--- a/docs/demo/sdlc-calculator-demo.en.pptx
+++ b/docs/demo/sdlc-calculator-demo.en.pptx
@@ -5017,7 +5017,7 @@
                 <a:ea typeface="Courier New" pitchFamily="34" charset="-122"/>
                 <a:cs typeface="Courier New" pitchFamily="34" charset="-120"/>
               </a:rPr>
-              <a:t>✓ test (1.0s)</a:t>
+              <a:t>✓ test (1.1s)</a:t>
             </a:r>
             <a:endParaRPr lang="en-US" sz="1000" dirty="0"/>
           </a:p>
@@ -6565,7 +6565,7 @@
                 <a:ea typeface="Courier New" pitchFamily="34" charset="-122"/>
                 <a:cs typeface="Courier New" pitchFamily="34" charset="-120"/>
               </a:rPr>
-              <a:t>  code-owner (e3f139969d53)</a:t>
+              <a:t>  code-owner (e9d5638215e4)</a:t>
             </a:r>
             <a:endParaRPr lang="en-US" sz="1000" dirty="0"/>
           </a:p>
@@ -7246,7 +7246,7 @@
                 <a:ea typeface="Courier New" pitchFamily="34" charset="-122"/>
                 <a:cs typeface="Courier New" pitchFamily="34" charset="-120"/>
               </a:rPr>
-              <a:t>  release-manager (e3f139969d53)</a:t>
+              <a:t>  release-manager (e9d5638215e4)</a:t>
             </a:r>
             <a:endParaRPr lang="en-US" sz="1000" dirty="0"/>
           </a:p>
@@ -7546,7 +7546,7 @@
                 <a:ea typeface="Courier New" pitchFamily="34" charset="-122"/>
                 <a:cs typeface="Courier New" pitchFamily="34" charset="-120"/>
               </a:rPr>
-              <a:t>✓ basic-arithmetic/intent alice valid 354195f9</a:t>
+              <a:t>✓ basic-arithmetic/intent alice valid 8bd3f527</a:t>
             </a:r>
             <a:endParaRPr lang="en-US" sz="1000" dirty="0"/>
           </a:p>
@@ -7563,7 +7563,7 @@
                 <a:ea typeface="Courier New" pitchFamily="34" charset="-122"/>
                 <a:cs typeface="Courier New" pitchFamily="34" charset="-120"/>
               </a:rPr>
-              <a:t>✓ basic-arithmetic/spec alice valid 354195f9</a:t>
+              <a:t>✓ basic-arithmetic/spec alice valid 8bd3f527</a:t>
             </a:r>
             <a:endParaRPr lang="en-US" sz="1000" dirty="0"/>
           </a:p>
@@ -7580,7 +7580,7 @@
                 <a:ea typeface="Courier New" pitchFamily="34" charset="-122"/>
                 <a:cs typeface="Courier New" pitchFamily="34" charset="-120"/>
               </a:rPr>
-              <a:t>✗ basic-arithmetic/plan bob unsigned dbfb32e7</a:t>
+              <a:t>✗ basic-arithmetic/plan bob unsigned 9d267f10</a:t>
             </a:r>
             <a:endParaRPr lang="en-US" sz="1000" dirty="0"/>
           </a:p>
@@ -7597,7 +7597,7 @@
                 <a:ea typeface="Courier New" pitchFamily="34" charset="-122"/>
                 <a:cs typeface="Courier New" pitchFamily="34" charset="-120"/>
               </a:rPr>
-              <a:t>✓ basic-arithmetic/review carol valid ee2db926</a:t>
+              <a:t>✓ basic-arithmetic/review carol valid 2a0a0907</a:t>
             </a:r>
             <a:endParaRPr lang="en-US" sz="1000" dirty="0"/>
           </a:p>
@@ -7614,7 +7614,7 @@
                 <a:ea typeface="Courier New" pitchFamily="34" charset="-122"/>
                 <a:cs typeface="Courier New" pitchFamily="34" charset="-120"/>
               </a:rPr>
-              <a:t>✓ basic-arithmetic/release alice valid f170ef93</a:t>
+              <a:t>✓ basic-arithmetic/release alice valid ced6aada</a:t>
             </a:r>
             <a:endParaRPr lang="en-US" sz="1000" dirty="0"/>
           </a:p>
@@ -7631,7 +7631,7 @@
                 <a:ea typeface="Courier New" pitchFamily="34" charset="-122"/>
                 <a:cs typeface="Courier New" pitchFamily="34" charset="-120"/>
               </a:rPr>
-              <a:t>✓ openspec/roles.yaml alice@calc.example valid c378982e</a:t>
+              <a:t>✓ openspec/roles.yaml alice@calc.example valid ef669d1c</a:t>
             </a:r>
             <a:endParaRPr lang="en-US" sz="1000" dirty="0"/>
           </a:p>
@@ -13460,7 +13460,7 @@
                 <a:ea typeface="Courier New" pitchFamily="34" charset="-122"/>
                 <a:cs typeface="Courier New" pitchFamily="34" charset="-120"/>
               </a:rPr>
-              <a:t>  archived) · sdlc 0.6.2, license:</a:t>
+              <a:t>  archived) · sdlc 0.6.3, license:</a:t>
             </a:r>
             <a:endParaRPr lang="en-US" sz="1000" dirty="0"/>
           </a:p>
@@ -13596,7 +13596,7 @@
                 <a:ea typeface="Courier New" pitchFamily="34" charset="-122"/>
                 <a:cs typeface="Courier New" pitchFamily="34" charset="-120"/>
               </a:rPr>
-              <a:t>  recorded with sdlc 0.6.2; licenses:</a:t>
+              <a:t>  recorded with sdlc 0.6.3; licenses:</a:t>
             </a:r>
             <a:endParaRPr lang="en-US" sz="1000" dirty="0"/>
           </a:p>
@@ -13913,7 +13913,7 @@
                 <a:ea typeface="Courier New" pitchFamily="34" charset="-122"/>
                 <a:cs typeface="Courier New" pitchFamily="34" charset="-120"/>
               </a:rPr>
-              <a:t>2026-10-04T17:18:11.516Z  deferred.added   </a:t>
+              <a:t>2026-10-04T19:50:38.766Z  deferred.added   </a:t>
             </a:r>
             <a:endParaRPr lang="en-US" sz="1000" dirty="0"/>
           </a:p>
@@ -13964,7 +13964,7 @@
                 <a:ea typeface="Courier New" pitchFamily="34" charset="-122"/>
                 <a:cs typeface="Courier New" pitchFamily="34" charset="-120"/>
               </a:rPr>
-              <a:t>  shows an error [sdlc 0.6.2 · community]</a:t>
+              <a:t>  shows an error [sdlc 0.6.3 · community]</a:t>
             </a:r>
             <a:endParaRPr lang="en-US" sz="1000" dirty="0"/>
           </a:p>
@@ -13981,7 +13981,7 @@
                 <a:ea typeface="Courier New" pitchFamily="34" charset="-122"/>
                 <a:cs typeface="Courier New" pitchFamily="34" charset="-120"/>
               </a:rPr>
-              <a:t>2026-10-04T17:18:16.679Z  gate.review.appro</a:t>
+              <a:t>2026-10-04T19:50:44.549Z  gate.review.appro</a:t>
             </a:r>
             <a:endParaRPr lang="en-US" sz="1000" dirty="0"/>
           </a:p>
@@ -14032,7 +14032,7 @@
                 <a:ea typeface="Courier New" pitchFamily="34" charset="-122"/>
                 <a:cs typeface="Courier New" pitchFamily="34" charset="-120"/>
               </a:rPr>
-              <a:t>  [sdlc 0.6.2 · community]</a:t>
+              <a:t>  [sdlc 0.6.3 · community]</a:t>
             </a:r>
             <a:endParaRPr lang="en-US" sz="1000" dirty="0"/>
           </a:p>
@@ -14049,7 +14049,7 @@
                 <a:ea typeface="Courier New" pitchFamily="34" charset="-122"/>
                 <a:cs typeface="Courier New" pitchFamily="34" charset="-120"/>
               </a:rPr>
-              <a:t>2026-10-04T17:18:19.234Z  gate.release.appr</a:t>
+              <a:t>2026-10-04T19:50:47.563Z  gate.release.appr</a:t>
             </a:r>
             <a:endParaRPr lang="en-US" sz="1000" dirty="0"/>
           </a:p>
@@ -14100,7 +14100,7 @@
                 <a:ea typeface="Courier New" pitchFamily="34" charset="-122"/>
                 <a:cs typeface="Courier New" pitchFamily="34" charset="-120"/>
               </a:rPr>
-              <a:t>  release-manager [sdlc 0.6.2 · community]</a:t>
+              <a:t>  release-manager [sdlc 0.6.3 · community]</a:t>
             </a:r>
             <a:endParaRPr lang="en-US" sz="1000" dirty="0"/>
           </a:p>
@@ -14117,7 +14117,7 @@
                 <a:ea typeface="Courier New" pitchFamily="34" charset="-122"/>
                 <a:cs typeface="Courier New" pitchFamily="34" charset="-120"/>
               </a:rPr>
-              <a:t>2026-10-04T17:18:24.931Z  change.archived  </a:t>
+              <a:t>2026-10-04T19:50:54.441Z  change.archived  </a:t>
             </a:r>
             <a:endParaRPr lang="en-US" sz="1000" dirty="0"/>
           </a:p>
@@ -22808,7 +22808,7 @@
                 <a:ea typeface="Courier New" pitchFamily="34" charset="-122"/>
                 <a:cs typeface="Courier New" pitchFamily="34" charset="-120"/>
               </a:rPr>
-              <a:t>  sdlc 0.6.2, license: community</a:t>
+              <a:t>  sdlc 0.6.3, license: community</a:t>
             </a:r>
             <a:endParaRPr lang="en-US" sz="1000" dirty="0"/>
           </a:p>
@@ -23159,7 +23159,7 @@
                 <a:ea typeface="Courier New" pitchFamily="34" charset="-122"/>
                 <a:cs typeface="Courier New" pitchFamily="34" charset="-120"/>
               </a:rPr>
-              <a:t>agents-guide | missing | — | Main guide for</a:t>
+              <a:t>agents-guide | missing | - | Main guide for</a:t>
             </a:r>
             <a:endParaRPr lang="en-US" sz="1000" dirty="0"/>
           </a:p>
@@ -23210,7 +23210,7 @@
                 <a:ea typeface="Courier New" pitchFamily="34" charset="-122"/>
                 <a:cs typeface="Courier New" pitchFamily="34" charset="-120"/>
               </a:rPr>
-              <a:t>claude-guide | missing | — | Thin Claude</a:t>
+              <a:t>claude-guide | missing | - | Thin Claude</a:t>
             </a:r>
             <a:endParaRPr lang="en-US" sz="1000" dirty="0"/>
           </a:p>
@@ -23363,7 +23363,7 @@
                 <a:ea typeface="Courier New" pitchFamily="34" charset="-122"/>
                 <a:cs typeface="Courier New" pitchFamily="34" charset="-120"/>
               </a:rPr>
-              <a:t>architecture | missing | — | System map:</a:t>
+              <a:t>architecture | missing | - | System map:</a:t>
             </a:r>
             <a:endParaRPr lang="en-US" sz="1000" dirty="0"/>
           </a:p>

--- a/docs/demo/sdlc-calculator-demo.en.pptx
+++ b/docs/demo/sdlc-calculator-demo.en.pptx
@@ -6565,7 +6565,7 @@
                 <a:ea typeface="Courier New" pitchFamily="34" charset="-122"/>
                 <a:cs typeface="Courier New" pitchFamily="34" charset="-120"/>
               </a:rPr>
-              <a:t>  code-owner (e9d5638215e4)</a:t>
+              <a:t>  code-owner (00ccae023886)</a:t>
             </a:r>
             <a:endParaRPr lang="en-US" sz="1000" dirty="0"/>
           </a:p>
@@ -7246,7 +7246,7 @@
                 <a:ea typeface="Courier New" pitchFamily="34" charset="-122"/>
                 <a:cs typeface="Courier New" pitchFamily="34" charset="-120"/>
               </a:rPr>
-              <a:t>  release-manager (e9d5638215e4)</a:t>
+              <a:t>  release-manager (00ccae023886)</a:t>
             </a:r>
             <a:endParaRPr lang="en-US" sz="1000" dirty="0"/>
           </a:p>
@@ -7546,7 +7546,7 @@
                 <a:ea typeface="Courier New" pitchFamily="34" charset="-122"/>
                 <a:cs typeface="Courier New" pitchFamily="34" charset="-120"/>
               </a:rPr>
-              <a:t>✓ basic-arithmetic/intent alice valid 8bd3f527</a:t>
+              <a:t>✓ basic-arithmetic/intent alice valid fc081258</a:t>
             </a:r>
             <a:endParaRPr lang="en-US" sz="1000" dirty="0"/>
           </a:p>
@@ -7563,7 +7563,7 @@
                 <a:ea typeface="Courier New" pitchFamily="34" charset="-122"/>
                 <a:cs typeface="Courier New" pitchFamily="34" charset="-120"/>
               </a:rPr>
-              <a:t>✓ basic-arithmetic/spec alice valid 8bd3f527</a:t>
+              <a:t>✓ basic-arithmetic/spec alice valid fc081258</a:t>
             </a:r>
             <a:endParaRPr lang="en-US" sz="1000" dirty="0"/>
           </a:p>
@@ -7580,7 +7580,7 @@
                 <a:ea typeface="Courier New" pitchFamily="34" charset="-122"/>
                 <a:cs typeface="Courier New" pitchFamily="34" charset="-120"/>
               </a:rPr>
-              <a:t>✗ basic-arithmetic/plan bob unsigned 9d267f10</a:t>
+              <a:t>✗ basic-arithmetic/plan bob unsigned 877b0c71</a:t>
             </a:r>
             <a:endParaRPr lang="en-US" sz="1000" dirty="0"/>
           </a:p>
@@ -7597,7 +7597,7 @@
                 <a:ea typeface="Courier New" pitchFamily="34" charset="-122"/>
                 <a:cs typeface="Courier New" pitchFamily="34" charset="-120"/>
               </a:rPr>
-              <a:t>✓ basic-arithmetic/review carol valid 2a0a0907</a:t>
+              <a:t>✓ basic-arithmetic/review carol valid b69c6383</a:t>
             </a:r>
             <a:endParaRPr lang="en-US" sz="1000" dirty="0"/>
           </a:p>
@@ -7614,7 +7614,7 @@
                 <a:ea typeface="Courier New" pitchFamily="34" charset="-122"/>
                 <a:cs typeface="Courier New" pitchFamily="34" charset="-120"/>
               </a:rPr>
-              <a:t>✓ basic-arithmetic/release alice valid ced6aada</a:t>
+              <a:t>✓ basic-arithmetic/release alice valid 59187a67</a:t>
             </a:r>
             <a:endParaRPr lang="en-US" sz="1000" dirty="0"/>
           </a:p>
@@ -7631,7 +7631,7 @@
                 <a:ea typeface="Courier New" pitchFamily="34" charset="-122"/>
                 <a:cs typeface="Courier New" pitchFamily="34" charset="-120"/>
               </a:rPr>
-              <a:t>✓ openspec/roles.yaml alice@calc.example valid ef669d1c</a:t>
+              <a:t>✓ openspec/roles.yaml alice@calc.example valid 226803bd</a:t>
             </a:r>
             <a:endParaRPr lang="en-US" sz="1000" dirty="0"/>
           </a:p>
@@ -13460,7 +13460,7 @@
                 <a:ea typeface="Courier New" pitchFamily="34" charset="-122"/>
                 <a:cs typeface="Courier New" pitchFamily="34" charset="-120"/>
               </a:rPr>
-              <a:t>  archived) · sdlc 0.6.3, license:</a:t>
+              <a:t>  archived) · sdlc 0.6.4, license:</a:t>
             </a:r>
             <a:endParaRPr lang="en-US" sz="1000" dirty="0"/>
           </a:p>
@@ -13596,7 +13596,7 @@
                 <a:ea typeface="Courier New" pitchFamily="34" charset="-122"/>
                 <a:cs typeface="Courier New" pitchFamily="34" charset="-120"/>
               </a:rPr>
-              <a:t>  recorded with sdlc 0.6.3; licenses:</a:t>
+              <a:t>  recorded with sdlc 0.6.4; licenses:</a:t>
             </a:r>
             <a:endParaRPr lang="en-US" sz="1000" dirty="0"/>
           </a:p>
@@ -13913,7 +13913,7 @@
                 <a:ea typeface="Courier New" pitchFamily="34" charset="-122"/>
                 <a:cs typeface="Courier New" pitchFamily="34" charset="-120"/>
               </a:rPr>
-              <a:t>2026-10-04T19:50:38.766Z  deferred.added   </a:t>
+              <a:t>2026-10-04T21:06:15.602Z  deferred.added   </a:t>
             </a:r>
             <a:endParaRPr lang="en-US" sz="1000" dirty="0"/>
           </a:p>
@@ -13964,7 +13964,7 @@
                 <a:ea typeface="Courier New" pitchFamily="34" charset="-122"/>
                 <a:cs typeface="Courier New" pitchFamily="34" charset="-120"/>
               </a:rPr>
-              <a:t>  shows an error [sdlc 0.6.3 · community]</a:t>
+              <a:t>  shows an error [sdlc 0.6.4 · community]</a:t>
             </a:r>
             <a:endParaRPr lang="en-US" sz="1000" dirty="0"/>
           </a:p>
@@ -13981,7 +13981,7 @@
                 <a:ea typeface="Courier New" pitchFamily="34" charset="-122"/>
                 <a:cs typeface="Courier New" pitchFamily="34" charset="-120"/>
               </a:rPr>
-              <a:t>2026-10-04T19:50:44.549Z  gate.review.appro</a:t>
+              <a:t>2026-10-04T21:06:21.055Z  gate.review.appro</a:t>
             </a:r>
             <a:endParaRPr lang="en-US" sz="1000" dirty="0"/>
           </a:p>
@@ -14032,7 +14032,7 @@
                 <a:ea typeface="Courier New" pitchFamily="34" charset="-122"/>
                 <a:cs typeface="Courier New" pitchFamily="34" charset="-120"/>
               </a:rPr>
-              <a:t>  [sdlc 0.6.3 · community]</a:t>
+              <a:t>  [sdlc 0.6.4 · community]</a:t>
             </a:r>
             <a:endParaRPr lang="en-US" sz="1000" dirty="0"/>
           </a:p>
@@ -14049,7 +14049,7 @@
                 <a:ea typeface="Courier New" pitchFamily="34" charset="-122"/>
                 <a:cs typeface="Courier New" pitchFamily="34" charset="-120"/>
               </a:rPr>
-              <a:t>2026-10-04T19:50:47.563Z  gate.release.appr</a:t>
+              <a:t>2026-10-04T21:06:23.917Z  gate.release.appr</a:t>
             </a:r>
             <a:endParaRPr lang="en-US" sz="1000" dirty="0"/>
           </a:p>
@@ -14100,7 +14100,7 @@
                 <a:ea typeface="Courier New" pitchFamily="34" charset="-122"/>
                 <a:cs typeface="Courier New" pitchFamily="34" charset="-120"/>
               </a:rPr>
-              <a:t>  release-manager [sdlc 0.6.3 · community]</a:t>
+              <a:t>  release-manager [sdlc 0.6.4 · community]</a:t>
             </a:r>
             <a:endParaRPr lang="en-US" sz="1000" dirty="0"/>
           </a:p>
@@ -14117,7 +14117,7 @@
                 <a:ea typeface="Courier New" pitchFamily="34" charset="-122"/>
                 <a:cs typeface="Courier New" pitchFamily="34" charset="-120"/>
               </a:rPr>
-              <a:t>2026-10-04T19:50:54.441Z  change.archived  </a:t>
+              <a:t>2026-10-04T21:06:30.564Z  change.archived  </a:t>
             </a:r>
             <a:endParaRPr lang="en-US" sz="1000" dirty="0"/>
           </a:p>
@@ -22808,7 +22808,7 @@
                 <a:ea typeface="Courier New" pitchFamily="34" charset="-122"/>
                 <a:cs typeface="Courier New" pitchFamily="34" charset="-120"/>
               </a:rPr>
-              <a:t>  sdlc 0.6.3, license: community</a:t>
+              <a:t>  sdlc 0.6.4, license: community</a:t>
             </a:r>
             <a:endParaRPr lang="en-US" sz="1000" dirty="0"/>
           </a:p>

--- a/docs/demo/sdlc-calculator-demo.en.pptx
+++ b/docs/demo/sdlc-calculator-demo.en.pptx
@@ -1063,6 +1063,7 @@
             <a:r>
               <a:rPr lang="en-US" dirty="0"/>
               <a:t>Every refusal in the demo, with the reason the CLI gave. Decisions stay with people and are recorded.
+sdlc adopt --apply — Applying the draft is a person's decision: refused for the agent.
 sdlc roles migrate — An agent cannot write the roles file.
 sdlc backlog move B3 --before B2 — Priority is a person's decision: refused for the agent.
 sdlc track set lite --change basic-arithmetic — An agent cannot pick the lite track.
@@ -6565,7 +6566,7 @@
                 <a:ea typeface="Courier New" pitchFamily="34" charset="-122"/>
                 <a:cs typeface="Courier New" pitchFamily="34" charset="-120"/>
               </a:rPr>
-              <a:t>  code-owner (00ccae023886)</a:t>
+              <a:t>  code-owner (6a48421629cb)</a:t>
             </a:r>
             <a:endParaRPr lang="en-US" sz="1000" dirty="0"/>
           </a:p>
@@ -7246,7 +7247,7 @@
                 <a:ea typeface="Courier New" pitchFamily="34" charset="-122"/>
                 <a:cs typeface="Courier New" pitchFamily="34" charset="-120"/>
               </a:rPr>
-              <a:t>  release-manager (00ccae023886)</a:t>
+              <a:t>  release-manager (6a48421629cb)</a:t>
             </a:r>
             <a:endParaRPr lang="en-US" sz="1000" dirty="0"/>
           </a:p>
@@ -7546,7 +7547,7 @@
                 <a:ea typeface="Courier New" pitchFamily="34" charset="-122"/>
                 <a:cs typeface="Courier New" pitchFamily="34" charset="-120"/>
               </a:rPr>
-              <a:t>✓ basic-arithmetic/intent alice valid fc081258</a:t>
+              <a:t>✓ basic-arithmetic/intent alice valid d92f764e</a:t>
             </a:r>
             <a:endParaRPr lang="en-US" sz="1000" dirty="0"/>
           </a:p>
@@ -7563,7 +7564,7 @@
                 <a:ea typeface="Courier New" pitchFamily="34" charset="-122"/>
                 <a:cs typeface="Courier New" pitchFamily="34" charset="-120"/>
               </a:rPr>
-              <a:t>✓ basic-arithmetic/spec alice valid fc081258</a:t>
+              <a:t>✓ basic-arithmetic/spec alice valid d92f764e</a:t>
             </a:r>
             <a:endParaRPr lang="en-US" sz="1000" dirty="0"/>
           </a:p>
@@ -7580,7 +7581,7 @@
                 <a:ea typeface="Courier New" pitchFamily="34" charset="-122"/>
                 <a:cs typeface="Courier New" pitchFamily="34" charset="-120"/>
               </a:rPr>
-              <a:t>✗ basic-arithmetic/plan bob unsigned 877b0c71</a:t>
+              <a:t>✗ basic-arithmetic/plan bob unsigned 00b2480e</a:t>
             </a:r>
             <a:endParaRPr lang="en-US" sz="1000" dirty="0"/>
           </a:p>
@@ -7597,7 +7598,7 @@
                 <a:ea typeface="Courier New" pitchFamily="34" charset="-122"/>
                 <a:cs typeface="Courier New" pitchFamily="34" charset="-120"/>
               </a:rPr>
-              <a:t>✓ basic-arithmetic/review carol valid b69c6383</a:t>
+              <a:t>✓ basic-arithmetic/review carol valid e72b772d</a:t>
             </a:r>
             <a:endParaRPr lang="en-US" sz="1000" dirty="0"/>
           </a:p>
@@ -7614,7 +7615,7 @@
                 <a:ea typeface="Courier New" pitchFamily="34" charset="-122"/>
                 <a:cs typeface="Courier New" pitchFamily="34" charset="-120"/>
               </a:rPr>
-              <a:t>✓ basic-arithmetic/release alice valid 59187a67</a:t>
+              <a:t>✓ basic-arithmetic/release alice valid c000549d</a:t>
             </a:r>
             <a:endParaRPr lang="en-US" sz="1000" dirty="0"/>
           </a:p>
@@ -7631,7 +7632,7 @@
                 <a:ea typeface="Courier New" pitchFamily="34" charset="-122"/>
                 <a:cs typeface="Courier New" pitchFamily="34" charset="-120"/>
               </a:rPr>
-              <a:t>✓ openspec/roles.yaml alice@calc.example valid 226803bd</a:t>
+              <a:t>✓ openspec/roles.yaml alice@calc.example valid 2539b36f</a:t>
             </a:r>
             <a:endParaRPr lang="en-US" sz="1000" dirty="0"/>
           </a:p>
@@ -8092,7 +8093,7 @@
                 <a:ea typeface="Courier New" pitchFamily="34" charset="-122"/>
                 <a:cs typeface="Courier New" pitchFamily="34" charset="-120"/>
               </a:rPr>
-              <a:t>  openspec\changes\archive\2026-10-04-basic</a:t>
+              <a:t>  openspec\changes\archive\2026-10-05-basic</a:t>
             </a:r>
             <a:endParaRPr lang="en-US" sz="1000" dirty="0"/>
           </a:p>
@@ -9372,7 +9373,7 @@
                 <a:ea typeface="Courier New" pitchFamily="34" charset="-122"/>
                 <a:cs typeface="Courier New" pitchFamily="34" charset="-120"/>
               </a:rPr>
-              <a:t>sdlc roles migrate</a:t>
+              <a:t>sdlc adopt --apply</a:t>
             </a:r>
             <a:endParaRPr lang="en-US" sz="1100" dirty="0"/>
           </a:p>
@@ -9411,7 +9412,7 @@
                 <a:ea typeface="Calibri" pitchFamily="34" charset="-122"/>
                 <a:cs typeface="Calibri" pitchFamily="34" charset="-120"/>
               </a:rPr>
-              <a:t>Only a person may migrate roles.</a:t>
+              <a:t>Only a person may apply the adoption draft</a:t>
             </a:r>
             <a:endParaRPr lang="en-US" sz="1100" dirty="0"/>
           </a:p>
@@ -9582,7 +9583,7 @@
                 <a:ea typeface="Courier New" pitchFamily="34" charset="-122"/>
                 <a:cs typeface="Courier New" pitchFamily="34" charset="-120"/>
               </a:rPr>
-              <a:t>sdlc backlog move B3 --before B2</a:t>
+              <a:t>sdlc roles migrate</a:t>
             </a:r>
             <a:endParaRPr lang="en-US" sz="1100" dirty="0"/>
           </a:p>
@@ -9621,7 +9622,7 @@
                 <a:ea typeface="Calibri" pitchFamily="34" charset="-122"/>
                 <a:cs typeface="Calibri" pitchFamily="34" charset="-120"/>
               </a:rPr>
-              <a:t>Backlog priority is a product decision. Ask a person to run this comm…</a:t>
+              <a:t>Only a person may migrate roles.</a:t>
             </a:r>
             <a:endParaRPr lang="en-US" sz="1100" dirty="0"/>
           </a:p>
@@ -9792,7 +9793,7 @@
                 <a:ea typeface="Courier New" pitchFamily="34" charset="-122"/>
                 <a:cs typeface="Courier New" pitchFamily="34" charset="-120"/>
               </a:rPr>
-              <a:t>sdlc track set lite --change basic-arithmetic</a:t>
+              <a:t>sdlc backlog move B3 --before B2</a:t>
             </a:r>
             <a:endParaRPr lang="en-US" sz="1100" dirty="0"/>
           </a:p>
@@ -9831,7 +9832,7 @@
                 <a:ea typeface="Calibri" pitchFamily="34" charset="-122"/>
                 <a:cs typeface="Calibri" pitchFamily="34" charset="-120"/>
               </a:rPr>
-              <a:t>An agent session (claude-code) cannot set the track.</a:t>
+              <a:t>Backlog priority is a product decision. Ask a person to run this comm…</a:t>
             </a:r>
             <a:endParaRPr lang="en-US" sz="1100" dirty="0"/>
           </a:p>
@@ -10002,7 +10003,7 @@
                 <a:ea typeface="Courier New" pitchFamily="34" charset="-122"/>
                 <a:cs typeface="Courier New" pitchFamily="34" charset="-120"/>
               </a:rPr>
-              <a:t>sdlc approve intent --change basic-arithmetic</a:t>
+              <a:t>sdlc track set lite --change basic-arithmetic</a:t>
             </a:r>
             <a:endParaRPr lang="en-US" sz="1100" dirty="0"/>
           </a:p>
@@ -10041,7 +10042,7 @@
                 <a:ea typeface="Calibri" pitchFamily="34" charset="-122"/>
                 <a:cs typeface="Calibri" pitchFamily="34" charset="-120"/>
               </a:rPr>
-              <a:t>`sdlc approve` records a human decision and cannot run inside an agen…</a:t>
+              <a:t>An agent session (claude-code) cannot set the track.</a:t>
             </a:r>
             <a:endParaRPr lang="en-US" sz="1100" dirty="0"/>
           </a:p>
@@ -10130,11 +10131,11 @@
             </a:avLst>
           </a:prstGeom>
           <a:solidFill>
-            <a:srgbClr val="2D8CFF"/>
+            <a:srgbClr val="F2A541"/>
           </a:solidFill>
           <a:ln w="12700">
             <a:solidFill>
-              <a:srgbClr val="2D8CFF"/>
+              <a:srgbClr val="F2A541"/>
             </a:solidFill>
             <a:prstDash val="solid"/>
           </a:ln>
@@ -10173,7 +10174,7 @@
                 <a:ea typeface="Calibri" pitchFamily="34" charset="-122"/>
                 <a:cs typeface="Calibri" pitchFamily="34" charset="-120"/>
               </a:rPr>
-              <a:t>Bob</a:t>
+              <a:t>AI agent</a:t>
             </a:r>
             <a:endParaRPr lang="en-US" sz="1100" dirty="0"/>
           </a:p>
@@ -10251,7 +10252,7 @@
                 <a:ea typeface="Calibri" pitchFamily="34" charset="-122"/>
                 <a:cs typeface="Calibri" pitchFamily="34" charset="-120"/>
               </a:rPr>
-              <a:t>Bob Turner does not hold product-owner; ask Alice Walker.</a:t>
+              <a:t>`sdlc approve` records a human decision and cannot run inside an agen…</a:t>
             </a:r>
             <a:endParaRPr lang="en-US" sz="1100" dirty="0"/>
           </a:p>
@@ -10340,11 +10341,11 @@
             </a:avLst>
           </a:prstGeom>
           <a:solidFill>
-            <a:srgbClr val="F2A541"/>
+            <a:srgbClr val="2D8CFF"/>
           </a:solidFill>
           <a:ln w="12700">
             <a:solidFill>
-              <a:srgbClr val="F2A541"/>
+              <a:srgbClr val="2D8CFF"/>
             </a:solidFill>
             <a:prstDash val="solid"/>
           </a:ln>
@@ -10383,7 +10384,7 @@
                 <a:ea typeface="Calibri" pitchFamily="34" charset="-122"/>
                 <a:cs typeface="Calibri" pitchFamily="34" charset="-120"/>
               </a:rPr>
-              <a:t>AI agent</a:t>
+              <a:t>Bob</a:t>
             </a:r>
             <a:endParaRPr lang="en-US" sz="1100" dirty="0"/>
           </a:p>
@@ -10422,7 +10423,7 @@
                 <a:ea typeface="Courier New" pitchFamily="34" charset="-122"/>
                 <a:cs typeface="Courier New" pitchFamily="34" charset="-120"/>
               </a:rPr>
-              <a:t>sdlc validate --change basic-arithmetic</a:t>
+              <a:t>sdlc approve intent --change basic-arithmetic</a:t>
             </a:r>
             <a:endParaRPr lang="en-US" sz="1100" dirty="0"/>
           </a:p>
@@ -10461,7 +10462,7 @@
                 <a:ea typeface="Calibri" pitchFamily="34" charset="-122"/>
                 <a:cs typeface="Calibri" pitchFamily="34" charset="-120"/>
               </a:rPr>
-              <a:t>✗ basic-arithmetic</a:t>
+              <a:t>Bob Turner does not hold product-owner; ask Alice Walker.</a:t>
             </a:r>
             <a:endParaRPr lang="en-US" sz="1100" dirty="0"/>
           </a:p>
@@ -10550,11 +10551,11 @@
             </a:avLst>
           </a:prstGeom>
           <a:solidFill>
-            <a:srgbClr val="2D8CFF"/>
+            <a:srgbClr val="F2A541"/>
           </a:solidFill>
           <a:ln w="12700">
             <a:solidFill>
-              <a:srgbClr val="2D8CFF"/>
+              <a:srgbClr val="F2A541"/>
             </a:solidFill>
             <a:prstDash val="solid"/>
           </a:ln>
@@ -10593,7 +10594,7 @@
                 <a:ea typeface="Calibri" pitchFamily="34" charset="-122"/>
                 <a:cs typeface="Calibri" pitchFamily="34" charset="-120"/>
               </a:rPr>
-              <a:t>Bob</a:t>
+              <a:t>AI agent</a:t>
             </a:r>
             <a:endParaRPr lang="en-US" sz="1100" dirty="0"/>
           </a:p>
@@ -10632,7 +10633,7 @@
                 <a:ea typeface="Courier New" pitchFamily="34" charset="-122"/>
                 <a:cs typeface="Courier New" pitchFamily="34" charset="-120"/>
               </a:rPr>
-              <a:t>sdlc approve review --change basic-arithmetic</a:t>
+              <a:t>sdlc validate --change basic-arithmetic</a:t>
             </a:r>
             <a:endParaRPr lang="en-US" sz="1100" dirty="0"/>
           </a:p>
@@ -10671,7 +10672,7 @@
                 <a:ea typeface="Calibri" pitchFamily="34" charset="-122"/>
                 <a:cs typeface="Calibri" pitchFamily="34" charset="-120"/>
               </a:rPr>
-              <a:t>Bob Turner authored code in this change. Bob Turner already approved …</a:t>
+              <a:t>✗ basic-arithmetic</a:t>
             </a:r>
             <a:endParaRPr lang="en-US" sz="1100" dirty="0"/>
           </a:p>
@@ -10760,6 +10761,216 @@
             </a:avLst>
           </a:prstGeom>
           <a:solidFill>
+            <a:srgbClr val="2D8CFF"/>
+          </a:solidFill>
+          <a:ln w="12700">
+            <a:solidFill>
+              <a:srgbClr val="2D8CFF"/>
+            </a:solidFill>
+            <a:prstDash val="solid"/>
+          </a:ln>
+        </p:spPr>
+      </p:sp>
+      <p:sp>
+        <p:nvSpPr>
+          <p:cNvPr id="49" name="Text 47"/>
+          <p:cNvSpPr txBox="1"/>
+          <p:nvPr/>
+        </p:nvSpPr>
+        <p:spPr>
+          <a:xfrm>
+            <a:off x="6643116" y="4087368"/>
+            <a:ext cx="1097280" cy="256032"/>
+          </a:xfrm>
+          <a:prstGeom prst="rect">
+            <a:avLst/>
+          </a:prstGeom>
+          <a:noFill/>
+          <a:ln/>
+        </p:spPr>
+        <p:txBody>
+          <a:bodyPr wrap="square" lIns="0" tIns="0" rIns="0" bIns="0" rtlCol="0" anchor="ctr"/>
+          <a:lstStyle/>
+          <a:p>
+            <a:pPr algn="ctr" indent="0" marL="0">
+              <a:buNone/>
+            </a:pPr>
+            <a:r>
+              <a:rPr lang="en-US" sz="1100" b="1" dirty="0">
+                <a:solidFill>
+                  <a:srgbClr val="FFFFFF"/>
+                </a:solidFill>
+                <a:latin typeface="Calibri" pitchFamily="34" charset="0"/>
+                <a:ea typeface="Calibri" pitchFamily="34" charset="-122"/>
+                <a:cs typeface="Calibri" pitchFamily="34" charset="-120"/>
+              </a:rPr>
+              <a:t>Bob</a:t>
+            </a:r>
+            <a:endParaRPr lang="en-US" sz="1100" dirty="0"/>
+          </a:p>
+        </p:txBody>
+      </p:sp>
+      <p:sp>
+        <p:nvSpPr>
+          <p:cNvPr id="50" name="Text 48"/>
+          <p:cNvSpPr txBox="1"/>
+          <p:nvPr/>
+        </p:nvSpPr>
+        <p:spPr>
+          <a:xfrm>
+            <a:off x="7831836" y="4078224"/>
+            <a:ext cx="3808476" cy="274320"/>
+          </a:xfrm>
+          <a:prstGeom prst="rect">
+            <a:avLst/>
+          </a:prstGeom>
+          <a:noFill/>
+          <a:ln/>
+        </p:spPr>
+        <p:txBody>
+          <a:bodyPr wrap="square" lIns="0" tIns="0" rIns="0" bIns="0" rtlCol="0" anchor="ctr"/>
+          <a:lstStyle/>
+          <a:p>
+            <a:pPr indent="0" marL="0">
+              <a:buNone/>
+            </a:pPr>
+            <a:r>
+              <a:rPr lang="en-US" sz="1100" dirty="0">
+                <a:solidFill>
+                  <a:srgbClr val="1F2430"/>
+                </a:solidFill>
+                <a:latin typeface="Courier New" pitchFamily="34" charset="0"/>
+                <a:ea typeface="Courier New" pitchFamily="34" charset="-122"/>
+                <a:cs typeface="Courier New" pitchFamily="34" charset="-120"/>
+              </a:rPr>
+              <a:t>sdlc approve review --change basic-arithmetic</a:t>
+            </a:r>
+            <a:endParaRPr lang="en-US" sz="1100" dirty="0"/>
+          </a:p>
+        </p:txBody>
+      </p:sp>
+      <p:sp>
+        <p:nvSpPr>
+          <p:cNvPr id="51" name="Text 49"/>
+          <p:cNvSpPr txBox="1"/>
+          <p:nvPr/>
+        </p:nvSpPr>
+        <p:spPr>
+          <a:xfrm>
+            <a:off x="6643116" y="4389120"/>
+            <a:ext cx="4951476" cy="237744"/>
+          </a:xfrm>
+          <a:prstGeom prst="rect">
+            <a:avLst/>
+          </a:prstGeom>
+          <a:noFill/>
+          <a:ln/>
+        </p:spPr>
+        <p:txBody>
+          <a:bodyPr wrap="square" lIns="0" tIns="0" rIns="0" bIns="0" rtlCol="0" anchor="ctr"/>
+          <a:lstStyle/>
+          <a:p>
+            <a:pPr indent="0" marL="0">
+              <a:buNone/>
+            </a:pPr>
+            <a:r>
+              <a:rPr lang="en-US" sz="1100" dirty="0">
+                <a:solidFill>
+                  <a:srgbClr val="D64545"/>
+                </a:solidFill>
+                <a:latin typeface="Calibri" pitchFamily="34" charset="0"/>
+                <a:ea typeface="Calibri" pitchFamily="34" charset="-122"/>
+                <a:cs typeface="Calibri" pitchFamily="34" charset="-120"/>
+              </a:rPr>
+              <a:t>Bob Turner authored code in this change. Bob Turner already approved …</a:t>
+            </a:r>
+            <a:endParaRPr lang="en-US" sz="1100" dirty="0"/>
+          </a:p>
+        </p:txBody>
+      </p:sp>
+      <p:sp>
+        <p:nvSpPr>
+          <p:cNvPr id="52" name="Shape 50"/>
+          <p:cNvSpPr/>
+          <p:nvPr/>
+        </p:nvSpPr>
+        <p:spPr>
+          <a:xfrm>
+            <a:off x="457200" y="4791456"/>
+            <a:ext cx="5500116" cy="676656"/>
+          </a:xfrm>
+          <a:prstGeom prst="roundRect">
+            <a:avLst>
+              <a:gd name="adj" fmla="val 10811"/>
+            </a:avLst>
+          </a:prstGeom>
+          <a:solidFill>
+            <a:srgbClr val="F3F5F8"/>
+          </a:solidFill>
+          <a:ln w="12700">
+            <a:solidFill>
+              <a:srgbClr val="F3F5F8"/>
+            </a:solidFill>
+            <a:prstDash val="solid"/>
+          </a:ln>
+        </p:spPr>
+      </p:sp>
+      <p:sp>
+        <p:nvSpPr>
+          <p:cNvPr id="53" name="Text 51"/>
+          <p:cNvSpPr txBox="1"/>
+          <p:nvPr/>
+        </p:nvSpPr>
+        <p:spPr>
+          <a:xfrm>
+            <a:off x="566928" y="4864608"/>
+            <a:ext cx="274320" cy="274320"/>
+          </a:xfrm>
+          <a:prstGeom prst="rect">
+            <a:avLst/>
+          </a:prstGeom>
+          <a:noFill/>
+          <a:ln/>
+        </p:spPr>
+        <p:txBody>
+          <a:bodyPr wrap="square" lIns="0" tIns="0" rIns="0" bIns="0" rtlCol="0" anchor="ctr"/>
+          <a:lstStyle/>
+          <a:p>
+            <a:pPr indent="0" marL="0">
+              <a:buNone/>
+            </a:pPr>
+            <a:r>
+              <a:rPr lang="en-US" sz="1600" b="1" dirty="0">
+                <a:solidFill>
+                  <a:srgbClr val="D64545"/>
+                </a:solidFill>
+                <a:latin typeface="Calibri" pitchFamily="34" charset="0"/>
+                <a:ea typeface="Calibri" pitchFamily="34" charset="-122"/>
+                <a:cs typeface="Calibri" pitchFamily="34" charset="-120"/>
+              </a:rPr>
+              <a:t>✗</a:t>
+            </a:r>
+            <a:endParaRPr lang="en-US" sz="1600" dirty="0"/>
+          </a:p>
+        </p:txBody>
+      </p:sp>
+      <p:sp>
+        <p:nvSpPr>
+          <p:cNvPr id="54" name="Shape 52"/>
+          <p:cNvSpPr/>
+          <p:nvPr/>
+        </p:nvSpPr>
+        <p:spPr>
+          <a:xfrm>
+            <a:off x="868680" y="4873752"/>
+            <a:ext cx="1097280" cy="256032"/>
+          </a:xfrm>
+          <a:prstGeom prst="roundRect">
+            <a:avLst>
+              <a:gd name="adj" fmla="val 50000"/>
+            </a:avLst>
+          </a:prstGeom>
+          <a:solidFill>
             <a:srgbClr val="F2A541"/>
           </a:solidFill>
           <a:ln w="12700">
@@ -10772,13 +10983,13 @@
       </p:sp>
       <p:sp>
         <p:nvSpPr>
-          <p:cNvPr id="49" name="Text 47"/>
-          <p:cNvSpPr txBox="1"/>
-          <p:nvPr/>
-        </p:nvSpPr>
-        <p:spPr>
-          <a:xfrm>
-            <a:off x="6643116" y="4087368"/>
+          <p:cNvPr id="55" name="Text 53"/>
+          <p:cNvSpPr txBox="1"/>
+          <p:nvPr/>
+        </p:nvSpPr>
+        <p:spPr>
+          <a:xfrm>
+            <a:off x="868680" y="4873752"/>
             <a:ext cx="1097280" cy="256032"/>
           </a:xfrm>
           <a:prstGeom prst="rect">
@@ -10811,13 +11022,13 @@
       </p:sp>
       <p:sp>
         <p:nvSpPr>
-          <p:cNvPr id="50" name="Text 48"/>
-          <p:cNvSpPr txBox="1"/>
-          <p:nvPr/>
-        </p:nvSpPr>
-        <p:spPr>
-          <a:xfrm>
-            <a:off x="7831836" y="4078224"/>
+          <p:cNvPr id="56" name="Text 54"/>
+          <p:cNvSpPr txBox="1"/>
+          <p:nvPr/>
+        </p:nvSpPr>
+        <p:spPr>
+          <a:xfrm>
+            <a:off x="2057400" y="4864608"/>
             <a:ext cx="3808476" cy="274320"/>
           </a:xfrm>
           <a:prstGeom prst="rect">
@@ -10850,13 +11061,13 @@
       </p:sp>
       <p:sp>
         <p:nvSpPr>
-          <p:cNvPr id="51" name="Text 49"/>
-          <p:cNvSpPr txBox="1"/>
-          <p:nvPr/>
-        </p:nvSpPr>
-        <p:spPr>
-          <a:xfrm>
-            <a:off x="6643116" y="4389120"/>
+          <p:cNvPr id="57" name="Text 55"/>
+          <p:cNvSpPr txBox="1"/>
+          <p:nvPr/>
+        </p:nvSpPr>
+        <p:spPr>
+          <a:xfrm>
+            <a:off x="868680" y="5175504"/>
             <a:ext cx="4951476" cy="237744"/>
           </a:xfrm>
           <a:prstGeom prst="rect">
@@ -13460,7 +13671,7 @@
                 <a:ea typeface="Courier New" pitchFamily="34" charset="-122"/>
                 <a:cs typeface="Courier New" pitchFamily="34" charset="-120"/>
               </a:rPr>
-              <a:t>  archived) · sdlc 0.6.4, license:</a:t>
+              <a:t>  archived) · sdlc 0.7.0, license:</a:t>
             </a:r>
             <a:endParaRPr lang="en-US" sz="1000" dirty="0"/>
           </a:p>
@@ -13596,7 +13807,7 @@
                 <a:ea typeface="Courier New" pitchFamily="34" charset="-122"/>
                 <a:cs typeface="Courier New" pitchFamily="34" charset="-120"/>
               </a:rPr>
-              <a:t>  recorded with sdlc 0.6.4; licenses:</a:t>
+              <a:t>  recorded with sdlc 0.7.0; licenses:</a:t>
             </a:r>
             <a:endParaRPr lang="en-US" sz="1000" dirty="0"/>
           </a:p>
@@ -13879,7 +14090,7 @@
                 <a:ea typeface="Courier New" pitchFamily="34" charset="-122"/>
                 <a:cs typeface="Courier New" pitchFamily="34" charset="-120"/>
               </a:rPr>
-              <a:t>(last 15 of 31 entries; --limit to see</a:t>
+              <a:t>(last 15 of 32 entries; --limit to see</a:t>
             </a:r>
             <a:endParaRPr lang="en-US" sz="1000" dirty="0"/>
           </a:p>
@@ -13913,7 +14124,7 @@
                 <a:ea typeface="Courier New" pitchFamily="34" charset="-122"/>
                 <a:cs typeface="Courier New" pitchFamily="34" charset="-120"/>
               </a:rPr>
-              <a:t>2026-10-04T21:06:15.602Z  deferred.added   </a:t>
+              <a:t>2026-10-05T08:25:09.774Z  deferred.added   </a:t>
             </a:r>
             <a:endParaRPr lang="en-US" sz="1000" dirty="0"/>
           </a:p>
@@ -13964,7 +14175,7 @@
                 <a:ea typeface="Courier New" pitchFamily="34" charset="-122"/>
                 <a:cs typeface="Courier New" pitchFamily="34" charset="-120"/>
               </a:rPr>
-              <a:t>  shows an error [sdlc 0.6.4 · community]</a:t>
+              <a:t>  shows an error [sdlc 0.7.0 · community]</a:t>
             </a:r>
             <a:endParaRPr lang="en-US" sz="1000" dirty="0"/>
           </a:p>
@@ -13981,7 +14192,7 @@
                 <a:ea typeface="Courier New" pitchFamily="34" charset="-122"/>
                 <a:cs typeface="Courier New" pitchFamily="34" charset="-120"/>
               </a:rPr>
-              <a:t>2026-10-04T21:06:21.055Z  gate.review.appro</a:t>
+              <a:t>2026-10-05T08:25:15.863Z  gate.review.appro</a:t>
             </a:r>
             <a:endParaRPr lang="en-US" sz="1000" dirty="0"/>
           </a:p>
@@ -14032,7 +14243,7 @@
                 <a:ea typeface="Courier New" pitchFamily="34" charset="-122"/>
                 <a:cs typeface="Courier New" pitchFamily="34" charset="-120"/>
               </a:rPr>
-              <a:t>  [sdlc 0.6.4 · community]</a:t>
+              <a:t>  [sdlc 0.7.0 · community]</a:t>
             </a:r>
             <a:endParaRPr lang="en-US" sz="1000" dirty="0"/>
           </a:p>
@@ -14049,7 +14260,7 @@
                 <a:ea typeface="Courier New" pitchFamily="34" charset="-122"/>
                 <a:cs typeface="Courier New" pitchFamily="34" charset="-120"/>
               </a:rPr>
-              <a:t>2026-10-04T21:06:23.917Z  gate.release.appr</a:t>
+              <a:t>2026-10-05T08:25:18.850Z  gate.release.appr</a:t>
             </a:r>
             <a:endParaRPr lang="en-US" sz="1000" dirty="0"/>
           </a:p>
@@ -14100,7 +14311,7 @@
                 <a:ea typeface="Courier New" pitchFamily="34" charset="-122"/>
                 <a:cs typeface="Courier New" pitchFamily="34" charset="-120"/>
               </a:rPr>
-              <a:t>  release-manager [sdlc 0.6.4 · community]</a:t>
+              <a:t>  release-manager [sdlc 0.7.0 · community]</a:t>
             </a:r>
             <a:endParaRPr lang="en-US" sz="1000" dirty="0"/>
           </a:p>
@@ -14117,7 +14328,7 @@
                 <a:ea typeface="Courier New" pitchFamily="34" charset="-122"/>
                 <a:cs typeface="Courier New" pitchFamily="34" charset="-120"/>
               </a:rPr>
-              <a:t>2026-10-04T21:06:30.564Z  change.archived  </a:t>
+              <a:t>2026-10-05T08:25:25.694Z  change.archived  </a:t>
             </a:r>
             <a:endParaRPr lang="en-US" sz="1000" dirty="0"/>
           </a:p>
@@ -14850,7 +15061,7 @@
                 <a:ea typeface="Cambria" pitchFamily="34" charset="-122"/>
                 <a:cs typeface="Cambria" pitchFamily="34" charset="-120"/>
               </a:rPr>
-              <a:t>75</a:t>
+              <a:t>78</a:t>
             </a:r>
             <a:endParaRPr lang="en-US" sz="6000" dirty="0"/>
           </a:p>
@@ -14955,7 +15166,7 @@
                 <a:ea typeface="Cambria" pitchFamily="34" charset="-122"/>
                 <a:cs typeface="Cambria" pitchFamily="34" charset="-120"/>
               </a:rPr>
-              <a:t>48</a:t>
+              <a:t>50</a:t>
             </a:r>
             <a:endParaRPr lang="en-US" sz="6000" dirty="0"/>
           </a:p>
@@ -14994,7 +15205,7 @@
                 <a:ea typeface="Calibri" pitchFamily="34" charset="-122"/>
                 <a:cs typeface="Calibri" pitchFamily="34" charset="-120"/>
               </a:rPr>
-              <a:t>of 48 commands</a:t>
+              <a:t>of 50 commands</a:t>
             </a:r>
             <a:endParaRPr lang="en-US" sz="1600" dirty="0"/>
           </a:p>
@@ -15060,7 +15271,7 @@
                 <a:ea typeface="Cambria" pitchFamily="34" charset="-122"/>
                 <a:cs typeface="Cambria" pitchFamily="34" charset="-120"/>
               </a:rPr>
-              <a:t>8</a:t>
+              <a:t>9</a:t>
             </a:r>
             <a:endParaRPr lang="en-US" sz="6000" dirty="0"/>
           </a:p>
@@ -15219,7 +15430,7 @@
         <p:spPr>
           <a:xfrm>
             <a:off x="457200" y="3749040"/>
-            <a:ext cx="945896" cy="256032"/>
+            <a:ext cx="549656" cy="256032"/>
           </a:xfrm>
           <a:prstGeom prst="roundRect">
             <a:avLst>
@@ -15246,7 +15457,7 @@
         <p:spPr>
           <a:xfrm>
             <a:off x="457200" y="3749040"/>
-            <a:ext cx="945896" cy="256032"/>
+            <a:ext cx="549656" cy="256032"/>
           </a:xfrm>
           <a:prstGeom prst="rect">
             <a:avLst/>
@@ -15270,7 +15481,7 @@
                 <a:ea typeface="Calibri" pitchFamily="34" charset="-122"/>
                 <a:cs typeface="Calibri" pitchFamily="34" charset="-120"/>
               </a:rPr>
-              <a:t>roles check</a:t>
+              <a:t>adopt</a:t>
             </a:r>
             <a:endParaRPr lang="en-US" sz="1000" dirty="0"/>
           </a:p>
@@ -15284,8 +15495,8 @@
         </p:nvSpPr>
         <p:spPr>
           <a:xfrm>
-            <a:off x="1494536" y="3749040"/>
-            <a:ext cx="813816" cy="256032"/>
+            <a:off x="1098296" y="3749040"/>
+            <a:ext cx="945896" cy="256032"/>
           </a:xfrm>
           <a:prstGeom prst="roundRect">
             <a:avLst>
@@ -15311,8 +15522,8 @@
         </p:nvSpPr>
         <p:spPr>
           <a:xfrm>
-            <a:off x="1494536" y="3749040"/>
-            <a:ext cx="813816" cy="256032"/>
+            <a:off x="1098296" y="3749040"/>
+            <a:ext cx="945896" cy="256032"/>
           </a:xfrm>
           <a:prstGeom prst="rect">
             <a:avLst/>
@@ -15336,7 +15547,7 @@
                 <a:ea typeface="Calibri" pitchFamily="34" charset="-122"/>
                 <a:cs typeface="Calibri" pitchFamily="34" charset="-120"/>
               </a:rPr>
-              <a:t>roles who</a:t>
+              <a:t>roles check</a:t>
             </a:r>
             <a:endParaRPr lang="en-US" sz="1000" dirty="0"/>
           </a:p>
@@ -15350,8 +15561,8 @@
         </p:nvSpPr>
         <p:spPr>
           <a:xfrm>
-            <a:off x="2399792" y="3749040"/>
-            <a:ext cx="1077976" cy="256032"/>
+            <a:off x="2135632" y="3749040"/>
+            <a:ext cx="813816" cy="256032"/>
           </a:xfrm>
           <a:prstGeom prst="roundRect">
             <a:avLst>
@@ -15377,8 +15588,8 @@
         </p:nvSpPr>
         <p:spPr>
           <a:xfrm>
-            <a:off x="2399792" y="3749040"/>
-            <a:ext cx="1077976" cy="256032"/>
+            <a:off x="2135632" y="3749040"/>
+            <a:ext cx="813816" cy="256032"/>
           </a:xfrm>
           <a:prstGeom prst="rect">
             <a:avLst/>
@@ -15402,7 +15613,7 @@
                 <a:ea typeface="Calibri" pitchFamily="34" charset="-122"/>
                 <a:cs typeface="Calibri" pitchFamily="34" charset="-120"/>
               </a:rPr>
-              <a:t>roles migrate</a:t>
+              <a:t>roles who</a:t>
             </a:r>
             <a:endParaRPr lang="en-US" sz="1000" dirty="0"/>
           </a:p>
@@ -15416,8 +15627,8 @@
         </p:nvSpPr>
         <p:spPr>
           <a:xfrm>
-            <a:off x="3569208" y="3749040"/>
-            <a:ext cx="1276096" cy="256032"/>
+            <a:off x="3040888" y="3749040"/>
+            <a:ext cx="1077976" cy="256032"/>
           </a:xfrm>
           <a:prstGeom prst="roundRect">
             <a:avLst>
@@ -15443,8 +15654,8 @@
         </p:nvSpPr>
         <p:spPr>
           <a:xfrm>
-            <a:off x="3569208" y="3749040"/>
-            <a:ext cx="1276096" cy="256032"/>
+            <a:off x="3040888" y="3749040"/>
+            <a:ext cx="1077976" cy="256032"/>
           </a:xfrm>
           <a:prstGeom prst="rect">
             <a:avLst/>
@@ -15468,7 +15679,7 @@
                 <a:ea typeface="Calibri" pitchFamily="34" charset="-122"/>
                 <a:cs typeface="Calibri" pitchFamily="34" charset="-120"/>
               </a:rPr>
-              <a:t>backlog epic add</a:t>
+              <a:t>roles migrate</a:t>
             </a:r>
             <a:endParaRPr lang="en-US" sz="1000" dirty="0"/>
           </a:p>
@@ -15482,8 +15693,8 @@
         </p:nvSpPr>
         <p:spPr>
           <a:xfrm>
-            <a:off x="4936744" y="3749040"/>
-            <a:ext cx="945896" cy="256032"/>
+            <a:off x="4210304" y="3749040"/>
+            <a:ext cx="1276096" cy="256032"/>
           </a:xfrm>
           <a:prstGeom prst="roundRect">
             <a:avLst>
@@ -15509,8 +15720,8 @@
         </p:nvSpPr>
         <p:spPr>
           <a:xfrm>
-            <a:off x="4936744" y="3749040"/>
-            <a:ext cx="945896" cy="256032"/>
+            <a:off x="4210304" y="3749040"/>
+            <a:ext cx="1276096" cy="256032"/>
           </a:xfrm>
           <a:prstGeom prst="rect">
             <a:avLst/>
@@ -15534,7 +15745,7 @@
                 <a:ea typeface="Calibri" pitchFamily="34" charset="-122"/>
                 <a:cs typeface="Calibri" pitchFamily="34" charset="-120"/>
               </a:rPr>
-              <a:t>backlog add</a:t>
+              <a:t>backlog epic add</a:t>
             </a:r>
             <a:endParaRPr lang="en-US" sz="1000" dirty="0"/>
           </a:p>
@@ -15548,8 +15759,8 @@
         </p:nvSpPr>
         <p:spPr>
           <a:xfrm>
-            <a:off x="5974080" y="3749040"/>
-            <a:ext cx="1011936" cy="256032"/>
+            <a:off x="5577840" y="3749040"/>
+            <a:ext cx="945896" cy="256032"/>
           </a:xfrm>
           <a:prstGeom prst="roundRect">
             <a:avLst>
@@ -15575,8 +15786,8 @@
         </p:nvSpPr>
         <p:spPr>
           <a:xfrm>
-            <a:off x="5974080" y="3749040"/>
-            <a:ext cx="1011936" cy="256032"/>
+            <a:off x="5577840" y="3749040"/>
+            <a:ext cx="945896" cy="256032"/>
           </a:xfrm>
           <a:prstGeom prst="rect">
             <a:avLst/>
@@ -15600,7 +15811,7 @@
                 <a:ea typeface="Calibri" pitchFamily="34" charset="-122"/>
                 <a:cs typeface="Calibri" pitchFamily="34" charset="-120"/>
               </a:rPr>
-              <a:t>backlog list</a:t>
+              <a:t>backlog add</a:t>
             </a:r>
             <a:endParaRPr lang="en-US" sz="1000" dirty="0"/>
           </a:p>
@@ -15614,7 +15825,7 @@
         </p:nvSpPr>
         <p:spPr>
           <a:xfrm>
-            <a:off x="7077456" y="3749040"/>
+            <a:off x="6615176" y="3749040"/>
             <a:ext cx="1011936" cy="256032"/>
           </a:xfrm>
           <a:prstGeom prst="roundRect">
@@ -15641,7 +15852,7 @@
         </p:nvSpPr>
         <p:spPr>
           <a:xfrm>
-            <a:off x="7077456" y="3749040"/>
+            <a:off x="6615176" y="3749040"/>
             <a:ext cx="1011936" cy="256032"/>
           </a:xfrm>
           <a:prstGeom prst="rect">
@@ -15666,7 +15877,7 @@
                 <a:ea typeface="Calibri" pitchFamily="34" charset="-122"/>
                 <a:cs typeface="Calibri" pitchFamily="34" charset="-120"/>
               </a:rPr>
-              <a:t>backlog next</a:t>
+              <a:t>backlog edit</a:t>
             </a:r>
             <a:endParaRPr lang="en-US" sz="1000" dirty="0"/>
           </a:p>
@@ -15680,8 +15891,8 @@
         </p:nvSpPr>
         <p:spPr>
           <a:xfrm>
-            <a:off x="8180832" y="3749040"/>
-            <a:ext cx="1077976" cy="256032"/>
+            <a:off x="7718552" y="3749040"/>
+            <a:ext cx="1011936" cy="256032"/>
           </a:xfrm>
           <a:prstGeom prst="roundRect">
             <a:avLst>
@@ -15707,8 +15918,8 @@
         </p:nvSpPr>
         <p:spPr>
           <a:xfrm>
-            <a:off x="8180832" y="3749040"/>
-            <a:ext cx="1077976" cy="256032"/>
+            <a:off x="7718552" y="3749040"/>
+            <a:ext cx="1011936" cy="256032"/>
           </a:xfrm>
           <a:prstGeom prst="rect">
             <a:avLst/>
@@ -15732,7 +15943,7 @@
                 <a:ea typeface="Calibri" pitchFamily="34" charset="-122"/>
                 <a:cs typeface="Calibri" pitchFamily="34" charset="-120"/>
               </a:rPr>
-              <a:t>backlog start</a:t>
+              <a:t>backlog list</a:t>
             </a:r>
             <a:endParaRPr lang="en-US" sz="1000" dirty="0"/>
           </a:p>
@@ -15746,7 +15957,7 @@
         </p:nvSpPr>
         <p:spPr>
           <a:xfrm>
-            <a:off x="9350248" y="3749040"/>
+            <a:off x="8821928" y="3749040"/>
             <a:ext cx="1011936" cy="256032"/>
           </a:xfrm>
           <a:prstGeom prst="roundRect">
@@ -15773,7 +15984,7 @@
         </p:nvSpPr>
         <p:spPr>
           <a:xfrm>
-            <a:off x="9350248" y="3749040"/>
+            <a:off x="8821928" y="3749040"/>
             <a:ext cx="1011936" cy="256032"/>
           </a:xfrm>
           <a:prstGeom prst="rect">
@@ -15798,7 +16009,7 @@
                 <a:ea typeface="Calibri" pitchFamily="34" charset="-122"/>
                 <a:cs typeface="Calibri" pitchFamily="34" charset="-120"/>
               </a:rPr>
-              <a:t>backlog move</a:t>
+              <a:t>backlog next</a:t>
             </a:r>
             <a:endParaRPr lang="en-US" sz="1000" dirty="0"/>
           </a:p>
@@ -15812,8 +16023,8 @@
         </p:nvSpPr>
         <p:spPr>
           <a:xfrm>
-            <a:off x="10453624" y="3749040"/>
-            <a:ext cx="1011936" cy="256032"/>
+            <a:off x="9925304" y="3749040"/>
+            <a:ext cx="1077976" cy="256032"/>
           </a:xfrm>
           <a:prstGeom prst="roundRect">
             <a:avLst>
@@ -15839,8 +16050,8 @@
         </p:nvSpPr>
         <p:spPr>
           <a:xfrm>
-            <a:off x="10453624" y="3749040"/>
-            <a:ext cx="1011936" cy="256032"/>
+            <a:off x="9925304" y="3749040"/>
+            <a:ext cx="1077976" cy="256032"/>
           </a:xfrm>
           <a:prstGeom prst="rect">
             <a:avLst/>
@@ -15864,7 +16075,7 @@
                 <a:ea typeface="Calibri" pitchFamily="34" charset="-122"/>
                 <a:cs typeface="Calibri" pitchFamily="34" charset="-120"/>
               </a:rPr>
-              <a:t>backlog drop</a:t>
+              <a:t>backlog start</a:t>
             </a:r>
             <a:endParaRPr lang="en-US" sz="1000" dirty="0"/>
           </a:p>
@@ -15930,7 +16141,7 @@
                 <a:ea typeface="Calibri" pitchFamily="34" charset="-122"/>
                 <a:cs typeface="Calibri" pitchFamily="34" charset="-120"/>
               </a:rPr>
-              <a:t>backlog done</a:t>
+              <a:t>backlog move</a:t>
             </a:r>
             <a:endParaRPr lang="en-US" sz="1000" dirty="0"/>
           </a:p>
@@ -15945,7 +16156,7 @@
         <p:spPr>
           <a:xfrm>
             <a:off x="1560576" y="4096512"/>
-            <a:ext cx="813816" cy="256032"/>
+            <a:ext cx="1011936" cy="256032"/>
           </a:xfrm>
           <a:prstGeom prst="roundRect">
             <a:avLst>
@@ -15972,7 +16183,7 @@
         <p:spPr>
           <a:xfrm>
             <a:off x="1560576" y="4096512"/>
-            <a:ext cx="813816" cy="256032"/>
+            <a:ext cx="1011936" cy="256032"/>
           </a:xfrm>
           <a:prstGeom prst="rect">
             <a:avLst/>
@@ -15996,7 +16207,7 @@
                 <a:ea typeface="Calibri" pitchFamily="34" charset="-122"/>
                 <a:cs typeface="Calibri" pitchFamily="34" charset="-120"/>
               </a:rPr>
-              <a:t>defer add</a:t>
+              <a:t>backlog drop</a:t>
             </a:r>
             <a:endParaRPr lang="en-US" sz="1000" dirty="0"/>
           </a:p>
@@ -16010,8 +16221,8 @@
         </p:nvSpPr>
         <p:spPr>
           <a:xfrm>
-            <a:off x="2465832" y="4096512"/>
-            <a:ext cx="879856" cy="256032"/>
+            <a:off x="2663952" y="4096512"/>
+            <a:ext cx="1011936" cy="256032"/>
           </a:xfrm>
           <a:prstGeom prst="roundRect">
             <a:avLst>
@@ -16037,8 +16248,8 @@
         </p:nvSpPr>
         <p:spPr>
           <a:xfrm>
-            <a:off x="2465832" y="4096512"/>
-            <a:ext cx="879856" cy="256032"/>
+            <a:off x="2663952" y="4096512"/>
+            <a:ext cx="1011936" cy="256032"/>
           </a:xfrm>
           <a:prstGeom prst="rect">
             <a:avLst/>
@@ -16062,7 +16273,7 @@
                 <a:ea typeface="Calibri" pitchFamily="34" charset="-122"/>
                 <a:cs typeface="Calibri" pitchFamily="34" charset="-120"/>
               </a:rPr>
-              <a:t>defer list</a:t>
+              <a:t>backlog done</a:t>
             </a:r>
             <a:endParaRPr lang="en-US" sz="1000" dirty="0"/>
           </a:p>
@@ -16076,8 +16287,8 @@
         </p:nvSpPr>
         <p:spPr>
           <a:xfrm>
-            <a:off x="3437128" y="4096512"/>
-            <a:ext cx="945896" cy="256032"/>
+            <a:off x="3767328" y="4096512"/>
+            <a:ext cx="813816" cy="256032"/>
           </a:xfrm>
           <a:prstGeom prst="roundRect">
             <a:avLst>
@@ -16103,8 +16314,8 @@
         </p:nvSpPr>
         <p:spPr>
           <a:xfrm>
-            <a:off x="3437128" y="4096512"/>
-            <a:ext cx="945896" cy="256032"/>
+            <a:off x="3767328" y="4096512"/>
+            <a:ext cx="813816" cy="256032"/>
           </a:xfrm>
           <a:prstGeom prst="rect">
             <a:avLst/>
@@ -16128,7 +16339,7 @@
                 <a:ea typeface="Calibri" pitchFamily="34" charset="-122"/>
                 <a:cs typeface="Calibri" pitchFamily="34" charset="-120"/>
               </a:rPr>
-              <a:t>defer close</a:t>
+              <a:t>defer add</a:t>
             </a:r>
             <a:endParaRPr lang="en-US" sz="1000" dirty="0"/>
           </a:p>
@@ -16142,8 +16353,8 @@
         </p:nvSpPr>
         <p:spPr>
           <a:xfrm>
-            <a:off x="4474464" y="4096512"/>
-            <a:ext cx="1011936" cy="256032"/>
+            <a:off x="4672584" y="4096512"/>
+            <a:ext cx="879856" cy="256032"/>
           </a:xfrm>
           <a:prstGeom prst="roundRect">
             <a:avLst>
@@ -16169,8 +16380,8 @@
         </p:nvSpPr>
         <p:spPr>
           <a:xfrm>
-            <a:off x="4474464" y="4096512"/>
-            <a:ext cx="1011936" cy="256032"/>
+            <a:off x="4672584" y="4096512"/>
+            <a:ext cx="879856" cy="256032"/>
           </a:xfrm>
           <a:prstGeom prst="rect">
             <a:avLst/>
@@ -16194,7 +16405,7 @@
                 <a:ea typeface="Calibri" pitchFamily="34" charset="-122"/>
                 <a:cs typeface="Calibri" pitchFamily="34" charset="-120"/>
               </a:rPr>
-              <a:t>layout check</a:t>
+              <a:t>defer list</a:t>
             </a:r>
             <a:endParaRPr lang="en-US" sz="1000" dirty="0"/>
           </a:p>
@@ -16208,8 +16419,8 @@
         </p:nvSpPr>
         <p:spPr>
           <a:xfrm>
-            <a:off x="5577840" y="4096512"/>
-            <a:ext cx="1210056" cy="256032"/>
+            <a:off x="5643880" y="4096512"/>
+            <a:ext cx="945896" cy="256032"/>
           </a:xfrm>
           <a:prstGeom prst="roundRect">
             <a:avLst>
@@ -16235,8 +16446,8 @@
         </p:nvSpPr>
         <p:spPr>
           <a:xfrm>
-            <a:off x="5577840" y="4096512"/>
-            <a:ext cx="1210056" cy="256032"/>
+            <a:off x="5643880" y="4096512"/>
+            <a:ext cx="945896" cy="256032"/>
           </a:xfrm>
           <a:prstGeom prst="rect">
             <a:avLst/>
@@ -16260,7 +16471,7 @@
                 <a:ea typeface="Calibri" pitchFamily="34" charset="-122"/>
                 <a:cs typeface="Calibri" pitchFamily="34" charset="-120"/>
               </a:rPr>
-              <a:t>layout scaffold</a:t>
+              <a:t>defer close</a:t>
             </a:r>
             <a:endParaRPr lang="en-US" sz="1000" dirty="0"/>
           </a:p>
@@ -16274,7 +16485,7 @@
         </p:nvSpPr>
         <p:spPr>
           <a:xfrm>
-            <a:off x="6879336" y="4096512"/>
+            <a:off x="6681216" y="4096512"/>
             <a:ext cx="1011936" cy="256032"/>
           </a:xfrm>
           <a:prstGeom prst="roundRect">
@@ -16301,7 +16512,7 @@
         </p:nvSpPr>
         <p:spPr>
           <a:xfrm>
-            <a:off x="6879336" y="4096512"/>
+            <a:off x="6681216" y="4096512"/>
             <a:ext cx="1011936" cy="256032"/>
           </a:xfrm>
           <a:prstGeom prst="rect">
@@ -16326,7 +16537,7 @@
                 <a:ea typeface="Calibri" pitchFamily="34" charset="-122"/>
                 <a:cs typeface="Calibri" pitchFamily="34" charset="-120"/>
               </a:rPr>
-              <a:t>layout adapt</a:t>
+              <a:t>layout check</a:t>
             </a:r>
             <a:endParaRPr lang="en-US" sz="1000" dirty="0"/>
           </a:p>
@@ -16340,8 +16551,8 @@
         </p:nvSpPr>
         <p:spPr>
           <a:xfrm>
-            <a:off x="7982712" y="4096512"/>
-            <a:ext cx="1144016" cy="256032"/>
+            <a:off x="7784592" y="4096512"/>
+            <a:ext cx="1210056" cy="256032"/>
           </a:xfrm>
           <a:prstGeom prst="roundRect">
             <a:avLst>
@@ -16367,8 +16578,8 @@
         </p:nvSpPr>
         <p:spPr>
           <a:xfrm>
-            <a:off x="7982712" y="4096512"/>
-            <a:ext cx="1144016" cy="256032"/>
+            <a:off x="7784592" y="4096512"/>
+            <a:ext cx="1210056" cy="256032"/>
           </a:xfrm>
           <a:prstGeom prst="rect">
             <a:avLst/>
@@ -16392,7 +16603,7 @@
                 <a:ea typeface="Calibri" pitchFamily="34" charset="-122"/>
                 <a:cs typeface="Calibri" pitchFamily="34" charset="-120"/>
               </a:rPr>
-              <a:t>layout convert</a:t>
+              <a:t>layout scaffold</a:t>
             </a:r>
             <a:endParaRPr lang="en-US" sz="1000" dirty="0"/>
           </a:p>
@@ -16406,8 +16617,8 @@
         </p:nvSpPr>
         <p:spPr>
           <a:xfrm>
-            <a:off x="9218168" y="4096512"/>
-            <a:ext cx="483616" cy="256032"/>
+            <a:off x="9086088" y="4096512"/>
+            <a:ext cx="1011936" cy="256032"/>
           </a:xfrm>
           <a:prstGeom prst="roundRect">
             <a:avLst>
@@ -16433,8 +16644,8 @@
         </p:nvSpPr>
         <p:spPr>
           <a:xfrm>
-            <a:off x="9218168" y="4096512"/>
-            <a:ext cx="483616" cy="256032"/>
+            <a:off x="9086088" y="4096512"/>
+            <a:ext cx="1011936" cy="256032"/>
           </a:xfrm>
           <a:prstGeom prst="rect">
             <a:avLst/>
@@ -16458,7 +16669,7 @@
                 <a:ea typeface="Calibri" pitchFamily="34" charset="-122"/>
                 <a:cs typeface="Calibri" pitchFamily="34" charset="-120"/>
               </a:rPr>
-              <a:t>init</a:t>
+              <a:t>layout adapt</a:t>
             </a:r>
             <a:endParaRPr lang="en-US" sz="1000" dirty="0"/>
           </a:p>
@@ -16472,8 +16683,8 @@
         </p:nvSpPr>
         <p:spPr>
           <a:xfrm>
-            <a:off x="9793224" y="4096512"/>
-            <a:ext cx="615696" cy="256032"/>
+            <a:off x="10189464" y="4096512"/>
+            <a:ext cx="1144016" cy="256032"/>
           </a:xfrm>
           <a:prstGeom prst="roundRect">
             <a:avLst>
@@ -16499,8 +16710,8 @@
         </p:nvSpPr>
         <p:spPr>
           <a:xfrm>
-            <a:off x="9793224" y="4096512"/>
-            <a:ext cx="615696" cy="256032"/>
+            <a:off x="10189464" y="4096512"/>
+            <a:ext cx="1144016" cy="256032"/>
           </a:xfrm>
           <a:prstGeom prst="rect">
             <a:avLst/>
@@ -16524,7 +16735,7 @@
                 <a:ea typeface="Calibri" pitchFamily="34" charset="-122"/>
                 <a:cs typeface="Calibri" pitchFamily="34" charset="-120"/>
               </a:rPr>
-              <a:t>update</a:t>
+              <a:t>layout convert</a:t>
             </a:r>
             <a:endParaRPr lang="en-US" sz="1000" dirty="0"/>
           </a:p>
@@ -16538,8 +16749,8 @@
         </p:nvSpPr>
         <p:spPr>
           <a:xfrm>
-            <a:off x="10500360" y="4096512"/>
-            <a:ext cx="813816" cy="256032"/>
+            <a:off x="457200" y="4443984"/>
+            <a:ext cx="483616" cy="256032"/>
           </a:xfrm>
           <a:prstGeom prst="roundRect">
             <a:avLst>
@@ -16565,8 +16776,8 @@
         </p:nvSpPr>
         <p:spPr>
           <a:xfrm>
-            <a:off x="10500360" y="4096512"/>
-            <a:ext cx="813816" cy="256032"/>
+            <a:off x="457200" y="4443984"/>
+            <a:ext cx="483616" cy="256032"/>
           </a:xfrm>
           <a:prstGeom prst="rect">
             <a:avLst/>
@@ -16590,7 +16801,7 @@
                 <a:ea typeface="Calibri" pitchFamily="34" charset="-122"/>
                 <a:cs typeface="Calibri" pitchFamily="34" charset="-120"/>
               </a:rPr>
-              <a:t>uninstall</a:t>
+              <a:t>init</a:t>
             </a:r>
             <a:endParaRPr lang="en-US" sz="1000" dirty="0"/>
           </a:p>
@@ -16604,8 +16815,8 @@
         </p:nvSpPr>
         <p:spPr>
           <a:xfrm>
-            <a:off x="457200" y="4443984"/>
-            <a:ext cx="417576" cy="256032"/>
+            <a:off x="1032256" y="4443984"/>
+            <a:ext cx="615696" cy="256032"/>
           </a:xfrm>
           <a:prstGeom prst="roundRect">
             <a:avLst>
@@ -16631,8 +16842,8 @@
         </p:nvSpPr>
         <p:spPr>
           <a:xfrm>
-            <a:off x="457200" y="4443984"/>
-            <a:ext cx="417576" cy="256032"/>
+            <a:off x="1032256" y="4443984"/>
+            <a:ext cx="615696" cy="256032"/>
           </a:xfrm>
           <a:prstGeom prst="rect">
             <a:avLst/>
@@ -16656,7 +16867,7 @@
                 <a:ea typeface="Calibri" pitchFamily="34" charset="-122"/>
                 <a:cs typeface="Calibri" pitchFamily="34" charset="-120"/>
               </a:rPr>
-              <a:t>new</a:t>
+              <a:t>update</a:t>
             </a:r>
             <a:endParaRPr lang="en-US" sz="1000" dirty="0"/>
           </a:p>
@@ -16670,8 +16881,8 @@
         </p:nvSpPr>
         <p:spPr>
           <a:xfrm>
-            <a:off x="966216" y="4443984"/>
-            <a:ext cx="1011936" cy="256032"/>
+            <a:off x="1739392" y="4443984"/>
+            <a:ext cx="813816" cy="256032"/>
           </a:xfrm>
           <a:prstGeom prst="roundRect">
             <a:avLst>
@@ -16697,8 +16908,8 @@
         </p:nvSpPr>
         <p:spPr>
           <a:xfrm>
-            <a:off x="966216" y="4443984"/>
-            <a:ext cx="1011936" cy="256032"/>
+            <a:off x="1739392" y="4443984"/>
+            <a:ext cx="813816" cy="256032"/>
           </a:xfrm>
           <a:prstGeom prst="rect">
             <a:avLst/>
@@ -16722,7 +16933,7 @@
                 <a:ea typeface="Calibri" pitchFamily="34" charset="-122"/>
                 <a:cs typeface="Calibri" pitchFamily="34" charset="-120"/>
               </a:rPr>
-              <a:t>explore list</a:t>
+              <a:t>uninstall</a:t>
             </a:r>
             <a:endParaRPr lang="en-US" sz="1000" dirty="0"/>
           </a:p>
@@ -16736,8 +16947,8 @@
         </p:nvSpPr>
         <p:spPr>
           <a:xfrm>
-            <a:off x="2069592" y="4443984"/>
-            <a:ext cx="945896" cy="256032"/>
+            <a:off x="2644648" y="4443984"/>
+            <a:ext cx="417576" cy="256032"/>
           </a:xfrm>
           <a:prstGeom prst="roundRect">
             <a:avLst>
@@ -16763,8 +16974,8 @@
         </p:nvSpPr>
         <p:spPr>
           <a:xfrm>
-            <a:off x="2069592" y="4443984"/>
-            <a:ext cx="945896" cy="256032"/>
+            <a:off x="2644648" y="4443984"/>
+            <a:ext cx="417576" cy="256032"/>
           </a:xfrm>
           <a:prstGeom prst="rect">
             <a:avLst/>
@@ -16788,7 +16999,7 @@
                 <a:ea typeface="Calibri" pitchFamily="34" charset="-122"/>
                 <a:cs typeface="Calibri" pitchFamily="34" charset="-120"/>
               </a:rPr>
-              <a:t>import bmad</a:t>
+              <a:t>new</a:t>
             </a:r>
             <a:endParaRPr lang="en-US" sz="1000" dirty="0"/>
           </a:p>
@@ -16802,8 +17013,8 @@
         </p:nvSpPr>
         <p:spPr>
           <a:xfrm>
-            <a:off x="3106928" y="4443984"/>
-            <a:ext cx="615696" cy="256032"/>
+            <a:off x="3153664" y="4443984"/>
+            <a:ext cx="1011936" cy="256032"/>
           </a:xfrm>
           <a:prstGeom prst="roundRect">
             <a:avLst>
@@ -16829,8 +17040,8 @@
         </p:nvSpPr>
         <p:spPr>
           <a:xfrm>
-            <a:off x="3106928" y="4443984"/>
-            <a:ext cx="615696" cy="256032"/>
+            <a:off x="3153664" y="4443984"/>
+            <a:ext cx="1011936" cy="256032"/>
           </a:xfrm>
           <a:prstGeom prst="rect">
             <a:avLst/>
@@ -16854,7 +17065,7 @@
                 <a:ea typeface="Calibri" pitchFamily="34" charset="-122"/>
                 <a:cs typeface="Calibri" pitchFamily="34" charset="-120"/>
               </a:rPr>
-              <a:t>status</a:t>
+              <a:t>explore list</a:t>
             </a:r>
             <a:endParaRPr lang="en-US" sz="1000" dirty="0"/>
           </a:p>
@@ -16868,8 +17079,8 @@
         </p:nvSpPr>
         <p:spPr>
           <a:xfrm>
-            <a:off x="3814064" y="4443984"/>
-            <a:ext cx="483616" cy="256032"/>
+            <a:off x="4257040" y="4443984"/>
+            <a:ext cx="945896" cy="256032"/>
           </a:xfrm>
           <a:prstGeom prst="roundRect">
             <a:avLst>
@@ -16895,8 +17106,8 @@
         </p:nvSpPr>
         <p:spPr>
           <a:xfrm>
-            <a:off x="3814064" y="4443984"/>
-            <a:ext cx="483616" cy="256032"/>
+            <a:off x="4257040" y="4443984"/>
+            <a:ext cx="945896" cy="256032"/>
           </a:xfrm>
           <a:prstGeom prst="rect">
             <a:avLst/>
@@ -16920,7 +17131,7 @@
                 <a:ea typeface="Calibri" pitchFamily="34" charset="-122"/>
                 <a:cs typeface="Calibri" pitchFamily="34" charset="-120"/>
               </a:rPr>
-              <a:t>help</a:t>
+              <a:t>import bmad</a:t>
             </a:r>
             <a:endParaRPr lang="en-US" sz="1000" dirty="0"/>
           </a:p>
@@ -16934,8 +17145,8 @@
         </p:nvSpPr>
         <p:spPr>
           <a:xfrm>
-            <a:off x="4389120" y="4443984"/>
-            <a:ext cx="879856" cy="256032"/>
+            <a:off x="5294376" y="4443984"/>
+            <a:ext cx="615696" cy="256032"/>
           </a:xfrm>
           <a:prstGeom prst="roundRect">
             <a:avLst>
@@ -16961,8 +17172,8 @@
         </p:nvSpPr>
         <p:spPr>
           <a:xfrm>
-            <a:off x="4389120" y="4443984"/>
-            <a:ext cx="879856" cy="256032"/>
+            <a:off x="5294376" y="4443984"/>
+            <a:ext cx="615696" cy="256032"/>
           </a:xfrm>
           <a:prstGeom prst="rect">
             <a:avLst/>
@@ -16986,7 +17197,7 @@
                 <a:ea typeface="Calibri" pitchFamily="34" charset="-122"/>
                 <a:cs typeface="Calibri" pitchFamily="34" charset="-120"/>
               </a:rPr>
-              <a:t>statusline</a:t>
+              <a:t>status</a:t>
             </a:r>
             <a:endParaRPr lang="en-US" sz="1000" dirty="0"/>
           </a:p>
@@ -17000,8 +17211,8 @@
         </p:nvSpPr>
         <p:spPr>
           <a:xfrm>
-            <a:off x="5360416" y="4443984"/>
-            <a:ext cx="813816" cy="256032"/>
+            <a:off x="6001512" y="4443984"/>
+            <a:ext cx="483616" cy="256032"/>
           </a:xfrm>
           <a:prstGeom prst="roundRect">
             <a:avLst>
@@ -17027,8 +17238,8 @@
         </p:nvSpPr>
         <p:spPr>
           <a:xfrm>
-            <a:off x="5360416" y="4443984"/>
-            <a:ext cx="813816" cy="256032"/>
+            <a:off x="6001512" y="4443984"/>
+            <a:ext cx="483616" cy="256032"/>
           </a:xfrm>
           <a:prstGeom prst="rect">
             <a:avLst/>
@@ -17052,7 +17263,7 @@
                 <a:ea typeface="Calibri" pitchFamily="34" charset="-122"/>
                 <a:cs typeface="Calibri" pitchFamily="34" charset="-120"/>
               </a:rPr>
-              <a:t>track set</a:t>
+              <a:t>help</a:t>
             </a:r>
             <a:endParaRPr lang="en-US" sz="1000" dirty="0"/>
           </a:p>
@@ -17066,8 +17277,8 @@
         </p:nvSpPr>
         <p:spPr>
           <a:xfrm>
-            <a:off x="6265672" y="4443984"/>
-            <a:ext cx="483616" cy="256032"/>
+            <a:off x="6576568" y="4443984"/>
+            <a:ext cx="879856" cy="256032"/>
           </a:xfrm>
           <a:prstGeom prst="roundRect">
             <a:avLst>
@@ -17093,8 +17304,8 @@
         </p:nvSpPr>
         <p:spPr>
           <a:xfrm>
-            <a:off x="6265672" y="4443984"/>
-            <a:ext cx="483616" cy="256032"/>
+            <a:off x="6576568" y="4443984"/>
+            <a:ext cx="879856" cy="256032"/>
           </a:xfrm>
           <a:prstGeom prst="rect">
             <a:avLst/>
@@ -17118,7 +17329,7 @@
                 <a:ea typeface="Calibri" pitchFamily="34" charset="-122"/>
                 <a:cs typeface="Calibri" pitchFamily="34" charset="-120"/>
               </a:rPr>
-              <a:t>next</a:t>
+              <a:t>statusline</a:t>
             </a:r>
             <a:endParaRPr lang="en-US" sz="1000" dirty="0"/>
           </a:p>
@@ -17132,8 +17343,8 @@
         </p:nvSpPr>
         <p:spPr>
           <a:xfrm>
-            <a:off x="6840728" y="4443984"/>
-            <a:ext cx="1011936" cy="256032"/>
+            <a:off x="7547864" y="4443984"/>
+            <a:ext cx="813816" cy="256032"/>
           </a:xfrm>
           <a:prstGeom prst="roundRect">
             <a:avLst>
@@ -17159,8 +17370,8 @@
         </p:nvSpPr>
         <p:spPr>
           <a:xfrm>
-            <a:off x="6840728" y="4443984"/>
-            <a:ext cx="1011936" cy="256032"/>
+            <a:off x="7547864" y="4443984"/>
+            <a:ext cx="813816" cy="256032"/>
           </a:xfrm>
           <a:prstGeom prst="rect">
             <a:avLst/>
@@ -17184,7 +17395,7 @@
                 <a:ea typeface="Calibri" pitchFamily="34" charset="-122"/>
                 <a:cs typeface="Calibri" pitchFamily="34" charset="-120"/>
               </a:rPr>
-              <a:t>instructions</a:t>
+              <a:t>track set</a:t>
             </a:r>
             <a:endParaRPr lang="en-US" sz="1000" dirty="0"/>
           </a:p>
@@ -17198,8 +17409,8 @@
         </p:nvSpPr>
         <p:spPr>
           <a:xfrm>
-            <a:off x="7944104" y="4443984"/>
-            <a:ext cx="681736" cy="256032"/>
+            <a:off x="8453120" y="4443984"/>
+            <a:ext cx="483616" cy="256032"/>
           </a:xfrm>
           <a:prstGeom prst="roundRect">
             <a:avLst>
@@ -17225,8 +17436,8 @@
         </p:nvSpPr>
         <p:spPr>
           <a:xfrm>
-            <a:off x="7944104" y="4443984"/>
-            <a:ext cx="681736" cy="256032"/>
+            <a:off x="8453120" y="4443984"/>
+            <a:ext cx="483616" cy="256032"/>
           </a:xfrm>
           <a:prstGeom prst="rect">
             <a:avLst/>
@@ -17250,7 +17461,7 @@
                 <a:ea typeface="Calibri" pitchFamily="34" charset="-122"/>
                 <a:cs typeface="Calibri" pitchFamily="34" charset="-120"/>
               </a:rPr>
-              <a:t>approve</a:t>
+              <a:t>next</a:t>
             </a:r>
             <a:endParaRPr lang="en-US" sz="1000" dirty="0"/>
           </a:p>
@@ -17264,8 +17475,8 @@
         </p:nvSpPr>
         <p:spPr>
           <a:xfrm>
-            <a:off x="8717280" y="4443984"/>
-            <a:ext cx="615696" cy="256032"/>
+            <a:off x="9028176" y="4443984"/>
+            <a:ext cx="1011936" cy="256032"/>
           </a:xfrm>
           <a:prstGeom prst="roundRect">
             <a:avLst>
@@ -17291,8 +17502,8 @@
         </p:nvSpPr>
         <p:spPr>
           <a:xfrm>
-            <a:off x="8717280" y="4443984"/>
-            <a:ext cx="615696" cy="256032"/>
+            <a:off x="9028176" y="4443984"/>
+            <a:ext cx="1011936" cy="256032"/>
           </a:xfrm>
           <a:prstGeom prst="rect">
             <a:avLst/>
@@ -17316,7 +17527,7 @@
                 <a:ea typeface="Calibri" pitchFamily="34" charset="-122"/>
                 <a:cs typeface="Calibri" pitchFamily="34" charset="-120"/>
               </a:rPr>
-              <a:t>reject</a:t>
+              <a:t>instructions</a:t>
             </a:r>
             <a:endParaRPr lang="en-US" sz="1000" dirty="0"/>
           </a:p>
@@ -17330,8 +17541,8 @@
         </p:nvSpPr>
         <p:spPr>
           <a:xfrm>
-            <a:off x="9424416" y="4443984"/>
-            <a:ext cx="549656" cy="256032"/>
+            <a:off x="10131552" y="4443984"/>
+            <a:ext cx="681736" cy="256032"/>
           </a:xfrm>
           <a:prstGeom prst="roundRect">
             <a:avLst>
@@ -17357,8 +17568,8 @@
         </p:nvSpPr>
         <p:spPr>
           <a:xfrm>
-            <a:off x="9424416" y="4443984"/>
-            <a:ext cx="549656" cy="256032"/>
+            <a:off x="10131552" y="4443984"/>
+            <a:ext cx="681736" cy="256032"/>
           </a:xfrm>
           <a:prstGeom prst="rect">
             <a:avLst/>
@@ -17382,7 +17593,7 @@
                 <a:ea typeface="Calibri" pitchFamily="34" charset="-122"/>
                 <a:cs typeface="Calibri" pitchFamily="34" charset="-120"/>
               </a:rPr>
-              <a:t>waive</a:t>
+              <a:t>approve</a:t>
             </a:r>
             <a:endParaRPr lang="en-US" sz="1000" dirty="0"/>
           </a:p>
@@ -17396,8 +17607,8 @@
         </p:nvSpPr>
         <p:spPr>
           <a:xfrm>
-            <a:off x="10065512" y="4443984"/>
-            <a:ext cx="1276096" cy="256032"/>
+            <a:off x="10904728" y="4443984"/>
+            <a:ext cx="615696" cy="256032"/>
           </a:xfrm>
           <a:prstGeom prst="roundRect">
             <a:avLst>
@@ -17423,8 +17634,8 @@
         </p:nvSpPr>
         <p:spPr>
           <a:xfrm>
-            <a:off x="10065512" y="4443984"/>
-            <a:ext cx="1276096" cy="256032"/>
+            <a:off x="10904728" y="4443984"/>
+            <a:ext cx="615696" cy="256032"/>
           </a:xfrm>
           <a:prstGeom prst="rect">
             <a:avLst/>
@@ -17448,7 +17659,7 @@
                 <a:ea typeface="Calibri" pitchFamily="34" charset="-122"/>
                 <a:cs typeface="Calibri" pitchFamily="34" charset="-120"/>
               </a:rPr>
-              <a:t>approvals verify</a:t>
+              <a:t>reject</a:t>
             </a:r>
             <a:endParaRPr lang="en-US" sz="1000" dirty="0"/>
           </a:p>
@@ -17514,7 +17725,7 @@
                 <a:ea typeface="Calibri" pitchFamily="34" charset="-122"/>
                 <a:cs typeface="Calibri" pitchFamily="34" charset="-120"/>
               </a:rPr>
-              <a:t>tests</a:t>
+              <a:t>waive</a:t>
             </a:r>
             <a:endParaRPr lang="en-US" sz="1000" dirty="0"/>
           </a:p>
@@ -17529,7 +17740,7 @@
         <p:spPr>
           <a:xfrm>
             <a:off x="1098296" y="4791456"/>
-            <a:ext cx="615696" cy="256032"/>
+            <a:ext cx="1276096" cy="256032"/>
           </a:xfrm>
           <a:prstGeom prst="roundRect">
             <a:avLst>
@@ -17556,7 +17767,7 @@
         <p:spPr>
           <a:xfrm>
             <a:off x="1098296" y="4791456"/>
-            <a:ext cx="615696" cy="256032"/>
+            <a:ext cx="1276096" cy="256032"/>
           </a:xfrm>
           <a:prstGeom prst="rect">
             <a:avLst/>
@@ -17580,7 +17791,7 @@
                 <a:ea typeface="Calibri" pitchFamily="34" charset="-122"/>
                 <a:cs typeface="Calibri" pitchFamily="34" charset="-120"/>
               </a:rPr>
-              <a:t>verify</a:t>
+              <a:t>approvals verify</a:t>
             </a:r>
             <a:endParaRPr lang="en-US" sz="1000" dirty="0"/>
           </a:p>
@@ -17594,8 +17805,8 @@
         </p:nvSpPr>
         <p:spPr>
           <a:xfrm>
-            <a:off x="1805432" y="4791456"/>
-            <a:ext cx="615696" cy="256032"/>
+            <a:off x="2465832" y="4791456"/>
+            <a:ext cx="549656" cy="256032"/>
           </a:xfrm>
           <a:prstGeom prst="roundRect">
             <a:avLst>
@@ -17621,8 +17832,8 @@
         </p:nvSpPr>
         <p:spPr>
           <a:xfrm>
-            <a:off x="1805432" y="4791456"/>
-            <a:ext cx="615696" cy="256032"/>
+            <a:off x="2465832" y="4791456"/>
+            <a:ext cx="549656" cy="256032"/>
           </a:xfrm>
           <a:prstGeom prst="rect">
             <a:avLst/>
@@ -17646,7 +17857,7 @@
                 <a:ea typeface="Calibri" pitchFamily="34" charset="-122"/>
                 <a:cs typeface="Calibri" pitchFamily="34" charset="-120"/>
               </a:rPr>
-              <a:t>review</a:t>
+              <a:t>tests</a:t>
             </a:r>
             <a:endParaRPr lang="en-US" sz="1000" dirty="0"/>
           </a:p>
@@ -17660,8 +17871,8 @@
         </p:nvSpPr>
         <p:spPr>
           <a:xfrm>
-            <a:off x="2512568" y="4791456"/>
-            <a:ext cx="747776" cy="256032"/>
+            <a:off x="3106928" y="4791456"/>
+            <a:ext cx="615696" cy="256032"/>
           </a:xfrm>
           <a:prstGeom prst="roundRect">
             <a:avLst>
@@ -17687,8 +17898,8 @@
         </p:nvSpPr>
         <p:spPr>
           <a:xfrm>
-            <a:off x="2512568" y="4791456"/>
-            <a:ext cx="747776" cy="256032"/>
+            <a:off x="3106928" y="4791456"/>
+            <a:ext cx="615696" cy="256032"/>
           </a:xfrm>
           <a:prstGeom prst="rect">
             <a:avLst/>
@@ -17712,7 +17923,7 @@
                 <a:ea typeface="Calibri" pitchFamily="34" charset="-122"/>
                 <a:cs typeface="Calibri" pitchFamily="34" charset="-120"/>
               </a:rPr>
-              <a:t>validate</a:t>
+              <a:t>verify</a:t>
             </a:r>
             <a:endParaRPr lang="en-US" sz="1000" dirty="0"/>
           </a:p>
@@ -17726,8 +17937,8 @@
         </p:nvSpPr>
         <p:spPr>
           <a:xfrm>
-            <a:off x="3351784" y="4791456"/>
-            <a:ext cx="681736" cy="256032"/>
+            <a:off x="3814064" y="4791456"/>
+            <a:ext cx="615696" cy="256032"/>
           </a:xfrm>
           <a:prstGeom prst="roundRect">
             <a:avLst>
@@ -17753,8 +17964,8 @@
         </p:nvSpPr>
         <p:spPr>
           <a:xfrm>
-            <a:off x="3351784" y="4791456"/>
-            <a:ext cx="681736" cy="256032"/>
+            <a:off x="3814064" y="4791456"/>
+            <a:ext cx="615696" cy="256032"/>
           </a:xfrm>
           <a:prstGeom prst="rect">
             <a:avLst/>
@@ -17778,7 +17989,7 @@
                 <a:ea typeface="Calibri" pitchFamily="34" charset="-122"/>
                 <a:cs typeface="Calibri" pitchFamily="34" charset="-120"/>
               </a:rPr>
-              <a:t>archive</a:t>
+              <a:t>review</a:t>
             </a:r>
             <a:endParaRPr lang="en-US" sz="1000" dirty="0"/>
           </a:p>
@@ -17792,8 +18003,8 @@
         </p:nvSpPr>
         <p:spPr>
           <a:xfrm>
-            <a:off x="4124960" y="4791456"/>
-            <a:ext cx="549656" cy="256032"/>
+            <a:off x="4521200" y="4791456"/>
+            <a:ext cx="747776" cy="256032"/>
           </a:xfrm>
           <a:prstGeom prst="roundRect">
             <a:avLst>
@@ -17819,8 +18030,8 @@
         </p:nvSpPr>
         <p:spPr>
           <a:xfrm>
-            <a:off x="4124960" y="4791456"/>
-            <a:ext cx="549656" cy="256032"/>
+            <a:off x="4521200" y="4791456"/>
+            <a:ext cx="747776" cy="256032"/>
           </a:xfrm>
           <a:prstGeom prst="rect">
             <a:avLst/>
@@ -17844,7 +18055,7 @@
                 <a:ea typeface="Calibri" pitchFamily="34" charset="-122"/>
                 <a:cs typeface="Calibri" pitchFamily="34" charset="-120"/>
               </a:rPr>
-              <a:t>audit</a:t>
+              <a:t>validate</a:t>
             </a:r>
             <a:endParaRPr lang="en-US" sz="1000" dirty="0"/>
           </a:p>
@@ -17858,8 +18069,8 @@
         </p:nvSpPr>
         <p:spPr>
           <a:xfrm>
-            <a:off x="4766056" y="4791456"/>
-            <a:ext cx="615696" cy="256032"/>
+            <a:off x="5360416" y="4791456"/>
+            <a:ext cx="681736" cy="256032"/>
           </a:xfrm>
           <a:prstGeom prst="roundRect">
             <a:avLst>
@@ -17885,8 +18096,8 @@
         </p:nvSpPr>
         <p:spPr>
           <a:xfrm>
-            <a:off x="4766056" y="4791456"/>
-            <a:ext cx="615696" cy="256032"/>
+            <a:off x="5360416" y="4791456"/>
+            <a:ext cx="681736" cy="256032"/>
           </a:xfrm>
           <a:prstGeom prst="rect">
             <a:avLst/>
@@ -17910,7 +18121,7 @@
                 <a:ea typeface="Calibri" pitchFamily="34" charset="-122"/>
                 <a:cs typeface="Calibri" pitchFamily="34" charset="-120"/>
               </a:rPr>
-              <a:t>report</a:t>
+              <a:t>archive</a:t>
             </a:r>
             <a:endParaRPr lang="en-US" sz="1000" dirty="0"/>
           </a:p>
@@ -17924,8 +18135,8 @@
         </p:nvSpPr>
         <p:spPr>
           <a:xfrm>
-            <a:off x="5473192" y="4791456"/>
-            <a:ext cx="813816" cy="256032"/>
+            <a:off x="6133592" y="4791456"/>
+            <a:ext cx="549656" cy="256032"/>
           </a:xfrm>
           <a:prstGeom prst="roundRect">
             <a:avLst>
@@ -17951,8 +18162,8 @@
         </p:nvSpPr>
         <p:spPr>
           <a:xfrm>
-            <a:off x="5473192" y="4791456"/>
-            <a:ext cx="813816" cy="256032"/>
+            <a:off x="6133592" y="4791456"/>
+            <a:ext cx="549656" cy="256032"/>
           </a:xfrm>
           <a:prstGeom prst="rect">
             <a:avLst/>
@@ -17976,7 +18187,7 @@
                 <a:ea typeface="Calibri" pitchFamily="34" charset="-122"/>
                 <a:cs typeface="Calibri" pitchFamily="34" charset="-120"/>
               </a:rPr>
-              <a:t>dashboard</a:t>
+              <a:t>audit</a:t>
             </a:r>
             <a:endParaRPr lang="en-US" sz="1000" dirty="0"/>
           </a:p>
@@ -17990,8 +18201,8 @@
         </p:nvSpPr>
         <p:spPr>
           <a:xfrm>
-            <a:off x="6378448" y="4791456"/>
-            <a:ext cx="417576" cy="256032"/>
+            <a:off x="6774688" y="4791456"/>
+            <a:ext cx="615696" cy="256032"/>
           </a:xfrm>
           <a:prstGeom prst="roundRect">
             <a:avLst>
@@ -18017,8 +18228,8 @@
         </p:nvSpPr>
         <p:spPr>
           <a:xfrm>
-            <a:off x="6378448" y="4791456"/>
-            <a:ext cx="417576" cy="256032"/>
+            <a:off x="6774688" y="4791456"/>
+            <a:ext cx="615696" cy="256032"/>
           </a:xfrm>
           <a:prstGeom prst="rect">
             <a:avLst/>
@@ -18042,7 +18253,7 @@
                 <a:ea typeface="Calibri" pitchFamily="34" charset="-122"/>
                 <a:cs typeface="Calibri" pitchFamily="34" charset="-120"/>
               </a:rPr>
-              <a:t>log</a:t>
+              <a:t>report</a:t>
             </a:r>
             <a:endParaRPr lang="en-US" sz="1000" dirty="0"/>
           </a:p>
@@ -18056,8 +18267,8 @@
         </p:nvSpPr>
         <p:spPr>
           <a:xfrm>
-            <a:off x="6887464" y="4791456"/>
-            <a:ext cx="681736" cy="256032"/>
+            <a:off x="7481824" y="4791456"/>
+            <a:ext cx="813816" cy="256032"/>
           </a:xfrm>
           <a:prstGeom prst="roundRect">
             <a:avLst>
@@ -18083,8 +18294,8 @@
         </p:nvSpPr>
         <p:spPr>
           <a:xfrm>
-            <a:off x="6887464" y="4791456"/>
-            <a:ext cx="681736" cy="256032"/>
+            <a:off x="7481824" y="4791456"/>
+            <a:ext cx="813816" cy="256032"/>
           </a:xfrm>
           <a:prstGeom prst="rect">
             <a:avLst/>
@@ -18108,7 +18319,7 @@
                 <a:ea typeface="Calibri" pitchFamily="34" charset="-122"/>
                 <a:cs typeface="Calibri" pitchFamily="34" charset="-120"/>
               </a:rPr>
-              <a:t>license</a:t>
+              <a:t>dashboard</a:t>
             </a:r>
             <a:endParaRPr lang="en-US" sz="1000" dirty="0"/>
           </a:p>
@@ -18122,8 +18333,8 @@
         </p:nvSpPr>
         <p:spPr>
           <a:xfrm>
-            <a:off x="7660640" y="4791456"/>
-            <a:ext cx="615696" cy="256032"/>
+            <a:off x="8387080" y="4791456"/>
+            <a:ext cx="417576" cy="256032"/>
           </a:xfrm>
           <a:prstGeom prst="roundRect">
             <a:avLst>
@@ -18149,8 +18360,8 @@
         </p:nvSpPr>
         <p:spPr>
           <a:xfrm>
-            <a:off x="7660640" y="4791456"/>
-            <a:ext cx="615696" cy="256032"/>
+            <a:off x="8387080" y="4791456"/>
+            <a:ext cx="417576" cy="256032"/>
           </a:xfrm>
           <a:prstGeom prst="rect">
             <a:avLst/>
@@ -18174,7 +18385,7 @@
                 <a:ea typeface="Calibri" pitchFamily="34" charset="-122"/>
                 <a:cs typeface="Calibri" pitchFamily="34" charset="-120"/>
               </a:rPr>
-              <a:t>doctor</a:t>
+              <a:t>log</a:t>
             </a:r>
             <a:endParaRPr lang="en-US" sz="1000" dirty="0"/>
           </a:p>
@@ -18188,8 +18399,8 @@
         </p:nvSpPr>
         <p:spPr>
           <a:xfrm>
-            <a:off x="8367776" y="4791456"/>
-            <a:ext cx="1011936" cy="256032"/>
+            <a:off x="8896096" y="4791456"/>
+            <a:ext cx="681736" cy="256032"/>
           </a:xfrm>
           <a:prstGeom prst="roundRect">
             <a:avLst>
@@ -18215,8 +18426,8 @@
         </p:nvSpPr>
         <p:spPr>
           <a:xfrm>
-            <a:off x="8367776" y="4791456"/>
-            <a:ext cx="1011936" cy="256032"/>
+            <a:off x="8896096" y="4791456"/>
+            <a:ext cx="681736" cy="256032"/>
           </a:xfrm>
           <a:prstGeom prst="rect">
             <a:avLst/>
@@ -18240,7 +18451,7 @@
                 <a:ea typeface="Calibri" pitchFamily="34" charset="-122"/>
                 <a:cs typeface="Calibri" pitchFamily="34" charset="-120"/>
               </a:rPr>
-              <a:t>plugin build</a:t>
+              <a:t>license</a:t>
             </a:r>
             <a:endParaRPr lang="en-US" sz="1000" dirty="0"/>
           </a:p>
@@ -18254,8 +18465,8 @@
         </p:nvSpPr>
         <p:spPr>
           <a:xfrm>
-            <a:off x="9471152" y="4791456"/>
-            <a:ext cx="483616" cy="256032"/>
+            <a:off x="9669272" y="4791456"/>
+            <a:ext cx="615696" cy="256032"/>
           </a:xfrm>
           <a:prstGeom prst="roundRect">
             <a:avLst>
@@ -18281,8 +18492,8 @@
         </p:nvSpPr>
         <p:spPr>
           <a:xfrm>
-            <a:off x="9471152" y="4791456"/>
-            <a:ext cx="483616" cy="256032"/>
+            <a:off x="9669272" y="4791456"/>
+            <a:ext cx="615696" cy="256032"/>
           </a:xfrm>
           <a:prstGeom prst="rect">
             <a:avLst/>
@@ -18306,7 +18517,7 @@
                 <a:ea typeface="Calibri" pitchFamily="34" charset="-122"/>
                 <a:cs typeface="Calibri" pitchFamily="34" charset="-120"/>
               </a:rPr>
-              <a:t>hook</a:t>
+              <a:t>doctor</a:t>
             </a:r>
             <a:endParaRPr lang="en-US" sz="1000" dirty="0"/>
           </a:p>
@@ -18320,8 +18531,8 @@
         </p:nvSpPr>
         <p:spPr>
           <a:xfrm>
-            <a:off x="10046208" y="4791456"/>
-            <a:ext cx="747776" cy="256032"/>
+            <a:off x="10376408" y="4791456"/>
+            <a:ext cx="1011936" cy="256032"/>
           </a:xfrm>
           <a:prstGeom prst="roundRect">
             <a:avLst>
@@ -18347,7 +18558,139 @@
         </p:nvSpPr>
         <p:spPr>
           <a:xfrm>
-            <a:off x="10046208" y="4791456"/>
+            <a:off x="10376408" y="4791456"/>
+            <a:ext cx="1011936" cy="256032"/>
+          </a:xfrm>
+          <a:prstGeom prst="rect">
+            <a:avLst/>
+          </a:prstGeom>
+          <a:noFill/>
+          <a:ln/>
+        </p:spPr>
+        <p:txBody>
+          <a:bodyPr wrap="square" lIns="0" tIns="0" rIns="0" bIns="0" rtlCol="0" anchor="ctr"/>
+          <a:lstStyle/>
+          <a:p>
+            <a:pPr algn="ctr" indent="0" marL="0">
+              <a:buNone/>
+            </a:pPr>
+            <a:r>
+              <a:rPr lang="en-US" sz="1000" dirty="0">
+                <a:solidFill>
+                  <a:srgbClr val="1F2430"/>
+                </a:solidFill>
+                <a:latin typeface="Calibri" pitchFamily="34" charset="0"/>
+                <a:ea typeface="Calibri" pitchFamily="34" charset="-122"/>
+                <a:cs typeface="Calibri" pitchFamily="34" charset="-120"/>
+              </a:rPr>
+              <a:t>plugin build</a:t>
+            </a:r>
+            <a:endParaRPr lang="en-US" sz="1000" dirty="0"/>
+          </a:p>
+        </p:txBody>
+      </p:sp>
+      <p:sp>
+        <p:nvSpPr>
+          <p:cNvPr id="112" name="Shape 110"/>
+          <p:cNvSpPr/>
+          <p:nvPr/>
+        </p:nvSpPr>
+        <p:spPr>
+          <a:xfrm>
+            <a:off x="457200" y="5138928"/>
+            <a:ext cx="483616" cy="256032"/>
+          </a:xfrm>
+          <a:prstGeom prst="roundRect">
+            <a:avLst>
+              <a:gd name="adj" fmla="val 50000"/>
+            </a:avLst>
+          </a:prstGeom>
+          <a:solidFill>
+            <a:srgbClr val="F3F5F8"/>
+          </a:solidFill>
+          <a:ln w="12700">
+            <a:solidFill>
+              <a:srgbClr val="F3F5F8"/>
+            </a:solidFill>
+            <a:prstDash val="solid"/>
+          </a:ln>
+        </p:spPr>
+      </p:sp>
+      <p:sp>
+        <p:nvSpPr>
+          <p:cNvPr id="113" name="Text 111"/>
+          <p:cNvSpPr txBox="1"/>
+          <p:nvPr/>
+        </p:nvSpPr>
+        <p:spPr>
+          <a:xfrm>
+            <a:off x="457200" y="5138928"/>
+            <a:ext cx="483616" cy="256032"/>
+          </a:xfrm>
+          <a:prstGeom prst="rect">
+            <a:avLst/>
+          </a:prstGeom>
+          <a:noFill/>
+          <a:ln/>
+        </p:spPr>
+        <p:txBody>
+          <a:bodyPr wrap="square" lIns="0" tIns="0" rIns="0" bIns="0" rtlCol="0" anchor="ctr"/>
+          <a:lstStyle/>
+          <a:p>
+            <a:pPr algn="ctr" indent="0" marL="0">
+              <a:buNone/>
+            </a:pPr>
+            <a:r>
+              <a:rPr lang="en-US" sz="1000" dirty="0">
+                <a:solidFill>
+                  <a:srgbClr val="1F2430"/>
+                </a:solidFill>
+                <a:latin typeface="Calibri" pitchFamily="34" charset="0"/>
+                <a:ea typeface="Calibri" pitchFamily="34" charset="-122"/>
+                <a:cs typeface="Calibri" pitchFamily="34" charset="-120"/>
+              </a:rPr>
+              <a:t>hook</a:t>
+            </a:r>
+            <a:endParaRPr lang="en-US" sz="1000" dirty="0"/>
+          </a:p>
+        </p:txBody>
+      </p:sp>
+      <p:sp>
+        <p:nvSpPr>
+          <p:cNvPr id="114" name="Shape 112"/>
+          <p:cNvSpPr/>
+          <p:nvPr/>
+        </p:nvSpPr>
+        <p:spPr>
+          <a:xfrm>
+            <a:off x="1032256" y="5138928"/>
+            <a:ext cx="747776" cy="256032"/>
+          </a:xfrm>
+          <a:prstGeom prst="roundRect">
+            <a:avLst>
+              <a:gd name="adj" fmla="val 50000"/>
+            </a:avLst>
+          </a:prstGeom>
+          <a:solidFill>
+            <a:srgbClr val="F3F5F8"/>
+          </a:solidFill>
+          <a:ln w="12700">
+            <a:solidFill>
+              <a:srgbClr val="F3F5F8"/>
+            </a:solidFill>
+            <a:prstDash val="solid"/>
+          </a:ln>
+        </p:spPr>
+      </p:sp>
+      <p:sp>
+        <p:nvSpPr>
+          <p:cNvPr id="115" name="Text 113"/>
+          <p:cNvSpPr txBox="1"/>
+          <p:nvPr/>
+        </p:nvSpPr>
+        <p:spPr>
+          <a:xfrm>
+            <a:off x="1032256" y="5138928"/>
             <a:ext cx="747776" cy="256032"/>
           </a:xfrm>
           <a:prstGeom prst="rect">
@@ -22808,7 +23151,7 @@
                 <a:ea typeface="Courier New" pitchFamily="34" charset="-122"/>
                 <a:cs typeface="Courier New" pitchFamily="34" charset="-120"/>
               </a:rPr>
-              <a:t>  sdlc 0.6.4, license: community</a:t>
+              <a:t>  sdlc 0.7.0, license: community</a:t>
             </a:r>
             <a:endParaRPr lang="en-US" sz="1000" dirty="0"/>
           </a:p>
@@ -22859,7 +23202,7 @@
                 <a:ea typeface="Courier New" pitchFamily="34" charset="-122"/>
                 <a:cs typeface="Courier New" pitchFamily="34" charset="-120"/>
               </a:rPr>
-              <a:t>  files: 55 created, 0 updated, 0</a:t>
+              <a:t>  files: 61 created, 0 updated, 0</a:t>
             </a:r>
             <a:endParaRPr lang="en-US" sz="1000" dirty="0"/>
           </a:p>
@@ -24171,7 +24514,7 @@
         <p:spPr>
           <a:xfrm>
             <a:off x="6634480" y="6053328"/>
-            <a:ext cx="615696" cy="256032"/>
+            <a:ext cx="549656" cy="256032"/>
           </a:xfrm>
           <a:prstGeom prst="roundRect">
             <a:avLst>
@@ -24198,6 +24541,72 @@
         <p:spPr>
           <a:xfrm>
             <a:off x="6634480" y="6053328"/>
+            <a:ext cx="549656" cy="256032"/>
+          </a:xfrm>
+          <a:prstGeom prst="rect">
+            <a:avLst/>
+          </a:prstGeom>
+          <a:noFill/>
+          <a:ln/>
+        </p:spPr>
+        <p:txBody>
+          <a:bodyPr wrap="square" lIns="0" tIns="0" rIns="0" bIns="0" rtlCol="0" anchor="ctr"/>
+          <a:lstStyle/>
+          <a:p>
+            <a:pPr algn="ctr" indent="0" marL="0">
+              <a:buNone/>
+            </a:pPr>
+            <a:r>
+              <a:rPr lang="en-US" sz="1000" dirty="0">
+                <a:solidFill>
+                  <a:srgbClr val="5B6475"/>
+                </a:solidFill>
+                <a:latin typeface="Calibri" pitchFamily="34" charset="0"/>
+                <a:ea typeface="Calibri" pitchFamily="34" charset="-122"/>
+                <a:cs typeface="Calibri" pitchFamily="34" charset="-120"/>
+              </a:rPr>
+              <a:t>adopt</a:t>
+            </a:r>
+            <a:endParaRPr lang="en-US" sz="1000" dirty="0"/>
+          </a:p>
+        </p:txBody>
+      </p:sp>
+      <p:sp>
+        <p:nvSpPr>
+          <p:cNvPr id="38" name="Shape 36"/>
+          <p:cNvSpPr/>
+          <p:nvPr/>
+        </p:nvSpPr>
+        <p:spPr>
+          <a:xfrm>
+            <a:off x="7275576" y="6053328"/>
+            <a:ext cx="615696" cy="256032"/>
+          </a:xfrm>
+          <a:prstGeom prst="roundRect">
+            <a:avLst>
+              <a:gd name="adj" fmla="val 50000"/>
+            </a:avLst>
+          </a:prstGeom>
+          <a:solidFill>
+            <a:srgbClr val="F3F5F8"/>
+          </a:solidFill>
+          <a:ln w="12700">
+            <a:solidFill>
+              <a:srgbClr val="F3F5F8"/>
+            </a:solidFill>
+            <a:prstDash val="solid"/>
+          </a:ln>
+        </p:spPr>
+      </p:sp>
+      <p:sp>
+        <p:nvSpPr>
+          <p:cNvPr id="39" name="Text 37"/>
+          <p:cNvSpPr txBox="1"/>
+          <p:nvPr/>
+        </p:nvSpPr>
+        <p:spPr>
+          <a:xfrm>
+            <a:off x="7275576" y="6053328"/>
             <a:ext cx="615696" cy="256032"/>
           </a:xfrm>
           <a:prstGeom prst="rect">
@@ -26177,7 +26586,7 @@
                 <a:ea typeface="Calibri" pitchFamily="34" charset="-122"/>
                 <a:cs typeface="Calibri" pitchFamily="34" charset="-120"/>
               </a:rPr>
-              <a:t>backlog drop</a:t>
+              <a:t>backlog edit</a:t>
             </a:r>
             <a:endParaRPr lang="en-US" sz="1000" dirty="0"/>
           </a:p>
@@ -26219,6 +26628,72 @@
         <p:spPr>
           <a:xfrm>
             <a:off x="6851904" y="6053328"/>
+            <a:ext cx="1011936" cy="256032"/>
+          </a:xfrm>
+          <a:prstGeom prst="rect">
+            <a:avLst/>
+          </a:prstGeom>
+          <a:noFill/>
+          <a:ln/>
+        </p:spPr>
+        <p:txBody>
+          <a:bodyPr wrap="square" lIns="0" tIns="0" rIns="0" bIns="0" rtlCol="0" anchor="ctr"/>
+          <a:lstStyle/>
+          <a:p>
+            <a:pPr algn="ctr" indent="0" marL="0">
+              <a:buNone/>
+            </a:pPr>
+            <a:r>
+              <a:rPr lang="en-US" sz="1000" dirty="0">
+                <a:solidFill>
+                  <a:srgbClr val="5B6475"/>
+                </a:solidFill>
+                <a:latin typeface="Calibri" pitchFamily="34" charset="0"/>
+                <a:ea typeface="Calibri" pitchFamily="34" charset="-122"/>
+                <a:cs typeface="Calibri" pitchFamily="34" charset="-120"/>
+              </a:rPr>
+              <a:t>backlog drop</a:t>
+            </a:r>
+            <a:endParaRPr lang="en-US" sz="1000" dirty="0"/>
+          </a:p>
+        </p:txBody>
+      </p:sp>
+      <p:sp>
+        <p:nvSpPr>
+          <p:cNvPr id="36" name="Shape 34"/>
+          <p:cNvSpPr/>
+          <p:nvPr/>
+        </p:nvSpPr>
+        <p:spPr>
+          <a:xfrm>
+            <a:off x="7955280" y="6053328"/>
+            <a:ext cx="1011936" cy="256032"/>
+          </a:xfrm>
+          <a:prstGeom prst="roundRect">
+            <a:avLst>
+              <a:gd name="adj" fmla="val 50000"/>
+            </a:avLst>
+          </a:prstGeom>
+          <a:solidFill>
+            <a:srgbClr val="F3F5F8"/>
+          </a:solidFill>
+          <a:ln w="12700">
+            <a:solidFill>
+              <a:srgbClr val="F3F5F8"/>
+            </a:solidFill>
+            <a:prstDash val="solid"/>
+          </a:ln>
+        </p:spPr>
+      </p:sp>
+      <p:sp>
+        <p:nvSpPr>
+          <p:cNvPr id="37" name="Text 35"/>
+          <p:cNvSpPr txBox="1"/>
+          <p:nvPr/>
+        </p:nvSpPr>
+        <p:spPr>
+          <a:xfrm>
+            <a:off x="7955280" y="6053328"/>
             <a:ext cx="1011936" cy="256032"/>
           </a:xfrm>
           <a:prstGeom prst="rect">

--- a/docs/demo/sdlc-calculator-demo.en.pptx
+++ b/docs/demo/sdlc-calculator-demo.en.pptx
@@ -6566,7 +6566,7 @@
                 <a:ea typeface="Courier New" pitchFamily="34" charset="-122"/>
                 <a:cs typeface="Courier New" pitchFamily="34" charset="-120"/>
               </a:rPr>
-              <a:t>  code-owner (6a48421629cb)</a:t>
+              <a:t>  code-owner (a2e7bf94c267)</a:t>
             </a:r>
             <a:endParaRPr lang="en-US" sz="1000" dirty="0"/>
           </a:p>
@@ -7247,7 +7247,7 @@
                 <a:ea typeface="Courier New" pitchFamily="34" charset="-122"/>
                 <a:cs typeface="Courier New" pitchFamily="34" charset="-120"/>
               </a:rPr>
-              <a:t>  release-manager (6a48421629cb)</a:t>
+              <a:t>  release-manager (a2e7bf94c267)</a:t>
             </a:r>
             <a:endParaRPr lang="en-US" sz="1000" dirty="0"/>
           </a:p>
@@ -7547,7 +7547,7 @@
                 <a:ea typeface="Courier New" pitchFamily="34" charset="-122"/>
                 <a:cs typeface="Courier New" pitchFamily="34" charset="-120"/>
               </a:rPr>
-              <a:t>✓ basic-arithmetic/intent alice valid d92f764e</a:t>
+              <a:t>✓ basic-arithmetic/intent alice valid b5854efb</a:t>
             </a:r>
             <a:endParaRPr lang="en-US" sz="1000" dirty="0"/>
           </a:p>
@@ -7564,7 +7564,7 @@
                 <a:ea typeface="Courier New" pitchFamily="34" charset="-122"/>
                 <a:cs typeface="Courier New" pitchFamily="34" charset="-120"/>
               </a:rPr>
-              <a:t>✓ basic-arithmetic/spec alice valid d92f764e</a:t>
+              <a:t>✓ basic-arithmetic/spec alice valid b5854efb</a:t>
             </a:r>
             <a:endParaRPr lang="en-US" sz="1000" dirty="0"/>
           </a:p>
@@ -7581,7 +7581,7 @@
                 <a:ea typeface="Courier New" pitchFamily="34" charset="-122"/>
                 <a:cs typeface="Courier New" pitchFamily="34" charset="-120"/>
               </a:rPr>
-              <a:t>✗ basic-arithmetic/plan bob unsigned 00b2480e</a:t>
+              <a:t>✗ basic-arithmetic/plan bob unsigned d99862f2</a:t>
             </a:r>
             <a:endParaRPr lang="en-US" sz="1000" dirty="0"/>
           </a:p>
@@ -7598,7 +7598,7 @@
                 <a:ea typeface="Courier New" pitchFamily="34" charset="-122"/>
                 <a:cs typeface="Courier New" pitchFamily="34" charset="-120"/>
               </a:rPr>
-              <a:t>✓ basic-arithmetic/review carol valid e72b772d</a:t>
+              <a:t>✓ basic-arithmetic/review carol valid 2e697d7f</a:t>
             </a:r>
             <a:endParaRPr lang="en-US" sz="1000" dirty="0"/>
           </a:p>
@@ -7615,7 +7615,7 @@
                 <a:ea typeface="Courier New" pitchFamily="34" charset="-122"/>
                 <a:cs typeface="Courier New" pitchFamily="34" charset="-120"/>
               </a:rPr>
-              <a:t>✓ basic-arithmetic/release alice valid c000549d</a:t>
+              <a:t>✓ basic-arithmetic/release alice valid 08d27328</a:t>
             </a:r>
             <a:endParaRPr lang="en-US" sz="1000" dirty="0"/>
           </a:p>
@@ -7632,7 +7632,7 @@
                 <a:ea typeface="Courier New" pitchFamily="34" charset="-122"/>
                 <a:cs typeface="Courier New" pitchFamily="34" charset="-120"/>
               </a:rPr>
-              <a:t>✓ openspec/roles.yaml alice@calc.example valid 2539b36f</a:t>
+              <a:t>✓ openspec/roles.yaml alice@calc.example valid 1765cc16</a:t>
             </a:r>
             <a:endParaRPr lang="en-US" sz="1000" dirty="0"/>
           </a:p>
@@ -13671,7 +13671,7 @@
                 <a:ea typeface="Courier New" pitchFamily="34" charset="-122"/>
                 <a:cs typeface="Courier New" pitchFamily="34" charset="-120"/>
               </a:rPr>
-              <a:t>  archived) · sdlc 0.7.0, license:</a:t>
+              <a:t>  archived) · sdlc 0.7.1, license:</a:t>
             </a:r>
             <a:endParaRPr lang="en-US" sz="1000" dirty="0"/>
           </a:p>
@@ -13807,7 +13807,7 @@
                 <a:ea typeface="Courier New" pitchFamily="34" charset="-122"/>
                 <a:cs typeface="Courier New" pitchFamily="34" charset="-120"/>
               </a:rPr>
-              <a:t>  recorded with sdlc 0.7.0; licenses:</a:t>
+              <a:t>  recorded with sdlc 0.7.1; licenses:</a:t>
             </a:r>
             <a:endParaRPr lang="en-US" sz="1000" dirty="0"/>
           </a:p>
@@ -14124,7 +14124,7 @@
                 <a:ea typeface="Courier New" pitchFamily="34" charset="-122"/>
                 <a:cs typeface="Courier New" pitchFamily="34" charset="-120"/>
               </a:rPr>
-              <a:t>2026-10-05T08:25:09.774Z  deferred.added   </a:t>
+              <a:t>2026-10-05T11:04:50.489Z  deferred.added   </a:t>
             </a:r>
             <a:endParaRPr lang="en-US" sz="1000" dirty="0"/>
           </a:p>
@@ -14175,7 +14175,7 @@
                 <a:ea typeface="Courier New" pitchFamily="34" charset="-122"/>
                 <a:cs typeface="Courier New" pitchFamily="34" charset="-120"/>
               </a:rPr>
-              <a:t>  shows an error [sdlc 0.7.0 · community]</a:t>
+              <a:t>  shows an error [sdlc 0.7.1 · community]</a:t>
             </a:r>
             <a:endParaRPr lang="en-US" sz="1000" dirty="0"/>
           </a:p>
@@ -14192,7 +14192,7 @@
                 <a:ea typeface="Courier New" pitchFamily="34" charset="-122"/>
                 <a:cs typeface="Courier New" pitchFamily="34" charset="-120"/>
               </a:rPr>
-              <a:t>2026-10-05T08:25:15.863Z  gate.review.appro</a:t>
+              <a:t>2026-10-05T11:04:56.119Z  gate.review.appro</a:t>
             </a:r>
             <a:endParaRPr lang="en-US" sz="1000" dirty="0"/>
           </a:p>
@@ -14243,7 +14243,7 @@
                 <a:ea typeface="Courier New" pitchFamily="34" charset="-122"/>
                 <a:cs typeface="Courier New" pitchFamily="34" charset="-120"/>
               </a:rPr>
-              <a:t>  [sdlc 0.7.0 · community]</a:t>
+              <a:t>  [sdlc 0.7.1 · community]</a:t>
             </a:r>
             <a:endParaRPr lang="en-US" sz="1000" dirty="0"/>
           </a:p>
@@ -14260,7 +14260,7 @@
                 <a:ea typeface="Courier New" pitchFamily="34" charset="-122"/>
                 <a:cs typeface="Courier New" pitchFamily="34" charset="-120"/>
               </a:rPr>
-              <a:t>2026-10-05T08:25:18.850Z  gate.release.appr</a:t>
+              <a:t>2026-10-05T11:04:58.990Z  gate.release.appr</a:t>
             </a:r>
             <a:endParaRPr lang="en-US" sz="1000" dirty="0"/>
           </a:p>
@@ -14311,7 +14311,7 @@
                 <a:ea typeface="Courier New" pitchFamily="34" charset="-122"/>
                 <a:cs typeface="Courier New" pitchFamily="34" charset="-120"/>
               </a:rPr>
-              <a:t>  release-manager [sdlc 0.7.0 · community]</a:t>
+              <a:t>  release-manager [sdlc 0.7.1 · community]</a:t>
             </a:r>
             <a:endParaRPr lang="en-US" sz="1000" dirty="0"/>
           </a:p>
@@ -14328,7 +14328,7 @@
                 <a:ea typeface="Courier New" pitchFamily="34" charset="-122"/>
                 <a:cs typeface="Courier New" pitchFamily="34" charset="-120"/>
               </a:rPr>
-              <a:t>2026-10-05T08:25:25.694Z  change.archived  </a:t>
+              <a:t>2026-10-05T11:05:05.536Z  change.archived  </a:t>
             </a:r>
             <a:endParaRPr lang="en-US" sz="1000" dirty="0"/>
           </a:p>
@@ -20470,6 +20470,40 @@
             </a:r>
             <a:endParaRPr lang="en-US" sz="1000" dirty="0"/>
           </a:p>
+          <a:p>
+            <a:pPr indent="0" marL="0">
+              <a:buNone/>
+            </a:pPr>
+            <a:r>
+              <a:rPr lang="en-US" sz="1000" dirty="0">
+                <a:solidFill>
+                  <a:srgbClr val="E8EEF2"/>
+                </a:solidFill>
+                <a:latin typeface="Courier New" pitchFamily="34" charset="0"/>
+                <a:ea typeface="Courier New" pitchFamily="34" charset="-122"/>
+                <a:cs typeface="Courier New" pitchFamily="34" charset="-120"/>
+              </a:rPr>
+              <a:t>fix: Run it yourself in your own terminal, not in the agent chat (a</a:t>
+            </a:r>
+            <a:endParaRPr lang="en-US" sz="1000" dirty="0"/>
+          </a:p>
+          <a:p>
+            <a:pPr indent="0" marL="0">
+              <a:buNone/>
+            </a:pPr>
+            <a:r>
+              <a:rPr lang="en-US" sz="1000" dirty="0">
+                <a:solidFill>
+                  <a:srgbClr val="E8EEF2"/>
+                </a:solidFill>
+                <a:latin typeface="Courier New" pitchFamily="34" charset="0"/>
+                <a:ea typeface="Courier New" pitchFamily="34" charset="-122"/>
+                <a:cs typeface="Courier New" pitchFamily="34" charset="-120"/>
+              </a:rPr>
+              <a:t>  `!` command there runs in the agent's shell): sdlc roles migrate</a:t>
+            </a:r>
+            <a:endParaRPr lang="en-US" sz="1000" dirty="0"/>
+          </a:p>
         </p:txBody>
       </p:sp>
       <p:sp>
@@ -23151,7 +23185,7 @@
                 <a:ea typeface="Courier New" pitchFamily="34" charset="-122"/>
                 <a:cs typeface="Courier New" pitchFamily="34" charset="-120"/>
               </a:rPr>
-              <a:t>  sdlc 0.7.0, license: community</a:t>
+              <a:t>  sdlc 0.7.1, license: community</a:t>
             </a:r>
             <a:endParaRPr lang="en-US" sz="1000" dirty="0"/>
           </a:p>
@@ -25846,6 +25880,74 @@
             </a:r>
             <a:endParaRPr lang="en-US" sz="1000" dirty="0"/>
           </a:p>
+          <a:p>
+            <a:pPr indent="0" marL="0">
+              <a:buNone/>
+            </a:pPr>
+            <a:r>
+              <a:rPr lang="en-US" sz="1000" dirty="0">
+                <a:solidFill>
+                  <a:srgbClr val="E8EEF2"/>
+                </a:solidFill>
+                <a:latin typeface="Courier New" pitchFamily="34" charset="0"/>
+                <a:ea typeface="Courier New" pitchFamily="34" charset="-122"/>
+                <a:cs typeface="Courier New" pitchFamily="34" charset="-120"/>
+              </a:rPr>
+              <a:t>fix: Run it yourself in your own terminal,</a:t>
+            </a:r>
+            <a:endParaRPr lang="en-US" sz="1000" dirty="0"/>
+          </a:p>
+          <a:p>
+            <a:pPr indent="0" marL="0">
+              <a:buNone/>
+            </a:pPr>
+            <a:r>
+              <a:rPr lang="en-US" sz="1000" dirty="0">
+                <a:solidFill>
+                  <a:srgbClr val="E8EEF2"/>
+                </a:solidFill>
+                <a:latin typeface="Courier New" pitchFamily="34" charset="0"/>
+                <a:ea typeface="Courier New" pitchFamily="34" charset="-122"/>
+                <a:cs typeface="Courier New" pitchFamily="34" charset="-120"/>
+              </a:rPr>
+              <a:t>  not in the agent chat (a `!` command</a:t>
+            </a:r>
+            <a:endParaRPr lang="en-US" sz="1000" dirty="0"/>
+          </a:p>
+          <a:p>
+            <a:pPr indent="0" marL="0">
+              <a:buNone/>
+            </a:pPr>
+            <a:r>
+              <a:rPr lang="en-US" sz="1000" dirty="0">
+                <a:solidFill>
+                  <a:srgbClr val="E8EEF2"/>
+                </a:solidFill>
+                <a:latin typeface="Courier New" pitchFamily="34" charset="0"/>
+                <a:ea typeface="Courier New" pitchFamily="34" charset="-122"/>
+                <a:cs typeface="Courier New" pitchFamily="34" charset="-120"/>
+              </a:rPr>
+              <a:t>  there runs in the agent's shell): sdlc</a:t>
+            </a:r>
+            <a:endParaRPr lang="en-US" sz="1000" dirty="0"/>
+          </a:p>
+          <a:p>
+            <a:pPr indent="0" marL="0">
+              <a:buNone/>
+            </a:pPr>
+            <a:r>
+              <a:rPr lang="en-US" sz="1000" dirty="0">
+                <a:solidFill>
+                  <a:srgbClr val="E8EEF2"/>
+                </a:solidFill>
+                <a:latin typeface="Courier New" pitchFamily="34" charset="0"/>
+                <a:ea typeface="Courier New" pitchFamily="34" charset="-122"/>
+                <a:cs typeface="Courier New" pitchFamily="34" charset="-120"/>
+              </a:rPr>
+              <a:t>  backlog move B3 --before B2</a:t>
+            </a:r>
+            <a:endParaRPr lang="en-US" sz="1000" dirty="0"/>
+          </a:p>
         </p:txBody>
       </p:sp>
       <p:sp>
@@ -28525,7 +28627,7 @@
                 <a:ea typeface="Courier New" pitchFamily="34" charset="-122"/>
                 <a:cs typeface="Courier New" pitchFamily="34" charset="-120"/>
               </a:rPr>
-              <a:t>fix: Run it yourself in a terminal outside</a:t>
+              <a:t>fix: Run it yourself in your own terminal,</a:t>
             </a:r>
             <a:endParaRPr lang="en-US" sz="1000" dirty="0"/>
           </a:p>
@@ -28542,7 +28644,41 @@
                 <a:ea typeface="Courier New" pitchFamily="34" charset="-122"/>
                 <a:cs typeface="Courier New" pitchFamily="34" charset="-120"/>
               </a:rPr>
-              <a:t>  the agent.</a:t>
+              <a:t>  not in the agent chat (a `!` command</a:t>
+            </a:r>
+            <a:endParaRPr lang="en-US" sz="1000" dirty="0"/>
+          </a:p>
+          <a:p>
+            <a:pPr indent="0" marL="0">
+              <a:buNone/>
+            </a:pPr>
+            <a:r>
+              <a:rPr lang="en-US" sz="1000" dirty="0">
+                <a:solidFill>
+                  <a:srgbClr val="E8EEF2"/>
+                </a:solidFill>
+                <a:latin typeface="Courier New" pitchFamily="34" charset="0"/>
+                <a:ea typeface="Courier New" pitchFamily="34" charset="-122"/>
+                <a:cs typeface="Courier New" pitchFamily="34" charset="-120"/>
+              </a:rPr>
+              <a:t>  there runs in the agent's shell): sdlc</a:t>
+            </a:r>
+            <a:endParaRPr lang="en-US" sz="1000" dirty="0"/>
+          </a:p>
+          <a:p>
+            <a:pPr indent="0" marL="0">
+              <a:buNone/>
+            </a:pPr>
+            <a:r>
+              <a:rPr lang="en-US" sz="1000" dirty="0">
+                <a:solidFill>
+                  <a:srgbClr val="E8EEF2"/>
+                </a:solidFill>
+                <a:latin typeface="Courier New" pitchFamily="34" charset="0"/>
+                <a:ea typeface="Courier New" pitchFamily="34" charset="-122"/>
+                <a:cs typeface="Courier New" pitchFamily="34" charset="-120"/>
+              </a:rPr>
+              <a:t>  approve intent --change basic-arithmetic</a:t>
             </a:r>
             <a:endParaRPr lang="en-US" sz="1000" dirty="0"/>
           </a:p>

--- a/docs/demo/sdlc-calculator-demo.en.pptx
+++ b/docs/demo/sdlc-calculator-demo.en.pptx
@@ -5018,7 +5018,7 @@
                 <a:ea typeface="Courier New" pitchFamily="34" charset="-122"/>
                 <a:cs typeface="Courier New" pitchFamily="34" charset="-120"/>
               </a:rPr>
-              <a:t>✓ test (1.1s)</a:t>
+              <a:t>✓ test (1.0s)</a:t>
             </a:r>
             <a:endParaRPr lang="en-US" sz="1000" dirty="0"/>
           </a:p>
@@ -6566,7 +6566,7 @@
                 <a:ea typeface="Courier New" pitchFamily="34" charset="-122"/>
                 <a:cs typeface="Courier New" pitchFamily="34" charset="-120"/>
               </a:rPr>
-              <a:t>  code-owner (a2e7bf94c267)</a:t>
+              <a:t>  code-owner (85e76c97d625)</a:t>
             </a:r>
             <a:endParaRPr lang="en-US" sz="1000" dirty="0"/>
           </a:p>
@@ -7247,7 +7247,7 @@
                 <a:ea typeface="Courier New" pitchFamily="34" charset="-122"/>
                 <a:cs typeface="Courier New" pitchFamily="34" charset="-120"/>
               </a:rPr>
-              <a:t>  release-manager (a2e7bf94c267)</a:t>
+              <a:t>  release-manager (85e76c97d625)</a:t>
             </a:r>
             <a:endParaRPr lang="en-US" sz="1000" dirty="0"/>
           </a:p>
@@ -7547,7 +7547,7 @@
                 <a:ea typeface="Courier New" pitchFamily="34" charset="-122"/>
                 <a:cs typeface="Courier New" pitchFamily="34" charset="-120"/>
               </a:rPr>
-              <a:t>✓ basic-arithmetic/intent alice valid b5854efb</a:t>
+              <a:t>✓ basic-arithmetic/intent alice valid adbf5d87</a:t>
             </a:r>
             <a:endParaRPr lang="en-US" sz="1000" dirty="0"/>
           </a:p>
@@ -7564,7 +7564,7 @@
                 <a:ea typeface="Courier New" pitchFamily="34" charset="-122"/>
                 <a:cs typeface="Courier New" pitchFamily="34" charset="-120"/>
               </a:rPr>
-              <a:t>✓ basic-arithmetic/spec alice valid b5854efb</a:t>
+              <a:t>✓ basic-arithmetic/spec alice valid adbf5d87</a:t>
             </a:r>
             <a:endParaRPr lang="en-US" sz="1000" dirty="0"/>
           </a:p>
@@ -7581,7 +7581,7 @@
                 <a:ea typeface="Courier New" pitchFamily="34" charset="-122"/>
                 <a:cs typeface="Courier New" pitchFamily="34" charset="-120"/>
               </a:rPr>
-              <a:t>✗ basic-arithmetic/plan bob unsigned d99862f2</a:t>
+              <a:t>✗ basic-arithmetic/plan bob unsigned 0d7032b7</a:t>
             </a:r>
             <a:endParaRPr lang="en-US" sz="1000" dirty="0"/>
           </a:p>
@@ -7598,7 +7598,7 @@
                 <a:ea typeface="Courier New" pitchFamily="34" charset="-122"/>
                 <a:cs typeface="Courier New" pitchFamily="34" charset="-120"/>
               </a:rPr>
-              <a:t>✓ basic-arithmetic/review carol valid 2e697d7f</a:t>
+              <a:t>✓ basic-arithmetic/review carol valid 126b5c9f</a:t>
             </a:r>
             <a:endParaRPr lang="en-US" sz="1000" dirty="0"/>
           </a:p>
@@ -7615,7 +7615,7 @@
                 <a:ea typeface="Courier New" pitchFamily="34" charset="-122"/>
                 <a:cs typeface="Courier New" pitchFamily="34" charset="-120"/>
               </a:rPr>
-              <a:t>✓ basic-arithmetic/release alice valid 08d27328</a:t>
+              <a:t>✓ basic-arithmetic/release alice valid 65b45c43</a:t>
             </a:r>
             <a:endParaRPr lang="en-US" sz="1000" dirty="0"/>
           </a:p>
@@ -7632,7 +7632,7 @@
                 <a:ea typeface="Courier New" pitchFamily="34" charset="-122"/>
                 <a:cs typeface="Courier New" pitchFamily="34" charset="-120"/>
               </a:rPr>
-              <a:t>✓ openspec/roles.yaml alice@calc.example valid 1765cc16</a:t>
+              <a:t>✓ openspec/roles.yaml alice@calc.example valid b3da9c0c</a:t>
             </a:r>
             <a:endParaRPr lang="en-US" sz="1000" dirty="0"/>
           </a:p>
@@ -13671,7 +13671,7 @@
                 <a:ea typeface="Courier New" pitchFamily="34" charset="-122"/>
                 <a:cs typeface="Courier New" pitchFamily="34" charset="-120"/>
               </a:rPr>
-              <a:t>  archived) · sdlc 0.7.1, license:</a:t>
+              <a:t>  archived) · sdlc 0.7.2, license:</a:t>
             </a:r>
             <a:endParaRPr lang="en-US" sz="1000" dirty="0"/>
           </a:p>
@@ -13807,7 +13807,7 @@
                 <a:ea typeface="Courier New" pitchFamily="34" charset="-122"/>
                 <a:cs typeface="Courier New" pitchFamily="34" charset="-120"/>
               </a:rPr>
-              <a:t>  recorded with sdlc 0.7.1; licenses:</a:t>
+              <a:t>  recorded with sdlc 0.7.2; licenses:</a:t>
             </a:r>
             <a:endParaRPr lang="en-US" sz="1000" dirty="0"/>
           </a:p>
@@ -14090,7 +14090,7 @@
                 <a:ea typeface="Courier New" pitchFamily="34" charset="-122"/>
                 <a:cs typeface="Courier New" pitchFamily="34" charset="-120"/>
               </a:rPr>
-              <a:t>(last 15 of 32 entries; --limit to see</a:t>
+              <a:t>(last 15 of 33 entries; --limit to see</a:t>
             </a:r>
             <a:endParaRPr lang="en-US" sz="1000" dirty="0"/>
           </a:p>
@@ -14124,7 +14124,7 @@
                 <a:ea typeface="Courier New" pitchFamily="34" charset="-122"/>
                 <a:cs typeface="Courier New" pitchFamily="34" charset="-120"/>
               </a:rPr>
-              <a:t>2026-10-05T11:04:50.489Z  deferred.added   </a:t>
+              <a:t>2026-10-05T12:39:34.297Z  deferred.added   </a:t>
             </a:r>
             <a:endParaRPr lang="en-US" sz="1000" dirty="0"/>
           </a:p>
@@ -14175,7 +14175,7 @@
                 <a:ea typeface="Courier New" pitchFamily="34" charset="-122"/>
                 <a:cs typeface="Courier New" pitchFamily="34" charset="-120"/>
               </a:rPr>
-              <a:t>  shows an error [sdlc 0.7.1 · community]</a:t>
+              <a:t>  shows an error [sdlc 0.7.2 · community]</a:t>
             </a:r>
             <a:endParaRPr lang="en-US" sz="1000" dirty="0"/>
           </a:p>
@@ -14192,7 +14192,7 @@
                 <a:ea typeface="Courier New" pitchFamily="34" charset="-122"/>
                 <a:cs typeface="Courier New" pitchFamily="34" charset="-120"/>
               </a:rPr>
-              <a:t>2026-10-05T11:04:56.119Z  gate.review.appro</a:t>
+              <a:t>2026-10-05T12:39:38.980Z  gate.review.appro</a:t>
             </a:r>
             <a:endParaRPr lang="en-US" sz="1000" dirty="0"/>
           </a:p>
@@ -14243,7 +14243,7 @@
                 <a:ea typeface="Courier New" pitchFamily="34" charset="-122"/>
                 <a:cs typeface="Courier New" pitchFamily="34" charset="-120"/>
               </a:rPr>
-              <a:t>  [sdlc 0.7.1 · community]</a:t>
+              <a:t>  [sdlc 0.7.2 · community]</a:t>
             </a:r>
             <a:endParaRPr lang="en-US" sz="1000" dirty="0"/>
           </a:p>
@@ -14260,7 +14260,7 @@
                 <a:ea typeface="Courier New" pitchFamily="34" charset="-122"/>
                 <a:cs typeface="Courier New" pitchFamily="34" charset="-120"/>
               </a:rPr>
-              <a:t>2026-10-05T11:04:58.990Z  gate.release.appr</a:t>
+              <a:t>2026-10-05T12:39:41.022Z  gate.release.appr</a:t>
             </a:r>
             <a:endParaRPr lang="en-US" sz="1000" dirty="0"/>
           </a:p>
@@ -14311,7 +14311,7 @@
                 <a:ea typeface="Courier New" pitchFamily="34" charset="-122"/>
                 <a:cs typeface="Courier New" pitchFamily="34" charset="-120"/>
               </a:rPr>
-              <a:t>  release-manager [sdlc 0.7.1 · community]</a:t>
+              <a:t>  release-manager [sdlc 0.7.2 · community]</a:t>
             </a:r>
             <a:endParaRPr lang="en-US" sz="1000" dirty="0"/>
           </a:p>
@@ -14328,7 +14328,7 @@
                 <a:ea typeface="Courier New" pitchFamily="34" charset="-122"/>
                 <a:cs typeface="Courier New" pitchFamily="34" charset="-120"/>
               </a:rPr>
-              <a:t>2026-10-05T11:05:05.536Z  change.archived  </a:t>
+              <a:t>2026-10-05T12:39:46.317Z  change.archived  </a:t>
             </a:r>
             <a:endParaRPr lang="en-US" sz="1000" dirty="0"/>
           </a:p>
@@ -15061,7 +15061,7 @@
                 <a:ea typeface="Cambria" pitchFamily="34" charset="-122"/>
                 <a:cs typeface="Cambria" pitchFamily="34" charset="-120"/>
               </a:rPr>
-              <a:t>78</a:t>
+              <a:t>79</a:t>
             </a:r>
             <a:endParaRPr lang="en-US" sz="6000" dirty="0"/>
           </a:p>
@@ -15166,7 +15166,7 @@
                 <a:ea typeface="Cambria" pitchFamily="34" charset="-122"/>
                 <a:cs typeface="Cambria" pitchFamily="34" charset="-120"/>
               </a:rPr>
-              <a:t>50</a:t>
+              <a:t>51</a:t>
             </a:r>
             <a:endParaRPr lang="en-US" sz="6000" dirty="0"/>
           </a:p>
@@ -15205,7 +15205,7 @@
                 <a:ea typeface="Calibri" pitchFamily="34" charset="-122"/>
                 <a:cs typeface="Calibri" pitchFamily="34" charset="-120"/>
               </a:rPr>
-              <a:t>of 50 commands</a:t>
+              <a:t>of 51 commands</a:t>
             </a:r>
             <a:endParaRPr lang="en-US" sz="1600" dirty="0"/>
           </a:p>
@@ -15760,7 +15760,7 @@
         <p:spPr>
           <a:xfrm>
             <a:off x="5577840" y="3749040"/>
-            <a:ext cx="945896" cy="256032"/>
+            <a:ext cx="1342136" cy="256032"/>
           </a:xfrm>
           <a:prstGeom prst="roundRect">
             <a:avLst>
@@ -15787,7 +15787,7 @@
         <p:spPr>
           <a:xfrm>
             <a:off x="5577840" y="3749040"/>
-            <a:ext cx="945896" cy="256032"/>
+            <a:ext cx="1342136" cy="256032"/>
           </a:xfrm>
           <a:prstGeom prst="rect">
             <a:avLst/>
@@ -15811,7 +15811,7 @@
                 <a:ea typeface="Calibri" pitchFamily="34" charset="-122"/>
                 <a:cs typeface="Calibri" pitchFamily="34" charset="-120"/>
               </a:rPr>
-              <a:t>backlog add</a:t>
+              <a:t>backlog epic edit</a:t>
             </a:r>
             <a:endParaRPr lang="en-US" sz="1000" dirty="0"/>
           </a:p>
@@ -15825,8 +15825,8 @@
         </p:nvSpPr>
         <p:spPr>
           <a:xfrm>
-            <a:off x="6615176" y="3749040"/>
-            <a:ext cx="1011936" cy="256032"/>
+            <a:off x="7011416" y="3749040"/>
+            <a:ext cx="945896" cy="256032"/>
           </a:xfrm>
           <a:prstGeom prst="roundRect">
             <a:avLst>
@@ -15852,8 +15852,8 @@
         </p:nvSpPr>
         <p:spPr>
           <a:xfrm>
-            <a:off x="6615176" y="3749040"/>
-            <a:ext cx="1011936" cy="256032"/>
+            <a:off x="7011416" y="3749040"/>
+            <a:ext cx="945896" cy="256032"/>
           </a:xfrm>
           <a:prstGeom prst="rect">
             <a:avLst/>
@@ -15877,7 +15877,7 @@
                 <a:ea typeface="Calibri" pitchFamily="34" charset="-122"/>
                 <a:cs typeface="Calibri" pitchFamily="34" charset="-120"/>
               </a:rPr>
-              <a:t>backlog edit</a:t>
+              <a:t>backlog add</a:t>
             </a:r>
             <a:endParaRPr lang="en-US" sz="1000" dirty="0"/>
           </a:p>
@@ -15891,7 +15891,7 @@
         </p:nvSpPr>
         <p:spPr>
           <a:xfrm>
-            <a:off x="7718552" y="3749040"/>
+            <a:off x="8048752" y="3749040"/>
             <a:ext cx="1011936" cy="256032"/>
           </a:xfrm>
           <a:prstGeom prst="roundRect">
@@ -15918,7 +15918,7 @@
         </p:nvSpPr>
         <p:spPr>
           <a:xfrm>
-            <a:off x="7718552" y="3749040"/>
+            <a:off x="8048752" y="3749040"/>
             <a:ext cx="1011936" cy="256032"/>
           </a:xfrm>
           <a:prstGeom prst="rect">
@@ -15943,7 +15943,7 @@
                 <a:ea typeface="Calibri" pitchFamily="34" charset="-122"/>
                 <a:cs typeface="Calibri" pitchFamily="34" charset="-120"/>
               </a:rPr>
-              <a:t>backlog list</a:t>
+              <a:t>backlog edit</a:t>
             </a:r>
             <a:endParaRPr lang="en-US" sz="1000" dirty="0"/>
           </a:p>
@@ -15957,7 +15957,7 @@
         </p:nvSpPr>
         <p:spPr>
           <a:xfrm>
-            <a:off x="8821928" y="3749040"/>
+            <a:off x="9152128" y="3749040"/>
             <a:ext cx="1011936" cy="256032"/>
           </a:xfrm>
           <a:prstGeom prst="roundRect">
@@ -15984,7 +15984,7 @@
         </p:nvSpPr>
         <p:spPr>
           <a:xfrm>
-            <a:off x="8821928" y="3749040"/>
+            <a:off x="9152128" y="3749040"/>
             <a:ext cx="1011936" cy="256032"/>
           </a:xfrm>
           <a:prstGeom prst="rect">
@@ -16009,7 +16009,7 @@
                 <a:ea typeface="Calibri" pitchFamily="34" charset="-122"/>
                 <a:cs typeface="Calibri" pitchFamily="34" charset="-120"/>
               </a:rPr>
-              <a:t>backlog next</a:t>
+              <a:t>backlog list</a:t>
             </a:r>
             <a:endParaRPr lang="en-US" sz="1000" dirty="0"/>
           </a:p>
@@ -16023,8 +16023,8 @@
         </p:nvSpPr>
         <p:spPr>
           <a:xfrm>
-            <a:off x="9925304" y="3749040"/>
-            <a:ext cx="1077976" cy="256032"/>
+            <a:off x="10255504" y="3749040"/>
+            <a:ext cx="1011936" cy="256032"/>
           </a:xfrm>
           <a:prstGeom prst="roundRect">
             <a:avLst>
@@ -16050,8 +16050,8 @@
         </p:nvSpPr>
         <p:spPr>
           <a:xfrm>
-            <a:off x="9925304" y="3749040"/>
-            <a:ext cx="1077976" cy="256032"/>
+            <a:off x="10255504" y="3749040"/>
+            <a:ext cx="1011936" cy="256032"/>
           </a:xfrm>
           <a:prstGeom prst="rect">
             <a:avLst/>
@@ -16075,7 +16075,7 @@
                 <a:ea typeface="Calibri" pitchFamily="34" charset="-122"/>
                 <a:cs typeface="Calibri" pitchFamily="34" charset="-120"/>
               </a:rPr>
-              <a:t>backlog start</a:t>
+              <a:t>backlog next</a:t>
             </a:r>
             <a:endParaRPr lang="en-US" sz="1000" dirty="0"/>
           </a:p>
@@ -16090,7 +16090,7 @@
         <p:spPr>
           <a:xfrm>
             <a:off x="457200" y="4096512"/>
-            <a:ext cx="1011936" cy="256032"/>
+            <a:ext cx="1077976" cy="256032"/>
           </a:xfrm>
           <a:prstGeom prst="roundRect">
             <a:avLst>
@@ -16117,7 +16117,7 @@
         <p:spPr>
           <a:xfrm>
             <a:off x="457200" y="4096512"/>
-            <a:ext cx="1011936" cy="256032"/>
+            <a:ext cx="1077976" cy="256032"/>
           </a:xfrm>
           <a:prstGeom prst="rect">
             <a:avLst/>
@@ -16141,7 +16141,7 @@
                 <a:ea typeface="Calibri" pitchFamily="34" charset="-122"/>
                 <a:cs typeface="Calibri" pitchFamily="34" charset="-120"/>
               </a:rPr>
-              <a:t>backlog move</a:t>
+              <a:t>backlog start</a:t>
             </a:r>
             <a:endParaRPr lang="en-US" sz="1000" dirty="0"/>
           </a:p>
@@ -16155,7 +16155,7 @@
         </p:nvSpPr>
         <p:spPr>
           <a:xfrm>
-            <a:off x="1560576" y="4096512"/>
+            <a:off x="1626616" y="4096512"/>
             <a:ext cx="1011936" cy="256032"/>
           </a:xfrm>
           <a:prstGeom prst="roundRect">
@@ -16182,7 +16182,7 @@
         </p:nvSpPr>
         <p:spPr>
           <a:xfrm>
-            <a:off x="1560576" y="4096512"/>
+            <a:off x="1626616" y="4096512"/>
             <a:ext cx="1011936" cy="256032"/>
           </a:xfrm>
           <a:prstGeom prst="rect">
@@ -16207,7 +16207,7 @@
                 <a:ea typeface="Calibri" pitchFamily="34" charset="-122"/>
                 <a:cs typeface="Calibri" pitchFamily="34" charset="-120"/>
               </a:rPr>
-              <a:t>backlog drop</a:t>
+              <a:t>backlog move</a:t>
             </a:r>
             <a:endParaRPr lang="en-US" sz="1000" dirty="0"/>
           </a:p>
@@ -16221,7 +16221,7 @@
         </p:nvSpPr>
         <p:spPr>
           <a:xfrm>
-            <a:off x="2663952" y="4096512"/>
+            <a:off x="2729992" y="4096512"/>
             <a:ext cx="1011936" cy="256032"/>
           </a:xfrm>
           <a:prstGeom prst="roundRect">
@@ -16248,7 +16248,7 @@
         </p:nvSpPr>
         <p:spPr>
           <a:xfrm>
-            <a:off x="2663952" y="4096512"/>
+            <a:off x="2729992" y="4096512"/>
             <a:ext cx="1011936" cy="256032"/>
           </a:xfrm>
           <a:prstGeom prst="rect">
@@ -16273,7 +16273,7 @@
                 <a:ea typeface="Calibri" pitchFamily="34" charset="-122"/>
                 <a:cs typeface="Calibri" pitchFamily="34" charset="-120"/>
               </a:rPr>
-              <a:t>backlog done</a:t>
+              <a:t>backlog drop</a:t>
             </a:r>
             <a:endParaRPr lang="en-US" sz="1000" dirty="0"/>
           </a:p>
@@ -16287,8 +16287,8 @@
         </p:nvSpPr>
         <p:spPr>
           <a:xfrm>
-            <a:off x="3767328" y="4096512"/>
-            <a:ext cx="813816" cy="256032"/>
+            <a:off x="3833368" y="4096512"/>
+            <a:ext cx="1011936" cy="256032"/>
           </a:xfrm>
           <a:prstGeom prst="roundRect">
             <a:avLst>
@@ -16314,8 +16314,8 @@
         </p:nvSpPr>
         <p:spPr>
           <a:xfrm>
-            <a:off x="3767328" y="4096512"/>
-            <a:ext cx="813816" cy="256032"/>
+            <a:off x="3833368" y="4096512"/>
+            <a:ext cx="1011936" cy="256032"/>
           </a:xfrm>
           <a:prstGeom prst="rect">
             <a:avLst/>
@@ -16339,7 +16339,7 @@
                 <a:ea typeface="Calibri" pitchFamily="34" charset="-122"/>
                 <a:cs typeface="Calibri" pitchFamily="34" charset="-120"/>
               </a:rPr>
-              <a:t>defer add</a:t>
+              <a:t>backlog done</a:t>
             </a:r>
             <a:endParaRPr lang="en-US" sz="1000" dirty="0"/>
           </a:p>
@@ -16353,8 +16353,8 @@
         </p:nvSpPr>
         <p:spPr>
           <a:xfrm>
-            <a:off x="4672584" y="4096512"/>
-            <a:ext cx="879856" cy="256032"/>
+            <a:off x="4936744" y="4096512"/>
+            <a:ext cx="813816" cy="256032"/>
           </a:xfrm>
           <a:prstGeom prst="roundRect">
             <a:avLst>
@@ -16380,8 +16380,8 @@
         </p:nvSpPr>
         <p:spPr>
           <a:xfrm>
-            <a:off x="4672584" y="4096512"/>
-            <a:ext cx="879856" cy="256032"/>
+            <a:off x="4936744" y="4096512"/>
+            <a:ext cx="813816" cy="256032"/>
           </a:xfrm>
           <a:prstGeom prst="rect">
             <a:avLst/>
@@ -16405,7 +16405,7 @@
                 <a:ea typeface="Calibri" pitchFamily="34" charset="-122"/>
                 <a:cs typeface="Calibri" pitchFamily="34" charset="-120"/>
               </a:rPr>
-              <a:t>defer list</a:t>
+              <a:t>defer add</a:t>
             </a:r>
             <a:endParaRPr lang="en-US" sz="1000" dirty="0"/>
           </a:p>
@@ -16419,8 +16419,8 @@
         </p:nvSpPr>
         <p:spPr>
           <a:xfrm>
-            <a:off x="5643880" y="4096512"/>
-            <a:ext cx="945896" cy="256032"/>
+            <a:off x="5842000" y="4096512"/>
+            <a:ext cx="879856" cy="256032"/>
           </a:xfrm>
           <a:prstGeom prst="roundRect">
             <a:avLst>
@@ -16446,8 +16446,8 @@
         </p:nvSpPr>
         <p:spPr>
           <a:xfrm>
-            <a:off x="5643880" y="4096512"/>
-            <a:ext cx="945896" cy="256032"/>
+            <a:off x="5842000" y="4096512"/>
+            <a:ext cx="879856" cy="256032"/>
           </a:xfrm>
           <a:prstGeom prst="rect">
             <a:avLst/>
@@ -16471,7 +16471,7 @@
                 <a:ea typeface="Calibri" pitchFamily="34" charset="-122"/>
                 <a:cs typeface="Calibri" pitchFamily="34" charset="-120"/>
               </a:rPr>
-              <a:t>defer close</a:t>
+              <a:t>defer list</a:t>
             </a:r>
             <a:endParaRPr lang="en-US" sz="1000" dirty="0"/>
           </a:p>
@@ -16485,8 +16485,8 @@
         </p:nvSpPr>
         <p:spPr>
           <a:xfrm>
-            <a:off x="6681216" y="4096512"/>
-            <a:ext cx="1011936" cy="256032"/>
+            <a:off x="6813296" y="4096512"/>
+            <a:ext cx="945896" cy="256032"/>
           </a:xfrm>
           <a:prstGeom prst="roundRect">
             <a:avLst>
@@ -16512,8 +16512,8 @@
         </p:nvSpPr>
         <p:spPr>
           <a:xfrm>
-            <a:off x="6681216" y="4096512"/>
-            <a:ext cx="1011936" cy="256032"/>
+            <a:off x="6813296" y="4096512"/>
+            <a:ext cx="945896" cy="256032"/>
           </a:xfrm>
           <a:prstGeom prst="rect">
             <a:avLst/>
@@ -16537,7 +16537,7 @@
                 <a:ea typeface="Calibri" pitchFamily="34" charset="-122"/>
                 <a:cs typeface="Calibri" pitchFamily="34" charset="-120"/>
               </a:rPr>
-              <a:t>layout check</a:t>
+              <a:t>defer close</a:t>
             </a:r>
             <a:endParaRPr lang="en-US" sz="1000" dirty="0"/>
           </a:p>
@@ -16551,8 +16551,8 @@
         </p:nvSpPr>
         <p:spPr>
           <a:xfrm>
-            <a:off x="7784592" y="4096512"/>
-            <a:ext cx="1210056" cy="256032"/>
+            <a:off x="7850632" y="4096512"/>
+            <a:ext cx="1011936" cy="256032"/>
           </a:xfrm>
           <a:prstGeom prst="roundRect">
             <a:avLst>
@@ -16578,8 +16578,8 @@
         </p:nvSpPr>
         <p:spPr>
           <a:xfrm>
-            <a:off x="7784592" y="4096512"/>
-            <a:ext cx="1210056" cy="256032"/>
+            <a:off x="7850632" y="4096512"/>
+            <a:ext cx="1011936" cy="256032"/>
           </a:xfrm>
           <a:prstGeom prst="rect">
             <a:avLst/>
@@ -16603,7 +16603,7 @@
                 <a:ea typeface="Calibri" pitchFamily="34" charset="-122"/>
                 <a:cs typeface="Calibri" pitchFamily="34" charset="-120"/>
               </a:rPr>
-              <a:t>layout scaffold</a:t>
+              <a:t>layout check</a:t>
             </a:r>
             <a:endParaRPr lang="en-US" sz="1000" dirty="0"/>
           </a:p>
@@ -16617,8 +16617,8 @@
         </p:nvSpPr>
         <p:spPr>
           <a:xfrm>
-            <a:off x="9086088" y="4096512"/>
-            <a:ext cx="1011936" cy="256032"/>
+            <a:off x="8954008" y="4096512"/>
+            <a:ext cx="1210056" cy="256032"/>
           </a:xfrm>
           <a:prstGeom prst="roundRect">
             <a:avLst>
@@ -16644,8 +16644,8 @@
         </p:nvSpPr>
         <p:spPr>
           <a:xfrm>
-            <a:off x="9086088" y="4096512"/>
-            <a:ext cx="1011936" cy="256032"/>
+            <a:off x="8954008" y="4096512"/>
+            <a:ext cx="1210056" cy="256032"/>
           </a:xfrm>
           <a:prstGeom prst="rect">
             <a:avLst/>
@@ -16669,7 +16669,7 @@
                 <a:ea typeface="Calibri" pitchFamily="34" charset="-122"/>
                 <a:cs typeface="Calibri" pitchFamily="34" charset="-120"/>
               </a:rPr>
-              <a:t>layout adapt</a:t>
+              <a:t>layout scaffold</a:t>
             </a:r>
             <a:endParaRPr lang="en-US" sz="1000" dirty="0"/>
           </a:p>
@@ -16683,8 +16683,8 @@
         </p:nvSpPr>
         <p:spPr>
           <a:xfrm>
-            <a:off x="10189464" y="4096512"/>
-            <a:ext cx="1144016" cy="256032"/>
+            <a:off x="10255504" y="4096512"/>
+            <a:ext cx="1011936" cy="256032"/>
           </a:xfrm>
           <a:prstGeom prst="roundRect">
             <a:avLst>
@@ -16710,8 +16710,8 @@
         </p:nvSpPr>
         <p:spPr>
           <a:xfrm>
-            <a:off x="10189464" y="4096512"/>
-            <a:ext cx="1144016" cy="256032"/>
+            <a:off x="10255504" y="4096512"/>
+            <a:ext cx="1011936" cy="256032"/>
           </a:xfrm>
           <a:prstGeom prst="rect">
             <a:avLst/>
@@ -16735,7 +16735,7 @@
                 <a:ea typeface="Calibri" pitchFamily="34" charset="-122"/>
                 <a:cs typeface="Calibri" pitchFamily="34" charset="-120"/>
               </a:rPr>
-              <a:t>layout convert</a:t>
+              <a:t>layout adapt</a:t>
             </a:r>
             <a:endParaRPr lang="en-US" sz="1000" dirty="0"/>
           </a:p>
@@ -16750,7 +16750,7 @@
         <p:spPr>
           <a:xfrm>
             <a:off x="457200" y="4443984"/>
-            <a:ext cx="483616" cy="256032"/>
+            <a:ext cx="1144016" cy="256032"/>
           </a:xfrm>
           <a:prstGeom prst="roundRect">
             <a:avLst>
@@ -16777,7 +16777,7 @@
         <p:spPr>
           <a:xfrm>
             <a:off x="457200" y="4443984"/>
-            <a:ext cx="483616" cy="256032"/>
+            <a:ext cx="1144016" cy="256032"/>
           </a:xfrm>
           <a:prstGeom prst="rect">
             <a:avLst/>
@@ -16801,7 +16801,7 @@
                 <a:ea typeface="Calibri" pitchFamily="34" charset="-122"/>
                 <a:cs typeface="Calibri" pitchFamily="34" charset="-120"/>
               </a:rPr>
-              <a:t>init</a:t>
+              <a:t>layout convert</a:t>
             </a:r>
             <a:endParaRPr lang="en-US" sz="1000" dirty="0"/>
           </a:p>
@@ -16815,8 +16815,8 @@
         </p:nvSpPr>
         <p:spPr>
           <a:xfrm>
-            <a:off x="1032256" y="4443984"/>
-            <a:ext cx="615696" cy="256032"/>
+            <a:off x="1692656" y="4443984"/>
+            <a:ext cx="483616" cy="256032"/>
           </a:xfrm>
           <a:prstGeom prst="roundRect">
             <a:avLst>
@@ -16842,8 +16842,8 @@
         </p:nvSpPr>
         <p:spPr>
           <a:xfrm>
-            <a:off x="1032256" y="4443984"/>
-            <a:ext cx="615696" cy="256032"/>
+            <a:off x="1692656" y="4443984"/>
+            <a:ext cx="483616" cy="256032"/>
           </a:xfrm>
           <a:prstGeom prst="rect">
             <a:avLst/>
@@ -16867,7 +16867,7 @@
                 <a:ea typeface="Calibri" pitchFamily="34" charset="-122"/>
                 <a:cs typeface="Calibri" pitchFamily="34" charset="-120"/>
               </a:rPr>
-              <a:t>update</a:t>
+              <a:t>init</a:t>
             </a:r>
             <a:endParaRPr lang="en-US" sz="1000" dirty="0"/>
           </a:p>
@@ -16881,8 +16881,8 @@
         </p:nvSpPr>
         <p:spPr>
           <a:xfrm>
-            <a:off x="1739392" y="4443984"/>
-            <a:ext cx="813816" cy="256032"/>
+            <a:off x="2267712" y="4443984"/>
+            <a:ext cx="615696" cy="256032"/>
           </a:xfrm>
           <a:prstGeom prst="roundRect">
             <a:avLst>
@@ -16908,8 +16908,8 @@
         </p:nvSpPr>
         <p:spPr>
           <a:xfrm>
-            <a:off x="1739392" y="4443984"/>
-            <a:ext cx="813816" cy="256032"/>
+            <a:off x="2267712" y="4443984"/>
+            <a:ext cx="615696" cy="256032"/>
           </a:xfrm>
           <a:prstGeom prst="rect">
             <a:avLst/>
@@ -16933,7 +16933,7 @@
                 <a:ea typeface="Calibri" pitchFamily="34" charset="-122"/>
                 <a:cs typeface="Calibri" pitchFamily="34" charset="-120"/>
               </a:rPr>
-              <a:t>uninstall</a:t>
+              <a:t>update</a:t>
             </a:r>
             <a:endParaRPr lang="en-US" sz="1000" dirty="0"/>
           </a:p>
@@ -16947,8 +16947,8 @@
         </p:nvSpPr>
         <p:spPr>
           <a:xfrm>
-            <a:off x="2644648" y="4443984"/>
-            <a:ext cx="417576" cy="256032"/>
+            <a:off x="2974848" y="4443984"/>
+            <a:ext cx="813816" cy="256032"/>
           </a:xfrm>
           <a:prstGeom prst="roundRect">
             <a:avLst>
@@ -16974,8 +16974,8 @@
         </p:nvSpPr>
         <p:spPr>
           <a:xfrm>
-            <a:off x="2644648" y="4443984"/>
-            <a:ext cx="417576" cy="256032"/>
+            <a:off x="2974848" y="4443984"/>
+            <a:ext cx="813816" cy="256032"/>
           </a:xfrm>
           <a:prstGeom prst="rect">
             <a:avLst/>
@@ -16999,7 +16999,7 @@
                 <a:ea typeface="Calibri" pitchFamily="34" charset="-122"/>
                 <a:cs typeface="Calibri" pitchFamily="34" charset="-120"/>
               </a:rPr>
-              <a:t>new</a:t>
+              <a:t>uninstall</a:t>
             </a:r>
             <a:endParaRPr lang="en-US" sz="1000" dirty="0"/>
           </a:p>
@@ -17013,8 +17013,8 @@
         </p:nvSpPr>
         <p:spPr>
           <a:xfrm>
-            <a:off x="3153664" y="4443984"/>
-            <a:ext cx="1011936" cy="256032"/>
+            <a:off x="3880104" y="4443984"/>
+            <a:ext cx="417576" cy="256032"/>
           </a:xfrm>
           <a:prstGeom prst="roundRect">
             <a:avLst>
@@ -17040,8 +17040,8 @@
         </p:nvSpPr>
         <p:spPr>
           <a:xfrm>
-            <a:off x="3153664" y="4443984"/>
-            <a:ext cx="1011936" cy="256032"/>
+            <a:off x="3880104" y="4443984"/>
+            <a:ext cx="417576" cy="256032"/>
           </a:xfrm>
           <a:prstGeom prst="rect">
             <a:avLst/>
@@ -17065,7 +17065,7 @@
                 <a:ea typeface="Calibri" pitchFamily="34" charset="-122"/>
                 <a:cs typeface="Calibri" pitchFamily="34" charset="-120"/>
               </a:rPr>
-              <a:t>explore list</a:t>
+              <a:t>new</a:t>
             </a:r>
             <a:endParaRPr lang="en-US" sz="1000" dirty="0"/>
           </a:p>
@@ -17079,8 +17079,8 @@
         </p:nvSpPr>
         <p:spPr>
           <a:xfrm>
-            <a:off x="4257040" y="4443984"/>
-            <a:ext cx="945896" cy="256032"/>
+            <a:off x="4389120" y="4443984"/>
+            <a:ext cx="1011936" cy="256032"/>
           </a:xfrm>
           <a:prstGeom prst="roundRect">
             <a:avLst>
@@ -17106,8 +17106,8 @@
         </p:nvSpPr>
         <p:spPr>
           <a:xfrm>
-            <a:off x="4257040" y="4443984"/>
-            <a:ext cx="945896" cy="256032"/>
+            <a:off x="4389120" y="4443984"/>
+            <a:ext cx="1011936" cy="256032"/>
           </a:xfrm>
           <a:prstGeom prst="rect">
             <a:avLst/>
@@ -17131,7 +17131,7 @@
                 <a:ea typeface="Calibri" pitchFamily="34" charset="-122"/>
                 <a:cs typeface="Calibri" pitchFamily="34" charset="-120"/>
               </a:rPr>
-              <a:t>import bmad</a:t>
+              <a:t>explore list</a:t>
             </a:r>
             <a:endParaRPr lang="en-US" sz="1000" dirty="0"/>
           </a:p>
@@ -17145,8 +17145,8 @@
         </p:nvSpPr>
         <p:spPr>
           <a:xfrm>
-            <a:off x="5294376" y="4443984"/>
-            <a:ext cx="615696" cy="256032"/>
+            <a:off x="5492496" y="4443984"/>
+            <a:ext cx="945896" cy="256032"/>
           </a:xfrm>
           <a:prstGeom prst="roundRect">
             <a:avLst>
@@ -17172,8 +17172,8 @@
         </p:nvSpPr>
         <p:spPr>
           <a:xfrm>
-            <a:off x="5294376" y="4443984"/>
-            <a:ext cx="615696" cy="256032"/>
+            <a:off x="5492496" y="4443984"/>
+            <a:ext cx="945896" cy="256032"/>
           </a:xfrm>
           <a:prstGeom prst="rect">
             <a:avLst/>
@@ -17197,7 +17197,7 @@
                 <a:ea typeface="Calibri" pitchFamily="34" charset="-122"/>
                 <a:cs typeface="Calibri" pitchFamily="34" charset="-120"/>
               </a:rPr>
-              <a:t>status</a:t>
+              <a:t>import bmad</a:t>
             </a:r>
             <a:endParaRPr lang="en-US" sz="1000" dirty="0"/>
           </a:p>
@@ -17211,8 +17211,8 @@
         </p:nvSpPr>
         <p:spPr>
           <a:xfrm>
-            <a:off x="6001512" y="4443984"/>
-            <a:ext cx="483616" cy="256032"/>
+            <a:off x="6529832" y="4443984"/>
+            <a:ext cx="615696" cy="256032"/>
           </a:xfrm>
           <a:prstGeom prst="roundRect">
             <a:avLst>
@@ -17238,8 +17238,8 @@
         </p:nvSpPr>
         <p:spPr>
           <a:xfrm>
-            <a:off x="6001512" y="4443984"/>
-            <a:ext cx="483616" cy="256032"/>
+            <a:off x="6529832" y="4443984"/>
+            <a:ext cx="615696" cy="256032"/>
           </a:xfrm>
           <a:prstGeom prst="rect">
             <a:avLst/>
@@ -17263,7 +17263,7 @@
                 <a:ea typeface="Calibri" pitchFamily="34" charset="-122"/>
                 <a:cs typeface="Calibri" pitchFamily="34" charset="-120"/>
               </a:rPr>
-              <a:t>help</a:t>
+              <a:t>status</a:t>
             </a:r>
             <a:endParaRPr lang="en-US" sz="1000" dirty="0"/>
           </a:p>
@@ -17277,8 +17277,8 @@
         </p:nvSpPr>
         <p:spPr>
           <a:xfrm>
-            <a:off x="6576568" y="4443984"/>
-            <a:ext cx="879856" cy="256032"/>
+            <a:off x="7236968" y="4443984"/>
+            <a:ext cx="483616" cy="256032"/>
           </a:xfrm>
           <a:prstGeom prst="roundRect">
             <a:avLst>
@@ -17304,8 +17304,8 @@
         </p:nvSpPr>
         <p:spPr>
           <a:xfrm>
-            <a:off x="6576568" y="4443984"/>
-            <a:ext cx="879856" cy="256032"/>
+            <a:off x="7236968" y="4443984"/>
+            <a:ext cx="483616" cy="256032"/>
           </a:xfrm>
           <a:prstGeom prst="rect">
             <a:avLst/>
@@ -17329,7 +17329,7 @@
                 <a:ea typeface="Calibri" pitchFamily="34" charset="-122"/>
                 <a:cs typeface="Calibri" pitchFamily="34" charset="-120"/>
               </a:rPr>
-              <a:t>statusline</a:t>
+              <a:t>help</a:t>
             </a:r>
             <a:endParaRPr lang="en-US" sz="1000" dirty="0"/>
           </a:p>
@@ -17343,8 +17343,8 @@
         </p:nvSpPr>
         <p:spPr>
           <a:xfrm>
-            <a:off x="7547864" y="4443984"/>
-            <a:ext cx="813816" cy="256032"/>
+            <a:off x="7812024" y="4443984"/>
+            <a:ext cx="879856" cy="256032"/>
           </a:xfrm>
           <a:prstGeom prst="roundRect">
             <a:avLst>
@@ -17370,8 +17370,8 @@
         </p:nvSpPr>
         <p:spPr>
           <a:xfrm>
-            <a:off x="7547864" y="4443984"/>
-            <a:ext cx="813816" cy="256032"/>
+            <a:off x="7812024" y="4443984"/>
+            <a:ext cx="879856" cy="256032"/>
           </a:xfrm>
           <a:prstGeom prst="rect">
             <a:avLst/>
@@ -17395,7 +17395,7 @@
                 <a:ea typeface="Calibri" pitchFamily="34" charset="-122"/>
                 <a:cs typeface="Calibri" pitchFamily="34" charset="-120"/>
               </a:rPr>
-              <a:t>track set</a:t>
+              <a:t>statusline</a:t>
             </a:r>
             <a:endParaRPr lang="en-US" sz="1000" dirty="0"/>
           </a:p>
@@ -17409,8 +17409,8 @@
         </p:nvSpPr>
         <p:spPr>
           <a:xfrm>
-            <a:off x="8453120" y="4443984"/>
-            <a:ext cx="483616" cy="256032"/>
+            <a:off x="8783320" y="4443984"/>
+            <a:ext cx="813816" cy="256032"/>
           </a:xfrm>
           <a:prstGeom prst="roundRect">
             <a:avLst>
@@ -17436,8 +17436,8 @@
         </p:nvSpPr>
         <p:spPr>
           <a:xfrm>
-            <a:off x="8453120" y="4443984"/>
-            <a:ext cx="483616" cy="256032"/>
+            <a:off x="8783320" y="4443984"/>
+            <a:ext cx="813816" cy="256032"/>
           </a:xfrm>
           <a:prstGeom prst="rect">
             <a:avLst/>
@@ -17461,7 +17461,7 @@
                 <a:ea typeface="Calibri" pitchFamily="34" charset="-122"/>
                 <a:cs typeface="Calibri" pitchFamily="34" charset="-120"/>
               </a:rPr>
-              <a:t>next</a:t>
+              <a:t>track set</a:t>
             </a:r>
             <a:endParaRPr lang="en-US" sz="1000" dirty="0"/>
           </a:p>
@@ -17475,8 +17475,8 @@
         </p:nvSpPr>
         <p:spPr>
           <a:xfrm>
-            <a:off x="9028176" y="4443984"/>
-            <a:ext cx="1011936" cy="256032"/>
+            <a:off x="9688576" y="4443984"/>
+            <a:ext cx="483616" cy="256032"/>
           </a:xfrm>
           <a:prstGeom prst="roundRect">
             <a:avLst>
@@ -17502,8 +17502,8 @@
         </p:nvSpPr>
         <p:spPr>
           <a:xfrm>
-            <a:off x="9028176" y="4443984"/>
-            <a:ext cx="1011936" cy="256032"/>
+            <a:off x="9688576" y="4443984"/>
+            <a:ext cx="483616" cy="256032"/>
           </a:xfrm>
           <a:prstGeom prst="rect">
             <a:avLst/>
@@ -17527,7 +17527,7 @@
                 <a:ea typeface="Calibri" pitchFamily="34" charset="-122"/>
                 <a:cs typeface="Calibri" pitchFamily="34" charset="-120"/>
               </a:rPr>
-              <a:t>instructions</a:t>
+              <a:t>next</a:t>
             </a:r>
             <a:endParaRPr lang="en-US" sz="1000" dirty="0"/>
           </a:p>
@@ -17541,8 +17541,8 @@
         </p:nvSpPr>
         <p:spPr>
           <a:xfrm>
-            <a:off x="10131552" y="4443984"/>
-            <a:ext cx="681736" cy="256032"/>
+            <a:off x="10263632" y="4443984"/>
+            <a:ext cx="1011936" cy="256032"/>
           </a:xfrm>
           <a:prstGeom prst="roundRect">
             <a:avLst>
@@ -17568,8 +17568,8 @@
         </p:nvSpPr>
         <p:spPr>
           <a:xfrm>
-            <a:off x="10131552" y="4443984"/>
-            <a:ext cx="681736" cy="256032"/>
+            <a:off x="10263632" y="4443984"/>
+            <a:ext cx="1011936" cy="256032"/>
           </a:xfrm>
           <a:prstGeom prst="rect">
             <a:avLst/>
@@ -17593,7 +17593,7 @@
                 <a:ea typeface="Calibri" pitchFamily="34" charset="-122"/>
                 <a:cs typeface="Calibri" pitchFamily="34" charset="-120"/>
               </a:rPr>
-              <a:t>approve</a:t>
+              <a:t>instructions</a:t>
             </a:r>
             <a:endParaRPr lang="en-US" sz="1000" dirty="0"/>
           </a:p>
@@ -17607,8 +17607,8 @@
         </p:nvSpPr>
         <p:spPr>
           <a:xfrm>
-            <a:off x="10904728" y="4443984"/>
-            <a:ext cx="615696" cy="256032"/>
+            <a:off x="457200" y="4791456"/>
+            <a:ext cx="681736" cy="256032"/>
           </a:xfrm>
           <a:prstGeom prst="roundRect">
             <a:avLst>
@@ -17634,8 +17634,8 @@
         </p:nvSpPr>
         <p:spPr>
           <a:xfrm>
-            <a:off x="10904728" y="4443984"/>
-            <a:ext cx="615696" cy="256032"/>
+            <a:off x="457200" y="4791456"/>
+            <a:ext cx="681736" cy="256032"/>
           </a:xfrm>
           <a:prstGeom prst="rect">
             <a:avLst/>
@@ -17659,7 +17659,7 @@
                 <a:ea typeface="Calibri" pitchFamily="34" charset="-122"/>
                 <a:cs typeface="Calibri" pitchFamily="34" charset="-120"/>
               </a:rPr>
-              <a:t>reject</a:t>
+              <a:t>approve</a:t>
             </a:r>
             <a:endParaRPr lang="en-US" sz="1000" dirty="0"/>
           </a:p>
@@ -17673,8 +17673,8 @@
         </p:nvSpPr>
         <p:spPr>
           <a:xfrm>
-            <a:off x="457200" y="4791456"/>
-            <a:ext cx="549656" cy="256032"/>
+            <a:off x="1230376" y="4791456"/>
+            <a:ext cx="615696" cy="256032"/>
           </a:xfrm>
           <a:prstGeom prst="roundRect">
             <a:avLst>
@@ -17700,8 +17700,8 @@
         </p:nvSpPr>
         <p:spPr>
           <a:xfrm>
-            <a:off x="457200" y="4791456"/>
-            <a:ext cx="549656" cy="256032"/>
+            <a:off x="1230376" y="4791456"/>
+            <a:ext cx="615696" cy="256032"/>
           </a:xfrm>
           <a:prstGeom prst="rect">
             <a:avLst/>
@@ -17725,7 +17725,7 @@
                 <a:ea typeface="Calibri" pitchFamily="34" charset="-122"/>
                 <a:cs typeface="Calibri" pitchFamily="34" charset="-120"/>
               </a:rPr>
-              <a:t>waive</a:t>
+              <a:t>reject</a:t>
             </a:r>
             <a:endParaRPr lang="en-US" sz="1000" dirty="0"/>
           </a:p>
@@ -17739,8 +17739,8 @@
         </p:nvSpPr>
         <p:spPr>
           <a:xfrm>
-            <a:off x="1098296" y="4791456"/>
-            <a:ext cx="1276096" cy="256032"/>
+            <a:off x="1937512" y="4791456"/>
+            <a:ext cx="549656" cy="256032"/>
           </a:xfrm>
           <a:prstGeom prst="roundRect">
             <a:avLst>
@@ -17766,8 +17766,8 @@
         </p:nvSpPr>
         <p:spPr>
           <a:xfrm>
-            <a:off x="1098296" y="4791456"/>
-            <a:ext cx="1276096" cy="256032"/>
+            <a:off x="1937512" y="4791456"/>
+            <a:ext cx="549656" cy="256032"/>
           </a:xfrm>
           <a:prstGeom prst="rect">
             <a:avLst/>
@@ -17791,7 +17791,7 @@
                 <a:ea typeface="Calibri" pitchFamily="34" charset="-122"/>
                 <a:cs typeface="Calibri" pitchFamily="34" charset="-120"/>
               </a:rPr>
-              <a:t>approvals verify</a:t>
+              <a:t>waive</a:t>
             </a:r>
             <a:endParaRPr lang="en-US" sz="1000" dirty="0"/>
           </a:p>
@@ -17805,8 +17805,8 @@
         </p:nvSpPr>
         <p:spPr>
           <a:xfrm>
-            <a:off x="2465832" y="4791456"/>
-            <a:ext cx="549656" cy="256032"/>
+            <a:off x="2578608" y="4791456"/>
+            <a:ext cx="1276096" cy="256032"/>
           </a:xfrm>
           <a:prstGeom prst="roundRect">
             <a:avLst>
@@ -17832,8 +17832,8 @@
         </p:nvSpPr>
         <p:spPr>
           <a:xfrm>
-            <a:off x="2465832" y="4791456"/>
-            <a:ext cx="549656" cy="256032"/>
+            <a:off x="2578608" y="4791456"/>
+            <a:ext cx="1276096" cy="256032"/>
           </a:xfrm>
           <a:prstGeom prst="rect">
             <a:avLst/>
@@ -17857,7 +17857,7 @@
                 <a:ea typeface="Calibri" pitchFamily="34" charset="-122"/>
                 <a:cs typeface="Calibri" pitchFamily="34" charset="-120"/>
               </a:rPr>
-              <a:t>tests</a:t>
+              <a:t>approvals verify</a:t>
             </a:r>
             <a:endParaRPr lang="en-US" sz="1000" dirty="0"/>
           </a:p>
@@ -17871,8 +17871,8 @@
         </p:nvSpPr>
         <p:spPr>
           <a:xfrm>
-            <a:off x="3106928" y="4791456"/>
-            <a:ext cx="615696" cy="256032"/>
+            <a:off x="3946144" y="4791456"/>
+            <a:ext cx="549656" cy="256032"/>
           </a:xfrm>
           <a:prstGeom prst="roundRect">
             <a:avLst>
@@ -17898,8 +17898,8 @@
         </p:nvSpPr>
         <p:spPr>
           <a:xfrm>
-            <a:off x="3106928" y="4791456"/>
-            <a:ext cx="615696" cy="256032"/>
+            <a:off x="3946144" y="4791456"/>
+            <a:ext cx="549656" cy="256032"/>
           </a:xfrm>
           <a:prstGeom prst="rect">
             <a:avLst/>
@@ -17923,7 +17923,7 @@
                 <a:ea typeface="Calibri" pitchFamily="34" charset="-122"/>
                 <a:cs typeface="Calibri" pitchFamily="34" charset="-120"/>
               </a:rPr>
-              <a:t>verify</a:t>
+              <a:t>tests</a:t>
             </a:r>
             <a:endParaRPr lang="en-US" sz="1000" dirty="0"/>
           </a:p>
@@ -17937,7 +17937,7 @@
         </p:nvSpPr>
         <p:spPr>
           <a:xfrm>
-            <a:off x="3814064" y="4791456"/>
+            <a:off x="4587240" y="4791456"/>
             <a:ext cx="615696" cy="256032"/>
           </a:xfrm>
           <a:prstGeom prst="roundRect">
@@ -17964,7 +17964,7 @@
         </p:nvSpPr>
         <p:spPr>
           <a:xfrm>
-            <a:off x="3814064" y="4791456"/>
+            <a:off x="4587240" y="4791456"/>
             <a:ext cx="615696" cy="256032"/>
           </a:xfrm>
           <a:prstGeom prst="rect">
@@ -17989,7 +17989,7 @@
                 <a:ea typeface="Calibri" pitchFamily="34" charset="-122"/>
                 <a:cs typeface="Calibri" pitchFamily="34" charset="-120"/>
               </a:rPr>
-              <a:t>review</a:t>
+              <a:t>verify</a:t>
             </a:r>
             <a:endParaRPr lang="en-US" sz="1000" dirty="0"/>
           </a:p>
@@ -18003,8 +18003,8 @@
         </p:nvSpPr>
         <p:spPr>
           <a:xfrm>
-            <a:off x="4521200" y="4791456"/>
-            <a:ext cx="747776" cy="256032"/>
+            <a:off x="5294376" y="4791456"/>
+            <a:ext cx="615696" cy="256032"/>
           </a:xfrm>
           <a:prstGeom prst="roundRect">
             <a:avLst>
@@ -18030,8 +18030,8 @@
         </p:nvSpPr>
         <p:spPr>
           <a:xfrm>
-            <a:off x="4521200" y="4791456"/>
-            <a:ext cx="747776" cy="256032"/>
+            <a:off x="5294376" y="4791456"/>
+            <a:ext cx="615696" cy="256032"/>
           </a:xfrm>
           <a:prstGeom prst="rect">
             <a:avLst/>
@@ -18055,7 +18055,7 @@
                 <a:ea typeface="Calibri" pitchFamily="34" charset="-122"/>
                 <a:cs typeface="Calibri" pitchFamily="34" charset="-120"/>
               </a:rPr>
-              <a:t>validate</a:t>
+              <a:t>review</a:t>
             </a:r>
             <a:endParaRPr lang="en-US" sz="1000" dirty="0"/>
           </a:p>
@@ -18069,8 +18069,8 @@
         </p:nvSpPr>
         <p:spPr>
           <a:xfrm>
-            <a:off x="5360416" y="4791456"/>
-            <a:ext cx="681736" cy="256032"/>
+            <a:off x="6001512" y="4791456"/>
+            <a:ext cx="747776" cy="256032"/>
           </a:xfrm>
           <a:prstGeom prst="roundRect">
             <a:avLst>
@@ -18096,8 +18096,8 @@
         </p:nvSpPr>
         <p:spPr>
           <a:xfrm>
-            <a:off x="5360416" y="4791456"/>
-            <a:ext cx="681736" cy="256032"/>
+            <a:off x="6001512" y="4791456"/>
+            <a:ext cx="747776" cy="256032"/>
           </a:xfrm>
           <a:prstGeom prst="rect">
             <a:avLst/>
@@ -18121,7 +18121,7 @@
                 <a:ea typeface="Calibri" pitchFamily="34" charset="-122"/>
                 <a:cs typeface="Calibri" pitchFamily="34" charset="-120"/>
               </a:rPr>
-              <a:t>archive</a:t>
+              <a:t>validate</a:t>
             </a:r>
             <a:endParaRPr lang="en-US" sz="1000" dirty="0"/>
           </a:p>
@@ -18135,8 +18135,8 @@
         </p:nvSpPr>
         <p:spPr>
           <a:xfrm>
-            <a:off x="6133592" y="4791456"/>
-            <a:ext cx="549656" cy="256032"/>
+            <a:off x="6840728" y="4791456"/>
+            <a:ext cx="681736" cy="256032"/>
           </a:xfrm>
           <a:prstGeom prst="roundRect">
             <a:avLst>
@@ -18162,8 +18162,8 @@
         </p:nvSpPr>
         <p:spPr>
           <a:xfrm>
-            <a:off x="6133592" y="4791456"/>
-            <a:ext cx="549656" cy="256032"/>
+            <a:off x="6840728" y="4791456"/>
+            <a:ext cx="681736" cy="256032"/>
           </a:xfrm>
           <a:prstGeom prst="rect">
             <a:avLst/>
@@ -18187,7 +18187,7 @@
                 <a:ea typeface="Calibri" pitchFamily="34" charset="-122"/>
                 <a:cs typeface="Calibri" pitchFamily="34" charset="-120"/>
               </a:rPr>
-              <a:t>audit</a:t>
+              <a:t>archive</a:t>
             </a:r>
             <a:endParaRPr lang="en-US" sz="1000" dirty="0"/>
           </a:p>
@@ -18201,8 +18201,8 @@
         </p:nvSpPr>
         <p:spPr>
           <a:xfrm>
-            <a:off x="6774688" y="4791456"/>
-            <a:ext cx="615696" cy="256032"/>
+            <a:off x="7613904" y="4791456"/>
+            <a:ext cx="549656" cy="256032"/>
           </a:xfrm>
           <a:prstGeom prst="roundRect">
             <a:avLst>
@@ -18228,8 +18228,8 @@
         </p:nvSpPr>
         <p:spPr>
           <a:xfrm>
-            <a:off x="6774688" y="4791456"/>
-            <a:ext cx="615696" cy="256032"/>
+            <a:off x="7613904" y="4791456"/>
+            <a:ext cx="549656" cy="256032"/>
           </a:xfrm>
           <a:prstGeom prst="rect">
             <a:avLst/>
@@ -18253,7 +18253,7 @@
                 <a:ea typeface="Calibri" pitchFamily="34" charset="-122"/>
                 <a:cs typeface="Calibri" pitchFamily="34" charset="-120"/>
               </a:rPr>
-              <a:t>report</a:t>
+              <a:t>audit</a:t>
             </a:r>
             <a:endParaRPr lang="en-US" sz="1000" dirty="0"/>
           </a:p>
@@ -18267,8 +18267,8 @@
         </p:nvSpPr>
         <p:spPr>
           <a:xfrm>
-            <a:off x="7481824" y="4791456"/>
-            <a:ext cx="813816" cy="256032"/>
+            <a:off x="8255000" y="4791456"/>
+            <a:ext cx="615696" cy="256032"/>
           </a:xfrm>
           <a:prstGeom prst="roundRect">
             <a:avLst>
@@ -18294,8 +18294,8 @@
         </p:nvSpPr>
         <p:spPr>
           <a:xfrm>
-            <a:off x="7481824" y="4791456"/>
-            <a:ext cx="813816" cy="256032"/>
+            <a:off x="8255000" y="4791456"/>
+            <a:ext cx="615696" cy="256032"/>
           </a:xfrm>
           <a:prstGeom prst="rect">
             <a:avLst/>
@@ -18319,7 +18319,7 @@
                 <a:ea typeface="Calibri" pitchFamily="34" charset="-122"/>
                 <a:cs typeface="Calibri" pitchFamily="34" charset="-120"/>
               </a:rPr>
-              <a:t>dashboard</a:t>
+              <a:t>report</a:t>
             </a:r>
             <a:endParaRPr lang="en-US" sz="1000" dirty="0"/>
           </a:p>
@@ -18333,8 +18333,8 @@
         </p:nvSpPr>
         <p:spPr>
           <a:xfrm>
-            <a:off x="8387080" y="4791456"/>
-            <a:ext cx="417576" cy="256032"/>
+            <a:off x="8962136" y="4791456"/>
+            <a:ext cx="813816" cy="256032"/>
           </a:xfrm>
           <a:prstGeom prst="roundRect">
             <a:avLst>
@@ -18360,8 +18360,8 @@
         </p:nvSpPr>
         <p:spPr>
           <a:xfrm>
-            <a:off x="8387080" y="4791456"/>
-            <a:ext cx="417576" cy="256032"/>
+            <a:off x="8962136" y="4791456"/>
+            <a:ext cx="813816" cy="256032"/>
           </a:xfrm>
           <a:prstGeom prst="rect">
             <a:avLst/>
@@ -18385,7 +18385,7 @@
                 <a:ea typeface="Calibri" pitchFamily="34" charset="-122"/>
                 <a:cs typeface="Calibri" pitchFamily="34" charset="-120"/>
               </a:rPr>
-              <a:t>log</a:t>
+              <a:t>dashboard</a:t>
             </a:r>
             <a:endParaRPr lang="en-US" sz="1000" dirty="0"/>
           </a:p>
@@ -18399,8 +18399,8 @@
         </p:nvSpPr>
         <p:spPr>
           <a:xfrm>
-            <a:off x="8896096" y="4791456"/>
-            <a:ext cx="681736" cy="256032"/>
+            <a:off x="9867392" y="4791456"/>
+            <a:ext cx="417576" cy="256032"/>
           </a:xfrm>
           <a:prstGeom prst="roundRect">
             <a:avLst>
@@ -18426,8 +18426,8 @@
         </p:nvSpPr>
         <p:spPr>
           <a:xfrm>
-            <a:off x="8896096" y="4791456"/>
-            <a:ext cx="681736" cy="256032"/>
+            <a:off x="9867392" y="4791456"/>
+            <a:ext cx="417576" cy="256032"/>
           </a:xfrm>
           <a:prstGeom prst="rect">
             <a:avLst/>
@@ -18451,7 +18451,7 @@
                 <a:ea typeface="Calibri" pitchFamily="34" charset="-122"/>
                 <a:cs typeface="Calibri" pitchFamily="34" charset="-120"/>
               </a:rPr>
-              <a:t>license</a:t>
+              <a:t>log</a:t>
             </a:r>
             <a:endParaRPr lang="en-US" sz="1000" dirty="0"/>
           </a:p>
@@ -18465,8 +18465,8 @@
         </p:nvSpPr>
         <p:spPr>
           <a:xfrm>
-            <a:off x="9669272" y="4791456"/>
-            <a:ext cx="615696" cy="256032"/>
+            <a:off x="10376408" y="4791456"/>
+            <a:ext cx="681736" cy="256032"/>
           </a:xfrm>
           <a:prstGeom prst="roundRect">
             <a:avLst>
@@ -18492,8 +18492,8 @@
         </p:nvSpPr>
         <p:spPr>
           <a:xfrm>
-            <a:off x="9669272" y="4791456"/>
-            <a:ext cx="615696" cy="256032"/>
+            <a:off x="10376408" y="4791456"/>
+            <a:ext cx="681736" cy="256032"/>
           </a:xfrm>
           <a:prstGeom prst="rect">
             <a:avLst/>
@@ -18517,7 +18517,7 @@
                 <a:ea typeface="Calibri" pitchFamily="34" charset="-122"/>
                 <a:cs typeface="Calibri" pitchFamily="34" charset="-120"/>
               </a:rPr>
-              <a:t>doctor</a:t>
+              <a:t>license</a:t>
             </a:r>
             <a:endParaRPr lang="en-US" sz="1000" dirty="0"/>
           </a:p>
@@ -18531,8 +18531,8 @@
         </p:nvSpPr>
         <p:spPr>
           <a:xfrm>
-            <a:off x="10376408" y="4791456"/>
-            <a:ext cx="1011936" cy="256032"/>
+            <a:off x="457200" y="5138928"/>
+            <a:ext cx="615696" cy="256032"/>
           </a:xfrm>
           <a:prstGeom prst="roundRect">
             <a:avLst>
@@ -18558,8 +18558,8 @@
         </p:nvSpPr>
         <p:spPr>
           <a:xfrm>
-            <a:off x="10376408" y="4791456"/>
-            <a:ext cx="1011936" cy="256032"/>
+            <a:off x="457200" y="5138928"/>
+            <a:ext cx="615696" cy="256032"/>
           </a:xfrm>
           <a:prstGeom prst="rect">
             <a:avLst/>
@@ -18583,7 +18583,7 @@
                 <a:ea typeface="Calibri" pitchFamily="34" charset="-122"/>
                 <a:cs typeface="Calibri" pitchFamily="34" charset="-120"/>
               </a:rPr>
-              <a:t>plugin build</a:t>
+              <a:t>doctor</a:t>
             </a:r>
             <a:endParaRPr lang="en-US" sz="1000" dirty="0"/>
           </a:p>
@@ -18597,8 +18597,8 @@
         </p:nvSpPr>
         <p:spPr>
           <a:xfrm>
-            <a:off x="457200" y="5138928"/>
-            <a:ext cx="483616" cy="256032"/>
+            <a:off x="1164336" y="5138928"/>
+            <a:ext cx="1011936" cy="256032"/>
           </a:xfrm>
           <a:prstGeom prst="roundRect">
             <a:avLst>
@@ -18624,8 +18624,8 @@
         </p:nvSpPr>
         <p:spPr>
           <a:xfrm>
-            <a:off x="457200" y="5138928"/>
-            <a:ext cx="483616" cy="256032"/>
+            <a:off x="1164336" y="5138928"/>
+            <a:ext cx="1011936" cy="256032"/>
           </a:xfrm>
           <a:prstGeom prst="rect">
             <a:avLst/>
@@ -18649,7 +18649,7 @@
                 <a:ea typeface="Calibri" pitchFamily="34" charset="-122"/>
                 <a:cs typeface="Calibri" pitchFamily="34" charset="-120"/>
               </a:rPr>
-              <a:t>hook</a:t>
+              <a:t>plugin build</a:t>
             </a:r>
             <a:endParaRPr lang="en-US" sz="1000" dirty="0"/>
           </a:p>
@@ -18663,8 +18663,8 @@
         </p:nvSpPr>
         <p:spPr>
           <a:xfrm>
-            <a:off x="1032256" y="5138928"/>
-            <a:ext cx="747776" cy="256032"/>
+            <a:off x="2267712" y="5138928"/>
+            <a:ext cx="483616" cy="256032"/>
           </a:xfrm>
           <a:prstGeom prst="roundRect">
             <a:avLst>
@@ -18690,7 +18690,73 @@
         </p:nvSpPr>
         <p:spPr>
           <a:xfrm>
-            <a:off x="1032256" y="5138928"/>
+            <a:off x="2267712" y="5138928"/>
+            <a:ext cx="483616" cy="256032"/>
+          </a:xfrm>
+          <a:prstGeom prst="rect">
+            <a:avLst/>
+          </a:prstGeom>
+          <a:noFill/>
+          <a:ln/>
+        </p:spPr>
+        <p:txBody>
+          <a:bodyPr wrap="square" lIns="0" tIns="0" rIns="0" bIns="0" rtlCol="0" anchor="ctr"/>
+          <a:lstStyle/>
+          <a:p>
+            <a:pPr algn="ctr" indent="0" marL="0">
+              <a:buNone/>
+            </a:pPr>
+            <a:r>
+              <a:rPr lang="en-US" sz="1000" dirty="0">
+                <a:solidFill>
+                  <a:srgbClr val="1F2430"/>
+                </a:solidFill>
+                <a:latin typeface="Calibri" pitchFamily="34" charset="0"/>
+                <a:ea typeface="Calibri" pitchFamily="34" charset="-122"/>
+                <a:cs typeface="Calibri" pitchFamily="34" charset="-120"/>
+              </a:rPr>
+              <a:t>hook</a:t>
+            </a:r>
+            <a:endParaRPr lang="en-US" sz="1000" dirty="0"/>
+          </a:p>
+        </p:txBody>
+      </p:sp>
+      <p:sp>
+        <p:nvSpPr>
+          <p:cNvPr id="116" name="Shape 114"/>
+          <p:cNvSpPr/>
+          <p:nvPr/>
+        </p:nvSpPr>
+        <p:spPr>
+          <a:xfrm>
+            <a:off x="2842768" y="5138928"/>
+            <a:ext cx="747776" cy="256032"/>
+          </a:xfrm>
+          <a:prstGeom prst="roundRect">
+            <a:avLst>
+              <a:gd name="adj" fmla="val 50000"/>
+            </a:avLst>
+          </a:prstGeom>
+          <a:solidFill>
+            <a:srgbClr val="F3F5F8"/>
+          </a:solidFill>
+          <a:ln w="12700">
+            <a:solidFill>
+              <a:srgbClr val="F3F5F8"/>
+            </a:solidFill>
+            <a:prstDash val="solid"/>
+          </a:ln>
+        </p:spPr>
+      </p:sp>
+      <p:sp>
+        <p:nvSpPr>
+          <p:cNvPr id="117" name="Text 115"/>
+          <p:cNvSpPr txBox="1"/>
+          <p:nvPr/>
+        </p:nvSpPr>
+        <p:spPr>
+          <a:xfrm>
+            <a:off x="2842768" y="5138928"/>
             <a:ext cx="747776" cy="256032"/>
           </a:xfrm>
           <a:prstGeom prst="rect">
@@ -23185,7 +23251,7 @@
                 <a:ea typeface="Courier New" pitchFamily="34" charset="-122"/>
                 <a:cs typeface="Courier New" pitchFamily="34" charset="-120"/>
               </a:rPr>
-              <a:t>  sdlc 0.7.1, license: community</a:t>
+              <a:t>  sdlc 0.7.2, license: community</a:t>
             </a:r>
             <a:endParaRPr lang="en-US" sz="1000" dirty="0"/>
           </a:p>
@@ -26505,7 +26571,7 @@
         <p:spPr>
           <a:xfrm>
             <a:off x="3607816" y="6053328"/>
-            <a:ext cx="945896" cy="256032"/>
+            <a:ext cx="1342136" cy="256032"/>
           </a:xfrm>
           <a:prstGeom prst="roundRect">
             <a:avLst>
@@ -26532,7 +26598,7 @@
         <p:spPr>
           <a:xfrm>
             <a:off x="3607816" y="6053328"/>
-            <a:ext cx="945896" cy="256032"/>
+            <a:ext cx="1342136" cy="256032"/>
           </a:xfrm>
           <a:prstGeom prst="rect">
             <a:avLst/>
@@ -26556,7 +26622,7 @@
                 <a:ea typeface="Calibri" pitchFamily="34" charset="-122"/>
                 <a:cs typeface="Calibri" pitchFamily="34" charset="-120"/>
               </a:rPr>
-              <a:t>backlog add</a:t>
+              <a:t>backlog epic edit</a:t>
             </a:r>
             <a:endParaRPr lang="en-US" sz="1000" dirty="0"/>
           </a:p>
@@ -26570,8 +26636,8 @@
         </p:nvSpPr>
         <p:spPr>
           <a:xfrm>
-            <a:off x="4645152" y="6053328"/>
-            <a:ext cx="1011936" cy="256032"/>
+            <a:off x="5041392" y="6053328"/>
+            <a:ext cx="945896" cy="256032"/>
           </a:xfrm>
           <a:prstGeom prst="roundRect">
             <a:avLst>
@@ -26597,8 +26663,8 @@
         </p:nvSpPr>
         <p:spPr>
           <a:xfrm>
-            <a:off x="4645152" y="6053328"/>
-            <a:ext cx="1011936" cy="256032"/>
+            <a:off x="5041392" y="6053328"/>
+            <a:ext cx="945896" cy="256032"/>
           </a:xfrm>
           <a:prstGeom prst="rect">
             <a:avLst/>
@@ -26622,7 +26688,7 @@
                 <a:ea typeface="Calibri" pitchFamily="34" charset="-122"/>
                 <a:cs typeface="Calibri" pitchFamily="34" charset="-120"/>
               </a:rPr>
-              <a:t>backlog move</a:t>
+              <a:t>backlog add</a:t>
             </a:r>
             <a:endParaRPr lang="en-US" sz="1000" dirty="0"/>
           </a:p>
@@ -26636,7 +26702,7 @@
         </p:nvSpPr>
         <p:spPr>
           <a:xfrm>
-            <a:off x="5748528" y="6053328"/>
+            <a:off x="6078728" y="6053328"/>
             <a:ext cx="1011936" cy="256032"/>
           </a:xfrm>
           <a:prstGeom prst="roundRect">
@@ -26663,7 +26729,7 @@
         </p:nvSpPr>
         <p:spPr>
           <a:xfrm>
-            <a:off x="5748528" y="6053328"/>
+            <a:off x="6078728" y="6053328"/>
             <a:ext cx="1011936" cy="256032"/>
           </a:xfrm>
           <a:prstGeom prst="rect">
@@ -26688,7 +26754,7 @@
                 <a:ea typeface="Calibri" pitchFamily="34" charset="-122"/>
                 <a:cs typeface="Calibri" pitchFamily="34" charset="-120"/>
               </a:rPr>
-              <a:t>backlog edit</a:t>
+              <a:t>backlog move</a:t>
             </a:r>
             <a:endParaRPr lang="en-US" sz="1000" dirty="0"/>
           </a:p>
@@ -26702,7 +26768,7 @@
         </p:nvSpPr>
         <p:spPr>
           <a:xfrm>
-            <a:off x="6851904" y="6053328"/>
+            <a:off x="7182104" y="6053328"/>
             <a:ext cx="1011936" cy="256032"/>
           </a:xfrm>
           <a:prstGeom prst="roundRect">
@@ -26729,7 +26795,7 @@
         </p:nvSpPr>
         <p:spPr>
           <a:xfrm>
-            <a:off x="6851904" y="6053328"/>
+            <a:off x="7182104" y="6053328"/>
             <a:ext cx="1011936" cy="256032"/>
           </a:xfrm>
           <a:prstGeom prst="rect">
@@ -26754,7 +26820,7 @@
                 <a:ea typeface="Calibri" pitchFamily="34" charset="-122"/>
                 <a:cs typeface="Calibri" pitchFamily="34" charset="-120"/>
               </a:rPr>
-              <a:t>backlog drop</a:t>
+              <a:t>backlog edit</a:t>
             </a:r>
             <a:endParaRPr lang="en-US" sz="1000" dirty="0"/>
           </a:p>
@@ -26768,7 +26834,7 @@
         </p:nvSpPr>
         <p:spPr>
           <a:xfrm>
-            <a:off x="7955280" y="6053328"/>
+            <a:off x="8285480" y="6053328"/>
             <a:ext cx="1011936" cy="256032"/>
           </a:xfrm>
           <a:prstGeom prst="roundRect">
@@ -26795,7 +26861,73 @@
         </p:nvSpPr>
         <p:spPr>
           <a:xfrm>
-            <a:off x="7955280" y="6053328"/>
+            <a:off x="8285480" y="6053328"/>
+            <a:ext cx="1011936" cy="256032"/>
+          </a:xfrm>
+          <a:prstGeom prst="rect">
+            <a:avLst/>
+          </a:prstGeom>
+          <a:noFill/>
+          <a:ln/>
+        </p:spPr>
+        <p:txBody>
+          <a:bodyPr wrap="square" lIns="0" tIns="0" rIns="0" bIns="0" rtlCol="0" anchor="ctr"/>
+          <a:lstStyle/>
+          <a:p>
+            <a:pPr algn="ctr" indent="0" marL="0">
+              <a:buNone/>
+            </a:pPr>
+            <a:r>
+              <a:rPr lang="en-US" sz="1000" dirty="0">
+                <a:solidFill>
+                  <a:srgbClr val="5B6475"/>
+                </a:solidFill>
+                <a:latin typeface="Calibri" pitchFamily="34" charset="0"/>
+                <a:ea typeface="Calibri" pitchFamily="34" charset="-122"/>
+                <a:cs typeface="Calibri" pitchFamily="34" charset="-120"/>
+              </a:rPr>
+              <a:t>backlog drop</a:t>
+            </a:r>
+            <a:endParaRPr lang="en-US" sz="1000" dirty="0"/>
+          </a:p>
+        </p:txBody>
+      </p:sp>
+      <p:sp>
+        <p:nvSpPr>
+          <p:cNvPr id="38" name="Shape 36"/>
+          <p:cNvSpPr/>
+          <p:nvPr/>
+        </p:nvSpPr>
+        <p:spPr>
+          <a:xfrm>
+            <a:off x="9388856" y="6053328"/>
+            <a:ext cx="1011936" cy="256032"/>
+          </a:xfrm>
+          <a:prstGeom prst="roundRect">
+            <a:avLst>
+              <a:gd name="adj" fmla="val 50000"/>
+            </a:avLst>
+          </a:prstGeom>
+          <a:solidFill>
+            <a:srgbClr val="F3F5F8"/>
+          </a:solidFill>
+          <a:ln w="12700">
+            <a:solidFill>
+              <a:srgbClr val="F3F5F8"/>
+            </a:solidFill>
+            <a:prstDash val="solid"/>
+          </a:ln>
+        </p:spPr>
+      </p:sp>
+      <p:sp>
+        <p:nvSpPr>
+          <p:cNvPr id="39" name="Text 37"/>
+          <p:cNvSpPr txBox="1"/>
+          <p:nvPr/>
+        </p:nvSpPr>
+        <p:spPr>
+          <a:xfrm>
+            <a:off x="9388856" y="6053328"/>
             <a:ext cx="1011936" cy="256032"/>
           </a:xfrm>
           <a:prstGeom prst="rect">

--- a/docs/demo/sdlc-calculator-demo.en.pptx
+++ b/docs/demo/sdlc-calculator-demo.en.pptx
@@ -6566,7 +6566,7 @@
                 <a:ea typeface="Courier New" pitchFamily="34" charset="-122"/>
                 <a:cs typeface="Courier New" pitchFamily="34" charset="-120"/>
               </a:rPr>
-              <a:t>  code-owner (85e76c97d625)</a:t>
+              <a:t>  code-owner (a229dad94f6b)</a:t>
             </a:r>
             <a:endParaRPr lang="en-US" sz="1000" dirty="0"/>
           </a:p>
@@ -7247,7 +7247,7 @@
                 <a:ea typeface="Courier New" pitchFamily="34" charset="-122"/>
                 <a:cs typeface="Courier New" pitchFamily="34" charset="-120"/>
               </a:rPr>
-              <a:t>  release-manager (85e76c97d625)</a:t>
+              <a:t>  release-manager (a229dad94f6b)</a:t>
             </a:r>
             <a:endParaRPr lang="en-US" sz="1000" dirty="0"/>
           </a:p>
@@ -7547,7 +7547,7 @@
                 <a:ea typeface="Courier New" pitchFamily="34" charset="-122"/>
                 <a:cs typeface="Courier New" pitchFamily="34" charset="-120"/>
               </a:rPr>
-              <a:t>✓ basic-arithmetic/intent alice valid adbf5d87</a:t>
+              <a:t>✓ basic-arithmetic/intent alice valid 6b282762</a:t>
             </a:r>
             <a:endParaRPr lang="en-US" sz="1000" dirty="0"/>
           </a:p>
@@ -7564,7 +7564,7 @@
                 <a:ea typeface="Courier New" pitchFamily="34" charset="-122"/>
                 <a:cs typeface="Courier New" pitchFamily="34" charset="-120"/>
               </a:rPr>
-              <a:t>✓ basic-arithmetic/spec alice valid adbf5d87</a:t>
+              <a:t>✓ basic-arithmetic/spec alice valid 6b282762</a:t>
             </a:r>
             <a:endParaRPr lang="en-US" sz="1000" dirty="0"/>
           </a:p>
@@ -7581,7 +7581,7 @@
                 <a:ea typeface="Courier New" pitchFamily="34" charset="-122"/>
                 <a:cs typeface="Courier New" pitchFamily="34" charset="-120"/>
               </a:rPr>
-              <a:t>✗ basic-arithmetic/plan bob unsigned 0d7032b7</a:t>
+              <a:t>✗ basic-arithmetic/plan bob unsigned 60b4c38b</a:t>
             </a:r>
             <a:endParaRPr lang="en-US" sz="1000" dirty="0"/>
           </a:p>
@@ -7598,7 +7598,7 @@
                 <a:ea typeface="Courier New" pitchFamily="34" charset="-122"/>
                 <a:cs typeface="Courier New" pitchFamily="34" charset="-120"/>
               </a:rPr>
-              <a:t>✓ basic-arithmetic/review carol valid 126b5c9f</a:t>
+              <a:t>✓ basic-arithmetic/review carol valid 79c0bc5e</a:t>
             </a:r>
             <a:endParaRPr lang="en-US" sz="1000" dirty="0"/>
           </a:p>
@@ -7615,7 +7615,7 @@
                 <a:ea typeface="Courier New" pitchFamily="34" charset="-122"/>
                 <a:cs typeface="Courier New" pitchFamily="34" charset="-120"/>
               </a:rPr>
-              <a:t>✓ basic-arithmetic/release alice valid 65b45c43</a:t>
+              <a:t>✓ basic-arithmetic/release alice valid dd3496e0</a:t>
             </a:r>
             <a:endParaRPr lang="en-US" sz="1000" dirty="0"/>
           </a:p>
@@ -7632,7 +7632,7 @@
                 <a:ea typeface="Courier New" pitchFamily="34" charset="-122"/>
                 <a:cs typeface="Courier New" pitchFamily="34" charset="-120"/>
               </a:rPr>
-              <a:t>✓ openspec/roles.yaml alice@calc.example valid b3da9c0c</a:t>
+              <a:t>✓ openspec/roles.yaml alice@calc.example valid 2e59e352</a:t>
             </a:r>
             <a:endParaRPr lang="en-US" sz="1000" dirty="0"/>
           </a:p>
@@ -13671,7 +13671,7 @@
                 <a:ea typeface="Courier New" pitchFamily="34" charset="-122"/>
                 <a:cs typeface="Courier New" pitchFamily="34" charset="-120"/>
               </a:rPr>
-              <a:t>  archived) · sdlc 0.7.2, license:</a:t>
+              <a:t>  archived) · sdlc 0.7.3, license:</a:t>
             </a:r>
             <a:endParaRPr lang="en-US" sz="1000" dirty="0"/>
           </a:p>
@@ -13807,7 +13807,7 @@
                 <a:ea typeface="Courier New" pitchFamily="34" charset="-122"/>
                 <a:cs typeface="Courier New" pitchFamily="34" charset="-120"/>
               </a:rPr>
-              <a:t>  recorded with sdlc 0.7.2; licenses:</a:t>
+              <a:t>  recorded with sdlc 0.7.3; licenses:</a:t>
             </a:r>
             <a:endParaRPr lang="en-US" sz="1000" dirty="0"/>
           </a:p>
@@ -14124,7 +14124,7 @@
                 <a:ea typeface="Courier New" pitchFamily="34" charset="-122"/>
                 <a:cs typeface="Courier New" pitchFamily="34" charset="-120"/>
               </a:rPr>
-              <a:t>2026-10-05T12:39:34.297Z  deferred.added   </a:t>
+              <a:t>2026-10-05T16:50:59.142Z  deferred.added   </a:t>
             </a:r>
             <a:endParaRPr lang="en-US" sz="1000" dirty="0"/>
           </a:p>
@@ -14175,7 +14175,7 @@
                 <a:ea typeface="Courier New" pitchFamily="34" charset="-122"/>
                 <a:cs typeface="Courier New" pitchFamily="34" charset="-120"/>
               </a:rPr>
-              <a:t>  shows an error [sdlc 0.7.2 · community]</a:t>
+              <a:t>  shows an error [sdlc 0.7.3 · community]</a:t>
             </a:r>
             <a:endParaRPr lang="en-US" sz="1000" dirty="0"/>
           </a:p>
@@ -14192,7 +14192,7 @@
                 <a:ea typeface="Courier New" pitchFamily="34" charset="-122"/>
                 <a:cs typeface="Courier New" pitchFamily="34" charset="-120"/>
               </a:rPr>
-              <a:t>2026-10-05T12:39:38.980Z  gate.review.appro</a:t>
+              <a:t>2026-10-05T16:51:04.017Z  gate.review.appro</a:t>
             </a:r>
             <a:endParaRPr lang="en-US" sz="1000" dirty="0"/>
           </a:p>
@@ -14243,7 +14243,7 @@
                 <a:ea typeface="Courier New" pitchFamily="34" charset="-122"/>
                 <a:cs typeface="Courier New" pitchFamily="34" charset="-120"/>
               </a:rPr>
-              <a:t>  [sdlc 0.7.2 · community]</a:t>
+              <a:t>  [sdlc 0.7.3 · community]</a:t>
             </a:r>
             <a:endParaRPr lang="en-US" sz="1000" dirty="0"/>
           </a:p>
@@ -14260,7 +14260,7 @@
                 <a:ea typeface="Courier New" pitchFamily="34" charset="-122"/>
                 <a:cs typeface="Courier New" pitchFamily="34" charset="-120"/>
               </a:rPr>
-              <a:t>2026-10-05T12:39:41.022Z  gate.release.appr</a:t>
+              <a:t>2026-10-05T16:51:06.107Z  gate.release.appr</a:t>
             </a:r>
             <a:endParaRPr lang="en-US" sz="1000" dirty="0"/>
           </a:p>
@@ -14311,7 +14311,7 @@
                 <a:ea typeface="Courier New" pitchFamily="34" charset="-122"/>
                 <a:cs typeface="Courier New" pitchFamily="34" charset="-120"/>
               </a:rPr>
-              <a:t>  release-manager [sdlc 0.7.2 · community]</a:t>
+              <a:t>  release-manager [sdlc 0.7.3 · community]</a:t>
             </a:r>
             <a:endParaRPr lang="en-US" sz="1000" dirty="0"/>
           </a:p>
@@ -14328,7 +14328,7 @@
                 <a:ea typeface="Courier New" pitchFamily="34" charset="-122"/>
                 <a:cs typeface="Courier New" pitchFamily="34" charset="-120"/>
               </a:rPr>
-              <a:t>2026-10-05T12:39:46.317Z  change.archived  </a:t>
+              <a:t>2026-10-05T16:51:11.426Z  change.archived  </a:t>
             </a:r>
             <a:endParaRPr lang="en-US" sz="1000" dirty="0"/>
           </a:p>
@@ -23251,7 +23251,7 @@
                 <a:ea typeface="Courier New" pitchFamily="34" charset="-122"/>
                 <a:cs typeface="Courier New" pitchFamily="34" charset="-120"/>
               </a:rPr>
-              <a:t>  sdlc 0.7.2, license: community</a:t>
+              <a:t>  sdlc 0.7.3, license: community</a:t>
             </a:r>
             <a:endParaRPr lang="en-US" sz="1000" dirty="0"/>
           </a:p>

--- a/docs/demo/sdlc-calculator-demo.en.pptx
+++ b/docs/demo/sdlc-calculator-demo.en.pptx
@@ -6566,7 +6566,7 @@
                 <a:ea typeface="Courier New" pitchFamily="34" charset="-122"/>
                 <a:cs typeface="Courier New" pitchFamily="34" charset="-120"/>
               </a:rPr>
-              <a:t>  code-owner (a229dad94f6b)</a:t>
+              <a:t>  code-owner (6839dde7b6d0)</a:t>
             </a:r>
             <a:endParaRPr lang="en-US" sz="1000" dirty="0"/>
           </a:p>
@@ -6583,7 +6583,7 @@
                 <a:ea typeface="Courier New" pitchFamily="34" charset="-122"/>
                 <a:cs typeface="Courier New" pitchFamily="34" charset="-120"/>
               </a:rPr>
-              <a:t>Next: person — A code owner must read</a:t>
+              <a:t>Next: person — Carol Hughes (code-owner)</a:t>
             </a:r>
             <a:endParaRPr lang="en-US" sz="1000" dirty="0"/>
           </a:p>
@@ -6600,7 +6600,7 @@
                 <a:ea typeface="Courier New" pitchFamily="34" charset="-122"/>
                 <a:cs typeface="Courier New" pitchFamily="34" charset="-120"/>
               </a:rPr>
-              <a:t>  review.md and the diff, then approve the</a:t>
+              <a:t>  must read review.md and the diff, then</a:t>
             </a:r>
             <a:endParaRPr lang="en-US" sz="1000" dirty="0"/>
           </a:p>
@@ -6617,7 +6617,7 @@
                 <a:ea typeface="Courier New" pitchFamily="34" charset="-122"/>
                 <a:cs typeface="Courier New" pitchFamily="34" charset="-120"/>
               </a:rPr>
-              <a:t>  review gate: sdlc approve review --change</a:t>
+              <a:t>  approve the review gate: sdlc approve</a:t>
             </a:r>
             <a:endParaRPr lang="en-US" sz="1000" dirty="0"/>
           </a:p>
@@ -6634,7 +6634,7 @@
                 <a:ea typeface="Courier New" pitchFamily="34" charset="-122"/>
                 <a:cs typeface="Courier New" pitchFamily="34" charset="-120"/>
               </a:rPr>
-              <a:t>  basic-arithmetic</a:t>
+              <a:t>  review --change basic-arithmetic</a:t>
             </a:r>
             <a:endParaRPr lang="en-US" sz="1000" dirty="0"/>
           </a:p>
@@ -7247,7 +7247,7 @@
                 <a:ea typeface="Courier New" pitchFamily="34" charset="-122"/>
                 <a:cs typeface="Courier New" pitchFamily="34" charset="-120"/>
               </a:rPr>
-              <a:t>  release-manager (a229dad94f6b)</a:t>
+              <a:t>  release-manager (6839dde7b6d0)</a:t>
             </a:r>
             <a:endParaRPr lang="en-US" sz="1000" dirty="0"/>
           </a:p>
@@ -7264,7 +7264,7 @@
                 <a:ea typeface="Courier New" pitchFamily="34" charset="-122"/>
                 <a:cs typeface="Courier New" pitchFamily="34" charset="-120"/>
               </a:rPr>
-              <a:t>Next: person — A code owner must read review.md and the diff, then</a:t>
+              <a:t>Next: person — Carol Hughes (code-owner) must read review.md and the</a:t>
             </a:r>
             <a:endParaRPr lang="en-US" sz="1000" dirty="0"/>
           </a:p>
@@ -7281,7 +7281,7 @@
                 <a:ea typeface="Courier New" pitchFamily="34" charset="-122"/>
                 <a:cs typeface="Courier New" pitchFamily="34" charset="-120"/>
               </a:rPr>
-              <a:t>  approve the review gate: sdlc approve review --change</a:t>
+              <a:t>  diff, then approve the review gate: sdlc approve review --change</a:t>
             </a:r>
             <a:endParaRPr lang="en-US" sz="1000" dirty="0"/>
           </a:p>
@@ -7547,7 +7547,7 @@
                 <a:ea typeface="Courier New" pitchFamily="34" charset="-122"/>
                 <a:cs typeface="Courier New" pitchFamily="34" charset="-120"/>
               </a:rPr>
-              <a:t>✓ basic-arithmetic/intent alice valid 6b282762</a:t>
+              <a:t>✓ basic-arithmetic/intent alice valid 7ccff08e</a:t>
             </a:r>
             <a:endParaRPr lang="en-US" sz="1000" dirty="0"/>
           </a:p>
@@ -7564,7 +7564,7 @@
                 <a:ea typeface="Courier New" pitchFamily="34" charset="-122"/>
                 <a:cs typeface="Courier New" pitchFamily="34" charset="-120"/>
               </a:rPr>
-              <a:t>✓ basic-arithmetic/spec alice valid 6b282762</a:t>
+              <a:t>✓ basic-arithmetic/spec alice valid 371e403b</a:t>
             </a:r>
             <a:endParaRPr lang="en-US" sz="1000" dirty="0"/>
           </a:p>
@@ -7581,7 +7581,7 @@
                 <a:ea typeface="Courier New" pitchFamily="34" charset="-122"/>
                 <a:cs typeface="Courier New" pitchFamily="34" charset="-120"/>
               </a:rPr>
-              <a:t>✗ basic-arithmetic/plan bob unsigned 60b4c38b</a:t>
+              <a:t>✗ basic-arithmetic/plan bob wrong-signer 371e403b</a:t>
             </a:r>
             <a:endParaRPr lang="en-US" sz="1000" dirty="0"/>
           </a:p>
@@ -7598,7 +7598,7 @@
                 <a:ea typeface="Courier New" pitchFamily="34" charset="-122"/>
                 <a:cs typeface="Courier New" pitchFamily="34" charset="-120"/>
               </a:rPr>
-              <a:t>✓ basic-arithmetic/review carol valid 79c0bc5e</a:t>
+              <a:t>✓ basic-arithmetic/review carol valid ed4cdd83</a:t>
             </a:r>
             <a:endParaRPr lang="en-US" sz="1000" dirty="0"/>
           </a:p>
@@ -7615,7 +7615,7 @@
                 <a:ea typeface="Courier New" pitchFamily="34" charset="-122"/>
                 <a:cs typeface="Courier New" pitchFamily="34" charset="-120"/>
               </a:rPr>
-              <a:t>✓ basic-arithmetic/release alice valid dd3496e0</a:t>
+              <a:t>✓ basic-arithmetic/release alice valid 23117b69</a:t>
             </a:r>
             <a:endParaRPr lang="en-US" sz="1000" dirty="0"/>
           </a:p>
@@ -7632,7 +7632,7 @@
                 <a:ea typeface="Courier New" pitchFamily="34" charset="-122"/>
                 <a:cs typeface="Courier New" pitchFamily="34" charset="-120"/>
               </a:rPr>
-              <a:t>✓ openspec/roles.yaml alice@calc.example valid 2e59e352</a:t>
+              <a:t>✓ openspec/roles.yaml alice@calc.example valid 71b79561</a:t>
             </a:r>
             <a:endParaRPr lang="en-US" sz="1000" dirty="0"/>
           </a:p>
@@ -9041,7 +9041,7 @@
         <p:spPr>
           <a:xfrm>
             <a:off x="2240280" y="6053328"/>
-            <a:ext cx="1011936" cy="256032"/>
+            <a:ext cx="549656" cy="256032"/>
           </a:xfrm>
           <a:prstGeom prst="roundRect">
             <a:avLst>
@@ -9068,6 +9068,72 @@
         <p:spPr>
           <a:xfrm>
             <a:off x="2240280" y="6053328"/>
+            <a:ext cx="549656" cy="256032"/>
+          </a:xfrm>
+          <a:prstGeom prst="rect">
+            <a:avLst/>
+          </a:prstGeom>
+          <a:noFill/>
+          <a:ln/>
+        </p:spPr>
+        <p:txBody>
+          <a:bodyPr wrap="square" lIns="0" tIns="0" rIns="0" bIns="0" rtlCol="0" anchor="ctr"/>
+          <a:lstStyle/>
+          <a:p>
+            <a:pPr algn="ctr" indent="0" marL="0">
+              <a:buNone/>
+            </a:pPr>
+            <a:r>
+              <a:rPr lang="en-US" sz="1000" dirty="0">
+                <a:solidFill>
+                  <a:srgbClr val="5B6475"/>
+                </a:solidFill>
+                <a:latin typeface="Calibri" pitchFamily="34" charset="0"/>
+                <a:ea typeface="Calibri" pitchFamily="34" charset="-122"/>
+                <a:cs typeface="Calibri" pitchFamily="34" charset="-120"/>
+              </a:rPr>
+              <a:t>trace</a:t>
+            </a:r>
+            <a:endParaRPr lang="en-US" sz="1000" dirty="0"/>
+          </a:p>
+        </p:txBody>
+      </p:sp>
+      <p:sp>
+        <p:nvSpPr>
+          <p:cNvPr id="28" name="Shape 26"/>
+          <p:cNvSpPr/>
+          <p:nvPr/>
+        </p:nvSpPr>
+        <p:spPr>
+          <a:xfrm>
+            <a:off x="2881376" y="6053328"/>
+            <a:ext cx="1011936" cy="256032"/>
+          </a:xfrm>
+          <a:prstGeom prst="roundRect">
+            <a:avLst>
+              <a:gd name="adj" fmla="val 50000"/>
+            </a:avLst>
+          </a:prstGeom>
+          <a:solidFill>
+            <a:srgbClr val="F3F5F8"/>
+          </a:solidFill>
+          <a:ln w="12700">
+            <a:solidFill>
+              <a:srgbClr val="F3F5F8"/>
+            </a:solidFill>
+            <a:prstDash val="solid"/>
+          </a:ln>
+        </p:spPr>
+      </p:sp>
+      <p:sp>
+        <p:nvSpPr>
+          <p:cNvPr id="29" name="Text 27"/>
+          <p:cNvSpPr txBox="1"/>
+          <p:nvPr/>
+        </p:nvSpPr>
+        <p:spPr>
+          <a:xfrm>
+            <a:off x="2881376" y="6053328"/>
             <a:ext cx="1011936" cy="256032"/>
           </a:xfrm>
           <a:prstGeom prst="rect">
@@ -13671,7 +13737,7 @@
                 <a:ea typeface="Courier New" pitchFamily="34" charset="-122"/>
                 <a:cs typeface="Courier New" pitchFamily="34" charset="-120"/>
               </a:rPr>
-              <a:t>  archived) · sdlc 0.7.3, license:</a:t>
+              <a:t>  archived) · sdlc 0.8.0, license:</a:t>
             </a:r>
             <a:endParaRPr lang="en-US" sz="1000" dirty="0"/>
           </a:p>
@@ -13807,7 +13873,58 @@
                 <a:ea typeface="Courier New" pitchFamily="34" charset="-122"/>
                 <a:cs typeface="Courier New" pitchFamily="34" charset="-120"/>
               </a:rPr>
-              <a:t>  recorded with sdlc 0.7.3; licenses:</a:t>
+              <a:t>  median wait for a person (seconds):</a:t>
+            </a:r>
+            <a:endParaRPr lang="en-US" sz="1000" dirty="0"/>
+          </a:p>
+          <a:p>
+            <a:pPr indent="0" marL="0">
+              <a:buNone/>
+            </a:pPr>
+            <a:r>
+              <a:rPr lang="en-US" sz="1000" dirty="0">
+                <a:solidFill>
+                  <a:srgbClr val="E8EEF2"/>
+                </a:solidFill>
+                <a:latin typeface="Courier New" pitchFamily="34" charset="0"/>
+                <a:ea typeface="Courier New" pitchFamily="34" charset="-122"/>
+                <a:cs typeface="Courier New" pitchFamily="34" charset="-120"/>
+              </a:rPr>
+              <a:t>  intent 2 · spec 7 · plan 8 · review 2;</a:t>
+            </a:r>
+            <a:endParaRPr lang="en-US" sz="1000" dirty="0"/>
+          </a:p>
+          <a:p>
+            <a:pPr indent="0" marL="0">
+              <a:buNone/>
+            </a:pPr>
+            <a:r>
+              <a:rPr lang="en-US" sz="1000" dirty="0">
+                <a:solidFill>
+                  <a:srgbClr val="E8EEF2"/>
+                </a:solidFill>
+                <a:latin typeface="Courier New" pitchFamily="34" charset="0"/>
+                <a:ea typeface="Courier New" pitchFamily="34" charset="-122"/>
+                <a:cs typeface="Courier New" pitchFamily="34" charset="-120"/>
+              </a:rPr>
+              <a:t>  rework reasons: missing-requirement 1</a:t>
+            </a:r>
+            <a:endParaRPr lang="en-US" sz="1000" dirty="0"/>
+          </a:p>
+          <a:p>
+            <a:pPr indent="0" marL="0">
+              <a:buNone/>
+            </a:pPr>
+            <a:r>
+              <a:rPr lang="en-US" sz="1000" dirty="0">
+                <a:solidFill>
+                  <a:srgbClr val="E8EEF2"/>
+                </a:solidFill>
+                <a:latin typeface="Courier New" pitchFamily="34" charset="0"/>
+                <a:ea typeface="Courier New" pitchFamily="34" charset="-122"/>
+                <a:cs typeface="Courier New" pitchFamily="34" charset="-120"/>
+              </a:rPr>
+              <a:t>  recorded with sdlc 0.8.0; licenses:</a:t>
             </a:r>
             <a:endParaRPr lang="en-US" sz="1000" dirty="0"/>
           </a:p>
@@ -14090,7 +14207,7 @@
                 <a:ea typeface="Courier New" pitchFamily="34" charset="-122"/>
                 <a:cs typeface="Courier New" pitchFamily="34" charset="-120"/>
               </a:rPr>
-              <a:t>(last 15 of 33 entries; --limit to see</a:t>
+              <a:t>(last 15 of 43 entries; --limit to see</a:t>
             </a:r>
             <a:endParaRPr lang="en-US" sz="1000" dirty="0"/>
           </a:p>
@@ -14124,7 +14241,7 @@
                 <a:ea typeface="Courier New" pitchFamily="34" charset="-122"/>
                 <a:cs typeface="Courier New" pitchFamily="34" charset="-120"/>
               </a:rPr>
-              <a:t>2026-10-05T16:50:59.142Z  deferred.added   </a:t>
+              <a:t>2026-10-05T20:31:10.507Z  gate.review.await</a:t>
             </a:r>
             <a:endParaRPr lang="en-US" sz="1000" dirty="0"/>
           </a:p>
@@ -14141,7 +14258,7 @@
                 <a:ea typeface="Courier New" pitchFamily="34" charset="-122"/>
                 <a:cs typeface="Courier New" pitchFamily="34" charset="-120"/>
               </a:rPr>
-              <a:t>  basic-arithmetic Bob Turner</a:t>
+              <a:t>  ing       basic-arithmetic  -</a:t>
             </a:r>
             <a:endParaRPr lang="en-US" sz="1000" dirty="0"/>
           </a:p>
@@ -14158,7 +14275,7 @@
                 <a:ea typeface="Courier New" pitchFamily="34" charset="-122"/>
                 <a:cs typeface="Courier New" pitchFamily="34" charset="-120"/>
               </a:rPr>
-              <a:t>  &lt;bob@calc.example&gt; - D1 Division by zero</a:t>
+              <a:t>  sha256:6839dde7b6d0d2b59ae640509bcfdb2d9c</a:t>
             </a:r>
             <a:endParaRPr lang="en-US" sz="1000" dirty="0"/>
           </a:p>
@@ -14175,7 +14292,7 @@
                 <a:ea typeface="Courier New" pitchFamily="34" charset="-122"/>
                 <a:cs typeface="Courier New" pitchFamily="34" charset="-120"/>
               </a:rPr>
-              <a:t>  shows an error [sdlc 0.7.3 · community]</a:t>
+              <a:t>  c6ee7489b5dcb865f1ed7bc402216b [sdlc</a:t>
             </a:r>
             <a:endParaRPr lang="en-US" sz="1000" dirty="0"/>
           </a:p>
@@ -14192,7 +14309,7 @@
                 <a:ea typeface="Courier New" pitchFamily="34" charset="-122"/>
                 <a:cs typeface="Courier New" pitchFamily="34" charset="-120"/>
               </a:rPr>
-              <a:t>2026-10-05T16:51:04.017Z  gate.review.appro</a:t>
+              <a:t>  0.8.0 · community]</a:t>
             </a:r>
             <a:endParaRPr lang="en-US" sz="1000" dirty="0"/>
           </a:p>
@@ -14209,6 +14326,23 @@
                 <a:ea typeface="Courier New" pitchFamily="34" charset="-122"/>
                 <a:cs typeface="Courier New" pitchFamily="34" charset="-120"/>
               </a:rPr>
+              <a:t>2026-10-05T20:31:12.907Z  gate.review.appro</a:t>
+            </a:r>
+            <a:endParaRPr lang="en-US" sz="1000" dirty="0"/>
+          </a:p>
+          <a:p>
+            <a:pPr indent="0" marL="0">
+              <a:buNone/>
+            </a:pPr>
+            <a:r>
+              <a:rPr lang="en-US" sz="1000" dirty="0">
+                <a:solidFill>
+                  <a:srgbClr val="E8EEF2"/>
+                </a:solidFill>
+                <a:latin typeface="Courier New" pitchFamily="34" charset="0"/>
+                <a:ea typeface="Courier New" pitchFamily="34" charset="-122"/>
+                <a:cs typeface="Courier New" pitchFamily="34" charset="-120"/>
+              </a:rPr>
               <a:t>  ved       basic-arithmetic Carol Hughes</a:t>
             </a:r>
             <a:endParaRPr lang="en-US" sz="1000" dirty="0"/>
@@ -14243,7 +14377,7 @@
                 <a:ea typeface="Courier New" pitchFamily="34" charset="-122"/>
                 <a:cs typeface="Courier New" pitchFamily="34" charset="-120"/>
               </a:rPr>
-              <a:t>  [sdlc 0.7.3 · community]</a:t>
+              <a:t>  [sdlc 0.8.0 · community]</a:t>
             </a:r>
             <a:endParaRPr lang="en-US" sz="1000" dirty="0"/>
           </a:p>
@@ -14260,7 +14394,7 @@
                 <a:ea typeface="Courier New" pitchFamily="34" charset="-122"/>
                 <a:cs typeface="Courier New" pitchFamily="34" charset="-120"/>
               </a:rPr>
-              <a:t>2026-10-05T16:51:06.107Z  gate.release.appr</a:t>
+              <a:t>2026-10-05T20:31:16.013Z  gate.release.appr</a:t>
             </a:r>
             <a:endParaRPr lang="en-US" sz="1000" dirty="0"/>
           </a:p>
@@ -14311,24 +14445,7 @@
                 <a:ea typeface="Courier New" pitchFamily="34" charset="-122"/>
                 <a:cs typeface="Courier New" pitchFamily="34" charset="-120"/>
               </a:rPr>
-              <a:t>  release-manager [sdlc 0.7.3 · community]</a:t>
-            </a:r>
-            <a:endParaRPr lang="en-US" sz="1000" dirty="0"/>
-          </a:p>
-          <a:p>
-            <a:pPr indent="0" marL="0">
-              <a:buNone/>
-            </a:pPr>
-            <a:r>
-              <a:rPr lang="en-US" sz="1000" dirty="0">
-                <a:solidFill>
-                  <a:srgbClr val="E8EEF2"/>
-                </a:solidFill>
-                <a:latin typeface="Courier New" pitchFamily="34" charset="0"/>
-                <a:ea typeface="Courier New" pitchFamily="34" charset="-122"/>
-                <a:cs typeface="Courier New" pitchFamily="34" charset="-120"/>
-              </a:rPr>
-              <a:t>2026-10-05T16:51:11.426Z  change.archived  </a:t>
+              <a:t>  release-manager [sdlc 0.8.0 · community]</a:t>
             </a:r>
             <a:endParaRPr lang="en-US" sz="1000" dirty="0"/>
           </a:p>
@@ -15061,7 +15178,7 @@
                 <a:ea typeface="Cambria" pitchFamily="34" charset="-122"/>
                 <a:cs typeface="Cambria" pitchFamily="34" charset="-120"/>
               </a:rPr>
-              <a:t>79</a:t>
+              <a:t>85</a:t>
             </a:r>
             <a:endParaRPr lang="en-US" sz="6000" dirty="0"/>
           </a:p>
@@ -15166,7 +15283,7 @@
                 <a:ea typeface="Cambria" pitchFamily="34" charset="-122"/>
                 <a:cs typeface="Cambria" pitchFamily="34" charset="-120"/>
               </a:rPr>
-              <a:t>51</a:t>
+              <a:t>55</a:t>
             </a:r>
             <a:endParaRPr lang="en-US" sz="6000" dirty="0"/>
           </a:p>
@@ -15205,7 +15322,7 @@
                 <a:ea typeface="Calibri" pitchFamily="34" charset="-122"/>
                 <a:cs typeface="Calibri" pitchFamily="34" charset="-120"/>
               </a:rPr>
-              <a:t>of 51 commands</a:t>
+              <a:t>of 55 commands</a:t>
             </a:r>
             <a:endParaRPr lang="en-US" sz="1600" dirty="0"/>
           </a:p>
@@ -17806,7 +17923,7 @@
         <p:spPr>
           <a:xfrm>
             <a:off x="2578608" y="4791456"/>
-            <a:ext cx="1276096" cy="256032"/>
+            <a:ext cx="747776" cy="256032"/>
           </a:xfrm>
           <a:prstGeom prst="roundRect">
             <a:avLst>
@@ -17833,7 +17950,7 @@
         <p:spPr>
           <a:xfrm>
             <a:off x="2578608" y="4791456"/>
-            <a:ext cx="1276096" cy="256032"/>
+            <a:ext cx="747776" cy="256032"/>
           </a:xfrm>
           <a:prstGeom prst="rect">
             <a:avLst/>
@@ -17857,7 +17974,7 @@
                 <a:ea typeface="Calibri" pitchFamily="34" charset="-122"/>
                 <a:cs typeface="Calibri" pitchFamily="34" charset="-120"/>
               </a:rPr>
-              <a:t>approvals verify</a:t>
+              <a:t>takeover</a:t>
             </a:r>
             <a:endParaRPr lang="en-US" sz="1000" dirty="0"/>
           </a:p>
@@ -17871,8 +17988,8 @@
         </p:nvSpPr>
         <p:spPr>
           <a:xfrm>
-            <a:off x="3946144" y="4791456"/>
-            <a:ext cx="549656" cy="256032"/>
+            <a:off x="3417824" y="4791456"/>
+            <a:ext cx="1210056" cy="256032"/>
           </a:xfrm>
           <a:prstGeom prst="roundRect">
             <a:avLst>
@@ -17898,8 +18015,8 @@
         </p:nvSpPr>
         <p:spPr>
           <a:xfrm>
-            <a:off x="3946144" y="4791456"/>
-            <a:ext cx="549656" cy="256032"/>
+            <a:off x="3417824" y="4791456"/>
+            <a:ext cx="1210056" cy="256032"/>
           </a:xfrm>
           <a:prstGeom prst="rect">
             <a:avLst/>
@@ -17923,7 +18040,7 @@
                 <a:ea typeface="Calibri" pitchFamily="34" charset="-122"/>
                 <a:cs typeface="Calibri" pitchFamily="34" charset="-120"/>
               </a:rPr>
-              <a:t>tests</a:t>
+              <a:t>release-control</a:t>
             </a:r>
             <a:endParaRPr lang="en-US" sz="1000" dirty="0"/>
           </a:p>
@@ -17937,7 +18054,7 @@
         </p:nvSpPr>
         <p:spPr>
           <a:xfrm>
-            <a:off x="4587240" y="4791456"/>
+            <a:off x="4719320" y="4791456"/>
             <a:ext cx="615696" cy="256032"/>
           </a:xfrm>
           <a:prstGeom prst="roundRect">
@@ -17964,7 +18081,7 @@
         </p:nvSpPr>
         <p:spPr>
           <a:xfrm>
-            <a:off x="4587240" y="4791456"/>
+            <a:off x="4719320" y="4791456"/>
             <a:ext cx="615696" cy="256032"/>
           </a:xfrm>
           <a:prstGeom prst="rect">
@@ -17989,7 +18106,7 @@
                 <a:ea typeface="Calibri" pitchFamily="34" charset="-122"/>
                 <a:cs typeface="Calibri" pitchFamily="34" charset="-120"/>
               </a:rPr>
-              <a:t>verify</a:t>
+              <a:t>rework</a:t>
             </a:r>
             <a:endParaRPr lang="en-US" sz="1000" dirty="0"/>
           </a:p>
@@ -18003,8 +18120,8 @@
         </p:nvSpPr>
         <p:spPr>
           <a:xfrm>
-            <a:off x="5294376" y="4791456"/>
-            <a:ext cx="615696" cy="256032"/>
+            <a:off x="5426456" y="4791456"/>
+            <a:ext cx="1276096" cy="256032"/>
           </a:xfrm>
           <a:prstGeom prst="roundRect">
             <a:avLst>
@@ -18030,8 +18147,8 @@
         </p:nvSpPr>
         <p:spPr>
           <a:xfrm>
-            <a:off x="5294376" y="4791456"/>
-            <a:ext cx="615696" cy="256032"/>
+            <a:off x="5426456" y="4791456"/>
+            <a:ext cx="1276096" cy="256032"/>
           </a:xfrm>
           <a:prstGeom prst="rect">
             <a:avLst/>
@@ -18055,7 +18172,7 @@
                 <a:ea typeface="Calibri" pitchFamily="34" charset="-122"/>
                 <a:cs typeface="Calibri" pitchFamily="34" charset="-120"/>
               </a:rPr>
-              <a:t>review</a:t>
+              <a:t>approvals verify</a:t>
             </a:r>
             <a:endParaRPr lang="en-US" sz="1000" dirty="0"/>
           </a:p>
@@ -18069,8 +18186,8 @@
         </p:nvSpPr>
         <p:spPr>
           <a:xfrm>
-            <a:off x="6001512" y="4791456"/>
-            <a:ext cx="747776" cy="256032"/>
+            <a:off x="6793992" y="4791456"/>
+            <a:ext cx="549656" cy="256032"/>
           </a:xfrm>
           <a:prstGeom prst="roundRect">
             <a:avLst>
@@ -18096,8 +18213,8 @@
         </p:nvSpPr>
         <p:spPr>
           <a:xfrm>
-            <a:off x="6001512" y="4791456"/>
-            <a:ext cx="747776" cy="256032"/>
+            <a:off x="6793992" y="4791456"/>
+            <a:ext cx="549656" cy="256032"/>
           </a:xfrm>
           <a:prstGeom prst="rect">
             <a:avLst/>
@@ -18121,7 +18238,7 @@
                 <a:ea typeface="Calibri" pitchFamily="34" charset="-122"/>
                 <a:cs typeface="Calibri" pitchFamily="34" charset="-120"/>
               </a:rPr>
-              <a:t>validate</a:t>
+              <a:t>tests</a:t>
             </a:r>
             <a:endParaRPr lang="en-US" sz="1000" dirty="0"/>
           </a:p>
@@ -18135,8 +18252,8 @@
         </p:nvSpPr>
         <p:spPr>
           <a:xfrm>
-            <a:off x="6840728" y="4791456"/>
-            <a:ext cx="681736" cy="256032"/>
+            <a:off x="7435088" y="4791456"/>
+            <a:ext cx="615696" cy="256032"/>
           </a:xfrm>
           <a:prstGeom prst="roundRect">
             <a:avLst>
@@ -18162,8 +18279,8 @@
         </p:nvSpPr>
         <p:spPr>
           <a:xfrm>
-            <a:off x="6840728" y="4791456"/>
-            <a:ext cx="681736" cy="256032"/>
+            <a:off x="7435088" y="4791456"/>
+            <a:ext cx="615696" cy="256032"/>
           </a:xfrm>
           <a:prstGeom prst="rect">
             <a:avLst/>
@@ -18187,7 +18304,7 @@
                 <a:ea typeface="Calibri" pitchFamily="34" charset="-122"/>
                 <a:cs typeface="Calibri" pitchFamily="34" charset="-120"/>
               </a:rPr>
-              <a:t>archive</a:t>
+              <a:t>verify</a:t>
             </a:r>
             <a:endParaRPr lang="en-US" sz="1000" dirty="0"/>
           </a:p>
@@ -18201,8 +18318,8 @@
         </p:nvSpPr>
         <p:spPr>
           <a:xfrm>
-            <a:off x="7613904" y="4791456"/>
-            <a:ext cx="549656" cy="256032"/>
+            <a:off x="8142224" y="4791456"/>
+            <a:ext cx="615696" cy="256032"/>
           </a:xfrm>
           <a:prstGeom prst="roundRect">
             <a:avLst>
@@ -18228,8 +18345,8 @@
         </p:nvSpPr>
         <p:spPr>
           <a:xfrm>
-            <a:off x="7613904" y="4791456"/>
-            <a:ext cx="549656" cy="256032"/>
+            <a:off x="8142224" y="4791456"/>
+            <a:ext cx="615696" cy="256032"/>
           </a:xfrm>
           <a:prstGeom prst="rect">
             <a:avLst/>
@@ -18253,7 +18370,7 @@
                 <a:ea typeface="Calibri" pitchFamily="34" charset="-122"/>
                 <a:cs typeface="Calibri" pitchFamily="34" charset="-120"/>
               </a:rPr>
-              <a:t>audit</a:t>
+              <a:t>review</a:t>
             </a:r>
             <a:endParaRPr lang="en-US" sz="1000" dirty="0"/>
           </a:p>
@@ -18267,8 +18384,8 @@
         </p:nvSpPr>
         <p:spPr>
           <a:xfrm>
-            <a:off x="8255000" y="4791456"/>
-            <a:ext cx="615696" cy="256032"/>
+            <a:off x="8849360" y="4791456"/>
+            <a:ext cx="747776" cy="256032"/>
           </a:xfrm>
           <a:prstGeom prst="roundRect">
             <a:avLst>
@@ -18294,8 +18411,8 @@
         </p:nvSpPr>
         <p:spPr>
           <a:xfrm>
-            <a:off x="8255000" y="4791456"/>
-            <a:ext cx="615696" cy="256032"/>
+            <a:off x="8849360" y="4791456"/>
+            <a:ext cx="747776" cy="256032"/>
           </a:xfrm>
           <a:prstGeom prst="rect">
             <a:avLst/>
@@ -18319,7 +18436,7 @@
                 <a:ea typeface="Calibri" pitchFamily="34" charset="-122"/>
                 <a:cs typeface="Calibri" pitchFamily="34" charset="-120"/>
               </a:rPr>
-              <a:t>report</a:t>
+              <a:t>validate</a:t>
             </a:r>
             <a:endParaRPr lang="en-US" sz="1000" dirty="0"/>
           </a:p>
@@ -18333,8 +18450,8 @@
         </p:nvSpPr>
         <p:spPr>
           <a:xfrm>
-            <a:off x="8962136" y="4791456"/>
-            <a:ext cx="813816" cy="256032"/>
+            <a:off x="9688576" y="4791456"/>
+            <a:ext cx="681736" cy="256032"/>
           </a:xfrm>
           <a:prstGeom prst="roundRect">
             <a:avLst>
@@ -18360,8 +18477,8 @@
         </p:nvSpPr>
         <p:spPr>
           <a:xfrm>
-            <a:off x="8962136" y="4791456"/>
-            <a:ext cx="813816" cy="256032"/>
+            <a:off x="9688576" y="4791456"/>
+            <a:ext cx="681736" cy="256032"/>
           </a:xfrm>
           <a:prstGeom prst="rect">
             <a:avLst/>
@@ -18385,7 +18502,7 @@
                 <a:ea typeface="Calibri" pitchFamily="34" charset="-122"/>
                 <a:cs typeface="Calibri" pitchFamily="34" charset="-120"/>
               </a:rPr>
-              <a:t>dashboard</a:t>
+              <a:t>archive</a:t>
             </a:r>
             <a:endParaRPr lang="en-US" sz="1000" dirty="0"/>
           </a:p>
@@ -18399,8 +18516,8 @@
         </p:nvSpPr>
         <p:spPr>
           <a:xfrm>
-            <a:off x="9867392" y="4791456"/>
-            <a:ext cx="417576" cy="256032"/>
+            <a:off x="10461752" y="4791456"/>
+            <a:ext cx="549656" cy="256032"/>
           </a:xfrm>
           <a:prstGeom prst="roundRect">
             <a:avLst>
@@ -18426,8 +18543,8 @@
         </p:nvSpPr>
         <p:spPr>
           <a:xfrm>
-            <a:off x="9867392" y="4791456"/>
-            <a:ext cx="417576" cy="256032"/>
+            <a:off x="10461752" y="4791456"/>
+            <a:ext cx="549656" cy="256032"/>
           </a:xfrm>
           <a:prstGeom prst="rect">
             <a:avLst/>
@@ -18451,7 +18568,7 @@
                 <a:ea typeface="Calibri" pitchFamily="34" charset="-122"/>
                 <a:cs typeface="Calibri" pitchFamily="34" charset="-120"/>
               </a:rPr>
-              <a:t>log</a:t>
+              <a:t>audit</a:t>
             </a:r>
             <a:endParaRPr lang="en-US" sz="1000" dirty="0"/>
           </a:p>
@@ -18465,8 +18582,8 @@
         </p:nvSpPr>
         <p:spPr>
           <a:xfrm>
-            <a:off x="10376408" y="4791456"/>
-            <a:ext cx="681736" cy="256032"/>
+            <a:off x="11102848" y="4791456"/>
+            <a:ext cx="615696" cy="256032"/>
           </a:xfrm>
           <a:prstGeom prst="roundRect">
             <a:avLst>
@@ -18492,8 +18609,8 @@
         </p:nvSpPr>
         <p:spPr>
           <a:xfrm>
-            <a:off x="10376408" y="4791456"/>
-            <a:ext cx="681736" cy="256032"/>
+            <a:off x="11102848" y="4791456"/>
+            <a:ext cx="615696" cy="256032"/>
           </a:xfrm>
           <a:prstGeom prst="rect">
             <a:avLst/>
@@ -18517,7 +18634,7 @@
                 <a:ea typeface="Calibri" pitchFamily="34" charset="-122"/>
                 <a:cs typeface="Calibri" pitchFamily="34" charset="-120"/>
               </a:rPr>
-              <a:t>license</a:t>
+              <a:t>report</a:t>
             </a:r>
             <a:endParaRPr lang="en-US" sz="1000" dirty="0"/>
           </a:p>
@@ -18532,7 +18649,7 @@
         <p:spPr>
           <a:xfrm>
             <a:off x="457200" y="5138928"/>
-            <a:ext cx="615696" cy="256032"/>
+            <a:ext cx="813816" cy="256032"/>
           </a:xfrm>
           <a:prstGeom prst="roundRect">
             <a:avLst>
@@ -18559,7 +18676,7 @@
         <p:spPr>
           <a:xfrm>
             <a:off x="457200" y="5138928"/>
-            <a:ext cx="615696" cy="256032"/>
+            <a:ext cx="813816" cy="256032"/>
           </a:xfrm>
           <a:prstGeom prst="rect">
             <a:avLst/>
@@ -18583,7 +18700,7 @@
                 <a:ea typeface="Calibri" pitchFamily="34" charset="-122"/>
                 <a:cs typeface="Calibri" pitchFamily="34" charset="-120"/>
               </a:rPr>
-              <a:t>doctor</a:t>
+              <a:t>dashboard</a:t>
             </a:r>
             <a:endParaRPr lang="en-US" sz="1000" dirty="0"/>
           </a:p>
@@ -18597,8 +18714,8 @@
         </p:nvSpPr>
         <p:spPr>
           <a:xfrm>
-            <a:off x="1164336" y="5138928"/>
-            <a:ext cx="1011936" cy="256032"/>
+            <a:off x="1362456" y="5138928"/>
+            <a:ext cx="417576" cy="256032"/>
           </a:xfrm>
           <a:prstGeom prst="roundRect">
             <a:avLst>
@@ -18624,8 +18741,8 @@
         </p:nvSpPr>
         <p:spPr>
           <a:xfrm>
-            <a:off x="1164336" y="5138928"/>
-            <a:ext cx="1011936" cy="256032"/>
+            <a:off x="1362456" y="5138928"/>
+            <a:ext cx="417576" cy="256032"/>
           </a:xfrm>
           <a:prstGeom prst="rect">
             <a:avLst/>
@@ -18649,7 +18766,7 @@
                 <a:ea typeface="Calibri" pitchFamily="34" charset="-122"/>
                 <a:cs typeface="Calibri" pitchFamily="34" charset="-120"/>
               </a:rPr>
-              <a:t>plugin build</a:t>
+              <a:t>log</a:t>
             </a:r>
             <a:endParaRPr lang="en-US" sz="1000" dirty="0"/>
           </a:p>
@@ -18663,8 +18780,8 @@
         </p:nvSpPr>
         <p:spPr>
           <a:xfrm>
-            <a:off x="2267712" y="5138928"/>
-            <a:ext cx="483616" cy="256032"/>
+            <a:off x="1871472" y="5138928"/>
+            <a:ext cx="681736" cy="256032"/>
           </a:xfrm>
           <a:prstGeom prst="roundRect">
             <a:avLst>
@@ -18690,8 +18807,8 @@
         </p:nvSpPr>
         <p:spPr>
           <a:xfrm>
-            <a:off x="2267712" y="5138928"/>
-            <a:ext cx="483616" cy="256032"/>
+            <a:off x="1871472" y="5138928"/>
+            <a:ext cx="681736" cy="256032"/>
           </a:xfrm>
           <a:prstGeom prst="rect">
             <a:avLst/>
@@ -18715,7 +18832,7 @@
                 <a:ea typeface="Calibri" pitchFamily="34" charset="-122"/>
                 <a:cs typeface="Calibri" pitchFamily="34" charset="-120"/>
               </a:rPr>
-              <a:t>hook</a:t>
+              <a:t>license</a:t>
             </a:r>
             <a:endParaRPr lang="en-US" sz="1000" dirty="0"/>
           </a:p>
@@ -18729,8 +18846,8 @@
         </p:nvSpPr>
         <p:spPr>
           <a:xfrm>
-            <a:off x="2842768" y="5138928"/>
-            <a:ext cx="747776" cy="256032"/>
+            <a:off x="2644648" y="5138928"/>
+            <a:ext cx="615696" cy="256032"/>
           </a:xfrm>
           <a:prstGeom prst="roundRect">
             <a:avLst>
@@ -18756,7 +18873,271 @@
         </p:nvSpPr>
         <p:spPr>
           <a:xfrm>
-            <a:off x="2842768" y="5138928"/>
+            <a:off x="2644648" y="5138928"/>
+            <a:ext cx="615696" cy="256032"/>
+          </a:xfrm>
+          <a:prstGeom prst="rect">
+            <a:avLst/>
+          </a:prstGeom>
+          <a:noFill/>
+          <a:ln/>
+        </p:spPr>
+        <p:txBody>
+          <a:bodyPr wrap="square" lIns="0" tIns="0" rIns="0" bIns="0" rtlCol="0" anchor="ctr"/>
+          <a:lstStyle/>
+          <a:p>
+            <a:pPr algn="ctr" indent="0" marL="0">
+              <a:buNone/>
+            </a:pPr>
+            <a:r>
+              <a:rPr lang="en-US" sz="1000" dirty="0">
+                <a:solidFill>
+                  <a:srgbClr val="1F2430"/>
+                </a:solidFill>
+                <a:latin typeface="Calibri" pitchFamily="34" charset="0"/>
+                <a:ea typeface="Calibri" pitchFamily="34" charset="-122"/>
+                <a:cs typeface="Calibri" pitchFamily="34" charset="-120"/>
+              </a:rPr>
+              <a:t>doctor</a:t>
+            </a:r>
+            <a:endParaRPr lang="en-US" sz="1000" dirty="0"/>
+          </a:p>
+        </p:txBody>
+      </p:sp>
+      <p:sp>
+        <p:nvSpPr>
+          <p:cNvPr id="118" name="Shape 116"/>
+          <p:cNvSpPr/>
+          <p:nvPr/>
+        </p:nvSpPr>
+        <p:spPr>
+          <a:xfrm>
+            <a:off x="3351784" y="5138928"/>
+            <a:ext cx="1011936" cy="256032"/>
+          </a:xfrm>
+          <a:prstGeom prst="roundRect">
+            <a:avLst>
+              <a:gd name="adj" fmla="val 50000"/>
+            </a:avLst>
+          </a:prstGeom>
+          <a:solidFill>
+            <a:srgbClr val="F3F5F8"/>
+          </a:solidFill>
+          <a:ln w="12700">
+            <a:solidFill>
+              <a:srgbClr val="F3F5F8"/>
+            </a:solidFill>
+            <a:prstDash val="solid"/>
+          </a:ln>
+        </p:spPr>
+      </p:sp>
+      <p:sp>
+        <p:nvSpPr>
+          <p:cNvPr id="119" name="Text 117"/>
+          <p:cNvSpPr txBox="1"/>
+          <p:nvPr/>
+        </p:nvSpPr>
+        <p:spPr>
+          <a:xfrm>
+            <a:off x="3351784" y="5138928"/>
+            <a:ext cx="1011936" cy="256032"/>
+          </a:xfrm>
+          <a:prstGeom prst="rect">
+            <a:avLst/>
+          </a:prstGeom>
+          <a:noFill/>
+          <a:ln/>
+        </p:spPr>
+        <p:txBody>
+          <a:bodyPr wrap="square" lIns="0" tIns="0" rIns="0" bIns="0" rtlCol="0" anchor="ctr"/>
+          <a:lstStyle/>
+          <a:p>
+            <a:pPr algn="ctr" indent="0" marL="0">
+              <a:buNone/>
+            </a:pPr>
+            <a:r>
+              <a:rPr lang="en-US" sz="1000" dirty="0">
+                <a:solidFill>
+                  <a:srgbClr val="1F2430"/>
+                </a:solidFill>
+                <a:latin typeface="Calibri" pitchFamily="34" charset="0"/>
+                <a:ea typeface="Calibri" pitchFamily="34" charset="-122"/>
+                <a:cs typeface="Calibri" pitchFamily="34" charset="-120"/>
+              </a:rPr>
+              <a:t>plugin build</a:t>
+            </a:r>
+            <a:endParaRPr lang="en-US" sz="1000" dirty="0"/>
+          </a:p>
+        </p:txBody>
+      </p:sp>
+      <p:sp>
+        <p:nvSpPr>
+          <p:cNvPr id="120" name="Shape 118"/>
+          <p:cNvSpPr/>
+          <p:nvPr/>
+        </p:nvSpPr>
+        <p:spPr>
+          <a:xfrm>
+            <a:off x="4455160" y="5138928"/>
+            <a:ext cx="549656" cy="256032"/>
+          </a:xfrm>
+          <a:prstGeom prst="roundRect">
+            <a:avLst>
+              <a:gd name="adj" fmla="val 50000"/>
+            </a:avLst>
+          </a:prstGeom>
+          <a:solidFill>
+            <a:srgbClr val="F3F5F8"/>
+          </a:solidFill>
+          <a:ln w="12700">
+            <a:solidFill>
+              <a:srgbClr val="F3F5F8"/>
+            </a:solidFill>
+            <a:prstDash val="solid"/>
+          </a:ln>
+        </p:spPr>
+      </p:sp>
+      <p:sp>
+        <p:nvSpPr>
+          <p:cNvPr id="121" name="Text 119"/>
+          <p:cNvSpPr txBox="1"/>
+          <p:nvPr/>
+        </p:nvSpPr>
+        <p:spPr>
+          <a:xfrm>
+            <a:off x="4455160" y="5138928"/>
+            <a:ext cx="549656" cy="256032"/>
+          </a:xfrm>
+          <a:prstGeom prst="rect">
+            <a:avLst/>
+          </a:prstGeom>
+          <a:noFill/>
+          <a:ln/>
+        </p:spPr>
+        <p:txBody>
+          <a:bodyPr wrap="square" lIns="0" tIns="0" rIns="0" bIns="0" rtlCol="0" anchor="ctr"/>
+          <a:lstStyle/>
+          <a:p>
+            <a:pPr algn="ctr" indent="0" marL="0">
+              <a:buNone/>
+            </a:pPr>
+            <a:r>
+              <a:rPr lang="en-US" sz="1000" dirty="0">
+                <a:solidFill>
+                  <a:srgbClr val="1F2430"/>
+                </a:solidFill>
+                <a:latin typeface="Calibri" pitchFamily="34" charset="0"/>
+                <a:ea typeface="Calibri" pitchFamily="34" charset="-122"/>
+                <a:cs typeface="Calibri" pitchFamily="34" charset="-120"/>
+              </a:rPr>
+              <a:t>trace</a:t>
+            </a:r>
+            <a:endParaRPr lang="en-US" sz="1000" dirty="0"/>
+          </a:p>
+        </p:txBody>
+      </p:sp>
+      <p:sp>
+        <p:nvSpPr>
+          <p:cNvPr id="122" name="Shape 120"/>
+          <p:cNvSpPr/>
+          <p:nvPr/>
+        </p:nvSpPr>
+        <p:spPr>
+          <a:xfrm>
+            <a:off x="5096256" y="5138928"/>
+            <a:ext cx="483616" cy="256032"/>
+          </a:xfrm>
+          <a:prstGeom prst="roundRect">
+            <a:avLst>
+              <a:gd name="adj" fmla="val 50000"/>
+            </a:avLst>
+          </a:prstGeom>
+          <a:solidFill>
+            <a:srgbClr val="F3F5F8"/>
+          </a:solidFill>
+          <a:ln w="12700">
+            <a:solidFill>
+              <a:srgbClr val="F3F5F8"/>
+            </a:solidFill>
+            <a:prstDash val="solid"/>
+          </a:ln>
+        </p:spPr>
+      </p:sp>
+      <p:sp>
+        <p:nvSpPr>
+          <p:cNvPr id="123" name="Text 121"/>
+          <p:cNvSpPr txBox="1"/>
+          <p:nvPr/>
+        </p:nvSpPr>
+        <p:spPr>
+          <a:xfrm>
+            <a:off x="5096256" y="5138928"/>
+            <a:ext cx="483616" cy="256032"/>
+          </a:xfrm>
+          <a:prstGeom prst="rect">
+            <a:avLst/>
+          </a:prstGeom>
+          <a:noFill/>
+          <a:ln/>
+        </p:spPr>
+        <p:txBody>
+          <a:bodyPr wrap="square" lIns="0" tIns="0" rIns="0" bIns="0" rtlCol="0" anchor="ctr"/>
+          <a:lstStyle/>
+          <a:p>
+            <a:pPr algn="ctr" indent="0" marL="0">
+              <a:buNone/>
+            </a:pPr>
+            <a:r>
+              <a:rPr lang="en-US" sz="1000" dirty="0">
+                <a:solidFill>
+                  <a:srgbClr val="1F2430"/>
+                </a:solidFill>
+                <a:latin typeface="Calibri" pitchFamily="34" charset="0"/>
+                <a:ea typeface="Calibri" pitchFamily="34" charset="-122"/>
+                <a:cs typeface="Calibri" pitchFamily="34" charset="-120"/>
+              </a:rPr>
+              <a:t>hook</a:t>
+            </a:r>
+            <a:endParaRPr lang="en-US" sz="1000" dirty="0"/>
+          </a:p>
+        </p:txBody>
+      </p:sp>
+      <p:sp>
+        <p:nvSpPr>
+          <p:cNvPr id="124" name="Shape 122"/>
+          <p:cNvSpPr/>
+          <p:nvPr/>
+        </p:nvSpPr>
+        <p:spPr>
+          <a:xfrm>
+            <a:off x="5671312" y="5138928"/>
+            <a:ext cx="747776" cy="256032"/>
+          </a:xfrm>
+          <a:prstGeom prst="roundRect">
+            <a:avLst>
+              <a:gd name="adj" fmla="val 50000"/>
+            </a:avLst>
+          </a:prstGeom>
+          <a:solidFill>
+            <a:srgbClr val="F3F5F8"/>
+          </a:solidFill>
+          <a:ln w="12700">
+            <a:solidFill>
+              <a:srgbClr val="F3F5F8"/>
+            </a:solidFill>
+            <a:prstDash val="solid"/>
+          </a:ln>
+        </p:spPr>
+      </p:sp>
+      <p:sp>
+        <p:nvSpPr>
+          <p:cNvPr id="125" name="Text 123"/>
+          <p:cNvSpPr txBox="1"/>
+          <p:nvPr/>
+        </p:nvSpPr>
+        <p:spPr>
+          <a:xfrm>
+            <a:off x="5671312" y="5138928"/>
             <a:ext cx="747776" cy="256032"/>
           </a:xfrm>
           <a:prstGeom prst="rect">
@@ -23251,7 +23632,7 @@
                 <a:ea typeface="Courier New" pitchFamily="34" charset="-122"/>
                 <a:cs typeface="Courier New" pitchFamily="34" charset="-120"/>
               </a:rPr>
-              <a:t>  sdlc 0.7.3, license: community</a:t>
+              <a:t>  sdlc 0.8.0, license: community</a:t>
             </a:r>
             <a:endParaRPr lang="en-US" sz="1000" dirty="0"/>
           </a:p>
@@ -27606,7 +27987,7 @@
                 <a:ea typeface="Courier New" pitchFamily="34" charset="-122"/>
                 <a:cs typeface="Courier New" pitchFamily="34" charset="-120"/>
               </a:rPr>
-              <a:t>Next: person — A product-owner must review</a:t>
+              <a:t>Next: person — Alice Walker (product-owner)</a:t>
             </a:r>
             <a:endParaRPr lang="en-US" sz="1000" dirty="0"/>
           </a:p>
@@ -27623,7 +28004,7 @@
                 <a:ea typeface="Courier New" pitchFamily="34" charset="-122"/>
                 <a:cs typeface="Courier New" pitchFamily="34" charset="-120"/>
               </a:rPr>
-              <a:t>  and approve the intent gate (intent):</a:t>
+              <a:t>  must review and approve the intent gate</a:t>
             </a:r>
             <a:endParaRPr lang="en-US" sz="1000" dirty="0"/>
           </a:p>
@@ -27640,7 +28021,7 @@
                 <a:ea typeface="Courier New" pitchFamily="34" charset="-122"/>
                 <a:cs typeface="Courier New" pitchFamily="34" charset="-120"/>
               </a:rPr>
-              <a:t>  sdlc approve intent --change</a:t>
+              <a:t>  (intent): sdlc approve intent --change</a:t>
             </a:r>
             <a:endParaRPr lang="en-US" sz="1000" dirty="0"/>
           </a:p>
@@ -28093,7 +28474,7 @@
                 <a:ea typeface="Courier New" pitchFamily="34" charset="-122"/>
                 <a:cs typeface="Courier New" pitchFamily="34" charset="-120"/>
               </a:rPr>
-              <a:t>  approval (product-owner)</a:t>
+              <a:t>  approval (product-owner; 0 of 1)</a:t>
             </a:r>
             <a:endParaRPr lang="en-US" sz="1000" dirty="0"/>
           </a:p>
@@ -28372,6 +28753,138 @@
                 <a:cs typeface="Calibri" pitchFamily="34" charset="-120"/>
               </a:rPr>
               <a:t>instructions</a:t>
+            </a:r>
+            <a:endParaRPr lang="en-US" sz="1000" dirty="0"/>
+          </a:p>
+        </p:txBody>
+      </p:sp>
+      <p:sp>
+        <p:nvSpPr>
+          <p:cNvPr id="30" name="Shape 28"/>
+          <p:cNvSpPr/>
+          <p:nvPr/>
+        </p:nvSpPr>
+        <p:spPr>
+          <a:xfrm>
+            <a:off x="4248912" y="6053328"/>
+            <a:ext cx="747776" cy="256032"/>
+          </a:xfrm>
+          <a:prstGeom prst="roundRect">
+            <a:avLst>
+              <a:gd name="adj" fmla="val 50000"/>
+            </a:avLst>
+          </a:prstGeom>
+          <a:solidFill>
+            <a:srgbClr val="F3F5F8"/>
+          </a:solidFill>
+          <a:ln w="12700">
+            <a:solidFill>
+              <a:srgbClr val="F3F5F8"/>
+            </a:solidFill>
+            <a:prstDash val="solid"/>
+          </a:ln>
+        </p:spPr>
+      </p:sp>
+      <p:sp>
+        <p:nvSpPr>
+          <p:cNvPr id="31" name="Text 29"/>
+          <p:cNvSpPr txBox="1"/>
+          <p:nvPr/>
+        </p:nvSpPr>
+        <p:spPr>
+          <a:xfrm>
+            <a:off x="4248912" y="6053328"/>
+            <a:ext cx="747776" cy="256032"/>
+          </a:xfrm>
+          <a:prstGeom prst="rect">
+            <a:avLst/>
+          </a:prstGeom>
+          <a:noFill/>
+          <a:ln/>
+        </p:spPr>
+        <p:txBody>
+          <a:bodyPr wrap="square" lIns="0" tIns="0" rIns="0" bIns="0" rtlCol="0" anchor="ctr"/>
+          <a:lstStyle/>
+          <a:p>
+            <a:pPr algn="ctr" indent="0" marL="0">
+              <a:buNone/>
+            </a:pPr>
+            <a:r>
+              <a:rPr lang="en-US" sz="1000" dirty="0">
+                <a:solidFill>
+                  <a:srgbClr val="5B6475"/>
+                </a:solidFill>
+                <a:latin typeface="Calibri" pitchFamily="34" charset="0"/>
+                <a:ea typeface="Calibri" pitchFamily="34" charset="-122"/>
+                <a:cs typeface="Calibri" pitchFamily="34" charset="-120"/>
+              </a:rPr>
+              <a:t>takeover</a:t>
+            </a:r>
+            <a:endParaRPr lang="en-US" sz="1000" dirty="0"/>
+          </a:p>
+        </p:txBody>
+      </p:sp>
+      <p:sp>
+        <p:nvSpPr>
+          <p:cNvPr id="32" name="Shape 30"/>
+          <p:cNvSpPr/>
+          <p:nvPr/>
+        </p:nvSpPr>
+        <p:spPr>
+          <a:xfrm>
+            <a:off x="5088128" y="6053328"/>
+            <a:ext cx="1210056" cy="256032"/>
+          </a:xfrm>
+          <a:prstGeom prst="roundRect">
+            <a:avLst>
+              <a:gd name="adj" fmla="val 50000"/>
+            </a:avLst>
+          </a:prstGeom>
+          <a:solidFill>
+            <a:srgbClr val="F3F5F8"/>
+          </a:solidFill>
+          <a:ln w="12700">
+            <a:solidFill>
+              <a:srgbClr val="F3F5F8"/>
+            </a:solidFill>
+            <a:prstDash val="solid"/>
+          </a:ln>
+        </p:spPr>
+      </p:sp>
+      <p:sp>
+        <p:nvSpPr>
+          <p:cNvPr id="33" name="Text 31"/>
+          <p:cNvSpPr txBox="1"/>
+          <p:nvPr/>
+        </p:nvSpPr>
+        <p:spPr>
+          <a:xfrm>
+            <a:off x="5088128" y="6053328"/>
+            <a:ext cx="1210056" cy="256032"/>
+          </a:xfrm>
+          <a:prstGeom prst="rect">
+            <a:avLst/>
+          </a:prstGeom>
+          <a:noFill/>
+          <a:ln/>
+        </p:spPr>
+        <p:txBody>
+          <a:bodyPr wrap="square" lIns="0" tIns="0" rIns="0" bIns="0" rtlCol="0" anchor="ctr"/>
+          <a:lstStyle/>
+          <a:p>
+            <a:pPr algn="ctr" indent="0" marL="0">
+              <a:buNone/>
+            </a:pPr>
+            <a:r>
+              <a:rPr lang="en-US" sz="1000" dirty="0">
+                <a:solidFill>
+                  <a:srgbClr val="5B6475"/>
+                </a:solidFill>
+                <a:latin typeface="Calibri" pitchFamily="34" charset="0"/>
+                <a:ea typeface="Calibri" pitchFamily="34" charset="-122"/>
+                <a:cs typeface="Calibri" pitchFamily="34" charset="-120"/>
+              </a:rPr>
+              <a:t>release-control</a:t>
             </a:r>
             <a:endParaRPr lang="en-US" sz="1000" dirty="0"/>
           </a:p>
@@ -29589,6 +30102,72 @@
                 <a:cs typeface="Calibri" pitchFamily="34" charset="-120"/>
               </a:rPr>
               <a:t>approve</a:t>
+            </a:r>
+            <a:endParaRPr lang="en-US" sz="1000" dirty="0"/>
+          </a:p>
+        </p:txBody>
+      </p:sp>
+      <p:sp>
+        <p:nvSpPr>
+          <p:cNvPr id="28" name="Shape 26"/>
+          <p:cNvSpPr/>
+          <p:nvPr/>
+        </p:nvSpPr>
+        <p:spPr>
+          <a:xfrm>
+            <a:off x="3013456" y="6053328"/>
+            <a:ext cx="615696" cy="256032"/>
+          </a:xfrm>
+          <a:prstGeom prst="roundRect">
+            <a:avLst>
+              <a:gd name="adj" fmla="val 50000"/>
+            </a:avLst>
+          </a:prstGeom>
+          <a:solidFill>
+            <a:srgbClr val="F3F5F8"/>
+          </a:solidFill>
+          <a:ln w="12700">
+            <a:solidFill>
+              <a:srgbClr val="F3F5F8"/>
+            </a:solidFill>
+            <a:prstDash val="solid"/>
+          </a:ln>
+        </p:spPr>
+      </p:sp>
+      <p:sp>
+        <p:nvSpPr>
+          <p:cNvPr id="29" name="Text 27"/>
+          <p:cNvSpPr txBox="1"/>
+          <p:nvPr/>
+        </p:nvSpPr>
+        <p:spPr>
+          <a:xfrm>
+            <a:off x="3013456" y="6053328"/>
+            <a:ext cx="615696" cy="256032"/>
+          </a:xfrm>
+          <a:prstGeom prst="rect">
+            <a:avLst/>
+          </a:prstGeom>
+          <a:noFill/>
+          <a:ln/>
+        </p:spPr>
+        <p:txBody>
+          <a:bodyPr wrap="square" lIns="0" tIns="0" rIns="0" bIns="0" rtlCol="0" anchor="ctr"/>
+          <a:lstStyle/>
+          <a:p>
+            <a:pPr algn="ctr" indent="0" marL="0">
+              <a:buNone/>
+            </a:pPr>
+            <a:r>
+              <a:rPr lang="en-US" sz="1000" dirty="0">
+                <a:solidFill>
+                  <a:srgbClr val="5B6475"/>
+                </a:solidFill>
+                <a:latin typeface="Calibri" pitchFamily="34" charset="0"/>
+                <a:ea typeface="Calibri" pitchFamily="34" charset="-122"/>
+                <a:cs typeface="Calibri" pitchFamily="34" charset="-120"/>
+              </a:rPr>
+              <a:t>rework</a:t>
             </a:r>
             <a:endParaRPr lang="en-US" sz="1000" dirty="0"/>
           </a:p>

--- a/docs/demo/sdlc-calculator-demo.en.pptx
+++ b/docs/demo/sdlc-calculator-demo.en.pptx
@@ -5018,7 +5018,7 @@
                 <a:ea typeface="Courier New" pitchFamily="34" charset="-122"/>
                 <a:cs typeface="Courier New" pitchFamily="34" charset="-120"/>
               </a:rPr>
-              <a:t>✓ test (1.0s)</a:t>
+              <a:t>✓ test (1.1s)</a:t>
             </a:r>
             <a:endParaRPr lang="en-US" sz="1000" dirty="0"/>
           </a:p>
@@ -6566,7 +6566,7 @@
                 <a:ea typeface="Courier New" pitchFamily="34" charset="-122"/>
                 <a:cs typeface="Courier New" pitchFamily="34" charset="-120"/>
               </a:rPr>
-              <a:t>  code-owner (6839dde7b6d0)</a:t>
+              <a:t>  code-owner (5c90e1c6fa00)</a:t>
             </a:r>
             <a:endParaRPr lang="en-US" sz="1000" dirty="0"/>
           </a:p>
@@ -7247,7 +7247,7 @@
                 <a:ea typeface="Courier New" pitchFamily="34" charset="-122"/>
                 <a:cs typeface="Courier New" pitchFamily="34" charset="-120"/>
               </a:rPr>
-              <a:t>  release-manager (6839dde7b6d0)</a:t>
+              <a:t>  release-manager (5c90e1c6fa00)</a:t>
             </a:r>
             <a:endParaRPr lang="en-US" sz="1000" dirty="0"/>
           </a:p>
@@ -7547,7 +7547,7 @@
                 <a:ea typeface="Courier New" pitchFamily="34" charset="-122"/>
                 <a:cs typeface="Courier New" pitchFamily="34" charset="-120"/>
               </a:rPr>
-              <a:t>✓ basic-arithmetic/intent alice valid 7ccff08e</a:t>
+              <a:t>✓ basic-arithmetic/intent alice valid 7228fa65</a:t>
             </a:r>
             <a:endParaRPr lang="en-US" sz="1000" dirty="0"/>
           </a:p>
@@ -7564,7 +7564,7 @@
                 <a:ea typeface="Courier New" pitchFamily="34" charset="-122"/>
                 <a:cs typeface="Courier New" pitchFamily="34" charset="-120"/>
               </a:rPr>
-              <a:t>✓ basic-arithmetic/spec alice valid 371e403b</a:t>
+              <a:t>✓ basic-arithmetic/spec alice valid 2bf3f4be</a:t>
             </a:r>
             <a:endParaRPr lang="en-US" sz="1000" dirty="0"/>
           </a:p>
@@ -7581,7 +7581,7 @@
                 <a:ea typeface="Courier New" pitchFamily="34" charset="-122"/>
                 <a:cs typeface="Courier New" pitchFamily="34" charset="-120"/>
               </a:rPr>
-              <a:t>✗ basic-arithmetic/plan bob wrong-signer 371e403b</a:t>
+              <a:t>✗ basic-arithmetic/plan bob wrong-signer 2bf3f4be</a:t>
             </a:r>
             <a:endParaRPr lang="en-US" sz="1000" dirty="0"/>
           </a:p>
@@ -7598,7 +7598,7 @@
                 <a:ea typeface="Courier New" pitchFamily="34" charset="-122"/>
                 <a:cs typeface="Courier New" pitchFamily="34" charset="-120"/>
               </a:rPr>
-              <a:t>✓ basic-arithmetic/review carol valid ed4cdd83</a:t>
+              <a:t>✓ basic-arithmetic/review carol valid 58210da3</a:t>
             </a:r>
             <a:endParaRPr lang="en-US" sz="1000" dirty="0"/>
           </a:p>
@@ -7615,7 +7615,7 @@
                 <a:ea typeface="Courier New" pitchFamily="34" charset="-122"/>
                 <a:cs typeface="Courier New" pitchFamily="34" charset="-120"/>
               </a:rPr>
-              <a:t>✓ basic-arithmetic/release alice valid 23117b69</a:t>
+              <a:t>✓ basic-arithmetic/release alice valid 5341d847</a:t>
             </a:r>
             <a:endParaRPr lang="en-US" sz="1000" dirty="0"/>
           </a:p>
@@ -7632,7 +7632,7 @@
                 <a:ea typeface="Courier New" pitchFamily="34" charset="-122"/>
                 <a:cs typeface="Courier New" pitchFamily="34" charset="-120"/>
               </a:rPr>
-              <a:t>✓ openspec/roles.yaml alice@calc.example valid 71b79561</a:t>
+              <a:t>✓ openspec/roles.yaml alice@calc.example valid b323bfed</a:t>
             </a:r>
             <a:endParaRPr lang="en-US" sz="1000" dirty="0"/>
           </a:p>
@@ -8093,7 +8093,7 @@
                 <a:ea typeface="Courier New" pitchFamily="34" charset="-122"/>
                 <a:cs typeface="Courier New" pitchFamily="34" charset="-120"/>
               </a:rPr>
-              <a:t>  openspec\changes\archive\2026-10-05-basic</a:t>
+              <a:t>  openspec\changes\archive\2026-10-06-basic</a:t>
             </a:r>
             <a:endParaRPr lang="en-US" sz="1000" dirty="0"/>
           </a:p>
@@ -13737,7 +13737,7 @@
                 <a:ea typeface="Courier New" pitchFamily="34" charset="-122"/>
                 <a:cs typeface="Courier New" pitchFamily="34" charset="-120"/>
               </a:rPr>
-              <a:t>  archived) · sdlc 0.8.0, license:</a:t>
+              <a:t>  archived) · sdlc 0.8.1, license:</a:t>
             </a:r>
             <a:endParaRPr lang="en-US" sz="1000" dirty="0"/>
           </a:p>
@@ -13890,7 +13890,7 @@
                 <a:ea typeface="Courier New" pitchFamily="34" charset="-122"/>
                 <a:cs typeface="Courier New" pitchFamily="34" charset="-120"/>
               </a:rPr>
-              <a:t>  intent 2 · spec 7 · plan 8 · review 2;</a:t>
+              <a:t>  intent 3 · spec 9 · plan 8 · review 3;</a:t>
             </a:r>
             <a:endParaRPr lang="en-US" sz="1000" dirty="0"/>
           </a:p>
@@ -13924,7 +13924,7 @@
                 <a:ea typeface="Courier New" pitchFamily="34" charset="-122"/>
                 <a:cs typeface="Courier New" pitchFamily="34" charset="-120"/>
               </a:rPr>
-              <a:t>  recorded with sdlc 0.8.0; licenses:</a:t>
+              <a:t>  recorded with sdlc 0.8.1; licenses:</a:t>
             </a:r>
             <a:endParaRPr lang="en-US" sz="1000" dirty="0"/>
           </a:p>
@@ -14241,7 +14241,7 @@
                 <a:ea typeface="Courier New" pitchFamily="34" charset="-122"/>
                 <a:cs typeface="Courier New" pitchFamily="34" charset="-120"/>
               </a:rPr>
-              <a:t>2026-10-05T20:31:10.507Z  gate.review.await</a:t>
+              <a:t>2026-10-06T09:41:18.909Z  gate.review.await</a:t>
             </a:r>
             <a:endParaRPr lang="en-US" sz="1000" dirty="0"/>
           </a:p>
@@ -14275,7 +14275,7 @@
                 <a:ea typeface="Courier New" pitchFamily="34" charset="-122"/>
                 <a:cs typeface="Courier New" pitchFamily="34" charset="-120"/>
               </a:rPr>
-              <a:t>  sha256:6839dde7b6d0d2b59ae640509bcfdb2d9c</a:t>
+              <a:t>  sha256:5c90e1c6fa00abfcdc680b0025b647bc90</a:t>
             </a:r>
             <a:endParaRPr lang="en-US" sz="1000" dirty="0"/>
           </a:p>
@@ -14292,7 +14292,7 @@
                 <a:ea typeface="Courier New" pitchFamily="34" charset="-122"/>
                 <a:cs typeface="Courier New" pitchFamily="34" charset="-120"/>
               </a:rPr>
-              <a:t>  c6ee7489b5dcb865f1ed7bc402216b [sdlc</a:t>
+              <a:t>  490a56dcb3f638ca31896d2d865d4c [sdlc</a:t>
             </a:r>
             <a:endParaRPr lang="en-US" sz="1000" dirty="0"/>
           </a:p>
@@ -14309,7 +14309,7 @@
                 <a:ea typeface="Courier New" pitchFamily="34" charset="-122"/>
                 <a:cs typeface="Courier New" pitchFamily="34" charset="-120"/>
               </a:rPr>
-              <a:t>  0.8.0 · community]</a:t>
+              <a:t>  0.8.1 · community]</a:t>
             </a:r>
             <a:endParaRPr lang="en-US" sz="1000" dirty="0"/>
           </a:p>
@@ -14326,7 +14326,7 @@
                 <a:ea typeface="Courier New" pitchFamily="34" charset="-122"/>
                 <a:cs typeface="Courier New" pitchFamily="34" charset="-120"/>
               </a:rPr>
-              <a:t>2026-10-05T20:31:12.907Z  gate.review.appro</a:t>
+              <a:t>2026-10-06T09:41:21.551Z  gate.review.appro</a:t>
             </a:r>
             <a:endParaRPr lang="en-US" sz="1000" dirty="0"/>
           </a:p>
@@ -14377,7 +14377,7 @@
                 <a:ea typeface="Courier New" pitchFamily="34" charset="-122"/>
                 <a:cs typeface="Courier New" pitchFamily="34" charset="-120"/>
               </a:rPr>
-              <a:t>  [sdlc 0.8.0 · community]</a:t>
+              <a:t>  [sdlc 0.8.1 · community]</a:t>
             </a:r>
             <a:endParaRPr lang="en-US" sz="1000" dirty="0"/>
           </a:p>
@@ -14394,7 +14394,7 @@
                 <a:ea typeface="Courier New" pitchFamily="34" charset="-122"/>
                 <a:cs typeface="Courier New" pitchFamily="34" charset="-120"/>
               </a:rPr>
-              <a:t>2026-10-05T20:31:16.013Z  gate.release.appr</a:t>
+              <a:t>2026-10-06T09:41:24.808Z  gate.release.appr</a:t>
             </a:r>
             <a:endParaRPr lang="en-US" sz="1000" dirty="0"/>
           </a:p>
@@ -14445,7 +14445,7 @@
                 <a:ea typeface="Courier New" pitchFamily="34" charset="-122"/>
                 <a:cs typeface="Courier New" pitchFamily="34" charset="-120"/>
               </a:rPr>
-              <a:t>  release-manager [sdlc 0.8.0 · community]</a:t>
+              <a:t>  release-manager [sdlc 0.8.1 · community]</a:t>
             </a:r>
             <a:endParaRPr lang="en-US" sz="1000" dirty="0"/>
           </a:p>
@@ -23632,7 +23632,7 @@
                 <a:ea typeface="Courier New" pitchFamily="34" charset="-122"/>
                 <a:cs typeface="Courier New" pitchFamily="34" charset="-120"/>
               </a:rPr>
-              <a:t>  sdlc 0.8.0, license: community</a:t>
+              <a:t>  sdlc 0.8.1, license: community</a:t>
             </a:r>
             <a:endParaRPr lang="en-US" sz="1000" dirty="0"/>
           </a:p>

--- a/docs/demo/sdlc-calculator-demo.en.pptx
+++ b/docs/demo/sdlc-calculator-demo.en.pptx
@@ -5018,7 +5018,7 @@
                 <a:ea typeface="Courier New" pitchFamily="34" charset="-122"/>
                 <a:cs typeface="Courier New" pitchFamily="34" charset="-120"/>
               </a:rPr>
-              <a:t>✓ test (1.1s)</a:t>
+              <a:t>✓ test (1.0s)</a:t>
             </a:r>
             <a:endParaRPr lang="en-US" sz="1000" dirty="0"/>
           </a:p>
@@ -6566,7 +6566,7 @@
                 <a:ea typeface="Courier New" pitchFamily="34" charset="-122"/>
                 <a:cs typeface="Courier New" pitchFamily="34" charset="-120"/>
               </a:rPr>
-              <a:t>  code-owner (5c90e1c6fa00)</a:t>
+              <a:t>  code-owner (2aedf7802f5b)</a:t>
             </a:r>
             <a:endParaRPr lang="en-US" sz="1000" dirty="0"/>
           </a:p>
@@ -7247,7 +7247,7 @@
                 <a:ea typeface="Courier New" pitchFamily="34" charset="-122"/>
                 <a:cs typeface="Courier New" pitchFamily="34" charset="-120"/>
               </a:rPr>
-              <a:t>  release-manager (5c90e1c6fa00)</a:t>
+              <a:t>  release-manager (2aedf7802f5b)</a:t>
             </a:r>
             <a:endParaRPr lang="en-US" sz="1000" dirty="0"/>
           </a:p>
@@ -7547,7 +7547,7 @@
                 <a:ea typeface="Courier New" pitchFamily="34" charset="-122"/>
                 <a:cs typeface="Courier New" pitchFamily="34" charset="-120"/>
               </a:rPr>
-              <a:t>✓ basic-arithmetic/intent alice valid 7228fa65</a:t>
+              <a:t>✓ basic-arithmetic/intent alice valid 17e3aa0e</a:t>
             </a:r>
             <a:endParaRPr lang="en-US" sz="1000" dirty="0"/>
           </a:p>
@@ -7564,7 +7564,7 @@
                 <a:ea typeface="Courier New" pitchFamily="34" charset="-122"/>
                 <a:cs typeface="Courier New" pitchFamily="34" charset="-120"/>
               </a:rPr>
-              <a:t>✓ basic-arithmetic/spec alice valid 2bf3f4be</a:t>
+              <a:t>✓ basic-arithmetic/spec alice valid fae7f89c</a:t>
             </a:r>
             <a:endParaRPr lang="en-US" sz="1000" dirty="0"/>
           </a:p>
@@ -7581,7 +7581,7 @@
                 <a:ea typeface="Courier New" pitchFamily="34" charset="-122"/>
                 <a:cs typeface="Courier New" pitchFamily="34" charset="-120"/>
               </a:rPr>
-              <a:t>✗ basic-arithmetic/plan bob wrong-signer 2bf3f4be</a:t>
+              <a:t>✗ basic-arithmetic/plan bob wrong-signer fae7f89c</a:t>
             </a:r>
             <a:endParaRPr lang="en-US" sz="1000" dirty="0"/>
           </a:p>
@@ -7598,7 +7598,7 @@
                 <a:ea typeface="Courier New" pitchFamily="34" charset="-122"/>
                 <a:cs typeface="Courier New" pitchFamily="34" charset="-120"/>
               </a:rPr>
-              <a:t>✓ basic-arithmetic/review carol valid 58210da3</a:t>
+              <a:t>✓ basic-arithmetic/review carol valid 1328e601</a:t>
             </a:r>
             <a:endParaRPr lang="en-US" sz="1000" dirty="0"/>
           </a:p>
@@ -7615,7 +7615,7 @@
                 <a:ea typeface="Courier New" pitchFamily="34" charset="-122"/>
                 <a:cs typeface="Courier New" pitchFamily="34" charset="-120"/>
               </a:rPr>
-              <a:t>✓ basic-arithmetic/release alice valid 5341d847</a:t>
+              <a:t>✓ basic-arithmetic/release alice valid 7f1f5d77</a:t>
             </a:r>
             <a:endParaRPr lang="en-US" sz="1000" dirty="0"/>
           </a:p>
@@ -7632,7 +7632,7 @@
                 <a:ea typeface="Courier New" pitchFamily="34" charset="-122"/>
                 <a:cs typeface="Courier New" pitchFamily="34" charset="-120"/>
               </a:rPr>
-              <a:t>✓ openspec/roles.yaml alice@calc.example valid b323bfed</a:t>
+              <a:t>✓ openspec/roles.yaml alice@calc.example valid c2855f48</a:t>
             </a:r>
             <a:endParaRPr lang="en-US" sz="1000" dirty="0"/>
           </a:p>
@@ -13737,7 +13737,7 @@
                 <a:ea typeface="Courier New" pitchFamily="34" charset="-122"/>
                 <a:cs typeface="Courier New" pitchFamily="34" charset="-120"/>
               </a:rPr>
-              <a:t>  archived) · sdlc 0.8.1, license:</a:t>
+              <a:t>  archived) · sdlc 0.8.2, license:</a:t>
             </a:r>
             <a:endParaRPr lang="en-US" sz="1000" dirty="0"/>
           </a:p>
@@ -13890,7 +13890,7 @@
                 <a:ea typeface="Courier New" pitchFamily="34" charset="-122"/>
                 <a:cs typeface="Courier New" pitchFamily="34" charset="-120"/>
               </a:rPr>
-              <a:t>  intent 3 · spec 9 · plan 8 · review 3;</a:t>
+              <a:t>  intent 2 · spec 8 · plan 7 · review 2;</a:t>
             </a:r>
             <a:endParaRPr lang="en-US" sz="1000" dirty="0"/>
           </a:p>
@@ -13924,7 +13924,7 @@
                 <a:ea typeface="Courier New" pitchFamily="34" charset="-122"/>
                 <a:cs typeface="Courier New" pitchFamily="34" charset="-120"/>
               </a:rPr>
-              <a:t>  recorded with sdlc 0.8.1; licenses:</a:t>
+              <a:t>  recorded with sdlc 0.8.2; licenses:</a:t>
             </a:r>
             <a:endParaRPr lang="en-US" sz="1000" dirty="0"/>
           </a:p>
@@ -14241,7 +14241,7 @@
                 <a:ea typeface="Courier New" pitchFamily="34" charset="-122"/>
                 <a:cs typeface="Courier New" pitchFamily="34" charset="-120"/>
               </a:rPr>
-              <a:t>2026-10-06T09:41:18.909Z  gate.review.await</a:t>
+              <a:t>2026-10-06T17:22:56.195Z  gate.review.await</a:t>
             </a:r>
             <a:endParaRPr lang="en-US" sz="1000" dirty="0"/>
           </a:p>
@@ -14275,7 +14275,7 @@
                 <a:ea typeface="Courier New" pitchFamily="34" charset="-122"/>
                 <a:cs typeface="Courier New" pitchFamily="34" charset="-120"/>
               </a:rPr>
-              <a:t>  sha256:5c90e1c6fa00abfcdc680b0025b647bc90</a:t>
+              <a:t>  sha256:2aedf7802f5b11661377b3e5b60d79e70a</a:t>
             </a:r>
             <a:endParaRPr lang="en-US" sz="1000" dirty="0"/>
           </a:p>
@@ -14292,7 +14292,7 @@
                 <a:ea typeface="Courier New" pitchFamily="34" charset="-122"/>
                 <a:cs typeface="Courier New" pitchFamily="34" charset="-120"/>
               </a:rPr>
-              <a:t>  490a56dcb3f638ca31896d2d865d4c [sdlc</a:t>
+              <a:t>  5af3baf498493332918fe82795e330 [sdlc</a:t>
             </a:r>
             <a:endParaRPr lang="en-US" sz="1000" dirty="0"/>
           </a:p>
@@ -14309,7 +14309,7 @@
                 <a:ea typeface="Courier New" pitchFamily="34" charset="-122"/>
                 <a:cs typeface="Courier New" pitchFamily="34" charset="-120"/>
               </a:rPr>
-              <a:t>  0.8.1 · community]</a:t>
+              <a:t>  0.8.2 · community]</a:t>
             </a:r>
             <a:endParaRPr lang="en-US" sz="1000" dirty="0"/>
           </a:p>
@@ -14326,7 +14326,7 @@
                 <a:ea typeface="Courier New" pitchFamily="34" charset="-122"/>
                 <a:cs typeface="Courier New" pitchFamily="34" charset="-120"/>
               </a:rPr>
-              <a:t>2026-10-06T09:41:21.551Z  gate.review.appro</a:t>
+              <a:t>2026-10-06T17:22:58.519Z  gate.review.appro</a:t>
             </a:r>
             <a:endParaRPr lang="en-US" sz="1000" dirty="0"/>
           </a:p>
@@ -14377,7 +14377,7 @@
                 <a:ea typeface="Courier New" pitchFamily="34" charset="-122"/>
                 <a:cs typeface="Courier New" pitchFamily="34" charset="-120"/>
               </a:rPr>
-              <a:t>  [sdlc 0.8.1 · community]</a:t>
+              <a:t>  [sdlc 0.8.2 · community]</a:t>
             </a:r>
             <a:endParaRPr lang="en-US" sz="1000" dirty="0"/>
           </a:p>
@@ -14394,7 +14394,7 @@
                 <a:ea typeface="Courier New" pitchFamily="34" charset="-122"/>
                 <a:cs typeface="Courier New" pitchFamily="34" charset="-120"/>
               </a:rPr>
-              <a:t>2026-10-06T09:41:24.808Z  gate.release.appr</a:t>
+              <a:t>2026-10-06T17:23:01.542Z  gate.release.appr</a:t>
             </a:r>
             <a:endParaRPr lang="en-US" sz="1000" dirty="0"/>
           </a:p>
@@ -14445,7 +14445,7 @@
                 <a:ea typeface="Courier New" pitchFamily="34" charset="-122"/>
                 <a:cs typeface="Courier New" pitchFamily="34" charset="-120"/>
               </a:rPr>
-              <a:t>  release-manager [sdlc 0.8.1 · community]</a:t>
+              <a:t>  release-manager [sdlc 0.8.2 · community]</a:t>
             </a:r>
             <a:endParaRPr lang="en-US" sz="1000" dirty="0"/>
           </a:p>
@@ -23632,7 +23632,7 @@
                 <a:ea typeface="Courier New" pitchFamily="34" charset="-122"/>
                 <a:cs typeface="Courier New" pitchFamily="34" charset="-120"/>
               </a:rPr>
-              <a:t>  sdlc 0.8.1, license: community</a:t>
+              <a:t>  sdlc 0.8.2, license: community</a:t>
             </a:r>
             <a:endParaRPr lang="en-US" sz="1000" dirty="0"/>
           </a:p>

--- a/docs/demo/sdlc-calculator-demo.en.pptx
+++ b/docs/demo/sdlc-calculator-demo.en.pptx
@@ -6658,7 +6658,7 @@
                 <a:ea typeface="Courier New" pitchFamily="34" charset="-122"/>
                 <a:cs typeface="Courier New" pitchFamily="34" charset="-120"/>
               </a:rPr>
-              <a:t>  code-owner (3b46e2724403)</a:t>
+              <a:t>  code-owner (15207f0f3042)</a:t>
             </a:r>
             <a:endParaRPr lang="en-US" sz="1000" dirty="0"/>
           </a:p>
@@ -7339,7 +7339,7 @@
                 <a:ea typeface="Courier New" pitchFamily="34" charset="-122"/>
                 <a:cs typeface="Courier New" pitchFamily="34" charset="-120"/>
               </a:rPr>
-              <a:t>  release-manager (3b46e2724403)</a:t>
+              <a:t>  release-manager (15207f0f3042)</a:t>
             </a:r>
             <a:endParaRPr lang="en-US" sz="1000" dirty="0"/>
           </a:p>
@@ -7639,7 +7639,7 @@
                 <a:ea typeface="Courier New" pitchFamily="34" charset="-122"/>
                 <a:cs typeface="Courier New" pitchFamily="34" charset="-120"/>
               </a:rPr>
-              <a:t>✓ basic-arithmetic/intent alice valid 2d54ab62</a:t>
+              <a:t>✓ basic-arithmetic/intent alice valid 5076f215</a:t>
             </a:r>
             <a:endParaRPr lang="en-US" sz="1000" dirty="0"/>
           </a:p>
@@ -7656,7 +7656,7 @@
                 <a:ea typeface="Courier New" pitchFamily="34" charset="-122"/>
                 <a:cs typeface="Courier New" pitchFamily="34" charset="-120"/>
               </a:rPr>
-              <a:t>✓ basic-arithmetic/spec alice valid 89635bce</a:t>
+              <a:t>✓ basic-arithmetic/spec alice valid 7f9bc81a</a:t>
             </a:r>
             <a:endParaRPr lang="en-US" sz="1000" dirty="0"/>
           </a:p>
@@ -7673,7 +7673,7 @@
                 <a:ea typeface="Courier New" pitchFamily="34" charset="-122"/>
                 <a:cs typeface="Courier New" pitchFamily="34" charset="-120"/>
               </a:rPr>
-              <a:t>✗ basic-arithmetic/plan bob wrong-signer 89635bce</a:t>
+              <a:t>✗ basic-arithmetic/plan bob wrong-signer 7f9bc81a</a:t>
             </a:r>
             <a:endParaRPr lang="en-US" sz="1000" dirty="0"/>
           </a:p>
@@ -7690,7 +7690,7 @@
                 <a:ea typeface="Courier New" pitchFamily="34" charset="-122"/>
                 <a:cs typeface="Courier New" pitchFamily="34" charset="-120"/>
               </a:rPr>
-              <a:t>✓ basic-arithmetic/review carol valid 53ad23b7</a:t>
+              <a:t>✓ basic-arithmetic/review carol valid 016d3b4b</a:t>
             </a:r>
             <a:endParaRPr lang="en-US" sz="1000" dirty="0"/>
           </a:p>
@@ -7707,7 +7707,7 @@
                 <a:ea typeface="Courier New" pitchFamily="34" charset="-122"/>
                 <a:cs typeface="Courier New" pitchFamily="34" charset="-120"/>
               </a:rPr>
-              <a:t>✓ basic-arithmetic/release alice valid b16eadd7</a:t>
+              <a:t>✓ basic-arithmetic/release alice valid 352090ab</a:t>
             </a:r>
             <a:endParaRPr lang="en-US" sz="1000" dirty="0"/>
           </a:p>
@@ -7724,7 +7724,7 @@
                 <a:ea typeface="Courier New" pitchFamily="34" charset="-122"/>
                 <a:cs typeface="Courier New" pitchFamily="34" charset="-120"/>
               </a:rPr>
-              <a:t>✓ openspec/roles.yaml alice@calc.example valid 0d43a659</a:t>
+              <a:t>✓ openspec/roles.yaml alice@calc.example valid bbd1c6b0</a:t>
             </a:r>
             <a:endParaRPr lang="en-US" sz="1000" dirty="0"/>
           </a:p>
@@ -8185,7 +8185,7 @@
                 <a:ea typeface="Courier New" pitchFamily="34" charset="-122"/>
                 <a:cs typeface="Courier New" pitchFamily="34" charset="-120"/>
               </a:rPr>
-              <a:t>  openspec\changes\archive\2026-10-06-basic</a:t>
+              <a:t>  openspec\changes\archive\2026-10-07-basic</a:t>
             </a:r>
             <a:endParaRPr lang="en-US" sz="1000" dirty="0"/>
           </a:p>
@@ -13829,7 +13829,7 @@
                 <a:ea typeface="Courier New" pitchFamily="34" charset="-122"/>
                 <a:cs typeface="Courier New" pitchFamily="34" charset="-120"/>
               </a:rPr>
-              <a:t>  archived) · sdlc 0.9.0, license:</a:t>
+              <a:t>  archived) · sdlc 0.9.1, license:</a:t>
             </a:r>
             <a:endParaRPr lang="en-US" sz="1000" dirty="0"/>
           </a:p>
@@ -14016,7 +14016,7 @@
                 <a:ea typeface="Courier New" pitchFamily="34" charset="-122"/>
                 <a:cs typeface="Courier New" pitchFamily="34" charset="-120"/>
               </a:rPr>
-              <a:t>  recorded with sdlc 0.9.0; licenses:</a:t>
+              <a:t>  recorded with sdlc 0.9.1; licenses:</a:t>
             </a:r>
             <a:endParaRPr lang="en-US" sz="1000" dirty="0"/>
           </a:p>
@@ -14333,7 +14333,7 @@
                 <a:ea typeface="Courier New" pitchFamily="34" charset="-122"/>
                 <a:cs typeface="Courier New" pitchFamily="34" charset="-120"/>
               </a:rPr>
-              <a:t>2026-10-06T22:15:55.514Z  gate.review.await</a:t>
+              <a:t>2026-10-07T10:13:21.903Z  gate.review.await</a:t>
             </a:r>
             <a:endParaRPr lang="en-US" sz="1000" dirty="0"/>
           </a:p>
@@ -14367,7 +14367,7 @@
                 <a:ea typeface="Courier New" pitchFamily="34" charset="-122"/>
                 <a:cs typeface="Courier New" pitchFamily="34" charset="-120"/>
               </a:rPr>
-              <a:t>  sha256:3b46e2724403b29ae43f5c85e743850ea5</a:t>
+              <a:t>  sha256:15207f0f3042ddb9dcece8aec4d12c856b</a:t>
             </a:r>
             <a:endParaRPr lang="en-US" sz="1000" dirty="0"/>
           </a:p>
@@ -14384,7 +14384,7 @@
                 <a:ea typeface="Courier New" pitchFamily="34" charset="-122"/>
                 <a:cs typeface="Courier New" pitchFamily="34" charset="-120"/>
               </a:rPr>
-              <a:t>  f67159dd578fa14d41ee61dd7752bf [sdlc</a:t>
+              <a:t>  747402af622946b7c55efdb406e49b [sdlc</a:t>
             </a:r>
             <a:endParaRPr lang="en-US" sz="1000" dirty="0"/>
           </a:p>
@@ -14401,7 +14401,7 @@
                 <a:ea typeface="Courier New" pitchFamily="34" charset="-122"/>
                 <a:cs typeface="Courier New" pitchFamily="34" charset="-120"/>
               </a:rPr>
-              <a:t>  0.9.0 · community]</a:t>
+              <a:t>  0.9.1 · community]</a:t>
             </a:r>
             <a:endParaRPr lang="en-US" sz="1000" dirty="0"/>
           </a:p>
@@ -14418,7 +14418,7 @@
                 <a:ea typeface="Courier New" pitchFamily="34" charset="-122"/>
                 <a:cs typeface="Courier New" pitchFamily="34" charset="-120"/>
               </a:rPr>
-              <a:t>2026-10-06T22:15:58.571Z  gate.review.appro</a:t>
+              <a:t>2026-10-07T10:13:24.897Z  gate.review.appro</a:t>
             </a:r>
             <a:endParaRPr lang="en-US" sz="1000" dirty="0"/>
           </a:p>
@@ -14469,7 +14469,7 @@
                 <a:ea typeface="Courier New" pitchFamily="34" charset="-122"/>
                 <a:cs typeface="Courier New" pitchFamily="34" charset="-120"/>
               </a:rPr>
-              <a:t>  [sdlc 0.9.0 · community]</a:t>
+              <a:t>  [sdlc 0.9.1 · community]</a:t>
             </a:r>
             <a:endParaRPr lang="en-US" sz="1000" dirty="0"/>
           </a:p>
@@ -14486,7 +14486,7 @@
                 <a:ea typeface="Courier New" pitchFamily="34" charset="-122"/>
                 <a:cs typeface="Courier New" pitchFamily="34" charset="-120"/>
               </a:rPr>
-              <a:t>2026-10-06T22:16:02.163Z  gate.release.appr</a:t>
+              <a:t>2026-10-07T10:13:28.430Z  gate.release.appr</a:t>
             </a:r>
             <a:endParaRPr lang="en-US" sz="1000" dirty="0"/>
           </a:p>
@@ -14537,7 +14537,7 @@
                 <a:ea typeface="Courier New" pitchFamily="34" charset="-122"/>
                 <a:cs typeface="Courier New" pitchFamily="34" charset="-120"/>
               </a:rPr>
-              <a:t>  release-manager [sdlc 0.9.0 · community]</a:t>
+              <a:t>  release-manager [sdlc 0.9.1 · community]</a:t>
             </a:r>
             <a:endParaRPr lang="en-US" sz="1000" dirty="0"/>
           </a:p>
@@ -15714,7 +15714,7 @@
                 <a:ea typeface="Courier New" pitchFamily="34" charset="-122"/>
                 <a:cs typeface="Courier New" pitchFamily="34" charset="-120"/>
               </a:rPr>
-              <a:t>✓ test (1.2s)</a:t>
+              <a:t>✓ test (1.0s)</a:t>
             </a:r>
             <a:endParaRPr lang="en-US" sz="1000" dirty="0"/>
           </a:p>
@@ -15731,7 +15731,7 @@
                 <a:ea typeface="Courier New" pitchFamily="34" charset="-122"/>
                 <a:cs typeface="Courier New" pitchFamily="34" charset="-120"/>
               </a:rPr>
-              <a:t>✓ ci-green (ci/pipeline_status, 0.7s)</a:t>
+              <a:t>✓ ci-green (ci/pipeline_status, 0.5s)</a:t>
             </a:r>
             <a:endParaRPr lang="en-US" sz="1000" dirty="0"/>
           </a:p>
@@ -16167,7 +16167,7 @@
                 <a:ea typeface="Courier New" pitchFamily="34" charset="-122"/>
                 <a:cs typeface="Courier New" pitchFamily="34" charset="-120"/>
               </a:rPr>
-              <a:t>      "id": "20261006T221649892Z-ci-green-0</a:t>
+              <a:t>      "id": "20261007T101406690Z-ci-green-b</a:t>
             </a:r>
             <a:endParaRPr lang="en-US" sz="1000" dirty="0"/>
           </a:p>
@@ -16184,7 +16184,7 @@
                 <a:ea typeface="Courier New" pitchFamily="34" charset="-122"/>
                 <a:cs typeface="Courier New" pitchFamily="34" charset="-120"/>
               </a:rPr>
-              <a:t>  eb8d5",</a:t>
+              <a:t>  80419",</a:t>
             </a:r>
             <a:endParaRPr lang="en-US" sz="1000" dirty="0"/>
           </a:p>
@@ -16320,7 +16320,7 @@
                 <a:ea typeface="Courier New" pitchFamily="34" charset="-122"/>
                 <a:cs typeface="Courier New" pitchFamily="34" charset="-120"/>
               </a:rPr>
-              <a:t>        "ref": "e105b7c63cb4b08e39dc9fa4c2d</a:t>
+              <a:t>        "ref": "2742131fbd21da8c5c880624e29</a:t>
             </a:r>
             <a:endParaRPr lang="en-US" sz="1000" dirty="0"/>
           </a:p>
@@ -16337,7 +16337,7 @@
                 <a:ea typeface="Courier New" pitchFamily="34" charset="-122"/>
                 <a:cs typeface="Courier New" pitchFamily="34" charset="-120"/>
               </a:rPr>
-              <a:t>  bdf6db8c0c381",</a:t>
+              <a:t>  ea2638c4bbb62",</a:t>
             </a:r>
             <a:endParaRPr lang="en-US" sz="1000" dirty="0"/>
           </a:p>
@@ -18581,7 +18581,7 @@
                 <a:ea typeface="Cambria" pitchFamily="34" charset="-122"/>
                 <a:cs typeface="Cambria" pitchFamily="34" charset="-120"/>
               </a:rPr>
-              <a:t>90</a:t>
+              <a:t>91</a:t>
             </a:r>
             <a:endParaRPr lang="en-US" sz="6000" dirty="0"/>
           </a:p>
@@ -18686,7 +18686,7 @@
                 <a:ea typeface="Cambria" pitchFamily="34" charset="-122"/>
                 <a:cs typeface="Cambria" pitchFamily="34" charset="-120"/>
               </a:rPr>
-              <a:t>59</a:t>
+              <a:t>60</a:t>
             </a:r>
             <a:endParaRPr lang="en-US" sz="6000" dirty="0"/>
           </a:p>
@@ -18725,7 +18725,7 @@
                 <a:ea typeface="Calibri" pitchFamily="34" charset="-122"/>
                 <a:cs typeface="Calibri" pitchFamily="34" charset="-120"/>
               </a:rPr>
-              <a:t>of 59 commands</a:t>
+              <a:t>of 60 commands</a:t>
             </a:r>
             <a:endParaRPr lang="en-US" sz="1600" dirty="0"/>
           </a:p>
@@ -20864,7 +20864,7 @@
         <p:spPr>
           <a:xfrm>
             <a:off x="7812024" y="4443984"/>
-            <a:ext cx="879856" cy="256032"/>
+            <a:ext cx="549656" cy="256032"/>
           </a:xfrm>
           <a:prstGeom prst="roundRect">
             <a:avLst>
@@ -20891,7 +20891,7 @@
         <p:spPr>
           <a:xfrm>
             <a:off x="7812024" y="4443984"/>
-            <a:ext cx="879856" cy="256032"/>
+            <a:ext cx="549656" cy="256032"/>
           </a:xfrm>
           <a:prstGeom prst="rect">
             <a:avLst/>
@@ -20915,7 +20915,7 @@
                 <a:ea typeface="Calibri" pitchFamily="34" charset="-122"/>
                 <a:cs typeface="Calibri" pitchFamily="34" charset="-120"/>
               </a:rPr>
-              <a:t>statusline</a:t>
+              <a:t>guide</a:t>
             </a:r>
             <a:endParaRPr lang="en-US" sz="1000" dirty="0"/>
           </a:p>
@@ -20929,8 +20929,8 @@
         </p:nvSpPr>
         <p:spPr>
           <a:xfrm>
-            <a:off x="8783320" y="4443984"/>
-            <a:ext cx="813816" cy="256032"/>
+            <a:off x="8453120" y="4443984"/>
+            <a:ext cx="879856" cy="256032"/>
           </a:xfrm>
           <a:prstGeom prst="roundRect">
             <a:avLst>
@@ -20956,8 +20956,8 @@
         </p:nvSpPr>
         <p:spPr>
           <a:xfrm>
-            <a:off x="8783320" y="4443984"/>
-            <a:ext cx="813816" cy="256032"/>
+            <a:off x="8453120" y="4443984"/>
+            <a:ext cx="879856" cy="256032"/>
           </a:xfrm>
           <a:prstGeom prst="rect">
             <a:avLst/>
@@ -20981,7 +20981,7 @@
                 <a:ea typeface="Calibri" pitchFamily="34" charset="-122"/>
                 <a:cs typeface="Calibri" pitchFamily="34" charset="-120"/>
               </a:rPr>
-              <a:t>mcp serve</a:t>
+              <a:t>statusline</a:t>
             </a:r>
             <a:endParaRPr lang="en-US" sz="1000" dirty="0"/>
           </a:p>
@@ -20995,7 +20995,7 @@
         </p:nvSpPr>
         <p:spPr>
           <a:xfrm>
-            <a:off x="9688576" y="4443984"/>
+            <a:off x="9424416" y="4443984"/>
             <a:ext cx="813816" cy="256032"/>
           </a:xfrm>
           <a:prstGeom prst="roundRect">
@@ -21022,7 +21022,7 @@
         </p:nvSpPr>
         <p:spPr>
           <a:xfrm>
-            <a:off x="9688576" y="4443984"/>
+            <a:off x="9424416" y="4443984"/>
             <a:ext cx="813816" cy="256032"/>
           </a:xfrm>
           <a:prstGeom prst="rect">
@@ -21047,7 +21047,7 @@
                 <a:ea typeface="Calibri" pitchFamily="34" charset="-122"/>
                 <a:cs typeface="Calibri" pitchFamily="34" charset="-120"/>
               </a:rPr>
-              <a:t>mcp check</a:t>
+              <a:t>mcp serve</a:t>
             </a:r>
             <a:endParaRPr lang="en-US" sz="1000" dirty="0"/>
           </a:p>
@@ -21061,8 +21061,8 @@
         </p:nvSpPr>
         <p:spPr>
           <a:xfrm>
-            <a:off x="10593832" y="4443984"/>
-            <a:ext cx="879856" cy="256032"/>
+            <a:off x="10329672" y="4443984"/>
+            <a:ext cx="813816" cy="256032"/>
           </a:xfrm>
           <a:prstGeom prst="roundRect">
             <a:avLst>
@@ -21088,8 +21088,8 @@
         </p:nvSpPr>
         <p:spPr>
           <a:xfrm>
-            <a:off x="10593832" y="4443984"/>
-            <a:ext cx="879856" cy="256032"/>
+            <a:off x="10329672" y="4443984"/>
+            <a:ext cx="813816" cy="256032"/>
           </a:xfrm>
           <a:prstGeom prst="rect">
             <a:avLst/>
@@ -21113,7 +21113,7 @@
                 <a:ea typeface="Calibri" pitchFamily="34" charset="-122"/>
                 <a:cs typeface="Calibri" pitchFamily="34" charset="-120"/>
               </a:rPr>
-              <a:t>inbox list</a:t>
+              <a:t>mcp check</a:t>
             </a:r>
             <a:endParaRPr lang="en-US" sz="1000" dirty="0"/>
           </a:p>
@@ -21179,7 +21179,7 @@
                 <a:ea typeface="Calibri" pitchFamily="34" charset="-122"/>
                 <a:cs typeface="Calibri" pitchFamily="34" charset="-120"/>
               </a:rPr>
-              <a:t>inbox done</a:t>
+              <a:t>inbox list</a:t>
             </a:r>
             <a:endParaRPr lang="en-US" sz="1000" dirty="0"/>
           </a:p>
@@ -21194,7 +21194,7 @@
         <p:spPr>
           <a:xfrm>
             <a:off x="1428496" y="4791456"/>
-            <a:ext cx="813816" cy="256032"/>
+            <a:ext cx="879856" cy="256032"/>
           </a:xfrm>
           <a:prstGeom prst="roundRect">
             <a:avLst>
@@ -21221,7 +21221,7 @@
         <p:spPr>
           <a:xfrm>
             <a:off x="1428496" y="4791456"/>
-            <a:ext cx="813816" cy="256032"/>
+            <a:ext cx="879856" cy="256032"/>
           </a:xfrm>
           <a:prstGeom prst="rect">
             <a:avLst/>
@@ -21245,7 +21245,7 @@
                 <a:ea typeface="Calibri" pitchFamily="34" charset="-122"/>
                 <a:cs typeface="Calibri" pitchFamily="34" charset="-120"/>
               </a:rPr>
-              <a:t>track set</a:t>
+              <a:t>inbox done</a:t>
             </a:r>
             <a:endParaRPr lang="en-US" sz="1000" dirty="0"/>
           </a:p>
@@ -21259,8 +21259,8 @@
         </p:nvSpPr>
         <p:spPr>
           <a:xfrm>
-            <a:off x="2333752" y="4791456"/>
-            <a:ext cx="483616" cy="256032"/>
+            <a:off x="2399792" y="4791456"/>
+            <a:ext cx="813816" cy="256032"/>
           </a:xfrm>
           <a:prstGeom prst="roundRect">
             <a:avLst>
@@ -21286,8 +21286,8 @@
         </p:nvSpPr>
         <p:spPr>
           <a:xfrm>
-            <a:off x="2333752" y="4791456"/>
-            <a:ext cx="483616" cy="256032"/>
+            <a:off x="2399792" y="4791456"/>
+            <a:ext cx="813816" cy="256032"/>
           </a:xfrm>
           <a:prstGeom prst="rect">
             <a:avLst/>
@@ -21311,7 +21311,7 @@
                 <a:ea typeface="Calibri" pitchFamily="34" charset="-122"/>
                 <a:cs typeface="Calibri" pitchFamily="34" charset="-120"/>
               </a:rPr>
-              <a:t>next</a:t>
+              <a:t>track set</a:t>
             </a:r>
             <a:endParaRPr lang="en-US" sz="1000" dirty="0"/>
           </a:p>
@@ -21325,8 +21325,8 @@
         </p:nvSpPr>
         <p:spPr>
           <a:xfrm>
-            <a:off x="2908808" y="4791456"/>
-            <a:ext cx="1011936" cy="256032"/>
+            <a:off x="3305048" y="4791456"/>
+            <a:ext cx="483616" cy="256032"/>
           </a:xfrm>
           <a:prstGeom prst="roundRect">
             <a:avLst>
@@ -21352,8 +21352,8 @@
         </p:nvSpPr>
         <p:spPr>
           <a:xfrm>
-            <a:off x="2908808" y="4791456"/>
-            <a:ext cx="1011936" cy="256032"/>
+            <a:off x="3305048" y="4791456"/>
+            <a:ext cx="483616" cy="256032"/>
           </a:xfrm>
           <a:prstGeom prst="rect">
             <a:avLst/>
@@ -21377,7 +21377,7 @@
                 <a:ea typeface="Calibri" pitchFamily="34" charset="-122"/>
                 <a:cs typeface="Calibri" pitchFamily="34" charset="-120"/>
               </a:rPr>
-              <a:t>instructions</a:t>
+              <a:t>next</a:t>
             </a:r>
             <a:endParaRPr lang="en-US" sz="1000" dirty="0"/>
           </a:p>
@@ -21391,8 +21391,8 @@
         </p:nvSpPr>
         <p:spPr>
           <a:xfrm>
-            <a:off x="4012184" y="4791456"/>
-            <a:ext cx="681736" cy="256032"/>
+            <a:off x="3880104" y="4791456"/>
+            <a:ext cx="1011936" cy="256032"/>
           </a:xfrm>
           <a:prstGeom prst="roundRect">
             <a:avLst>
@@ -21418,8 +21418,8 @@
         </p:nvSpPr>
         <p:spPr>
           <a:xfrm>
-            <a:off x="4012184" y="4791456"/>
-            <a:ext cx="681736" cy="256032"/>
+            <a:off x="3880104" y="4791456"/>
+            <a:ext cx="1011936" cy="256032"/>
           </a:xfrm>
           <a:prstGeom prst="rect">
             <a:avLst/>
@@ -21443,7 +21443,7 @@
                 <a:ea typeface="Calibri" pitchFamily="34" charset="-122"/>
                 <a:cs typeface="Calibri" pitchFamily="34" charset="-120"/>
               </a:rPr>
-              <a:t>approve</a:t>
+              <a:t>instructions</a:t>
             </a:r>
             <a:endParaRPr lang="en-US" sz="1000" dirty="0"/>
           </a:p>
@@ -21457,8 +21457,8 @@
         </p:nvSpPr>
         <p:spPr>
           <a:xfrm>
-            <a:off x="4785360" y="4791456"/>
-            <a:ext cx="615696" cy="256032"/>
+            <a:off x="4983480" y="4791456"/>
+            <a:ext cx="681736" cy="256032"/>
           </a:xfrm>
           <a:prstGeom prst="roundRect">
             <a:avLst>
@@ -21484,8 +21484,8 @@
         </p:nvSpPr>
         <p:spPr>
           <a:xfrm>
-            <a:off x="4785360" y="4791456"/>
-            <a:ext cx="615696" cy="256032"/>
+            <a:off x="4983480" y="4791456"/>
+            <a:ext cx="681736" cy="256032"/>
           </a:xfrm>
           <a:prstGeom prst="rect">
             <a:avLst/>
@@ -21509,7 +21509,7 @@
                 <a:ea typeface="Calibri" pitchFamily="34" charset="-122"/>
                 <a:cs typeface="Calibri" pitchFamily="34" charset="-120"/>
               </a:rPr>
-              <a:t>reject</a:t>
+              <a:t>approve</a:t>
             </a:r>
             <a:endParaRPr lang="en-US" sz="1000" dirty="0"/>
           </a:p>
@@ -21523,8 +21523,8 @@
         </p:nvSpPr>
         <p:spPr>
           <a:xfrm>
-            <a:off x="5492496" y="4791456"/>
-            <a:ext cx="549656" cy="256032"/>
+            <a:off x="5756656" y="4791456"/>
+            <a:ext cx="615696" cy="256032"/>
           </a:xfrm>
           <a:prstGeom prst="roundRect">
             <a:avLst>
@@ -21550,8 +21550,8 @@
         </p:nvSpPr>
         <p:spPr>
           <a:xfrm>
-            <a:off x="5492496" y="4791456"/>
-            <a:ext cx="549656" cy="256032"/>
+            <a:off x="5756656" y="4791456"/>
+            <a:ext cx="615696" cy="256032"/>
           </a:xfrm>
           <a:prstGeom prst="rect">
             <a:avLst/>
@@ -21575,7 +21575,7 @@
                 <a:ea typeface="Calibri" pitchFamily="34" charset="-122"/>
                 <a:cs typeface="Calibri" pitchFamily="34" charset="-120"/>
               </a:rPr>
-              <a:t>waive</a:t>
+              <a:t>reject</a:t>
             </a:r>
             <a:endParaRPr lang="en-US" sz="1000" dirty="0"/>
           </a:p>
@@ -21589,8 +21589,8 @@
         </p:nvSpPr>
         <p:spPr>
           <a:xfrm>
-            <a:off x="6133592" y="4791456"/>
-            <a:ext cx="747776" cy="256032"/>
+            <a:off x="6463792" y="4791456"/>
+            <a:ext cx="549656" cy="256032"/>
           </a:xfrm>
           <a:prstGeom prst="roundRect">
             <a:avLst>
@@ -21616,8 +21616,8 @@
         </p:nvSpPr>
         <p:spPr>
           <a:xfrm>
-            <a:off x="6133592" y="4791456"/>
-            <a:ext cx="747776" cy="256032"/>
+            <a:off x="6463792" y="4791456"/>
+            <a:ext cx="549656" cy="256032"/>
           </a:xfrm>
           <a:prstGeom prst="rect">
             <a:avLst/>
@@ -21641,7 +21641,7 @@
                 <a:ea typeface="Calibri" pitchFamily="34" charset="-122"/>
                 <a:cs typeface="Calibri" pitchFamily="34" charset="-120"/>
               </a:rPr>
-              <a:t>takeover</a:t>
+              <a:t>waive</a:t>
             </a:r>
             <a:endParaRPr lang="en-US" sz="1000" dirty="0"/>
           </a:p>
@@ -21655,8 +21655,8 @@
         </p:nvSpPr>
         <p:spPr>
           <a:xfrm>
-            <a:off x="6972808" y="4791456"/>
-            <a:ext cx="1210056" cy="256032"/>
+            <a:off x="7104888" y="4791456"/>
+            <a:ext cx="747776" cy="256032"/>
           </a:xfrm>
           <a:prstGeom prst="roundRect">
             <a:avLst>
@@ -21682,8 +21682,8 @@
         </p:nvSpPr>
         <p:spPr>
           <a:xfrm>
-            <a:off x="6972808" y="4791456"/>
-            <a:ext cx="1210056" cy="256032"/>
+            <a:off x="7104888" y="4791456"/>
+            <a:ext cx="747776" cy="256032"/>
           </a:xfrm>
           <a:prstGeom prst="rect">
             <a:avLst/>
@@ -21707,7 +21707,7 @@
                 <a:ea typeface="Calibri" pitchFamily="34" charset="-122"/>
                 <a:cs typeface="Calibri" pitchFamily="34" charset="-120"/>
               </a:rPr>
-              <a:t>release-control</a:t>
+              <a:t>takeover</a:t>
             </a:r>
             <a:endParaRPr lang="en-US" sz="1000" dirty="0"/>
           </a:p>
@@ -21721,8 +21721,8 @@
         </p:nvSpPr>
         <p:spPr>
           <a:xfrm>
-            <a:off x="8274304" y="4791456"/>
-            <a:ext cx="615696" cy="256032"/>
+            <a:off x="7944104" y="4791456"/>
+            <a:ext cx="1210056" cy="256032"/>
           </a:xfrm>
           <a:prstGeom prst="roundRect">
             <a:avLst>
@@ -21748,8 +21748,8 @@
         </p:nvSpPr>
         <p:spPr>
           <a:xfrm>
-            <a:off x="8274304" y="4791456"/>
-            <a:ext cx="615696" cy="256032"/>
+            <a:off x="7944104" y="4791456"/>
+            <a:ext cx="1210056" cy="256032"/>
           </a:xfrm>
           <a:prstGeom prst="rect">
             <a:avLst/>
@@ -21773,7 +21773,7 @@
                 <a:ea typeface="Calibri" pitchFamily="34" charset="-122"/>
                 <a:cs typeface="Calibri" pitchFamily="34" charset="-120"/>
               </a:rPr>
-              <a:t>rework</a:t>
+              <a:t>release-control</a:t>
             </a:r>
             <a:endParaRPr lang="en-US" sz="1000" dirty="0"/>
           </a:p>
@@ -21787,8 +21787,8 @@
         </p:nvSpPr>
         <p:spPr>
           <a:xfrm>
-            <a:off x="8981440" y="4791456"/>
-            <a:ext cx="1276096" cy="256032"/>
+            <a:off x="9245600" y="4791456"/>
+            <a:ext cx="615696" cy="256032"/>
           </a:xfrm>
           <a:prstGeom prst="roundRect">
             <a:avLst>
@@ -21814,8 +21814,8 @@
         </p:nvSpPr>
         <p:spPr>
           <a:xfrm>
-            <a:off x="8981440" y="4791456"/>
-            <a:ext cx="1276096" cy="256032"/>
+            <a:off x="9245600" y="4791456"/>
+            <a:ext cx="615696" cy="256032"/>
           </a:xfrm>
           <a:prstGeom prst="rect">
             <a:avLst/>
@@ -21839,7 +21839,7 @@
                 <a:ea typeface="Calibri" pitchFamily="34" charset="-122"/>
                 <a:cs typeface="Calibri" pitchFamily="34" charset="-120"/>
               </a:rPr>
-              <a:t>approvals verify</a:t>
+              <a:t>rework</a:t>
             </a:r>
             <a:endParaRPr lang="en-US" sz="1000" dirty="0"/>
           </a:p>
@@ -21853,8 +21853,8 @@
         </p:nvSpPr>
         <p:spPr>
           <a:xfrm>
-            <a:off x="10348976" y="4791456"/>
-            <a:ext cx="549656" cy="256032"/>
+            <a:off x="9952736" y="4791456"/>
+            <a:ext cx="1276096" cy="256032"/>
           </a:xfrm>
           <a:prstGeom prst="roundRect">
             <a:avLst>
@@ -21880,8 +21880,8 @@
         </p:nvSpPr>
         <p:spPr>
           <a:xfrm>
-            <a:off x="10348976" y="4791456"/>
-            <a:ext cx="549656" cy="256032"/>
+            <a:off x="9952736" y="4791456"/>
+            <a:ext cx="1276096" cy="256032"/>
           </a:xfrm>
           <a:prstGeom prst="rect">
             <a:avLst/>
@@ -21905,7 +21905,7 @@
                 <a:ea typeface="Calibri" pitchFamily="34" charset="-122"/>
                 <a:cs typeface="Calibri" pitchFamily="34" charset="-120"/>
               </a:rPr>
-              <a:t>tests</a:t>
+              <a:t>approvals verify</a:t>
             </a:r>
             <a:endParaRPr lang="en-US" sz="1000" dirty="0"/>
           </a:p>
@@ -21919,8 +21919,8 @@
         </p:nvSpPr>
         <p:spPr>
           <a:xfrm>
-            <a:off x="10990072" y="4791456"/>
-            <a:ext cx="615696" cy="256032"/>
+            <a:off x="457200" y="5138928"/>
+            <a:ext cx="549656" cy="256032"/>
           </a:xfrm>
           <a:prstGeom prst="roundRect">
             <a:avLst>
@@ -21946,8 +21946,8 @@
         </p:nvSpPr>
         <p:spPr>
           <a:xfrm>
-            <a:off x="10990072" y="4791456"/>
-            <a:ext cx="615696" cy="256032"/>
+            <a:off x="457200" y="5138928"/>
+            <a:ext cx="549656" cy="256032"/>
           </a:xfrm>
           <a:prstGeom prst="rect">
             <a:avLst/>
@@ -21971,7 +21971,7 @@
                 <a:ea typeface="Calibri" pitchFamily="34" charset="-122"/>
                 <a:cs typeface="Calibri" pitchFamily="34" charset="-120"/>
               </a:rPr>
-              <a:t>verify</a:t>
+              <a:t>tests</a:t>
             </a:r>
             <a:endParaRPr lang="en-US" sz="1000" dirty="0"/>
           </a:p>
@@ -21985,7 +21985,7 @@
         </p:nvSpPr>
         <p:spPr>
           <a:xfrm>
-            <a:off x="457200" y="5138928"/>
+            <a:off x="1098296" y="5138928"/>
             <a:ext cx="615696" cy="256032"/>
           </a:xfrm>
           <a:prstGeom prst="roundRect">
@@ -22012,7 +22012,7 @@
         </p:nvSpPr>
         <p:spPr>
           <a:xfrm>
-            <a:off x="457200" y="5138928"/>
+            <a:off x="1098296" y="5138928"/>
             <a:ext cx="615696" cy="256032"/>
           </a:xfrm>
           <a:prstGeom prst="rect">
@@ -22037,7 +22037,7 @@
                 <a:ea typeface="Calibri" pitchFamily="34" charset="-122"/>
                 <a:cs typeface="Calibri" pitchFamily="34" charset="-120"/>
               </a:rPr>
-              <a:t>review</a:t>
+              <a:t>verify</a:t>
             </a:r>
             <a:endParaRPr lang="en-US" sz="1000" dirty="0"/>
           </a:p>
@@ -22051,8 +22051,8 @@
         </p:nvSpPr>
         <p:spPr>
           <a:xfrm>
-            <a:off x="1164336" y="5138928"/>
-            <a:ext cx="747776" cy="256032"/>
+            <a:off x="1805432" y="5138928"/>
+            <a:ext cx="615696" cy="256032"/>
           </a:xfrm>
           <a:prstGeom prst="roundRect">
             <a:avLst>
@@ -22078,8 +22078,8 @@
         </p:nvSpPr>
         <p:spPr>
           <a:xfrm>
-            <a:off x="1164336" y="5138928"/>
-            <a:ext cx="747776" cy="256032"/>
+            <a:off x="1805432" y="5138928"/>
+            <a:ext cx="615696" cy="256032"/>
           </a:xfrm>
           <a:prstGeom prst="rect">
             <a:avLst/>
@@ -22103,7 +22103,7 @@
                 <a:ea typeface="Calibri" pitchFamily="34" charset="-122"/>
                 <a:cs typeface="Calibri" pitchFamily="34" charset="-120"/>
               </a:rPr>
-              <a:t>validate</a:t>
+              <a:t>review</a:t>
             </a:r>
             <a:endParaRPr lang="en-US" sz="1000" dirty="0"/>
           </a:p>
@@ -22117,8 +22117,8 @@
         </p:nvSpPr>
         <p:spPr>
           <a:xfrm>
-            <a:off x="2003552" y="5138928"/>
-            <a:ext cx="681736" cy="256032"/>
+            <a:off x="2512568" y="5138928"/>
+            <a:ext cx="747776" cy="256032"/>
           </a:xfrm>
           <a:prstGeom prst="roundRect">
             <a:avLst>
@@ -22144,8 +22144,8 @@
         </p:nvSpPr>
         <p:spPr>
           <a:xfrm>
-            <a:off x="2003552" y="5138928"/>
-            <a:ext cx="681736" cy="256032"/>
+            <a:off x="2512568" y="5138928"/>
+            <a:ext cx="747776" cy="256032"/>
           </a:xfrm>
           <a:prstGeom prst="rect">
             <a:avLst/>
@@ -22169,7 +22169,7 @@
                 <a:ea typeface="Calibri" pitchFamily="34" charset="-122"/>
                 <a:cs typeface="Calibri" pitchFamily="34" charset="-120"/>
               </a:rPr>
-              <a:t>archive</a:t>
+              <a:t>validate</a:t>
             </a:r>
             <a:endParaRPr lang="en-US" sz="1000" dirty="0"/>
           </a:p>
@@ -22183,8 +22183,8 @@
         </p:nvSpPr>
         <p:spPr>
           <a:xfrm>
-            <a:off x="2776728" y="5138928"/>
-            <a:ext cx="549656" cy="256032"/>
+            <a:off x="3351784" y="5138928"/>
+            <a:ext cx="681736" cy="256032"/>
           </a:xfrm>
           <a:prstGeom prst="roundRect">
             <a:avLst>
@@ -22210,8 +22210,8 @@
         </p:nvSpPr>
         <p:spPr>
           <a:xfrm>
-            <a:off x="2776728" y="5138928"/>
-            <a:ext cx="549656" cy="256032"/>
+            <a:off x="3351784" y="5138928"/>
+            <a:ext cx="681736" cy="256032"/>
           </a:xfrm>
           <a:prstGeom prst="rect">
             <a:avLst/>
@@ -22235,7 +22235,7 @@
                 <a:ea typeface="Calibri" pitchFamily="34" charset="-122"/>
                 <a:cs typeface="Calibri" pitchFamily="34" charset="-120"/>
               </a:rPr>
-              <a:t>audit</a:t>
+              <a:t>archive</a:t>
             </a:r>
             <a:endParaRPr lang="en-US" sz="1000" dirty="0"/>
           </a:p>
@@ -22249,8 +22249,8 @@
         </p:nvSpPr>
         <p:spPr>
           <a:xfrm>
-            <a:off x="3417824" y="5138928"/>
-            <a:ext cx="615696" cy="256032"/>
+            <a:off x="4124960" y="5138928"/>
+            <a:ext cx="549656" cy="256032"/>
           </a:xfrm>
           <a:prstGeom prst="roundRect">
             <a:avLst>
@@ -22276,8 +22276,8 @@
         </p:nvSpPr>
         <p:spPr>
           <a:xfrm>
-            <a:off x="3417824" y="5138928"/>
-            <a:ext cx="615696" cy="256032"/>
+            <a:off x="4124960" y="5138928"/>
+            <a:ext cx="549656" cy="256032"/>
           </a:xfrm>
           <a:prstGeom prst="rect">
             <a:avLst/>
@@ -22301,7 +22301,7 @@
                 <a:ea typeface="Calibri" pitchFamily="34" charset="-122"/>
                 <a:cs typeface="Calibri" pitchFamily="34" charset="-120"/>
               </a:rPr>
-              <a:t>report</a:t>
+              <a:t>audit</a:t>
             </a:r>
             <a:endParaRPr lang="en-US" sz="1000" dirty="0"/>
           </a:p>
@@ -22315,8 +22315,8 @@
         </p:nvSpPr>
         <p:spPr>
           <a:xfrm>
-            <a:off x="4124960" y="5138928"/>
-            <a:ext cx="813816" cy="256032"/>
+            <a:off x="4766056" y="5138928"/>
+            <a:ext cx="615696" cy="256032"/>
           </a:xfrm>
           <a:prstGeom prst="roundRect">
             <a:avLst>
@@ -22342,8 +22342,8 @@
         </p:nvSpPr>
         <p:spPr>
           <a:xfrm>
-            <a:off x="4124960" y="5138928"/>
-            <a:ext cx="813816" cy="256032"/>
+            <a:off x="4766056" y="5138928"/>
+            <a:ext cx="615696" cy="256032"/>
           </a:xfrm>
           <a:prstGeom prst="rect">
             <a:avLst/>
@@ -22367,7 +22367,7 @@
                 <a:ea typeface="Calibri" pitchFamily="34" charset="-122"/>
                 <a:cs typeface="Calibri" pitchFamily="34" charset="-120"/>
               </a:rPr>
-              <a:t>dashboard</a:t>
+              <a:t>report</a:t>
             </a:r>
             <a:endParaRPr lang="en-US" sz="1000" dirty="0"/>
           </a:p>
@@ -22381,8 +22381,8 @@
         </p:nvSpPr>
         <p:spPr>
           <a:xfrm>
-            <a:off x="5030216" y="5138928"/>
-            <a:ext cx="417576" cy="256032"/>
+            <a:off x="5473192" y="5138928"/>
+            <a:ext cx="813816" cy="256032"/>
           </a:xfrm>
           <a:prstGeom prst="roundRect">
             <a:avLst>
@@ -22408,8 +22408,8 @@
         </p:nvSpPr>
         <p:spPr>
           <a:xfrm>
-            <a:off x="5030216" y="5138928"/>
-            <a:ext cx="417576" cy="256032"/>
+            <a:off x="5473192" y="5138928"/>
+            <a:ext cx="813816" cy="256032"/>
           </a:xfrm>
           <a:prstGeom prst="rect">
             <a:avLst/>
@@ -22433,7 +22433,7 @@
                 <a:ea typeface="Calibri" pitchFamily="34" charset="-122"/>
                 <a:cs typeface="Calibri" pitchFamily="34" charset="-120"/>
               </a:rPr>
-              <a:t>log</a:t>
+              <a:t>dashboard</a:t>
             </a:r>
             <a:endParaRPr lang="en-US" sz="1000" dirty="0"/>
           </a:p>
@@ -22447,8 +22447,8 @@
         </p:nvSpPr>
         <p:spPr>
           <a:xfrm>
-            <a:off x="5539232" y="5138928"/>
-            <a:ext cx="681736" cy="256032"/>
+            <a:off x="6378448" y="5138928"/>
+            <a:ext cx="417576" cy="256032"/>
           </a:xfrm>
           <a:prstGeom prst="roundRect">
             <a:avLst>
@@ -22474,8 +22474,8 @@
         </p:nvSpPr>
         <p:spPr>
           <a:xfrm>
-            <a:off x="5539232" y="5138928"/>
-            <a:ext cx="681736" cy="256032"/>
+            <a:off x="6378448" y="5138928"/>
+            <a:ext cx="417576" cy="256032"/>
           </a:xfrm>
           <a:prstGeom prst="rect">
             <a:avLst/>
@@ -22499,7 +22499,7 @@
                 <a:ea typeface="Calibri" pitchFamily="34" charset="-122"/>
                 <a:cs typeface="Calibri" pitchFamily="34" charset="-120"/>
               </a:rPr>
-              <a:t>license</a:t>
+              <a:t>log</a:t>
             </a:r>
             <a:endParaRPr lang="en-US" sz="1000" dirty="0"/>
           </a:p>
@@ -22513,8 +22513,8 @@
         </p:nvSpPr>
         <p:spPr>
           <a:xfrm>
-            <a:off x="6312408" y="5138928"/>
-            <a:ext cx="615696" cy="256032"/>
+            <a:off x="6887464" y="5138928"/>
+            <a:ext cx="681736" cy="256032"/>
           </a:xfrm>
           <a:prstGeom prst="roundRect">
             <a:avLst>
@@ -22540,8 +22540,8 @@
         </p:nvSpPr>
         <p:spPr>
           <a:xfrm>
-            <a:off x="6312408" y="5138928"/>
-            <a:ext cx="615696" cy="256032"/>
+            <a:off x="6887464" y="5138928"/>
+            <a:ext cx="681736" cy="256032"/>
           </a:xfrm>
           <a:prstGeom prst="rect">
             <a:avLst/>
@@ -22565,7 +22565,7 @@
                 <a:ea typeface="Calibri" pitchFamily="34" charset="-122"/>
                 <a:cs typeface="Calibri" pitchFamily="34" charset="-120"/>
               </a:rPr>
-              <a:t>doctor</a:t>
+              <a:t>license</a:t>
             </a:r>
             <a:endParaRPr lang="en-US" sz="1000" dirty="0"/>
           </a:p>
@@ -22579,8 +22579,8 @@
         </p:nvSpPr>
         <p:spPr>
           <a:xfrm>
-            <a:off x="7019544" y="5138928"/>
-            <a:ext cx="1011936" cy="256032"/>
+            <a:off x="7660640" y="5138928"/>
+            <a:ext cx="615696" cy="256032"/>
           </a:xfrm>
           <a:prstGeom prst="roundRect">
             <a:avLst>
@@ -22606,8 +22606,8 @@
         </p:nvSpPr>
         <p:spPr>
           <a:xfrm>
-            <a:off x="7019544" y="5138928"/>
-            <a:ext cx="1011936" cy="256032"/>
+            <a:off x="7660640" y="5138928"/>
+            <a:ext cx="615696" cy="256032"/>
           </a:xfrm>
           <a:prstGeom prst="rect">
             <a:avLst/>
@@ -22631,7 +22631,7 @@
                 <a:ea typeface="Calibri" pitchFamily="34" charset="-122"/>
                 <a:cs typeface="Calibri" pitchFamily="34" charset="-120"/>
               </a:rPr>
-              <a:t>plugin build</a:t>
+              <a:t>doctor</a:t>
             </a:r>
             <a:endParaRPr lang="en-US" sz="1000" dirty="0"/>
           </a:p>
@@ -22645,8 +22645,8 @@
         </p:nvSpPr>
         <p:spPr>
           <a:xfrm>
-            <a:off x="8122920" y="5138928"/>
-            <a:ext cx="549656" cy="256032"/>
+            <a:off x="8367776" y="5138928"/>
+            <a:ext cx="1011936" cy="256032"/>
           </a:xfrm>
           <a:prstGeom prst="roundRect">
             <a:avLst>
@@ -22672,8 +22672,8 @@
         </p:nvSpPr>
         <p:spPr>
           <a:xfrm>
-            <a:off x="8122920" y="5138928"/>
-            <a:ext cx="549656" cy="256032"/>
+            <a:off x="8367776" y="5138928"/>
+            <a:ext cx="1011936" cy="256032"/>
           </a:xfrm>
           <a:prstGeom prst="rect">
             <a:avLst/>
@@ -22697,7 +22697,7 @@
                 <a:ea typeface="Calibri" pitchFamily="34" charset="-122"/>
                 <a:cs typeface="Calibri" pitchFamily="34" charset="-120"/>
               </a:rPr>
-              <a:t>trace</a:t>
+              <a:t>plugin build</a:t>
             </a:r>
             <a:endParaRPr lang="en-US" sz="1000" dirty="0"/>
           </a:p>
@@ -22711,8 +22711,8 @@
         </p:nvSpPr>
         <p:spPr>
           <a:xfrm>
-            <a:off x="8764016" y="5138928"/>
-            <a:ext cx="483616" cy="256032"/>
+            <a:off x="9471152" y="5138928"/>
+            <a:ext cx="549656" cy="256032"/>
           </a:xfrm>
           <a:prstGeom prst="roundRect">
             <a:avLst>
@@ -22738,8 +22738,8 @@
         </p:nvSpPr>
         <p:spPr>
           <a:xfrm>
-            <a:off x="8764016" y="5138928"/>
-            <a:ext cx="483616" cy="256032"/>
+            <a:off x="9471152" y="5138928"/>
+            <a:ext cx="549656" cy="256032"/>
           </a:xfrm>
           <a:prstGeom prst="rect">
             <a:avLst/>
@@ -22763,7 +22763,7 @@
                 <a:ea typeface="Calibri" pitchFamily="34" charset="-122"/>
                 <a:cs typeface="Calibri" pitchFamily="34" charset="-120"/>
               </a:rPr>
-              <a:t>hook</a:t>
+              <a:t>trace</a:t>
             </a:r>
             <a:endParaRPr lang="en-US" sz="1000" dirty="0"/>
           </a:p>
@@ -22777,8 +22777,8 @@
         </p:nvSpPr>
         <p:spPr>
           <a:xfrm>
-            <a:off x="9339072" y="5138928"/>
-            <a:ext cx="747776" cy="256032"/>
+            <a:off x="10112248" y="5138928"/>
+            <a:ext cx="483616" cy="256032"/>
           </a:xfrm>
           <a:prstGeom prst="roundRect">
             <a:avLst>
@@ -22804,7 +22804,73 @@
         </p:nvSpPr>
         <p:spPr>
           <a:xfrm>
-            <a:off x="9339072" y="5138928"/>
+            <a:off x="10112248" y="5138928"/>
+            <a:ext cx="483616" cy="256032"/>
+          </a:xfrm>
+          <a:prstGeom prst="rect">
+            <a:avLst/>
+          </a:prstGeom>
+          <a:noFill/>
+          <a:ln/>
+        </p:spPr>
+        <p:txBody>
+          <a:bodyPr wrap="square" lIns="0" tIns="0" rIns="0" bIns="0" rtlCol="0" anchor="ctr"/>
+          <a:lstStyle/>
+          <a:p>
+            <a:pPr algn="ctr" indent="0" marL="0">
+              <a:buNone/>
+            </a:pPr>
+            <a:r>
+              <a:rPr lang="en-US" sz="1000" dirty="0">
+                <a:solidFill>
+                  <a:srgbClr val="1F2430"/>
+                </a:solidFill>
+                <a:latin typeface="Calibri" pitchFamily="34" charset="0"/>
+                <a:ea typeface="Calibri" pitchFamily="34" charset="-122"/>
+                <a:cs typeface="Calibri" pitchFamily="34" charset="-120"/>
+              </a:rPr>
+              <a:t>hook</a:t>
+            </a:r>
+            <a:endParaRPr lang="en-US" sz="1000" dirty="0"/>
+          </a:p>
+        </p:txBody>
+      </p:sp>
+      <p:sp>
+        <p:nvSpPr>
+          <p:cNvPr id="134" name="Shape 132"/>
+          <p:cNvSpPr/>
+          <p:nvPr/>
+        </p:nvSpPr>
+        <p:spPr>
+          <a:xfrm>
+            <a:off x="10687304" y="5138928"/>
+            <a:ext cx="747776" cy="256032"/>
+          </a:xfrm>
+          <a:prstGeom prst="roundRect">
+            <a:avLst>
+              <a:gd name="adj" fmla="val 50000"/>
+            </a:avLst>
+          </a:prstGeom>
+          <a:solidFill>
+            <a:srgbClr val="F3F5F8"/>
+          </a:solidFill>
+          <a:ln w="12700">
+            <a:solidFill>
+              <a:srgbClr val="F3F5F8"/>
+            </a:solidFill>
+            <a:prstDash val="solid"/>
+          </a:ln>
+        </p:spPr>
+      </p:sp>
+      <p:sp>
+        <p:nvSpPr>
+          <p:cNvPr id="135" name="Text 133"/>
+          <p:cNvSpPr txBox="1"/>
+          <p:nvPr/>
+        </p:nvSpPr>
+        <p:spPr>
+          <a:xfrm>
+            <a:off x="10687304" y="5138928"/>
             <a:ext cx="747776" cy="256032"/>
           </a:xfrm>
           <a:prstGeom prst="rect">
@@ -25475,7 +25541,7 @@
                 <a:ea typeface="Courier New" pitchFamily="34" charset="-122"/>
                 <a:cs typeface="Courier New" pitchFamily="34" charset="-120"/>
               </a:rPr>
-              <a:t>  sdlc 0.9.0, license: community</a:t>
+              <a:t>  sdlc 0.9.1, license: community</a:t>
             </a:r>
             <a:endParaRPr lang="en-US" sz="1000" dirty="0"/>
           </a:p>
@@ -25526,7 +25592,7 @@
                 <a:ea typeface="Courier New" pitchFamily="34" charset="-122"/>
                 <a:cs typeface="Courier New" pitchFamily="34" charset="-120"/>
               </a:rPr>
-              <a:t>  files: 61 created, 0 updated, 0</a:t>
+              <a:t>  files: 64 created, 0 updated, 0</a:t>
             </a:r>
             <a:endParaRPr lang="en-US" sz="1000" dirty="0"/>
           </a:p>
@@ -26706,7 +26772,7 @@
         <p:spPr>
           <a:xfrm>
             <a:off x="4295648" y="6053328"/>
-            <a:ext cx="1011936" cy="256032"/>
+            <a:ext cx="549656" cy="256032"/>
           </a:xfrm>
           <a:prstGeom prst="roundRect">
             <a:avLst>
@@ -26733,7 +26799,7 @@
         <p:spPr>
           <a:xfrm>
             <a:off x="4295648" y="6053328"/>
-            <a:ext cx="1011936" cy="256032"/>
+            <a:ext cx="549656" cy="256032"/>
           </a:xfrm>
           <a:prstGeom prst="rect">
             <a:avLst/>
@@ -26757,7 +26823,7 @@
                 <a:ea typeface="Calibri" pitchFamily="34" charset="-122"/>
                 <a:cs typeface="Calibri" pitchFamily="34" charset="-120"/>
               </a:rPr>
-              <a:t>layout adapt</a:t>
+              <a:t>guide</a:t>
             </a:r>
             <a:endParaRPr lang="en-US" sz="1000" dirty="0"/>
           </a:p>
@@ -26771,8 +26837,8 @@
         </p:nvSpPr>
         <p:spPr>
           <a:xfrm>
-            <a:off x="5399024" y="6053328"/>
-            <a:ext cx="1144016" cy="256032"/>
+            <a:off x="4936744" y="6053328"/>
+            <a:ext cx="1011936" cy="256032"/>
           </a:xfrm>
           <a:prstGeom prst="roundRect">
             <a:avLst>
@@ -26798,8 +26864,8 @@
         </p:nvSpPr>
         <p:spPr>
           <a:xfrm>
-            <a:off x="5399024" y="6053328"/>
-            <a:ext cx="1144016" cy="256032"/>
+            <a:off x="4936744" y="6053328"/>
+            <a:ext cx="1011936" cy="256032"/>
           </a:xfrm>
           <a:prstGeom prst="rect">
             <a:avLst/>
@@ -26823,7 +26889,7 @@
                 <a:ea typeface="Calibri" pitchFamily="34" charset="-122"/>
                 <a:cs typeface="Calibri" pitchFamily="34" charset="-120"/>
               </a:rPr>
-              <a:t>layout convert</a:t>
+              <a:t>layout adapt</a:t>
             </a:r>
             <a:endParaRPr lang="en-US" sz="1000" dirty="0"/>
           </a:p>
@@ -26837,8 +26903,8 @@
         </p:nvSpPr>
         <p:spPr>
           <a:xfrm>
-            <a:off x="6634480" y="6053328"/>
-            <a:ext cx="549656" cy="256032"/>
+            <a:off x="6040120" y="6053328"/>
+            <a:ext cx="1144016" cy="256032"/>
           </a:xfrm>
           <a:prstGeom prst="roundRect">
             <a:avLst>
@@ -26864,8 +26930,8 @@
         </p:nvSpPr>
         <p:spPr>
           <a:xfrm>
-            <a:off x="6634480" y="6053328"/>
-            <a:ext cx="549656" cy="256032"/>
+            <a:off x="6040120" y="6053328"/>
+            <a:ext cx="1144016" cy="256032"/>
           </a:xfrm>
           <a:prstGeom prst="rect">
             <a:avLst/>
@@ -26889,7 +26955,7 @@
                 <a:ea typeface="Calibri" pitchFamily="34" charset="-122"/>
                 <a:cs typeface="Calibri" pitchFamily="34" charset="-120"/>
               </a:rPr>
-              <a:t>adopt</a:t>
+              <a:t>layout convert</a:t>
             </a:r>
             <a:endParaRPr lang="en-US" sz="1000" dirty="0"/>
           </a:p>
@@ -26904,7 +26970,7 @@
         <p:spPr>
           <a:xfrm>
             <a:off x="7275576" y="6053328"/>
-            <a:ext cx="615696" cy="256032"/>
+            <a:ext cx="549656" cy="256032"/>
           </a:xfrm>
           <a:prstGeom prst="roundRect">
             <a:avLst>
@@ -26931,6 +26997,72 @@
         <p:spPr>
           <a:xfrm>
             <a:off x="7275576" y="6053328"/>
+            <a:ext cx="549656" cy="256032"/>
+          </a:xfrm>
+          <a:prstGeom prst="rect">
+            <a:avLst/>
+          </a:prstGeom>
+          <a:noFill/>
+          <a:ln/>
+        </p:spPr>
+        <p:txBody>
+          <a:bodyPr wrap="square" lIns="0" tIns="0" rIns="0" bIns="0" rtlCol="0" anchor="ctr"/>
+          <a:lstStyle/>
+          <a:p>
+            <a:pPr algn="ctr" indent="0" marL="0">
+              <a:buNone/>
+            </a:pPr>
+            <a:r>
+              <a:rPr lang="en-US" sz="1000" dirty="0">
+                <a:solidFill>
+                  <a:srgbClr val="5B6475"/>
+                </a:solidFill>
+                <a:latin typeface="Calibri" pitchFamily="34" charset="0"/>
+                <a:ea typeface="Calibri" pitchFamily="34" charset="-122"/>
+                <a:cs typeface="Calibri" pitchFamily="34" charset="-120"/>
+              </a:rPr>
+              <a:t>adopt</a:t>
+            </a:r>
+            <a:endParaRPr lang="en-US" sz="1000" dirty="0"/>
+          </a:p>
+        </p:txBody>
+      </p:sp>
+      <p:sp>
+        <p:nvSpPr>
+          <p:cNvPr id="40" name="Shape 38"/>
+          <p:cNvSpPr/>
+          <p:nvPr/>
+        </p:nvSpPr>
+        <p:spPr>
+          <a:xfrm>
+            <a:off x="7916672" y="6053328"/>
+            <a:ext cx="615696" cy="256032"/>
+          </a:xfrm>
+          <a:prstGeom prst="roundRect">
+            <a:avLst>
+              <a:gd name="adj" fmla="val 50000"/>
+            </a:avLst>
+          </a:prstGeom>
+          <a:solidFill>
+            <a:srgbClr val="F3F5F8"/>
+          </a:solidFill>
+          <a:ln w="12700">
+            <a:solidFill>
+              <a:srgbClr val="F3F5F8"/>
+            </a:solidFill>
+            <a:prstDash val="solid"/>
+          </a:ln>
+        </p:spPr>
+      </p:sp>
+      <p:sp>
+        <p:nvSpPr>
+          <p:cNvPr id="41" name="Text 39"/>
+          <p:cNvSpPr txBox="1"/>
+          <p:nvPr/>
+        </p:nvSpPr>
+        <p:spPr>
+          <a:xfrm>
+            <a:off x="7916672" y="6053328"/>
             <a:ext cx="615696" cy="256032"/>
           </a:xfrm>
           <a:prstGeom prst="rect">

--- a/docs/demo/sdlc-calculator-demo.en.pptx
+++ b/docs/demo/sdlc-calculator-demo.en.pptx
@@ -6658,7 +6658,7 @@
                 <a:ea typeface="Courier New" pitchFamily="34" charset="-122"/>
                 <a:cs typeface="Courier New" pitchFamily="34" charset="-120"/>
               </a:rPr>
-              <a:t>  code-owner (15207f0f3042)</a:t>
+              <a:t>  code-owner (e1ad15ea9d87)</a:t>
             </a:r>
             <a:endParaRPr lang="en-US" sz="1000" dirty="0"/>
           </a:p>
@@ -7127,11 +7127,11 @@
         <p:spPr>
           <a:xfrm>
             <a:off x="457200" y="1645920"/>
-            <a:ext cx="5500116" cy="4206240"/>
+            <a:ext cx="5500116" cy="3749040"/>
           </a:xfrm>
           <a:prstGeom prst="roundRect">
             <a:avLst>
-              <a:gd name="adj" fmla="val 2174"/>
+              <a:gd name="adj" fmla="val 2439"/>
             </a:avLst>
           </a:prstGeom>
           <a:solidFill>
@@ -7298,7 +7298,7 @@
         <p:spPr>
           <a:xfrm>
             <a:off x="594360" y="2468880"/>
-            <a:ext cx="5225796" cy="3246120"/>
+            <a:ext cx="5225796" cy="2788920"/>
           </a:xfrm>
           <a:prstGeom prst="rect">
             <a:avLst/>
@@ -7339,7 +7339,7 @@
                 <a:ea typeface="Courier New" pitchFamily="34" charset="-122"/>
                 <a:cs typeface="Courier New" pitchFamily="34" charset="-120"/>
               </a:rPr>
-              <a:t>  release-manager (15207f0f3042)</a:t>
+              <a:t>  release-manager (e1ad15ea9d87)</a:t>
             </a:r>
             <a:endParaRPr lang="en-US" sz="1000" dirty="0"/>
           </a:p>
@@ -7404,7 +7404,7 @@
         </p:nvSpPr>
         <p:spPr>
           <a:xfrm>
-            <a:off x="457200" y="5925312"/>
+            <a:off x="457200" y="5468112"/>
             <a:ext cx="5500116" cy="384048"/>
           </a:xfrm>
           <a:prstGeom prst="rect">
@@ -7444,11 +7444,11 @@
         <p:spPr>
           <a:xfrm>
             <a:off x="6231636" y="1645920"/>
-            <a:ext cx="5500116" cy="4206240"/>
+            <a:ext cx="5500116" cy="3749040"/>
           </a:xfrm>
           <a:prstGeom prst="roundRect">
             <a:avLst>
-              <a:gd name="adj" fmla="val 2174"/>
+              <a:gd name="adj" fmla="val 2439"/>
             </a:avLst>
           </a:prstGeom>
           <a:solidFill>
@@ -7615,7 +7615,7 @@
         <p:spPr>
           <a:xfrm>
             <a:off x="6368796" y="2468880"/>
-            <a:ext cx="5225796" cy="3246120"/>
+            <a:ext cx="5225796" cy="2788920"/>
           </a:xfrm>
           <a:prstGeom prst="rect">
             <a:avLst/>
@@ -7639,7 +7639,7 @@
                 <a:ea typeface="Courier New" pitchFamily="34" charset="-122"/>
                 <a:cs typeface="Courier New" pitchFamily="34" charset="-120"/>
               </a:rPr>
-              <a:t>✓ basic-arithmetic/intent alice valid 5076f215</a:t>
+              <a:t>✓ basic-arithmetic/intent alice valid c5112f50</a:t>
             </a:r>
             <a:endParaRPr lang="en-US" sz="1000" dirty="0"/>
           </a:p>
@@ -7656,7 +7656,7 @@
                 <a:ea typeface="Courier New" pitchFamily="34" charset="-122"/>
                 <a:cs typeface="Courier New" pitchFamily="34" charset="-120"/>
               </a:rPr>
-              <a:t>✓ basic-arithmetic/spec alice valid 7f9bc81a</a:t>
+              <a:t>✓ basic-arithmetic/spec alice valid e4689e12</a:t>
             </a:r>
             <a:endParaRPr lang="en-US" sz="1000" dirty="0"/>
           </a:p>
@@ -7673,7 +7673,7 @@
                 <a:ea typeface="Courier New" pitchFamily="34" charset="-122"/>
                 <a:cs typeface="Courier New" pitchFamily="34" charset="-120"/>
               </a:rPr>
-              <a:t>✗ basic-arithmetic/plan bob wrong-signer 7f9bc81a</a:t>
+              <a:t>✗ basic-arithmetic/plan bob wrong-signer e4689e12</a:t>
             </a:r>
             <a:endParaRPr lang="en-US" sz="1000" dirty="0"/>
           </a:p>
@@ -7690,7 +7690,7 @@
                 <a:ea typeface="Courier New" pitchFamily="34" charset="-122"/>
                 <a:cs typeface="Courier New" pitchFamily="34" charset="-120"/>
               </a:rPr>
-              <a:t>✓ basic-arithmetic/review carol valid 016d3b4b</a:t>
+              <a:t>✓ basic-arithmetic/review carol valid 91e4cc39</a:t>
             </a:r>
             <a:endParaRPr lang="en-US" sz="1000" dirty="0"/>
           </a:p>
@@ -7707,7 +7707,7 @@
                 <a:ea typeface="Courier New" pitchFamily="34" charset="-122"/>
                 <a:cs typeface="Courier New" pitchFamily="34" charset="-120"/>
               </a:rPr>
-              <a:t>✓ basic-arithmetic/release alice valid 352090ab</a:t>
+              <a:t>✓ basic-arithmetic/release alice valid 2160d122</a:t>
             </a:r>
             <a:endParaRPr lang="en-US" sz="1000" dirty="0"/>
           </a:p>
@@ -7724,7 +7724,7 @@
                 <a:ea typeface="Courier New" pitchFamily="34" charset="-122"/>
                 <a:cs typeface="Courier New" pitchFamily="34" charset="-120"/>
               </a:rPr>
-              <a:t>✓ openspec/roles.yaml alice@calc.example valid bbd1c6b0</a:t>
+              <a:t>✓ openspec/roles.yaml alice@calc.example valid 3894ed3d</a:t>
             </a:r>
             <a:endParaRPr lang="en-US" sz="1000" dirty="0"/>
           </a:p>
@@ -7789,7 +7789,7 @@
         </p:nvSpPr>
         <p:spPr>
           <a:xfrm>
-            <a:off x="6231636" y="5925312"/>
+            <a:off x="6231636" y="5468112"/>
             <a:ext cx="5500116" cy="384048"/>
           </a:xfrm>
           <a:prstGeom prst="rect">
@@ -7834,6 +7834,111 @@
               <a:t>is unsigned, reported but not blocking.</a:t>
             </a:r>
             <a:endParaRPr lang="en-US" sz="1100" dirty="0"/>
+          </a:p>
+        </p:txBody>
+      </p:sp>
+      <p:sp>
+        <p:nvSpPr>
+          <p:cNvPr id="18" name="Text 16"/>
+          <p:cNvSpPr txBox="1"/>
+          <p:nvPr/>
+        </p:nvSpPr>
+        <p:spPr>
+          <a:xfrm>
+            <a:off x="457200" y="6053328"/>
+            <a:ext cx="1737360" cy="256032"/>
+          </a:xfrm>
+          <a:prstGeom prst="rect">
+            <a:avLst/>
+          </a:prstGeom>
+          <a:noFill/>
+          <a:ln/>
+        </p:spPr>
+        <p:txBody>
+          <a:bodyPr wrap="square" lIns="0" tIns="0" rIns="0" bIns="0" rtlCol="0" anchor="ctr"/>
+          <a:lstStyle/>
+          <a:p>
+            <a:pPr indent="0" marL="0">
+              <a:buNone/>
+            </a:pPr>
+            <a:r>
+              <a:rPr lang="en-US" sz="1100" dirty="0">
+                <a:solidFill>
+                  <a:srgbClr val="5B6475"/>
+                </a:solidFill>
+                <a:latin typeface="Calibri" pitchFamily="34" charset="0"/>
+                <a:ea typeface="Calibri" pitchFamily="34" charset="-122"/>
+                <a:cs typeface="Calibri" pitchFamily="34" charset="-120"/>
+              </a:rPr>
+              <a:t>Also in this part:</a:t>
+            </a:r>
+            <a:endParaRPr lang="en-US" sz="1100" dirty="0"/>
+          </a:p>
+        </p:txBody>
+      </p:sp>
+      <p:sp>
+        <p:nvSpPr>
+          <p:cNvPr id="19" name="Shape 17"/>
+          <p:cNvSpPr/>
+          <p:nvPr/>
+        </p:nvSpPr>
+        <p:spPr>
+          <a:xfrm>
+            <a:off x="2240280" y="6053328"/>
+            <a:ext cx="1077976" cy="256032"/>
+          </a:xfrm>
+          <a:prstGeom prst="roundRect">
+            <a:avLst>
+              <a:gd name="adj" fmla="val 50000"/>
+            </a:avLst>
+          </a:prstGeom>
+          <a:solidFill>
+            <a:srgbClr val="F3F5F8"/>
+          </a:solidFill>
+          <a:ln w="12700">
+            <a:solidFill>
+              <a:srgbClr val="F3F5F8"/>
+            </a:solidFill>
+            <a:prstDash val="solid"/>
+          </a:ln>
+        </p:spPr>
+      </p:sp>
+      <p:sp>
+        <p:nvSpPr>
+          <p:cNvPr id="20" name="Text 18"/>
+          <p:cNvSpPr txBox="1"/>
+          <p:nvPr/>
+        </p:nvSpPr>
+        <p:spPr>
+          <a:xfrm>
+            <a:off x="2240280" y="6053328"/>
+            <a:ext cx="1077976" cy="256032"/>
+          </a:xfrm>
+          <a:prstGeom prst="rect">
+            <a:avLst/>
+          </a:prstGeom>
+          <a:noFill/>
+          <a:ln/>
+        </p:spPr>
+        <p:txBody>
+          <a:bodyPr wrap="square" lIns="0" tIns="0" rIns="0" bIns="0" rtlCol="0" anchor="ctr"/>
+          <a:lstStyle/>
+          <a:p>
+            <a:pPr algn="ctr" indent="0" marL="0">
+              <a:buNone/>
+            </a:pPr>
+            <a:r>
+              <a:rPr lang="en-US" sz="1000" dirty="0">
+                <a:solidFill>
+                  <a:srgbClr val="5B6475"/>
+                </a:solidFill>
+                <a:latin typeface="Calibri" pitchFamily="34" charset="0"/>
+                <a:ea typeface="Calibri" pitchFamily="34" charset="-122"/>
+                <a:cs typeface="Calibri" pitchFamily="34" charset="-120"/>
+              </a:rPr>
+              <a:t>release check</a:t>
+            </a:r>
+            <a:endParaRPr lang="en-US" sz="1000" dirty="0"/>
           </a:p>
         </p:txBody>
       </p:sp>
@@ -13829,7 +13934,7 @@
                 <a:ea typeface="Courier New" pitchFamily="34" charset="-122"/>
                 <a:cs typeface="Courier New" pitchFamily="34" charset="-120"/>
               </a:rPr>
-              <a:t>  archived) · sdlc 0.9.1, license:</a:t>
+              <a:t>  archived) · sdlc 0.10.0, license:</a:t>
             </a:r>
             <a:endParaRPr lang="en-US" sz="1000" dirty="0"/>
           </a:p>
@@ -14016,7 +14121,7 @@
                 <a:ea typeface="Courier New" pitchFamily="34" charset="-122"/>
                 <a:cs typeface="Courier New" pitchFamily="34" charset="-120"/>
               </a:rPr>
-              <a:t>  recorded with sdlc 0.9.1; licenses:</a:t>
+              <a:t>  recorded with sdlc 0.10.0; licenses:</a:t>
             </a:r>
             <a:endParaRPr lang="en-US" sz="1000" dirty="0"/>
           </a:p>
@@ -14333,7 +14438,7 @@
                 <a:ea typeface="Courier New" pitchFamily="34" charset="-122"/>
                 <a:cs typeface="Courier New" pitchFamily="34" charset="-120"/>
               </a:rPr>
-              <a:t>2026-10-07T10:13:21.903Z  gate.review.await</a:t>
+              <a:t>2026-10-07T13:36:22.758Z  gate.review.await</a:t>
             </a:r>
             <a:endParaRPr lang="en-US" sz="1000" dirty="0"/>
           </a:p>
@@ -14367,7 +14472,7 @@
                 <a:ea typeface="Courier New" pitchFamily="34" charset="-122"/>
                 <a:cs typeface="Courier New" pitchFamily="34" charset="-120"/>
               </a:rPr>
-              <a:t>  sha256:15207f0f3042ddb9dcece8aec4d12c856b</a:t>
+              <a:t>  sha256:e1ad15ea9d87bf2b7858610d3286b407cf</a:t>
             </a:r>
             <a:endParaRPr lang="en-US" sz="1000" dirty="0"/>
           </a:p>
@@ -14384,7 +14489,7 @@
                 <a:ea typeface="Courier New" pitchFamily="34" charset="-122"/>
                 <a:cs typeface="Courier New" pitchFamily="34" charset="-120"/>
               </a:rPr>
-              <a:t>  747402af622946b7c55efdb406e49b [sdlc</a:t>
+              <a:t>  7dad20136ebebb77a89d1a2b19ffc1 [sdlc</a:t>
             </a:r>
             <a:endParaRPr lang="en-US" sz="1000" dirty="0"/>
           </a:p>
@@ -14401,7 +14506,7 @@
                 <a:ea typeface="Courier New" pitchFamily="34" charset="-122"/>
                 <a:cs typeface="Courier New" pitchFamily="34" charset="-120"/>
               </a:rPr>
-              <a:t>  0.9.1 · community]</a:t>
+              <a:t>  0.10.0 · community]</a:t>
             </a:r>
             <a:endParaRPr lang="en-US" sz="1000" dirty="0"/>
           </a:p>
@@ -14418,7 +14523,7 @@
                 <a:ea typeface="Courier New" pitchFamily="34" charset="-122"/>
                 <a:cs typeface="Courier New" pitchFamily="34" charset="-120"/>
               </a:rPr>
-              <a:t>2026-10-07T10:13:24.897Z  gate.review.appro</a:t>
+              <a:t>2026-10-07T13:36:25.643Z  gate.review.appro</a:t>
             </a:r>
             <a:endParaRPr lang="en-US" sz="1000" dirty="0"/>
           </a:p>
@@ -14469,7 +14574,7 @@
                 <a:ea typeface="Courier New" pitchFamily="34" charset="-122"/>
                 <a:cs typeface="Courier New" pitchFamily="34" charset="-120"/>
               </a:rPr>
-              <a:t>  [sdlc 0.9.1 · community]</a:t>
+              <a:t>  [sdlc 0.10.0 · community]</a:t>
             </a:r>
             <a:endParaRPr lang="en-US" sz="1000" dirty="0"/>
           </a:p>
@@ -14486,7 +14591,7 @@
                 <a:ea typeface="Courier New" pitchFamily="34" charset="-122"/>
                 <a:cs typeface="Courier New" pitchFamily="34" charset="-120"/>
               </a:rPr>
-              <a:t>2026-10-07T10:13:28.430Z  gate.release.appr</a:t>
+              <a:t>2026-10-07T13:36:30.395Z  gate.release.appr</a:t>
             </a:r>
             <a:endParaRPr lang="en-US" sz="1000" dirty="0"/>
           </a:p>
@@ -14537,7 +14642,7 @@
                 <a:ea typeface="Courier New" pitchFamily="34" charset="-122"/>
                 <a:cs typeface="Courier New" pitchFamily="34" charset="-120"/>
               </a:rPr>
-              <a:t>  release-manager [sdlc 0.9.1 · community]</a:t>
+              <a:t>  release-manager [sdlc 0.10.0 · community]</a:t>
             </a:r>
             <a:endParaRPr lang="en-US" sz="1000" dirty="0"/>
           </a:p>
@@ -15714,7 +15819,7 @@
                 <a:ea typeface="Courier New" pitchFamily="34" charset="-122"/>
                 <a:cs typeface="Courier New" pitchFamily="34" charset="-120"/>
               </a:rPr>
-              <a:t>✓ test (1.0s)</a:t>
+              <a:t>✓ test (1.4s)</a:t>
             </a:r>
             <a:endParaRPr lang="en-US" sz="1000" dirty="0"/>
           </a:p>
@@ -15731,7 +15836,7 @@
                 <a:ea typeface="Courier New" pitchFamily="34" charset="-122"/>
                 <a:cs typeface="Courier New" pitchFamily="34" charset="-120"/>
               </a:rPr>
-              <a:t>✓ ci-green (ci/pipeline_status, 0.5s)</a:t>
+              <a:t>✓ ci-green (ci/pipeline_status, 0.8s)</a:t>
             </a:r>
             <a:endParaRPr lang="en-US" sz="1000" dirty="0"/>
           </a:p>
@@ -16167,7 +16272,7 @@
                 <a:ea typeface="Courier New" pitchFamily="34" charset="-122"/>
                 <a:cs typeface="Courier New" pitchFamily="34" charset="-120"/>
               </a:rPr>
-              <a:t>      "id": "20261007T101406690Z-ci-green-b</a:t>
+              <a:t>      "id": "20261007T133720640Z-ci-green-3</a:t>
             </a:r>
             <a:endParaRPr lang="en-US" sz="1000" dirty="0"/>
           </a:p>
@@ -16184,7 +16289,7 @@
                 <a:ea typeface="Courier New" pitchFamily="34" charset="-122"/>
                 <a:cs typeface="Courier New" pitchFamily="34" charset="-120"/>
               </a:rPr>
-              <a:t>  80419",</a:t>
+              <a:t>  67431",</a:t>
             </a:r>
             <a:endParaRPr lang="en-US" sz="1000" dirty="0"/>
           </a:p>
@@ -16320,7 +16425,7 @@
                 <a:ea typeface="Courier New" pitchFamily="34" charset="-122"/>
                 <a:cs typeface="Courier New" pitchFamily="34" charset="-120"/>
               </a:rPr>
-              <a:t>        "ref": "2742131fbd21da8c5c880624e29</a:t>
+              <a:t>        "ref": "981f0bffbaca6272e42788b096b</a:t>
             </a:r>
             <a:endParaRPr lang="en-US" sz="1000" dirty="0"/>
           </a:p>
@@ -16337,7 +16442,7 @@
                 <a:ea typeface="Courier New" pitchFamily="34" charset="-122"/>
                 <a:cs typeface="Courier New" pitchFamily="34" charset="-120"/>
               </a:rPr>
-              <a:t>  ea2638c4bbb62",</a:t>
+              <a:t>  a742e3fa1444e",</a:t>
             </a:r>
             <a:endParaRPr lang="en-US" sz="1000" dirty="0"/>
           </a:p>
@@ -16530,7 +16635,7 @@
         <p:spPr>
           <a:xfrm>
             <a:off x="3211576" y="6053328"/>
-            <a:ext cx="813816" cy="256032"/>
+            <a:ext cx="945896" cy="256032"/>
           </a:xfrm>
           <a:prstGeom prst="roundRect">
             <a:avLst>
@@ -16557,6 +16662,138 @@
         <p:spPr>
           <a:xfrm>
             <a:off x="3211576" y="6053328"/>
+            <a:ext cx="945896" cy="256032"/>
+          </a:xfrm>
+          <a:prstGeom prst="rect">
+            <a:avLst/>
+          </a:prstGeom>
+          <a:noFill/>
+          <a:ln/>
+        </p:spPr>
+        <p:txBody>
+          <a:bodyPr wrap="square" lIns="0" tIns="0" rIns="0" bIns="0" rtlCol="0" anchor="ctr"/>
+          <a:lstStyle/>
+          <a:p>
+            <a:pPr algn="ctr" indent="0" marL="0">
+              <a:buNone/>
+            </a:pPr>
+            <a:r>
+              <a:rPr lang="en-US" sz="1000" dirty="0">
+                <a:solidFill>
+                  <a:srgbClr val="5B6475"/>
+                </a:solidFill>
+                <a:latin typeface="Calibri" pitchFamily="34" charset="0"/>
+                <a:ea typeface="Calibri" pitchFamily="34" charset="-122"/>
+                <a:cs typeface="Calibri" pitchFamily="34" charset="-120"/>
+              </a:rPr>
+              <a:t>events list</a:t>
+            </a:r>
+            <a:endParaRPr lang="en-US" sz="1000" dirty="0"/>
+          </a:p>
+        </p:txBody>
+      </p:sp>
+      <p:sp>
+        <p:nvSpPr>
+          <p:cNvPr id="30" name="Shape 28"/>
+          <p:cNvSpPr/>
+          <p:nvPr/>
+        </p:nvSpPr>
+        <p:spPr>
+          <a:xfrm>
+            <a:off x="4248912" y="6053328"/>
+            <a:ext cx="1011936" cy="256032"/>
+          </a:xfrm>
+          <a:prstGeom prst="roundRect">
+            <a:avLst>
+              <a:gd name="adj" fmla="val 50000"/>
+            </a:avLst>
+          </a:prstGeom>
+          <a:solidFill>
+            <a:srgbClr val="F3F5F8"/>
+          </a:solidFill>
+          <a:ln w="12700">
+            <a:solidFill>
+              <a:srgbClr val="F3F5F8"/>
+            </a:solidFill>
+            <a:prstDash val="solid"/>
+          </a:ln>
+        </p:spPr>
+      </p:sp>
+      <p:sp>
+        <p:nvSpPr>
+          <p:cNvPr id="31" name="Text 29"/>
+          <p:cNvSpPr txBox="1"/>
+          <p:nvPr/>
+        </p:nvSpPr>
+        <p:spPr>
+          <a:xfrm>
+            <a:off x="4248912" y="6053328"/>
+            <a:ext cx="1011936" cy="256032"/>
+          </a:xfrm>
+          <a:prstGeom prst="rect">
+            <a:avLst/>
+          </a:prstGeom>
+          <a:noFill/>
+          <a:ln/>
+        </p:spPr>
+        <p:txBody>
+          <a:bodyPr wrap="square" lIns="0" tIns="0" rIns="0" bIns="0" rtlCol="0" anchor="ctr"/>
+          <a:lstStyle/>
+          <a:p>
+            <a:pPr algn="ctr" indent="0" marL="0">
+              <a:buNone/>
+            </a:pPr>
+            <a:r>
+              <a:rPr lang="en-US" sz="1000" dirty="0">
+                <a:solidFill>
+                  <a:srgbClr val="5B6475"/>
+                </a:solidFill>
+                <a:latin typeface="Calibri" pitchFamily="34" charset="0"/>
+                <a:ea typeface="Calibri" pitchFamily="34" charset="-122"/>
+                <a:cs typeface="Calibri" pitchFamily="34" charset="-120"/>
+              </a:rPr>
+              <a:t>events flush</a:t>
+            </a:r>
+            <a:endParaRPr lang="en-US" sz="1000" dirty="0"/>
+          </a:p>
+        </p:txBody>
+      </p:sp>
+      <p:sp>
+        <p:nvSpPr>
+          <p:cNvPr id="32" name="Shape 30"/>
+          <p:cNvSpPr/>
+          <p:nvPr/>
+        </p:nvSpPr>
+        <p:spPr>
+          <a:xfrm>
+            <a:off x="5352288" y="6053328"/>
+            <a:ext cx="813816" cy="256032"/>
+          </a:xfrm>
+          <a:prstGeom prst="roundRect">
+            <a:avLst>
+              <a:gd name="adj" fmla="val 50000"/>
+            </a:avLst>
+          </a:prstGeom>
+          <a:solidFill>
+            <a:srgbClr val="F3F5F8"/>
+          </a:solidFill>
+          <a:ln w="12700">
+            <a:solidFill>
+              <a:srgbClr val="F3F5F8"/>
+            </a:solidFill>
+            <a:prstDash val="solid"/>
+          </a:ln>
+        </p:spPr>
+      </p:sp>
+      <p:sp>
+        <p:nvSpPr>
+          <p:cNvPr id="33" name="Text 31"/>
+          <p:cNvSpPr txBox="1"/>
+          <p:nvPr/>
+        </p:nvSpPr>
+        <p:spPr>
+          <a:xfrm>
+            <a:off x="5352288" y="6053328"/>
             <a:ext cx="813816" cy="256032"/>
           </a:xfrm>
           <a:prstGeom prst="rect">
@@ -18581,7 +18818,7 @@
                 <a:ea typeface="Cambria" pitchFamily="34" charset="-122"/>
                 <a:cs typeface="Cambria" pitchFamily="34" charset="-120"/>
               </a:rPr>
-              <a:t>91</a:t>
+              <a:t>94</a:t>
             </a:r>
             <a:endParaRPr lang="en-US" sz="6000" dirty="0"/>
           </a:p>
@@ -18686,7 +18923,7 @@
                 <a:ea typeface="Cambria" pitchFamily="34" charset="-122"/>
                 <a:cs typeface="Cambria" pitchFamily="34" charset="-120"/>
               </a:rPr>
-              <a:t>60</a:t>
+              <a:t>63</a:t>
             </a:r>
             <a:endParaRPr lang="en-US" sz="6000" dirty="0"/>
           </a:p>
@@ -18725,7 +18962,7 @@
                 <a:ea typeface="Calibri" pitchFamily="34" charset="-122"/>
                 <a:cs typeface="Calibri" pitchFamily="34" charset="-120"/>
               </a:rPr>
-              <a:t>of 60 commands</a:t>
+              <a:t>of 63 commands</a:t>
             </a:r>
             <a:endParaRPr lang="en-US" sz="1600" dirty="0"/>
           </a:p>
@@ -21260,7 +21497,7 @@
         <p:spPr>
           <a:xfrm>
             <a:off x="2399792" y="4791456"/>
-            <a:ext cx="813816" cy="256032"/>
+            <a:ext cx="945896" cy="256032"/>
           </a:xfrm>
           <a:prstGeom prst="roundRect">
             <a:avLst>
@@ -21287,7 +21524,7 @@
         <p:spPr>
           <a:xfrm>
             <a:off x="2399792" y="4791456"/>
-            <a:ext cx="813816" cy="256032"/>
+            <a:ext cx="945896" cy="256032"/>
           </a:xfrm>
           <a:prstGeom prst="rect">
             <a:avLst/>
@@ -21311,7 +21548,7 @@
                 <a:ea typeface="Calibri" pitchFamily="34" charset="-122"/>
                 <a:cs typeface="Calibri" pitchFamily="34" charset="-120"/>
               </a:rPr>
-              <a:t>track set</a:t>
+              <a:t>events list</a:t>
             </a:r>
             <a:endParaRPr lang="en-US" sz="1000" dirty="0"/>
           </a:p>
@@ -21325,8 +21562,8 @@
         </p:nvSpPr>
         <p:spPr>
           <a:xfrm>
-            <a:off x="3305048" y="4791456"/>
-            <a:ext cx="483616" cy="256032"/>
+            <a:off x="3437128" y="4791456"/>
+            <a:ext cx="1011936" cy="256032"/>
           </a:xfrm>
           <a:prstGeom prst="roundRect">
             <a:avLst>
@@ -21352,8 +21589,8 @@
         </p:nvSpPr>
         <p:spPr>
           <a:xfrm>
-            <a:off x="3305048" y="4791456"/>
-            <a:ext cx="483616" cy="256032"/>
+            <a:off x="3437128" y="4791456"/>
+            <a:ext cx="1011936" cy="256032"/>
           </a:xfrm>
           <a:prstGeom prst="rect">
             <a:avLst/>
@@ -21377,7 +21614,7 @@
                 <a:ea typeface="Calibri" pitchFamily="34" charset="-122"/>
                 <a:cs typeface="Calibri" pitchFamily="34" charset="-120"/>
               </a:rPr>
-              <a:t>next</a:t>
+              <a:t>events flush</a:t>
             </a:r>
             <a:endParaRPr lang="en-US" sz="1000" dirty="0"/>
           </a:p>
@@ -21391,8 +21628,8 @@
         </p:nvSpPr>
         <p:spPr>
           <a:xfrm>
-            <a:off x="3880104" y="4791456"/>
-            <a:ext cx="1011936" cy="256032"/>
+            <a:off x="4540504" y="4791456"/>
+            <a:ext cx="1077976" cy="256032"/>
           </a:xfrm>
           <a:prstGeom prst="roundRect">
             <a:avLst>
@@ -21418,8 +21655,8 @@
         </p:nvSpPr>
         <p:spPr>
           <a:xfrm>
-            <a:off x="3880104" y="4791456"/>
-            <a:ext cx="1011936" cy="256032"/>
+            <a:off x="4540504" y="4791456"/>
+            <a:ext cx="1077976" cy="256032"/>
           </a:xfrm>
           <a:prstGeom prst="rect">
             <a:avLst/>
@@ -21443,7 +21680,7 @@
                 <a:ea typeface="Calibri" pitchFamily="34" charset="-122"/>
                 <a:cs typeface="Calibri" pitchFamily="34" charset="-120"/>
               </a:rPr>
-              <a:t>instructions</a:t>
+              <a:t>release check</a:t>
             </a:r>
             <a:endParaRPr lang="en-US" sz="1000" dirty="0"/>
           </a:p>
@@ -21457,8 +21694,8 @@
         </p:nvSpPr>
         <p:spPr>
           <a:xfrm>
-            <a:off x="4983480" y="4791456"/>
-            <a:ext cx="681736" cy="256032"/>
+            <a:off x="5709920" y="4791456"/>
+            <a:ext cx="813816" cy="256032"/>
           </a:xfrm>
           <a:prstGeom prst="roundRect">
             <a:avLst>
@@ -21484,8 +21721,8 @@
         </p:nvSpPr>
         <p:spPr>
           <a:xfrm>
-            <a:off x="4983480" y="4791456"/>
-            <a:ext cx="681736" cy="256032"/>
+            <a:off x="5709920" y="4791456"/>
+            <a:ext cx="813816" cy="256032"/>
           </a:xfrm>
           <a:prstGeom prst="rect">
             <a:avLst/>
@@ -21509,7 +21746,7 @@
                 <a:ea typeface="Calibri" pitchFamily="34" charset="-122"/>
                 <a:cs typeface="Calibri" pitchFamily="34" charset="-120"/>
               </a:rPr>
-              <a:t>approve</a:t>
+              <a:t>track set</a:t>
             </a:r>
             <a:endParaRPr lang="en-US" sz="1000" dirty="0"/>
           </a:p>
@@ -21523,8 +21760,8 @@
         </p:nvSpPr>
         <p:spPr>
           <a:xfrm>
-            <a:off x="5756656" y="4791456"/>
-            <a:ext cx="615696" cy="256032"/>
+            <a:off x="6615176" y="4791456"/>
+            <a:ext cx="483616" cy="256032"/>
           </a:xfrm>
           <a:prstGeom prst="roundRect">
             <a:avLst>
@@ -21550,8 +21787,8 @@
         </p:nvSpPr>
         <p:spPr>
           <a:xfrm>
-            <a:off x="5756656" y="4791456"/>
-            <a:ext cx="615696" cy="256032"/>
+            <a:off x="6615176" y="4791456"/>
+            <a:ext cx="483616" cy="256032"/>
           </a:xfrm>
           <a:prstGeom prst="rect">
             <a:avLst/>
@@ -21575,7 +21812,7 @@
                 <a:ea typeface="Calibri" pitchFamily="34" charset="-122"/>
                 <a:cs typeface="Calibri" pitchFamily="34" charset="-120"/>
               </a:rPr>
-              <a:t>reject</a:t>
+              <a:t>next</a:t>
             </a:r>
             <a:endParaRPr lang="en-US" sz="1000" dirty="0"/>
           </a:p>
@@ -21589,8 +21826,8 @@
         </p:nvSpPr>
         <p:spPr>
           <a:xfrm>
-            <a:off x="6463792" y="4791456"/>
-            <a:ext cx="549656" cy="256032"/>
+            <a:off x="7190232" y="4791456"/>
+            <a:ext cx="1011936" cy="256032"/>
           </a:xfrm>
           <a:prstGeom prst="roundRect">
             <a:avLst>
@@ -21616,8 +21853,8 @@
         </p:nvSpPr>
         <p:spPr>
           <a:xfrm>
-            <a:off x="6463792" y="4791456"/>
-            <a:ext cx="549656" cy="256032"/>
+            <a:off x="7190232" y="4791456"/>
+            <a:ext cx="1011936" cy="256032"/>
           </a:xfrm>
           <a:prstGeom prst="rect">
             <a:avLst/>
@@ -21641,7 +21878,7 @@
                 <a:ea typeface="Calibri" pitchFamily="34" charset="-122"/>
                 <a:cs typeface="Calibri" pitchFamily="34" charset="-120"/>
               </a:rPr>
-              <a:t>waive</a:t>
+              <a:t>instructions</a:t>
             </a:r>
             <a:endParaRPr lang="en-US" sz="1000" dirty="0"/>
           </a:p>
@@ -21655,8 +21892,8 @@
         </p:nvSpPr>
         <p:spPr>
           <a:xfrm>
-            <a:off x="7104888" y="4791456"/>
-            <a:ext cx="747776" cy="256032"/>
+            <a:off x="8293608" y="4791456"/>
+            <a:ext cx="681736" cy="256032"/>
           </a:xfrm>
           <a:prstGeom prst="roundRect">
             <a:avLst>
@@ -21682,8 +21919,8 @@
         </p:nvSpPr>
         <p:spPr>
           <a:xfrm>
-            <a:off x="7104888" y="4791456"/>
-            <a:ext cx="747776" cy="256032"/>
+            <a:off x="8293608" y="4791456"/>
+            <a:ext cx="681736" cy="256032"/>
           </a:xfrm>
           <a:prstGeom prst="rect">
             <a:avLst/>
@@ -21707,7 +21944,7 @@
                 <a:ea typeface="Calibri" pitchFamily="34" charset="-122"/>
                 <a:cs typeface="Calibri" pitchFamily="34" charset="-120"/>
               </a:rPr>
-              <a:t>takeover</a:t>
+              <a:t>approve</a:t>
             </a:r>
             <a:endParaRPr lang="en-US" sz="1000" dirty="0"/>
           </a:p>
@@ -21721,8 +21958,8 @@
         </p:nvSpPr>
         <p:spPr>
           <a:xfrm>
-            <a:off x="7944104" y="4791456"/>
-            <a:ext cx="1210056" cy="256032"/>
+            <a:off x="9066784" y="4791456"/>
+            <a:ext cx="615696" cy="256032"/>
           </a:xfrm>
           <a:prstGeom prst="roundRect">
             <a:avLst>
@@ -21748,8 +21985,8 @@
         </p:nvSpPr>
         <p:spPr>
           <a:xfrm>
-            <a:off x="7944104" y="4791456"/>
-            <a:ext cx="1210056" cy="256032"/>
+            <a:off x="9066784" y="4791456"/>
+            <a:ext cx="615696" cy="256032"/>
           </a:xfrm>
           <a:prstGeom prst="rect">
             <a:avLst/>
@@ -21773,7 +22010,7 @@
                 <a:ea typeface="Calibri" pitchFamily="34" charset="-122"/>
                 <a:cs typeface="Calibri" pitchFamily="34" charset="-120"/>
               </a:rPr>
-              <a:t>release-control</a:t>
+              <a:t>reject</a:t>
             </a:r>
             <a:endParaRPr lang="en-US" sz="1000" dirty="0"/>
           </a:p>
@@ -21787,8 +22024,8 @@
         </p:nvSpPr>
         <p:spPr>
           <a:xfrm>
-            <a:off x="9245600" y="4791456"/>
-            <a:ext cx="615696" cy="256032"/>
+            <a:off x="9773920" y="4791456"/>
+            <a:ext cx="549656" cy="256032"/>
           </a:xfrm>
           <a:prstGeom prst="roundRect">
             <a:avLst>
@@ -21814,8 +22051,8 @@
         </p:nvSpPr>
         <p:spPr>
           <a:xfrm>
-            <a:off x="9245600" y="4791456"/>
-            <a:ext cx="615696" cy="256032"/>
+            <a:off x="9773920" y="4791456"/>
+            <a:ext cx="549656" cy="256032"/>
           </a:xfrm>
           <a:prstGeom prst="rect">
             <a:avLst/>
@@ -21839,7 +22076,7 @@
                 <a:ea typeface="Calibri" pitchFamily="34" charset="-122"/>
                 <a:cs typeface="Calibri" pitchFamily="34" charset="-120"/>
               </a:rPr>
-              <a:t>rework</a:t>
+              <a:t>waive</a:t>
             </a:r>
             <a:endParaRPr lang="en-US" sz="1000" dirty="0"/>
           </a:p>
@@ -21853,8 +22090,8 @@
         </p:nvSpPr>
         <p:spPr>
           <a:xfrm>
-            <a:off x="9952736" y="4791456"/>
-            <a:ext cx="1276096" cy="256032"/>
+            <a:off x="10415016" y="4791456"/>
+            <a:ext cx="747776" cy="256032"/>
           </a:xfrm>
           <a:prstGeom prst="roundRect">
             <a:avLst>
@@ -21880,8 +22117,8 @@
         </p:nvSpPr>
         <p:spPr>
           <a:xfrm>
-            <a:off x="9952736" y="4791456"/>
-            <a:ext cx="1276096" cy="256032"/>
+            <a:off x="10415016" y="4791456"/>
+            <a:ext cx="747776" cy="256032"/>
           </a:xfrm>
           <a:prstGeom prst="rect">
             <a:avLst/>
@@ -21905,7 +22142,7 @@
                 <a:ea typeface="Calibri" pitchFamily="34" charset="-122"/>
                 <a:cs typeface="Calibri" pitchFamily="34" charset="-120"/>
               </a:rPr>
-              <a:t>approvals verify</a:t>
+              <a:t>takeover</a:t>
             </a:r>
             <a:endParaRPr lang="en-US" sz="1000" dirty="0"/>
           </a:p>
@@ -21920,7 +22157,7 @@
         <p:spPr>
           <a:xfrm>
             <a:off x="457200" y="5138928"/>
-            <a:ext cx="549656" cy="256032"/>
+            <a:ext cx="1210056" cy="256032"/>
           </a:xfrm>
           <a:prstGeom prst="roundRect">
             <a:avLst>
@@ -21947,7 +22184,7 @@
         <p:spPr>
           <a:xfrm>
             <a:off x="457200" y="5138928"/>
-            <a:ext cx="549656" cy="256032"/>
+            <a:ext cx="1210056" cy="256032"/>
           </a:xfrm>
           <a:prstGeom prst="rect">
             <a:avLst/>
@@ -21971,7 +22208,7 @@
                 <a:ea typeface="Calibri" pitchFamily="34" charset="-122"/>
                 <a:cs typeface="Calibri" pitchFamily="34" charset="-120"/>
               </a:rPr>
-              <a:t>tests</a:t>
+              <a:t>release-control</a:t>
             </a:r>
             <a:endParaRPr lang="en-US" sz="1000" dirty="0"/>
           </a:p>
@@ -21985,7 +22222,7 @@
         </p:nvSpPr>
         <p:spPr>
           <a:xfrm>
-            <a:off x="1098296" y="5138928"/>
+            <a:off x="1758696" y="5138928"/>
             <a:ext cx="615696" cy="256032"/>
           </a:xfrm>
           <a:prstGeom prst="roundRect">
@@ -22012,7 +22249,7 @@
         </p:nvSpPr>
         <p:spPr>
           <a:xfrm>
-            <a:off x="1098296" y="5138928"/>
+            <a:off x="1758696" y="5138928"/>
             <a:ext cx="615696" cy="256032"/>
           </a:xfrm>
           <a:prstGeom prst="rect">
@@ -22037,7 +22274,7 @@
                 <a:ea typeface="Calibri" pitchFamily="34" charset="-122"/>
                 <a:cs typeface="Calibri" pitchFamily="34" charset="-120"/>
               </a:rPr>
-              <a:t>verify</a:t>
+              <a:t>rework</a:t>
             </a:r>
             <a:endParaRPr lang="en-US" sz="1000" dirty="0"/>
           </a:p>
@@ -22051,8 +22288,8 @@
         </p:nvSpPr>
         <p:spPr>
           <a:xfrm>
-            <a:off x="1805432" y="5138928"/>
-            <a:ext cx="615696" cy="256032"/>
+            <a:off x="2465832" y="5138928"/>
+            <a:ext cx="1276096" cy="256032"/>
           </a:xfrm>
           <a:prstGeom prst="roundRect">
             <a:avLst>
@@ -22078,8 +22315,8 @@
         </p:nvSpPr>
         <p:spPr>
           <a:xfrm>
-            <a:off x="1805432" y="5138928"/>
-            <a:ext cx="615696" cy="256032"/>
+            <a:off x="2465832" y="5138928"/>
+            <a:ext cx="1276096" cy="256032"/>
           </a:xfrm>
           <a:prstGeom prst="rect">
             <a:avLst/>
@@ -22103,7 +22340,7 @@
                 <a:ea typeface="Calibri" pitchFamily="34" charset="-122"/>
                 <a:cs typeface="Calibri" pitchFamily="34" charset="-120"/>
               </a:rPr>
-              <a:t>review</a:t>
+              <a:t>approvals verify</a:t>
             </a:r>
             <a:endParaRPr lang="en-US" sz="1000" dirty="0"/>
           </a:p>
@@ -22117,8 +22354,8 @@
         </p:nvSpPr>
         <p:spPr>
           <a:xfrm>
-            <a:off x="2512568" y="5138928"/>
-            <a:ext cx="747776" cy="256032"/>
+            <a:off x="3833368" y="5138928"/>
+            <a:ext cx="549656" cy="256032"/>
           </a:xfrm>
           <a:prstGeom prst="roundRect">
             <a:avLst>
@@ -22144,8 +22381,8 @@
         </p:nvSpPr>
         <p:spPr>
           <a:xfrm>
-            <a:off x="2512568" y="5138928"/>
-            <a:ext cx="747776" cy="256032"/>
+            <a:off x="3833368" y="5138928"/>
+            <a:ext cx="549656" cy="256032"/>
           </a:xfrm>
           <a:prstGeom prst="rect">
             <a:avLst/>
@@ -22169,7 +22406,7 @@
                 <a:ea typeface="Calibri" pitchFamily="34" charset="-122"/>
                 <a:cs typeface="Calibri" pitchFamily="34" charset="-120"/>
               </a:rPr>
-              <a:t>validate</a:t>
+              <a:t>tests</a:t>
             </a:r>
             <a:endParaRPr lang="en-US" sz="1000" dirty="0"/>
           </a:p>
@@ -22183,8 +22420,8 @@
         </p:nvSpPr>
         <p:spPr>
           <a:xfrm>
-            <a:off x="3351784" y="5138928"/>
-            <a:ext cx="681736" cy="256032"/>
+            <a:off x="4474464" y="5138928"/>
+            <a:ext cx="615696" cy="256032"/>
           </a:xfrm>
           <a:prstGeom prst="roundRect">
             <a:avLst>
@@ -22210,8 +22447,8 @@
         </p:nvSpPr>
         <p:spPr>
           <a:xfrm>
-            <a:off x="3351784" y="5138928"/>
-            <a:ext cx="681736" cy="256032"/>
+            <a:off x="4474464" y="5138928"/>
+            <a:ext cx="615696" cy="256032"/>
           </a:xfrm>
           <a:prstGeom prst="rect">
             <a:avLst/>
@@ -22235,7 +22472,7 @@
                 <a:ea typeface="Calibri" pitchFamily="34" charset="-122"/>
                 <a:cs typeface="Calibri" pitchFamily="34" charset="-120"/>
               </a:rPr>
-              <a:t>archive</a:t>
+              <a:t>verify</a:t>
             </a:r>
             <a:endParaRPr lang="en-US" sz="1000" dirty="0"/>
           </a:p>
@@ -22249,8 +22486,8 @@
         </p:nvSpPr>
         <p:spPr>
           <a:xfrm>
-            <a:off x="4124960" y="5138928"/>
-            <a:ext cx="549656" cy="256032"/>
+            <a:off x="5181600" y="5138928"/>
+            <a:ext cx="615696" cy="256032"/>
           </a:xfrm>
           <a:prstGeom prst="roundRect">
             <a:avLst>
@@ -22276,8 +22513,8 @@
         </p:nvSpPr>
         <p:spPr>
           <a:xfrm>
-            <a:off x="4124960" y="5138928"/>
-            <a:ext cx="549656" cy="256032"/>
+            <a:off x="5181600" y="5138928"/>
+            <a:ext cx="615696" cy="256032"/>
           </a:xfrm>
           <a:prstGeom prst="rect">
             <a:avLst/>
@@ -22301,7 +22538,7 @@
                 <a:ea typeface="Calibri" pitchFamily="34" charset="-122"/>
                 <a:cs typeface="Calibri" pitchFamily="34" charset="-120"/>
               </a:rPr>
-              <a:t>audit</a:t>
+              <a:t>review</a:t>
             </a:r>
             <a:endParaRPr lang="en-US" sz="1000" dirty="0"/>
           </a:p>
@@ -22315,8 +22552,8 @@
         </p:nvSpPr>
         <p:spPr>
           <a:xfrm>
-            <a:off x="4766056" y="5138928"/>
-            <a:ext cx="615696" cy="256032"/>
+            <a:off x="5888736" y="5138928"/>
+            <a:ext cx="747776" cy="256032"/>
           </a:xfrm>
           <a:prstGeom prst="roundRect">
             <a:avLst>
@@ -22342,8 +22579,8 @@
         </p:nvSpPr>
         <p:spPr>
           <a:xfrm>
-            <a:off x="4766056" y="5138928"/>
-            <a:ext cx="615696" cy="256032"/>
+            <a:off x="5888736" y="5138928"/>
+            <a:ext cx="747776" cy="256032"/>
           </a:xfrm>
           <a:prstGeom prst="rect">
             <a:avLst/>
@@ -22367,7 +22604,7 @@
                 <a:ea typeface="Calibri" pitchFamily="34" charset="-122"/>
                 <a:cs typeface="Calibri" pitchFamily="34" charset="-120"/>
               </a:rPr>
-              <a:t>report</a:t>
+              <a:t>validate</a:t>
             </a:r>
             <a:endParaRPr lang="en-US" sz="1000" dirty="0"/>
           </a:p>
@@ -22381,8 +22618,8 @@
         </p:nvSpPr>
         <p:spPr>
           <a:xfrm>
-            <a:off x="5473192" y="5138928"/>
-            <a:ext cx="813816" cy="256032"/>
+            <a:off x="6727952" y="5138928"/>
+            <a:ext cx="681736" cy="256032"/>
           </a:xfrm>
           <a:prstGeom prst="roundRect">
             <a:avLst>
@@ -22408,8 +22645,8 @@
         </p:nvSpPr>
         <p:spPr>
           <a:xfrm>
-            <a:off x="5473192" y="5138928"/>
-            <a:ext cx="813816" cy="256032"/>
+            <a:off x="6727952" y="5138928"/>
+            <a:ext cx="681736" cy="256032"/>
           </a:xfrm>
           <a:prstGeom prst="rect">
             <a:avLst/>
@@ -22433,7 +22670,7 @@
                 <a:ea typeface="Calibri" pitchFamily="34" charset="-122"/>
                 <a:cs typeface="Calibri" pitchFamily="34" charset="-120"/>
               </a:rPr>
-              <a:t>dashboard</a:t>
+              <a:t>archive</a:t>
             </a:r>
             <a:endParaRPr lang="en-US" sz="1000" dirty="0"/>
           </a:p>
@@ -22447,8 +22684,8 @@
         </p:nvSpPr>
         <p:spPr>
           <a:xfrm>
-            <a:off x="6378448" y="5138928"/>
-            <a:ext cx="417576" cy="256032"/>
+            <a:off x="7501128" y="5138928"/>
+            <a:ext cx="549656" cy="256032"/>
           </a:xfrm>
           <a:prstGeom prst="roundRect">
             <a:avLst>
@@ -22474,8 +22711,8 @@
         </p:nvSpPr>
         <p:spPr>
           <a:xfrm>
-            <a:off x="6378448" y="5138928"/>
-            <a:ext cx="417576" cy="256032"/>
+            <a:off x="7501128" y="5138928"/>
+            <a:ext cx="549656" cy="256032"/>
           </a:xfrm>
           <a:prstGeom prst="rect">
             <a:avLst/>
@@ -22499,7 +22736,7 @@
                 <a:ea typeface="Calibri" pitchFamily="34" charset="-122"/>
                 <a:cs typeface="Calibri" pitchFamily="34" charset="-120"/>
               </a:rPr>
-              <a:t>log</a:t>
+              <a:t>audit</a:t>
             </a:r>
             <a:endParaRPr lang="en-US" sz="1000" dirty="0"/>
           </a:p>
@@ -22513,8 +22750,8 @@
         </p:nvSpPr>
         <p:spPr>
           <a:xfrm>
-            <a:off x="6887464" y="5138928"/>
-            <a:ext cx="681736" cy="256032"/>
+            <a:off x="8142224" y="5138928"/>
+            <a:ext cx="615696" cy="256032"/>
           </a:xfrm>
           <a:prstGeom prst="roundRect">
             <a:avLst>
@@ -22540,8 +22777,8 @@
         </p:nvSpPr>
         <p:spPr>
           <a:xfrm>
-            <a:off x="6887464" y="5138928"/>
-            <a:ext cx="681736" cy="256032"/>
+            <a:off x="8142224" y="5138928"/>
+            <a:ext cx="615696" cy="256032"/>
           </a:xfrm>
           <a:prstGeom prst="rect">
             <a:avLst/>
@@ -22565,7 +22802,7 @@
                 <a:ea typeface="Calibri" pitchFamily="34" charset="-122"/>
                 <a:cs typeface="Calibri" pitchFamily="34" charset="-120"/>
               </a:rPr>
-              <a:t>license</a:t>
+              <a:t>report</a:t>
             </a:r>
             <a:endParaRPr lang="en-US" sz="1000" dirty="0"/>
           </a:p>
@@ -22579,8 +22816,8 @@
         </p:nvSpPr>
         <p:spPr>
           <a:xfrm>
-            <a:off x="7660640" y="5138928"/>
-            <a:ext cx="615696" cy="256032"/>
+            <a:off x="8849360" y="5138928"/>
+            <a:ext cx="813816" cy="256032"/>
           </a:xfrm>
           <a:prstGeom prst="roundRect">
             <a:avLst>
@@ -22606,8 +22843,8 @@
         </p:nvSpPr>
         <p:spPr>
           <a:xfrm>
-            <a:off x="7660640" y="5138928"/>
-            <a:ext cx="615696" cy="256032"/>
+            <a:off x="8849360" y="5138928"/>
+            <a:ext cx="813816" cy="256032"/>
           </a:xfrm>
           <a:prstGeom prst="rect">
             <a:avLst/>
@@ -22631,7 +22868,7 @@
                 <a:ea typeface="Calibri" pitchFamily="34" charset="-122"/>
                 <a:cs typeface="Calibri" pitchFamily="34" charset="-120"/>
               </a:rPr>
-              <a:t>doctor</a:t>
+              <a:t>dashboard</a:t>
             </a:r>
             <a:endParaRPr lang="en-US" sz="1000" dirty="0"/>
           </a:p>
@@ -22645,8 +22882,8 @@
         </p:nvSpPr>
         <p:spPr>
           <a:xfrm>
-            <a:off x="8367776" y="5138928"/>
-            <a:ext cx="1011936" cy="256032"/>
+            <a:off x="9754616" y="5138928"/>
+            <a:ext cx="417576" cy="256032"/>
           </a:xfrm>
           <a:prstGeom prst="roundRect">
             <a:avLst>
@@ -22672,8 +22909,8 @@
         </p:nvSpPr>
         <p:spPr>
           <a:xfrm>
-            <a:off x="8367776" y="5138928"/>
-            <a:ext cx="1011936" cy="256032"/>
+            <a:off x="9754616" y="5138928"/>
+            <a:ext cx="417576" cy="256032"/>
           </a:xfrm>
           <a:prstGeom prst="rect">
             <a:avLst/>
@@ -22697,7 +22934,7 @@
                 <a:ea typeface="Calibri" pitchFamily="34" charset="-122"/>
                 <a:cs typeface="Calibri" pitchFamily="34" charset="-120"/>
               </a:rPr>
-              <a:t>plugin build</a:t>
+              <a:t>log</a:t>
             </a:r>
             <a:endParaRPr lang="en-US" sz="1000" dirty="0"/>
           </a:p>
@@ -22711,8 +22948,8 @@
         </p:nvSpPr>
         <p:spPr>
           <a:xfrm>
-            <a:off x="9471152" y="5138928"/>
-            <a:ext cx="549656" cy="256032"/>
+            <a:off x="10263632" y="5138928"/>
+            <a:ext cx="681736" cy="256032"/>
           </a:xfrm>
           <a:prstGeom prst="roundRect">
             <a:avLst>
@@ -22738,8 +22975,8 @@
         </p:nvSpPr>
         <p:spPr>
           <a:xfrm>
-            <a:off x="9471152" y="5138928"/>
-            <a:ext cx="549656" cy="256032"/>
+            <a:off x="10263632" y="5138928"/>
+            <a:ext cx="681736" cy="256032"/>
           </a:xfrm>
           <a:prstGeom prst="rect">
             <a:avLst/>
@@ -22763,7 +23000,7 @@
                 <a:ea typeface="Calibri" pitchFamily="34" charset="-122"/>
                 <a:cs typeface="Calibri" pitchFamily="34" charset="-120"/>
               </a:rPr>
-              <a:t>trace</a:t>
+              <a:t>license</a:t>
             </a:r>
             <a:endParaRPr lang="en-US" sz="1000" dirty="0"/>
           </a:p>
@@ -22777,8 +23014,8 @@
         </p:nvSpPr>
         <p:spPr>
           <a:xfrm>
-            <a:off x="10112248" y="5138928"/>
-            <a:ext cx="483616" cy="256032"/>
+            <a:off x="11036808" y="5138928"/>
+            <a:ext cx="615696" cy="256032"/>
           </a:xfrm>
           <a:prstGeom prst="roundRect">
             <a:avLst>
@@ -22804,8 +23041,8 @@
         </p:nvSpPr>
         <p:spPr>
           <a:xfrm>
-            <a:off x="10112248" y="5138928"/>
-            <a:ext cx="483616" cy="256032"/>
+            <a:off x="11036808" y="5138928"/>
+            <a:ext cx="615696" cy="256032"/>
           </a:xfrm>
           <a:prstGeom prst="rect">
             <a:avLst/>
@@ -22829,7 +23066,7 @@
                 <a:ea typeface="Calibri" pitchFamily="34" charset="-122"/>
                 <a:cs typeface="Calibri" pitchFamily="34" charset="-120"/>
               </a:rPr>
-              <a:t>hook</a:t>
+              <a:t>doctor</a:t>
             </a:r>
             <a:endParaRPr lang="en-US" sz="1000" dirty="0"/>
           </a:p>
@@ -22843,8 +23080,8 @@
         </p:nvSpPr>
         <p:spPr>
           <a:xfrm>
-            <a:off x="10687304" y="5138928"/>
-            <a:ext cx="747776" cy="256032"/>
+            <a:off x="457200" y="5486400"/>
+            <a:ext cx="1011936" cy="256032"/>
           </a:xfrm>
           <a:prstGeom prst="roundRect">
             <a:avLst>
@@ -22870,7 +23107,205 @@
         </p:nvSpPr>
         <p:spPr>
           <a:xfrm>
-            <a:off x="10687304" y="5138928"/>
+            <a:off x="457200" y="5486400"/>
+            <a:ext cx="1011936" cy="256032"/>
+          </a:xfrm>
+          <a:prstGeom prst="rect">
+            <a:avLst/>
+          </a:prstGeom>
+          <a:noFill/>
+          <a:ln/>
+        </p:spPr>
+        <p:txBody>
+          <a:bodyPr wrap="square" lIns="0" tIns="0" rIns="0" bIns="0" rtlCol="0" anchor="ctr"/>
+          <a:lstStyle/>
+          <a:p>
+            <a:pPr algn="ctr" indent="0" marL="0">
+              <a:buNone/>
+            </a:pPr>
+            <a:r>
+              <a:rPr lang="en-US" sz="1000" dirty="0">
+                <a:solidFill>
+                  <a:srgbClr val="1F2430"/>
+                </a:solidFill>
+                <a:latin typeface="Calibri" pitchFamily="34" charset="0"/>
+                <a:ea typeface="Calibri" pitchFamily="34" charset="-122"/>
+                <a:cs typeface="Calibri" pitchFamily="34" charset="-120"/>
+              </a:rPr>
+              <a:t>plugin build</a:t>
+            </a:r>
+            <a:endParaRPr lang="en-US" sz="1000" dirty="0"/>
+          </a:p>
+        </p:txBody>
+      </p:sp>
+      <p:sp>
+        <p:nvSpPr>
+          <p:cNvPr id="136" name="Shape 134"/>
+          <p:cNvSpPr/>
+          <p:nvPr/>
+        </p:nvSpPr>
+        <p:spPr>
+          <a:xfrm>
+            <a:off x="1560576" y="5486400"/>
+            <a:ext cx="549656" cy="256032"/>
+          </a:xfrm>
+          <a:prstGeom prst="roundRect">
+            <a:avLst>
+              <a:gd name="adj" fmla="val 50000"/>
+            </a:avLst>
+          </a:prstGeom>
+          <a:solidFill>
+            <a:srgbClr val="F3F5F8"/>
+          </a:solidFill>
+          <a:ln w="12700">
+            <a:solidFill>
+              <a:srgbClr val="F3F5F8"/>
+            </a:solidFill>
+            <a:prstDash val="solid"/>
+          </a:ln>
+        </p:spPr>
+      </p:sp>
+      <p:sp>
+        <p:nvSpPr>
+          <p:cNvPr id="137" name="Text 135"/>
+          <p:cNvSpPr txBox="1"/>
+          <p:nvPr/>
+        </p:nvSpPr>
+        <p:spPr>
+          <a:xfrm>
+            <a:off x="1560576" y="5486400"/>
+            <a:ext cx="549656" cy="256032"/>
+          </a:xfrm>
+          <a:prstGeom prst="rect">
+            <a:avLst/>
+          </a:prstGeom>
+          <a:noFill/>
+          <a:ln/>
+        </p:spPr>
+        <p:txBody>
+          <a:bodyPr wrap="square" lIns="0" tIns="0" rIns="0" bIns="0" rtlCol="0" anchor="ctr"/>
+          <a:lstStyle/>
+          <a:p>
+            <a:pPr algn="ctr" indent="0" marL="0">
+              <a:buNone/>
+            </a:pPr>
+            <a:r>
+              <a:rPr lang="en-US" sz="1000" dirty="0">
+                <a:solidFill>
+                  <a:srgbClr val="1F2430"/>
+                </a:solidFill>
+                <a:latin typeface="Calibri" pitchFamily="34" charset="0"/>
+                <a:ea typeface="Calibri" pitchFamily="34" charset="-122"/>
+                <a:cs typeface="Calibri" pitchFamily="34" charset="-120"/>
+              </a:rPr>
+              <a:t>trace</a:t>
+            </a:r>
+            <a:endParaRPr lang="en-US" sz="1000" dirty="0"/>
+          </a:p>
+        </p:txBody>
+      </p:sp>
+      <p:sp>
+        <p:nvSpPr>
+          <p:cNvPr id="138" name="Shape 136"/>
+          <p:cNvSpPr/>
+          <p:nvPr/>
+        </p:nvSpPr>
+        <p:spPr>
+          <a:xfrm>
+            <a:off x="2201672" y="5486400"/>
+            <a:ext cx="483616" cy="256032"/>
+          </a:xfrm>
+          <a:prstGeom prst="roundRect">
+            <a:avLst>
+              <a:gd name="adj" fmla="val 50000"/>
+            </a:avLst>
+          </a:prstGeom>
+          <a:solidFill>
+            <a:srgbClr val="F3F5F8"/>
+          </a:solidFill>
+          <a:ln w="12700">
+            <a:solidFill>
+              <a:srgbClr val="F3F5F8"/>
+            </a:solidFill>
+            <a:prstDash val="solid"/>
+          </a:ln>
+        </p:spPr>
+      </p:sp>
+      <p:sp>
+        <p:nvSpPr>
+          <p:cNvPr id="139" name="Text 137"/>
+          <p:cNvSpPr txBox="1"/>
+          <p:nvPr/>
+        </p:nvSpPr>
+        <p:spPr>
+          <a:xfrm>
+            <a:off x="2201672" y="5486400"/>
+            <a:ext cx="483616" cy="256032"/>
+          </a:xfrm>
+          <a:prstGeom prst="rect">
+            <a:avLst/>
+          </a:prstGeom>
+          <a:noFill/>
+          <a:ln/>
+        </p:spPr>
+        <p:txBody>
+          <a:bodyPr wrap="square" lIns="0" tIns="0" rIns="0" bIns="0" rtlCol="0" anchor="ctr"/>
+          <a:lstStyle/>
+          <a:p>
+            <a:pPr algn="ctr" indent="0" marL="0">
+              <a:buNone/>
+            </a:pPr>
+            <a:r>
+              <a:rPr lang="en-US" sz="1000" dirty="0">
+                <a:solidFill>
+                  <a:srgbClr val="1F2430"/>
+                </a:solidFill>
+                <a:latin typeface="Calibri" pitchFamily="34" charset="0"/>
+                <a:ea typeface="Calibri" pitchFamily="34" charset="-122"/>
+                <a:cs typeface="Calibri" pitchFamily="34" charset="-120"/>
+              </a:rPr>
+              <a:t>hook</a:t>
+            </a:r>
+            <a:endParaRPr lang="en-US" sz="1000" dirty="0"/>
+          </a:p>
+        </p:txBody>
+      </p:sp>
+      <p:sp>
+        <p:nvSpPr>
+          <p:cNvPr id="140" name="Shape 138"/>
+          <p:cNvSpPr/>
+          <p:nvPr/>
+        </p:nvSpPr>
+        <p:spPr>
+          <a:xfrm>
+            <a:off x="2776728" y="5486400"/>
+            <a:ext cx="747776" cy="256032"/>
+          </a:xfrm>
+          <a:prstGeom prst="roundRect">
+            <a:avLst>
+              <a:gd name="adj" fmla="val 50000"/>
+            </a:avLst>
+          </a:prstGeom>
+          <a:solidFill>
+            <a:srgbClr val="F3F5F8"/>
+          </a:solidFill>
+          <a:ln w="12700">
+            <a:solidFill>
+              <a:srgbClr val="F3F5F8"/>
+            </a:solidFill>
+            <a:prstDash val="solid"/>
+          </a:ln>
+        </p:spPr>
+      </p:sp>
+      <p:sp>
+        <p:nvSpPr>
+          <p:cNvPr id="141" name="Text 139"/>
+          <p:cNvSpPr txBox="1"/>
+          <p:nvPr/>
+        </p:nvSpPr>
+        <p:spPr>
+          <a:xfrm>
+            <a:off x="2776728" y="5486400"/>
             <a:ext cx="747776" cy="256032"/>
           </a:xfrm>
           <a:prstGeom prst="rect">
@@ -25541,7 +25976,7 @@
                 <a:ea typeface="Courier New" pitchFamily="34" charset="-122"/>
                 <a:cs typeface="Courier New" pitchFamily="34" charset="-120"/>
               </a:rPr>
-              <a:t>  sdlc 0.9.1, license: community</a:t>
+              <a:t>  sdlc 0.10.0, license: community</a:t>
             </a:r>
             <a:endParaRPr lang="en-US" sz="1000" dirty="0"/>
           </a:p>

--- a/docs/demo/sdlc-calculator-demo.en.pptx
+++ b/docs/demo/sdlc-calculator-demo.en.pptx
@@ -1072,7 +1072,8 @@
 sdlc approve intent --change basic-arithmetic — Bob is not the product owner.
 sdlc validate --change basic-arithmetic — The first draft has a requirement without a scenario: strict validation refuses it.
 sdlc approve review --change basic-arithmetic — Bob is the author: refused.
-sdlc tests unlock --change fix-rounding — Unlocking is a person's decision.</a:t>
+sdlc tests unlock --change fix-rounding — Unlocking is a person's decision.
+sdlc team accept tester — What a role says is a person's decision: refused for the agent.</a:t>
             </a:r>
             <a:endParaRPr lang="en-US" dirty="0"/>
           </a:p>
@@ -6658,7 +6659,7 @@
                 <a:ea typeface="Courier New" pitchFamily="34" charset="-122"/>
                 <a:cs typeface="Courier New" pitchFamily="34" charset="-120"/>
               </a:rPr>
-              <a:t>  code-owner (e1ad15ea9d87)</a:t>
+              <a:t>  code-owner (794602e2105c)</a:t>
             </a:r>
             <a:endParaRPr lang="en-US" sz="1000" dirty="0"/>
           </a:p>
@@ -7339,7 +7340,7 @@
                 <a:ea typeface="Courier New" pitchFamily="34" charset="-122"/>
                 <a:cs typeface="Courier New" pitchFamily="34" charset="-120"/>
               </a:rPr>
-              <a:t>  release-manager (e1ad15ea9d87)</a:t>
+              <a:t>  release-manager (794602e2105c)</a:t>
             </a:r>
             <a:endParaRPr lang="en-US" sz="1000" dirty="0"/>
           </a:p>
@@ -7639,7 +7640,7 @@
                 <a:ea typeface="Courier New" pitchFamily="34" charset="-122"/>
                 <a:cs typeface="Courier New" pitchFamily="34" charset="-120"/>
               </a:rPr>
-              <a:t>✓ basic-arithmetic/intent alice valid c5112f50</a:t>
+              <a:t>✓ basic-arithmetic/intent alice valid 2b809052</a:t>
             </a:r>
             <a:endParaRPr lang="en-US" sz="1000" dirty="0"/>
           </a:p>
@@ -7656,7 +7657,7 @@
                 <a:ea typeface="Courier New" pitchFamily="34" charset="-122"/>
                 <a:cs typeface="Courier New" pitchFamily="34" charset="-120"/>
               </a:rPr>
-              <a:t>✓ basic-arithmetic/spec alice valid e4689e12</a:t>
+              <a:t>✓ basic-arithmetic/spec alice valid 2bef4479</a:t>
             </a:r>
             <a:endParaRPr lang="en-US" sz="1000" dirty="0"/>
           </a:p>
@@ -7673,7 +7674,7 @@
                 <a:ea typeface="Courier New" pitchFamily="34" charset="-122"/>
                 <a:cs typeface="Courier New" pitchFamily="34" charset="-120"/>
               </a:rPr>
-              <a:t>✗ basic-arithmetic/plan bob wrong-signer e4689e12</a:t>
+              <a:t>✗ basic-arithmetic/plan bob wrong-signer 2bef4479</a:t>
             </a:r>
             <a:endParaRPr lang="en-US" sz="1000" dirty="0"/>
           </a:p>
@@ -7690,7 +7691,7 @@
                 <a:ea typeface="Courier New" pitchFamily="34" charset="-122"/>
                 <a:cs typeface="Courier New" pitchFamily="34" charset="-120"/>
               </a:rPr>
-              <a:t>✓ basic-arithmetic/review carol valid 91e4cc39</a:t>
+              <a:t>✓ basic-arithmetic/review carol valid 8f916d32</a:t>
             </a:r>
             <a:endParaRPr lang="en-US" sz="1000" dirty="0"/>
           </a:p>
@@ -7707,7 +7708,7 @@
                 <a:ea typeface="Courier New" pitchFamily="34" charset="-122"/>
                 <a:cs typeface="Courier New" pitchFamily="34" charset="-120"/>
               </a:rPr>
-              <a:t>✓ basic-arithmetic/release alice valid 2160d122</a:t>
+              <a:t>✓ basic-arithmetic/release alice valid ea758646</a:t>
             </a:r>
             <a:endParaRPr lang="en-US" sz="1000" dirty="0"/>
           </a:p>
@@ -7724,7 +7725,7 @@
                 <a:ea typeface="Courier New" pitchFamily="34" charset="-122"/>
                 <a:cs typeface="Courier New" pitchFamily="34" charset="-120"/>
               </a:rPr>
-              <a:t>✓ openspec/roles.yaml alice@calc.example valid 3894ed3d</a:t>
+              <a:t>✓ openspec/roles.yaml alice@calc.example valid 6514c2cc</a:t>
             </a:r>
             <a:endParaRPr lang="en-US" sz="1000" dirty="0"/>
           </a:p>
@@ -11361,6 +11362,216 @@
           </a:p>
         </p:txBody>
       </p:sp>
+      <p:sp>
+        <p:nvSpPr>
+          <p:cNvPr id="58" name="Shape 56"/>
+          <p:cNvSpPr/>
+          <p:nvPr/>
+        </p:nvSpPr>
+        <p:spPr>
+          <a:xfrm>
+            <a:off x="6231636" y="4791456"/>
+            <a:ext cx="5500116" cy="676656"/>
+          </a:xfrm>
+          <a:prstGeom prst="roundRect">
+            <a:avLst>
+              <a:gd name="adj" fmla="val 10811"/>
+            </a:avLst>
+          </a:prstGeom>
+          <a:solidFill>
+            <a:srgbClr val="F3F5F8"/>
+          </a:solidFill>
+          <a:ln w="12700">
+            <a:solidFill>
+              <a:srgbClr val="F3F5F8"/>
+            </a:solidFill>
+            <a:prstDash val="solid"/>
+          </a:ln>
+        </p:spPr>
+      </p:sp>
+      <p:sp>
+        <p:nvSpPr>
+          <p:cNvPr id="59" name="Text 57"/>
+          <p:cNvSpPr txBox="1"/>
+          <p:nvPr/>
+        </p:nvSpPr>
+        <p:spPr>
+          <a:xfrm>
+            <a:off x="6341364" y="4864608"/>
+            <a:ext cx="274320" cy="274320"/>
+          </a:xfrm>
+          <a:prstGeom prst="rect">
+            <a:avLst/>
+          </a:prstGeom>
+          <a:noFill/>
+          <a:ln/>
+        </p:spPr>
+        <p:txBody>
+          <a:bodyPr wrap="square" lIns="0" tIns="0" rIns="0" bIns="0" rtlCol="0" anchor="ctr"/>
+          <a:lstStyle/>
+          <a:p>
+            <a:pPr indent="0" marL="0">
+              <a:buNone/>
+            </a:pPr>
+            <a:r>
+              <a:rPr lang="en-US" sz="1600" b="1" dirty="0">
+                <a:solidFill>
+                  <a:srgbClr val="D64545"/>
+                </a:solidFill>
+                <a:latin typeface="Calibri" pitchFamily="34" charset="0"/>
+                <a:ea typeface="Calibri" pitchFamily="34" charset="-122"/>
+                <a:cs typeface="Calibri" pitchFamily="34" charset="-120"/>
+              </a:rPr>
+              <a:t>✗</a:t>
+            </a:r>
+            <a:endParaRPr lang="en-US" sz="1600" dirty="0"/>
+          </a:p>
+        </p:txBody>
+      </p:sp>
+      <p:sp>
+        <p:nvSpPr>
+          <p:cNvPr id="60" name="Shape 58"/>
+          <p:cNvSpPr/>
+          <p:nvPr/>
+        </p:nvSpPr>
+        <p:spPr>
+          <a:xfrm>
+            <a:off x="6643116" y="4873752"/>
+            <a:ext cx="1097280" cy="256032"/>
+          </a:xfrm>
+          <a:prstGeom prst="roundRect">
+            <a:avLst>
+              <a:gd name="adj" fmla="val 50000"/>
+            </a:avLst>
+          </a:prstGeom>
+          <a:solidFill>
+            <a:srgbClr val="F2A541"/>
+          </a:solidFill>
+          <a:ln w="12700">
+            <a:solidFill>
+              <a:srgbClr val="F2A541"/>
+            </a:solidFill>
+            <a:prstDash val="solid"/>
+          </a:ln>
+        </p:spPr>
+      </p:sp>
+      <p:sp>
+        <p:nvSpPr>
+          <p:cNvPr id="61" name="Text 59"/>
+          <p:cNvSpPr txBox="1"/>
+          <p:nvPr/>
+        </p:nvSpPr>
+        <p:spPr>
+          <a:xfrm>
+            <a:off x="6643116" y="4873752"/>
+            <a:ext cx="1097280" cy="256032"/>
+          </a:xfrm>
+          <a:prstGeom prst="rect">
+            <a:avLst/>
+          </a:prstGeom>
+          <a:noFill/>
+          <a:ln/>
+        </p:spPr>
+        <p:txBody>
+          <a:bodyPr wrap="square" lIns="0" tIns="0" rIns="0" bIns="0" rtlCol="0" anchor="ctr"/>
+          <a:lstStyle/>
+          <a:p>
+            <a:pPr algn="ctr" indent="0" marL="0">
+              <a:buNone/>
+            </a:pPr>
+            <a:r>
+              <a:rPr lang="en-US" sz="1100" b="1" dirty="0">
+                <a:solidFill>
+                  <a:srgbClr val="FFFFFF"/>
+                </a:solidFill>
+                <a:latin typeface="Calibri" pitchFamily="34" charset="0"/>
+                <a:ea typeface="Calibri" pitchFamily="34" charset="-122"/>
+                <a:cs typeface="Calibri" pitchFamily="34" charset="-120"/>
+              </a:rPr>
+              <a:t>AI agent</a:t>
+            </a:r>
+            <a:endParaRPr lang="en-US" sz="1100" dirty="0"/>
+          </a:p>
+        </p:txBody>
+      </p:sp>
+      <p:sp>
+        <p:nvSpPr>
+          <p:cNvPr id="62" name="Text 60"/>
+          <p:cNvSpPr txBox="1"/>
+          <p:nvPr/>
+        </p:nvSpPr>
+        <p:spPr>
+          <a:xfrm>
+            <a:off x="7831836" y="4864608"/>
+            <a:ext cx="3808476" cy="274320"/>
+          </a:xfrm>
+          <a:prstGeom prst="rect">
+            <a:avLst/>
+          </a:prstGeom>
+          <a:noFill/>
+          <a:ln/>
+        </p:spPr>
+        <p:txBody>
+          <a:bodyPr wrap="square" lIns="0" tIns="0" rIns="0" bIns="0" rtlCol="0" anchor="ctr"/>
+          <a:lstStyle/>
+          <a:p>
+            <a:pPr indent="0" marL="0">
+              <a:buNone/>
+            </a:pPr>
+            <a:r>
+              <a:rPr lang="en-US" sz="1100" dirty="0">
+                <a:solidFill>
+                  <a:srgbClr val="1F2430"/>
+                </a:solidFill>
+                <a:latin typeface="Courier New" pitchFamily="34" charset="0"/>
+                <a:ea typeface="Courier New" pitchFamily="34" charset="-122"/>
+                <a:cs typeface="Courier New" pitchFamily="34" charset="-120"/>
+              </a:rPr>
+              <a:t>sdlc team accept tester</a:t>
+            </a:r>
+            <a:endParaRPr lang="en-US" sz="1100" dirty="0"/>
+          </a:p>
+        </p:txBody>
+      </p:sp>
+      <p:sp>
+        <p:nvSpPr>
+          <p:cNvPr id="63" name="Text 61"/>
+          <p:cNvSpPr txBox="1"/>
+          <p:nvPr/>
+        </p:nvSpPr>
+        <p:spPr>
+          <a:xfrm>
+            <a:off x="6643116" y="5175504"/>
+            <a:ext cx="4951476" cy="237744"/>
+          </a:xfrm>
+          <a:prstGeom prst="rect">
+            <a:avLst/>
+          </a:prstGeom>
+          <a:noFill/>
+          <a:ln/>
+        </p:spPr>
+        <p:txBody>
+          <a:bodyPr wrap="square" lIns="0" tIns="0" rIns="0" bIns="0" rtlCol="0" anchor="ctr"/>
+          <a:lstStyle/>
+          <a:p>
+            <a:pPr indent="0" marL="0">
+              <a:buNone/>
+            </a:pPr>
+            <a:r>
+              <a:rPr lang="en-US" sz="1100" dirty="0">
+                <a:solidFill>
+                  <a:srgbClr val="D64545"/>
+                </a:solidFill>
+                <a:latin typeface="Calibri" pitchFamily="34" charset="0"/>
+                <a:ea typeface="Calibri" pitchFamily="34" charset="-122"/>
+                <a:cs typeface="Calibri" pitchFamily="34" charset="-120"/>
+              </a:rPr>
+              <a:t>`sdlc team accept` records a human decision and cannot run inside an …</a:t>
+            </a:r>
+            <a:endParaRPr lang="en-US" sz="1100" dirty="0"/>
+          </a:p>
+        </p:txBody>
+      </p:sp>
     </p:spTree>
   </p:cSld>
   <p:clrMapOvr>
@@ -13934,7 +14145,7 @@
                 <a:ea typeface="Courier New" pitchFamily="34" charset="-122"/>
                 <a:cs typeface="Courier New" pitchFamily="34" charset="-120"/>
               </a:rPr>
-              <a:t>  archived) · sdlc 0.10.0, license:</a:t>
+              <a:t>  archived) · sdlc 0.11.0, license:</a:t>
             </a:r>
             <a:endParaRPr lang="en-US" sz="1000" dirty="0"/>
           </a:p>
@@ -14087,7 +14298,7 @@
                 <a:ea typeface="Courier New" pitchFamily="34" charset="-122"/>
                 <a:cs typeface="Courier New" pitchFamily="34" charset="-120"/>
               </a:rPr>
-              <a:t>  intent 3 · spec 9 · plan 9 · review 3;</a:t>
+              <a:t>  intent 4 · spec 9 · plan 9 · review 3;</a:t>
             </a:r>
             <a:endParaRPr lang="en-US" sz="1000" dirty="0"/>
           </a:p>
@@ -14121,7 +14332,7 @@
                 <a:ea typeface="Courier New" pitchFamily="34" charset="-122"/>
                 <a:cs typeface="Courier New" pitchFamily="34" charset="-120"/>
               </a:rPr>
-              <a:t>  recorded with sdlc 0.10.0; licenses:</a:t>
+              <a:t>  recorded with sdlc 0.11.0; licenses:</a:t>
             </a:r>
             <a:endParaRPr lang="en-US" sz="1000" dirty="0"/>
           </a:p>
@@ -14438,7 +14649,7 @@
                 <a:ea typeface="Courier New" pitchFamily="34" charset="-122"/>
                 <a:cs typeface="Courier New" pitchFamily="34" charset="-120"/>
               </a:rPr>
-              <a:t>2026-10-07T13:36:22.758Z  gate.review.await</a:t>
+              <a:t>2026-10-07T20:04:38.093Z  gate.review.await</a:t>
             </a:r>
             <a:endParaRPr lang="en-US" sz="1000" dirty="0"/>
           </a:p>
@@ -14472,7 +14683,7 @@
                 <a:ea typeface="Courier New" pitchFamily="34" charset="-122"/>
                 <a:cs typeface="Courier New" pitchFamily="34" charset="-120"/>
               </a:rPr>
-              <a:t>  sha256:e1ad15ea9d87bf2b7858610d3286b407cf</a:t>
+              <a:t>  sha256:794602e2105c13b0465c4edcf3dd269ebf</a:t>
             </a:r>
             <a:endParaRPr lang="en-US" sz="1000" dirty="0"/>
           </a:p>
@@ -14489,7 +14700,7 @@
                 <a:ea typeface="Courier New" pitchFamily="34" charset="-122"/>
                 <a:cs typeface="Courier New" pitchFamily="34" charset="-120"/>
               </a:rPr>
-              <a:t>  7dad20136ebebb77a89d1a2b19ffc1 [sdlc</a:t>
+              <a:t>  3d7dc4ac9ee2d9aee4f1ea229023ec [sdlc</a:t>
             </a:r>
             <a:endParaRPr lang="en-US" sz="1000" dirty="0"/>
           </a:p>
@@ -14506,7 +14717,7 @@
                 <a:ea typeface="Courier New" pitchFamily="34" charset="-122"/>
                 <a:cs typeface="Courier New" pitchFamily="34" charset="-120"/>
               </a:rPr>
-              <a:t>  0.10.0 · community]</a:t>
+              <a:t>  0.11.0 · community]</a:t>
             </a:r>
             <a:endParaRPr lang="en-US" sz="1000" dirty="0"/>
           </a:p>
@@ -14523,7 +14734,7 @@
                 <a:ea typeface="Courier New" pitchFamily="34" charset="-122"/>
                 <a:cs typeface="Courier New" pitchFamily="34" charset="-120"/>
               </a:rPr>
-              <a:t>2026-10-07T13:36:25.643Z  gate.review.appro</a:t>
+              <a:t>2026-10-07T20:04:41.234Z  gate.review.appro</a:t>
             </a:r>
             <a:endParaRPr lang="en-US" sz="1000" dirty="0"/>
           </a:p>
@@ -14574,7 +14785,7 @@
                 <a:ea typeface="Courier New" pitchFamily="34" charset="-122"/>
                 <a:cs typeface="Courier New" pitchFamily="34" charset="-120"/>
               </a:rPr>
-              <a:t>  [sdlc 0.10.0 · community]</a:t>
+              <a:t>  [sdlc 0.11.0 · community]</a:t>
             </a:r>
             <a:endParaRPr lang="en-US" sz="1000" dirty="0"/>
           </a:p>
@@ -14591,7 +14802,7 @@
                 <a:ea typeface="Courier New" pitchFamily="34" charset="-122"/>
                 <a:cs typeface="Courier New" pitchFamily="34" charset="-120"/>
               </a:rPr>
-              <a:t>2026-10-07T13:36:30.395Z  gate.release.appr</a:t>
+              <a:t>2026-10-07T20:04:45.854Z  gate.release.appr</a:t>
             </a:r>
             <a:endParaRPr lang="en-US" sz="1000" dirty="0"/>
           </a:p>
@@ -14642,7 +14853,7 @@
                 <a:ea typeface="Courier New" pitchFamily="34" charset="-122"/>
                 <a:cs typeface="Courier New" pitchFamily="34" charset="-120"/>
               </a:rPr>
-              <a:t>  release-manager [sdlc 0.10.0 · community]</a:t>
+              <a:t>  release-manager [sdlc 0.11.0 · community]</a:t>
             </a:r>
             <a:endParaRPr lang="en-US" sz="1000" dirty="0"/>
           </a:p>
@@ -15819,7 +16030,7 @@
                 <a:ea typeface="Courier New" pitchFamily="34" charset="-122"/>
                 <a:cs typeface="Courier New" pitchFamily="34" charset="-120"/>
               </a:rPr>
-              <a:t>✓ test (1.4s)</a:t>
+              <a:t>✓ test (1.1s)</a:t>
             </a:r>
             <a:endParaRPr lang="en-US" sz="1000" dirty="0"/>
           </a:p>
@@ -15836,7 +16047,7 @@
                 <a:ea typeface="Courier New" pitchFamily="34" charset="-122"/>
                 <a:cs typeface="Courier New" pitchFamily="34" charset="-120"/>
               </a:rPr>
-              <a:t>✓ ci-green (ci/pipeline_status, 0.8s)</a:t>
+              <a:t>✓ ci-green (ci/pipeline_status, 0.6s)</a:t>
             </a:r>
             <a:endParaRPr lang="en-US" sz="1000" dirty="0"/>
           </a:p>
@@ -16272,7 +16483,7 @@
                 <a:ea typeface="Courier New" pitchFamily="34" charset="-122"/>
                 <a:cs typeface="Courier New" pitchFamily="34" charset="-120"/>
               </a:rPr>
-              <a:t>      "id": "20261007T133720640Z-ci-green-3</a:t>
+              <a:t>      "id": "20261007T200527818Z-ci-green-a</a:t>
             </a:r>
             <a:endParaRPr lang="en-US" sz="1000" dirty="0"/>
           </a:p>
@@ -16289,7 +16500,7 @@
                 <a:ea typeface="Courier New" pitchFamily="34" charset="-122"/>
                 <a:cs typeface="Courier New" pitchFamily="34" charset="-120"/>
               </a:rPr>
-              <a:t>  67431",</a:t>
+              <a:t>  b5c0d",</a:t>
             </a:r>
             <a:endParaRPr lang="en-US" sz="1000" dirty="0"/>
           </a:p>
@@ -16425,7 +16636,7 @@
                 <a:ea typeface="Courier New" pitchFamily="34" charset="-122"/>
                 <a:cs typeface="Courier New" pitchFamily="34" charset="-120"/>
               </a:rPr>
-              <a:t>        "ref": "981f0bffbaca6272e42788b096b</a:t>
+              <a:t>        "ref": "0b6a530445076524df168fb2551</a:t>
             </a:r>
             <a:endParaRPr lang="en-US" sz="1000" dirty="0"/>
           </a:p>
@@ -16442,7 +16653,7 @@
                 <a:ea typeface="Courier New" pitchFamily="34" charset="-122"/>
                 <a:cs typeface="Courier New" pitchFamily="34" charset="-120"/>
               </a:rPr>
-              <a:t>  a742e3fa1444e",</a:t>
+              <a:t>  fa0504e5a1ac4",</a:t>
             </a:r>
             <a:endParaRPr lang="en-US" sz="1000" dirty="0"/>
           </a:p>
@@ -18818,7 +19029,7 @@
                 <a:ea typeface="Cambria" pitchFamily="34" charset="-122"/>
                 <a:cs typeface="Cambria" pitchFamily="34" charset="-120"/>
               </a:rPr>
-              <a:t>94</a:t>
+              <a:t>99</a:t>
             </a:r>
             <a:endParaRPr lang="en-US" sz="6000" dirty="0"/>
           </a:p>
@@ -18923,7 +19134,7 @@
                 <a:ea typeface="Cambria" pitchFamily="34" charset="-122"/>
                 <a:cs typeface="Cambria" pitchFamily="34" charset="-120"/>
               </a:rPr>
-              <a:t>63</a:t>
+              <a:t>67</a:t>
             </a:r>
             <a:endParaRPr lang="en-US" sz="6000" dirty="0"/>
           </a:p>
@@ -18962,7 +19173,7 @@
                 <a:ea typeface="Calibri" pitchFamily="34" charset="-122"/>
                 <a:cs typeface="Calibri" pitchFamily="34" charset="-120"/>
               </a:rPr>
-              <a:t>of 63 commands</a:t>
+              <a:t>of 67 commands</a:t>
             </a:r>
             <a:endParaRPr lang="en-US" sz="1600" dirty="0"/>
           </a:p>
@@ -19028,7 +19239,7 @@
                 <a:ea typeface="Cambria" pitchFamily="34" charset="-122"/>
                 <a:cs typeface="Cambria" pitchFamily="34" charset="-120"/>
               </a:rPr>
-              <a:t>9</a:t>
+              <a:t>10</a:t>
             </a:r>
             <a:endParaRPr lang="en-US" sz="6000" dirty="0"/>
           </a:p>
@@ -19451,7 +19662,7 @@
         <p:spPr>
           <a:xfrm>
             <a:off x="4210304" y="3749040"/>
-            <a:ext cx="1276096" cy="256032"/>
+            <a:ext cx="813816" cy="256032"/>
           </a:xfrm>
           <a:prstGeom prst="roundRect">
             <a:avLst>
@@ -19478,7 +19689,7 @@
         <p:spPr>
           <a:xfrm>
             <a:off x="4210304" y="3749040"/>
-            <a:ext cx="1276096" cy="256032"/>
+            <a:ext cx="813816" cy="256032"/>
           </a:xfrm>
           <a:prstGeom prst="rect">
             <a:avLst/>
@@ -19502,7 +19713,7 @@
                 <a:ea typeface="Calibri" pitchFamily="34" charset="-122"/>
                 <a:cs typeface="Calibri" pitchFamily="34" charset="-120"/>
               </a:rPr>
-              <a:t>backlog epic add</a:t>
+              <a:t>team sync</a:t>
             </a:r>
             <a:endParaRPr lang="en-US" sz="1000" dirty="0"/>
           </a:p>
@@ -19516,8 +19727,8 @@
         </p:nvSpPr>
         <p:spPr>
           <a:xfrm>
-            <a:off x="5577840" y="3749040"/>
-            <a:ext cx="1342136" cy="256032"/>
+            <a:off x="5115560" y="3749040"/>
+            <a:ext cx="945896" cy="256032"/>
           </a:xfrm>
           <a:prstGeom prst="roundRect">
             <a:avLst>
@@ -19543,8 +19754,8 @@
         </p:nvSpPr>
         <p:spPr>
           <a:xfrm>
-            <a:off x="5577840" y="3749040"/>
-            <a:ext cx="1342136" cy="256032"/>
+            <a:off x="5115560" y="3749040"/>
+            <a:ext cx="945896" cy="256032"/>
           </a:xfrm>
           <a:prstGeom prst="rect">
             <a:avLst/>
@@ -19568,7 +19779,7 @@
                 <a:ea typeface="Calibri" pitchFamily="34" charset="-122"/>
                 <a:cs typeface="Calibri" pitchFamily="34" charset="-120"/>
               </a:rPr>
-              <a:t>backlog epic edit</a:t>
+              <a:t>team accept</a:t>
             </a:r>
             <a:endParaRPr lang="en-US" sz="1000" dirty="0"/>
           </a:p>
@@ -19582,8 +19793,8 @@
         </p:nvSpPr>
         <p:spPr>
           <a:xfrm>
-            <a:off x="7011416" y="3749040"/>
-            <a:ext cx="945896" cy="256032"/>
+            <a:off x="6152896" y="3749040"/>
+            <a:ext cx="813816" cy="256032"/>
           </a:xfrm>
           <a:prstGeom prst="roundRect">
             <a:avLst>
@@ -19609,8 +19820,8 @@
         </p:nvSpPr>
         <p:spPr>
           <a:xfrm>
-            <a:off x="7011416" y="3749040"/>
-            <a:ext cx="945896" cy="256032"/>
+            <a:off x="6152896" y="3749040"/>
+            <a:ext cx="813816" cy="256032"/>
           </a:xfrm>
           <a:prstGeom prst="rect">
             <a:avLst/>
@@ -19634,7 +19845,7 @@
                 <a:ea typeface="Calibri" pitchFamily="34" charset="-122"/>
                 <a:cs typeface="Calibri" pitchFamily="34" charset="-120"/>
               </a:rPr>
-              <a:t>backlog add</a:t>
+              <a:t>team list</a:t>
             </a:r>
             <a:endParaRPr lang="en-US" sz="1000" dirty="0"/>
           </a:p>
@@ -19648,8 +19859,8 @@
         </p:nvSpPr>
         <p:spPr>
           <a:xfrm>
-            <a:off x="8048752" y="3749040"/>
-            <a:ext cx="1011936" cy="256032"/>
+            <a:off x="7058152" y="3749040"/>
+            <a:ext cx="879856" cy="256032"/>
           </a:xfrm>
           <a:prstGeom prst="roundRect">
             <a:avLst>
@@ -19675,8 +19886,8 @@
         </p:nvSpPr>
         <p:spPr>
           <a:xfrm>
-            <a:off x="8048752" y="3749040"/>
-            <a:ext cx="1011936" cy="256032"/>
+            <a:off x="7058152" y="3749040"/>
+            <a:ext cx="879856" cy="256032"/>
           </a:xfrm>
           <a:prstGeom prst="rect">
             <a:avLst/>
@@ -19700,7 +19911,7 @@
                 <a:ea typeface="Calibri" pitchFamily="34" charset="-122"/>
                 <a:cs typeface="Calibri" pitchFamily="34" charset="-120"/>
               </a:rPr>
-              <a:t>backlog edit</a:t>
+              <a:t>team check</a:t>
             </a:r>
             <a:endParaRPr lang="en-US" sz="1000" dirty="0"/>
           </a:p>
@@ -19714,8 +19925,8 @@
         </p:nvSpPr>
         <p:spPr>
           <a:xfrm>
-            <a:off x="9152128" y="3749040"/>
-            <a:ext cx="1011936" cy="256032"/>
+            <a:off x="8029448" y="3749040"/>
+            <a:ext cx="1276096" cy="256032"/>
           </a:xfrm>
           <a:prstGeom prst="roundRect">
             <a:avLst>
@@ -19741,8 +19952,8 @@
         </p:nvSpPr>
         <p:spPr>
           <a:xfrm>
-            <a:off x="9152128" y="3749040"/>
-            <a:ext cx="1011936" cy="256032"/>
+            <a:off x="8029448" y="3749040"/>
+            <a:ext cx="1276096" cy="256032"/>
           </a:xfrm>
           <a:prstGeom prst="rect">
             <a:avLst/>
@@ -19766,7 +19977,7 @@
                 <a:ea typeface="Calibri" pitchFamily="34" charset="-122"/>
                 <a:cs typeface="Calibri" pitchFamily="34" charset="-120"/>
               </a:rPr>
-              <a:t>backlog list</a:t>
+              <a:t>backlog epic add</a:t>
             </a:r>
             <a:endParaRPr lang="en-US" sz="1000" dirty="0"/>
           </a:p>
@@ -19780,8 +19991,8 @@
         </p:nvSpPr>
         <p:spPr>
           <a:xfrm>
-            <a:off x="10255504" y="3749040"/>
-            <a:ext cx="1011936" cy="256032"/>
+            <a:off x="9396984" y="3749040"/>
+            <a:ext cx="1342136" cy="256032"/>
           </a:xfrm>
           <a:prstGeom prst="roundRect">
             <a:avLst>
@@ -19807,8 +20018,8 @@
         </p:nvSpPr>
         <p:spPr>
           <a:xfrm>
-            <a:off x="10255504" y="3749040"/>
-            <a:ext cx="1011936" cy="256032"/>
+            <a:off x="9396984" y="3749040"/>
+            <a:ext cx="1342136" cy="256032"/>
           </a:xfrm>
           <a:prstGeom prst="rect">
             <a:avLst/>
@@ -19832,7 +20043,7 @@
                 <a:ea typeface="Calibri" pitchFamily="34" charset="-122"/>
                 <a:cs typeface="Calibri" pitchFamily="34" charset="-120"/>
               </a:rPr>
-              <a:t>backlog next</a:t>
+              <a:t>backlog epic edit</a:t>
             </a:r>
             <a:endParaRPr lang="en-US" sz="1000" dirty="0"/>
           </a:p>
@@ -19847,7 +20058,7 @@
         <p:spPr>
           <a:xfrm>
             <a:off x="457200" y="4096512"/>
-            <a:ext cx="1077976" cy="256032"/>
+            <a:ext cx="945896" cy="256032"/>
           </a:xfrm>
           <a:prstGeom prst="roundRect">
             <a:avLst>
@@ -19874,7 +20085,7 @@
         <p:spPr>
           <a:xfrm>
             <a:off x="457200" y="4096512"/>
-            <a:ext cx="1077976" cy="256032"/>
+            <a:ext cx="945896" cy="256032"/>
           </a:xfrm>
           <a:prstGeom prst="rect">
             <a:avLst/>
@@ -19898,7 +20109,7 @@
                 <a:ea typeface="Calibri" pitchFamily="34" charset="-122"/>
                 <a:cs typeface="Calibri" pitchFamily="34" charset="-120"/>
               </a:rPr>
-              <a:t>backlog start</a:t>
+              <a:t>backlog add</a:t>
             </a:r>
             <a:endParaRPr lang="en-US" sz="1000" dirty="0"/>
           </a:p>
@@ -19912,7 +20123,7 @@
         </p:nvSpPr>
         <p:spPr>
           <a:xfrm>
-            <a:off x="1626616" y="4096512"/>
+            <a:off x="1494536" y="4096512"/>
             <a:ext cx="1011936" cy="256032"/>
           </a:xfrm>
           <a:prstGeom prst="roundRect">
@@ -19939,7 +20150,7 @@
         </p:nvSpPr>
         <p:spPr>
           <a:xfrm>
-            <a:off x="1626616" y="4096512"/>
+            <a:off x="1494536" y="4096512"/>
             <a:ext cx="1011936" cy="256032"/>
           </a:xfrm>
           <a:prstGeom prst="rect">
@@ -19964,7 +20175,7 @@
                 <a:ea typeface="Calibri" pitchFamily="34" charset="-122"/>
                 <a:cs typeface="Calibri" pitchFamily="34" charset="-120"/>
               </a:rPr>
-              <a:t>backlog move</a:t>
+              <a:t>backlog edit</a:t>
             </a:r>
             <a:endParaRPr lang="en-US" sz="1000" dirty="0"/>
           </a:p>
@@ -19978,7 +20189,7 @@
         </p:nvSpPr>
         <p:spPr>
           <a:xfrm>
-            <a:off x="2729992" y="4096512"/>
+            <a:off x="2597912" y="4096512"/>
             <a:ext cx="1011936" cy="256032"/>
           </a:xfrm>
           <a:prstGeom prst="roundRect">
@@ -20005,7 +20216,7 @@
         </p:nvSpPr>
         <p:spPr>
           <a:xfrm>
-            <a:off x="2729992" y="4096512"/>
+            <a:off x="2597912" y="4096512"/>
             <a:ext cx="1011936" cy="256032"/>
           </a:xfrm>
           <a:prstGeom prst="rect">
@@ -20030,7 +20241,7 @@
                 <a:ea typeface="Calibri" pitchFamily="34" charset="-122"/>
                 <a:cs typeface="Calibri" pitchFamily="34" charset="-120"/>
               </a:rPr>
-              <a:t>backlog drop</a:t>
+              <a:t>backlog list</a:t>
             </a:r>
             <a:endParaRPr lang="en-US" sz="1000" dirty="0"/>
           </a:p>
@@ -20044,7 +20255,7 @@
         </p:nvSpPr>
         <p:spPr>
           <a:xfrm>
-            <a:off x="3833368" y="4096512"/>
+            <a:off x="3701288" y="4096512"/>
             <a:ext cx="1011936" cy="256032"/>
           </a:xfrm>
           <a:prstGeom prst="roundRect">
@@ -20071,7 +20282,7 @@
         </p:nvSpPr>
         <p:spPr>
           <a:xfrm>
-            <a:off x="3833368" y="4096512"/>
+            <a:off x="3701288" y="4096512"/>
             <a:ext cx="1011936" cy="256032"/>
           </a:xfrm>
           <a:prstGeom prst="rect">
@@ -20096,7 +20307,7 @@
                 <a:ea typeface="Calibri" pitchFamily="34" charset="-122"/>
                 <a:cs typeface="Calibri" pitchFamily="34" charset="-120"/>
               </a:rPr>
-              <a:t>backlog done</a:t>
+              <a:t>backlog next</a:t>
             </a:r>
             <a:endParaRPr lang="en-US" sz="1000" dirty="0"/>
           </a:p>
@@ -20110,8 +20321,8 @@
         </p:nvSpPr>
         <p:spPr>
           <a:xfrm>
-            <a:off x="4936744" y="4096512"/>
-            <a:ext cx="813816" cy="256032"/>
+            <a:off x="4804664" y="4096512"/>
+            <a:ext cx="1077976" cy="256032"/>
           </a:xfrm>
           <a:prstGeom prst="roundRect">
             <a:avLst>
@@ -20137,8 +20348,8 @@
         </p:nvSpPr>
         <p:spPr>
           <a:xfrm>
-            <a:off x="4936744" y="4096512"/>
-            <a:ext cx="813816" cy="256032"/>
+            <a:off x="4804664" y="4096512"/>
+            <a:ext cx="1077976" cy="256032"/>
           </a:xfrm>
           <a:prstGeom prst="rect">
             <a:avLst/>
@@ -20162,7 +20373,7 @@
                 <a:ea typeface="Calibri" pitchFamily="34" charset="-122"/>
                 <a:cs typeface="Calibri" pitchFamily="34" charset="-120"/>
               </a:rPr>
-              <a:t>defer add</a:t>
+              <a:t>backlog start</a:t>
             </a:r>
             <a:endParaRPr lang="en-US" sz="1000" dirty="0"/>
           </a:p>
@@ -20176,8 +20387,8 @@
         </p:nvSpPr>
         <p:spPr>
           <a:xfrm>
-            <a:off x="5842000" y="4096512"/>
-            <a:ext cx="879856" cy="256032"/>
+            <a:off x="5974080" y="4096512"/>
+            <a:ext cx="1011936" cy="256032"/>
           </a:xfrm>
           <a:prstGeom prst="roundRect">
             <a:avLst>
@@ -20203,8 +20414,8 @@
         </p:nvSpPr>
         <p:spPr>
           <a:xfrm>
-            <a:off x="5842000" y="4096512"/>
-            <a:ext cx="879856" cy="256032"/>
+            <a:off x="5974080" y="4096512"/>
+            <a:ext cx="1011936" cy="256032"/>
           </a:xfrm>
           <a:prstGeom prst="rect">
             <a:avLst/>
@@ -20228,7 +20439,7 @@
                 <a:ea typeface="Calibri" pitchFamily="34" charset="-122"/>
                 <a:cs typeface="Calibri" pitchFamily="34" charset="-120"/>
               </a:rPr>
-              <a:t>defer list</a:t>
+              <a:t>backlog move</a:t>
             </a:r>
             <a:endParaRPr lang="en-US" sz="1000" dirty="0"/>
           </a:p>
@@ -20242,8 +20453,8 @@
         </p:nvSpPr>
         <p:spPr>
           <a:xfrm>
-            <a:off x="6813296" y="4096512"/>
-            <a:ext cx="945896" cy="256032"/>
+            <a:off x="7077456" y="4096512"/>
+            <a:ext cx="1011936" cy="256032"/>
           </a:xfrm>
           <a:prstGeom prst="roundRect">
             <a:avLst>
@@ -20269,8 +20480,8 @@
         </p:nvSpPr>
         <p:spPr>
           <a:xfrm>
-            <a:off x="6813296" y="4096512"/>
-            <a:ext cx="945896" cy="256032"/>
+            <a:off x="7077456" y="4096512"/>
+            <a:ext cx="1011936" cy="256032"/>
           </a:xfrm>
           <a:prstGeom prst="rect">
             <a:avLst/>
@@ -20294,7 +20505,7 @@
                 <a:ea typeface="Calibri" pitchFamily="34" charset="-122"/>
                 <a:cs typeface="Calibri" pitchFamily="34" charset="-120"/>
               </a:rPr>
-              <a:t>defer close</a:t>
+              <a:t>backlog drop</a:t>
             </a:r>
             <a:endParaRPr lang="en-US" sz="1000" dirty="0"/>
           </a:p>
@@ -20308,7 +20519,7 @@
         </p:nvSpPr>
         <p:spPr>
           <a:xfrm>
-            <a:off x="7850632" y="4096512"/>
+            <a:off x="8180832" y="4096512"/>
             <a:ext cx="1011936" cy="256032"/>
           </a:xfrm>
           <a:prstGeom prst="roundRect">
@@ -20335,7 +20546,7 @@
         </p:nvSpPr>
         <p:spPr>
           <a:xfrm>
-            <a:off x="7850632" y="4096512"/>
+            <a:off x="8180832" y="4096512"/>
             <a:ext cx="1011936" cy="256032"/>
           </a:xfrm>
           <a:prstGeom prst="rect">
@@ -20360,7 +20571,7 @@
                 <a:ea typeface="Calibri" pitchFamily="34" charset="-122"/>
                 <a:cs typeface="Calibri" pitchFamily="34" charset="-120"/>
               </a:rPr>
-              <a:t>layout check</a:t>
+              <a:t>backlog done</a:t>
             </a:r>
             <a:endParaRPr lang="en-US" sz="1000" dirty="0"/>
           </a:p>
@@ -20374,8 +20585,8 @@
         </p:nvSpPr>
         <p:spPr>
           <a:xfrm>
-            <a:off x="8954008" y="4096512"/>
-            <a:ext cx="1210056" cy="256032"/>
+            <a:off x="9284208" y="4096512"/>
+            <a:ext cx="813816" cy="256032"/>
           </a:xfrm>
           <a:prstGeom prst="roundRect">
             <a:avLst>
@@ -20401,8 +20612,8 @@
         </p:nvSpPr>
         <p:spPr>
           <a:xfrm>
-            <a:off x="8954008" y="4096512"/>
-            <a:ext cx="1210056" cy="256032"/>
+            <a:off x="9284208" y="4096512"/>
+            <a:ext cx="813816" cy="256032"/>
           </a:xfrm>
           <a:prstGeom prst="rect">
             <a:avLst/>
@@ -20426,7 +20637,7 @@
                 <a:ea typeface="Calibri" pitchFamily="34" charset="-122"/>
                 <a:cs typeface="Calibri" pitchFamily="34" charset="-120"/>
               </a:rPr>
-              <a:t>layout scaffold</a:t>
+              <a:t>defer add</a:t>
             </a:r>
             <a:endParaRPr lang="en-US" sz="1000" dirty="0"/>
           </a:p>
@@ -20440,8 +20651,8 @@
         </p:nvSpPr>
         <p:spPr>
           <a:xfrm>
-            <a:off x="10255504" y="4096512"/>
-            <a:ext cx="1011936" cy="256032"/>
+            <a:off x="10189464" y="4096512"/>
+            <a:ext cx="879856" cy="256032"/>
           </a:xfrm>
           <a:prstGeom prst="roundRect">
             <a:avLst>
@@ -20467,8 +20678,8 @@
         </p:nvSpPr>
         <p:spPr>
           <a:xfrm>
-            <a:off x="10255504" y="4096512"/>
-            <a:ext cx="1011936" cy="256032"/>
+            <a:off x="10189464" y="4096512"/>
+            <a:ext cx="879856" cy="256032"/>
           </a:xfrm>
           <a:prstGeom prst="rect">
             <a:avLst/>
@@ -20492,7 +20703,7 @@
                 <a:ea typeface="Calibri" pitchFamily="34" charset="-122"/>
                 <a:cs typeface="Calibri" pitchFamily="34" charset="-120"/>
               </a:rPr>
-              <a:t>layout adapt</a:t>
+              <a:t>defer list</a:t>
             </a:r>
             <a:endParaRPr lang="en-US" sz="1000" dirty="0"/>
           </a:p>
@@ -20507,7 +20718,7 @@
         <p:spPr>
           <a:xfrm>
             <a:off x="457200" y="4443984"/>
-            <a:ext cx="1144016" cy="256032"/>
+            <a:ext cx="945896" cy="256032"/>
           </a:xfrm>
           <a:prstGeom prst="roundRect">
             <a:avLst>
@@ -20534,7 +20745,7 @@
         <p:spPr>
           <a:xfrm>
             <a:off x="457200" y="4443984"/>
-            <a:ext cx="1144016" cy="256032"/>
+            <a:ext cx="945896" cy="256032"/>
           </a:xfrm>
           <a:prstGeom prst="rect">
             <a:avLst/>
@@ -20558,7 +20769,7 @@
                 <a:ea typeface="Calibri" pitchFamily="34" charset="-122"/>
                 <a:cs typeface="Calibri" pitchFamily="34" charset="-120"/>
               </a:rPr>
-              <a:t>layout convert</a:t>
+              <a:t>defer close</a:t>
             </a:r>
             <a:endParaRPr lang="en-US" sz="1000" dirty="0"/>
           </a:p>
@@ -20572,8 +20783,8 @@
         </p:nvSpPr>
         <p:spPr>
           <a:xfrm>
-            <a:off x="1692656" y="4443984"/>
-            <a:ext cx="483616" cy="256032"/>
+            <a:off x="1494536" y="4443984"/>
+            <a:ext cx="1011936" cy="256032"/>
           </a:xfrm>
           <a:prstGeom prst="roundRect">
             <a:avLst>
@@ -20599,8 +20810,8 @@
         </p:nvSpPr>
         <p:spPr>
           <a:xfrm>
-            <a:off x="1692656" y="4443984"/>
-            <a:ext cx="483616" cy="256032"/>
+            <a:off x="1494536" y="4443984"/>
+            <a:ext cx="1011936" cy="256032"/>
           </a:xfrm>
           <a:prstGeom prst="rect">
             <a:avLst/>
@@ -20624,7 +20835,7 @@
                 <a:ea typeface="Calibri" pitchFamily="34" charset="-122"/>
                 <a:cs typeface="Calibri" pitchFamily="34" charset="-120"/>
               </a:rPr>
-              <a:t>init</a:t>
+              <a:t>layout check</a:t>
             </a:r>
             <a:endParaRPr lang="en-US" sz="1000" dirty="0"/>
           </a:p>
@@ -20638,8 +20849,8 @@
         </p:nvSpPr>
         <p:spPr>
           <a:xfrm>
-            <a:off x="2267712" y="4443984"/>
-            <a:ext cx="615696" cy="256032"/>
+            <a:off x="2597912" y="4443984"/>
+            <a:ext cx="1210056" cy="256032"/>
           </a:xfrm>
           <a:prstGeom prst="roundRect">
             <a:avLst>
@@ -20665,8 +20876,8 @@
         </p:nvSpPr>
         <p:spPr>
           <a:xfrm>
-            <a:off x="2267712" y="4443984"/>
-            <a:ext cx="615696" cy="256032"/>
+            <a:off x="2597912" y="4443984"/>
+            <a:ext cx="1210056" cy="256032"/>
           </a:xfrm>
           <a:prstGeom prst="rect">
             <a:avLst/>
@@ -20690,7 +20901,7 @@
                 <a:ea typeface="Calibri" pitchFamily="34" charset="-122"/>
                 <a:cs typeface="Calibri" pitchFamily="34" charset="-120"/>
               </a:rPr>
-              <a:t>update</a:t>
+              <a:t>layout scaffold</a:t>
             </a:r>
             <a:endParaRPr lang="en-US" sz="1000" dirty="0"/>
           </a:p>
@@ -20704,8 +20915,8 @@
         </p:nvSpPr>
         <p:spPr>
           <a:xfrm>
-            <a:off x="2974848" y="4443984"/>
-            <a:ext cx="813816" cy="256032"/>
+            <a:off x="3899408" y="4443984"/>
+            <a:ext cx="1011936" cy="256032"/>
           </a:xfrm>
           <a:prstGeom prst="roundRect">
             <a:avLst>
@@ -20731,8 +20942,8 @@
         </p:nvSpPr>
         <p:spPr>
           <a:xfrm>
-            <a:off x="2974848" y="4443984"/>
-            <a:ext cx="813816" cy="256032"/>
+            <a:off x="3899408" y="4443984"/>
+            <a:ext cx="1011936" cy="256032"/>
           </a:xfrm>
           <a:prstGeom prst="rect">
             <a:avLst/>
@@ -20756,7 +20967,7 @@
                 <a:ea typeface="Calibri" pitchFamily="34" charset="-122"/>
                 <a:cs typeface="Calibri" pitchFamily="34" charset="-120"/>
               </a:rPr>
-              <a:t>uninstall</a:t>
+              <a:t>layout adapt</a:t>
             </a:r>
             <a:endParaRPr lang="en-US" sz="1000" dirty="0"/>
           </a:p>
@@ -20770,8 +20981,8 @@
         </p:nvSpPr>
         <p:spPr>
           <a:xfrm>
-            <a:off x="3880104" y="4443984"/>
-            <a:ext cx="417576" cy="256032"/>
+            <a:off x="5002784" y="4443984"/>
+            <a:ext cx="1144016" cy="256032"/>
           </a:xfrm>
           <a:prstGeom prst="roundRect">
             <a:avLst>
@@ -20797,8 +21008,8 @@
         </p:nvSpPr>
         <p:spPr>
           <a:xfrm>
-            <a:off x="3880104" y="4443984"/>
-            <a:ext cx="417576" cy="256032"/>
+            <a:off x="5002784" y="4443984"/>
+            <a:ext cx="1144016" cy="256032"/>
           </a:xfrm>
           <a:prstGeom prst="rect">
             <a:avLst/>
@@ -20822,7 +21033,7 @@
                 <a:ea typeface="Calibri" pitchFamily="34" charset="-122"/>
                 <a:cs typeface="Calibri" pitchFamily="34" charset="-120"/>
               </a:rPr>
-              <a:t>new</a:t>
+              <a:t>layout convert</a:t>
             </a:r>
             <a:endParaRPr lang="en-US" sz="1000" dirty="0"/>
           </a:p>
@@ -20836,8 +21047,8 @@
         </p:nvSpPr>
         <p:spPr>
           <a:xfrm>
-            <a:off x="4389120" y="4443984"/>
-            <a:ext cx="1011936" cy="256032"/>
+            <a:off x="6238240" y="4443984"/>
+            <a:ext cx="483616" cy="256032"/>
           </a:xfrm>
           <a:prstGeom prst="roundRect">
             <a:avLst>
@@ -20863,8 +21074,8 @@
         </p:nvSpPr>
         <p:spPr>
           <a:xfrm>
-            <a:off x="4389120" y="4443984"/>
-            <a:ext cx="1011936" cy="256032"/>
+            <a:off x="6238240" y="4443984"/>
+            <a:ext cx="483616" cy="256032"/>
           </a:xfrm>
           <a:prstGeom prst="rect">
             <a:avLst/>
@@ -20888,7 +21099,7 @@
                 <a:ea typeface="Calibri" pitchFamily="34" charset="-122"/>
                 <a:cs typeface="Calibri" pitchFamily="34" charset="-120"/>
               </a:rPr>
-              <a:t>explore list</a:t>
+              <a:t>init</a:t>
             </a:r>
             <a:endParaRPr lang="en-US" sz="1000" dirty="0"/>
           </a:p>
@@ -20902,8 +21113,8 @@
         </p:nvSpPr>
         <p:spPr>
           <a:xfrm>
-            <a:off x="5492496" y="4443984"/>
-            <a:ext cx="945896" cy="256032"/>
+            <a:off x="6813296" y="4443984"/>
+            <a:ext cx="615696" cy="256032"/>
           </a:xfrm>
           <a:prstGeom prst="roundRect">
             <a:avLst>
@@ -20929,8 +21140,8 @@
         </p:nvSpPr>
         <p:spPr>
           <a:xfrm>
-            <a:off x="5492496" y="4443984"/>
-            <a:ext cx="945896" cy="256032"/>
+            <a:off x="6813296" y="4443984"/>
+            <a:ext cx="615696" cy="256032"/>
           </a:xfrm>
           <a:prstGeom prst="rect">
             <a:avLst/>
@@ -20954,7 +21165,7 @@
                 <a:ea typeface="Calibri" pitchFamily="34" charset="-122"/>
                 <a:cs typeface="Calibri" pitchFamily="34" charset="-120"/>
               </a:rPr>
-              <a:t>import bmad</a:t>
+              <a:t>update</a:t>
             </a:r>
             <a:endParaRPr lang="en-US" sz="1000" dirty="0"/>
           </a:p>
@@ -20968,8 +21179,8 @@
         </p:nvSpPr>
         <p:spPr>
           <a:xfrm>
-            <a:off x="6529832" y="4443984"/>
-            <a:ext cx="615696" cy="256032"/>
+            <a:off x="7520432" y="4443984"/>
+            <a:ext cx="813816" cy="256032"/>
           </a:xfrm>
           <a:prstGeom prst="roundRect">
             <a:avLst>
@@ -20995,8 +21206,8 @@
         </p:nvSpPr>
         <p:spPr>
           <a:xfrm>
-            <a:off x="6529832" y="4443984"/>
-            <a:ext cx="615696" cy="256032"/>
+            <a:off x="7520432" y="4443984"/>
+            <a:ext cx="813816" cy="256032"/>
           </a:xfrm>
           <a:prstGeom prst="rect">
             <a:avLst/>
@@ -21020,7 +21231,7 @@
                 <a:ea typeface="Calibri" pitchFamily="34" charset="-122"/>
                 <a:cs typeface="Calibri" pitchFamily="34" charset="-120"/>
               </a:rPr>
-              <a:t>status</a:t>
+              <a:t>uninstall</a:t>
             </a:r>
             <a:endParaRPr lang="en-US" sz="1000" dirty="0"/>
           </a:p>
@@ -21034,8 +21245,8 @@
         </p:nvSpPr>
         <p:spPr>
           <a:xfrm>
-            <a:off x="7236968" y="4443984"/>
-            <a:ext cx="483616" cy="256032"/>
+            <a:off x="8425688" y="4443984"/>
+            <a:ext cx="417576" cy="256032"/>
           </a:xfrm>
           <a:prstGeom prst="roundRect">
             <a:avLst>
@@ -21061,8 +21272,8 @@
         </p:nvSpPr>
         <p:spPr>
           <a:xfrm>
-            <a:off x="7236968" y="4443984"/>
-            <a:ext cx="483616" cy="256032"/>
+            <a:off x="8425688" y="4443984"/>
+            <a:ext cx="417576" cy="256032"/>
           </a:xfrm>
           <a:prstGeom prst="rect">
             <a:avLst/>
@@ -21086,7 +21297,7 @@
                 <a:ea typeface="Calibri" pitchFamily="34" charset="-122"/>
                 <a:cs typeface="Calibri" pitchFamily="34" charset="-120"/>
               </a:rPr>
-              <a:t>help</a:t>
+              <a:t>new</a:t>
             </a:r>
             <a:endParaRPr lang="en-US" sz="1000" dirty="0"/>
           </a:p>
@@ -21100,8 +21311,8 @@
         </p:nvSpPr>
         <p:spPr>
           <a:xfrm>
-            <a:off x="7812024" y="4443984"/>
-            <a:ext cx="549656" cy="256032"/>
+            <a:off x="8934704" y="4443984"/>
+            <a:ext cx="1011936" cy="256032"/>
           </a:xfrm>
           <a:prstGeom prst="roundRect">
             <a:avLst>
@@ -21127,8 +21338,8 @@
         </p:nvSpPr>
         <p:spPr>
           <a:xfrm>
-            <a:off x="7812024" y="4443984"/>
-            <a:ext cx="549656" cy="256032"/>
+            <a:off x="8934704" y="4443984"/>
+            <a:ext cx="1011936" cy="256032"/>
           </a:xfrm>
           <a:prstGeom prst="rect">
             <a:avLst/>
@@ -21152,7 +21363,7 @@
                 <a:ea typeface="Calibri" pitchFamily="34" charset="-122"/>
                 <a:cs typeface="Calibri" pitchFamily="34" charset="-120"/>
               </a:rPr>
-              <a:t>guide</a:t>
+              <a:t>explore list</a:t>
             </a:r>
             <a:endParaRPr lang="en-US" sz="1000" dirty="0"/>
           </a:p>
@@ -21166,8 +21377,8 @@
         </p:nvSpPr>
         <p:spPr>
           <a:xfrm>
-            <a:off x="8453120" y="4443984"/>
-            <a:ext cx="879856" cy="256032"/>
+            <a:off x="10038080" y="4443984"/>
+            <a:ext cx="945896" cy="256032"/>
           </a:xfrm>
           <a:prstGeom prst="roundRect">
             <a:avLst>
@@ -21193,8 +21404,8 @@
         </p:nvSpPr>
         <p:spPr>
           <a:xfrm>
-            <a:off x="8453120" y="4443984"/>
-            <a:ext cx="879856" cy="256032"/>
+            <a:off x="10038080" y="4443984"/>
+            <a:ext cx="945896" cy="256032"/>
           </a:xfrm>
           <a:prstGeom prst="rect">
             <a:avLst/>
@@ -21218,7 +21429,7 @@
                 <a:ea typeface="Calibri" pitchFamily="34" charset="-122"/>
                 <a:cs typeface="Calibri" pitchFamily="34" charset="-120"/>
               </a:rPr>
-              <a:t>statusline</a:t>
+              <a:t>import bmad</a:t>
             </a:r>
             <a:endParaRPr lang="en-US" sz="1000" dirty="0"/>
           </a:p>
@@ -21232,8 +21443,8 @@
         </p:nvSpPr>
         <p:spPr>
           <a:xfrm>
-            <a:off x="9424416" y="4443984"/>
-            <a:ext cx="813816" cy="256032"/>
+            <a:off x="11075416" y="4443984"/>
+            <a:ext cx="615696" cy="256032"/>
           </a:xfrm>
           <a:prstGeom prst="roundRect">
             <a:avLst>
@@ -21259,8 +21470,8 @@
         </p:nvSpPr>
         <p:spPr>
           <a:xfrm>
-            <a:off x="9424416" y="4443984"/>
-            <a:ext cx="813816" cy="256032"/>
+            <a:off x="11075416" y="4443984"/>
+            <a:ext cx="615696" cy="256032"/>
           </a:xfrm>
           <a:prstGeom prst="rect">
             <a:avLst/>
@@ -21284,7 +21495,7 @@
                 <a:ea typeface="Calibri" pitchFamily="34" charset="-122"/>
                 <a:cs typeface="Calibri" pitchFamily="34" charset="-120"/>
               </a:rPr>
-              <a:t>mcp serve</a:t>
+              <a:t>status</a:t>
             </a:r>
             <a:endParaRPr lang="en-US" sz="1000" dirty="0"/>
           </a:p>
@@ -21298,8 +21509,8 @@
         </p:nvSpPr>
         <p:spPr>
           <a:xfrm>
-            <a:off x="10329672" y="4443984"/>
-            <a:ext cx="813816" cy="256032"/>
+            <a:off x="457200" y="4791456"/>
+            <a:ext cx="483616" cy="256032"/>
           </a:xfrm>
           <a:prstGeom prst="roundRect">
             <a:avLst>
@@ -21325,8 +21536,8 @@
         </p:nvSpPr>
         <p:spPr>
           <a:xfrm>
-            <a:off x="10329672" y="4443984"/>
-            <a:ext cx="813816" cy="256032"/>
+            <a:off x="457200" y="4791456"/>
+            <a:ext cx="483616" cy="256032"/>
           </a:xfrm>
           <a:prstGeom prst="rect">
             <a:avLst/>
@@ -21350,7 +21561,7 @@
                 <a:ea typeface="Calibri" pitchFamily="34" charset="-122"/>
                 <a:cs typeface="Calibri" pitchFamily="34" charset="-120"/>
               </a:rPr>
-              <a:t>mcp check</a:t>
+              <a:t>help</a:t>
             </a:r>
             <a:endParaRPr lang="en-US" sz="1000" dirty="0"/>
           </a:p>
@@ -21364,8 +21575,8 @@
         </p:nvSpPr>
         <p:spPr>
           <a:xfrm>
-            <a:off x="457200" y="4791456"/>
-            <a:ext cx="879856" cy="256032"/>
+            <a:off x="1032256" y="4791456"/>
+            <a:ext cx="549656" cy="256032"/>
           </a:xfrm>
           <a:prstGeom prst="roundRect">
             <a:avLst>
@@ -21391,8 +21602,8 @@
         </p:nvSpPr>
         <p:spPr>
           <a:xfrm>
-            <a:off x="457200" y="4791456"/>
-            <a:ext cx="879856" cy="256032"/>
+            <a:off x="1032256" y="4791456"/>
+            <a:ext cx="549656" cy="256032"/>
           </a:xfrm>
           <a:prstGeom prst="rect">
             <a:avLst/>
@@ -21416,7 +21627,7 @@
                 <a:ea typeface="Calibri" pitchFamily="34" charset="-122"/>
                 <a:cs typeface="Calibri" pitchFamily="34" charset="-120"/>
               </a:rPr>
-              <a:t>inbox list</a:t>
+              <a:t>guide</a:t>
             </a:r>
             <a:endParaRPr lang="en-US" sz="1000" dirty="0"/>
           </a:p>
@@ -21430,7 +21641,7 @@
         </p:nvSpPr>
         <p:spPr>
           <a:xfrm>
-            <a:off x="1428496" y="4791456"/>
+            <a:off x="1673352" y="4791456"/>
             <a:ext cx="879856" cy="256032"/>
           </a:xfrm>
           <a:prstGeom prst="roundRect">
@@ -21457,7 +21668,7 @@
         </p:nvSpPr>
         <p:spPr>
           <a:xfrm>
-            <a:off x="1428496" y="4791456"/>
+            <a:off x="1673352" y="4791456"/>
             <a:ext cx="879856" cy="256032"/>
           </a:xfrm>
           <a:prstGeom prst="rect">
@@ -21482,7 +21693,7 @@
                 <a:ea typeface="Calibri" pitchFamily="34" charset="-122"/>
                 <a:cs typeface="Calibri" pitchFamily="34" charset="-120"/>
               </a:rPr>
-              <a:t>inbox done</a:t>
+              <a:t>statusline</a:t>
             </a:r>
             <a:endParaRPr lang="en-US" sz="1000" dirty="0"/>
           </a:p>
@@ -21496,8 +21707,8 @@
         </p:nvSpPr>
         <p:spPr>
           <a:xfrm>
-            <a:off x="2399792" y="4791456"/>
-            <a:ext cx="945896" cy="256032"/>
+            <a:off x="2644648" y="4791456"/>
+            <a:ext cx="813816" cy="256032"/>
           </a:xfrm>
           <a:prstGeom prst="roundRect">
             <a:avLst>
@@ -21523,8 +21734,8 @@
         </p:nvSpPr>
         <p:spPr>
           <a:xfrm>
-            <a:off x="2399792" y="4791456"/>
-            <a:ext cx="945896" cy="256032"/>
+            <a:off x="2644648" y="4791456"/>
+            <a:ext cx="813816" cy="256032"/>
           </a:xfrm>
           <a:prstGeom prst="rect">
             <a:avLst/>
@@ -21548,7 +21759,7 @@
                 <a:ea typeface="Calibri" pitchFamily="34" charset="-122"/>
                 <a:cs typeface="Calibri" pitchFamily="34" charset="-120"/>
               </a:rPr>
-              <a:t>events list</a:t>
+              <a:t>mcp serve</a:t>
             </a:r>
             <a:endParaRPr lang="en-US" sz="1000" dirty="0"/>
           </a:p>
@@ -21562,8 +21773,8 @@
         </p:nvSpPr>
         <p:spPr>
           <a:xfrm>
-            <a:off x="3437128" y="4791456"/>
-            <a:ext cx="1011936" cy="256032"/>
+            <a:off x="3549904" y="4791456"/>
+            <a:ext cx="813816" cy="256032"/>
           </a:xfrm>
           <a:prstGeom prst="roundRect">
             <a:avLst>
@@ -21589,8 +21800,8 @@
         </p:nvSpPr>
         <p:spPr>
           <a:xfrm>
-            <a:off x="3437128" y="4791456"/>
-            <a:ext cx="1011936" cy="256032"/>
+            <a:off x="3549904" y="4791456"/>
+            <a:ext cx="813816" cy="256032"/>
           </a:xfrm>
           <a:prstGeom prst="rect">
             <a:avLst/>
@@ -21614,7 +21825,7 @@
                 <a:ea typeface="Calibri" pitchFamily="34" charset="-122"/>
                 <a:cs typeface="Calibri" pitchFamily="34" charset="-120"/>
               </a:rPr>
-              <a:t>events flush</a:t>
+              <a:t>mcp check</a:t>
             </a:r>
             <a:endParaRPr lang="en-US" sz="1000" dirty="0"/>
           </a:p>
@@ -21628,8 +21839,8 @@
         </p:nvSpPr>
         <p:spPr>
           <a:xfrm>
-            <a:off x="4540504" y="4791456"/>
-            <a:ext cx="1077976" cy="256032"/>
+            <a:off x="4455160" y="4791456"/>
+            <a:ext cx="879856" cy="256032"/>
           </a:xfrm>
           <a:prstGeom prst="roundRect">
             <a:avLst>
@@ -21655,8 +21866,8 @@
         </p:nvSpPr>
         <p:spPr>
           <a:xfrm>
-            <a:off x="4540504" y="4791456"/>
-            <a:ext cx="1077976" cy="256032"/>
+            <a:off x="4455160" y="4791456"/>
+            <a:ext cx="879856" cy="256032"/>
           </a:xfrm>
           <a:prstGeom prst="rect">
             <a:avLst/>
@@ -21680,7 +21891,7 @@
                 <a:ea typeface="Calibri" pitchFamily="34" charset="-122"/>
                 <a:cs typeface="Calibri" pitchFamily="34" charset="-120"/>
               </a:rPr>
-              <a:t>release check</a:t>
+              <a:t>inbox list</a:t>
             </a:r>
             <a:endParaRPr lang="en-US" sz="1000" dirty="0"/>
           </a:p>
@@ -21694,8 +21905,8 @@
         </p:nvSpPr>
         <p:spPr>
           <a:xfrm>
-            <a:off x="5709920" y="4791456"/>
-            <a:ext cx="813816" cy="256032"/>
+            <a:off x="5426456" y="4791456"/>
+            <a:ext cx="879856" cy="256032"/>
           </a:xfrm>
           <a:prstGeom prst="roundRect">
             <a:avLst>
@@ -21721,8 +21932,8 @@
         </p:nvSpPr>
         <p:spPr>
           <a:xfrm>
-            <a:off x="5709920" y="4791456"/>
-            <a:ext cx="813816" cy="256032"/>
+            <a:off x="5426456" y="4791456"/>
+            <a:ext cx="879856" cy="256032"/>
           </a:xfrm>
           <a:prstGeom prst="rect">
             <a:avLst/>
@@ -21746,7 +21957,7 @@
                 <a:ea typeface="Calibri" pitchFamily="34" charset="-122"/>
                 <a:cs typeface="Calibri" pitchFamily="34" charset="-120"/>
               </a:rPr>
-              <a:t>track set</a:t>
+              <a:t>inbox done</a:t>
             </a:r>
             <a:endParaRPr lang="en-US" sz="1000" dirty="0"/>
           </a:p>
@@ -21760,8 +21971,8 @@
         </p:nvSpPr>
         <p:spPr>
           <a:xfrm>
-            <a:off x="6615176" y="4791456"/>
-            <a:ext cx="483616" cy="256032"/>
+            <a:off x="6397752" y="4791456"/>
+            <a:ext cx="945896" cy="256032"/>
           </a:xfrm>
           <a:prstGeom prst="roundRect">
             <a:avLst>
@@ -21787,8 +21998,8 @@
         </p:nvSpPr>
         <p:spPr>
           <a:xfrm>
-            <a:off x="6615176" y="4791456"/>
-            <a:ext cx="483616" cy="256032"/>
+            <a:off x="6397752" y="4791456"/>
+            <a:ext cx="945896" cy="256032"/>
           </a:xfrm>
           <a:prstGeom prst="rect">
             <a:avLst/>
@@ -21812,7 +22023,7 @@
                 <a:ea typeface="Calibri" pitchFamily="34" charset="-122"/>
                 <a:cs typeface="Calibri" pitchFamily="34" charset="-120"/>
               </a:rPr>
-              <a:t>next</a:t>
+              <a:t>events list</a:t>
             </a:r>
             <a:endParaRPr lang="en-US" sz="1000" dirty="0"/>
           </a:p>
@@ -21826,7 +22037,7 @@
         </p:nvSpPr>
         <p:spPr>
           <a:xfrm>
-            <a:off x="7190232" y="4791456"/>
+            <a:off x="7435088" y="4791456"/>
             <a:ext cx="1011936" cy="256032"/>
           </a:xfrm>
           <a:prstGeom prst="roundRect">
@@ -21853,7 +22064,7 @@
         </p:nvSpPr>
         <p:spPr>
           <a:xfrm>
-            <a:off x="7190232" y="4791456"/>
+            <a:off x="7435088" y="4791456"/>
             <a:ext cx="1011936" cy="256032"/>
           </a:xfrm>
           <a:prstGeom prst="rect">
@@ -21878,7 +22089,7 @@
                 <a:ea typeface="Calibri" pitchFamily="34" charset="-122"/>
                 <a:cs typeface="Calibri" pitchFamily="34" charset="-120"/>
               </a:rPr>
-              <a:t>instructions</a:t>
+              <a:t>events flush</a:t>
             </a:r>
             <a:endParaRPr lang="en-US" sz="1000" dirty="0"/>
           </a:p>
@@ -21892,8 +22103,8 @@
         </p:nvSpPr>
         <p:spPr>
           <a:xfrm>
-            <a:off x="8293608" y="4791456"/>
-            <a:ext cx="681736" cy="256032"/>
+            <a:off x="8538464" y="4791456"/>
+            <a:ext cx="1077976" cy="256032"/>
           </a:xfrm>
           <a:prstGeom prst="roundRect">
             <a:avLst>
@@ -21919,8 +22130,8 @@
         </p:nvSpPr>
         <p:spPr>
           <a:xfrm>
-            <a:off x="8293608" y="4791456"/>
-            <a:ext cx="681736" cy="256032"/>
+            <a:off x="8538464" y="4791456"/>
+            <a:ext cx="1077976" cy="256032"/>
           </a:xfrm>
           <a:prstGeom prst="rect">
             <a:avLst/>
@@ -21944,7 +22155,7 @@
                 <a:ea typeface="Calibri" pitchFamily="34" charset="-122"/>
                 <a:cs typeface="Calibri" pitchFamily="34" charset="-120"/>
               </a:rPr>
-              <a:t>approve</a:t>
+              <a:t>release check</a:t>
             </a:r>
             <a:endParaRPr lang="en-US" sz="1000" dirty="0"/>
           </a:p>
@@ -21958,8 +22169,8 @@
         </p:nvSpPr>
         <p:spPr>
           <a:xfrm>
-            <a:off x="9066784" y="4791456"/>
-            <a:ext cx="615696" cy="256032"/>
+            <a:off x="9707880" y="4791456"/>
+            <a:ext cx="813816" cy="256032"/>
           </a:xfrm>
           <a:prstGeom prst="roundRect">
             <a:avLst>
@@ -21985,8 +22196,8 @@
         </p:nvSpPr>
         <p:spPr>
           <a:xfrm>
-            <a:off x="9066784" y="4791456"/>
-            <a:ext cx="615696" cy="256032"/>
+            <a:off x="9707880" y="4791456"/>
+            <a:ext cx="813816" cy="256032"/>
           </a:xfrm>
           <a:prstGeom prst="rect">
             <a:avLst/>
@@ -22010,7 +22221,7 @@
                 <a:ea typeface="Calibri" pitchFamily="34" charset="-122"/>
                 <a:cs typeface="Calibri" pitchFamily="34" charset="-120"/>
               </a:rPr>
-              <a:t>reject</a:t>
+              <a:t>track set</a:t>
             </a:r>
             <a:endParaRPr lang="en-US" sz="1000" dirty="0"/>
           </a:p>
@@ -22024,8 +22235,8 @@
         </p:nvSpPr>
         <p:spPr>
           <a:xfrm>
-            <a:off x="9773920" y="4791456"/>
-            <a:ext cx="549656" cy="256032"/>
+            <a:off x="10613136" y="4791456"/>
+            <a:ext cx="483616" cy="256032"/>
           </a:xfrm>
           <a:prstGeom prst="roundRect">
             <a:avLst>
@@ -22051,8 +22262,8 @@
         </p:nvSpPr>
         <p:spPr>
           <a:xfrm>
-            <a:off x="9773920" y="4791456"/>
-            <a:ext cx="549656" cy="256032"/>
+            <a:off x="10613136" y="4791456"/>
+            <a:ext cx="483616" cy="256032"/>
           </a:xfrm>
           <a:prstGeom prst="rect">
             <a:avLst/>
@@ -22076,7 +22287,7 @@
                 <a:ea typeface="Calibri" pitchFamily="34" charset="-122"/>
                 <a:cs typeface="Calibri" pitchFamily="34" charset="-120"/>
               </a:rPr>
-              <a:t>waive</a:t>
+              <a:t>next</a:t>
             </a:r>
             <a:endParaRPr lang="en-US" sz="1000" dirty="0"/>
           </a:p>
@@ -22090,8 +22301,8 @@
         </p:nvSpPr>
         <p:spPr>
           <a:xfrm>
-            <a:off x="10415016" y="4791456"/>
-            <a:ext cx="747776" cy="256032"/>
+            <a:off x="457200" y="5138928"/>
+            <a:ext cx="1011936" cy="256032"/>
           </a:xfrm>
           <a:prstGeom prst="roundRect">
             <a:avLst>
@@ -22117,8 +22328,8 @@
         </p:nvSpPr>
         <p:spPr>
           <a:xfrm>
-            <a:off x="10415016" y="4791456"/>
-            <a:ext cx="747776" cy="256032"/>
+            <a:off x="457200" y="5138928"/>
+            <a:ext cx="1011936" cy="256032"/>
           </a:xfrm>
           <a:prstGeom prst="rect">
             <a:avLst/>
@@ -22142,7 +22353,7 @@
                 <a:ea typeface="Calibri" pitchFamily="34" charset="-122"/>
                 <a:cs typeface="Calibri" pitchFamily="34" charset="-120"/>
               </a:rPr>
-              <a:t>takeover</a:t>
+              <a:t>instructions</a:t>
             </a:r>
             <a:endParaRPr lang="en-US" sz="1000" dirty="0"/>
           </a:p>
@@ -22156,8 +22367,8 @@
         </p:nvSpPr>
         <p:spPr>
           <a:xfrm>
-            <a:off x="457200" y="5138928"/>
-            <a:ext cx="1210056" cy="256032"/>
+            <a:off x="1560576" y="5138928"/>
+            <a:ext cx="681736" cy="256032"/>
           </a:xfrm>
           <a:prstGeom prst="roundRect">
             <a:avLst>
@@ -22183,8 +22394,8 @@
         </p:nvSpPr>
         <p:spPr>
           <a:xfrm>
-            <a:off x="457200" y="5138928"/>
-            <a:ext cx="1210056" cy="256032"/>
+            <a:off x="1560576" y="5138928"/>
+            <a:ext cx="681736" cy="256032"/>
           </a:xfrm>
           <a:prstGeom prst="rect">
             <a:avLst/>
@@ -22208,7 +22419,7 @@
                 <a:ea typeface="Calibri" pitchFamily="34" charset="-122"/>
                 <a:cs typeface="Calibri" pitchFamily="34" charset="-120"/>
               </a:rPr>
-              <a:t>release-control</a:t>
+              <a:t>approve</a:t>
             </a:r>
             <a:endParaRPr lang="en-US" sz="1000" dirty="0"/>
           </a:p>
@@ -22222,7 +22433,7 @@
         </p:nvSpPr>
         <p:spPr>
           <a:xfrm>
-            <a:off x="1758696" y="5138928"/>
+            <a:off x="2333752" y="5138928"/>
             <a:ext cx="615696" cy="256032"/>
           </a:xfrm>
           <a:prstGeom prst="roundRect">
@@ -22249,7 +22460,7 @@
         </p:nvSpPr>
         <p:spPr>
           <a:xfrm>
-            <a:off x="1758696" y="5138928"/>
+            <a:off x="2333752" y="5138928"/>
             <a:ext cx="615696" cy="256032"/>
           </a:xfrm>
           <a:prstGeom prst="rect">
@@ -22274,7 +22485,7 @@
                 <a:ea typeface="Calibri" pitchFamily="34" charset="-122"/>
                 <a:cs typeface="Calibri" pitchFamily="34" charset="-120"/>
               </a:rPr>
-              <a:t>rework</a:t>
+              <a:t>reject</a:t>
             </a:r>
             <a:endParaRPr lang="en-US" sz="1000" dirty="0"/>
           </a:p>
@@ -22288,8 +22499,8 @@
         </p:nvSpPr>
         <p:spPr>
           <a:xfrm>
-            <a:off x="2465832" y="5138928"/>
-            <a:ext cx="1276096" cy="256032"/>
+            <a:off x="3040888" y="5138928"/>
+            <a:ext cx="549656" cy="256032"/>
           </a:xfrm>
           <a:prstGeom prst="roundRect">
             <a:avLst>
@@ -22315,8 +22526,8 @@
         </p:nvSpPr>
         <p:spPr>
           <a:xfrm>
-            <a:off x="2465832" y="5138928"/>
-            <a:ext cx="1276096" cy="256032"/>
+            <a:off x="3040888" y="5138928"/>
+            <a:ext cx="549656" cy="256032"/>
           </a:xfrm>
           <a:prstGeom prst="rect">
             <a:avLst/>
@@ -22340,7 +22551,7 @@
                 <a:ea typeface="Calibri" pitchFamily="34" charset="-122"/>
                 <a:cs typeface="Calibri" pitchFamily="34" charset="-120"/>
               </a:rPr>
-              <a:t>approvals verify</a:t>
+              <a:t>waive</a:t>
             </a:r>
             <a:endParaRPr lang="en-US" sz="1000" dirty="0"/>
           </a:p>
@@ -22354,8 +22565,8 @@
         </p:nvSpPr>
         <p:spPr>
           <a:xfrm>
-            <a:off x="3833368" y="5138928"/>
-            <a:ext cx="549656" cy="256032"/>
+            <a:off x="3681984" y="5138928"/>
+            <a:ext cx="747776" cy="256032"/>
           </a:xfrm>
           <a:prstGeom prst="roundRect">
             <a:avLst>
@@ -22381,8 +22592,8 @@
         </p:nvSpPr>
         <p:spPr>
           <a:xfrm>
-            <a:off x="3833368" y="5138928"/>
-            <a:ext cx="549656" cy="256032"/>
+            <a:off x="3681984" y="5138928"/>
+            <a:ext cx="747776" cy="256032"/>
           </a:xfrm>
           <a:prstGeom prst="rect">
             <a:avLst/>
@@ -22406,7 +22617,7 @@
                 <a:ea typeface="Calibri" pitchFamily="34" charset="-122"/>
                 <a:cs typeface="Calibri" pitchFamily="34" charset="-120"/>
               </a:rPr>
-              <a:t>tests</a:t>
+              <a:t>takeover</a:t>
             </a:r>
             <a:endParaRPr lang="en-US" sz="1000" dirty="0"/>
           </a:p>
@@ -22420,8 +22631,8 @@
         </p:nvSpPr>
         <p:spPr>
           <a:xfrm>
-            <a:off x="4474464" y="5138928"/>
-            <a:ext cx="615696" cy="256032"/>
+            <a:off x="4521200" y="5138928"/>
+            <a:ext cx="1210056" cy="256032"/>
           </a:xfrm>
           <a:prstGeom prst="roundRect">
             <a:avLst>
@@ -22447,8 +22658,8 @@
         </p:nvSpPr>
         <p:spPr>
           <a:xfrm>
-            <a:off x="4474464" y="5138928"/>
-            <a:ext cx="615696" cy="256032"/>
+            <a:off x="4521200" y="5138928"/>
+            <a:ext cx="1210056" cy="256032"/>
           </a:xfrm>
           <a:prstGeom prst="rect">
             <a:avLst/>
@@ -22472,7 +22683,7 @@
                 <a:ea typeface="Calibri" pitchFamily="34" charset="-122"/>
                 <a:cs typeface="Calibri" pitchFamily="34" charset="-120"/>
               </a:rPr>
-              <a:t>verify</a:t>
+              <a:t>release-control</a:t>
             </a:r>
             <a:endParaRPr lang="en-US" sz="1000" dirty="0"/>
           </a:p>
@@ -22486,7 +22697,7 @@
         </p:nvSpPr>
         <p:spPr>
           <a:xfrm>
-            <a:off x="5181600" y="5138928"/>
+            <a:off x="5822696" y="5138928"/>
             <a:ext cx="615696" cy="256032"/>
           </a:xfrm>
           <a:prstGeom prst="roundRect">
@@ -22513,7 +22724,7 @@
         </p:nvSpPr>
         <p:spPr>
           <a:xfrm>
-            <a:off x="5181600" y="5138928"/>
+            <a:off x="5822696" y="5138928"/>
             <a:ext cx="615696" cy="256032"/>
           </a:xfrm>
           <a:prstGeom prst="rect">
@@ -22538,7 +22749,7 @@
                 <a:ea typeface="Calibri" pitchFamily="34" charset="-122"/>
                 <a:cs typeface="Calibri" pitchFamily="34" charset="-120"/>
               </a:rPr>
-              <a:t>review</a:t>
+              <a:t>rework</a:t>
             </a:r>
             <a:endParaRPr lang="en-US" sz="1000" dirty="0"/>
           </a:p>
@@ -22552,8 +22763,8 @@
         </p:nvSpPr>
         <p:spPr>
           <a:xfrm>
-            <a:off x="5888736" y="5138928"/>
-            <a:ext cx="747776" cy="256032"/>
+            <a:off x="6529832" y="5138928"/>
+            <a:ext cx="1276096" cy="256032"/>
           </a:xfrm>
           <a:prstGeom prst="roundRect">
             <a:avLst>
@@ -22579,8 +22790,8 @@
         </p:nvSpPr>
         <p:spPr>
           <a:xfrm>
-            <a:off x="5888736" y="5138928"/>
-            <a:ext cx="747776" cy="256032"/>
+            <a:off x="6529832" y="5138928"/>
+            <a:ext cx="1276096" cy="256032"/>
           </a:xfrm>
           <a:prstGeom prst="rect">
             <a:avLst/>
@@ -22604,7 +22815,7 @@
                 <a:ea typeface="Calibri" pitchFamily="34" charset="-122"/>
                 <a:cs typeface="Calibri" pitchFamily="34" charset="-120"/>
               </a:rPr>
-              <a:t>validate</a:t>
+              <a:t>approvals verify</a:t>
             </a:r>
             <a:endParaRPr lang="en-US" sz="1000" dirty="0"/>
           </a:p>
@@ -22618,8 +22829,8 @@
         </p:nvSpPr>
         <p:spPr>
           <a:xfrm>
-            <a:off x="6727952" y="5138928"/>
-            <a:ext cx="681736" cy="256032"/>
+            <a:off x="7897368" y="5138928"/>
+            <a:ext cx="549656" cy="256032"/>
           </a:xfrm>
           <a:prstGeom prst="roundRect">
             <a:avLst>
@@ -22645,8 +22856,8 @@
         </p:nvSpPr>
         <p:spPr>
           <a:xfrm>
-            <a:off x="6727952" y="5138928"/>
-            <a:ext cx="681736" cy="256032"/>
+            <a:off x="7897368" y="5138928"/>
+            <a:ext cx="549656" cy="256032"/>
           </a:xfrm>
           <a:prstGeom prst="rect">
             <a:avLst/>
@@ -22670,7 +22881,7 @@
                 <a:ea typeface="Calibri" pitchFamily="34" charset="-122"/>
                 <a:cs typeface="Calibri" pitchFamily="34" charset="-120"/>
               </a:rPr>
-              <a:t>archive</a:t>
+              <a:t>tests</a:t>
             </a:r>
             <a:endParaRPr lang="en-US" sz="1000" dirty="0"/>
           </a:p>
@@ -22684,8 +22895,8 @@
         </p:nvSpPr>
         <p:spPr>
           <a:xfrm>
-            <a:off x="7501128" y="5138928"/>
-            <a:ext cx="549656" cy="256032"/>
+            <a:off x="8538464" y="5138928"/>
+            <a:ext cx="615696" cy="256032"/>
           </a:xfrm>
           <a:prstGeom prst="roundRect">
             <a:avLst>
@@ -22711,8 +22922,8 @@
         </p:nvSpPr>
         <p:spPr>
           <a:xfrm>
-            <a:off x="7501128" y="5138928"/>
-            <a:ext cx="549656" cy="256032"/>
+            <a:off x="8538464" y="5138928"/>
+            <a:ext cx="615696" cy="256032"/>
           </a:xfrm>
           <a:prstGeom prst="rect">
             <a:avLst/>
@@ -22736,7 +22947,7 @@
                 <a:ea typeface="Calibri" pitchFamily="34" charset="-122"/>
                 <a:cs typeface="Calibri" pitchFamily="34" charset="-120"/>
               </a:rPr>
-              <a:t>audit</a:t>
+              <a:t>verify</a:t>
             </a:r>
             <a:endParaRPr lang="en-US" sz="1000" dirty="0"/>
           </a:p>
@@ -22750,7 +22961,7 @@
         </p:nvSpPr>
         <p:spPr>
           <a:xfrm>
-            <a:off x="8142224" y="5138928"/>
+            <a:off x="9245600" y="5138928"/>
             <a:ext cx="615696" cy="256032"/>
           </a:xfrm>
           <a:prstGeom prst="roundRect">
@@ -22777,7 +22988,7 @@
         </p:nvSpPr>
         <p:spPr>
           <a:xfrm>
-            <a:off x="8142224" y="5138928"/>
+            <a:off x="9245600" y="5138928"/>
             <a:ext cx="615696" cy="256032"/>
           </a:xfrm>
           <a:prstGeom prst="rect">
@@ -22802,7 +23013,7 @@
                 <a:ea typeface="Calibri" pitchFamily="34" charset="-122"/>
                 <a:cs typeface="Calibri" pitchFamily="34" charset="-120"/>
               </a:rPr>
-              <a:t>report</a:t>
+              <a:t>review</a:t>
             </a:r>
             <a:endParaRPr lang="en-US" sz="1000" dirty="0"/>
           </a:p>
@@ -22816,8 +23027,8 @@
         </p:nvSpPr>
         <p:spPr>
           <a:xfrm>
-            <a:off x="8849360" y="5138928"/>
-            <a:ext cx="813816" cy="256032"/>
+            <a:off x="9952736" y="5138928"/>
+            <a:ext cx="747776" cy="256032"/>
           </a:xfrm>
           <a:prstGeom prst="roundRect">
             <a:avLst>
@@ -22843,8 +23054,8 @@
         </p:nvSpPr>
         <p:spPr>
           <a:xfrm>
-            <a:off x="8849360" y="5138928"/>
-            <a:ext cx="813816" cy="256032"/>
+            <a:off x="9952736" y="5138928"/>
+            <a:ext cx="747776" cy="256032"/>
           </a:xfrm>
           <a:prstGeom prst="rect">
             <a:avLst/>
@@ -22868,7 +23079,7 @@
                 <a:ea typeface="Calibri" pitchFamily="34" charset="-122"/>
                 <a:cs typeface="Calibri" pitchFamily="34" charset="-120"/>
               </a:rPr>
-              <a:t>dashboard</a:t>
+              <a:t>validate</a:t>
             </a:r>
             <a:endParaRPr lang="en-US" sz="1000" dirty="0"/>
           </a:p>
@@ -22882,8 +23093,8 @@
         </p:nvSpPr>
         <p:spPr>
           <a:xfrm>
-            <a:off x="9754616" y="5138928"/>
-            <a:ext cx="417576" cy="256032"/>
+            <a:off x="10791952" y="5138928"/>
+            <a:ext cx="681736" cy="256032"/>
           </a:xfrm>
           <a:prstGeom prst="roundRect">
             <a:avLst>
@@ -22909,8 +23120,8 @@
         </p:nvSpPr>
         <p:spPr>
           <a:xfrm>
-            <a:off x="9754616" y="5138928"/>
-            <a:ext cx="417576" cy="256032"/>
+            <a:off x="10791952" y="5138928"/>
+            <a:ext cx="681736" cy="256032"/>
           </a:xfrm>
           <a:prstGeom prst="rect">
             <a:avLst/>
@@ -22934,7 +23145,7 @@
                 <a:ea typeface="Calibri" pitchFamily="34" charset="-122"/>
                 <a:cs typeface="Calibri" pitchFamily="34" charset="-120"/>
               </a:rPr>
-              <a:t>log</a:t>
+              <a:t>archive</a:t>
             </a:r>
             <a:endParaRPr lang="en-US" sz="1000" dirty="0"/>
           </a:p>
@@ -22948,8 +23159,8 @@
         </p:nvSpPr>
         <p:spPr>
           <a:xfrm>
-            <a:off x="10263632" y="5138928"/>
-            <a:ext cx="681736" cy="256032"/>
+            <a:off x="457200" y="5486400"/>
+            <a:ext cx="549656" cy="256032"/>
           </a:xfrm>
           <a:prstGeom prst="roundRect">
             <a:avLst>
@@ -22975,8 +23186,8 @@
         </p:nvSpPr>
         <p:spPr>
           <a:xfrm>
-            <a:off x="10263632" y="5138928"/>
-            <a:ext cx="681736" cy="256032"/>
+            <a:off x="457200" y="5486400"/>
+            <a:ext cx="549656" cy="256032"/>
           </a:xfrm>
           <a:prstGeom prst="rect">
             <a:avLst/>
@@ -23000,7 +23211,7 @@
                 <a:ea typeface="Calibri" pitchFamily="34" charset="-122"/>
                 <a:cs typeface="Calibri" pitchFamily="34" charset="-120"/>
               </a:rPr>
-              <a:t>license</a:t>
+              <a:t>audit</a:t>
             </a:r>
             <a:endParaRPr lang="en-US" sz="1000" dirty="0"/>
           </a:p>
@@ -23014,7 +23225,7 @@
         </p:nvSpPr>
         <p:spPr>
           <a:xfrm>
-            <a:off x="11036808" y="5138928"/>
+            <a:off x="1098296" y="5486400"/>
             <a:ext cx="615696" cy="256032"/>
           </a:xfrm>
           <a:prstGeom prst="roundRect">
@@ -23041,7 +23252,7 @@
         </p:nvSpPr>
         <p:spPr>
           <a:xfrm>
-            <a:off x="11036808" y="5138928"/>
+            <a:off x="1098296" y="5486400"/>
             <a:ext cx="615696" cy="256032"/>
           </a:xfrm>
           <a:prstGeom prst="rect">
@@ -23066,7 +23277,7 @@
                 <a:ea typeface="Calibri" pitchFamily="34" charset="-122"/>
                 <a:cs typeface="Calibri" pitchFamily="34" charset="-120"/>
               </a:rPr>
-              <a:t>doctor</a:t>
+              <a:t>report</a:t>
             </a:r>
             <a:endParaRPr lang="en-US" sz="1000" dirty="0"/>
           </a:p>
@@ -23080,8 +23291,8 @@
         </p:nvSpPr>
         <p:spPr>
           <a:xfrm>
-            <a:off x="457200" y="5486400"/>
-            <a:ext cx="1011936" cy="256032"/>
+            <a:off x="1805432" y="5486400"/>
+            <a:ext cx="813816" cy="256032"/>
           </a:xfrm>
           <a:prstGeom prst="roundRect">
             <a:avLst>
@@ -23107,8 +23318,8 @@
         </p:nvSpPr>
         <p:spPr>
           <a:xfrm>
-            <a:off x="457200" y="5486400"/>
-            <a:ext cx="1011936" cy="256032"/>
+            <a:off x="1805432" y="5486400"/>
+            <a:ext cx="813816" cy="256032"/>
           </a:xfrm>
           <a:prstGeom prst="rect">
             <a:avLst/>
@@ -23132,7 +23343,7 @@
                 <a:ea typeface="Calibri" pitchFamily="34" charset="-122"/>
                 <a:cs typeface="Calibri" pitchFamily="34" charset="-120"/>
               </a:rPr>
-              <a:t>plugin build</a:t>
+              <a:t>dashboard</a:t>
             </a:r>
             <a:endParaRPr lang="en-US" sz="1000" dirty="0"/>
           </a:p>
@@ -23146,8 +23357,8 @@
         </p:nvSpPr>
         <p:spPr>
           <a:xfrm>
-            <a:off x="1560576" y="5486400"/>
-            <a:ext cx="549656" cy="256032"/>
+            <a:off x="2710688" y="5486400"/>
+            <a:ext cx="417576" cy="256032"/>
           </a:xfrm>
           <a:prstGeom prst="roundRect">
             <a:avLst>
@@ -23173,8 +23384,8 @@
         </p:nvSpPr>
         <p:spPr>
           <a:xfrm>
-            <a:off x="1560576" y="5486400"/>
-            <a:ext cx="549656" cy="256032"/>
+            <a:off x="2710688" y="5486400"/>
+            <a:ext cx="417576" cy="256032"/>
           </a:xfrm>
           <a:prstGeom prst="rect">
             <a:avLst/>
@@ -23198,7 +23409,7 @@
                 <a:ea typeface="Calibri" pitchFamily="34" charset="-122"/>
                 <a:cs typeface="Calibri" pitchFamily="34" charset="-120"/>
               </a:rPr>
-              <a:t>trace</a:t>
+              <a:t>log</a:t>
             </a:r>
             <a:endParaRPr lang="en-US" sz="1000" dirty="0"/>
           </a:p>
@@ -23212,8 +23423,8 @@
         </p:nvSpPr>
         <p:spPr>
           <a:xfrm>
-            <a:off x="2201672" y="5486400"/>
-            <a:ext cx="483616" cy="256032"/>
+            <a:off x="3219704" y="5486400"/>
+            <a:ext cx="681736" cy="256032"/>
           </a:xfrm>
           <a:prstGeom prst="roundRect">
             <a:avLst>
@@ -23239,8 +23450,8 @@
         </p:nvSpPr>
         <p:spPr>
           <a:xfrm>
-            <a:off x="2201672" y="5486400"/>
-            <a:ext cx="483616" cy="256032"/>
+            <a:off x="3219704" y="5486400"/>
+            <a:ext cx="681736" cy="256032"/>
           </a:xfrm>
           <a:prstGeom prst="rect">
             <a:avLst/>
@@ -23264,7 +23475,7 @@
                 <a:ea typeface="Calibri" pitchFamily="34" charset="-122"/>
                 <a:cs typeface="Calibri" pitchFamily="34" charset="-120"/>
               </a:rPr>
-              <a:t>hook</a:t>
+              <a:t>license</a:t>
             </a:r>
             <a:endParaRPr lang="en-US" sz="1000" dirty="0"/>
           </a:p>
@@ -23278,8 +23489,8 @@
         </p:nvSpPr>
         <p:spPr>
           <a:xfrm>
-            <a:off x="2776728" y="5486400"/>
-            <a:ext cx="747776" cy="256032"/>
+            <a:off x="3992880" y="5486400"/>
+            <a:ext cx="615696" cy="256032"/>
           </a:xfrm>
           <a:prstGeom prst="roundRect">
             <a:avLst>
@@ -23305,7 +23516,271 @@
         </p:nvSpPr>
         <p:spPr>
           <a:xfrm>
-            <a:off x="2776728" y="5486400"/>
+            <a:off x="3992880" y="5486400"/>
+            <a:ext cx="615696" cy="256032"/>
+          </a:xfrm>
+          <a:prstGeom prst="rect">
+            <a:avLst/>
+          </a:prstGeom>
+          <a:noFill/>
+          <a:ln/>
+        </p:spPr>
+        <p:txBody>
+          <a:bodyPr wrap="square" lIns="0" tIns="0" rIns="0" bIns="0" rtlCol="0" anchor="ctr"/>
+          <a:lstStyle/>
+          <a:p>
+            <a:pPr algn="ctr" indent="0" marL="0">
+              <a:buNone/>
+            </a:pPr>
+            <a:r>
+              <a:rPr lang="en-US" sz="1000" dirty="0">
+                <a:solidFill>
+                  <a:srgbClr val="1F2430"/>
+                </a:solidFill>
+                <a:latin typeface="Calibri" pitchFamily="34" charset="0"/>
+                <a:ea typeface="Calibri" pitchFamily="34" charset="-122"/>
+                <a:cs typeface="Calibri" pitchFamily="34" charset="-120"/>
+              </a:rPr>
+              <a:t>doctor</a:t>
+            </a:r>
+            <a:endParaRPr lang="en-US" sz="1000" dirty="0"/>
+          </a:p>
+        </p:txBody>
+      </p:sp>
+      <p:sp>
+        <p:nvSpPr>
+          <p:cNvPr id="142" name="Shape 140"/>
+          <p:cNvSpPr/>
+          <p:nvPr/>
+        </p:nvSpPr>
+        <p:spPr>
+          <a:xfrm>
+            <a:off x="4700016" y="5486400"/>
+            <a:ext cx="1011936" cy="256032"/>
+          </a:xfrm>
+          <a:prstGeom prst="roundRect">
+            <a:avLst>
+              <a:gd name="adj" fmla="val 50000"/>
+            </a:avLst>
+          </a:prstGeom>
+          <a:solidFill>
+            <a:srgbClr val="F3F5F8"/>
+          </a:solidFill>
+          <a:ln w="12700">
+            <a:solidFill>
+              <a:srgbClr val="F3F5F8"/>
+            </a:solidFill>
+            <a:prstDash val="solid"/>
+          </a:ln>
+        </p:spPr>
+      </p:sp>
+      <p:sp>
+        <p:nvSpPr>
+          <p:cNvPr id="143" name="Text 141"/>
+          <p:cNvSpPr txBox="1"/>
+          <p:nvPr/>
+        </p:nvSpPr>
+        <p:spPr>
+          <a:xfrm>
+            <a:off x="4700016" y="5486400"/>
+            <a:ext cx="1011936" cy="256032"/>
+          </a:xfrm>
+          <a:prstGeom prst="rect">
+            <a:avLst/>
+          </a:prstGeom>
+          <a:noFill/>
+          <a:ln/>
+        </p:spPr>
+        <p:txBody>
+          <a:bodyPr wrap="square" lIns="0" tIns="0" rIns="0" bIns="0" rtlCol="0" anchor="ctr"/>
+          <a:lstStyle/>
+          <a:p>
+            <a:pPr algn="ctr" indent="0" marL="0">
+              <a:buNone/>
+            </a:pPr>
+            <a:r>
+              <a:rPr lang="en-US" sz="1000" dirty="0">
+                <a:solidFill>
+                  <a:srgbClr val="1F2430"/>
+                </a:solidFill>
+                <a:latin typeface="Calibri" pitchFamily="34" charset="0"/>
+                <a:ea typeface="Calibri" pitchFamily="34" charset="-122"/>
+                <a:cs typeface="Calibri" pitchFamily="34" charset="-120"/>
+              </a:rPr>
+              <a:t>plugin build</a:t>
+            </a:r>
+            <a:endParaRPr lang="en-US" sz="1000" dirty="0"/>
+          </a:p>
+        </p:txBody>
+      </p:sp>
+      <p:sp>
+        <p:nvSpPr>
+          <p:cNvPr id="144" name="Shape 142"/>
+          <p:cNvSpPr/>
+          <p:nvPr/>
+        </p:nvSpPr>
+        <p:spPr>
+          <a:xfrm>
+            <a:off x="5803392" y="5486400"/>
+            <a:ext cx="549656" cy="256032"/>
+          </a:xfrm>
+          <a:prstGeom prst="roundRect">
+            <a:avLst>
+              <a:gd name="adj" fmla="val 50000"/>
+            </a:avLst>
+          </a:prstGeom>
+          <a:solidFill>
+            <a:srgbClr val="F3F5F8"/>
+          </a:solidFill>
+          <a:ln w="12700">
+            <a:solidFill>
+              <a:srgbClr val="F3F5F8"/>
+            </a:solidFill>
+            <a:prstDash val="solid"/>
+          </a:ln>
+        </p:spPr>
+      </p:sp>
+      <p:sp>
+        <p:nvSpPr>
+          <p:cNvPr id="145" name="Text 143"/>
+          <p:cNvSpPr txBox="1"/>
+          <p:nvPr/>
+        </p:nvSpPr>
+        <p:spPr>
+          <a:xfrm>
+            <a:off x="5803392" y="5486400"/>
+            <a:ext cx="549656" cy="256032"/>
+          </a:xfrm>
+          <a:prstGeom prst="rect">
+            <a:avLst/>
+          </a:prstGeom>
+          <a:noFill/>
+          <a:ln/>
+        </p:spPr>
+        <p:txBody>
+          <a:bodyPr wrap="square" lIns="0" tIns="0" rIns="0" bIns="0" rtlCol="0" anchor="ctr"/>
+          <a:lstStyle/>
+          <a:p>
+            <a:pPr algn="ctr" indent="0" marL="0">
+              <a:buNone/>
+            </a:pPr>
+            <a:r>
+              <a:rPr lang="en-US" sz="1000" dirty="0">
+                <a:solidFill>
+                  <a:srgbClr val="1F2430"/>
+                </a:solidFill>
+                <a:latin typeface="Calibri" pitchFamily="34" charset="0"/>
+                <a:ea typeface="Calibri" pitchFamily="34" charset="-122"/>
+                <a:cs typeface="Calibri" pitchFamily="34" charset="-120"/>
+              </a:rPr>
+              <a:t>trace</a:t>
+            </a:r>
+            <a:endParaRPr lang="en-US" sz="1000" dirty="0"/>
+          </a:p>
+        </p:txBody>
+      </p:sp>
+      <p:sp>
+        <p:nvSpPr>
+          <p:cNvPr id="146" name="Shape 144"/>
+          <p:cNvSpPr/>
+          <p:nvPr/>
+        </p:nvSpPr>
+        <p:spPr>
+          <a:xfrm>
+            <a:off x="6444488" y="5486400"/>
+            <a:ext cx="483616" cy="256032"/>
+          </a:xfrm>
+          <a:prstGeom prst="roundRect">
+            <a:avLst>
+              <a:gd name="adj" fmla="val 50000"/>
+            </a:avLst>
+          </a:prstGeom>
+          <a:solidFill>
+            <a:srgbClr val="F3F5F8"/>
+          </a:solidFill>
+          <a:ln w="12700">
+            <a:solidFill>
+              <a:srgbClr val="F3F5F8"/>
+            </a:solidFill>
+            <a:prstDash val="solid"/>
+          </a:ln>
+        </p:spPr>
+      </p:sp>
+      <p:sp>
+        <p:nvSpPr>
+          <p:cNvPr id="147" name="Text 145"/>
+          <p:cNvSpPr txBox="1"/>
+          <p:nvPr/>
+        </p:nvSpPr>
+        <p:spPr>
+          <a:xfrm>
+            <a:off x="6444488" y="5486400"/>
+            <a:ext cx="483616" cy="256032"/>
+          </a:xfrm>
+          <a:prstGeom prst="rect">
+            <a:avLst/>
+          </a:prstGeom>
+          <a:noFill/>
+          <a:ln/>
+        </p:spPr>
+        <p:txBody>
+          <a:bodyPr wrap="square" lIns="0" tIns="0" rIns="0" bIns="0" rtlCol="0" anchor="ctr"/>
+          <a:lstStyle/>
+          <a:p>
+            <a:pPr algn="ctr" indent="0" marL="0">
+              <a:buNone/>
+            </a:pPr>
+            <a:r>
+              <a:rPr lang="en-US" sz="1000" dirty="0">
+                <a:solidFill>
+                  <a:srgbClr val="1F2430"/>
+                </a:solidFill>
+                <a:latin typeface="Calibri" pitchFamily="34" charset="0"/>
+                <a:ea typeface="Calibri" pitchFamily="34" charset="-122"/>
+                <a:cs typeface="Calibri" pitchFamily="34" charset="-120"/>
+              </a:rPr>
+              <a:t>hook</a:t>
+            </a:r>
+            <a:endParaRPr lang="en-US" sz="1000" dirty="0"/>
+          </a:p>
+        </p:txBody>
+      </p:sp>
+      <p:sp>
+        <p:nvSpPr>
+          <p:cNvPr id="148" name="Shape 146"/>
+          <p:cNvSpPr/>
+          <p:nvPr/>
+        </p:nvSpPr>
+        <p:spPr>
+          <a:xfrm>
+            <a:off x="7019544" y="5486400"/>
+            <a:ext cx="747776" cy="256032"/>
+          </a:xfrm>
+          <a:prstGeom prst="roundRect">
+            <a:avLst>
+              <a:gd name="adj" fmla="val 50000"/>
+            </a:avLst>
+          </a:prstGeom>
+          <a:solidFill>
+            <a:srgbClr val="F3F5F8"/>
+          </a:solidFill>
+          <a:ln w="12700">
+            <a:solidFill>
+              <a:srgbClr val="F3F5F8"/>
+            </a:solidFill>
+            <a:prstDash val="solid"/>
+          </a:ln>
+        </p:spPr>
+      </p:sp>
+      <p:sp>
+        <p:nvSpPr>
+          <p:cNvPr id="149" name="Text 147"/>
+          <p:cNvSpPr txBox="1"/>
+          <p:nvPr/>
+        </p:nvSpPr>
+        <p:spPr>
+          <a:xfrm>
+            <a:off x="7019544" y="5486400"/>
             <a:ext cx="747776" cy="256032"/>
           </a:xfrm>
           <a:prstGeom prst="rect">
@@ -25976,7 +26451,7 @@
                 <a:ea typeface="Courier New" pitchFamily="34" charset="-122"/>
                 <a:cs typeface="Courier New" pitchFamily="34" charset="-120"/>
               </a:rPr>
-              <a:t>  sdlc 0.10.0, license: community</a:t>
+              <a:t>  sdlc 0.11.0, license: community</a:t>
             </a:r>
             <a:endParaRPr lang="en-US" sz="1000" dirty="0"/>
           </a:p>
@@ -26027,7 +26502,7 @@
                 <a:ea typeface="Courier New" pitchFamily="34" charset="-122"/>
                 <a:cs typeface="Courier New" pitchFamily="34" charset="-120"/>
               </a:rPr>
-              <a:t>  files: 64 created, 0 updated, 0</a:t>
+              <a:t>  files: 67 created, 0 updated, 0</a:t>
             </a:r>
             <a:endParaRPr lang="en-US" sz="1000" dirty="0"/>
           </a:p>

--- a/docs/demo/sdlc-calculator-demo.en.pptx
+++ b/docs/demo/sdlc-calculator-demo.en.pptx
@@ -6659,7 +6659,7 @@
                 <a:ea typeface="Courier New" pitchFamily="34" charset="-122"/>
                 <a:cs typeface="Courier New" pitchFamily="34" charset="-120"/>
               </a:rPr>
-              <a:t>  code-owner (794602e2105c)</a:t>
+              <a:t>  code-owner (fda718d788b8)</a:t>
             </a:r>
             <a:endParaRPr lang="en-US" sz="1000" dirty="0"/>
           </a:p>
@@ -7340,7 +7340,7 @@
                 <a:ea typeface="Courier New" pitchFamily="34" charset="-122"/>
                 <a:cs typeface="Courier New" pitchFamily="34" charset="-120"/>
               </a:rPr>
-              <a:t>  release-manager (794602e2105c)</a:t>
+              <a:t>  release-manager (fda718d788b8)</a:t>
             </a:r>
             <a:endParaRPr lang="en-US" sz="1000" dirty="0"/>
           </a:p>
@@ -7640,7 +7640,7 @@
                 <a:ea typeface="Courier New" pitchFamily="34" charset="-122"/>
                 <a:cs typeface="Courier New" pitchFamily="34" charset="-120"/>
               </a:rPr>
-              <a:t>✓ basic-arithmetic/intent alice valid 2b809052</a:t>
+              <a:t>✓ basic-arithmetic/intent alice valid 16180068</a:t>
             </a:r>
             <a:endParaRPr lang="en-US" sz="1000" dirty="0"/>
           </a:p>
@@ -7657,7 +7657,7 @@
                 <a:ea typeface="Courier New" pitchFamily="34" charset="-122"/>
                 <a:cs typeface="Courier New" pitchFamily="34" charset="-120"/>
               </a:rPr>
-              <a:t>✓ basic-arithmetic/spec alice valid 2bef4479</a:t>
+              <a:t>✓ basic-arithmetic/spec alice valid 83fc80dd</a:t>
             </a:r>
             <a:endParaRPr lang="en-US" sz="1000" dirty="0"/>
           </a:p>
@@ -7674,7 +7674,7 @@
                 <a:ea typeface="Courier New" pitchFamily="34" charset="-122"/>
                 <a:cs typeface="Courier New" pitchFamily="34" charset="-120"/>
               </a:rPr>
-              <a:t>✗ basic-arithmetic/plan bob wrong-signer 2bef4479</a:t>
+              <a:t>✗ basic-arithmetic/plan bob wrong-signer 83fc80dd</a:t>
             </a:r>
             <a:endParaRPr lang="en-US" sz="1000" dirty="0"/>
           </a:p>
@@ -7691,7 +7691,7 @@
                 <a:ea typeface="Courier New" pitchFamily="34" charset="-122"/>
                 <a:cs typeface="Courier New" pitchFamily="34" charset="-120"/>
               </a:rPr>
-              <a:t>✓ basic-arithmetic/review carol valid 8f916d32</a:t>
+              <a:t>✓ basic-arithmetic/review carol valid 3782ae14</a:t>
             </a:r>
             <a:endParaRPr lang="en-US" sz="1000" dirty="0"/>
           </a:p>
@@ -7708,7 +7708,7 @@
                 <a:ea typeface="Courier New" pitchFamily="34" charset="-122"/>
                 <a:cs typeface="Courier New" pitchFamily="34" charset="-120"/>
               </a:rPr>
-              <a:t>✓ basic-arithmetic/release alice valid ea758646</a:t>
+              <a:t>✓ basic-arithmetic/release alice valid c11195b6</a:t>
             </a:r>
             <a:endParaRPr lang="en-US" sz="1000" dirty="0"/>
           </a:p>
@@ -7725,7 +7725,7 @@
                 <a:ea typeface="Courier New" pitchFamily="34" charset="-122"/>
                 <a:cs typeface="Courier New" pitchFamily="34" charset="-120"/>
               </a:rPr>
-              <a:t>✓ openspec/roles.yaml alice@calc.example valid 6514c2cc</a:t>
+              <a:t>✓ openspec/roles.yaml alice@calc.example valid 2f8830ef</a:t>
             </a:r>
             <a:endParaRPr lang="en-US" sz="1000" dirty="0"/>
           </a:p>
@@ -14145,7 +14145,7 @@
                 <a:ea typeface="Courier New" pitchFamily="34" charset="-122"/>
                 <a:cs typeface="Courier New" pitchFamily="34" charset="-120"/>
               </a:rPr>
-              <a:t>  archived) · sdlc 0.11.0, license:</a:t>
+              <a:t>  archived) · sdlc 0.11.1, license:</a:t>
             </a:r>
             <a:endParaRPr lang="en-US" sz="1000" dirty="0"/>
           </a:p>
@@ -14298,7 +14298,7 @@
                 <a:ea typeface="Courier New" pitchFamily="34" charset="-122"/>
                 <a:cs typeface="Courier New" pitchFamily="34" charset="-120"/>
               </a:rPr>
-              <a:t>  intent 4 · spec 9 · plan 9 · review 3;</a:t>
+              <a:t>  intent 3 · spec 8 · plan 9 · review 3;</a:t>
             </a:r>
             <a:endParaRPr lang="en-US" sz="1000" dirty="0"/>
           </a:p>
@@ -14332,7 +14332,7 @@
                 <a:ea typeface="Courier New" pitchFamily="34" charset="-122"/>
                 <a:cs typeface="Courier New" pitchFamily="34" charset="-120"/>
               </a:rPr>
-              <a:t>  recorded with sdlc 0.11.0; licenses:</a:t>
+              <a:t>  recorded with sdlc 0.11.1; licenses:</a:t>
             </a:r>
             <a:endParaRPr lang="en-US" sz="1000" dirty="0"/>
           </a:p>
@@ -14649,7 +14649,7 @@
                 <a:ea typeface="Courier New" pitchFamily="34" charset="-122"/>
                 <a:cs typeface="Courier New" pitchFamily="34" charset="-120"/>
               </a:rPr>
-              <a:t>2026-10-07T20:04:38.093Z  gate.review.await</a:t>
+              <a:t>2026-10-08T06:37:08.475Z  gate.review.await</a:t>
             </a:r>
             <a:endParaRPr lang="en-US" sz="1000" dirty="0"/>
           </a:p>
@@ -14683,7 +14683,7 @@
                 <a:ea typeface="Courier New" pitchFamily="34" charset="-122"/>
                 <a:cs typeface="Courier New" pitchFamily="34" charset="-120"/>
               </a:rPr>
-              <a:t>  sha256:794602e2105c13b0465c4edcf3dd269ebf</a:t>
+              <a:t>  sha256:fda718d788b83c13e8184a62fb1b24b1b5</a:t>
             </a:r>
             <a:endParaRPr lang="en-US" sz="1000" dirty="0"/>
           </a:p>
@@ -14700,7 +14700,7 @@
                 <a:ea typeface="Courier New" pitchFamily="34" charset="-122"/>
                 <a:cs typeface="Courier New" pitchFamily="34" charset="-120"/>
               </a:rPr>
-              <a:t>  3d7dc4ac9ee2d9aee4f1ea229023ec [sdlc</a:t>
+              <a:t>  e3a2a7fc69809bc3e958dd14af3986 [sdlc</a:t>
             </a:r>
             <a:endParaRPr lang="en-US" sz="1000" dirty="0"/>
           </a:p>
@@ -14717,7 +14717,7 @@
                 <a:ea typeface="Courier New" pitchFamily="34" charset="-122"/>
                 <a:cs typeface="Courier New" pitchFamily="34" charset="-120"/>
               </a:rPr>
-              <a:t>  0.11.0 · community]</a:t>
+              <a:t>  0.11.1 · community]</a:t>
             </a:r>
             <a:endParaRPr lang="en-US" sz="1000" dirty="0"/>
           </a:p>
@@ -14734,7 +14734,7 @@
                 <a:ea typeface="Courier New" pitchFamily="34" charset="-122"/>
                 <a:cs typeface="Courier New" pitchFamily="34" charset="-120"/>
               </a:rPr>
-              <a:t>2026-10-07T20:04:41.234Z  gate.review.appro</a:t>
+              <a:t>2026-10-08T06:37:11.297Z  gate.review.appro</a:t>
             </a:r>
             <a:endParaRPr lang="en-US" sz="1000" dirty="0"/>
           </a:p>
@@ -14785,7 +14785,7 @@
                 <a:ea typeface="Courier New" pitchFamily="34" charset="-122"/>
                 <a:cs typeface="Courier New" pitchFamily="34" charset="-120"/>
               </a:rPr>
-              <a:t>  [sdlc 0.11.0 · community]</a:t>
+              <a:t>  [sdlc 0.11.1 · community]</a:t>
             </a:r>
             <a:endParaRPr lang="en-US" sz="1000" dirty="0"/>
           </a:p>
@@ -14802,7 +14802,7 @@
                 <a:ea typeface="Courier New" pitchFamily="34" charset="-122"/>
                 <a:cs typeface="Courier New" pitchFamily="34" charset="-120"/>
               </a:rPr>
-              <a:t>2026-10-07T20:04:45.854Z  gate.release.appr</a:t>
+              <a:t>2026-10-08T06:37:15.533Z  gate.release.appr</a:t>
             </a:r>
             <a:endParaRPr lang="en-US" sz="1000" dirty="0"/>
           </a:p>
@@ -14853,7 +14853,7 @@
                 <a:ea typeface="Courier New" pitchFamily="34" charset="-122"/>
                 <a:cs typeface="Courier New" pitchFamily="34" charset="-120"/>
               </a:rPr>
-              <a:t>  release-manager [sdlc 0.11.0 · community]</a:t>
+              <a:t>  release-manager [sdlc 0.11.1 · community]</a:t>
             </a:r>
             <a:endParaRPr lang="en-US" sz="1000" dirty="0"/>
           </a:p>
@@ -16030,7 +16030,7 @@
                 <a:ea typeface="Courier New" pitchFamily="34" charset="-122"/>
                 <a:cs typeface="Courier New" pitchFamily="34" charset="-120"/>
               </a:rPr>
-              <a:t>✓ test (1.1s)</a:t>
+              <a:t>✓ test (0.9s)</a:t>
             </a:r>
             <a:endParaRPr lang="en-US" sz="1000" dirty="0"/>
           </a:p>
@@ -16047,7 +16047,7 @@
                 <a:ea typeface="Courier New" pitchFamily="34" charset="-122"/>
                 <a:cs typeface="Courier New" pitchFamily="34" charset="-120"/>
               </a:rPr>
-              <a:t>✓ ci-green (ci/pipeline_status, 0.6s)</a:t>
+              <a:t>✓ ci-green (ci/pipeline_status, 0.5s)</a:t>
             </a:r>
             <a:endParaRPr lang="en-US" sz="1000" dirty="0"/>
           </a:p>
@@ -16483,7 +16483,7 @@
                 <a:ea typeface="Courier New" pitchFamily="34" charset="-122"/>
                 <a:cs typeface="Courier New" pitchFamily="34" charset="-120"/>
               </a:rPr>
-              <a:t>      "id": "20261007T200527818Z-ci-green-a</a:t>
+              <a:t>      "id": "20261008T063753150Z-ci-green-1</a:t>
             </a:r>
             <a:endParaRPr lang="en-US" sz="1000" dirty="0"/>
           </a:p>
@@ -16500,7 +16500,7 @@
                 <a:ea typeface="Courier New" pitchFamily="34" charset="-122"/>
                 <a:cs typeface="Courier New" pitchFamily="34" charset="-120"/>
               </a:rPr>
-              <a:t>  b5c0d",</a:t>
+              <a:t>  9bd91",</a:t>
             </a:r>
             <a:endParaRPr lang="en-US" sz="1000" dirty="0"/>
           </a:p>
@@ -16636,7 +16636,7 @@
                 <a:ea typeface="Courier New" pitchFamily="34" charset="-122"/>
                 <a:cs typeface="Courier New" pitchFamily="34" charset="-120"/>
               </a:rPr>
-              <a:t>        "ref": "0b6a530445076524df168fb2551</a:t>
+              <a:t>        "ref": "91532c7ef2228edea69b5a326c3</a:t>
             </a:r>
             <a:endParaRPr lang="en-US" sz="1000" dirty="0"/>
           </a:p>
@@ -16653,7 +16653,7 @@
                 <a:ea typeface="Courier New" pitchFamily="34" charset="-122"/>
                 <a:cs typeface="Courier New" pitchFamily="34" charset="-120"/>
               </a:rPr>
-              <a:t>  fa0504e5a1ac4",</a:t>
+              <a:t>  7e6f8195304f5",</a:t>
             </a:r>
             <a:endParaRPr lang="en-US" sz="1000" dirty="0"/>
           </a:p>
@@ -26451,7 +26451,7 @@
                 <a:ea typeface="Courier New" pitchFamily="34" charset="-122"/>
                 <a:cs typeface="Courier New" pitchFamily="34" charset="-120"/>
               </a:rPr>
-              <a:t>  sdlc 0.11.0, license: community</a:t>
+              <a:t>  sdlc 0.11.1, license: community</a:t>
             </a:r>
             <a:endParaRPr lang="en-US" sz="1000" dirty="0"/>
           </a:p>

--- a/docs/demo/sdlc-calculator-demo.en.pptx
+++ b/docs/demo/sdlc-calculator-demo.en.pptx
@@ -6659,7 +6659,109 @@
                 <a:ea typeface="Courier New" pitchFamily="34" charset="-122"/>
                 <a:cs typeface="Courier New" pitchFamily="34" charset="-120"/>
               </a:rPr>
-              <a:t>  code-owner (fda718d788b8)</a:t>
+              <a:t>  code-owner (63fa1476507a)</a:t>
+            </a:r>
+            <a:endParaRPr lang="en-US" sz="1000" dirty="0"/>
+          </a:p>
+          <a:p>
+            <a:pPr indent="0" marL="0">
+              <a:buNone/>
+            </a:pPr>
+            <a:r>
+              <a:rPr lang="en-US" sz="1000" dirty="0">
+                <a:solidFill>
+                  <a:srgbClr val="E8EEF2"/>
+                </a:solidFill>
+                <a:latin typeface="Courier New" pitchFamily="34" charset="0"/>
+                <a:ea typeface="Courier New" pitchFamily="34" charset="-122"/>
+                <a:cs typeface="Courier New" pitchFamily="34" charset="-120"/>
+              </a:rPr>
+              <a:t>Suggested commit message (its trailer ties</a:t>
+            </a:r>
+            <a:endParaRPr lang="en-US" sz="1000" dirty="0"/>
+          </a:p>
+          <a:p>
+            <a:pPr indent="0" marL="0">
+              <a:buNone/>
+            </a:pPr>
+            <a:r>
+              <a:rPr lang="en-US" sz="1000" dirty="0">
+                <a:solidFill>
+                  <a:srgbClr val="E8EEF2"/>
+                </a:solidFill>
+                <a:latin typeface="Courier New" pitchFamily="34" charset="0"/>
+                <a:ea typeface="Courier New" pitchFamily="34" charset="-122"/>
+                <a:cs typeface="Courier New" pitchFamily="34" charset="-120"/>
+              </a:rPr>
+              <a:t>  the commit to this approval):</a:t>
+            </a:r>
+            <a:endParaRPr lang="en-US" sz="1000" dirty="0"/>
+          </a:p>
+          <a:p>
+            <a:pPr indent="0" marL="0">
+              <a:buNone/>
+            </a:pPr>
+            <a:r>
+              <a:rPr lang="en-US" sz="1000" dirty="0">
+                <a:solidFill>
+                  <a:srgbClr val="E8EEF2"/>
+                </a:solidFill>
+                <a:latin typeface="Courier New" pitchFamily="34" charset="0"/>
+                <a:ea typeface="Courier New" pitchFamily="34" charset="-122"/>
+                <a:cs typeface="Courier New" pitchFamily="34" charset="-120"/>
+              </a:rPr>
+              <a:t>  $ git commit -m "chore(basic-arithmetic):</a:t>
+            </a:r>
+            <a:endParaRPr lang="en-US" sz="1000" dirty="0"/>
+          </a:p>
+          <a:p>
+            <a:pPr indent="0" marL="0">
+              <a:buNone/>
+            </a:pPr>
+            <a:r>
+              <a:rPr lang="en-US" sz="1000" dirty="0">
+                <a:solidFill>
+                  <a:srgbClr val="E8EEF2"/>
+                </a:solidFill>
+                <a:latin typeface="Courier New" pitchFamily="34" charset="0"/>
+                <a:ea typeface="Courier New" pitchFamily="34" charset="-122"/>
+                <a:cs typeface="Courier New" pitchFamily="34" charset="-120"/>
+              </a:rPr>
+              <a:t>  approve the review gate" -m</a:t>
+            </a:r>
+            <a:endParaRPr lang="en-US" sz="1000" dirty="0"/>
+          </a:p>
+          <a:p>
+            <a:pPr indent="0" marL="0">
+              <a:buNone/>
+            </a:pPr>
+            <a:r>
+              <a:rPr lang="en-US" sz="1000" dirty="0">
+                <a:solidFill>
+                  <a:srgbClr val="E8EEF2"/>
+                </a:solidFill>
+                <a:latin typeface="Courier New" pitchFamily="34" charset="0"/>
+                <a:ea typeface="Courier New" pitchFamily="34" charset="-122"/>
+                <a:cs typeface="Courier New" pitchFamily="34" charset="-120"/>
+              </a:rPr>
+              <a:t>  "SDLC-Approval: basic-arithmetic:review:6</a:t>
+            </a:r>
+            <a:endParaRPr lang="en-US" sz="1000" dirty="0"/>
+          </a:p>
+          <a:p>
+            <a:pPr indent="0" marL="0">
+              <a:buNone/>
+            </a:pPr>
+            <a:r>
+              <a:rPr lang="en-US" sz="1000" dirty="0">
+                <a:solidFill>
+                  <a:srgbClr val="E8EEF2"/>
+                </a:solidFill>
+                <a:latin typeface="Courier New" pitchFamily="34" charset="0"/>
+                <a:ea typeface="Courier New" pitchFamily="34" charset="-122"/>
+                <a:cs typeface="Courier New" pitchFamily="34" charset="-120"/>
+              </a:rPr>
+              <a:t>  3fa1476507a"</a:t>
             </a:r>
             <a:endParaRPr lang="en-US" sz="1000" dirty="0"/>
           </a:p>
@@ -7340,7 +7442,75 @@
                 <a:ea typeface="Courier New" pitchFamily="34" charset="-122"/>
                 <a:cs typeface="Courier New" pitchFamily="34" charset="-120"/>
               </a:rPr>
-              <a:t>  release-manager (fda718d788b8)</a:t>
+              <a:t>  release-manager (63fa1476507a)</a:t>
+            </a:r>
+            <a:endParaRPr lang="en-US" sz="1000" dirty="0"/>
+          </a:p>
+          <a:p>
+            <a:pPr indent="0" marL="0">
+              <a:buNone/>
+            </a:pPr>
+            <a:r>
+              <a:rPr lang="en-US" sz="1000" dirty="0">
+                <a:solidFill>
+                  <a:srgbClr val="E8EEF2"/>
+                </a:solidFill>
+                <a:latin typeface="Courier New" pitchFamily="34" charset="0"/>
+                <a:ea typeface="Courier New" pitchFamily="34" charset="-122"/>
+                <a:cs typeface="Courier New" pitchFamily="34" charset="-120"/>
+              </a:rPr>
+              <a:t>Suggested commit message (its trailer ties the commit to this</a:t>
+            </a:r>
+            <a:endParaRPr lang="en-US" sz="1000" dirty="0"/>
+          </a:p>
+          <a:p>
+            <a:pPr indent="0" marL="0">
+              <a:buNone/>
+            </a:pPr>
+            <a:r>
+              <a:rPr lang="en-US" sz="1000" dirty="0">
+                <a:solidFill>
+                  <a:srgbClr val="E8EEF2"/>
+                </a:solidFill>
+                <a:latin typeface="Courier New" pitchFamily="34" charset="0"/>
+                <a:ea typeface="Courier New" pitchFamily="34" charset="-122"/>
+                <a:cs typeface="Courier New" pitchFamily="34" charset="-120"/>
+              </a:rPr>
+              <a:t>  approval):</a:t>
+            </a:r>
+            <a:endParaRPr lang="en-US" sz="1000" dirty="0"/>
+          </a:p>
+          <a:p>
+            <a:pPr indent="0" marL="0">
+              <a:buNone/>
+            </a:pPr>
+            <a:r>
+              <a:rPr lang="en-US" sz="1000" dirty="0">
+                <a:solidFill>
+                  <a:srgbClr val="E8EEF2"/>
+                </a:solidFill>
+                <a:latin typeface="Courier New" pitchFamily="34" charset="0"/>
+                <a:ea typeface="Courier New" pitchFamily="34" charset="-122"/>
+                <a:cs typeface="Courier New" pitchFamily="34" charset="-120"/>
+              </a:rPr>
+              <a:t>  $ git commit -m "chore(basic-arithmetic): approve the release</a:t>
+            </a:r>
+            <a:endParaRPr lang="en-US" sz="1000" dirty="0"/>
+          </a:p>
+          <a:p>
+            <a:pPr indent="0" marL="0">
+              <a:buNone/>
+            </a:pPr>
+            <a:r>
+              <a:rPr lang="en-US" sz="1000" dirty="0">
+                <a:solidFill>
+                  <a:srgbClr val="E8EEF2"/>
+                </a:solidFill>
+                <a:latin typeface="Courier New" pitchFamily="34" charset="0"/>
+                <a:ea typeface="Courier New" pitchFamily="34" charset="-122"/>
+                <a:cs typeface="Courier New" pitchFamily="34" charset="-120"/>
+              </a:rPr>
+              <a:t>  gate" -m "SDLC-Approval: basic-arithmetic:release:63fa1476507a"</a:t>
             </a:r>
             <a:endParaRPr lang="en-US" sz="1000" dirty="0"/>
           </a:p>
@@ -7640,7 +7810,7 @@
                 <a:ea typeface="Courier New" pitchFamily="34" charset="-122"/>
                 <a:cs typeface="Courier New" pitchFamily="34" charset="-120"/>
               </a:rPr>
-              <a:t>✓ basic-arithmetic/intent alice valid 16180068</a:t>
+              <a:t>✓ basic-arithmetic/intent alice valid 8b57f270</a:t>
             </a:r>
             <a:endParaRPr lang="en-US" sz="1000" dirty="0"/>
           </a:p>
@@ -7657,7 +7827,7 @@
                 <a:ea typeface="Courier New" pitchFamily="34" charset="-122"/>
                 <a:cs typeface="Courier New" pitchFamily="34" charset="-120"/>
               </a:rPr>
-              <a:t>✓ basic-arithmetic/spec alice valid 83fc80dd</a:t>
+              <a:t>✓ basic-arithmetic/spec alice valid bbac70c5</a:t>
             </a:r>
             <a:endParaRPr lang="en-US" sz="1000" dirty="0"/>
           </a:p>
@@ -7674,7 +7844,7 @@
                 <a:ea typeface="Courier New" pitchFamily="34" charset="-122"/>
                 <a:cs typeface="Courier New" pitchFamily="34" charset="-120"/>
               </a:rPr>
-              <a:t>✗ basic-arithmetic/plan bob wrong-signer 83fc80dd</a:t>
+              <a:t>✗ basic-arithmetic/plan bob wrong-signer bbac70c5</a:t>
             </a:r>
             <a:endParaRPr lang="en-US" sz="1000" dirty="0"/>
           </a:p>
@@ -7691,7 +7861,7 @@
                 <a:ea typeface="Courier New" pitchFamily="34" charset="-122"/>
                 <a:cs typeface="Courier New" pitchFamily="34" charset="-120"/>
               </a:rPr>
-              <a:t>✓ basic-arithmetic/review carol valid 3782ae14</a:t>
+              <a:t>✓ basic-arithmetic/review carol valid 28e1b97c</a:t>
             </a:r>
             <a:endParaRPr lang="en-US" sz="1000" dirty="0"/>
           </a:p>
@@ -7708,7 +7878,7 @@
                 <a:ea typeface="Courier New" pitchFamily="34" charset="-122"/>
                 <a:cs typeface="Courier New" pitchFamily="34" charset="-120"/>
               </a:rPr>
-              <a:t>✓ basic-arithmetic/release alice valid c11195b6</a:t>
+              <a:t>✓ basic-arithmetic/release alice valid 5984042e</a:t>
             </a:r>
             <a:endParaRPr lang="en-US" sz="1000" dirty="0"/>
           </a:p>
@@ -7725,7 +7895,7 @@
                 <a:ea typeface="Courier New" pitchFamily="34" charset="-122"/>
                 <a:cs typeface="Courier New" pitchFamily="34" charset="-120"/>
               </a:rPr>
-              <a:t>✓ openspec/roles.yaml alice@calc.example valid 2f8830ef</a:t>
+              <a:t>✓ openspec/roles.yaml alice@calc.example valid aacbfe84</a:t>
             </a:r>
             <a:endParaRPr lang="en-US" sz="1000" dirty="0"/>
           </a:p>
@@ -8291,7 +8461,7 @@
                 <a:ea typeface="Courier New" pitchFamily="34" charset="-122"/>
                 <a:cs typeface="Courier New" pitchFamily="34" charset="-120"/>
               </a:rPr>
-              <a:t>  openspec\changes\archive\2026-10-07-basic</a:t>
+              <a:t>  openspec\changes\archive\2026-10-08-basic</a:t>
             </a:r>
             <a:endParaRPr lang="en-US" sz="1000" dirty="0"/>
           </a:p>
@@ -14145,7 +14315,7 @@
                 <a:ea typeface="Courier New" pitchFamily="34" charset="-122"/>
                 <a:cs typeface="Courier New" pitchFamily="34" charset="-120"/>
               </a:rPr>
-              <a:t>  archived) · sdlc 0.11.1, license:</a:t>
+              <a:t>  archived) · sdlc 0.11.2, license:</a:t>
             </a:r>
             <a:endParaRPr lang="en-US" sz="1000" dirty="0"/>
           </a:p>
@@ -14264,7 +14434,7 @@
                 <a:ea typeface="Courier New" pitchFamily="34" charset="-122"/>
                 <a:cs typeface="Courier New" pitchFamily="34" charset="-120"/>
               </a:rPr>
-              <a:t>  rejections 1; waivers 1</a:t>
+              <a:t>  rejections 1; waivers 1 (+0 by policy)</a:t>
             </a:r>
             <a:endParaRPr lang="en-US" sz="1000" dirty="0"/>
           </a:p>
@@ -14298,7 +14468,7 @@
                 <a:ea typeface="Courier New" pitchFamily="34" charset="-122"/>
                 <a:cs typeface="Courier New" pitchFamily="34" charset="-120"/>
               </a:rPr>
-              <a:t>  intent 3 · spec 8 · plan 9 · review 3;</a:t>
+              <a:t>  intent 3 · plan 9 · review 3; rework</a:t>
             </a:r>
             <a:endParaRPr lang="en-US" sz="1000" dirty="0"/>
           </a:p>
@@ -14315,7 +14485,7 @@
                 <a:ea typeface="Courier New" pitchFamily="34" charset="-122"/>
                 <a:cs typeface="Courier New" pitchFamily="34" charset="-120"/>
               </a:rPr>
-              <a:t>  rework reasons: missing-requirement 1</a:t>
+              <a:t>  reasons: missing-requirement 1</a:t>
             </a:r>
             <a:endParaRPr lang="en-US" sz="1000" dirty="0"/>
           </a:p>
@@ -14332,7 +14502,7 @@
                 <a:ea typeface="Courier New" pitchFamily="34" charset="-122"/>
                 <a:cs typeface="Courier New" pitchFamily="34" charset="-120"/>
               </a:rPr>
-              <a:t>  recorded with sdlc 0.11.1; licenses:</a:t>
+              <a:t>  recorded with sdlc 0.11.2; licenses:</a:t>
             </a:r>
             <a:endParaRPr lang="en-US" sz="1000" dirty="0"/>
           </a:p>
@@ -14649,7 +14819,7 @@
                 <a:ea typeface="Courier New" pitchFamily="34" charset="-122"/>
                 <a:cs typeface="Courier New" pitchFamily="34" charset="-120"/>
               </a:rPr>
-              <a:t>2026-10-08T06:37:08.475Z  gate.review.await</a:t>
+              <a:t>2026-10-08T10:02:08.056Z  gate.review.await</a:t>
             </a:r>
             <a:endParaRPr lang="en-US" sz="1000" dirty="0"/>
           </a:p>
@@ -14683,7 +14853,7 @@
                 <a:ea typeface="Courier New" pitchFamily="34" charset="-122"/>
                 <a:cs typeface="Courier New" pitchFamily="34" charset="-120"/>
               </a:rPr>
-              <a:t>  sha256:fda718d788b83c13e8184a62fb1b24b1b5</a:t>
+              <a:t>  sha256:63fa1476507a4a7202559bef4ebd9b85c6</a:t>
             </a:r>
             <a:endParaRPr lang="en-US" sz="1000" dirty="0"/>
           </a:p>
@@ -14700,7 +14870,7 @@
                 <a:ea typeface="Courier New" pitchFamily="34" charset="-122"/>
                 <a:cs typeface="Courier New" pitchFamily="34" charset="-120"/>
               </a:rPr>
-              <a:t>  e3a2a7fc69809bc3e958dd14af3986 [sdlc</a:t>
+              <a:t>  b4bdd8d9402d0a34161a5f6c87a8cc [sdlc</a:t>
             </a:r>
             <a:endParaRPr lang="en-US" sz="1000" dirty="0"/>
           </a:p>
@@ -14717,7 +14887,7 @@
                 <a:ea typeface="Courier New" pitchFamily="34" charset="-122"/>
                 <a:cs typeface="Courier New" pitchFamily="34" charset="-120"/>
               </a:rPr>
-              <a:t>  0.11.1 · community]</a:t>
+              <a:t>  0.11.2 · community]</a:t>
             </a:r>
             <a:endParaRPr lang="en-US" sz="1000" dirty="0"/>
           </a:p>
@@ -14734,7 +14904,7 @@
                 <a:ea typeface="Courier New" pitchFamily="34" charset="-122"/>
                 <a:cs typeface="Courier New" pitchFamily="34" charset="-120"/>
               </a:rPr>
-              <a:t>2026-10-08T06:37:11.297Z  gate.review.appro</a:t>
+              <a:t>2026-10-08T10:02:11.047Z  gate.review.appro</a:t>
             </a:r>
             <a:endParaRPr lang="en-US" sz="1000" dirty="0"/>
           </a:p>
@@ -14785,7 +14955,7 @@
                 <a:ea typeface="Courier New" pitchFamily="34" charset="-122"/>
                 <a:cs typeface="Courier New" pitchFamily="34" charset="-120"/>
               </a:rPr>
-              <a:t>  [sdlc 0.11.1 · community]</a:t>
+              <a:t>  [sdlc 0.11.2 · community]</a:t>
             </a:r>
             <a:endParaRPr lang="en-US" sz="1000" dirty="0"/>
           </a:p>
@@ -14802,7 +14972,7 @@
                 <a:ea typeface="Courier New" pitchFamily="34" charset="-122"/>
                 <a:cs typeface="Courier New" pitchFamily="34" charset="-120"/>
               </a:rPr>
-              <a:t>2026-10-08T06:37:15.533Z  gate.release.appr</a:t>
+              <a:t>2026-10-08T10:02:15.526Z  gate.release.appr</a:t>
             </a:r>
             <a:endParaRPr lang="en-US" sz="1000" dirty="0"/>
           </a:p>
@@ -14853,7 +15023,7 @@
                 <a:ea typeface="Courier New" pitchFamily="34" charset="-122"/>
                 <a:cs typeface="Courier New" pitchFamily="34" charset="-120"/>
               </a:rPr>
-              <a:t>  release-manager [sdlc 0.11.1 · community]</a:t>
+              <a:t>  release-manager [sdlc 0.11.2 · community]</a:t>
             </a:r>
             <a:endParaRPr lang="en-US" sz="1000" dirty="0"/>
           </a:p>
@@ -16030,7 +16200,7 @@
                 <a:ea typeface="Courier New" pitchFamily="34" charset="-122"/>
                 <a:cs typeface="Courier New" pitchFamily="34" charset="-120"/>
               </a:rPr>
-              <a:t>✓ test (0.9s)</a:t>
+              <a:t>✓ test (1.0s)</a:t>
             </a:r>
             <a:endParaRPr lang="en-US" sz="1000" dirty="0"/>
           </a:p>
@@ -16483,7 +16653,7 @@
                 <a:ea typeface="Courier New" pitchFamily="34" charset="-122"/>
                 <a:cs typeface="Courier New" pitchFamily="34" charset="-120"/>
               </a:rPr>
-              <a:t>      "id": "20261008T063753150Z-ci-green-1</a:t>
+              <a:t>      "id": "20261008T100255976Z-ci-green-b</a:t>
             </a:r>
             <a:endParaRPr lang="en-US" sz="1000" dirty="0"/>
           </a:p>
@@ -16500,7 +16670,7 @@
                 <a:ea typeface="Courier New" pitchFamily="34" charset="-122"/>
                 <a:cs typeface="Courier New" pitchFamily="34" charset="-120"/>
               </a:rPr>
-              <a:t>  9bd91",</a:t>
+              <a:t>  ff50e",</a:t>
             </a:r>
             <a:endParaRPr lang="en-US" sz="1000" dirty="0"/>
           </a:p>
@@ -16636,7 +16806,7 @@
                 <a:ea typeface="Courier New" pitchFamily="34" charset="-122"/>
                 <a:cs typeface="Courier New" pitchFamily="34" charset="-120"/>
               </a:rPr>
-              <a:t>        "ref": "91532c7ef2228edea69b5a326c3</a:t>
+              <a:t>        "ref": "d0b1c1b167d17c19e2886e4a42d</a:t>
             </a:r>
             <a:endParaRPr lang="en-US" sz="1000" dirty="0"/>
           </a:p>
@@ -16653,7 +16823,7 @@
                 <a:ea typeface="Courier New" pitchFamily="34" charset="-122"/>
                 <a:cs typeface="Courier New" pitchFamily="34" charset="-120"/>
               </a:rPr>
-              <a:t>  7e6f8195304f5",</a:t>
+              <a:t>  88ff4fa215474",</a:t>
             </a:r>
             <a:endParaRPr lang="en-US" sz="1000" dirty="0"/>
           </a:p>
@@ -26451,7 +26621,7 @@
                 <a:ea typeface="Courier New" pitchFamily="34" charset="-122"/>
                 <a:cs typeface="Courier New" pitchFamily="34" charset="-120"/>
               </a:rPr>
-              <a:t>  sdlc 0.11.1, license: community</a:t>
+              <a:t>  sdlc 0.11.2, license: community</a:t>
             </a:r>
             <a:endParaRPr lang="en-US" sz="1000" dirty="0"/>
           </a:p>
@@ -32809,6 +32979,108 @@
                 <a:cs typeface="Courier New" pitchFamily="34" charset="-120"/>
               </a:rPr>
               <a:t>  product-owner (adecb64c45af)</a:t>
+            </a:r>
+            <a:endParaRPr lang="en-US" sz="1000" dirty="0"/>
+          </a:p>
+          <a:p>
+            <a:pPr indent="0" marL="0">
+              <a:buNone/>
+            </a:pPr>
+            <a:r>
+              <a:rPr lang="en-US" sz="1000" dirty="0">
+                <a:solidFill>
+                  <a:srgbClr val="E8EEF2"/>
+                </a:solidFill>
+                <a:latin typeface="Courier New" pitchFamily="34" charset="0"/>
+                <a:ea typeface="Courier New" pitchFamily="34" charset="-122"/>
+                <a:cs typeface="Courier New" pitchFamily="34" charset="-120"/>
+              </a:rPr>
+              <a:t>Suggested commit message (its trailer ties</a:t>
+            </a:r>
+            <a:endParaRPr lang="en-US" sz="1000" dirty="0"/>
+          </a:p>
+          <a:p>
+            <a:pPr indent="0" marL="0">
+              <a:buNone/>
+            </a:pPr>
+            <a:r>
+              <a:rPr lang="en-US" sz="1000" dirty="0">
+                <a:solidFill>
+                  <a:srgbClr val="E8EEF2"/>
+                </a:solidFill>
+                <a:latin typeface="Courier New" pitchFamily="34" charset="0"/>
+                <a:ea typeface="Courier New" pitchFamily="34" charset="-122"/>
+                <a:cs typeface="Courier New" pitchFamily="34" charset="-120"/>
+              </a:rPr>
+              <a:t>  the commit to this approval):</a:t>
+            </a:r>
+            <a:endParaRPr lang="en-US" sz="1000" dirty="0"/>
+          </a:p>
+          <a:p>
+            <a:pPr indent="0" marL="0">
+              <a:buNone/>
+            </a:pPr>
+            <a:r>
+              <a:rPr lang="en-US" sz="1000" dirty="0">
+                <a:solidFill>
+                  <a:srgbClr val="E8EEF2"/>
+                </a:solidFill>
+                <a:latin typeface="Courier New" pitchFamily="34" charset="0"/>
+                <a:ea typeface="Courier New" pitchFamily="34" charset="-122"/>
+                <a:cs typeface="Courier New" pitchFamily="34" charset="-120"/>
+              </a:rPr>
+              <a:t>  $ git commit -m "chore(basic-arithmetic):</a:t>
+            </a:r>
+            <a:endParaRPr lang="en-US" sz="1000" dirty="0"/>
+          </a:p>
+          <a:p>
+            <a:pPr indent="0" marL="0">
+              <a:buNone/>
+            </a:pPr>
+            <a:r>
+              <a:rPr lang="en-US" sz="1000" dirty="0">
+                <a:solidFill>
+                  <a:srgbClr val="E8EEF2"/>
+                </a:solidFill>
+                <a:latin typeface="Courier New" pitchFamily="34" charset="0"/>
+                <a:ea typeface="Courier New" pitchFamily="34" charset="-122"/>
+                <a:cs typeface="Courier New" pitchFamily="34" charset="-120"/>
+              </a:rPr>
+              <a:t>  approve the intent gate" -m</a:t>
+            </a:r>
+            <a:endParaRPr lang="en-US" sz="1000" dirty="0"/>
+          </a:p>
+          <a:p>
+            <a:pPr indent="0" marL="0">
+              <a:buNone/>
+            </a:pPr>
+            <a:r>
+              <a:rPr lang="en-US" sz="1000" dirty="0">
+                <a:solidFill>
+                  <a:srgbClr val="E8EEF2"/>
+                </a:solidFill>
+                <a:latin typeface="Courier New" pitchFamily="34" charset="0"/>
+                <a:ea typeface="Courier New" pitchFamily="34" charset="-122"/>
+                <a:cs typeface="Courier New" pitchFamily="34" charset="-120"/>
+              </a:rPr>
+              <a:t>  "SDLC-Approval: basic-arithmetic:intent:a</a:t>
+            </a:r>
+            <a:endParaRPr lang="en-US" sz="1000" dirty="0"/>
+          </a:p>
+          <a:p>
+            <a:pPr indent="0" marL="0">
+              <a:buNone/>
+            </a:pPr>
+            <a:r>
+              <a:rPr lang="en-US" sz="1000" dirty="0">
+                <a:solidFill>
+                  <a:srgbClr val="E8EEF2"/>
+                </a:solidFill>
+                <a:latin typeface="Courier New" pitchFamily="34" charset="0"/>
+                <a:ea typeface="Courier New" pitchFamily="34" charset="-122"/>
+                <a:cs typeface="Courier New" pitchFamily="34" charset="-120"/>
+              </a:rPr>
+              <a:t>  decb64c45af"</a:t>
             </a:r>
             <a:endParaRPr lang="en-US" sz="1000" dirty="0"/>
           </a:p>

--- a/docs/demo/sdlc-calculator-demo.en.pptx
+++ b/docs/demo/sdlc-calculator-demo.en.pptx
@@ -5111,7 +5111,7 @@
                 <a:ea typeface="Courier New" pitchFamily="34" charset="-122"/>
                 <a:cs typeface="Courier New" pitchFamily="34" charset="-120"/>
               </a:rPr>
-              <a:t>✓ test (1.0s)</a:t>
+              <a:t>✓ test (1.1s)</a:t>
             </a:r>
             <a:endParaRPr lang="en-US" sz="1000" dirty="0"/>
           </a:p>
@@ -6659,7 +6659,7 @@
                 <a:ea typeface="Courier New" pitchFamily="34" charset="-122"/>
                 <a:cs typeface="Courier New" pitchFamily="34" charset="-120"/>
               </a:rPr>
-              <a:t>  code-owner (63fa1476507a)</a:t>
+              <a:t>  code-owner (9076b412ed5f)</a:t>
             </a:r>
             <a:endParaRPr lang="en-US" sz="1000" dirty="0"/>
           </a:p>
@@ -6744,7 +6744,7 @@
                 <a:ea typeface="Courier New" pitchFamily="34" charset="-122"/>
                 <a:cs typeface="Courier New" pitchFamily="34" charset="-120"/>
               </a:rPr>
-              <a:t>  "SDLC-Approval: basic-arithmetic:review:6</a:t>
+              <a:t>  "SDLC-Approval: basic-arithmetic:review:9</a:t>
             </a:r>
             <a:endParaRPr lang="en-US" sz="1000" dirty="0"/>
           </a:p>
@@ -6761,7 +6761,7 @@
                 <a:ea typeface="Courier New" pitchFamily="34" charset="-122"/>
                 <a:cs typeface="Courier New" pitchFamily="34" charset="-120"/>
               </a:rPr>
-              <a:t>  3fa1476507a"</a:t>
+              <a:t>  076b412ed5f"</a:t>
             </a:r>
             <a:endParaRPr lang="en-US" sz="1000" dirty="0"/>
           </a:p>
@@ -7442,7 +7442,7 @@
                 <a:ea typeface="Courier New" pitchFamily="34" charset="-122"/>
                 <a:cs typeface="Courier New" pitchFamily="34" charset="-120"/>
               </a:rPr>
-              <a:t>  release-manager (63fa1476507a)</a:t>
+              <a:t>  release-manager (9076b412ed5f)</a:t>
             </a:r>
             <a:endParaRPr lang="en-US" sz="1000" dirty="0"/>
           </a:p>
@@ -7510,7 +7510,7 @@
                 <a:ea typeface="Courier New" pitchFamily="34" charset="-122"/>
                 <a:cs typeface="Courier New" pitchFamily="34" charset="-120"/>
               </a:rPr>
-              <a:t>  gate" -m "SDLC-Approval: basic-arithmetic:release:63fa1476507a"</a:t>
+              <a:t>  gate" -m "SDLC-Approval: basic-arithmetic:release:9076b412ed5f"</a:t>
             </a:r>
             <a:endParaRPr lang="en-US" sz="1000" dirty="0"/>
           </a:p>
@@ -7810,7 +7810,7 @@
                 <a:ea typeface="Courier New" pitchFamily="34" charset="-122"/>
                 <a:cs typeface="Courier New" pitchFamily="34" charset="-120"/>
               </a:rPr>
-              <a:t>✓ basic-arithmetic/intent alice valid 8b57f270</a:t>
+              <a:t>✓ basic-arithmetic/intent alice valid 499aba3a</a:t>
             </a:r>
             <a:endParaRPr lang="en-US" sz="1000" dirty="0"/>
           </a:p>
@@ -7827,7 +7827,7 @@
                 <a:ea typeface="Courier New" pitchFamily="34" charset="-122"/>
                 <a:cs typeface="Courier New" pitchFamily="34" charset="-120"/>
               </a:rPr>
-              <a:t>✓ basic-arithmetic/spec alice valid bbac70c5</a:t>
+              <a:t>✓ basic-arithmetic/spec alice valid 9f136f61</a:t>
             </a:r>
             <a:endParaRPr lang="en-US" sz="1000" dirty="0"/>
           </a:p>
@@ -7844,7 +7844,7 @@
                 <a:ea typeface="Courier New" pitchFamily="34" charset="-122"/>
                 <a:cs typeface="Courier New" pitchFamily="34" charset="-120"/>
               </a:rPr>
-              <a:t>✗ basic-arithmetic/plan bob wrong-signer bbac70c5</a:t>
+              <a:t>✗ basic-arithmetic/plan bob wrong-signer 9f136f61</a:t>
             </a:r>
             <a:endParaRPr lang="en-US" sz="1000" dirty="0"/>
           </a:p>
@@ -7861,7 +7861,7 @@
                 <a:ea typeface="Courier New" pitchFamily="34" charset="-122"/>
                 <a:cs typeface="Courier New" pitchFamily="34" charset="-120"/>
               </a:rPr>
-              <a:t>✓ basic-arithmetic/review carol valid 28e1b97c</a:t>
+              <a:t>✓ basic-arithmetic/review carol valid 11654342</a:t>
             </a:r>
             <a:endParaRPr lang="en-US" sz="1000" dirty="0"/>
           </a:p>
@@ -7878,7 +7878,7 @@
                 <a:ea typeface="Courier New" pitchFamily="34" charset="-122"/>
                 <a:cs typeface="Courier New" pitchFamily="34" charset="-120"/>
               </a:rPr>
-              <a:t>✓ basic-arithmetic/release alice valid 5984042e</a:t>
+              <a:t>✓ basic-arithmetic/release alice valid e3ee45aa</a:t>
             </a:r>
             <a:endParaRPr lang="en-US" sz="1000" dirty="0"/>
           </a:p>
@@ -7895,7 +7895,7 @@
                 <a:ea typeface="Courier New" pitchFamily="34" charset="-122"/>
                 <a:cs typeface="Courier New" pitchFamily="34" charset="-120"/>
               </a:rPr>
-              <a:t>✓ openspec/roles.yaml alice@calc.example valid aacbfe84</a:t>
+              <a:t>✓ openspec/roles.yaml alice@calc.example valid 7de00b00</a:t>
             </a:r>
             <a:endParaRPr lang="en-US" sz="1000" dirty="0"/>
           </a:p>
@@ -14315,7 +14315,7 @@
                 <a:ea typeface="Courier New" pitchFamily="34" charset="-122"/>
                 <a:cs typeface="Courier New" pitchFamily="34" charset="-120"/>
               </a:rPr>
-              <a:t>  archived) · sdlc 0.11.2, license:</a:t>
+              <a:t>  archived) · sdlc 0.11.3, license:</a:t>
             </a:r>
             <a:endParaRPr lang="en-US" sz="1000" dirty="0"/>
           </a:p>
@@ -14468,7 +14468,7 @@
                 <a:ea typeface="Courier New" pitchFamily="34" charset="-122"/>
                 <a:cs typeface="Courier New" pitchFamily="34" charset="-120"/>
               </a:rPr>
-              <a:t>  intent 3 · plan 9 · review 3; rework</a:t>
+              <a:t>  intent 3 · plan 11 · review 3; rework</a:t>
             </a:r>
             <a:endParaRPr lang="en-US" sz="1000" dirty="0"/>
           </a:p>
@@ -14502,7 +14502,7 @@
                 <a:ea typeface="Courier New" pitchFamily="34" charset="-122"/>
                 <a:cs typeface="Courier New" pitchFamily="34" charset="-120"/>
               </a:rPr>
-              <a:t>  recorded with sdlc 0.11.2; licenses:</a:t>
+              <a:t>  recorded with sdlc 0.11.3; licenses:</a:t>
             </a:r>
             <a:endParaRPr lang="en-US" sz="1000" dirty="0"/>
           </a:p>
@@ -14819,7 +14819,7 @@
                 <a:ea typeface="Courier New" pitchFamily="34" charset="-122"/>
                 <a:cs typeface="Courier New" pitchFamily="34" charset="-120"/>
               </a:rPr>
-              <a:t>2026-10-08T10:02:08.056Z  gate.review.await</a:t>
+              <a:t>2026-10-08T13:14:35.061Z  gate.review.await</a:t>
             </a:r>
             <a:endParaRPr lang="en-US" sz="1000" dirty="0"/>
           </a:p>
@@ -14853,7 +14853,7 @@
                 <a:ea typeface="Courier New" pitchFamily="34" charset="-122"/>
                 <a:cs typeface="Courier New" pitchFamily="34" charset="-120"/>
               </a:rPr>
-              <a:t>  sha256:63fa1476507a4a7202559bef4ebd9b85c6</a:t>
+              <a:t>  sha256:9076b412ed5f48c24cb1195f9663b86094</a:t>
             </a:r>
             <a:endParaRPr lang="en-US" sz="1000" dirty="0"/>
           </a:p>
@@ -14870,7 +14870,7 @@
                 <a:ea typeface="Courier New" pitchFamily="34" charset="-122"/>
                 <a:cs typeface="Courier New" pitchFamily="34" charset="-120"/>
               </a:rPr>
-              <a:t>  b4bdd8d9402d0a34161a5f6c87a8cc [sdlc</a:t>
+              <a:t>  193bc915f050edbdd8b0ff106d1a6f [sdlc</a:t>
             </a:r>
             <a:endParaRPr lang="en-US" sz="1000" dirty="0"/>
           </a:p>
@@ -14887,7 +14887,7 @@
                 <a:ea typeface="Courier New" pitchFamily="34" charset="-122"/>
                 <a:cs typeface="Courier New" pitchFamily="34" charset="-120"/>
               </a:rPr>
-              <a:t>  0.11.2 · community]</a:t>
+              <a:t>  0.11.3 · community]</a:t>
             </a:r>
             <a:endParaRPr lang="en-US" sz="1000" dirty="0"/>
           </a:p>
@@ -14904,7 +14904,7 @@
                 <a:ea typeface="Courier New" pitchFamily="34" charset="-122"/>
                 <a:cs typeface="Courier New" pitchFamily="34" charset="-120"/>
               </a:rPr>
-              <a:t>2026-10-08T10:02:11.047Z  gate.review.appro</a:t>
+              <a:t>2026-10-08T13:14:37.903Z  gate.review.appro</a:t>
             </a:r>
             <a:endParaRPr lang="en-US" sz="1000" dirty="0"/>
           </a:p>
@@ -14955,7 +14955,7 @@
                 <a:ea typeface="Courier New" pitchFamily="34" charset="-122"/>
                 <a:cs typeface="Courier New" pitchFamily="34" charset="-120"/>
               </a:rPr>
-              <a:t>  [sdlc 0.11.2 · community]</a:t>
+              <a:t>  [sdlc 0.11.3 · community]</a:t>
             </a:r>
             <a:endParaRPr lang="en-US" sz="1000" dirty="0"/>
           </a:p>
@@ -14972,7 +14972,7 @@
                 <a:ea typeface="Courier New" pitchFamily="34" charset="-122"/>
                 <a:cs typeface="Courier New" pitchFamily="34" charset="-120"/>
               </a:rPr>
-              <a:t>2026-10-08T10:02:15.526Z  gate.release.appr</a:t>
+              <a:t>2026-10-08T13:14:42.699Z  gate.release.appr</a:t>
             </a:r>
             <a:endParaRPr lang="en-US" sz="1000" dirty="0"/>
           </a:p>
@@ -15023,7 +15023,7 @@
                 <a:ea typeface="Courier New" pitchFamily="34" charset="-122"/>
                 <a:cs typeface="Courier New" pitchFamily="34" charset="-120"/>
               </a:rPr>
-              <a:t>  release-manager [sdlc 0.11.2 · community]</a:t>
+              <a:t>  release-manager [sdlc 0.11.3 · community]</a:t>
             </a:r>
             <a:endParaRPr lang="en-US" sz="1000" dirty="0"/>
           </a:p>
@@ -16653,7 +16653,7 @@
                 <a:ea typeface="Courier New" pitchFamily="34" charset="-122"/>
                 <a:cs typeface="Courier New" pitchFamily="34" charset="-120"/>
               </a:rPr>
-              <a:t>      "id": "20261008T100255976Z-ci-green-b</a:t>
+              <a:t>      "id": "20261008T131524739Z-ci-green-a</a:t>
             </a:r>
             <a:endParaRPr lang="en-US" sz="1000" dirty="0"/>
           </a:p>
@@ -16670,7 +16670,7 @@
                 <a:ea typeface="Courier New" pitchFamily="34" charset="-122"/>
                 <a:cs typeface="Courier New" pitchFamily="34" charset="-120"/>
               </a:rPr>
-              <a:t>  ff50e",</a:t>
+              <a:t>  1b7a6",</a:t>
             </a:r>
             <a:endParaRPr lang="en-US" sz="1000" dirty="0"/>
           </a:p>
@@ -16806,7 +16806,7 @@
                 <a:ea typeface="Courier New" pitchFamily="34" charset="-122"/>
                 <a:cs typeface="Courier New" pitchFamily="34" charset="-120"/>
               </a:rPr>
-              <a:t>        "ref": "d0b1c1b167d17c19e2886e4a42d</a:t>
+              <a:t>        "ref": "5bbdd1a1d36a97ead88231bb2a1</a:t>
             </a:r>
             <a:endParaRPr lang="en-US" sz="1000" dirty="0"/>
           </a:p>
@@ -16823,7 +16823,7 @@
                 <a:ea typeface="Courier New" pitchFamily="34" charset="-122"/>
                 <a:cs typeface="Courier New" pitchFamily="34" charset="-120"/>
               </a:rPr>
-              <a:t>  88ff4fa215474",</a:t>
+              <a:t>  e26a072e096e9",</a:t>
             </a:r>
             <a:endParaRPr lang="en-US" sz="1000" dirty="0"/>
           </a:p>
@@ -19199,7 +19199,7 @@
                 <a:ea typeface="Cambria" pitchFamily="34" charset="-122"/>
                 <a:cs typeface="Cambria" pitchFamily="34" charset="-120"/>
               </a:rPr>
-              <a:t>99</a:t>
+              <a:t>101</a:t>
             </a:r>
             <a:endParaRPr lang="en-US" sz="6000" dirty="0"/>
           </a:p>
@@ -19304,7 +19304,7 @@
                 <a:ea typeface="Cambria" pitchFamily="34" charset="-122"/>
                 <a:cs typeface="Cambria" pitchFamily="34" charset="-120"/>
               </a:rPr>
-              <a:t>67</a:t>
+              <a:t>69</a:t>
             </a:r>
             <a:endParaRPr lang="en-US" sz="6000" dirty="0"/>
           </a:p>
@@ -19343,7 +19343,7 @@
                 <a:ea typeface="Calibri" pitchFamily="34" charset="-122"/>
                 <a:cs typeface="Calibri" pitchFamily="34" charset="-120"/>
               </a:rPr>
-              <a:t>of 67 commands</a:t>
+              <a:t>of 69 commands</a:t>
             </a:r>
             <a:endParaRPr lang="en-US" sz="1600" dirty="0"/>
           </a:p>
@@ -21680,7 +21680,7 @@
         <p:spPr>
           <a:xfrm>
             <a:off x="457200" y="4791456"/>
-            <a:ext cx="483616" cy="256032"/>
+            <a:ext cx="681736" cy="256032"/>
           </a:xfrm>
           <a:prstGeom prst="roundRect">
             <a:avLst>
@@ -21707,7 +21707,7 @@
         <p:spPr>
           <a:xfrm>
             <a:off x="457200" y="4791456"/>
-            <a:ext cx="483616" cy="256032"/>
+            <a:ext cx="681736" cy="256032"/>
           </a:xfrm>
           <a:prstGeom prst="rect">
             <a:avLst/>
@@ -21731,7 +21731,7 @@
                 <a:ea typeface="Calibri" pitchFamily="34" charset="-122"/>
                 <a:cs typeface="Calibri" pitchFamily="34" charset="-120"/>
               </a:rPr>
-              <a:t>help</a:t>
+              <a:t>explain</a:t>
             </a:r>
             <a:endParaRPr lang="en-US" sz="1000" dirty="0"/>
           </a:p>
@@ -21745,8 +21745,8 @@
         </p:nvSpPr>
         <p:spPr>
           <a:xfrm>
-            <a:off x="1032256" y="4791456"/>
-            <a:ext cx="549656" cy="256032"/>
+            <a:off x="1230376" y="4791456"/>
+            <a:ext cx="483616" cy="256032"/>
           </a:xfrm>
           <a:prstGeom prst="roundRect">
             <a:avLst>
@@ -21772,8 +21772,8 @@
         </p:nvSpPr>
         <p:spPr>
           <a:xfrm>
-            <a:off x="1032256" y="4791456"/>
-            <a:ext cx="549656" cy="256032"/>
+            <a:off x="1230376" y="4791456"/>
+            <a:ext cx="483616" cy="256032"/>
           </a:xfrm>
           <a:prstGeom prst="rect">
             <a:avLst/>
@@ -21797,7 +21797,7 @@
                 <a:ea typeface="Calibri" pitchFamily="34" charset="-122"/>
                 <a:cs typeface="Calibri" pitchFamily="34" charset="-120"/>
               </a:rPr>
-              <a:t>guide</a:t>
+              <a:t>help</a:t>
             </a:r>
             <a:endParaRPr lang="en-US" sz="1000" dirty="0"/>
           </a:p>
@@ -21811,8 +21811,8 @@
         </p:nvSpPr>
         <p:spPr>
           <a:xfrm>
-            <a:off x="1673352" y="4791456"/>
-            <a:ext cx="879856" cy="256032"/>
+            <a:off x="1805432" y="4791456"/>
+            <a:ext cx="549656" cy="256032"/>
           </a:xfrm>
           <a:prstGeom prst="roundRect">
             <a:avLst>
@@ -21838,8 +21838,8 @@
         </p:nvSpPr>
         <p:spPr>
           <a:xfrm>
-            <a:off x="1673352" y="4791456"/>
-            <a:ext cx="879856" cy="256032"/>
+            <a:off x="1805432" y="4791456"/>
+            <a:ext cx="549656" cy="256032"/>
           </a:xfrm>
           <a:prstGeom prst="rect">
             <a:avLst/>
@@ -21863,7 +21863,7 @@
                 <a:ea typeface="Calibri" pitchFamily="34" charset="-122"/>
                 <a:cs typeface="Calibri" pitchFamily="34" charset="-120"/>
               </a:rPr>
-              <a:t>statusline</a:t>
+              <a:t>guide</a:t>
             </a:r>
             <a:endParaRPr lang="en-US" sz="1000" dirty="0"/>
           </a:p>
@@ -21877,8 +21877,8 @@
         </p:nvSpPr>
         <p:spPr>
           <a:xfrm>
-            <a:off x="2644648" y="4791456"/>
-            <a:ext cx="813816" cy="256032"/>
+            <a:off x="2446528" y="4791456"/>
+            <a:ext cx="879856" cy="256032"/>
           </a:xfrm>
           <a:prstGeom prst="roundRect">
             <a:avLst>
@@ -21904,8 +21904,8 @@
         </p:nvSpPr>
         <p:spPr>
           <a:xfrm>
-            <a:off x="2644648" y="4791456"/>
-            <a:ext cx="813816" cy="256032"/>
+            <a:off x="2446528" y="4791456"/>
+            <a:ext cx="879856" cy="256032"/>
           </a:xfrm>
           <a:prstGeom prst="rect">
             <a:avLst/>
@@ -21929,7 +21929,7 @@
                 <a:ea typeface="Calibri" pitchFamily="34" charset="-122"/>
                 <a:cs typeface="Calibri" pitchFamily="34" charset="-120"/>
               </a:rPr>
-              <a:t>mcp serve</a:t>
+              <a:t>statusline</a:t>
             </a:r>
             <a:endParaRPr lang="en-US" sz="1000" dirty="0"/>
           </a:p>
@@ -21943,7 +21943,7 @@
         </p:nvSpPr>
         <p:spPr>
           <a:xfrm>
-            <a:off x="3549904" y="4791456"/>
+            <a:off x="3417824" y="4791456"/>
             <a:ext cx="813816" cy="256032"/>
           </a:xfrm>
           <a:prstGeom prst="roundRect">
@@ -21970,7 +21970,7 @@
         </p:nvSpPr>
         <p:spPr>
           <a:xfrm>
-            <a:off x="3549904" y="4791456"/>
+            <a:off x="3417824" y="4791456"/>
             <a:ext cx="813816" cy="256032"/>
           </a:xfrm>
           <a:prstGeom prst="rect">
@@ -21995,7 +21995,7 @@
                 <a:ea typeface="Calibri" pitchFamily="34" charset="-122"/>
                 <a:cs typeface="Calibri" pitchFamily="34" charset="-120"/>
               </a:rPr>
-              <a:t>mcp check</a:t>
+              <a:t>mcp serve</a:t>
             </a:r>
             <a:endParaRPr lang="en-US" sz="1000" dirty="0"/>
           </a:p>
@@ -22009,8 +22009,8 @@
         </p:nvSpPr>
         <p:spPr>
           <a:xfrm>
-            <a:off x="4455160" y="4791456"/>
-            <a:ext cx="879856" cy="256032"/>
+            <a:off x="4323080" y="4791456"/>
+            <a:ext cx="813816" cy="256032"/>
           </a:xfrm>
           <a:prstGeom prst="roundRect">
             <a:avLst>
@@ -22036,8 +22036,8 @@
         </p:nvSpPr>
         <p:spPr>
           <a:xfrm>
-            <a:off x="4455160" y="4791456"/>
-            <a:ext cx="879856" cy="256032"/>
+            <a:off x="4323080" y="4791456"/>
+            <a:ext cx="813816" cy="256032"/>
           </a:xfrm>
           <a:prstGeom prst="rect">
             <a:avLst/>
@@ -22061,7 +22061,7 @@
                 <a:ea typeface="Calibri" pitchFamily="34" charset="-122"/>
                 <a:cs typeface="Calibri" pitchFamily="34" charset="-120"/>
               </a:rPr>
-              <a:t>inbox list</a:t>
+              <a:t>mcp check</a:t>
             </a:r>
             <a:endParaRPr lang="en-US" sz="1000" dirty="0"/>
           </a:p>
@@ -22075,7 +22075,7 @@
         </p:nvSpPr>
         <p:spPr>
           <a:xfrm>
-            <a:off x="5426456" y="4791456"/>
+            <a:off x="5228336" y="4791456"/>
             <a:ext cx="879856" cy="256032"/>
           </a:xfrm>
           <a:prstGeom prst="roundRect">
@@ -22102,7 +22102,7 @@
         </p:nvSpPr>
         <p:spPr>
           <a:xfrm>
-            <a:off x="5426456" y="4791456"/>
+            <a:off x="5228336" y="4791456"/>
             <a:ext cx="879856" cy="256032"/>
           </a:xfrm>
           <a:prstGeom prst="rect">
@@ -22127,7 +22127,7 @@
                 <a:ea typeface="Calibri" pitchFamily="34" charset="-122"/>
                 <a:cs typeface="Calibri" pitchFamily="34" charset="-120"/>
               </a:rPr>
-              <a:t>inbox done</a:t>
+              <a:t>inbox list</a:t>
             </a:r>
             <a:endParaRPr lang="en-US" sz="1000" dirty="0"/>
           </a:p>
@@ -22141,8 +22141,8 @@
         </p:nvSpPr>
         <p:spPr>
           <a:xfrm>
-            <a:off x="6397752" y="4791456"/>
-            <a:ext cx="945896" cy="256032"/>
+            <a:off x="6199632" y="4791456"/>
+            <a:ext cx="879856" cy="256032"/>
           </a:xfrm>
           <a:prstGeom prst="roundRect">
             <a:avLst>
@@ -22168,8 +22168,8 @@
         </p:nvSpPr>
         <p:spPr>
           <a:xfrm>
-            <a:off x="6397752" y="4791456"/>
-            <a:ext cx="945896" cy="256032"/>
+            <a:off x="6199632" y="4791456"/>
+            <a:ext cx="879856" cy="256032"/>
           </a:xfrm>
           <a:prstGeom prst="rect">
             <a:avLst/>
@@ -22193,7 +22193,7 @@
                 <a:ea typeface="Calibri" pitchFamily="34" charset="-122"/>
                 <a:cs typeface="Calibri" pitchFamily="34" charset="-120"/>
               </a:rPr>
-              <a:t>events list</a:t>
+              <a:t>inbox done</a:t>
             </a:r>
             <a:endParaRPr lang="en-US" sz="1000" dirty="0"/>
           </a:p>
@@ -22207,8 +22207,8 @@
         </p:nvSpPr>
         <p:spPr>
           <a:xfrm>
-            <a:off x="7435088" y="4791456"/>
-            <a:ext cx="1011936" cy="256032"/>
+            <a:off x="7170928" y="4791456"/>
+            <a:ext cx="945896" cy="256032"/>
           </a:xfrm>
           <a:prstGeom prst="roundRect">
             <a:avLst>
@@ -22234,8 +22234,8 @@
         </p:nvSpPr>
         <p:spPr>
           <a:xfrm>
-            <a:off x="7435088" y="4791456"/>
-            <a:ext cx="1011936" cy="256032"/>
+            <a:off x="7170928" y="4791456"/>
+            <a:ext cx="945896" cy="256032"/>
           </a:xfrm>
           <a:prstGeom prst="rect">
             <a:avLst/>
@@ -22259,7 +22259,7 @@
                 <a:ea typeface="Calibri" pitchFamily="34" charset="-122"/>
                 <a:cs typeface="Calibri" pitchFamily="34" charset="-120"/>
               </a:rPr>
-              <a:t>events flush</a:t>
+              <a:t>events list</a:t>
             </a:r>
             <a:endParaRPr lang="en-US" sz="1000" dirty="0"/>
           </a:p>
@@ -22273,8 +22273,8 @@
         </p:nvSpPr>
         <p:spPr>
           <a:xfrm>
-            <a:off x="8538464" y="4791456"/>
-            <a:ext cx="1077976" cy="256032"/>
+            <a:off x="8208264" y="4791456"/>
+            <a:ext cx="1011936" cy="256032"/>
           </a:xfrm>
           <a:prstGeom prst="roundRect">
             <a:avLst>
@@ -22300,8 +22300,8 @@
         </p:nvSpPr>
         <p:spPr>
           <a:xfrm>
-            <a:off x="8538464" y="4791456"/>
-            <a:ext cx="1077976" cy="256032"/>
+            <a:off x="8208264" y="4791456"/>
+            <a:ext cx="1011936" cy="256032"/>
           </a:xfrm>
           <a:prstGeom prst="rect">
             <a:avLst/>
@@ -22325,7 +22325,7 @@
                 <a:ea typeface="Calibri" pitchFamily="34" charset="-122"/>
                 <a:cs typeface="Calibri" pitchFamily="34" charset="-120"/>
               </a:rPr>
-              <a:t>release check</a:t>
+              <a:t>events flush</a:t>
             </a:r>
             <a:endParaRPr lang="en-US" sz="1000" dirty="0"/>
           </a:p>
@@ -22339,8 +22339,8 @@
         </p:nvSpPr>
         <p:spPr>
           <a:xfrm>
-            <a:off x="9707880" y="4791456"/>
-            <a:ext cx="813816" cy="256032"/>
+            <a:off x="9311640" y="4791456"/>
+            <a:ext cx="1077976" cy="256032"/>
           </a:xfrm>
           <a:prstGeom prst="roundRect">
             <a:avLst>
@@ -22366,8 +22366,8 @@
         </p:nvSpPr>
         <p:spPr>
           <a:xfrm>
-            <a:off x="9707880" y="4791456"/>
-            <a:ext cx="813816" cy="256032"/>
+            <a:off x="9311640" y="4791456"/>
+            <a:ext cx="1077976" cy="256032"/>
           </a:xfrm>
           <a:prstGeom prst="rect">
             <a:avLst/>
@@ -22391,7 +22391,7 @@
                 <a:ea typeface="Calibri" pitchFamily="34" charset="-122"/>
                 <a:cs typeface="Calibri" pitchFamily="34" charset="-120"/>
               </a:rPr>
-              <a:t>track set</a:t>
+              <a:t>release check</a:t>
             </a:r>
             <a:endParaRPr lang="en-US" sz="1000" dirty="0"/>
           </a:p>
@@ -22405,8 +22405,8 @@
         </p:nvSpPr>
         <p:spPr>
           <a:xfrm>
-            <a:off x="10613136" y="4791456"/>
-            <a:ext cx="483616" cy="256032"/>
+            <a:off x="10481056" y="4791456"/>
+            <a:ext cx="813816" cy="256032"/>
           </a:xfrm>
           <a:prstGeom prst="roundRect">
             <a:avLst>
@@ -22432,8 +22432,8 @@
         </p:nvSpPr>
         <p:spPr>
           <a:xfrm>
-            <a:off x="10613136" y="4791456"/>
-            <a:ext cx="483616" cy="256032"/>
+            <a:off x="10481056" y="4791456"/>
+            <a:ext cx="813816" cy="256032"/>
           </a:xfrm>
           <a:prstGeom prst="rect">
             <a:avLst/>
@@ -22457,7 +22457,7 @@
                 <a:ea typeface="Calibri" pitchFamily="34" charset="-122"/>
                 <a:cs typeface="Calibri" pitchFamily="34" charset="-120"/>
               </a:rPr>
-              <a:t>next</a:t>
+              <a:t>track set</a:t>
             </a:r>
             <a:endParaRPr lang="en-US" sz="1000" dirty="0"/>
           </a:p>
@@ -22472,7 +22472,7 @@
         <p:spPr>
           <a:xfrm>
             <a:off x="457200" y="5138928"/>
-            <a:ext cx="1011936" cy="256032"/>
+            <a:ext cx="483616" cy="256032"/>
           </a:xfrm>
           <a:prstGeom prst="roundRect">
             <a:avLst>
@@ -22499,7 +22499,7 @@
         <p:spPr>
           <a:xfrm>
             <a:off x="457200" y="5138928"/>
-            <a:ext cx="1011936" cy="256032"/>
+            <a:ext cx="483616" cy="256032"/>
           </a:xfrm>
           <a:prstGeom prst="rect">
             <a:avLst/>
@@ -22523,7 +22523,7 @@
                 <a:ea typeface="Calibri" pitchFamily="34" charset="-122"/>
                 <a:cs typeface="Calibri" pitchFamily="34" charset="-120"/>
               </a:rPr>
-              <a:t>instructions</a:t>
+              <a:t>next</a:t>
             </a:r>
             <a:endParaRPr lang="en-US" sz="1000" dirty="0"/>
           </a:p>
@@ -22537,8 +22537,8 @@
         </p:nvSpPr>
         <p:spPr>
           <a:xfrm>
-            <a:off x="1560576" y="5138928"/>
-            <a:ext cx="681736" cy="256032"/>
+            <a:off x="1032256" y="5138928"/>
+            <a:ext cx="1011936" cy="256032"/>
           </a:xfrm>
           <a:prstGeom prst="roundRect">
             <a:avLst>
@@ -22564,8 +22564,8 @@
         </p:nvSpPr>
         <p:spPr>
           <a:xfrm>
-            <a:off x="1560576" y="5138928"/>
-            <a:ext cx="681736" cy="256032"/>
+            <a:off x="1032256" y="5138928"/>
+            <a:ext cx="1011936" cy="256032"/>
           </a:xfrm>
           <a:prstGeom prst="rect">
             <a:avLst/>
@@ -22589,7 +22589,7 @@
                 <a:ea typeface="Calibri" pitchFamily="34" charset="-122"/>
                 <a:cs typeface="Calibri" pitchFamily="34" charset="-120"/>
               </a:rPr>
-              <a:t>approve</a:t>
+              <a:t>instructions</a:t>
             </a:r>
             <a:endParaRPr lang="en-US" sz="1000" dirty="0"/>
           </a:p>
@@ -22603,8 +22603,8 @@
         </p:nvSpPr>
         <p:spPr>
           <a:xfrm>
-            <a:off x="2333752" y="5138928"/>
-            <a:ext cx="615696" cy="256032"/>
+            <a:off x="2135632" y="5138928"/>
+            <a:ext cx="681736" cy="256032"/>
           </a:xfrm>
           <a:prstGeom prst="roundRect">
             <a:avLst>
@@ -22630,8 +22630,8 @@
         </p:nvSpPr>
         <p:spPr>
           <a:xfrm>
-            <a:off x="2333752" y="5138928"/>
-            <a:ext cx="615696" cy="256032"/>
+            <a:off x="2135632" y="5138928"/>
+            <a:ext cx="681736" cy="256032"/>
           </a:xfrm>
           <a:prstGeom prst="rect">
             <a:avLst/>
@@ -22655,7 +22655,7 @@
                 <a:ea typeface="Calibri" pitchFamily="34" charset="-122"/>
                 <a:cs typeface="Calibri" pitchFamily="34" charset="-120"/>
               </a:rPr>
-              <a:t>reject</a:t>
+              <a:t>approve</a:t>
             </a:r>
             <a:endParaRPr lang="en-US" sz="1000" dirty="0"/>
           </a:p>
@@ -22669,8 +22669,8 @@
         </p:nvSpPr>
         <p:spPr>
           <a:xfrm>
-            <a:off x="3040888" y="5138928"/>
-            <a:ext cx="549656" cy="256032"/>
+            <a:off x="2908808" y="5138928"/>
+            <a:ext cx="615696" cy="256032"/>
           </a:xfrm>
           <a:prstGeom prst="roundRect">
             <a:avLst>
@@ -22696,8 +22696,8 @@
         </p:nvSpPr>
         <p:spPr>
           <a:xfrm>
-            <a:off x="3040888" y="5138928"/>
-            <a:ext cx="549656" cy="256032"/>
+            <a:off x="2908808" y="5138928"/>
+            <a:ext cx="615696" cy="256032"/>
           </a:xfrm>
           <a:prstGeom prst="rect">
             <a:avLst/>
@@ -22721,7 +22721,7 @@
                 <a:ea typeface="Calibri" pitchFamily="34" charset="-122"/>
                 <a:cs typeface="Calibri" pitchFamily="34" charset="-120"/>
               </a:rPr>
-              <a:t>waive</a:t>
+              <a:t>reject</a:t>
             </a:r>
             <a:endParaRPr lang="en-US" sz="1000" dirty="0"/>
           </a:p>
@@ -22735,8 +22735,8 @@
         </p:nvSpPr>
         <p:spPr>
           <a:xfrm>
-            <a:off x="3681984" y="5138928"/>
-            <a:ext cx="747776" cy="256032"/>
+            <a:off x="3615944" y="5138928"/>
+            <a:ext cx="549656" cy="256032"/>
           </a:xfrm>
           <a:prstGeom prst="roundRect">
             <a:avLst>
@@ -22762,8 +22762,8 @@
         </p:nvSpPr>
         <p:spPr>
           <a:xfrm>
-            <a:off x="3681984" y="5138928"/>
-            <a:ext cx="747776" cy="256032"/>
+            <a:off x="3615944" y="5138928"/>
+            <a:ext cx="549656" cy="256032"/>
           </a:xfrm>
           <a:prstGeom prst="rect">
             <a:avLst/>
@@ -22787,7 +22787,7 @@
                 <a:ea typeface="Calibri" pitchFamily="34" charset="-122"/>
                 <a:cs typeface="Calibri" pitchFamily="34" charset="-120"/>
               </a:rPr>
-              <a:t>takeover</a:t>
+              <a:t>waive</a:t>
             </a:r>
             <a:endParaRPr lang="en-US" sz="1000" dirty="0"/>
           </a:p>
@@ -22801,8 +22801,8 @@
         </p:nvSpPr>
         <p:spPr>
           <a:xfrm>
-            <a:off x="4521200" y="5138928"/>
-            <a:ext cx="1210056" cy="256032"/>
+            <a:off x="4257040" y="5138928"/>
+            <a:ext cx="747776" cy="256032"/>
           </a:xfrm>
           <a:prstGeom prst="roundRect">
             <a:avLst>
@@ -22828,8 +22828,8 @@
         </p:nvSpPr>
         <p:spPr>
           <a:xfrm>
-            <a:off x="4521200" y="5138928"/>
-            <a:ext cx="1210056" cy="256032"/>
+            <a:off x="4257040" y="5138928"/>
+            <a:ext cx="747776" cy="256032"/>
           </a:xfrm>
           <a:prstGeom prst="rect">
             <a:avLst/>
@@ -22853,7 +22853,7 @@
                 <a:ea typeface="Calibri" pitchFamily="34" charset="-122"/>
                 <a:cs typeface="Calibri" pitchFamily="34" charset="-120"/>
               </a:rPr>
-              <a:t>release-control</a:t>
+              <a:t>takeover</a:t>
             </a:r>
             <a:endParaRPr lang="en-US" sz="1000" dirty="0"/>
           </a:p>
@@ -22867,8 +22867,8 @@
         </p:nvSpPr>
         <p:spPr>
           <a:xfrm>
-            <a:off x="5822696" y="5138928"/>
-            <a:ext cx="615696" cy="256032"/>
+            <a:off x="5096256" y="5138928"/>
+            <a:ext cx="1210056" cy="256032"/>
           </a:xfrm>
           <a:prstGeom prst="roundRect">
             <a:avLst>
@@ -22894,8 +22894,8 @@
         </p:nvSpPr>
         <p:spPr>
           <a:xfrm>
-            <a:off x="5822696" y="5138928"/>
-            <a:ext cx="615696" cy="256032"/>
+            <a:off x="5096256" y="5138928"/>
+            <a:ext cx="1210056" cy="256032"/>
           </a:xfrm>
           <a:prstGeom prst="rect">
             <a:avLst/>
@@ -22919,7 +22919,7 @@
                 <a:ea typeface="Calibri" pitchFamily="34" charset="-122"/>
                 <a:cs typeface="Calibri" pitchFamily="34" charset="-120"/>
               </a:rPr>
-              <a:t>rework</a:t>
+              <a:t>release-control</a:t>
             </a:r>
             <a:endParaRPr lang="en-US" sz="1000" dirty="0"/>
           </a:p>
@@ -22933,8 +22933,8 @@
         </p:nvSpPr>
         <p:spPr>
           <a:xfrm>
-            <a:off x="6529832" y="5138928"/>
-            <a:ext cx="1276096" cy="256032"/>
+            <a:off x="6397752" y="5138928"/>
+            <a:ext cx="615696" cy="256032"/>
           </a:xfrm>
           <a:prstGeom prst="roundRect">
             <a:avLst>
@@ -22960,8 +22960,8 @@
         </p:nvSpPr>
         <p:spPr>
           <a:xfrm>
-            <a:off x="6529832" y="5138928"/>
-            <a:ext cx="1276096" cy="256032"/>
+            <a:off x="6397752" y="5138928"/>
+            <a:ext cx="615696" cy="256032"/>
           </a:xfrm>
           <a:prstGeom prst="rect">
             <a:avLst/>
@@ -22985,7 +22985,7 @@
                 <a:ea typeface="Calibri" pitchFamily="34" charset="-122"/>
                 <a:cs typeface="Calibri" pitchFamily="34" charset="-120"/>
               </a:rPr>
-              <a:t>approvals verify</a:t>
+              <a:t>rework</a:t>
             </a:r>
             <a:endParaRPr lang="en-US" sz="1000" dirty="0"/>
           </a:p>
@@ -22999,8 +22999,8 @@
         </p:nvSpPr>
         <p:spPr>
           <a:xfrm>
-            <a:off x="7897368" y="5138928"/>
-            <a:ext cx="549656" cy="256032"/>
+            <a:off x="7104888" y="5138928"/>
+            <a:ext cx="1276096" cy="256032"/>
           </a:xfrm>
           <a:prstGeom prst="roundRect">
             <a:avLst>
@@ -23026,8 +23026,8 @@
         </p:nvSpPr>
         <p:spPr>
           <a:xfrm>
-            <a:off x="7897368" y="5138928"/>
-            <a:ext cx="549656" cy="256032"/>
+            <a:off x="7104888" y="5138928"/>
+            <a:ext cx="1276096" cy="256032"/>
           </a:xfrm>
           <a:prstGeom prst="rect">
             <a:avLst/>
@@ -23051,7 +23051,7 @@
                 <a:ea typeface="Calibri" pitchFamily="34" charset="-122"/>
                 <a:cs typeface="Calibri" pitchFamily="34" charset="-120"/>
               </a:rPr>
-              <a:t>tests</a:t>
+              <a:t>approvals verify</a:t>
             </a:r>
             <a:endParaRPr lang="en-US" sz="1000" dirty="0"/>
           </a:p>
@@ -23065,8 +23065,8 @@
         </p:nvSpPr>
         <p:spPr>
           <a:xfrm>
-            <a:off x="8538464" y="5138928"/>
-            <a:ext cx="615696" cy="256032"/>
+            <a:off x="8472424" y="5138928"/>
+            <a:ext cx="549656" cy="256032"/>
           </a:xfrm>
           <a:prstGeom prst="roundRect">
             <a:avLst>
@@ -23092,8 +23092,8 @@
         </p:nvSpPr>
         <p:spPr>
           <a:xfrm>
-            <a:off x="8538464" y="5138928"/>
-            <a:ext cx="615696" cy="256032"/>
+            <a:off x="8472424" y="5138928"/>
+            <a:ext cx="549656" cy="256032"/>
           </a:xfrm>
           <a:prstGeom prst="rect">
             <a:avLst/>
@@ -23117,7 +23117,7 @@
                 <a:ea typeface="Calibri" pitchFamily="34" charset="-122"/>
                 <a:cs typeface="Calibri" pitchFamily="34" charset="-120"/>
               </a:rPr>
-              <a:t>verify</a:t>
+              <a:t>tests</a:t>
             </a:r>
             <a:endParaRPr lang="en-US" sz="1000" dirty="0"/>
           </a:p>
@@ -23131,7 +23131,7 @@
         </p:nvSpPr>
         <p:spPr>
           <a:xfrm>
-            <a:off x="9245600" y="5138928"/>
+            <a:off x="9113520" y="5138928"/>
             <a:ext cx="615696" cy="256032"/>
           </a:xfrm>
           <a:prstGeom prst="roundRect">
@@ -23158,7 +23158,7 @@
         </p:nvSpPr>
         <p:spPr>
           <a:xfrm>
-            <a:off x="9245600" y="5138928"/>
+            <a:off x="9113520" y="5138928"/>
             <a:ext cx="615696" cy="256032"/>
           </a:xfrm>
           <a:prstGeom prst="rect">
@@ -23183,7 +23183,7 @@
                 <a:ea typeface="Calibri" pitchFamily="34" charset="-122"/>
                 <a:cs typeface="Calibri" pitchFamily="34" charset="-120"/>
               </a:rPr>
-              <a:t>review</a:t>
+              <a:t>verify</a:t>
             </a:r>
             <a:endParaRPr lang="en-US" sz="1000" dirty="0"/>
           </a:p>
@@ -23197,8 +23197,8 @@
         </p:nvSpPr>
         <p:spPr>
           <a:xfrm>
-            <a:off x="9952736" y="5138928"/>
-            <a:ext cx="747776" cy="256032"/>
+            <a:off x="9820656" y="5138928"/>
+            <a:ext cx="615696" cy="256032"/>
           </a:xfrm>
           <a:prstGeom prst="roundRect">
             <a:avLst>
@@ -23224,8 +23224,8 @@
         </p:nvSpPr>
         <p:spPr>
           <a:xfrm>
-            <a:off x="9952736" y="5138928"/>
-            <a:ext cx="747776" cy="256032"/>
+            <a:off x="9820656" y="5138928"/>
+            <a:ext cx="615696" cy="256032"/>
           </a:xfrm>
           <a:prstGeom prst="rect">
             <a:avLst/>
@@ -23249,7 +23249,7 @@
                 <a:ea typeface="Calibri" pitchFamily="34" charset="-122"/>
                 <a:cs typeface="Calibri" pitchFamily="34" charset="-120"/>
               </a:rPr>
-              <a:t>validate</a:t>
+              <a:t>review</a:t>
             </a:r>
             <a:endParaRPr lang="en-US" sz="1000" dirty="0"/>
           </a:p>
@@ -23263,8 +23263,8 @@
         </p:nvSpPr>
         <p:spPr>
           <a:xfrm>
-            <a:off x="10791952" y="5138928"/>
-            <a:ext cx="681736" cy="256032"/>
+            <a:off x="10527792" y="5138928"/>
+            <a:ext cx="747776" cy="256032"/>
           </a:xfrm>
           <a:prstGeom prst="roundRect">
             <a:avLst>
@@ -23290,8 +23290,8 @@
         </p:nvSpPr>
         <p:spPr>
           <a:xfrm>
-            <a:off x="10791952" y="5138928"/>
-            <a:ext cx="681736" cy="256032"/>
+            <a:off x="10527792" y="5138928"/>
+            <a:ext cx="747776" cy="256032"/>
           </a:xfrm>
           <a:prstGeom prst="rect">
             <a:avLst/>
@@ -23315,7 +23315,7 @@
                 <a:ea typeface="Calibri" pitchFamily="34" charset="-122"/>
                 <a:cs typeface="Calibri" pitchFamily="34" charset="-120"/>
               </a:rPr>
-              <a:t>archive</a:t>
+              <a:t>validate</a:t>
             </a:r>
             <a:endParaRPr lang="en-US" sz="1000" dirty="0"/>
           </a:p>
@@ -23330,7 +23330,7 @@
         <p:spPr>
           <a:xfrm>
             <a:off x="457200" y="5486400"/>
-            <a:ext cx="549656" cy="256032"/>
+            <a:ext cx="681736" cy="256032"/>
           </a:xfrm>
           <a:prstGeom prst="roundRect">
             <a:avLst>
@@ -23357,7 +23357,7 @@
         <p:spPr>
           <a:xfrm>
             <a:off x="457200" y="5486400"/>
-            <a:ext cx="549656" cy="256032"/>
+            <a:ext cx="681736" cy="256032"/>
           </a:xfrm>
           <a:prstGeom prst="rect">
             <a:avLst/>
@@ -23381,7 +23381,7 @@
                 <a:ea typeface="Calibri" pitchFamily="34" charset="-122"/>
                 <a:cs typeface="Calibri" pitchFamily="34" charset="-120"/>
               </a:rPr>
-              <a:t>audit</a:t>
+              <a:t>archive</a:t>
             </a:r>
             <a:endParaRPr lang="en-US" sz="1000" dirty="0"/>
           </a:p>
@@ -23395,8 +23395,8 @@
         </p:nvSpPr>
         <p:spPr>
           <a:xfrm>
-            <a:off x="1098296" y="5486400"/>
-            <a:ext cx="615696" cy="256032"/>
+            <a:off x="1230376" y="5486400"/>
+            <a:ext cx="549656" cy="256032"/>
           </a:xfrm>
           <a:prstGeom prst="roundRect">
             <a:avLst>
@@ -23422,8 +23422,8 @@
         </p:nvSpPr>
         <p:spPr>
           <a:xfrm>
-            <a:off x="1098296" y="5486400"/>
-            <a:ext cx="615696" cy="256032"/>
+            <a:off x="1230376" y="5486400"/>
+            <a:ext cx="549656" cy="256032"/>
           </a:xfrm>
           <a:prstGeom prst="rect">
             <a:avLst/>
@@ -23447,7 +23447,7 @@
                 <a:ea typeface="Calibri" pitchFamily="34" charset="-122"/>
                 <a:cs typeface="Calibri" pitchFamily="34" charset="-120"/>
               </a:rPr>
-              <a:t>report</a:t>
+              <a:t>audit</a:t>
             </a:r>
             <a:endParaRPr lang="en-US" sz="1000" dirty="0"/>
           </a:p>
@@ -23461,8 +23461,8 @@
         </p:nvSpPr>
         <p:spPr>
           <a:xfrm>
-            <a:off x="1805432" y="5486400"/>
-            <a:ext cx="813816" cy="256032"/>
+            <a:off x="1871472" y="5486400"/>
+            <a:ext cx="615696" cy="256032"/>
           </a:xfrm>
           <a:prstGeom prst="roundRect">
             <a:avLst>
@@ -23488,8 +23488,8 @@
         </p:nvSpPr>
         <p:spPr>
           <a:xfrm>
-            <a:off x="1805432" y="5486400"/>
-            <a:ext cx="813816" cy="256032"/>
+            <a:off x="1871472" y="5486400"/>
+            <a:ext cx="615696" cy="256032"/>
           </a:xfrm>
           <a:prstGeom prst="rect">
             <a:avLst/>
@@ -23513,7 +23513,7 @@
                 <a:ea typeface="Calibri" pitchFamily="34" charset="-122"/>
                 <a:cs typeface="Calibri" pitchFamily="34" charset="-120"/>
               </a:rPr>
-              <a:t>dashboard</a:t>
+              <a:t>report</a:t>
             </a:r>
             <a:endParaRPr lang="en-US" sz="1000" dirty="0"/>
           </a:p>
@@ -23527,8 +23527,8 @@
         </p:nvSpPr>
         <p:spPr>
           <a:xfrm>
-            <a:off x="2710688" y="5486400"/>
-            <a:ext cx="417576" cy="256032"/>
+            <a:off x="2578608" y="5486400"/>
+            <a:ext cx="813816" cy="256032"/>
           </a:xfrm>
           <a:prstGeom prst="roundRect">
             <a:avLst>
@@ -23554,8 +23554,8 @@
         </p:nvSpPr>
         <p:spPr>
           <a:xfrm>
-            <a:off x="2710688" y="5486400"/>
-            <a:ext cx="417576" cy="256032"/>
+            <a:off x="2578608" y="5486400"/>
+            <a:ext cx="813816" cy="256032"/>
           </a:xfrm>
           <a:prstGeom prst="rect">
             <a:avLst/>
@@ -23579,7 +23579,7 @@
                 <a:ea typeface="Calibri" pitchFamily="34" charset="-122"/>
                 <a:cs typeface="Calibri" pitchFamily="34" charset="-120"/>
               </a:rPr>
-              <a:t>log</a:t>
+              <a:t>dashboard</a:t>
             </a:r>
             <a:endParaRPr lang="en-US" sz="1000" dirty="0"/>
           </a:p>
@@ -23593,8 +23593,8 @@
         </p:nvSpPr>
         <p:spPr>
           <a:xfrm>
-            <a:off x="3219704" y="5486400"/>
-            <a:ext cx="681736" cy="256032"/>
+            <a:off x="3483864" y="5486400"/>
+            <a:ext cx="417576" cy="256032"/>
           </a:xfrm>
           <a:prstGeom prst="roundRect">
             <a:avLst>
@@ -23620,8 +23620,8 @@
         </p:nvSpPr>
         <p:spPr>
           <a:xfrm>
-            <a:off x="3219704" y="5486400"/>
-            <a:ext cx="681736" cy="256032"/>
+            <a:off x="3483864" y="5486400"/>
+            <a:ext cx="417576" cy="256032"/>
           </a:xfrm>
           <a:prstGeom prst="rect">
             <a:avLst/>
@@ -23645,7 +23645,7 @@
                 <a:ea typeface="Calibri" pitchFamily="34" charset="-122"/>
                 <a:cs typeface="Calibri" pitchFamily="34" charset="-120"/>
               </a:rPr>
-              <a:t>license</a:t>
+              <a:t>log</a:t>
             </a:r>
             <a:endParaRPr lang="en-US" sz="1000" dirty="0"/>
           </a:p>
@@ -23660,7 +23660,7 @@
         <p:spPr>
           <a:xfrm>
             <a:off x="3992880" y="5486400"/>
-            <a:ext cx="615696" cy="256032"/>
+            <a:ext cx="681736" cy="256032"/>
           </a:xfrm>
           <a:prstGeom prst="roundRect">
             <a:avLst>
@@ -23687,7 +23687,7 @@
         <p:spPr>
           <a:xfrm>
             <a:off x="3992880" y="5486400"/>
-            <a:ext cx="615696" cy="256032"/>
+            <a:ext cx="681736" cy="256032"/>
           </a:xfrm>
           <a:prstGeom prst="rect">
             <a:avLst/>
@@ -23711,7 +23711,7 @@
                 <a:ea typeface="Calibri" pitchFamily="34" charset="-122"/>
                 <a:cs typeface="Calibri" pitchFamily="34" charset="-120"/>
               </a:rPr>
-              <a:t>doctor</a:t>
+              <a:t>license</a:t>
             </a:r>
             <a:endParaRPr lang="en-US" sz="1000" dirty="0"/>
           </a:p>
@@ -23725,8 +23725,8 @@
         </p:nvSpPr>
         <p:spPr>
           <a:xfrm>
-            <a:off x="4700016" y="5486400"/>
-            <a:ext cx="1011936" cy="256032"/>
+            <a:off x="4766056" y="5486400"/>
+            <a:ext cx="615696" cy="256032"/>
           </a:xfrm>
           <a:prstGeom prst="roundRect">
             <a:avLst>
@@ -23752,8 +23752,8 @@
         </p:nvSpPr>
         <p:spPr>
           <a:xfrm>
-            <a:off x="4700016" y="5486400"/>
-            <a:ext cx="1011936" cy="256032"/>
+            <a:off x="4766056" y="5486400"/>
+            <a:ext cx="615696" cy="256032"/>
           </a:xfrm>
           <a:prstGeom prst="rect">
             <a:avLst/>
@@ -23777,7 +23777,7 @@
                 <a:ea typeface="Calibri" pitchFamily="34" charset="-122"/>
                 <a:cs typeface="Calibri" pitchFamily="34" charset="-120"/>
               </a:rPr>
-              <a:t>plugin build</a:t>
+              <a:t>doctor</a:t>
             </a:r>
             <a:endParaRPr lang="en-US" sz="1000" dirty="0"/>
           </a:p>
@@ -23791,8 +23791,8 @@
         </p:nvSpPr>
         <p:spPr>
           <a:xfrm>
-            <a:off x="5803392" y="5486400"/>
-            <a:ext cx="549656" cy="256032"/>
+            <a:off x="5473192" y="5486400"/>
+            <a:ext cx="615696" cy="256032"/>
           </a:xfrm>
           <a:prstGeom prst="roundRect">
             <a:avLst>
@@ -23818,8 +23818,8 @@
         </p:nvSpPr>
         <p:spPr>
           <a:xfrm>
-            <a:off x="5803392" y="5486400"/>
-            <a:ext cx="549656" cy="256032"/>
+            <a:off x="5473192" y="5486400"/>
+            <a:ext cx="615696" cy="256032"/>
           </a:xfrm>
           <a:prstGeom prst="rect">
             <a:avLst/>
@@ -23843,7 +23843,7 @@
                 <a:ea typeface="Calibri" pitchFamily="34" charset="-122"/>
                 <a:cs typeface="Calibri" pitchFamily="34" charset="-120"/>
               </a:rPr>
-              <a:t>trace</a:t>
+              <a:t>health</a:t>
             </a:r>
             <a:endParaRPr lang="en-US" sz="1000" dirty="0"/>
           </a:p>
@@ -23857,8 +23857,8 @@
         </p:nvSpPr>
         <p:spPr>
           <a:xfrm>
-            <a:off x="6444488" y="5486400"/>
-            <a:ext cx="483616" cy="256032"/>
+            <a:off x="6180328" y="5486400"/>
+            <a:ext cx="1011936" cy="256032"/>
           </a:xfrm>
           <a:prstGeom prst="roundRect">
             <a:avLst>
@@ -23884,8 +23884,8 @@
         </p:nvSpPr>
         <p:spPr>
           <a:xfrm>
-            <a:off x="6444488" y="5486400"/>
-            <a:ext cx="483616" cy="256032"/>
+            <a:off x="6180328" y="5486400"/>
+            <a:ext cx="1011936" cy="256032"/>
           </a:xfrm>
           <a:prstGeom prst="rect">
             <a:avLst/>
@@ -23909,7 +23909,7 @@
                 <a:ea typeface="Calibri" pitchFamily="34" charset="-122"/>
                 <a:cs typeface="Calibri" pitchFamily="34" charset="-120"/>
               </a:rPr>
-              <a:t>hook</a:t>
+              <a:t>plugin build</a:t>
             </a:r>
             <a:endParaRPr lang="en-US" sz="1000" dirty="0"/>
           </a:p>
@@ -23923,8 +23923,8 @@
         </p:nvSpPr>
         <p:spPr>
           <a:xfrm>
-            <a:off x="7019544" y="5486400"/>
-            <a:ext cx="747776" cy="256032"/>
+            <a:off x="7283704" y="5486400"/>
+            <a:ext cx="549656" cy="256032"/>
           </a:xfrm>
           <a:prstGeom prst="roundRect">
             <a:avLst>
@@ -23950,7 +23950,139 @@
         </p:nvSpPr>
         <p:spPr>
           <a:xfrm>
-            <a:off x="7019544" y="5486400"/>
+            <a:off x="7283704" y="5486400"/>
+            <a:ext cx="549656" cy="256032"/>
+          </a:xfrm>
+          <a:prstGeom prst="rect">
+            <a:avLst/>
+          </a:prstGeom>
+          <a:noFill/>
+          <a:ln/>
+        </p:spPr>
+        <p:txBody>
+          <a:bodyPr wrap="square" lIns="0" tIns="0" rIns="0" bIns="0" rtlCol="0" anchor="ctr"/>
+          <a:lstStyle/>
+          <a:p>
+            <a:pPr algn="ctr" indent="0" marL="0">
+              <a:buNone/>
+            </a:pPr>
+            <a:r>
+              <a:rPr lang="en-US" sz="1000" dirty="0">
+                <a:solidFill>
+                  <a:srgbClr val="1F2430"/>
+                </a:solidFill>
+                <a:latin typeface="Calibri" pitchFamily="34" charset="0"/>
+                <a:ea typeface="Calibri" pitchFamily="34" charset="-122"/>
+                <a:cs typeface="Calibri" pitchFamily="34" charset="-120"/>
+              </a:rPr>
+              <a:t>trace</a:t>
+            </a:r>
+            <a:endParaRPr lang="en-US" sz="1000" dirty="0"/>
+          </a:p>
+        </p:txBody>
+      </p:sp>
+      <p:sp>
+        <p:nvSpPr>
+          <p:cNvPr id="150" name="Shape 148"/>
+          <p:cNvSpPr/>
+          <p:nvPr/>
+        </p:nvSpPr>
+        <p:spPr>
+          <a:xfrm>
+            <a:off x="7924800" y="5486400"/>
+            <a:ext cx="483616" cy="256032"/>
+          </a:xfrm>
+          <a:prstGeom prst="roundRect">
+            <a:avLst>
+              <a:gd name="adj" fmla="val 50000"/>
+            </a:avLst>
+          </a:prstGeom>
+          <a:solidFill>
+            <a:srgbClr val="F3F5F8"/>
+          </a:solidFill>
+          <a:ln w="12700">
+            <a:solidFill>
+              <a:srgbClr val="F3F5F8"/>
+            </a:solidFill>
+            <a:prstDash val="solid"/>
+          </a:ln>
+        </p:spPr>
+      </p:sp>
+      <p:sp>
+        <p:nvSpPr>
+          <p:cNvPr id="151" name="Text 149"/>
+          <p:cNvSpPr txBox="1"/>
+          <p:nvPr/>
+        </p:nvSpPr>
+        <p:spPr>
+          <a:xfrm>
+            <a:off x="7924800" y="5486400"/>
+            <a:ext cx="483616" cy="256032"/>
+          </a:xfrm>
+          <a:prstGeom prst="rect">
+            <a:avLst/>
+          </a:prstGeom>
+          <a:noFill/>
+          <a:ln/>
+        </p:spPr>
+        <p:txBody>
+          <a:bodyPr wrap="square" lIns="0" tIns="0" rIns="0" bIns="0" rtlCol="0" anchor="ctr"/>
+          <a:lstStyle/>
+          <a:p>
+            <a:pPr algn="ctr" indent="0" marL="0">
+              <a:buNone/>
+            </a:pPr>
+            <a:r>
+              <a:rPr lang="en-US" sz="1000" dirty="0">
+                <a:solidFill>
+                  <a:srgbClr val="1F2430"/>
+                </a:solidFill>
+                <a:latin typeface="Calibri" pitchFamily="34" charset="0"/>
+                <a:ea typeface="Calibri" pitchFamily="34" charset="-122"/>
+                <a:cs typeface="Calibri" pitchFamily="34" charset="-120"/>
+              </a:rPr>
+              <a:t>hook</a:t>
+            </a:r>
+            <a:endParaRPr lang="en-US" sz="1000" dirty="0"/>
+          </a:p>
+        </p:txBody>
+      </p:sp>
+      <p:sp>
+        <p:nvSpPr>
+          <p:cNvPr id="152" name="Shape 150"/>
+          <p:cNvSpPr/>
+          <p:nvPr/>
+        </p:nvSpPr>
+        <p:spPr>
+          <a:xfrm>
+            <a:off x="8499856" y="5486400"/>
+            <a:ext cx="747776" cy="256032"/>
+          </a:xfrm>
+          <a:prstGeom prst="roundRect">
+            <a:avLst>
+              <a:gd name="adj" fmla="val 50000"/>
+            </a:avLst>
+          </a:prstGeom>
+          <a:solidFill>
+            <a:srgbClr val="F3F5F8"/>
+          </a:solidFill>
+          <a:ln w="12700">
+            <a:solidFill>
+              <a:srgbClr val="F3F5F8"/>
+            </a:solidFill>
+            <a:prstDash val="solid"/>
+          </a:ln>
+        </p:spPr>
+      </p:sp>
+      <p:sp>
+        <p:nvSpPr>
+          <p:cNvPr id="153" name="Text 151"/>
+          <p:cNvSpPr txBox="1"/>
+          <p:nvPr/>
+        </p:nvSpPr>
+        <p:spPr>
+          <a:xfrm>
+            <a:off x="8499856" y="5486400"/>
             <a:ext cx="747776" cy="256032"/>
           </a:xfrm>
           <a:prstGeom prst="rect">
@@ -26621,7 +26753,7 @@
                 <a:ea typeface="Courier New" pitchFamily="34" charset="-122"/>
                 <a:cs typeface="Courier New" pitchFamily="34" charset="-120"/>
               </a:rPr>
-              <a:t>  sdlc 0.11.2, license: community</a:t>
+              <a:t>  sdlc 0.11.3, license: community</a:t>
             </a:r>
             <a:endParaRPr lang="en-US" sz="1000" dirty="0"/>
           </a:p>
@@ -26672,7 +26804,7 @@
                 <a:ea typeface="Courier New" pitchFamily="34" charset="-122"/>
                 <a:cs typeface="Courier New" pitchFamily="34" charset="-120"/>
               </a:rPr>
-              <a:t>  files: 67 created, 0 updated, 0</a:t>
+              <a:t>  files: 72 created, 0 updated, 0</a:t>
             </a:r>
             <a:endParaRPr lang="en-US" sz="1000" dirty="0"/>
           </a:p>
@@ -27720,7 +27852,7 @@
         <p:spPr>
           <a:xfrm>
             <a:off x="2947416" y="6053328"/>
-            <a:ext cx="681736" cy="256032"/>
+            <a:ext cx="615696" cy="256032"/>
           </a:xfrm>
           <a:prstGeom prst="roundRect">
             <a:avLst>
@@ -27747,7 +27879,7 @@
         <p:spPr>
           <a:xfrm>
             <a:off x="2947416" y="6053328"/>
-            <a:ext cx="681736" cy="256032"/>
+            <a:ext cx="615696" cy="256032"/>
           </a:xfrm>
           <a:prstGeom prst="rect">
             <a:avLst/>
@@ -27771,7 +27903,7 @@
                 <a:ea typeface="Calibri" pitchFamily="34" charset="-122"/>
                 <a:cs typeface="Calibri" pitchFamily="34" charset="-120"/>
               </a:rPr>
-              <a:t>license</a:t>
+              <a:t>health</a:t>
             </a:r>
             <a:endParaRPr lang="en-US" sz="1000" dirty="0"/>
           </a:p>
@@ -27785,8 +27917,8 @@
         </p:nvSpPr>
         <p:spPr>
           <a:xfrm>
-            <a:off x="3720592" y="6053328"/>
-            <a:ext cx="483616" cy="256032"/>
+            <a:off x="3654552" y="6053328"/>
+            <a:ext cx="681736" cy="256032"/>
           </a:xfrm>
           <a:prstGeom prst="roundRect">
             <a:avLst>
@@ -27812,8 +27944,8 @@
         </p:nvSpPr>
         <p:spPr>
           <a:xfrm>
-            <a:off x="3720592" y="6053328"/>
-            <a:ext cx="483616" cy="256032"/>
+            <a:off x="3654552" y="6053328"/>
+            <a:ext cx="681736" cy="256032"/>
           </a:xfrm>
           <a:prstGeom prst="rect">
             <a:avLst/>
@@ -27837,7 +27969,7 @@
                 <a:ea typeface="Calibri" pitchFamily="34" charset="-122"/>
                 <a:cs typeface="Calibri" pitchFamily="34" charset="-120"/>
               </a:rPr>
-              <a:t>help</a:t>
+              <a:t>license</a:t>
             </a:r>
             <a:endParaRPr lang="en-US" sz="1000" dirty="0"/>
           </a:p>
@@ -27851,8 +27983,8 @@
         </p:nvSpPr>
         <p:spPr>
           <a:xfrm>
-            <a:off x="4295648" y="6053328"/>
-            <a:ext cx="549656" cy="256032"/>
+            <a:off x="4427728" y="6053328"/>
+            <a:ext cx="483616" cy="256032"/>
           </a:xfrm>
           <a:prstGeom prst="roundRect">
             <a:avLst>
@@ -27878,8 +28010,8 @@
         </p:nvSpPr>
         <p:spPr>
           <a:xfrm>
-            <a:off x="4295648" y="6053328"/>
-            <a:ext cx="549656" cy="256032"/>
+            <a:off x="4427728" y="6053328"/>
+            <a:ext cx="483616" cy="256032"/>
           </a:xfrm>
           <a:prstGeom prst="rect">
             <a:avLst/>
@@ -27903,7 +28035,7 @@
                 <a:ea typeface="Calibri" pitchFamily="34" charset="-122"/>
                 <a:cs typeface="Calibri" pitchFamily="34" charset="-120"/>
               </a:rPr>
-              <a:t>guide</a:t>
+              <a:t>help</a:t>
             </a:r>
             <a:endParaRPr lang="en-US" sz="1000" dirty="0"/>
           </a:p>
@@ -27917,8 +28049,8 @@
         </p:nvSpPr>
         <p:spPr>
           <a:xfrm>
-            <a:off x="4936744" y="6053328"/>
-            <a:ext cx="1011936" cy="256032"/>
+            <a:off x="5002784" y="6053328"/>
+            <a:ext cx="549656" cy="256032"/>
           </a:xfrm>
           <a:prstGeom prst="roundRect">
             <a:avLst>
@@ -27944,8 +28076,8 @@
         </p:nvSpPr>
         <p:spPr>
           <a:xfrm>
-            <a:off x="4936744" y="6053328"/>
-            <a:ext cx="1011936" cy="256032"/>
+            <a:off x="5002784" y="6053328"/>
+            <a:ext cx="549656" cy="256032"/>
           </a:xfrm>
           <a:prstGeom prst="rect">
             <a:avLst/>
@@ -27969,7 +28101,7 @@
                 <a:ea typeface="Calibri" pitchFamily="34" charset="-122"/>
                 <a:cs typeface="Calibri" pitchFamily="34" charset="-120"/>
               </a:rPr>
-              <a:t>layout adapt</a:t>
+              <a:t>guide</a:t>
             </a:r>
             <a:endParaRPr lang="en-US" sz="1000" dirty="0"/>
           </a:p>
@@ -27983,8 +28115,8 @@
         </p:nvSpPr>
         <p:spPr>
           <a:xfrm>
-            <a:off x="6040120" y="6053328"/>
-            <a:ext cx="1144016" cy="256032"/>
+            <a:off x="5643880" y="6053328"/>
+            <a:ext cx="1011936" cy="256032"/>
           </a:xfrm>
           <a:prstGeom prst="roundRect">
             <a:avLst>
@@ -28010,8 +28142,8 @@
         </p:nvSpPr>
         <p:spPr>
           <a:xfrm>
-            <a:off x="6040120" y="6053328"/>
-            <a:ext cx="1144016" cy="256032"/>
+            <a:off x="5643880" y="6053328"/>
+            <a:ext cx="1011936" cy="256032"/>
           </a:xfrm>
           <a:prstGeom prst="rect">
             <a:avLst/>
@@ -28035,7 +28167,7 @@
                 <a:ea typeface="Calibri" pitchFamily="34" charset="-122"/>
                 <a:cs typeface="Calibri" pitchFamily="34" charset="-120"/>
               </a:rPr>
-              <a:t>layout convert</a:t>
+              <a:t>layout adapt</a:t>
             </a:r>
             <a:endParaRPr lang="en-US" sz="1000" dirty="0"/>
           </a:p>
@@ -28049,8 +28181,8 @@
         </p:nvSpPr>
         <p:spPr>
           <a:xfrm>
-            <a:off x="7275576" y="6053328"/>
-            <a:ext cx="549656" cy="256032"/>
+            <a:off x="6747256" y="6053328"/>
+            <a:ext cx="1144016" cy="256032"/>
           </a:xfrm>
           <a:prstGeom prst="roundRect">
             <a:avLst>
@@ -28076,8 +28208,8 @@
         </p:nvSpPr>
         <p:spPr>
           <a:xfrm>
-            <a:off x="7275576" y="6053328"/>
-            <a:ext cx="549656" cy="256032"/>
+            <a:off x="6747256" y="6053328"/>
+            <a:ext cx="1144016" cy="256032"/>
           </a:xfrm>
           <a:prstGeom prst="rect">
             <a:avLst/>
@@ -28101,7 +28233,7 @@
                 <a:ea typeface="Calibri" pitchFamily="34" charset="-122"/>
                 <a:cs typeface="Calibri" pitchFamily="34" charset="-120"/>
               </a:rPr>
-              <a:t>adopt</a:t>
+              <a:t>layout convert</a:t>
             </a:r>
             <a:endParaRPr lang="en-US" sz="1000" dirty="0"/>
           </a:p>
@@ -28115,8 +28247,8 @@
         </p:nvSpPr>
         <p:spPr>
           <a:xfrm>
-            <a:off x="7916672" y="6053328"/>
-            <a:ext cx="615696" cy="256032"/>
+            <a:off x="7982712" y="6053328"/>
+            <a:ext cx="549656" cy="256032"/>
           </a:xfrm>
           <a:prstGeom prst="roundRect">
             <a:avLst>
@@ -28142,7 +28274,73 @@
         </p:nvSpPr>
         <p:spPr>
           <a:xfrm>
-            <a:off x="7916672" y="6053328"/>
+            <a:off x="7982712" y="6053328"/>
+            <a:ext cx="549656" cy="256032"/>
+          </a:xfrm>
+          <a:prstGeom prst="rect">
+            <a:avLst/>
+          </a:prstGeom>
+          <a:noFill/>
+          <a:ln/>
+        </p:spPr>
+        <p:txBody>
+          <a:bodyPr wrap="square" lIns="0" tIns="0" rIns="0" bIns="0" rtlCol="0" anchor="ctr"/>
+          <a:lstStyle/>
+          <a:p>
+            <a:pPr algn="ctr" indent="0" marL="0">
+              <a:buNone/>
+            </a:pPr>
+            <a:r>
+              <a:rPr lang="en-US" sz="1000" dirty="0">
+                <a:solidFill>
+                  <a:srgbClr val="5B6475"/>
+                </a:solidFill>
+                <a:latin typeface="Calibri" pitchFamily="34" charset="0"/>
+                <a:ea typeface="Calibri" pitchFamily="34" charset="-122"/>
+                <a:cs typeface="Calibri" pitchFamily="34" charset="-120"/>
+              </a:rPr>
+              <a:t>adopt</a:t>
+            </a:r>
+            <a:endParaRPr lang="en-US" sz="1000" dirty="0"/>
+          </a:p>
+        </p:txBody>
+      </p:sp>
+      <p:sp>
+        <p:nvSpPr>
+          <p:cNvPr id="42" name="Shape 40"/>
+          <p:cNvSpPr/>
+          <p:nvPr/>
+        </p:nvSpPr>
+        <p:spPr>
+          <a:xfrm>
+            <a:off x="8623808" y="6053328"/>
+            <a:ext cx="615696" cy="256032"/>
+          </a:xfrm>
+          <a:prstGeom prst="roundRect">
+            <a:avLst>
+              <a:gd name="adj" fmla="val 50000"/>
+            </a:avLst>
+          </a:prstGeom>
+          <a:solidFill>
+            <a:srgbClr val="F3F5F8"/>
+          </a:solidFill>
+          <a:ln w="12700">
+            <a:solidFill>
+              <a:srgbClr val="F3F5F8"/>
+            </a:solidFill>
+            <a:prstDash val="solid"/>
+          </a:ln>
+        </p:spPr>
+      </p:sp>
+      <p:sp>
+        <p:nvSpPr>
+          <p:cNvPr id="43" name="Text 41"/>
+          <p:cNvSpPr txBox="1"/>
+          <p:nvPr/>
+        </p:nvSpPr>
+        <p:spPr>
+          <a:xfrm>
+            <a:off x="8623808" y="6053328"/>
             <a:ext cx="615696" cy="256032"/>
           </a:xfrm>
           <a:prstGeom prst="rect">
@@ -33325,6 +33523,72 @@
                 <a:cs typeface="Calibri" pitchFamily="34" charset="-120"/>
               </a:rPr>
               <a:t>rework</a:t>
+            </a:r>
+            <a:endParaRPr lang="en-US" sz="1000" dirty="0"/>
+          </a:p>
+        </p:txBody>
+      </p:sp>
+      <p:sp>
+        <p:nvSpPr>
+          <p:cNvPr id="30" name="Shape 28"/>
+          <p:cNvSpPr/>
+          <p:nvPr/>
+        </p:nvSpPr>
+        <p:spPr>
+          <a:xfrm>
+            <a:off x="3720592" y="6053328"/>
+            <a:ext cx="681736" cy="256032"/>
+          </a:xfrm>
+          <a:prstGeom prst="roundRect">
+            <a:avLst>
+              <a:gd name="adj" fmla="val 50000"/>
+            </a:avLst>
+          </a:prstGeom>
+          <a:solidFill>
+            <a:srgbClr val="F3F5F8"/>
+          </a:solidFill>
+          <a:ln w="12700">
+            <a:solidFill>
+              <a:srgbClr val="F3F5F8"/>
+            </a:solidFill>
+            <a:prstDash val="solid"/>
+          </a:ln>
+        </p:spPr>
+      </p:sp>
+      <p:sp>
+        <p:nvSpPr>
+          <p:cNvPr id="31" name="Text 29"/>
+          <p:cNvSpPr txBox="1"/>
+          <p:nvPr/>
+        </p:nvSpPr>
+        <p:spPr>
+          <a:xfrm>
+            <a:off x="3720592" y="6053328"/>
+            <a:ext cx="681736" cy="256032"/>
+          </a:xfrm>
+          <a:prstGeom prst="rect">
+            <a:avLst/>
+          </a:prstGeom>
+          <a:noFill/>
+          <a:ln/>
+        </p:spPr>
+        <p:txBody>
+          <a:bodyPr wrap="square" lIns="0" tIns="0" rIns="0" bIns="0" rtlCol="0" anchor="ctr"/>
+          <a:lstStyle/>
+          <a:p>
+            <a:pPr algn="ctr" indent="0" marL="0">
+              <a:buNone/>
+            </a:pPr>
+            <a:r>
+              <a:rPr lang="en-US" sz="1000" dirty="0">
+                <a:solidFill>
+                  <a:srgbClr val="5B6475"/>
+                </a:solidFill>
+                <a:latin typeface="Calibri" pitchFamily="34" charset="0"/>
+                <a:ea typeface="Calibri" pitchFamily="34" charset="-122"/>
+                <a:cs typeface="Calibri" pitchFamily="34" charset="-120"/>
+              </a:rPr>
+              <a:t>explain</a:t>
             </a:r>
             <a:endParaRPr lang="en-US" sz="1000" dirty="0"/>
           </a:p>

--- a/docs/demo/sdlc-calculator-demo.en.pptx
+++ b/docs/demo/sdlc-calculator-demo.en.pptx
@@ -2243,6 +2243,7 @@
               <a:t>The agent cannot approve. Bob is not the product owner. Alice approves the intent and the spec; Bob, the engineer, the plan.
 sdlc approve intent --change basic-arithmetic — The agent cannot approve.
 sdlc approve intent --change basic-arithmetic — Bob is not the product owner.
+sdlc answer 1 --change basic-arithmetic --text No: the receipt shows the total only — Alice answers the open question of the intent herself: the agent cannot.
 sdlc approve intent --change basic-arithmetic — Alice approves the intent.</a:t>
             </a:r>
             <a:endParaRPr lang="en-US" dirty="0"/>
@@ -5111,7 +5112,7 @@
                 <a:ea typeface="Courier New" pitchFamily="34" charset="-122"/>
                 <a:cs typeface="Courier New" pitchFamily="34" charset="-120"/>
               </a:rPr>
-              <a:t>✓ test (1.1s)</a:t>
+              <a:t>✓ test (1.0s)</a:t>
             </a:r>
             <a:endParaRPr lang="en-US" sz="1000" dirty="0"/>
           </a:p>
@@ -6659,7 +6660,7 @@
                 <a:ea typeface="Courier New" pitchFamily="34" charset="-122"/>
                 <a:cs typeface="Courier New" pitchFamily="34" charset="-120"/>
               </a:rPr>
-              <a:t>  code-owner (9076b412ed5f)</a:t>
+              <a:t>  code-owner (dc583d37ba4d)</a:t>
             </a:r>
             <a:endParaRPr lang="en-US" sz="1000" dirty="0"/>
           </a:p>
@@ -6744,7 +6745,7 @@
                 <a:ea typeface="Courier New" pitchFamily="34" charset="-122"/>
                 <a:cs typeface="Courier New" pitchFamily="34" charset="-120"/>
               </a:rPr>
-              <a:t>  "SDLC-Approval: basic-arithmetic:review:9</a:t>
+              <a:t>  "SDLC-Approval: basic-arithmetic:review:d</a:t>
             </a:r>
             <a:endParaRPr lang="en-US" sz="1000" dirty="0"/>
           </a:p>
@@ -6761,7 +6762,7 @@
                 <a:ea typeface="Courier New" pitchFamily="34" charset="-122"/>
                 <a:cs typeface="Courier New" pitchFamily="34" charset="-120"/>
               </a:rPr>
-              <a:t>  076b412ed5f"</a:t>
+              <a:t>  c583d37ba4d"</a:t>
             </a:r>
             <a:endParaRPr lang="en-US" sz="1000" dirty="0"/>
           </a:p>
@@ -7442,7 +7443,7 @@
                 <a:ea typeface="Courier New" pitchFamily="34" charset="-122"/>
                 <a:cs typeface="Courier New" pitchFamily="34" charset="-120"/>
               </a:rPr>
-              <a:t>  release-manager (9076b412ed5f)</a:t>
+              <a:t>  release-manager (dc583d37ba4d)</a:t>
             </a:r>
             <a:endParaRPr lang="en-US" sz="1000" dirty="0"/>
           </a:p>
@@ -7510,7 +7511,7 @@
                 <a:ea typeface="Courier New" pitchFamily="34" charset="-122"/>
                 <a:cs typeface="Courier New" pitchFamily="34" charset="-120"/>
               </a:rPr>
-              <a:t>  gate" -m "SDLC-Approval: basic-arithmetic:release:9076b412ed5f"</a:t>
+              <a:t>  gate" -m "SDLC-Approval: basic-arithmetic:release:dc583d37ba4d"</a:t>
             </a:r>
             <a:endParaRPr lang="en-US" sz="1000" dirty="0"/>
           </a:p>
@@ -7810,7 +7811,7 @@
                 <a:ea typeface="Courier New" pitchFamily="34" charset="-122"/>
                 <a:cs typeface="Courier New" pitchFamily="34" charset="-120"/>
               </a:rPr>
-              <a:t>✓ basic-arithmetic/intent alice valid 499aba3a</a:t>
+              <a:t>✓ basic-arithmetic/intent alice valid 8a399908</a:t>
             </a:r>
             <a:endParaRPr lang="en-US" sz="1000" dirty="0"/>
           </a:p>
@@ -7827,7 +7828,7 @@
                 <a:ea typeface="Courier New" pitchFamily="34" charset="-122"/>
                 <a:cs typeface="Courier New" pitchFamily="34" charset="-120"/>
               </a:rPr>
-              <a:t>✓ basic-arithmetic/spec alice valid 9f136f61</a:t>
+              <a:t>✓ basic-arithmetic/spec alice valid 44090c60</a:t>
             </a:r>
             <a:endParaRPr lang="en-US" sz="1000" dirty="0"/>
           </a:p>
@@ -7844,7 +7845,7 @@
                 <a:ea typeface="Courier New" pitchFamily="34" charset="-122"/>
                 <a:cs typeface="Courier New" pitchFamily="34" charset="-120"/>
               </a:rPr>
-              <a:t>✗ basic-arithmetic/plan bob wrong-signer 9f136f61</a:t>
+              <a:t>✗ basic-arithmetic/plan bob wrong-signer 44090c60</a:t>
             </a:r>
             <a:endParaRPr lang="en-US" sz="1000" dirty="0"/>
           </a:p>
@@ -7861,7 +7862,7 @@
                 <a:ea typeface="Courier New" pitchFamily="34" charset="-122"/>
                 <a:cs typeface="Courier New" pitchFamily="34" charset="-120"/>
               </a:rPr>
-              <a:t>✓ basic-arithmetic/review carol valid 11654342</a:t>
+              <a:t>✓ basic-arithmetic/review carol valid 6cf7633c</a:t>
             </a:r>
             <a:endParaRPr lang="en-US" sz="1000" dirty="0"/>
           </a:p>
@@ -7878,7 +7879,7 @@
                 <a:ea typeface="Courier New" pitchFamily="34" charset="-122"/>
                 <a:cs typeface="Courier New" pitchFamily="34" charset="-120"/>
               </a:rPr>
-              <a:t>✓ basic-arithmetic/release alice valid e3ee45aa</a:t>
+              <a:t>✓ basic-arithmetic/release alice valid 68179d3e</a:t>
             </a:r>
             <a:endParaRPr lang="en-US" sz="1000" dirty="0"/>
           </a:p>
@@ -7895,7 +7896,7 @@
                 <a:ea typeface="Courier New" pitchFamily="34" charset="-122"/>
                 <a:cs typeface="Courier New" pitchFamily="34" charset="-120"/>
               </a:rPr>
-              <a:t>✓ openspec/roles.yaml alice@calc.example valid 7de00b00</a:t>
+              <a:t>✓ openspec/roles.yaml alice@calc.example valid 652eda92</a:t>
             </a:r>
             <a:endParaRPr lang="en-US" sz="1000" dirty="0"/>
           </a:p>
@@ -14315,7 +14316,7 @@
                 <a:ea typeface="Courier New" pitchFamily="34" charset="-122"/>
                 <a:cs typeface="Courier New" pitchFamily="34" charset="-120"/>
               </a:rPr>
-              <a:t>  archived) · sdlc 0.11.3, license:</a:t>
+              <a:t>  archived) · sdlc 0.11.4, license:</a:t>
             </a:r>
             <a:endParaRPr lang="en-US" sz="1000" dirty="0"/>
           </a:p>
@@ -14468,7 +14469,7 @@
                 <a:ea typeface="Courier New" pitchFamily="34" charset="-122"/>
                 <a:cs typeface="Courier New" pitchFamily="34" charset="-120"/>
               </a:rPr>
-              <a:t>  intent 3 · plan 11 · review 3; rework</a:t>
+              <a:t>  intent 2 · plan 10 · review 3; rework</a:t>
             </a:r>
             <a:endParaRPr lang="en-US" sz="1000" dirty="0"/>
           </a:p>
@@ -14502,7 +14503,7 @@
                 <a:ea typeface="Courier New" pitchFamily="34" charset="-122"/>
                 <a:cs typeface="Courier New" pitchFamily="34" charset="-120"/>
               </a:rPr>
-              <a:t>  recorded with sdlc 0.11.3; licenses:</a:t>
+              <a:t>  people's participation (3 changes),</a:t>
             </a:r>
             <a:endParaRPr lang="en-US" sz="1000" dirty="0"/>
           </a:p>
@@ -14519,7 +14520,7 @@
                 <a:ea typeface="Courier New" pitchFamily="34" charset="-122"/>
                 <a:cs typeface="Courier New" pitchFamily="34" charset="-120"/>
               </a:rPr>
-              <a:t>  community (PolyForm-Noncommercial-1.0.0 +</a:t>
+              <a:t>  planned / actual: gate decisions 10;</a:t>
             </a:r>
             <a:endParaRPr lang="en-US" sz="1000" dirty="0"/>
           </a:p>
@@ -14536,7 +14537,24 @@
                 <a:ea typeface="Courier New" pitchFamily="34" charset="-122"/>
                 <a:cs typeface="Courier New" pitchFamily="34" charset="-120"/>
               </a:rPr>
-              <a:t>  sdlc-Additional-Permissions-1.0)</a:t>
+              <a:t>  approvals 10 / 7; reworks 1, takeovers 1,</a:t>
+            </a:r>
+            <a:endParaRPr lang="en-US" sz="1000" dirty="0"/>
+          </a:p>
+          <a:p>
+            <a:pPr indent="0" marL="0">
+              <a:buNone/>
+            </a:pPr>
+            <a:r>
+              <a:rPr lang="en-US" sz="1000" dirty="0">
+                <a:solidFill>
+                  <a:srgbClr val="E8EEF2"/>
+                </a:solidFill>
+                <a:latin typeface="Courier New" pitchFamily="34" charset="0"/>
+                <a:ea typeface="Courier New" pitchFamily="34" charset="-122"/>
+                <a:cs typeface="Courier New" pitchFamily="34" charset="-120"/>
+              </a:rPr>
+              <a:t>…</a:t>
             </a:r>
             <a:endParaRPr lang="en-US" sz="1000" dirty="0"/>
           </a:p>
@@ -14785,7 +14803,7 @@
                 <a:ea typeface="Courier New" pitchFamily="34" charset="-122"/>
                 <a:cs typeface="Courier New" pitchFamily="34" charset="-120"/>
               </a:rPr>
-              <a:t>(last 15 of 43 entries; --limit to see</a:t>
+              <a:t>(last 15 of 44 entries; --limit to see</a:t>
             </a:r>
             <a:endParaRPr lang="en-US" sz="1000" dirty="0"/>
           </a:p>
@@ -14819,7 +14837,7 @@
                 <a:ea typeface="Courier New" pitchFamily="34" charset="-122"/>
                 <a:cs typeface="Courier New" pitchFamily="34" charset="-120"/>
               </a:rPr>
-              <a:t>2026-10-08T13:14:35.061Z  gate.review.await</a:t>
+              <a:t>2026-10-08T15:42:51.485Z  gate.review.await</a:t>
             </a:r>
             <a:endParaRPr lang="en-US" sz="1000" dirty="0"/>
           </a:p>
@@ -14853,7 +14871,7 @@
                 <a:ea typeface="Courier New" pitchFamily="34" charset="-122"/>
                 <a:cs typeface="Courier New" pitchFamily="34" charset="-120"/>
               </a:rPr>
-              <a:t>  sha256:9076b412ed5f48c24cb1195f9663b86094</a:t>
+              <a:t>  sha256:dc583d37ba4d12493377d8b49dc850ce2f</a:t>
             </a:r>
             <a:endParaRPr lang="en-US" sz="1000" dirty="0"/>
           </a:p>
@@ -14870,7 +14888,7 @@
                 <a:ea typeface="Courier New" pitchFamily="34" charset="-122"/>
                 <a:cs typeface="Courier New" pitchFamily="34" charset="-120"/>
               </a:rPr>
-              <a:t>  193bc915f050edbdd8b0ff106d1a6f [sdlc</a:t>
+              <a:t>  7d19f26228cbfbaf8471d13189c61a [sdlc</a:t>
             </a:r>
             <a:endParaRPr lang="en-US" sz="1000" dirty="0"/>
           </a:p>
@@ -14887,7 +14905,7 @@
                 <a:ea typeface="Courier New" pitchFamily="34" charset="-122"/>
                 <a:cs typeface="Courier New" pitchFamily="34" charset="-120"/>
               </a:rPr>
-              <a:t>  0.11.3 · community]</a:t>
+              <a:t>  0.11.4 · community]</a:t>
             </a:r>
             <a:endParaRPr lang="en-US" sz="1000" dirty="0"/>
           </a:p>
@@ -14904,7 +14922,7 @@
                 <a:ea typeface="Courier New" pitchFamily="34" charset="-122"/>
                 <a:cs typeface="Courier New" pitchFamily="34" charset="-120"/>
               </a:rPr>
-              <a:t>2026-10-08T13:14:37.903Z  gate.review.appro</a:t>
+              <a:t>2026-10-08T15:42:54.486Z  gate.review.appro</a:t>
             </a:r>
             <a:endParaRPr lang="en-US" sz="1000" dirty="0"/>
           </a:p>
@@ -14955,7 +14973,7 @@
                 <a:ea typeface="Courier New" pitchFamily="34" charset="-122"/>
                 <a:cs typeface="Courier New" pitchFamily="34" charset="-120"/>
               </a:rPr>
-              <a:t>  [sdlc 0.11.3 · community]</a:t>
+              <a:t>  [sdlc 0.11.4 · community]</a:t>
             </a:r>
             <a:endParaRPr lang="en-US" sz="1000" dirty="0"/>
           </a:p>
@@ -14972,7 +14990,7 @@
                 <a:ea typeface="Courier New" pitchFamily="34" charset="-122"/>
                 <a:cs typeface="Courier New" pitchFamily="34" charset="-120"/>
               </a:rPr>
-              <a:t>2026-10-08T13:14:42.699Z  gate.release.appr</a:t>
+              <a:t>2026-10-08T15:42:59.792Z  gate.release.appr</a:t>
             </a:r>
             <a:endParaRPr lang="en-US" sz="1000" dirty="0"/>
           </a:p>
@@ -15023,7 +15041,7 @@
                 <a:ea typeface="Courier New" pitchFamily="34" charset="-122"/>
                 <a:cs typeface="Courier New" pitchFamily="34" charset="-120"/>
               </a:rPr>
-              <a:t>  release-manager [sdlc 0.11.3 · community]</a:t>
+              <a:t>  release-manager [sdlc 0.11.4 · community]</a:t>
             </a:r>
             <a:endParaRPr lang="en-US" sz="1000" dirty="0"/>
           </a:p>
@@ -16200,7 +16218,7 @@
                 <a:ea typeface="Courier New" pitchFamily="34" charset="-122"/>
                 <a:cs typeface="Courier New" pitchFamily="34" charset="-120"/>
               </a:rPr>
-              <a:t>✓ test (1.0s)</a:t>
+              <a:t>✓ test (1.2s)</a:t>
             </a:r>
             <a:endParaRPr lang="en-US" sz="1000" dirty="0"/>
           </a:p>
@@ -16217,7 +16235,7 @@
                 <a:ea typeface="Courier New" pitchFamily="34" charset="-122"/>
                 <a:cs typeface="Courier New" pitchFamily="34" charset="-120"/>
               </a:rPr>
-              <a:t>✓ ci-green (ci/pipeline_status, 0.5s)</a:t>
+              <a:t>✓ ci-green (ci/pipeline_status, 0.6s)</a:t>
             </a:r>
             <a:endParaRPr lang="en-US" sz="1000" dirty="0"/>
           </a:p>
@@ -16653,7 +16671,7 @@
                 <a:ea typeface="Courier New" pitchFamily="34" charset="-122"/>
                 <a:cs typeface="Courier New" pitchFamily="34" charset="-120"/>
               </a:rPr>
-              <a:t>      "id": "20261008T131524739Z-ci-green-a</a:t>
+              <a:t>      "id": "20261008T154345228Z-ci-green-a</a:t>
             </a:r>
             <a:endParaRPr lang="en-US" sz="1000" dirty="0"/>
           </a:p>
@@ -16670,7 +16688,7 @@
                 <a:ea typeface="Courier New" pitchFamily="34" charset="-122"/>
                 <a:cs typeface="Courier New" pitchFamily="34" charset="-120"/>
               </a:rPr>
-              <a:t>  1b7a6",</a:t>
+              <a:t>  a3050",</a:t>
             </a:r>
             <a:endParaRPr lang="en-US" sz="1000" dirty="0"/>
           </a:p>
@@ -16806,7 +16824,7 @@
                 <a:ea typeface="Courier New" pitchFamily="34" charset="-122"/>
                 <a:cs typeface="Courier New" pitchFamily="34" charset="-120"/>
               </a:rPr>
-              <a:t>        "ref": "5bbdd1a1d36a97ead88231bb2a1</a:t>
+              <a:t>        "ref": "cf6104e63c650f3e245f9cae890</a:t>
             </a:r>
             <a:endParaRPr lang="en-US" sz="1000" dirty="0"/>
           </a:p>
@@ -16823,7 +16841,7 @@
                 <a:ea typeface="Courier New" pitchFamily="34" charset="-122"/>
                 <a:cs typeface="Courier New" pitchFamily="34" charset="-120"/>
               </a:rPr>
-              <a:t>  e26a072e096e9",</a:t>
+              <a:t>  705b07a451e0b",</a:t>
             </a:r>
             <a:endParaRPr lang="en-US" sz="1000" dirty="0"/>
           </a:p>
@@ -19199,7 +19217,7 @@
                 <a:ea typeface="Cambria" pitchFamily="34" charset="-122"/>
                 <a:cs typeface="Cambria" pitchFamily="34" charset="-120"/>
               </a:rPr>
-              <a:t>101</a:t>
+              <a:t>102</a:t>
             </a:r>
             <a:endParaRPr lang="en-US" sz="6000" dirty="0"/>
           </a:p>
@@ -19304,7 +19322,7 @@
                 <a:ea typeface="Cambria" pitchFamily="34" charset="-122"/>
                 <a:cs typeface="Cambria" pitchFamily="34" charset="-120"/>
               </a:rPr>
-              <a:t>69</a:t>
+              <a:t>70</a:t>
             </a:r>
             <a:endParaRPr lang="en-US" sz="6000" dirty="0"/>
           </a:p>
@@ -19343,7 +19361,7 @@
                 <a:ea typeface="Calibri" pitchFamily="34" charset="-122"/>
                 <a:cs typeface="Calibri" pitchFamily="34" charset="-120"/>
               </a:rPr>
-              <a:t>of 69 commands</a:t>
+              <a:t>of 70 commands</a:t>
             </a:r>
             <a:endParaRPr lang="en-US" sz="1600" dirty="0"/>
           </a:p>
@@ -22802,7 +22820,7 @@
         <p:spPr>
           <a:xfrm>
             <a:off x="4257040" y="5138928"/>
-            <a:ext cx="747776" cy="256032"/>
+            <a:ext cx="615696" cy="256032"/>
           </a:xfrm>
           <a:prstGeom prst="roundRect">
             <a:avLst>
@@ -22829,7 +22847,7 @@
         <p:spPr>
           <a:xfrm>
             <a:off x="4257040" y="5138928"/>
-            <a:ext cx="747776" cy="256032"/>
+            <a:ext cx="615696" cy="256032"/>
           </a:xfrm>
           <a:prstGeom prst="rect">
             <a:avLst/>
@@ -22853,7 +22871,7 @@
                 <a:ea typeface="Calibri" pitchFamily="34" charset="-122"/>
                 <a:cs typeface="Calibri" pitchFamily="34" charset="-120"/>
               </a:rPr>
-              <a:t>takeover</a:t>
+              <a:t>answer</a:t>
             </a:r>
             <a:endParaRPr lang="en-US" sz="1000" dirty="0"/>
           </a:p>
@@ -22867,8 +22885,8 @@
         </p:nvSpPr>
         <p:spPr>
           <a:xfrm>
-            <a:off x="5096256" y="5138928"/>
-            <a:ext cx="1210056" cy="256032"/>
+            <a:off x="4964176" y="5138928"/>
+            <a:ext cx="747776" cy="256032"/>
           </a:xfrm>
           <a:prstGeom prst="roundRect">
             <a:avLst>
@@ -22894,8 +22912,8 @@
         </p:nvSpPr>
         <p:spPr>
           <a:xfrm>
-            <a:off x="5096256" y="5138928"/>
-            <a:ext cx="1210056" cy="256032"/>
+            <a:off x="4964176" y="5138928"/>
+            <a:ext cx="747776" cy="256032"/>
           </a:xfrm>
           <a:prstGeom prst="rect">
             <a:avLst/>
@@ -22919,7 +22937,7 @@
                 <a:ea typeface="Calibri" pitchFamily="34" charset="-122"/>
                 <a:cs typeface="Calibri" pitchFamily="34" charset="-120"/>
               </a:rPr>
-              <a:t>release-control</a:t>
+              <a:t>takeover</a:t>
             </a:r>
             <a:endParaRPr lang="en-US" sz="1000" dirty="0"/>
           </a:p>
@@ -22933,8 +22951,8 @@
         </p:nvSpPr>
         <p:spPr>
           <a:xfrm>
-            <a:off x="6397752" y="5138928"/>
-            <a:ext cx="615696" cy="256032"/>
+            <a:off x="5803392" y="5138928"/>
+            <a:ext cx="1210056" cy="256032"/>
           </a:xfrm>
           <a:prstGeom prst="roundRect">
             <a:avLst>
@@ -22960,8 +22978,8 @@
         </p:nvSpPr>
         <p:spPr>
           <a:xfrm>
-            <a:off x="6397752" y="5138928"/>
-            <a:ext cx="615696" cy="256032"/>
+            <a:off x="5803392" y="5138928"/>
+            <a:ext cx="1210056" cy="256032"/>
           </a:xfrm>
           <a:prstGeom prst="rect">
             <a:avLst/>
@@ -22985,7 +23003,7 @@
                 <a:ea typeface="Calibri" pitchFamily="34" charset="-122"/>
                 <a:cs typeface="Calibri" pitchFamily="34" charset="-120"/>
               </a:rPr>
-              <a:t>rework</a:t>
+              <a:t>release-control</a:t>
             </a:r>
             <a:endParaRPr lang="en-US" sz="1000" dirty="0"/>
           </a:p>
@@ -23000,7 +23018,7 @@
         <p:spPr>
           <a:xfrm>
             <a:off x="7104888" y="5138928"/>
-            <a:ext cx="1276096" cy="256032"/>
+            <a:ext cx="615696" cy="256032"/>
           </a:xfrm>
           <a:prstGeom prst="roundRect">
             <a:avLst>
@@ -23027,7 +23045,7 @@
         <p:spPr>
           <a:xfrm>
             <a:off x="7104888" y="5138928"/>
-            <a:ext cx="1276096" cy="256032"/>
+            <a:ext cx="615696" cy="256032"/>
           </a:xfrm>
           <a:prstGeom prst="rect">
             <a:avLst/>
@@ -23051,7 +23069,7 @@
                 <a:ea typeface="Calibri" pitchFamily="34" charset="-122"/>
                 <a:cs typeface="Calibri" pitchFamily="34" charset="-120"/>
               </a:rPr>
-              <a:t>approvals verify</a:t>
+              <a:t>rework</a:t>
             </a:r>
             <a:endParaRPr lang="en-US" sz="1000" dirty="0"/>
           </a:p>
@@ -23065,8 +23083,8 @@
         </p:nvSpPr>
         <p:spPr>
           <a:xfrm>
-            <a:off x="8472424" y="5138928"/>
-            <a:ext cx="549656" cy="256032"/>
+            <a:off x="7812024" y="5138928"/>
+            <a:ext cx="1276096" cy="256032"/>
           </a:xfrm>
           <a:prstGeom prst="roundRect">
             <a:avLst>
@@ -23092,8 +23110,8 @@
         </p:nvSpPr>
         <p:spPr>
           <a:xfrm>
-            <a:off x="8472424" y="5138928"/>
-            <a:ext cx="549656" cy="256032"/>
+            <a:off x="7812024" y="5138928"/>
+            <a:ext cx="1276096" cy="256032"/>
           </a:xfrm>
           <a:prstGeom prst="rect">
             <a:avLst/>
@@ -23117,7 +23135,7 @@
                 <a:ea typeface="Calibri" pitchFamily="34" charset="-122"/>
                 <a:cs typeface="Calibri" pitchFamily="34" charset="-120"/>
               </a:rPr>
-              <a:t>tests</a:t>
+              <a:t>approvals verify</a:t>
             </a:r>
             <a:endParaRPr lang="en-US" sz="1000" dirty="0"/>
           </a:p>
@@ -23131,8 +23149,8 @@
         </p:nvSpPr>
         <p:spPr>
           <a:xfrm>
-            <a:off x="9113520" y="5138928"/>
-            <a:ext cx="615696" cy="256032"/>
+            <a:off x="9179560" y="5138928"/>
+            <a:ext cx="549656" cy="256032"/>
           </a:xfrm>
           <a:prstGeom prst="roundRect">
             <a:avLst>
@@ -23158,8 +23176,8 @@
         </p:nvSpPr>
         <p:spPr>
           <a:xfrm>
-            <a:off x="9113520" y="5138928"/>
-            <a:ext cx="615696" cy="256032"/>
+            <a:off x="9179560" y="5138928"/>
+            <a:ext cx="549656" cy="256032"/>
           </a:xfrm>
           <a:prstGeom prst="rect">
             <a:avLst/>
@@ -23183,7 +23201,7 @@
                 <a:ea typeface="Calibri" pitchFamily="34" charset="-122"/>
                 <a:cs typeface="Calibri" pitchFamily="34" charset="-120"/>
               </a:rPr>
-              <a:t>verify</a:t>
+              <a:t>tests</a:t>
             </a:r>
             <a:endParaRPr lang="en-US" sz="1000" dirty="0"/>
           </a:p>
@@ -23249,7 +23267,7 @@
                 <a:ea typeface="Calibri" pitchFamily="34" charset="-122"/>
                 <a:cs typeface="Calibri" pitchFamily="34" charset="-120"/>
               </a:rPr>
-              <a:t>review</a:t>
+              <a:t>verify</a:t>
             </a:r>
             <a:endParaRPr lang="en-US" sz="1000" dirty="0"/>
           </a:p>
@@ -23264,7 +23282,7 @@
         <p:spPr>
           <a:xfrm>
             <a:off x="10527792" y="5138928"/>
-            <a:ext cx="747776" cy="256032"/>
+            <a:ext cx="615696" cy="256032"/>
           </a:xfrm>
           <a:prstGeom prst="roundRect">
             <a:avLst>
@@ -23291,7 +23309,7 @@
         <p:spPr>
           <a:xfrm>
             <a:off x="10527792" y="5138928"/>
-            <a:ext cx="747776" cy="256032"/>
+            <a:ext cx="615696" cy="256032"/>
           </a:xfrm>
           <a:prstGeom prst="rect">
             <a:avLst/>
@@ -23315,7 +23333,7 @@
                 <a:ea typeface="Calibri" pitchFamily="34" charset="-122"/>
                 <a:cs typeface="Calibri" pitchFamily="34" charset="-120"/>
               </a:rPr>
-              <a:t>validate</a:t>
+              <a:t>review</a:t>
             </a:r>
             <a:endParaRPr lang="en-US" sz="1000" dirty="0"/>
           </a:p>
@@ -23330,7 +23348,7 @@
         <p:spPr>
           <a:xfrm>
             <a:off x="457200" y="5486400"/>
-            <a:ext cx="681736" cy="256032"/>
+            <a:ext cx="747776" cy="256032"/>
           </a:xfrm>
           <a:prstGeom prst="roundRect">
             <a:avLst>
@@ -23357,7 +23375,7 @@
         <p:spPr>
           <a:xfrm>
             <a:off x="457200" y="5486400"/>
-            <a:ext cx="681736" cy="256032"/>
+            <a:ext cx="747776" cy="256032"/>
           </a:xfrm>
           <a:prstGeom prst="rect">
             <a:avLst/>
@@ -23381,7 +23399,7 @@
                 <a:ea typeface="Calibri" pitchFamily="34" charset="-122"/>
                 <a:cs typeface="Calibri" pitchFamily="34" charset="-120"/>
               </a:rPr>
-              <a:t>archive</a:t>
+              <a:t>validate</a:t>
             </a:r>
             <a:endParaRPr lang="en-US" sz="1000" dirty="0"/>
           </a:p>
@@ -23395,8 +23413,8 @@
         </p:nvSpPr>
         <p:spPr>
           <a:xfrm>
-            <a:off x="1230376" y="5486400"/>
-            <a:ext cx="549656" cy="256032"/>
+            <a:off x="1296416" y="5486400"/>
+            <a:ext cx="681736" cy="256032"/>
           </a:xfrm>
           <a:prstGeom prst="roundRect">
             <a:avLst>
@@ -23422,8 +23440,8 @@
         </p:nvSpPr>
         <p:spPr>
           <a:xfrm>
-            <a:off x="1230376" y="5486400"/>
-            <a:ext cx="549656" cy="256032"/>
+            <a:off x="1296416" y="5486400"/>
+            <a:ext cx="681736" cy="256032"/>
           </a:xfrm>
           <a:prstGeom prst="rect">
             <a:avLst/>
@@ -23447,7 +23465,7 @@
                 <a:ea typeface="Calibri" pitchFamily="34" charset="-122"/>
                 <a:cs typeface="Calibri" pitchFamily="34" charset="-120"/>
               </a:rPr>
-              <a:t>audit</a:t>
+              <a:t>archive</a:t>
             </a:r>
             <a:endParaRPr lang="en-US" sz="1000" dirty="0"/>
           </a:p>
@@ -23461,8 +23479,8 @@
         </p:nvSpPr>
         <p:spPr>
           <a:xfrm>
-            <a:off x="1871472" y="5486400"/>
-            <a:ext cx="615696" cy="256032"/>
+            <a:off x="2069592" y="5486400"/>
+            <a:ext cx="549656" cy="256032"/>
           </a:xfrm>
           <a:prstGeom prst="roundRect">
             <a:avLst>
@@ -23488,8 +23506,8 @@
         </p:nvSpPr>
         <p:spPr>
           <a:xfrm>
-            <a:off x="1871472" y="5486400"/>
-            <a:ext cx="615696" cy="256032"/>
+            <a:off x="2069592" y="5486400"/>
+            <a:ext cx="549656" cy="256032"/>
           </a:xfrm>
           <a:prstGeom prst="rect">
             <a:avLst/>
@@ -23513,7 +23531,7 @@
                 <a:ea typeface="Calibri" pitchFamily="34" charset="-122"/>
                 <a:cs typeface="Calibri" pitchFamily="34" charset="-120"/>
               </a:rPr>
-              <a:t>report</a:t>
+              <a:t>audit</a:t>
             </a:r>
             <a:endParaRPr lang="en-US" sz="1000" dirty="0"/>
           </a:p>
@@ -23527,8 +23545,8 @@
         </p:nvSpPr>
         <p:spPr>
           <a:xfrm>
-            <a:off x="2578608" y="5486400"/>
-            <a:ext cx="813816" cy="256032"/>
+            <a:off x="2710688" y="5486400"/>
+            <a:ext cx="615696" cy="256032"/>
           </a:xfrm>
           <a:prstGeom prst="roundRect">
             <a:avLst>
@@ -23554,8 +23572,8 @@
         </p:nvSpPr>
         <p:spPr>
           <a:xfrm>
-            <a:off x="2578608" y="5486400"/>
-            <a:ext cx="813816" cy="256032"/>
+            <a:off x="2710688" y="5486400"/>
+            <a:ext cx="615696" cy="256032"/>
           </a:xfrm>
           <a:prstGeom prst="rect">
             <a:avLst/>
@@ -23579,7 +23597,7 @@
                 <a:ea typeface="Calibri" pitchFamily="34" charset="-122"/>
                 <a:cs typeface="Calibri" pitchFamily="34" charset="-120"/>
               </a:rPr>
-              <a:t>dashboard</a:t>
+              <a:t>report</a:t>
             </a:r>
             <a:endParaRPr lang="en-US" sz="1000" dirty="0"/>
           </a:p>
@@ -23593,8 +23611,8 @@
         </p:nvSpPr>
         <p:spPr>
           <a:xfrm>
-            <a:off x="3483864" y="5486400"/>
-            <a:ext cx="417576" cy="256032"/>
+            <a:off x="3417824" y="5486400"/>
+            <a:ext cx="813816" cy="256032"/>
           </a:xfrm>
           <a:prstGeom prst="roundRect">
             <a:avLst>
@@ -23620,8 +23638,8 @@
         </p:nvSpPr>
         <p:spPr>
           <a:xfrm>
-            <a:off x="3483864" y="5486400"/>
-            <a:ext cx="417576" cy="256032"/>
+            <a:off x="3417824" y="5486400"/>
+            <a:ext cx="813816" cy="256032"/>
           </a:xfrm>
           <a:prstGeom prst="rect">
             <a:avLst/>
@@ -23645,7 +23663,7 @@
                 <a:ea typeface="Calibri" pitchFamily="34" charset="-122"/>
                 <a:cs typeface="Calibri" pitchFamily="34" charset="-120"/>
               </a:rPr>
-              <a:t>log</a:t>
+              <a:t>dashboard</a:t>
             </a:r>
             <a:endParaRPr lang="en-US" sz="1000" dirty="0"/>
           </a:p>
@@ -23659,8 +23677,8 @@
         </p:nvSpPr>
         <p:spPr>
           <a:xfrm>
-            <a:off x="3992880" y="5486400"/>
-            <a:ext cx="681736" cy="256032"/>
+            <a:off x="4323080" y="5486400"/>
+            <a:ext cx="417576" cy="256032"/>
           </a:xfrm>
           <a:prstGeom prst="roundRect">
             <a:avLst>
@@ -23686,8 +23704,8 @@
         </p:nvSpPr>
         <p:spPr>
           <a:xfrm>
-            <a:off x="3992880" y="5486400"/>
-            <a:ext cx="681736" cy="256032"/>
+            <a:off x="4323080" y="5486400"/>
+            <a:ext cx="417576" cy="256032"/>
           </a:xfrm>
           <a:prstGeom prst="rect">
             <a:avLst/>
@@ -23711,7 +23729,7 @@
                 <a:ea typeface="Calibri" pitchFamily="34" charset="-122"/>
                 <a:cs typeface="Calibri" pitchFamily="34" charset="-120"/>
               </a:rPr>
-              <a:t>license</a:t>
+              <a:t>log</a:t>
             </a:r>
             <a:endParaRPr lang="en-US" sz="1000" dirty="0"/>
           </a:p>
@@ -23725,8 +23743,8 @@
         </p:nvSpPr>
         <p:spPr>
           <a:xfrm>
-            <a:off x="4766056" y="5486400"/>
-            <a:ext cx="615696" cy="256032"/>
+            <a:off x="4832096" y="5486400"/>
+            <a:ext cx="681736" cy="256032"/>
           </a:xfrm>
           <a:prstGeom prst="roundRect">
             <a:avLst>
@@ -23752,8 +23770,8 @@
         </p:nvSpPr>
         <p:spPr>
           <a:xfrm>
-            <a:off x="4766056" y="5486400"/>
-            <a:ext cx="615696" cy="256032"/>
+            <a:off x="4832096" y="5486400"/>
+            <a:ext cx="681736" cy="256032"/>
           </a:xfrm>
           <a:prstGeom prst="rect">
             <a:avLst/>
@@ -23777,7 +23795,7 @@
                 <a:ea typeface="Calibri" pitchFamily="34" charset="-122"/>
                 <a:cs typeface="Calibri" pitchFamily="34" charset="-120"/>
               </a:rPr>
-              <a:t>doctor</a:t>
+              <a:t>license</a:t>
             </a:r>
             <a:endParaRPr lang="en-US" sz="1000" dirty="0"/>
           </a:p>
@@ -23791,7 +23809,7 @@
         </p:nvSpPr>
         <p:spPr>
           <a:xfrm>
-            <a:off x="5473192" y="5486400"/>
+            <a:off x="5605272" y="5486400"/>
             <a:ext cx="615696" cy="256032"/>
           </a:xfrm>
           <a:prstGeom prst="roundRect">
@@ -23818,7 +23836,7 @@
         </p:nvSpPr>
         <p:spPr>
           <a:xfrm>
-            <a:off x="5473192" y="5486400"/>
+            <a:off x="5605272" y="5486400"/>
             <a:ext cx="615696" cy="256032"/>
           </a:xfrm>
           <a:prstGeom prst="rect">
@@ -23843,7 +23861,7 @@
                 <a:ea typeface="Calibri" pitchFamily="34" charset="-122"/>
                 <a:cs typeface="Calibri" pitchFamily="34" charset="-120"/>
               </a:rPr>
-              <a:t>health</a:t>
+              <a:t>doctor</a:t>
             </a:r>
             <a:endParaRPr lang="en-US" sz="1000" dirty="0"/>
           </a:p>
@@ -23857,8 +23875,8 @@
         </p:nvSpPr>
         <p:spPr>
           <a:xfrm>
-            <a:off x="6180328" y="5486400"/>
-            <a:ext cx="1011936" cy="256032"/>
+            <a:off x="6312408" y="5486400"/>
+            <a:ext cx="615696" cy="256032"/>
           </a:xfrm>
           <a:prstGeom prst="roundRect">
             <a:avLst>
@@ -23884,8 +23902,8 @@
         </p:nvSpPr>
         <p:spPr>
           <a:xfrm>
-            <a:off x="6180328" y="5486400"/>
-            <a:ext cx="1011936" cy="256032"/>
+            <a:off x="6312408" y="5486400"/>
+            <a:ext cx="615696" cy="256032"/>
           </a:xfrm>
           <a:prstGeom prst="rect">
             <a:avLst/>
@@ -23909,7 +23927,7 @@
                 <a:ea typeface="Calibri" pitchFamily="34" charset="-122"/>
                 <a:cs typeface="Calibri" pitchFamily="34" charset="-120"/>
               </a:rPr>
-              <a:t>plugin build</a:t>
+              <a:t>health</a:t>
             </a:r>
             <a:endParaRPr lang="en-US" sz="1000" dirty="0"/>
           </a:p>
@@ -23923,8 +23941,8 @@
         </p:nvSpPr>
         <p:spPr>
           <a:xfrm>
-            <a:off x="7283704" y="5486400"/>
-            <a:ext cx="549656" cy="256032"/>
+            <a:off x="7019544" y="5486400"/>
+            <a:ext cx="1011936" cy="256032"/>
           </a:xfrm>
           <a:prstGeom prst="roundRect">
             <a:avLst>
@@ -23950,8 +23968,8 @@
         </p:nvSpPr>
         <p:spPr>
           <a:xfrm>
-            <a:off x="7283704" y="5486400"/>
-            <a:ext cx="549656" cy="256032"/>
+            <a:off x="7019544" y="5486400"/>
+            <a:ext cx="1011936" cy="256032"/>
           </a:xfrm>
           <a:prstGeom prst="rect">
             <a:avLst/>
@@ -23975,7 +23993,7 @@
                 <a:ea typeface="Calibri" pitchFamily="34" charset="-122"/>
                 <a:cs typeface="Calibri" pitchFamily="34" charset="-120"/>
               </a:rPr>
-              <a:t>trace</a:t>
+              <a:t>plugin build</a:t>
             </a:r>
             <a:endParaRPr lang="en-US" sz="1000" dirty="0"/>
           </a:p>
@@ -23989,8 +24007,8 @@
         </p:nvSpPr>
         <p:spPr>
           <a:xfrm>
-            <a:off x="7924800" y="5486400"/>
-            <a:ext cx="483616" cy="256032"/>
+            <a:off x="8122920" y="5486400"/>
+            <a:ext cx="549656" cy="256032"/>
           </a:xfrm>
           <a:prstGeom prst="roundRect">
             <a:avLst>
@@ -24016,8 +24034,8 @@
         </p:nvSpPr>
         <p:spPr>
           <a:xfrm>
-            <a:off x="7924800" y="5486400"/>
-            <a:ext cx="483616" cy="256032"/>
+            <a:off x="8122920" y="5486400"/>
+            <a:ext cx="549656" cy="256032"/>
           </a:xfrm>
           <a:prstGeom prst="rect">
             <a:avLst/>
@@ -24041,7 +24059,7 @@
                 <a:ea typeface="Calibri" pitchFamily="34" charset="-122"/>
                 <a:cs typeface="Calibri" pitchFamily="34" charset="-120"/>
               </a:rPr>
-              <a:t>hook</a:t>
+              <a:t>trace</a:t>
             </a:r>
             <a:endParaRPr lang="en-US" sz="1000" dirty="0"/>
           </a:p>
@@ -24055,8 +24073,8 @@
         </p:nvSpPr>
         <p:spPr>
           <a:xfrm>
-            <a:off x="8499856" y="5486400"/>
-            <a:ext cx="747776" cy="256032"/>
+            <a:off x="8764016" y="5486400"/>
+            <a:ext cx="483616" cy="256032"/>
           </a:xfrm>
           <a:prstGeom prst="roundRect">
             <a:avLst>
@@ -24082,7 +24100,73 @@
         </p:nvSpPr>
         <p:spPr>
           <a:xfrm>
-            <a:off x="8499856" y="5486400"/>
+            <a:off x="8764016" y="5486400"/>
+            <a:ext cx="483616" cy="256032"/>
+          </a:xfrm>
+          <a:prstGeom prst="rect">
+            <a:avLst/>
+          </a:prstGeom>
+          <a:noFill/>
+          <a:ln/>
+        </p:spPr>
+        <p:txBody>
+          <a:bodyPr wrap="square" lIns="0" tIns="0" rIns="0" bIns="0" rtlCol="0" anchor="ctr"/>
+          <a:lstStyle/>
+          <a:p>
+            <a:pPr algn="ctr" indent="0" marL="0">
+              <a:buNone/>
+            </a:pPr>
+            <a:r>
+              <a:rPr lang="en-US" sz="1000" dirty="0">
+                <a:solidFill>
+                  <a:srgbClr val="1F2430"/>
+                </a:solidFill>
+                <a:latin typeface="Calibri" pitchFamily="34" charset="0"/>
+                <a:ea typeface="Calibri" pitchFamily="34" charset="-122"/>
+                <a:cs typeface="Calibri" pitchFamily="34" charset="-120"/>
+              </a:rPr>
+              <a:t>hook</a:t>
+            </a:r>
+            <a:endParaRPr lang="en-US" sz="1000" dirty="0"/>
+          </a:p>
+        </p:txBody>
+      </p:sp>
+      <p:sp>
+        <p:nvSpPr>
+          <p:cNvPr id="154" name="Shape 152"/>
+          <p:cNvSpPr/>
+          <p:nvPr/>
+        </p:nvSpPr>
+        <p:spPr>
+          <a:xfrm>
+            <a:off x="9339072" y="5486400"/>
+            <a:ext cx="747776" cy="256032"/>
+          </a:xfrm>
+          <a:prstGeom prst="roundRect">
+            <a:avLst>
+              <a:gd name="adj" fmla="val 50000"/>
+            </a:avLst>
+          </a:prstGeom>
+          <a:solidFill>
+            <a:srgbClr val="F3F5F8"/>
+          </a:solidFill>
+          <a:ln w="12700">
+            <a:solidFill>
+              <a:srgbClr val="F3F5F8"/>
+            </a:solidFill>
+            <a:prstDash val="solid"/>
+          </a:ln>
+        </p:spPr>
+      </p:sp>
+      <p:sp>
+        <p:nvSpPr>
+          <p:cNvPr id="155" name="Text 153"/>
+          <p:cNvSpPr txBox="1"/>
+          <p:nvPr/>
+        </p:nvSpPr>
+        <p:spPr>
+          <a:xfrm>
+            <a:off x="9339072" y="5486400"/>
             <a:ext cx="747776" cy="256032"/>
           </a:xfrm>
           <a:prstGeom prst="rect">
@@ -26753,7 +26837,7 @@
                 <a:ea typeface="Courier New" pitchFamily="34" charset="-122"/>
                 <a:cs typeface="Courier New" pitchFamily="34" charset="-120"/>
               </a:rPr>
-              <a:t>  sdlc 0.11.3, license: community</a:t>
+              <a:t>  sdlc 0.11.4, license: community</a:t>
             </a:r>
             <a:endParaRPr lang="en-US" sz="1000" dirty="0"/>
           </a:p>
@@ -32262,11 +32346,11 @@
         <p:spPr>
           <a:xfrm>
             <a:off x="457200" y="1645920"/>
-            <a:ext cx="3575304" cy="3749040"/>
+            <a:ext cx="2612898" cy="3749040"/>
           </a:xfrm>
           <a:prstGeom prst="roundRect">
             <a:avLst>
-              <a:gd name="adj" fmla="val 2558"/>
+              <a:gd name="adj" fmla="val 3500"/>
             </a:avLst>
           </a:prstGeom>
           <a:solidFill>
@@ -32289,7 +32373,7 @@
         <p:spPr>
           <a:xfrm>
             <a:off x="594360" y="1783080"/>
-            <a:ext cx="1371600" cy="274320"/>
+            <a:ext cx="1045159" cy="274320"/>
           </a:xfrm>
           <a:prstGeom prst="roundRect">
             <a:avLst>
@@ -32316,7 +32400,7 @@
         <p:spPr>
           <a:xfrm>
             <a:off x="594360" y="1783080"/>
-            <a:ext cx="1371600" cy="274320"/>
+            <a:ext cx="1045159" cy="274320"/>
           </a:xfrm>
           <a:prstGeom prst="rect">
             <a:avLst/>
@@ -32354,7 +32438,7 @@
         </p:nvSpPr>
         <p:spPr>
           <a:xfrm>
-            <a:off x="2889504" y="1783080"/>
+            <a:off x="1927098" y="1783080"/>
             <a:ext cx="1005840" cy="274320"/>
           </a:xfrm>
           <a:prstGeom prst="rect">
@@ -32394,7 +32478,7 @@
         <p:spPr>
           <a:xfrm>
             <a:off x="594360" y="2176272"/>
-            <a:ext cx="3300984" cy="365760"/>
+            <a:ext cx="2338578" cy="365760"/>
           </a:xfrm>
           <a:prstGeom prst="rect">
             <a:avLst/>
@@ -32418,7 +32502,7 @@
                 <a:ea typeface="Courier New" pitchFamily="34" charset="-122"/>
                 <a:cs typeface="Courier New" pitchFamily="34" charset="-120"/>
               </a:rPr>
-              <a:t>$ sdlc approve intent --change</a:t>
+              <a:t>$ sdlc approve intent</a:t>
             </a:r>
             <a:endParaRPr lang="en-US" sz="1100" dirty="0"/>
           </a:p>
@@ -32435,7 +32519,7 @@
                 <a:ea typeface="Courier New" pitchFamily="34" charset="-122"/>
                 <a:cs typeface="Courier New" pitchFamily="34" charset="-120"/>
               </a:rPr>
-              <a:t>basic-arithmetic</a:t>
+              <a:t>--change basic-arithmetic</a:t>
             </a:r>
             <a:endParaRPr lang="en-US" sz="1100" dirty="0"/>
           </a:p>
@@ -32450,7 +32534,7 @@
         <p:spPr>
           <a:xfrm>
             <a:off x="594360" y="2651760"/>
-            <a:ext cx="3300984" cy="2606040"/>
+            <a:ext cx="2338578" cy="2606040"/>
           </a:xfrm>
           <a:prstGeom prst="rect">
             <a:avLst/>
@@ -32474,7 +32558,7 @@
                 <a:ea typeface="Courier New" pitchFamily="34" charset="-122"/>
                 <a:cs typeface="Courier New" pitchFamily="34" charset="-120"/>
               </a:rPr>
-              <a:t>`sdlc approve` records a human decision and</a:t>
+              <a:t>`sdlc approve` records a human</a:t>
             </a:r>
             <a:endParaRPr lang="en-US" sz="1000" dirty="0"/>
           </a:p>
@@ -32491,7 +32575,7 @@
                 <a:ea typeface="Courier New" pitchFamily="34" charset="-122"/>
                 <a:cs typeface="Courier New" pitchFamily="34" charset="-120"/>
               </a:rPr>
-              <a:t>  cannot run inside an agent session</a:t>
+              <a:t>  decision and cannot run</a:t>
             </a:r>
             <a:endParaRPr lang="en-US" sz="1000" dirty="0"/>
           </a:p>
@@ -32508,6 +32592,23 @@
                 <a:ea typeface="Courier New" pitchFamily="34" charset="-122"/>
                 <a:cs typeface="Courier New" pitchFamily="34" charset="-120"/>
               </a:rPr>
+              <a:t>  inside an agent session</a:t>
+            </a:r>
+            <a:endParaRPr lang="en-US" sz="1000" dirty="0"/>
+          </a:p>
+          <a:p>
+            <a:pPr indent="0" marL="0">
+              <a:buNone/>
+            </a:pPr>
+            <a:r>
+              <a:rPr lang="en-US" sz="1000" dirty="0">
+                <a:solidFill>
+                  <a:srgbClr val="E8EEF2"/>
+                </a:solidFill>
+                <a:latin typeface="Courier New" pitchFamily="34" charset="0"/>
+                <a:ea typeface="Courier New" pitchFamily="34" charset="-122"/>
+                <a:cs typeface="Courier New" pitchFamily="34" charset="-120"/>
+              </a:rPr>
               <a:t>  (claude-code).</a:t>
             </a:r>
             <a:endParaRPr lang="en-US" sz="1000" dirty="0"/>
@@ -32525,7 +32626,7 @@
                 <a:ea typeface="Courier New" pitchFamily="34" charset="-122"/>
                 <a:cs typeface="Courier New" pitchFamily="34" charset="-120"/>
               </a:rPr>
-              <a:t>fix: Run it yourself in your own terminal,</a:t>
+              <a:t>fix: Run it yourself in your</a:t>
             </a:r>
             <a:endParaRPr lang="en-US" sz="1000" dirty="0"/>
           </a:p>
@@ -32542,7 +32643,7 @@
                 <a:ea typeface="Courier New" pitchFamily="34" charset="-122"/>
                 <a:cs typeface="Courier New" pitchFamily="34" charset="-120"/>
               </a:rPr>
-              <a:t>  not in the agent chat (a `!` command</a:t>
+              <a:t>  own terminal, not in the</a:t>
             </a:r>
             <a:endParaRPr lang="en-US" sz="1000" dirty="0"/>
           </a:p>
@@ -32559,7 +32660,7 @@
                 <a:ea typeface="Courier New" pitchFamily="34" charset="-122"/>
                 <a:cs typeface="Courier New" pitchFamily="34" charset="-120"/>
               </a:rPr>
-              <a:t>  there runs in the agent's shell): sdlc</a:t>
+              <a:t>  agent chat (a `!` command</a:t>
             </a:r>
             <a:endParaRPr lang="en-US" sz="1000" dirty="0"/>
           </a:p>
@@ -32576,7 +32677,41 @@
                 <a:ea typeface="Courier New" pitchFamily="34" charset="-122"/>
                 <a:cs typeface="Courier New" pitchFamily="34" charset="-120"/>
               </a:rPr>
-              <a:t>  approve intent --change basic-arithmetic</a:t>
+              <a:t>  there runs in the agent's</a:t>
+            </a:r>
+            <a:endParaRPr lang="en-US" sz="1000" dirty="0"/>
+          </a:p>
+          <a:p>
+            <a:pPr indent="0" marL="0">
+              <a:buNone/>
+            </a:pPr>
+            <a:r>
+              <a:rPr lang="en-US" sz="1000" dirty="0">
+                <a:solidFill>
+                  <a:srgbClr val="E8EEF2"/>
+                </a:solidFill>
+                <a:latin typeface="Courier New" pitchFamily="34" charset="0"/>
+                <a:ea typeface="Courier New" pitchFamily="34" charset="-122"/>
+                <a:cs typeface="Courier New" pitchFamily="34" charset="-120"/>
+              </a:rPr>
+              <a:t>  shell): sdlc approve intent</a:t>
+            </a:r>
+            <a:endParaRPr lang="en-US" sz="1000" dirty="0"/>
+          </a:p>
+          <a:p>
+            <a:pPr indent="0" marL="0">
+              <a:buNone/>
+            </a:pPr>
+            <a:r>
+              <a:rPr lang="en-US" sz="1000" dirty="0">
+                <a:solidFill>
+                  <a:srgbClr val="E8EEF2"/>
+                </a:solidFill>
+                <a:latin typeface="Courier New" pitchFamily="34" charset="0"/>
+                <a:ea typeface="Courier New" pitchFamily="34" charset="-122"/>
+                <a:cs typeface="Courier New" pitchFamily="34" charset="-120"/>
+              </a:rPr>
+              <a:t>  --change basic-arithmetic</a:t>
             </a:r>
             <a:endParaRPr lang="en-US" sz="1000" dirty="0"/>
           </a:p>
@@ -32591,7 +32726,7 @@
         <p:spPr>
           <a:xfrm>
             <a:off x="457200" y="5468112"/>
-            <a:ext cx="3575304" cy="384048"/>
+            <a:ext cx="2612898" cy="384048"/>
           </a:xfrm>
           <a:prstGeom prst="rect">
             <a:avLst/>
@@ -32629,12 +32764,12 @@
         </p:nvSpPr>
         <p:spPr>
           <a:xfrm>
-            <a:off x="4306824" y="1645920"/>
-            <a:ext cx="3575304" cy="3749040"/>
+            <a:off x="3344418" y="1645920"/>
+            <a:ext cx="2612898" cy="3749040"/>
           </a:xfrm>
           <a:prstGeom prst="roundRect">
             <a:avLst>
-              <a:gd name="adj" fmla="val 2558"/>
+              <a:gd name="adj" fmla="val 3500"/>
             </a:avLst>
           </a:prstGeom>
           <a:solidFill>
@@ -32656,8 +32791,8 @@
         </p:nvSpPr>
         <p:spPr>
           <a:xfrm>
-            <a:off x="4443984" y="1783080"/>
-            <a:ext cx="1371600" cy="274320"/>
+            <a:off x="3481578" y="1783080"/>
+            <a:ext cx="1045159" cy="274320"/>
           </a:xfrm>
           <a:prstGeom prst="roundRect">
             <a:avLst>
@@ -32683,8 +32818,8 @@
         </p:nvSpPr>
         <p:spPr>
           <a:xfrm>
-            <a:off x="4443984" y="1783080"/>
-            <a:ext cx="1371600" cy="274320"/>
+            <a:off x="3481578" y="1783080"/>
+            <a:ext cx="1045159" cy="274320"/>
           </a:xfrm>
           <a:prstGeom prst="rect">
             <a:avLst/>
@@ -32722,7 +32857,7 @@
         </p:nvSpPr>
         <p:spPr>
           <a:xfrm>
-            <a:off x="6739128" y="1783080"/>
+            <a:off x="4814316" y="1783080"/>
             <a:ext cx="1005840" cy="274320"/>
           </a:xfrm>
           <a:prstGeom prst="rect">
@@ -32761,8 +32896,8 @@
         </p:nvSpPr>
         <p:spPr>
           <a:xfrm>
-            <a:off x="4443984" y="2176272"/>
-            <a:ext cx="3300984" cy="365760"/>
+            <a:off x="3481578" y="2176272"/>
+            <a:ext cx="2338578" cy="365760"/>
           </a:xfrm>
           <a:prstGeom prst="rect">
             <a:avLst/>
@@ -32786,7 +32921,7 @@
                 <a:ea typeface="Courier New" pitchFamily="34" charset="-122"/>
                 <a:cs typeface="Courier New" pitchFamily="34" charset="-120"/>
               </a:rPr>
-              <a:t>$ sdlc approve intent --change</a:t>
+              <a:t>$ sdlc approve intent</a:t>
             </a:r>
             <a:endParaRPr lang="en-US" sz="1100" dirty="0"/>
           </a:p>
@@ -32803,7 +32938,7 @@
                 <a:ea typeface="Courier New" pitchFamily="34" charset="-122"/>
                 <a:cs typeface="Courier New" pitchFamily="34" charset="-120"/>
               </a:rPr>
-              <a:t>basic-arithmetic</a:t>
+              <a:t>--change basic-arithmetic</a:t>
             </a:r>
             <a:endParaRPr lang="en-US" sz="1100" dirty="0"/>
           </a:p>
@@ -32817,8 +32952,8 @@
         </p:nvSpPr>
         <p:spPr>
           <a:xfrm>
-            <a:off x="4443984" y="2651760"/>
-            <a:ext cx="3300984" cy="2606040"/>
+            <a:off x="3481578" y="2651760"/>
+            <a:ext cx="2338578" cy="2606040"/>
           </a:xfrm>
           <a:prstGeom prst="rect">
             <a:avLst/>
@@ -32842,7 +32977,7 @@
                 <a:ea typeface="Courier New" pitchFamily="34" charset="-122"/>
                 <a:cs typeface="Courier New" pitchFamily="34" charset="-120"/>
               </a:rPr>
-              <a:t>Bob Turner does not hold product-owner; ask</a:t>
+              <a:t>Bob Turner does not hold</a:t>
             </a:r>
             <a:endParaRPr lang="en-US" sz="1000" dirty="0"/>
           </a:p>
@@ -32859,7 +32994,7 @@
                 <a:ea typeface="Courier New" pitchFamily="34" charset="-122"/>
                 <a:cs typeface="Courier New" pitchFamily="34" charset="-120"/>
               </a:rPr>
-              <a:t>  Alice Walker.</a:t>
+              <a:t>  product-owner; ask Alice</a:t>
             </a:r>
             <a:endParaRPr lang="en-US" sz="1000" dirty="0"/>
           </a:p>
@@ -32876,6 +33011,23 @@
                 <a:ea typeface="Courier New" pitchFamily="34" charset="-122"/>
                 <a:cs typeface="Courier New" pitchFamily="34" charset="-120"/>
               </a:rPr>
+              <a:t>  Walker.</a:t>
+            </a:r>
+            <a:endParaRPr lang="en-US" sz="1000" dirty="0"/>
+          </a:p>
+          <a:p>
+            <a:pPr indent="0" marL="0">
+              <a:buNone/>
+            </a:pPr>
+            <a:r>
+              <a:rPr lang="en-US" sz="1000" dirty="0">
+                <a:solidFill>
+                  <a:srgbClr val="E8EEF2"/>
+                </a:solidFill>
+                <a:latin typeface="Courier New" pitchFamily="34" charset="0"/>
+                <a:ea typeface="Courier New" pitchFamily="34" charset="-122"/>
+                <a:cs typeface="Courier New" pitchFamily="34" charset="-120"/>
+              </a:rPr>
               <a:t>fix: Ask one of: Alice Walker.</a:t>
             </a:r>
             <a:endParaRPr lang="en-US" sz="1000" dirty="0"/>
@@ -32890,8 +33042,8 @@
         </p:nvSpPr>
         <p:spPr>
           <a:xfrm>
-            <a:off x="4306824" y="5468112"/>
-            <a:ext cx="3575304" cy="384048"/>
+            <a:off x="3344418" y="5468112"/>
+            <a:ext cx="2612898" cy="384048"/>
           </a:xfrm>
           <a:prstGeom prst="rect">
             <a:avLst/>
@@ -32929,12 +33081,12 @@
         </p:nvSpPr>
         <p:spPr>
           <a:xfrm>
-            <a:off x="8156448" y="1645920"/>
-            <a:ext cx="3575304" cy="3749040"/>
+            <a:off x="6231636" y="1645920"/>
+            <a:ext cx="2612898" cy="3749040"/>
           </a:xfrm>
           <a:prstGeom prst="roundRect">
             <a:avLst>
-              <a:gd name="adj" fmla="val 2558"/>
+              <a:gd name="adj" fmla="val 3500"/>
             </a:avLst>
           </a:prstGeom>
           <a:solidFill>
@@ -32956,8 +33108,8 @@
         </p:nvSpPr>
         <p:spPr>
           <a:xfrm>
-            <a:off x="8293608" y="1783080"/>
-            <a:ext cx="1371600" cy="274320"/>
+            <a:off x="6368796" y="1783080"/>
+            <a:ext cx="1045159" cy="274320"/>
           </a:xfrm>
           <a:prstGeom prst="roundRect">
             <a:avLst>
@@ -32983,8 +33135,8 @@
         </p:nvSpPr>
         <p:spPr>
           <a:xfrm>
-            <a:off x="8293608" y="1783080"/>
-            <a:ext cx="1371600" cy="274320"/>
+            <a:off x="6368796" y="1783080"/>
+            <a:ext cx="1045159" cy="274320"/>
           </a:xfrm>
           <a:prstGeom prst="rect">
             <a:avLst/>
@@ -33017,6 +33169,323 @@
       <p:sp>
         <p:nvSpPr>
           <p:cNvPr id="21" name="Text 19"/>
+          <p:cNvSpPr txBox="1"/>
+          <p:nvPr/>
+        </p:nvSpPr>
+        <p:spPr>
+          <a:xfrm>
+            <a:off x="7701534" y="1783080"/>
+            <a:ext cx="1005840" cy="274320"/>
+          </a:xfrm>
+          <a:prstGeom prst="rect">
+            <a:avLst/>
+          </a:prstGeom>
+          <a:noFill/>
+          <a:ln/>
+        </p:spPr>
+        <p:txBody>
+          <a:bodyPr wrap="square" lIns="0" tIns="0" rIns="0" bIns="0" rtlCol="0" anchor="ctr"/>
+          <a:lstStyle/>
+          <a:p>
+            <a:pPr algn="r" indent="0" marL="0">
+              <a:buNone/>
+            </a:pPr>
+            <a:r>
+              <a:rPr lang="en-US" sz="1100" b="1" dirty="0">
+                <a:solidFill>
+                  <a:srgbClr val="2FA66A"/>
+                </a:solidFill>
+                <a:latin typeface="Calibri" pitchFamily="34" charset="0"/>
+                <a:ea typeface="Calibri" pitchFamily="34" charset="-122"/>
+                <a:cs typeface="Calibri" pitchFamily="34" charset="-120"/>
+              </a:rPr>
+              <a:t>✓ exit 0</a:t>
+            </a:r>
+            <a:endParaRPr lang="en-US" sz="1100" dirty="0"/>
+          </a:p>
+        </p:txBody>
+      </p:sp>
+      <p:sp>
+        <p:nvSpPr>
+          <p:cNvPr id="22" name="Text 20"/>
+          <p:cNvSpPr txBox="1"/>
+          <p:nvPr/>
+        </p:nvSpPr>
+        <p:spPr>
+          <a:xfrm>
+            <a:off x="6368796" y="2176272"/>
+            <a:ext cx="2338578" cy="365760"/>
+          </a:xfrm>
+          <a:prstGeom prst="rect">
+            <a:avLst/>
+          </a:prstGeom>
+          <a:noFill/>
+          <a:ln/>
+        </p:spPr>
+        <p:txBody>
+          <a:bodyPr wrap="square" lIns="0" tIns="0" rIns="0" bIns="0" rtlCol="0" anchor="t"/>
+          <a:lstStyle/>
+          <a:p>
+            <a:pPr indent="0" marL="0">
+              <a:buNone/>
+            </a:pPr>
+            <a:r>
+              <a:rPr lang="en-US" sz="1100" dirty="0">
+                <a:solidFill>
+                  <a:srgbClr val="F2A541"/>
+                </a:solidFill>
+                <a:latin typeface="Courier New" pitchFamily="34" charset="0"/>
+                <a:ea typeface="Courier New" pitchFamily="34" charset="-122"/>
+                <a:cs typeface="Courier New" pitchFamily="34" charset="-120"/>
+              </a:rPr>
+              <a:t>$ sdlc answer 1 --change</a:t>
+            </a:r>
+            <a:endParaRPr lang="en-US" sz="1100" dirty="0"/>
+          </a:p>
+          <a:p>
+            <a:pPr indent="0" marL="0">
+              <a:buNone/>
+            </a:pPr>
+            <a:r>
+              <a:rPr lang="en-US" sz="1100" dirty="0">
+                <a:solidFill>
+                  <a:srgbClr val="F2A541"/>
+                </a:solidFill>
+                <a:latin typeface="Courier New" pitchFamily="34" charset="0"/>
+                <a:ea typeface="Courier New" pitchFamily="34" charset="-122"/>
+                <a:cs typeface="Courier New" pitchFamily="34" charset="-120"/>
+              </a:rPr>
+              <a:t>basic-arithmetic --text No…</a:t>
+            </a:r>
+            <a:endParaRPr lang="en-US" sz="1100" dirty="0"/>
+          </a:p>
+        </p:txBody>
+      </p:sp>
+      <p:sp>
+        <p:nvSpPr>
+          <p:cNvPr id="23" name="Text 21"/>
+          <p:cNvSpPr txBox="1"/>
+          <p:nvPr/>
+        </p:nvSpPr>
+        <p:spPr>
+          <a:xfrm>
+            <a:off x="6368796" y="2651760"/>
+            <a:ext cx="2338578" cy="2606040"/>
+          </a:xfrm>
+          <a:prstGeom prst="rect">
+            <a:avLst/>
+          </a:prstGeom>
+          <a:noFill/>
+          <a:ln/>
+        </p:spPr>
+        <p:txBody>
+          <a:bodyPr wrap="square" lIns="0" tIns="0" rIns="0" bIns="0" rtlCol="0" anchor="t"/>
+          <a:lstStyle/>
+          <a:p>
+            <a:pPr indent="0" marL="0">
+              <a:buNone/>
+            </a:pPr>
+            <a:r>
+              <a:rPr lang="en-US" sz="1000" dirty="0">
+                <a:solidFill>
+                  <a:srgbClr val="E8EEF2"/>
+                </a:solidFill>
+                <a:latin typeface="Courier New" pitchFamily="34" charset="0"/>
+                <a:ea typeface="Courier New" pitchFamily="34" charset="-122"/>
+                <a:cs typeface="Courier New" pitchFamily="34" charset="-120"/>
+              </a:rPr>
+              <a:t>Answer to question 1 of</a:t>
+            </a:r>
+            <a:endParaRPr lang="en-US" sz="1000" dirty="0"/>
+          </a:p>
+          <a:p>
+            <a:pPr indent="0" marL="0">
+              <a:buNone/>
+            </a:pPr>
+            <a:r>
+              <a:rPr lang="en-US" sz="1000" dirty="0">
+                <a:solidFill>
+                  <a:srgbClr val="E8EEF2"/>
+                </a:solidFill>
+                <a:latin typeface="Courier New" pitchFamily="34" charset="0"/>
+                <a:ea typeface="Courier New" pitchFamily="34" charset="-122"/>
+                <a:cs typeface="Courier New" pitchFamily="34" charset="-120"/>
+              </a:rPr>
+              <a:t>  intent.md recorded by Alice</a:t>
+            </a:r>
+            <a:endParaRPr lang="en-US" sz="1000" dirty="0"/>
+          </a:p>
+          <a:p>
+            <a:pPr indent="0" marL="0">
+              <a:buNone/>
+            </a:pPr>
+            <a:r>
+              <a:rPr lang="en-US" sz="1000" dirty="0">
+                <a:solidFill>
+                  <a:srgbClr val="E8EEF2"/>
+                </a:solidFill>
+                <a:latin typeface="Courier New" pitchFamily="34" charset="0"/>
+                <a:ea typeface="Courier New" pitchFamily="34" charset="-122"/>
+                <a:cs typeface="Courier New" pitchFamily="34" charset="-120"/>
+              </a:rPr>
+              <a:t>  Walker &lt;alice@calc.example&gt;.</a:t>
+            </a:r>
+            <a:endParaRPr lang="en-US" sz="1000" dirty="0"/>
+          </a:p>
+        </p:txBody>
+      </p:sp>
+      <p:sp>
+        <p:nvSpPr>
+          <p:cNvPr id="24" name="Text 22"/>
+          <p:cNvSpPr txBox="1"/>
+          <p:nvPr/>
+        </p:nvSpPr>
+        <p:spPr>
+          <a:xfrm>
+            <a:off x="6231636" y="5468112"/>
+            <a:ext cx="2612898" cy="384048"/>
+          </a:xfrm>
+          <a:prstGeom prst="rect">
+            <a:avLst/>
+          </a:prstGeom>
+          <a:noFill/>
+          <a:ln/>
+        </p:spPr>
+        <p:txBody>
+          <a:bodyPr wrap="square" lIns="0" tIns="0" rIns="0" bIns="0" rtlCol="0" anchor="t"/>
+          <a:lstStyle/>
+          <a:p>
+            <a:pPr indent="0" marL="0">
+              <a:buNone/>
+            </a:pPr>
+            <a:r>
+              <a:rPr lang="en-US" sz="1100" i="1" dirty="0">
+                <a:solidFill>
+                  <a:srgbClr val="5B6475"/>
+                </a:solidFill>
+                <a:latin typeface="Calibri" pitchFamily="34" charset="0"/>
+                <a:ea typeface="Calibri" pitchFamily="34" charset="-122"/>
+                <a:cs typeface="Calibri" pitchFamily="34" charset="-120"/>
+              </a:rPr>
+              <a:t>Alice answers the open question of</a:t>
+            </a:r>
+            <a:endParaRPr lang="en-US" sz="1100" dirty="0"/>
+          </a:p>
+          <a:p>
+            <a:pPr indent="0" marL="0">
+              <a:buNone/>
+            </a:pPr>
+            <a:r>
+              <a:rPr lang="en-US" sz="1100" i="1" dirty="0">
+                <a:solidFill>
+                  <a:srgbClr val="5B6475"/>
+                </a:solidFill>
+                <a:latin typeface="Calibri" pitchFamily="34" charset="0"/>
+                <a:ea typeface="Calibri" pitchFamily="34" charset="-122"/>
+                <a:cs typeface="Calibri" pitchFamily="34" charset="-120"/>
+              </a:rPr>
+              <a:t>the intent herself: the agent cannot.</a:t>
+            </a:r>
+            <a:endParaRPr lang="en-US" sz="1100" dirty="0"/>
+          </a:p>
+        </p:txBody>
+      </p:sp>
+      <p:sp>
+        <p:nvSpPr>
+          <p:cNvPr id="25" name="Shape 23"/>
+          <p:cNvSpPr/>
+          <p:nvPr/>
+        </p:nvSpPr>
+        <p:spPr>
+          <a:xfrm>
+            <a:off x="9118854" y="1645920"/>
+            <a:ext cx="2612898" cy="3749040"/>
+          </a:xfrm>
+          <a:prstGeom prst="roundRect">
+            <a:avLst>
+              <a:gd name="adj" fmla="val 3500"/>
+            </a:avLst>
+          </a:prstGeom>
+          <a:solidFill>
+            <a:srgbClr val="1F2430"/>
+          </a:solidFill>
+          <a:ln w="12700">
+            <a:solidFill>
+              <a:srgbClr val="1F2430"/>
+            </a:solidFill>
+            <a:prstDash val="solid"/>
+          </a:ln>
+        </p:spPr>
+      </p:sp>
+      <p:sp>
+        <p:nvSpPr>
+          <p:cNvPr id="26" name="Shape 24"/>
+          <p:cNvSpPr/>
+          <p:nvPr/>
+        </p:nvSpPr>
+        <p:spPr>
+          <a:xfrm>
+            <a:off x="9256014" y="1783080"/>
+            <a:ext cx="1045159" cy="274320"/>
+          </a:xfrm>
+          <a:prstGeom prst="roundRect">
+            <a:avLst>
+              <a:gd name="adj" fmla="val 50000"/>
+            </a:avLst>
+          </a:prstGeom>
+          <a:solidFill>
+            <a:srgbClr val="7C5CFF"/>
+          </a:solidFill>
+          <a:ln w="12700">
+            <a:solidFill>
+              <a:srgbClr val="7C5CFF"/>
+            </a:solidFill>
+            <a:prstDash val="solid"/>
+          </a:ln>
+        </p:spPr>
+      </p:sp>
+      <p:sp>
+        <p:nvSpPr>
+          <p:cNvPr id="27" name="Text 25"/>
+          <p:cNvSpPr txBox="1"/>
+          <p:nvPr/>
+        </p:nvSpPr>
+        <p:spPr>
+          <a:xfrm>
+            <a:off x="9256014" y="1783080"/>
+            <a:ext cx="1045159" cy="274320"/>
+          </a:xfrm>
+          <a:prstGeom prst="rect">
+            <a:avLst/>
+          </a:prstGeom>
+          <a:noFill/>
+          <a:ln/>
+        </p:spPr>
+        <p:txBody>
+          <a:bodyPr wrap="square" lIns="0" tIns="0" rIns="0" bIns="0" rtlCol="0" anchor="ctr"/>
+          <a:lstStyle/>
+          <a:p>
+            <a:pPr algn="ctr" indent="0" marL="0">
+              <a:buNone/>
+            </a:pPr>
+            <a:r>
+              <a:rPr lang="en-US" sz="1100" b="1" dirty="0">
+                <a:solidFill>
+                  <a:srgbClr val="FFFFFF"/>
+                </a:solidFill>
+                <a:latin typeface="Calibri" pitchFamily="34" charset="0"/>
+                <a:ea typeface="Calibri" pitchFamily="34" charset="-122"/>
+                <a:cs typeface="Calibri" pitchFamily="34" charset="-120"/>
+              </a:rPr>
+              <a:t>Alice</a:t>
+            </a:r>
+            <a:endParaRPr lang="en-US" sz="1100" dirty="0"/>
+          </a:p>
+        </p:txBody>
+      </p:sp>
+      <p:sp>
+        <p:nvSpPr>
+          <p:cNvPr id="28" name="Text 26"/>
           <p:cNvSpPr txBox="1"/>
           <p:nvPr/>
         </p:nvSpPr>
@@ -33055,14 +33524,14 @@
       </p:sp>
       <p:sp>
         <p:nvSpPr>
-          <p:cNvPr id="22" name="Text 20"/>
-          <p:cNvSpPr txBox="1"/>
-          <p:nvPr/>
-        </p:nvSpPr>
-        <p:spPr>
-          <a:xfrm>
-            <a:off x="8293608" y="2176272"/>
-            <a:ext cx="3300984" cy="365760"/>
+          <p:cNvPr id="29" name="Text 27"/>
+          <p:cNvSpPr txBox="1"/>
+          <p:nvPr/>
+        </p:nvSpPr>
+        <p:spPr>
+          <a:xfrm>
+            <a:off x="9256014" y="2176272"/>
+            <a:ext cx="2338578" cy="365760"/>
           </a:xfrm>
           <a:prstGeom prst="rect">
             <a:avLst/>
@@ -33086,7 +33555,7 @@
                 <a:ea typeface="Courier New" pitchFamily="34" charset="-122"/>
                 <a:cs typeface="Courier New" pitchFamily="34" charset="-120"/>
               </a:rPr>
-              <a:t>$ sdlc approve intent --change</a:t>
+              <a:t>$ sdlc approve intent</a:t>
             </a:r>
             <a:endParaRPr lang="en-US" sz="1100" dirty="0"/>
           </a:p>
@@ -33103,7 +33572,7 @@
                 <a:ea typeface="Courier New" pitchFamily="34" charset="-122"/>
                 <a:cs typeface="Courier New" pitchFamily="34" charset="-120"/>
               </a:rPr>
-              <a:t>basic-arithmetic</a:t>
+              <a:t>--change basic-arithmetic</a:t>
             </a:r>
             <a:endParaRPr lang="en-US" sz="1100" dirty="0"/>
           </a:p>
@@ -33111,14 +33580,14 @@
       </p:sp>
       <p:sp>
         <p:nvSpPr>
-          <p:cNvPr id="23" name="Text 21"/>
-          <p:cNvSpPr txBox="1"/>
-          <p:nvPr/>
-        </p:nvSpPr>
-        <p:spPr>
-          <a:xfrm>
-            <a:off x="8293608" y="2651760"/>
-            <a:ext cx="3300984" cy="2606040"/>
+          <p:cNvPr id="30" name="Text 28"/>
+          <p:cNvSpPr txBox="1"/>
+          <p:nvPr/>
+        </p:nvSpPr>
+        <p:spPr>
+          <a:xfrm>
+            <a:off x="9256014" y="2651760"/>
+            <a:ext cx="2338578" cy="2606040"/>
           </a:xfrm>
           <a:prstGeom prst="rect">
             <a:avLst/>
@@ -33159,7 +33628,7 @@
                 <a:ea typeface="Courier New" pitchFamily="34" charset="-122"/>
                 <a:cs typeface="Courier New" pitchFamily="34" charset="-120"/>
               </a:rPr>
-              <a:t>  &lt;alice@calc.example&gt; approved as</a:t>
+              <a:t>  &lt;alice@calc.example&gt;</a:t>
             </a:r>
             <a:endParaRPr lang="en-US" sz="1000" dirty="0"/>
           </a:p>
@@ -33176,7 +33645,7 @@
                 <a:ea typeface="Courier New" pitchFamily="34" charset="-122"/>
                 <a:cs typeface="Courier New" pitchFamily="34" charset="-120"/>
               </a:rPr>
-              <a:t>  product-owner (adecb64c45af)</a:t>
+              <a:t>  approved as product-owner</a:t>
             </a:r>
             <a:endParaRPr lang="en-US" sz="1000" dirty="0"/>
           </a:p>
@@ -33193,7 +33662,7 @@
                 <a:ea typeface="Courier New" pitchFamily="34" charset="-122"/>
                 <a:cs typeface="Courier New" pitchFamily="34" charset="-120"/>
               </a:rPr>
-              <a:t>Suggested commit message (its trailer ties</a:t>
+              <a:t>  (f27bc8d851ef)</a:t>
             </a:r>
             <a:endParaRPr lang="en-US" sz="1000" dirty="0"/>
           </a:p>
@@ -33210,7 +33679,7 @@
                 <a:ea typeface="Courier New" pitchFamily="34" charset="-122"/>
                 <a:cs typeface="Courier New" pitchFamily="34" charset="-120"/>
               </a:rPr>
-              <a:t>  the commit to this approval):</a:t>
+              <a:t>Suggested commit message (its</a:t>
             </a:r>
             <a:endParaRPr lang="en-US" sz="1000" dirty="0"/>
           </a:p>
@@ -33227,7 +33696,7 @@
                 <a:ea typeface="Courier New" pitchFamily="34" charset="-122"/>
                 <a:cs typeface="Courier New" pitchFamily="34" charset="-120"/>
               </a:rPr>
-              <a:t>  $ git commit -m "chore(basic-arithmetic):</a:t>
+              <a:t>  trailer ties the commit to</a:t>
             </a:r>
             <a:endParaRPr lang="en-US" sz="1000" dirty="0"/>
           </a:p>
@@ -33244,7 +33713,7 @@
                 <a:ea typeface="Courier New" pitchFamily="34" charset="-122"/>
                 <a:cs typeface="Courier New" pitchFamily="34" charset="-120"/>
               </a:rPr>
-              <a:t>  approve the intent gate" -m</a:t>
+              <a:t>  this approval):</a:t>
             </a:r>
             <a:endParaRPr lang="en-US" sz="1000" dirty="0"/>
           </a:p>
@@ -33261,7 +33730,7 @@
                 <a:ea typeface="Courier New" pitchFamily="34" charset="-122"/>
                 <a:cs typeface="Courier New" pitchFamily="34" charset="-120"/>
               </a:rPr>
-              <a:t>  "SDLC-Approval: basic-arithmetic:intent:a</a:t>
+              <a:t>  $ git commit -m "chore(basic</a:t>
             </a:r>
             <a:endParaRPr lang="en-US" sz="1000" dirty="0"/>
           </a:p>
@@ -33278,7 +33747,7 @@
                 <a:ea typeface="Courier New" pitchFamily="34" charset="-122"/>
                 <a:cs typeface="Courier New" pitchFamily="34" charset="-120"/>
               </a:rPr>
-              <a:t>  decb64c45af"</a:t>
+              <a:t>  -arithmetic): approve the</a:t>
             </a:r>
             <a:endParaRPr lang="en-US" sz="1000" dirty="0"/>
           </a:p>
@@ -33295,7 +33764,7 @@
                 <a:ea typeface="Courier New" pitchFamily="34" charset="-122"/>
                 <a:cs typeface="Courier New" pitchFamily="34" charset="-120"/>
               </a:rPr>
-              <a:t>Next: agent — Write proposal (proposal.md)</a:t>
+              <a:t>  intent gate" -m "SDLC-Approv</a:t>
             </a:r>
             <a:endParaRPr lang="en-US" sz="1000" dirty="0"/>
           </a:p>
@@ -33312,22 +33781,73 @@
                 <a:ea typeface="Courier New" pitchFamily="34" charset="-122"/>
                 <a:cs typeface="Courier New" pitchFamily="34" charset="-120"/>
               </a:rPr>
-              <a:t>  for the spec gate. (/sdlc:spec)</a:t>
-            </a:r>
-            <a:endParaRPr lang="en-US" sz="1000" dirty="0"/>
-          </a:p>
-        </p:txBody>
-      </p:sp>
-      <p:sp>
-        <p:nvSpPr>
-          <p:cNvPr id="24" name="Text 22"/>
-          <p:cNvSpPr txBox="1"/>
-          <p:nvPr/>
-        </p:nvSpPr>
-        <p:spPr>
-          <a:xfrm>
-            <a:off x="8156448" y="5468112"/>
-            <a:ext cx="3575304" cy="384048"/>
+              <a:t>  al: basic-arithmetic:intent:</a:t>
+            </a:r>
+            <a:endParaRPr lang="en-US" sz="1000" dirty="0"/>
+          </a:p>
+          <a:p>
+            <a:pPr indent="0" marL="0">
+              <a:buNone/>
+            </a:pPr>
+            <a:r>
+              <a:rPr lang="en-US" sz="1000" dirty="0">
+                <a:solidFill>
+                  <a:srgbClr val="E8EEF2"/>
+                </a:solidFill>
+                <a:latin typeface="Courier New" pitchFamily="34" charset="0"/>
+                <a:ea typeface="Courier New" pitchFamily="34" charset="-122"/>
+                <a:cs typeface="Courier New" pitchFamily="34" charset="-120"/>
+              </a:rPr>
+              <a:t>  f27bc8d851ef"</a:t>
+            </a:r>
+            <a:endParaRPr lang="en-US" sz="1000" dirty="0"/>
+          </a:p>
+          <a:p>
+            <a:pPr indent="0" marL="0">
+              <a:buNone/>
+            </a:pPr>
+            <a:r>
+              <a:rPr lang="en-US" sz="1000" dirty="0">
+                <a:solidFill>
+                  <a:srgbClr val="E8EEF2"/>
+                </a:solidFill>
+                <a:latin typeface="Courier New" pitchFamily="34" charset="0"/>
+                <a:ea typeface="Courier New" pitchFamily="34" charset="-122"/>
+                <a:cs typeface="Courier New" pitchFamily="34" charset="-120"/>
+              </a:rPr>
+              <a:t>Next: agent — Write proposal</a:t>
+            </a:r>
+            <a:endParaRPr lang="en-US" sz="1000" dirty="0"/>
+          </a:p>
+          <a:p>
+            <a:pPr indent="0" marL="0">
+              <a:buNone/>
+            </a:pPr>
+            <a:r>
+              <a:rPr lang="en-US" sz="1000" dirty="0">
+                <a:solidFill>
+                  <a:srgbClr val="E8EEF2"/>
+                </a:solidFill>
+                <a:latin typeface="Courier New" pitchFamily="34" charset="0"/>
+                <a:ea typeface="Courier New" pitchFamily="34" charset="-122"/>
+                <a:cs typeface="Courier New" pitchFamily="34" charset="-120"/>
+              </a:rPr>
+              <a:t>…</a:t>
+            </a:r>
+            <a:endParaRPr lang="en-US" sz="1000" dirty="0"/>
+          </a:p>
+        </p:txBody>
+      </p:sp>
+      <p:sp>
+        <p:nvSpPr>
+          <p:cNvPr id="31" name="Text 29"/>
+          <p:cNvSpPr txBox="1"/>
+          <p:nvPr/>
+        </p:nvSpPr>
+        <p:spPr>
+          <a:xfrm>
+            <a:off x="9118854" y="5468112"/>
+            <a:ext cx="2612898" cy="384048"/>
           </a:xfrm>
           <a:prstGeom prst="rect">
             <a:avLst/>
@@ -33359,7 +33879,7 @@
       </p:sp>
       <p:sp>
         <p:nvSpPr>
-          <p:cNvPr id="25" name="Text 23"/>
+          <p:cNvPr id="32" name="Text 30"/>
           <p:cNvSpPr txBox="1"/>
           <p:nvPr/>
         </p:nvSpPr>
@@ -33398,7 +33918,7 @@
       </p:sp>
       <p:sp>
         <p:nvSpPr>
-          <p:cNvPr id="26" name="Shape 24"/>
+          <p:cNvPr id="33" name="Shape 31"/>
           <p:cNvSpPr/>
           <p:nvPr/>
         </p:nvSpPr>
@@ -33425,7 +33945,7 @@
       </p:sp>
       <p:sp>
         <p:nvSpPr>
-          <p:cNvPr id="27" name="Text 25"/>
+          <p:cNvPr id="34" name="Text 32"/>
           <p:cNvSpPr txBox="1"/>
           <p:nvPr/>
         </p:nvSpPr>
@@ -33464,7 +33984,7 @@
       </p:sp>
       <p:sp>
         <p:nvSpPr>
-          <p:cNvPr id="28" name="Shape 26"/>
+          <p:cNvPr id="35" name="Shape 33"/>
           <p:cNvSpPr/>
           <p:nvPr/>
         </p:nvSpPr>
@@ -33491,7 +34011,7 @@
       </p:sp>
       <p:sp>
         <p:nvSpPr>
-          <p:cNvPr id="29" name="Text 27"/>
+          <p:cNvPr id="36" name="Text 34"/>
           <p:cNvSpPr txBox="1"/>
           <p:nvPr/>
         </p:nvSpPr>
@@ -33530,7 +34050,7 @@
       </p:sp>
       <p:sp>
         <p:nvSpPr>
-          <p:cNvPr id="30" name="Shape 28"/>
+          <p:cNvPr id="37" name="Shape 35"/>
           <p:cNvSpPr/>
           <p:nvPr/>
         </p:nvSpPr>
@@ -33557,7 +34077,7 @@
       </p:sp>
       <p:sp>
         <p:nvSpPr>
-          <p:cNvPr id="31" name="Text 29"/>
+          <p:cNvPr id="38" name="Text 36"/>
           <p:cNvSpPr txBox="1"/>
           <p:nvPr/>
         </p:nvSpPr>

--- a/docs/demo/sdlc-calculator-demo.en.pptx
+++ b/docs/demo/sdlc-calculator-demo.en.pptx
@@ -6660,7 +6660,7 @@
                 <a:ea typeface="Courier New" pitchFamily="34" charset="-122"/>
                 <a:cs typeface="Courier New" pitchFamily="34" charset="-120"/>
               </a:rPr>
-              <a:t>  code-owner (dc583d37ba4d)</a:t>
+              <a:t>  code-owner (015cf69a73e1)</a:t>
             </a:r>
             <a:endParaRPr lang="en-US" sz="1000" dirty="0"/>
           </a:p>
@@ -6745,7 +6745,7 @@
                 <a:ea typeface="Courier New" pitchFamily="34" charset="-122"/>
                 <a:cs typeface="Courier New" pitchFamily="34" charset="-120"/>
               </a:rPr>
-              <a:t>  "SDLC-Approval: basic-arithmetic:review:d</a:t>
+              <a:t>  "SDLC-Approval: basic-arithmetic:review:0</a:t>
             </a:r>
             <a:endParaRPr lang="en-US" sz="1000" dirty="0"/>
           </a:p>
@@ -6762,7 +6762,7 @@
                 <a:ea typeface="Courier New" pitchFamily="34" charset="-122"/>
                 <a:cs typeface="Courier New" pitchFamily="34" charset="-120"/>
               </a:rPr>
-              <a:t>  c583d37ba4d"</a:t>
+              <a:t>  15cf69a73e1"</a:t>
             </a:r>
             <a:endParaRPr lang="en-US" sz="1000" dirty="0"/>
           </a:p>
@@ -7443,7 +7443,7 @@
                 <a:ea typeface="Courier New" pitchFamily="34" charset="-122"/>
                 <a:cs typeface="Courier New" pitchFamily="34" charset="-120"/>
               </a:rPr>
-              <a:t>  release-manager (dc583d37ba4d)</a:t>
+              <a:t>  release-manager (015cf69a73e1)</a:t>
             </a:r>
             <a:endParaRPr lang="en-US" sz="1000" dirty="0"/>
           </a:p>
@@ -7511,7 +7511,7 @@
                 <a:ea typeface="Courier New" pitchFamily="34" charset="-122"/>
                 <a:cs typeface="Courier New" pitchFamily="34" charset="-120"/>
               </a:rPr>
-              <a:t>  gate" -m "SDLC-Approval: basic-arithmetic:release:dc583d37ba4d"</a:t>
+              <a:t>  gate" -m "SDLC-Approval: basic-arithmetic:release:015cf69a73e1"</a:t>
             </a:r>
             <a:endParaRPr lang="en-US" sz="1000" dirty="0"/>
           </a:p>
@@ -7811,7 +7811,7 @@
                 <a:ea typeface="Courier New" pitchFamily="34" charset="-122"/>
                 <a:cs typeface="Courier New" pitchFamily="34" charset="-120"/>
               </a:rPr>
-              <a:t>✓ basic-arithmetic/intent alice valid 8a399908</a:t>
+              <a:t>✓ basic-arithmetic/intent alice valid 8cfdef5c</a:t>
             </a:r>
             <a:endParaRPr lang="en-US" sz="1000" dirty="0"/>
           </a:p>
@@ -7828,7 +7828,7 @@
                 <a:ea typeface="Courier New" pitchFamily="34" charset="-122"/>
                 <a:cs typeface="Courier New" pitchFamily="34" charset="-120"/>
               </a:rPr>
-              <a:t>✓ basic-arithmetic/spec alice valid 44090c60</a:t>
+              <a:t>✓ basic-arithmetic/spec alice valid 5891a520</a:t>
             </a:r>
             <a:endParaRPr lang="en-US" sz="1000" dirty="0"/>
           </a:p>
@@ -7845,7 +7845,7 @@
                 <a:ea typeface="Courier New" pitchFamily="34" charset="-122"/>
                 <a:cs typeface="Courier New" pitchFamily="34" charset="-120"/>
               </a:rPr>
-              <a:t>✗ basic-arithmetic/plan bob wrong-signer 44090c60</a:t>
+              <a:t>✗ basic-arithmetic/plan bob wrong-signer 5891a520</a:t>
             </a:r>
             <a:endParaRPr lang="en-US" sz="1000" dirty="0"/>
           </a:p>
@@ -7862,7 +7862,7 @@
                 <a:ea typeface="Courier New" pitchFamily="34" charset="-122"/>
                 <a:cs typeface="Courier New" pitchFamily="34" charset="-120"/>
               </a:rPr>
-              <a:t>✓ basic-arithmetic/review carol valid 6cf7633c</a:t>
+              <a:t>✓ basic-arithmetic/review carol valid 07a01500</a:t>
             </a:r>
             <a:endParaRPr lang="en-US" sz="1000" dirty="0"/>
           </a:p>
@@ -7879,7 +7879,7 @@
                 <a:ea typeface="Courier New" pitchFamily="34" charset="-122"/>
                 <a:cs typeface="Courier New" pitchFamily="34" charset="-120"/>
               </a:rPr>
-              <a:t>✓ basic-arithmetic/release alice valid 68179d3e</a:t>
+              <a:t>✓ basic-arithmetic/release alice valid 4b9f8a00</a:t>
             </a:r>
             <a:endParaRPr lang="en-US" sz="1000" dirty="0"/>
           </a:p>
@@ -7896,7 +7896,7 @@
                 <a:ea typeface="Courier New" pitchFamily="34" charset="-122"/>
                 <a:cs typeface="Courier New" pitchFamily="34" charset="-120"/>
               </a:rPr>
-              <a:t>✓ openspec/roles.yaml alice@calc.example valid 652eda92</a:t>
+              <a:t>✓ openspec/roles.yaml alice@calc.example valid a53165de</a:t>
             </a:r>
             <a:endParaRPr lang="en-US" sz="1000" dirty="0"/>
           </a:p>
@@ -8057,7 +8057,7 @@
         <p:spPr>
           <a:xfrm>
             <a:off x="2240280" y="6053328"/>
-            <a:ext cx="1077976" cy="256032"/>
+            <a:ext cx="813816" cy="256032"/>
           </a:xfrm>
           <a:prstGeom prst="roundRect">
             <a:avLst>
@@ -8084,6 +8084,72 @@
         <p:spPr>
           <a:xfrm>
             <a:off x="2240280" y="6053328"/>
+            <a:ext cx="813816" cy="256032"/>
+          </a:xfrm>
+          <a:prstGeom prst="rect">
+            <a:avLst/>
+          </a:prstGeom>
+          <a:noFill/>
+          <a:ln/>
+        </p:spPr>
+        <p:txBody>
+          <a:bodyPr wrap="square" lIns="0" tIns="0" rIns="0" bIns="0" rtlCol="0" anchor="ctr"/>
+          <a:lstStyle/>
+          <a:p>
+            <a:pPr algn="ctr" indent="0" marL="0">
+              <a:buNone/>
+            </a:pPr>
+            <a:r>
+              <a:rPr lang="en-US" sz="1000" dirty="0">
+                <a:solidFill>
+                  <a:srgbClr val="5B6475"/>
+                </a:solidFill>
+                <a:latin typeface="Calibri" pitchFamily="34" charset="0"/>
+                <a:ea typeface="Calibri" pitchFamily="34" charset="-122"/>
+                <a:cs typeface="Calibri" pitchFamily="34" charset="-120"/>
+              </a:rPr>
+              <a:t>changelog</a:t>
+            </a:r>
+            <a:endParaRPr lang="en-US" sz="1000" dirty="0"/>
+          </a:p>
+        </p:txBody>
+      </p:sp>
+      <p:sp>
+        <p:nvSpPr>
+          <p:cNvPr id="21" name="Shape 19"/>
+          <p:cNvSpPr/>
+          <p:nvPr/>
+        </p:nvSpPr>
+        <p:spPr>
+          <a:xfrm>
+            <a:off x="3145536" y="6053328"/>
+            <a:ext cx="1077976" cy="256032"/>
+          </a:xfrm>
+          <a:prstGeom prst="roundRect">
+            <a:avLst>
+              <a:gd name="adj" fmla="val 50000"/>
+            </a:avLst>
+          </a:prstGeom>
+          <a:solidFill>
+            <a:srgbClr val="F3F5F8"/>
+          </a:solidFill>
+          <a:ln w="12700">
+            <a:solidFill>
+              <a:srgbClr val="F3F5F8"/>
+            </a:solidFill>
+            <a:prstDash val="solid"/>
+          </a:ln>
+        </p:spPr>
+      </p:sp>
+      <p:sp>
+        <p:nvSpPr>
+          <p:cNvPr id="22" name="Text 20"/>
+          <p:cNvSpPr txBox="1"/>
+          <p:nvPr/>
+        </p:nvSpPr>
+        <p:spPr>
+          <a:xfrm>
+            <a:off x="3145536" y="6053328"/>
             <a:ext cx="1077976" cy="256032"/>
           </a:xfrm>
           <a:prstGeom prst="rect">
@@ -14316,7 +14382,7 @@
                 <a:ea typeface="Courier New" pitchFamily="34" charset="-122"/>
                 <a:cs typeface="Courier New" pitchFamily="34" charset="-120"/>
               </a:rPr>
-              <a:t>  archived) · sdlc 0.11.4, license:</a:t>
+              <a:t>  archived) · sdlc 0.12.0, license:</a:t>
             </a:r>
             <a:endParaRPr lang="en-US" sz="1000" dirty="0"/>
           </a:p>
@@ -14452,6 +14518,40 @@
                 <a:ea typeface="Courier New" pitchFamily="34" charset="-122"/>
                 <a:cs typeface="Courier New" pitchFamily="34" charset="-120"/>
               </a:rPr>
+              <a:t>  agent commits: 11 of 12 (SDLC-Agent</a:t>
+            </a:r>
+            <a:endParaRPr lang="en-US" sz="1000" dirty="0"/>
+          </a:p>
+          <a:p>
+            <a:pPr indent="0" marL="0">
+              <a:buNone/>
+            </a:pPr>
+            <a:r>
+              <a:rPr lang="en-US" sz="1000" dirty="0">
+                <a:solidFill>
+                  <a:srgbClr val="E8EEF2"/>
+                </a:solidFill>
+                <a:latin typeface="Courier New" pitchFamily="34" charset="0"/>
+                <a:ea typeface="Courier New" pitchFamily="34" charset="-122"/>
+                <a:cs typeface="Courier New" pitchFamily="34" charset="-120"/>
+              </a:rPr>
+              <a:t>  trailer)</a:t>
+            </a:r>
+            <a:endParaRPr lang="en-US" sz="1000" dirty="0"/>
+          </a:p>
+          <a:p>
+            <a:pPr indent="0" marL="0">
+              <a:buNone/>
+            </a:pPr>
+            <a:r>
+              <a:rPr lang="en-US" sz="1000" dirty="0">
+                <a:solidFill>
+                  <a:srgbClr val="E8EEF2"/>
+                </a:solidFill>
+                <a:latin typeface="Courier New" pitchFamily="34" charset="0"/>
+                <a:ea typeface="Courier New" pitchFamily="34" charset="-122"/>
+                <a:cs typeface="Courier New" pitchFamily="34" charset="-120"/>
+              </a:rPr>
               <a:t>  median wait for a person (seconds):</a:t>
             </a:r>
             <a:endParaRPr lang="en-US" sz="1000" dirty="0"/>
@@ -14469,7 +14569,7 @@
                 <a:ea typeface="Courier New" pitchFamily="34" charset="-122"/>
                 <a:cs typeface="Courier New" pitchFamily="34" charset="-120"/>
               </a:rPr>
-              <a:t>  intent 2 · plan 10 · review 3; rework</a:t>
+              <a:t>  intent 3 · plan 11 · review 3; rework</a:t>
             </a:r>
             <a:endParaRPr lang="en-US" sz="1000" dirty="0"/>
           </a:p>
@@ -14504,40 +14604,6 @@
                 <a:cs typeface="Courier New" pitchFamily="34" charset="-120"/>
               </a:rPr>
               <a:t>  people's participation (3 changes),</a:t>
-            </a:r>
-            <a:endParaRPr lang="en-US" sz="1000" dirty="0"/>
-          </a:p>
-          <a:p>
-            <a:pPr indent="0" marL="0">
-              <a:buNone/>
-            </a:pPr>
-            <a:r>
-              <a:rPr lang="en-US" sz="1000" dirty="0">
-                <a:solidFill>
-                  <a:srgbClr val="E8EEF2"/>
-                </a:solidFill>
-                <a:latin typeface="Courier New" pitchFamily="34" charset="0"/>
-                <a:ea typeface="Courier New" pitchFamily="34" charset="-122"/>
-                <a:cs typeface="Courier New" pitchFamily="34" charset="-120"/>
-              </a:rPr>
-              <a:t>  planned / actual: gate decisions 10;</a:t>
-            </a:r>
-            <a:endParaRPr lang="en-US" sz="1000" dirty="0"/>
-          </a:p>
-          <a:p>
-            <a:pPr indent="0" marL="0">
-              <a:buNone/>
-            </a:pPr>
-            <a:r>
-              <a:rPr lang="en-US" sz="1000" dirty="0">
-                <a:solidFill>
-                  <a:srgbClr val="E8EEF2"/>
-                </a:solidFill>
-                <a:latin typeface="Courier New" pitchFamily="34" charset="0"/>
-                <a:ea typeface="Courier New" pitchFamily="34" charset="-122"/>
-                <a:cs typeface="Courier New" pitchFamily="34" charset="-120"/>
-              </a:rPr>
-              <a:t>  approvals 10 / 7; reworks 1, takeovers 1,</a:t>
             </a:r>
             <a:endParaRPr lang="en-US" sz="1000" dirty="0"/>
           </a:p>
@@ -14837,7 +14903,7 @@
                 <a:ea typeface="Courier New" pitchFamily="34" charset="-122"/>
                 <a:cs typeface="Courier New" pitchFamily="34" charset="-120"/>
               </a:rPr>
-              <a:t>2026-10-08T15:42:51.485Z  gate.review.await</a:t>
+              <a:t>2026-10-08T18:05:20.873Z  gate.review.await</a:t>
             </a:r>
             <a:endParaRPr lang="en-US" sz="1000" dirty="0"/>
           </a:p>
@@ -14871,7 +14937,7 @@
                 <a:ea typeface="Courier New" pitchFamily="34" charset="-122"/>
                 <a:cs typeface="Courier New" pitchFamily="34" charset="-120"/>
               </a:rPr>
-              <a:t>  sha256:dc583d37ba4d12493377d8b49dc850ce2f</a:t>
+              <a:t>  sha256:015cf69a73e188c763cff17b8a014f4818</a:t>
             </a:r>
             <a:endParaRPr lang="en-US" sz="1000" dirty="0"/>
           </a:p>
@@ -14888,7 +14954,7 @@
                 <a:ea typeface="Courier New" pitchFamily="34" charset="-122"/>
                 <a:cs typeface="Courier New" pitchFamily="34" charset="-120"/>
               </a:rPr>
-              <a:t>  7d19f26228cbfbaf8471d13189c61a [sdlc</a:t>
+              <a:t>  b9d1376d24e5184ebf2225a7e3facc [sdlc</a:t>
             </a:r>
             <a:endParaRPr lang="en-US" sz="1000" dirty="0"/>
           </a:p>
@@ -14905,7 +14971,7 @@
                 <a:ea typeface="Courier New" pitchFamily="34" charset="-122"/>
                 <a:cs typeface="Courier New" pitchFamily="34" charset="-120"/>
               </a:rPr>
-              <a:t>  0.11.4 · community]</a:t>
+              <a:t>  0.12.0 · community]</a:t>
             </a:r>
             <a:endParaRPr lang="en-US" sz="1000" dirty="0"/>
           </a:p>
@@ -14922,7 +14988,7 @@
                 <a:ea typeface="Courier New" pitchFamily="34" charset="-122"/>
                 <a:cs typeface="Courier New" pitchFamily="34" charset="-120"/>
               </a:rPr>
-              <a:t>2026-10-08T15:42:54.486Z  gate.review.appro</a:t>
+              <a:t>2026-10-08T18:05:23.694Z  gate.review.appro</a:t>
             </a:r>
             <a:endParaRPr lang="en-US" sz="1000" dirty="0"/>
           </a:p>
@@ -14973,7 +15039,7 @@
                 <a:ea typeface="Courier New" pitchFamily="34" charset="-122"/>
                 <a:cs typeface="Courier New" pitchFamily="34" charset="-120"/>
               </a:rPr>
-              <a:t>  [sdlc 0.11.4 · community]</a:t>
+              <a:t>  [sdlc 0.12.0 · community]</a:t>
             </a:r>
             <a:endParaRPr lang="en-US" sz="1000" dirty="0"/>
           </a:p>
@@ -14990,7 +15056,7 @@
                 <a:ea typeface="Courier New" pitchFamily="34" charset="-122"/>
                 <a:cs typeface="Courier New" pitchFamily="34" charset="-120"/>
               </a:rPr>
-              <a:t>2026-10-08T15:42:59.792Z  gate.release.appr</a:t>
+              <a:t>2026-10-08T18:05:29.269Z  gate.release.appr</a:t>
             </a:r>
             <a:endParaRPr lang="en-US" sz="1000" dirty="0"/>
           </a:p>
@@ -15041,7 +15107,7 @@
                 <a:ea typeface="Courier New" pitchFamily="34" charset="-122"/>
                 <a:cs typeface="Courier New" pitchFamily="34" charset="-120"/>
               </a:rPr>
-              <a:t>  release-manager [sdlc 0.11.4 · community]</a:t>
+              <a:t>  release-manager [sdlc 0.12.0 · community]</a:t>
             </a:r>
             <a:endParaRPr lang="en-US" sz="1000" dirty="0"/>
           </a:p>
@@ -16218,7 +16284,7 @@
                 <a:ea typeface="Courier New" pitchFamily="34" charset="-122"/>
                 <a:cs typeface="Courier New" pitchFamily="34" charset="-120"/>
               </a:rPr>
-              <a:t>✓ test (1.2s)</a:t>
+              <a:t>✓ test (1.0s)</a:t>
             </a:r>
             <a:endParaRPr lang="en-US" sz="1000" dirty="0"/>
           </a:p>
@@ -16235,7 +16301,7 @@
                 <a:ea typeface="Courier New" pitchFamily="34" charset="-122"/>
                 <a:cs typeface="Courier New" pitchFamily="34" charset="-120"/>
               </a:rPr>
-              <a:t>✓ ci-green (ci/pipeline_status, 0.6s)</a:t>
+              <a:t>✓ ci-green (ci/pipeline_status, 0.5s)</a:t>
             </a:r>
             <a:endParaRPr lang="en-US" sz="1000" dirty="0"/>
           </a:p>
@@ -16671,7 +16737,7 @@
                 <a:ea typeface="Courier New" pitchFamily="34" charset="-122"/>
                 <a:cs typeface="Courier New" pitchFamily="34" charset="-120"/>
               </a:rPr>
-              <a:t>      "id": "20261008T154345228Z-ci-green-a</a:t>
+              <a:t>      "id": "20261008T180609887Z-ci-green-6</a:t>
             </a:r>
             <a:endParaRPr lang="en-US" sz="1000" dirty="0"/>
           </a:p>
@@ -16688,7 +16754,7 @@
                 <a:ea typeface="Courier New" pitchFamily="34" charset="-122"/>
                 <a:cs typeface="Courier New" pitchFamily="34" charset="-120"/>
               </a:rPr>
-              <a:t>  a3050",</a:t>
+              <a:t>  70cfe",</a:t>
             </a:r>
             <a:endParaRPr lang="en-US" sz="1000" dirty="0"/>
           </a:p>
@@ -16824,7 +16890,7 @@
                 <a:ea typeface="Courier New" pitchFamily="34" charset="-122"/>
                 <a:cs typeface="Courier New" pitchFamily="34" charset="-120"/>
               </a:rPr>
-              <a:t>        "ref": "cf6104e63c650f3e245f9cae890</a:t>
+              <a:t>        "ref": "87d968ae0c990e15c352fd2bf1a</a:t>
             </a:r>
             <a:endParaRPr lang="en-US" sz="1000" dirty="0"/>
           </a:p>
@@ -16841,7 +16907,7 @@
                 <a:ea typeface="Courier New" pitchFamily="34" charset="-122"/>
                 <a:cs typeface="Courier New" pitchFamily="34" charset="-120"/>
               </a:rPr>
-              <a:t>  705b07a451e0b",</a:t>
+              <a:t>  bd52742b741f0",</a:t>
             </a:r>
             <a:endParaRPr lang="en-US" sz="1000" dirty="0"/>
           </a:p>
@@ -19217,7 +19283,7 @@
                 <a:ea typeface="Cambria" pitchFamily="34" charset="-122"/>
                 <a:cs typeface="Cambria" pitchFamily="34" charset="-120"/>
               </a:rPr>
-              <a:t>102</a:t>
+              <a:t>103</a:t>
             </a:r>
             <a:endParaRPr lang="en-US" sz="6000" dirty="0"/>
           </a:p>
@@ -19322,7 +19388,7 @@
                 <a:ea typeface="Cambria" pitchFamily="34" charset="-122"/>
                 <a:cs typeface="Cambria" pitchFamily="34" charset="-120"/>
               </a:rPr>
-              <a:t>70</a:t>
+              <a:t>71</a:t>
             </a:r>
             <a:endParaRPr lang="en-US" sz="6000" dirty="0"/>
           </a:p>
@@ -19361,7 +19427,7 @@
                 <a:ea typeface="Calibri" pitchFamily="34" charset="-122"/>
                 <a:cs typeface="Calibri" pitchFamily="34" charset="-120"/>
               </a:rPr>
-              <a:t>of 70 commands</a:t>
+              <a:t>of 71 commands</a:t>
             </a:r>
             <a:endParaRPr lang="en-US" sz="1600" dirty="0"/>
           </a:p>
@@ -23546,7 +23612,7 @@
         <p:spPr>
           <a:xfrm>
             <a:off x="2710688" y="5486400"/>
-            <a:ext cx="615696" cy="256032"/>
+            <a:ext cx="813816" cy="256032"/>
           </a:xfrm>
           <a:prstGeom prst="roundRect">
             <a:avLst>
@@ -23573,7 +23639,7 @@
         <p:spPr>
           <a:xfrm>
             <a:off x="2710688" y="5486400"/>
-            <a:ext cx="615696" cy="256032"/>
+            <a:ext cx="813816" cy="256032"/>
           </a:xfrm>
           <a:prstGeom prst="rect">
             <a:avLst/>
@@ -23597,7 +23663,7 @@
                 <a:ea typeface="Calibri" pitchFamily="34" charset="-122"/>
                 <a:cs typeface="Calibri" pitchFamily="34" charset="-120"/>
               </a:rPr>
-              <a:t>report</a:t>
+              <a:t>changelog</a:t>
             </a:r>
             <a:endParaRPr lang="en-US" sz="1000" dirty="0"/>
           </a:p>
@@ -23611,8 +23677,8 @@
         </p:nvSpPr>
         <p:spPr>
           <a:xfrm>
-            <a:off x="3417824" y="5486400"/>
-            <a:ext cx="813816" cy="256032"/>
+            <a:off x="3615944" y="5486400"/>
+            <a:ext cx="615696" cy="256032"/>
           </a:xfrm>
           <a:prstGeom prst="roundRect">
             <a:avLst>
@@ -23638,8 +23704,8 @@
         </p:nvSpPr>
         <p:spPr>
           <a:xfrm>
-            <a:off x="3417824" y="5486400"/>
-            <a:ext cx="813816" cy="256032"/>
+            <a:off x="3615944" y="5486400"/>
+            <a:ext cx="615696" cy="256032"/>
           </a:xfrm>
           <a:prstGeom prst="rect">
             <a:avLst/>
@@ -23663,7 +23729,7 @@
                 <a:ea typeface="Calibri" pitchFamily="34" charset="-122"/>
                 <a:cs typeface="Calibri" pitchFamily="34" charset="-120"/>
               </a:rPr>
-              <a:t>dashboard</a:t>
+              <a:t>report</a:t>
             </a:r>
             <a:endParaRPr lang="en-US" sz="1000" dirty="0"/>
           </a:p>
@@ -23678,7 +23744,7 @@
         <p:spPr>
           <a:xfrm>
             <a:off x="4323080" y="5486400"/>
-            <a:ext cx="417576" cy="256032"/>
+            <a:ext cx="813816" cy="256032"/>
           </a:xfrm>
           <a:prstGeom prst="roundRect">
             <a:avLst>
@@ -23705,7 +23771,7 @@
         <p:spPr>
           <a:xfrm>
             <a:off x="4323080" y="5486400"/>
-            <a:ext cx="417576" cy="256032"/>
+            <a:ext cx="813816" cy="256032"/>
           </a:xfrm>
           <a:prstGeom prst="rect">
             <a:avLst/>
@@ -23729,7 +23795,7 @@
                 <a:ea typeface="Calibri" pitchFamily="34" charset="-122"/>
                 <a:cs typeface="Calibri" pitchFamily="34" charset="-120"/>
               </a:rPr>
-              <a:t>log</a:t>
+              <a:t>dashboard</a:t>
             </a:r>
             <a:endParaRPr lang="en-US" sz="1000" dirty="0"/>
           </a:p>
@@ -23743,8 +23809,8 @@
         </p:nvSpPr>
         <p:spPr>
           <a:xfrm>
-            <a:off x="4832096" y="5486400"/>
-            <a:ext cx="681736" cy="256032"/>
+            <a:off x="5228336" y="5486400"/>
+            <a:ext cx="417576" cy="256032"/>
           </a:xfrm>
           <a:prstGeom prst="roundRect">
             <a:avLst>
@@ -23770,8 +23836,8 @@
         </p:nvSpPr>
         <p:spPr>
           <a:xfrm>
-            <a:off x="4832096" y="5486400"/>
-            <a:ext cx="681736" cy="256032"/>
+            <a:off x="5228336" y="5486400"/>
+            <a:ext cx="417576" cy="256032"/>
           </a:xfrm>
           <a:prstGeom prst="rect">
             <a:avLst/>
@@ -23795,7 +23861,7 @@
                 <a:ea typeface="Calibri" pitchFamily="34" charset="-122"/>
                 <a:cs typeface="Calibri" pitchFamily="34" charset="-120"/>
               </a:rPr>
-              <a:t>license</a:t>
+              <a:t>log</a:t>
             </a:r>
             <a:endParaRPr lang="en-US" sz="1000" dirty="0"/>
           </a:p>
@@ -23809,8 +23875,8 @@
         </p:nvSpPr>
         <p:spPr>
           <a:xfrm>
-            <a:off x="5605272" y="5486400"/>
-            <a:ext cx="615696" cy="256032"/>
+            <a:off x="5737352" y="5486400"/>
+            <a:ext cx="681736" cy="256032"/>
           </a:xfrm>
           <a:prstGeom prst="roundRect">
             <a:avLst>
@@ -23836,8 +23902,8 @@
         </p:nvSpPr>
         <p:spPr>
           <a:xfrm>
-            <a:off x="5605272" y="5486400"/>
-            <a:ext cx="615696" cy="256032"/>
+            <a:off x="5737352" y="5486400"/>
+            <a:ext cx="681736" cy="256032"/>
           </a:xfrm>
           <a:prstGeom prst="rect">
             <a:avLst/>
@@ -23861,7 +23927,7 @@
                 <a:ea typeface="Calibri" pitchFamily="34" charset="-122"/>
                 <a:cs typeface="Calibri" pitchFamily="34" charset="-120"/>
               </a:rPr>
-              <a:t>doctor</a:t>
+              <a:t>license</a:t>
             </a:r>
             <a:endParaRPr lang="en-US" sz="1000" dirty="0"/>
           </a:p>
@@ -23875,7 +23941,7 @@
         </p:nvSpPr>
         <p:spPr>
           <a:xfrm>
-            <a:off x="6312408" y="5486400"/>
+            <a:off x="6510528" y="5486400"/>
             <a:ext cx="615696" cy="256032"/>
           </a:xfrm>
           <a:prstGeom prst="roundRect">
@@ -23902,7 +23968,7 @@
         </p:nvSpPr>
         <p:spPr>
           <a:xfrm>
-            <a:off x="6312408" y="5486400"/>
+            <a:off x="6510528" y="5486400"/>
             <a:ext cx="615696" cy="256032"/>
           </a:xfrm>
           <a:prstGeom prst="rect">
@@ -23927,7 +23993,7 @@
                 <a:ea typeface="Calibri" pitchFamily="34" charset="-122"/>
                 <a:cs typeface="Calibri" pitchFamily="34" charset="-120"/>
               </a:rPr>
-              <a:t>health</a:t>
+              <a:t>doctor</a:t>
             </a:r>
             <a:endParaRPr lang="en-US" sz="1000" dirty="0"/>
           </a:p>
@@ -23941,8 +24007,8 @@
         </p:nvSpPr>
         <p:spPr>
           <a:xfrm>
-            <a:off x="7019544" y="5486400"/>
-            <a:ext cx="1011936" cy="256032"/>
+            <a:off x="7217664" y="5486400"/>
+            <a:ext cx="615696" cy="256032"/>
           </a:xfrm>
           <a:prstGeom prst="roundRect">
             <a:avLst>
@@ -23968,8 +24034,8 @@
         </p:nvSpPr>
         <p:spPr>
           <a:xfrm>
-            <a:off x="7019544" y="5486400"/>
-            <a:ext cx="1011936" cy="256032"/>
+            <a:off x="7217664" y="5486400"/>
+            <a:ext cx="615696" cy="256032"/>
           </a:xfrm>
           <a:prstGeom prst="rect">
             <a:avLst/>
@@ -23993,7 +24059,7 @@
                 <a:ea typeface="Calibri" pitchFamily="34" charset="-122"/>
                 <a:cs typeface="Calibri" pitchFamily="34" charset="-120"/>
               </a:rPr>
-              <a:t>plugin build</a:t>
+              <a:t>health</a:t>
             </a:r>
             <a:endParaRPr lang="en-US" sz="1000" dirty="0"/>
           </a:p>
@@ -24007,8 +24073,8 @@
         </p:nvSpPr>
         <p:spPr>
           <a:xfrm>
-            <a:off x="8122920" y="5486400"/>
-            <a:ext cx="549656" cy="256032"/>
+            <a:off x="7924800" y="5486400"/>
+            <a:ext cx="1011936" cy="256032"/>
           </a:xfrm>
           <a:prstGeom prst="roundRect">
             <a:avLst>
@@ -24034,8 +24100,8 @@
         </p:nvSpPr>
         <p:spPr>
           <a:xfrm>
-            <a:off x="8122920" y="5486400"/>
-            <a:ext cx="549656" cy="256032"/>
+            <a:off x="7924800" y="5486400"/>
+            <a:ext cx="1011936" cy="256032"/>
           </a:xfrm>
           <a:prstGeom prst="rect">
             <a:avLst/>
@@ -24059,7 +24125,7 @@
                 <a:ea typeface="Calibri" pitchFamily="34" charset="-122"/>
                 <a:cs typeface="Calibri" pitchFamily="34" charset="-120"/>
               </a:rPr>
-              <a:t>trace</a:t>
+              <a:t>plugin build</a:t>
             </a:r>
             <a:endParaRPr lang="en-US" sz="1000" dirty="0"/>
           </a:p>
@@ -24073,8 +24139,8 @@
         </p:nvSpPr>
         <p:spPr>
           <a:xfrm>
-            <a:off x="8764016" y="5486400"/>
-            <a:ext cx="483616" cy="256032"/>
+            <a:off x="9028176" y="5486400"/>
+            <a:ext cx="549656" cy="256032"/>
           </a:xfrm>
           <a:prstGeom prst="roundRect">
             <a:avLst>
@@ -24100,8 +24166,8 @@
         </p:nvSpPr>
         <p:spPr>
           <a:xfrm>
-            <a:off x="8764016" y="5486400"/>
-            <a:ext cx="483616" cy="256032"/>
+            <a:off x="9028176" y="5486400"/>
+            <a:ext cx="549656" cy="256032"/>
           </a:xfrm>
           <a:prstGeom prst="rect">
             <a:avLst/>
@@ -24125,7 +24191,7 @@
                 <a:ea typeface="Calibri" pitchFamily="34" charset="-122"/>
                 <a:cs typeface="Calibri" pitchFamily="34" charset="-120"/>
               </a:rPr>
-              <a:t>hook</a:t>
+              <a:t>trace</a:t>
             </a:r>
             <a:endParaRPr lang="en-US" sz="1000" dirty="0"/>
           </a:p>
@@ -24139,8 +24205,8 @@
         </p:nvSpPr>
         <p:spPr>
           <a:xfrm>
-            <a:off x="9339072" y="5486400"/>
-            <a:ext cx="747776" cy="256032"/>
+            <a:off x="9669272" y="5486400"/>
+            <a:ext cx="483616" cy="256032"/>
           </a:xfrm>
           <a:prstGeom prst="roundRect">
             <a:avLst>
@@ -24166,7 +24232,73 @@
         </p:nvSpPr>
         <p:spPr>
           <a:xfrm>
-            <a:off x="9339072" y="5486400"/>
+            <a:off x="9669272" y="5486400"/>
+            <a:ext cx="483616" cy="256032"/>
+          </a:xfrm>
+          <a:prstGeom prst="rect">
+            <a:avLst/>
+          </a:prstGeom>
+          <a:noFill/>
+          <a:ln/>
+        </p:spPr>
+        <p:txBody>
+          <a:bodyPr wrap="square" lIns="0" tIns="0" rIns="0" bIns="0" rtlCol="0" anchor="ctr"/>
+          <a:lstStyle/>
+          <a:p>
+            <a:pPr algn="ctr" indent="0" marL="0">
+              <a:buNone/>
+            </a:pPr>
+            <a:r>
+              <a:rPr lang="en-US" sz="1000" dirty="0">
+                <a:solidFill>
+                  <a:srgbClr val="1F2430"/>
+                </a:solidFill>
+                <a:latin typeface="Calibri" pitchFamily="34" charset="0"/>
+                <a:ea typeface="Calibri" pitchFamily="34" charset="-122"/>
+                <a:cs typeface="Calibri" pitchFamily="34" charset="-120"/>
+              </a:rPr>
+              <a:t>hook</a:t>
+            </a:r>
+            <a:endParaRPr lang="en-US" sz="1000" dirty="0"/>
+          </a:p>
+        </p:txBody>
+      </p:sp>
+      <p:sp>
+        <p:nvSpPr>
+          <p:cNvPr id="156" name="Shape 154"/>
+          <p:cNvSpPr/>
+          <p:nvPr/>
+        </p:nvSpPr>
+        <p:spPr>
+          <a:xfrm>
+            <a:off x="10244328" y="5486400"/>
+            <a:ext cx="747776" cy="256032"/>
+          </a:xfrm>
+          <a:prstGeom prst="roundRect">
+            <a:avLst>
+              <a:gd name="adj" fmla="val 50000"/>
+            </a:avLst>
+          </a:prstGeom>
+          <a:solidFill>
+            <a:srgbClr val="F3F5F8"/>
+          </a:solidFill>
+          <a:ln w="12700">
+            <a:solidFill>
+              <a:srgbClr val="F3F5F8"/>
+            </a:solidFill>
+            <a:prstDash val="solid"/>
+          </a:ln>
+        </p:spPr>
+      </p:sp>
+      <p:sp>
+        <p:nvSpPr>
+          <p:cNvPr id="157" name="Text 155"/>
+          <p:cNvSpPr txBox="1"/>
+          <p:nvPr/>
+        </p:nvSpPr>
+        <p:spPr>
+          <a:xfrm>
+            <a:off x="10244328" y="5486400"/>
             <a:ext cx="747776" cy="256032"/>
           </a:xfrm>
           <a:prstGeom prst="rect">
@@ -26837,7 +26969,7 @@
                 <a:ea typeface="Courier New" pitchFamily="34" charset="-122"/>
                 <a:cs typeface="Courier New" pitchFamily="34" charset="-120"/>
               </a:rPr>
-              <a:t>  sdlc 0.11.4, license: community</a:t>
+              <a:t>  sdlc 0.12.0, license: community</a:t>
             </a:r>
             <a:endParaRPr lang="en-US" sz="1000" dirty="0"/>
           </a:p>
@@ -26888,7 +27020,7 @@
                 <a:ea typeface="Courier New" pitchFamily="34" charset="-122"/>
                 <a:cs typeface="Courier New" pitchFamily="34" charset="-120"/>
               </a:rPr>
-              <a:t>  files: 72 created, 0 updated, 0</a:t>
+              <a:t>  git hook .git/hooks/prepare-commit-msg:</a:t>
             </a:r>
             <a:endParaRPr lang="en-US" sz="1000" dirty="0"/>
           </a:p>

--- a/docs/demo/sdlc-calculator-demo.en.pptx
+++ b/docs/demo/sdlc-calculator-demo.en.pptx
@@ -6660,7 +6660,7 @@
                 <a:ea typeface="Courier New" pitchFamily="34" charset="-122"/>
                 <a:cs typeface="Courier New" pitchFamily="34" charset="-120"/>
               </a:rPr>
-              <a:t>  code-owner (015cf69a73e1)</a:t>
+              <a:t>  code-owner (29b1dbba496e)</a:t>
             </a:r>
             <a:endParaRPr lang="en-US" sz="1000" dirty="0"/>
           </a:p>
@@ -6745,7 +6745,7 @@
                 <a:ea typeface="Courier New" pitchFamily="34" charset="-122"/>
                 <a:cs typeface="Courier New" pitchFamily="34" charset="-120"/>
               </a:rPr>
-              <a:t>  "SDLC-Approval: basic-arithmetic:review:0</a:t>
+              <a:t>  "SDLC-Approval: basic-arithmetic:review:2</a:t>
             </a:r>
             <a:endParaRPr lang="en-US" sz="1000" dirty="0"/>
           </a:p>
@@ -6762,7 +6762,7 @@
                 <a:ea typeface="Courier New" pitchFamily="34" charset="-122"/>
                 <a:cs typeface="Courier New" pitchFamily="34" charset="-120"/>
               </a:rPr>
-              <a:t>  15cf69a73e1"</a:t>
+              <a:t>  9b1dbba496e"</a:t>
             </a:r>
             <a:endParaRPr lang="en-US" sz="1000" dirty="0"/>
           </a:p>
@@ -7443,7 +7443,7 @@
                 <a:ea typeface="Courier New" pitchFamily="34" charset="-122"/>
                 <a:cs typeface="Courier New" pitchFamily="34" charset="-120"/>
               </a:rPr>
-              <a:t>  release-manager (015cf69a73e1)</a:t>
+              <a:t>  release-manager (29b1dbba496e)</a:t>
             </a:r>
             <a:endParaRPr lang="en-US" sz="1000" dirty="0"/>
           </a:p>
@@ -7511,7 +7511,7 @@
                 <a:ea typeface="Courier New" pitchFamily="34" charset="-122"/>
                 <a:cs typeface="Courier New" pitchFamily="34" charset="-120"/>
               </a:rPr>
-              <a:t>  gate" -m "SDLC-Approval: basic-arithmetic:release:015cf69a73e1"</a:t>
+              <a:t>  gate" -m "SDLC-Approval: basic-arithmetic:release:29b1dbba496e"</a:t>
             </a:r>
             <a:endParaRPr lang="en-US" sz="1000" dirty="0"/>
           </a:p>
@@ -7811,7 +7811,7 @@
                 <a:ea typeface="Courier New" pitchFamily="34" charset="-122"/>
                 <a:cs typeface="Courier New" pitchFamily="34" charset="-120"/>
               </a:rPr>
-              <a:t>✓ basic-arithmetic/intent alice valid 8cfdef5c</a:t>
+              <a:t>✓ basic-arithmetic/intent alice valid 5986f269</a:t>
             </a:r>
             <a:endParaRPr lang="en-US" sz="1000" dirty="0"/>
           </a:p>
@@ -7828,7 +7828,7 @@
                 <a:ea typeface="Courier New" pitchFamily="34" charset="-122"/>
                 <a:cs typeface="Courier New" pitchFamily="34" charset="-120"/>
               </a:rPr>
-              <a:t>✓ basic-arithmetic/spec alice valid 5891a520</a:t>
+              <a:t>✓ basic-arithmetic/spec alice valid 085df546</a:t>
             </a:r>
             <a:endParaRPr lang="en-US" sz="1000" dirty="0"/>
           </a:p>
@@ -7845,7 +7845,7 @@
                 <a:ea typeface="Courier New" pitchFamily="34" charset="-122"/>
                 <a:cs typeface="Courier New" pitchFamily="34" charset="-120"/>
               </a:rPr>
-              <a:t>✗ basic-arithmetic/plan bob wrong-signer 5891a520</a:t>
+              <a:t>✗ basic-arithmetic/plan bob wrong-signer 085df546</a:t>
             </a:r>
             <a:endParaRPr lang="en-US" sz="1000" dirty="0"/>
           </a:p>
@@ -7862,7 +7862,7 @@
                 <a:ea typeface="Courier New" pitchFamily="34" charset="-122"/>
                 <a:cs typeface="Courier New" pitchFamily="34" charset="-120"/>
               </a:rPr>
-              <a:t>✓ basic-arithmetic/review carol valid 07a01500</a:t>
+              <a:t>✓ basic-arithmetic/review carol valid 699847b1</a:t>
             </a:r>
             <a:endParaRPr lang="en-US" sz="1000" dirty="0"/>
           </a:p>
@@ -7879,7 +7879,7 @@
                 <a:ea typeface="Courier New" pitchFamily="34" charset="-122"/>
                 <a:cs typeface="Courier New" pitchFamily="34" charset="-120"/>
               </a:rPr>
-              <a:t>✓ basic-arithmetic/release alice valid 4b9f8a00</a:t>
+              <a:t>✓ basic-arithmetic/release alice valid 5a612384</a:t>
             </a:r>
             <a:endParaRPr lang="en-US" sz="1000" dirty="0"/>
           </a:p>
@@ -7896,7 +7896,7 @@
                 <a:ea typeface="Courier New" pitchFamily="34" charset="-122"/>
                 <a:cs typeface="Courier New" pitchFamily="34" charset="-120"/>
               </a:rPr>
-              <a:t>✓ openspec/roles.yaml alice@calc.example valid a53165de</a:t>
+              <a:t>✓ openspec/roles.yaml alice@calc.example valid 9b596928</a:t>
             </a:r>
             <a:endParaRPr lang="en-US" sz="1000" dirty="0"/>
           </a:p>
@@ -14382,7 +14382,7 @@
                 <a:ea typeface="Courier New" pitchFamily="34" charset="-122"/>
                 <a:cs typeface="Courier New" pitchFamily="34" charset="-120"/>
               </a:rPr>
-              <a:t>  archived) · sdlc 0.12.0, license:</a:t>
+              <a:t>  archived) · sdlc 0.13.0, license:</a:t>
             </a:r>
             <a:endParaRPr lang="en-US" sz="1000" dirty="0"/>
           </a:p>
@@ -14569,7 +14569,7 @@
                 <a:ea typeface="Courier New" pitchFamily="34" charset="-122"/>
                 <a:cs typeface="Courier New" pitchFamily="34" charset="-120"/>
               </a:rPr>
-              <a:t>  intent 3 · plan 11 · review 3; rework</a:t>
+              <a:t>  intent 3 · plan 12 · review 3; rework</a:t>
             </a:r>
             <a:endParaRPr lang="en-US" sz="1000" dirty="0"/>
           </a:p>
@@ -14903,7 +14903,7 @@
                 <a:ea typeface="Courier New" pitchFamily="34" charset="-122"/>
                 <a:cs typeface="Courier New" pitchFamily="34" charset="-120"/>
               </a:rPr>
-              <a:t>2026-10-08T18:05:20.873Z  gate.review.await</a:t>
+              <a:t>2026-10-08T20:23:00.314Z  gate.review.await</a:t>
             </a:r>
             <a:endParaRPr lang="en-US" sz="1000" dirty="0"/>
           </a:p>
@@ -14937,7 +14937,7 @@
                 <a:ea typeface="Courier New" pitchFamily="34" charset="-122"/>
                 <a:cs typeface="Courier New" pitchFamily="34" charset="-120"/>
               </a:rPr>
-              <a:t>  sha256:015cf69a73e188c763cff17b8a014f4818</a:t>
+              <a:t>  sha256:29b1dbba496e041498a058028b98136d93</a:t>
             </a:r>
             <a:endParaRPr lang="en-US" sz="1000" dirty="0"/>
           </a:p>
@@ -14954,7 +14954,7 @@
                 <a:ea typeface="Courier New" pitchFamily="34" charset="-122"/>
                 <a:cs typeface="Courier New" pitchFamily="34" charset="-120"/>
               </a:rPr>
-              <a:t>  b9d1376d24e5184ebf2225a7e3facc [sdlc</a:t>
+              <a:t>  d86655c53e4f94210285298afc8b7b [sdlc</a:t>
             </a:r>
             <a:endParaRPr lang="en-US" sz="1000" dirty="0"/>
           </a:p>
@@ -14971,7 +14971,7 @@
                 <a:ea typeface="Courier New" pitchFamily="34" charset="-122"/>
                 <a:cs typeface="Courier New" pitchFamily="34" charset="-120"/>
               </a:rPr>
-              <a:t>  0.12.0 · community]</a:t>
+              <a:t>  0.13.0 · community]</a:t>
             </a:r>
             <a:endParaRPr lang="en-US" sz="1000" dirty="0"/>
           </a:p>
@@ -14988,7 +14988,7 @@
                 <a:ea typeface="Courier New" pitchFamily="34" charset="-122"/>
                 <a:cs typeface="Courier New" pitchFamily="34" charset="-120"/>
               </a:rPr>
-              <a:t>2026-10-08T18:05:23.694Z  gate.review.appro</a:t>
+              <a:t>2026-10-08T20:23:03.413Z  gate.review.appro</a:t>
             </a:r>
             <a:endParaRPr lang="en-US" sz="1000" dirty="0"/>
           </a:p>
@@ -15039,7 +15039,7 @@
                 <a:ea typeface="Courier New" pitchFamily="34" charset="-122"/>
                 <a:cs typeface="Courier New" pitchFamily="34" charset="-120"/>
               </a:rPr>
-              <a:t>  [sdlc 0.12.0 · community]</a:t>
+              <a:t>  [sdlc 0.13.0 · community]</a:t>
             </a:r>
             <a:endParaRPr lang="en-US" sz="1000" dirty="0"/>
           </a:p>
@@ -15056,7 +15056,7 @@
                 <a:ea typeface="Courier New" pitchFamily="34" charset="-122"/>
                 <a:cs typeface="Courier New" pitchFamily="34" charset="-120"/>
               </a:rPr>
-              <a:t>2026-10-08T18:05:29.269Z  gate.release.appr</a:t>
+              <a:t>2026-10-08T20:23:09.449Z  gate.release.appr</a:t>
             </a:r>
             <a:endParaRPr lang="en-US" sz="1000" dirty="0"/>
           </a:p>
@@ -15107,7 +15107,7 @@
                 <a:ea typeface="Courier New" pitchFamily="34" charset="-122"/>
                 <a:cs typeface="Courier New" pitchFamily="34" charset="-120"/>
               </a:rPr>
-              <a:t>  release-manager [sdlc 0.12.0 · community]</a:t>
+              <a:t>  release-manager [sdlc 0.13.0 · community]</a:t>
             </a:r>
             <a:endParaRPr lang="en-US" sz="1000" dirty="0"/>
           </a:p>
@@ -16737,7 +16737,7 @@
                 <a:ea typeface="Courier New" pitchFamily="34" charset="-122"/>
                 <a:cs typeface="Courier New" pitchFamily="34" charset="-120"/>
               </a:rPr>
-              <a:t>      "id": "20261008T180609887Z-ci-green-6</a:t>
+              <a:t>      "id": "20261008T202353353Z-ci-green-e</a:t>
             </a:r>
             <a:endParaRPr lang="en-US" sz="1000" dirty="0"/>
           </a:p>
@@ -16754,7 +16754,7 @@
                 <a:ea typeface="Courier New" pitchFamily="34" charset="-122"/>
                 <a:cs typeface="Courier New" pitchFamily="34" charset="-120"/>
               </a:rPr>
-              <a:t>  70cfe",</a:t>
+              <a:t>  a4554",</a:t>
             </a:r>
             <a:endParaRPr lang="en-US" sz="1000" dirty="0"/>
           </a:p>
@@ -16890,7 +16890,7 @@
                 <a:ea typeface="Courier New" pitchFamily="34" charset="-122"/>
                 <a:cs typeface="Courier New" pitchFamily="34" charset="-120"/>
               </a:rPr>
-              <a:t>        "ref": "87d968ae0c990e15c352fd2bf1a</a:t>
+              <a:t>        "ref": "9ff236a0b14f8f0d5f07bfe9331</a:t>
             </a:r>
             <a:endParaRPr lang="en-US" sz="1000" dirty="0"/>
           </a:p>
@@ -16907,7 +16907,7 @@
                 <a:ea typeface="Courier New" pitchFamily="34" charset="-122"/>
                 <a:cs typeface="Courier New" pitchFamily="34" charset="-120"/>
               </a:rPr>
-              <a:t>  bd52742b741f0",</a:t>
+              <a:t>  c51dd6f7a0cc8",</a:t>
             </a:r>
             <a:endParaRPr lang="en-US" sz="1000" dirty="0"/>
           </a:p>
@@ -26969,7 +26969,7 @@
                 <a:ea typeface="Courier New" pitchFamily="34" charset="-122"/>
                 <a:cs typeface="Courier New" pitchFamily="34" charset="-120"/>
               </a:rPr>
-              <a:t>  sdlc 0.12.0, license: community</a:t>
+              <a:t>  sdlc 0.13.0, license: community</a:t>
             </a:r>
             <a:endParaRPr lang="en-US" sz="1000" dirty="0"/>
           </a:p>

--- a/docs/demo/sdlc-calculator-demo.en.pptx
+++ b/docs/demo/sdlc-calculator-demo.en.pptx
@@ -6660,7 +6660,7 @@
                 <a:ea typeface="Courier New" pitchFamily="34" charset="-122"/>
                 <a:cs typeface="Courier New" pitchFamily="34" charset="-120"/>
               </a:rPr>
-              <a:t>  code-owner (29b1dbba496e)</a:t>
+              <a:t>  code-owner (0e1f099045b8)</a:t>
             </a:r>
             <a:endParaRPr lang="en-US" sz="1000" dirty="0"/>
           </a:p>
@@ -6745,7 +6745,7 @@
                 <a:ea typeface="Courier New" pitchFamily="34" charset="-122"/>
                 <a:cs typeface="Courier New" pitchFamily="34" charset="-120"/>
               </a:rPr>
-              <a:t>  "SDLC-Approval: basic-arithmetic:review:2</a:t>
+              <a:t>  "SDLC-Approval: basic-arithmetic:review:0</a:t>
             </a:r>
             <a:endParaRPr lang="en-US" sz="1000" dirty="0"/>
           </a:p>
@@ -6762,7 +6762,7 @@
                 <a:ea typeface="Courier New" pitchFamily="34" charset="-122"/>
                 <a:cs typeface="Courier New" pitchFamily="34" charset="-120"/>
               </a:rPr>
-              <a:t>  9b1dbba496e"</a:t>
+              <a:t>  e1f099045b8"</a:t>
             </a:r>
             <a:endParaRPr lang="en-US" sz="1000" dirty="0"/>
           </a:p>
@@ -7443,7 +7443,7 @@
                 <a:ea typeface="Courier New" pitchFamily="34" charset="-122"/>
                 <a:cs typeface="Courier New" pitchFamily="34" charset="-120"/>
               </a:rPr>
-              <a:t>  release-manager (29b1dbba496e)</a:t>
+              <a:t>  release-manager (0e1f099045b8)</a:t>
             </a:r>
             <a:endParaRPr lang="en-US" sz="1000" dirty="0"/>
           </a:p>
@@ -7511,7 +7511,7 @@
                 <a:ea typeface="Courier New" pitchFamily="34" charset="-122"/>
                 <a:cs typeface="Courier New" pitchFamily="34" charset="-120"/>
               </a:rPr>
-              <a:t>  gate" -m "SDLC-Approval: basic-arithmetic:release:29b1dbba496e"</a:t>
+              <a:t>  gate" -m "SDLC-Approval: basic-arithmetic:release:0e1f099045b8"</a:t>
             </a:r>
             <a:endParaRPr lang="en-US" sz="1000" dirty="0"/>
           </a:p>
@@ -7811,7 +7811,7 @@
                 <a:ea typeface="Courier New" pitchFamily="34" charset="-122"/>
                 <a:cs typeface="Courier New" pitchFamily="34" charset="-120"/>
               </a:rPr>
-              <a:t>✓ basic-arithmetic/intent alice valid 5986f269</a:t>
+              <a:t>✓ basic-arithmetic/intent alice valid cfb73c63</a:t>
             </a:r>
             <a:endParaRPr lang="en-US" sz="1000" dirty="0"/>
           </a:p>
@@ -7828,7 +7828,7 @@
                 <a:ea typeface="Courier New" pitchFamily="34" charset="-122"/>
                 <a:cs typeface="Courier New" pitchFamily="34" charset="-120"/>
               </a:rPr>
-              <a:t>✓ basic-arithmetic/spec alice valid 085df546</a:t>
+              <a:t>✓ basic-arithmetic/spec alice valid bb4a18dc</a:t>
             </a:r>
             <a:endParaRPr lang="en-US" sz="1000" dirty="0"/>
           </a:p>
@@ -7845,7 +7845,7 @@
                 <a:ea typeface="Courier New" pitchFamily="34" charset="-122"/>
                 <a:cs typeface="Courier New" pitchFamily="34" charset="-120"/>
               </a:rPr>
-              <a:t>✗ basic-arithmetic/plan bob wrong-signer 085df546</a:t>
+              <a:t>✗ basic-arithmetic/plan bob wrong-signer bb4a18dc</a:t>
             </a:r>
             <a:endParaRPr lang="en-US" sz="1000" dirty="0"/>
           </a:p>
@@ -7862,7 +7862,7 @@
                 <a:ea typeface="Courier New" pitchFamily="34" charset="-122"/>
                 <a:cs typeface="Courier New" pitchFamily="34" charset="-120"/>
               </a:rPr>
-              <a:t>✓ basic-arithmetic/review carol valid 699847b1</a:t>
+              <a:t>✓ basic-arithmetic/review carol valid 5d27bce0</a:t>
             </a:r>
             <a:endParaRPr lang="en-US" sz="1000" dirty="0"/>
           </a:p>
@@ -7879,7 +7879,7 @@
                 <a:ea typeface="Courier New" pitchFamily="34" charset="-122"/>
                 <a:cs typeface="Courier New" pitchFamily="34" charset="-120"/>
               </a:rPr>
-              <a:t>✓ basic-arithmetic/release alice valid 5a612384</a:t>
+              <a:t>✓ basic-arithmetic/release alice valid 0ccb2085</a:t>
             </a:r>
             <a:endParaRPr lang="en-US" sz="1000" dirty="0"/>
           </a:p>
@@ -7896,7 +7896,7 @@
                 <a:ea typeface="Courier New" pitchFamily="34" charset="-122"/>
                 <a:cs typeface="Courier New" pitchFamily="34" charset="-120"/>
               </a:rPr>
-              <a:t>✓ openspec/roles.yaml alice@calc.example valid 9b596928</a:t>
+              <a:t>✓ openspec/roles.yaml alice@calc.example valid 267e0793</a:t>
             </a:r>
             <a:endParaRPr lang="en-US" sz="1000" dirty="0"/>
           </a:p>
@@ -14382,7 +14382,7 @@
                 <a:ea typeface="Courier New" pitchFamily="34" charset="-122"/>
                 <a:cs typeface="Courier New" pitchFamily="34" charset="-120"/>
               </a:rPr>
-              <a:t>  archived) · sdlc 0.13.0, license:</a:t>
+              <a:t>  archived) · sdlc 0.13.1, license:</a:t>
             </a:r>
             <a:endParaRPr lang="en-US" sz="1000" dirty="0"/>
           </a:p>
@@ -14569,7 +14569,7 @@
                 <a:ea typeface="Courier New" pitchFamily="34" charset="-122"/>
                 <a:cs typeface="Courier New" pitchFamily="34" charset="-120"/>
               </a:rPr>
-              <a:t>  intent 3 · plan 12 · review 3; rework</a:t>
+              <a:t>  intent 2 · plan 11 · review 3; rework</a:t>
             </a:r>
             <a:endParaRPr lang="en-US" sz="1000" dirty="0"/>
           </a:p>
@@ -14903,7 +14903,7 @@
                 <a:ea typeface="Courier New" pitchFamily="34" charset="-122"/>
                 <a:cs typeface="Courier New" pitchFamily="34" charset="-120"/>
               </a:rPr>
-              <a:t>2026-10-08T20:23:00.314Z  gate.review.await</a:t>
+              <a:t>2026-10-09T05:56:16.077Z  gate.review.await</a:t>
             </a:r>
             <a:endParaRPr lang="en-US" sz="1000" dirty="0"/>
           </a:p>
@@ -14937,7 +14937,7 @@
                 <a:ea typeface="Courier New" pitchFamily="34" charset="-122"/>
                 <a:cs typeface="Courier New" pitchFamily="34" charset="-120"/>
               </a:rPr>
-              <a:t>  sha256:29b1dbba496e041498a058028b98136d93</a:t>
+              <a:t>  sha256:0e1f099045b84ebdb864864f068bd06dfa</a:t>
             </a:r>
             <a:endParaRPr lang="en-US" sz="1000" dirty="0"/>
           </a:p>
@@ -14954,7 +14954,7 @@
                 <a:ea typeface="Courier New" pitchFamily="34" charset="-122"/>
                 <a:cs typeface="Courier New" pitchFamily="34" charset="-120"/>
               </a:rPr>
-              <a:t>  d86655c53e4f94210285298afc8b7b [sdlc</a:t>
+              <a:t>  abcd3d9bc533080a14cc9b465a281a [sdlc</a:t>
             </a:r>
             <a:endParaRPr lang="en-US" sz="1000" dirty="0"/>
           </a:p>
@@ -14971,7 +14971,7 @@
                 <a:ea typeface="Courier New" pitchFamily="34" charset="-122"/>
                 <a:cs typeface="Courier New" pitchFamily="34" charset="-120"/>
               </a:rPr>
-              <a:t>  0.13.0 · community]</a:t>
+              <a:t>  0.13.1 · community]</a:t>
             </a:r>
             <a:endParaRPr lang="en-US" sz="1000" dirty="0"/>
           </a:p>
@@ -14988,7 +14988,7 @@
                 <a:ea typeface="Courier New" pitchFamily="34" charset="-122"/>
                 <a:cs typeface="Courier New" pitchFamily="34" charset="-120"/>
               </a:rPr>
-              <a:t>2026-10-08T20:23:03.413Z  gate.review.appro</a:t>
+              <a:t>2026-10-09T05:56:18.902Z  gate.review.appro</a:t>
             </a:r>
             <a:endParaRPr lang="en-US" sz="1000" dirty="0"/>
           </a:p>
@@ -15039,7 +15039,7 @@
                 <a:ea typeface="Courier New" pitchFamily="34" charset="-122"/>
                 <a:cs typeface="Courier New" pitchFamily="34" charset="-120"/>
               </a:rPr>
-              <a:t>  [sdlc 0.13.0 · community]</a:t>
+              <a:t>  [sdlc 0.13.1 · community]</a:t>
             </a:r>
             <a:endParaRPr lang="en-US" sz="1000" dirty="0"/>
           </a:p>
@@ -15056,7 +15056,7 @@
                 <a:ea typeface="Courier New" pitchFamily="34" charset="-122"/>
                 <a:cs typeface="Courier New" pitchFamily="34" charset="-120"/>
               </a:rPr>
-              <a:t>2026-10-08T20:23:09.449Z  gate.release.appr</a:t>
+              <a:t>2026-10-09T05:56:24.322Z  gate.release.appr</a:t>
             </a:r>
             <a:endParaRPr lang="en-US" sz="1000" dirty="0"/>
           </a:p>
@@ -15107,7 +15107,7 @@
                 <a:ea typeface="Courier New" pitchFamily="34" charset="-122"/>
                 <a:cs typeface="Courier New" pitchFamily="34" charset="-120"/>
               </a:rPr>
-              <a:t>  release-manager [sdlc 0.13.0 · community]</a:t>
+              <a:t>  release-manager [sdlc 0.13.1 · community]</a:t>
             </a:r>
             <a:endParaRPr lang="en-US" sz="1000" dirty="0"/>
           </a:p>
@@ -16284,7 +16284,7 @@
                 <a:ea typeface="Courier New" pitchFamily="34" charset="-122"/>
                 <a:cs typeface="Courier New" pitchFamily="34" charset="-120"/>
               </a:rPr>
-              <a:t>✓ test (1.0s)</a:t>
+              <a:t>✓ test (0.9s)</a:t>
             </a:r>
             <a:endParaRPr lang="en-US" sz="1000" dirty="0"/>
           </a:p>
@@ -16737,7 +16737,7 @@
                 <a:ea typeface="Courier New" pitchFamily="34" charset="-122"/>
                 <a:cs typeface="Courier New" pitchFamily="34" charset="-120"/>
               </a:rPr>
-              <a:t>      "id": "20261008T202353353Z-ci-green-e</a:t>
+              <a:t>      "id": "20261009T055704551Z-ci-green-7</a:t>
             </a:r>
             <a:endParaRPr lang="en-US" sz="1000" dirty="0"/>
           </a:p>
@@ -16754,7 +16754,7 @@
                 <a:ea typeface="Courier New" pitchFamily="34" charset="-122"/>
                 <a:cs typeface="Courier New" pitchFamily="34" charset="-120"/>
               </a:rPr>
-              <a:t>  a4554",</a:t>
+              <a:t>  9856f",</a:t>
             </a:r>
             <a:endParaRPr lang="en-US" sz="1000" dirty="0"/>
           </a:p>
@@ -16890,7 +16890,7 @@
                 <a:ea typeface="Courier New" pitchFamily="34" charset="-122"/>
                 <a:cs typeface="Courier New" pitchFamily="34" charset="-120"/>
               </a:rPr>
-              <a:t>        "ref": "9ff236a0b14f8f0d5f07bfe9331</a:t>
+              <a:t>        "ref": "c6f8a841edea1fbba4dc3db098c</a:t>
             </a:r>
             <a:endParaRPr lang="en-US" sz="1000" dirty="0"/>
           </a:p>
@@ -16907,7 +16907,7 @@
                 <a:ea typeface="Courier New" pitchFamily="34" charset="-122"/>
                 <a:cs typeface="Courier New" pitchFamily="34" charset="-120"/>
               </a:rPr>
-              <a:t>  c51dd6f7a0cc8",</a:t>
+              <a:t>  cc2b484c9a2f3",</a:t>
             </a:r>
             <a:endParaRPr lang="en-US" sz="1000" dirty="0"/>
           </a:p>
@@ -26969,7 +26969,7 @@
                 <a:ea typeface="Courier New" pitchFamily="34" charset="-122"/>
                 <a:cs typeface="Courier New" pitchFamily="34" charset="-120"/>
               </a:rPr>
-              <a:t>  sdlc 0.13.0, license: community</a:t>
+              <a:t>  sdlc 0.13.1, license: community</a:t>
             </a:r>
             <a:endParaRPr lang="en-US" sz="1000" dirty="0"/>
           </a:p>

--- a/docs/demo/sdlc-calculator-demo.en.pptx
+++ b/docs/demo/sdlc-calculator-demo.en.pptx
@@ -6660,7 +6660,7 @@
                 <a:ea typeface="Courier New" pitchFamily="34" charset="-122"/>
                 <a:cs typeface="Courier New" pitchFamily="34" charset="-120"/>
               </a:rPr>
-              <a:t>  code-owner (0e1f099045b8)</a:t>
+              <a:t>  code-owner (9c1adacc80d9)</a:t>
             </a:r>
             <a:endParaRPr lang="en-US" sz="1000" dirty="0"/>
           </a:p>
@@ -6745,7 +6745,7 @@
                 <a:ea typeface="Courier New" pitchFamily="34" charset="-122"/>
                 <a:cs typeface="Courier New" pitchFamily="34" charset="-120"/>
               </a:rPr>
-              <a:t>  "SDLC-Approval: basic-arithmetic:review:0</a:t>
+              <a:t>  "SDLC-Approval: basic-arithmetic:review:9</a:t>
             </a:r>
             <a:endParaRPr lang="en-US" sz="1000" dirty="0"/>
           </a:p>
@@ -6762,7 +6762,7 @@
                 <a:ea typeface="Courier New" pitchFamily="34" charset="-122"/>
                 <a:cs typeface="Courier New" pitchFamily="34" charset="-120"/>
               </a:rPr>
-              <a:t>  e1f099045b8"</a:t>
+              <a:t>  c1adacc80d9"</a:t>
             </a:r>
             <a:endParaRPr lang="en-US" sz="1000" dirty="0"/>
           </a:p>
@@ -7443,7 +7443,7 @@
                 <a:ea typeface="Courier New" pitchFamily="34" charset="-122"/>
                 <a:cs typeface="Courier New" pitchFamily="34" charset="-120"/>
               </a:rPr>
-              <a:t>  release-manager (0e1f099045b8)</a:t>
+              <a:t>  release-manager (9c1adacc80d9)</a:t>
             </a:r>
             <a:endParaRPr lang="en-US" sz="1000" dirty="0"/>
           </a:p>
@@ -7511,7 +7511,7 @@
                 <a:ea typeface="Courier New" pitchFamily="34" charset="-122"/>
                 <a:cs typeface="Courier New" pitchFamily="34" charset="-120"/>
               </a:rPr>
-              <a:t>  gate" -m "SDLC-Approval: basic-arithmetic:release:0e1f099045b8"</a:t>
+              <a:t>  gate" -m "SDLC-Approval: basic-arithmetic:release:9c1adacc80d9"</a:t>
             </a:r>
             <a:endParaRPr lang="en-US" sz="1000" dirty="0"/>
           </a:p>
@@ -7811,7 +7811,7 @@
                 <a:ea typeface="Courier New" pitchFamily="34" charset="-122"/>
                 <a:cs typeface="Courier New" pitchFamily="34" charset="-120"/>
               </a:rPr>
-              <a:t>✓ basic-arithmetic/intent alice valid cfb73c63</a:t>
+              <a:t>✓ basic-arithmetic/intent alice valid 01c8d1b0</a:t>
             </a:r>
             <a:endParaRPr lang="en-US" sz="1000" dirty="0"/>
           </a:p>
@@ -7828,7 +7828,7 @@
                 <a:ea typeface="Courier New" pitchFamily="34" charset="-122"/>
                 <a:cs typeface="Courier New" pitchFamily="34" charset="-120"/>
               </a:rPr>
-              <a:t>✓ basic-arithmetic/spec alice valid bb4a18dc</a:t>
+              <a:t>✓ basic-arithmetic/spec alice valid 0cfe6b14</a:t>
             </a:r>
             <a:endParaRPr lang="en-US" sz="1000" dirty="0"/>
           </a:p>
@@ -7845,7 +7845,7 @@
                 <a:ea typeface="Courier New" pitchFamily="34" charset="-122"/>
                 <a:cs typeface="Courier New" pitchFamily="34" charset="-120"/>
               </a:rPr>
-              <a:t>✗ basic-arithmetic/plan bob wrong-signer bb4a18dc</a:t>
+              <a:t>✗ basic-arithmetic/plan bob wrong-signer 0cfe6b14</a:t>
             </a:r>
             <a:endParaRPr lang="en-US" sz="1000" dirty="0"/>
           </a:p>
@@ -7862,7 +7862,7 @@
                 <a:ea typeface="Courier New" pitchFamily="34" charset="-122"/>
                 <a:cs typeface="Courier New" pitchFamily="34" charset="-120"/>
               </a:rPr>
-              <a:t>✓ basic-arithmetic/review carol valid 5d27bce0</a:t>
+              <a:t>✓ basic-arithmetic/review carol valid 61e27b64</a:t>
             </a:r>
             <a:endParaRPr lang="en-US" sz="1000" dirty="0"/>
           </a:p>
@@ -7879,7 +7879,7 @@
                 <a:ea typeface="Courier New" pitchFamily="34" charset="-122"/>
                 <a:cs typeface="Courier New" pitchFamily="34" charset="-120"/>
               </a:rPr>
-              <a:t>✓ basic-arithmetic/release alice valid 0ccb2085</a:t>
+              <a:t>✓ basic-arithmetic/release alice valid c1db7e6c</a:t>
             </a:r>
             <a:endParaRPr lang="en-US" sz="1000" dirty="0"/>
           </a:p>
@@ -7896,7 +7896,7 @@
                 <a:ea typeface="Courier New" pitchFamily="34" charset="-122"/>
                 <a:cs typeface="Courier New" pitchFamily="34" charset="-120"/>
               </a:rPr>
-              <a:t>✓ openspec/roles.yaml alice@calc.example valid 267e0793</a:t>
+              <a:t>✓ openspec/roles.yaml alice@calc.example valid 1c54bfcd</a:t>
             </a:r>
             <a:endParaRPr lang="en-US" sz="1000" dirty="0"/>
           </a:p>
@@ -8528,7 +8528,7 @@
                 <a:ea typeface="Courier New" pitchFamily="34" charset="-122"/>
                 <a:cs typeface="Courier New" pitchFamily="34" charset="-120"/>
               </a:rPr>
-              <a:t>  openspec\changes\archive\2026-10-08-basic</a:t>
+              <a:t>  openspec\changes\archive\2026-10-09-basic</a:t>
             </a:r>
             <a:endParaRPr lang="en-US" sz="1000" dirty="0"/>
           </a:p>
@@ -14382,7 +14382,7 @@
                 <a:ea typeface="Courier New" pitchFamily="34" charset="-122"/>
                 <a:cs typeface="Courier New" pitchFamily="34" charset="-120"/>
               </a:rPr>
-              <a:t>  archived) · sdlc 0.13.1, license:</a:t>
+              <a:t>  archived) · sdlc 0.14.0, license:</a:t>
             </a:r>
             <a:endParaRPr lang="en-US" sz="1000" dirty="0"/>
           </a:p>
@@ -14569,7 +14569,7 @@
                 <a:ea typeface="Courier New" pitchFamily="34" charset="-122"/>
                 <a:cs typeface="Courier New" pitchFamily="34" charset="-120"/>
               </a:rPr>
-              <a:t>  intent 2 · plan 11 · review 3; rework</a:t>
+              <a:t>  intent 3 · plan 10 · review 3; rework</a:t>
             </a:r>
             <a:endParaRPr lang="en-US" sz="1000" dirty="0"/>
           </a:p>
@@ -14903,7 +14903,7 @@
                 <a:ea typeface="Courier New" pitchFamily="34" charset="-122"/>
                 <a:cs typeface="Courier New" pitchFamily="34" charset="-120"/>
               </a:rPr>
-              <a:t>2026-10-09T05:56:16.077Z  gate.review.await</a:t>
+              <a:t>2026-10-09T11:18:15.153Z  gate.review.await</a:t>
             </a:r>
             <a:endParaRPr lang="en-US" sz="1000" dirty="0"/>
           </a:p>
@@ -14937,7 +14937,7 @@
                 <a:ea typeface="Courier New" pitchFamily="34" charset="-122"/>
                 <a:cs typeface="Courier New" pitchFamily="34" charset="-120"/>
               </a:rPr>
-              <a:t>  sha256:0e1f099045b84ebdb864864f068bd06dfa</a:t>
+              <a:t>  sha256:9c1adacc80d944ff44bbb822b6f0daf99a</a:t>
             </a:r>
             <a:endParaRPr lang="en-US" sz="1000" dirty="0"/>
           </a:p>
@@ -14954,7 +14954,7 @@
                 <a:ea typeface="Courier New" pitchFamily="34" charset="-122"/>
                 <a:cs typeface="Courier New" pitchFamily="34" charset="-120"/>
               </a:rPr>
-              <a:t>  abcd3d9bc533080a14cc9b465a281a [sdlc</a:t>
+              <a:t>  ec7568d4f5e9813b4ef42f90300281 [sdlc</a:t>
             </a:r>
             <a:endParaRPr lang="en-US" sz="1000" dirty="0"/>
           </a:p>
@@ -14971,7 +14971,7 @@
                 <a:ea typeface="Courier New" pitchFamily="34" charset="-122"/>
                 <a:cs typeface="Courier New" pitchFamily="34" charset="-120"/>
               </a:rPr>
-              <a:t>  0.13.1 · community]</a:t>
+              <a:t>  0.14.0 · community]</a:t>
             </a:r>
             <a:endParaRPr lang="en-US" sz="1000" dirty="0"/>
           </a:p>
@@ -14988,7 +14988,7 @@
                 <a:ea typeface="Courier New" pitchFamily="34" charset="-122"/>
                 <a:cs typeface="Courier New" pitchFamily="34" charset="-120"/>
               </a:rPr>
-              <a:t>2026-10-09T05:56:18.902Z  gate.review.appro</a:t>
+              <a:t>2026-10-09T11:18:18.124Z  gate.review.appro</a:t>
             </a:r>
             <a:endParaRPr lang="en-US" sz="1000" dirty="0"/>
           </a:p>
@@ -15039,7 +15039,7 @@
                 <a:ea typeface="Courier New" pitchFamily="34" charset="-122"/>
                 <a:cs typeface="Courier New" pitchFamily="34" charset="-120"/>
               </a:rPr>
-              <a:t>  [sdlc 0.13.1 · community]</a:t>
+              <a:t>  [sdlc 0.14.0 · community]</a:t>
             </a:r>
             <a:endParaRPr lang="en-US" sz="1000" dirty="0"/>
           </a:p>
@@ -15056,7 +15056,7 @@
                 <a:ea typeface="Courier New" pitchFamily="34" charset="-122"/>
                 <a:cs typeface="Courier New" pitchFamily="34" charset="-120"/>
               </a:rPr>
-              <a:t>2026-10-09T05:56:24.322Z  gate.release.appr</a:t>
+              <a:t>2026-10-09T11:18:23.910Z  gate.release.appr</a:t>
             </a:r>
             <a:endParaRPr lang="en-US" sz="1000" dirty="0"/>
           </a:p>
@@ -15107,7 +15107,7 @@
                 <a:ea typeface="Courier New" pitchFamily="34" charset="-122"/>
                 <a:cs typeface="Courier New" pitchFamily="34" charset="-120"/>
               </a:rPr>
-              <a:t>  release-manager [sdlc 0.13.1 · community]</a:t>
+              <a:t>  release-manager [sdlc 0.14.0 · community]</a:t>
             </a:r>
             <a:endParaRPr lang="en-US" sz="1000" dirty="0"/>
           </a:p>
@@ -16284,7 +16284,7 @@
                 <a:ea typeface="Courier New" pitchFamily="34" charset="-122"/>
                 <a:cs typeface="Courier New" pitchFamily="34" charset="-120"/>
               </a:rPr>
-              <a:t>✓ test (0.9s)</a:t>
+              <a:t>✓ test (1.0s)</a:t>
             </a:r>
             <a:endParaRPr lang="en-US" sz="1000" dirty="0"/>
           </a:p>
@@ -16737,7 +16737,7 @@
                 <a:ea typeface="Courier New" pitchFamily="34" charset="-122"/>
                 <a:cs typeface="Courier New" pitchFamily="34" charset="-120"/>
               </a:rPr>
-              <a:t>      "id": "20261009T055704551Z-ci-green-7</a:t>
+              <a:t>      "id": "20261009T111905403Z-ci-green-d</a:t>
             </a:r>
             <a:endParaRPr lang="en-US" sz="1000" dirty="0"/>
           </a:p>
@@ -16754,7 +16754,7 @@
                 <a:ea typeface="Courier New" pitchFamily="34" charset="-122"/>
                 <a:cs typeface="Courier New" pitchFamily="34" charset="-120"/>
               </a:rPr>
-              <a:t>  9856f",</a:t>
+              <a:t>  ad63c",</a:t>
             </a:r>
             <a:endParaRPr lang="en-US" sz="1000" dirty="0"/>
           </a:p>
@@ -16890,7 +16890,7 @@
                 <a:ea typeface="Courier New" pitchFamily="34" charset="-122"/>
                 <a:cs typeface="Courier New" pitchFamily="34" charset="-120"/>
               </a:rPr>
-              <a:t>        "ref": "c6f8a841edea1fbba4dc3db098c</a:t>
+              <a:t>        "ref": "9acc218c9dd956c149808baf1df</a:t>
             </a:r>
             <a:endParaRPr lang="en-US" sz="1000" dirty="0"/>
           </a:p>
@@ -16907,7 +16907,7 @@
                 <a:ea typeface="Courier New" pitchFamily="34" charset="-122"/>
                 <a:cs typeface="Courier New" pitchFamily="34" charset="-120"/>
               </a:rPr>
-              <a:t>  cc2b484c9a2f3",</a:t>
+              <a:t>  5cfb6a7346a2e",</a:t>
             </a:r>
             <a:endParaRPr lang="en-US" sz="1000" dirty="0"/>
           </a:p>
@@ -26969,7 +26969,7 @@
                 <a:ea typeface="Courier New" pitchFamily="34" charset="-122"/>
                 <a:cs typeface="Courier New" pitchFamily="34" charset="-120"/>
               </a:rPr>
-              <a:t>  sdlc 0.13.1, license: community</a:t>
+              <a:t>  sdlc 0.14.0, license: community</a:t>
             </a:r>
             <a:endParaRPr lang="en-US" sz="1000" dirty="0"/>
           </a:p>
@@ -33794,7 +33794,7 @@
                 <a:ea typeface="Courier New" pitchFamily="34" charset="-122"/>
                 <a:cs typeface="Courier New" pitchFamily="34" charset="-120"/>
               </a:rPr>
-              <a:t>  (f27bc8d851ef)</a:t>
+              <a:t>  (df7cf643b6a1)</a:t>
             </a:r>
             <a:endParaRPr lang="en-US" sz="1000" dirty="0"/>
           </a:p>
@@ -33930,7 +33930,7 @@
                 <a:ea typeface="Courier New" pitchFamily="34" charset="-122"/>
                 <a:cs typeface="Courier New" pitchFamily="34" charset="-120"/>
               </a:rPr>
-              <a:t>  f27bc8d851ef"</a:t>
+              <a:t>  df7cf643b6a1"</a:t>
             </a:r>
             <a:endParaRPr lang="en-US" sz="1000" dirty="0"/>
           </a:p>

--- a/docs/demo/sdlc-calculator-demo.en.pptx
+++ b/docs/demo/sdlc-calculator-demo.en.pptx
@@ -6660,7 +6660,7 @@
                 <a:ea typeface="Courier New" pitchFamily="34" charset="-122"/>
                 <a:cs typeface="Courier New" pitchFamily="34" charset="-120"/>
               </a:rPr>
-              <a:t>  code-owner (9c1adacc80d9)</a:t>
+              <a:t>  code-owner (4344ec8e9412)</a:t>
             </a:r>
             <a:endParaRPr lang="en-US" sz="1000" dirty="0"/>
           </a:p>
@@ -6745,7 +6745,7 @@
                 <a:ea typeface="Courier New" pitchFamily="34" charset="-122"/>
                 <a:cs typeface="Courier New" pitchFamily="34" charset="-120"/>
               </a:rPr>
-              <a:t>  "SDLC-Approval: basic-arithmetic:review:9</a:t>
+              <a:t>  "SDLC-Approval: basic-arithmetic:review:4</a:t>
             </a:r>
             <a:endParaRPr lang="en-US" sz="1000" dirty="0"/>
           </a:p>
@@ -6762,7 +6762,7 @@
                 <a:ea typeface="Courier New" pitchFamily="34" charset="-122"/>
                 <a:cs typeface="Courier New" pitchFamily="34" charset="-120"/>
               </a:rPr>
-              <a:t>  c1adacc80d9"</a:t>
+              <a:t>  344ec8e9412"</a:t>
             </a:r>
             <a:endParaRPr lang="en-US" sz="1000" dirty="0"/>
           </a:p>
@@ -7443,7 +7443,7 @@
                 <a:ea typeface="Courier New" pitchFamily="34" charset="-122"/>
                 <a:cs typeface="Courier New" pitchFamily="34" charset="-120"/>
               </a:rPr>
-              <a:t>  release-manager (9c1adacc80d9)</a:t>
+              <a:t>  release-manager (4344ec8e9412)</a:t>
             </a:r>
             <a:endParaRPr lang="en-US" sz="1000" dirty="0"/>
           </a:p>
@@ -7511,7 +7511,7 @@
                 <a:ea typeface="Courier New" pitchFamily="34" charset="-122"/>
                 <a:cs typeface="Courier New" pitchFamily="34" charset="-120"/>
               </a:rPr>
-              <a:t>  gate" -m "SDLC-Approval: basic-arithmetic:release:9c1adacc80d9"</a:t>
+              <a:t>  gate" -m "SDLC-Approval: basic-arithmetic:release:4344ec8e9412"</a:t>
             </a:r>
             <a:endParaRPr lang="en-US" sz="1000" dirty="0"/>
           </a:p>
@@ -7811,7 +7811,7 @@
                 <a:ea typeface="Courier New" pitchFamily="34" charset="-122"/>
                 <a:cs typeface="Courier New" pitchFamily="34" charset="-120"/>
               </a:rPr>
-              <a:t>✓ basic-arithmetic/intent alice valid 01c8d1b0</a:t>
+              <a:t>✓ basic-arithmetic/intent alice valid 2ca9c9ea</a:t>
             </a:r>
             <a:endParaRPr lang="en-US" sz="1000" dirty="0"/>
           </a:p>
@@ -7828,7 +7828,7 @@
                 <a:ea typeface="Courier New" pitchFamily="34" charset="-122"/>
                 <a:cs typeface="Courier New" pitchFamily="34" charset="-120"/>
               </a:rPr>
-              <a:t>✓ basic-arithmetic/spec alice valid 0cfe6b14</a:t>
+              <a:t>✓ basic-arithmetic/spec alice valid 62a342b3</a:t>
             </a:r>
             <a:endParaRPr lang="en-US" sz="1000" dirty="0"/>
           </a:p>
@@ -7845,7 +7845,7 @@
                 <a:ea typeface="Courier New" pitchFamily="34" charset="-122"/>
                 <a:cs typeface="Courier New" pitchFamily="34" charset="-120"/>
               </a:rPr>
-              <a:t>✗ basic-arithmetic/plan bob wrong-signer 0cfe6b14</a:t>
+              <a:t>✗ basic-arithmetic/plan bob wrong-signer 62a342b3</a:t>
             </a:r>
             <a:endParaRPr lang="en-US" sz="1000" dirty="0"/>
           </a:p>
@@ -7862,7 +7862,7 @@
                 <a:ea typeface="Courier New" pitchFamily="34" charset="-122"/>
                 <a:cs typeface="Courier New" pitchFamily="34" charset="-120"/>
               </a:rPr>
-              <a:t>✓ basic-arithmetic/review carol valid 61e27b64</a:t>
+              <a:t>✓ basic-arithmetic/review carol valid 3bc25613</a:t>
             </a:r>
             <a:endParaRPr lang="en-US" sz="1000" dirty="0"/>
           </a:p>
@@ -7879,7 +7879,7 @@
                 <a:ea typeface="Courier New" pitchFamily="34" charset="-122"/>
                 <a:cs typeface="Courier New" pitchFamily="34" charset="-120"/>
               </a:rPr>
-              <a:t>✓ basic-arithmetic/release alice valid c1db7e6c</a:t>
+              <a:t>✓ basic-arithmetic/release alice valid 15001de1</a:t>
             </a:r>
             <a:endParaRPr lang="en-US" sz="1000" dirty="0"/>
           </a:p>
@@ -7896,7 +7896,7 @@
                 <a:ea typeface="Courier New" pitchFamily="34" charset="-122"/>
                 <a:cs typeface="Courier New" pitchFamily="34" charset="-120"/>
               </a:rPr>
-              <a:t>✓ openspec/roles.yaml alice@calc.example valid 1c54bfcd</a:t>
+              <a:t>✓ openspec/roles.yaml alice@calc.example valid 0166ab36</a:t>
             </a:r>
             <a:endParaRPr lang="en-US" sz="1000" dirty="0"/>
           </a:p>
@@ -14382,7 +14382,7 @@
                 <a:ea typeface="Courier New" pitchFamily="34" charset="-122"/>
                 <a:cs typeface="Courier New" pitchFamily="34" charset="-120"/>
               </a:rPr>
-              <a:t>  archived) · sdlc 0.14.0, license:</a:t>
+              <a:t>  archived) · sdlc 0.14.1, license:</a:t>
             </a:r>
             <a:endParaRPr lang="en-US" sz="1000" dirty="0"/>
           </a:p>
@@ -14569,7 +14569,7 @@
                 <a:ea typeface="Courier New" pitchFamily="34" charset="-122"/>
                 <a:cs typeface="Courier New" pitchFamily="34" charset="-120"/>
               </a:rPr>
-              <a:t>  intent 3 · plan 10 · review 3; rework</a:t>
+              <a:t>  intent 3 · plan 11 · review 3; rework</a:t>
             </a:r>
             <a:endParaRPr lang="en-US" sz="1000" dirty="0"/>
           </a:p>
@@ -14903,7 +14903,7 @@
                 <a:ea typeface="Courier New" pitchFamily="34" charset="-122"/>
                 <a:cs typeface="Courier New" pitchFamily="34" charset="-120"/>
               </a:rPr>
-              <a:t>2026-10-09T11:18:15.153Z  gate.review.await</a:t>
+              <a:t>2026-10-09T13:49:37.473Z  gate.review.await</a:t>
             </a:r>
             <a:endParaRPr lang="en-US" sz="1000" dirty="0"/>
           </a:p>
@@ -14937,7 +14937,7 @@
                 <a:ea typeface="Courier New" pitchFamily="34" charset="-122"/>
                 <a:cs typeface="Courier New" pitchFamily="34" charset="-120"/>
               </a:rPr>
-              <a:t>  sha256:9c1adacc80d944ff44bbb822b6f0daf99a</a:t>
+              <a:t>  sha256:4344ec8e9412e6d81a6e67181ed17789f3</a:t>
             </a:r>
             <a:endParaRPr lang="en-US" sz="1000" dirty="0"/>
           </a:p>
@@ -14954,7 +14954,7 @@
                 <a:ea typeface="Courier New" pitchFamily="34" charset="-122"/>
                 <a:cs typeface="Courier New" pitchFamily="34" charset="-120"/>
               </a:rPr>
-              <a:t>  ec7568d4f5e9813b4ef42f90300281 [sdlc</a:t>
+              <a:t>  43509bddbffd59407e4021b607ee52 [sdlc</a:t>
             </a:r>
             <a:endParaRPr lang="en-US" sz="1000" dirty="0"/>
           </a:p>
@@ -14971,7 +14971,7 @@
                 <a:ea typeface="Courier New" pitchFamily="34" charset="-122"/>
                 <a:cs typeface="Courier New" pitchFamily="34" charset="-120"/>
               </a:rPr>
-              <a:t>  0.14.0 · community]</a:t>
+              <a:t>  0.14.1 · community]</a:t>
             </a:r>
             <a:endParaRPr lang="en-US" sz="1000" dirty="0"/>
           </a:p>
@@ -14988,7 +14988,7 @@
                 <a:ea typeface="Courier New" pitchFamily="34" charset="-122"/>
                 <a:cs typeface="Courier New" pitchFamily="34" charset="-120"/>
               </a:rPr>
-              <a:t>2026-10-09T11:18:18.124Z  gate.review.appro</a:t>
+              <a:t>2026-10-09T13:49:40.949Z  gate.review.appro</a:t>
             </a:r>
             <a:endParaRPr lang="en-US" sz="1000" dirty="0"/>
           </a:p>
@@ -15039,7 +15039,7 @@
                 <a:ea typeface="Courier New" pitchFamily="34" charset="-122"/>
                 <a:cs typeface="Courier New" pitchFamily="34" charset="-120"/>
               </a:rPr>
-              <a:t>  [sdlc 0.14.0 · community]</a:t>
+              <a:t>  [sdlc 0.14.1 · community]</a:t>
             </a:r>
             <a:endParaRPr lang="en-US" sz="1000" dirty="0"/>
           </a:p>
@@ -15056,7 +15056,7 @@
                 <a:ea typeface="Courier New" pitchFamily="34" charset="-122"/>
                 <a:cs typeface="Courier New" pitchFamily="34" charset="-120"/>
               </a:rPr>
-              <a:t>2026-10-09T11:18:23.910Z  gate.release.appr</a:t>
+              <a:t>2026-10-09T13:49:47.957Z  gate.release.appr</a:t>
             </a:r>
             <a:endParaRPr lang="en-US" sz="1000" dirty="0"/>
           </a:p>
@@ -15107,7 +15107,7 @@
                 <a:ea typeface="Courier New" pitchFamily="34" charset="-122"/>
                 <a:cs typeface="Courier New" pitchFamily="34" charset="-120"/>
               </a:rPr>
-              <a:t>  release-manager [sdlc 0.14.0 · community]</a:t>
+              <a:t>  release-manager [sdlc 0.14.1 · community]</a:t>
             </a:r>
             <a:endParaRPr lang="en-US" sz="1000" dirty="0"/>
           </a:p>
@@ -16737,7 +16737,7 @@
                 <a:ea typeface="Courier New" pitchFamily="34" charset="-122"/>
                 <a:cs typeface="Courier New" pitchFamily="34" charset="-120"/>
               </a:rPr>
-              <a:t>      "id": "20261009T111905403Z-ci-green-d</a:t>
+              <a:t>      "id": "20261009T135033553Z-ci-green-0</a:t>
             </a:r>
             <a:endParaRPr lang="en-US" sz="1000" dirty="0"/>
           </a:p>
@@ -16754,7 +16754,7 @@
                 <a:ea typeface="Courier New" pitchFamily="34" charset="-122"/>
                 <a:cs typeface="Courier New" pitchFamily="34" charset="-120"/>
               </a:rPr>
-              <a:t>  ad63c",</a:t>
+              <a:t>  89eef",</a:t>
             </a:r>
             <a:endParaRPr lang="en-US" sz="1000" dirty="0"/>
           </a:p>
@@ -16890,7 +16890,7 @@
                 <a:ea typeface="Courier New" pitchFamily="34" charset="-122"/>
                 <a:cs typeface="Courier New" pitchFamily="34" charset="-120"/>
               </a:rPr>
-              <a:t>        "ref": "9acc218c9dd956c149808baf1df</a:t>
+              <a:t>        "ref": "45b70ca257d53f9e59a5b447da6</a:t>
             </a:r>
             <a:endParaRPr lang="en-US" sz="1000" dirty="0"/>
           </a:p>
@@ -16907,7 +16907,7 @@
                 <a:ea typeface="Courier New" pitchFamily="34" charset="-122"/>
                 <a:cs typeface="Courier New" pitchFamily="34" charset="-120"/>
               </a:rPr>
-              <a:t>  5cfb6a7346a2e",</a:t>
+              <a:t>  b3fd870493732",</a:t>
             </a:r>
             <a:endParaRPr lang="en-US" sz="1000" dirty="0"/>
           </a:p>
@@ -26969,7 +26969,7 @@
                 <a:ea typeface="Courier New" pitchFamily="34" charset="-122"/>
                 <a:cs typeface="Courier New" pitchFamily="34" charset="-120"/>
               </a:rPr>
-              <a:t>  sdlc 0.14.0, license: community</a:t>
+              <a:t>  sdlc 0.14.1, license: community</a:t>
             </a:r>
             <a:endParaRPr lang="en-US" sz="1000" dirty="0"/>
           </a:p>

--- a/docs/demo/sdlc-calculator-demo.en.pptx
+++ b/docs/demo/sdlc-calculator-demo.en.pptx
@@ -5112,7 +5112,7 @@
                 <a:ea typeface="Courier New" pitchFamily="34" charset="-122"/>
                 <a:cs typeface="Courier New" pitchFamily="34" charset="-120"/>
               </a:rPr>
-              <a:t>✓ test (1.0s)</a:t>
+              <a:t>✓ test (1.1s)</a:t>
             </a:r>
             <a:endParaRPr lang="en-US" sz="1000" dirty="0"/>
           </a:p>
@@ -6660,7 +6660,7 @@
                 <a:ea typeface="Courier New" pitchFamily="34" charset="-122"/>
                 <a:cs typeface="Courier New" pitchFamily="34" charset="-120"/>
               </a:rPr>
-              <a:t>  code-owner (4344ec8e9412)</a:t>
+              <a:t>  code-owner (b5150d6137dd)</a:t>
             </a:r>
             <a:endParaRPr lang="en-US" sz="1000" dirty="0"/>
           </a:p>
@@ -6745,7 +6745,7 @@
                 <a:ea typeface="Courier New" pitchFamily="34" charset="-122"/>
                 <a:cs typeface="Courier New" pitchFamily="34" charset="-120"/>
               </a:rPr>
-              <a:t>  "SDLC-Approval: basic-arithmetic:review:4</a:t>
+              <a:t>  "SDLC-Approval: basic-arithmetic:review:b</a:t>
             </a:r>
             <a:endParaRPr lang="en-US" sz="1000" dirty="0"/>
           </a:p>
@@ -6762,7 +6762,7 @@
                 <a:ea typeface="Courier New" pitchFamily="34" charset="-122"/>
                 <a:cs typeface="Courier New" pitchFamily="34" charset="-120"/>
               </a:rPr>
-              <a:t>  344ec8e9412"</a:t>
+              <a:t>  5150d6137dd"</a:t>
             </a:r>
             <a:endParaRPr lang="en-US" sz="1000" dirty="0"/>
           </a:p>
@@ -7443,7 +7443,7 @@
                 <a:ea typeface="Courier New" pitchFamily="34" charset="-122"/>
                 <a:cs typeface="Courier New" pitchFamily="34" charset="-120"/>
               </a:rPr>
-              <a:t>  release-manager (4344ec8e9412)</a:t>
+              <a:t>  release-manager (b5150d6137dd)</a:t>
             </a:r>
             <a:endParaRPr lang="en-US" sz="1000" dirty="0"/>
           </a:p>
@@ -7511,7 +7511,7 @@
                 <a:ea typeface="Courier New" pitchFamily="34" charset="-122"/>
                 <a:cs typeface="Courier New" pitchFamily="34" charset="-120"/>
               </a:rPr>
-              <a:t>  gate" -m "SDLC-Approval: basic-arithmetic:release:4344ec8e9412"</a:t>
+              <a:t>  gate" -m "SDLC-Approval: basic-arithmetic:release:b5150d6137dd"</a:t>
             </a:r>
             <a:endParaRPr lang="en-US" sz="1000" dirty="0"/>
           </a:p>
@@ -7811,7 +7811,7 @@
                 <a:ea typeface="Courier New" pitchFamily="34" charset="-122"/>
                 <a:cs typeface="Courier New" pitchFamily="34" charset="-120"/>
               </a:rPr>
-              <a:t>✓ basic-arithmetic/intent alice valid 2ca9c9ea</a:t>
+              <a:t>✓ basic-arithmetic/intent alice valid 1e787adc</a:t>
             </a:r>
             <a:endParaRPr lang="en-US" sz="1000" dirty="0"/>
           </a:p>
@@ -7828,7 +7828,7 @@
                 <a:ea typeface="Courier New" pitchFamily="34" charset="-122"/>
                 <a:cs typeface="Courier New" pitchFamily="34" charset="-120"/>
               </a:rPr>
-              <a:t>✓ basic-arithmetic/spec alice valid 62a342b3</a:t>
+              <a:t>✓ basic-arithmetic/spec alice valid ec113afc</a:t>
             </a:r>
             <a:endParaRPr lang="en-US" sz="1000" dirty="0"/>
           </a:p>
@@ -7845,7 +7845,7 @@
                 <a:ea typeface="Courier New" pitchFamily="34" charset="-122"/>
                 <a:cs typeface="Courier New" pitchFamily="34" charset="-120"/>
               </a:rPr>
-              <a:t>✗ basic-arithmetic/plan bob wrong-signer 62a342b3</a:t>
+              <a:t>✗ basic-arithmetic/plan bob wrong-signer ec113afc</a:t>
             </a:r>
             <a:endParaRPr lang="en-US" sz="1000" dirty="0"/>
           </a:p>
@@ -7862,7 +7862,7 @@
                 <a:ea typeface="Courier New" pitchFamily="34" charset="-122"/>
                 <a:cs typeface="Courier New" pitchFamily="34" charset="-120"/>
               </a:rPr>
-              <a:t>✓ basic-arithmetic/review carol valid 3bc25613</a:t>
+              <a:t>✓ basic-arithmetic/review carol valid 8c573d98</a:t>
             </a:r>
             <a:endParaRPr lang="en-US" sz="1000" dirty="0"/>
           </a:p>
@@ -7879,7 +7879,7 @@
                 <a:ea typeface="Courier New" pitchFamily="34" charset="-122"/>
                 <a:cs typeface="Courier New" pitchFamily="34" charset="-120"/>
               </a:rPr>
-              <a:t>✓ basic-arithmetic/release alice valid 15001de1</a:t>
+              <a:t>✓ basic-arithmetic/release alice valid f31564de</a:t>
             </a:r>
             <a:endParaRPr lang="en-US" sz="1000" dirty="0"/>
           </a:p>
@@ -7896,7 +7896,7 @@
                 <a:ea typeface="Courier New" pitchFamily="34" charset="-122"/>
                 <a:cs typeface="Courier New" pitchFamily="34" charset="-120"/>
               </a:rPr>
-              <a:t>✓ openspec/roles.yaml alice@calc.example valid 0166ab36</a:t>
+              <a:t>✓ openspec/roles.yaml alice@calc.example valid b724cb74</a:t>
             </a:r>
             <a:endParaRPr lang="en-US" sz="1000" dirty="0"/>
           </a:p>
@@ -14382,7 +14382,7 @@
                 <a:ea typeface="Courier New" pitchFamily="34" charset="-122"/>
                 <a:cs typeface="Courier New" pitchFamily="34" charset="-120"/>
               </a:rPr>
-              <a:t>  archived) · sdlc 0.14.1, license:</a:t>
+              <a:t>  archived) · sdlc 0.14.2, license:</a:t>
             </a:r>
             <a:endParaRPr lang="en-US" sz="1000" dirty="0"/>
           </a:p>
@@ -14569,7 +14569,7 @@
                 <a:ea typeface="Courier New" pitchFamily="34" charset="-122"/>
                 <a:cs typeface="Courier New" pitchFamily="34" charset="-120"/>
               </a:rPr>
-              <a:t>  intent 3 · plan 11 · review 3; rework</a:t>
+              <a:t>  intent 3 · plan 12 · review 3; rework</a:t>
             </a:r>
             <a:endParaRPr lang="en-US" sz="1000" dirty="0"/>
           </a:p>
@@ -14903,7 +14903,7 @@
                 <a:ea typeface="Courier New" pitchFamily="34" charset="-122"/>
                 <a:cs typeface="Courier New" pitchFamily="34" charset="-120"/>
               </a:rPr>
-              <a:t>2026-10-09T13:49:37.473Z  gate.review.await</a:t>
+              <a:t>2026-10-09T15:00:00.078Z  gate.review.await</a:t>
             </a:r>
             <a:endParaRPr lang="en-US" sz="1000" dirty="0"/>
           </a:p>
@@ -14937,7 +14937,7 @@
                 <a:ea typeface="Courier New" pitchFamily="34" charset="-122"/>
                 <a:cs typeface="Courier New" pitchFamily="34" charset="-120"/>
               </a:rPr>
-              <a:t>  sha256:4344ec8e9412e6d81a6e67181ed17789f3</a:t>
+              <a:t>  sha256:b5150d6137dd8ae8058337fff0df61f546</a:t>
             </a:r>
             <a:endParaRPr lang="en-US" sz="1000" dirty="0"/>
           </a:p>
@@ -14954,7 +14954,7 @@
                 <a:ea typeface="Courier New" pitchFamily="34" charset="-122"/>
                 <a:cs typeface="Courier New" pitchFamily="34" charset="-120"/>
               </a:rPr>
-              <a:t>  43509bddbffd59407e4021b607ee52 [sdlc</a:t>
+              <a:t>  d71b9d76ac9636700467f2bb73a9d6 [sdlc</a:t>
             </a:r>
             <a:endParaRPr lang="en-US" sz="1000" dirty="0"/>
           </a:p>
@@ -14971,7 +14971,7 @@
                 <a:ea typeface="Courier New" pitchFamily="34" charset="-122"/>
                 <a:cs typeface="Courier New" pitchFamily="34" charset="-120"/>
               </a:rPr>
-              <a:t>  0.14.1 · community]</a:t>
+              <a:t>  0.14.2 · community]</a:t>
             </a:r>
             <a:endParaRPr lang="en-US" sz="1000" dirty="0"/>
           </a:p>
@@ -14988,7 +14988,7 @@
                 <a:ea typeface="Courier New" pitchFamily="34" charset="-122"/>
                 <a:cs typeface="Courier New" pitchFamily="34" charset="-120"/>
               </a:rPr>
-              <a:t>2026-10-09T13:49:40.949Z  gate.review.appro</a:t>
+              <a:t>2026-10-09T15:00:03.458Z  gate.review.appro</a:t>
             </a:r>
             <a:endParaRPr lang="en-US" sz="1000" dirty="0"/>
           </a:p>
@@ -15039,7 +15039,7 @@
                 <a:ea typeface="Courier New" pitchFamily="34" charset="-122"/>
                 <a:cs typeface="Courier New" pitchFamily="34" charset="-120"/>
               </a:rPr>
-              <a:t>  [sdlc 0.14.1 · community]</a:t>
+              <a:t>  [sdlc 0.14.2 · community]</a:t>
             </a:r>
             <a:endParaRPr lang="en-US" sz="1000" dirty="0"/>
           </a:p>
@@ -15056,7 +15056,7 @@
                 <a:ea typeface="Courier New" pitchFamily="34" charset="-122"/>
                 <a:cs typeface="Courier New" pitchFamily="34" charset="-120"/>
               </a:rPr>
-              <a:t>2026-10-09T13:49:47.957Z  gate.release.appr</a:t>
+              <a:t>2026-10-09T15:00:09.402Z  gate.release.appr</a:t>
             </a:r>
             <a:endParaRPr lang="en-US" sz="1000" dirty="0"/>
           </a:p>
@@ -15107,7 +15107,7 @@
                 <a:ea typeface="Courier New" pitchFamily="34" charset="-122"/>
                 <a:cs typeface="Courier New" pitchFamily="34" charset="-120"/>
               </a:rPr>
-              <a:t>  release-manager [sdlc 0.14.1 · community]</a:t>
+              <a:t>  release-manager [sdlc 0.14.2 · community]</a:t>
             </a:r>
             <a:endParaRPr lang="en-US" sz="1000" dirty="0"/>
           </a:p>
@@ -16301,7 +16301,7 @@
                 <a:ea typeface="Courier New" pitchFamily="34" charset="-122"/>
                 <a:cs typeface="Courier New" pitchFamily="34" charset="-120"/>
               </a:rPr>
-              <a:t>✓ ci-green (ci/pipeline_status, 0.5s)</a:t>
+              <a:t>✓ ci-green (ci/pipeline_status, 0.6s)</a:t>
             </a:r>
             <a:endParaRPr lang="en-US" sz="1000" dirty="0"/>
           </a:p>
@@ -16737,7 +16737,7 @@
                 <a:ea typeface="Courier New" pitchFamily="34" charset="-122"/>
                 <a:cs typeface="Courier New" pitchFamily="34" charset="-120"/>
               </a:rPr>
-              <a:t>      "id": "20261009T135033553Z-ci-green-0</a:t>
+              <a:t>      "id": "20261009T150055272Z-ci-green-9</a:t>
             </a:r>
             <a:endParaRPr lang="en-US" sz="1000" dirty="0"/>
           </a:p>
@@ -16754,7 +16754,7 @@
                 <a:ea typeface="Courier New" pitchFamily="34" charset="-122"/>
                 <a:cs typeface="Courier New" pitchFamily="34" charset="-120"/>
               </a:rPr>
-              <a:t>  89eef",</a:t>
+              <a:t>  777b2",</a:t>
             </a:r>
             <a:endParaRPr lang="en-US" sz="1000" dirty="0"/>
           </a:p>
@@ -16890,7 +16890,7 @@
                 <a:ea typeface="Courier New" pitchFamily="34" charset="-122"/>
                 <a:cs typeface="Courier New" pitchFamily="34" charset="-120"/>
               </a:rPr>
-              <a:t>        "ref": "45b70ca257d53f9e59a5b447da6</a:t>
+              <a:t>        "ref": "58dea8abcf1e8b3b1eb9c2e4179</a:t>
             </a:r>
             <a:endParaRPr lang="en-US" sz="1000" dirty="0"/>
           </a:p>
@@ -16907,7 +16907,7 @@
                 <a:ea typeface="Courier New" pitchFamily="34" charset="-122"/>
                 <a:cs typeface="Courier New" pitchFamily="34" charset="-120"/>
               </a:rPr>
-              <a:t>  b3fd870493732",</a:t>
+              <a:t>  d9c0edffc7417",</a:t>
             </a:r>
             <a:endParaRPr lang="en-US" sz="1000" dirty="0"/>
           </a:p>
@@ -26969,7 +26969,7 @@
                 <a:ea typeface="Courier New" pitchFamily="34" charset="-122"/>
                 <a:cs typeface="Courier New" pitchFamily="34" charset="-120"/>
               </a:rPr>
-              <a:t>  sdlc 0.14.1, license: community</a:t>
+              <a:t>  sdlc 0.14.2, license: community</a:t>
             </a:r>
             <a:endParaRPr lang="en-US" sz="1000" dirty="0"/>
           </a:p>

--- a/docs/demo/sdlc-calculator-demo.en.pptx
+++ b/docs/demo/sdlc-calculator-demo.en.pptx
@@ -5112,7 +5112,7 @@
                 <a:ea typeface="Courier New" pitchFamily="34" charset="-122"/>
                 <a:cs typeface="Courier New" pitchFamily="34" charset="-120"/>
               </a:rPr>
-              <a:t>✓ test (1.1s)</a:t>
+              <a:t>✓ test (0.9s)</a:t>
             </a:r>
             <a:endParaRPr lang="en-US" sz="1000" dirty="0"/>
           </a:p>
@@ -6660,7 +6660,7 @@
                 <a:ea typeface="Courier New" pitchFamily="34" charset="-122"/>
                 <a:cs typeface="Courier New" pitchFamily="34" charset="-120"/>
               </a:rPr>
-              <a:t>  code-owner (b5150d6137dd)</a:t>
+              <a:t>  code-owner (66331c0a36bf)</a:t>
             </a:r>
             <a:endParaRPr lang="en-US" sz="1000" dirty="0"/>
           </a:p>
@@ -6745,7 +6745,7 @@
                 <a:ea typeface="Courier New" pitchFamily="34" charset="-122"/>
                 <a:cs typeface="Courier New" pitchFamily="34" charset="-120"/>
               </a:rPr>
-              <a:t>  "SDLC-Approval: basic-arithmetic:review:b</a:t>
+              <a:t>  "SDLC-Approval: basic-arithmetic:review:6</a:t>
             </a:r>
             <a:endParaRPr lang="en-US" sz="1000" dirty="0"/>
           </a:p>
@@ -6762,7 +6762,7 @@
                 <a:ea typeface="Courier New" pitchFamily="34" charset="-122"/>
                 <a:cs typeface="Courier New" pitchFamily="34" charset="-120"/>
               </a:rPr>
-              <a:t>  5150d6137dd"</a:t>
+              <a:t>  6331c0a36bf"</a:t>
             </a:r>
             <a:endParaRPr lang="en-US" sz="1000" dirty="0"/>
           </a:p>
@@ -7443,7 +7443,7 @@
                 <a:ea typeface="Courier New" pitchFamily="34" charset="-122"/>
                 <a:cs typeface="Courier New" pitchFamily="34" charset="-120"/>
               </a:rPr>
-              <a:t>  release-manager (b5150d6137dd)</a:t>
+              <a:t>  release-manager (66331c0a36bf)</a:t>
             </a:r>
             <a:endParaRPr lang="en-US" sz="1000" dirty="0"/>
           </a:p>
@@ -7511,7 +7511,7 @@
                 <a:ea typeface="Courier New" pitchFamily="34" charset="-122"/>
                 <a:cs typeface="Courier New" pitchFamily="34" charset="-120"/>
               </a:rPr>
-              <a:t>  gate" -m "SDLC-Approval: basic-arithmetic:release:b5150d6137dd"</a:t>
+              <a:t>  gate" -m "SDLC-Approval: basic-arithmetic:release:66331c0a36bf"</a:t>
             </a:r>
             <a:endParaRPr lang="en-US" sz="1000" dirty="0"/>
           </a:p>
@@ -7811,7 +7811,7 @@
                 <a:ea typeface="Courier New" pitchFamily="34" charset="-122"/>
                 <a:cs typeface="Courier New" pitchFamily="34" charset="-120"/>
               </a:rPr>
-              <a:t>✓ basic-arithmetic/intent alice valid 1e787adc</a:t>
+              <a:t>✓ basic-arithmetic/intent alice valid c909f64a</a:t>
             </a:r>
             <a:endParaRPr lang="en-US" sz="1000" dirty="0"/>
           </a:p>
@@ -7828,7 +7828,7 @@
                 <a:ea typeface="Courier New" pitchFamily="34" charset="-122"/>
                 <a:cs typeface="Courier New" pitchFamily="34" charset="-120"/>
               </a:rPr>
-              <a:t>✓ basic-arithmetic/spec alice valid ec113afc</a:t>
+              <a:t>✓ basic-arithmetic/spec alice valid ebad5874</a:t>
             </a:r>
             <a:endParaRPr lang="en-US" sz="1000" dirty="0"/>
           </a:p>
@@ -7845,7 +7845,7 @@
                 <a:ea typeface="Courier New" pitchFamily="34" charset="-122"/>
                 <a:cs typeface="Courier New" pitchFamily="34" charset="-120"/>
               </a:rPr>
-              <a:t>✗ basic-arithmetic/plan bob wrong-signer ec113afc</a:t>
+              <a:t>✗ basic-arithmetic/plan bob wrong-signer ebad5874</a:t>
             </a:r>
             <a:endParaRPr lang="en-US" sz="1000" dirty="0"/>
           </a:p>
@@ -7862,7 +7862,7 @@
                 <a:ea typeface="Courier New" pitchFamily="34" charset="-122"/>
                 <a:cs typeface="Courier New" pitchFamily="34" charset="-120"/>
               </a:rPr>
-              <a:t>✓ basic-arithmetic/review carol valid 8c573d98</a:t>
+              <a:t>✓ basic-arithmetic/review carol valid 2491789c</a:t>
             </a:r>
             <a:endParaRPr lang="en-US" sz="1000" dirty="0"/>
           </a:p>
@@ -7879,7 +7879,7 @@
                 <a:ea typeface="Courier New" pitchFamily="34" charset="-122"/>
                 <a:cs typeface="Courier New" pitchFamily="34" charset="-120"/>
               </a:rPr>
-              <a:t>✓ basic-arithmetic/release alice valid f31564de</a:t>
+              <a:t>✓ basic-arithmetic/release alice valid 943fdf96</a:t>
             </a:r>
             <a:endParaRPr lang="en-US" sz="1000" dirty="0"/>
           </a:p>
@@ -7896,7 +7896,7 @@
                 <a:ea typeface="Courier New" pitchFamily="34" charset="-122"/>
                 <a:cs typeface="Courier New" pitchFamily="34" charset="-120"/>
               </a:rPr>
-              <a:t>✓ openspec/roles.yaml alice@calc.example valid b724cb74</a:t>
+              <a:t>✓ openspec/roles.yaml alice@calc.example valid 73863a57</a:t>
             </a:r>
             <a:endParaRPr lang="en-US" sz="1000" dirty="0"/>
           </a:p>
@@ -14382,7 +14382,7 @@
                 <a:ea typeface="Courier New" pitchFamily="34" charset="-122"/>
                 <a:cs typeface="Courier New" pitchFamily="34" charset="-120"/>
               </a:rPr>
-              <a:t>  archived) · sdlc 0.14.2, license:</a:t>
+              <a:t>  archived) · sdlc 0.14.3, license:</a:t>
             </a:r>
             <a:endParaRPr lang="en-US" sz="1000" dirty="0"/>
           </a:p>
@@ -14569,7 +14569,7 @@
                 <a:ea typeface="Courier New" pitchFamily="34" charset="-122"/>
                 <a:cs typeface="Courier New" pitchFamily="34" charset="-120"/>
               </a:rPr>
-              <a:t>  intent 3 · plan 12 · review 3; rework</a:t>
+              <a:t>  intent 2 · plan 10 · review 3; rework</a:t>
             </a:r>
             <a:endParaRPr lang="en-US" sz="1000" dirty="0"/>
           </a:p>
@@ -14903,7 +14903,7 @@
                 <a:ea typeface="Courier New" pitchFamily="34" charset="-122"/>
                 <a:cs typeface="Courier New" pitchFamily="34" charset="-120"/>
               </a:rPr>
-              <a:t>2026-10-09T15:00:00.078Z  gate.review.await</a:t>
+              <a:t>2026-10-09T16:52:27.697Z  gate.review.await</a:t>
             </a:r>
             <a:endParaRPr lang="en-US" sz="1000" dirty="0"/>
           </a:p>
@@ -14937,7 +14937,7 @@
                 <a:ea typeface="Courier New" pitchFamily="34" charset="-122"/>
                 <a:cs typeface="Courier New" pitchFamily="34" charset="-120"/>
               </a:rPr>
-              <a:t>  sha256:b5150d6137dd8ae8058337fff0df61f546</a:t>
+              <a:t>  sha256:66331c0a36bf8fb897033d727e9074d6e0</a:t>
             </a:r>
             <a:endParaRPr lang="en-US" sz="1000" dirty="0"/>
           </a:p>
@@ -14954,7 +14954,7 @@
                 <a:ea typeface="Courier New" pitchFamily="34" charset="-122"/>
                 <a:cs typeface="Courier New" pitchFamily="34" charset="-120"/>
               </a:rPr>
-              <a:t>  d71b9d76ac9636700467f2bb73a9d6 [sdlc</a:t>
+              <a:t>  c3cf4d5a4dda288f48c3f8e2b76297 [sdlc</a:t>
             </a:r>
             <a:endParaRPr lang="en-US" sz="1000" dirty="0"/>
           </a:p>
@@ -14971,7 +14971,7 @@
                 <a:ea typeface="Courier New" pitchFamily="34" charset="-122"/>
                 <a:cs typeface="Courier New" pitchFamily="34" charset="-120"/>
               </a:rPr>
-              <a:t>  0.14.2 · community]</a:t>
+              <a:t>  0.14.3 · community]</a:t>
             </a:r>
             <a:endParaRPr lang="en-US" sz="1000" dirty="0"/>
           </a:p>
@@ -14988,7 +14988,7 @@
                 <a:ea typeface="Courier New" pitchFamily="34" charset="-122"/>
                 <a:cs typeface="Courier New" pitchFamily="34" charset="-120"/>
               </a:rPr>
-              <a:t>2026-10-09T15:00:03.458Z  gate.review.appro</a:t>
+              <a:t>2026-10-09T16:52:30.543Z  gate.review.appro</a:t>
             </a:r>
             <a:endParaRPr lang="en-US" sz="1000" dirty="0"/>
           </a:p>
@@ -15039,7 +15039,7 @@
                 <a:ea typeface="Courier New" pitchFamily="34" charset="-122"/>
                 <a:cs typeface="Courier New" pitchFamily="34" charset="-120"/>
               </a:rPr>
-              <a:t>  [sdlc 0.14.2 · community]</a:t>
+              <a:t>  [sdlc 0.14.3 · community]</a:t>
             </a:r>
             <a:endParaRPr lang="en-US" sz="1000" dirty="0"/>
           </a:p>
@@ -15056,7 +15056,7 @@
                 <a:ea typeface="Courier New" pitchFamily="34" charset="-122"/>
                 <a:cs typeface="Courier New" pitchFamily="34" charset="-120"/>
               </a:rPr>
-              <a:t>2026-10-09T15:00:09.402Z  gate.release.appr</a:t>
+              <a:t>2026-10-09T16:52:35.934Z  gate.release.appr</a:t>
             </a:r>
             <a:endParaRPr lang="en-US" sz="1000" dirty="0"/>
           </a:p>
@@ -15107,7 +15107,7 @@
                 <a:ea typeface="Courier New" pitchFamily="34" charset="-122"/>
                 <a:cs typeface="Courier New" pitchFamily="34" charset="-120"/>
               </a:rPr>
-              <a:t>  release-manager [sdlc 0.14.2 · community]</a:t>
+              <a:t>  release-manager [sdlc 0.14.3 · community]</a:t>
             </a:r>
             <a:endParaRPr lang="en-US" sz="1000" dirty="0"/>
           </a:p>
@@ -16284,7 +16284,7 @@
                 <a:ea typeface="Courier New" pitchFamily="34" charset="-122"/>
                 <a:cs typeface="Courier New" pitchFamily="34" charset="-120"/>
               </a:rPr>
-              <a:t>✓ test (1.0s)</a:t>
+              <a:t>✓ test (0.9s)</a:t>
             </a:r>
             <a:endParaRPr lang="en-US" sz="1000" dirty="0"/>
           </a:p>
@@ -16301,7 +16301,7 @@
                 <a:ea typeface="Courier New" pitchFamily="34" charset="-122"/>
                 <a:cs typeface="Courier New" pitchFamily="34" charset="-120"/>
               </a:rPr>
-              <a:t>✓ ci-green (ci/pipeline_status, 0.6s)</a:t>
+              <a:t>✓ ci-green (ci/pipeline_status, 0.5s)</a:t>
             </a:r>
             <a:endParaRPr lang="en-US" sz="1000" dirty="0"/>
           </a:p>
@@ -16737,7 +16737,7 @@
                 <a:ea typeface="Courier New" pitchFamily="34" charset="-122"/>
                 <a:cs typeface="Courier New" pitchFamily="34" charset="-120"/>
               </a:rPr>
-              <a:t>      "id": "20261009T150055272Z-ci-green-9</a:t>
+              <a:t>      "id": "20261009T165315835Z-ci-green-0</a:t>
             </a:r>
             <a:endParaRPr lang="en-US" sz="1000" dirty="0"/>
           </a:p>
@@ -16754,7 +16754,7 @@
                 <a:ea typeface="Courier New" pitchFamily="34" charset="-122"/>
                 <a:cs typeface="Courier New" pitchFamily="34" charset="-120"/>
               </a:rPr>
-              <a:t>  777b2",</a:t>
+              <a:t>  6538c",</a:t>
             </a:r>
             <a:endParaRPr lang="en-US" sz="1000" dirty="0"/>
           </a:p>
@@ -16890,7 +16890,7 @@
                 <a:ea typeface="Courier New" pitchFamily="34" charset="-122"/>
                 <a:cs typeface="Courier New" pitchFamily="34" charset="-120"/>
               </a:rPr>
-              <a:t>        "ref": "58dea8abcf1e8b3b1eb9c2e4179</a:t>
+              <a:t>        "ref": "3d8af713e07451edcf4dd6f28ea</a:t>
             </a:r>
             <a:endParaRPr lang="en-US" sz="1000" dirty="0"/>
           </a:p>
@@ -16907,7 +16907,7 @@
                 <a:ea typeface="Courier New" pitchFamily="34" charset="-122"/>
                 <a:cs typeface="Courier New" pitchFamily="34" charset="-120"/>
               </a:rPr>
-              <a:t>  d9c0edffc7417",</a:t>
+              <a:t>  620a6df876044",</a:t>
             </a:r>
             <a:endParaRPr lang="en-US" sz="1000" dirty="0"/>
           </a:p>
@@ -26969,7 +26969,7 @@
                 <a:ea typeface="Courier New" pitchFamily="34" charset="-122"/>
                 <a:cs typeface="Courier New" pitchFamily="34" charset="-120"/>
               </a:rPr>
-              <a:t>  sdlc 0.14.2, license: community</a:t>
+              <a:t>  sdlc 0.14.3, license: community</a:t>
             </a:r>
             <a:endParaRPr lang="en-US" sz="1000" dirty="0"/>
           </a:p>

--- a/docs/demo/sdlc-calculator-demo.en.pptx
+++ b/docs/demo/sdlc-calculator-demo.en.pptx
@@ -5112,7 +5112,7 @@
                 <a:ea typeface="Courier New" pitchFamily="34" charset="-122"/>
                 <a:cs typeface="Courier New" pitchFamily="34" charset="-120"/>
               </a:rPr>
-              <a:t>✓ test (0.9s)</a:t>
+              <a:t>✓ test (1.1s)</a:t>
             </a:r>
             <a:endParaRPr lang="en-US" sz="1000" dirty="0"/>
           </a:p>
@@ -6660,7 +6660,7 @@
                 <a:ea typeface="Courier New" pitchFamily="34" charset="-122"/>
                 <a:cs typeface="Courier New" pitchFamily="34" charset="-120"/>
               </a:rPr>
-              <a:t>  code-owner (66331c0a36bf)</a:t>
+              <a:t>  code-owner (7f64adb98975)</a:t>
             </a:r>
             <a:endParaRPr lang="en-US" sz="1000" dirty="0"/>
           </a:p>
@@ -6745,7 +6745,7 @@
                 <a:ea typeface="Courier New" pitchFamily="34" charset="-122"/>
                 <a:cs typeface="Courier New" pitchFamily="34" charset="-120"/>
               </a:rPr>
-              <a:t>  "SDLC-Approval: basic-arithmetic:review:6</a:t>
+              <a:t>  "SDLC-Approval: basic-arithmetic:review:7</a:t>
             </a:r>
             <a:endParaRPr lang="en-US" sz="1000" dirty="0"/>
           </a:p>
@@ -6762,7 +6762,7 @@
                 <a:ea typeface="Courier New" pitchFamily="34" charset="-122"/>
                 <a:cs typeface="Courier New" pitchFamily="34" charset="-120"/>
               </a:rPr>
-              <a:t>  6331c0a36bf"</a:t>
+              <a:t>  f64adb98975"</a:t>
             </a:r>
             <a:endParaRPr lang="en-US" sz="1000" dirty="0"/>
           </a:p>
@@ -7443,7 +7443,7 @@
                 <a:ea typeface="Courier New" pitchFamily="34" charset="-122"/>
                 <a:cs typeface="Courier New" pitchFamily="34" charset="-120"/>
               </a:rPr>
-              <a:t>  release-manager (66331c0a36bf)</a:t>
+              <a:t>  release-manager (7f64adb98975)</a:t>
             </a:r>
             <a:endParaRPr lang="en-US" sz="1000" dirty="0"/>
           </a:p>
@@ -7511,7 +7511,7 @@
                 <a:ea typeface="Courier New" pitchFamily="34" charset="-122"/>
                 <a:cs typeface="Courier New" pitchFamily="34" charset="-120"/>
               </a:rPr>
-              <a:t>  gate" -m "SDLC-Approval: basic-arithmetic:release:66331c0a36bf"</a:t>
+              <a:t>  gate" -m "SDLC-Approval: basic-arithmetic:release:7f64adb98975"</a:t>
             </a:r>
             <a:endParaRPr lang="en-US" sz="1000" dirty="0"/>
           </a:p>
@@ -7811,7 +7811,7 @@
                 <a:ea typeface="Courier New" pitchFamily="34" charset="-122"/>
                 <a:cs typeface="Courier New" pitchFamily="34" charset="-120"/>
               </a:rPr>
-              <a:t>✓ basic-arithmetic/intent alice valid c909f64a</a:t>
+              <a:t>✓ basic-arithmetic/intent alice valid ce9d8230</a:t>
             </a:r>
             <a:endParaRPr lang="en-US" sz="1000" dirty="0"/>
           </a:p>
@@ -7828,7 +7828,7 @@
                 <a:ea typeface="Courier New" pitchFamily="34" charset="-122"/>
                 <a:cs typeface="Courier New" pitchFamily="34" charset="-120"/>
               </a:rPr>
-              <a:t>✓ basic-arithmetic/spec alice valid ebad5874</a:t>
+              <a:t>✓ basic-arithmetic/spec alice valid 425f0638</a:t>
             </a:r>
             <a:endParaRPr lang="en-US" sz="1000" dirty="0"/>
           </a:p>
@@ -7845,7 +7845,7 @@
                 <a:ea typeface="Courier New" pitchFamily="34" charset="-122"/>
                 <a:cs typeface="Courier New" pitchFamily="34" charset="-120"/>
               </a:rPr>
-              <a:t>✗ basic-arithmetic/plan bob wrong-signer ebad5874</a:t>
+              <a:t>✗ basic-arithmetic/plan bob wrong-signer 425f0638</a:t>
             </a:r>
             <a:endParaRPr lang="en-US" sz="1000" dirty="0"/>
           </a:p>
@@ -7862,7 +7862,7 @@
                 <a:ea typeface="Courier New" pitchFamily="34" charset="-122"/>
                 <a:cs typeface="Courier New" pitchFamily="34" charset="-120"/>
               </a:rPr>
-              <a:t>✓ basic-arithmetic/review carol valid 2491789c</a:t>
+              <a:t>✓ basic-arithmetic/review carol valid eebf83f3</a:t>
             </a:r>
             <a:endParaRPr lang="en-US" sz="1000" dirty="0"/>
           </a:p>
@@ -7879,7 +7879,7 @@
                 <a:ea typeface="Courier New" pitchFamily="34" charset="-122"/>
                 <a:cs typeface="Courier New" pitchFamily="34" charset="-120"/>
               </a:rPr>
-              <a:t>✓ basic-arithmetic/release alice valid 943fdf96</a:t>
+              <a:t>✓ basic-arithmetic/release alice valid 490bb26b</a:t>
             </a:r>
             <a:endParaRPr lang="en-US" sz="1000" dirty="0"/>
           </a:p>
@@ -7896,7 +7896,7 @@
                 <a:ea typeface="Courier New" pitchFamily="34" charset="-122"/>
                 <a:cs typeface="Courier New" pitchFamily="34" charset="-120"/>
               </a:rPr>
-              <a:t>✓ openspec/roles.yaml alice@calc.example valid 73863a57</a:t>
+              <a:t>✓ openspec/roles.yaml alice@calc.example valid 8f5a9e39</a:t>
             </a:r>
             <a:endParaRPr lang="en-US" sz="1000" dirty="0"/>
           </a:p>
@@ -14382,7 +14382,7 @@
                 <a:ea typeface="Courier New" pitchFamily="34" charset="-122"/>
                 <a:cs typeface="Courier New" pitchFamily="34" charset="-120"/>
               </a:rPr>
-              <a:t>  archived) · sdlc 0.14.3, license:</a:t>
+              <a:t>  archived) · sdlc 0.14.4, license:</a:t>
             </a:r>
             <a:endParaRPr lang="en-US" sz="1000" dirty="0"/>
           </a:p>
@@ -14569,7 +14569,7 @@
                 <a:ea typeface="Courier New" pitchFamily="34" charset="-122"/>
                 <a:cs typeface="Courier New" pitchFamily="34" charset="-120"/>
               </a:rPr>
-              <a:t>  intent 2 · plan 10 · review 3; rework</a:t>
+              <a:t>  intent 3 · plan 11 · review 3; rework</a:t>
             </a:r>
             <a:endParaRPr lang="en-US" sz="1000" dirty="0"/>
           </a:p>
@@ -14903,7 +14903,7 @@
                 <a:ea typeface="Courier New" pitchFamily="34" charset="-122"/>
                 <a:cs typeface="Courier New" pitchFamily="34" charset="-120"/>
               </a:rPr>
-              <a:t>2026-10-09T16:52:27.697Z  gate.review.await</a:t>
+              <a:t>2026-10-09T19:44:19.499Z  gate.review.await</a:t>
             </a:r>
             <a:endParaRPr lang="en-US" sz="1000" dirty="0"/>
           </a:p>
@@ -14937,7 +14937,7 @@
                 <a:ea typeface="Courier New" pitchFamily="34" charset="-122"/>
                 <a:cs typeface="Courier New" pitchFamily="34" charset="-120"/>
               </a:rPr>
-              <a:t>  sha256:66331c0a36bf8fb897033d727e9074d6e0</a:t>
+              <a:t>  sha256:7f64adb98975582b9196364477c348c9fd</a:t>
             </a:r>
             <a:endParaRPr lang="en-US" sz="1000" dirty="0"/>
           </a:p>
@@ -14954,7 +14954,7 @@
                 <a:ea typeface="Courier New" pitchFamily="34" charset="-122"/>
                 <a:cs typeface="Courier New" pitchFamily="34" charset="-120"/>
               </a:rPr>
-              <a:t>  c3cf4d5a4dda288f48c3f8e2b76297 [sdlc</a:t>
+              <a:t>  a808eec3db9d899da48a469abb01d7 [sdlc</a:t>
             </a:r>
             <a:endParaRPr lang="en-US" sz="1000" dirty="0"/>
           </a:p>
@@ -14971,7 +14971,7 @@
                 <a:ea typeface="Courier New" pitchFamily="34" charset="-122"/>
                 <a:cs typeface="Courier New" pitchFamily="34" charset="-120"/>
               </a:rPr>
-              <a:t>  0.14.3 · community]</a:t>
+              <a:t>  0.14.4 · community]</a:t>
             </a:r>
             <a:endParaRPr lang="en-US" sz="1000" dirty="0"/>
           </a:p>
@@ -14988,7 +14988,7 @@
                 <a:ea typeface="Courier New" pitchFamily="34" charset="-122"/>
                 <a:cs typeface="Courier New" pitchFamily="34" charset="-120"/>
               </a:rPr>
-              <a:t>2026-10-09T16:52:30.543Z  gate.review.appro</a:t>
+              <a:t>2026-10-09T19:44:22.589Z  gate.review.appro</a:t>
             </a:r>
             <a:endParaRPr lang="en-US" sz="1000" dirty="0"/>
           </a:p>
@@ -15039,7 +15039,7 @@
                 <a:ea typeface="Courier New" pitchFamily="34" charset="-122"/>
                 <a:cs typeface="Courier New" pitchFamily="34" charset="-120"/>
               </a:rPr>
-              <a:t>  [sdlc 0.14.3 · community]</a:t>
+              <a:t>  [sdlc 0.14.4 · community]</a:t>
             </a:r>
             <a:endParaRPr lang="en-US" sz="1000" dirty="0"/>
           </a:p>
@@ -15056,7 +15056,7 @@
                 <a:ea typeface="Courier New" pitchFamily="34" charset="-122"/>
                 <a:cs typeface="Courier New" pitchFamily="34" charset="-120"/>
               </a:rPr>
-              <a:t>2026-10-09T16:52:35.934Z  gate.release.appr</a:t>
+              <a:t>2026-10-09T19:44:28.712Z  gate.release.appr</a:t>
             </a:r>
             <a:endParaRPr lang="en-US" sz="1000" dirty="0"/>
           </a:p>
@@ -15107,7 +15107,7 @@
                 <a:ea typeface="Courier New" pitchFamily="34" charset="-122"/>
                 <a:cs typeface="Courier New" pitchFamily="34" charset="-120"/>
               </a:rPr>
-              <a:t>  release-manager [sdlc 0.14.3 · community]</a:t>
+              <a:t>  release-manager [sdlc 0.14.4 · community]</a:t>
             </a:r>
             <a:endParaRPr lang="en-US" sz="1000" dirty="0"/>
           </a:p>
@@ -16737,7 +16737,7 @@
                 <a:ea typeface="Courier New" pitchFamily="34" charset="-122"/>
                 <a:cs typeface="Courier New" pitchFamily="34" charset="-120"/>
               </a:rPr>
-              <a:t>      "id": "20261009T165315835Z-ci-green-0</a:t>
+              <a:t>      "id": "20261009T194511481Z-ci-green-e</a:t>
             </a:r>
             <a:endParaRPr lang="en-US" sz="1000" dirty="0"/>
           </a:p>
@@ -16754,7 +16754,7 @@
                 <a:ea typeface="Courier New" pitchFamily="34" charset="-122"/>
                 <a:cs typeface="Courier New" pitchFamily="34" charset="-120"/>
               </a:rPr>
-              <a:t>  6538c",</a:t>
+              <a:t>  2d8c0",</a:t>
             </a:r>
             <a:endParaRPr lang="en-US" sz="1000" dirty="0"/>
           </a:p>
@@ -16890,7 +16890,7 @@
                 <a:ea typeface="Courier New" pitchFamily="34" charset="-122"/>
                 <a:cs typeface="Courier New" pitchFamily="34" charset="-120"/>
               </a:rPr>
-              <a:t>        "ref": "3d8af713e07451edcf4dd6f28ea</a:t>
+              <a:t>        "ref": "89d37e0a3465b9f5c72ebd0e377</a:t>
             </a:r>
             <a:endParaRPr lang="en-US" sz="1000" dirty="0"/>
           </a:p>
@@ -16907,7 +16907,7 @@
                 <a:ea typeface="Courier New" pitchFamily="34" charset="-122"/>
                 <a:cs typeface="Courier New" pitchFamily="34" charset="-120"/>
               </a:rPr>
-              <a:t>  620a6df876044",</a:t>
+              <a:t>  edd835a2c2f8d",</a:t>
             </a:r>
             <a:endParaRPr lang="en-US" sz="1000" dirty="0"/>
           </a:p>
@@ -26969,7 +26969,7 @@
                 <a:ea typeface="Courier New" pitchFamily="34" charset="-122"/>
                 <a:cs typeface="Courier New" pitchFamily="34" charset="-120"/>
               </a:rPr>
-              <a:t>  sdlc 0.14.3, license: community</a:t>
+              <a:t>  sdlc 0.14.4, license: community</a:t>
             </a:r>
             <a:endParaRPr lang="en-US" sz="1000" dirty="0"/>
           </a:p>

--- a/docs/demo/sdlc-calculator-demo.en.pptx
+++ b/docs/demo/sdlc-calculator-demo.en.pptx
@@ -5112,7 +5112,7 @@
                 <a:ea typeface="Courier New" pitchFamily="34" charset="-122"/>
                 <a:cs typeface="Courier New" pitchFamily="34" charset="-120"/>
               </a:rPr>
-              <a:t>✓ test (1.1s)</a:t>
+              <a:t>✓ test (0.9s)</a:t>
             </a:r>
             <a:endParaRPr lang="en-US" sz="1000" dirty="0"/>
           </a:p>
@@ -6660,7 +6660,7 @@
                 <a:ea typeface="Courier New" pitchFamily="34" charset="-122"/>
                 <a:cs typeface="Courier New" pitchFamily="34" charset="-120"/>
               </a:rPr>
-              <a:t>  code-owner (7f64adb98975)</a:t>
+              <a:t>  code-owner (7f2e33b07f21)</a:t>
             </a:r>
             <a:endParaRPr lang="en-US" sz="1000" dirty="0"/>
           </a:p>
@@ -6762,7 +6762,7 @@
                 <a:ea typeface="Courier New" pitchFamily="34" charset="-122"/>
                 <a:cs typeface="Courier New" pitchFamily="34" charset="-120"/>
               </a:rPr>
-              <a:t>  f64adb98975"</a:t>
+              <a:t>  f2e33b07f21"</a:t>
             </a:r>
             <a:endParaRPr lang="en-US" sz="1000" dirty="0"/>
           </a:p>
@@ -7443,7 +7443,7 @@
                 <a:ea typeface="Courier New" pitchFamily="34" charset="-122"/>
                 <a:cs typeface="Courier New" pitchFamily="34" charset="-120"/>
               </a:rPr>
-              <a:t>  release-manager (7f64adb98975)</a:t>
+              <a:t>  release-manager (7f2e33b07f21)</a:t>
             </a:r>
             <a:endParaRPr lang="en-US" sz="1000" dirty="0"/>
           </a:p>
@@ -7511,7 +7511,7 @@
                 <a:ea typeface="Courier New" pitchFamily="34" charset="-122"/>
                 <a:cs typeface="Courier New" pitchFamily="34" charset="-120"/>
               </a:rPr>
-              <a:t>  gate" -m "SDLC-Approval: basic-arithmetic:release:7f64adb98975"</a:t>
+              <a:t>  gate" -m "SDLC-Approval: basic-arithmetic:release:7f2e33b07f21"</a:t>
             </a:r>
             <a:endParaRPr lang="en-US" sz="1000" dirty="0"/>
           </a:p>
@@ -7811,7 +7811,7 @@
                 <a:ea typeface="Courier New" pitchFamily="34" charset="-122"/>
                 <a:cs typeface="Courier New" pitchFamily="34" charset="-120"/>
               </a:rPr>
-              <a:t>✓ basic-arithmetic/intent alice valid ce9d8230</a:t>
+              <a:t>✓ basic-arithmetic/intent alice valid 68068be4</a:t>
             </a:r>
             <a:endParaRPr lang="en-US" sz="1000" dirty="0"/>
           </a:p>
@@ -7828,7 +7828,7 @@
                 <a:ea typeface="Courier New" pitchFamily="34" charset="-122"/>
                 <a:cs typeface="Courier New" pitchFamily="34" charset="-120"/>
               </a:rPr>
-              <a:t>✓ basic-arithmetic/spec alice valid 425f0638</a:t>
+              <a:t>✓ basic-arithmetic/spec alice valid 657b5c53</a:t>
             </a:r>
             <a:endParaRPr lang="en-US" sz="1000" dirty="0"/>
           </a:p>
@@ -7845,7 +7845,7 @@
                 <a:ea typeface="Courier New" pitchFamily="34" charset="-122"/>
                 <a:cs typeface="Courier New" pitchFamily="34" charset="-120"/>
               </a:rPr>
-              <a:t>✗ basic-arithmetic/plan bob wrong-signer 425f0638</a:t>
+              <a:t>✗ basic-arithmetic/plan bob wrong-signer 657b5c53</a:t>
             </a:r>
             <a:endParaRPr lang="en-US" sz="1000" dirty="0"/>
           </a:p>
@@ -7862,7 +7862,7 @@
                 <a:ea typeface="Courier New" pitchFamily="34" charset="-122"/>
                 <a:cs typeface="Courier New" pitchFamily="34" charset="-120"/>
               </a:rPr>
-              <a:t>✓ basic-arithmetic/review carol valid eebf83f3</a:t>
+              <a:t>✓ basic-arithmetic/review carol valid 0acc4321</a:t>
             </a:r>
             <a:endParaRPr lang="en-US" sz="1000" dirty="0"/>
           </a:p>
@@ -7879,7 +7879,7 @@
                 <a:ea typeface="Courier New" pitchFamily="34" charset="-122"/>
                 <a:cs typeface="Courier New" pitchFamily="34" charset="-120"/>
               </a:rPr>
-              <a:t>✓ basic-arithmetic/release alice valid 490bb26b</a:t>
+              <a:t>✓ basic-arithmetic/release alice valid 768bdbcc</a:t>
             </a:r>
             <a:endParaRPr lang="en-US" sz="1000" dirty="0"/>
           </a:p>
@@ -7896,7 +7896,7 @@
                 <a:ea typeface="Courier New" pitchFamily="34" charset="-122"/>
                 <a:cs typeface="Courier New" pitchFamily="34" charset="-120"/>
               </a:rPr>
-              <a:t>✓ openspec/roles.yaml alice@calc.example valid 8f5a9e39</a:t>
+              <a:t>✓ openspec/roles.yaml alice@calc.example valid b131b70d</a:t>
             </a:r>
             <a:endParaRPr lang="en-US" sz="1000" dirty="0"/>
           </a:p>
@@ -14382,7 +14382,7 @@
                 <a:ea typeface="Courier New" pitchFamily="34" charset="-122"/>
                 <a:cs typeface="Courier New" pitchFamily="34" charset="-120"/>
               </a:rPr>
-              <a:t>  archived) · sdlc 0.14.4, license:</a:t>
+              <a:t>  archived) · sdlc 0.14.5, license:</a:t>
             </a:r>
             <a:endParaRPr lang="en-US" sz="1000" dirty="0"/>
           </a:p>
@@ -14903,7 +14903,7 @@
                 <a:ea typeface="Courier New" pitchFamily="34" charset="-122"/>
                 <a:cs typeface="Courier New" pitchFamily="34" charset="-120"/>
               </a:rPr>
-              <a:t>2026-10-09T19:44:19.499Z  gate.review.await</a:t>
+              <a:t>2026-10-09T21:29:25.383Z  gate.review.await</a:t>
             </a:r>
             <a:endParaRPr lang="en-US" sz="1000" dirty="0"/>
           </a:p>
@@ -14937,7 +14937,7 @@
                 <a:ea typeface="Courier New" pitchFamily="34" charset="-122"/>
                 <a:cs typeface="Courier New" pitchFamily="34" charset="-120"/>
               </a:rPr>
-              <a:t>  sha256:7f64adb98975582b9196364477c348c9fd</a:t>
+              <a:t>  sha256:7f2e33b07f21c8d5b17934994b95a599ab</a:t>
             </a:r>
             <a:endParaRPr lang="en-US" sz="1000" dirty="0"/>
           </a:p>
@@ -14954,7 +14954,7 @@
                 <a:ea typeface="Courier New" pitchFamily="34" charset="-122"/>
                 <a:cs typeface="Courier New" pitchFamily="34" charset="-120"/>
               </a:rPr>
-              <a:t>  a808eec3db9d899da48a469abb01d7 [sdlc</a:t>
+              <a:t>  c149f46ca1ab5677b168e1f0322784 [sdlc</a:t>
             </a:r>
             <a:endParaRPr lang="en-US" sz="1000" dirty="0"/>
           </a:p>
@@ -14971,7 +14971,7 @@
                 <a:ea typeface="Courier New" pitchFamily="34" charset="-122"/>
                 <a:cs typeface="Courier New" pitchFamily="34" charset="-120"/>
               </a:rPr>
-              <a:t>  0.14.4 · community]</a:t>
+              <a:t>  0.14.5 · community]</a:t>
             </a:r>
             <a:endParaRPr lang="en-US" sz="1000" dirty="0"/>
           </a:p>
@@ -14988,7 +14988,7 @@
                 <a:ea typeface="Courier New" pitchFamily="34" charset="-122"/>
                 <a:cs typeface="Courier New" pitchFamily="34" charset="-120"/>
               </a:rPr>
-              <a:t>2026-10-09T19:44:22.589Z  gate.review.appro</a:t>
+              <a:t>2026-10-09T21:29:28.216Z  gate.review.appro</a:t>
             </a:r>
             <a:endParaRPr lang="en-US" sz="1000" dirty="0"/>
           </a:p>
@@ -15039,7 +15039,7 @@
                 <a:ea typeface="Courier New" pitchFamily="34" charset="-122"/>
                 <a:cs typeface="Courier New" pitchFamily="34" charset="-120"/>
               </a:rPr>
-              <a:t>  [sdlc 0.14.4 · community]</a:t>
+              <a:t>  [sdlc 0.14.5 · community]</a:t>
             </a:r>
             <a:endParaRPr lang="en-US" sz="1000" dirty="0"/>
           </a:p>
@@ -15056,7 +15056,7 @@
                 <a:ea typeface="Courier New" pitchFamily="34" charset="-122"/>
                 <a:cs typeface="Courier New" pitchFamily="34" charset="-120"/>
               </a:rPr>
-              <a:t>2026-10-09T19:44:28.712Z  gate.release.appr</a:t>
+              <a:t>2026-10-09T21:29:33.745Z  gate.release.appr</a:t>
             </a:r>
             <a:endParaRPr lang="en-US" sz="1000" dirty="0"/>
           </a:p>
@@ -15107,7 +15107,7 @@
                 <a:ea typeface="Courier New" pitchFamily="34" charset="-122"/>
                 <a:cs typeface="Courier New" pitchFamily="34" charset="-120"/>
               </a:rPr>
-              <a:t>  release-manager [sdlc 0.14.4 · community]</a:t>
+              <a:t>  release-manager [sdlc 0.14.5 · community]</a:t>
             </a:r>
             <a:endParaRPr lang="en-US" sz="1000" dirty="0"/>
           </a:p>
@@ -16284,7 +16284,7 @@
                 <a:ea typeface="Courier New" pitchFamily="34" charset="-122"/>
                 <a:cs typeface="Courier New" pitchFamily="34" charset="-120"/>
               </a:rPr>
-              <a:t>✓ test (0.9s)</a:t>
+              <a:t>✓ test (1.0s)</a:t>
             </a:r>
             <a:endParaRPr lang="en-US" sz="1000" dirty="0"/>
           </a:p>
@@ -16737,7 +16737,7 @@
                 <a:ea typeface="Courier New" pitchFamily="34" charset="-122"/>
                 <a:cs typeface="Courier New" pitchFamily="34" charset="-120"/>
               </a:rPr>
-              <a:t>      "id": "20261009T194511481Z-ci-green-e</a:t>
+              <a:t>      "id": "20261009T213014111Z-ci-green-5</a:t>
             </a:r>
             <a:endParaRPr lang="en-US" sz="1000" dirty="0"/>
           </a:p>
@@ -16754,7 +16754,7 @@
                 <a:ea typeface="Courier New" pitchFamily="34" charset="-122"/>
                 <a:cs typeface="Courier New" pitchFamily="34" charset="-120"/>
               </a:rPr>
-              <a:t>  2d8c0",</a:t>
+              <a:t>  4ac44",</a:t>
             </a:r>
             <a:endParaRPr lang="en-US" sz="1000" dirty="0"/>
           </a:p>
@@ -16890,7 +16890,7 @@
                 <a:ea typeface="Courier New" pitchFamily="34" charset="-122"/>
                 <a:cs typeface="Courier New" pitchFamily="34" charset="-120"/>
               </a:rPr>
-              <a:t>        "ref": "89d37e0a3465b9f5c72ebd0e377</a:t>
+              <a:t>        "ref": "29d0896091df3e0c2abc6824c88</a:t>
             </a:r>
             <a:endParaRPr lang="en-US" sz="1000" dirty="0"/>
           </a:p>
@@ -16907,7 +16907,7 @@
                 <a:ea typeface="Courier New" pitchFamily="34" charset="-122"/>
                 <a:cs typeface="Courier New" pitchFamily="34" charset="-120"/>
               </a:rPr>
-              <a:t>  edd835a2c2f8d",</a:t>
+              <a:t>  a70ac4517a4b4",</a:t>
             </a:r>
             <a:endParaRPr lang="en-US" sz="1000" dirty="0"/>
           </a:p>
@@ -26969,7 +26969,7 @@
                 <a:ea typeface="Courier New" pitchFamily="34" charset="-122"/>
                 <a:cs typeface="Courier New" pitchFamily="34" charset="-120"/>
               </a:rPr>
-              <a:t>  sdlc 0.14.4, license: community</a:t>
+              <a:t>  sdlc 0.14.5, license: community</a:t>
             </a:r>
             <a:endParaRPr lang="en-US" sz="1000" dirty="0"/>
           </a:p>

--- a/docs/demo/sdlc-calculator-demo.en.pptx
+++ b/docs/demo/sdlc-calculator-demo.en.pptx
@@ -5112,7 +5112,7 @@
                 <a:ea typeface="Courier New" pitchFamily="34" charset="-122"/>
                 <a:cs typeface="Courier New" pitchFamily="34" charset="-120"/>
               </a:rPr>
-              <a:t>✓ test (0.9s)</a:t>
+              <a:t>✓ test (1.0s)</a:t>
             </a:r>
             <a:endParaRPr lang="en-US" sz="1000" dirty="0"/>
           </a:p>
@@ -6660,7 +6660,7 @@
                 <a:ea typeface="Courier New" pitchFamily="34" charset="-122"/>
                 <a:cs typeface="Courier New" pitchFamily="34" charset="-120"/>
               </a:rPr>
-              <a:t>  code-owner (7f2e33b07f21)</a:t>
+              <a:t>  code-owner (2274a74f2a51)</a:t>
             </a:r>
             <a:endParaRPr lang="en-US" sz="1000" dirty="0"/>
           </a:p>
@@ -6745,7 +6745,7 @@
                 <a:ea typeface="Courier New" pitchFamily="34" charset="-122"/>
                 <a:cs typeface="Courier New" pitchFamily="34" charset="-120"/>
               </a:rPr>
-              <a:t>  "SDLC-Approval: basic-arithmetic:review:7</a:t>
+              <a:t>  "SDLC-Approval: basic-arithmetic:review:2</a:t>
             </a:r>
             <a:endParaRPr lang="en-US" sz="1000" dirty="0"/>
           </a:p>
@@ -6762,7 +6762,7 @@
                 <a:ea typeface="Courier New" pitchFamily="34" charset="-122"/>
                 <a:cs typeface="Courier New" pitchFamily="34" charset="-120"/>
               </a:rPr>
-              <a:t>  f2e33b07f21"</a:t>
+              <a:t>  274a74f2a51"</a:t>
             </a:r>
             <a:endParaRPr lang="en-US" sz="1000" dirty="0"/>
           </a:p>
@@ -6779,7 +6779,7 @@
                 <a:ea typeface="Courier New" pitchFamily="34" charset="-122"/>
                 <a:cs typeface="Courier New" pitchFamily="34" charset="-120"/>
               </a:rPr>
-              <a:t>Next: person — Carol Hughes (code-owner)</a:t>
+              <a:t>Next: agent — All gates are satisfied:</a:t>
             </a:r>
             <a:endParaRPr lang="en-US" sz="1000" dirty="0"/>
           </a:p>
@@ -6796,7 +6796,7 @@
                 <a:ea typeface="Courier New" pitchFamily="34" charset="-122"/>
                 <a:cs typeface="Courier New" pitchFamily="34" charset="-120"/>
               </a:rPr>
-              <a:t>  must read review.md and the diff, then</a:t>
+              <a:t>  archive the change to merge its delta</a:t>
             </a:r>
             <a:endParaRPr lang="en-US" sz="1000" dirty="0"/>
           </a:p>
@@ -6813,7 +6813,7 @@
                 <a:ea typeface="Courier New" pitchFamily="34" charset="-122"/>
                 <a:cs typeface="Courier New" pitchFamily="34" charset="-120"/>
               </a:rPr>
-              <a:t>  approve the review gate: sdlc approve</a:t>
+              <a:t>  specs into openspec/specs/.</a:t>
             </a:r>
             <a:endParaRPr lang="en-US" sz="1000" dirty="0"/>
           </a:p>
@@ -6830,7 +6830,7 @@
                 <a:ea typeface="Courier New" pitchFamily="34" charset="-122"/>
                 <a:cs typeface="Courier New" pitchFamily="34" charset="-120"/>
               </a:rPr>
-              <a:t>  review --change basic-arithmetic</a:t>
+              <a:t>  (/sdlc:archive)</a:t>
             </a:r>
             <a:endParaRPr lang="en-US" sz="1000" dirty="0"/>
           </a:p>
@@ -7443,7 +7443,7 @@
                 <a:ea typeface="Courier New" pitchFamily="34" charset="-122"/>
                 <a:cs typeface="Courier New" pitchFamily="34" charset="-120"/>
               </a:rPr>
-              <a:t>  release-manager (7f2e33b07f21)</a:t>
+              <a:t>  release-manager (2274a74f2a51)</a:t>
             </a:r>
             <a:endParaRPr lang="en-US" sz="1000" dirty="0"/>
           </a:p>
@@ -7511,7 +7511,7 @@
                 <a:ea typeface="Courier New" pitchFamily="34" charset="-122"/>
                 <a:cs typeface="Courier New" pitchFamily="34" charset="-120"/>
               </a:rPr>
-              <a:t>  gate" -m "SDLC-Approval: basic-arithmetic:release:7f2e33b07f21"</a:t>
+              <a:t>  gate" -m "SDLC-Approval: basic-arithmetic:release:2274a74f2a51"</a:t>
             </a:r>
             <a:endParaRPr lang="en-US" sz="1000" dirty="0"/>
           </a:p>
@@ -7528,7 +7528,7 @@
                 <a:ea typeface="Courier New" pitchFamily="34" charset="-122"/>
                 <a:cs typeface="Courier New" pitchFamily="34" charset="-120"/>
               </a:rPr>
-              <a:t>Next: person — Carol Hughes (code-owner) must read review.md and the</a:t>
+              <a:t>Next: agent — All gates are satisfied: archive the change to merge</a:t>
             </a:r>
             <a:endParaRPr lang="en-US" sz="1000" dirty="0"/>
           </a:p>
@@ -7545,24 +7545,7 @@
                 <a:ea typeface="Courier New" pitchFamily="34" charset="-122"/>
                 <a:cs typeface="Courier New" pitchFamily="34" charset="-120"/>
               </a:rPr>
-              <a:t>  diff, then approve the review gate: sdlc approve review --change</a:t>
-            </a:r>
-            <a:endParaRPr lang="en-US" sz="1000" dirty="0"/>
-          </a:p>
-          <a:p>
-            <a:pPr indent="0" marL="0">
-              <a:buNone/>
-            </a:pPr>
-            <a:r>
-              <a:rPr lang="en-US" sz="1000" dirty="0">
-                <a:solidFill>
-                  <a:srgbClr val="E8EEF2"/>
-                </a:solidFill>
-                <a:latin typeface="Courier New" pitchFamily="34" charset="0"/>
-                <a:ea typeface="Courier New" pitchFamily="34" charset="-122"/>
-                <a:cs typeface="Courier New" pitchFamily="34" charset="-120"/>
-              </a:rPr>
-              <a:t>  basic-arithmetic</a:t>
+              <a:t>  its delta specs into openspec/specs/. (/sdlc:archive)</a:t>
             </a:r>
             <a:endParaRPr lang="en-US" sz="1000" dirty="0"/>
           </a:p>
@@ -7811,7 +7794,7 @@
                 <a:ea typeface="Courier New" pitchFamily="34" charset="-122"/>
                 <a:cs typeface="Courier New" pitchFamily="34" charset="-120"/>
               </a:rPr>
-              <a:t>✓ basic-arithmetic/intent alice valid 68068be4</a:t>
+              <a:t>✓ basic-arithmetic/intent alice valid 2590a7eb</a:t>
             </a:r>
             <a:endParaRPr lang="en-US" sz="1000" dirty="0"/>
           </a:p>
@@ -7828,7 +7811,7 @@
                 <a:ea typeface="Courier New" pitchFamily="34" charset="-122"/>
                 <a:cs typeface="Courier New" pitchFamily="34" charset="-120"/>
               </a:rPr>
-              <a:t>✓ basic-arithmetic/spec alice valid 657b5c53</a:t>
+              <a:t>✓ basic-arithmetic/spec alice valid d5691689</a:t>
             </a:r>
             <a:endParaRPr lang="en-US" sz="1000" dirty="0"/>
           </a:p>
@@ -7845,7 +7828,7 @@
                 <a:ea typeface="Courier New" pitchFamily="34" charset="-122"/>
                 <a:cs typeface="Courier New" pitchFamily="34" charset="-120"/>
               </a:rPr>
-              <a:t>✗ basic-arithmetic/plan bob wrong-signer 657b5c53</a:t>
+              <a:t>✗ basic-arithmetic/plan bob wrong-signer d5691689</a:t>
             </a:r>
             <a:endParaRPr lang="en-US" sz="1000" dirty="0"/>
           </a:p>
@@ -7862,7 +7845,7 @@
                 <a:ea typeface="Courier New" pitchFamily="34" charset="-122"/>
                 <a:cs typeface="Courier New" pitchFamily="34" charset="-120"/>
               </a:rPr>
-              <a:t>✓ basic-arithmetic/review carol valid 0acc4321</a:t>
+              <a:t>✓ basic-arithmetic/review carol valid db7936f0</a:t>
             </a:r>
             <a:endParaRPr lang="en-US" sz="1000" dirty="0"/>
           </a:p>
@@ -7879,7 +7862,7 @@
                 <a:ea typeface="Courier New" pitchFamily="34" charset="-122"/>
                 <a:cs typeface="Courier New" pitchFamily="34" charset="-120"/>
               </a:rPr>
-              <a:t>✓ basic-arithmetic/release alice valid 768bdbcc</a:t>
+              <a:t>✓ basic-arithmetic/release alice valid ff47894c</a:t>
             </a:r>
             <a:endParaRPr lang="en-US" sz="1000" dirty="0"/>
           </a:p>
@@ -7896,7 +7879,7 @@
                 <a:ea typeface="Courier New" pitchFamily="34" charset="-122"/>
                 <a:cs typeface="Courier New" pitchFamily="34" charset="-120"/>
               </a:rPr>
-              <a:t>✓ openspec/roles.yaml alice@calc.example valid b131b70d</a:t>
+              <a:t>✓ openspec/roles.yaml alice@calc.example valid 125efdd7</a:t>
             </a:r>
             <a:endParaRPr lang="en-US" sz="1000" dirty="0"/>
           </a:p>
@@ -8528,7 +8511,7 @@
                 <a:ea typeface="Courier New" pitchFamily="34" charset="-122"/>
                 <a:cs typeface="Courier New" pitchFamily="34" charset="-120"/>
               </a:rPr>
-              <a:t>  openspec\changes\archive\2026-10-09-basic</a:t>
+              <a:t>  openspec\changes\archive\2026-10-11-basic</a:t>
             </a:r>
             <a:endParaRPr lang="en-US" sz="1000" dirty="0"/>
           </a:p>
@@ -14382,7 +14365,7 @@
                 <a:ea typeface="Courier New" pitchFamily="34" charset="-122"/>
                 <a:cs typeface="Courier New" pitchFamily="34" charset="-120"/>
               </a:rPr>
-              <a:t>  archived) · sdlc 0.14.5, license:</a:t>
+              <a:t>  archived) · sdlc 0.14.6, license:</a:t>
             </a:r>
             <a:endParaRPr lang="en-US" sz="1000" dirty="0"/>
           </a:p>
@@ -14903,7 +14886,7 @@
                 <a:ea typeface="Courier New" pitchFamily="34" charset="-122"/>
                 <a:cs typeface="Courier New" pitchFamily="34" charset="-120"/>
               </a:rPr>
-              <a:t>2026-10-09T21:29:25.383Z  gate.review.await</a:t>
+              <a:t>2026-10-11T16:13:26.327Z  gate.review.await</a:t>
             </a:r>
             <a:endParaRPr lang="en-US" sz="1000" dirty="0"/>
           </a:p>
@@ -14937,7 +14920,7 @@
                 <a:ea typeface="Courier New" pitchFamily="34" charset="-122"/>
                 <a:cs typeface="Courier New" pitchFamily="34" charset="-120"/>
               </a:rPr>
-              <a:t>  sha256:7f2e33b07f21c8d5b17934994b95a599ab</a:t>
+              <a:t>  sha256:2274a74f2a51361ceedad8742901ba17c7</a:t>
             </a:r>
             <a:endParaRPr lang="en-US" sz="1000" dirty="0"/>
           </a:p>
@@ -14954,7 +14937,7 @@
                 <a:ea typeface="Courier New" pitchFamily="34" charset="-122"/>
                 <a:cs typeface="Courier New" pitchFamily="34" charset="-120"/>
               </a:rPr>
-              <a:t>  c149f46ca1ab5677b168e1f0322784 [sdlc</a:t>
+              <a:t>  a9e041d0e702149896634b139fb1dc [sdlc</a:t>
             </a:r>
             <a:endParaRPr lang="en-US" sz="1000" dirty="0"/>
           </a:p>
@@ -14971,7 +14954,7 @@
                 <a:ea typeface="Courier New" pitchFamily="34" charset="-122"/>
                 <a:cs typeface="Courier New" pitchFamily="34" charset="-120"/>
               </a:rPr>
-              <a:t>  0.14.5 · community]</a:t>
+              <a:t>  0.14.6 · community]</a:t>
             </a:r>
             <a:endParaRPr lang="en-US" sz="1000" dirty="0"/>
           </a:p>
@@ -14988,7 +14971,7 @@
                 <a:ea typeface="Courier New" pitchFamily="34" charset="-122"/>
                 <a:cs typeface="Courier New" pitchFamily="34" charset="-120"/>
               </a:rPr>
-              <a:t>2026-10-09T21:29:28.216Z  gate.review.appro</a:t>
+              <a:t>2026-10-11T16:13:29.357Z  gate.review.appro</a:t>
             </a:r>
             <a:endParaRPr lang="en-US" sz="1000" dirty="0"/>
           </a:p>
@@ -15039,7 +15022,7 @@
                 <a:ea typeface="Courier New" pitchFamily="34" charset="-122"/>
                 <a:cs typeface="Courier New" pitchFamily="34" charset="-120"/>
               </a:rPr>
-              <a:t>  [sdlc 0.14.5 · community]</a:t>
+              <a:t>  [sdlc 0.14.6 · community]</a:t>
             </a:r>
             <a:endParaRPr lang="en-US" sz="1000" dirty="0"/>
           </a:p>
@@ -15056,7 +15039,7 @@
                 <a:ea typeface="Courier New" pitchFamily="34" charset="-122"/>
                 <a:cs typeface="Courier New" pitchFamily="34" charset="-120"/>
               </a:rPr>
-              <a:t>2026-10-09T21:29:33.745Z  gate.release.appr</a:t>
+              <a:t>2026-10-11T16:13:34.852Z  gate.release.appr</a:t>
             </a:r>
             <a:endParaRPr lang="en-US" sz="1000" dirty="0"/>
           </a:p>
@@ -15107,7 +15090,7 @@
                 <a:ea typeface="Courier New" pitchFamily="34" charset="-122"/>
                 <a:cs typeface="Courier New" pitchFamily="34" charset="-120"/>
               </a:rPr>
-              <a:t>  release-manager [sdlc 0.14.5 · community]</a:t>
+              <a:t>  release-manager [sdlc 0.14.6 · community]</a:t>
             </a:r>
             <a:endParaRPr lang="en-US" sz="1000" dirty="0"/>
           </a:p>
@@ -16737,7 +16720,7 @@
                 <a:ea typeface="Courier New" pitchFamily="34" charset="-122"/>
                 <a:cs typeface="Courier New" pitchFamily="34" charset="-120"/>
               </a:rPr>
-              <a:t>      "id": "20261009T213014111Z-ci-green-5</a:t>
+              <a:t>      "id": "20261011T161417493Z-ci-green-2</a:t>
             </a:r>
             <a:endParaRPr lang="en-US" sz="1000" dirty="0"/>
           </a:p>
@@ -16754,7 +16737,7 @@
                 <a:ea typeface="Courier New" pitchFamily="34" charset="-122"/>
                 <a:cs typeface="Courier New" pitchFamily="34" charset="-120"/>
               </a:rPr>
-              <a:t>  4ac44",</a:t>
+              <a:t>  bbb10",</a:t>
             </a:r>
             <a:endParaRPr lang="en-US" sz="1000" dirty="0"/>
           </a:p>
@@ -16890,7 +16873,7 @@
                 <a:ea typeface="Courier New" pitchFamily="34" charset="-122"/>
                 <a:cs typeface="Courier New" pitchFamily="34" charset="-120"/>
               </a:rPr>
-              <a:t>        "ref": "29d0896091df3e0c2abc6824c88</a:t>
+              <a:t>        "ref": "47aa7231182575c55eb588f0871</a:t>
             </a:r>
             <a:endParaRPr lang="en-US" sz="1000" dirty="0"/>
           </a:p>
@@ -16907,7 +16890,7 @@
                 <a:ea typeface="Courier New" pitchFamily="34" charset="-122"/>
                 <a:cs typeface="Courier New" pitchFamily="34" charset="-120"/>
               </a:rPr>
-              <a:t>  a70ac4517a4b4",</a:t>
+              <a:t>  9e28535ed9910",</a:t>
             </a:r>
             <a:endParaRPr lang="en-US" sz="1000" dirty="0"/>
           </a:p>
@@ -26969,7 +26952,7 @@
                 <a:ea typeface="Courier New" pitchFamily="34" charset="-122"/>
                 <a:cs typeface="Courier New" pitchFamily="34" charset="-120"/>
               </a:rPr>
-              <a:t>  sdlc 0.14.5, license: community</a:t>
+              <a:t>  sdlc 0.14.6, license: community</a:t>
             </a:r>
             <a:endParaRPr lang="en-US" sz="1000" dirty="0"/>
           </a:p>
@@ -33794,7 +33777,7 @@
                 <a:ea typeface="Courier New" pitchFamily="34" charset="-122"/>
                 <a:cs typeface="Courier New" pitchFamily="34" charset="-120"/>
               </a:rPr>
-              <a:t>  (df7cf643b6a1)</a:t>
+              <a:t>  (ca0a7835fb5a)</a:t>
             </a:r>
             <a:endParaRPr lang="en-US" sz="1000" dirty="0"/>
           </a:p>
@@ -33930,7 +33913,7 @@
                 <a:ea typeface="Courier New" pitchFamily="34" charset="-122"/>
                 <a:cs typeface="Courier New" pitchFamily="34" charset="-120"/>
               </a:rPr>
-              <a:t>  df7cf643b6a1"</a:t>
+              <a:t>  ca0a7835fb5a"</a:t>
             </a:r>
             <a:endParaRPr lang="en-US" sz="1000" dirty="0"/>
           </a:p>

--- a/docs/demo/sdlc-calculator-demo.en.pptx
+++ b/docs/demo/sdlc-calculator-demo.en.pptx
@@ -6660,7 +6660,7 @@
                 <a:ea typeface="Courier New" pitchFamily="34" charset="-122"/>
                 <a:cs typeface="Courier New" pitchFamily="34" charset="-120"/>
               </a:rPr>
-              <a:t>  code-owner (2274a74f2a51)</a:t>
+              <a:t>  code-owner (a0bc17763e43)</a:t>
             </a:r>
             <a:endParaRPr lang="en-US" sz="1000" dirty="0"/>
           </a:p>
@@ -6745,7 +6745,7 @@
                 <a:ea typeface="Courier New" pitchFamily="34" charset="-122"/>
                 <a:cs typeface="Courier New" pitchFamily="34" charset="-120"/>
               </a:rPr>
-              <a:t>  "SDLC-Approval: basic-arithmetic:review:2</a:t>
+              <a:t>  "SDLC-Approval: basic-arithmetic:review:a</a:t>
             </a:r>
             <a:endParaRPr lang="en-US" sz="1000" dirty="0"/>
           </a:p>
@@ -6762,7 +6762,7 @@
                 <a:ea typeface="Courier New" pitchFamily="34" charset="-122"/>
                 <a:cs typeface="Courier New" pitchFamily="34" charset="-120"/>
               </a:rPr>
-              <a:t>  274a74f2a51"</a:t>
+              <a:t>  0bc17763e43"</a:t>
             </a:r>
             <a:endParaRPr lang="en-US" sz="1000" dirty="0"/>
           </a:p>
@@ -7443,7 +7443,7 @@
                 <a:ea typeface="Courier New" pitchFamily="34" charset="-122"/>
                 <a:cs typeface="Courier New" pitchFamily="34" charset="-120"/>
               </a:rPr>
-              <a:t>  release-manager (2274a74f2a51)</a:t>
+              <a:t>  release-manager (a0bc17763e43)</a:t>
             </a:r>
             <a:endParaRPr lang="en-US" sz="1000" dirty="0"/>
           </a:p>
@@ -7511,7 +7511,7 @@
                 <a:ea typeface="Courier New" pitchFamily="34" charset="-122"/>
                 <a:cs typeface="Courier New" pitchFamily="34" charset="-120"/>
               </a:rPr>
-              <a:t>  gate" -m "SDLC-Approval: basic-arithmetic:release:2274a74f2a51"</a:t>
+              <a:t>  gate" -m "SDLC-Approval: basic-arithmetic:release:a0bc17763e43"</a:t>
             </a:r>
             <a:endParaRPr lang="en-US" sz="1000" dirty="0"/>
           </a:p>
@@ -7794,7 +7794,7 @@
                 <a:ea typeface="Courier New" pitchFamily="34" charset="-122"/>
                 <a:cs typeface="Courier New" pitchFamily="34" charset="-120"/>
               </a:rPr>
-              <a:t>✓ basic-arithmetic/intent alice valid 2590a7eb</a:t>
+              <a:t>✓ basic-arithmetic/intent alice valid 7b23c1f3</a:t>
             </a:r>
             <a:endParaRPr lang="en-US" sz="1000" dirty="0"/>
           </a:p>
@@ -7811,7 +7811,7 @@
                 <a:ea typeface="Courier New" pitchFamily="34" charset="-122"/>
                 <a:cs typeface="Courier New" pitchFamily="34" charset="-120"/>
               </a:rPr>
-              <a:t>✓ basic-arithmetic/spec alice valid d5691689</a:t>
+              <a:t>✓ basic-arithmetic/spec alice valid 0abaa1a3</a:t>
             </a:r>
             <a:endParaRPr lang="en-US" sz="1000" dirty="0"/>
           </a:p>
@@ -7828,7 +7828,7 @@
                 <a:ea typeface="Courier New" pitchFamily="34" charset="-122"/>
                 <a:cs typeface="Courier New" pitchFamily="34" charset="-120"/>
               </a:rPr>
-              <a:t>✗ basic-arithmetic/plan bob wrong-signer d5691689</a:t>
+              <a:t>✗ basic-arithmetic/plan bob wrong-signer 0abaa1a3</a:t>
             </a:r>
             <a:endParaRPr lang="en-US" sz="1000" dirty="0"/>
           </a:p>
@@ -7845,7 +7845,7 @@
                 <a:ea typeface="Courier New" pitchFamily="34" charset="-122"/>
                 <a:cs typeface="Courier New" pitchFamily="34" charset="-120"/>
               </a:rPr>
-              <a:t>✓ basic-arithmetic/review carol valid db7936f0</a:t>
+              <a:t>✓ basic-arithmetic/review carol valid e1f24962</a:t>
             </a:r>
             <a:endParaRPr lang="en-US" sz="1000" dirty="0"/>
           </a:p>
@@ -7862,7 +7862,7 @@
                 <a:ea typeface="Courier New" pitchFamily="34" charset="-122"/>
                 <a:cs typeface="Courier New" pitchFamily="34" charset="-120"/>
               </a:rPr>
-              <a:t>✓ basic-arithmetic/release alice valid ff47894c</a:t>
+              <a:t>✓ basic-arithmetic/release alice valid 66be5a87</a:t>
             </a:r>
             <a:endParaRPr lang="en-US" sz="1000" dirty="0"/>
           </a:p>
@@ -7879,7 +7879,7 @@
                 <a:ea typeface="Courier New" pitchFamily="34" charset="-122"/>
                 <a:cs typeface="Courier New" pitchFamily="34" charset="-120"/>
               </a:rPr>
-              <a:t>✓ openspec/roles.yaml alice@calc.example valid 125efdd7</a:t>
+              <a:t>✓ openspec/roles.yaml alice@calc.example valid 319d380c</a:t>
             </a:r>
             <a:endParaRPr lang="en-US" sz="1000" dirty="0"/>
           </a:p>
@@ -14365,7 +14365,7 @@
                 <a:ea typeface="Courier New" pitchFamily="34" charset="-122"/>
                 <a:cs typeface="Courier New" pitchFamily="34" charset="-120"/>
               </a:rPr>
-              <a:t>  archived) · sdlc 0.14.6, license:</a:t>
+              <a:t>  archived) · sdlc 0.14.7, license:</a:t>
             </a:r>
             <a:endParaRPr lang="en-US" sz="1000" dirty="0"/>
           </a:p>
@@ -14552,7 +14552,7 @@
                 <a:ea typeface="Courier New" pitchFamily="34" charset="-122"/>
                 <a:cs typeface="Courier New" pitchFamily="34" charset="-120"/>
               </a:rPr>
-              <a:t>  intent 3 · plan 11 · review 3; rework</a:t>
+              <a:t>  intent 2 · plan 11 · review 3; rework</a:t>
             </a:r>
             <a:endParaRPr lang="en-US" sz="1000" dirty="0"/>
           </a:p>
@@ -14886,7 +14886,7 @@
                 <a:ea typeface="Courier New" pitchFamily="34" charset="-122"/>
                 <a:cs typeface="Courier New" pitchFamily="34" charset="-120"/>
               </a:rPr>
-              <a:t>2026-10-11T16:13:26.327Z  gate.review.await</a:t>
+              <a:t>2026-10-11T17:31:02.746Z  gate.review.await</a:t>
             </a:r>
             <a:endParaRPr lang="en-US" sz="1000" dirty="0"/>
           </a:p>
@@ -14920,7 +14920,7 @@
                 <a:ea typeface="Courier New" pitchFamily="34" charset="-122"/>
                 <a:cs typeface="Courier New" pitchFamily="34" charset="-120"/>
               </a:rPr>
-              <a:t>  sha256:2274a74f2a51361ceedad8742901ba17c7</a:t>
+              <a:t>  sha256:a0bc17763e4332b307ea1435a7268b67ea</a:t>
             </a:r>
             <a:endParaRPr lang="en-US" sz="1000" dirty="0"/>
           </a:p>
@@ -14937,7 +14937,7 @@
                 <a:ea typeface="Courier New" pitchFamily="34" charset="-122"/>
                 <a:cs typeface="Courier New" pitchFamily="34" charset="-120"/>
               </a:rPr>
-              <a:t>  a9e041d0e702149896634b139fb1dc [sdlc</a:t>
+              <a:t>  0778acd66fdbe2c28977751a7ef077 [sdlc</a:t>
             </a:r>
             <a:endParaRPr lang="en-US" sz="1000" dirty="0"/>
           </a:p>
@@ -14954,7 +14954,7 @@
                 <a:ea typeface="Courier New" pitchFamily="34" charset="-122"/>
                 <a:cs typeface="Courier New" pitchFamily="34" charset="-120"/>
               </a:rPr>
-              <a:t>  0.14.6 · community]</a:t>
+              <a:t>  0.14.7 · community]</a:t>
             </a:r>
             <a:endParaRPr lang="en-US" sz="1000" dirty="0"/>
           </a:p>
@@ -14971,7 +14971,7 @@
                 <a:ea typeface="Courier New" pitchFamily="34" charset="-122"/>
                 <a:cs typeface="Courier New" pitchFamily="34" charset="-120"/>
               </a:rPr>
-              <a:t>2026-10-11T16:13:29.357Z  gate.review.appro</a:t>
+              <a:t>2026-10-11T17:31:05.733Z  gate.review.appro</a:t>
             </a:r>
             <a:endParaRPr lang="en-US" sz="1000" dirty="0"/>
           </a:p>
@@ -15022,7 +15022,7 @@
                 <a:ea typeface="Courier New" pitchFamily="34" charset="-122"/>
                 <a:cs typeface="Courier New" pitchFamily="34" charset="-120"/>
               </a:rPr>
-              <a:t>  [sdlc 0.14.6 · community]</a:t>
+              <a:t>  [sdlc 0.14.7 · community]</a:t>
             </a:r>
             <a:endParaRPr lang="en-US" sz="1000" dirty="0"/>
           </a:p>
@@ -15039,7 +15039,7 @@
                 <a:ea typeface="Courier New" pitchFamily="34" charset="-122"/>
                 <a:cs typeface="Courier New" pitchFamily="34" charset="-120"/>
               </a:rPr>
-              <a:t>2026-10-11T16:13:34.852Z  gate.release.appr</a:t>
+              <a:t>2026-10-11T17:31:11.157Z  gate.release.appr</a:t>
             </a:r>
             <a:endParaRPr lang="en-US" sz="1000" dirty="0"/>
           </a:p>
@@ -15090,7 +15090,7 @@
                 <a:ea typeface="Courier New" pitchFamily="34" charset="-122"/>
                 <a:cs typeface="Courier New" pitchFamily="34" charset="-120"/>
               </a:rPr>
-              <a:t>  release-manager [sdlc 0.14.6 · community]</a:t>
+              <a:t>  release-manager [sdlc 0.14.7 · community]</a:t>
             </a:r>
             <a:endParaRPr lang="en-US" sz="1000" dirty="0"/>
           </a:p>
@@ -16720,7 +16720,7 @@
                 <a:ea typeface="Courier New" pitchFamily="34" charset="-122"/>
                 <a:cs typeface="Courier New" pitchFamily="34" charset="-120"/>
               </a:rPr>
-              <a:t>      "id": "20261011T161417493Z-ci-green-2</a:t>
+              <a:t>      "id": "20261011T173152343Z-ci-green-0</a:t>
             </a:r>
             <a:endParaRPr lang="en-US" sz="1000" dirty="0"/>
           </a:p>
@@ -16737,7 +16737,7 @@
                 <a:ea typeface="Courier New" pitchFamily="34" charset="-122"/>
                 <a:cs typeface="Courier New" pitchFamily="34" charset="-120"/>
               </a:rPr>
-              <a:t>  bbb10",</a:t>
+              <a:t>  1b96e",</a:t>
             </a:r>
             <a:endParaRPr lang="en-US" sz="1000" dirty="0"/>
           </a:p>
@@ -16873,7 +16873,7 @@
                 <a:ea typeface="Courier New" pitchFamily="34" charset="-122"/>
                 <a:cs typeface="Courier New" pitchFamily="34" charset="-120"/>
               </a:rPr>
-              <a:t>        "ref": "47aa7231182575c55eb588f0871</a:t>
+              <a:t>        "ref": "5ea7e36f5375dcc3503b1be8c99</a:t>
             </a:r>
             <a:endParaRPr lang="en-US" sz="1000" dirty="0"/>
           </a:p>
@@ -16890,7 +16890,7 @@
                 <a:ea typeface="Courier New" pitchFamily="34" charset="-122"/>
                 <a:cs typeface="Courier New" pitchFamily="34" charset="-120"/>
               </a:rPr>
-              <a:t>  9e28535ed9910",</a:t>
+              <a:t>  4411ddd532154",</a:t>
             </a:r>
             <a:endParaRPr lang="en-US" sz="1000" dirty="0"/>
           </a:p>
@@ -26952,7 +26952,7 @@
                 <a:ea typeface="Courier New" pitchFamily="34" charset="-122"/>
                 <a:cs typeface="Courier New" pitchFamily="34" charset="-120"/>
               </a:rPr>
-              <a:t>  sdlc 0.14.6, license: community</a:t>
+              <a:t>  sdlc 0.14.7, license: community</a:t>
             </a:r>
             <a:endParaRPr lang="en-US" sz="1000" dirty="0"/>
           </a:p>

--- a/docs/demo/sdlc-calculator-demo.en.pptx
+++ b/docs/demo/sdlc-calculator-demo.en.pptx
@@ -5112,7 +5112,7 @@
                 <a:ea typeface="Courier New" pitchFamily="34" charset="-122"/>
                 <a:cs typeface="Courier New" pitchFamily="34" charset="-120"/>
               </a:rPr>
-              <a:t>✓ test (1.0s)</a:t>
+              <a:t>✓ test (0.9s)</a:t>
             </a:r>
             <a:endParaRPr lang="en-US" sz="1000" dirty="0"/>
           </a:p>
@@ -6660,7 +6660,7 @@
                 <a:ea typeface="Courier New" pitchFamily="34" charset="-122"/>
                 <a:cs typeface="Courier New" pitchFamily="34" charset="-120"/>
               </a:rPr>
-              <a:t>  code-owner (a0bc17763e43)</a:t>
+              <a:t>  code-owner (c3289403791c)</a:t>
             </a:r>
             <a:endParaRPr lang="en-US" sz="1000" dirty="0"/>
           </a:p>
@@ -6745,7 +6745,7 @@
                 <a:ea typeface="Courier New" pitchFamily="34" charset="-122"/>
                 <a:cs typeface="Courier New" pitchFamily="34" charset="-120"/>
               </a:rPr>
-              <a:t>  "SDLC-Approval: basic-arithmetic:review:a</a:t>
+              <a:t>  "SDLC-Approval: basic-arithmetic:review:c</a:t>
             </a:r>
             <a:endParaRPr lang="en-US" sz="1000" dirty="0"/>
           </a:p>
@@ -6762,7 +6762,7 @@
                 <a:ea typeface="Courier New" pitchFamily="34" charset="-122"/>
                 <a:cs typeface="Courier New" pitchFamily="34" charset="-120"/>
               </a:rPr>
-              <a:t>  0bc17763e43"</a:t>
+              <a:t>  3289403791c"</a:t>
             </a:r>
             <a:endParaRPr lang="en-US" sz="1000" dirty="0"/>
           </a:p>
@@ -7443,7 +7443,7 @@
                 <a:ea typeface="Courier New" pitchFamily="34" charset="-122"/>
                 <a:cs typeface="Courier New" pitchFamily="34" charset="-120"/>
               </a:rPr>
-              <a:t>  release-manager (a0bc17763e43)</a:t>
+              <a:t>  release-manager (c3289403791c)</a:t>
             </a:r>
             <a:endParaRPr lang="en-US" sz="1000" dirty="0"/>
           </a:p>
@@ -7511,7 +7511,7 @@
                 <a:ea typeface="Courier New" pitchFamily="34" charset="-122"/>
                 <a:cs typeface="Courier New" pitchFamily="34" charset="-120"/>
               </a:rPr>
-              <a:t>  gate" -m "SDLC-Approval: basic-arithmetic:release:a0bc17763e43"</a:t>
+              <a:t>  gate" -m "SDLC-Approval: basic-arithmetic:release:c3289403791c"</a:t>
             </a:r>
             <a:endParaRPr lang="en-US" sz="1000" dirty="0"/>
           </a:p>
@@ -7794,7 +7794,7 @@
                 <a:ea typeface="Courier New" pitchFamily="34" charset="-122"/>
                 <a:cs typeface="Courier New" pitchFamily="34" charset="-120"/>
               </a:rPr>
-              <a:t>✓ basic-arithmetic/intent alice valid 7b23c1f3</a:t>
+              <a:t>✓ basic-arithmetic/intent alice valid 092cd6b1</a:t>
             </a:r>
             <a:endParaRPr lang="en-US" sz="1000" dirty="0"/>
           </a:p>
@@ -7811,7 +7811,7 @@
                 <a:ea typeface="Courier New" pitchFamily="34" charset="-122"/>
                 <a:cs typeface="Courier New" pitchFamily="34" charset="-120"/>
               </a:rPr>
-              <a:t>✓ basic-arithmetic/spec alice valid 0abaa1a3</a:t>
+              <a:t>✓ basic-arithmetic/spec alice valid 0afcb046</a:t>
             </a:r>
             <a:endParaRPr lang="en-US" sz="1000" dirty="0"/>
           </a:p>
@@ -7828,7 +7828,7 @@
                 <a:ea typeface="Courier New" pitchFamily="34" charset="-122"/>
                 <a:cs typeface="Courier New" pitchFamily="34" charset="-120"/>
               </a:rPr>
-              <a:t>✗ basic-arithmetic/plan bob wrong-signer 0abaa1a3</a:t>
+              <a:t>✗ basic-arithmetic/plan bob wrong-signer 0afcb046</a:t>
             </a:r>
             <a:endParaRPr lang="en-US" sz="1000" dirty="0"/>
           </a:p>
@@ -7845,7 +7845,7 @@
                 <a:ea typeface="Courier New" pitchFamily="34" charset="-122"/>
                 <a:cs typeface="Courier New" pitchFamily="34" charset="-120"/>
               </a:rPr>
-              <a:t>✓ basic-arithmetic/review carol valid e1f24962</a:t>
+              <a:t>✓ basic-arithmetic/review carol valid ce5b594d</a:t>
             </a:r>
             <a:endParaRPr lang="en-US" sz="1000" dirty="0"/>
           </a:p>
@@ -7862,7 +7862,7 @@
                 <a:ea typeface="Courier New" pitchFamily="34" charset="-122"/>
                 <a:cs typeface="Courier New" pitchFamily="34" charset="-120"/>
               </a:rPr>
-              <a:t>✓ basic-arithmetic/release alice valid 66be5a87</a:t>
+              <a:t>✓ basic-arithmetic/release alice valid 1c8e641e</a:t>
             </a:r>
             <a:endParaRPr lang="en-US" sz="1000" dirty="0"/>
           </a:p>
@@ -7879,7 +7879,7 @@
                 <a:ea typeface="Courier New" pitchFamily="34" charset="-122"/>
                 <a:cs typeface="Courier New" pitchFamily="34" charset="-120"/>
               </a:rPr>
-              <a:t>✓ openspec/roles.yaml alice@calc.example valid 319d380c</a:t>
+              <a:t>✓ openspec/roles.yaml alice@calc.example valid 14ee937d</a:t>
             </a:r>
             <a:endParaRPr lang="en-US" sz="1000" dirty="0"/>
           </a:p>
@@ -14365,7 +14365,7 @@
                 <a:ea typeface="Courier New" pitchFamily="34" charset="-122"/>
                 <a:cs typeface="Courier New" pitchFamily="34" charset="-120"/>
               </a:rPr>
-              <a:t>  archived) · sdlc 0.14.7, license:</a:t>
+              <a:t>  archived) · sdlc 0.15.0, license:</a:t>
             </a:r>
             <a:endParaRPr lang="en-US" sz="1000" dirty="0"/>
           </a:p>
@@ -14552,7 +14552,7 @@
                 <a:ea typeface="Courier New" pitchFamily="34" charset="-122"/>
                 <a:cs typeface="Courier New" pitchFamily="34" charset="-120"/>
               </a:rPr>
-              <a:t>  intent 2 · plan 11 · review 3; rework</a:t>
+              <a:t>  intent 3 · spec 1 · plan 11 · review 3;</a:t>
             </a:r>
             <a:endParaRPr lang="en-US" sz="1000" dirty="0"/>
           </a:p>
@@ -14569,7 +14569,7 @@
                 <a:ea typeface="Courier New" pitchFamily="34" charset="-122"/>
                 <a:cs typeface="Courier New" pitchFamily="34" charset="-120"/>
               </a:rPr>
-              <a:t>  reasons: missing-requirement 1</a:t>
+              <a:t>  rework reasons: missing-requirement 1</a:t>
             </a:r>
             <a:endParaRPr lang="en-US" sz="1000" dirty="0"/>
           </a:p>
@@ -14852,7 +14852,7 @@
                 <a:ea typeface="Courier New" pitchFamily="34" charset="-122"/>
                 <a:cs typeface="Courier New" pitchFamily="34" charset="-120"/>
               </a:rPr>
-              <a:t>(last 15 of 44 entries; --limit to see</a:t>
+              <a:t>(last 15 of 45 entries; --limit to see</a:t>
             </a:r>
             <a:endParaRPr lang="en-US" sz="1000" dirty="0"/>
           </a:p>
@@ -14886,7 +14886,7 @@
                 <a:ea typeface="Courier New" pitchFamily="34" charset="-122"/>
                 <a:cs typeface="Courier New" pitchFamily="34" charset="-120"/>
               </a:rPr>
-              <a:t>2026-10-11T17:31:02.746Z  gate.review.await</a:t>
+              <a:t>2026-10-11T18:46:33.939Z  gate.review.await</a:t>
             </a:r>
             <a:endParaRPr lang="en-US" sz="1000" dirty="0"/>
           </a:p>
@@ -14920,7 +14920,7 @@
                 <a:ea typeface="Courier New" pitchFamily="34" charset="-122"/>
                 <a:cs typeface="Courier New" pitchFamily="34" charset="-120"/>
               </a:rPr>
-              <a:t>  sha256:a0bc17763e4332b307ea1435a7268b67ea</a:t>
+              <a:t>  sha256:c3289403791c5c9047737a9b7d4a0e7cb9</a:t>
             </a:r>
             <a:endParaRPr lang="en-US" sz="1000" dirty="0"/>
           </a:p>
@@ -14937,7 +14937,7 @@
                 <a:ea typeface="Courier New" pitchFamily="34" charset="-122"/>
                 <a:cs typeface="Courier New" pitchFamily="34" charset="-120"/>
               </a:rPr>
-              <a:t>  0778acd66fdbe2c28977751a7ef077 [sdlc</a:t>
+              <a:t>  28d813abfdda02a1bf29080209a8be [sdlc</a:t>
             </a:r>
             <a:endParaRPr lang="en-US" sz="1000" dirty="0"/>
           </a:p>
@@ -14954,7 +14954,7 @@
                 <a:ea typeface="Courier New" pitchFamily="34" charset="-122"/>
                 <a:cs typeface="Courier New" pitchFamily="34" charset="-120"/>
               </a:rPr>
-              <a:t>  0.14.7 · community]</a:t>
+              <a:t>  0.15.0 · community]</a:t>
             </a:r>
             <a:endParaRPr lang="en-US" sz="1000" dirty="0"/>
           </a:p>
@@ -14971,7 +14971,7 @@
                 <a:ea typeface="Courier New" pitchFamily="34" charset="-122"/>
                 <a:cs typeface="Courier New" pitchFamily="34" charset="-120"/>
               </a:rPr>
-              <a:t>2026-10-11T17:31:05.733Z  gate.review.appro</a:t>
+              <a:t>2026-10-11T18:46:36.890Z  gate.review.appro</a:t>
             </a:r>
             <a:endParaRPr lang="en-US" sz="1000" dirty="0"/>
           </a:p>
@@ -15022,7 +15022,7 @@
                 <a:ea typeface="Courier New" pitchFamily="34" charset="-122"/>
                 <a:cs typeface="Courier New" pitchFamily="34" charset="-120"/>
               </a:rPr>
-              <a:t>  [sdlc 0.14.7 · community]</a:t>
+              <a:t>  [sdlc 0.15.0 · community]</a:t>
             </a:r>
             <a:endParaRPr lang="en-US" sz="1000" dirty="0"/>
           </a:p>
@@ -15039,7 +15039,7 @@
                 <a:ea typeface="Courier New" pitchFamily="34" charset="-122"/>
                 <a:cs typeface="Courier New" pitchFamily="34" charset="-120"/>
               </a:rPr>
-              <a:t>2026-10-11T17:31:11.157Z  gate.release.appr</a:t>
+              <a:t>2026-10-11T18:46:42.064Z  gate.release.appr</a:t>
             </a:r>
             <a:endParaRPr lang="en-US" sz="1000" dirty="0"/>
           </a:p>
@@ -15090,7 +15090,7 @@
                 <a:ea typeface="Courier New" pitchFamily="34" charset="-122"/>
                 <a:cs typeface="Courier New" pitchFamily="34" charset="-120"/>
               </a:rPr>
-              <a:t>  release-manager [sdlc 0.14.7 · community]</a:t>
+              <a:t>  release-manager [sdlc 0.15.0 · community]</a:t>
             </a:r>
             <a:endParaRPr lang="en-US" sz="1000" dirty="0"/>
           </a:p>
@@ -16720,7 +16720,7 @@
                 <a:ea typeface="Courier New" pitchFamily="34" charset="-122"/>
                 <a:cs typeface="Courier New" pitchFamily="34" charset="-120"/>
               </a:rPr>
-              <a:t>      "id": "20261011T173152343Z-ci-green-0</a:t>
+              <a:t>      "id": "20261011T184723201Z-ci-green-b</a:t>
             </a:r>
             <a:endParaRPr lang="en-US" sz="1000" dirty="0"/>
           </a:p>
@@ -16737,7 +16737,7 @@
                 <a:ea typeface="Courier New" pitchFamily="34" charset="-122"/>
                 <a:cs typeface="Courier New" pitchFamily="34" charset="-120"/>
               </a:rPr>
-              <a:t>  1b96e",</a:t>
+              <a:t>  47656",</a:t>
             </a:r>
             <a:endParaRPr lang="en-US" sz="1000" dirty="0"/>
           </a:p>
@@ -16873,7 +16873,7 @@
                 <a:ea typeface="Courier New" pitchFamily="34" charset="-122"/>
                 <a:cs typeface="Courier New" pitchFamily="34" charset="-120"/>
               </a:rPr>
-              <a:t>        "ref": "5ea7e36f5375dcc3503b1be8c99</a:t>
+              <a:t>        "ref": "171520b4e27bb6452f9a787e7c1</a:t>
             </a:r>
             <a:endParaRPr lang="en-US" sz="1000" dirty="0"/>
           </a:p>
@@ -16890,7 +16890,7 @@
                 <a:ea typeface="Courier New" pitchFamily="34" charset="-122"/>
                 <a:cs typeface="Courier New" pitchFamily="34" charset="-120"/>
               </a:rPr>
-              <a:t>  4411ddd532154",</a:t>
+              <a:t>  b2e6a86434c44",</a:t>
             </a:r>
             <a:endParaRPr lang="en-US" sz="1000" dirty="0"/>
           </a:p>
@@ -26952,7 +26952,7 @@
                 <a:ea typeface="Courier New" pitchFamily="34" charset="-122"/>
                 <a:cs typeface="Courier New" pitchFamily="34" charset="-120"/>
               </a:rPr>
-              <a:t>  sdlc 0.14.7, license: community</a:t>
+              <a:t>  sdlc 0.15.0, license: community</a:t>
             </a:r>
             <a:endParaRPr lang="en-US" sz="1000" dirty="0"/>
           </a:p>

--- a/docs/demo/sdlc-calculator-demo.en.pptx
+++ b/docs/demo/sdlc-calculator-demo.en.pptx
@@ -5112,7 +5112,7 @@
                 <a:ea typeface="Courier New" pitchFamily="34" charset="-122"/>
                 <a:cs typeface="Courier New" pitchFamily="34" charset="-120"/>
               </a:rPr>
-              <a:t>✓ test (0.9s)</a:t>
+              <a:t>✓ test (1.6s)</a:t>
             </a:r>
             <a:endParaRPr lang="en-US" sz="1000" dirty="0"/>
           </a:p>
@@ -6660,7 +6660,7 @@
                 <a:ea typeface="Courier New" pitchFamily="34" charset="-122"/>
                 <a:cs typeface="Courier New" pitchFamily="34" charset="-120"/>
               </a:rPr>
-              <a:t>  code-owner (c3289403791c)</a:t>
+              <a:t>  code-owner (e1c1c2823fb1)</a:t>
             </a:r>
             <a:endParaRPr lang="en-US" sz="1000" dirty="0"/>
           </a:p>
@@ -6745,7 +6745,7 @@
                 <a:ea typeface="Courier New" pitchFamily="34" charset="-122"/>
                 <a:cs typeface="Courier New" pitchFamily="34" charset="-120"/>
               </a:rPr>
-              <a:t>  "SDLC-Approval: basic-arithmetic:review:c</a:t>
+              <a:t>  "SDLC-Approval: basic-arithmetic:review:e</a:t>
             </a:r>
             <a:endParaRPr lang="en-US" sz="1000" dirty="0"/>
           </a:p>
@@ -6762,7 +6762,7 @@
                 <a:ea typeface="Courier New" pitchFamily="34" charset="-122"/>
                 <a:cs typeface="Courier New" pitchFamily="34" charset="-120"/>
               </a:rPr>
-              <a:t>  3289403791c"</a:t>
+              <a:t>  1c1c2823fb1"</a:t>
             </a:r>
             <a:endParaRPr lang="en-US" sz="1000" dirty="0"/>
           </a:p>
@@ -7443,7 +7443,7 @@
                 <a:ea typeface="Courier New" pitchFamily="34" charset="-122"/>
                 <a:cs typeface="Courier New" pitchFamily="34" charset="-120"/>
               </a:rPr>
-              <a:t>  release-manager (c3289403791c)</a:t>
+              <a:t>  release-manager (e1c1c2823fb1)</a:t>
             </a:r>
             <a:endParaRPr lang="en-US" sz="1000" dirty="0"/>
           </a:p>
@@ -7511,7 +7511,7 @@
                 <a:ea typeface="Courier New" pitchFamily="34" charset="-122"/>
                 <a:cs typeface="Courier New" pitchFamily="34" charset="-120"/>
               </a:rPr>
-              <a:t>  gate" -m "SDLC-Approval: basic-arithmetic:release:c3289403791c"</a:t>
+              <a:t>  gate" -m "SDLC-Approval: basic-arithmetic:release:e1c1c2823fb1"</a:t>
             </a:r>
             <a:endParaRPr lang="en-US" sz="1000" dirty="0"/>
           </a:p>
@@ -7794,7 +7794,7 @@
                 <a:ea typeface="Courier New" pitchFamily="34" charset="-122"/>
                 <a:cs typeface="Courier New" pitchFamily="34" charset="-120"/>
               </a:rPr>
-              <a:t>✓ basic-arithmetic/intent alice valid 092cd6b1</a:t>
+              <a:t>✓ basic-arithmetic/intent alice valid 79d5cf54</a:t>
             </a:r>
             <a:endParaRPr lang="en-US" sz="1000" dirty="0"/>
           </a:p>
@@ -7811,7 +7811,7 @@
                 <a:ea typeface="Courier New" pitchFamily="34" charset="-122"/>
                 <a:cs typeface="Courier New" pitchFamily="34" charset="-120"/>
               </a:rPr>
-              <a:t>✓ basic-arithmetic/spec alice valid 0afcb046</a:t>
+              <a:t>✓ basic-arithmetic/spec alice valid d692bf3d</a:t>
             </a:r>
             <a:endParaRPr lang="en-US" sz="1000" dirty="0"/>
           </a:p>
@@ -7828,7 +7828,7 @@
                 <a:ea typeface="Courier New" pitchFamily="34" charset="-122"/>
                 <a:cs typeface="Courier New" pitchFamily="34" charset="-120"/>
               </a:rPr>
-              <a:t>✗ basic-arithmetic/plan bob wrong-signer 0afcb046</a:t>
+              <a:t>✗ basic-arithmetic/plan bob wrong-signer d692bf3d</a:t>
             </a:r>
             <a:endParaRPr lang="en-US" sz="1000" dirty="0"/>
           </a:p>
@@ -7845,7 +7845,7 @@
                 <a:ea typeface="Courier New" pitchFamily="34" charset="-122"/>
                 <a:cs typeface="Courier New" pitchFamily="34" charset="-120"/>
               </a:rPr>
-              <a:t>✓ basic-arithmetic/review carol valid ce5b594d</a:t>
+              <a:t>✓ basic-arithmetic/review carol valid f2ddd540</a:t>
             </a:r>
             <a:endParaRPr lang="en-US" sz="1000" dirty="0"/>
           </a:p>
@@ -7862,7 +7862,7 @@
                 <a:ea typeface="Courier New" pitchFamily="34" charset="-122"/>
                 <a:cs typeface="Courier New" pitchFamily="34" charset="-120"/>
               </a:rPr>
-              <a:t>✓ basic-arithmetic/release alice valid 1c8e641e</a:t>
+              <a:t>✓ basic-arithmetic/release alice valid f7c6dd57</a:t>
             </a:r>
             <a:endParaRPr lang="en-US" sz="1000" dirty="0"/>
           </a:p>
@@ -7879,7 +7879,7 @@
                 <a:ea typeface="Courier New" pitchFamily="34" charset="-122"/>
                 <a:cs typeface="Courier New" pitchFamily="34" charset="-120"/>
               </a:rPr>
-              <a:t>✓ openspec/roles.yaml alice@calc.example valid 14ee937d</a:t>
+              <a:t>✓ openspec/roles.yaml alice@calc.example valid 083a05f5</a:t>
             </a:r>
             <a:endParaRPr lang="en-US" sz="1000" dirty="0"/>
           </a:p>
@@ -14365,7 +14365,7 @@
                 <a:ea typeface="Courier New" pitchFamily="34" charset="-122"/>
                 <a:cs typeface="Courier New" pitchFamily="34" charset="-120"/>
               </a:rPr>
-              <a:t>  archived) · sdlc 0.15.0, license:</a:t>
+              <a:t>  archived) · sdlc 0.15.1, license:</a:t>
             </a:r>
             <a:endParaRPr lang="en-US" sz="1000" dirty="0"/>
           </a:p>
@@ -14552,7 +14552,7 @@
                 <a:ea typeface="Courier New" pitchFamily="34" charset="-122"/>
                 <a:cs typeface="Courier New" pitchFamily="34" charset="-120"/>
               </a:rPr>
-              <a:t>  intent 3 · spec 1 · plan 11 · review 3;</a:t>
+              <a:t>  intent 3 · spec 1 · plan 16 · review 4;</a:t>
             </a:r>
             <a:endParaRPr lang="en-US" sz="1000" dirty="0"/>
           </a:p>
@@ -14886,7 +14886,7 @@
                 <a:ea typeface="Courier New" pitchFamily="34" charset="-122"/>
                 <a:cs typeface="Courier New" pitchFamily="34" charset="-120"/>
               </a:rPr>
-              <a:t>2026-10-11T18:46:33.939Z  gate.review.await</a:t>
+              <a:t>2026-10-11T21:22:55.364Z  gate.review.await</a:t>
             </a:r>
             <a:endParaRPr lang="en-US" sz="1000" dirty="0"/>
           </a:p>
@@ -14920,7 +14920,7 @@
                 <a:ea typeface="Courier New" pitchFamily="34" charset="-122"/>
                 <a:cs typeface="Courier New" pitchFamily="34" charset="-120"/>
               </a:rPr>
-              <a:t>  sha256:c3289403791c5c9047737a9b7d4a0e7cb9</a:t>
+              <a:t>  sha256:e1c1c2823fb1fafd37a6b1212db0069924</a:t>
             </a:r>
             <a:endParaRPr lang="en-US" sz="1000" dirty="0"/>
           </a:p>
@@ -14937,7 +14937,7 @@
                 <a:ea typeface="Courier New" pitchFamily="34" charset="-122"/>
                 <a:cs typeface="Courier New" pitchFamily="34" charset="-120"/>
               </a:rPr>
-              <a:t>  28d813abfdda02a1bf29080209a8be [sdlc</a:t>
+              <a:t>  c8ad140fe1f11f4e874178e42f2f23 [sdlc</a:t>
             </a:r>
             <a:endParaRPr lang="en-US" sz="1000" dirty="0"/>
           </a:p>
@@ -14954,7 +14954,7 @@
                 <a:ea typeface="Courier New" pitchFamily="34" charset="-122"/>
                 <a:cs typeface="Courier New" pitchFamily="34" charset="-120"/>
               </a:rPr>
-              <a:t>  0.15.0 · community]</a:t>
+              <a:t>  0.15.1 · community]</a:t>
             </a:r>
             <a:endParaRPr lang="en-US" sz="1000" dirty="0"/>
           </a:p>
@@ -14971,7 +14971,7 @@
                 <a:ea typeface="Courier New" pitchFamily="34" charset="-122"/>
                 <a:cs typeface="Courier New" pitchFamily="34" charset="-120"/>
               </a:rPr>
-              <a:t>2026-10-11T18:46:36.890Z  gate.review.appro</a:t>
+              <a:t>2026-10-11T21:22:59.088Z  gate.review.appro</a:t>
             </a:r>
             <a:endParaRPr lang="en-US" sz="1000" dirty="0"/>
           </a:p>
@@ -15022,7 +15022,7 @@
                 <a:ea typeface="Courier New" pitchFamily="34" charset="-122"/>
                 <a:cs typeface="Courier New" pitchFamily="34" charset="-120"/>
               </a:rPr>
-              <a:t>  [sdlc 0.15.0 · community]</a:t>
+              <a:t>  [sdlc 0.15.1 · community]</a:t>
             </a:r>
             <a:endParaRPr lang="en-US" sz="1000" dirty="0"/>
           </a:p>
@@ -15039,7 +15039,7 @@
                 <a:ea typeface="Courier New" pitchFamily="34" charset="-122"/>
                 <a:cs typeface="Courier New" pitchFamily="34" charset="-120"/>
               </a:rPr>
-              <a:t>2026-10-11T18:46:42.064Z  gate.release.appr</a:t>
+              <a:t>2026-10-11T21:23:07.697Z  gate.release.appr</a:t>
             </a:r>
             <a:endParaRPr lang="en-US" sz="1000" dirty="0"/>
           </a:p>
@@ -15090,7 +15090,7 @@
                 <a:ea typeface="Courier New" pitchFamily="34" charset="-122"/>
                 <a:cs typeface="Courier New" pitchFamily="34" charset="-120"/>
               </a:rPr>
-              <a:t>  release-manager [sdlc 0.15.0 · community]</a:t>
+              <a:t>  release-manager [sdlc 0.15.1 · community]</a:t>
             </a:r>
             <a:endParaRPr lang="en-US" sz="1000" dirty="0"/>
           </a:p>
@@ -16267,7 +16267,7 @@
                 <a:ea typeface="Courier New" pitchFamily="34" charset="-122"/>
                 <a:cs typeface="Courier New" pitchFamily="34" charset="-120"/>
               </a:rPr>
-              <a:t>✓ test (1.0s)</a:t>
+              <a:t>✓ test (1.5s)</a:t>
             </a:r>
             <a:endParaRPr lang="en-US" sz="1000" dirty="0"/>
           </a:p>
@@ -16284,7 +16284,7 @@
                 <a:ea typeface="Courier New" pitchFamily="34" charset="-122"/>
                 <a:cs typeface="Courier New" pitchFamily="34" charset="-120"/>
               </a:rPr>
-              <a:t>✓ ci-green (ci/pipeline_status, 0.5s)</a:t>
+              <a:t>✓ ci-green (ci/pipeline_status, 0.6s)</a:t>
             </a:r>
             <a:endParaRPr lang="en-US" sz="1000" dirty="0"/>
           </a:p>
@@ -16720,7 +16720,7 @@
                 <a:ea typeface="Courier New" pitchFamily="34" charset="-122"/>
                 <a:cs typeface="Courier New" pitchFamily="34" charset="-120"/>
               </a:rPr>
-              <a:t>      "id": "20261011T184723201Z-ci-green-b</a:t>
+              <a:t>      "id": "20261011T212355314Z-ci-green-f</a:t>
             </a:r>
             <a:endParaRPr lang="en-US" sz="1000" dirty="0"/>
           </a:p>
@@ -16737,7 +16737,7 @@
                 <a:ea typeface="Courier New" pitchFamily="34" charset="-122"/>
                 <a:cs typeface="Courier New" pitchFamily="34" charset="-120"/>
               </a:rPr>
-              <a:t>  47656",</a:t>
+              <a:t>  9d97a",</a:t>
             </a:r>
             <a:endParaRPr lang="en-US" sz="1000" dirty="0"/>
           </a:p>
@@ -16873,7 +16873,7 @@
                 <a:ea typeface="Courier New" pitchFamily="34" charset="-122"/>
                 <a:cs typeface="Courier New" pitchFamily="34" charset="-120"/>
               </a:rPr>
-              <a:t>        "ref": "171520b4e27bb6452f9a787e7c1</a:t>
+              <a:t>        "ref": "742f9726f5779dce767a51f6aa6</a:t>
             </a:r>
             <a:endParaRPr lang="en-US" sz="1000" dirty="0"/>
           </a:p>
@@ -16890,7 +16890,7 @@
                 <a:ea typeface="Courier New" pitchFamily="34" charset="-122"/>
                 <a:cs typeface="Courier New" pitchFamily="34" charset="-120"/>
               </a:rPr>
-              <a:t>  b2e6a86434c44",</a:t>
+              <a:t>  8d52fd29910aa",</a:t>
             </a:r>
             <a:endParaRPr lang="en-US" sz="1000" dirty="0"/>
           </a:p>
@@ -26952,7 +26952,7 @@
                 <a:ea typeface="Courier New" pitchFamily="34" charset="-122"/>
                 <a:cs typeface="Courier New" pitchFamily="34" charset="-120"/>
               </a:rPr>
-              <a:t>  sdlc 0.15.0, license: community</a:t>
+              <a:t>  sdlc 0.15.1, license: community</a:t>
             </a:r>
             <a:endParaRPr lang="en-US" sz="1000" dirty="0"/>
           </a:p>

--- a/docs/demo/sdlc-calculator-demo.en.pptx
+++ b/docs/demo/sdlc-calculator-demo.en.pptx
@@ -5112,7 +5112,7 @@
                 <a:ea typeface="Courier New" pitchFamily="34" charset="-122"/>
                 <a:cs typeface="Courier New" pitchFamily="34" charset="-120"/>
               </a:rPr>
-              <a:t>✓ test (1.6s)</a:t>
+              <a:t>✓ test (1.3s)</a:t>
             </a:r>
             <a:endParaRPr lang="en-US" sz="1000" dirty="0"/>
           </a:p>
@@ -6660,7 +6660,7 @@
                 <a:ea typeface="Courier New" pitchFamily="34" charset="-122"/>
                 <a:cs typeface="Courier New" pitchFamily="34" charset="-120"/>
               </a:rPr>
-              <a:t>  code-owner (e1c1c2823fb1)</a:t>
+              <a:t>  code-owner (c7066ff3fb7e)</a:t>
             </a:r>
             <a:endParaRPr lang="en-US" sz="1000" dirty="0"/>
           </a:p>
@@ -6745,7 +6745,7 @@
                 <a:ea typeface="Courier New" pitchFamily="34" charset="-122"/>
                 <a:cs typeface="Courier New" pitchFamily="34" charset="-120"/>
               </a:rPr>
-              <a:t>  "SDLC-Approval: basic-arithmetic:review:e</a:t>
+              <a:t>  "SDLC-Approval: basic-arithmetic:review:c</a:t>
             </a:r>
             <a:endParaRPr lang="en-US" sz="1000" dirty="0"/>
           </a:p>
@@ -6762,7 +6762,7 @@
                 <a:ea typeface="Courier New" pitchFamily="34" charset="-122"/>
                 <a:cs typeface="Courier New" pitchFamily="34" charset="-120"/>
               </a:rPr>
-              <a:t>  1c1c2823fb1"</a:t>
+              <a:t>  7066ff3fb7e"</a:t>
             </a:r>
             <a:endParaRPr lang="en-US" sz="1000" dirty="0"/>
           </a:p>
@@ -7443,7 +7443,7 @@
                 <a:ea typeface="Courier New" pitchFamily="34" charset="-122"/>
                 <a:cs typeface="Courier New" pitchFamily="34" charset="-120"/>
               </a:rPr>
-              <a:t>  release-manager (e1c1c2823fb1)</a:t>
+              <a:t>  release-manager (c7066ff3fb7e)</a:t>
             </a:r>
             <a:endParaRPr lang="en-US" sz="1000" dirty="0"/>
           </a:p>
@@ -7511,7 +7511,7 @@
                 <a:ea typeface="Courier New" pitchFamily="34" charset="-122"/>
                 <a:cs typeface="Courier New" pitchFamily="34" charset="-120"/>
               </a:rPr>
-              <a:t>  gate" -m "SDLC-Approval: basic-arithmetic:release:e1c1c2823fb1"</a:t>
+              <a:t>  gate" -m "SDLC-Approval: basic-arithmetic:release:c7066ff3fb7e"</a:t>
             </a:r>
             <a:endParaRPr lang="en-US" sz="1000" dirty="0"/>
           </a:p>
@@ -7794,7 +7794,7 @@
                 <a:ea typeface="Courier New" pitchFamily="34" charset="-122"/>
                 <a:cs typeface="Courier New" pitchFamily="34" charset="-120"/>
               </a:rPr>
-              <a:t>✓ basic-arithmetic/intent alice valid 79d5cf54</a:t>
+              <a:t>✓ basic-arithmetic/intent alice valid 9629c043 trailer: missing</a:t>
             </a:r>
             <a:endParaRPr lang="en-US" sz="1000" dirty="0"/>
           </a:p>
@@ -7811,7 +7811,7 @@
                 <a:ea typeface="Courier New" pitchFamily="34" charset="-122"/>
                 <a:cs typeface="Courier New" pitchFamily="34" charset="-120"/>
               </a:rPr>
-              <a:t>✓ basic-arithmetic/spec alice valid d692bf3d</a:t>
+              <a:t>✓ basic-arithmetic/spec alice valid d7a3a605 trailer: missing</a:t>
             </a:r>
             <a:endParaRPr lang="en-US" sz="1000" dirty="0"/>
           </a:p>
@@ -7828,7 +7828,7 @@
                 <a:ea typeface="Courier New" pitchFamily="34" charset="-122"/>
                 <a:cs typeface="Courier New" pitchFamily="34" charset="-120"/>
               </a:rPr>
-              <a:t>✗ basic-arithmetic/plan bob wrong-signer d692bf3d</a:t>
+              <a:t>✗ basic-arithmetic/plan bob wrong-signer d7a3a605 trailer: missing</a:t>
             </a:r>
             <a:endParaRPr lang="en-US" sz="1000" dirty="0"/>
           </a:p>
@@ -7845,7 +7845,7 @@
                 <a:ea typeface="Courier New" pitchFamily="34" charset="-122"/>
                 <a:cs typeface="Courier New" pitchFamily="34" charset="-120"/>
               </a:rPr>
-              <a:t>✓ basic-arithmetic/review carol valid f2ddd540</a:t>
+              <a:t>✓ basic-arithmetic/review carol valid 1fa2ecb2 trailer: missing</a:t>
             </a:r>
             <a:endParaRPr lang="en-US" sz="1000" dirty="0"/>
           </a:p>
@@ -7862,7 +7862,7 @@
                 <a:ea typeface="Courier New" pitchFamily="34" charset="-122"/>
                 <a:cs typeface="Courier New" pitchFamily="34" charset="-120"/>
               </a:rPr>
-              <a:t>✓ basic-arithmetic/release alice valid f7c6dd57</a:t>
+              <a:t>✓ basic-arithmetic/release alice valid 2677e607 trailer: missing</a:t>
             </a:r>
             <a:endParaRPr lang="en-US" sz="1000" dirty="0"/>
           </a:p>
@@ -7879,7 +7879,7 @@
                 <a:ea typeface="Courier New" pitchFamily="34" charset="-122"/>
                 <a:cs typeface="Courier New" pitchFamily="34" charset="-120"/>
               </a:rPr>
-              <a:t>✓ openspec/roles.yaml alice@calc.example valid 083a05f5</a:t>
+              <a:t>✓ openspec/roles.yaml alice@calc.example valid 1860bdef</a:t>
             </a:r>
             <a:endParaRPr lang="en-US" sz="1000" dirty="0"/>
           </a:p>
@@ -8511,7 +8511,7 @@
                 <a:ea typeface="Courier New" pitchFamily="34" charset="-122"/>
                 <a:cs typeface="Courier New" pitchFamily="34" charset="-120"/>
               </a:rPr>
-              <a:t>  openspec\changes\archive\2026-10-11-basic</a:t>
+              <a:t>  openspec\changes\archive\2026-10-12-basic</a:t>
             </a:r>
             <a:endParaRPr lang="en-US" sz="1000" dirty="0"/>
           </a:p>
@@ -14365,7 +14365,7 @@
                 <a:ea typeface="Courier New" pitchFamily="34" charset="-122"/>
                 <a:cs typeface="Courier New" pitchFamily="34" charset="-120"/>
               </a:rPr>
-              <a:t>  archived) · sdlc 0.15.1, license:</a:t>
+              <a:t>  archived) · sdlc 0.15.2, license:</a:t>
             </a:r>
             <a:endParaRPr lang="en-US" sz="1000" dirty="0"/>
           </a:p>
@@ -14552,7 +14552,7 @@
                 <a:ea typeface="Courier New" pitchFamily="34" charset="-122"/>
                 <a:cs typeface="Courier New" pitchFamily="34" charset="-120"/>
               </a:rPr>
-              <a:t>  intent 3 · spec 1 · plan 16 · review 4;</a:t>
+              <a:t>  intent 3 · spec 1 · plan 14 · review 4;</a:t>
             </a:r>
             <a:endParaRPr lang="en-US" sz="1000" dirty="0"/>
           </a:p>
@@ -14852,7 +14852,7 @@
                 <a:ea typeface="Courier New" pitchFamily="34" charset="-122"/>
                 <a:cs typeface="Courier New" pitchFamily="34" charset="-120"/>
               </a:rPr>
-              <a:t>(last 15 of 45 entries; --limit to see</a:t>
+              <a:t>(last 15 of 44 entries; --limit to see</a:t>
             </a:r>
             <a:endParaRPr lang="en-US" sz="1000" dirty="0"/>
           </a:p>
@@ -14886,7 +14886,7 @@
                 <a:ea typeface="Courier New" pitchFamily="34" charset="-122"/>
                 <a:cs typeface="Courier New" pitchFamily="34" charset="-120"/>
               </a:rPr>
-              <a:t>2026-10-11T21:22:55.364Z  gate.review.await</a:t>
+              <a:t>2026-10-12T07:20:46.860Z  gate.review.await</a:t>
             </a:r>
             <a:endParaRPr lang="en-US" sz="1000" dirty="0"/>
           </a:p>
@@ -14920,7 +14920,7 @@
                 <a:ea typeface="Courier New" pitchFamily="34" charset="-122"/>
                 <a:cs typeface="Courier New" pitchFamily="34" charset="-120"/>
               </a:rPr>
-              <a:t>  sha256:e1c1c2823fb1fafd37a6b1212db0069924</a:t>
+              <a:t>  sha256:c7066ff3fb7e573844f9dbfd0792c7df2e</a:t>
             </a:r>
             <a:endParaRPr lang="en-US" sz="1000" dirty="0"/>
           </a:p>
@@ -14937,7 +14937,7 @@
                 <a:ea typeface="Courier New" pitchFamily="34" charset="-122"/>
                 <a:cs typeface="Courier New" pitchFamily="34" charset="-120"/>
               </a:rPr>
-              <a:t>  c8ad140fe1f11f4e874178e42f2f23 [sdlc</a:t>
+              <a:t>  aa3f1f39b751f97ac72b6b26a7f55f [sdlc</a:t>
             </a:r>
             <a:endParaRPr lang="en-US" sz="1000" dirty="0"/>
           </a:p>
@@ -14954,7 +14954,7 @@
                 <a:ea typeface="Courier New" pitchFamily="34" charset="-122"/>
                 <a:cs typeface="Courier New" pitchFamily="34" charset="-120"/>
               </a:rPr>
-              <a:t>  0.15.1 · community]</a:t>
+              <a:t>  0.15.2 · community]</a:t>
             </a:r>
             <a:endParaRPr lang="en-US" sz="1000" dirty="0"/>
           </a:p>
@@ -14971,7 +14971,7 @@
                 <a:ea typeface="Courier New" pitchFamily="34" charset="-122"/>
                 <a:cs typeface="Courier New" pitchFamily="34" charset="-120"/>
               </a:rPr>
-              <a:t>2026-10-11T21:22:59.088Z  gate.review.appro</a:t>
+              <a:t>2026-10-12T07:20:50.566Z  gate.review.appro</a:t>
             </a:r>
             <a:endParaRPr lang="en-US" sz="1000" dirty="0"/>
           </a:p>
@@ -15022,7 +15022,7 @@
                 <a:ea typeface="Courier New" pitchFamily="34" charset="-122"/>
                 <a:cs typeface="Courier New" pitchFamily="34" charset="-120"/>
               </a:rPr>
-              <a:t>  [sdlc 0.15.1 · community]</a:t>
+              <a:t>  [sdlc 0.15.2 · community]</a:t>
             </a:r>
             <a:endParaRPr lang="en-US" sz="1000" dirty="0"/>
           </a:p>
@@ -15039,7 +15039,7 @@
                 <a:ea typeface="Courier New" pitchFamily="34" charset="-122"/>
                 <a:cs typeface="Courier New" pitchFamily="34" charset="-120"/>
               </a:rPr>
-              <a:t>2026-10-11T21:23:07.697Z  gate.release.appr</a:t>
+              <a:t>2026-10-12T07:20:57.597Z  gate.release.appr</a:t>
             </a:r>
             <a:endParaRPr lang="en-US" sz="1000" dirty="0"/>
           </a:p>
@@ -15090,7 +15090,7 @@
                 <a:ea typeface="Courier New" pitchFamily="34" charset="-122"/>
                 <a:cs typeface="Courier New" pitchFamily="34" charset="-120"/>
               </a:rPr>
-              <a:t>  release-manager [sdlc 0.15.1 · community]</a:t>
+              <a:t>  release-manager [sdlc 0.15.2 · community]</a:t>
             </a:r>
             <a:endParaRPr lang="en-US" sz="1000" dirty="0"/>
           </a:p>
@@ -16267,7 +16267,7 @@
                 <a:ea typeface="Courier New" pitchFamily="34" charset="-122"/>
                 <a:cs typeface="Courier New" pitchFamily="34" charset="-120"/>
               </a:rPr>
-              <a:t>✓ test (1.5s)</a:t>
+              <a:t>✓ test (1.2s)</a:t>
             </a:r>
             <a:endParaRPr lang="en-US" sz="1000" dirty="0"/>
           </a:p>
@@ -16720,7 +16720,7 @@
                 <a:ea typeface="Courier New" pitchFamily="34" charset="-122"/>
                 <a:cs typeface="Courier New" pitchFamily="34" charset="-120"/>
               </a:rPr>
-              <a:t>      "id": "20261011T212355314Z-ci-green-f</a:t>
+              <a:t>      "id": "20261012T072149508Z-ci-green-8</a:t>
             </a:r>
             <a:endParaRPr lang="en-US" sz="1000" dirty="0"/>
           </a:p>
@@ -16737,7 +16737,7 @@
                 <a:ea typeface="Courier New" pitchFamily="34" charset="-122"/>
                 <a:cs typeface="Courier New" pitchFamily="34" charset="-120"/>
               </a:rPr>
-              <a:t>  9d97a",</a:t>
+              <a:t>  54112",</a:t>
             </a:r>
             <a:endParaRPr lang="en-US" sz="1000" dirty="0"/>
           </a:p>
@@ -16873,7 +16873,7 @@
                 <a:ea typeface="Courier New" pitchFamily="34" charset="-122"/>
                 <a:cs typeface="Courier New" pitchFamily="34" charset="-120"/>
               </a:rPr>
-              <a:t>        "ref": "742f9726f5779dce767a51f6aa6</a:t>
+              <a:t>        "ref": "a35190ab2ca95fa1c423ec1f006</a:t>
             </a:r>
             <a:endParaRPr lang="en-US" sz="1000" dirty="0"/>
           </a:p>
@@ -16890,7 +16890,7 @@
                 <a:ea typeface="Courier New" pitchFamily="34" charset="-122"/>
                 <a:cs typeface="Courier New" pitchFamily="34" charset="-120"/>
               </a:rPr>
-              <a:t>  8d52fd29910aa",</a:t>
+              <a:t>  379c623918baf",</a:t>
             </a:r>
             <a:endParaRPr lang="en-US" sz="1000" dirty="0"/>
           </a:p>
@@ -26952,7 +26952,7 @@
                 <a:ea typeface="Courier New" pitchFamily="34" charset="-122"/>
                 <a:cs typeface="Courier New" pitchFamily="34" charset="-120"/>
               </a:rPr>
-              <a:t>  sdlc 0.15.1, license: community</a:t>
+              <a:t>  sdlc 0.15.2, license: community</a:t>
             </a:r>
             <a:endParaRPr lang="en-US" sz="1000" dirty="0"/>
           </a:p>
@@ -31439,7 +31439,7 @@
                 <a:ea typeface="Courier New" pitchFamily="34" charset="-122"/>
                 <a:cs typeface="Courier New" pitchFamily="34" charset="-120"/>
               </a:rPr>
-              <a:t>Next: person — Alice Walker (product-owner)</a:t>
+              <a:t>Next: agent — Write intent (intent.md) for</a:t>
             </a:r>
             <a:endParaRPr lang="en-US" sz="1000" dirty="0"/>
           </a:p>
@@ -31456,41 +31456,7 @@
                 <a:ea typeface="Courier New" pitchFamily="34" charset="-122"/>
                 <a:cs typeface="Courier New" pitchFamily="34" charset="-120"/>
               </a:rPr>
-              <a:t>  must review and approve the intent gate</a:t>
-            </a:r>
-            <a:endParaRPr lang="en-US" sz="1000" dirty="0"/>
-          </a:p>
-          <a:p>
-            <a:pPr indent="0" marL="0">
-              <a:buNone/>
-            </a:pPr>
-            <a:r>
-              <a:rPr lang="en-US" sz="1000" dirty="0">
-                <a:solidFill>
-                  <a:srgbClr val="E8EEF2"/>
-                </a:solidFill>
-                <a:latin typeface="Courier New" pitchFamily="34" charset="0"/>
-                <a:ea typeface="Courier New" pitchFamily="34" charset="-122"/>
-                <a:cs typeface="Courier New" pitchFamily="34" charset="-120"/>
-              </a:rPr>
-              <a:t>  (intent): sdlc approve intent --change</a:t>
-            </a:r>
-            <a:endParaRPr lang="en-US" sz="1000" dirty="0"/>
-          </a:p>
-          <a:p>
-            <a:pPr indent="0" marL="0">
-              <a:buNone/>
-            </a:pPr>
-            <a:r>
-              <a:rPr lang="en-US" sz="1000" dirty="0">
-                <a:solidFill>
-                  <a:srgbClr val="E8EEF2"/>
-                </a:solidFill>
-                <a:latin typeface="Courier New" pitchFamily="34" charset="0"/>
-                <a:ea typeface="Courier New" pitchFamily="34" charset="-122"/>
-                <a:cs typeface="Courier New" pitchFamily="34" charset="-120"/>
-              </a:rPr>
-              <a:t>  basic-arithmetic --as product-owner</a:t>
+              <a:t>  the intent gate. (/sdlc:intent)</a:t>
             </a:r>
             <a:endParaRPr lang="en-US" sz="1000" dirty="0"/>
           </a:p>
@@ -33777,7 +33743,7 @@
                 <a:ea typeface="Courier New" pitchFamily="34" charset="-122"/>
                 <a:cs typeface="Courier New" pitchFamily="34" charset="-120"/>
               </a:rPr>
-              <a:t>  (ca0a7835fb5a)</a:t>
+              <a:t>  (246351ec8bec)</a:t>
             </a:r>
             <a:endParaRPr lang="en-US" sz="1000" dirty="0"/>
           </a:p>
@@ -33913,7 +33879,7 @@
                 <a:ea typeface="Courier New" pitchFamily="34" charset="-122"/>
                 <a:cs typeface="Courier New" pitchFamily="34" charset="-120"/>
               </a:rPr>
-              <a:t>  ca0a7835fb5a"</a:t>
+              <a:t>  246351ec8bec"</a:t>
             </a:r>
             <a:endParaRPr lang="en-US" sz="1000" dirty="0"/>
           </a:p>

--- a/docs/demo/sdlc-calculator-demo.en.pptx
+++ b/docs/demo/sdlc-calculator-demo.en.pptx
@@ -5112,7 +5112,7 @@
                 <a:ea typeface="Courier New" pitchFamily="34" charset="-122"/>
                 <a:cs typeface="Courier New" pitchFamily="34" charset="-120"/>
               </a:rPr>
-              <a:t>✓ test (1.3s)</a:t>
+              <a:t>✓ test (1.1s)</a:t>
             </a:r>
             <a:endParaRPr lang="en-US" sz="1000" dirty="0"/>
           </a:p>
@@ -6660,7 +6660,7 @@
                 <a:ea typeface="Courier New" pitchFamily="34" charset="-122"/>
                 <a:cs typeface="Courier New" pitchFamily="34" charset="-120"/>
               </a:rPr>
-              <a:t>  code-owner (c7066ff3fb7e)</a:t>
+              <a:t>  code-owner (724adef414cd)</a:t>
             </a:r>
             <a:endParaRPr lang="en-US" sz="1000" dirty="0"/>
           </a:p>
@@ -6745,7 +6745,7 @@
                 <a:ea typeface="Courier New" pitchFamily="34" charset="-122"/>
                 <a:cs typeface="Courier New" pitchFamily="34" charset="-120"/>
               </a:rPr>
-              <a:t>  "SDLC-Approval: basic-arithmetic:review:c</a:t>
+              <a:t>  "SDLC-Approval: basic-arithmetic:review:7</a:t>
             </a:r>
             <a:endParaRPr lang="en-US" sz="1000" dirty="0"/>
           </a:p>
@@ -6762,7 +6762,7 @@
                 <a:ea typeface="Courier New" pitchFamily="34" charset="-122"/>
                 <a:cs typeface="Courier New" pitchFamily="34" charset="-120"/>
               </a:rPr>
-              <a:t>  7066ff3fb7e"</a:t>
+              <a:t>  24adef414cd"</a:t>
             </a:r>
             <a:endParaRPr lang="en-US" sz="1000" dirty="0"/>
           </a:p>
@@ -7443,7 +7443,7 @@
                 <a:ea typeface="Courier New" pitchFamily="34" charset="-122"/>
                 <a:cs typeface="Courier New" pitchFamily="34" charset="-120"/>
               </a:rPr>
-              <a:t>  release-manager (c7066ff3fb7e)</a:t>
+              <a:t>  release-manager (724adef414cd)</a:t>
             </a:r>
             <a:endParaRPr lang="en-US" sz="1000" dirty="0"/>
           </a:p>
@@ -7511,7 +7511,7 @@
                 <a:ea typeface="Courier New" pitchFamily="34" charset="-122"/>
                 <a:cs typeface="Courier New" pitchFamily="34" charset="-120"/>
               </a:rPr>
-              <a:t>  gate" -m "SDLC-Approval: basic-arithmetic:release:c7066ff3fb7e"</a:t>
+              <a:t>  gate" -m "SDLC-Approval: basic-arithmetic:release:724adef414cd"</a:t>
             </a:r>
             <a:endParaRPr lang="en-US" sz="1000" dirty="0"/>
           </a:p>
@@ -7794,7 +7794,7 @@
                 <a:ea typeface="Courier New" pitchFamily="34" charset="-122"/>
                 <a:cs typeface="Courier New" pitchFamily="34" charset="-120"/>
               </a:rPr>
-              <a:t>✓ basic-arithmetic/intent alice valid 9629c043 trailer: missing</a:t>
+              <a:t>✓ basic-arithmetic/intent alice valid f67a90de trailer: missing</a:t>
             </a:r>
             <a:endParaRPr lang="en-US" sz="1000" dirty="0"/>
           </a:p>
@@ -7811,7 +7811,7 @@
                 <a:ea typeface="Courier New" pitchFamily="34" charset="-122"/>
                 <a:cs typeface="Courier New" pitchFamily="34" charset="-120"/>
               </a:rPr>
-              <a:t>✓ basic-arithmetic/spec alice valid d7a3a605 trailer: missing</a:t>
+              <a:t>✓ basic-arithmetic/spec alice valid 49d44168 trailer: missing</a:t>
             </a:r>
             <a:endParaRPr lang="en-US" sz="1000" dirty="0"/>
           </a:p>
@@ -7828,7 +7828,7 @@
                 <a:ea typeface="Courier New" pitchFamily="34" charset="-122"/>
                 <a:cs typeface="Courier New" pitchFamily="34" charset="-120"/>
               </a:rPr>
-              <a:t>✗ basic-arithmetic/plan bob wrong-signer d7a3a605 trailer: missing</a:t>
+              <a:t>✗ basic-arithmetic/plan bob wrong-signer 49d44168 trailer: missing</a:t>
             </a:r>
             <a:endParaRPr lang="en-US" sz="1000" dirty="0"/>
           </a:p>
@@ -7845,7 +7845,7 @@
                 <a:ea typeface="Courier New" pitchFamily="34" charset="-122"/>
                 <a:cs typeface="Courier New" pitchFamily="34" charset="-120"/>
               </a:rPr>
-              <a:t>✓ basic-arithmetic/review carol valid 1fa2ecb2 trailer: missing</a:t>
+              <a:t>✓ basic-arithmetic/review carol valid 7dd9d0f2 trailer: missing</a:t>
             </a:r>
             <a:endParaRPr lang="en-US" sz="1000" dirty="0"/>
           </a:p>
@@ -7862,7 +7862,7 @@
                 <a:ea typeface="Courier New" pitchFamily="34" charset="-122"/>
                 <a:cs typeface="Courier New" pitchFamily="34" charset="-120"/>
               </a:rPr>
-              <a:t>✓ basic-arithmetic/release alice valid 2677e607 trailer: missing</a:t>
+              <a:t>✓ basic-arithmetic/release alice valid ebca62f0 trailer: missing</a:t>
             </a:r>
             <a:endParaRPr lang="en-US" sz="1000" dirty="0"/>
           </a:p>
@@ -7879,7 +7879,7 @@
                 <a:ea typeface="Courier New" pitchFamily="34" charset="-122"/>
                 <a:cs typeface="Courier New" pitchFamily="34" charset="-120"/>
               </a:rPr>
-              <a:t>✓ openspec/roles.yaml alice@calc.example valid 1860bdef</a:t>
+              <a:t>✓ openspec/roles.yaml alice@calc.example valid c1afb48f</a:t>
             </a:r>
             <a:endParaRPr lang="en-US" sz="1000" dirty="0"/>
           </a:p>
@@ -14365,7 +14365,7 @@
                 <a:ea typeface="Courier New" pitchFamily="34" charset="-122"/>
                 <a:cs typeface="Courier New" pitchFamily="34" charset="-120"/>
               </a:rPr>
-              <a:t>  archived) · sdlc 0.15.2, license:</a:t>
+              <a:t>  archived) · sdlc 0.15.3, license:</a:t>
             </a:r>
             <a:endParaRPr lang="en-US" sz="1000" dirty="0"/>
           </a:p>
@@ -14552,7 +14552,7 @@
                 <a:ea typeface="Courier New" pitchFamily="34" charset="-122"/>
                 <a:cs typeface="Courier New" pitchFamily="34" charset="-120"/>
               </a:rPr>
-              <a:t>  intent 3 · spec 1 · plan 14 · review 4;</a:t>
+              <a:t>  intent 3 · spec 1 · plan 14 · review 3;</a:t>
             </a:r>
             <a:endParaRPr lang="en-US" sz="1000" dirty="0"/>
           </a:p>
@@ -14886,7 +14886,7 @@
                 <a:ea typeface="Courier New" pitchFamily="34" charset="-122"/>
                 <a:cs typeface="Courier New" pitchFamily="34" charset="-120"/>
               </a:rPr>
-              <a:t>2026-10-12T07:20:46.860Z  gate.review.await</a:t>
+              <a:t>2026-10-12T09:04:23.328Z  gate.review.await</a:t>
             </a:r>
             <a:endParaRPr lang="en-US" sz="1000" dirty="0"/>
           </a:p>
@@ -14920,7 +14920,7 @@
                 <a:ea typeface="Courier New" pitchFamily="34" charset="-122"/>
                 <a:cs typeface="Courier New" pitchFamily="34" charset="-120"/>
               </a:rPr>
-              <a:t>  sha256:c7066ff3fb7e573844f9dbfd0792c7df2e</a:t>
+              <a:t>  sha256:724adef414cda8539deaf284827111a968</a:t>
             </a:r>
             <a:endParaRPr lang="en-US" sz="1000" dirty="0"/>
           </a:p>
@@ -14937,7 +14937,7 @@
                 <a:ea typeface="Courier New" pitchFamily="34" charset="-122"/>
                 <a:cs typeface="Courier New" pitchFamily="34" charset="-120"/>
               </a:rPr>
-              <a:t>  aa3f1f39b751f97ac72b6b26a7f55f [sdlc</a:t>
+              <a:t>  0234750270208b185d3da916bdd232 [sdlc</a:t>
             </a:r>
             <a:endParaRPr lang="en-US" sz="1000" dirty="0"/>
           </a:p>
@@ -14954,7 +14954,7 @@
                 <a:ea typeface="Courier New" pitchFamily="34" charset="-122"/>
                 <a:cs typeface="Courier New" pitchFamily="34" charset="-120"/>
               </a:rPr>
-              <a:t>  0.15.2 · community]</a:t>
+              <a:t>  0.15.3 · community]</a:t>
             </a:r>
             <a:endParaRPr lang="en-US" sz="1000" dirty="0"/>
           </a:p>
@@ -14971,7 +14971,7 @@
                 <a:ea typeface="Courier New" pitchFamily="34" charset="-122"/>
                 <a:cs typeface="Courier New" pitchFamily="34" charset="-120"/>
               </a:rPr>
-              <a:t>2026-10-12T07:20:50.566Z  gate.review.appro</a:t>
+              <a:t>2026-10-12T09:04:26.395Z  gate.review.appro</a:t>
             </a:r>
             <a:endParaRPr lang="en-US" sz="1000" dirty="0"/>
           </a:p>
@@ -15022,7 +15022,7 @@
                 <a:ea typeface="Courier New" pitchFamily="34" charset="-122"/>
                 <a:cs typeface="Courier New" pitchFamily="34" charset="-120"/>
               </a:rPr>
-              <a:t>  [sdlc 0.15.2 · community]</a:t>
+              <a:t>  [sdlc 0.15.3 · community]</a:t>
             </a:r>
             <a:endParaRPr lang="en-US" sz="1000" dirty="0"/>
           </a:p>
@@ -15039,7 +15039,7 @@
                 <a:ea typeface="Courier New" pitchFamily="34" charset="-122"/>
                 <a:cs typeface="Courier New" pitchFamily="34" charset="-120"/>
               </a:rPr>
-              <a:t>2026-10-12T07:20:57.597Z  gate.release.appr</a:t>
+              <a:t>2026-10-12T09:04:32.636Z  gate.release.appr</a:t>
             </a:r>
             <a:endParaRPr lang="en-US" sz="1000" dirty="0"/>
           </a:p>
@@ -15090,7 +15090,7 @@
                 <a:ea typeface="Courier New" pitchFamily="34" charset="-122"/>
                 <a:cs typeface="Courier New" pitchFamily="34" charset="-120"/>
               </a:rPr>
-              <a:t>  release-manager [sdlc 0.15.2 · community]</a:t>
+              <a:t>  release-manager [sdlc 0.15.3 · community]</a:t>
             </a:r>
             <a:endParaRPr lang="en-US" sz="1000" dirty="0"/>
           </a:p>
@@ -16267,7 +16267,7 @@
                 <a:ea typeface="Courier New" pitchFamily="34" charset="-122"/>
                 <a:cs typeface="Courier New" pitchFamily="34" charset="-120"/>
               </a:rPr>
-              <a:t>✓ test (1.2s)</a:t>
+              <a:t>✓ test (1.0s)</a:t>
             </a:r>
             <a:endParaRPr lang="en-US" sz="1000" dirty="0"/>
           </a:p>
@@ -16284,7 +16284,7 @@
                 <a:ea typeface="Courier New" pitchFamily="34" charset="-122"/>
                 <a:cs typeface="Courier New" pitchFamily="34" charset="-120"/>
               </a:rPr>
-              <a:t>✓ ci-green (ci/pipeline_status, 0.6s)</a:t>
+              <a:t>✓ ci-green (ci/pipeline_status, 0.5s)</a:t>
             </a:r>
             <a:endParaRPr lang="en-US" sz="1000" dirty="0"/>
           </a:p>
@@ -16720,7 +16720,7 @@
                 <a:ea typeface="Courier New" pitchFamily="34" charset="-122"/>
                 <a:cs typeface="Courier New" pitchFamily="34" charset="-120"/>
               </a:rPr>
-              <a:t>      "id": "20261012T072149508Z-ci-green-8</a:t>
+              <a:t>      "id": "20261012T090522387Z-ci-green-4</a:t>
             </a:r>
             <a:endParaRPr lang="en-US" sz="1000" dirty="0"/>
           </a:p>
@@ -16737,7 +16737,7 @@
                 <a:ea typeface="Courier New" pitchFamily="34" charset="-122"/>
                 <a:cs typeface="Courier New" pitchFamily="34" charset="-120"/>
               </a:rPr>
-              <a:t>  54112",</a:t>
+              <a:t>  6b9d2",</a:t>
             </a:r>
             <a:endParaRPr lang="en-US" sz="1000" dirty="0"/>
           </a:p>
@@ -16873,7 +16873,7 @@
                 <a:ea typeface="Courier New" pitchFamily="34" charset="-122"/>
                 <a:cs typeface="Courier New" pitchFamily="34" charset="-120"/>
               </a:rPr>
-              <a:t>        "ref": "a35190ab2ca95fa1c423ec1f006</a:t>
+              <a:t>        "ref": "69515169f3b043c5e81f622dd31</a:t>
             </a:r>
             <a:endParaRPr lang="en-US" sz="1000" dirty="0"/>
           </a:p>
@@ -16890,7 +16890,7 @@
                 <a:ea typeface="Courier New" pitchFamily="34" charset="-122"/>
                 <a:cs typeface="Courier New" pitchFamily="34" charset="-120"/>
               </a:rPr>
-              <a:t>  379c623918baf",</a:t>
+              <a:t>  6042997801b5c",</a:t>
             </a:r>
             <a:endParaRPr lang="en-US" sz="1000" dirty="0"/>
           </a:p>
@@ -26952,7 +26952,7 @@
                 <a:ea typeface="Courier New" pitchFamily="34" charset="-122"/>
                 <a:cs typeface="Courier New" pitchFamily="34" charset="-120"/>
               </a:rPr>
-              <a:t>  sdlc 0.15.2, license: community</a:t>
+              <a:t>  sdlc 0.15.3, license: community</a:t>
             </a:r>
             <a:endParaRPr lang="en-US" sz="1000" dirty="0"/>
           </a:p>

--- a/docs/demo/sdlc-calculator-demo.en.pptx
+++ b/docs/demo/sdlc-calculator-demo.en.pptx
@@ -5112,7 +5112,7 @@
                 <a:ea typeface="Courier New" pitchFamily="34" charset="-122"/>
                 <a:cs typeface="Courier New" pitchFamily="34" charset="-120"/>
               </a:rPr>
-              <a:t>✓ test (1.1s)</a:t>
+              <a:t>✓ test (1.0s)</a:t>
             </a:r>
             <a:endParaRPr lang="en-US" sz="1000" dirty="0"/>
           </a:p>
@@ -6660,7 +6660,7 @@
                 <a:ea typeface="Courier New" pitchFamily="34" charset="-122"/>
                 <a:cs typeface="Courier New" pitchFamily="34" charset="-120"/>
               </a:rPr>
-              <a:t>  code-owner (724adef414cd)</a:t>
+              <a:t>  code-owner (a926d27ef760)</a:t>
             </a:r>
             <a:endParaRPr lang="en-US" sz="1000" dirty="0"/>
           </a:p>
@@ -6745,7 +6745,7 @@
                 <a:ea typeface="Courier New" pitchFamily="34" charset="-122"/>
                 <a:cs typeface="Courier New" pitchFamily="34" charset="-120"/>
               </a:rPr>
-              <a:t>  "SDLC-Approval: basic-arithmetic:review:7</a:t>
+              <a:t>  "SDLC-Approval: basic-arithmetic:review:a</a:t>
             </a:r>
             <a:endParaRPr lang="en-US" sz="1000" dirty="0"/>
           </a:p>
@@ -6762,7 +6762,7 @@
                 <a:ea typeface="Courier New" pitchFamily="34" charset="-122"/>
                 <a:cs typeface="Courier New" pitchFamily="34" charset="-120"/>
               </a:rPr>
-              <a:t>  24adef414cd"</a:t>
+              <a:t>  926d27ef760"</a:t>
             </a:r>
             <a:endParaRPr lang="en-US" sz="1000" dirty="0"/>
           </a:p>
@@ -7443,7 +7443,7 @@
                 <a:ea typeface="Courier New" pitchFamily="34" charset="-122"/>
                 <a:cs typeface="Courier New" pitchFamily="34" charset="-120"/>
               </a:rPr>
-              <a:t>  release-manager (724adef414cd)</a:t>
+              <a:t>  release-manager (a926d27ef760)</a:t>
             </a:r>
             <a:endParaRPr lang="en-US" sz="1000" dirty="0"/>
           </a:p>
@@ -7511,7 +7511,7 @@
                 <a:ea typeface="Courier New" pitchFamily="34" charset="-122"/>
                 <a:cs typeface="Courier New" pitchFamily="34" charset="-120"/>
               </a:rPr>
-              <a:t>  gate" -m "SDLC-Approval: basic-arithmetic:release:724adef414cd"</a:t>
+              <a:t>  gate" -m "SDLC-Approval: basic-arithmetic:release:a926d27ef760"</a:t>
             </a:r>
             <a:endParaRPr lang="en-US" sz="1000" dirty="0"/>
           </a:p>
@@ -7794,7 +7794,7 @@
                 <a:ea typeface="Courier New" pitchFamily="34" charset="-122"/>
                 <a:cs typeface="Courier New" pitchFamily="34" charset="-120"/>
               </a:rPr>
-              <a:t>✓ basic-arithmetic/intent alice valid f67a90de trailer: missing</a:t>
+              <a:t>✓ basic-arithmetic/intent alice valid a5357fd4 trailer: missing</a:t>
             </a:r>
             <a:endParaRPr lang="en-US" sz="1000" dirty="0"/>
           </a:p>
@@ -7811,7 +7811,7 @@
                 <a:ea typeface="Courier New" pitchFamily="34" charset="-122"/>
                 <a:cs typeface="Courier New" pitchFamily="34" charset="-120"/>
               </a:rPr>
-              <a:t>✓ basic-arithmetic/spec alice valid 49d44168 trailer: missing</a:t>
+              <a:t>✓ basic-arithmetic/spec alice valid 5b5d78ae trailer: missing</a:t>
             </a:r>
             <a:endParaRPr lang="en-US" sz="1000" dirty="0"/>
           </a:p>
@@ -7828,7 +7828,7 @@
                 <a:ea typeface="Courier New" pitchFamily="34" charset="-122"/>
                 <a:cs typeface="Courier New" pitchFamily="34" charset="-120"/>
               </a:rPr>
-              <a:t>✗ basic-arithmetic/plan bob wrong-signer 49d44168 trailer: missing</a:t>
+              <a:t>✗ basic-arithmetic/plan bob wrong-signer 5b5d78ae trailer: missing</a:t>
             </a:r>
             <a:endParaRPr lang="en-US" sz="1000" dirty="0"/>
           </a:p>
@@ -7845,7 +7845,7 @@
                 <a:ea typeface="Courier New" pitchFamily="34" charset="-122"/>
                 <a:cs typeface="Courier New" pitchFamily="34" charset="-120"/>
               </a:rPr>
-              <a:t>✓ basic-arithmetic/review carol valid 7dd9d0f2 trailer: missing</a:t>
+              <a:t>✓ basic-arithmetic/review carol valid 803956c6 trailer: missing</a:t>
             </a:r>
             <a:endParaRPr lang="en-US" sz="1000" dirty="0"/>
           </a:p>
@@ -7862,7 +7862,7 @@
                 <a:ea typeface="Courier New" pitchFamily="34" charset="-122"/>
                 <a:cs typeface="Courier New" pitchFamily="34" charset="-120"/>
               </a:rPr>
-              <a:t>✓ basic-arithmetic/release alice valid ebca62f0 trailer: missing</a:t>
+              <a:t>✓ basic-arithmetic/release alice valid e6660de3 trailer: missing</a:t>
             </a:r>
             <a:endParaRPr lang="en-US" sz="1000" dirty="0"/>
           </a:p>
@@ -7879,7 +7879,7 @@
                 <a:ea typeface="Courier New" pitchFamily="34" charset="-122"/>
                 <a:cs typeface="Courier New" pitchFamily="34" charset="-120"/>
               </a:rPr>
-              <a:t>✓ openspec/roles.yaml alice@calc.example valid c1afb48f</a:t>
+              <a:t>✓ openspec/roles.yaml alice@calc.example valid e84d864b</a:t>
             </a:r>
             <a:endParaRPr lang="en-US" sz="1000" dirty="0"/>
           </a:p>
@@ -14365,7 +14365,7 @@
                 <a:ea typeface="Courier New" pitchFamily="34" charset="-122"/>
                 <a:cs typeface="Courier New" pitchFamily="34" charset="-120"/>
               </a:rPr>
-              <a:t>  archived) · sdlc 0.15.3, license:</a:t>
+              <a:t>  archived) · sdlc 0.15.4, license:</a:t>
             </a:r>
             <a:endParaRPr lang="en-US" sz="1000" dirty="0"/>
           </a:p>
@@ -14552,7 +14552,7 @@
                 <a:ea typeface="Courier New" pitchFamily="34" charset="-122"/>
                 <a:cs typeface="Courier New" pitchFamily="34" charset="-120"/>
               </a:rPr>
-              <a:t>  intent 3 · spec 1 · plan 14 · review 3;</a:t>
+              <a:t>  intent 3 · spec 1 · plan 13 · review 3;</a:t>
             </a:r>
             <a:endParaRPr lang="en-US" sz="1000" dirty="0"/>
           </a:p>
@@ -14886,7 +14886,7 @@
                 <a:ea typeface="Courier New" pitchFamily="34" charset="-122"/>
                 <a:cs typeface="Courier New" pitchFamily="34" charset="-120"/>
               </a:rPr>
-              <a:t>2026-10-12T09:04:23.328Z  gate.review.await</a:t>
+              <a:t>2026-10-12T10:37:49.467Z  gate.review.await</a:t>
             </a:r>
             <a:endParaRPr lang="en-US" sz="1000" dirty="0"/>
           </a:p>
@@ -14920,7 +14920,7 @@
                 <a:ea typeface="Courier New" pitchFamily="34" charset="-122"/>
                 <a:cs typeface="Courier New" pitchFamily="34" charset="-120"/>
               </a:rPr>
-              <a:t>  sha256:724adef414cda8539deaf284827111a968</a:t>
+              <a:t>  sha256:a926d27ef7602348df7c9ff8d297a9a9b2</a:t>
             </a:r>
             <a:endParaRPr lang="en-US" sz="1000" dirty="0"/>
           </a:p>
@@ -14937,7 +14937,7 @@
                 <a:ea typeface="Courier New" pitchFamily="34" charset="-122"/>
                 <a:cs typeface="Courier New" pitchFamily="34" charset="-120"/>
               </a:rPr>
-              <a:t>  0234750270208b185d3da916bdd232 [sdlc</a:t>
+              <a:t>  04d040d0163779271132d900e1977d [sdlc</a:t>
             </a:r>
             <a:endParaRPr lang="en-US" sz="1000" dirty="0"/>
           </a:p>
@@ -14954,7 +14954,7 @@
                 <a:ea typeface="Courier New" pitchFamily="34" charset="-122"/>
                 <a:cs typeface="Courier New" pitchFamily="34" charset="-120"/>
               </a:rPr>
-              <a:t>  0.15.3 · community]</a:t>
+              <a:t>  0.15.4 · community]</a:t>
             </a:r>
             <a:endParaRPr lang="en-US" sz="1000" dirty="0"/>
           </a:p>
@@ -14971,7 +14971,7 @@
                 <a:ea typeface="Courier New" pitchFamily="34" charset="-122"/>
                 <a:cs typeface="Courier New" pitchFamily="34" charset="-120"/>
               </a:rPr>
-              <a:t>2026-10-12T09:04:26.395Z  gate.review.appro</a:t>
+              <a:t>2026-10-12T10:37:52.517Z  gate.review.appro</a:t>
             </a:r>
             <a:endParaRPr lang="en-US" sz="1000" dirty="0"/>
           </a:p>
@@ -15022,7 +15022,7 @@
                 <a:ea typeface="Courier New" pitchFamily="34" charset="-122"/>
                 <a:cs typeface="Courier New" pitchFamily="34" charset="-120"/>
               </a:rPr>
-              <a:t>  [sdlc 0.15.3 · community]</a:t>
+              <a:t>  [sdlc 0.15.4 · community]</a:t>
             </a:r>
             <a:endParaRPr lang="en-US" sz="1000" dirty="0"/>
           </a:p>
@@ -15039,7 +15039,7 @@
                 <a:ea typeface="Courier New" pitchFamily="34" charset="-122"/>
                 <a:cs typeface="Courier New" pitchFamily="34" charset="-120"/>
               </a:rPr>
-              <a:t>2026-10-12T09:04:32.636Z  gate.release.appr</a:t>
+              <a:t>2026-10-12T10:37:58.642Z  gate.release.appr</a:t>
             </a:r>
             <a:endParaRPr lang="en-US" sz="1000" dirty="0"/>
           </a:p>
@@ -15090,7 +15090,7 @@
                 <a:ea typeface="Courier New" pitchFamily="34" charset="-122"/>
                 <a:cs typeface="Courier New" pitchFamily="34" charset="-120"/>
               </a:rPr>
-              <a:t>  release-manager [sdlc 0.15.3 · community]</a:t>
+              <a:t>  release-manager [sdlc 0.15.4 · community]</a:t>
             </a:r>
             <a:endParaRPr lang="en-US" sz="1000" dirty="0"/>
           </a:p>
@@ -16720,7 +16720,7 @@
                 <a:ea typeface="Courier New" pitchFamily="34" charset="-122"/>
                 <a:cs typeface="Courier New" pitchFamily="34" charset="-120"/>
               </a:rPr>
-              <a:t>      "id": "20261012T090522387Z-ci-green-4</a:t>
+              <a:t>      "id": "20261012T103845856Z-ci-green-c</a:t>
             </a:r>
             <a:endParaRPr lang="en-US" sz="1000" dirty="0"/>
           </a:p>
@@ -16737,7 +16737,7 @@
                 <a:ea typeface="Courier New" pitchFamily="34" charset="-122"/>
                 <a:cs typeface="Courier New" pitchFamily="34" charset="-120"/>
               </a:rPr>
-              <a:t>  6b9d2",</a:t>
+              <a:t>  5ba35",</a:t>
             </a:r>
             <a:endParaRPr lang="en-US" sz="1000" dirty="0"/>
           </a:p>
@@ -16873,7 +16873,7 @@
                 <a:ea typeface="Courier New" pitchFamily="34" charset="-122"/>
                 <a:cs typeface="Courier New" pitchFamily="34" charset="-120"/>
               </a:rPr>
-              <a:t>        "ref": "69515169f3b043c5e81f622dd31</a:t>
+              <a:t>        "ref": "f070fd3e991dbee7473eb016ca0</a:t>
             </a:r>
             <a:endParaRPr lang="en-US" sz="1000" dirty="0"/>
           </a:p>
@@ -16890,7 +16890,7 @@
                 <a:ea typeface="Courier New" pitchFamily="34" charset="-122"/>
                 <a:cs typeface="Courier New" pitchFamily="34" charset="-120"/>
               </a:rPr>
-              <a:t>  6042997801b5c",</a:t>
+              <a:t>  a8bebfdb56c1c",</a:t>
             </a:r>
             <a:endParaRPr lang="en-US" sz="1000" dirty="0"/>
           </a:p>
@@ -26952,7 +26952,7 @@
                 <a:ea typeface="Courier New" pitchFamily="34" charset="-122"/>
                 <a:cs typeface="Courier New" pitchFamily="34" charset="-120"/>
               </a:rPr>
-              <a:t>  sdlc 0.15.3, license: community</a:t>
+              <a:t>  sdlc 0.15.4, license: community</a:t>
             </a:r>
             <a:endParaRPr lang="en-US" sz="1000" dirty="0"/>
           </a:p>

--- a/docs/demo/sdlc-calculator-demo.en.pptx
+++ b/docs/demo/sdlc-calculator-demo.en.pptx
@@ -6660,7 +6660,7 @@
                 <a:ea typeface="Courier New" pitchFamily="34" charset="-122"/>
                 <a:cs typeface="Courier New" pitchFamily="34" charset="-120"/>
               </a:rPr>
-              <a:t>  code-owner (a926d27ef760)</a:t>
+              <a:t>  code-owner (2d4e1179f87b)</a:t>
             </a:r>
             <a:endParaRPr lang="en-US" sz="1000" dirty="0"/>
           </a:p>
@@ -6745,7 +6745,7 @@
                 <a:ea typeface="Courier New" pitchFamily="34" charset="-122"/>
                 <a:cs typeface="Courier New" pitchFamily="34" charset="-120"/>
               </a:rPr>
-              <a:t>  "SDLC-Approval: basic-arithmetic:review:a</a:t>
+              <a:t>  "SDLC-Approval: basic-arithmetic:review:2</a:t>
             </a:r>
             <a:endParaRPr lang="en-US" sz="1000" dirty="0"/>
           </a:p>
@@ -6762,7 +6762,7 @@
                 <a:ea typeface="Courier New" pitchFamily="34" charset="-122"/>
                 <a:cs typeface="Courier New" pitchFamily="34" charset="-120"/>
               </a:rPr>
-              <a:t>  926d27ef760"</a:t>
+              <a:t>  d4e1179f87b"</a:t>
             </a:r>
             <a:endParaRPr lang="en-US" sz="1000" dirty="0"/>
           </a:p>
@@ -7443,7 +7443,7 @@
                 <a:ea typeface="Courier New" pitchFamily="34" charset="-122"/>
                 <a:cs typeface="Courier New" pitchFamily="34" charset="-120"/>
               </a:rPr>
-              <a:t>  release-manager (a926d27ef760)</a:t>
+              <a:t>  release-manager (2d4e1179f87b)</a:t>
             </a:r>
             <a:endParaRPr lang="en-US" sz="1000" dirty="0"/>
           </a:p>
@@ -7511,7 +7511,7 @@
                 <a:ea typeface="Courier New" pitchFamily="34" charset="-122"/>
                 <a:cs typeface="Courier New" pitchFamily="34" charset="-120"/>
               </a:rPr>
-              <a:t>  gate" -m "SDLC-Approval: basic-arithmetic:release:a926d27ef760"</a:t>
+              <a:t>  gate" -m "SDLC-Approval: basic-arithmetic:release:2d4e1179f87b"</a:t>
             </a:r>
             <a:endParaRPr lang="en-US" sz="1000" dirty="0"/>
           </a:p>
@@ -7794,7 +7794,7 @@
                 <a:ea typeface="Courier New" pitchFamily="34" charset="-122"/>
                 <a:cs typeface="Courier New" pitchFamily="34" charset="-120"/>
               </a:rPr>
-              <a:t>✓ basic-arithmetic/intent alice valid a5357fd4 trailer: missing</a:t>
+              <a:t>✓ basic-arithmetic/intent alice valid 2fc6af5f trailer: missing</a:t>
             </a:r>
             <a:endParaRPr lang="en-US" sz="1000" dirty="0"/>
           </a:p>
@@ -7811,7 +7811,7 @@
                 <a:ea typeface="Courier New" pitchFamily="34" charset="-122"/>
                 <a:cs typeface="Courier New" pitchFamily="34" charset="-120"/>
               </a:rPr>
-              <a:t>✓ basic-arithmetic/spec alice valid 5b5d78ae trailer: missing</a:t>
+              <a:t>✓ basic-arithmetic/spec alice valid 20ad1c9c trailer: missing</a:t>
             </a:r>
             <a:endParaRPr lang="en-US" sz="1000" dirty="0"/>
           </a:p>
@@ -7828,7 +7828,7 @@
                 <a:ea typeface="Courier New" pitchFamily="34" charset="-122"/>
                 <a:cs typeface="Courier New" pitchFamily="34" charset="-120"/>
               </a:rPr>
-              <a:t>✗ basic-arithmetic/plan bob wrong-signer 5b5d78ae trailer: missing</a:t>
+              <a:t>✗ basic-arithmetic/plan bob wrong-signer 20ad1c9c trailer: missing</a:t>
             </a:r>
             <a:endParaRPr lang="en-US" sz="1000" dirty="0"/>
           </a:p>
@@ -7845,7 +7845,7 @@
                 <a:ea typeface="Courier New" pitchFamily="34" charset="-122"/>
                 <a:cs typeface="Courier New" pitchFamily="34" charset="-120"/>
               </a:rPr>
-              <a:t>✓ basic-arithmetic/review carol valid 803956c6 trailer: missing</a:t>
+              <a:t>✓ basic-arithmetic/review carol valid dd6163e1 trailer: missing</a:t>
             </a:r>
             <a:endParaRPr lang="en-US" sz="1000" dirty="0"/>
           </a:p>
@@ -7862,7 +7862,7 @@
                 <a:ea typeface="Courier New" pitchFamily="34" charset="-122"/>
                 <a:cs typeface="Courier New" pitchFamily="34" charset="-120"/>
               </a:rPr>
-              <a:t>✓ basic-arithmetic/release alice valid e6660de3 trailer: missing</a:t>
+              <a:t>✓ basic-arithmetic/release alice valid 6c4ca7e5 trailer: missing</a:t>
             </a:r>
             <a:endParaRPr lang="en-US" sz="1000" dirty="0"/>
           </a:p>
@@ -7879,7 +7879,7 @@
                 <a:ea typeface="Courier New" pitchFamily="34" charset="-122"/>
                 <a:cs typeface="Courier New" pitchFamily="34" charset="-120"/>
               </a:rPr>
-              <a:t>✓ openspec/roles.yaml alice@calc.example valid e84d864b</a:t>
+              <a:t>✓ openspec/roles.yaml alice@calc.example valid 3af4e9c1</a:t>
             </a:r>
             <a:endParaRPr lang="en-US" sz="1000" dirty="0"/>
           </a:p>
@@ -14365,7 +14365,7 @@
                 <a:ea typeface="Courier New" pitchFamily="34" charset="-122"/>
                 <a:cs typeface="Courier New" pitchFamily="34" charset="-120"/>
               </a:rPr>
-              <a:t>  archived) · sdlc 0.15.4, license:</a:t>
+              <a:t>  archived) · sdlc 0.16.0, license:</a:t>
             </a:r>
             <a:endParaRPr lang="en-US" sz="1000" dirty="0"/>
           </a:p>
@@ -14886,7 +14886,7 @@
                 <a:ea typeface="Courier New" pitchFamily="34" charset="-122"/>
                 <a:cs typeface="Courier New" pitchFamily="34" charset="-120"/>
               </a:rPr>
-              <a:t>2026-10-12T10:37:49.467Z  gate.review.await</a:t>
+              <a:t>2026-10-12T11:44:46.776Z  gate.review.await</a:t>
             </a:r>
             <a:endParaRPr lang="en-US" sz="1000" dirty="0"/>
           </a:p>
@@ -14920,7 +14920,7 @@
                 <a:ea typeface="Courier New" pitchFamily="34" charset="-122"/>
                 <a:cs typeface="Courier New" pitchFamily="34" charset="-120"/>
               </a:rPr>
-              <a:t>  sha256:a926d27ef7602348df7c9ff8d297a9a9b2</a:t>
+              <a:t>  sha256:2d4e1179f87b8d8cf46235dfb3677acf9c</a:t>
             </a:r>
             <a:endParaRPr lang="en-US" sz="1000" dirty="0"/>
           </a:p>
@@ -14937,7 +14937,7 @@
                 <a:ea typeface="Courier New" pitchFamily="34" charset="-122"/>
                 <a:cs typeface="Courier New" pitchFamily="34" charset="-120"/>
               </a:rPr>
-              <a:t>  04d040d0163779271132d900e1977d [sdlc</a:t>
+              <a:t>  126eaf2527028066f0df56a62e87ad [sdlc</a:t>
             </a:r>
             <a:endParaRPr lang="en-US" sz="1000" dirty="0"/>
           </a:p>
@@ -14954,7 +14954,7 @@
                 <a:ea typeface="Courier New" pitchFamily="34" charset="-122"/>
                 <a:cs typeface="Courier New" pitchFamily="34" charset="-120"/>
               </a:rPr>
-              <a:t>  0.15.4 · community]</a:t>
+              <a:t>  0.16.0 · community]</a:t>
             </a:r>
             <a:endParaRPr lang="en-US" sz="1000" dirty="0"/>
           </a:p>
@@ -14971,7 +14971,7 @@
                 <a:ea typeface="Courier New" pitchFamily="34" charset="-122"/>
                 <a:cs typeface="Courier New" pitchFamily="34" charset="-120"/>
               </a:rPr>
-              <a:t>2026-10-12T10:37:52.517Z  gate.review.appro</a:t>
+              <a:t>2026-10-12T11:44:49.694Z  gate.review.appro</a:t>
             </a:r>
             <a:endParaRPr lang="en-US" sz="1000" dirty="0"/>
           </a:p>
@@ -15022,7 +15022,7 @@
                 <a:ea typeface="Courier New" pitchFamily="34" charset="-122"/>
                 <a:cs typeface="Courier New" pitchFamily="34" charset="-120"/>
               </a:rPr>
-              <a:t>  [sdlc 0.15.4 · community]</a:t>
+              <a:t>  [sdlc 0.16.0 · community]</a:t>
             </a:r>
             <a:endParaRPr lang="en-US" sz="1000" dirty="0"/>
           </a:p>
@@ -15039,7 +15039,7 @@
                 <a:ea typeface="Courier New" pitchFamily="34" charset="-122"/>
                 <a:cs typeface="Courier New" pitchFamily="34" charset="-120"/>
               </a:rPr>
-              <a:t>2026-10-12T10:37:58.642Z  gate.release.appr</a:t>
+              <a:t>2026-10-12T11:44:55.690Z  gate.release.appr</a:t>
             </a:r>
             <a:endParaRPr lang="en-US" sz="1000" dirty="0"/>
           </a:p>
@@ -15090,7 +15090,7 @@
                 <a:ea typeface="Courier New" pitchFamily="34" charset="-122"/>
                 <a:cs typeface="Courier New" pitchFamily="34" charset="-120"/>
               </a:rPr>
-              <a:t>  release-manager [sdlc 0.15.4 · community]</a:t>
+              <a:t>  release-manager [sdlc 0.16.0 · community]</a:t>
             </a:r>
             <a:endParaRPr lang="en-US" sz="1000" dirty="0"/>
           </a:p>
@@ -16720,7 +16720,7 @@
                 <a:ea typeface="Courier New" pitchFamily="34" charset="-122"/>
                 <a:cs typeface="Courier New" pitchFamily="34" charset="-120"/>
               </a:rPr>
-              <a:t>      "id": "20261012T103845856Z-ci-green-c</a:t>
+              <a:t>      "id": "20261012T114542613Z-ci-green-6</a:t>
             </a:r>
             <a:endParaRPr lang="en-US" sz="1000" dirty="0"/>
           </a:p>
@@ -16737,7 +16737,7 @@
                 <a:ea typeface="Courier New" pitchFamily="34" charset="-122"/>
                 <a:cs typeface="Courier New" pitchFamily="34" charset="-120"/>
               </a:rPr>
-              <a:t>  5ba35",</a:t>
+              <a:t>  848f2",</a:t>
             </a:r>
             <a:endParaRPr lang="en-US" sz="1000" dirty="0"/>
           </a:p>
@@ -16873,7 +16873,7 @@
                 <a:ea typeface="Courier New" pitchFamily="34" charset="-122"/>
                 <a:cs typeface="Courier New" pitchFamily="34" charset="-120"/>
               </a:rPr>
-              <a:t>        "ref": "f070fd3e991dbee7473eb016ca0</a:t>
+              <a:t>        "ref": "f9ea5b941e4556bfdc338cd5b2a</a:t>
             </a:r>
             <a:endParaRPr lang="en-US" sz="1000" dirty="0"/>
           </a:p>
@@ -16890,7 +16890,7 @@
                 <a:ea typeface="Courier New" pitchFamily="34" charset="-122"/>
                 <a:cs typeface="Courier New" pitchFamily="34" charset="-120"/>
               </a:rPr>
-              <a:t>  a8bebfdb56c1c",</a:t>
+              <a:t>  f1962d57b6b56",</a:t>
             </a:r>
             <a:endParaRPr lang="en-US" sz="1000" dirty="0"/>
           </a:p>
@@ -26952,7 +26952,7 @@
                 <a:ea typeface="Courier New" pitchFamily="34" charset="-122"/>
                 <a:cs typeface="Courier New" pitchFamily="34" charset="-120"/>
               </a:rPr>
-              <a:t>  sdlc 0.15.4, license: community</a:t>
+              <a:t>  sdlc 0.16.0, license: community</a:t>
             </a:r>
             <a:endParaRPr lang="en-US" sz="1000" dirty="0"/>
           </a:p>

--- a/docs/demo/sdlc-calculator-demo.en.pptx
+++ b/docs/demo/sdlc-calculator-demo.en.pptx
@@ -6660,7 +6660,7 @@
                 <a:ea typeface="Courier New" pitchFamily="34" charset="-122"/>
                 <a:cs typeface="Courier New" pitchFamily="34" charset="-120"/>
               </a:rPr>
-              <a:t>  code-owner (2d4e1179f87b)</a:t>
+              <a:t>  code-owner (ef784b84d0bc)</a:t>
             </a:r>
             <a:endParaRPr lang="en-US" sz="1000" dirty="0"/>
           </a:p>
@@ -6745,7 +6745,7 @@
                 <a:ea typeface="Courier New" pitchFamily="34" charset="-122"/>
                 <a:cs typeface="Courier New" pitchFamily="34" charset="-120"/>
               </a:rPr>
-              <a:t>  "SDLC-Approval: basic-arithmetic:review:2</a:t>
+              <a:t>  "SDLC-Approval: basic-arithmetic:review:e</a:t>
             </a:r>
             <a:endParaRPr lang="en-US" sz="1000" dirty="0"/>
           </a:p>
@@ -6762,7 +6762,7 @@
                 <a:ea typeface="Courier New" pitchFamily="34" charset="-122"/>
                 <a:cs typeface="Courier New" pitchFamily="34" charset="-120"/>
               </a:rPr>
-              <a:t>  d4e1179f87b"</a:t>
+              <a:t>  f784b84d0bc"</a:t>
             </a:r>
             <a:endParaRPr lang="en-US" sz="1000" dirty="0"/>
           </a:p>
@@ -7443,7 +7443,7 @@
                 <a:ea typeface="Courier New" pitchFamily="34" charset="-122"/>
                 <a:cs typeface="Courier New" pitchFamily="34" charset="-120"/>
               </a:rPr>
-              <a:t>  release-manager (2d4e1179f87b)</a:t>
+              <a:t>  release-manager (ef784b84d0bc)</a:t>
             </a:r>
             <a:endParaRPr lang="en-US" sz="1000" dirty="0"/>
           </a:p>
@@ -7511,7 +7511,7 @@
                 <a:ea typeface="Courier New" pitchFamily="34" charset="-122"/>
                 <a:cs typeface="Courier New" pitchFamily="34" charset="-120"/>
               </a:rPr>
-              <a:t>  gate" -m "SDLC-Approval: basic-arithmetic:release:2d4e1179f87b"</a:t>
+              <a:t>  gate" -m "SDLC-Approval: basic-arithmetic:release:ef784b84d0bc"</a:t>
             </a:r>
             <a:endParaRPr lang="en-US" sz="1000" dirty="0"/>
           </a:p>
@@ -7794,7 +7794,7 @@
                 <a:ea typeface="Courier New" pitchFamily="34" charset="-122"/>
                 <a:cs typeface="Courier New" pitchFamily="34" charset="-120"/>
               </a:rPr>
-              <a:t>✓ basic-arithmetic/intent alice valid 2fc6af5f trailer: missing</a:t>
+              <a:t>✓ basic-arithmetic/intent alice valid b0f5e7fa trailer: missing</a:t>
             </a:r>
             <a:endParaRPr lang="en-US" sz="1000" dirty="0"/>
           </a:p>
@@ -7811,7 +7811,7 @@
                 <a:ea typeface="Courier New" pitchFamily="34" charset="-122"/>
                 <a:cs typeface="Courier New" pitchFamily="34" charset="-120"/>
               </a:rPr>
-              <a:t>✓ basic-arithmetic/spec alice valid 20ad1c9c trailer: missing</a:t>
+              <a:t>✓ basic-arithmetic/spec alice valid 094d1d1a trailer: missing</a:t>
             </a:r>
             <a:endParaRPr lang="en-US" sz="1000" dirty="0"/>
           </a:p>
@@ -7828,7 +7828,7 @@
                 <a:ea typeface="Courier New" pitchFamily="34" charset="-122"/>
                 <a:cs typeface="Courier New" pitchFamily="34" charset="-120"/>
               </a:rPr>
-              <a:t>✗ basic-arithmetic/plan bob wrong-signer 20ad1c9c trailer: missing</a:t>
+              <a:t>✗ basic-arithmetic/plan bob wrong-signer 094d1d1a trailer: missing</a:t>
             </a:r>
             <a:endParaRPr lang="en-US" sz="1000" dirty="0"/>
           </a:p>
@@ -7845,7 +7845,7 @@
                 <a:ea typeface="Courier New" pitchFamily="34" charset="-122"/>
                 <a:cs typeface="Courier New" pitchFamily="34" charset="-120"/>
               </a:rPr>
-              <a:t>✓ basic-arithmetic/review carol valid dd6163e1 trailer: missing</a:t>
+              <a:t>✓ basic-arithmetic/review carol valid a1a76515 trailer: missing</a:t>
             </a:r>
             <a:endParaRPr lang="en-US" sz="1000" dirty="0"/>
           </a:p>
@@ -7862,7 +7862,7 @@
                 <a:ea typeface="Courier New" pitchFamily="34" charset="-122"/>
                 <a:cs typeface="Courier New" pitchFamily="34" charset="-120"/>
               </a:rPr>
-              <a:t>✓ basic-arithmetic/release alice valid 6c4ca7e5 trailer: missing</a:t>
+              <a:t>✓ basic-arithmetic/release alice valid 6ffa4b4f trailer: missing</a:t>
             </a:r>
             <a:endParaRPr lang="en-US" sz="1000" dirty="0"/>
           </a:p>
@@ -7879,7 +7879,7 @@
                 <a:ea typeface="Courier New" pitchFamily="34" charset="-122"/>
                 <a:cs typeface="Courier New" pitchFamily="34" charset="-120"/>
               </a:rPr>
-              <a:t>✓ openspec/roles.yaml alice@calc.example valid 3af4e9c1</a:t>
+              <a:t>✓ openspec/roles.yaml alice@calc.example valid 608d2828</a:t>
             </a:r>
             <a:endParaRPr lang="en-US" sz="1000" dirty="0"/>
           </a:p>
@@ -14365,7 +14365,7 @@
                 <a:ea typeface="Courier New" pitchFamily="34" charset="-122"/>
                 <a:cs typeface="Courier New" pitchFamily="34" charset="-120"/>
               </a:rPr>
-              <a:t>  archived) · sdlc 0.16.0, license:</a:t>
+              <a:t>  archived) · sdlc 0.16.1, license:</a:t>
             </a:r>
             <a:endParaRPr lang="en-US" sz="1000" dirty="0"/>
           </a:p>
@@ -14552,7 +14552,7 @@
                 <a:ea typeface="Courier New" pitchFamily="34" charset="-122"/>
                 <a:cs typeface="Courier New" pitchFamily="34" charset="-120"/>
               </a:rPr>
-              <a:t>  intent 3 · spec 1 · plan 13 · review 3;</a:t>
+              <a:t>  intent 3 · spec 1 · plan 14 · review 3;</a:t>
             </a:r>
             <a:endParaRPr lang="en-US" sz="1000" dirty="0"/>
           </a:p>
@@ -14886,7 +14886,7 @@
                 <a:ea typeface="Courier New" pitchFamily="34" charset="-122"/>
                 <a:cs typeface="Courier New" pitchFamily="34" charset="-120"/>
               </a:rPr>
-              <a:t>2026-10-12T11:44:46.776Z  gate.review.await</a:t>
+              <a:t>2026-10-12T13:28:57.301Z  gate.review.await</a:t>
             </a:r>
             <a:endParaRPr lang="en-US" sz="1000" dirty="0"/>
           </a:p>
@@ -14920,7 +14920,7 @@
                 <a:ea typeface="Courier New" pitchFamily="34" charset="-122"/>
                 <a:cs typeface="Courier New" pitchFamily="34" charset="-120"/>
               </a:rPr>
-              <a:t>  sha256:2d4e1179f87b8d8cf46235dfb3677acf9c</a:t>
+              <a:t>  sha256:ef784b84d0bcd62dc8ae42dcd69860bc3b</a:t>
             </a:r>
             <a:endParaRPr lang="en-US" sz="1000" dirty="0"/>
           </a:p>
@@ -14937,7 +14937,7 @@
                 <a:ea typeface="Courier New" pitchFamily="34" charset="-122"/>
                 <a:cs typeface="Courier New" pitchFamily="34" charset="-120"/>
               </a:rPr>
-              <a:t>  126eaf2527028066f0df56a62e87ad [sdlc</a:t>
+              <a:t>  8c634ea7cbdd278188e451e973e362 [sdlc</a:t>
             </a:r>
             <a:endParaRPr lang="en-US" sz="1000" dirty="0"/>
           </a:p>
@@ -14954,7 +14954,7 @@
                 <a:ea typeface="Courier New" pitchFamily="34" charset="-122"/>
                 <a:cs typeface="Courier New" pitchFamily="34" charset="-120"/>
               </a:rPr>
-              <a:t>  0.16.0 · community]</a:t>
+              <a:t>  0.16.1 · community]</a:t>
             </a:r>
             <a:endParaRPr lang="en-US" sz="1000" dirty="0"/>
           </a:p>
@@ -14971,7 +14971,7 @@
                 <a:ea typeface="Courier New" pitchFamily="34" charset="-122"/>
                 <a:cs typeface="Courier New" pitchFamily="34" charset="-120"/>
               </a:rPr>
-              <a:t>2026-10-12T11:44:49.694Z  gate.review.appro</a:t>
+              <a:t>2026-10-12T13:29:00.443Z  gate.review.appro</a:t>
             </a:r>
             <a:endParaRPr lang="en-US" sz="1000" dirty="0"/>
           </a:p>
@@ -15022,7 +15022,7 @@
                 <a:ea typeface="Courier New" pitchFamily="34" charset="-122"/>
                 <a:cs typeface="Courier New" pitchFamily="34" charset="-120"/>
               </a:rPr>
-              <a:t>  [sdlc 0.16.0 · community]</a:t>
+              <a:t>  [sdlc 0.16.1 · community]</a:t>
             </a:r>
             <a:endParaRPr lang="en-US" sz="1000" dirty="0"/>
           </a:p>
@@ -15039,7 +15039,7 @@
                 <a:ea typeface="Courier New" pitchFamily="34" charset="-122"/>
                 <a:cs typeface="Courier New" pitchFamily="34" charset="-120"/>
               </a:rPr>
-              <a:t>2026-10-12T11:44:55.690Z  gate.release.appr</a:t>
+              <a:t>2026-10-12T13:29:06.827Z  gate.release.appr</a:t>
             </a:r>
             <a:endParaRPr lang="en-US" sz="1000" dirty="0"/>
           </a:p>
@@ -15090,7 +15090,7 @@
                 <a:ea typeface="Courier New" pitchFamily="34" charset="-122"/>
                 <a:cs typeface="Courier New" pitchFamily="34" charset="-120"/>
               </a:rPr>
-              <a:t>  release-manager [sdlc 0.16.0 · community]</a:t>
+              <a:t>  release-manager [sdlc 0.16.1 · community]</a:t>
             </a:r>
             <a:endParaRPr lang="en-US" sz="1000" dirty="0"/>
           </a:p>
@@ -16720,7 +16720,7 @@
                 <a:ea typeface="Courier New" pitchFamily="34" charset="-122"/>
                 <a:cs typeface="Courier New" pitchFamily="34" charset="-120"/>
               </a:rPr>
-              <a:t>      "id": "20261012T114542613Z-ci-green-6</a:t>
+              <a:t>      "id": "20261012T132955659Z-ci-green-6</a:t>
             </a:r>
             <a:endParaRPr lang="en-US" sz="1000" dirty="0"/>
           </a:p>
@@ -16737,7 +16737,7 @@
                 <a:ea typeface="Courier New" pitchFamily="34" charset="-122"/>
                 <a:cs typeface="Courier New" pitchFamily="34" charset="-120"/>
               </a:rPr>
-              <a:t>  848f2",</a:t>
+              <a:t>  768a3",</a:t>
             </a:r>
             <a:endParaRPr lang="en-US" sz="1000" dirty="0"/>
           </a:p>
@@ -16873,7 +16873,7 @@
                 <a:ea typeface="Courier New" pitchFamily="34" charset="-122"/>
                 <a:cs typeface="Courier New" pitchFamily="34" charset="-120"/>
               </a:rPr>
-              <a:t>        "ref": "f9ea5b941e4556bfdc338cd5b2a</a:t>
+              <a:t>        "ref": "0052ccc6d9d5285b83afc4233e7</a:t>
             </a:r>
             <a:endParaRPr lang="en-US" sz="1000" dirty="0"/>
           </a:p>
@@ -16890,7 +16890,7 @@
                 <a:ea typeface="Courier New" pitchFamily="34" charset="-122"/>
                 <a:cs typeface="Courier New" pitchFamily="34" charset="-120"/>
               </a:rPr>
-              <a:t>  f1962d57b6b56",</a:t>
+              <a:t>  489b640a86e61",</a:t>
             </a:r>
             <a:endParaRPr lang="en-US" sz="1000" dirty="0"/>
           </a:p>
@@ -26952,7 +26952,7 @@
                 <a:ea typeface="Courier New" pitchFamily="34" charset="-122"/>
                 <a:cs typeface="Courier New" pitchFamily="34" charset="-120"/>
               </a:rPr>
-              <a:t>  sdlc 0.16.0, license: community</a:t>
+              <a:t>  sdlc 0.16.1, license: community</a:t>
             </a:r>
             <a:endParaRPr lang="en-US" sz="1000" dirty="0"/>
           </a:p>

--- a/docs/demo/sdlc-calculator-demo.en.pptx
+++ b/docs/demo/sdlc-calculator-demo.en.pptx
@@ -6660,7 +6660,7 @@
                 <a:ea typeface="Courier New" pitchFamily="34" charset="-122"/>
                 <a:cs typeface="Courier New" pitchFamily="34" charset="-120"/>
               </a:rPr>
-              <a:t>  code-owner (ef784b84d0bc)</a:t>
+              <a:t>  code-owner (5a26fd14d3b1)</a:t>
             </a:r>
             <a:endParaRPr lang="en-US" sz="1000" dirty="0"/>
           </a:p>
@@ -6745,7 +6745,7 @@
                 <a:ea typeface="Courier New" pitchFamily="34" charset="-122"/>
                 <a:cs typeface="Courier New" pitchFamily="34" charset="-120"/>
               </a:rPr>
-              <a:t>  "SDLC-Approval: basic-arithmetic:review:e</a:t>
+              <a:t>  "SDLC-Approval: basic-arithmetic:review:5</a:t>
             </a:r>
             <a:endParaRPr lang="en-US" sz="1000" dirty="0"/>
           </a:p>
@@ -6762,7 +6762,7 @@
                 <a:ea typeface="Courier New" pitchFamily="34" charset="-122"/>
                 <a:cs typeface="Courier New" pitchFamily="34" charset="-120"/>
               </a:rPr>
-              <a:t>  f784b84d0bc"</a:t>
+              <a:t>  a26fd14d3b1"</a:t>
             </a:r>
             <a:endParaRPr lang="en-US" sz="1000" dirty="0"/>
           </a:p>
@@ -7443,7 +7443,7 @@
                 <a:ea typeface="Courier New" pitchFamily="34" charset="-122"/>
                 <a:cs typeface="Courier New" pitchFamily="34" charset="-120"/>
               </a:rPr>
-              <a:t>  release-manager (ef784b84d0bc)</a:t>
+              <a:t>  release-manager (5a26fd14d3b1)</a:t>
             </a:r>
             <a:endParaRPr lang="en-US" sz="1000" dirty="0"/>
           </a:p>
@@ -7511,7 +7511,7 @@
                 <a:ea typeface="Courier New" pitchFamily="34" charset="-122"/>
                 <a:cs typeface="Courier New" pitchFamily="34" charset="-120"/>
               </a:rPr>
-              <a:t>  gate" -m "SDLC-Approval: basic-arithmetic:release:ef784b84d0bc"</a:t>
+              <a:t>  gate" -m "SDLC-Approval: basic-arithmetic:release:5a26fd14d3b1"</a:t>
             </a:r>
             <a:endParaRPr lang="en-US" sz="1000" dirty="0"/>
           </a:p>
@@ -7794,7 +7794,7 @@
                 <a:ea typeface="Courier New" pitchFamily="34" charset="-122"/>
                 <a:cs typeface="Courier New" pitchFamily="34" charset="-120"/>
               </a:rPr>
-              <a:t>✓ basic-arithmetic/intent alice valid b0f5e7fa trailer: missing</a:t>
+              <a:t>✓ basic-arithmetic/intent alice valid dc1bb17a trailer: missing</a:t>
             </a:r>
             <a:endParaRPr lang="en-US" sz="1000" dirty="0"/>
           </a:p>
@@ -7811,7 +7811,7 @@
                 <a:ea typeface="Courier New" pitchFamily="34" charset="-122"/>
                 <a:cs typeface="Courier New" pitchFamily="34" charset="-120"/>
               </a:rPr>
-              <a:t>✓ basic-arithmetic/spec alice valid 094d1d1a trailer: missing</a:t>
+              <a:t>✓ basic-arithmetic/spec alice valid 6cb23d80 trailer: missing</a:t>
             </a:r>
             <a:endParaRPr lang="en-US" sz="1000" dirty="0"/>
           </a:p>
@@ -7828,7 +7828,7 @@
                 <a:ea typeface="Courier New" pitchFamily="34" charset="-122"/>
                 <a:cs typeface="Courier New" pitchFamily="34" charset="-120"/>
               </a:rPr>
-              <a:t>✗ basic-arithmetic/plan bob wrong-signer 094d1d1a trailer: missing</a:t>
+              <a:t>✗ basic-arithmetic/plan bob wrong-signer 6cb23d80 trailer: missing</a:t>
             </a:r>
             <a:endParaRPr lang="en-US" sz="1000" dirty="0"/>
           </a:p>
@@ -7845,7 +7845,7 @@
                 <a:ea typeface="Courier New" pitchFamily="34" charset="-122"/>
                 <a:cs typeface="Courier New" pitchFamily="34" charset="-120"/>
               </a:rPr>
-              <a:t>✓ basic-arithmetic/review carol valid a1a76515 trailer: missing</a:t>
+              <a:t>✓ basic-arithmetic/review carol valid 5120b2b7 trailer: missing</a:t>
             </a:r>
             <a:endParaRPr lang="en-US" sz="1000" dirty="0"/>
           </a:p>
@@ -7862,7 +7862,7 @@
                 <a:ea typeface="Courier New" pitchFamily="34" charset="-122"/>
                 <a:cs typeface="Courier New" pitchFamily="34" charset="-120"/>
               </a:rPr>
-              <a:t>✓ basic-arithmetic/release alice valid 6ffa4b4f trailer: missing</a:t>
+              <a:t>✓ basic-arithmetic/release alice valid 5aa2ca98 trailer: missing</a:t>
             </a:r>
             <a:endParaRPr lang="en-US" sz="1000" dirty="0"/>
           </a:p>
@@ -7879,7 +7879,7 @@
                 <a:ea typeface="Courier New" pitchFamily="34" charset="-122"/>
                 <a:cs typeface="Courier New" pitchFamily="34" charset="-120"/>
               </a:rPr>
-              <a:t>✓ openspec/roles.yaml alice@calc.example valid 608d2828</a:t>
+              <a:t>✓ openspec/roles.yaml alice@calc.example valid dd79449c</a:t>
             </a:r>
             <a:endParaRPr lang="en-US" sz="1000" dirty="0"/>
           </a:p>
@@ -14365,7 +14365,7 @@
                 <a:ea typeface="Courier New" pitchFamily="34" charset="-122"/>
                 <a:cs typeface="Courier New" pitchFamily="34" charset="-120"/>
               </a:rPr>
-              <a:t>  archived) · sdlc 0.16.1, license:</a:t>
+              <a:t>  archived) · sdlc 0.16.2, license:</a:t>
             </a:r>
             <a:endParaRPr lang="en-US" sz="1000" dirty="0"/>
           </a:p>
@@ -14501,7 +14501,7 @@
                 <a:ea typeface="Courier New" pitchFamily="34" charset="-122"/>
                 <a:cs typeface="Courier New" pitchFamily="34" charset="-120"/>
               </a:rPr>
-              <a:t>  agent commits: 11 of 12 (SDLC-Agent</a:t>
+              <a:t>  agent commits: 0 of 12 (SDLC-Agent</a:t>
             </a:r>
             <a:endParaRPr lang="en-US" sz="1000" dirty="0"/>
           </a:p>
@@ -14886,7 +14886,7 @@
                 <a:ea typeface="Courier New" pitchFamily="34" charset="-122"/>
                 <a:cs typeface="Courier New" pitchFamily="34" charset="-120"/>
               </a:rPr>
-              <a:t>2026-10-12T13:28:57.301Z  gate.review.await</a:t>
+              <a:t>2026-10-12T14:45:35.851Z  gate.review.await</a:t>
             </a:r>
             <a:endParaRPr lang="en-US" sz="1000" dirty="0"/>
           </a:p>
@@ -14920,7 +14920,7 @@
                 <a:ea typeface="Courier New" pitchFamily="34" charset="-122"/>
                 <a:cs typeface="Courier New" pitchFamily="34" charset="-120"/>
               </a:rPr>
-              <a:t>  sha256:ef784b84d0bcd62dc8ae42dcd69860bc3b</a:t>
+              <a:t>  sha256:5a26fd14d3b15ccc118360026c58c0b693</a:t>
             </a:r>
             <a:endParaRPr lang="en-US" sz="1000" dirty="0"/>
           </a:p>
@@ -14937,7 +14937,7 @@
                 <a:ea typeface="Courier New" pitchFamily="34" charset="-122"/>
                 <a:cs typeface="Courier New" pitchFamily="34" charset="-120"/>
               </a:rPr>
-              <a:t>  8c634ea7cbdd278188e451e973e362 [sdlc</a:t>
+              <a:t>  d03c7733c25a425a605e699faf6440 [sdlc</a:t>
             </a:r>
             <a:endParaRPr lang="en-US" sz="1000" dirty="0"/>
           </a:p>
@@ -14954,7 +14954,7 @@
                 <a:ea typeface="Courier New" pitchFamily="34" charset="-122"/>
                 <a:cs typeface="Courier New" pitchFamily="34" charset="-120"/>
               </a:rPr>
-              <a:t>  0.16.1 · community]</a:t>
+              <a:t>  0.16.2 · community]</a:t>
             </a:r>
             <a:endParaRPr lang="en-US" sz="1000" dirty="0"/>
           </a:p>
@@ -14971,7 +14971,7 @@
                 <a:ea typeface="Courier New" pitchFamily="34" charset="-122"/>
                 <a:cs typeface="Courier New" pitchFamily="34" charset="-120"/>
               </a:rPr>
-              <a:t>2026-10-12T13:29:00.443Z  gate.review.appro</a:t>
+              <a:t>2026-10-12T14:45:38.933Z  gate.review.appro</a:t>
             </a:r>
             <a:endParaRPr lang="en-US" sz="1000" dirty="0"/>
           </a:p>
@@ -15022,7 +15022,7 @@
                 <a:ea typeface="Courier New" pitchFamily="34" charset="-122"/>
                 <a:cs typeface="Courier New" pitchFamily="34" charset="-120"/>
               </a:rPr>
-              <a:t>  [sdlc 0.16.1 · community]</a:t>
+              <a:t>  [sdlc 0.16.2 · community]</a:t>
             </a:r>
             <a:endParaRPr lang="en-US" sz="1000" dirty="0"/>
           </a:p>
@@ -15039,7 +15039,7 @@
                 <a:ea typeface="Courier New" pitchFamily="34" charset="-122"/>
                 <a:cs typeface="Courier New" pitchFamily="34" charset="-120"/>
               </a:rPr>
-              <a:t>2026-10-12T13:29:06.827Z  gate.release.appr</a:t>
+              <a:t>2026-10-12T14:45:45.198Z  gate.release.appr</a:t>
             </a:r>
             <a:endParaRPr lang="en-US" sz="1000" dirty="0"/>
           </a:p>
@@ -15090,7 +15090,7 @@
                 <a:ea typeface="Courier New" pitchFamily="34" charset="-122"/>
                 <a:cs typeface="Courier New" pitchFamily="34" charset="-120"/>
               </a:rPr>
-              <a:t>  release-manager [sdlc 0.16.1 · community]</a:t>
+              <a:t>  release-manager [sdlc 0.16.2 · community]</a:t>
             </a:r>
             <a:endParaRPr lang="en-US" sz="1000" dirty="0"/>
           </a:p>
@@ -16720,7 +16720,7 @@
                 <a:ea typeface="Courier New" pitchFamily="34" charset="-122"/>
                 <a:cs typeface="Courier New" pitchFamily="34" charset="-120"/>
               </a:rPr>
-              <a:t>      "id": "20261012T132955659Z-ci-green-6</a:t>
+              <a:t>      "id": "20261012T144633255Z-ci-green-e</a:t>
             </a:r>
             <a:endParaRPr lang="en-US" sz="1000" dirty="0"/>
           </a:p>
@@ -16737,7 +16737,7 @@
                 <a:ea typeface="Courier New" pitchFamily="34" charset="-122"/>
                 <a:cs typeface="Courier New" pitchFamily="34" charset="-120"/>
               </a:rPr>
-              <a:t>  768a3",</a:t>
+              <a:t>  2ddd2",</a:t>
             </a:r>
             <a:endParaRPr lang="en-US" sz="1000" dirty="0"/>
           </a:p>
@@ -16873,7 +16873,7 @@
                 <a:ea typeface="Courier New" pitchFamily="34" charset="-122"/>
                 <a:cs typeface="Courier New" pitchFamily="34" charset="-120"/>
               </a:rPr>
-              <a:t>        "ref": "0052ccc6d9d5285b83afc4233e7</a:t>
+              <a:t>        "ref": "280019eec5165fcbd633f583552</a:t>
             </a:r>
             <a:endParaRPr lang="en-US" sz="1000" dirty="0"/>
           </a:p>
@@ -16890,7 +16890,7 @@
                 <a:ea typeface="Courier New" pitchFamily="34" charset="-122"/>
                 <a:cs typeface="Courier New" pitchFamily="34" charset="-120"/>
               </a:rPr>
-              <a:t>  489b640a86e61",</a:t>
+              <a:t>  f6c5d186a19a8",</a:t>
             </a:r>
             <a:endParaRPr lang="en-US" sz="1000" dirty="0"/>
           </a:p>
@@ -26952,7 +26952,7 @@
                 <a:ea typeface="Courier New" pitchFamily="34" charset="-122"/>
                 <a:cs typeface="Courier New" pitchFamily="34" charset="-120"/>
               </a:rPr>
-              <a:t>  sdlc 0.16.1, license: community</a:t>
+              <a:t>  sdlc 0.16.2, license: community</a:t>
             </a:r>
             <a:endParaRPr lang="en-US" sz="1000" dirty="0"/>
           </a:p>

--- a/docs/demo/sdlc-calculator-demo.en.pptx
+++ b/docs/demo/sdlc-calculator-demo.en.pptx
@@ -6660,7 +6660,7 @@
                 <a:ea typeface="Courier New" pitchFamily="34" charset="-122"/>
                 <a:cs typeface="Courier New" pitchFamily="34" charset="-120"/>
               </a:rPr>
-              <a:t>  code-owner (5a26fd14d3b1)</a:t>
+              <a:t>  code-owner (3fe67dd99150)</a:t>
             </a:r>
             <a:endParaRPr lang="en-US" sz="1000" dirty="0"/>
           </a:p>
@@ -6745,7 +6745,7 @@
                 <a:ea typeface="Courier New" pitchFamily="34" charset="-122"/>
                 <a:cs typeface="Courier New" pitchFamily="34" charset="-120"/>
               </a:rPr>
-              <a:t>  "SDLC-Approval: basic-arithmetic:review:5</a:t>
+              <a:t>  "SDLC-Approval: basic-arithmetic:review:3</a:t>
             </a:r>
             <a:endParaRPr lang="en-US" sz="1000" dirty="0"/>
           </a:p>
@@ -6762,7 +6762,7 @@
                 <a:ea typeface="Courier New" pitchFamily="34" charset="-122"/>
                 <a:cs typeface="Courier New" pitchFamily="34" charset="-120"/>
               </a:rPr>
-              <a:t>  a26fd14d3b1"</a:t>
+              <a:t>  fe67dd99150"</a:t>
             </a:r>
             <a:endParaRPr lang="en-US" sz="1000" dirty="0"/>
           </a:p>
@@ -7443,7 +7443,7 @@
                 <a:ea typeface="Courier New" pitchFamily="34" charset="-122"/>
                 <a:cs typeface="Courier New" pitchFamily="34" charset="-120"/>
               </a:rPr>
-              <a:t>  release-manager (5a26fd14d3b1)</a:t>
+              <a:t>  release-manager (3fe67dd99150)</a:t>
             </a:r>
             <a:endParaRPr lang="en-US" sz="1000" dirty="0"/>
           </a:p>
@@ -7511,7 +7511,7 @@
                 <a:ea typeface="Courier New" pitchFamily="34" charset="-122"/>
                 <a:cs typeface="Courier New" pitchFamily="34" charset="-120"/>
               </a:rPr>
-              <a:t>  gate" -m "SDLC-Approval: basic-arithmetic:release:5a26fd14d3b1"</a:t>
+              <a:t>  gate" -m "SDLC-Approval: basic-arithmetic:release:3fe67dd99150"</a:t>
             </a:r>
             <a:endParaRPr lang="en-US" sz="1000" dirty="0"/>
           </a:p>
@@ -7794,7 +7794,7 @@
                 <a:ea typeface="Courier New" pitchFamily="34" charset="-122"/>
                 <a:cs typeface="Courier New" pitchFamily="34" charset="-120"/>
               </a:rPr>
-              <a:t>✓ basic-arithmetic/intent alice valid dc1bb17a trailer: missing</a:t>
+              <a:t>✓ basic-arithmetic/intent alice valid 8e330ae7 trailer: missing</a:t>
             </a:r>
             <a:endParaRPr lang="en-US" sz="1000" dirty="0"/>
           </a:p>
@@ -7811,7 +7811,7 @@
                 <a:ea typeface="Courier New" pitchFamily="34" charset="-122"/>
                 <a:cs typeface="Courier New" pitchFamily="34" charset="-120"/>
               </a:rPr>
-              <a:t>✓ basic-arithmetic/spec alice valid 6cb23d80 trailer: missing</a:t>
+              <a:t>✓ basic-arithmetic/spec alice valid 107c224f trailer: missing</a:t>
             </a:r>
             <a:endParaRPr lang="en-US" sz="1000" dirty="0"/>
           </a:p>
@@ -7828,7 +7828,7 @@
                 <a:ea typeface="Courier New" pitchFamily="34" charset="-122"/>
                 <a:cs typeface="Courier New" pitchFamily="34" charset="-120"/>
               </a:rPr>
-              <a:t>✗ basic-arithmetic/plan bob wrong-signer 6cb23d80 trailer: missing</a:t>
+              <a:t>✗ basic-arithmetic/plan bob wrong-signer 107c224f trailer: missing</a:t>
             </a:r>
             <a:endParaRPr lang="en-US" sz="1000" dirty="0"/>
           </a:p>
@@ -7845,7 +7845,7 @@
                 <a:ea typeface="Courier New" pitchFamily="34" charset="-122"/>
                 <a:cs typeface="Courier New" pitchFamily="34" charset="-120"/>
               </a:rPr>
-              <a:t>✓ basic-arithmetic/review carol valid 5120b2b7 trailer: missing</a:t>
+              <a:t>✓ basic-arithmetic/review carol valid 6943d6be trailer: missing</a:t>
             </a:r>
             <a:endParaRPr lang="en-US" sz="1000" dirty="0"/>
           </a:p>
@@ -7862,7 +7862,7 @@
                 <a:ea typeface="Courier New" pitchFamily="34" charset="-122"/>
                 <a:cs typeface="Courier New" pitchFamily="34" charset="-120"/>
               </a:rPr>
-              <a:t>✓ basic-arithmetic/release alice valid 5aa2ca98 trailer: missing</a:t>
+              <a:t>✓ basic-arithmetic/release alice valid 1b26a563 trailer: missing</a:t>
             </a:r>
             <a:endParaRPr lang="en-US" sz="1000" dirty="0"/>
           </a:p>
@@ -7879,7 +7879,7 @@
                 <a:ea typeface="Courier New" pitchFamily="34" charset="-122"/>
                 <a:cs typeface="Courier New" pitchFamily="34" charset="-120"/>
               </a:rPr>
-              <a:t>✓ openspec/roles.yaml alice@calc.example valid dd79449c</a:t>
+              <a:t>✓ openspec/roles.yaml alice@calc.example bootstrap 04d0b1ec</a:t>
             </a:r>
             <a:endParaRPr lang="en-US" sz="1000" dirty="0"/>
           </a:p>
@@ -14365,7 +14365,7 @@
                 <a:ea typeface="Courier New" pitchFamily="34" charset="-122"/>
                 <a:cs typeface="Courier New" pitchFamily="34" charset="-120"/>
               </a:rPr>
-              <a:t>  archived) · sdlc 0.16.2, license:</a:t>
+              <a:t>  archived) · sdlc 0.16.3, license:</a:t>
             </a:r>
             <a:endParaRPr lang="en-US" sz="1000" dirty="0"/>
           </a:p>
@@ -14552,7 +14552,7 @@
                 <a:ea typeface="Courier New" pitchFamily="34" charset="-122"/>
                 <a:cs typeface="Courier New" pitchFamily="34" charset="-120"/>
               </a:rPr>
-              <a:t>  intent 3 · spec 1 · plan 14 · review 3;</a:t>
+              <a:t>  intent 3 · spec 1 · plan 13 · review 3;</a:t>
             </a:r>
             <a:endParaRPr lang="en-US" sz="1000" dirty="0"/>
           </a:p>
@@ -14886,7 +14886,7 @@
                 <a:ea typeface="Courier New" pitchFamily="34" charset="-122"/>
                 <a:cs typeface="Courier New" pitchFamily="34" charset="-120"/>
               </a:rPr>
-              <a:t>2026-10-12T14:45:35.851Z  gate.review.await</a:t>
+              <a:t>2026-10-12T17:54:32.408Z  gate.review.await</a:t>
             </a:r>
             <a:endParaRPr lang="en-US" sz="1000" dirty="0"/>
           </a:p>
@@ -14920,7 +14920,7 @@
                 <a:ea typeface="Courier New" pitchFamily="34" charset="-122"/>
                 <a:cs typeface="Courier New" pitchFamily="34" charset="-120"/>
               </a:rPr>
-              <a:t>  sha256:5a26fd14d3b15ccc118360026c58c0b693</a:t>
+              <a:t>  sha256:3fe67dd9915088930c7427061dc3c5e496</a:t>
             </a:r>
             <a:endParaRPr lang="en-US" sz="1000" dirty="0"/>
           </a:p>
@@ -14937,7 +14937,7 @@
                 <a:ea typeface="Courier New" pitchFamily="34" charset="-122"/>
                 <a:cs typeface="Courier New" pitchFamily="34" charset="-120"/>
               </a:rPr>
-              <a:t>  d03c7733c25a425a605e699faf6440 [sdlc</a:t>
+              <a:t>  c4f349ad9d3f4cd8fd094ebb77aa4a [sdlc</a:t>
             </a:r>
             <a:endParaRPr lang="en-US" sz="1000" dirty="0"/>
           </a:p>
@@ -14954,7 +14954,7 @@
                 <a:ea typeface="Courier New" pitchFamily="34" charset="-122"/>
                 <a:cs typeface="Courier New" pitchFamily="34" charset="-120"/>
               </a:rPr>
-              <a:t>  0.16.2 · community]</a:t>
+              <a:t>  0.16.3 · community]</a:t>
             </a:r>
             <a:endParaRPr lang="en-US" sz="1000" dirty="0"/>
           </a:p>
@@ -14971,7 +14971,7 @@
                 <a:ea typeface="Courier New" pitchFamily="34" charset="-122"/>
                 <a:cs typeface="Courier New" pitchFamily="34" charset="-120"/>
               </a:rPr>
-              <a:t>2026-10-12T14:45:38.933Z  gate.review.appro</a:t>
+              <a:t>2026-10-12T17:54:35.551Z  gate.review.appro</a:t>
             </a:r>
             <a:endParaRPr lang="en-US" sz="1000" dirty="0"/>
           </a:p>
@@ -15022,7 +15022,7 @@
                 <a:ea typeface="Courier New" pitchFamily="34" charset="-122"/>
                 <a:cs typeface="Courier New" pitchFamily="34" charset="-120"/>
               </a:rPr>
-              <a:t>  [sdlc 0.16.2 · community]</a:t>
+              <a:t>  [sdlc 0.16.3 · community]</a:t>
             </a:r>
             <a:endParaRPr lang="en-US" sz="1000" dirty="0"/>
           </a:p>
@@ -15039,7 +15039,7 @@
                 <a:ea typeface="Courier New" pitchFamily="34" charset="-122"/>
                 <a:cs typeface="Courier New" pitchFamily="34" charset="-120"/>
               </a:rPr>
-              <a:t>2026-10-12T14:45:45.198Z  gate.release.appr</a:t>
+              <a:t>2026-10-12T17:54:41.749Z  gate.release.appr</a:t>
             </a:r>
             <a:endParaRPr lang="en-US" sz="1000" dirty="0"/>
           </a:p>
@@ -15090,7 +15090,7 @@
                 <a:ea typeface="Courier New" pitchFamily="34" charset="-122"/>
                 <a:cs typeface="Courier New" pitchFamily="34" charset="-120"/>
               </a:rPr>
-              <a:t>  release-manager [sdlc 0.16.2 · community]</a:t>
+              <a:t>  release-manager [sdlc 0.16.3 · community]</a:t>
             </a:r>
             <a:endParaRPr lang="en-US" sz="1000" dirty="0"/>
           </a:p>
@@ -16720,7 +16720,7 @@
                 <a:ea typeface="Courier New" pitchFamily="34" charset="-122"/>
                 <a:cs typeface="Courier New" pitchFamily="34" charset="-120"/>
               </a:rPr>
-              <a:t>      "id": "20261012T144633255Z-ci-green-e</a:t>
+              <a:t>      "id": "20261012T175530725Z-ci-green-1</a:t>
             </a:r>
             <a:endParaRPr lang="en-US" sz="1000" dirty="0"/>
           </a:p>
@@ -16737,7 +16737,7 @@
                 <a:ea typeface="Courier New" pitchFamily="34" charset="-122"/>
                 <a:cs typeface="Courier New" pitchFamily="34" charset="-120"/>
               </a:rPr>
-              <a:t>  2ddd2",</a:t>
+              <a:t>  044be",</a:t>
             </a:r>
             <a:endParaRPr lang="en-US" sz="1000" dirty="0"/>
           </a:p>
@@ -16873,7 +16873,7 @@
                 <a:ea typeface="Courier New" pitchFamily="34" charset="-122"/>
                 <a:cs typeface="Courier New" pitchFamily="34" charset="-120"/>
               </a:rPr>
-              <a:t>        "ref": "280019eec5165fcbd633f583552</a:t>
+              <a:t>        "ref": "aab87b1053d604eadb8b3cb8dcd</a:t>
             </a:r>
             <a:endParaRPr lang="en-US" sz="1000" dirty="0"/>
           </a:p>
@@ -16890,7 +16890,7 @@
                 <a:ea typeface="Courier New" pitchFamily="34" charset="-122"/>
                 <a:cs typeface="Courier New" pitchFamily="34" charset="-120"/>
               </a:rPr>
-              <a:t>  f6c5d186a19a8",</a:t>
+              <a:t>  77474e4b0fd75",</a:t>
             </a:r>
             <a:endParaRPr lang="en-US" sz="1000" dirty="0"/>
           </a:p>
@@ -26952,7 +26952,7 @@
                 <a:ea typeface="Courier New" pitchFamily="34" charset="-122"/>
                 <a:cs typeface="Courier New" pitchFamily="34" charset="-120"/>
               </a:rPr>
-              <a:t>  sdlc 0.16.2, license: community</a:t>
+              <a:t>  sdlc 0.16.3, license: community</a:t>
             </a:r>
             <a:endParaRPr lang="en-US" sz="1000" dirty="0"/>
           </a:p>

--- a/docs/demo/sdlc-calculator-demo.en.pptx
+++ b/docs/demo/sdlc-calculator-demo.en.pptx
@@ -5112,7 +5112,7 @@
                 <a:ea typeface="Courier New" pitchFamily="34" charset="-122"/>
                 <a:cs typeface="Courier New" pitchFamily="34" charset="-120"/>
               </a:rPr>
-              <a:t>✓ test (1.0s)</a:t>
+              <a:t>✓ test (1.1s)</a:t>
             </a:r>
             <a:endParaRPr lang="en-US" sz="1000" dirty="0"/>
           </a:p>
@@ -6660,7 +6660,7 @@
                 <a:ea typeface="Courier New" pitchFamily="34" charset="-122"/>
                 <a:cs typeface="Courier New" pitchFamily="34" charset="-120"/>
               </a:rPr>
-              <a:t>  code-owner (3fe67dd99150)</a:t>
+              <a:t>  code-owner (2f0312b7fcdc)</a:t>
             </a:r>
             <a:endParaRPr lang="en-US" sz="1000" dirty="0"/>
           </a:p>
@@ -6745,7 +6745,7 @@
                 <a:ea typeface="Courier New" pitchFamily="34" charset="-122"/>
                 <a:cs typeface="Courier New" pitchFamily="34" charset="-120"/>
               </a:rPr>
-              <a:t>  "SDLC-Approval: basic-arithmetic:review:3</a:t>
+              <a:t>  "SDLC-Approval: basic-arithmetic:review:2</a:t>
             </a:r>
             <a:endParaRPr lang="en-US" sz="1000" dirty="0"/>
           </a:p>
@@ -6762,7 +6762,7 @@
                 <a:ea typeface="Courier New" pitchFamily="34" charset="-122"/>
                 <a:cs typeface="Courier New" pitchFamily="34" charset="-120"/>
               </a:rPr>
-              <a:t>  fe67dd99150"</a:t>
+              <a:t>  f0312b7fcdc"</a:t>
             </a:r>
             <a:endParaRPr lang="en-US" sz="1000" dirty="0"/>
           </a:p>
@@ -7443,7 +7443,7 @@
                 <a:ea typeface="Courier New" pitchFamily="34" charset="-122"/>
                 <a:cs typeface="Courier New" pitchFamily="34" charset="-120"/>
               </a:rPr>
-              <a:t>  release-manager (3fe67dd99150)</a:t>
+              <a:t>  release-manager (2f0312b7fcdc)</a:t>
             </a:r>
             <a:endParaRPr lang="en-US" sz="1000" dirty="0"/>
           </a:p>
@@ -7511,7 +7511,7 @@
                 <a:ea typeface="Courier New" pitchFamily="34" charset="-122"/>
                 <a:cs typeface="Courier New" pitchFamily="34" charset="-120"/>
               </a:rPr>
-              <a:t>  gate" -m "SDLC-Approval: basic-arithmetic:release:3fe67dd99150"</a:t>
+              <a:t>  gate" -m "SDLC-Approval: basic-arithmetic:release:2f0312b7fcdc"</a:t>
             </a:r>
             <a:endParaRPr lang="en-US" sz="1000" dirty="0"/>
           </a:p>
@@ -7794,7 +7794,7 @@
                 <a:ea typeface="Courier New" pitchFamily="34" charset="-122"/>
                 <a:cs typeface="Courier New" pitchFamily="34" charset="-120"/>
               </a:rPr>
-              <a:t>✓ basic-arithmetic/intent alice valid 8e330ae7 trailer: missing</a:t>
+              <a:t>✓ basic-arithmetic/intent alice valid 11893cb3 trailer: missing</a:t>
             </a:r>
             <a:endParaRPr lang="en-US" sz="1000" dirty="0"/>
           </a:p>
@@ -7811,7 +7811,7 @@
                 <a:ea typeface="Courier New" pitchFamily="34" charset="-122"/>
                 <a:cs typeface="Courier New" pitchFamily="34" charset="-120"/>
               </a:rPr>
-              <a:t>✓ basic-arithmetic/spec alice valid 107c224f trailer: missing</a:t>
+              <a:t>✓ basic-arithmetic/spec alice valid 80d48b3a trailer: missing</a:t>
             </a:r>
             <a:endParaRPr lang="en-US" sz="1000" dirty="0"/>
           </a:p>
@@ -7828,7 +7828,7 @@
                 <a:ea typeface="Courier New" pitchFamily="34" charset="-122"/>
                 <a:cs typeface="Courier New" pitchFamily="34" charset="-120"/>
               </a:rPr>
-              <a:t>✗ basic-arithmetic/plan bob wrong-signer 107c224f trailer: missing</a:t>
+              <a:t>✗ basic-arithmetic/plan bob wrong-signer 80d48b3a trailer: missing</a:t>
             </a:r>
             <a:endParaRPr lang="en-US" sz="1000" dirty="0"/>
           </a:p>
@@ -7845,7 +7845,7 @@
                 <a:ea typeface="Courier New" pitchFamily="34" charset="-122"/>
                 <a:cs typeface="Courier New" pitchFamily="34" charset="-120"/>
               </a:rPr>
-              <a:t>✓ basic-arithmetic/review carol valid 6943d6be trailer: missing</a:t>
+              <a:t>✓ basic-arithmetic/review carol valid 32a5c38f trailer: missing</a:t>
             </a:r>
             <a:endParaRPr lang="en-US" sz="1000" dirty="0"/>
           </a:p>
@@ -7862,7 +7862,7 @@
                 <a:ea typeface="Courier New" pitchFamily="34" charset="-122"/>
                 <a:cs typeface="Courier New" pitchFamily="34" charset="-120"/>
               </a:rPr>
-              <a:t>✓ basic-arithmetic/release alice valid 1b26a563 trailer: missing</a:t>
+              <a:t>✓ basic-arithmetic/release alice valid a7c96875 trailer: missing</a:t>
             </a:r>
             <a:endParaRPr lang="en-US" sz="1000" dirty="0"/>
           </a:p>
@@ -7879,7 +7879,7 @@
                 <a:ea typeface="Courier New" pitchFamily="34" charset="-122"/>
                 <a:cs typeface="Courier New" pitchFamily="34" charset="-120"/>
               </a:rPr>
-              <a:t>✓ openspec/roles.yaml alice@calc.example bootstrap 04d0b1ec</a:t>
+              <a:t>✓ openspec/roles.yaml alice@calc.example bootstrap 0d032022</a:t>
             </a:r>
             <a:endParaRPr lang="en-US" sz="1000" dirty="0"/>
           </a:p>
@@ -8511,7 +8511,7 @@
                 <a:ea typeface="Courier New" pitchFamily="34" charset="-122"/>
                 <a:cs typeface="Courier New" pitchFamily="34" charset="-120"/>
               </a:rPr>
-              <a:t>  openspec\changes\archive\2026-10-12-basic</a:t>
+              <a:t>  openspec\changes\archive\2026-10-13-basic</a:t>
             </a:r>
             <a:endParaRPr lang="en-US" sz="1000" dirty="0"/>
           </a:p>
@@ -14365,7 +14365,7 @@
                 <a:ea typeface="Courier New" pitchFamily="34" charset="-122"/>
                 <a:cs typeface="Courier New" pitchFamily="34" charset="-120"/>
               </a:rPr>
-              <a:t>  archived) · sdlc 0.16.3, license:</a:t>
+              <a:t>  archived) · sdlc 0.17.0, license:</a:t>
             </a:r>
             <a:endParaRPr lang="en-US" sz="1000" dirty="0"/>
           </a:p>
@@ -14552,7 +14552,7 @@
                 <a:ea typeface="Courier New" pitchFamily="34" charset="-122"/>
                 <a:cs typeface="Courier New" pitchFamily="34" charset="-120"/>
               </a:rPr>
-              <a:t>  intent 3 · spec 1 · plan 13 · review 3;</a:t>
+              <a:t>  intent 3 · spec 1 · plan 15 · review 3;</a:t>
             </a:r>
             <a:endParaRPr lang="en-US" sz="1000" dirty="0"/>
           </a:p>
@@ -14886,7 +14886,7 @@
                 <a:ea typeface="Courier New" pitchFamily="34" charset="-122"/>
                 <a:cs typeface="Courier New" pitchFamily="34" charset="-120"/>
               </a:rPr>
-              <a:t>2026-10-12T17:54:32.408Z  gate.review.await</a:t>
+              <a:t>2026-10-13T07:51:23.383Z  gate.review.await</a:t>
             </a:r>
             <a:endParaRPr lang="en-US" sz="1000" dirty="0"/>
           </a:p>
@@ -14920,7 +14920,7 @@
                 <a:ea typeface="Courier New" pitchFamily="34" charset="-122"/>
                 <a:cs typeface="Courier New" pitchFamily="34" charset="-120"/>
               </a:rPr>
-              <a:t>  sha256:3fe67dd9915088930c7427061dc3c5e496</a:t>
+              <a:t>  sha256:2f0312b7fcdcf82af2d8a8c11e7f0c0da5</a:t>
             </a:r>
             <a:endParaRPr lang="en-US" sz="1000" dirty="0"/>
           </a:p>
@@ -14937,7 +14937,7 @@
                 <a:ea typeface="Courier New" pitchFamily="34" charset="-122"/>
                 <a:cs typeface="Courier New" pitchFamily="34" charset="-120"/>
               </a:rPr>
-              <a:t>  c4f349ad9d3f4cd8fd094ebb77aa4a [sdlc</a:t>
+              <a:t>  ef2bc5b8c4a439941d04ae52ba6a5f [sdlc</a:t>
             </a:r>
             <a:endParaRPr lang="en-US" sz="1000" dirty="0"/>
           </a:p>
@@ -14954,7 +14954,7 @@
                 <a:ea typeface="Courier New" pitchFamily="34" charset="-122"/>
                 <a:cs typeface="Courier New" pitchFamily="34" charset="-120"/>
               </a:rPr>
-              <a:t>  0.16.3 · community]</a:t>
+              <a:t>  0.17.0 · community]</a:t>
             </a:r>
             <a:endParaRPr lang="en-US" sz="1000" dirty="0"/>
           </a:p>
@@ -14971,7 +14971,7 @@
                 <a:ea typeface="Courier New" pitchFamily="34" charset="-122"/>
                 <a:cs typeface="Courier New" pitchFamily="34" charset="-120"/>
               </a:rPr>
-              <a:t>2026-10-12T17:54:35.551Z  gate.review.appro</a:t>
+              <a:t>2026-10-13T07:51:26.649Z  gate.review.appro</a:t>
             </a:r>
             <a:endParaRPr lang="en-US" sz="1000" dirty="0"/>
           </a:p>
@@ -15022,7 +15022,7 @@
                 <a:ea typeface="Courier New" pitchFamily="34" charset="-122"/>
                 <a:cs typeface="Courier New" pitchFamily="34" charset="-120"/>
               </a:rPr>
-              <a:t>  [sdlc 0.16.3 · community]</a:t>
+              <a:t>  [sdlc 0.17.0 · community]</a:t>
             </a:r>
             <a:endParaRPr lang="en-US" sz="1000" dirty="0"/>
           </a:p>
@@ -15039,7 +15039,7 @@
                 <a:ea typeface="Courier New" pitchFamily="34" charset="-122"/>
                 <a:cs typeface="Courier New" pitchFamily="34" charset="-120"/>
               </a:rPr>
-              <a:t>2026-10-12T17:54:41.749Z  gate.release.appr</a:t>
+              <a:t>2026-10-13T07:51:33.058Z  gate.release.appr</a:t>
             </a:r>
             <a:endParaRPr lang="en-US" sz="1000" dirty="0"/>
           </a:p>
@@ -15090,7 +15090,7 @@
                 <a:ea typeface="Courier New" pitchFamily="34" charset="-122"/>
                 <a:cs typeface="Courier New" pitchFamily="34" charset="-120"/>
               </a:rPr>
-              <a:t>  release-manager [sdlc 0.16.3 · community]</a:t>
+              <a:t>  release-manager [sdlc 0.17.0 · community]</a:t>
             </a:r>
             <a:endParaRPr lang="en-US" sz="1000" dirty="0"/>
           </a:p>
@@ -16267,7 +16267,7 @@
                 <a:ea typeface="Courier New" pitchFamily="34" charset="-122"/>
                 <a:cs typeface="Courier New" pitchFamily="34" charset="-120"/>
               </a:rPr>
-              <a:t>✓ test (1.0s)</a:t>
+              <a:t>✓ test (1.1s)</a:t>
             </a:r>
             <a:endParaRPr lang="en-US" sz="1000" dirty="0"/>
           </a:p>
@@ -16284,7 +16284,7 @@
                 <a:ea typeface="Courier New" pitchFamily="34" charset="-122"/>
                 <a:cs typeface="Courier New" pitchFamily="34" charset="-120"/>
               </a:rPr>
-              <a:t>✓ ci-green (ci/pipeline_status, 0.5s)</a:t>
+              <a:t>✓ ci-green (ci/pipeline_status, 0.6s)</a:t>
             </a:r>
             <a:endParaRPr lang="en-US" sz="1000" dirty="0"/>
           </a:p>
@@ -16720,7 +16720,7 @@
                 <a:ea typeface="Courier New" pitchFamily="34" charset="-122"/>
                 <a:cs typeface="Courier New" pitchFamily="34" charset="-120"/>
               </a:rPr>
-              <a:t>      "id": "20261012T175530725Z-ci-green-1</a:t>
+              <a:t>      "id": "20261013T075223330Z-ci-green-f</a:t>
             </a:r>
             <a:endParaRPr lang="en-US" sz="1000" dirty="0"/>
           </a:p>
@@ -16737,7 +16737,7 @@
                 <a:ea typeface="Courier New" pitchFamily="34" charset="-122"/>
                 <a:cs typeface="Courier New" pitchFamily="34" charset="-120"/>
               </a:rPr>
-              <a:t>  044be",</a:t>
+              <a:t>  fed13",</a:t>
             </a:r>
             <a:endParaRPr lang="en-US" sz="1000" dirty="0"/>
           </a:p>
@@ -16873,7 +16873,7 @@
                 <a:ea typeface="Courier New" pitchFamily="34" charset="-122"/>
                 <a:cs typeface="Courier New" pitchFamily="34" charset="-120"/>
               </a:rPr>
-              <a:t>        "ref": "aab87b1053d604eadb8b3cb8dcd</a:t>
+              <a:t>        "ref": "2a037004327e7616149ed05101a</a:t>
             </a:r>
             <a:endParaRPr lang="en-US" sz="1000" dirty="0"/>
           </a:p>
@@ -16890,7 +16890,7 @@
                 <a:ea typeface="Courier New" pitchFamily="34" charset="-122"/>
                 <a:cs typeface="Courier New" pitchFamily="34" charset="-120"/>
               </a:rPr>
-              <a:t>  77474e4b0fd75",</a:t>
+              <a:t>  9f1aa1358dc93",</a:t>
             </a:r>
             <a:endParaRPr lang="en-US" sz="1000" dirty="0"/>
           </a:p>
@@ -19266,7 +19266,7 @@
                 <a:ea typeface="Cambria" pitchFamily="34" charset="-122"/>
                 <a:cs typeface="Cambria" pitchFamily="34" charset="-120"/>
               </a:rPr>
-              <a:t>103</a:t>
+              <a:t>104</a:t>
             </a:r>
             <a:endParaRPr lang="en-US" sz="6000" dirty="0"/>
           </a:p>
@@ -19371,7 +19371,7 @@
                 <a:ea typeface="Cambria" pitchFamily="34" charset="-122"/>
                 <a:cs typeface="Cambria" pitchFamily="34" charset="-120"/>
               </a:rPr>
-              <a:t>71</a:t>
+              <a:t>72</a:t>
             </a:r>
             <a:endParaRPr lang="en-US" sz="6000" dirty="0"/>
           </a:p>
@@ -19410,7 +19410,7 @@
                 <a:ea typeface="Calibri" pitchFamily="34" charset="-122"/>
                 <a:cs typeface="Calibri" pitchFamily="34" charset="-120"/>
               </a:rPr>
-              <a:t>of 71 commands</a:t>
+              <a:t>of 72 commands</a:t>
             </a:r>
             <a:endParaRPr lang="en-US" sz="1600" dirty="0"/>
           </a:p>
@@ -19899,7 +19899,7 @@
         <p:spPr>
           <a:xfrm>
             <a:off x="4210304" y="3749040"/>
-            <a:ext cx="813816" cy="256032"/>
+            <a:ext cx="681736" cy="256032"/>
           </a:xfrm>
           <a:prstGeom prst="roundRect">
             <a:avLst>
@@ -19926,7 +19926,7 @@
         <p:spPr>
           <a:xfrm>
             <a:off x="4210304" y="3749040"/>
-            <a:ext cx="813816" cy="256032"/>
+            <a:ext cx="681736" cy="256032"/>
           </a:xfrm>
           <a:prstGeom prst="rect">
             <a:avLst/>
@@ -19950,7 +19950,7 @@
                 <a:ea typeface="Calibri" pitchFamily="34" charset="-122"/>
                 <a:cs typeface="Calibri" pitchFamily="34" charset="-120"/>
               </a:rPr>
-              <a:t>team sync</a:t>
+              <a:t>ci init</a:t>
             </a:r>
             <a:endParaRPr lang="en-US" sz="1000" dirty="0"/>
           </a:p>
@@ -19964,8 +19964,8 @@
         </p:nvSpPr>
         <p:spPr>
           <a:xfrm>
-            <a:off x="5115560" y="3749040"/>
-            <a:ext cx="945896" cy="256032"/>
+            <a:off x="4983480" y="3749040"/>
+            <a:ext cx="813816" cy="256032"/>
           </a:xfrm>
           <a:prstGeom prst="roundRect">
             <a:avLst>
@@ -19991,8 +19991,8 @@
         </p:nvSpPr>
         <p:spPr>
           <a:xfrm>
-            <a:off x="5115560" y="3749040"/>
-            <a:ext cx="945896" cy="256032"/>
+            <a:off x="4983480" y="3749040"/>
+            <a:ext cx="813816" cy="256032"/>
           </a:xfrm>
           <a:prstGeom prst="rect">
             <a:avLst/>
@@ -20016,7 +20016,7 @@
                 <a:ea typeface="Calibri" pitchFamily="34" charset="-122"/>
                 <a:cs typeface="Calibri" pitchFamily="34" charset="-120"/>
               </a:rPr>
-              <a:t>team accept</a:t>
+              <a:t>team sync</a:t>
             </a:r>
             <a:endParaRPr lang="en-US" sz="1000" dirty="0"/>
           </a:p>
@@ -20030,8 +20030,8 @@
         </p:nvSpPr>
         <p:spPr>
           <a:xfrm>
-            <a:off x="6152896" y="3749040"/>
-            <a:ext cx="813816" cy="256032"/>
+            <a:off x="5888736" y="3749040"/>
+            <a:ext cx="945896" cy="256032"/>
           </a:xfrm>
           <a:prstGeom prst="roundRect">
             <a:avLst>
@@ -20057,8 +20057,8 @@
         </p:nvSpPr>
         <p:spPr>
           <a:xfrm>
-            <a:off x="6152896" y="3749040"/>
-            <a:ext cx="813816" cy="256032"/>
+            <a:off x="5888736" y="3749040"/>
+            <a:ext cx="945896" cy="256032"/>
           </a:xfrm>
           <a:prstGeom prst="rect">
             <a:avLst/>
@@ -20082,7 +20082,7 @@
                 <a:ea typeface="Calibri" pitchFamily="34" charset="-122"/>
                 <a:cs typeface="Calibri" pitchFamily="34" charset="-120"/>
               </a:rPr>
-              <a:t>team list</a:t>
+              <a:t>team accept</a:t>
             </a:r>
             <a:endParaRPr lang="en-US" sz="1000" dirty="0"/>
           </a:p>
@@ -20096,8 +20096,8 @@
         </p:nvSpPr>
         <p:spPr>
           <a:xfrm>
-            <a:off x="7058152" y="3749040"/>
-            <a:ext cx="879856" cy="256032"/>
+            <a:off x="6926072" y="3749040"/>
+            <a:ext cx="813816" cy="256032"/>
           </a:xfrm>
           <a:prstGeom prst="roundRect">
             <a:avLst>
@@ -20123,8 +20123,8 @@
         </p:nvSpPr>
         <p:spPr>
           <a:xfrm>
-            <a:off x="7058152" y="3749040"/>
-            <a:ext cx="879856" cy="256032"/>
+            <a:off x="6926072" y="3749040"/>
+            <a:ext cx="813816" cy="256032"/>
           </a:xfrm>
           <a:prstGeom prst="rect">
             <a:avLst/>
@@ -20148,7 +20148,7 @@
                 <a:ea typeface="Calibri" pitchFamily="34" charset="-122"/>
                 <a:cs typeface="Calibri" pitchFamily="34" charset="-120"/>
               </a:rPr>
-              <a:t>team check</a:t>
+              <a:t>team list</a:t>
             </a:r>
             <a:endParaRPr lang="en-US" sz="1000" dirty="0"/>
           </a:p>
@@ -20162,8 +20162,8 @@
         </p:nvSpPr>
         <p:spPr>
           <a:xfrm>
-            <a:off x="8029448" y="3749040"/>
-            <a:ext cx="1276096" cy="256032"/>
+            <a:off x="7831328" y="3749040"/>
+            <a:ext cx="879856" cy="256032"/>
           </a:xfrm>
           <a:prstGeom prst="roundRect">
             <a:avLst>
@@ -20189,8 +20189,8 @@
         </p:nvSpPr>
         <p:spPr>
           <a:xfrm>
-            <a:off x="8029448" y="3749040"/>
-            <a:ext cx="1276096" cy="256032"/>
+            <a:off x="7831328" y="3749040"/>
+            <a:ext cx="879856" cy="256032"/>
           </a:xfrm>
           <a:prstGeom prst="rect">
             <a:avLst/>
@@ -20214,7 +20214,7 @@
                 <a:ea typeface="Calibri" pitchFamily="34" charset="-122"/>
                 <a:cs typeface="Calibri" pitchFamily="34" charset="-120"/>
               </a:rPr>
-              <a:t>backlog epic add</a:t>
+              <a:t>team check</a:t>
             </a:r>
             <a:endParaRPr lang="en-US" sz="1000" dirty="0"/>
           </a:p>
@@ -20228,8 +20228,8 @@
         </p:nvSpPr>
         <p:spPr>
           <a:xfrm>
-            <a:off x="9396984" y="3749040"/>
-            <a:ext cx="1342136" cy="256032"/>
+            <a:off x="8802624" y="3749040"/>
+            <a:ext cx="1276096" cy="256032"/>
           </a:xfrm>
           <a:prstGeom prst="roundRect">
             <a:avLst>
@@ -20255,8 +20255,8 @@
         </p:nvSpPr>
         <p:spPr>
           <a:xfrm>
-            <a:off x="9396984" y="3749040"/>
-            <a:ext cx="1342136" cy="256032"/>
+            <a:off x="8802624" y="3749040"/>
+            <a:ext cx="1276096" cy="256032"/>
           </a:xfrm>
           <a:prstGeom prst="rect">
             <a:avLst/>
@@ -20280,7 +20280,7 @@
                 <a:ea typeface="Calibri" pitchFamily="34" charset="-122"/>
                 <a:cs typeface="Calibri" pitchFamily="34" charset="-120"/>
               </a:rPr>
-              <a:t>backlog epic edit</a:t>
+              <a:t>backlog epic add</a:t>
             </a:r>
             <a:endParaRPr lang="en-US" sz="1000" dirty="0"/>
           </a:p>
@@ -20294,8 +20294,8 @@
         </p:nvSpPr>
         <p:spPr>
           <a:xfrm>
-            <a:off x="457200" y="4096512"/>
-            <a:ext cx="945896" cy="256032"/>
+            <a:off x="10170160" y="3749040"/>
+            <a:ext cx="1342136" cy="256032"/>
           </a:xfrm>
           <a:prstGeom prst="roundRect">
             <a:avLst>
@@ -20321,47 +20321,47 @@
         </p:nvSpPr>
         <p:spPr>
           <a:xfrm>
+            <a:off x="10170160" y="3749040"/>
+            <a:ext cx="1342136" cy="256032"/>
+          </a:xfrm>
+          <a:prstGeom prst="rect">
+            <a:avLst/>
+          </a:prstGeom>
+          <a:noFill/>
+          <a:ln/>
+        </p:spPr>
+        <p:txBody>
+          <a:bodyPr wrap="square" lIns="0" tIns="0" rIns="0" bIns="0" rtlCol="0" anchor="ctr"/>
+          <a:lstStyle/>
+          <a:p>
+            <a:pPr algn="ctr" indent="0" marL="0">
+              <a:buNone/>
+            </a:pPr>
+            <a:r>
+              <a:rPr lang="en-US" sz="1000" dirty="0">
+                <a:solidFill>
+                  <a:srgbClr val="1F2430"/>
+                </a:solidFill>
+                <a:latin typeface="Calibri" pitchFamily="34" charset="0"/>
+                <a:ea typeface="Calibri" pitchFamily="34" charset="-122"/>
+                <a:cs typeface="Calibri" pitchFamily="34" charset="-120"/>
+              </a:rPr>
+              <a:t>backlog epic edit</a:t>
+            </a:r>
+            <a:endParaRPr lang="en-US" sz="1000" dirty="0"/>
+          </a:p>
+        </p:txBody>
+      </p:sp>
+      <p:sp>
+        <p:nvSpPr>
+          <p:cNvPr id="38" name="Shape 36"/>
+          <p:cNvSpPr/>
+          <p:nvPr/>
+        </p:nvSpPr>
+        <p:spPr>
+          <a:xfrm>
             <a:off x="457200" y="4096512"/>
             <a:ext cx="945896" cy="256032"/>
-          </a:xfrm>
-          <a:prstGeom prst="rect">
-            <a:avLst/>
-          </a:prstGeom>
-          <a:noFill/>
-          <a:ln/>
-        </p:spPr>
-        <p:txBody>
-          <a:bodyPr wrap="square" lIns="0" tIns="0" rIns="0" bIns="0" rtlCol="0" anchor="ctr"/>
-          <a:lstStyle/>
-          <a:p>
-            <a:pPr algn="ctr" indent="0" marL="0">
-              <a:buNone/>
-            </a:pPr>
-            <a:r>
-              <a:rPr lang="en-US" sz="1000" dirty="0">
-                <a:solidFill>
-                  <a:srgbClr val="1F2430"/>
-                </a:solidFill>
-                <a:latin typeface="Calibri" pitchFamily="34" charset="0"/>
-                <a:ea typeface="Calibri" pitchFamily="34" charset="-122"/>
-                <a:cs typeface="Calibri" pitchFamily="34" charset="-120"/>
-              </a:rPr>
-              <a:t>backlog add</a:t>
-            </a:r>
-            <a:endParaRPr lang="en-US" sz="1000" dirty="0"/>
-          </a:p>
-        </p:txBody>
-      </p:sp>
-      <p:sp>
-        <p:nvSpPr>
-          <p:cNvPr id="38" name="Shape 36"/>
-          <p:cNvSpPr/>
-          <p:nvPr/>
-        </p:nvSpPr>
-        <p:spPr>
-          <a:xfrm>
-            <a:off x="1494536" y="4096512"/>
-            <a:ext cx="1011936" cy="256032"/>
           </a:xfrm>
           <a:prstGeom prst="roundRect">
             <a:avLst>
@@ -20387,8 +20387,8 @@
         </p:nvSpPr>
         <p:spPr>
           <a:xfrm>
-            <a:off x="1494536" y="4096512"/>
-            <a:ext cx="1011936" cy="256032"/>
+            <a:off x="457200" y="4096512"/>
+            <a:ext cx="945896" cy="256032"/>
           </a:xfrm>
           <a:prstGeom prst="rect">
             <a:avLst/>
@@ -20412,7 +20412,7 @@
                 <a:ea typeface="Calibri" pitchFamily="34" charset="-122"/>
                 <a:cs typeface="Calibri" pitchFamily="34" charset="-120"/>
               </a:rPr>
-              <a:t>backlog edit</a:t>
+              <a:t>backlog add</a:t>
             </a:r>
             <a:endParaRPr lang="en-US" sz="1000" dirty="0"/>
           </a:p>
@@ -20426,7 +20426,7 @@
         </p:nvSpPr>
         <p:spPr>
           <a:xfrm>
-            <a:off x="2597912" y="4096512"/>
+            <a:off x="1494536" y="4096512"/>
             <a:ext cx="1011936" cy="256032"/>
           </a:xfrm>
           <a:prstGeom prst="roundRect">
@@ -20453,7 +20453,7 @@
         </p:nvSpPr>
         <p:spPr>
           <a:xfrm>
-            <a:off x="2597912" y="4096512"/>
+            <a:off x="1494536" y="4096512"/>
             <a:ext cx="1011936" cy="256032"/>
           </a:xfrm>
           <a:prstGeom prst="rect">
@@ -20478,7 +20478,7 @@
                 <a:ea typeface="Calibri" pitchFamily="34" charset="-122"/>
                 <a:cs typeface="Calibri" pitchFamily="34" charset="-120"/>
               </a:rPr>
-              <a:t>backlog list</a:t>
+              <a:t>backlog edit</a:t>
             </a:r>
             <a:endParaRPr lang="en-US" sz="1000" dirty="0"/>
           </a:p>
@@ -20492,7 +20492,7 @@
         </p:nvSpPr>
         <p:spPr>
           <a:xfrm>
-            <a:off x="3701288" y="4096512"/>
+            <a:off x="2597912" y="4096512"/>
             <a:ext cx="1011936" cy="256032"/>
           </a:xfrm>
           <a:prstGeom prst="roundRect">
@@ -20519,47 +20519,47 @@
         </p:nvSpPr>
         <p:spPr>
           <a:xfrm>
+            <a:off x="2597912" y="4096512"/>
+            <a:ext cx="1011936" cy="256032"/>
+          </a:xfrm>
+          <a:prstGeom prst="rect">
+            <a:avLst/>
+          </a:prstGeom>
+          <a:noFill/>
+          <a:ln/>
+        </p:spPr>
+        <p:txBody>
+          <a:bodyPr wrap="square" lIns="0" tIns="0" rIns="0" bIns="0" rtlCol="0" anchor="ctr"/>
+          <a:lstStyle/>
+          <a:p>
+            <a:pPr algn="ctr" indent="0" marL="0">
+              <a:buNone/>
+            </a:pPr>
+            <a:r>
+              <a:rPr lang="en-US" sz="1000" dirty="0">
+                <a:solidFill>
+                  <a:srgbClr val="1F2430"/>
+                </a:solidFill>
+                <a:latin typeface="Calibri" pitchFamily="34" charset="0"/>
+                <a:ea typeface="Calibri" pitchFamily="34" charset="-122"/>
+                <a:cs typeface="Calibri" pitchFamily="34" charset="-120"/>
+              </a:rPr>
+              <a:t>backlog list</a:t>
+            </a:r>
+            <a:endParaRPr lang="en-US" sz="1000" dirty="0"/>
+          </a:p>
+        </p:txBody>
+      </p:sp>
+      <p:sp>
+        <p:nvSpPr>
+          <p:cNvPr id="44" name="Shape 42"/>
+          <p:cNvSpPr/>
+          <p:nvPr/>
+        </p:nvSpPr>
+        <p:spPr>
+          <a:xfrm>
             <a:off x="3701288" y="4096512"/>
             <a:ext cx="1011936" cy="256032"/>
-          </a:xfrm>
-          <a:prstGeom prst="rect">
-            <a:avLst/>
-          </a:prstGeom>
-          <a:noFill/>
-          <a:ln/>
-        </p:spPr>
-        <p:txBody>
-          <a:bodyPr wrap="square" lIns="0" tIns="0" rIns="0" bIns="0" rtlCol="0" anchor="ctr"/>
-          <a:lstStyle/>
-          <a:p>
-            <a:pPr algn="ctr" indent="0" marL="0">
-              <a:buNone/>
-            </a:pPr>
-            <a:r>
-              <a:rPr lang="en-US" sz="1000" dirty="0">
-                <a:solidFill>
-                  <a:srgbClr val="1F2430"/>
-                </a:solidFill>
-                <a:latin typeface="Calibri" pitchFamily="34" charset="0"/>
-                <a:ea typeface="Calibri" pitchFamily="34" charset="-122"/>
-                <a:cs typeface="Calibri" pitchFamily="34" charset="-120"/>
-              </a:rPr>
-              <a:t>backlog next</a:t>
-            </a:r>
-            <a:endParaRPr lang="en-US" sz="1000" dirty="0"/>
-          </a:p>
-        </p:txBody>
-      </p:sp>
-      <p:sp>
-        <p:nvSpPr>
-          <p:cNvPr id="44" name="Shape 42"/>
-          <p:cNvSpPr/>
-          <p:nvPr/>
-        </p:nvSpPr>
-        <p:spPr>
-          <a:xfrm>
-            <a:off x="4804664" y="4096512"/>
-            <a:ext cx="1077976" cy="256032"/>
           </a:xfrm>
           <a:prstGeom prst="roundRect">
             <a:avLst>
@@ -20585,47 +20585,47 @@
         </p:nvSpPr>
         <p:spPr>
           <a:xfrm>
+            <a:off x="3701288" y="4096512"/>
+            <a:ext cx="1011936" cy="256032"/>
+          </a:xfrm>
+          <a:prstGeom prst="rect">
+            <a:avLst/>
+          </a:prstGeom>
+          <a:noFill/>
+          <a:ln/>
+        </p:spPr>
+        <p:txBody>
+          <a:bodyPr wrap="square" lIns="0" tIns="0" rIns="0" bIns="0" rtlCol="0" anchor="ctr"/>
+          <a:lstStyle/>
+          <a:p>
+            <a:pPr algn="ctr" indent="0" marL="0">
+              <a:buNone/>
+            </a:pPr>
+            <a:r>
+              <a:rPr lang="en-US" sz="1000" dirty="0">
+                <a:solidFill>
+                  <a:srgbClr val="1F2430"/>
+                </a:solidFill>
+                <a:latin typeface="Calibri" pitchFamily="34" charset="0"/>
+                <a:ea typeface="Calibri" pitchFamily="34" charset="-122"/>
+                <a:cs typeface="Calibri" pitchFamily="34" charset="-120"/>
+              </a:rPr>
+              <a:t>backlog next</a:t>
+            </a:r>
+            <a:endParaRPr lang="en-US" sz="1000" dirty="0"/>
+          </a:p>
+        </p:txBody>
+      </p:sp>
+      <p:sp>
+        <p:nvSpPr>
+          <p:cNvPr id="46" name="Shape 44"/>
+          <p:cNvSpPr/>
+          <p:nvPr/>
+        </p:nvSpPr>
+        <p:spPr>
+          <a:xfrm>
             <a:off x="4804664" y="4096512"/>
             <a:ext cx="1077976" cy="256032"/>
-          </a:xfrm>
-          <a:prstGeom prst="rect">
-            <a:avLst/>
-          </a:prstGeom>
-          <a:noFill/>
-          <a:ln/>
-        </p:spPr>
-        <p:txBody>
-          <a:bodyPr wrap="square" lIns="0" tIns="0" rIns="0" bIns="0" rtlCol="0" anchor="ctr"/>
-          <a:lstStyle/>
-          <a:p>
-            <a:pPr algn="ctr" indent="0" marL="0">
-              <a:buNone/>
-            </a:pPr>
-            <a:r>
-              <a:rPr lang="en-US" sz="1000" dirty="0">
-                <a:solidFill>
-                  <a:srgbClr val="1F2430"/>
-                </a:solidFill>
-                <a:latin typeface="Calibri" pitchFamily="34" charset="0"/>
-                <a:ea typeface="Calibri" pitchFamily="34" charset="-122"/>
-                <a:cs typeface="Calibri" pitchFamily="34" charset="-120"/>
-              </a:rPr>
-              <a:t>backlog start</a:t>
-            </a:r>
-            <a:endParaRPr lang="en-US" sz="1000" dirty="0"/>
-          </a:p>
-        </p:txBody>
-      </p:sp>
-      <p:sp>
-        <p:nvSpPr>
-          <p:cNvPr id="46" name="Shape 44"/>
-          <p:cNvSpPr/>
-          <p:nvPr/>
-        </p:nvSpPr>
-        <p:spPr>
-          <a:xfrm>
-            <a:off x="5974080" y="4096512"/>
-            <a:ext cx="1011936" cy="256032"/>
           </a:xfrm>
           <a:prstGeom prst="roundRect">
             <a:avLst>
@@ -20651,8 +20651,8 @@
         </p:nvSpPr>
         <p:spPr>
           <a:xfrm>
-            <a:off x="5974080" y="4096512"/>
-            <a:ext cx="1011936" cy="256032"/>
+            <a:off x="4804664" y="4096512"/>
+            <a:ext cx="1077976" cy="256032"/>
           </a:xfrm>
           <a:prstGeom prst="rect">
             <a:avLst/>
@@ -20676,7 +20676,7 @@
                 <a:ea typeface="Calibri" pitchFamily="34" charset="-122"/>
                 <a:cs typeface="Calibri" pitchFamily="34" charset="-120"/>
               </a:rPr>
-              <a:t>backlog move</a:t>
+              <a:t>backlog start</a:t>
             </a:r>
             <a:endParaRPr lang="en-US" sz="1000" dirty="0"/>
           </a:p>
@@ -20690,7 +20690,7 @@
         </p:nvSpPr>
         <p:spPr>
           <a:xfrm>
-            <a:off x="7077456" y="4096512"/>
+            <a:off x="5974080" y="4096512"/>
             <a:ext cx="1011936" cy="256032"/>
           </a:xfrm>
           <a:prstGeom prst="roundRect">
@@ -20717,7 +20717,7 @@
         </p:nvSpPr>
         <p:spPr>
           <a:xfrm>
-            <a:off x="7077456" y="4096512"/>
+            <a:off x="5974080" y="4096512"/>
             <a:ext cx="1011936" cy="256032"/>
           </a:xfrm>
           <a:prstGeom prst="rect">
@@ -20742,7 +20742,7 @@
                 <a:ea typeface="Calibri" pitchFamily="34" charset="-122"/>
                 <a:cs typeface="Calibri" pitchFamily="34" charset="-120"/>
               </a:rPr>
-              <a:t>backlog drop</a:t>
+              <a:t>backlog move</a:t>
             </a:r>
             <a:endParaRPr lang="en-US" sz="1000" dirty="0"/>
           </a:p>
@@ -20756,7 +20756,7 @@
         </p:nvSpPr>
         <p:spPr>
           <a:xfrm>
-            <a:off x="8180832" y="4096512"/>
+            <a:off x="7077456" y="4096512"/>
             <a:ext cx="1011936" cy="256032"/>
           </a:xfrm>
           <a:prstGeom prst="roundRect">
@@ -20783,47 +20783,47 @@
         </p:nvSpPr>
         <p:spPr>
           <a:xfrm>
+            <a:off x="7077456" y="4096512"/>
+            <a:ext cx="1011936" cy="256032"/>
+          </a:xfrm>
+          <a:prstGeom prst="rect">
+            <a:avLst/>
+          </a:prstGeom>
+          <a:noFill/>
+          <a:ln/>
+        </p:spPr>
+        <p:txBody>
+          <a:bodyPr wrap="square" lIns="0" tIns="0" rIns="0" bIns="0" rtlCol="0" anchor="ctr"/>
+          <a:lstStyle/>
+          <a:p>
+            <a:pPr algn="ctr" indent="0" marL="0">
+              <a:buNone/>
+            </a:pPr>
+            <a:r>
+              <a:rPr lang="en-US" sz="1000" dirty="0">
+                <a:solidFill>
+                  <a:srgbClr val="1F2430"/>
+                </a:solidFill>
+                <a:latin typeface="Calibri" pitchFamily="34" charset="0"/>
+                <a:ea typeface="Calibri" pitchFamily="34" charset="-122"/>
+                <a:cs typeface="Calibri" pitchFamily="34" charset="-120"/>
+              </a:rPr>
+              <a:t>backlog drop</a:t>
+            </a:r>
+            <a:endParaRPr lang="en-US" sz="1000" dirty="0"/>
+          </a:p>
+        </p:txBody>
+      </p:sp>
+      <p:sp>
+        <p:nvSpPr>
+          <p:cNvPr id="52" name="Shape 50"/>
+          <p:cNvSpPr/>
+          <p:nvPr/>
+        </p:nvSpPr>
+        <p:spPr>
+          <a:xfrm>
             <a:off x="8180832" y="4096512"/>
             <a:ext cx="1011936" cy="256032"/>
-          </a:xfrm>
-          <a:prstGeom prst="rect">
-            <a:avLst/>
-          </a:prstGeom>
-          <a:noFill/>
-          <a:ln/>
-        </p:spPr>
-        <p:txBody>
-          <a:bodyPr wrap="square" lIns="0" tIns="0" rIns="0" bIns="0" rtlCol="0" anchor="ctr"/>
-          <a:lstStyle/>
-          <a:p>
-            <a:pPr algn="ctr" indent="0" marL="0">
-              <a:buNone/>
-            </a:pPr>
-            <a:r>
-              <a:rPr lang="en-US" sz="1000" dirty="0">
-                <a:solidFill>
-                  <a:srgbClr val="1F2430"/>
-                </a:solidFill>
-                <a:latin typeface="Calibri" pitchFamily="34" charset="0"/>
-                <a:ea typeface="Calibri" pitchFamily="34" charset="-122"/>
-                <a:cs typeface="Calibri" pitchFamily="34" charset="-120"/>
-              </a:rPr>
-              <a:t>backlog done</a:t>
-            </a:r>
-            <a:endParaRPr lang="en-US" sz="1000" dirty="0"/>
-          </a:p>
-        </p:txBody>
-      </p:sp>
-      <p:sp>
-        <p:nvSpPr>
-          <p:cNvPr id="52" name="Shape 50"/>
-          <p:cNvSpPr/>
-          <p:nvPr/>
-        </p:nvSpPr>
-        <p:spPr>
-          <a:xfrm>
-            <a:off x="9284208" y="4096512"/>
-            <a:ext cx="813816" cy="256032"/>
           </a:xfrm>
           <a:prstGeom prst="roundRect">
             <a:avLst>
@@ -20849,47 +20849,47 @@
         </p:nvSpPr>
         <p:spPr>
           <a:xfrm>
+            <a:off x="8180832" y="4096512"/>
+            <a:ext cx="1011936" cy="256032"/>
+          </a:xfrm>
+          <a:prstGeom prst="rect">
+            <a:avLst/>
+          </a:prstGeom>
+          <a:noFill/>
+          <a:ln/>
+        </p:spPr>
+        <p:txBody>
+          <a:bodyPr wrap="square" lIns="0" tIns="0" rIns="0" bIns="0" rtlCol="0" anchor="ctr"/>
+          <a:lstStyle/>
+          <a:p>
+            <a:pPr algn="ctr" indent="0" marL="0">
+              <a:buNone/>
+            </a:pPr>
+            <a:r>
+              <a:rPr lang="en-US" sz="1000" dirty="0">
+                <a:solidFill>
+                  <a:srgbClr val="1F2430"/>
+                </a:solidFill>
+                <a:latin typeface="Calibri" pitchFamily="34" charset="0"/>
+                <a:ea typeface="Calibri" pitchFamily="34" charset="-122"/>
+                <a:cs typeface="Calibri" pitchFamily="34" charset="-120"/>
+              </a:rPr>
+              <a:t>backlog done</a:t>
+            </a:r>
+            <a:endParaRPr lang="en-US" sz="1000" dirty="0"/>
+          </a:p>
+        </p:txBody>
+      </p:sp>
+      <p:sp>
+        <p:nvSpPr>
+          <p:cNvPr id="54" name="Shape 52"/>
+          <p:cNvSpPr/>
+          <p:nvPr/>
+        </p:nvSpPr>
+        <p:spPr>
+          <a:xfrm>
             <a:off x="9284208" y="4096512"/>
             <a:ext cx="813816" cy="256032"/>
-          </a:xfrm>
-          <a:prstGeom prst="rect">
-            <a:avLst/>
-          </a:prstGeom>
-          <a:noFill/>
-          <a:ln/>
-        </p:spPr>
-        <p:txBody>
-          <a:bodyPr wrap="square" lIns="0" tIns="0" rIns="0" bIns="0" rtlCol="0" anchor="ctr"/>
-          <a:lstStyle/>
-          <a:p>
-            <a:pPr algn="ctr" indent="0" marL="0">
-              <a:buNone/>
-            </a:pPr>
-            <a:r>
-              <a:rPr lang="en-US" sz="1000" dirty="0">
-                <a:solidFill>
-                  <a:srgbClr val="1F2430"/>
-                </a:solidFill>
-                <a:latin typeface="Calibri" pitchFamily="34" charset="0"/>
-                <a:ea typeface="Calibri" pitchFamily="34" charset="-122"/>
-                <a:cs typeface="Calibri" pitchFamily="34" charset="-120"/>
-              </a:rPr>
-              <a:t>defer add</a:t>
-            </a:r>
-            <a:endParaRPr lang="en-US" sz="1000" dirty="0"/>
-          </a:p>
-        </p:txBody>
-      </p:sp>
-      <p:sp>
-        <p:nvSpPr>
-          <p:cNvPr id="54" name="Shape 52"/>
-          <p:cNvSpPr/>
-          <p:nvPr/>
-        </p:nvSpPr>
-        <p:spPr>
-          <a:xfrm>
-            <a:off x="10189464" y="4096512"/>
-            <a:ext cx="879856" cy="256032"/>
           </a:xfrm>
           <a:prstGeom prst="roundRect">
             <a:avLst>
@@ -20915,47 +20915,47 @@
         </p:nvSpPr>
         <p:spPr>
           <a:xfrm>
+            <a:off x="9284208" y="4096512"/>
+            <a:ext cx="813816" cy="256032"/>
+          </a:xfrm>
+          <a:prstGeom prst="rect">
+            <a:avLst/>
+          </a:prstGeom>
+          <a:noFill/>
+          <a:ln/>
+        </p:spPr>
+        <p:txBody>
+          <a:bodyPr wrap="square" lIns="0" tIns="0" rIns="0" bIns="0" rtlCol="0" anchor="ctr"/>
+          <a:lstStyle/>
+          <a:p>
+            <a:pPr algn="ctr" indent="0" marL="0">
+              <a:buNone/>
+            </a:pPr>
+            <a:r>
+              <a:rPr lang="en-US" sz="1000" dirty="0">
+                <a:solidFill>
+                  <a:srgbClr val="1F2430"/>
+                </a:solidFill>
+                <a:latin typeface="Calibri" pitchFamily="34" charset="0"/>
+                <a:ea typeface="Calibri" pitchFamily="34" charset="-122"/>
+                <a:cs typeface="Calibri" pitchFamily="34" charset="-120"/>
+              </a:rPr>
+              <a:t>defer add</a:t>
+            </a:r>
+            <a:endParaRPr lang="en-US" sz="1000" dirty="0"/>
+          </a:p>
+        </p:txBody>
+      </p:sp>
+      <p:sp>
+        <p:nvSpPr>
+          <p:cNvPr id="56" name="Shape 54"/>
+          <p:cNvSpPr/>
+          <p:nvPr/>
+        </p:nvSpPr>
+        <p:spPr>
+          <a:xfrm>
             <a:off x="10189464" y="4096512"/>
             <a:ext cx="879856" cy="256032"/>
-          </a:xfrm>
-          <a:prstGeom prst="rect">
-            <a:avLst/>
-          </a:prstGeom>
-          <a:noFill/>
-          <a:ln/>
-        </p:spPr>
-        <p:txBody>
-          <a:bodyPr wrap="square" lIns="0" tIns="0" rIns="0" bIns="0" rtlCol="0" anchor="ctr"/>
-          <a:lstStyle/>
-          <a:p>
-            <a:pPr algn="ctr" indent="0" marL="0">
-              <a:buNone/>
-            </a:pPr>
-            <a:r>
-              <a:rPr lang="en-US" sz="1000" dirty="0">
-                <a:solidFill>
-                  <a:srgbClr val="1F2430"/>
-                </a:solidFill>
-                <a:latin typeface="Calibri" pitchFamily="34" charset="0"/>
-                <a:ea typeface="Calibri" pitchFamily="34" charset="-122"/>
-                <a:cs typeface="Calibri" pitchFamily="34" charset="-120"/>
-              </a:rPr>
-              <a:t>defer list</a:t>
-            </a:r>
-            <a:endParaRPr lang="en-US" sz="1000" dirty="0"/>
-          </a:p>
-        </p:txBody>
-      </p:sp>
-      <p:sp>
-        <p:nvSpPr>
-          <p:cNvPr id="56" name="Shape 54"/>
-          <p:cNvSpPr/>
-          <p:nvPr/>
-        </p:nvSpPr>
-        <p:spPr>
-          <a:xfrm>
-            <a:off x="457200" y="4443984"/>
-            <a:ext cx="945896" cy="256032"/>
           </a:xfrm>
           <a:prstGeom prst="roundRect">
             <a:avLst>
@@ -20981,47 +20981,47 @@
         </p:nvSpPr>
         <p:spPr>
           <a:xfrm>
+            <a:off x="10189464" y="4096512"/>
+            <a:ext cx="879856" cy="256032"/>
+          </a:xfrm>
+          <a:prstGeom prst="rect">
+            <a:avLst/>
+          </a:prstGeom>
+          <a:noFill/>
+          <a:ln/>
+        </p:spPr>
+        <p:txBody>
+          <a:bodyPr wrap="square" lIns="0" tIns="0" rIns="0" bIns="0" rtlCol="0" anchor="ctr"/>
+          <a:lstStyle/>
+          <a:p>
+            <a:pPr algn="ctr" indent="0" marL="0">
+              <a:buNone/>
+            </a:pPr>
+            <a:r>
+              <a:rPr lang="en-US" sz="1000" dirty="0">
+                <a:solidFill>
+                  <a:srgbClr val="1F2430"/>
+                </a:solidFill>
+                <a:latin typeface="Calibri" pitchFamily="34" charset="0"/>
+                <a:ea typeface="Calibri" pitchFamily="34" charset="-122"/>
+                <a:cs typeface="Calibri" pitchFamily="34" charset="-120"/>
+              </a:rPr>
+              <a:t>defer list</a:t>
+            </a:r>
+            <a:endParaRPr lang="en-US" sz="1000" dirty="0"/>
+          </a:p>
+        </p:txBody>
+      </p:sp>
+      <p:sp>
+        <p:nvSpPr>
+          <p:cNvPr id="58" name="Shape 56"/>
+          <p:cNvSpPr/>
+          <p:nvPr/>
+        </p:nvSpPr>
+        <p:spPr>
+          <a:xfrm>
             <a:off x="457200" y="4443984"/>
             <a:ext cx="945896" cy="256032"/>
-          </a:xfrm>
-          <a:prstGeom prst="rect">
-            <a:avLst/>
-          </a:prstGeom>
-          <a:noFill/>
-          <a:ln/>
-        </p:spPr>
-        <p:txBody>
-          <a:bodyPr wrap="square" lIns="0" tIns="0" rIns="0" bIns="0" rtlCol="0" anchor="ctr"/>
-          <a:lstStyle/>
-          <a:p>
-            <a:pPr algn="ctr" indent="0" marL="0">
-              <a:buNone/>
-            </a:pPr>
-            <a:r>
-              <a:rPr lang="en-US" sz="1000" dirty="0">
-                <a:solidFill>
-                  <a:srgbClr val="1F2430"/>
-                </a:solidFill>
-                <a:latin typeface="Calibri" pitchFamily="34" charset="0"/>
-                <a:ea typeface="Calibri" pitchFamily="34" charset="-122"/>
-                <a:cs typeface="Calibri" pitchFamily="34" charset="-120"/>
-              </a:rPr>
-              <a:t>defer close</a:t>
-            </a:r>
-            <a:endParaRPr lang="en-US" sz="1000" dirty="0"/>
-          </a:p>
-        </p:txBody>
-      </p:sp>
-      <p:sp>
-        <p:nvSpPr>
-          <p:cNvPr id="58" name="Shape 56"/>
-          <p:cNvSpPr/>
-          <p:nvPr/>
-        </p:nvSpPr>
-        <p:spPr>
-          <a:xfrm>
-            <a:off x="1494536" y="4443984"/>
-            <a:ext cx="1011936" cy="256032"/>
           </a:xfrm>
           <a:prstGeom prst="roundRect">
             <a:avLst>
@@ -21047,47 +21047,47 @@
         </p:nvSpPr>
         <p:spPr>
           <a:xfrm>
+            <a:off x="457200" y="4443984"/>
+            <a:ext cx="945896" cy="256032"/>
+          </a:xfrm>
+          <a:prstGeom prst="rect">
+            <a:avLst/>
+          </a:prstGeom>
+          <a:noFill/>
+          <a:ln/>
+        </p:spPr>
+        <p:txBody>
+          <a:bodyPr wrap="square" lIns="0" tIns="0" rIns="0" bIns="0" rtlCol="0" anchor="ctr"/>
+          <a:lstStyle/>
+          <a:p>
+            <a:pPr algn="ctr" indent="0" marL="0">
+              <a:buNone/>
+            </a:pPr>
+            <a:r>
+              <a:rPr lang="en-US" sz="1000" dirty="0">
+                <a:solidFill>
+                  <a:srgbClr val="1F2430"/>
+                </a:solidFill>
+                <a:latin typeface="Calibri" pitchFamily="34" charset="0"/>
+                <a:ea typeface="Calibri" pitchFamily="34" charset="-122"/>
+                <a:cs typeface="Calibri" pitchFamily="34" charset="-120"/>
+              </a:rPr>
+              <a:t>defer close</a:t>
+            </a:r>
+            <a:endParaRPr lang="en-US" sz="1000" dirty="0"/>
+          </a:p>
+        </p:txBody>
+      </p:sp>
+      <p:sp>
+        <p:nvSpPr>
+          <p:cNvPr id="60" name="Shape 58"/>
+          <p:cNvSpPr/>
+          <p:nvPr/>
+        </p:nvSpPr>
+        <p:spPr>
+          <a:xfrm>
             <a:off x="1494536" y="4443984"/>
             <a:ext cx="1011936" cy="256032"/>
-          </a:xfrm>
-          <a:prstGeom prst="rect">
-            <a:avLst/>
-          </a:prstGeom>
-          <a:noFill/>
-          <a:ln/>
-        </p:spPr>
-        <p:txBody>
-          <a:bodyPr wrap="square" lIns="0" tIns="0" rIns="0" bIns="0" rtlCol="0" anchor="ctr"/>
-          <a:lstStyle/>
-          <a:p>
-            <a:pPr algn="ctr" indent="0" marL="0">
-              <a:buNone/>
-            </a:pPr>
-            <a:r>
-              <a:rPr lang="en-US" sz="1000" dirty="0">
-                <a:solidFill>
-                  <a:srgbClr val="1F2430"/>
-                </a:solidFill>
-                <a:latin typeface="Calibri" pitchFamily="34" charset="0"/>
-                <a:ea typeface="Calibri" pitchFamily="34" charset="-122"/>
-                <a:cs typeface="Calibri" pitchFamily="34" charset="-120"/>
-              </a:rPr>
-              <a:t>layout check</a:t>
-            </a:r>
-            <a:endParaRPr lang="en-US" sz="1000" dirty="0"/>
-          </a:p>
-        </p:txBody>
-      </p:sp>
-      <p:sp>
-        <p:nvSpPr>
-          <p:cNvPr id="60" name="Shape 58"/>
-          <p:cNvSpPr/>
-          <p:nvPr/>
-        </p:nvSpPr>
-        <p:spPr>
-          <a:xfrm>
-            <a:off x="2597912" y="4443984"/>
-            <a:ext cx="1210056" cy="256032"/>
           </a:xfrm>
           <a:prstGeom prst="roundRect">
             <a:avLst>
@@ -21113,47 +21113,47 @@
         </p:nvSpPr>
         <p:spPr>
           <a:xfrm>
+            <a:off x="1494536" y="4443984"/>
+            <a:ext cx="1011936" cy="256032"/>
+          </a:xfrm>
+          <a:prstGeom prst="rect">
+            <a:avLst/>
+          </a:prstGeom>
+          <a:noFill/>
+          <a:ln/>
+        </p:spPr>
+        <p:txBody>
+          <a:bodyPr wrap="square" lIns="0" tIns="0" rIns="0" bIns="0" rtlCol="0" anchor="ctr"/>
+          <a:lstStyle/>
+          <a:p>
+            <a:pPr algn="ctr" indent="0" marL="0">
+              <a:buNone/>
+            </a:pPr>
+            <a:r>
+              <a:rPr lang="en-US" sz="1000" dirty="0">
+                <a:solidFill>
+                  <a:srgbClr val="1F2430"/>
+                </a:solidFill>
+                <a:latin typeface="Calibri" pitchFamily="34" charset="0"/>
+                <a:ea typeface="Calibri" pitchFamily="34" charset="-122"/>
+                <a:cs typeface="Calibri" pitchFamily="34" charset="-120"/>
+              </a:rPr>
+              <a:t>layout check</a:t>
+            </a:r>
+            <a:endParaRPr lang="en-US" sz="1000" dirty="0"/>
+          </a:p>
+        </p:txBody>
+      </p:sp>
+      <p:sp>
+        <p:nvSpPr>
+          <p:cNvPr id="62" name="Shape 60"/>
+          <p:cNvSpPr/>
+          <p:nvPr/>
+        </p:nvSpPr>
+        <p:spPr>
+          <a:xfrm>
             <a:off x="2597912" y="4443984"/>
             <a:ext cx="1210056" cy="256032"/>
-          </a:xfrm>
-          <a:prstGeom prst="rect">
-            <a:avLst/>
-          </a:prstGeom>
-          <a:noFill/>
-          <a:ln/>
-        </p:spPr>
-        <p:txBody>
-          <a:bodyPr wrap="square" lIns="0" tIns="0" rIns="0" bIns="0" rtlCol="0" anchor="ctr"/>
-          <a:lstStyle/>
-          <a:p>
-            <a:pPr algn="ctr" indent="0" marL="0">
-              <a:buNone/>
-            </a:pPr>
-            <a:r>
-              <a:rPr lang="en-US" sz="1000" dirty="0">
-                <a:solidFill>
-                  <a:srgbClr val="1F2430"/>
-                </a:solidFill>
-                <a:latin typeface="Calibri" pitchFamily="34" charset="0"/>
-                <a:ea typeface="Calibri" pitchFamily="34" charset="-122"/>
-                <a:cs typeface="Calibri" pitchFamily="34" charset="-120"/>
-              </a:rPr>
-              <a:t>layout scaffold</a:t>
-            </a:r>
-            <a:endParaRPr lang="en-US" sz="1000" dirty="0"/>
-          </a:p>
-        </p:txBody>
-      </p:sp>
-      <p:sp>
-        <p:nvSpPr>
-          <p:cNvPr id="62" name="Shape 60"/>
-          <p:cNvSpPr/>
-          <p:nvPr/>
-        </p:nvSpPr>
-        <p:spPr>
-          <a:xfrm>
-            <a:off x="3899408" y="4443984"/>
-            <a:ext cx="1011936" cy="256032"/>
           </a:xfrm>
           <a:prstGeom prst="roundRect">
             <a:avLst>
@@ -21179,47 +21179,47 @@
         </p:nvSpPr>
         <p:spPr>
           <a:xfrm>
+            <a:off x="2597912" y="4443984"/>
+            <a:ext cx="1210056" cy="256032"/>
+          </a:xfrm>
+          <a:prstGeom prst="rect">
+            <a:avLst/>
+          </a:prstGeom>
+          <a:noFill/>
+          <a:ln/>
+        </p:spPr>
+        <p:txBody>
+          <a:bodyPr wrap="square" lIns="0" tIns="0" rIns="0" bIns="0" rtlCol="0" anchor="ctr"/>
+          <a:lstStyle/>
+          <a:p>
+            <a:pPr algn="ctr" indent="0" marL="0">
+              <a:buNone/>
+            </a:pPr>
+            <a:r>
+              <a:rPr lang="en-US" sz="1000" dirty="0">
+                <a:solidFill>
+                  <a:srgbClr val="1F2430"/>
+                </a:solidFill>
+                <a:latin typeface="Calibri" pitchFamily="34" charset="0"/>
+                <a:ea typeface="Calibri" pitchFamily="34" charset="-122"/>
+                <a:cs typeface="Calibri" pitchFamily="34" charset="-120"/>
+              </a:rPr>
+              <a:t>layout scaffold</a:t>
+            </a:r>
+            <a:endParaRPr lang="en-US" sz="1000" dirty="0"/>
+          </a:p>
+        </p:txBody>
+      </p:sp>
+      <p:sp>
+        <p:nvSpPr>
+          <p:cNvPr id="64" name="Shape 62"/>
+          <p:cNvSpPr/>
+          <p:nvPr/>
+        </p:nvSpPr>
+        <p:spPr>
+          <a:xfrm>
             <a:off x="3899408" y="4443984"/>
             <a:ext cx="1011936" cy="256032"/>
-          </a:xfrm>
-          <a:prstGeom prst="rect">
-            <a:avLst/>
-          </a:prstGeom>
-          <a:noFill/>
-          <a:ln/>
-        </p:spPr>
-        <p:txBody>
-          <a:bodyPr wrap="square" lIns="0" tIns="0" rIns="0" bIns="0" rtlCol="0" anchor="ctr"/>
-          <a:lstStyle/>
-          <a:p>
-            <a:pPr algn="ctr" indent="0" marL="0">
-              <a:buNone/>
-            </a:pPr>
-            <a:r>
-              <a:rPr lang="en-US" sz="1000" dirty="0">
-                <a:solidFill>
-                  <a:srgbClr val="1F2430"/>
-                </a:solidFill>
-                <a:latin typeface="Calibri" pitchFamily="34" charset="0"/>
-                <a:ea typeface="Calibri" pitchFamily="34" charset="-122"/>
-                <a:cs typeface="Calibri" pitchFamily="34" charset="-120"/>
-              </a:rPr>
-              <a:t>layout adapt</a:t>
-            </a:r>
-            <a:endParaRPr lang="en-US" sz="1000" dirty="0"/>
-          </a:p>
-        </p:txBody>
-      </p:sp>
-      <p:sp>
-        <p:nvSpPr>
-          <p:cNvPr id="64" name="Shape 62"/>
-          <p:cNvSpPr/>
-          <p:nvPr/>
-        </p:nvSpPr>
-        <p:spPr>
-          <a:xfrm>
-            <a:off x="5002784" y="4443984"/>
-            <a:ext cx="1144016" cy="256032"/>
           </a:xfrm>
           <a:prstGeom prst="roundRect">
             <a:avLst>
@@ -21245,47 +21245,47 @@
         </p:nvSpPr>
         <p:spPr>
           <a:xfrm>
+            <a:off x="3899408" y="4443984"/>
+            <a:ext cx="1011936" cy="256032"/>
+          </a:xfrm>
+          <a:prstGeom prst="rect">
+            <a:avLst/>
+          </a:prstGeom>
+          <a:noFill/>
+          <a:ln/>
+        </p:spPr>
+        <p:txBody>
+          <a:bodyPr wrap="square" lIns="0" tIns="0" rIns="0" bIns="0" rtlCol="0" anchor="ctr"/>
+          <a:lstStyle/>
+          <a:p>
+            <a:pPr algn="ctr" indent="0" marL="0">
+              <a:buNone/>
+            </a:pPr>
+            <a:r>
+              <a:rPr lang="en-US" sz="1000" dirty="0">
+                <a:solidFill>
+                  <a:srgbClr val="1F2430"/>
+                </a:solidFill>
+                <a:latin typeface="Calibri" pitchFamily="34" charset="0"/>
+                <a:ea typeface="Calibri" pitchFamily="34" charset="-122"/>
+                <a:cs typeface="Calibri" pitchFamily="34" charset="-120"/>
+              </a:rPr>
+              <a:t>layout adapt</a:t>
+            </a:r>
+            <a:endParaRPr lang="en-US" sz="1000" dirty="0"/>
+          </a:p>
+        </p:txBody>
+      </p:sp>
+      <p:sp>
+        <p:nvSpPr>
+          <p:cNvPr id="66" name="Shape 64"/>
+          <p:cNvSpPr/>
+          <p:nvPr/>
+        </p:nvSpPr>
+        <p:spPr>
+          <a:xfrm>
             <a:off x="5002784" y="4443984"/>
             <a:ext cx="1144016" cy="256032"/>
-          </a:xfrm>
-          <a:prstGeom prst="rect">
-            <a:avLst/>
-          </a:prstGeom>
-          <a:noFill/>
-          <a:ln/>
-        </p:spPr>
-        <p:txBody>
-          <a:bodyPr wrap="square" lIns="0" tIns="0" rIns="0" bIns="0" rtlCol="0" anchor="ctr"/>
-          <a:lstStyle/>
-          <a:p>
-            <a:pPr algn="ctr" indent="0" marL="0">
-              <a:buNone/>
-            </a:pPr>
-            <a:r>
-              <a:rPr lang="en-US" sz="1000" dirty="0">
-                <a:solidFill>
-                  <a:srgbClr val="1F2430"/>
-                </a:solidFill>
-                <a:latin typeface="Calibri" pitchFamily="34" charset="0"/>
-                <a:ea typeface="Calibri" pitchFamily="34" charset="-122"/>
-                <a:cs typeface="Calibri" pitchFamily="34" charset="-120"/>
-              </a:rPr>
-              <a:t>layout convert</a:t>
-            </a:r>
-            <a:endParaRPr lang="en-US" sz="1000" dirty="0"/>
-          </a:p>
-        </p:txBody>
-      </p:sp>
-      <p:sp>
-        <p:nvSpPr>
-          <p:cNvPr id="66" name="Shape 64"/>
-          <p:cNvSpPr/>
-          <p:nvPr/>
-        </p:nvSpPr>
-        <p:spPr>
-          <a:xfrm>
-            <a:off x="6238240" y="4443984"/>
-            <a:ext cx="483616" cy="256032"/>
           </a:xfrm>
           <a:prstGeom prst="roundRect">
             <a:avLst>
@@ -21311,47 +21311,47 @@
         </p:nvSpPr>
         <p:spPr>
           <a:xfrm>
+            <a:off x="5002784" y="4443984"/>
+            <a:ext cx="1144016" cy="256032"/>
+          </a:xfrm>
+          <a:prstGeom prst="rect">
+            <a:avLst/>
+          </a:prstGeom>
+          <a:noFill/>
+          <a:ln/>
+        </p:spPr>
+        <p:txBody>
+          <a:bodyPr wrap="square" lIns="0" tIns="0" rIns="0" bIns="0" rtlCol="0" anchor="ctr"/>
+          <a:lstStyle/>
+          <a:p>
+            <a:pPr algn="ctr" indent="0" marL="0">
+              <a:buNone/>
+            </a:pPr>
+            <a:r>
+              <a:rPr lang="en-US" sz="1000" dirty="0">
+                <a:solidFill>
+                  <a:srgbClr val="1F2430"/>
+                </a:solidFill>
+                <a:latin typeface="Calibri" pitchFamily="34" charset="0"/>
+                <a:ea typeface="Calibri" pitchFamily="34" charset="-122"/>
+                <a:cs typeface="Calibri" pitchFamily="34" charset="-120"/>
+              </a:rPr>
+              <a:t>layout convert</a:t>
+            </a:r>
+            <a:endParaRPr lang="en-US" sz="1000" dirty="0"/>
+          </a:p>
+        </p:txBody>
+      </p:sp>
+      <p:sp>
+        <p:nvSpPr>
+          <p:cNvPr id="68" name="Shape 66"/>
+          <p:cNvSpPr/>
+          <p:nvPr/>
+        </p:nvSpPr>
+        <p:spPr>
+          <a:xfrm>
             <a:off x="6238240" y="4443984"/>
             <a:ext cx="483616" cy="256032"/>
-          </a:xfrm>
-          <a:prstGeom prst="rect">
-            <a:avLst/>
-          </a:prstGeom>
-          <a:noFill/>
-          <a:ln/>
-        </p:spPr>
-        <p:txBody>
-          <a:bodyPr wrap="square" lIns="0" tIns="0" rIns="0" bIns="0" rtlCol="0" anchor="ctr"/>
-          <a:lstStyle/>
-          <a:p>
-            <a:pPr algn="ctr" indent="0" marL="0">
-              <a:buNone/>
-            </a:pPr>
-            <a:r>
-              <a:rPr lang="en-US" sz="1000" dirty="0">
-                <a:solidFill>
-                  <a:srgbClr val="1F2430"/>
-                </a:solidFill>
-                <a:latin typeface="Calibri" pitchFamily="34" charset="0"/>
-                <a:ea typeface="Calibri" pitchFamily="34" charset="-122"/>
-                <a:cs typeface="Calibri" pitchFamily="34" charset="-120"/>
-              </a:rPr>
-              <a:t>init</a:t>
-            </a:r>
-            <a:endParaRPr lang="en-US" sz="1000" dirty="0"/>
-          </a:p>
-        </p:txBody>
-      </p:sp>
-      <p:sp>
-        <p:nvSpPr>
-          <p:cNvPr id="68" name="Shape 66"/>
-          <p:cNvSpPr/>
-          <p:nvPr/>
-        </p:nvSpPr>
-        <p:spPr>
-          <a:xfrm>
-            <a:off x="6813296" y="4443984"/>
-            <a:ext cx="615696" cy="256032"/>
           </a:xfrm>
           <a:prstGeom prst="roundRect">
             <a:avLst>
@@ -21377,47 +21377,47 @@
         </p:nvSpPr>
         <p:spPr>
           <a:xfrm>
+            <a:off x="6238240" y="4443984"/>
+            <a:ext cx="483616" cy="256032"/>
+          </a:xfrm>
+          <a:prstGeom prst="rect">
+            <a:avLst/>
+          </a:prstGeom>
+          <a:noFill/>
+          <a:ln/>
+        </p:spPr>
+        <p:txBody>
+          <a:bodyPr wrap="square" lIns="0" tIns="0" rIns="0" bIns="0" rtlCol="0" anchor="ctr"/>
+          <a:lstStyle/>
+          <a:p>
+            <a:pPr algn="ctr" indent="0" marL="0">
+              <a:buNone/>
+            </a:pPr>
+            <a:r>
+              <a:rPr lang="en-US" sz="1000" dirty="0">
+                <a:solidFill>
+                  <a:srgbClr val="1F2430"/>
+                </a:solidFill>
+                <a:latin typeface="Calibri" pitchFamily="34" charset="0"/>
+                <a:ea typeface="Calibri" pitchFamily="34" charset="-122"/>
+                <a:cs typeface="Calibri" pitchFamily="34" charset="-120"/>
+              </a:rPr>
+              <a:t>init</a:t>
+            </a:r>
+            <a:endParaRPr lang="en-US" sz="1000" dirty="0"/>
+          </a:p>
+        </p:txBody>
+      </p:sp>
+      <p:sp>
+        <p:nvSpPr>
+          <p:cNvPr id="70" name="Shape 68"/>
+          <p:cNvSpPr/>
+          <p:nvPr/>
+        </p:nvSpPr>
+        <p:spPr>
+          <a:xfrm>
             <a:off x="6813296" y="4443984"/>
             <a:ext cx="615696" cy="256032"/>
-          </a:xfrm>
-          <a:prstGeom prst="rect">
-            <a:avLst/>
-          </a:prstGeom>
-          <a:noFill/>
-          <a:ln/>
-        </p:spPr>
-        <p:txBody>
-          <a:bodyPr wrap="square" lIns="0" tIns="0" rIns="0" bIns="0" rtlCol="0" anchor="ctr"/>
-          <a:lstStyle/>
-          <a:p>
-            <a:pPr algn="ctr" indent="0" marL="0">
-              <a:buNone/>
-            </a:pPr>
-            <a:r>
-              <a:rPr lang="en-US" sz="1000" dirty="0">
-                <a:solidFill>
-                  <a:srgbClr val="1F2430"/>
-                </a:solidFill>
-                <a:latin typeface="Calibri" pitchFamily="34" charset="0"/>
-                <a:ea typeface="Calibri" pitchFamily="34" charset="-122"/>
-                <a:cs typeface="Calibri" pitchFamily="34" charset="-120"/>
-              </a:rPr>
-              <a:t>update</a:t>
-            </a:r>
-            <a:endParaRPr lang="en-US" sz="1000" dirty="0"/>
-          </a:p>
-        </p:txBody>
-      </p:sp>
-      <p:sp>
-        <p:nvSpPr>
-          <p:cNvPr id="70" name="Shape 68"/>
-          <p:cNvSpPr/>
-          <p:nvPr/>
-        </p:nvSpPr>
-        <p:spPr>
-          <a:xfrm>
-            <a:off x="7520432" y="4443984"/>
-            <a:ext cx="813816" cy="256032"/>
           </a:xfrm>
           <a:prstGeom prst="roundRect">
             <a:avLst>
@@ -21443,47 +21443,47 @@
         </p:nvSpPr>
         <p:spPr>
           <a:xfrm>
+            <a:off x="6813296" y="4443984"/>
+            <a:ext cx="615696" cy="256032"/>
+          </a:xfrm>
+          <a:prstGeom prst="rect">
+            <a:avLst/>
+          </a:prstGeom>
+          <a:noFill/>
+          <a:ln/>
+        </p:spPr>
+        <p:txBody>
+          <a:bodyPr wrap="square" lIns="0" tIns="0" rIns="0" bIns="0" rtlCol="0" anchor="ctr"/>
+          <a:lstStyle/>
+          <a:p>
+            <a:pPr algn="ctr" indent="0" marL="0">
+              <a:buNone/>
+            </a:pPr>
+            <a:r>
+              <a:rPr lang="en-US" sz="1000" dirty="0">
+                <a:solidFill>
+                  <a:srgbClr val="1F2430"/>
+                </a:solidFill>
+                <a:latin typeface="Calibri" pitchFamily="34" charset="0"/>
+                <a:ea typeface="Calibri" pitchFamily="34" charset="-122"/>
+                <a:cs typeface="Calibri" pitchFamily="34" charset="-120"/>
+              </a:rPr>
+              <a:t>update</a:t>
+            </a:r>
+            <a:endParaRPr lang="en-US" sz="1000" dirty="0"/>
+          </a:p>
+        </p:txBody>
+      </p:sp>
+      <p:sp>
+        <p:nvSpPr>
+          <p:cNvPr id="72" name="Shape 70"/>
+          <p:cNvSpPr/>
+          <p:nvPr/>
+        </p:nvSpPr>
+        <p:spPr>
+          <a:xfrm>
             <a:off x="7520432" y="4443984"/>
             <a:ext cx="813816" cy="256032"/>
-          </a:xfrm>
-          <a:prstGeom prst="rect">
-            <a:avLst/>
-          </a:prstGeom>
-          <a:noFill/>
-          <a:ln/>
-        </p:spPr>
-        <p:txBody>
-          <a:bodyPr wrap="square" lIns="0" tIns="0" rIns="0" bIns="0" rtlCol="0" anchor="ctr"/>
-          <a:lstStyle/>
-          <a:p>
-            <a:pPr algn="ctr" indent="0" marL="0">
-              <a:buNone/>
-            </a:pPr>
-            <a:r>
-              <a:rPr lang="en-US" sz="1000" dirty="0">
-                <a:solidFill>
-                  <a:srgbClr val="1F2430"/>
-                </a:solidFill>
-                <a:latin typeface="Calibri" pitchFamily="34" charset="0"/>
-                <a:ea typeface="Calibri" pitchFamily="34" charset="-122"/>
-                <a:cs typeface="Calibri" pitchFamily="34" charset="-120"/>
-              </a:rPr>
-              <a:t>uninstall</a:t>
-            </a:r>
-            <a:endParaRPr lang="en-US" sz="1000" dirty="0"/>
-          </a:p>
-        </p:txBody>
-      </p:sp>
-      <p:sp>
-        <p:nvSpPr>
-          <p:cNvPr id="72" name="Shape 70"/>
-          <p:cNvSpPr/>
-          <p:nvPr/>
-        </p:nvSpPr>
-        <p:spPr>
-          <a:xfrm>
-            <a:off x="8425688" y="4443984"/>
-            <a:ext cx="417576" cy="256032"/>
           </a:xfrm>
           <a:prstGeom prst="roundRect">
             <a:avLst>
@@ -21509,47 +21509,47 @@
         </p:nvSpPr>
         <p:spPr>
           <a:xfrm>
+            <a:off x="7520432" y="4443984"/>
+            <a:ext cx="813816" cy="256032"/>
+          </a:xfrm>
+          <a:prstGeom prst="rect">
+            <a:avLst/>
+          </a:prstGeom>
+          <a:noFill/>
+          <a:ln/>
+        </p:spPr>
+        <p:txBody>
+          <a:bodyPr wrap="square" lIns="0" tIns="0" rIns="0" bIns="0" rtlCol="0" anchor="ctr"/>
+          <a:lstStyle/>
+          <a:p>
+            <a:pPr algn="ctr" indent="0" marL="0">
+              <a:buNone/>
+            </a:pPr>
+            <a:r>
+              <a:rPr lang="en-US" sz="1000" dirty="0">
+                <a:solidFill>
+                  <a:srgbClr val="1F2430"/>
+                </a:solidFill>
+                <a:latin typeface="Calibri" pitchFamily="34" charset="0"/>
+                <a:ea typeface="Calibri" pitchFamily="34" charset="-122"/>
+                <a:cs typeface="Calibri" pitchFamily="34" charset="-120"/>
+              </a:rPr>
+              <a:t>uninstall</a:t>
+            </a:r>
+            <a:endParaRPr lang="en-US" sz="1000" dirty="0"/>
+          </a:p>
+        </p:txBody>
+      </p:sp>
+      <p:sp>
+        <p:nvSpPr>
+          <p:cNvPr id="74" name="Shape 72"/>
+          <p:cNvSpPr/>
+          <p:nvPr/>
+        </p:nvSpPr>
+        <p:spPr>
+          <a:xfrm>
             <a:off x="8425688" y="4443984"/>
             <a:ext cx="417576" cy="256032"/>
-          </a:xfrm>
-          <a:prstGeom prst="rect">
-            <a:avLst/>
-          </a:prstGeom>
-          <a:noFill/>
-          <a:ln/>
-        </p:spPr>
-        <p:txBody>
-          <a:bodyPr wrap="square" lIns="0" tIns="0" rIns="0" bIns="0" rtlCol="0" anchor="ctr"/>
-          <a:lstStyle/>
-          <a:p>
-            <a:pPr algn="ctr" indent="0" marL="0">
-              <a:buNone/>
-            </a:pPr>
-            <a:r>
-              <a:rPr lang="en-US" sz="1000" dirty="0">
-                <a:solidFill>
-                  <a:srgbClr val="1F2430"/>
-                </a:solidFill>
-                <a:latin typeface="Calibri" pitchFamily="34" charset="0"/>
-                <a:ea typeface="Calibri" pitchFamily="34" charset="-122"/>
-                <a:cs typeface="Calibri" pitchFamily="34" charset="-120"/>
-              </a:rPr>
-              <a:t>new</a:t>
-            </a:r>
-            <a:endParaRPr lang="en-US" sz="1000" dirty="0"/>
-          </a:p>
-        </p:txBody>
-      </p:sp>
-      <p:sp>
-        <p:nvSpPr>
-          <p:cNvPr id="74" name="Shape 72"/>
-          <p:cNvSpPr/>
-          <p:nvPr/>
-        </p:nvSpPr>
-        <p:spPr>
-          <a:xfrm>
-            <a:off x="8934704" y="4443984"/>
-            <a:ext cx="1011936" cy="256032"/>
           </a:xfrm>
           <a:prstGeom prst="roundRect">
             <a:avLst>
@@ -21575,47 +21575,47 @@
         </p:nvSpPr>
         <p:spPr>
           <a:xfrm>
+            <a:off x="8425688" y="4443984"/>
+            <a:ext cx="417576" cy="256032"/>
+          </a:xfrm>
+          <a:prstGeom prst="rect">
+            <a:avLst/>
+          </a:prstGeom>
+          <a:noFill/>
+          <a:ln/>
+        </p:spPr>
+        <p:txBody>
+          <a:bodyPr wrap="square" lIns="0" tIns="0" rIns="0" bIns="0" rtlCol="0" anchor="ctr"/>
+          <a:lstStyle/>
+          <a:p>
+            <a:pPr algn="ctr" indent="0" marL="0">
+              <a:buNone/>
+            </a:pPr>
+            <a:r>
+              <a:rPr lang="en-US" sz="1000" dirty="0">
+                <a:solidFill>
+                  <a:srgbClr val="1F2430"/>
+                </a:solidFill>
+                <a:latin typeface="Calibri" pitchFamily="34" charset="0"/>
+                <a:ea typeface="Calibri" pitchFamily="34" charset="-122"/>
+                <a:cs typeface="Calibri" pitchFamily="34" charset="-120"/>
+              </a:rPr>
+              <a:t>new</a:t>
+            </a:r>
+            <a:endParaRPr lang="en-US" sz="1000" dirty="0"/>
+          </a:p>
+        </p:txBody>
+      </p:sp>
+      <p:sp>
+        <p:nvSpPr>
+          <p:cNvPr id="76" name="Shape 74"/>
+          <p:cNvSpPr/>
+          <p:nvPr/>
+        </p:nvSpPr>
+        <p:spPr>
+          <a:xfrm>
             <a:off x="8934704" y="4443984"/>
             <a:ext cx="1011936" cy="256032"/>
-          </a:xfrm>
-          <a:prstGeom prst="rect">
-            <a:avLst/>
-          </a:prstGeom>
-          <a:noFill/>
-          <a:ln/>
-        </p:spPr>
-        <p:txBody>
-          <a:bodyPr wrap="square" lIns="0" tIns="0" rIns="0" bIns="0" rtlCol="0" anchor="ctr"/>
-          <a:lstStyle/>
-          <a:p>
-            <a:pPr algn="ctr" indent="0" marL="0">
-              <a:buNone/>
-            </a:pPr>
-            <a:r>
-              <a:rPr lang="en-US" sz="1000" dirty="0">
-                <a:solidFill>
-                  <a:srgbClr val="1F2430"/>
-                </a:solidFill>
-                <a:latin typeface="Calibri" pitchFamily="34" charset="0"/>
-                <a:ea typeface="Calibri" pitchFamily="34" charset="-122"/>
-                <a:cs typeface="Calibri" pitchFamily="34" charset="-120"/>
-              </a:rPr>
-              <a:t>explore list</a:t>
-            </a:r>
-            <a:endParaRPr lang="en-US" sz="1000" dirty="0"/>
-          </a:p>
-        </p:txBody>
-      </p:sp>
-      <p:sp>
-        <p:nvSpPr>
-          <p:cNvPr id="76" name="Shape 74"/>
-          <p:cNvSpPr/>
-          <p:nvPr/>
-        </p:nvSpPr>
-        <p:spPr>
-          <a:xfrm>
-            <a:off x="10038080" y="4443984"/>
-            <a:ext cx="945896" cy="256032"/>
           </a:xfrm>
           <a:prstGeom prst="roundRect">
             <a:avLst>
@@ -21641,47 +21641,47 @@
         </p:nvSpPr>
         <p:spPr>
           <a:xfrm>
+            <a:off x="8934704" y="4443984"/>
+            <a:ext cx="1011936" cy="256032"/>
+          </a:xfrm>
+          <a:prstGeom prst="rect">
+            <a:avLst/>
+          </a:prstGeom>
+          <a:noFill/>
+          <a:ln/>
+        </p:spPr>
+        <p:txBody>
+          <a:bodyPr wrap="square" lIns="0" tIns="0" rIns="0" bIns="0" rtlCol="0" anchor="ctr"/>
+          <a:lstStyle/>
+          <a:p>
+            <a:pPr algn="ctr" indent="0" marL="0">
+              <a:buNone/>
+            </a:pPr>
+            <a:r>
+              <a:rPr lang="en-US" sz="1000" dirty="0">
+                <a:solidFill>
+                  <a:srgbClr val="1F2430"/>
+                </a:solidFill>
+                <a:latin typeface="Calibri" pitchFamily="34" charset="0"/>
+                <a:ea typeface="Calibri" pitchFamily="34" charset="-122"/>
+                <a:cs typeface="Calibri" pitchFamily="34" charset="-120"/>
+              </a:rPr>
+              <a:t>explore list</a:t>
+            </a:r>
+            <a:endParaRPr lang="en-US" sz="1000" dirty="0"/>
+          </a:p>
+        </p:txBody>
+      </p:sp>
+      <p:sp>
+        <p:nvSpPr>
+          <p:cNvPr id="78" name="Shape 76"/>
+          <p:cNvSpPr/>
+          <p:nvPr/>
+        </p:nvSpPr>
+        <p:spPr>
+          <a:xfrm>
             <a:off x="10038080" y="4443984"/>
             <a:ext cx="945896" cy="256032"/>
-          </a:xfrm>
-          <a:prstGeom prst="rect">
-            <a:avLst/>
-          </a:prstGeom>
-          <a:noFill/>
-          <a:ln/>
-        </p:spPr>
-        <p:txBody>
-          <a:bodyPr wrap="square" lIns="0" tIns="0" rIns="0" bIns="0" rtlCol="0" anchor="ctr"/>
-          <a:lstStyle/>
-          <a:p>
-            <a:pPr algn="ctr" indent="0" marL="0">
-              <a:buNone/>
-            </a:pPr>
-            <a:r>
-              <a:rPr lang="en-US" sz="1000" dirty="0">
-                <a:solidFill>
-                  <a:srgbClr val="1F2430"/>
-                </a:solidFill>
-                <a:latin typeface="Calibri" pitchFamily="34" charset="0"/>
-                <a:ea typeface="Calibri" pitchFamily="34" charset="-122"/>
-                <a:cs typeface="Calibri" pitchFamily="34" charset="-120"/>
-              </a:rPr>
-              <a:t>import bmad</a:t>
-            </a:r>
-            <a:endParaRPr lang="en-US" sz="1000" dirty="0"/>
-          </a:p>
-        </p:txBody>
-      </p:sp>
-      <p:sp>
-        <p:nvSpPr>
-          <p:cNvPr id="78" name="Shape 76"/>
-          <p:cNvSpPr/>
-          <p:nvPr/>
-        </p:nvSpPr>
-        <p:spPr>
-          <a:xfrm>
-            <a:off x="11075416" y="4443984"/>
-            <a:ext cx="615696" cy="256032"/>
           </a:xfrm>
           <a:prstGeom prst="roundRect">
             <a:avLst>
@@ -21707,47 +21707,47 @@
         </p:nvSpPr>
         <p:spPr>
           <a:xfrm>
+            <a:off x="10038080" y="4443984"/>
+            <a:ext cx="945896" cy="256032"/>
+          </a:xfrm>
+          <a:prstGeom prst="rect">
+            <a:avLst/>
+          </a:prstGeom>
+          <a:noFill/>
+          <a:ln/>
+        </p:spPr>
+        <p:txBody>
+          <a:bodyPr wrap="square" lIns="0" tIns="0" rIns="0" bIns="0" rtlCol="0" anchor="ctr"/>
+          <a:lstStyle/>
+          <a:p>
+            <a:pPr algn="ctr" indent="0" marL="0">
+              <a:buNone/>
+            </a:pPr>
+            <a:r>
+              <a:rPr lang="en-US" sz="1000" dirty="0">
+                <a:solidFill>
+                  <a:srgbClr val="1F2430"/>
+                </a:solidFill>
+                <a:latin typeface="Calibri" pitchFamily="34" charset="0"/>
+                <a:ea typeface="Calibri" pitchFamily="34" charset="-122"/>
+                <a:cs typeface="Calibri" pitchFamily="34" charset="-120"/>
+              </a:rPr>
+              <a:t>import bmad</a:t>
+            </a:r>
+            <a:endParaRPr lang="en-US" sz="1000" dirty="0"/>
+          </a:p>
+        </p:txBody>
+      </p:sp>
+      <p:sp>
+        <p:nvSpPr>
+          <p:cNvPr id="80" name="Shape 78"/>
+          <p:cNvSpPr/>
+          <p:nvPr/>
+        </p:nvSpPr>
+        <p:spPr>
+          <a:xfrm>
             <a:off x="11075416" y="4443984"/>
             <a:ext cx="615696" cy="256032"/>
-          </a:xfrm>
-          <a:prstGeom prst="rect">
-            <a:avLst/>
-          </a:prstGeom>
-          <a:noFill/>
-          <a:ln/>
-        </p:spPr>
-        <p:txBody>
-          <a:bodyPr wrap="square" lIns="0" tIns="0" rIns="0" bIns="0" rtlCol="0" anchor="ctr"/>
-          <a:lstStyle/>
-          <a:p>
-            <a:pPr algn="ctr" indent="0" marL="0">
-              <a:buNone/>
-            </a:pPr>
-            <a:r>
-              <a:rPr lang="en-US" sz="1000" dirty="0">
-                <a:solidFill>
-                  <a:srgbClr val="1F2430"/>
-                </a:solidFill>
-                <a:latin typeface="Calibri" pitchFamily="34" charset="0"/>
-                <a:ea typeface="Calibri" pitchFamily="34" charset="-122"/>
-                <a:cs typeface="Calibri" pitchFamily="34" charset="-120"/>
-              </a:rPr>
-              <a:t>status</a:t>
-            </a:r>
-            <a:endParaRPr lang="en-US" sz="1000" dirty="0"/>
-          </a:p>
-        </p:txBody>
-      </p:sp>
-      <p:sp>
-        <p:nvSpPr>
-          <p:cNvPr id="80" name="Shape 78"/>
-          <p:cNvSpPr/>
-          <p:nvPr/>
-        </p:nvSpPr>
-        <p:spPr>
-          <a:xfrm>
-            <a:off x="457200" y="4791456"/>
-            <a:ext cx="681736" cy="256032"/>
           </a:xfrm>
           <a:prstGeom prst="roundRect">
             <a:avLst>
@@ -21773,47 +21773,47 @@
         </p:nvSpPr>
         <p:spPr>
           <a:xfrm>
+            <a:off x="11075416" y="4443984"/>
+            <a:ext cx="615696" cy="256032"/>
+          </a:xfrm>
+          <a:prstGeom prst="rect">
+            <a:avLst/>
+          </a:prstGeom>
+          <a:noFill/>
+          <a:ln/>
+        </p:spPr>
+        <p:txBody>
+          <a:bodyPr wrap="square" lIns="0" tIns="0" rIns="0" bIns="0" rtlCol="0" anchor="ctr"/>
+          <a:lstStyle/>
+          <a:p>
+            <a:pPr algn="ctr" indent="0" marL="0">
+              <a:buNone/>
+            </a:pPr>
+            <a:r>
+              <a:rPr lang="en-US" sz="1000" dirty="0">
+                <a:solidFill>
+                  <a:srgbClr val="1F2430"/>
+                </a:solidFill>
+                <a:latin typeface="Calibri" pitchFamily="34" charset="0"/>
+                <a:ea typeface="Calibri" pitchFamily="34" charset="-122"/>
+                <a:cs typeface="Calibri" pitchFamily="34" charset="-120"/>
+              </a:rPr>
+              <a:t>status</a:t>
+            </a:r>
+            <a:endParaRPr lang="en-US" sz="1000" dirty="0"/>
+          </a:p>
+        </p:txBody>
+      </p:sp>
+      <p:sp>
+        <p:nvSpPr>
+          <p:cNvPr id="82" name="Shape 80"/>
+          <p:cNvSpPr/>
+          <p:nvPr/>
+        </p:nvSpPr>
+        <p:spPr>
+          <a:xfrm>
             <a:off x="457200" y="4791456"/>
             <a:ext cx="681736" cy="256032"/>
-          </a:xfrm>
-          <a:prstGeom prst="rect">
-            <a:avLst/>
-          </a:prstGeom>
-          <a:noFill/>
-          <a:ln/>
-        </p:spPr>
-        <p:txBody>
-          <a:bodyPr wrap="square" lIns="0" tIns="0" rIns="0" bIns="0" rtlCol="0" anchor="ctr"/>
-          <a:lstStyle/>
-          <a:p>
-            <a:pPr algn="ctr" indent="0" marL="0">
-              <a:buNone/>
-            </a:pPr>
-            <a:r>
-              <a:rPr lang="en-US" sz="1000" dirty="0">
-                <a:solidFill>
-                  <a:srgbClr val="1F2430"/>
-                </a:solidFill>
-                <a:latin typeface="Calibri" pitchFamily="34" charset="0"/>
-                <a:ea typeface="Calibri" pitchFamily="34" charset="-122"/>
-                <a:cs typeface="Calibri" pitchFamily="34" charset="-120"/>
-              </a:rPr>
-              <a:t>explain</a:t>
-            </a:r>
-            <a:endParaRPr lang="en-US" sz="1000" dirty="0"/>
-          </a:p>
-        </p:txBody>
-      </p:sp>
-      <p:sp>
-        <p:nvSpPr>
-          <p:cNvPr id="82" name="Shape 80"/>
-          <p:cNvSpPr/>
-          <p:nvPr/>
-        </p:nvSpPr>
-        <p:spPr>
-          <a:xfrm>
-            <a:off x="1230376" y="4791456"/>
-            <a:ext cx="483616" cy="256032"/>
           </a:xfrm>
           <a:prstGeom prst="roundRect">
             <a:avLst>
@@ -21839,47 +21839,47 @@
         </p:nvSpPr>
         <p:spPr>
           <a:xfrm>
+            <a:off x="457200" y="4791456"/>
+            <a:ext cx="681736" cy="256032"/>
+          </a:xfrm>
+          <a:prstGeom prst="rect">
+            <a:avLst/>
+          </a:prstGeom>
+          <a:noFill/>
+          <a:ln/>
+        </p:spPr>
+        <p:txBody>
+          <a:bodyPr wrap="square" lIns="0" tIns="0" rIns="0" bIns="0" rtlCol="0" anchor="ctr"/>
+          <a:lstStyle/>
+          <a:p>
+            <a:pPr algn="ctr" indent="0" marL="0">
+              <a:buNone/>
+            </a:pPr>
+            <a:r>
+              <a:rPr lang="en-US" sz="1000" dirty="0">
+                <a:solidFill>
+                  <a:srgbClr val="1F2430"/>
+                </a:solidFill>
+                <a:latin typeface="Calibri" pitchFamily="34" charset="0"/>
+                <a:ea typeface="Calibri" pitchFamily="34" charset="-122"/>
+                <a:cs typeface="Calibri" pitchFamily="34" charset="-120"/>
+              </a:rPr>
+              <a:t>explain</a:t>
+            </a:r>
+            <a:endParaRPr lang="en-US" sz="1000" dirty="0"/>
+          </a:p>
+        </p:txBody>
+      </p:sp>
+      <p:sp>
+        <p:nvSpPr>
+          <p:cNvPr id="84" name="Shape 82"/>
+          <p:cNvSpPr/>
+          <p:nvPr/>
+        </p:nvSpPr>
+        <p:spPr>
+          <a:xfrm>
             <a:off x="1230376" y="4791456"/>
             <a:ext cx="483616" cy="256032"/>
-          </a:xfrm>
-          <a:prstGeom prst="rect">
-            <a:avLst/>
-          </a:prstGeom>
-          <a:noFill/>
-          <a:ln/>
-        </p:spPr>
-        <p:txBody>
-          <a:bodyPr wrap="square" lIns="0" tIns="0" rIns="0" bIns="0" rtlCol="0" anchor="ctr"/>
-          <a:lstStyle/>
-          <a:p>
-            <a:pPr algn="ctr" indent="0" marL="0">
-              <a:buNone/>
-            </a:pPr>
-            <a:r>
-              <a:rPr lang="en-US" sz="1000" dirty="0">
-                <a:solidFill>
-                  <a:srgbClr val="1F2430"/>
-                </a:solidFill>
-                <a:latin typeface="Calibri" pitchFamily="34" charset="0"/>
-                <a:ea typeface="Calibri" pitchFamily="34" charset="-122"/>
-                <a:cs typeface="Calibri" pitchFamily="34" charset="-120"/>
-              </a:rPr>
-              <a:t>help</a:t>
-            </a:r>
-            <a:endParaRPr lang="en-US" sz="1000" dirty="0"/>
-          </a:p>
-        </p:txBody>
-      </p:sp>
-      <p:sp>
-        <p:nvSpPr>
-          <p:cNvPr id="84" name="Shape 82"/>
-          <p:cNvSpPr/>
-          <p:nvPr/>
-        </p:nvSpPr>
-        <p:spPr>
-          <a:xfrm>
-            <a:off x="1805432" y="4791456"/>
-            <a:ext cx="549656" cy="256032"/>
           </a:xfrm>
           <a:prstGeom prst="roundRect">
             <a:avLst>
@@ -21905,47 +21905,47 @@
         </p:nvSpPr>
         <p:spPr>
           <a:xfrm>
+            <a:off x="1230376" y="4791456"/>
+            <a:ext cx="483616" cy="256032"/>
+          </a:xfrm>
+          <a:prstGeom prst="rect">
+            <a:avLst/>
+          </a:prstGeom>
+          <a:noFill/>
+          <a:ln/>
+        </p:spPr>
+        <p:txBody>
+          <a:bodyPr wrap="square" lIns="0" tIns="0" rIns="0" bIns="0" rtlCol="0" anchor="ctr"/>
+          <a:lstStyle/>
+          <a:p>
+            <a:pPr algn="ctr" indent="0" marL="0">
+              <a:buNone/>
+            </a:pPr>
+            <a:r>
+              <a:rPr lang="en-US" sz="1000" dirty="0">
+                <a:solidFill>
+                  <a:srgbClr val="1F2430"/>
+                </a:solidFill>
+                <a:latin typeface="Calibri" pitchFamily="34" charset="0"/>
+                <a:ea typeface="Calibri" pitchFamily="34" charset="-122"/>
+                <a:cs typeface="Calibri" pitchFamily="34" charset="-120"/>
+              </a:rPr>
+              <a:t>help</a:t>
+            </a:r>
+            <a:endParaRPr lang="en-US" sz="1000" dirty="0"/>
+          </a:p>
+        </p:txBody>
+      </p:sp>
+      <p:sp>
+        <p:nvSpPr>
+          <p:cNvPr id="86" name="Shape 84"/>
+          <p:cNvSpPr/>
+          <p:nvPr/>
+        </p:nvSpPr>
+        <p:spPr>
+          <a:xfrm>
             <a:off x="1805432" y="4791456"/>
             <a:ext cx="549656" cy="256032"/>
-          </a:xfrm>
-          <a:prstGeom prst="rect">
-            <a:avLst/>
-          </a:prstGeom>
-          <a:noFill/>
-          <a:ln/>
-        </p:spPr>
-        <p:txBody>
-          <a:bodyPr wrap="square" lIns="0" tIns="0" rIns="0" bIns="0" rtlCol="0" anchor="ctr"/>
-          <a:lstStyle/>
-          <a:p>
-            <a:pPr algn="ctr" indent="0" marL="0">
-              <a:buNone/>
-            </a:pPr>
-            <a:r>
-              <a:rPr lang="en-US" sz="1000" dirty="0">
-                <a:solidFill>
-                  <a:srgbClr val="1F2430"/>
-                </a:solidFill>
-                <a:latin typeface="Calibri" pitchFamily="34" charset="0"/>
-                <a:ea typeface="Calibri" pitchFamily="34" charset="-122"/>
-                <a:cs typeface="Calibri" pitchFamily="34" charset="-120"/>
-              </a:rPr>
-              <a:t>guide</a:t>
-            </a:r>
-            <a:endParaRPr lang="en-US" sz="1000" dirty="0"/>
-          </a:p>
-        </p:txBody>
-      </p:sp>
-      <p:sp>
-        <p:nvSpPr>
-          <p:cNvPr id="86" name="Shape 84"/>
-          <p:cNvSpPr/>
-          <p:nvPr/>
-        </p:nvSpPr>
-        <p:spPr>
-          <a:xfrm>
-            <a:off x="2446528" y="4791456"/>
-            <a:ext cx="879856" cy="256032"/>
           </a:xfrm>
           <a:prstGeom prst="roundRect">
             <a:avLst>
@@ -21971,47 +21971,47 @@
         </p:nvSpPr>
         <p:spPr>
           <a:xfrm>
+            <a:off x="1805432" y="4791456"/>
+            <a:ext cx="549656" cy="256032"/>
+          </a:xfrm>
+          <a:prstGeom prst="rect">
+            <a:avLst/>
+          </a:prstGeom>
+          <a:noFill/>
+          <a:ln/>
+        </p:spPr>
+        <p:txBody>
+          <a:bodyPr wrap="square" lIns="0" tIns="0" rIns="0" bIns="0" rtlCol="0" anchor="ctr"/>
+          <a:lstStyle/>
+          <a:p>
+            <a:pPr algn="ctr" indent="0" marL="0">
+              <a:buNone/>
+            </a:pPr>
+            <a:r>
+              <a:rPr lang="en-US" sz="1000" dirty="0">
+                <a:solidFill>
+                  <a:srgbClr val="1F2430"/>
+                </a:solidFill>
+                <a:latin typeface="Calibri" pitchFamily="34" charset="0"/>
+                <a:ea typeface="Calibri" pitchFamily="34" charset="-122"/>
+                <a:cs typeface="Calibri" pitchFamily="34" charset="-120"/>
+              </a:rPr>
+              <a:t>guide</a:t>
+            </a:r>
+            <a:endParaRPr lang="en-US" sz="1000" dirty="0"/>
+          </a:p>
+        </p:txBody>
+      </p:sp>
+      <p:sp>
+        <p:nvSpPr>
+          <p:cNvPr id="88" name="Shape 86"/>
+          <p:cNvSpPr/>
+          <p:nvPr/>
+        </p:nvSpPr>
+        <p:spPr>
+          <a:xfrm>
             <a:off x="2446528" y="4791456"/>
             <a:ext cx="879856" cy="256032"/>
-          </a:xfrm>
-          <a:prstGeom prst="rect">
-            <a:avLst/>
-          </a:prstGeom>
-          <a:noFill/>
-          <a:ln/>
-        </p:spPr>
-        <p:txBody>
-          <a:bodyPr wrap="square" lIns="0" tIns="0" rIns="0" bIns="0" rtlCol="0" anchor="ctr"/>
-          <a:lstStyle/>
-          <a:p>
-            <a:pPr algn="ctr" indent="0" marL="0">
-              <a:buNone/>
-            </a:pPr>
-            <a:r>
-              <a:rPr lang="en-US" sz="1000" dirty="0">
-                <a:solidFill>
-                  <a:srgbClr val="1F2430"/>
-                </a:solidFill>
-                <a:latin typeface="Calibri" pitchFamily="34" charset="0"/>
-                <a:ea typeface="Calibri" pitchFamily="34" charset="-122"/>
-                <a:cs typeface="Calibri" pitchFamily="34" charset="-120"/>
-              </a:rPr>
-              <a:t>statusline</a:t>
-            </a:r>
-            <a:endParaRPr lang="en-US" sz="1000" dirty="0"/>
-          </a:p>
-        </p:txBody>
-      </p:sp>
-      <p:sp>
-        <p:nvSpPr>
-          <p:cNvPr id="88" name="Shape 86"/>
-          <p:cNvSpPr/>
-          <p:nvPr/>
-        </p:nvSpPr>
-        <p:spPr>
-          <a:xfrm>
-            <a:off x="3417824" y="4791456"/>
-            <a:ext cx="813816" cy="256032"/>
           </a:xfrm>
           <a:prstGeom prst="roundRect">
             <a:avLst>
@@ -22037,8 +22037,8 @@
         </p:nvSpPr>
         <p:spPr>
           <a:xfrm>
-            <a:off x="3417824" y="4791456"/>
-            <a:ext cx="813816" cy="256032"/>
+            <a:off x="2446528" y="4791456"/>
+            <a:ext cx="879856" cy="256032"/>
           </a:xfrm>
           <a:prstGeom prst="rect">
             <a:avLst/>
@@ -22062,7 +22062,7 @@
                 <a:ea typeface="Calibri" pitchFamily="34" charset="-122"/>
                 <a:cs typeface="Calibri" pitchFamily="34" charset="-120"/>
               </a:rPr>
-              <a:t>mcp serve</a:t>
+              <a:t>statusline</a:t>
             </a:r>
             <a:endParaRPr lang="en-US" sz="1000" dirty="0"/>
           </a:p>
@@ -22076,7 +22076,7 @@
         </p:nvSpPr>
         <p:spPr>
           <a:xfrm>
-            <a:off x="4323080" y="4791456"/>
+            <a:off x="3417824" y="4791456"/>
             <a:ext cx="813816" cy="256032"/>
           </a:xfrm>
           <a:prstGeom prst="roundRect">
@@ -22103,47 +22103,47 @@
         </p:nvSpPr>
         <p:spPr>
           <a:xfrm>
+            <a:off x="3417824" y="4791456"/>
+            <a:ext cx="813816" cy="256032"/>
+          </a:xfrm>
+          <a:prstGeom prst="rect">
+            <a:avLst/>
+          </a:prstGeom>
+          <a:noFill/>
+          <a:ln/>
+        </p:spPr>
+        <p:txBody>
+          <a:bodyPr wrap="square" lIns="0" tIns="0" rIns="0" bIns="0" rtlCol="0" anchor="ctr"/>
+          <a:lstStyle/>
+          <a:p>
+            <a:pPr algn="ctr" indent="0" marL="0">
+              <a:buNone/>
+            </a:pPr>
+            <a:r>
+              <a:rPr lang="en-US" sz="1000" dirty="0">
+                <a:solidFill>
+                  <a:srgbClr val="1F2430"/>
+                </a:solidFill>
+                <a:latin typeface="Calibri" pitchFamily="34" charset="0"/>
+                <a:ea typeface="Calibri" pitchFamily="34" charset="-122"/>
+                <a:cs typeface="Calibri" pitchFamily="34" charset="-120"/>
+              </a:rPr>
+              <a:t>mcp serve</a:t>
+            </a:r>
+            <a:endParaRPr lang="en-US" sz="1000" dirty="0"/>
+          </a:p>
+        </p:txBody>
+      </p:sp>
+      <p:sp>
+        <p:nvSpPr>
+          <p:cNvPr id="92" name="Shape 90"/>
+          <p:cNvSpPr/>
+          <p:nvPr/>
+        </p:nvSpPr>
+        <p:spPr>
+          <a:xfrm>
             <a:off x="4323080" y="4791456"/>
             <a:ext cx="813816" cy="256032"/>
-          </a:xfrm>
-          <a:prstGeom prst="rect">
-            <a:avLst/>
-          </a:prstGeom>
-          <a:noFill/>
-          <a:ln/>
-        </p:spPr>
-        <p:txBody>
-          <a:bodyPr wrap="square" lIns="0" tIns="0" rIns="0" bIns="0" rtlCol="0" anchor="ctr"/>
-          <a:lstStyle/>
-          <a:p>
-            <a:pPr algn="ctr" indent="0" marL="0">
-              <a:buNone/>
-            </a:pPr>
-            <a:r>
-              <a:rPr lang="en-US" sz="1000" dirty="0">
-                <a:solidFill>
-                  <a:srgbClr val="1F2430"/>
-                </a:solidFill>
-                <a:latin typeface="Calibri" pitchFamily="34" charset="0"/>
-                <a:ea typeface="Calibri" pitchFamily="34" charset="-122"/>
-                <a:cs typeface="Calibri" pitchFamily="34" charset="-120"/>
-              </a:rPr>
-              <a:t>mcp check</a:t>
-            </a:r>
-            <a:endParaRPr lang="en-US" sz="1000" dirty="0"/>
-          </a:p>
-        </p:txBody>
-      </p:sp>
-      <p:sp>
-        <p:nvSpPr>
-          <p:cNvPr id="92" name="Shape 90"/>
-          <p:cNvSpPr/>
-          <p:nvPr/>
-        </p:nvSpPr>
-        <p:spPr>
-          <a:xfrm>
-            <a:off x="5228336" y="4791456"/>
-            <a:ext cx="879856" cy="256032"/>
           </a:xfrm>
           <a:prstGeom prst="roundRect">
             <a:avLst>
@@ -22169,8 +22169,8 @@
         </p:nvSpPr>
         <p:spPr>
           <a:xfrm>
-            <a:off x="5228336" y="4791456"/>
-            <a:ext cx="879856" cy="256032"/>
+            <a:off x="4323080" y="4791456"/>
+            <a:ext cx="813816" cy="256032"/>
           </a:xfrm>
           <a:prstGeom prst="rect">
             <a:avLst/>
@@ -22194,7 +22194,7 @@
                 <a:ea typeface="Calibri" pitchFamily="34" charset="-122"/>
                 <a:cs typeface="Calibri" pitchFamily="34" charset="-120"/>
               </a:rPr>
-              <a:t>inbox list</a:t>
+              <a:t>mcp check</a:t>
             </a:r>
             <a:endParaRPr lang="en-US" sz="1000" dirty="0"/>
           </a:p>
@@ -22208,7 +22208,7 @@
         </p:nvSpPr>
         <p:spPr>
           <a:xfrm>
-            <a:off x="6199632" y="4791456"/>
+            <a:off x="5228336" y="4791456"/>
             <a:ext cx="879856" cy="256032"/>
           </a:xfrm>
           <a:prstGeom prst="roundRect">
@@ -22235,47 +22235,47 @@
         </p:nvSpPr>
         <p:spPr>
           <a:xfrm>
+            <a:off x="5228336" y="4791456"/>
+            <a:ext cx="879856" cy="256032"/>
+          </a:xfrm>
+          <a:prstGeom prst="rect">
+            <a:avLst/>
+          </a:prstGeom>
+          <a:noFill/>
+          <a:ln/>
+        </p:spPr>
+        <p:txBody>
+          <a:bodyPr wrap="square" lIns="0" tIns="0" rIns="0" bIns="0" rtlCol="0" anchor="ctr"/>
+          <a:lstStyle/>
+          <a:p>
+            <a:pPr algn="ctr" indent="0" marL="0">
+              <a:buNone/>
+            </a:pPr>
+            <a:r>
+              <a:rPr lang="en-US" sz="1000" dirty="0">
+                <a:solidFill>
+                  <a:srgbClr val="1F2430"/>
+                </a:solidFill>
+                <a:latin typeface="Calibri" pitchFamily="34" charset="0"/>
+                <a:ea typeface="Calibri" pitchFamily="34" charset="-122"/>
+                <a:cs typeface="Calibri" pitchFamily="34" charset="-120"/>
+              </a:rPr>
+              <a:t>inbox list</a:t>
+            </a:r>
+            <a:endParaRPr lang="en-US" sz="1000" dirty="0"/>
+          </a:p>
+        </p:txBody>
+      </p:sp>
+      <p:sp>
+        <p:nvSpPr>
+          <p:cNvPr id="96" name="Shape 94"/>
+          <p:cNvSpPr/>
+          <p:nvPr/>
+        </p:nvSpPr>
+        <p:spPr>
+          <a:xfrm>
             <a:off x="6199632" y="4791456"/>
             <a:ext cx="879856" cy="256032"/>
-          </a:xfrm>
-          <a:prstGeom prst="rect">
-            <a:avLst/>
-          </a:prstGeom>
-          <a:noFill/>
-          <a:ln/>
-        </p:spPr>
-        <p:txBody>
-          <a:bodyPr wrap="square" lIns="0" tIns="0" rIns="0" bIns="0" rtlCol="0" anchor="ctr"/>
-          <a:lstStyle/>
-          <a:p>
-            <a:pPr algn="ctr" indent="0" marL="0">
-              <a:buNone/>
-            </a:pPr>
-            <a:r>
-              <a:rPr lang="en-US" sz="1000" dirty="0">
-                <a:solidFill>
-                  <a:srgbClr val="1F2430"/>
-                </a:solidFill>
-                <a:latin typeface="Calibri" pitchFamily="34" charset="0"/>
-                <a:ea typeface="Calibri" pitchFamily="34" charset="-122"/>
-                <a:cs typeface="Calibri" pitchFamily="34" charset="-120"/>
-              </a:rPr>
-              <a:t>inbox done</a:t>
-            </a:r>
-            <a:endParaRPr lang="en-US" sz="1000" dirty="0"/>
-          </a:p>
-        </p:txBody>
-      </p:sp>
-      <p:sp>
-        <p:nvSpPr>
-          <p:cNvPr id="96" name="Shape 94"/>
-          <p:cNvSpPr/>
-          <p:nvPr/>
-        </p:nvSpPr>
-        <p:spPr>
-          <a:xfrm>
-            <a:off x="7170928" y="4791456"/>
-            <a:ext cx="945896" cy="256032"/>
           </a:xfrm>
           <a:prstGeom prst="roundRect">
             <a:avLst>
@@ -22301,47 +22301,47 @@
         </p:nvSpPr>
         <p:spPr>
           <a:xfrm>
+            <a:off x="6199632" y="4791456"/>
+            <a:ext cx="879856" cy="256032"/>
+          </a:xfrm>
+          <a:prstGeom prst="rect">
+            <a:avLst/>
+          </a:prstGeom>
+          <a:noFill/>
+          <a:ln/>
+        </p:spPr>
+        <p:txBody>
+          <a:bodyPr wrap="square" lIns="0" tIns="0" rIns="0" bIns="0" rtlCol="0" anchor="ctr"/>
+          <a:lstStyle/>
+          <a:p>
+            <a:pPr algn="ctr" indent="0" marL="0">
+              <a:buNone/>
+            </a:pPr>
+            <a:r>
+              <a:rPr lang="en-US" sz="1000" dirty="0">
+                <a:solidFill>
+                  <a:srgbClr val="1F2430"/>
+                </a:solidFill>
+                <a:latin typeface="Calibri" pitchFamily="34" charset="0"/>
+                <a:ea typeface="Calibri" pitchFamily="34" charset="-122"/>
+                <a:cs typeface="Calibri" pitchFamily="34" charset="-120"/>
+              </a:rPr>
+              <a:t>inbox done</a:t>
+            </a:r>
+            <a:endParaRPr lang="en-US" sz="1000" dirty="0"/>
+          </a:p>
+        </p:txBody>
+      </p:sp>
+      <p:sp>
+        <p:nvSpPr>
+          <p:cNvPr id="98" name="Shape 96"/>
+          <p:cNvSpPr/>
+          <p:nvPr/>
+        </p:nvSpPr>
+        <p:spPr>
+          <a:xfrm>
             <a:off x="7170928" y="4791456"/>
             <a:ext cx="945896" cy="256032"/>
-          </a:xfrm>
-          <a:prstGeom prst="rect">
-            <a:avLst/>
-          </a:prstGeom>
-          <a:noFill/>
-          <a:ln/>
-        </p:spPr>
-        <p:txBody>
-          <a:bodyPr wrap="square" lIns="0" tIns="0" rIns="0" bIns="0" rtlCol="0" anchor="ctr"/>
-          <a:lstStyle/>
-          <a:p>
-            <a:pPr algn="ctr" indent="0" marL="0">
-              <a:buNone/>
-            </a:pPr>
-            <a:r>
-              <a:rPr lang="en-US" sz="1000" dirty="0">
-                <a:solidFill>
-                  <a:srgbClr val="1F2430"/>
-                </a:solidFill>
-                <a:latin typeface="Calibri" pitchFamily="34" charset="0"/>
-                <a:ea typeface="Calibri" pitchFamily="34" charset="-122"/>
-                <a:cs typeface="Calibri" pitchFamily="34" charset="-120"/>
-              </a:rPr>
-              <a:t>events list</a:t>
-            </a:r>
-            <a:endParaRPr lang="en-US" sz="1000" dirty="0"/>
-          </a:p>
-        </p:txBody>
-      </p:sp>
-      <p:sp>
-        <p:nvSpPr>
-          <p:cNvPr id="98" name="Shape 96"/>
-          <p:cNvSpPr/>
-          <p:nvPr/>
-        </p:nvSpPr>
-        <p:spPr>
-          <a:xfrm>
-            <a:off x="8208264" y="4791456"/>
-            <a:ext cx="1011936" cy="256032"/>
           </a:xfrm>
           <a:prstGeom prst="roundRect">
             <a:avLst>
@@ -22367,47 +22367,47 @@
         </p:nvSpPr>
         <p:spPr>
           <a:xfrm>
+            <a:off x="7170928" y="4791456"/>
+            <a:ext cx="945896" cy="256032"/>
+          </a:xfrm>
+          <a:prstGeom prst="rect">
+            <a:avLst/>
+          </a:prstGeom>
+          <a:noFill/>
+          <a:ln/>
+        </p:spPr>
+        <p:txBody>
+          <a:bodyPr wrap="square" lIns="0" tIns="0" rIns="0" bIns="0" rtlCol="0" anchor="ctr"/>
+          <a:lstStyle/>
+          <a:p>
+            <a:pPr algn="ctr" indent="0" marL="0">
+              <a:buNone/>
+            </a:pPr>
+            <a:r>
+              <a:rPr lang="en-US" sz="1000" dirty="0">
+                <a:solidFill>
+                  <a:srgbClr val="1F2430"/>
+                </a:solidFill>
+                <a:latin typeface="Calibri" pitchFamily="34" charset="0"/>
+                <a:ea typeface="Calibri" pitchFamily="34" charset="-122"/>
+                <a:cs typeface="Calibri" pitchFamily="34" charset="-120"/>
+              </a:rPr>
+              <a:t>events list</a:t>
+            </a:r>
+            <a:endParaRPr lang="en-US" sz="1000" dirty="0"/>
+          </a:p>
+        </p:txBody>
+      </p:sp>
+      <p:sp>
+        <p:nvSpPr>
+          <p:cNvPr id="100" name="Shape 98"/>
+          <p:cNvSpPr/>
+          <p:nvPr/>
+        </p:nvSpPr>
+        <p:spPr>
+          <a:xfrm>
             <a:off x="8208264" y="4791456"/>
             <a:ext cx="1011936" cy="256032"/>
-          </a:xfrm>
-          <a:prstGeom prst="rect">
-            <a:avLst/>
-          </a:prstGeom>
-          <a:noFill/>
-          <a:ln/>
-        </p:spPr>
-        <p:txBody>
-          <a:bodyPr wrap="square" lIns="0" tIns="0" rIns="0" bIns="0" rtlCol="0" anchor="ctr"/>
-          <a:lstStyle/>
-          <a:p>
-            <a:pPr algn="ctr" indent="0" marL="0">
-              <a:buNone/>
-            </a:pPr>
-            <a:r>
-              <a:rPr lang="en-US" sz="1000" dirty="0">
-                <a:solidFill>
-                  <a:srgbClr val="1F2430"/>
-                </a:solidFill>
-                <a:latin typeface="Calibri" pitchFamily="34" charset="0"/>
-                <a:ea typeface="Calibri" pitchFamily="34" charset="-122"/>
-                <a:cs typeface="Calibri" pitchFamily="34" charset="-120"/>
-              </a:rPr>
-              <a:t>events flush</a:t>
-            </a:r>
-            <a:endParaRPr lang="en-US" sz="1000" dirty="0"/>
-          </a:p>
-        </p:txBody>
-      </p:sp>
-      <p:sp>
-        <p:nvSpPr>
-          <p:cNvPr id="100" name="Shape 98"/>
-          <p:cNvSpPr/>
-          <p:nvPr/>
-        </p:nvSpPr>
-        <p:spPr>
-          <a:xfrm>
-            <a:off x="9311640" y="4791456"/>
-            <a:ext cx="1077976" cy="256032"/>
           </a:xfrm>
           <a:prstGeom prst="roundRect">
             <a:avLst>
@@ -22433,47 +22433,47 @@
         </p:nvSpPr>
         <p:spPr>
           <a:xfrm>
+            <a:off x="8208264" y="4791456"/>
+            <a:ext cx="1011936" cy="256032"/>
+          </a:xfrm>
+          <a:prstGeom prst="rect">
+            <a:avLst/>
+          </a:prstGeom>
+          <a:noFill/>
+          <a:ln/>
+        </p:spPr>
+        <p:txBody>
+          <a:bodyPr wrap="square" lIns="0" tIns="0" rIns="0" bIns="0" rtlCol="0" anchor="ctr"/>
+          <a:lstStyle/>
+          <a:p>
+            <a:pPr algn="ctr" indent="0" marL="0">
+              <a:buNone/>
+            </a:pPr>
+            <a:r>
+              <a:rPr lang="en-US" sz="1000" dirty="0">
+                <a:solidFill>
+                  <a:srgbClr val="1F2430"/>
+                </a:solidFill>
+                <a:latin typeface="Calibri" pitchFamily="34" charset="0"/>
+                <a:ea typeface="Calibri" pitchFamily="34" charset="-122"/>
+                <a:cs typeface="Calibri" pitchFamily="34" charset="-120"/>
+              </a:rPr>
+              <a:t>events flush</a:t>
+            </a:r>
+            <a:endParaRPr lang="en-US" sz="1000" dirty="0"/>
+          </a:p>
+        </p:txBody>
+      </p:sp>
+      <p:sp>
+        <p:nvSpPr>
+          <p:cNvPr id="102" name="Shape 100"/>
+          <p:cNvSpPr/>
+          <p:nvPr/>
+        </p:nvSpPr>
+        <p:spPr>
+          <a:xfrm>
             <a:off x="9311640" y="4791456"/>
             <a:ext cx="1077976" cy="256032"/>
-          </a:xfrm>
-          <a:prstGeom prst="rect">
-            <a:avLst/>
-          </a:prstGeom>
-          <a:noFill/>
-          <a:ln/>
-        </p:spPr>
-        <p:txBody>
-          <a:bodyPr wrap="square" lIns="0" tIns="0" rIns="0" bIns="0" rtlCol="0" anchor="ctr"/>
-          <a:lstStyle/>
-          <a:p>
-            <a:pPr algn="ctr" indent="0" marL="0">
-              <a:buNone/>
-            </a:pPr>
-            <a:r>
-              <a:rPr lang="en-US" sz="1000" dirty="0">
-                <a:solidFill>
-                  <a:srgbClr val="1F2430"/>
-                </a:solidFill>
-                <a:latin typeface="Calibri" pitchFamily="34" charset="0"/>
-                <a:ea typeface="Calibri" pitchFamily="34" charset="-122"/>
-                <a:cs typeface="Calibri" pitchFamily="34" charset="-120"/>
-              </a:rPr>
-              <a:t>release check</a:t>
-            </a:r>
-            <a:endParaRPr lang="en-US" sz="1000" dirty="0"/>
-          </a:p>
-        </p:txBody>
-      </p:sp>
-      <p:sp>
-        <p:nvSpPr>
-          <p:cNvPr id="102" name="Shape 100"/>
-          <p:cNvSpPr/>
-          <p:nvPr/>
-        </p:nvSpPr>
-        <p:spPr>
-          <a:xfrm>
-            <a:off x="10481056" y="4791456"/>
-            <a:ext cx="813816" cy="256032"/>
           </a:xfrm>
           <a:prstGeom prst="roundRect">
             <a:avLst>
@@ -22499,47 +22499,47 @@
         </p:nvSpPr>
         <p:spPr>
           <a:xfrm>
+            <a:off x="9311640" y="4791456"/>
+            <a:ext cx="1077976" cy="256032"/>
+          </a:xfrm>
+          <a:prstGeom prst="rect">
+            <a:avLst/>
+          </a:prstGeom>
+          <a:noFill/>
+          <a:ln/>
+        </p:spPr>
+        <p:txBody>
+          <a:bodyPr wrap="square" lIns="0" tIns="0" rIns="0" bIns="0" rtlCol="0" anchor="ctr"/>
+          <a:lstStyle/>
+          <a:p>
+            <a:pPr algn="ctr" indent="0" marL="0">
+              <a:buNone/>
+            </a:pPr>
+            <a:r>
+              <a:rPr lang="en-US" sz="1000" dirty="0">
+                <a:solidFill>
+                  <a:srgbClr val="1F2430"/>
+                </a:solidFill>
+                <a:latin typeface="Calibri" pitchFamily="34" charset="0"/>
+                <a:ea typeface="Calibri" pitchFamily="34" charset="-122"/>
+                <a:cs typeface="Calibri" pitchFamily="34" charset="-120"/>
+              </a:rPr>
+              <a:t>release check</a:t>
+            </a:r>
+            <a:endParaRPr lang="en-US" sz="1000" dirty="0"/>
+          </a:p>
+        </p:txBody>
+      </p:sp>
+      <p:sp>
+        <p:nvSpPr>
+          <p:cNvPr id="104" name="Shape 102"/>
+          <p:cNvSpPr/>
+          <p:nvPr/>
+        </p:nvSpPr>
+        <p:spPr>
+          <a:xfrm>
             <a:off x="10481056" y="4791456"/>
             <a:ext cx="813816" cy="256032"/>
-          </a:xfrm>
-          <a:prstGeom prst="rect">
-            <a:avLst/>
-          </a:prstGeom>
-          <a:noFill/>
-          <a:ln/>
-        </p:spPr>
-        <p:txBody>
-          <a:bodyPr wrap="square" lIns="0" tIns="0" rIns="0" bIns="0" rtlCol="0" anchor="ctr"/>
-          <a:lstStyle/>
-          <a:p>
-            <a:pPr algn="ctr" indent="0" marL="0">
-              <a:buNone/>
-            </a:pPr>
-            <a:r>
-              <a:rPr lang="en-US" sz="1000" dirty="0">
-                <a:solidFill>
-                  <a:srgbClr val="1F2430"/>
-                </a:solidFill>
-                <a:latin typeface="Calibri" pitchFamily="34" charset="0"/>
-                <a:ea typeface="Calibri" pitchFamily="34" charset="-122"/>
-                <a:cs typeface="Calibri" pitchFamily="34" charset="-120"/>
-              </a:rPr>
-              <a:t>track set</a:t>
-            </a:r>
-            <a:endParaRPr lang="en-US" sz="1000" dirty="0"/>
-          </a:p>
-        </p:txBody>
-      </p:sp>
-      <p:sp>
-        <p:nvSpPr>
-          <p:cNvPr id="104" name="Shape 102"/>
-          <p:cNvSpPr/>
-          <p:nvPr/>
-        </p:nvSpPr>
-        <p:spPr>
-          <a:xfrm>
-            <a:off x="457200" y="5138928"/>
-            <a:ext cx="483616" cy="256032"/>
           </a:xfrm>
           <a:prstGeom prst="roundRect">
             <a:avLst>
@@ -22565,47 +22565,47 @@
         </p:nvSpPr>
         <p:spPr>
           <a:xfrm>
+            <a:off x="10481056" y="4791456"/>
+            <a:ext cx="813816" cy="256032"/>
+          </a:xfrm>
+          <a:prstGeom prst="rect">
+            <a:avLst/>
+          </a:prstGeom>
+          <a:noFill/>
+          <a:ln/>
+        </p:spPr>
+        <p:txBody>
+          <a:bodyPr wrap="square" lIns="0" tIns="0" rIns="0" bIns="0" rtlCol="0" anchor="ctr"/>
+          <a:lstStyle/>
+          <a:p>
+            <a:pPr algn="ctr" indent="0" marL="0">
+              <a:buNone/>
+            </a:pPr>
+            <a:r>
+              <a:rPr lang="en-US" sz="1000" dirty="0">
+                <a:solidFill>
+                  <a:srgbClr val="1F2430"/>
+                </a:solidFill>
+                <a:latin typeface="Calibri" pitchFamily="34" charset="0"/>
+                <a:ea typeface="Calibri" pitchFamily="34" charset="-122"/>
+                <a:cs typeface="Calibri" pitchFamily="34" charset="-120"/>
+              </a:rPr>
+              <a:t>track set</a:t>
+            </a:r>
+            <a:endParaRPr lang="en-US" sz="1000" dirty="0"/>
+          </a:p>
+        </p:txBody>
+      </p:sp>
+      <p:sp>
+        <p:nvSpPr>
+          <p:cNvPr id="106" name="Shape 104"/>
+          <p:cNvSpPr/>
+          <p:nvPr/>
+        </p:nvSpPr>
+        <p:spPr>
+          <a:xfrm>
             <a:off x="457200" y="5138928"/>
             <a:ext cx="483616" cy="256032"/>
-          </a:xfrm>
-          <a:prstGeom prst="rect">
-            <a:avLst/>
-          </a:prstGeom>
-          <a:noFill/>
-          <a:ln/>
-        </p:spPr>
-        <p:txBody>
-          <a:bodyPr wrap="square" lIns="0" tIns="0" rIns="0" bIns="0" rtlCol="0" anchor="ctr"/>
-          <a:lstStyle/>
-          <a:p>
-            <a:pPr algn="ctr" indent="0" marL="0">
-              <a:buNone/>
-            </a:pPr>
-            <a:r>
-              <a:rPr lang="en-US" sz="1000" dirty="0">
-                <a:solidFill>
-                  <a:srgbClr val="1F2430"/>
-                </a:solidFill>
-                <a:latin typeface="Calibri" pitchFamily="34" charset="0"/>
-                <a:ea typeface="Calibri" pitchFamily="34" charset="-122"/>
-                <a:cs typeface="Calibri" pitchFamily="34" charset="-120"/>
-              </a:rPr>
-              <a:t>next</a:t>
-            </a:r>
-            <a:endParaRPr lang="en-US" sz="1000" dirty="0"/>
-          </a:p>
-        </p:txBody>
-      </p:sp>
-      <p:sp>
-        <p:nvSpPr>
-          <p:cNvPr id="106" name="Shape 104"/>
-          <p:cNvSpPr/>
-          <p:nvPr/>
-        </p:nvSpPr>
-        <p:spPr>
-          <a:xfrm>
-            <a:off x="1032256" y="5138928"/>
-            <a:ext cx="1011936" cy="256032"/>
           </a:xfrm>
           <a:prstGeom prst="roundRect">
             <a:avLst>
@@ -22631,47 +22631,47 @@
         </p:nvSpPr>
         <p:spPr>
           <a:xfrm>
+            <a:off x="457200" y="5138928"/>
+            <a:ext cx="483616" cy="256032"/>
+          </a:xfrm>
+          <a:prstGeom prst="rect">
+            <a:avLst/>
+          </a:prstGeom>
+          <a:noFill/>
+          <a:ln/>
+        </p:spPr>
+        <p:txBody>
+          <a:bodyPr wrap="square" lIns="0" tIns="0" rIns="0" bIns="0" rtlCol="0" anchor="ctr"/>
+          <a:lstStyle/>
+          <a:p>
+            <a:pPr algn="ctr" indent="0" marL="0">
+              <a:buNone/>
+            </a:pPr>
+            <a:r>
+              <a:rPr lang="en-US" sz="1000" dirty="0">
+                <a:solidFill>
+                  <a:srgbClr val="1F2430"/>
+                </a:solidFill>
+                <a:latin typeface="Calibri" pitchFamily="34" charset="0"/>
+                <a:ea typeface="Calibri" pitchFamily="34" charset="-122"/>
+                <a:cs typeface="Calibri" pitchFamily="34" charset="-120"/>
+              </a:rPr>
+              <a:t>next</a:t>
+            </a:r>
+            <a:endParaRPr lang="en-US" sz="1000" dirty="0"/>
+          </a:p>
+        </p:txBody>
+      </p:sp>
+      <p:sp>
+        <p:nvSpPr>
+          <p:cNvPr id="108" name="Shape 106"/>
+          <p:cNvSpPr/>
+          <p:nvPr/>
+        </p:nvSpPr>
+        <p:spPr>
+          <a:xfrm>
             <a:off x="1032256" y="5138928"/>
             <a:ext cx="1011936" cy="256032"/>
-          </a:xfrm>
-          <a:prstGeom prst="rect">
-            <a:avLst/>
-          </a:prstGeom>
-          <a:noFill/>
-          <a:ln/>
-        </p:spPr>
-        <p:txBody>
-          <a:bodyPr wrap="square" lIns="0" tIns="0" rIns="0" bIns="0" rtlCol="0" anchor="ctr"/>
-          <a:lstStyle/>
-          <a:p>
-            <a:pPr algn="ctr" indent="0" marL="0">
-              <a:buNone/>
-            </a:pPr>
-            <a:r>
-              <a:rPr lang="en-US" sz="1000" dirty="0">
-                <a:solidFill>
-                  <a:srgbClr val="1F2430"/>
-                </a:solidFill>
-                <a:latin typeface="Calibri" pitchFamily="34" charset="0"/>
-                <a:ea typeface="Calibri" pitchFamily="34" charset="-122"/>
-                <a:cs typeface="Calibri" pitchFamily="34" charset="-120"/>
-              </a:rPr>
-              <a:t>instructions</a:t>
-            </a:r>
-            <a:endParaRPr lang="en-US" sz="1000" dirty="0"/>
-          </a:p>
-        </p:txBody>
-      </p:sp>
-      <p:sp>
-        <p:nvSpPr>
-          <p:cNvPr id="108" name="Shape 106"/>
-          <p:cNvSpPr/>
-          <p:nvPr/>
-        </p:nvSpPr>
-        <p:spPr>
-          <a:xfrm>
-            <a:off x="2135632" y="5138928"/>
-            <a:ext cx="681736" cy="256032"/>
           </a:xfrm>
           <a:prstGeom prst="roundRect">
             <a:avLst>
@@ -22697,47 +22697,47 @@
         </p:nvSpPr>
         <p:spPr>
           <a:xfrm>
+            <a:off x="1032256" y="5138928"/>
+            <a:ext cx="1011936" cy="256032"/>
+          </a:xfrm>
+          <a:prstGeom prst="rect">
+            <a:avLst/>
+          </a:prstGeom>
+          <a:noFill/>
+          <a:ln/>
+        </p:spPr>
+        <p:txBody>
+          <a:bodyPr wrap="square" lIns="0" tIns="0" rIns="0" bIns="0" rtlCol="0" anchor="ctr"/>
+          <a:lstStyle/>
+          <a:p>
+            <a:pPr algn="ctr" indent="0" marL="0">
+              <a:buNone/>
+            </a:pPr>
+            <a:r>
+              <a:rPr lang="en-US" sz="1000" dirty="0">
+                <a:solidFill>
+                  <a:srgbClr val="1F2430"/>
+                </a:solidFill>
+                <a:latin typeface="Calibri" pitchFamily="34" charset="0"/>
+                <a:ea typeface="Calibri" pitchFamily="34" charset="-122"/>
+                <a:cs typeface="Calibri" pitchFamily="34" charset="-120"/>
+              </a:rPr>
+              <a:t>instructions</a:t>
+            </a:r>
+            <a:endParaRPr lang="en-US" sz="1000" dirty="0"/>
+          </a:p>
+        </p:txBody>
+      </p:sp>
+      <p:sp>
+        <p:nvSpPr>
+          <p:cNvPr id="110" name="Shape 108"/>
+          <p:cNvSpPr/>
+          <p:nvPr/>
+        </p:nvSpPr>
+        <p:spPr>
+          <a:xfrm>
             <a:off x="2135632" y="5138928"/>
             <a:ext cx="681736" cy="256032"/>
-          </a:xfrm>
-          <a:prstGeom prst="rect">
-            <a:avLst/>
-          </a:prstGeom>
-          <a:noFill/>
-          <a:ln/>
-        </p:spPr>
-        <p:txBody>
-          <a:bodyPr wrap="square" lIns="0" tIns="0" rIns="0" bIns="0" rtlCol="0" anchor="ctr"/>
-          <a:lstStyle/>
-          <a:p>
-            <a:pPr algn="ctr" indent="0" marL="0">
-              <a:buNone/>
-            </a:pPr>
-            <a:r>
-              <a:rPr lang="en-US" sz="1000" dirty="0">
-                <a:solidFill>
-                  <a:srgbClr val="1F2430"/>
-                </a:solidFill>
-                <a:latin typeface="Calibri" pitchFamily="34" charset="0"/>
-                <a:ea typeface="Calibri" pitchFamily="34" charset="-122"/>
-                <a:cs typeface="Calibri" pitchFamily="34" charset="-120"/>
-              </a:rPr>
-              <a:t>approve</a:t>
-            </a:r>
-            <a:endParaRPr lang="en-US" sz="1000" dirty="0"/>
-          </a:p>
-        </p:txBody>
-      </p:sp>
-      <p:sp>
-        <p:nvSpPr>
-          <p:cNvPr id="110" name="Shape 108"/>
-          <p:cNvSpPr/>
-          <p:nvPr/>
-        </p:nvSpPr>
-        <p:spPr>
-          <a:xfrm>
-            <a:off x="2908808" y="5138928"/>
-            <a:ext cx="615696" cy="256032"/>
           </a:xfrm>
           <a:prstGeom prst="roundRect">
             <a:avLst>
@@ -22763,47 +22763,47 @@
         </p:nvSpPr>
         <p:spPr>
           <a:xfrm>
+            <a:off x="2135632" y="5138928"/>
+            <a:ext cx="681736" cy="256032"/>
+          </a:xfrm>
+          <a:prstGeom prst="rect">
+            <a:avLst/>
+          </a:prstGeom>
+          <a:noFill/>
+          <a:ln/>
+        </p:spPr>
+        <p:txBody>
+          <a:bodyPr wrap="square" lIns="0" tIns="0" rIns="0" bIns="0" rtlCol="0" anchor="ctr"/>
+          <a:lstStyle/>
+          <a:p>
+            <a:pPr algn="ctr" indent="0" marL="0">
+              <a:buNone/>
+            </a:pPr>
+            <a:r>
+              <a:rPr lang="en-US" sz="1000" dirty="0">
+                <a:solidFill>
+                  <a:srgbClr val="1F2430"/>
+                </a:solidFill>
+                <a:latin typeface="Calibri" pitchFamily="34" charset="0"/>
+                <a:ea typeface="Calibri" pitchFamily="34" charset="-122"/>
+                <a:cs typeface="Calibri" pitchFamily="34" charset="-120"/>
+              </a:rPr>
+              <a:t>approve</a:t>
+            </a:r>
+            <a:endParaRPr lang="en-US" sz="1000" dirty="0"/>
+          </a:p>
+        </p:txBody>
+      </p:sp>
+      <p:sp>
+        <p:nvSpPr>
+          <p:cNvPr id="112" name="Shape 110"/>
+          <p:cNvSpPr/>
+          <p:nvPr/>
+        </p:nvSpPr>
+        <p:spPr>
+          <a:xfrm>
             <a:off x="2908808" y="5138928"/>
             <a:ext cx="615696" cy="256032"/>
-          </a:xfrm>
-          <a:prstGeom prst="rect">
-            <a:avLst/>
-          </a:prstGeom>
-          <a:noFill/>
-          <a:ln/>
-        </p:spPr>
-        <p:txBody>
-          <a:bodyPr wrap="square" lIns="0" tIns="0" rIns="0" bIns="0" rtlCol="0" anchor="ctr"/>
-          <a:lstStyle/>
-          <a:p>
-            <a:pPr algn="ctr" indent="0" marL="0">
-              <a:buNone/>
-            </a:pPr>
-            <a:r>
-              <a:rPr lang="en-US" sz="1000" dirty="0">
-                <a:solidFill>
-                  <a:srgbClr val="1F2430"/>
-                </a:solidFill>
-                <a:latin typeface="Calibri" pitchFamily="34" charset="0"/>
-                <a:ea typeface="Calibri" pitchFamily="34" charset="-122"/>
-                <a:cs typeface="Calibri" pitchFamily="34" charset="-120"/>
-              </a:rPr>
-              <a:t>reject</a:t>
-            </a:r>
-            <a:endParaRPr lang="en-US" sz="1000" dirty="0"/>
-          </a:p>
-        </p:txBody>
-      </p:sp>
-      <p:sp>
-        <p:nvSpPr>
-          <p:cNvPr id="112" name="Shape 110"/>
-          <p:cNvSpPr/>
-          <p:nvPr/>
-        </p:nvSpPr>
-        <p:spPr>
-          <a:xfrm>
-            <a:off x="3615944" y="5138928"/>
-            <a:ext cx="549656" cy="256032"/>
           </a:xfrm>
           <a:prstGeom prst="roundRect">
             <a:avLst>
@@ -22829,47 +22829,47 @@
         </p:nvSpPr>
         <p:spPr>
           <a:xfrm>
+            <a:off x="2908808" y="5138928"/>
+            <a:ext cx="615696" cy="256032"/>
+          </a:xfrm>
+          <a:prstGeom prst="rect">
+            <a:avLst/>
+          </a:prstGeom>
+          <a:noFill/>
+          <a:ln/>
+        </p:spPr>
+        <p:txBody>
+          <a:bodyPr wrap="square" lIns="0" tIns="0" rIns="0" bIns="0" rtlCol="0" anchor="ctr"/>
+          <a:lstStyle/>
+          <a:p>
+            <a:pPr algn="ctr" indent="0" marL="0">
+              <a:buNone/>
+            </a:pPr>
+            <a:r>
+              <a:rPr lang="en-US" sz="1000" dirty="0">
+                <a:solidFill>
+                  <a:srgbClr val="1F2430"/>
+                </a:solidFill>
+                <a:latin typeface="Calibri" pitchFamily="34" charset="0"/>
+                <a:ea typeface="Calibri" pitchFamily="34" charset="-122"/>
+                <a:cs typeface="Calibri" pitchFamily="34" charset="-120"/>
+              </a:rPr>
+              <a:t>reject</a:t>
+            </a:r>
+            <a:endParaRPr lang="en-US" sz="1000" dirty="0"/>
+          </a:p>
+        </p:txBody>
+      </p:sp>
+      <p:sp>
+        <p:nvSpPr>
+          <p:cNvPr id="114" name="Shape 112"/>
+          <p:cNvSpPr/>
+          <p:nvPr/>
+        </p:nvSpPr>
+        <p:spPr>
+          <a:xfrm>
             <a:off x="3615944" y="5138928"/>
             <a:ext cx="549656" cy="256032"/>
-          </a:xfrm>
-          <a:prstGeom prst="rect">
-            <a:avLst/>
-          </a:prstGeom>
-          <a:noFill/>
-          <a:ln/>
-        </p:spPr>
-        <p:txBody>
-          <a:bodyPr wrap="square" lIns="0" tIns="0" rIns="0" bIns="0" rtlCol="0" anchor="ctr"/>
-          <a:lstStyle/>
-          <a:p>
-            <a:pPr algn="ctr" indent="0" marL="0">
-              <a:buNone/>
-            </a:pPr>
-            <a:r>
-              <a:rPr lang="en-US" sz="1000" dirty="0">
-                <a:solidFill>
-                  <a:srgbClr val="1F2430"/>
-                </a:solidFill>
-                <a:latin typeface="Calibri" pitchFamily="34" charset="0"/>
-                <a:ea typeface="Calibri" pitchFamily="34" charset="-122"/>
-                <a:cs typeface="Calibri" pitchFamily="34" charset="-120"/>
-              </a:rPr>
-              <a:t>waive</a:t>
-            </a:r>
-            <a:endParaRPr lang="en-US" sz="1000" dirty="0"/>
-          </a:p>
-        </p:txBody>
-      </p:sp>
-      <p:sp>
-        <p:nvSpPr>
-          <p:cNvPr id="114" name="Shape 112"/>
-          <p:cNvSpPr/>
-          <p:nvPr/>
-        </p:nvSpPr>
-        <p:spPr>
-          <a:xfrm>
-            <a:off x="4257040" y="5138928"/>
-            <a:ext cx="615696" cy="256032"/>
           </a:xfrm>
           <a:prstGeom prst="roundRect">
             <a:avLst>
@@ -22895,47 +22895,47 @@
         </p:nvSpPr>
         <p:spPr>
           <a:xfrm>
+            <a:off x="3615944" y="5138928"/>
+            <a:ext cx="549656" cy="256032"/>
+          </a:xfrm>
+          <a:prstGeom prst="rect">
+            <a:avLst/>
+          </a:prstGeom>
+          <a:noFill/>
+          <a:ln/>
+        </p:spPr>
+        <p:txBody>
+          <a:bodyPr wrap="square" lIns="0" tIns="0" rIns="0" bIns="0" rtlCol="0" anchor="ctr"/>
+          <a:lstStyle/>
+          <a:p>
+            <a:pPr algn="ctr" indent="0" marL="0">
+              <a:buNone/>
+            </a:pPr>
+            <a:r>
+              <a:rPr lang="en-US" sz="1000" dirty="0">
+                <a:solidFill>
+                  <a:srgbClr val="1F2430"/>
+                </a:solidFill>
+                <a:latin typeface="Calibri" pitchFamily="34" charset="0"/>
+                <a:ea typeface="Calibri" pitchFamily="34" charset="-122"/>
+                <a:cs typeface="Calibri" pitchFamily="34" charset="-120"/>
+              </a:rPr>
+              <a:t>waive</a:t>
+            </a:r>
+            <a:endParaRPr lang="en-US" sz="1000" dirty="0"/>
+          </a:p>
+        </p:txBody>
+      </p:sp>
+      <p:sp>
+        <p:nvSpPr>
+          <p:cNvPr id="116" name="Shape 114"/>
+          <p:cNvSpPr/>
+          <p:nvPr/>
+        </p:nvSpPr>
+        <p:spPr>
+          <a:xfrm>
             <a:off x="4257040" y="5138928"/>
             <a:ext cx="615696" cy="256032"/>
-          </a:xfrm>
-          <a:prstGeom prst="rect">
-            <a:avLst/>
-          </a:prstGeom>
-          <a:noFill/>
-          <a:ln/>
-        </p:spPr>
-        <p:txBody>
-          <a:bodyPr wrap="square" lIns="0" tIns="0" rIns="0" bIns="0" rtlCol="0" anchor="ctr"/>
-          <a:lstStyle/>
-          <a:p>
-            <a:pPr algn="ctr" indent="0" marL="0">
-              <a:buNone/>
-            </a:pPr>
-            <a:r>
-              <a:rPr lang="en-US" sz="1000" dirty="0">
-                <a:solidFill>
-                  <a:srgbClr val="1F2430"/>
-                </a:solidFill>
-                <a:latin typeface="Calibri" pitchFamily="34" charset="0"/>
-                <a:ea typeface="Calibri" pitchFamily="34" charset="-122"/>
-                <a:cs typeface="Calibri" pitchFamily="34" charset="-120"/>
-              </a:rPr>
-              <a:t>answer</a:t>
-            </a:r>
-            <a:endParaRPr lang="en-US" sz="1000" dirty="0"/>
-          </a:p>
-        </p:txBody>
-      </p:sp>
-      <p:sp>
-        <p:nvSpPr>
-          <p:cNvPr id="116" name="Shape 114"/>
-          <p:cNvSpPr/>
-          <p:nvPr/>
-        </p:nvSpPr>
-        <p:spPr>
-          <a:xfrm>
-            <a:off x="4964176" y="5138928"/>
-            <a:ext cx="747776" cy="256032"/>
           </a:xfrm>
           <a:prstGeom prst="roundRect">
             <a:avLst>
@@ -22961,47 +22961,47 @@
         </p:nvSpPr>
         <p:spPr>
           <a:xfrm>
+            <a:off x="4257040" y="5138928"/>
+            <a:ext cx="615696" cy="256032"/>
+          </a:xfrm>
+          <a:prstGeom prst="rect">
+            <a:avLst/>
+          </a:prstGeom>
+          <a:noFill/>
+          <a:ln/>
+        </p:spPr>
+        <p:txBody>
+          <a:bodyPr wrap="square" lIns="0" tIns="0" rIns="0" bIns="0" rtlCol="0" anchor="ctr"/>
+          <a:lstStyle/>
+          <a:p>
+            <a:pPr algn="ctr" indent="0" marL="0">
+              <a:buNone/>
+            </a:pPr>
+            <a:r>
+              <a:rPr lang="en-US" sz="1000" dirty="0">
+                <a:solidFill>
+                  <a:srgbClr val="1F2430"/>
+                </a:solidFill>
+                <a:latin typeface="Calibri" pitchFamily="34" charset="0"/>
+                <a:ea typeface="Calibri" pitchFamily="34" charset="-122"/>
+                <a:cs typeface="Calibri" pitchFamily="34" charset="-120"/>
+              </a:rPr>
+              <a:t>answer</a:t>
+            </a:r>
+            <a:endParaRPr lang="en-US" sz="1000" dirty="0"/>
+          </a:p>
+        </p:txBody>
+      </p:sp>
+      <p:sp>
+        <p:nvSpPr>
+          <p:cNvPr id="118" name="Shape 116"/>
+          <p:cNvSpPr/>
+          <p:nvPr/>
+        </p:nvSpPr>
+        <p:spPr>
+          <a:xfrm>
             <a:off x="4964176" y="5138928"/>
             <a:ext cx="747776" cy="256032"/>
-          </a:xfrm>
-          <a:prstGeom prst="rect">
-            <a:avLst/>
-          </a:prstGeom>
-          <a:noFill/>
-          <a:ln/>
-        </p:spPr>
-        <p:txBody>
-          <a:bodyPr wrap="square" lIns="0" tIns="0" rIns="0" bIns="0" rtlCol="0" anchor="ctr"/>
-          <a:lstStyle/>
-          <a:p>
-            <a:pPr algn="ctr" indent="0" marL="0">
-              <a:buNone/>
-            </a:pPr>
-            <a:r>
-              <a:rPr lang="en-US" sz="1000" dirty="0">
-                <a:solidFill>
-                  <a:srgbClr val="1F2430"/>
-                </a:solidFill>
-                <a:latin typeface="Calibri" pitchFamily="34" charset="0"/>
-                <a:ea typeface="Calibri" pitchFamily="34" charset="-122"/>
-                <a:cs typeface="Calibri" pitchFamily="34" charset="-120"/>
-              </a:rPr>
-              <a:t>takeover</a:t>
-            </a:r>
-            <a:endParaRPr lang="en-US" sz="1000" dirty="0"/>
-          </a:p>
-        </p:txBody>
-      </p:sp>
-      <p:sp>
-        <p:nvSpPr>
-          <p:cNvPr id="118" name="Shape 116"/>
-          <p:cNvSpPr/>
-          <p:nvPr/>
-        </p:nvSpPr>
-        <p:spPr>
-          <a:xfrm>
-            <a:off x="5803392" y="5138928"/>
-            <a:ext cx="1210056" cy="256032"/>
           </a:xfrm>
           <a:prstGeom prst="roundRect">
             <a:avLst>
@@ -23027,47 +23027,47 @@
         </p:nvSpPr>
         <p:spPr>
           <a:xfrm>
+            <a:off x="4964176" y="5138928"/>
+            <a:ext cx="747776" cy="256032"/>
+          </a:xfrm>
+          <a:prstGeom prst="rect">
+            <a:avLst/>
+          </a:prstGeom>
+          <a:noFill/>
+          <a:ln/>
+        </p:spPr>
+        <p:txBody>
+          <a:bodyPr wrap="square" lIns="0" tIns="0" rIns="0" bIns="0" rtlCol="0" anchor="ctr"/>
+          <a:lstStyle/>
+          <a:p>
+            <a:pPr algn="ctr" indent="0" marL="0">
+              <a:buNone/>
+            </a:pPr>
+            <a:r>
+              <a:rPr lang="en-US" sz="1000" dirty="0">
+                <a:solidFill>
+                  <a:srgbClr val="1F2430"/>
+                </a:solidFill>
+                <a:latin typeface="Calibri" pitchFamily="34" charset="0"/>
+                <a:ea typeface="Calibri" pitchFamily="34" charset="-122"/>
+                <a:cs typeface="Calibri" pitchFamily="34" charset="-120"/>
+              </a:rPr>
+              <a:t>takeover</a:t>
+            </a:r>
+            <a:endParaRPr lang="en-US" sz="1000" dirty="0"/>
+          </a:p>
+        </p:txBody>
+      </p:sp>
+      <p:sp>
+        <p:nvSpPr>
+          <p:cNvPr id="120" name="Shape 118"/>
+          <p:cNvSpPr/>
+          <p:nvPr/>
+        </p:nvSpPr>
+        <p:spPr>
+          <a:xfrm>
             <a:off x="5803392" y="5138928"/>
             <a:ext cx="1210056" cy="256032"/>
-          </a:xfrm>
-          <a:prstGeom prst="rect">
-            <a:avLst/>
-          </a:prstGeom>
-          <a:noFill/>
-          <a:ln/>
-        </p:spPr>
-        <p:txBody>
-          <a:bodyPr wrap="square" lIns="0" tIns="0" rIns="0" bIns="0" rtlCol="0" anchor="ctr"/>
-          <a:lstStyle/>
-          <a:p>
-            <a:pPr algn="ctr" indent="0" marL="0">
-              <a:buNone/>
-            </a:pPr>
-            <a:r>
-              <a:rPr lang="en-US" sz="1000" dirty="0">
-                <a:solidFill>
-                  <a:srgbClr val="1F2430"/>
-                </a:solidFill>
-                <a:latin typeface="Calibri" pitchFamily="34" charset="0"/>
-                <a:ea typeface="Calibri" pitchFamily="34" charset="-122"/>
-                <a:cs typeface="Calibri" pitchFamily="34" charset="-120"/>
-              </a:rPr>
-              <a:t>release-control</a:t>
-            </a:r>
-            <a:endParaRPr lang="en-US" sz="1000" dirty="0"/>
-          </a:p>
-        </p:txBody>
-      </p:sp>
-      <p:sp>
-        <p:nvSpPr>
-          <p:cNvPr id="120" name="Shape 118"/>
-          <p:cNvSpPr/>
-          <p:nvPr/>
-        </p:nvSpPr>
-        <p:spPr>
-          <a:xfrm>
-            <a:off x="7104888" y="5138928"/>
-            <a:ext cx="615696" cy="256032"/>
           </a:xfrm>
           <a:prstGeom prst="roundRect">
             <a:avLst>
@@ -23093,47 +23093,47 @@
         </p:nvSpPr>
         <p:spPr>
           <a:xfrm>
+            <a:off x="5803392" y="5138928"/>
+            <a:ext cx="1210056" cy="256032"/>
+          </a:xfrm>
+          <a:prstGeom prst="rect">
+            <a:avLst/>
+          </a:prstGeom>
+          <a:noFill/>
+          <a:ln/>
+        </p:spPr>
+        <p:txBody>
+          <a:bodyPr wrap="square" lIns="0" tIns="0" rIns="0" bIns="0" rtlCol="0" anchor="ctr"/>
+          <a:lstStyle/>
+          <a:p>
+            <a:pPr algn="ctr" indent="0" marL="0">
+              <a:buNone/>
+            </a:pPr>
+            <a:r>
+              <a:rPr lang="en-US" sz="1000" dirty="0">
+                <a:solidFill>
+                  <a:srgbClr val="1F2430"/>
+                </a:solidFill>
+                <a:latin typeface="Calibri" pitchFamily="34" charset="0"/>
+                <a:ea typeface="Calibri" pitchFamily="34" charset="-122"/>
+                <a:cs typeface="Calibri" pitchFamily="34" charset="-120"/>
+              </a:rPr>
+              <a:t>release-control</a:t>
+            </a:r>
+            <a:endParaRPr lang="en-US" sz="1000" dirty="0"/>
+          </a:p>
+        </p:txBody>
+      </p:sp>
+      <p:sp>
+        <p:nvSpPr>
+          <p:cNvPr id="122" name="Shape 120"/>
+          <p:cNvSpPr/>
+          <p:nvPr/>
+        </p:nvSpPr>
+        <p:spPr>
+          <a:xfrm>
             <a:off x="7104888" y="5138928"/>
             <a:ext cx="615696" cy="256032"/>
-          </a:xfrm>
-          <a:prstGeom prst="rect">
-            <a:avLst/>
-          </a:prstGeom>
-          <a:noFill/>
-          <a:ln/>
-        </p:spPr>
-        <p:txBody>
-          <a:bodyPr wrap="square" lIns="0" tIns="0" rIns="0" bIns="0" rtlCol="0" anchor="ctr"/>
-          <a:lstStyle/>
-          <a:p>
-            <a:pPr algn="ctr" indent="0" marL="0">
-              <a:buNone/>
-            </a:pPr>
-            <a:r>
-              <a:rPr lang="en-US" sz="1000" dirty="0">
-                <a:solidFill>
-                  <a:srgbClr val="1F2430"/>
-                </a:solidFill>
-                <a:latin typeface="Calibri" pitchFamily="34" charset="0"/>
-                <a:ea typeface="Calibri" pitchFamily="34" charset="-122"/>
-                <a:cs typeface="Calibri" pitchFamily="34" charset="-120"/>
-              </a:rPr>
-              <a:t>rework</a:t>
-            </a:r>
-            <a:endParaRPr lang="en-US" sz="1000" dirty="0"/>
-          </a:p>
-        </p:txBody>
-      </p:sp>
-      <p:sp>
-        <p:nvSpPr>
-          <p:cNvPr id="122" name="Shape 120"/>
-          <p:cNvSpPr/>
-          <p:nvPr/>
-        </p:nvSpPr>
-        <p:spPr>
-          <a:xfrm>
-            <a:off x="7812024" y="5138928"/>
-            <a:ext cx="1276096" cy="256032"/>
           </a:xfrm>
           <a:prstGeom prst="roundRect">
             <a:avLst>
@@ -23159,47 +23159,47 @@
         </p:nvSpPr>
         <p:spPr>
           <a:xfrm>
+            <a:off x="7104888" y="5138928"/>
+            <a:ext cx="615696" cy="256032"/>
+          </a:xfrm>
+          <a:prstGeom prst="rect">
+            <a:avLst/>
+          </a:prstGeom>
+          <a:noFill/>
+          <a:ln/>
+        </p:spPr>
+        <p:txBody>
+          <a:bodyPr wrap="square" lIns="0" tIns="0" rIns="0" bIns="0" rtlCol="0" anchor="ctr"/>
+          <a:lstStyle/>
+          <a:p>
+            <a:pPr algn="ctr" indent="0" marL="0">
+              <a:buNone/>
+            </a:pPr>
+            <a:r>
+              <a:rPr lang="en-US" sz="1000" dirty="0">
+                <a:solidFill>
+                  <a:srgbClr val="1F2430"/>
+                </a:solidFill>
+                <a:latin typeface="Calibri" pitchFamily="34" charset="0"/>
+                <a:ea typeface="Calibri" pitchFamily="34" charset="-122"/>
+                <a:cs typeface="Calibri" pitchFamily="34" charset="-120"/>
+              </a:rPr>
+              <a:t>rework</a:t>
+            </a:r>
+            <a:endParaRPr lang="en-US" sz="1000" dirty="0"/>
+          </a:p>
+        </p:txBody>
+      </p:sp>
+      <p:sp>
+        <p:nvSpPr>
+          <p:cNvPr id="124" name="Shape 122"/>
+          <p:cNvSpPr/>
+          <p:nvPr/>
+        </p:nvSpPr>
+        <p:spPr>
+          <a:xfrm>
             <a:off x="7812024" y="5138928"/>
             <a:ext cx="1276096" cy="256032"/>
-          </a:xfrm>
-          <a:prstGeom prst="rect">
-            <a:avLst/>
-          </a:prstGeom>
-          <a:noFill/>
-          <a:ln/>
-        </p:spPr>
-        <p:txBody>
-          <a:bodyPr wrap="square" lIns="0" tIns="0" rIns="0" bIns="0" rtlCol="0" anchor="ctr"/>
-          <a:lstStyle/>
-          <a:p>
-            <a:pPr algn="ctr" indent="0" marL="0">
-              <a:buNone/>
-            </a:pPr>
-            <a:r>
-              <a:rPr lang="en-US" sz="1000" dirty="0">
-                <a:solidFill>
-                  <a:srgbClr val="1F2430"/>
-                </a:solidFill>
-                <a:latin typeface="Calibri" pitchFamily="34" charset="0"/>
-                <a:ea typeface="Calibri" pitchFamily="34" charset="-122"/>
-                <a:cs typeface="Calibri" pitchFamily="34" charset="-120"/>
-              </a:rPr>
-              <a:t>approvals verify</a:t>
-            </a:r>
-            <a:endParaRPr lang="en-US" sz="1000" dirty="0"/>
-          </a:p>
-        </p:txBody>
-      </p:sp>
-      <p:sp>
-        <p:nvSpPr>
-          <p:cNvPr id="124" name="Shape 122"/>
-          <p:cNvSpPr/>
-          <p:nvPr/>
-        </p:nvSpPr>
-        <p:spPr>
-          <a:xfrm>
-            <a:off x="9179560" y="5138928"/>
-            <a:ext cx="549656" cy="256032"/>
           </a:xfrm>
           <a:prstGeom prst="roundRect">
             <a:avLst>
@@ -23225,47 +23225,47 @@
         </p:nvSpPr>
         <p:spPr>
           <a:xfrm>
+            <a:off x="7812024" y="5138928"/>
+            <a:ext cx="1276096" cy="256032"/>
+          </a:xfrm>
+          <a:prstGeom prst="rect">
+            <a:avLst/>
+          </a:prstGeom>
+          <a:noFill/>
+          <a:ln/>
+        </p:spPr>
+        <p:txBody>
+          <a:bodyPr wrap="square" lIns="0" tIns="0" rIns="0" bIns="0" rtlCol="0" anchor="ctr"/>
+          <a:lstStyle/>
+          <a:p>
+            <a:pPr algn="ctr" indent="0" marL="0">
+              <a:buNone/>
+            </a:pPr>
+            <a:r>
+              <a:rPr lang="en-US" sz="1000" dirty="0">
+                <a:solidFill>
+                  <a:srgbClr val="1F2430"/>
+                </a:solidFill>
+                <a:latin typeface="Calibri" pitchFamily="34" charset="0"/>
+                <a:ea typeface="Calibri" pitchFamily="34" charset="-122"/>
+                <a:cs typeface="Calibri" pitchFamily="34" charset="-120"/>
+              </a:rPr>
+              <a:t>approvals verify</a:t>
+            </a:r>
+            <a:endParaRPr lang="en-US" sz="1000" dirty="0"/>
+          </a:p>
+        </p:txBody>
+      </p:sp>
+      <p:sp>
+        <p:nvSpPr>
+          <p:cNvPr id="126" name="Shape 124"/>
+          <p:cNvSpPr/>
+          <p:nvPr/>
+        </p:nvSpPr>
+        <p:spPr>
+          <a:xfrm>
             <a:off x="9179560" y="5138928"/>
             <a:ext cx="549656" cy="256032"/>
-          </a:xfrm>
-          <a:prstGeom prst="rect">
-            <a:avLst/>
-          </a:prstGeom>
-          <a:noFill/>
-          <a:ln/>
-        </p:spPr>
-        <p:txBody>
-          <a:bodyPr wrap="square" lIns="0" tIns="0" rIns="0" bIns="0" rtlCol="0" anchor="ctr"/>
-          <a:lstStyle/>
-          <a:p>
-            <a:pPr algn="ctr" indent="0" marL="0">
-              <a:buNone/>
-            </a:pPr>
-            <a:r>
-              <a:rPr lang="en-US" sz="1000" dirty="0">
-                <a:solidFill>
-                  <a:srgbClr val="1F2430"/>
-                </a:solidFill>
-                <a:latin typeface="Calibri" pitchFamily="34" charset="0"/>
-                <a:ea typeface="Calibri" pitchFamily="34" charset="-122"/>
-                <a:cs typeface="Calibri" pitchFamily="34" charset="-120"/>
-              </a:rPr>
-              <a:t>tests</a:t>
-            </a:r>
-            <a:endParaRPr lang="en-US" sz="1000" dirty="0"/>
-          </a:p>
-        </p:txBody>
-      </p:sp>
-      <p:sp>
-        <p:nvSpPr>
-          <p:cNvPr id="126" name="Shape 124"/>
-          <p:cNvSpPr/>
-          <p:nvPr/>
-        </p:nvSpPr>
-        <p:spPr>
-          <a:xfrm>
-            <a:off x="9820656" y="5138928"/>
-            <a:ext cx="615696" cy="256032"/>
           </a:xfrm>
           <a:prstGeom prst="roundRect">
             <a:avLst>
@@ -23291,8 +23291,8 @@
         </p:nvSpPr>
         <p:spPr>
           <a:xfrm>
-            <a:off x="9820656" y="5138928"/>
-            <a:ext cx="615696" cy="256032"/>
+            <a:off x="9179560" y="5138928"/>
+            <a:ext cx="549656" cy="256032"/>
           </a:xfrm>
           <a:prstGeom prst="rect">
             <a:avLst/>
@@ -23316,7 +23316,7 @@
                 <a:ea typeface="Calibri" pitchFamily="34" charset="-122"/>
                 <a:cs typeface="Calibri" pitchFamily="34" charset="-120"/>
               </a:rPr>
-              <a:t>verify</a:t>
+              <a:t>tests</a:t>
             </a:r>
             <a:endParaRPr lang="en-US" sz="1000" dirty="0"/>
           </a:p>
@@ -23330,7 +23330,7 @@
         </p:nvSpPr>
         <p:spPr>
           <a:xfrm>
-            <a:off x="10527792" y="5138928"/>
+            <a:off x="9820656" y="5138928"/>
             <a:ext cx="615696" cy="256032"/>
           </a:xfrm>
           <a:prstGeom prst="roundRect">
@@ -23357,47 +23357,47 @@
         </p:nvSpPr>
         <p:spPr>
           <a:xfrm>
+            <a:off x="9820656" y="5138928"/>
+            <a:ext cx="615696" cy="256032"/>
+          </a:xfrm>
+          <a:prstGeom prst="rect">
+            <a:avLst/>
+          </a:prstGeom>
+          <a:noFill/>
+          <a:ln/>
+        </p:spPr>
+        <p:txBody>
+          <a:bodyPr wrap="square" lIns="0" tIns="0" rIns="0" bIns="0" rtlCol="0" anchor="ctr"/>
+          <a:lstStyle/>
+          <a:p>
+            <a:pPr algn="ctr" indent="0" marL="0">
+              <a:buNone/>
+            </a:pPr>
+            <a:r>
+              <a:rPr lang="en-US" sz="1000" dirty="0">
+                <a:solidFill>
+                  <a:srgbClr val="1F2430"/>
+                </a:solidFill>
+                <a:latin typeface="Calibri" pitchFamily="34" charset="0"/>
+                <a:ea typeface="Calibri" pitchFamily="34" charset="-122"/>
+                <a:cs typeface="Calibri" pitchFamily="34" charset="-120"/>
+              </a:rPr>
+              <a:t>verify</a:t>
+            </a:r>
+            <a:endParaRPr lang="en-US" sz="1000" dirty="0"/>
+          </a:p>
+        </p:txBody>
+      </p:sp>
+      <p:sp>
+        <p:nvSpPr>
+          <p:cNvPr id="130" name="Shape 128"/>
+          <p:cNvSpPr/>
+          <p:nvPr/>
+        </p:nvSpPr>
+        <p:spPr>
+          <a:xfrm>
             <a:off x="10527792" y="5138928"/>
             <a:ext cx="615696" cy="256032"/>
-          </a:xfrm>
-          <a:prstGeom prst="rect">
-            <a:avLst/>
-          </a:prstGeom>
-          <a:noFill/>
-          <a:ln/>
-        </p:spPr>
-        <p:txBody>
-          <a:bodyPr wrap="square" lIns="0" tIns="0" rIns="0" bIns="0" rtlCol="0" anchor="ctr"/>
-          <a:lstStyle/>
-          <a:p>
-            <a:pPr algn="ctr" indent="0" marL="0">
-              <a:buNone/>
-            </a:pPr>
-            <a:r>
-              <a:rPr lang="en-US" sz="1000" dirty="0">
-                <a:solidFill>
-                  <a:srgbClr val="1F2430"/>
-                </a:solidFill>
-                <a:latin typeface="Calibri" pitchFamily="34" charset="0"/>
-                <a:ea typeface="Calibri" pitchFamily="34" charset="-122"/>
-                <a:cs typeface="Calibri" pitchFamily="34" charset="-120"/>
-              </a:rPr>
-              <a:t>review</a:t>
-            </a:r>
-            <a:endParaRPr lang="en-US" sz="1000" dirty="0"/>
-          </a:p>
-        </p:txBody>
-      </p:sp>
-      <p:sp>
-        <p:nvSpPr>
-          <p:cNvPr id="130" name="Shape 128"/>
-          <p:cNvSpPr/>
-          <p:nvPr/>
-        </p:nvSpPr>
-        <p:spPr>
-          <a:xfrm>
-            <a:off x="457200" y="5486400"/>
-            <a:ext cx="747776" cy="256032"/>
           </a:xfrm>
           <a:prstGeom prst="roundRect">
             <a:avLst>
@@ -23423,47 +23423,47 @@
         </p:nvSpPr>
         <p:spPr>
           <a:xfrm>
+            <a:off x="10527792" y="5138928"/>
+            <a:ext cx="615696" cy="256032"/>
+          </a:xfrm>
+          <a:prstGeom prst="rect">
+            <a:avLst/>
+          </a:prstGeom>
+          <a:noFill/>
+          <a:ln/>
+        </p:spPr>
+        <p:txBody>
+          <a:bodyPr wrap="square" lIns="0" tIns="0" rIns="0" bIns="0" rtlCol="0" anchor="ctr"/>
+          <a:lstStyle/>
+          <a:p>
+            <a:pPr algn="ctr" indent="0" marL="0">
+              <a:buNone/>
+            </a:pPr>
+            <a:r>
+              <a:rPr lang="en-US" sz="1000" dirty="0">
+                <a:solidFill>
+                  <a:srgbClr val="1F2430"/>
+                </a:solidFill>
+                <a:latin typeface="Calibri" pitchFamily="34" charset="0"/>
+                <a:ea typeface="Calibri" pitchFamily="34" charset="-122"/>
+                <a:cs typeface="Calibri" pitchFamily="34" charset="-120"/>
+              </a:rPr>
+              <a:t>review</a:t>
+            </a:r>
+            <a:endParaRPr lang="en-US" sz="1000" dirty="0"/>
+          </a:p>
+        </p:txBody>
+      </p:sp>
+      <p:sp>
+        <p:nvSpPr>
+          <p:cNvPr id="132" name="Shape 130"/>
+          <p:cNvSpPr/>
+          <p:nvPr/>
+        </p:nvSpPr>
+        <p:spPr>
+          <a:xfrm>
             <a:off x="457200" y="5486400"/>
             <a:ext cx="747776" cy="256032"/>
-          </a:xfrm>
-          <a:prstGeom prst="rect">
-            <a:avLst/>
-          </a:prstGeom>
-          <a:noFill/>
-          <a:ln/>
-        </p:spPr>
-        <p:txBody>
-          <a:bodyPr wrap="square" lIns="0" tIns="0" rIns="0" bIns="0" rtlCol="0" anchor="ctr"/>
-          <a:lstStyle/>
-          <a:p>
-            <a:pPr algn="ctr" indent="0" marL="0">
-              <a:buNone/>
-            </a:pPr>
-            <a:r>
-              <a:rPr lang="en-US" sz="1000" dirty="0">
-                <a:solidFill>
-                  <a:srgbClr val="1F2430"/>
-                </a:solidFill>
-                <a:latin typeface="Calibri" pitchFamily="34" charset="0"/>
-                <a:ea typeface="Calibri" pitchFamily="34" charset="-122"/>
-                <a:cs typeface="Calibri" pitchFamily="34" charset="-120"/>
-              </a:rPr>
-              <a:t>validate</a:t>
-            </a:r>
-            <a:endParaRPr lang="en-US" sz="1000" dirty="0"/>
-          </a:p>
-        </p:txBody>
-      </p:sp>
-      <p:sp>
-        <p:nvSpPr>
-          <p:cNvPr id="132" name="Shape 130"/>
-          <p:cNvSpPr/>
-          <p:nvPr/>
-        </p:nvSpPr>
-        <p:spPr>
-          <a:xfrm>
-            <a:off x="1296416" y="5486400"/>
-            <a:ext cx="681736" cy="256032"/>
           </a:xfrm>
           <a:prstGeom prst="roundRect">
             <a:avLst>
@@ -23489,47 +23489,47 @@
         </p:nvSpPr>
         <p:spPr>
           <a:xfrm>
+            <a:off x="457200" y="5486400"/>
+            <a:ext cx="747776" cy="256032"/>
+          </a:xfrm>
+          <a:prstGeom prst="rect">
+            <a:avLst/>
+          </a:prstGeom>
+          <a:noFill/>
+          <a:ln/>
+        </p:spPr>
+        <p:txBody>
+          <a:bodyPr wrap="square" lIns="0" tIns="0" rIns="0" bIns="0" rtlCol="0" anchor="ctr"/>
+          <a:lstStyle/>
+          <a:p>
+            <a:pPr algn="ctr" indent="0" marL="0">
+              <a:buNone/>
+            </a:pPr>
+            <a:r>
+              <a:rPr lang="en-US" sz="1000" dirty="0">
+                <a:solidFill>
+                  <a:srgbClr val="1F2430"/>
+                </a:solidFill>
+                <a:latin typeface="Calibri" pitchFamily="34" charset="0"/>
+                <a:ea typeface="Calibri" pitchFamily="34" charset="-122"/>
+                <a:cs typeface="Calibri" pitchFamily="34" charset="-120"/>
+              </a:rPr>
+              <a:t>validate</a:t>
+            </a:r>
+            <a:endParaRPr lang="en-US" sz="1000" dirty="0"/>
+          </a:p>
+        </p:txBody>
+      </p:sp>
+      <p:sp>
+        <p:nvSpPr>
+          <p:cNvPr id="134" name="Shape 132"/>
+          <p:cNvSpPr/>
+          <p:nvPr/>
+        </p:nvSpPr>
+        <p:spPr>
+          <a:xfrm>
             <a:off x="1296416" y="5486400"/>
             <a:ext cx="681736" cy="256032"/>
-          </a:xfrm>
-          <a:prstGeom prst="rect">
-            <a:avLst/>
-          </a:prstGeom>
-          <a:noFill/>
-          <a:ln/>
-        </p:spPr>
-        <p:txBody>
-          <a:bodyPr wrap="square" lIns="0" tIns="0" rIns="0" bIns="0" rtlCol="0" anchor="ctr"/>
-          <a:lstStyle/>
-          <a:p>
-            <a:pPr algn="ctr" indent="0" marL="0">
-              <a:buNone/>
-            </a:pPr>
-            <a:r>
-              <a:rPr lang="en-US" sz="1000" dirty="0">
-                <a:solidFill>
-                  <a:srgbClr val="1F2430"/>
-                </a:solidFill>
-                <a:latin typeface="Calibri" pitchFamily="34" charset="0"/>
-                <a:ea typeface="Calibri" pitchFamily="34" charset="-122"/>
-                <a:cs typeface="Calibri" pitchFamily="34" charset="-120"/>
-              </a:rPr>
-              <a:t>archive</a:t>
-            </a:r>
-            <a:endParaRPr lang="en-US" sz="1000" dirty="0"/>
-          </a:p>
-        </p:txBody>
-      </p:sp>
-      <p:sp>
-        <p:nvSpPr>
-          <p:cNvPr id="134" name="Shape 132"/>
-          <p:cNvSpPr/>
-          <p:nvPr/>
-        </p:nvSpPr>
-        <p:spPr>
-          <a:xfrm>
-            <a:off x="2069592" y="5486400"/>
-            <a:ext cx="549656" cy="256032"/>
           </a:xfrm>
           <a:prstGeom prst="roundRect">
             <a:avLst>
@@ -23555,47 +23555,47 @@
         </p:nvSpPr>
         <p:spPr>
           <a:xfrm>
+            <a:off x="1296416" y="5486400"/>
+            <a:ext cx="681736" cy="256032"/>
+          </a:xfrm>
+          <a:prstGeom prst="rect">
+            <a:avLst/>
+          </a:prstGeom>
+          <a:noFill/>
+          <a:ln/>
+        </p:spPr>
+        <p:txBody>
+          <a:bodyPr wrap="square" lIns="0" tIns="0" rIns="0" bIns="0" rtlCol="0" anchor="ctr"/>
+          <a:lstStyle/>
+          <a:p>
+            <a:pPr algn="ctr" indent="0" marL="0">
+              <a:buNone/>
+            </a:pPr>
+            <a:r>
+              <a:rPr lang="en-US" sz="1000" dirty="0">
+                <a:solidFill>
+                  <a:srgbClr val="1F2430"/>
+                </a:solidFill>
+                <a:latin typeface="Calibri" pitchFamily="34" charset="0"/>
+                <a:ea typeface="Calibri" pitchFamily="34" charset="-122"/>
+                <a:cs typeface="Calibri" pitchFamily="34" charset="-120"/>
+              </a:rPr>
+              <a:t>archive</a:t>
+            </a:r>
+            <a:endParaRPr lang="en-US" sz="1000" dirty="0"/>
+          </a:p>
+        </p:txBody>
+      </p:sp>
+      <p:sp>
+        <p:nvSpPr>
+          <p:cNvPr id="136" name="Shape 134"/>
+          <p:cNvSpPr/>
+          <p:nvPr/>
+        </p:nvSpPr>
+        <p:spPr>
+          <a:xfrm>
             <a:off x="2069592" y="5486400"/>
             <a:ext cx="549656" cy="256032"/>
-          </a:xfrm>
-          <a:prstGeom prst="rect">
-            <a:avLst/>
-          </a:prstGeom>
-          <a:noFill/>
-          <a:ln/>
-        </p:spPr>
-        <p:txBody>
-          <a:bodyPr wrap="square" lIns="0" tIns="0" rIns="0" bIns="0" rtlCol="0" anchor="ctr"/>
-          <a:lstStyle/>
-          <a:p>
-            <a:pPr algn="ctr" indent="0" marL="0">
-              <a:buNone/>
-            </a:pPr>
-            <a:r>
-              <a:rPr lang="en-US" sz="1000" dirty="0">
-                <a:solidFill>
-                  <a:srgbClr val="1F2430"/>
-                </a:solidFill>
-                <a:latin typeface="Calibri" pitchFamily="34" charset="0"/>
-                <a:ea typeface="Calibri" pitchFamily="34" charset="-122"/>
-                <a:cs typeface="Calibri" pitchFamily="34" charset="-120"/>
-              </a:rPr>
-              <a:t>audit</a:t>
-            </a:r>
-            <a:endParaRPr lang="en-US" sz="1000" dirty="0"/>
-          </a:p>
-        </p:txBody>
-      </p:sp>
-      <p:sp>
-        <p:nvSpPr>
-          <p:cNvPr id="136" name="Shape 134"/>
-          <p:cNvSpPr/>
-          <p:nvPr/>
-        </p:nvSpPr>
-        <p:spPr>
-          <a:xfrm>
-            <a:off x="2710688" y="5486400"/>
-            <a:ext cx="813816" cy="256032"/>
           </a:xfrm>
           <a:prstGeom prst="roundRect">
             <a:avLst>
@@ -23621,47 +23621,47 @@
         </p:nvSpPr>
         <p:spPr>
           <a:xfrm>
+            <a:off x="2069592" y="5486400"/>
+            <a:ext cx="549656" cy="256032"/>
+          </a:xfrm>
+          <a:prstGeom prst="rect">
+            <a:avLst/>
+          </a:prstGeom>
+          <a:noFill/>
+          <a:ln/>
+        </p:spPr>
+        <p:txBody>
+          <a:bodyPr wrap="square" lIns="0" tIns="0" rIns="0" bIns="0" rtlCol="0" anchor="ctr"/>
+          <a:lstStyle/>
+          <a:p>
+            <a:pPr algn="ctr" indent="0" marL="0">
+              <a:buNone/>
+            </a:pPr>
+            <a:r>
+              <a:rPr lang="en-US" sz="1000" dirty="0">
+                <a:solidFill>
+                  <a:srgbClr val="1F2430"/>
+                </a:solidFill>
+                <a:latin typeface="Calibri" pitchFamily="34" charset="0"/>
+                <a:ea typeface="Calibri" pitchFamily="34" charset="-122"/>
+                <a:cs typeface="Calibri" pitchFamily="34" charset="-120"/>
+              </a:rPr>
+              <a:t>audit</a:t>
+            </a:r>
+            <a:endParaRPr lang="en-US" sz="1000" dirty="0"/>
+          </a:p>
+        </p:txBody>
+      </p:sp>
+      <p:sp>
+        <p:nvSpPr>
+          <p:cNvPr id="138" name="Shape 136"/>
+          <p:cNvSpPr/>
+          <p:nvPr/>
+        </p:nvSpPr>
+        <p:spPr>
+          <a:xfrm>
             <a:off x="2710688" y="5486400"/>
             <a:ext cx="813816" cy="256032"/>
-          </a:xfrm>
-          <a:prstGeom prst="rect">
-            <a:avLst/>
-          </a:prstGeom>
-          <a:noFill/>
-          <a:ln/>
-        </p:spPr>
-        <p:txBody>
-          <a:bodyPr wrap="square" lIns="0" tIns="0" rIns="0" bIns="0" rtlCol="0" anchor="ctr"/>
-          <a:lstStyle/>
-          <a:p>
-            <a:pPr algn="ctr" indent="0" marL="0">
-              <a:buNone/>
-            </a:pPr>
-            <a:r>
-              <a:rPr lang="en-US" sz="1000" dirty="0">
-                <a:solidFill>
-                  <a:srgbClr val="1F2430"/>
-                </a:solidFill>
-                <a:latin typeface="Calibri" pitchFamily="34" charset="0"/>
-                <a:ea typeface="Calibri" pitchFamily="34" charset="-122"/>
-                <a:cs typeface="Calibri" pitchFamily="34" charset="-120"/>
-              </a:rPr>
-              <a:t>changelog</a:t>
-            </a:r>
-            <a:endParaRPr lang="en-US" sz="1000" dirty="0"/>
-          </a:p>
-        </p:txBody>
-      </p:sp>
-      <p:sp>
-        <p:nvSpPr>
-          <p:cNvPr id="138" name="Shape 136"/>
-          <p:cNvSpPr/>
-          <p:nvPr/>
-        </p:nvSpPr>
-        <p:spPr>
-          <a:xfrm>
-            <a:off x="3615944" y="5486400"/>
-            <a:ext cx="615696" cy="256032"/>
           </a:xfrm>
           <a:prstGeom prst="roundRect">
             <a:avLst>
@@ -23687,47 +23687,47 @@
         </p:nvSpPr>
         <p:spPr>
           <a:xfrm>
+            <a:off x="2710688" y="5486400"/>
+            <a:ext cx="813816" cy="256032"/>
+          </a:xfrm>
+          <a:prstGeom prst="rect">
+            <a:avLst/>
+          </a:prstGeom>
+          <a:noFill/>
+          <a:ln/>
+        </p:spPr>
+        <p:txBody>
+          <a:bodyPr wrap="square" lIns="0" tIns="0" rIns="0" bIns="0" rtlCol="0" anchor="ctr"/>
+          <a:lstStyle/>
+          <a:p>
+            <a:pPr algn="ctr" indent="0" marL="0">
+              <a:buNone/>
+            </a:pPr>
+            <a:r>
+              <a:rPr lang="en-US" sz="1000" dirty="0">
+                <a:solidFill>
+                  <a:srgbClr val="1F2430"/>
+                </a:solidFill>
+                <a:latin typeface="Calibri" pitchFamily="34" charset="0"/>
+                <a:ea typeface="Calibri" pitchFamily="34" charset="-122"/>
+                <a:cs typeface="Calibri" pitchFamily="34" charset="-120"/>
+              </a:rPr>
+              <a:t>changelog</a:t>
+            </a:r>
+            <a:endParaRPr lang="en-US" sz="1000" dirty="0"/>
+          </a:p>
+        </p:txBody>
+      </p:sp>
+      <p:sp>
+        <p:nvSpPr>
+          <p:cNvPr id="140" name="Shape 138"/>
+          <p:cNvSpPr/>
+          <p:nvPr/>
+        </p:nvSpPr>
+        <p:spPr>
+          <a:xfrm>
             <a:off x="3615944" y="5486400"/>
             <a:ext cx="615696" cy="256032"/>
-          </a:xfrm>
-          <a:prstGeom prst="rect">
-            <a:avLst/>
-          </a:prstGeom>
-          <a:noFill/>
-          <a:ln/>
-        </p:spPr>
-        <p:txBody>
-          <a:bodyPr wrap="square" lIns="0" tIns="0" rIns="0" bIns="0" rtlCol="0" anchor="ctr"/>
-          <a:lstStyle/>
-          <a:p>
-            <a:pPr algn="ctr" indent="0" marL="0">
-              <a:buNone/>
-            </a:pPr>
-            <a:r>
-              <a:rPr lang="en-US" sz="1000" dirty="0">
-                <a:solidFill>
-                  <a:srgbClr val="1F2430"/>
-                </a:solidFill>
-                <a:latin typeface="Calibri" pitchFamily="34" charset="0"/>
-                <a:ea typeface="Calibri" pitchFamily="34" charset="-122"/>
-                <a:cs typeface="Calibri" pitchFamily="34" charset="-120"/>
-              </a:rPr>
-              <a:t>report</a:t>
-            </a:r>
-            <a:endParaRPr lang="en-US" sz="1000" dirty="0"/>
-          </a:p>
-        </p:txBody>
-      </p:sp>
-      <p:sp>
-        <p:nvSpPr>
-          <p:cNvPr id="140" name="Shape 138"/>
-          <p:cNvSpPr/>
-          <p:nvPr/>
-        </p:nvSpPr>
-        <p:spPr>
-          <a:xfrm>
-            <a:off x="4323080" y="5486400"/>
-            <a:ext cx="813816" cy="256032"/>
           </a:xfrm>
           <a:prstGeom prst="roundRect">
             <a:avLst>
@@ -23753,47 +23753,47 @@
         </p:nvSpPr>
         <p:spPr>
           <a:xfrm>
+            <a:off x="3615944" y="5486400"/>
+            <a:ext cx="615696" cy="256032"/>
+          </a:xfrm>
+          <a:prstGeom prst="rect">
+            <a:avLst/>
+          </a:prstGeom>
+          <a:noFill/>
+          <a:ln/>
+        </p:spPr>
+        <p:txBody>
+          <a:bodyPr wrap="square" lIns="0" tIns="0" rIns="0" bIns="0" rtlCol="0" anchor="ctr"/>
+          <a:lstStyle/>
+          <a:p>
+            <a:pPr algn="ctr" indent="0" marL="0">
+              <a:buNone/>
+            </a:pPr>
+            <a:r>
+              <a:rPr lang="en-US" sz="1000" dirty="0">
+                <a:solidFill>
+                  <a:srgbClr val="1F2430"/>
+                </a:solidFill>
+                <a:latin typeface="Calibri" pitchFamily="34" charset="0"/>
+                <a:ea typeface="Calibri" pitchFamily="34" charset="-122"/>
+                <a:cs typeface="Calibri" pitchFamily="34" charset="-120"/>
+              </a:rPr>
+              <a:t>report</a:t>
+            </a:r>
+            <a:endParaRPr lang="en-US" sz="1000" dirty="0"/>
+          </a:p>
+        </p:txBody>
+      </p:sp>
+      <p:sp>
+        <p:nvSpPr>
+          <p:cNvPr id="142" name="Shape 140"/>
+          <p:cNvSpPr/>
+          <p:nvPr/>
+        </p:nvSpPr>
+        <p:spPr>
+          <a:xfrm>
             <a:off x="4323080" y="5486400"/>
             <a:ext cx="813816" cy="256032"/>
-          </a:xfrm>
-          <a:prstGeom prst="rect">
-            <a:avLst/>
-          </a:prstGeom>
-          <a:noFill/>
-          <a:ln/>
-        </p:spPr>
-        <p:txBody>
-          <a:bodyPr wrap="square" lIns="0" tIns="0" rIns="0" bIns="0" rtlCol="0" anchor="ctr"/>
-          <a:lstStyle/>
-          <a:p>
-            <a:pPr algn="ctr" indent="0" marL="0">
-              <a:buNone/>
-            </a:pPr>
-            <a:r>
-              <a:rPr lang="en-US" sz="1000" dirty="0">
-                <a:solidFill>
-                  <a:srgbClr val="1F2430"/>
-                </a:solidFill>
-                <a:latin typeface="Calibri" pitchFamily="34" charset="0"/>
-                <a:ea typeface="Calibri" pitchFamily="34" charset="-122"/>
-                <a:cs typeface="Calibri" pitchFamily="34" charset="-120"/>
-              </a:rPr>
-              <a:t>dashboard</a:t>
-            </a:r>
-            <a:endParaRPr lang="en-US" sz="1000" dirty="0"/>
-          </a:p>
-        </p:txBody>
-      </p:sp>
-      <p:sp>
-        <p:nvSpPr>
-          <p:cNvPr id="142" name="Shape 140"/>
-          <p:cNvSpPr/>
-          <p:nvPr/>
-        </p:nvSpPr>
-        <p:spPr>
-          <a:xfrm>
-            <a:off x="5228336" y="5486400"/>
-            <a:ext cx="417576" cy="256032"/>
           </a:xfrm>
           <a:prstGeom prst="roundRect">
             <a:avLst>
@@ -23819,47 +23819,47 @@
         </p:nvSpPr>
         <p:spPr>
           <a:xfrm>
+            <a:off x="4323080" y="5486400"/>
+            <a:ext cx="813816" cy="256032"/>
+          </a:xfrm>
+          <a:prstGeom prst="rect">
+            <a:avLst/>
+          </a:prstGeom>
+          <a:noFill/>
+          <a:ln/>
+        </p:spPr>
+        <p:txBody>
+          <a:bodyPr wrap="square" lIns="0" tIns="0" rIns="0" bIns="0" rtlCol="0" anchor="ctr"/>
+          <a:lstStyle/>
+          <a:p>
+            <a:pPr algn="ctr" indent="0" marL="0">
+              <a:buNone/>
+            </a:pPr>
+            <a:r>
+              <a:rPr lang="en-US" sz="1000" dirty="0">
+                <a:solidFill>
+                  <a:srgbClr val="1F2430"/>
+                </a:solidFill>
+                <a:latin typeface="Calibri" pitchFamily="34" charset="0"/>
+                <a:ea typeface="Calibri" pitchFamily="34" charset="-122"/>
+                <a:cs typeface="Calibri" pitchFamily="34" charset="-120"/>
+              </a:rPr>
+              <a:t>dashboard</a:t>
+            </a:r>
+            <a:endParaRPr lang="en-US" sz="1000" dirty="0"/>
+          </a:p>
+        </p:txBody>
+      </p:sp>
+      <p:sp>
+        <p:nvSpPr>
+          <p:cNvPr id="144" name="Shape 142"/>
+          <p:cNvSpPr/>
+          <p:nvPr/>
+        </p:nvSpPr>
+        <p:spPr>
+          <a:xfrm>
             <a:off x="5228336" y="5486400"/>
             <a:ext cx="417576" cy="256032"/>
-          </a:xfrm>
-          <a:prstGeom prst="rect">
-            <a:avLst/>
-          </a:prstGeom>
-          <a:noFill/>
-          <a:ln/>
-        </p:spPr>
-        <p:txBody>
-          <a:bodyPr wrap="square" lIns="0" tIns="0" rIns="0" bIns="0" rtlCol="0" anchor="ctr"/>
-          <a:lstStyle/>
-          <a:p>
-            <a:pPr algn="ctr" indent="0" marL="0">
-              <a:buNone/>
-            </a:pPr>
-            <a:r>
-              <a:rPr lang="en-US" sz="1000" dirty="0">
-                <a:solidFill>
-                  <a:srgbClr val="1F2430"/>
-                </a:solidFill>
-                <a:latin typeface="Calibri" pitchFamily="34" charset="0"/>
-                <a:ea typeface="Calibri" pitchFamily="34" charset="-122"/>
-                <a:cs typeface="Calibri" pitchFamily="34" charset="-120"/>
-              </a:rPr>
-              <a:t>log</a:t>
-            </a:r>
-            <a:endParaRPr lang="en-US" sz="1000" dirty="0"/>
-          </a:p>
-        </p:txBody>
-      </p:sp>
-      <p:sp>
-        <p:nvSpPr>
-          <p:cNvPr id="144" name="Shape 142"/>
-          <p:cNvSpPr/>
-          <p:nvPr/>
-        </p:nvSpPr>
-        <p:spPr>
-          <a:xfrm>
-            <a:off x="5737352" y="5486400"/>
-            <a:ext cx="681736" cy="256032"/>
           </a:xfrm>
           <a:prstGeom prst="roundRect">
             <a:avLst>
@@ -23885,47 +23885,47 @@
         </p:nvSpPr>
         <p:spPr>
           <a:xfrm>
+            <a:off x="5228336" y="5486400"/>
+            <a:ext cx="417576" cy="256032"/>
+          </a:xfrm>
+          <a:prstGeom prst="rect">
+            <a:avLst/>
+          </a:prstGeom>
+          <a:noFill/>
+          <a:ln/>
+        </p:spPr>
+        <p:txBody>
+          <a:bodyPr wrap="square" lIns="0" tIns="0" rIns="0" bIns="0" rtlCol="0" anchor="ctr"/>
+          <a:lstStyle/>
+          <a:p>
+            <a:pPr algn="ctr" indent="0" marL="0">
+              <a:buNone/>
+            </a:pPr>
+            <a:r>
+              <a:rPr lang="en-US" sz="1000" dirty="0">
+                <a:solidFill>
+                  <a:srgbClr val="1F2430"/>
+                </a:solidFill>
+                <a:latin typeface="Calibri" pitchFamily="34" charset="0"/>
+                <a:ea typeface="Calibri" pitchFamily="34" charset="-122"/>
+                <a:cs typeface="Calibri" pitchFamily="34" charset="-120"/>
+              </a:rPr>
+              <a:t>log</a:t>
+            </a:r>
+            <a:endParaRPr lang="en-US" sz="1000" dirty="0"/>
+          </a:p>
+        </p:txBody>
+      </p:sp>
+      <p:sp>
+        <p:nvSpPr>
+          <p:cNvPr id="146" name="Shape 144"/>
+          <p:cNvSpPr/>
+          <p:nvPr/>
+        </p:nvSpPr>
+        <p:spPr>
+          <a:xfrm>
             <a:off x="5737352" y="5486400"/>
             <a:ext cx="681736" cy="256032"/>
-          </a:xfrm>
-          <a:prstGeom prst="rect">
-            <a:avLst/>
-          </a:prstGeom>
-          <a:noFill/>
-          <a:ln/>
-        </p:spPr>
-        <p:txBody>
-          <a:bodyPr wrap="square" lIns="0" tIns="0" rIns="0" bIns="0" rtlCol="0" anchor="ctr"/>
-          <a:lstStyle/>
-          <a:p>
-            <a:pPr algn="ctr" indent="0" marL="0">
-              <a:buNone/>
-            </a:pPr>
-            <a:r>
-              <a:rPr lang="en-US" sz="1000" dirty="0">
-                <a:solidFill>
-                  <a:srgbClr val="1F2430"/>
-                </a:solidFill>
-                <a:latin typeface="Calibri" pitchFamily="34" charset="0"/>
-                <a:ea typeface="Calibri" pitchFamily="34" charset="-122"/>
-                <a:cs typeface="Calibri" pitchFamily="34" charset="-120"/>
-              </a:rPr>
-              <a:t>license</a:t>
-            </a:r>
-            <a:endParaRPr lang="en-US" sz="1000" dirty="0"/>
-          </a:p>
-        </p:txBody>
-      </p:sp>
-      <p:sp>
-        <p:nvSpPr>
-          <p:cNvPr id="146" name="Shape 144"/>
-          <p:cNvSpPr/>
-          <p:nvPr/>
-        </p:nvSpPr>
-        <p:spPr>
-          <a:xfrm>
-            <a:off x="6510528" y="5486400"/>
-            <a:ext cx="615696" cy="256032"/>
           </a:xfrm>
           <a:prstGeom prst="roundRect">
             <a:avLst>
@@ -23951,8 +23951,8 @@
         </p:nvSpPr>
         <p:spPr>
           <a:xfrm>
-            <a:off x="6510528" y="5486400"/>
-            <a:ext cx="615696" cy="256032"/>
+            <a:off x="5737352" y="5486400"/>
+            <a:ext cx="681736" cy="256032"/>
           </a:xfrm>
           <a:prstGeom prst="rect">
             <a:avLst/>
@@ -23976,7 +23976,7 @@
                 <a:ea typeface="Calibri" pitchFamily="34" charset="-122"/>
                 <a:cs typeface="Calibri" pitchFamily="34" charset="-120"/>
               </a:rPr>
-              <a:t>doctor</a:t>
+              <a:t>license</a:t>
             </a:r>
             <a:endParaRPr lang="en-US" sz="1000" dirty="0"/>
           </a:p>
@@ -23990,7 +23990,7 @@
         </p:nvSpPr>
         <p:spPr>
           <a:xfrm>
-            <a:off x="7217664" y="5486400"/>
+            <a:off x="6510528" y="5486400"/>
             <a:ext cx="615696" cy="256032"/>
           </a:xfrm>
           <a:prstGeom prst="roundRect">
@@ -24017,47 +24017,47 @@
         </p:nvSpPr>
         <p:spPr>
           <a:xfrm>
+            <a:off x="6510528" y="5486400"/>
+            <a:ext cx="615696" cy="256032"/>
+          </a:xfrm>
+          <a:prstGeom prst="rect">
+            <a:avLst/>
+          </a:prstGeom>
+          <a:noFill/>
+          <a:ln/>
+        </p:spPr>
+        <p:txBody>
+          <a:bodyPr wrap="square" lIns="0" tIns="0" rIns="0" bIns="0" rtlCol="0" anchor="ctr"/>
+          <a:lstStyle/>
+          <a:p>
+            <a:pPr algn="ctr" indent="0" marL="0">
+              <a:buNone/>
+            </a:pPr>
+            <a:r>
+              <a:rPr lang="en-US" sz="1000" dirty="0">
+                <a:solidFill>
+                  <a:srgbClr val="1F2430"/>
+                </a:solidFill>
+                <a:latin typeface="Calibri" pitchFamily="34" charset="0"/>
+                <a:ea typeface="Calibri" pitchFamily="34" charset="-122"/>
+                <a:cs typeface="Calibri" pitchFamily="34" charset="-120"/>
+              </a:rPr>
+              <a:t>doctor</a:t>
+            </a:r>
+            <a:endParaRPr lang="en-US" sz="1000" dirty="0"/>
+          </a:p>
+        </p:txBody>
+      </p:sp>
+      <p:sp>
+        <p:nvSpPr>
+          <p:cNvPr id="150" name="Shape 148"/>
+          <p:cNvSpPr/>
+          <p:nvPr/>
+        </p:nvSpPr>
+        <p:spPr>
+          <a:xfrm>
             <a:off x="7217664" y="5486400"/>
             <a:ext cx="615696" cy="256032"/>
-          </a:xfrm>
-          <a:prstGeom prst="rect">
-            <a:avLst/>
-          </a:prstGeom>
-          <a:noFill/>
-          <a:ln/>
-        </p:spPr>
-        <p:txBody>
-          <a:bodyPr wrap="square" lIns="0" tIns="0" rIns="0" bIns="0" rtlCol="0" anchor="ctr"/>
-          <a:lstStyle/>
-          <a:p>
-            <a:pPr algn="ctr" indent="0" marL="0">
-              <a:buNone/>
-            </a:pPr>
-            <a:r>
-              <a:rPr lang="en-US" sz="1000" dirty="0">
-                <a:solidFill>
-                  <a:srgbClr val="1F2430"/>
-                </a:solidFill>
-                <a:latin typeface="Calibri" pitchFamily="34" charset="0"/>
-                <a:ea typeface="Calibri" pitchFamily="34" charset="-122"/>
-                <a:cs typeface="Calibri" pitchFamily="34" charset="-120"/>
-              </a:rPr>
-              <a:t>health</a:t>
-            </a:r>
-            <a:endParaRPr lang="en-US" sz="1000" dirty="0"/>
-          </a:p>
-        </p:txBody>
-      </p:sp>
-      <p:sp>
-        <p:nvSpPr>
-          <p:cNvPr id="150" name="Shape 148"/>
-          <p:cNvSpPr/>
-          <p:nvPr/>
-        </p:nvSpPr>
-        <p:spPr>
-          <a:xfrm>
-            <a:off x="7924800" y="5486400"/>
-            <a:ext cx="1011936" cy="256032"/>
           </a:xfrm>
           <a:prstGeom prst="roundRect">
             <a:avLst>
@@ -24083,47 +24083,47 @@
         </p:nvSpPr>
         <p:spPr>
           <a:xfrm>
+            <a:off x="7217664" y="5486400"/>
+            <a:ext cx="615696" cy="256032"/>
+          </a:xfrm>
+          <a:prstGeom prst="rect">
+            <a:avLst/>
+          </a:prstGeom>
+          <a:noFill/>
+          <a:ln/>
+        </p:spPr>
+        <p:txBody>
+          <a:bodyPr wrap="square" lIns="0" tIns="0" rIns="0" bIns="0" rtlCol="0" anchor="ctr"/>
+          <a:lstStyle/>
+          <a:p>
+            <a:pPr algn="ctr" indent="0" marL="0">
+              <a:buNone/>
+            </a:pPr>
+            <a:r>
+              <a:rPr lang="en-US" sz="1000" dirty="0">
+                <a:solidFill>
+                  <a:srgbClr val="1F2430"/>
+                </a:solidFill>
+                <a:latin typeface="Calibri" pitchFamily="34" charset="0"/>
+                <a:ea typeface="Calibri" pitchFamily="34" charset="-122"/>
+                <a:cs typeface="Calibri" pitchFamily="34" charset="-120"/>
+              </a:rPr>
+              <a:t>health</a:t>
+            </a:r>
+            <a:endParaRPr lang="en-US" sz="1000" dirty="0"/>
+          </a:p>
+        </p:txBody>
+      </p:sp>
+      <p:sp>
+        <p:nvSpPr>
+          <p:cNvPr id="152" name="Shape 150"/>
+          <p:cNvSpPr/>
+          <p:nvPr/>
+        </p:nvSpPr>
+        <p:spPr>
+          <a:xfrm>
             <a:off x="7924800" y="5486400"/>
             <a:ext cx="1011936" cy="256032"/>
-          </a:xfrm>
-          <a:prstGeom prst="rect">
-            <a:avLst/>
-          </a:prstGeom>
-          <a:noFill/>
-          <a:ln/>
-        </p:spPr>
-        <p:txBody>
-          <a:bodyPr wrap="square" lIns="0" tIns="0" rIns="0" bIns="0" rtlCol="0" anchor="ctr"/>
-          <a:lstStyle/>
-          <a:p>
-            <a:pPr algn="ctr" indent="0" marL="0">
-              <a:buNone/>
-            </a:pPr>
-            <a:r>
-              <a:rPr lang="en-US" sz="1000" dirty="0">
-                <a:solidFill>
-                  <a:srgbClr val="1F2430"/>
-                </a:solidFill>
-                <a:latin typeface="Calibri" pitchFamily="34" charset="0"/>
-                <a:ea typeface="Calibri" pitchFamily="34" charset="-122"/>
-                <a:cs typeface="Calibri" pitchFamily="34" charset="-120"/>
-              </a:rPr>
-              <a:t>plugin build</a:t>
-            </a:r>
-            <a:endParaRPr lang="en-US" sz="1000" dirty="0"/>
-          </a:p>
-        </p:txBody>
-      </p:sp>
-      <p:sp>
-        <p:nvSpPr>
-          <p:cNvPr id="152" name="Shape 150"/>
-          <p:cNvSpPr/>
-          <p:nvPr/>
-        </p:nvSpPr>
-        <p:spPr>
-          <a:xfrm>
-            <a:off x="9028176" y="5486400"/>
-            <a:ext cx="549656" cy="256032"/>
           </a:xfrm>
           <a:prstGeom prst="roundRect">
             <a:avLst>
@@ -24149,47 +24149,47 @@
         </p:nvSpPr>
         <p:spPr>
           <a:xfrm>
+            <a:off x="7924800" y="5486400"/>
+            <a:ext cx="1011936" cy="256032"/>
+          </a:xfrm>
+          <a:prstGeom prst="rect">
+            <a:avLst/>
+          </a:prstGeom>
+          <a:noFill/>
+          <a:ln/>
+        </p:spPr>
+        <p:txBody>
+          <a:bodyPr wrap="square" lIns="0" tIns="0" rIns="0" bIns="0" rtlCol="0" anchor="ctr"/>
+          <a:lstStyle/>
+          <a:p>
+            <a:pPr algn="ctr" indent="0" marL="0">
+              <a:buNone/>
+            </a:pPr>
+            <a:r>
+              <a:rPr lang="en-US" sz="1000" dirty="0">
+                <a:solidFill>
+                  <a:srgbClr val="1F2430"/>
+                </a:solidFill>
+                <a:latin typeface="Calibri" pitchFamily="34" charset="0"/>
+                <a:ea typeface="Calibri" pitchFamily="34" charset="-122"/>
+                <a:cs typeface="Calibri" pitchFamily="34" charset="-120"/>
+              </a:rPr>
+              <a:t>plugin build</a:t>
+            </a:r>
+            <a:endParaRPr lang="en-US" sz="1000" dirty="0"/>
+          </a:p>
+        </p:txBody>
+      </p:sp>
+      <p:sp>
+        <p:nvSpPr>
+          <p:cNvPr id="154" name="Shape 152"/>
+          <p:cNvSpPr/>
+          <p:nvPr/>
+        </p:nvSpPr>
+        <p:spPr>
+          <a:xfrm>
             <a:off x="9028176" y="5486400"/>
             <a:ext cx="549656" cy="256032"/>
-          </a:xfrm>
-          <a:prstGeom prst="rect">
-            <a:avLst/>
-          </a:prstGeom>
-          <a:noFill/>
-          <a:ln/>
-        </p:spPr>
-        <p:txBody>
-          <a:bodyPr wrap="square" lIns="0" tIns="0" rIns="0" bIns="0" rtlCol="0" anchor="ctr"/>
-          <a:lstStyle/>
-          <a:p>
-            <a:pPr algn="ctr" indent="0" marL="0">
-              <a:buNone/>
-            </a:pPr>
-            <a:r>
-              <a:rPr lang="en-US" sz="1000" dirty="0">
-                <a:solidFill>
-                  <a:srgbClr val="1F2430"/>
-                </a:solidFill>
-                <a:latin typeface="Calibri" pitchFamily="34" charset="0"/>
-                <a:ea typeface="Calibri" pitchFamily="34" charset="-122"/>
-                <a:cs typeface="Calibri" pitchFamily="34" charset="-120"/>
-              </a:rPr>
-              <a:t>trace</a:t>
-            </a:r>
-            <a:endParaRPr lang="en-US" sz="1000" dirty="0"/>
-          </a:p>
-        </p:txBody>
-      </p:sp>
-      <p:sp>
-        <p:nvSpPr>
-          <p:cNvPr id="154" name="Shape 152"/>
-          <p:cNvSpPr/>
-          <p:nvPr/>
-        </p:nvSpPr>
-        <p:spPr>
-          <a:xfrm>
-            <a:off x="9669272" y="5486400"/>
-            <a:ext cx="483616" cy="256032"/>
           </a:xfrm>
           <a:prstGeom prst="roundRect">
             <a:avLst>
@@ -24215,47 +24215,47 @@
         </p:nvSpPr>
         <p:spPr>
           <a:xfrm>
+            <a:off x="9028176" y="5486400"/>
+            <a:ext cx="549656" cy="256032"/>
+          </a:xfrm>
+          <a:prstGeom prst="rect">
+            <a:avLst/>
+          </a:prstGeom>
+          <a:noFill/>
+          <a:ln/>
+        </p:spPr>
+        <p:txBody>
+          <a:bodyPr wrap="square" lIns="0" tIns="0" rIns="0" bIns="0" rtlCol="0" anchor="ctr"/>
+          <a:lstStyle/>
+          <a:p>
+            <a:pPr algn="ctr" indent="0" marL="0">
+              <a:buNone/>
+            </a:pPr>
+            <a:r>
+              <a:rPr lang="en-US" sz="1000" dirty="0">
+                <a:solidFill>
+                  <a:srgbClr val="1F2430"/>
+                </a:solidFill>
+                <a:latin typeface="Calibri" pitchFamily="34" charset="0"/>
+                <a:ea typeface="Calibri" pitchFamily="34" charset="-122"/>
+                <a:cs typeface="Calibri" pitchFamily="34" charset="-120"/>
+              </a:rPr>
+              <a:t>trace</a:t>
+            </a:r>
+            <a:endParaRPr lang="en-US" sz="1000" dirty="0"/>
+          </a:p>
+        </p:txBody>
+      </p:sp>
+      <p:sp>
+        <p:nvSpPr>
+          <p:cNvPr id="156" name="Shape 154"/>
+          <p:cNvSpPr/>
+          <p:nvPr/>
+        </p:nvSpPr>
+        <p:spPr>
+          <a:xfrm>
             <a:off x="9669272" y="5486400"/>
             <a:ext cx="483616" cy="256032"/>
-          </a:xfrm>
-          <a:prstGeom prst="rect">
-            <a:avLst/>
-          </a:prstGeom>
-          <a:noFill/>
-          <a:ln/>
-        </p:spPr>
-        <p:txBody>
-          <a:bodyPr wrap="square" lIns="0" tIns="0" rIns="0" bIns="0" rtlCol="0" anchor="ctr"/>
-          <a:lstStyle/>
-          <a:p>
-            <a:pPr algn="ctr" indent="0" marL="0">
-              <a:buNone/>
-            </a:pPr>
-            <a:r>
-              <a:rPr lang="en-US" sz="1000" dirty="0">
-                <a:solidFill>
-                  <a:srgbClr val="1F2430"/>
-                </a:solidFill>
-                <a:latin typeface="Calibri" pitchFamily="34" charset="0"/>
-                <a:ea typeface="Calibri" pitchFamily="34" charset="-122"/>
-                <a:cs typeface="Calibri" pitchFamily="34" charset="-120"/>
-              </a:rPr>
-              <a:t>hook</a:t>
-            </a:r>
-            <a:endParaRPr lang="en-US" sz="1000" dirty="0"/>
-          </a:p>
-        </p:txBody>
-      </p:sp>
-      <p:sp>
-        <p:nvSpPr>
-          <p:cNvPr id="156" name="Shape 154"/>
-          <p:cNvSpPr/>
-          <p:nvPr/>
-        </p:nvSpPr>
-        <p:spPr>
-          <a:xfrm>
-            <a:off x="10244328" y="5486400"/>
-            <a:ext cx="747776" cy="256032"/>
           </a:xfrm>
           <a:prstGeom prst="roundRect">
             <a:avLst>
@@ -24276,6 +24276,72 @@
       <p:sp>
         <p:nvSpPr>
           <p:cNvPr id="157" name="Text 155"/>
+          <p:cNvSpPr txBox="1"/>
+          <p:nvPr/>
+        </p:nvSpPr>
+        <p:spPr>
+          <a:xfrm>
+            <a:off x="9669272" y="5486400"/>
+            <a:ext cx="483616" cy="256032"/>
+          </a:xfrm>
+          <a:prstGeom prst="rect">
+            <a:avLst/>
+          </a:prstGeom>
+          <a:noFill/>
+          <a:ln/>
+        </p:spPr>
+        <p:txBody>
+          <a:bodyPr wrap="square" lIns="0" tIns="0" rIns="0" bIns="0" rtlCol="0" anchor="ctr"/>
+          <a:lstStyle/>
+          <a:p>
+            <a:pPr algn="ctr" indent="0" marL="0">
+              <a:buNone/>
+            </a:pPr>
+            <a:r>
+              <a:rPr lang="en-US" sz="1000" dirty="0">
+                <a:solidFill>
+                  <a:srgbClr val="1F2430"/>
+                </a:solidFill>
+                <a:latin typeface="Calibri" pitchFamily="34" charset="0"/>
+                <a:ea typeface="Calibri" pitchFamily="34" charset="-122"/>
+                <a:cs typeface="Calibri" pitchFamily="34" charset="-120"/>
+              </a:rPr>
+              <a:t>hook</a:t>
+            </a:r>
+            <a:endParaRPr lang="en-US" sz="1000" dirty="0"/>
+          </a:p>
+        </p:txBody>
+      </p:sp>
+      <p:sp>
+        <p:nvSpPr>
+          <p:cNvPr id="158" name="Shape 156"/>
+          <p:cNvSpPr/>
+          <p:nvPr/>
+        </p:nvSpPr>
+        <p:spPr>
+          <a:xfrm>
+            <a:off x="10244328" y="5486400"/>
+            <a:ext cx="747776" cy="256032"/>
+          </a:xfrm>
+          <a:prstGeom prst="roundRect">
+            <a:avLst>
+              <a:gd name="adj" fmla="val 50000"/>
+            </a:avLst>
+          </a:prstGeom>
+          <a:solidFill>
+            <a:srgbClr val="F3F5F8"/>
+          </a:solidFill>
+          <a:ln w="12700">
+            <a:solidFill>
+              <a:srgbClr val="F3F5F8"/>
+            </a:solidFill>
+            <a:prstDash val="solid"/>
+          </a:ln>
+        </p:spPr>
+      </p:sp>
+      <p:sp>
+        <p:nvSpPr>
+          <p:cNvPr id="159" name="Text 157"/>
           <p:cNvSpPr txBox="1"/>
           <p:nvPr/>
         </p:nvSpPr>
@@ -26952,7 +27018,7 @@
                 <a:ea typeface="Courier New" pitchFamily="34" charset="-122"/>
                 <a:cs typeface="Courier New" pitchFamily="34" charset="-120"/>
               </a:rPr>
-              <a:t>  sdlc 0.16.3, license: community</a:t>
+              <a:t>  sdlc 0.17.0, license: community</a:t>
             </a:r>
             <a:endParaRPr lang="en-US" sz="1000" dirty="0"/>
           </a:p>
@@ -33743,7 +33809,7 @@
                 <a:ea typeface="Courier New" pitchFamily="34" charset="-122"/>
                 <a:cs typeface="Courier New" pitchFamily="34" charset="-120"/>
               </a:rPr>
-              <a:t>  (246351ec8bec)</a:t>
+              <a:t>  (3f005a0f65e9)</a:t>
             </a:r>
             <a:endParaRPr lang="en-US" sz="1000" dirty="0"/>
           </a:p>
@@ -33879,7 +33945,7 @@
                 <a:ea typeface="Courier New" pitchFamily="34" charset="-122"/>
                 <a:cs typeface="Courier New" pitchFamily="34" charset="-120"/>
               </a:rPr>
-              <a:t>  246351ec8bec"</a:t>
+              <a:t>  3f005a0f65e9"</a:t>
             </a:r>
             <a:endParaRPr lang="en-US" sz="1000" dirty="0"/>
           </a:p>

--- a/docs/demo/sdlc-calculator-demo.en.pptx
+++ b/docs/demo/sdlc-calculator-demo.en.pptx
@@ -5112,7 +5112,7 @@
                 <a:ea typeface="Courier New" pitchFamily="34" charset="-122"/>
                 <a:cs typeface="Courier New" pitchFamily="34" charset="-120"/>
               </a:rPr>
-              <a:t>✓ test (1.1s)</a:t>
+              <a:t>✓ test (1.2s)</a:t>
             </a:r>
             <a:endParaRPr lang="en-US" sz="1000" dirty="0"/>
           </a:p>
@@ -6660,7 +6660,7 @@
                 <a:ea typeface="Courier New" pitchFamily="34" charset="-122"/>
                 <a:cs typeface="Courier New" pitchFamily="34" charset="-120"/>
               </a:rPr>
-              <a:t>  code-owner (2f0312b7fcdc)</a:t>
+              <a:t>  code-owner (8cf5f98928e2)</a:t>
             </a:r>
             <a:endParaRPr lang="en-US" sz="1000" dirty="0"/>
           </a:p>
@@ -6745,7 +6745,7 @@
                 <a:ea typeface="Courier New" pitchFamily="34" charset="-122"/>
                 <a:cs typeface="Courier New" pitchFamily="34" charset="-120"/>
               </a:rPr>
-              <a:t>  "SDLC-Approval: basic-arithmetic:review:2</a:t>
+              <a:t>  "SDLC-Approval: basic-arithmetic:review:8</a:t>
             </a:r>
             <a:endParaRPr lang="en-US" sz="1000" dirty="0"/>
           </a:p>
@@ -6762,7 +6762,7 @@
                 <a:ea typeface="Courier New" pitchFamily="34" charset="-122"/>
                 <a:cs typeface="Courier New" pitchFamily="34" charset="-120"/>
               </a:rPr>
-              <a:t>  f0312b7fcdc"</a:t>
+              <a:t>  cf5f98928e2"</a:t>
             </a:r>
             <a:endParaRPr lang="en-US" sz="1000" dirty="0"/>
           </a:p>
@@ -7443,7 +7443,7 @@
                 <a:ea typeface="Courier New" pitchFamily="34" charset="-122"/>
                 <a:cs typeface="Courier New" pitchFamily="34" charset="-120"/>
               </a:rPr>
-              <a:t>  release-manager (2f0312b7fcdc)</a:t>
+              <a:t>  release-manager (8cf5f98928e2)</a:t>
             </a:r>
             <a:endParaRPr lang="en-US" sz="1000" dirty="0"/>
           </a:p>
@@ -7511,7 +7511,7 @@
                 <a:ea typeface="Courier New" pitchFamily="34" charset="-122"/>
                 <a:cs typeface="Courier New" pitchFamily="34" charset="-120"/>
               </a:rPr>
-              <a:t>  gate" -m "SDLC-Approval: basic-arithmetic:release:2f0312b7fcdc"</a:t>
+              <a:t>  gate" -m "SDLC-Approval: basic-arithmetic:release:8cf5f98928e2"</a:t>
             </a:r>
             <a:endParaRPr lang="en-US" sz="1000" dirty="0"/>
           </a:p>
@@ -7794,7 +7794,7 @@
                 <a:ea typeface="Courier New" pitchFamily="34" charset="-122"/>
                 <a:cs typeface="Courier New" pitchFamily="34" charset="-120"/>
               </a:rPr>
-              <a:t>✓ basic-arithmetic/intent alice valid 11893cb3 trailer: missing</a:t>
+              <a:t>✓ basic-arithmetic/intent alice valid ba203e76 trailer: missing</a:t>
             </a:r>
             <a:endParaRPr lang="en-US" sz="1000" dirty="0"/>
           </a:p>
@@ -7811,7 +7811,7 @@
                 <a:ea typeface="Courier New" pitchFamily="34" charset="-122"/>
                 <a:cs typeface="Courier New" pitchFamily="34" charset="-120"/>
               </a:rPr>
-              <a:t>✓ basic-arithmetic/spec alice valid 80d48b3a trailer: missing</a:t>
+              <a:t>✓ basic-arithmetic/spec alice valid 4c3be653 trailer: missing</a:t>
             </a:r>
             <a:endParaRPr lang="en-US" sz="1000" dirty="0"/>
           </a:p>
@@ -7828,7 +7828,7 @@
                 <a:ea typeface="Courier New" pitchFamily="34" charset="-122"/>
                 <a:cs typeface="Courier New" pitchFamily="34" charset="-120"/>
               </a:rPr>
-              <a:t>✗ basic-arithmetic/plan bob wrong-signer 80d48b3a trailer: missing</a:t>
+              <a:t>✗ basic-arithmetic/plan bob wrong-signer 4c3be653 trailer: missing</a:t>
             </a:r>
             <a:endParaRPr lang="en-US" sz="1000" dirty="0"/>
           </a:p>
@@ -7845,7 +7845,7 @@
                 <a:ea typeface="Courier New" pitchFamily="34" charset="-122"/>
                 <a:cs typeface="Courier New" pitchFamily="34" charset="-120"/>
               </a:rPr>
-              <a:t>✓ basic-arithmetic/review carol valid 32a5c38f trailer: missing</a:t>
+              <a:t>✓ basic-arithmetic/review carol valid 0e4833ee trailer: missing</a:t>
             </a:r>
             <a:endParaRPr lang="en-US" sz="1000" dirty="0"/>
           </a:p>
@@ -7862,7 +7862,7 @@
                 <a:ea typeface="Courier New" pitchFamily="34" charset="-122"/>
                 <a:cs typeface="Courier New" pitchFamily="34" charset="-120"/>
               </a:rPr>
-              <a:t>✓ basic-arithmetic/release alice valid a7c96875 trailer: missing</a:t>
+              <a:t>✓ basic-arithmetic/release alice valid d866a99f trailer: missing</a:t>
             </a:r>
             <a:endParaRPr lang="en-US" sz="1000" dirty="0"/>
           </a:p>
@@ -7879,7 +7879,7 @@
                 <a:ea typeface="Courier New" pitchFamily="34" charset="-122"/>
                 <a:cs typeface="Courier New" pitchFamily="34" charset="-120"/>
               </a:rPr>
-              <a:t>✓ openspec/roles.yaml alice@calc.example bootstrap 0d032022</a:t>
+              <a:t>✓ openspec/roles.yaml alice@calc.example bootstrap 137d1b62</a:t>
             </a:r>
             <a:endParaRPr lang="en-US" sz="1000" dirty="0"/>
           </a:p>
@@ -14365,7 +14365,7 @@
                 <a:ea typeface="Courier New" pitchFamily="34" charset="-122"/>
                 <a:cs typeface="Courier New" pitchFamily="34" charset="-120"/>
               </a:rPr>
-              <a:t>  archived) · sdlc 0.17.0, license:</a:t>
+              <a:t>  archived) · sdlc 0.18.0, license:</a:t>
             </a:r>
             <a:endParaRPr lang="en-US" sz="1000" dirty="0"/>
           </a:p>
@@ -14552,7 +14552,7 @@
                 <a:ea typeface="Courier New" pitchFamily="34" charset="-122"/>
                 <a:cs typeface="Courier New" pitchFamily="34" charset="-120"/>
               </a:rPr>
-              <a:t>  intent 3 · spec 1 · plan 15 · review 3;</a:t>
+              <a:t>  intent 3 · spec 1 · plan 16 · review 4;</a:t>
             </a:r>
             <a:endParaRPr lang="en-US" sz="1000" dirty="0"/>
           </a:p>
@@ -14886,7 +14886,7 @@
                 <a:ea typeface="Courier New" pitchFamily="34" charset="-122"/>
                 <a:cs typeface="Courier New" pitchFamily="34" charset="-120"/>
               </a:rPr>
-              <a:t>2026-10-13T07:51:23.383Z  gate.review.await</a:t>
+              <a:t>2026-10-13T09:59:43.531Z  gate.review.await</a:t>
             </a:r>
             <a:endParaRPr lang="en-US" sz="1000" dirty="0"/>
           </a:p>
@@ -14920,7 +14920,7 @@
                 <a:ea typeface="Courier New" pitchFamily="34" charset="-122"/>
                 <a:cs typeface="Courier New" pitchFamily="34" charset="-120"/>
               </a:rPr>
-              <a:t>  sha256:2f0312b7fcdcf82af2d8a8c11e7f0c0da5</a:t>
+              <a:t>  sha256:8cf5f98928e279a64a3de9693742f47c85</a:t>
             </a:r>
             <a:endParaRPr lang="en-US" sz="1000" dirty="0"/>
           </a:p>
@@ -14937,7 +14937,7 @@
                 <a:ea typeface="Courier New" pitchFamily="34" charset="-122"/>
                 <a:cs typeface="Courier New" pitchFamily="34" charset="-120"/>
               </a:rPr>
-              <a:t>  ef2bc5b8c4a439941d04ae52ba6a5f [sdlc</a:t>
+              <a:t>  fa9f5754dad3a412534e6b41ae457a [sdlc</a:t>
             </a:r>
             <a:endParaRPr lang="en-US" sz="1000" dirty="0"/>
           </a:p>
@@ -14954,7 +14954,7 @@
                 <a:ea typeface="Courier New" pitchFamily="34" charset="-122"/>
                 <a:cs typeface="Courier New" pitchFamily="34" charset="-120"/>
               </a:rPr>
-              <a:t>  0.17.0 · community]</a:t>
+              <a:t>  0.18.0 · community]</a:t>
             </a:r>
             <a:endParaRPr lang="en-US" sz="1000" dirty="0"/>
           </a:p>
@@ -14971,7 +14971,7 @@
                 <a:ea typeface="Courier New" pitchFamily="34" charset="-122"/>
                 <a:cs typeface="Courier New" pitchFamily="34" charset="-120"/>
               </a:rPr>
-              <a:t>2026-10-13T07:51:26.649Z  gate.review.appro</a:t>
+              <a:t>2026-10-13T09:59:47.632Z  gate.review.appro</a:t>
             </a:r>
             <a:endParaRPr lang="en-US" sz="1000" dirty="0"/>
           </a:p>
@@ -15022,7 +15022,7 @@
                 <a:ea typeface="Courier New" pitchFamily="34" charset="-122"/>
                 <a:cs typeface="Courier New" pitchFamily="34" charset="-120"/>
               </a:rPr>
-              <a:t>  [sdlc 0.17.0 · community]</a:t>
+              <a:t>  [sdlc 0.18.0 · community]</a:t>
             </a:r>
             <a:endParaRPr lang="en-US" sz="1000" dirty="0"/>
           </a:p>
@@ -15039,7 +15039,7 @@
                 <a:ea typeface="Courier New" pitchFamily="34" charset="-122"/>
                 <a:cs typeface="Courier New" pitchFamily="34" charset="-120"/>
               </a:rPr>
-              <a:t>2026-10-13T07:51:33.058Z  gate.release.appr</a:t>
+              <a:t>2026-10-13T09:59:55.096Z  gate.release.appr</a:t>
             </a:r>
             <a:endParaRPr lang="en-US" sz="1000" dirty="0"/>
           </a:p>
@@ -15090,7 +15090,7 @@
                 <a:ea typeface="Courier New" pitchFamily="34" charset="-122"/>
                 <a:cs typeface="Courier New" pitchFamily="34" charset="-120"/>
               </a:rPr>
-              <a:t>  release-manager [sdlc 0.17.0 · community]</a:t>
+              <a:t>  release-manager [sdlc 0.18.0 · community]</a:t>
             </a:r>
             <a:endParaRPr lang="en-US" sz="1000" dirty="0"/>
           </a:p>
@@ -15596,7 +15596,7 @@
         <p:spPr>
           <a:xfrm>
             <a:off x="7209536" y="6053328"/>
-            <a:ext cx="813816" cy="256032"/>
+            <a:ext cx="681736" cy="256032"/>
           </a:xfrm>
           <a:prstGeom prst="roundRect">
             <a:avLst>
@@ -15623,6 +15623,72 @@
         <p:spPr>
           <a:xfrm>
             <a:off x="7209536" y="6053328"/>
+            <a:ext cx="681736" cy="256032"/>
+          </a:xfrm>
+          <a:prstGeom prst="rect">
+            <a:avLst/>
+          </a:prstGeom>
+          <a:noFill/>
+          <a:ln/>
+        </p:spPr>
+        <p:txBody>
+          <a:bodyPr wrap="square" lIns="0" tIns="0" rIns="0" bIns="0" rtlCol="0" anchor="ctr"/>
+          <a:lstStyle/>
+          <a:p>
+            <a:pPr algn="ctr" indent="0" marL="0">
+              <a:buNone/>
+            </a:pPr>
+            <a:r>
+              <a:rPr lang="en-US" sz="1000" dirty="0">
+                <a:solidFill>
+                  <a:srgbClr val="5B6475"/>
+                </a:solidFill>
+                <a:latin typeface="Calibri" pitchFamily="34" charset="0"/>
+                <a:ea typeface="Calibri" pitchFamily="34" charset="-122"/>
+                <a:cs typeface="Calibri" pitchFamily="34" charset="-120"/>
+              </a:rPr>
+              <a:t>ci init</a:t>
+            </a:r>
+            <a:endParaRPr lang="en-US" sz="1000" dirty="0"/>
+          </a:p>
+        </p:txBody>
+      </p:sp>
+      <p:sp>
+        <p:nvSpPr>
+          <p:cNvPr id="40" name="Shape 38"/>
+          <p:cNvSpPr/>
+          <p:nvPr/>
+        </p:nvSpPr>
+        <p:spPr>
+          <a:xfrm>
+            <a:off x="7982712" y="6053328"/>
+            <a:ext cx="813816" cy="256032"/>
+          </a:xfrm>
+          <a:prstGeom prst="roundRect">
+            <a:avLst>
+              <a:gd name="adj" fmla="val 50000"/>
+            </a:avLst>
+          </a:prstGeom>
+          <a:solidFill>
+            <a:srgbClr val="F3F5F8"/>
+          </a:solidFill>
+          <a:ln w="12700">
+            <a:solidFill>
+              <a:srgbClr val="F3F5F8"/>
+            </a:solidFill>
+            <a:prstDash val="solid"/>
+          </a:ln>
+        </p:spPr>
+      </p:sp>
+      <p:sp>
+        <p:nvSpPr>
+          <p:cNvPr id="41" name="Text 39"/>
+          <p:cNvSpPr txBox="1"/>
+          <p:nvPr/>
+        </p:nvSpPr>
+        <p:spPr>
+          <a:xfrm>
+            <a:off x="7982712" y="6053328"/>
             <a:ext cx="813816" cy="256032"/>
           </a:xfrm>
           <a:prstGeom prst="rect">
@@ -16267,7 +16333,7 @@
                 <a:ea typeface="Courier New" pitchFamily="34" charset="-122"/>
                 <a:cs typeface="Courier New" pitchFamily="34" charset="-120"/>
               </a:rPr>
-              <a:t>✓ test (1.1s)</a:t>
+              <a:t>✓ test (1.4s)</a:t>
             </a:r>
             <a:endParaRPr lang="en-US" sz="1000" dirty="0"/>
           </a:p>
@@ -16284,7 +16350,7 @@
                 <a:ea typeface="Courier New" pitchFamily="34" charset="-122"/>
                 <a:cs typeface="Courier New" pitchFamily="34" charset="-120"/>
               </a:rPr>
-              <a:t>✓ ci-green (ci/pipeline_status, 0.6s)</a:t>
+              <a:t>✓ ci-green (ci/pipeline_status, 1.1s)</a:t>
             </a:r>
             <a:endParaRPr lang="en-US" sz="1000" dirty="0"/>
           </a:p>
@@ -16720,7 +16786,7 @@
                 <a:ea typeface="Courier New" pitchFamily="34" charset="-122"/>
                 <a:cs typeface="Courier New" pitchFamily="34" charset="-120"/>
               </a:rPr>
-              <a:t>      "id": "20261013T075223330Z-ci-green-f</a:t>
+              <a:t>      "id": "20261013T100107052Z-ci-green-f</a:t>
             </a:r>
             <a:endParaRPr lang="en-US" sz="1000" dirty="0"/>
           </a:p>
@@ -16737,7 +16803,7 @@
                 <a:ea typeface="Courier New" pitchFamily="34" charset="-122"/>
                 <a:cs typeface="Courier New" pitchFamily="34" charset="-120"/>
               </a:rPr>
-              <a:t>  fed13",</a:t>
+              <a:t>  7e08f",</a:t>
             </a:r>
             <a:endParaRPr lang="en-US" sz="1000" dirty="0"/>
           </a:p>
@@ -16873,7 +16939,7 @@
                 <a:ea typeface="Courier New" pitchFamily="34" charset="-122"/>
                 <a:cs typeface="Courier New" pitchFamily="34" charset="-120"/>
               </a:rPr>
-              <a:t>        "ref": "2a037004327e7616149ed05101a</a:t>
+              <a:t>        "ref": "29c7ed7fa8ad45fbc5631152cae</a:t>
             </a:r>
             <a:endParaRPr lang="en-US" sz="1000" dirty="0"/>
           </a:p>
@@ -16890,7 +16956,7 @@
                 <a:ea typeface="Courier New" pitchFamily="34" charset="-122"/>
                 <a:cs typeface="Courier New" pitchFamily="34" charset="-120"/>
               </a:rPr>
-              <a:t>  9f1aa1358dc93",</a:t>
+              <a:t>  3d2b45af2df33",</a:t>
             </a:r>
             <a:endParaRPr lang="en-US" sz="1000" dirty="0"/>
           </a:p>
@@ -27018,7 +27084,7 @@
                 <a:ea typeface="Courier New" pitchFamily="34" charset="-122"/>
                 <a:cs typeface="Courier New" pitchFamily="34" charset="-120"/>
               </a:rPr>
-              <a:t>  sdlc 0.17.0, license: community</a:t>
+              <a:t>  sdlc 0.18.0, license: community</a:t>
             </a:r>
             <a:endParaRPr lang="en-US" sz="1000" dirty="0"/>
           </a:p>

--- a/docs/demo/sdlc-calculator-demo.en.pptx
+++ b/docs/demo/sdlc-calculator-demo.en.pptx
@@ -5112,7 +5112,7 @@
                 <a:ea typeface="Courier New" pitchFamily="34" charset="-122"/>
                 <a:cs typeface="Courier New" pitchFamily="34" charset="-120"/>
               </a:rPr>
-              <a:t>✓ test (1.2s)</a:t>
+              <a:t>✓ test (0.9s)</a:t>
             </a:r>
             <a:endParaRPr lang="en-US" sz="1000" dirty="0"/>
           </a:p>
@@ -6660,7 +6660,7 @@
                 <a:ea typeface="Courier New" pitchFamily="34" charset="-122"/>
                 <a:cs typeface="Courier New" pitchFamily="34" charset="-120"/>
               </a:rPr>
-              <a:t>  code-owner (8cf5f98928e2)</a:t>
+              <a:t>  code-owner (712099877b9e)</a:t>
             </a:r>
             <a:endParaRPr lang="en-US" sz="1000" dirty="0"/>
           </a:p>
@@ -6745,7 +6745,7 @@
                 <a:ea typeface="Courier New" pitchFamily="34" charset="-122"/>
                 <a:cs typeface="Courier New" pitchFamily="34" charset="-120"/>
               </a:rPr>
-              <a:t>  "SDLC-Approval: basic-arithmetic:review:8</a:t>
+              <a:t>  "SDLC-Approval: basic-arithmetic:review:7</a:t>
             </a:r>
             <a:endParaRPr lang="en-US" sz="1000" dirty="0"/>
           </a:p>
@@ -6762,7 +6762,7 @@
                 <a:ea typeface="Courier New" pitchFamily="34" charset="-122"/>
                 <a:cs typeface="Courier New" pitchFamily="34" charset="-120"/>
               </a:rPr>
-              <a:t>  cf5f98928e2"</a:t>
+              <a:t>  12099877b9e"</a:t>
             </a:r>
             <a:endParaRPr lang="en-US" sz="1000" dirty="0"/>
           </a:p>
@@ -7443,7 +7443,7 @@
                 <a:ea typeface="Courier New" pitchFamily="34" charset="-122"/>
                 <a:cs typeface="Courier New" pitchFamily="34" charset="-120"/>
               </a:rPr>
-              <a:t>  release-manager (8cf5f98928e2)</a:t>
+              <a:t>  release-manager (712099877b9e)</a:t>
             </a:r>
             <a:endParaRPr lang="en-US" sz="1000" dirty="0"/>
           </a:p>
@@ -7511,7 +7511,7 @@
                 <a:ea typeface="Courier New" pitchFamily="34" charset="-122"/>
                 <a:cs typeface="Courier New" pitchFamily="34" charset="-120"/>
               </a:rPr>
-              <a:t>  gate" -m "SDLC-Approval: basic-arithmetic:release:8cf5f98928e2"</a:t>
+              <a:t>  gate" -m "SDLC-Approval: basic-arithmetic:release:712099877b9e"</a:t>
             </a:r>
             <a:endParaRPr lang="en-US" sz="1000" dirty="0"/>
           </a:p>
@@ -7794,7 +7794,7 @@
                 <a:ea typeface="Courier New" pitchFamily="34" charset="-122"/>
                 <a:cs typeface="Courier New" pitchFamily="34" charset="-120"/>
               </a:rPr>
-              <a:t>✓ basic-arithmetic/intent alice valid ba203e76 trailer: missing</a:t>
+              <a:t>✓ basic-arithmetic/intent alice valid 2bb8417b trailer: missing</a:t>
             </a:r>
             <a:endParaRPr lang="en-US" sz="1000" dirty="0"/>
           </a:p>
@@ -7811,7 +7811,7 @@
                 <a:ea typeface="Courier New" pitchFamily="34" charset="-122"/>
                 <a:cs typeface="Courier New" pitchFamily="34" charset="-120"/>
               </a:rPr>
-              <a:t>✓ basic-arithmetic/spec alice valid 4c3be653 trailer: missing</a:t>
+              <a:t>✓ basic-arithmetic/spec alice valid bb21d651 trailer: missing</a:t>
             </a:r>
             <a:endParaRPr lang="en-US" sz="1000" dirty="0"/>
           </a:p>
@@ -7828,7 +7828,7 @@
                 <a:ea typeface="Courier New" pitchFamily="34" charset="-122"/>
                 <a:cs typeface="Courier New" pitchFamily="34" charset="-120"/>
               </a:rPr>
-              <a:t>✗ basic-arithmetic/plan bob wrong-signer 4c3be653 trailer: missing</a:t>
+              <a:t>✗ basic-arithmetic/plan bob wrong-signer bb21d651 trailer: missing</a:t>
             </a:r>
             <a:endParaRPr lang="en-US" sz="1000" dirty="0"/>
           </a:p>
@@ -7845,7 +7845,7 @@
                 <a:ea typeface="Courier New" pitchFamily="34" charset="-122"/>
                 <a:cs typeface="Courier New" pitchFamily="34" charset="-120"/>
               </a:rPr>
-              <a:t>✓ basic-arithmetic/review carol valid 0e4833ee trailer: missing</a:t>
+              <a:t>✓ basic-arithmetic/review carol valid b1bf9ce3 trailer: missing</a:t>
             </a:r>
             <a:endParaRPr lang="en-US" sz="1000" dirty="0"/>
           </a:p>
@@ -7862,7 +7862,7 @@
                 <a:ea typeface="Courier New" pitchFamily="34" charset="-122"/>
                 <a:cs typeface="Courier New" pitchFamily="34" charset="-120"/>
               </a:rPr>
-              <a:t>✓ basic-arithmetic/release alice valid d866a99f trailer: missing</a:t>
+              <a:t>✓ basic-arithmetic/release alice valid eb6c00f8 trailer: missing</a:t>
             </a:r>
             <a:endParaRPr lang="en-US" sz="1000" dirty="0"/>
           </a:p>
@@ -7879,7 +7879,7 @@
                 <a:ea typeface="Courier New" pitchFamily="34" charset="-122"/>
                 <a:cs typeface="Courier New" pitchFamily="34" charset="-120"/>
               </a:rPr>
-              <a:t>✓ openspec/roles.yaml alice@calc.example bootstrap 137d1b62</a:t>
+              <a:t>✓ openspec/roles.yaml alice@calc.example bootstrap 4ba7fa97</a:t>
             </a:r>
             <a:endParaRPr lang="en-US" sz="1000" dirty="0"/>
           </a:p>
@@ -14365,7 +14365,7 @@
                 <a:ea typeface="Courier New" pitchFamily="34" charset="-122"/>
                 <a:cs typeface="Courier New" pitchFamily="34" charset="-120"/>
               </a:rPr>
-              <a:t>  archived) · sdlc 0.18.0, license:</a:t>
+              <a:t>  archived) · sdlc 0.19.0, license:</a:t>
             </a:r>
             <a:endParaRPr lang="en-US" sz="1000" dirty="0"/>
           </a:p>
@@ -14552,7 +14552,7 @@
                 <a:ea typeface="Courier New" pitchFamily="34" charset="-122"/>
                 <a:cs typeface="Courier New" pitchFamily="34" charset="-120"/>
               </a:rPr>
-              <a:t>  intent 3 · spec 1 · plan 16 · review 4;</a:t>
+              <a:t>  intent 3 · spec 1 · plan 14 · review 3;</a:t>
             </a:r>
             <a:endParaRPr lang="en-US" sz="1000" dirty="0"/>
           </a:p>
@@ -14852,7 +14852,7 @@
                 <a:ea typeface="Courier New" pitchFamily="34" charset="-122"/>
                 <a:cs typeface="Courier New" pitchFamily="34" charset="-120"/>
               </a:rPr>
-              <a:t>(last 15 of 44 entries; --limit to see</a:t>
+              <a:t>(last 15 of 46 entries; --limit to see</a:t>
             </a:r>
             <a:endParaRPr lang="en-US" sz="1000" dirty="0"/>
           </a:p>
@@ -14886,7 +14886,7 @@
                 <a:ea typeface="Courier New" pitchFamily="34" charset="-122"/>
                 <a:cs typeface="Courier New" pitchFamily="34" charset="-120"/>
               </a:rPr>
-              <a:t>2026-10-13T09:59:43.531Z  gate.review.await</a:t>
+              <a:t>2026-10-13T12:39:06.473Z  gate.review.await</a:t>
             </a:r>
             <a:endParaRPr lang="en-US" sz="1000" dirty="0"/>
           </a:p>
@@ -14920,7 +14920,7 @@
                 <a:ea typeface="Courier New" pitchFamily="34" charset="-122"/>
                 <a:cs typeface="Courier New" pitchFamily="34" charset="-120"/>
               </a:rPr>
-              <a:t>  sha256:8cf5f98928e279a64a3de9693742f47c85</a:t>
+              <a:t>  sha256:712099877b9e02aad7ba9df255d39cfea8</a:t>
             </a:r>
             <a:endParaRPr lang="en-US" sz="1000" dirty="0"/>
           </a:p>
@@ -14937,7 +14937,7 @@
                 <a:ea typeface="Courier New" pitchFamily="34" charset="-122"/>
                 <a:cs typeface="Courier New" pitchFamily="34" charset="-120"/>
               </a:rPr>
-              <a:t>  fa9f5754dad3a412534e6b41ae457a [sdlc</a:t>
+              <a:t>  913e1c7bd04eae8189166e4031f9d1 [sdlc</a:t>
             </a:r>
             <a:endParaRPr lang="en-US" sz="1000" dirty="0"/>
           </a:p>
@@ -14954,7 +14954,7 @@
                 <a:ea typeface="Courier New" pitchFamily="34" charset="-122"/>
                 <a:cs typeface="Courier New" pitchFamily="34" charset="-120"/>
               </a:rPr>
-              <a:t>  0.18.0 · community]</a:t>
+              <a:t>  0.19.0 · community]</a:t>
             </a:r>
             <a:endParaRPr lang="en-US" sz="1000" dirty="0"/>
           </a:p>
@@ -14971,7 +14971,7 @@
                 <a:ea typeface="Courier New" pitchFamily="34" charset="-122"/>
                 <a:cs typeface="Courier New" pitchFamily="34" charset="-120"/>
               </a:rPr>
-              <a:t>2026-10-13T09:59:47.632Z  gate.review.appro</a:t>
+              <a:t>2026-10-13T12:39:09.723Z  gate.review.appro</a:t>
             </a:r>
             <a:endParaRPr lang="en-US" sz="1000" dirty="0"/>
           </a:p>
@@ -15022,7 +15022,7 @@
                 <a:ea typeface="Courier New" pitchFamily="34" charset="-122"/>
                 <a:cs typeface="Courier New" pitchFamily="34" charset="-120"/>
               </a:rPr>
-              <a:t>  [sdlc 0.18.0 · community]</a:t>
+              <a:t>  [sdlc 0.19.0 · community]</a:t>
             </a:r>
             <a:endParaRPr lang="en-US" sz="1000" dirty="0"/>
           </a:p>
@@ -15039,7 +15039,7 @@
                 <a:ea typeface="Courier New" pitchFamily="34" charset="-122"/>
                 <a:cs typeface="Courier New" pitchFamily="34" charset="-120"/>
               </a:rPr>
-              <a:t>2026-10-13T09:59:55.096Z  gate.release.appr</a:t>
+              <a:t>2026-10-13T12:39:16.238Z  gate.release.appr</a:t>
             </a:r>
             <a:endParaRPr lang="en-US" sz="1000" dirty="0"/>
           </a:p>
@@ -15090,7 +15090,7 @@
                 <a:ea typeface="Courier New" pitchFamily="34" charset="-122"/>
                 <a:cs typeface="Courier New" pitchFamily="34" charset="-120"/>
               </a:rPr>
-              <a:t>  release-manager [sdlc 0.18.0 · community]</a:t>
+              <a:t>  release-manager [sdlc 0.19.0 · community]</a:t>
             </a:r>
             <a:endParaRPr lang="en-US" sz="1000" dirty="0"/>
           </a:p>
@@ -16050,6 +16050,57 @@
                 <a:ea typeface="Courier New" pitchFamily="34" charset="-122"/>
                 <a:cs typeface="Courier New" pitchFamily="34" charset="-120"/>
               </a:rPr>
+              <a:t>✓ github (stdio): available, 3 tool(s)</a:t>
+            </a:r>
+            <a:endParaRPr lang="en-US" sz="1000" dirty="0"/>
+          </a:p>
+          <a:p>
+            <a:pPr indent="0" marL="0">
+              <a:buNone/>
+            </a:pPr>
+            <a:r>
+              <a:rPr lang="en-US" sz="1000" dirty="0">
+                <a:solidFill>
+                  <a:srgbClr val="E8EEF2"/>
+                </a:solidFill>
+                <a:latin typeface="Courier New" pitchFamily="34" charset="0"/>
+                <a:ea typeface="Courier New" pitchFamily="34" charset="-122"/>
+                <a:cs typeface="Courier New" pitchFamily="34" charset="-120"/>
+              </a:rPr>
+              <a:t>    list_issues, add_issue_comment,</a:t>
+            </a:r>
+            <a:endParaRPr lang="en-US" sz="1000" dirty="0"/>
+          </a:p>
+          <a:p>
+            <a:pPr indent="0" marL="0">
+              <a:buNone/>
+            </a:pPr>
+            <a:r>
+              <a:rPr lang="en-US" sz="1000" dirty="0">
+                <a:solidFill>
+                  <a:srgbClr val="E8EEF2"/>
+                </a:solidFill>
+                <a:latin typeface="Courier New" pitchFamily="34" charset="0"/>
+                <a:ea typeface="Courier New" pitchFamily="34" charset="-122"/>
+                <a:cs typeface="Courier New" pitchFamily="34" charset="-120"/>
+              </a:rPr>
+              <a:t>  update_issue</a:t>
+            </a:r>
+            <a:endParaRPr lang="en-US" sz="1000" dirty="0"/>
+          </a:p>
+          <a:p>
+            <a:pPr indent="0" marL="0">
+              <a:buNone/>
+            </a:pPr>
+            <a:r>
+              <a:rPr lang="en-US" sz="1000" dirty="0">
+                <a:solidFill>
+                  <a:srgbClr val="E8EEF2"/>
+                </a:solidFill>
+                <a:latin typeface="Courier New" pitchFamily="34" charset="0"/>
+                <a:ea typeface="Courier New" pitchFamily="34" charset="-122"/>
+                <a:cs typeface="Courier New" pitchFamily="34" charset="-120"/>
+              </a:rPr>
               <a:t>✓ ci (stdio): available, 1 tool(s)</a:t>
             </a:r>
             <a:endParaRPr lang="en-US" sz="1000" dirty="0"/>
@@ -16068,6 +16119,40 @@
                 <a:cs typeface="Courier New" pitchFamily="34" charset="-120"/>
               </a:rPr>
               <a:t>    pipeline_status</a:t>
+            </a:r>
+            <a:endParaRPr lang="en-US" sz="1000" dirty="0"/>
+          </a:p>
+          <a:p>
+            <a:pPr indent="0" marL="0">
+              <a:buNone/>
+            </a:pPr>
+            <a:r>
+              <a:rPr lang="en-US" sz="1000" dirty="0">
+                <a:solidFill>
+                  <a:srgbClr val="E8EEF2"/>
+                </a:solidFill>
+                <a:latin typeface="Courier New" pitchFamily="34" charset="0"/>
+                <a:ea typeface="Courier New" pitchFamily="34" charset="-122"/>
+                <a:cs typeface="Courier New" pitchFamily="34" charset="-120"/>
+              </a:rPr>
+              <a:t>✓ kb (stdio): available, 1 tool(s)</a:t>
+            </a:r>
+            <a:endParaRPr lang="en-US" sz="1000" dirty="0"/>
+          </a:p>
+          <a:p>
+            <a:pPr indent="0" marL="0">
+              <a:buNone/>
+            </a:pPr>
+            <a:r>
+              <a:rPr lang="en-US" sz="1000" dirty="0">
+                <a:solidFill>
+                  <a:srgbClr val="E8EEF2"/>
+                </a:solidFill>
+                <a:latin typeface="Courier New" pitchFamily="34" charset="0"/>
+                <a:ea typeface="Courier New" pitchFamily="34" charset="-122"/>
+                <a:cs typeface="Courier New" pitchFamily="34" charset="-120"/>
+              </a:rPr>
+              <a:t>    search_docs</a:t>
             </a:r>
             <a:endParaRPr lang="en-US" sz="1000" dirty="0"/>
           </a:p>
@@ -16333,7 +16418,7 @@
                 <a:ea typeface="Courier New" pitchFamily="34" charset="-122"/>
                 <a:cs typeface="Courier New" pitchFamily="34" charset="-120"/>
               </a:rPr>
-              <a:t>✓ test (1.4s)</a:t>
+              <a:t>✓ test (1.0s)</a:t>
             </a:r>
             <a:endParaRPr lang="en-US" sz="1000" dirty="0"/>
           </a:p>
@@ -16350,7 +16435,7 @@
                 <a:ea typeface="Courier New" pitchFamily="34" charset="-122"/>
                 <a:cs typeface="Courier New" pitchFamily="34" charset="-120"/>
               </a:rPr>
-              <a:t>✓ ci-green (ci/pipeline_status, 1.1s)</a:t>
+              <a:t>✓ ci-green (ci/pipeline_status, 0.5s)</a:t>
             </a:r>
             <a:endParaRPr lang="en-US" sz="1000" dirty="0"/>
           </a:p>
@@ -16786,7 +16871,7 @@
                 <a:ea typeface="Courier New" pitchFamily="34" charset="-122"/>
                 <a:cs typeface="Courier New" pitchFamily="34" charset="-120"/>
               </a:rPr>
-              <a:t>      "id": "20261013T100107052Z-ci-green-f</a:t>
+              <a:t>      "id": "20261013T124009491Z-ci-green-9</a:t>
             </a:r>
             <a:endParaRPr lang="en-US" sz="1000" dirty="0"/>
           </a:p>
@@ -16803,7 +16888,7 @@
                 <a:ea typeface="Courier New" pitchFamily="34" charset="-122"/>
                 <a:cs typeface="Courier New" pitchFamily="34" charset="-120"/>
               </a:rPr>
-              <a:t>  7e08f",</a:t>
+              <a:t>  29a3f",</a:t>
             </a:r>
             <a:endParaRPr lang="en-US" sz="1000" dirty="0"/>
           </a:p>
@@ -16939,7 +17024,7 @@
                 <a:ea typeface="Courier New" pitchFamily="34" charset="-122"/>
                 <a:cs typeface="Courier New" pitchFamily="34" charset="-120"/>
               </a:rPr>
-              <a:t>        "ref": "29c7ed7fa8ad45fbc5631152cae</a:t>
+              <a:t>        "ref": "2e1baac9ee53f63c0b027747d99</a:t>
             </a:r>
             <a:endParaRPr lang="en-US" sz="1000" dirty="0"/>
           </a:p>
@@ -16956,7 +17041,7 @@
                 <a:ea typeface="Courier New" pitchFamily="34" charset="-122"/>
                 <a:cs typeface="Courier New" pitchFamily="34" charset="-120"/>
               </a:rPr>
-              <a:t>  3d2b45af2df33",</a:t>
+              <a:t>  6d5979c6ebe47",</a:t>
             </a:r>
             <a:endParaRPr lang="en-US" sz="1000" dirty="0"/>
           </a:p>
@@ -17281,7 +17366,7 @@
         <p:spPr>
           <a:xfrm>
             <a:off x="5352288" y="6053328"/>
-            <a:ext cx="813816" cy="256032"/>
+            <a:ext cx="1144016" cy="256032"/>
           </a:xfrm>
           <a:prstGeom prst="roundRect">
             <a:avLst>
@@ -17308,8 +17393,140 @@
         <p:spPr>
           <a:xfrm>
             <a:off x="5352288" y="6053328"/>
+            <a:ext cx="1144016" cy="256032"/>
+          </a:xfrm>
+          <a:prstGeom prst="rect">
+            <a:avLst/>
+          </a:prstGeom>
+          <a:noFill/>
+          <a:ln/>
+        </p:spPr>
+        <p:txBody>
+          <a:bodyPr wrap="square" lIns="0" tIns="0" rIns="0" bIns="0" rtlCol="0" anchor="ctr"/>
+          <a:lstStyle/>
+          <a:p>
+            <a:pPr algn="ctr" indent="0" marL="0">
+              <a:buNone/>
+            </a:pPr>
+            <a:r>
+              <a:rPr lang="en-US" sz="1000" dirty="0">
+                <a:solidFill>
+                  <a:srgbClr val="5B6475"/>
+                </a:solidFill>
+                <a:latin typeface="Calibri" pitchFamily="34" charset="0"/>
+                <a:ea typeface="Calibri" pitchFamily="34" charset="-122"/>
+                <a:cs typeface="Calibri" pitchFamily="34" charset="-120"/>
+              </a:rPr>
+              <a:t>events summary</a:t>
+            </a:r>
+            <a:endParaRPr lang="en-US" sz="1000" dirty="0"/>
+          </a:p>
+        </p:txBody>
+      </p:sp>
+      <p:sp>
+        <p:nvSpPr>
+          <p:cNvPr id="34" name="Shape 32"/>
+          <p:cNvSpPr/>
+          <p:nvPr/>
+        </p:nvSpPr>
+        <p:spPr>
+          <a:xfrm>
+            <a:off x="6587744" y="6053328"/>
+            <a:ext cx="1077976" cy="256032"/>
+          </a:xfrm>
+          <a:prstGeom prst="roundRect">
+            <a:avLst>
+              <a:gd name="adj" fmla="val 50000"/>
+            </a:avLst>
+          </a:prstGeom>
+          <a:solidFill>
+            <a:srgbClr val="F3F5F8"/>
+          </a:solidFill>
+          <a:ln w="12700">
+            <a:solidFill>
+              <a:srgbClr val="F3F5F8"/>
+            </a:solidFill>
+            <a:prstDash val="solid"/>
+          </a:ln>
+        </p:spPr>
+      </p:sp>
+      <p:sp>
+        <p:nvSpPr>
+          <p:cNvPr id="35" name="Text 33"/>
+          <p:cNvSpPr txBox="1"/>
+          <p:nvPr/>
+        </p:nvSpPr>
+        <p:spPr>
+          <a:xfrm>
+            <a:off x="6587744" y="6053328"/>
+            <a:ext cx="1077976" cy="256032"/>
+          </a:xfrm>
+          <a:prstGeom prst="rect">
+            <a:avLst/>
+          </a:prstGeom>
+          <a:noFill/>
+          <a:ln/>
+        </p:spPr>
+        <p:txBody>
+          <a:bodyPr wrap="square" lIns="0" tIns="0" rIns="0" bIns="0" rtlCol="0" anchor="ctr"/>
+          <a:lstStyle/>
+          <a:p>
+            <a:pPr algn="ctr" indent="0" marL="0">
+              <a:buNone/>
+            </a:pPr>
+            <a:r>
+              <a:rPr lang="en-US" sz="1000" dirty="0">
+                <a:solidFill>
+                  <a:srgbClr val="5B6475"/>
+                </a:solidFill>
+                <a:latin typeface="Calibri" pitchFamily="34" charset="0"/>
+                <a:ea typeface="Calibri" pitchFamily="34" charset="-122"/>
+                <a:cs typeface="Calibri" pitchFamily="34" charset="-120"/>
+              </a:rPr>
+              <a:t>triage intake</a:t>
+            </a:r>
+            <a:endParaRPr lang="en-US" sz="1000" dirty="0"/>
+          </a:p>
+        </p:txBody>
+      </p:sp>
+      <p:sp>
+        <p:nvSpPr>
+          <p:cNvPr id="36" name="Shape 34"/>
+          <p:cNvSpPr/>
+          <p:nvPr/>
+        </p:nvSpPr>
+        <p:spPr>
+          <a:xfrm>
+            <a:off x="7757160" y="6053328"/>
             <a:ext cx="813816" cy="256032"/>
           </a:xfrm>
+          <a:prstGeom prst="roundRect">
+            <a:avLst>
+              <a:gd name="adj" fmla="val 50000"/>
+            </a:avLst>
+          </a:prstGeom>
+          <a:solidFill>
+            <a:srgbClr val="F3F5F8"/>
+          </a:solidFill>
+          <a:ln w="12700">
+            <a:solidFill>
+              <a:srgbClr val="F3F5F8"/>
+            </a:solidFill>
+            <a:prstDash val="solid"/>
+          </a:ln>
+        </p:spPr>
+      </p:sp>
+      <p:sp>
+        <p:nvSpPr>
+          <p:cNvPr id="37" name="Text 35"/>
+          <p:cNvSpPr txBox="1"/>
+          <p:nvPr/>
+        </p:nvSpPr>
+        <p:spPr>
+          <a:xfrm>
+            <a:off x="7757160" y="6053328"/>
+            <a:ext cx="813816" cy="256032"/>
+          </a:xfrm>
           <a:prstGeom prst="rect">
             <a:avLst/>
           </a:prstGeom>
@@ -17333,6 +17550,72 @@
                 <a:cs typeface="Calibri" pitchFamily="34" charset="-120"/>
               </a:rPr>
               <a:t>mcp serve</a:t>
+            </a:r>
+            <a:endParaRPr lang="en-US" sz="1000" dirty="0"/>
+          </a:p>
+        </p:txBody>
+      </p:sp>
+      <p:sp>
+        <p:nvSpPr>
+          <p:cNvPr id="38" name="Shape 36"/>
+          <p:cNvSpPr/>
+          <p:nvPr/>
+        </p:nvSpPr>
+        <p:spPr>
+          <a:xfrm>
+            <a:off x="8662416" y="6053328"/>
+            <a:ext cx="1011936" cy="256032"/>
+          </a:xfrm>
+          <a:prstGeom prst="roundRect">
+            <a:avLst>
+              <a:gd name="adj" fmla="val 50000"/>
+            </a:avLst>
+          </a:prstGeom>
+          <a:solidFill>
+            <a:srgbClr val="F3F5F8"/>
+          </a:solidFill>
+          <a:ln w="12700">
+            <a:solidFill>
+              <a:srgbClr val="F3F5F8"/>
+            </a:solidFill>
+            <a:prstDash val="solid"/>
+          </a:ln>
+        </p:spPr>
+      </p:sp>
+      <p:sp>
+        <p:nvSpPr>
+          <p:cNvPr id="39" name="Text 37"/>
+          <p:cNvSpPr txBox="1"/>
+          <p:nvPr/>
+        </p:nvSpPr>
+        <p:spPr>
+          <a:xfrm>
+            <a:off x="8662416" y="6053328"/>
+            <a:ext cx="1011936" cy="256032"/>
+          </a:xfrm>
+          <a:prstGeom prst="rect">
+            <a:avLst/>
+          </a:prstGeom>
+          <a:noFill/>
+          <a:ln/>
+        </p:spPr>
+        <p:txBody>
+          <a:bodyPr wrap="square" lIns="0" tIns="0" rIns="0" bIns="0" rtlCol="0" anchor="ctr"/>
+          <a:lstStyle/>
+          <a:p>
+            <a:pPr algn="ctr" indent="0" marL="0">
+              <a:buNone/>
+            </a:pPr>
+            <a:r>
+              <a:rPr lang="en-US" sz="1000" dirty="0">
+                <a:solidFill>
+                  <a:srgbClr val="5B6475"/>
+                </a:solidFill>
+                <a:latin typeface="Calibri" pitchFamily="34" charset="0"/>
+                <a:ea typeface="Calibri" pitchFamily="34" charset="-122"/>
+                <a:cs typeface="Calibri" pitchFamily="34" charset="-120"/>
+              </a:rPr>
+              <a:t>context pull</a:t>
             </a:r>
             <a:endParaRPr lang="en-US" sz="1000" dirty="0"/>
           </a:p>
@@ -19332,7 +19615,7 @@
                 <a:ea typeface="Cambria" pitchFamily="34" charset="-122"/>
                 <a:cs typeface="Cambria" pitchFamily="34" charset="-120"/>
               </a:rPr>
-              <a:t>104</a:t>
+              <a:t>111</a:t>
             </a:r>
             <a:endParaRPr lang="en-US" sz="6000" dirty="0"/>
           </a:p>
@@ -19437,7 +19720,7 @@
                 <a:ea typeface="Cambria" pitchFamily="34" charset="-122"/>
                 <a:cs typeface="Cambria" pitchFamily="34" charset="-120"/>
               </a:rPr>
-              <a:t>72</a:t>
+              <a:t>78</a:t>
             </a:r>
             <a:endParaRPr lang="en-US" sz="6000" dirty="0"/>
           </a:p>
@@ -19476,7 +19759,7 @@
                 <a:ea typeface="Calibri" pitchFamily="34" charset="-122"/>
                 <a:cs typeface="Calibri" pitchFamily="34" charset="-120"/>
               </a:rPr>
-              <a:t>of 72 commands</a:t>
+              <a:t>of 78 commands</a:t>
             </a:r>
             <a:endParaRPr lang="en-US" sz="1600" dirty="0"/>
           </a:p>
@@ -20955,7 +21238,7 @@
         <p:spPr>
           <a:xfrm>
             <a:off x="9284208" y="4096512"/>
-            <a:ext cx="813816" cy="256032"/>
+            <a:ext cx="1144016" cy="256032"/>
           </a:xfrm>
           <a:prstGeom prst="roundRect">
             <a:avLst>
@@ -20982,7 +21265,7 @@
         <p:spPr>
           <a:xfrm>
             <a:off x="9284208" y="4096512"/>
-            <a:ext cx="813816" cy="256032"/>
+            <a:ext cx="1144016" cy="256032"/>
           </a:xfrm>
           <a:prstGeom prst="rect">
             <a:avLst/>
@@ -21006,7 +21289,7 @@
                 <a:ea typeface="Calibri" pitchFamily="34" charset="-122"/>
                 <a:cs typeface="Calibri" pitchFamily="34" charset="-120"/>
               </a:rPr>
-              <a:t>defer add</a:t>
+              <a:t>backlog import</a:t>
             </a:r>
             <a:endParaRPr lang="en-US" sz="1000" dirty="0"/>
           </a:p>
@@ -21020,8 +21303,8 @@
         </p:nvSpPr>
         <p:spPr>
           <a:xfrm>
-            <a:off x="10189464" y="4096512"/>
-            <a:ext cx="879856" cy="256032"/>
+            <a:off x="10519664" y="4096512"/>
+            <a:ext cx="813816" cy="256032"/>
           </a:xfrm>
           <a:prstGeom prst="roundRect">
             <a:avLst>
@@ -21047,8 +21330,8 @@
         </p:nvSpPr>
         <p:spPr>
           <a:xfrm>
-            <a:off x="10189464" y="4096512"/>
-            <a:ext cx="879856" cy="256032"/>
+            <a:off x="10519664" y="4096512"/>
+            <a:ext cx="813816" cy="256032"/>
           </a:xfrm>
           <a:prstGeom prst="rect">
             <a:avLst/>
@@ -21072,7 +21355,7 @@
                 <a:ea typeface="Calibri" pitchFamily="34" charset="-122"/>
                 <a:cs typeface="Calibri" pitchFamily="34" charset="-120"/>
               </a:rPr>
-              <a:t>defer list</a:t>
+              <a:t>defer add</a:t>
             </a:r>
             <a:endParaRPr lang="en-US" sz="1000" dirty="0"/>
           </a:p>
@@ -21087,7 +21370,7 @@
         <p:spPr>
           <a:xfrm>
             <a:off x="457200" y="4443984"/>
-            <a:ext cx="945896" cy="256032"/>
+            <a:ext cx="879856" cy="256032"/>
           </a:xfrm>
           <a:prstGeom prst="roundRect">
             <a:avLst>
@@ -21114,7 +21397,7 @@
         <p:spPr>
           <a:xfrm>
             <a:off x="457200" y="4443984"/>
-            <a:ext cx="945896" cy="256032"/>
+            <a:ext cx="879856" cy="256032"/>
           </a:xfrm>
           <a:prstGeom prst="rect">
             <a:avLst/>
@@ -21138,7 +21421,7 @@
                 <a:ea typeface="Calibri" pitchFamily="34" charset="-122"/>
                 <a:cs typeface="Calibri" pitchFamily="34" charset="-120"/>
               </a:rPr>
-              <a:t>defer close</a:t>
+              <a:t>defer list</a:t>
             </a:r>
             <a:endParaRPr lang="en-US" sz="1000" dirty="0"/>
           </a:p>
@@ -21152,8 +21435,8 @@
         </p:nvSpPr>
         <p:spPr>
           <a:xfrm>
-            <a:off x="1494536" y="4443984"/>
-            <a:ext cx="1011936" cy="256032"/>
+            <a:off x="1428496" y="4443984"/>
+            <a:ext cx="945896" cy="256032"/>
           </a:xfrm>
           <a:prstGeom prst="roundRect">
             <a:avLst>
@@ -21179,8 +21462,8 @@
         </p:nvSpPr>
         <p:spPr>
           <a:xfrm>
-            <a:off x="1494536" y="4443984"/>
-            <a:ext cx="1011936" cy="256032"/>
+            <a:off x="1428496" y="4443984"/>
+            <a:ext cx="945896" cy="256032"/>
           </a:xfrm>
           <a:prstGeom prst="rect">
             <a:avLst/>
@@ -21204,7 +21487,7 @@
                 <a:ea typeface="Calibri" pitchFamily="34" charset="-122"/>
                 <a:cs typeface="Calibri" pitchFamily="34" charset="-120"/>
               </a:rPr>
-              <a:t>layout check</a:t>
+              <a:t>defer close</a:t>
             </a:r>
             <a:endParaRPr lang="en-US" sz="1000" dirty="0"/>
           </a:p>
@@ -21218,8 +21501,8 @@
         </p:nvSpPr>
         <p:spPr>
           <a:xfrm>
-            <a:off x="2597912" y="4443984"/>
-            <a:ext cx="1210056" cy="256032"/>
+            <a:off x="2465832" y="4443984"/>
+            <a:ext cx="1011936" cy="256032"/>
           </a:xfrm>
           <a:prstGeom prst="roundRect">
             <a:avLst>
@@ -21245,8 +21528,8 @@
         </p:nvSpPr>
         <p:spPr>
           <a:xfrm>
-            <a:off x="2597912" y="4443984"/>
-            <a:ext cx="1210056" cy="256032"/>
+            <a:off x="2465832" y="4443984"/>
+            <a:ext cx="1011936" cy="256032"/>
           </a:xfrm>
           <a:prstGeom prst="rect">
             <a:avLst/>
@@ -21270,7 +21553,7 @@
                 <a:ea typeface="Calibri" pitchFamily="34" charset="-122"/>
                 <a:cs typeface="Calibri" pitchFamily="34" charset="-120"/>
               </a:rPr>
-              <a:t>layout scaffold</a:t>
+              <a:t>layout check</a:t>
             </a:r>
             <a:endParaRPr lang="en-US" sz="1000" dirty="0"/>
           </a:p>
@@ -21284,8 +21567,8 @@
         </p:nvSpPr>
         <p:spPr>
           <a:xfrm>
-            <a:off x="3899408" y="4443984"/>
-            <a:ext cx="1011936" cy="256032"/>
+            <a:off x="3569208" y="4443984"/>
+            <a:ext cx="1210056" cy="256032"/>
           </a:xfrm>
           <a:prstGeom prst="roundRect">
             <a:avLst>
@@ -21311,8 +21594,8 @@
         </p:nvSpPr>
         <p:spPr>
           <a:xfrm>
-            <a:off x="3899408" y="4443984"/>
-            <a:ext cx="1011936" cy="256032"/>
+            <a:off x="3569208" y="4443984"/>
+            <a:ext cx="1210056" cy="256032"/>
           </a:xfrm>
           <a:prstGeom prst="rect">
             <a:avLst/>
@@ -21336,7 +21619,7 @@
                 <a:ea typeface="Calibri" pitchFamily="34" charset="-122"/>
                 <a:cs typeface="Calibri" pitchFamily="34" charset="-120"/>
               </a:rPr>
-              <a:t>layout adapt</a:t>
+              <a:t>layout scaffold</a:t>
             </a:r>
             <a:endParaRPr lang="en-US" sz="1000" dirty="0"/>
           </a:p>
@@ -21350,8 +21633,8 @@
         </p:nvSpPr>
         <p:spPr>
           <a:xfrm>
-            <a:off x="5002784" y="4443984"/>
-            <a:ext cx="1144016" cy="256032"/>
+            <a:off x="4870704" y="4443984"/>
+            <a:ext cx="1011936" cy="256032"/>
           </a:xfrm>
           <a:prstGeom prst="roundRect">
             <a:avLst>
@@ -21377,8 +21660,8 @@
         </p:nvSpPr>
         <p:spPr>
           <a:xfrm>
-            <a:off x="5002784" y="4443984"/>
-            <a:ext cx="1144016" cy="256032"/>
+            <a:off x="4870704" y="4443984"/>
+            <a:ext cx="1011936" cy="256032"/>
           </a:xfrm>
           <a:prstGeom prst="rect">
             <a:avLst/>
@@ -21402,7 +21685,7 @@
                 <a:ea typeface="Calibri" pitchFamily="34" charset="-122"/>
                 <a:cs typeface="Calibri" pitchFamily="34" charset="-120"/>
               </a:rPr>
-              <a:t>layout convert</a:t>
+              <a:t>layout adapt</a:t>
             </a:r>
             <a:endParaRPr lang="en-US" sz="1000" dirty="0"/>
           </a:p>
@@ -21416,8 +21699,8 @@
         </p:nvSpPr>
         <p:spPr>
           <a:xfrm>
-            <a:off x="6238240" y="4443984"/>
-            <a:ext cx="483616" cy="256032"/>
+            <a:off x="5974080" y="4443984"/>
+            <a:ext cx="1144016" cy="256032"/>
           </a:xfrm>
           <a:prstGeom prst="roundRect">
             <a:avLst>
@@ -21443,8 +21726,8 @@
         </p:nvSpPr>
         <p:spPr>
           <a:xfrm>
-            <a:off x="6238240" y="4443984"/>
-            <a:ext cx="483616" cy="256032"/>
+            <a:off x="5974080" y="4443984"/>
+            <a:ext cx="1144016" cy="256032"/>
           </a:xfrm>
           <a:prstGeom prst="rect">
             <a:avLst/>
@@ -21468,7 +21751,7 @@
                 <a:ea typeface="Calibri" pitchFamily="34" charset="-122"/>
                 <a:cs typeface="Calibri" pitchFamily="34" charset="-120"/>
               </a:rPr>
-              <a:t>init</a:t>
+              <a:t>layout convert</a:t>
             </a:r>
             <a:endParaRPr lang="en-US" sz="1000" dirty="0"/>
           </a:p>
@@ -21482,8 +21765,8 @@
         </p:nvSpPr>
         <p:spPr>
           <a:xfrm>
-            <a:off x="6813296" y="4443984"/>
-            <a:ext cx="615696" cy="256032"/>
+            <a:off x="7209536" y="4443984"/>
+            <a:ext cx="483616" cy="256032"/>
           </a:xfrm>
           <a:prstGeom prst="roundRect">
             <a:avLst>
@@ -21509,8 +21792,8 @@
         </p:nvSpPr>
         <p:spPr>
           <a:xfrm>
-            <a:off x="6813296" y="4443984"/>
-            <a:ext cx="615696" cy="256032"/>
+            <a:off x="7209536" y="4443984"/>
+            <a:ext cx="483616" cy="256032"/>
           </a:xfrm>
           <a:prstGeom prst="rect">
             <a:avLst/>
@@ -21534,7 +21817,7 @@
                 <a:ea typeface="Calibri" pitchFamily="34" charset="-122"/>
                 <a:cs typeface="Calibri" pitchFamily="34" charset="-120"/>
               </a:rPr>
-              <a:t>update</a:t>
+              <a:t>init</a:t>
             </a:r>
             <a:endParaRPr lang="en-US" sz="1000" dirty="0"/>
           </a:p>
@@ -21548,8 +21831,8 @@
         </p:nvSpPr>
         <p:spPr>
           <a:xfrm>
-            <a:off x="7520432" y="4443984"/>
-            <a:ext cx="813816" cy="256032"/>
+            <a:off x="7784592" y="4443984"/>
+            <a:ext cx="615696" cy="256032"/>
           </a:xfrm>
           <a:prstGeom prst="roundRect">
             <a:avLst>
@@ -21575,8 +21858,8 @@
         </p:nvSpPr>
         <p:spPr>
           <a:xfrm>
-            <a:off x="7520432" y="4443984"/>
-            <a:ext cx="813816" cy="256032"/>
+            <a:off x="7784592" y="4443984"/>
+            <a:ext cx="615696" cy="256032"/>
           </a:xfrm>
           <a:prstGeom prst="rect">
             <a:avLst/>
@@ -21600,7 +21883,7 @@
                 <a:ea typeface="Calibri" pitchFamily="34" charset="-122"/>
                 <a:cs typeface="Calibri" pitchFamily="34" charset="-120"/>
               </a:rPr>
-              <a:t>uninstall</a:t>
+              <a:t>update</a:t>
             </a:r>
             <a:endParaRPr lang="en-US" sz="1000" dirty="0"/>
           </a:p>
@@ -21614,8 +21897,8 @@
         </p:nvSpPr>
         <p:spPr>
           <a:xfrm>
-            <a:off x="8425688" y="4443984"/>
-            <a:ext cx="417576" cy="256032"/>
+            <a:off x="8491728" y="4443984"/>
+            <a:ext cx="813816" cy="256032"/>
           </a:xfrm>
           <a:prstGeom prst="roundRect">
             <a:avLst>
@@ -21641,8 +21924,8 @@
         </p:nvSpPr>
         <p:spPr>
           <a:xfrm>
-            <a:off x="8425688" y="4443984"/>
-            <a:ext cx="417576" cy="256032"/>
+            <a:off x="8491728" y="4443984"/>
+            <a:ext cx="813816" cy="256032"/>
           </a:xfrm>
           <a:prstGeom prst="rect">
             <a:avLst/>
@@ -21666,7 +21949,7 @@
                 <a:ea typeface="Calibri" pitchFamily="34" charset="-122"/>
                 <a:cs typeface="Calibri" pitchFamily="34" charset="-120"/>
               </a:rPr>
-              <a:t>new</a:t>
+              <a:t>uninstall</a:t>
             </a:r>
             <a:endParaRPr lang="en-US" sz="1000" dirty="0"/>
           </a:p>
@@ -21680,8 +21963,8 @@
         </p:nvSpPr>
         <p:spPr>
           <a:xfrm>
-            <a:off x="8934704" y="4443984"/>
-            <a:ext cx="1011936" cy="256032"/>
+            <a:off x="9396984" y="4443984"/>
+            <a:ext cx="417576" cy="256032"/>
           </a:xfrm>
           <a:prstGeom prst="roundRect">
             <a:avLst>
@@ -21707,8 +21990,8 @@
         </p:nvSpPr>
         <p:spPr>
           <a:xfrm>
-            <a:off x="8934704" y="4443984"/>
-            <a:ext cx="1011936" cy="256032"/>
+            <a:off x="9396984" y="4443984"/>
+            <a:ext cx="417576" cy="256032"/>
           </a:xfrm>
           <a:prstGeom prst="rect">
             <a:avLst/>
@@ -21732,7 +22015,7 @@
                 <a:ea typeface="Calibri" pitchFamily="34" charset="-122"/>
                 <a:cs typeface="Calibri" pitchFamily="34" charset="-120"/>
               </a:rPr>
-              <a:t>explore list</a:t>
+              <a:t>new</a:t>
             </a:r>
             <a:endParaRPr lang="en-US" sz="1000" dirty="0"/>
           </a:p>
@@ -21746,8 +22029,8 @@
         </p:nvSpPr>
         <p:spPr>
           <a:xfrm>
-            <a:off x="10038080" y="4443984"/>
-            <a:ext cx="945896" cy="256032"/>
+            <a:off x="9906000" y="4443984"/>
+            <a:ext cx="1011936" cy="256032"/>
           </a:xfrm>
           <a:prstGeom prst="roundRect">
             <a:avLst>
@@ -21773,8 +22056,8 @@
         </p:nvSpPr>
         <p:spPr>
           <a:xfrm>
-            <a:off x="10038080" y="4443984"/>
-            <a:ext cx="945896" cy="256032"/>
+            <a:off x="9906000" y="4443984"/>
+            <a:ext cx="1011936" cy="256032"/>
           </a:xfrm>
           <a:prstGeom prst="rect">
             <a:avLst/>
@@ -21798,7 +22081,7 @@
                 <a:ea typeface="Calibri" pitchFamily="34" charset="-122"/>
                 <a:cs typeface="Calibri" pitchFamily="34" charset="-120"/>
               </a:rPr>
-              <a:t>import bmad</a:t>
+              <a:t>explore list</a:t>
             </a:r>
             <a:endParaRPr lang="en-US" sz="1000" dirty="0"/>
           </a:p>
@@ -21812,8 +22095,8 @@
         </p:nvSpPr>
         <p:spPr>
           <a:xfrm>
-            <a:off x="11075416" y="4443984"/>
-            <a:ext cx="615696" cy="256032"/>
+            <a:off x="457200" y="4791456"/>
+            <a:ext cx="945896" cy="256032"/>
           </a:xfrm>
           <a:prstGeom prst="roundRect">
             <a:avLst>
@@ -21839,8 +22122,8 @@
         </p:nvSpPr>
         <p:spPr>
           <a:xfrm>
-            <a:off x="11075416" y="4443984"/>
-            <a:ext cx="615696" cy="256032"/>
+            <a:off x="457200" y="4791456"/>
+            <a:ext cx="945896" cy="256032"/>
           </a:xfrm>
           <a:prstGeom prst="rect">
             <a:avLst/>
@@ -21864,7 +22147,7 @@
                 <a:ea typeface="Calibri" pitchFamily="34" charset="-122"/>
                 <a:cs typeface="Calibri" pitchFamily="34" charset="-120"/>
               </a:rPr>
-              <a:t>status</a:t>
+              <a:t>import bmad</a:t>
             </a:r>
             <a:endParaRPr lang="en-US" sz="1000" dirty="0"/>
           </a:p>
@@ -21878,8 +22161,8 @@
         </p:nvSpPr>
         <p:spPr>
           <a:xfrm>
-            <a:off x="457200" y="4791456"/>
-            <a:ext cx="681736" cy="256032"/>
+            <a:off x="1494536" y="4791456"/>
+            <a:ext cx="615696" cy="256032"/>
           </a:xfrm>
           <a:prstGeom prst="roundRect">
             <a:avLst>
@@ -21905,8 +22188,8 @@
         </p:nvSpPr>
         <p:spPr>
           <a:xfrm>
-            <a:off x="457200" y="4791456"/>
-            <a:ext cx="681736" cy="256032"/>
+            <a:off x="1494536" y="4791456"/>
+            <a:ext cx="615696" cy="256032"/>
           </a:xfrm>
           <a:prstGeom prst="rect">
             <a:avLst/>
@@ -21930,7 +22213,7 @@
                 <a:ea typeface="Calibri" pitchFamily="34" charset="-122"/>
                 <a:cs typeface="Calibri" pitchFamily="34" charset="-120"/>
               </a:rPr>
-              <a:t>explain</a:t>
+              <a:t>status</a:t>
             </a:r>
             <a:endParaRPr lang="en-US" sz="1000" dirty="0"/>
           </a:p>
@@ -21944,8 +22227,8 @@
         </p:nvSpPr>
         <p:spPr>
           <a:xfrm>
-            <a:off x="1230376" y="4791456"/>
-            <a:ext cx="483616" cy="256032"/>
+            <a:off x="2201672" y="4791456"/>
+            <a:ext cx="681736" cy="256032"/>
           </a:xfrm>
           <a:prstGeom prst="roundRect">
             <a:avLst>
@@ -21971,8 +22254,8 @@
         </p:nvSpPr>
         <p:spPr>
           <a:xfrm>
-            <a:off x="1230376" y="4791456"/>
-            <a:ext cx="483616" cy="256032"/>
+            <a:off x="2201672" y="4791456"/>
+            <a:ext cx="681736" cy="256032"/>
           </a:xfrm>
           <a:prstGeom prst="rect">
             <a:avLst/>
@@ -21996,7 +22279,7 @@
                 <a:ea typeface="Calibri" pitchFamily="34" charset="-122"/>
                 <a:cs typeface="Calibri" pitchFamily="34" charset="-120"/>
               </a:rPr>
-              <a:t>help</a:t>
+              <a:t>explain</a:t>
             </a:r>
             <a:endParaRPr lang="en-US" sz="1000" dirty="0"/>
           </a:p>
@@ -22010,8 +22293,8 @@
         </p:nvSpPr>
         <p:spPr>
           <a:xfrm>
-            <a:off x="1805432" y="4791456"/>
-            <a:ext cx="549656" cy="256032"/>
+            <a:off x="2974848" y="4791456"/>
+            <a:ext cx="483616" cy="256032"/>
           </a:xfrm>
           <a:prstGeom prst="roundRect">
             <a:avLst>
@@ -22037,8 +22320,8 @@
         </p:nvSpPr>
         <p:spPr>
           <a:xfrm>
-            <a:off x="1805432" y="4791456"/>
-            <a:ext cx="549656" cy="256032"/>
+            <a:off x="2974848" y="4791456"/>
+            <a:ext cx="483616" cy="256032"/>
           </a:xfrm>
           <a:prstGeom prst="rect">
             <a:avLst/>
@@ -22062,7 +22345,7 @@
                 <a:ea typeface="Calibri" pitchFamily="34" charset="-122"/>
                 <a:cs typeface="Calibri" pitchFamily="34" charset="-120"/>
               </a:rPr>
-              <a:t>guide</a:t>
+              <a:t>help</a:t>
             </a:r>
             <a:endParaRPr lang="en-US" sz="1000" dirty="0"/>
           </a:p>
@@ -22076,8 +22359,8 @@
         </p:nvSpPr>
         <p:spPr>
           <a:xfrm>
-            <a:off x="2446528" y="4791456"/>
-            <a:ext cx="879856" cy="256032"/>
+            <a:off x="3549904" y="4791456"/>
+            <a:ext cx="549656" cy="256032"/>
           </a:xfrm>
           <a:prstGeom prst="roundRect">
             <a:avLst>
@@ -22103,8 +22386,8 @@
         </p:nvSpPr>
         <p:spPr>
           <a:xfrm>
-            <a:off x="2446528" y="4791456"/>
-            <a:ext cx="879856" cy="256032"/>
+            <a:off x="3549904" y="4791456"/>
+            <a:ext cx="549656" cy="256032"/>
           </a:xfrm>
           <a:prstGeom prst="rect">
             <a:avLst/>
@@ -22128,7 +22411,7 @@
                 <a:ea typeface="Calibri" pitchFamily="34" charset="-122"/>
                 <a:cs typeface="Calibri" pitchFamily="34" charset="-120"/>
               </a:rPr>
-              <a:t>statusline</a:t>
+              <a:t>guide</a:t>
             </a:r>
             <a:endParaRPr lang="en-US" sz="1000" dirty="0"/>
           </a:p>
@@ -22142,8 +22425,8 @@
         </p:nvSpPr>
         <p:spPr>
           <a:xfrm>
-            <a:off x="3417824" y="4791456"/>
-            <a:ext cx="813816" cy="256032"/>
+            <a:off x="4191000" y="4791456"/>
+            <a:ext cx="879856" cy="256032"/>
           </a:xfrm>
           <a:prstGeom prst="roundRect">
             <a:avLst>
@@ -22169,8 +22452,8 @@
         </p:nvSpPr>
         <p:spPr>
           <a:xfrm>
-            <a:off x="3417824" y="4791456"/>
-            <a:ext cx="813816" cy="256032"/>
+            <a:off x="4191000" y="4791456"/>
+            <a:ext cx="879856" cy="256032"/>
           </a:xfrm>
           <a:prstGeom prst="rect">
             <a:avLst/>
@@ -22194,7 +22477,7 @@
                 <a:ea typeface="Calibri" pitchFamily="34" charset="-122"/>
                 <a:cs typeface="Calibri" pitchFamily="34" charset="-120"/>
               </a:rPr>
-              <a:t>mcp serve</a:t>
+              <a:t>statusline</a:t>
             </a:r>
             <a:endParaRPr lang="en-US" sz="1000" dirty="0"/>
           </a:p>
@@ -22208,8 +22491,8 @@
         </p:nvSpPr>
         <p:spPr>
           <a:xfrm>
-            <a:off x="4323080" y="4791456"/>
-            <a:ext cx="813816" cy="256032"/>
+            <a:off x="5162296" y="4791456"/>
+            <a:ext cx="1011936" cy="256032"/>
           </a:xfrm>
           <a:prstGeom prst="roundRect">
             <a:avLst>
@@ -22235,8 +22518,8 @@
         </p:nvSpPr>
         <p:spPr>
           <a:xfrm>
-            <a:off x="4323080" y="4791456"/>
-            <a:ext cx="813816" cy="256032"/>
+            <a:off x="5162296" y="4791456"/>
+            <a:ext cx="1011936" cy="256032"/>
           </a:xfrm>
           <a:prstGeom prst="rect">
             <a:avLst/>
@@ -22260,7 +22543,7 @@
                 <a:ea typeface="Calibri" pitchFamily="34" charset="-122"/>
                 <a:cs typeface="Calibri" pitchFamily="34" charset="-120"/>
               </a:rPr>
-              <a:t>mcp check</a:t>
+              <a:t>context pull</a:t>
             </a:r>
             <a:endParaRPr lang="en-US" sz="1000" dirty="0"/>
           </a:p>
@@ -22274,8 +22557,8 @@
         </p:nvSpPr>
         <p:spPr>
           <a:xfrm>
-            <a:off x="5228336" y="4791456"/>
-            <a:ext cx="879856" cy="256032"/>
+            <a:off x="6265672" y="4791456"/>
+            <a:ext cx="813816" cy="256032"/>
           </a:xfrm>
           <a:prstGeom prst="roundRect">
             <a:avLst>
@@ -22301,8 +22584,8 @@
         </p:nvSpPr>
         <p:spPr>
           <a:xfrm>
-            <a:off x="5228336" y="4791456"/>
-            <a:ext cx="879856" cy="256032"/>
+            <a:off x="6265672" y="4791456"/>
+            <a:ext cx="813816" cy="256032"/>
           </a:xfrm>
           <a:prstGeom prst="rect">
             <a:avLst/>
@@ -22326,7 +22609,7 @@
                 <a:ea typeface="Calibri" pitchFamily="34" charset="-122"/>
                 <a:cs typeface="Calibri" pitchFamily="34" charset="-120"/>
               </a:rPr>
-              <a:t>inbox list</a:t>
+              <a:t>mcp serve</a:t>
             </a:r>
             <a:endParaRPr lang="en-US" sz="1000" dirty="0"/>
           </a:p>
@@ -22340,8 +22623,8 @@
         </p:nvSpPr>
         <p:spPr>
           <a:xfrm>
-            <a:off x="6199632" y="4791456"/>
-            <a:ext cx="879856" cy="256032"/>
+            <a:off x="7170928" y="4791456"/>
+            <a:ext cx="813816" cy="256032"/>
           </a:xfrm>
           <a:prstGeom prst="roundRect">
             <a:avLst>
@@ -22367,8 +22650,8 @@
         </p:nvSpPr>
         <p:spPr>
           <a:xfrm>
-            <a:off x="6199632" y="4791456"/>
-            <a:ext cx="879856" cy="256032"/>
+            <a:off x="7170928" y="4791456"/>
+            <a:ext cx="813816" cy="256032"/>
           </a:xfrm>
           <a:prstGeom prst="rect">
             <a:avLst/>
@@ -22392,7 +22675,7 @@
                 <a:ea typeface="Calibri" pitchFamily="34" charset="-122"/>
                 <a:cs typeface="Calibri" pitchFamily="34" charset="-120"/>
               </a:rPr>
-              <a:t>inbox done</a:t>
+              <a:t>mcp check</a:t>
             </a:r>
             <a:endParaRPr lang="en-US" sz="1000" dirty="0"/>
           </a:p>
@@ -22406,8 +22689,8 @@
         </p:nvSpPr>
         <p:spPr>
           <a:xfrm>
-            <a:off x="7170928" y="4791456"/>
-            <a:ext cx="945896" cy="256032"/>
+            <a:off x="8076184" y="4791456"/>
+            <a:ext cx="879856" cy="256032"/>
           </a:xfrm>
           <a:prstGeom prst="roundRect">
             <a:avLst>
@@ -22433,8 +22716,8 @@
         </p:nvSpPr>
         <p:spPr>
           <a:xfrm>
-            <a:off x="7170928" y="4791456"/>
-            <a:ext cx="945896" cy="256032"/>
+            <a:off x="8076184" y="4791456"/>
+            <a:ext cx="879856" cy="256032"/>
           </a:xfrm>
           <a:prstGeom prst="rect">
             <a:avLst/>
@@ -22458,7 +22741,7 @@
                 <a:ea typeface="Calibri" pitchFamily="34" charset="-122"/>
                 <a:cs typeface="Calibri" pitchFamily="34" charset="-120"/>
               </a:rPr>
-              <a:t>events list</a:t>
+              <a:t>inbox list</a:t>
             </a:r>
             <a:endParaRPr lang="en-US" sz="1000" dirty="0"/>
           </a:p>
@@ -22472,8 +22755,8 @@
         </p:nvSpPr>
         <p:spPr>
           <a:xfrm>
-            <a:off x="8208264" y="4791456"/>
-            <a:ext cx="1011936" cy="256032"/>
+            <a:off x="9047480" y="4791456"/>
+            <a:ext cx="879856" cy="256032"/>
           </a:xfrm>
           <a:prstGeom prst="roundRect">
             <a:avLst>
@@ -22499,8 +22782,8 @@
         </p:nvSpPr>
         <p:spPr>
           <a:xfrm>
-            <a:off x="8208264" y="4791456"/>
-            <a:ext cx="1011936" cy="256032"/>
+            <a:off x="9047480" y="4791456"/>
+            <a:ext cx="879856" cy="256032"/>
           </a:xfrm>
           <a:prstGeom prst="rect">
             <a:avLst/>
@@ -22524,7 +22807,7 @@
                 <a:ea typeface="Calibri" pitchFamily="34" charset="-122"/>
                 <a:cs typeface="Calibri" pitchFamily="34" charset="-120"/>
               </a:rPr>
-              <a:t>events flush</a:t>
+              <a:t>inbox done</a:t>
             </a:r>
             <a:endParaRPr lang="en-US" sz="1000" dirty="0"/>
           </a:p>
@@ -22538,8 +22821,8 @@
         </p:nvSpPr>
         <p:spPr>
           <a:xfrm>
-            <a:off x="9311640" y="4791456"/>
-            <a:ext cx="1077976" cy="256032"/>
+            <a:off x="10018776" y="4791456"/>
+            <a:ext cx="945896" cy="256032"/>
           </a:xfrm>
           <a:prstGeom prst="roundRect">
             <a:avLst>
@@ -22565,8 +22848,8 @@
         </p:nvSpPr>
         <p:spPr>
           <a:xfrm>
-            <a:off x="9311640" y="4791456"/>
-            <a:ext cx="1077976" cy="256032"/>
+            <a:off x="10018776" y="4791456"/>
+            <a:ext cx="945896" cy="256032"/>
           </a:xfrm>
           <a:prstGeom prst="rect">
             <a:avLst/>
@@ -22590,7 +22873,7 @@
                 <a:ea typeface="Calibri" pitchFamily="34" charset="-122"/>
                 <a:cs typeface="Calibri" pitchFamily="34" charset="-120"/>
               </a:rPr>
-              <a:t>release check</a:t>
+              <a:t>events list</a:t>
             </a:r>
             <a:endParaRPr lang="en-US" sz="1000" dirty="0"/>
           </a:p>
@@ -22604,8 +22887,8 @@
         </p:nvSpPr>
         <p:spPr>
           <a:xfrm>
-            <a:off x="10481056" y="4791456"/>
-            <a:ext cx="813816" cy="256032"/>
+            <a:off x="457200" y="5138928"/>
+            <a:ext cx="1011936" cy="256032"/>
           </a:xfrm>
           <a:prstGeom prst="roundRect">
             <a:avLst>
@@ -22631,8 +22914,8 @@
         </p:nvSpPr>
         <p:spPr>
           <a:xfrm>
-            <a:off x="10481056" y="4791456"/>
-            <a:ext cx="813816" cy="256032"/>
+            <a:off x="457200" y="5138928"/>
+            <a:ext cx="1011936" cy="256032"/>
           </a:xfrm>
           <a:prstGeom prst="rect">
             <a:avLst/>
@@ -22656,7 +22939,7 @@
                 <a:ea typeface="Calibri" pitchFamily="34" charset="-122"/>
                 <a:cs typeface="Calibri" pitchFamily="34" charset="-120"/>
               </a:rPr>
-              <a:t>track set</a:t>
+              <a:t>events flush</a:t>
             </a:r>
             <a:endParaRPr lang="en-US" sz="1000" dirty="0"/>
           </a:p>
@@ -22670,8 +22953,8 @@
         </p:nvSpPr>
         <p:spPr>
           <a:xfrm>
-            <a:off x="457200" y="5138928"/>
-            <a:ext cx="483616" cy="256032"/>
+            <a:off x="1560576" y="5138928"/>
+            <a:ext cx="1144016" cy="256032"/>
           </a:xfrm>
           <a:prstGeom prst="roundRect">
             <a:avLst>
@@ -22697,8 +22980,8 @@
         </p:nvSpPr>
         <p:spPr>
           <a:xfrm>
-            <a:off x="457200" y="5138928"/>
-            <a:ext cx="483616" cy="256032"/>
+            <a:off x="1560576" y="5138928"/>
+            <a:ext cx="1144016" cy="256032"/>
           </a:xfrm>
           <a:prstGeom prst="rect">
             <a:avLst/>
@@ -22722,7 +23005,7 @@
                 <a:ea typeface="Calibri" pitchFamily="34" charset="-122"/>
                 <a:cs typeface="Calibri" pitchFamily="34" charset="-120"/>
               </a:rPr>
-              <a:t>next</a:t>
+              <a:t>events summary</a:t>
             </a:r>
             <a:endParaRPr lang="en-US" sz="1000" dirty="0"/>
           </a:p>
@@ -22736,8 +23019,8 @@
         </p:nvSpPr>
         <p:spPr>
           <a:xfrm>
-            <a:off x="1032256" y="5138928"/>
-            <a:ext cx="1011936" cy="256032"/>
+            <a:off x="2796032" y="5138928"/>
+            <a:ext cx="1077976" cy="256032"/>
           </a:xfrm>
           <a:prstGeom prst="roundRect">
             <a:avLst>
@@ -22763,8 +23046,8 @@
         </p:nvSpPr>
         <p:spPr>
           <a:xfrm>
-            <a:off x="1032256" y="5138928"/>
-            <a:ext cx="1011936" cy="256032"/>
+            <a:off x="2796032" y="5138928"/>
+            <a:ext cx="1077976" cy="256032"/>
           </a:xfrm>
           <a:prstGeom prst="rect">
             <a:avLst/>
@@ -22788,7 +23071,7 @@
                 <a:ea typeface="Calibri" pitchFamily="34" charset="-122"/>
                 <a:cs typeface="Calibri" pitchFamily="34" charset="-120"/>
               </a:rPr>
-              <a:t>instructions</a:t>
+              <a:t>triage intake</a:t>
             </a:r>
             <a:endParaRPr lang="en-US" sz="1000" dirty="0"/>
           </a:p>
@@ -22802,8 +23085,8 @@
         </p:nvSpPr>
         <p:spPr>
           <a:xfrm>
-            <a:off x="2135632" y="5138928"/>
-            <a:ext cx="681736" cy="256032"/>
+            <a:off x="3965448" y="5138928"/>
+            <a:ext cx="1077976" cy="256032"/>
           </a:xfrm>
           <a:prstGeom prst="roundRect">
             <a:avLst>
@@ -22829,8 +23112,8 @@
         </p:nvSpPr>
         <p:spPr>
           <a:xfrm>
-            <a:off x="2135632" y="5138928"/>
-            <a:ext cx="681736" cy="256032"/>
+            <a:off x="3965448" y="5138928"/>
+            <a:ext cx="1077976" cy="256032"/>
           </a:xfrm>
           <a:prstGeom prst="rect">
             <a:avLst/>
@@ -22854,7 +23137,7 @@
                 <a:ea typeface="Calibri" pitchFamily="34" charset="-122"/>
                 <a:cs typeface="Calibri" pitchFamily="34" charset="-120"/>
               </a:rPr>
-              <a:t>approve</a:t>
+              <a:t>release check</a:t>
             </a:r>
             <a:endParaRPr lang="en-US" sz="1000" dirty="0"/>
           </a:p>
@@ -22868,8 +23151,8 @@
         </p:nvSpPr>
         <p:spPr>
           <a:xfrm>
-            <a:off x="2908808" y="5138928"/>
-            <a:ext cx="615696" cy="256032"/>
+            <a:off x="5134864" y="5138928"/>
+            <a:ext cx="813816" cy="256032"/>
           </a:xfrm>
           <a:prstGeom prst="roundRect">
             <a:avLst>
@@ -22895,8 +23178,8 @@
         </p:nvSpPr>
         <p:spPr>
           <a:xfrm>
-            <a:off x="2908808" y="5138928"/>
-            <a:ext cx="615696" cy="256032"/>
+            <a:off x="5134864" y="5138928"/>
+            <a:ext cx="813816" cy="256032"/>
           </a:xfrm>
           <a:prstGeom prst="rect">
             <a:avLst/>
@@ -22920,7 +23203,7 @@
                 <a:ea typeface="Calibri" pitchFamily="34" charset="-122"/>
                 <a:cs typeface="Calibri" pitchFamily="34" charset="-120"/>
               </a:rPr>
-              <a:t>reject</a:t>
+              <a:t>track set</a:t>
             </a:r>
             <a:endParaRPr lang="en-US" sz="1000" dirty="0"/>
           </a:p>
@@ -22934,8 +23217,8 @@
         </p:nvSpPr>
         <p:spPr>
           <a:xfrm>
-            <a:off x="3615944" y="5138928"/>
-            <a:ext cx="549656" cy="256032"/>
+            <a:off x="6040120" y="5138928"/>
+            <a:ext cx="483616" cy="256032"/>
           </a:xfrm>
           <a:prstGeom prst="roundRect">
             <a:avLst>
@@ -22961,8 +23244,8 @@
         </p:nvSpPr>
         <p:spPr>
           <a:xfrm>
-            <a:off x="3615944" y="5138928"/>
-            <a:ext cx="549656" cy="256032"/>
+            <a:off x="6040120" y="5138928"/>
+            <a:ext cx="483616" cy="256032"/>
           </a:xfrm>
           <a:prstGeom prst="rect">
             <a:avLst/>
@@ -22986,7 +23269,7 @@
                 <a:ea typeface="Calibri" pitchFamily="34" charset="-122"/>
                 <a:cs typeface="Calibri" pitchFamily="34" charset="-120"/>
               </a:rPr>
-              <a:t>waive</a:t>
+              <a:t>next</a:t>
             </a:r>
             <a:endParaRPr lang="en-US" sz="1000" dirty="0"/>
           </a:p>
@@ -23000,8 +23283,8 @@
         </p:nvSpPr>
         <p:spPr>
           <a:xfrm>
-            <a:off x="4257040" y="5138928"/>
-            <a:ext cx="615696" cy="256032"/>
+            <a:off x="6615176" y="5138928"/>
+            <a:ext cx="1011936" cy="256032"/>
           </a:xfrm>
           <a:prstGeom prst="roundRect">
             <a:avLst>
@@ -23027,8 +23310,8 @@
         </p:nvSpPr>
         <p:spPr>
           <a:xfrm>
-            <a:off x="4257040" y="5138928"/>
-            <a:ext cx="615696" cy="256032"/>
+            <a:off x="6615176" y="5138928"/>
+            <a:ext cx="1011936" cy="256032"/>
           </a:xfrm>
           <a:prstGeom prst="rect">
             <a:avLst/>
@@ -23052,7 +23335,7 @@
                 <a:ea typeface="Calibri" pitchFamily="34" charset="-122"/>
                 <a:cs typeface="Calibri" pitchFamily="34" charset="-120"/>
               </a:rPr>
-              <a:t>answer</a:t>
+              <a:t>instructions</a:t>
             </a:r>
             <a:endParaRPr lang="en-US" sz="1000" dirty="0"/>
           </a:p>
@@ -23066,8 +23349,8 @@
         </p:nvSpPr>
         <p:spPr>
           <a:xfrm>
-            <a:off x="4964176" y="5138928"/>
-            <a:ext cx="747776" cy="256032"/>
+            <a:off x="7718552" y="5138928"/>
+            <a:ext cx="681736" cy="256032"/>
           </a:xfrm>
           <a:prstGeom prst="roundRect">
             <a:avLst>
@@ -23093,8 +23376,8 @@
         </p:nvSpPr>
         <p:spPr>
           <a:xfrm>
-            <a:off x="4964176" y="5138928"/>
-            <a:ext cx="747776" cy="256032"/>
+            <a:off x="7718552" y="5138928"/>
+            <a:ext cx="681736" cy="256032"/>
           </a:xfrm>
           <a:prstGeom prst="rect">
             <a:avLst/>
@@ -23118,7 +23401,7 @@
                 <a:ea typeface="Calibri" pitchFamily="34" charset="-122"/>
                 <a:cs typeface="Calibri" pitchFamily="34" charset="-120"/>
               </a:rPr>
-              <a:t>takeover</a:t>
+              <a:t>approve</a:t>
             </a:r>
             <a:endParaRPr lang="en-US" sz="1000" dirty="0"/>
           </a:p>
@@ -23132,8 +23415,8 @@
         </p:nvSpPr>
         <p:spPr>
           <a:xfrm>
-            <a:off x="5803392" y="5138928"/>
-            <a:ext cx="1210056" cy="256032"/>
+            <a:off x="8491728" y="5138928"/>
+            <a:ext cx="615696" cy="256032"/>
           </a:xfrm>
           <a:prstGeom prst="roundRect">
             <a:avLst>
@@ -23159,8 +23442,8 @@
         </p:nvSpPr>
         <p:spPr>
           <a:xfrm>
-            <a:off x="5803392" y="5138928"/>
-            <a:ext cx="1210056" cy="256032"/>
+            <a:off x="8491728" y="5138928"/>
+            <a:ext cx="615696" cy="256032"/>
           </a:xfrm>
           <a:prstGeom prst="rect">
             <a:avLst/>
@@ -23184,7 +23467,7 @@
                 <a:ea typeface="Calibri" pitchFamily="34" charset="-122"/>
                 <a:cs typeface="Calibri" pitchFamily="34" charset="-120"/>
               </a:rPr>
-              <a:t>release-control</a:t>
+              <a:t>reject</a:t>
             </a:r>
             <a:endParaRPr lang="en-US" sz="1000" dirty="0"/>
           </a:p>
@@ -23198,8 +23481,8 @@
         </p:nvSpPr>
         <p:spPr>
           <a:xfrm>
-            <a:off x="7104888" y="5138928"/>
-            <a:ext cx="615696" cy="256032"/>
+            <a:off x="9198864" y="5138928"/>
+            <a:ext cx="549656" cy="256032"/>
           </a:xfrm>
           <a:prstGeom prst="roundRect">
             <a:avLst>
@@ -23225,8 +23508,8 @@
         </p:nvSpPr>
         <p:spPr>
           <a:xfrm>
-            <a:off x="7104888" y="5138928"/>
-            <a:ext cx="615696" cy="256032"/>
+            <a:off x="9198864" y="5138928"/>
+            <a:ext cx="549656" cy="256032"/>
           </a:xfrm>
           <a:prstGeom prst="rect">
             <a:avLst/>
@@ -23250,7 +23533,7 @@
                 <a:ea typeface="Calibri" pitchFamily="34" charset="-122"/>
                 <a:cs typeface="Calibri" pitchFamily="34" charset="-120"/>
               </a:rPr>
-              <a:t>rework</a:t>
+              <a:t>waive</a:t>
             </a:r>
             <a:endParaRPr lang="en-US" sz="1000" dirty="0"/>
           </a:p>
@@ -23264,8 +23547,8 @@
         </p:nvSpPr>
         <p:spPr>
           <a:xfrm>
-            <a:off x="7812024" y="5138928"/>
-            <a:ext cx="1276096" cy="256032"/>
+            <a:off x="9839960" y="5138928"/>
+            <a:ext cx="615696" cy="256032"/>
           </a:xfrm>
           <a:prstGeom prst="roundRect">
             <a:avLst>
@@ -23291,8 +23574,8 @@
         </p:nvSpPr>
         <p:spPr>
           <a:xfrm>
-            <a:off x="7812024" y="5138928"/>
-            <a:ext cx="1276096" cy="256032"/>
+            <a:off x="9839960" y="5138928"/>
+            <a:ext cx="615696" cy="256032"/>
           </a:xfrm>
           <a:prstGeom prst="rect">
             <a:avLst/>
@@ -23316,7 +23599,7 @@
                 <a:ea typeface="Calibri" pitchFamily="34" charset="-122"/>
                 <a:cs typeface="Calibri" pitchFamily="34" charset="-120"/>
               </a:rPr>
-              <a:t>approvals verify</a:t>
+              <a:t>answer</a:t>
             </a:r>
             <a:endParaRPr lang="en-US" sz="1000" dirty="0"/>
           </a:p>
@@ -23330,8 +23613,8 @@
         </p:nvSpPr>
         <p:spPr>
           <a:xfrm>
-            <a:off x="9179560" y="5138928"/>
-            <a:ext cx="549656" cy="256032"/>
+            <a:off x="10547096" y="5138928"/>
+            <a:ext cx="747776" cy="256032"/>
           </a:xfrm>
           <a:prstGeom prst="roundRect">
             <a:avLst>
@@ -23357,8 +23640,8 @@
         </p:nvSpPr>
         <p:spPr>
           <a:xfrm>
-            <a:off x="9179560" y="5138928"/>
-            <a:ext cx="549656" cy="256032"/>
+            <a:off x="10547096" y="5138928"/>
+            <a:ext cx="747776" cy="256032"/>
           </a:xfrm>
           <a:prstGeom prst="rect">
             <a:avLst/>
@@ -23382,7 +23665,7 @@
                 <a:ea typeface="Calibri" pitchFamily="34" charset="-122"/>
                 <a:cs typeface="Calibri" pitchFamily="34" charset="-120"/>
               </a:rPr>
-              <a:t>tests</a:t>
+              <a:t>takeover</a:t>
             </a:r>
             <a:endParaRPr lang="en-US" sz="1000" dirty="0"/>
           </a:p>
@@ -23396,8 +23679,8 @@
         </p:nvSpPr>
         <p:spPr>
           <a:xfrm>
-            <a:off x="9820656" y="5138928"/>
-            <a:ext cx="615696" cy="256032"/>
+            <a:off x="457200" y="5486400"/>
+            <a:ext cx="1210056" cy="256032"/>
           </a:xfrm>
           <a:prstGeom prst="roundRect">
             <a:avLst>
@@ -23423,8 +23706,8 @@
         </p:nvSpPr>
         <p:spPr>
           <a:xfrm>
-            <a:off x="9820656" y="5138928"/>
-            <a:ext cx="615696" cy="256032"/>
+            <a:off x="457200" y="5486400"/>
+            <a:ext cx="1210056" cy="256032"/>
           </a:xfrm>
           <a:prstGeom prst="rect">
             <a:avLst/>
@@ -23448,7 +23731,7 @@
                 <a:ea typeface="Calibri" pitchFamily="34" charset="-122"/>
                 <a:cs typeface="Calibri" pitchFamily="34" charset="-120"/>
               </a:rPr>
-              <a:t>verify</a:t>
+              <a:t>release-control</a:t>
             </a:r>
             <a:endParaRPr lang="en-US" sz="1000" dirty="0"/>
           </a:p>
@@ -23462,7 +23745,7 @@
         </p:nvSpPr>
         <p:spPr>
           <a:xfrm>
-            <a:off x="10527792" y="5138928"/>
+            <a:off x="1758696" y="5486400"/>
             <a:ext cx="615696" cy="256032"/>
           </a:xfrm>
           <a:prstGeom prst="roundRect">
@@ -23489,7 +23772,7 @@
         </p:nvSpPr>
         <p:spPr>
           <a:xfrm>
-            <a:off x="10527792" y="5138928"/>
+            <a:off x="1758696" y="5486400"/>
             <a:ext cx="615696" cy="256032"/>
           </a:xfrm>
           <a:prstGeom prst="rect">
@@ -23514,7 +23797,7 @@
                 <a:ea typeface="Calibri" pitchFamily="34" charset="-122"/>
                 <a:cs typeface="Calibri" pitchFamily="34" charset="-120"/>
               </a:rPr>
-              <a:t>review</a:t>
+              <a:t>rework</a:t>
             </a:r>
             <a:endParaRPr lang="en-US" sz="1000" dirty="0"/>
           </a:p>
@@ -23528,8 +23811,8 @@
         </p:nvSpPr>
         <p:spPr>
           <a:xfrm>
-            <a:off x="457200" y="5486400"/>
-            <a:ext cx="747776" cy="256032"/>
+            <a:off x="2465832" y="5486400"/>
+            <a:ext cx="1276096" cy="256032"/>
           </a:xfrm>
           <a:prstGeom prst="roundRect">
             <a:avLst>
@@ -23555,8 +23838,8 @@
         </p:nvSpPr>
         <p:spPr>
           <a:xfrm>
-            <a:off x="457200" y="5486400"/>
-            <a:ext cx="747776" cy="256032"/>
+            <a:off x="2465832" y="5486400"/>
+            <a:ext cx="1276096" cy="256032"/>
           </a:xfrm>
           <a:prstGeom prst="rect">
             <a:avLst/>
@@ -23580,7 +23863,7 @@
                 <a:ea typeface="Calibri" pitchFamily="34" charset="-122"/>
                 <a:cs typeface="Calibri" pitchFamily="34" charset="-120"/>
               </a:rPr>
-              <a:t>validate</a:t>
+              <a:t>approvals verify</a:t>
             </a:r>
             <a:endParaRPr lang="en-US" sz="1000" dirty="0"/>
           </a:p>
@@ -23594,8 +23877,8 @@
         </p:nvSpPr>
         <p:spPr>
           <a:xfrm>
-            <a:off x="1296416" y="5486400"/>
-            <a:ext cx="681736" cy="256032"/>
+            <a:off x="3833368" y="5486400"/>
+            <a:ext cx="549656" cy="256032"/>
           </a:xfrm>
           <a:prstGeom prst="roundRect">
             <a:avLst>
@@ -23621,8 +23904,8 @@
         </p:nvSpPr>
         <p:spPr>
           <a:xfrm>
-            <a:off x="1296416" y="5486400"/>
-            <a:ext cx="681736" cy="256032"/>
+            <a:off x="3833368" y="5486400"/>
+            <a:ext cx="549656" cy="256032"/>
           </a:xfrm>
           <a:prstGeom prst="rect">
             <a:avLst/>
@@ -23646,7 +23929,7 @@
                 <a:ea typeface="Calibri" pitchFamily="34" charset="-122"/>
                 <a:cs typeface="Calibri" pitchFamily="34" charset="-120"/>
               </a:rPr>
-              <a:t>archive</a:t>
+              <a:t>tests</a:t>
             </a:r>
             <a:endParaRPr lang="en-US" sz="1000" dirty="0"/>
           </a:p>
@@ -23660,8 +23943,8 @@
         </p:nvSpPr>
         <p:spPr>
           <a:xfrm>
-            <a:off x="2069592" y="5486400"/>
-            <a:ext cx="549656" cy="256032"/>
+            <a:off x="4474464" y="5486400"/>
+            <a:ext cx="945896" cy="256032"/>
           </a:xfrm>
           <a:prstGeom prst="roundRect">
             <a:avLst>
@@ -23687,8 +23970,8 @@
         </p:nvSpPr>
         <p:spPr>
           <a:xfrm>
-            <a:off x="2069592" y="5486400"/>
-            <a:ext cx="549656" cy="256032"/>
+            <a:off x="4474464" y="5486400"/>
+            <a:ext cx="945896" cy="256032"/>
           </a:xfrm>
           <a:prstGeom prst="rect">
             <a:avLst/>
@@ -23712,7 +23995,7 @@
                 <a:ea typeface="Calibri" pitchFamily="34" charset="-122"/>
                 <a:cs typeface="Calibri" pitchFamily="34" charset="-120"/>
               </a:rPr>
-              <a:t>audit</a:t>
+              <a:t>task export</a:t>
             </a:r>
             <a:endParaRPr lang="en-US" sz="1000" dirty="0"/>
           </a:p>
@@ -23726,8 +24009,8 @@
         </p:nvSpPr>
         <p:spPr>
           <a:xfrm>
-            <a:off x="2710688" y="5486400"/>
-            <a:ext cx="813816" cy="256032"/>
+            <a:off x="5511800" y="5486400"/>
+            <a:ext cx="1342136" cy="256032"/>
           </a:xfrm>
           <a:prstGeom prst="roundRect">
             <a:avLst>
@@ -23753,8 +24036,8 @@
         </p:nvSpPr>
         <p:spPr>
           <a:xfrm>
-            <a:off x="2710688" y="5486400"/>
-            <a:ext cx="813816" cy="256032"/>
+            <a:off x="5511800" y="5486400"/>
+            <a:ext cx="1342136" cy="256032"/>
           </a:xfrm>
           <a:prstGeom prst="rect">
             <a:avLst/>
@@ -23778,7 +24061,7 @@
                 <a:ea typeface="Calibri" pitchFamily="34" charset="-122"/>
                 <a:cs typeface="Calibri" pitchFamily="34" charset="-120"/>
               </a:rPr>
-              <a:t>changelog</a:t>
+              <a:t>task check-result</a:t>
             </a:r>
             <a:endParaRPr lang="en-US" sz="1000" dirty="0"/>
           </a:p>
@@ -23792,7 +24075,7 @@
         </p:nvSpPr>
         <p:spPr>
           <a:xfrm>
-            <a:off x="3615944" y="5486400"/>
+            <a:off x="6945376" y="5486400"/>
             <a:ext cx="615696" cy="256032"/>
           </a:xfrm>
           <a:prstGeom prst="roundRect">
@@ -23819,7 +24102,7 @@
         </p:nvSpPr>
         <p:spPr>
           <a:xfrm>
-            <a:off x="3615944" y="5486400"/>
+            <a:off x="6945376" y="5486400"/>
             <a:ext cx="615696" cy="256032"/>
           </a:xfrm>
           <a:prstGeom prst="rect">
@@ -23844,7 +24127,7 @@
                 <a:ea typeface="Calibri" pitchFamily="34" charset="-122"/>
                 <a:cs typeface="Calibri" pitchFamily="34" charset="-120"/>
               </a:rPr>
-              <a:t>report</a:t>
+              <a:t>verify</a:t>
             </a:r>
             <a:endParaRPr lang="en-US" sz="1000" dirty="0"/>
           </a:p>
@@ -23858,8 +24141,8 @@
         </p:nvSpPr>
         <p:spPr>
           <a:xfrm>
-            <a:off x="4323080" y="5486400"/>
-            <a:ext cx="813816" cy="256032"/>
+            <a:off x="7652512" y="5486400"/>
+            <a:ext cx="615696" cy="256032"/>
           </a:xfrm>
           <a:prstGeom prst="roundRect">
             <a:avLst>
@@ -23885,8 +24168,8 @@
         </p:nvSpPr>
         <p:spPr>
           <a:xfrm>
-            <a:off x="4323080" y="5486400"/>
-            <a:ext cx="813816" cy="256032"/>
+            <a:off x="7652512" y="5486400"/>
+            <a:ext cx="615696" cy="256032"/>
           </a:xfrm>
           <a:prstGeom prst="rect">
             <a:avLst/>
@@ -23910,7 +24193,7 @@
                 <a:ea typeface="Calibri" pitchFamily="34" charset="-122"/>
                 <a:cs typeface="Calibri" pitchFamily="34" charset="-120"/>
               </a:rPr>
-              <a:t>dashboard</a:t>
+              <a:t>review</a:t>
             </a:r>
             <a:endParaRPr lang="en-US" sz="1000" dirty="0"/>
           </a:p>
@@ -23924,8 +24207,8 @@
         </p:nvSpPr>
         <p:spPr>
           <a:xfrm>
-            <a:off x="5228336" y="5486400"/>
-            <a:ext cx="417576" cy="256032"/>
+            <a:off x="8359648" y="5486400"/>
+            <a:ext cx="747776" cy="256032"/>
           </a:xfrm>
           <a:prstGeom prst="roundRect">
             <a:avLst>
@@ -23951,8 +24234,8 @@
         </p:nvSpPr>
         <p:spPr>
           <a:xfrm>
-            <a:off x="5228336" y="5486400"/>
-            <a:ext cx="417576" cy="256032"/>
+            <a:off x="8359648" y="5486400"/>
+            <a:ext cx="747776" cy="256032"/>
           </a:xfrm>
           <a:prstGeom prst="rect">
             <a:avLst/>
@@ -23976,7 +24259,7 @@
                 <a:ea typeface="Calibri" pitchFamily="34" charset="-122"/>
                 <a:cs typeface="Calibri" pitchFamily="34" charset="-120"/>
               </a:rPr>
-              <a:t>log</a:t>
+              <a:t>validate</a:t>
             </a:r>
             <a:endParaRPr lang="en-US" sz="1000" dirty="0"/>
           </a:p>
@@ -23990,7 +24273,7 @@
         </p:nvSpPr>
         <p:spPr>
           <a:xfrm>
-            <a:off x="5737352" y="5486400"/>
+            <a:off x="9198864" y="5486400"/>
             <a:ext cx="681736" cy="256032"/>
           </a:xfrm>
           <a:prstGeom prst="roundRect">
@@ -24017,7 +24300,7 @@
         </p:nvSpPr>
         <p:spPr>
           <a:xfrm>
-            <a:off x="5737352" y="5486400"/>
+            <a:off x="9198864" y="5486400"/>
             <a:ext cx="681736" cy="256032"/>
           </a:xfrm>
           <a:prstGeom prst="rect">
@@ -24042,7 +24325,7 @@
                 <a:ea typeface="Calibri" pitchFamily="34" charset="-122"/>
                 <a:cs typeface="Calibri" pitchFamily="34" charset="-120"/>
               </a:rPr>
-              <a:t>license</a:t>
+              <a:t>archive</a:t>
             </a:r>
             <a:endParaRPr lang="en-US" sz="1000" dirty="0"/>
           </a:p>
@@ -24056,8 +24339,8 @@
         </p:nvSpPr>
         <p:spPr>
           <a:xfrm>
-            <a:off x="6510528" y="5486400"/>
-            <a:ext cx="615696" cy="256032"/>
+            <a:off x="9972040" y="5486400"/>
+            <a:ext cx="549656" cy="256032"/>
           </a:xfrm>
           <a:prstGeom prst="roundRect">
             <a:avLst>
@@ -24083,8 +24366,8 @@
         </p:nvSpPr>
         <p:spPr>
           <a:xfrm>
-            <a:off x="6510528" y="5486400"/>
-            <a:ext cx="615696" cy="256032"/>
+            <a:off x="9972040" y="5486400"/>
+            <a:ext cx="549656" cy="256032"/>
           </a:xfrm>
           <a:prstGeom prst="rect">
             <a:avLst/>
@@ -24108,7 +24391,7 @@
                 <a:ea typeface="Calibri" pitchFamily="34" charset="-122"/>
                 <a:cs typeface="Calibri" pitchFamily="34" charset="-120"/>
               </a:rPr>
-              <a:t>doctor</a:t>
+              <a:t>audit</a:t>
             </a:r>
             <a:endParaRPr lang="en-US" sz="1000" dirty="0"/>
           </a:p>
@@ -24122,8 +24405,8 @@
         </p:nvSpPr>
         <p:spPr>
           <a:xfrm>
-            <a:off x="7217664" y="5486400"/>
-            <a:ext cx="615696" cy="256032"/>
+            <a:off x="10613136" y="5486400"/>
+            <a:ext cx="813816" cy="256032"/>
           </a:xfrm>
           <a:prstGeom prst="roundRect">
             <a:avLst>
@@ -24149,8 +24432,8 @@
         </p:nvSpPr>
         <p:spPr>
           <a:xfrm>
-            <a:off x="7217664" y="5486400"/>
-            <a:ext cx="615696" cy="256032"/>
+            <a:off x="10613136" y="5486400"/>
+            <a:ext cx="813816" cy="256032"/>
           </a:xfrm>
           <a:prstGeom prst="rect">
             <a:avLst/>
@@ -24174,7 +24457,7 @@
                 <a:ea typeface="Calibri" pitchFamily="34" charset="-122"/>
                 <a:cs typeface="Calibri" pitchFamily="34" charset="-120"/>
               </a:rPr>
-              <a:t>health</a:t>
+              <a:t>changelog</a:t>
             </a:r>
             <a:endParaRPr lang="en-US" sz="1000" dirty="0"/>
           </a:p>
@@ -24188,8 +24471,8 @@
         </p:nvSpPr>
         <p:spPr>
           <a:xfrm>
-            <a:off x="7924800" y="5486400"/>
-            <a:ext cx="1011936" cy="256032"/>
+            <a:off x="457200" y="5833872"/>
+            <a:ext cx="615696" cy="256032"/>
           </a:xfrm>
           <a:prstGeom prst="roundRect">
             <a:avLst>
@@ -24215,8 +24498,8 @@
         </p:nvSpPr>
         <p:spPr>
           <a:xfrm>
-            <a:off x="7924800" y="5486400"/>
-            <a:ext cx="1011936" cy="256032"/>
+            <a:off x="457200" y="5833872"/>
+            <a:ext cx="615696" cy="256032"/>
           </a:xfrm>
           <a:prstGeom prst="rect">
             <a:avLst/>
@@ -24240,7 +24523,7 @@
                 <a:ea typeface="Calibri" pitchFamily="34" charset="-122"/>
                 <a:cs typeface="Calibri" pitchFamily="34" charset="-120"/>
               </a:rPr>
-              <a:t>plugin build</a:t>
+              <a:t>report</a:t>
             </a:r>
             <a:endParaRPr lang="en-US" sz="1000" dirty="0"/>
           </a:p>
@@ -24254,8 +24537,8 @@
         </p:nvSpPr>
         <p:spPr>
           <a:xfrm>
-            <a:off x="9028176" y="5486400"/>
-            <a:ext cx="549656" cy="256032"/>
+            <a:off x="1164336" y="5833872"/>
+            <a:ext cx="813816" cy="256032"/>
           </a:xfrm>
           <a:prstGeom prst="roundRect">
             <a:avLst>
@@ -24281,8 +24564,8 @@
         </p:nvSpPr>
         <p:spPr>
           <a:xfrm>
-            <a:off x="9028176" y="5486400"/>
-            <a:ext cx="549656" cy="256032"/>
+            <a:off x="1164336" y="5833872"/>
+            <a:ext cx="813816" cy="256032"/>
           </a:xfrm>
           <a:prstGeom prst="rect">
             <a:avLst/>
@@ -24306,7 +24589,7 @@
                 <a:ea typeface="Calibri" pitchFamily="34" charset="-122"/>
                 <a:cs typeface="Calibri" pitchFamily="34" charset="-120"/>
               </a:rPr>
-              <a:t>trace</a:t>
+              <a:t>dashboard</a:t>
             </a:r>
             <a:endParaRPr lang="en-US" sz="1000" dirty="0"/>
           </a:p>
@@ -24320,8 +24603,8 @@
         </p:nvSpPr>
         <p:spPr>
           <a:xfrm>
-            <a:off x="9669272" y="5486400"/>
-            <a:ext cx="483616" cy="256032"/>
+            <a:off x="2069592" y="5833872"/>
+            <a:ext cx="417576" cy="256032"/>
           </a:xfrm>
           <a:prstGeom prst="roundRect">
             <a:avLst>
@@ -24347,8 +24630,8 @@
         </p:nvSpPr>
         <p:spPr>
           <a:xfrm>
-            <a:off x="9669272" y="5486400"/>
-            <a:ext cx="483616" cy="256032"/>
+            <a:off x="2069592" y="5833872"/>
+            <a:ext cx="417576" cy="256032"/>
           </a:xfrm>
           <a:prstGeom prst="rect">
             <a:avLst/>
@@ -24372,7 +24655,7 @@
                 <a:ea typeface="Calibri" pitchFamily="34" charset="-122"/>
                 <a:cs typeface="Calibri" pitchFamily="34" charset="-120"/>
               </a:rPr>
-              <a:t>hook</a:t>
+              <a:t>log</a:t>
             </a:r>
             <a:endParaRPr lang="en-US" sz="1000" dirty="0"/>
           </a:p>
@@ -24386,8 +24669,8 @@
         </p:nvSpPr>
         <p:spPr>
           <a:xfrm>
-            <a:off x="10244328" y="5486400"/>
-            <a:ext cx="747776" cy="256032"/>
+            <a:off x="2578608" y="5833872"/>
+            <a:ext cx="681736" cy="256032"/>
           </a:xfrm>
           <a:prstGeom prst="roundRect">
             <a:avLst>
@@ -24413,7 +24696,403 @@
         </p:nvSpPr>
         <p:spPr>
           <a:xfrm>
-            <a:off x="10244328" y="5486400"/>
+            <a:off x="2578608" y="5833872"/>
+            <a:ext cx="681736" cy="256032"/>
+          </a:xfrm>
+          <a:prstGeom prst="rect">
+            <a:avLst/>
+          </a:prstGeom>
+          <a:noFill/>
+          <a:ln/>
+        </p:spPr>
+        <p:txBody>
+          <a:bodyPr wrap="square" lIns="0" tIns="0" rIns="0" bIns="0" rtlCol="0" anchor="ctr"/>
+          <a:lstStyle/>
+          <a:p>
+            <a:pPr algn="ctr" indent="0" marL="0">
+              <a:buNone/>
+            </a:pPr>
+            <a:r>
+              <a:rPr lang="en-US" sz="1000" dirty="0">
+                <a:solidFill>
+                  <a:srgbClr val="1F2430"/>
+                </a:solidFill>
+                <a:latin typeface="Calibri" pitchFamily="34" charset="0"/>
+                <a:ea typeface="Calibri" pitchFamily="34" charset="-122"/>
+                <a:cs typeface="Calibri" pitchFamily="34" charset="-120"/>
+              </a:rPr>
+              <a:t>license</a:t>
+            </a:r>
+            <a:endParaRPr lang="en-US" sz="1000" dirty="0"/>
+          </a:p>
+        </p:txBody>
+      </p:sp>
+      <p:sp>
+        <p:nvSpPr>
+          <p:cNvPr id="160" name="Shape 158"/>
+          <p:cNvSpPr/>
+          <p:nvPr/>
+        </p:nvSpPr>
+        <p:spPr>
+          <a:xfrm>
+            <a:off x="3351784" y="5833872"/>
+            <a:ext cx="615696" cy="256032"/>
+          </a:xfrm>
+          <a:prstGeom prst="roundRect">
+            <a:avLst>
+              <a:gd name="adj" fmla="val 50000"/>
+            </a:avLst>
+          </a:prstGeom>
+          <a:solidFill>
+            <a:srgbClr val="F3F5F8"/>
+          </a:solidFill>
+          <a:ln w="12700">
+            <a:solidFill>
+              <a:srgbClr val="F3F5F8"/>
+            </a:solidFill>
+            <a:prstDash val="solid"/>
+          </a:ln>
+        </p:spPr>
+      </p:sp>
+      <p:sp>
+        <p:nvSpPr>
+          <p:cNvPr id="161" name="Text 159"/>
+          <p:cNvSpPr txBox="1"/>
+          <p:nvPr/>
+        </p:nvSpPr>
+        <p:spPr>
+          <a:xfrm>
+            <a:off x="3351784" y="5833872"/>
+            <a:ext cx="615696" cy="256032"/>
+          </a:xfrm>
+          <a:prstGeom prst="rect">
+            <a:avLst/>
+          </a:prstGeom>
+          <a:noFill/>
+          <a:ln/>
+        </p:spPr>
+        <p:txBody>
+          <a:bodyPr wrap="square" lIns="0" tIns="0" rIns="0" bIns="0" rtlCol="0" anchor="ctr"/>
+          <a:lstStyle/>
+          <a:p>
+            <a:pPr algn="ctr" indent="0" marL="0">
+              <a:buNone/>
+            </a:pPr>
+            <a:r>
+              <a:rPr lang="en-US" sz="1000" dirty="0">
+                <a:solidFill>
+                  <a:srgbClr val="1F2430"/>
+                </a:solidFill>
+                <a:latin typeface="Calibri" pitchFamily="34" charset="0"/>
+                <a:ea typeface="Calibri" pitchFamily="34" charset="-122"/>
+                <a:cs typeface="Calibri" pitchFamily="34" charset="-120"/>
+              </a:rPr>
+              <a:t>doctor</a:t>
+            </a:r>
+            <a:endParaRPr lang="en-US" sz="1000" dirty="0"/>
+          </a:p>
+        </p:txBody>
+      </p:sp>
+      <p:sp>
+        <p:nvSpPr>
+          <p:cNvPr id="162" name="Shape 160"/>
+          <p:cNvSpPr/>
+          <p:nvPr/>
+        </p:nvSpPr>
+        <p:spPr>
+          <a:xfrm>
+            <a:off x="4058920" y="5833872"/>
+            <a:ext cx="615696" cy="256032"/>
+          </a:xfrm>
+          <a:prstGeom prst="roundRect">
+            <a:avLst>
+              <a:gd name="adj" fmla="val 50000"/>
+            </a:avLst>
+          </a:prstGeom>
+          <a:solidFill>
+            <a:srgbClr val="F3F5F8"/>
+          </a:solidFill>
+          <a:ln w="12700">
+            <a:solidFill>
+              <a:srgbClr val="F3F5F8"/>
+            </a:solidFill>
+            <a:prstDash val="solid"/>
+          </a:ln>
+        </p:spPr>
+      </p:sp>
+      <p:sp>
+        <p:nvSpPr>
+          <p:cNvPr id="163" name="Text 161"/>
+          <p:cNvSpPr txBox="1"/>
+          <p:nvPr/>
+        </p:nvSpPr>
+        <p:spPr>
+          <a:xfrm>
+            <a:off x="4058920" y="5833872"/>
+            <a:ext cx="615696" cy="256032"/>
+          </a:xfrm>
+          <a:prstGeom prst="rect">
+            <a:avLst/>
+          </a:prstGeom>
+          <a:noFill/>
+          <a:ln/>
+        </p:spPr>
+        <p:txBody>
+          <a:bodyPr wrap="square" lIns="0" tIns="0" rIns="0" bIns="0" rtlCol="0" anchor="ctr"/>
+          <a:lstStyle/>
+          <a:p>
+            <a:pPr algn="ctr" indent="0" marL="0">
+              <a:buNone/>
+            </a:pPr>
+            <a:r>
+              <a:rPr lang="en-US" sz="1000" dirty="0">
+                <a:solidFill>
+                  <a:srgbClr val="1F2430"/>
+                </a:solidFill>
+                <a:latin typeface="Calibri" pitchFamily="34" charset="0"/>
+                <a:ea typeface="Calibri" pitchFamily="34" charset="-122"/>
+                <a:cs typeface="Calibri" pitchFamily="34" charset="-120"/>
+              </a:rPr>
+              <a:t>health</a:t>
+            </a:r>
+            <a:endParaRPr lang="en-US" sz="1000" dirty="0"/>
+          </a:p>
+        </p:txBody>
+      </p:sp>
+      <p:sp>
+        <p:nvSpPr>
+          <p:cNvPr id="164" name="Shape 162"/>
+          <p:cNvSpPr/>
+          <p:nvPr/>
+        </p:nvSpPr>
+        <p:spPr>
+          <a:xfrm>
+            <a:off x="4766056" y="5833872"/>
+            <a:ext cx="1011936" cy="256032"/>
+          </a:xfrm>
+          <a:prstGeom prst="roundRect">
+            <a:avLst>
+              <a:gd name="adj" fmla="val 50000"/>
+            </a:avLst>
+          </a:prstGeom>
+          <a:solidFill>
+            <a:srgbClr val="F3F5F8"/>
+          </a:solidFill>
+          <a:ln w="12700">
+            <a:solidFill>
+              <a:srgbClr val="F3F5F8"/>
+            </a:solidFill>
+            <a:prstDash val="solid"/>
+          </a:ln>
+        </p:spPr>
+      </p:sp>
+      <p:sp>
+        <p:nvSpPr>
+          <p:cNvPr id="165" name="Text 163"/>
+          <p:cNvSpPr txBox="1"/>
+          <p:nvPr/>
+        </p:nvSpPr>
+        <p:spPr>
+          <a:xfrm>
+            <a:off x="4766056" y="5833872"/>
+            <a:ext cx="1011936" cy="256032"/>
+          </a:xfrm>
+          <a:prstGeom prst="rect">
+            <a:avLst/>
+          </a:prstGeom>
+          <a:noFill/>
+          <a:ln/>
+        </p:spPr>
+        <p:txBody>
+          <a:bodyPr wrap="square" lIns="0" tIns="0" rIns="0" bIns="0" rtlCol="0" anchor="ctr"/>
+          <a:lstStyle/>
+          <a:p>
+            <a:pPr algn="ctr" indent="0" marL="0">
+              <a:buNone/>
+            </a:pPr>
+            <a:r>
+              <a:rPr lang="en-US" sz="1000" dirty="0">
+                <a:solidFill>
+                  <a:srgbClr val="1F2430"/>
+                </a:solidFill>
+                <a:latin typeface="Calibri" pitchFamily="34" charset="0"/>
+                <a:ea typeface="Calibri" pitchFamily="34" charset="-122"/>
+                <a:cs typeface="Calibri" pitchFamily="34" charset="-120"/>
+              </a:rPr>
+              <a:t>plugin build</a:t>
+            </a:r>
+            <a:endParaRPr lang="en-US" sz="1000" dirty="0"/>
+          </a:p>
+        </p:txBody>
+      </p:sp>
+      <p:sp>
+        <p:nvSpPr>
+          <p:cNvPr id="166" name="Shape 164"/>
+          <p:cNvSpPr/>
+          <p:nvPr/>
+        </p:nvSpPr>
+        <p:spPr>
+          <a:xfrm>
+            <a:off x="5869432" y="5833872"/>
+            <a:ext cx="549656" cy="256032"/>
+          </a:xfrm>
+          <a:prstGeom prst="roundRect">
+            <a:avLst>
+              <a:gd name="adj" fmla="val 50000"/>
+            </a:avLst>
+          </a:prstGeom>
+          <a:solidFill>
+            <a:srgbClr val="F3F5F8"/>
+          </a:solidFill>
+          <a:ln w="12700">
+            <a:solidFill>
+              <a:srgbClr val="F3F5F8"/>
+            </a:solidFill>
+            <a:prstDash val="solid"/>
+          </a:ln>
+        </p:spPr>
+      </p:sp>
+      <p:sp>
+        <p:nvSpPr>
+          <p:cNvPr id="167" name="Text 165"/>
+          <p:cNvSpPr txBox="1"/>
+          <p:nvPr/>
+        </p:nvSpPr>
+        <p:spPr>
+          <a:xfrm>
+            <a:off x="5869432" y="5833872"/>
+            <a:ext cx="549656" cy="256032"/>
+          </a:xfrm>
+          <a:prstGeom prst="rect">
+            <a:avLst/>
+          </a:prstGeom>
+          <a:noFill/>
+          <a:ln/>
+        </p:spPr>
+        <p:txBody>
+          <a:bodyPr wrap="square" lIns="0" tIns="0" rIns="0" bIns="0" rtlCol="0" anchor="ctr"/>
+          <a:lstStyle/>
+          <a:p>
+            <a:pPr algn="ctr" indent="0" marL="0">
+              <a:buNone/>
+            </a:pPr>
+            <a:r>
+              <a:rPr lang="en-US" sz="1000" dirty="0">
+                <a:solidFill>
+                  <a:srgbClr val="1F2430"/>
+                </a:solidFill>
+                <a:latin typeface="Calibri" pitchFamily="34" charset="0"/>
+                <a:ea typeface="Calibri" pitchFamily="34" charset="-122"/>
+                <a:cs typeface="Calibri" pitchFamily="34" charset="-120"/>
+              </a:rPr>
+              <a:t>trace</a:t>
+            </a:r>
+            <a:endParaRPr lang="en-US" sz="1000" dirty="0"/>
+          </a:p>
+        </p:txBody>
+      </p:sp>
+      <p:sp>
+        <p:nvSpPr>
+          <p:cNvPr id="168" name="Shape 166"/>
+          <p:cNvSpPr/>
+          <p:nvPr/>
+        </p:nvSpPr>
+        <p:spPr>
+          <a:xfrm>
+            <a:off x="6510528" y="5833872"/>
+            <a:ext cx="483616" cy="256032"/>
+          </a:xfrm>
+          <a:prstGeom prst="roundRect">
+            <a:avLst>
+              <a:gd name="adj" fmla="val 50000"/>
+            </a:avLst>
+          </a:prstGeom>
+          <a:solidFill>
+            <a:srgbClr val="F3F5F8"/>
+          </a:solidFill>
+          <a:ln w="12700">
+            <a:solidFill>
+              <a:srgbClr val="F3F5F8"/>
+            </a:solidFill>
+            <a:prstDash val="solid"/>
+          </a:ln>
+        </p:spPr>
+      </p:sp>
+      <p:sp>
+        <p:nvSpPr>
+          <p:cNvPr id="169" name="Text 167"/>
+          <p:cNvSpPr txBox="1"/>
+          <p:nvPr/>
+        </p:nvSpPr>
+        <p:spPr>
+          <a:xfrm>
+            <a:off x="6510528" y="5833872"/>
+            <a:ext cx="483616" cy="256032"/>
+          </a:xfrm>
+          <a:prstGeom prst="rect">
+            <a:avLst/>
+          </a:prstGeom>
+          <a:noFill/>
+          <a:ln/>
+        </p:spPr>
+        <p:txBody>
+          <a:bodyPr wrap="square" lIns="0" tIns="0" rIns="0" bIns="0" rtlCol="0" anchor="ctr"/>
+          <a:lstStyle/>
+          <a:p>
+            <a:pPr algn="ctr" indent="0" marL="0">
+              <a:buNone/>
+            </a:pPr>
+            <a:r>
+              <a:rPr lang="en-US" sz="1000" dirty="0">
+                <a:solidFill>
+                  <a:srgbClr val="1F2430"/>
+                </a:solidFill>
+                <a:latin typeface="Calibri" pitchFamily="34" charset="0"/>
+                <a:ea typeface="Calibri" pitchFamily="34" charset="-122"/>
+                <a:cs typeface="Calibri" pitchFamily="34" charset="-120"/>
+              </a:rPr>
+              <a:t>hook</a:t>
+            </a:r>
+            <a:endParaRPr lang="en-US" sz="1000" dirty="0"/>
+          </a:p>
+        </p:txBody>
+      </p:sp>
+      <p:sp>
+        <p:nvSpPr>
+          <p:cNvPr id="170" name="Shape 168"/>
+          <p:cNvSpPr/>
+          <p:nvPr/>
+        </p:nvSpPr>
+        <p:spPr>
+          <a:xfrm>
+            <a:off x="7085584" y="5833872"/>
+            <a:ext cx="747776" cy="256032"/>
+          </a:xfrm>
+          <a:prstGeom prst="roundRect">
+            <a:avLst>
+              <a:gd name="adj" fmla="val 50000"/>
+            </a:avLst>
+          </a:prstGeom>
+          <a:solidFill>
+            <a:srgbClr val="F3F5F8"/>
+          </a:solidFill>
+          <a:ln w="12700">
+            <a:solidFill>
+              <a:srgbClr val="F3F5F8"/>
+            </a:solidFill>
+            <a:prstDash val="solid"/>
+          </a:ln>
+        </p:spPr>
+      </p:sp>
+      <p:sp>
+        <p:nvSpPr>
+          <p:cNvPr id="171" name="Text 169"/>
+          <p:cNvSpPr txBox="1"/>
+          <p:nvPr/>
+        </p:nvSpPr>
+        <p:spPr>
+          <a:xfrm>
+            <a:off x="7085584" y="5833872"/>
             <a:ext cx="747776" cy="256032"/>
           </a:xfrm>
           <a:prstGeom prst="rect">
@@ -27084,7 +27763,7 @@
                 <a:ea typeface="Courier New" pitchFamily="34" charset="-122"/>
                 <a:cs typeface="Courier New" pitchFamily="34" charset="-120"/>
               </a:rPr>
-              <a:t>  sdlc 0.18.0, license: community</a:t>
+              <a:t>  sdlc 0.19.0, license: community</a:t>
             </a:r>
             <a:endParaRPr lang="en-US" sz="1000" dirty="0"/>
           </a:p>

--- a/docs/demo/sdlc-calculator-demo.en.pptx
+++ b/docs/demo/sdlc-calculator-demo.en.pptx
@@ -5112,7 +5112,7 @@
                 <a:ea typeface="Courier New" pitchFamily="34" charset="-122"/>
                 <a:cs typeface="Courier New" pitchFamily="34" charset="-120"/>
               </a:rPr>
-              <a:t>✓ test (0.9s)</a:t>
+              <a:t>✓ test (2.2s)</a:t>
             </a:r>
             <a:endParaRPr lang="en-US" sz="1000" dirty="0"/>
           </a:p>
@@ -6660,7 +6660,7 @@
                 <a:ea typeface="Courier New" pitchFamily="34" charset="-122"/>
                 <a:cs typeface="Courier New" pitchFamily="34" charset="-120"/>
               </a:rPr>
-              <a:t>  code-owner (712099877b9e)</a:t>
+              <a:t>  code-owner (3d6ac2e55b7f)</a:t>
             </a:r>
             <a:endParaRPr lang="en-US" sz="1000" dirty="0"/>
           </a:p>
@@ -6745,7 +6745,7 @@
                 <a:ea typeface="Courier New" pitchFamily="34" charset="-122"/>
                 <a:cs typeface="Courier New" pitchFamily="34" charset="-120"/>
               </a:rPr>
-              <a:t>  "SDLC-Approval: basic-arithmetic:review:7</a:t>
+              <a:t>  "SDLC-Approval: basic-arithmetic:review:3</a:t>
             </a:r>
             <a:endParaRPr lang="en-US" sz="1000" dirty="0"/>
           </a:p>
@@ -6762,7 +6762,7 @@
                 <a:ea typeface="Courier New" pitchFamily="34" charset="-122"/>
                 <a:cs typeface="Courier New" pitchFamily="34" charset="-120"/>
               </a:rPr>
-              <a:t>  12099877b9e"</a:t>
+              <a:t>  d6ac2e55b7f"</a:t>
             </a:r>
             <a:endParaRPr lang="en-US" sz="1000" dirty="0"/>
           </a:p>
@@ -7443,7 +7443,7 @@
                 <a:ea typeface="Courier New" pitchFamily="34" charset="-122"/>
                 <a:cs typeface="Courier New" pitchFamily="34" charset="-120"/>
               </a:rPr>
-              <a:t>  release-manager (712099877b9e)</a:t>
+              <a:t>  release-manager (3d6ac2e55b7f)</a:t>
             </a:r>
             <a:endParaRPr lang="en-US" sz="1000" dirty="0"/>
           </a:p>
@@ -7511,7 +7511,7 @@
                 <a:ea typeface="Courier New" pitchFamily="34" charset="-122"/>
                 <a:cs typeface="Courier New" pitchFamily="34" charset="-120"/>
               </a:rPr>
-              <a:t>  gate" -m "SDLC-Approval: basic-arithmetic:release:712099877b9e"</a:t>
+              <a:t>  gate" -m "SDLC-Approval: basic-arithmetic:release:3d6ac2e55b7f"</a:t>
             </a:r>
             <a:endParaRPr lang="en-US" sz="1000" dirty="0"/>
           </a:p>
@@ -7794,7 +7794,7 @@
                 <a:ea typeface="Courier New" pitchFamily="34" charset="-122"/>
                 <a:cs typeface="Courier New" pitchFamily="34" charset="-120"/>
               </a:rPr>
-              <a:t>✓ basic-arithmetic/intent alice valid 2bb8417b trailer: missing</a:t>
+              <a:t>✓ basic-arithmetic/intent alice valid 41c6aa1c trailer: missing</a:t>
             </a:r>
             <a:endParaRPr lang="en-US" sz="1000" dirty="0"/>
           </a:p>
@@ -7811,7 +7811,7 @@
                 <a:ea typeface="Courier New" pitchFamily="34" charset="-122"/>
                 <a:cs typeface="Courier New" pitchFamily="34" charset="-120"/>
               </a:rPr>
-              <a:t>✓ basic-arithmetic/spec alice valid bb21d651 trailer: missing</a:t>
+              <a:t>✓ basic-arithmetic/spec alice valid 168e88e7 trailer: missing</a:t>
             </a:r>
             <a:endParaRPr lang="en-US" sz="1000" dirty="0"/>
           </a:p>
@@ -7828,7 +7828,7 @@
                 <a:ea typeface="Courier New" pitchFamily="34" charset="-122"/>
                 <a:cs typeface="Courier New" pitchFamily="34" charset="-120"/>
               </a:rPr>
-              <a:t>✗ basic-arithmetic/plan bob wrong-signer bb21d651 trailer: missing</a:t>
+              <a:t>✗ basic-arithmetic/plan bob wrong-signer 168e88e7 trailer: missing</a:t>
             </a:r>
             <a:endParaRPr lang="en-US" sz="1000" dirty="0"/>
           </a:p>
@@ -7845,7 +7845,7 @@
                 <a:ea typeface="Courier New" pitchFamily="34" charset="-122"/>
                 <a:cs typeface="Courier New" pitchFamily="34" charset="-120"/>
               </a:rPr>
-              <a:t>✓ basic-arithmetic/review carol valid b1bf9ce3 trailer: missing</a:t>
+              <a:t>✓ basic-arithmetic/review carol valid c6ddcb02 trailer: missing</a:t>
             </a:r>
             <a:endParaRPr lang="en-US" sz="1000" dirty="0"/>
           </a:p>
@@ -7862,7 +7862,7 @@
                 <a:ea typeface="Courier New" pitchFamily="34" charset="-122"/>
                 <a:cs typeface="Courier New" pitchFamily="34" charset="-120"/>
               </a:rPr>
-              <a:t>✓ basic-arithmetic/release alice valid eb6c00f8 trailer: missing</a:t>
+              <a:t>✓ basic-arithmetic/release alice valid 909490ea trailer: missing</a:t>
             </a:r>
             <a:endParaRPr lang="en-US" sz="1000" dirty="0"/>
           </a:p>
@@ -7879,7 +7879,7 @@
                 <a:ea typeface="Courier New" pitchFamily="34" charset="-122"/>
                 <a:cs typeface="Courier New" pitchFamily="34" charset="-120"/>
               </a:rPr>
-              <a:t>✓ openspec/roles.yaml alice@calc.example bootstrap 4ba7fa97</a:t>
+              <a:t>✓ openspec/roles.yaml alice@calc.example bootstrap 68932692</a:t>
             </a:r>
             <a:endParaRPr lang="en-US" sz="1000" dirty="0"/>
           </a:p>
@@ -14365,7 +14365,7 @@
                 <a:ea typeface="Courier New" pitchFamily="34" charset="-122"/>
                 <a:cs typeface="Courier New" pitchFamily="34" charset="-120"/>
               </a:rPr>
-              <a:t>  archived) · sdlc 0.19.0, license:</a:t>
+              <a:t>  archived) · sdlc 0.20.0, license:</a:t>
             </a:r>
             <a:endParaRPr lang="en-US" sz="1000" dirty="0"/>
           </a:p>
@@ -14552,7 +14552,7 @@
                 <a:ea typeface="Courier New" pitchFamily="34" charset="-122"/>
                 <a:cs typeface="Courier New" pitchFamily="34" charset="-120"/>
               </a:rPr>
-              <a:t>  intent 3 · spec 1 · plan 14 · review 3;</a:t>
+              <a:t>  intent 3 · spec 3 · plan 16 · review 3;</a:t>
             </a:r>
             <a:endParaRPr lang="en-US" sz="1000" dirty="0"/>
           </a:p>
@@ -14852,7 +14852,7 @@
                 <a:ea typeface="Courier New" pitchFamily="34" charset="-122"/>
                 <a:cs typeface="Courier New" pitchFamily="34" charset="-120"/>
               </a:rPr>
-              <a:t>(last 15 of 46 entries; --limit to see</a:t>
+              <a:t>(last 15 of 47 entries; --limit to see</a:t>
             </a:r>
             <a:endParaRPr lang="en-US" sz="1000" dirty="0"/>
           </a:p>
@@ -14886,7 +14886,7 @@
                 <a:ea typeface="Courier New" pitchFamily="34" charset="-122"/>
                 <a:cs typeface="Courier New" pitchFamily="34" charset="-120"/>
               </a:rPr>
-              <a:t>2026-10-13T12:39:06.473Z  gate.review.await</a:t>
+              <a:t>2026-10-13T16:48:05.251Z  gate.review.await</a:t>
             </a:r>
             <a:endParaRPr lang="en-US" sz="1000" dirty="0"/>
           </a:p>
@@ -14920,7 +14920,7 @@
                 <a:ea typeface="Courier New" pitchFamily="34" charset="-122"/>
                 <a:cs typeface="Courier New" pitchFamily="34" charset="-120"/>
               </a:rPr>
-              <a:t>  sha256:712099877b9e02aad7ba9df255d39cfea8</a:t>
+              <a:t>  sha256:3d6ac2e55b7fa3a198a9816633bd881d47</a:t>
             </a:r>
             <a:endParaRPr lang="en-US" sz="1000" dirty="0"/>
           </a:p>
@@ -14937,7 +14937,7 @@
                 <a:ea typeface="Courier New" pitchFamily="34" charset="-122"/>
                 <a:cs typeface="Courier New" pitchFamily="34" charset="-120"/>
               </a:rPr>
-              <a:t>  913e1c7bd04eae8189166e4031f9d1 [sdlc</a:t>
+              <a:t>  7ca917251a375d5c8c848e9ad14518 [sdlc</a:t>
             </a:r>
             <a:endParaRPr lang="en-US" sz="1000" dirty="0"/>
           </a:p>
@@ -14954,7 +14954,7 @@
                 <a:ea typeface="Courier New" pitchFamily="34" charset="-122"/>
                 <a:cs typeface="Courier New" pitchFamily="34" charset="-120"/>
               </a:rPr>
-              <a:t>  0.19.0 · community]</a:t>
+              <a:t>  0.20.0 · community]</a:t>
             </a:r>
             <a:endParaRPr lang="en-US" sz="1000" dirty="0"/>
           </a:p>
@@ -14971,7 +14971,7 @@
                 <a:ea typeface="Courier New" pitchFamily="34" charset="-122"/>
                 <a:cs typeface="Courier New" pitchFamily="34" charset="-120"/>
               </a:rPr>
-              <a:t>2026-10-13T12:39:09.723Z  gate.review.appro</a:t>
+              <a:t>2026-10-13T16:48:08.386Z  gate.review.appro</a:t>
             </a:r>
             <a:endParaRPr lang="en-US" sz="1000" dirty="0"/>
           </a:p>
@@ -15022,7 +15022,7 @@
                 <a:ea typeface="Courier New" pitchFamily="34" charset="-122"/>
                 <a:cs typeface="Courier New" pitchFamily="34" charset="-120"/>
               </a:rPr>
-              <a:t>  [sdlc 0.19.0 · community]</a:t>
+              <a:t>  [sdlc 0.20.0 · community]</a:t>
             </a:r>
             <a:endParaRPr lang="en-US" sz="1000" dirty="0"/>
           </a:p>
@@ -15039,7 +15039,7 @@
                 <a:ea typeface="Courier New" pitchFamily="34" charset="-122"/>
                 <a:cs typeface="Courier New" pitchFamily="34" charset="-120"/>
               </a:rPr>
-              <a:t>2026-10-13T12:39:16.238Z  gate.release.appr</a:t>
+              <a:t>2026-10-13T16:48:15.066Z  gate.release.appr</a:t>
             </a:r>
             <a:endParaRPr lang="en-US" sz="1000" dirty="0"/>
           </a:p>
@@ -15090,7 +15090,7 @@
                 <a:ea typeface="Courier New" pitchFamily="34" charset="-122"/>
                 <a:cs typeface="Courier New" pitchFamily="34" charset="-120"/>
               </a:rPr>
-              <a:t>  release-manager [sdlc 0.19.0 · community]</a:t>
+              <a:t>  release-manager [sdlc 0.20.0 · community]</a:t>
             </a:r>
             <a:endParaRPr lang="en-US" sz="1000" dirty="0"/>
           </a:p>
@@ -16871,7 +16871,7 @@
                 <a:ea typeface="Courier New" pitchFamily="34" charset="-122"/>
                 <a:cs typeface="Courier New" pitchFamily="34" charset="-120"/>
               </a:rPr>
-              <a:t>      "id": "20261013T124009491Z-ci-green-9</a:t>
+              <a:t>      "id": "20261013T164910740Z-ci-green-e</a:t>
             </a:r>
             <a:endParaRPr lang="en-US" sz="1000" dirty="0"/>
           </a:p>
@@ -16888,7 +16888,7 @@
                 <a:ea typeface="Courier New" pitchFamily="34" charset="-122"/>
                 <a:cs typeface="Courier New" pitchFamily="34" charset="-120"/>
               </a:rPr>
-              <a:t>  29a3f",</a:t>
+              <a:t>  1d607",</a:t>
             </a:r>
             <a:endParaRPr lang="en-US" sz="1000" dirty="0"/>
           </a:p>
@@ -17024,7 +17024,7 @@
                 <a:ea typeface="Courier New" pitchFamily="34" charset="-122"/>
                 <a:cs typeface="Courier New" pitchFamily="34" charset="-120"/>
               </a:rPr>
-              <a:t>        "ref": "2e1baac9ee53f63c0b027747d99</a:t>
+              <a:t>        "ref": "bb445e41c829a11fdf3f991ce99</a:t>
             </a:r>
             <a:endParaRPr lang="en-US" sz="1000" dirty="0"/>
           </a:p>
@@ -17041,7 +17041,7 @@
                 <a:ea typeface="Courier New" pitchFamily="34" charset="-122"/>
                 <a:cs typeface="Courier New" pitchFamily="34" charset="-120"/>
               </a:rPr>
-              <a:t>  6d5979c6ebe47",</a:t>
+              <a:t>  77e06b7879c35",</a:t>
             </a:r>
             <a:endParaRPr lang="en-US" sz="1000" dirty="0"/>
           </a:p>
@@ -19615,7 +19615,7 @@
                 <a:ea typeface="Cambria" pitchFamily="34" charset="-122"/>
                 <a:cs typeface="Cambria" pitchFamily="34" charset="-120"/>
               </a:rPr>
-              <a:t>111</a:t>
+              <a:t>112</a:t>
             </a:r>
             <a:endParaRPr lang="en-US" sz="6000" dirty="0"/>
           </a:p>
@@ -19720,7 +19720,7 @@
                 <a:ea typeface="Cambria" pitchFamily="34" charset="-122"/>
                 <a:cs typeface="Cambria" pitchFamily="34" charset="-120"/>
               </a:rPr>
-              <a:t>78</a:t>
+              <a:t>79</a:t>
             </a:r>
             <a:endParaRPr lang="en-US" sz="6000" dirty="0"/>
           </a:p>
@@ -19759,7 +19759,7 @@
                 <a:ea typeface="Calibri" pitchFamily="34" charset="-122"/>
                 <a:cs typeface="Calibri" pitchFamily="34" charset="-120"/>
               </a:rPr>
-              <a:t>of 78 commands</a:t>
+              <a:t>of 79 commands</a:t>
             </a:r>
             <a:endParaRPr lang="en-US" sz="1600" dirty="0"/>
           </a:p>
@@ -23614,7 +23614,7 @@
         <p:spPr>
           <a:xfrm>
             <a:off x="10547096" y="5138928"/>
-            <a:ext cx="747776" cy="256032"/>
+            <a:ext cx="549656" cy="256032"/>
           </a:xfrm>
           <a:prstGeom prst="roundRect">
             <a:avLst>
@@ -23641,7 +23641,7 @@
         <p:spPr>
           <a:xfrm>
             <a:off x="10547096" y="5138928"/>
-            <a:ext cx="747776" cy="256032"/>
+            <a:ext cx="549656" cy="256032"/>
           </a:xfrm>
           <a:prstGeom prst="rect">
             <a:avLst/>
@@ -23665,7 +23665,7 @@
                 <a:ea typeface="Calibri" pitchFamily="34" charset="-122"/>
                 <a:cs typeface="Calibri" pitchFamily="34" charset="-120"/>
               </a:rPr>
-              <a:t>takeover</a:t>
+              <a:t>judge</a:t>
             </a:r>
             <a:endParaRPr lang="en-US" sz="1000" dirty="0"/>
           </a:p>
@@ -23680,7 +23680,7 @@
         <p:spPr>
           <a:xfrm>
             <a:off x="457200" y="5486400"/>
-            <a:ext cx="1210056" cy="256032"/>
+            <a:ext cx="747776" cy="256032"/>
           </a:xfrm>
           <a:prstGeom prst="roundRect">
             <a:avLst>
@@ -23707,7 +23707,7 @@
         <p:spPr>
           <a:xfrm>
             <a:off x="457200" y="5486400"/>
-            <a:ext cx="1210056" cy="256032"/>
+            <a:ext cx="747776" cy="256032"/>
           </a:xfrm>
           <a:prstGeom prst="rect">
             <a:avLst/>
@@ -23731,7 +23731,7 @@
                 <a:ea typeface="Calibri" pitchFamily="34" charset="-122"/>
                 <a:cs typeface="Calibri" pitchFamily="34" charset="-120"/>
               </a:rPr>
-              <a:t>release-control</a:t>
+              <a:t>takeover</a:t>
             </a:r>
             <a:endParaRPr lang="en-US" sz="1000" dirty="0"/>
           </a:p>
@@ -23745,8 +23745,8 @@
         </p:nvSpPr>
         <p:spPr>
           <a:xfrm>
-            <a:off x="1758696" y="5486400"/>
-            <a:ext cx="615696" cy="256032"/>
+            <a:off x="1296416" y="5486400"/>
+            <a:ext cx="1210056" cy="256032"/>
           </a:xfrm>
           <a:prstGeom prst="roundRect">
             <a:avLst>
@@ -23772,8 +23772,8 @@
         </p:nvSpPr>
         <p:spPr>
           <a:xfrm>
-            <a:off x="1758696" y="5486400"/>
-            <a:ext cx="615696" cy="256032"/>
+            <a:off x="1296416" y="5486400"/>
+            <a:ext cx="1210056" cy="256032"/>
           </a:xfrm>
           <a:prstGeom prst="rect">
             <a:avLst/>
@@ -23797,7 +23797,7 @@
                 <a:ea typeface="Calibri" pitchFamily="34" charset="-122"/>
                 <a:cs typeface="Calibri" pitchFamily="34" charset="-120"/>
               </a:rPr>
-              <a:t>rework</a:t>
+              <a:t>release-control</a:t>
             </a:r>
             <a:endParaRPr lang="en-US" sz="1000" dirty="0"/>
           </a:p>
@@ -23811,8 +23811,8 @@
         </p:nvSpPr>
         <p:spPr>
           <a:xfrm>
-            <a:off x="2465832" y="5486400"/>
-            <a:ext cx="1276096" cy="256032"/>
+            <a:off x="2597912" y="5486400"/>
+            <a:ext cx="615696" cy="256032"/>
           </a:xfrm>
           <a:prstGeom prst="roundRect">
             <a:avLst>
@@ -23838,8 +23838,8 @@
         </p:nvSpPr>
         <p:spPr>
           <a:xfrm>
-            <a:off x="2465832" y="5486400"/>
-            <a:ext cx="1276096" cy="256032"/>
+            <a:off x="2597912" y="5486400"/>
+            <a:ext cx="615696" cy="256032"/>
           </a:xfrm>
           <a:prstGeom prst="rect">
             <a:avLst/>
@@ -23863,7 +23863,7 @@
                 <a:ea typeface="Calibri" pitchFamily="34" charset="-122"/>
                 <a:cs typeface="Calibri" pitchFamily="34" charset="-120"/>
               </a:rPr>
-              <a:t>approvals verify</a:t>
+              <a:t>rework</a:t>
             </a:r>
             <a:endParaRPr lang="en-US" sz="1000" dirty="0"/>
           </a:p>
@@ -23877,8 +23877,8 @@
         </p:nvSpPr>
         <p:spPr>
           <a:xfrm>
-            <a:off x="3833368" y="5486400"/>
-            <a:ext cx="549656" cy="256032"/>
+            <a:off x="3305048" y="5486400"/>
+            <a:ext cx="1276096" cy="256032"/>
           </a:xfrm>
           <a:prstGeom prst="roundRect">
             <a:avLst>
@@ -23904,8 +23904,8 @@
         </p:nvSpPr>
         <p:spPr>
           <a:xfrm>
-            <a:off x="3833368" y="5486400"/>
-            <a:ext cx="549656" cy="256032"/>
+            <a:off x="3305048" y="5486400"/>
+            <a:ext cx="1276096" cy="256032"/>
           </a:xfrm>
           <a:prstGeom prst="rect">
             <a:avLst/>
@@ -23929,7 +23929,7 @@
                 <a:ea typeface="Calibri" pitchFamily="34" charset="-122"/>
                 <a:cs typeface="Calibri" pitchFamily="34" charset="-120"/>
               </a:rPr>
-              <a:t>tests</a:t>
+              <a:t>approvals verify</a:t>
             </a:r>
             <a:endParaRPr lang="en-US" sz="1000" dirty="0"/>
           </a:p>
@@ -23943,8 +23943,8 @@
         </p:nvSpPr>
         <p:spPr>
           <a:xfrm>
-            <a:off x="4474464" y="5486400"/>
-            <a:ext cx="945896" cy="256032"/>
+            <a:off x="4672584" y="5486400"/>
+            <a:ext cx="549656" cy="256032"/>
           </a:xfrm>
           <a:prstGeom prst="roundRect">
             <a:avLst>
@@ -23970,8 +23970,8 @@
         </p:nvSpPr>
         <p:spPr>
           <a:xfrm>
-            <a:off x="4474464" y="5486400"/>
-            <a:ext cx="945896" cy="256032"/>
+            <a:off x="4672584" y="5486400"/>
+            <a:ext cx="549656" cy="256032"/>
           </a:xfrm>
           <a:prstGeom prst="rect">
             <a:avLst/>
@@ -23995,7 +23995,7 @@
                 <a:ea typeface="Calibri" pitchFamily="34" charset="-122"/>
                 <a:cs typeface="Calibri" pitchFamily="34" charset="-120"/>
               </a:rPr>
-              <a:t>task export</a:t>
+              <a:t>tests</a:t>
             </a:r>
             <a:endParaRPr lang="en-US" sz="1000" dirty="0"/>
           </a:p>
@@ -24009,8 +24009,8 @@
         </p:nvSpPr>
         <p:spPr>
           <a:xfrm>
-            <a:off x="5511800" y="5486400"/>
-            <a:ext cx="1342136" cy="256032"/>
+            <a:off x="5313680" y="5486400"/>
+            <a:ext cx="945896" cy="256032"/>
           </a:xfrm>
           <a:prstGeom prst="roundRect">
             <a:avLst>
@@ -24036,8 +24036,8 @@
         </p:nvSpPr>
         <p:spPr>
           <a:xfrm>
-            <a:off x="5511800" y="5486400"/>
-            <a:ext cx="1342136" cy="256032"/>
+            <a:off x="5313680" y="5486400"/>
+            <a:ext cx="945896" cy="256032"/>
           </a:xfrm>
           <a:prstGeom prst="rect">
             <a:avLst/>
@@ -24061,7 +24061,7 @@
                 <a:ea typeface="Calibri" pitchFamily="34" charset="-122"/>
                 <a:cs typeface="Calibri" pitchFamily="34" charset="-120"/>
               </a:rPr>
-              <a:t>task check-result</a:t>
+              <a:t>task export</a:t>
             </a:r>
             <a:endParaRPr lang="en-US" sz="1000" dirty="0"/>
           </a:p>
@@ -24075,8 +24075,8 @@
         </p:nvSpPr>
         <p:spPr>
           <a:xfrm>
-            <a:off x="6945376" y="5486400"/>
-            <a:ext cx="615696" cy="256032"/>
+            <a:off x="6351016" y="5486400"/>
+            <a:ext cx="1342136" cy="256032"/>
           </a:xfrm>
           <a:prstGeom prst="roundRect">
             <a:avLst>
@@ -24102,8 +24102,8 @@
         </p:nvSpPr>
         <p:spPr>
           <a:xfrm>
-            <a:off x="6945376" y="5486400"/>
-            <a:ext cx="615696" cy="256032"/>
+            <a:off x="6351016" y="5486400"/>
+            <a:ext cx="1342136" cy="256032"/>
           </a:xfrm>
           <a:prstGeom prst="rect">
             <a:avLst/>
@@ -24127,7 +24127,7 @@
                 <a:ea typeface="Calibri" pitchFamily="34" charset="-122"/>
                 <a:cs typeface="Calibri" pitchFamily="34" charset="-120"/>
               </a:rPr>
-              <a:t>verify</a:t>
+              <a:t>task check-result</a:t>
             </a:r>
             <a:endParaRPr lang="en-US" sz="1000" dirty="0"/>
           </a:p>
@@ -24141,7 +24141,7 @@
         </p:nvSpPr>
         <p:spPr>
           <a:xfrm>
-            <a:off x="7652512" y="5486400"/>
+            <a:off x="7784592" y="5486400"/>
             <a:ext cx="615696" cy="256032"/>
           </a:xfrm>
           <a:prstGeom prst="roundRect">
@@ -24168,7 +24168,7 @@
         </p:nvSpPr>
         <p:spPr>
           <a:xfrm>
-            <a:off x="7652512" y="5486400"/>
+            <a:off x="7784592" y="5486400"/>
             <a:ext cx="615696" cy="256032"/>
           </a:xfrm>
           <a:prstGeom prst="rect">
@@ -24193,7 +24193,7 @@
                 <a:ea typeface="Calibri" pitchFamily="34" charset="-122"/>
                 <a:cs typeface="Calibri" pitchFamily="34" charset="-120"/>
               </a:rPr>
-              <a:t>review</a:t>
+              <a:t>verify</a:t>
             </a:r>
             <a:endParaRPr lang="en-US" sz="1000" dirty="0"/>
           </a:p>
@@ -24207,8 +24207,8 @@
         </p:nvSpPr>
         <p:spPr>
           <a:xfrm>
-            <a:off x="8359648" y="5486400"/>
-            <a:ext cx="747776" cy="256032"/>
+            <a:off x="8491728" y="5486400"/>
+            <a:ext cx="615696" cy="256032"/>
           </a:xfrm>
           <a:prstGeom prst="roundRect">
             <a:avLst>
@@ -24234,8 +24234,8 @@
         </p:nvSpPr>
         <p:spPr>
           <a:xfrm>
-            <a:off x="8359648" y="5486400"/>
-            <a:ext cx="747776" cy="256032"/>
+            <a:off x="8491728" y="5486400"/>
+            <a:ext cx="615696" cy="256032"/>
           </a:xfrm>
           <a:prstGeom prst="rect">
             <a:avLst/>
@@ -24259,7 +24259,7 @@
                 <a:ea typeface="Calibri" pitchFamily="34" charset="-122"/>
                 <a:cs typeface="Calibri" pitchFamily="34" charset="-120"/>
               </a:rPr>
-              <a:t>validate</a:t>
+              <a:t>review</a:t>
             </a:r>
             <a:endParaRPr lang="en-US" sz="1000" dirty="0"/>
           </a:p>
@@ -24274,7 +24274,7 @@
         <p:spPr>
           <a:xfrm>
             <a:off x="9198864" y="5486400"/>
-            <a:ext cx="681736" cy="256032"/>
+            <a:ext cx="747776" cy="256032"/>
           </a:xfrm>
           <a:prstGeom prst="roundRect">
             <a:avLst>
@@ -24301,7 +24301,7 @@
         <p:spPr>
           <a:xfrm>
             <a:off x="9198864" y="5486400"/>
-            <a:ext cx="681736" cy="256032"/>
+            <a:ext cx="747776" cy="256032"/>
           </a:xfrm>
           <a:prstGeom prst="rect">
             <a:avLst/>
@@ -24325,7 +24325,7 @@
                 <a:ea typeface="Calibri" pitchFamily="34" charset="-122"/>
                 <a:cs typeface="Calibri" pitchFamily="34" charset="-120"/>
               </a:rPr>
-              <a:t>archive</a:t>
+              <a:t>validate</a:t>
             </a:r>
             <a:endParaRPr lang="en-US" sz="1000" dirty="0"/>
           </a:p>
@@ -24339,8 +24339,8 @@
         </p:nvSpPr>
         <p:spPr>
           <a:xfrm>
-            <a:off x="9972040" y="5486400"/>
-            <a:ext cx="549656" cy="256032"/>
+            <a:off x="10038080" y="5486400"/>
+            <a:ext cx="681736" cy="256032"/>
           </a:xfrm>
           <a:prstGeom prst="roundRect">
             <a:avLst>
@@ -24366,8 +24366,8 @@
         </p:nvSpPr>
         <p:spPr>
           <a:xfrm>
-            <a:off x="9972040" y="5486400"/>
-            <a:ext cx="549656" cy="256032"/>
+            <a:off x="10038080" y="5486400"/>
+            <a:ext cx="681736" cy="256032"/>
           </a:xfrm>
           <a:prstGeom prst="rect">
             <a:avLst/>
@@ -24391,7 +24391,7 @@
                 <a:ea typeface="Calibri" pitchFamily="34" charset="-122"/>
                 <a:cs typeface="Calibri" pitchFamily="34" charset="-120"/>
               </a:rPr>
-              <a:t>audit</a:t>
+              <a:t>archive</a:t>
             </a:r>
             <a:endParaRPr lang="en-US" sz="1000" dirty="0"/>
           </a:p>
@@ -24405,8 +24405,8 @@
         </p:nvSpPr>
         <p:spPr>
           <a:xfrm>
-            <a:off x="10613136" y="5486400"/>
-            <a:ext cx="813816" cy="256032"/>
+            <a:off x="10811256" y="5486400"/>
+            <a:ext cx="549656" cy="256032"/>
           </a:xfrm>
           <a:prstGeom prst="roundRect">
             <a:avLst>
@@ -24432,8 +24432,8 @@
         </p:nvSpPr>
         <p:spPr>
           <a:xfrm>
-            <a:off x="10613136" y="5486400"/>
-            <a:ext cx="813816" cy="256032"/>
+            <a:off x="10811256" y="5486400"/>
+            <a:ext cx="549656" cy="256032"/>
           </a:xfrm>
           <a:prstGeom prst="rect">
             <a:avLst/>
@@ -24457,7 +24457,7 @@
                 <a:ea typeface="Calibri" pitchFamily="34" charset="-122"/>
                 <a:cs typeface="Calibri" pitchFamily="34" charset="-120"/>
               </a:rPr>
-              <a:t>changelog</a:t>
+              <a:t>audit</a:t>
             </a:r>
             <a:endParaRPr lang="en-US" sz="1000" dirty="0"/>
           </a:p>
@@ -24472,7 +24472,7 @@
         <p:spPr>
           <a:xfrm>
             <a:off x="457200" y="5833872"/>
-            <a:ext cx="615696" cy="256032"/>
+            <a:ext cx="813816" cy="256032"/>
           </a:xfrm>
           <a:prstGeom prst="roundRect">
             <a:avLst>
@@ -24499,7 +24499,7 @@
         <p:spPr>
           <a:xfrm>
             <a:off x="457200" y="5833872"/>
-            <a:ext cx="615696" cy="256032"/>
+            <a:ext cx="813816" cy="256032"/>
           </a:xfrm>
           <a:prstGeom prst="rect">
             <a:avLst/>
@@ -24523,7 +24523,7 @@
                 <a:ea typeface="Calibri" pitchFamily="34" charset="-122"/>
                 <a:cs typeface="Calibri" pitchFamily="34" charset="-120"/>
               </a:rPr>
-              <a:t>report</a:t>
+              <a:t>changelog</a:t>
             </a:r>
             <a:endParaRPr lang="en-US" sz="1000" dirty="0"/>
           </a:p>
@@ -24537,8 +24537,8 @@
         </p:nvSpPr>
         <p:spPr>
           <a:xfrm>
-            <a:off x="1164336" y="5833872"/>
-            <a:ext cx="813816" cy="256032"/>
+            <a:off x="1362456" y="5833872"/>
+            <a:ext cx="615696" cy="256032"/>
           </a:xfrm>
           <a:prstGeom prst="roundRect">
             <a:avLst>
@@ -24564,8 +24564,8 @@
         </p:nvSpPr>
         <p:spPr>
           <a:xfrm>
-            <a:off x="1164336" y="5833872"/>
-            <a:ext cx="813816" cy="256032"/>
+            <a:off x="1362456" y="5833872"/>
+            <a:ext cx="615696" cy="256032"/>
           </a:xfrm>
           <a:prstGeom prst="rect">
             <a:avLst/>
@@ -24589,7 +24589,7 @@
                 <a:ea typeface="Calibri" pitchFamily="34" charset="-122"/>
                 <a:cs typeface="Calibri" pitchFamily="34" charset="-120"/>
               </a:rPr>
-              <a:t>dashboard</a:t>
+              <a:t>report</a:t>
             </a:r>
             <a:endParaRPr lang="en-US" sz="1000" dirty="0"/>
           </a:p>
@@ -24604,7 +24604,7 @@
         <p:spPr>
           <a:xfrm>
             <a:off x="2069592" y="5833872"/>
-            <a:ext cx="417576" cy="256032"/>
+            <a:ext cx="813816" cy="256032"/>
           </a:xfrm>
           <a:prstGeom prst="roundRect">
             <a:avLst>
@@ -24631,7 +24631,7 @@
         <p:spPr>
           <a:xfrm>
             <a:off x="2069592" y="5833872"/>
-            <a:ext cx="417576" cy="256032"/>
+            <a:ext cx="813816" cy="256032"/>
           </a:xfrm>
           <a:prstGeom prst="rect">
             <a:avLst/>
@@ -24655,7 +24655,7 @@
                 <a:ea typeface="Calibri" pitchFamily="34" charset="-122"/>
                 <a:cs typeface="Calibri" pitchFamily="34" charset="-120"/>
               </a:rPr>
-              <a:t>log</a:t>
+              <a:t>dashboard</a:t>
             </a:r>
             <a:endParaRPr lang="en-US" sz="1000" dirty="0"/>
           </a:p>
@@ -24669,8 +24669,8 @@
         </p:nvSpPr>
         <p:spPr>
           <a:xfrm>
-            <a:off x="2578608" y="5833872"/>
-            <a:ext cx="681736" cy="256032"/>
+            <a:off x="2974848" y="5833872"/>
+            <a:ext cx="417576" cy="256032"/>
           </a:xfrm>
           <a:prstGeom prst="roundRect">
             <a:avLst>
@@ -24696,8 +24696,8 @@
         </p:nvSpPr>
         <p:spPr>
           <a:xfrm>
-            <a:off x="2578608" y="5833872"/>
-            <a:ext cx="681736" cy="256032"/>
+            <a:off x="2974848" y="5833872"/>
+            <a:ext cx="417576" cy="256032"/>
           </a:xfrm>
           <a:prstGeom prst="rect">
             <a:avLst/>
@@ -24721,7 +24721,7 @@
                 <a:ea typeface="Calibri" pitchFamily="34" charset="-122"/>
                 <a:cs typeface="Calibri" pitchFamily="34" charset="-120"/>
               </a:rPr>
-              <a:t>license</a:t>
+              <a:t>log</a:t>
             </a:r>
             <a:endParaRPr lang="en-US" sz="1000" dirty="0"/>
           </a:p>
@@ -24735,8 +24735,8 @@
         </p:nvSpPr>
         <p:spPr>
           <a:xfrm>
-            <a:off x="3351784" y="5833872"/>
-            <a:ext cx="615696" cy="256032"/>
+            <a:off x="3483864" y="5833872"/>
+            <a:ext cx="681736" cy="256032"/>
           </a:xfrm>
           <a:prstGeom prst="roundRect">
             <a:avLst>
@@ -24762,8 +24762,8 @@
         </p:nvSpPr>
         <p:spPr>
           <a:xfrm>
-            <a:off x="3351784" y="5833872"/>
-            <a:ext cx="615696" cy="256032"/>
+            <a:off x="3483864" y="5833872"/>
+            <a:ext cx="681736" cy="256032"/>
           </a:xfrm>
           <a:prstGeom prst="rect">
             <a:avLst/>
@@ -24787,7 +24787,7 @@
                 <a:ea typeface="Calibri" pitchFamily="34" charset="-122"/>
                 <a:cs typeface="Calibri" pitchFamily="34" charset="-120"/>
               </a:rPr>
-              <a:t>doctor</a:t>
+              <a:t>license</a:t>
             </a:r>
             <a:endParaRPr lang="en-US" sz="1000" dirty="0"/>
           </a:p>
@@ -24801,7 +24801,7 @@
         </p:nvSpPr>
         <p:spPr>
           <a:xfrm>
-            <a:off x="4058920" y="5833872"/>
+            <a:off x="4257040" y="5833872"/>
             <a:ext cx="615696" cy="256032"/>
           </a:xfrm>
           <a:prstGeom prst="roundRect">
@@ -24828,7 +24828,7 @@
         </p:nvSpPr>
         <p:spPr>
           <a:xfrm>
-            <a:off x="4058920" y="5833872"/>
+            <a:off x="4257040" y="5833872"/>
             <a:ext cx="615696" cy="256032"/>
           </a:xfrm>
           <a:prstGeom prst="rect">
@@ -24853,7 +24853,7 @@
                 <a:ea typeface="Calibri" pitchFamily="34" charset="-122"/>
                 <a:cs typeface="Calibri" pitchFamily="34" charset="-120"/>
               </a:rPr>
-              <a:t>health</a:t>
+              <a:t>doctor</a:t>
             </a:r>
             <a:endParaRPr lang="en-US" sz="1000" dirty="0"/>
           </a:p>
@@ -24867,8 +24867,8 @@
         </p:nvSpPr>
         <p:spPr>
           <a:xfrm>
-            <a:off x="4766056" y="5833872"/>
-            <a:ext cx="1011936" cy="256032"/>
+            <a:off x="4964176" y="5833872"/>
+            <a:ext cx="615696" cy="256032"/>
           </a:xfrm>
           <a:prstGeom prst="roundRect">
             <a:avLst>
@@ -24894,8 +24894,8 @@
         </p:nvSpPr>
         <p:spPr>
           <a:xfrm>
-            <a:off x="4766056" y="5833872"/>
-            <a:ext cx="1011936" cy="256032"/>
+            <a:off x="4964176" y="5833872"/>
+            <a:ext cx="615696" cy="256032"/>
           </a:xfrm>
           <a:prstGeom prst="rect">
             <a:avLst/>
@@ -24919,7 +24919,7 @@
                 <a:ea typeface="Calibri" pitchFamily="34" charset="-122"/>
                 <a:cs typeface="Calibri" pitchFamily="34" charset="-120"/>
               </a:rPr>
-              <a:t>plugin build</a:t>
+              <a:t>health</a:t>
             </a:r>
             <a:endParaRPr lang="en-US" sz="1000" dirty="0"/>
           </a:p>
@@ -24933,8 +24933,8 @@
         </p:nvSpPr>
         <p:spPr>
           <a:xfrm>
-            <a:off x="5869432" y="5833872"/>
-            <a:ext cx="549656" cy="256032"/>
+            <a:off x="5671312" y="5833872"/>
+            <a:ext cx="1011936" cy="256032"/>
           </a:xfrm>
           <a:prstGeom prst="roundRect">
             <a:avLst>
@@ -24960,8 +24960,8 @@
         </p:nvSpPr>
         <p:spPr>
           <a:xfrm>
-            <a:off x="5869432" y="5833872"/>
-            <a:ext cx="549656" cy="256032"/>
+            <a:off x="5671312" y="5833872"/>
+            <a:ext cx="1011936" cy="256032"/>
           </a:xfrm>
           <a:prstGeom prst="rect">
             <a:avLst/>
@@ -24985,7 +24985,7 @@
                 <a:ea typeface="Calibri" pitchFamily="34" charset="-122"/>
                 <a:cs typeface="Calibri" pitchFamily="34" charset="-120"/>
               </a:rPr>
-              <a:t>trace</a:t>
+              <a:t>plugin build</a:t>
             </a:r>
             <a:endParaRPr lang="en-US" sz="1000" dirty="0"/>
           </a:p>
@@ -24999,8 +24999,8 @@
         </p:nvSpPr>
         <p:spPr>
           <a:xfrm>
-            <a:off x="6510528" y="5833872"/>
-            <a:ext cx="483616" cy="256032"/>
+            <a:off x="6774688" y="5833872"/>
+            <a:ext cx="549656" cy="256032"/>
           </a:xfrm>
           <a:prstGeom prst="roundRect">
             <a:avLst>
@@ -25026,8 +25026,8 @@
         </p:nvSpPr>
         <p:spPr>
           <a:xfrm>
-            <a:off x="6510528" y="5833872"/>
-            <a:ext cx="483616" cy="256032"/>
+            <a:off x="6774688" y="5833872"/>
+            <a:ext cx="549656" cy="256032"/>
           </a:xfrm>
           <a:prstGeom prst="rect">
             <a:avLst/>
@@ -25051,7 +25051,7 @@
                 <a:ea typeface="Calibri" pitchFamily="34" charset="-122"/>
                 <a:cs typeface="Calibri" pitchFamily="34" charset="-120"/>
               </a:rPr>
-              <a:t>hook</a:t>
+              <a:t>trace</a:t>
             </a:r>
             <a:endParaRPr lang="en-US" sz="1000" dirty="0"/>
           </a:p>
@@ -25065,8 +25065,8 @@
         </p:nvSpPr>
         <p:spPr>
           <a:xfrm>
-            <a:off x="7085584" y="5833872"/>
-            <a:ext cx="747776" cy="256032"/>
+            <a:off x="7415784" y="5833872"/>
+            <a:ext cx="483616" cy="256032"/>
           </a:xfrm>
           <a:prstGeom prst="roundRect">
             <a:avLst>
@@ -25092,7 +25092,73 @@
         </p:nvSpPr>
         <p:spPr>
           <a:xfrm>
-            <a:off x="7085584" y="5833872"/>
+            <a:off x="7415784" y="5833872"/>
+            <a:ext cx="483616" cy="256032"/>
+          </a:xfrm>
+          <a:prstGeom prst="rect">
+            <a:avLst/>
+          </a:prstGeom>
+          <a:noFill/>
+          <a:ln/>
+        </p:spPr>
+        <p:txBody>
+          <a:bodyPr wrap="square" lIns="0" tIns="0" rIns="0" bIns="0" rtlCol="0" anchor="ctr"/>
+          <a:lstStyle/>
+          <a:p>
+            <a:pPr algn="ctr" indent="0" marL="0">
+              <a:buNone/>
+            </a:pPr>
+            <a:r>
+              <a:rPr lang="en-US" sz="1000" dirty="0">
+                <a:solidFill>
+                  <a:srgbClr val="1F2430"/>
+                </a:solidFill>
+                <a:latin typeface="Calibri" pitchFamily="34" charset="0"/>
+                <a:ea typeface="Calibri" pitchFamily="34" charset="-122"/>
+                <a:cs typeface="Calibri" pitchFamily="34" charset="-120"/>
+              </a:rPr>
+              <a:t>hook</a:t>
+            </a:r>
+            <a:endParaRPr lang="en-US" sz="1000" dirty="0"/>
+          </a:p>
+        </p:txBody>
+      </p:sp>
+      <p:sp>
+        <p:nvSpPr>
+          <p:cNvPr id="172" name="Shape 170"/>
+          <p:cNvSpPr/>
+          <p:nvPr/>
+        </p:nvSpPr>
+        <p:spPr>
+          <a:xfrm>
+            <a:off x="7990840" y="5833872"/>
+            <a:ext cx="747776" cy="256032"/>
+          </a:xfrm>
+          <a:prstGeom prst="roundRect">
+            <a:avLst>
+              <a:gd name="adj" fmla="val 50000"/>
+            </a:avLst>
+          </a:prstGeom>
+          <a:solidFill>
+            <a:srgbClr val="F3F5F8"/>
+          </a:solidFill>
+          <a:ln w="12700">
+            <a:solidFill>
+              <a:srgbClr val="F3F5F8"/>
+            </a:solidFill>
+            <a:prstDash val="solid"/>
+          </a:ln>
+        </p:spPr>
+      </p:sp>
+      <p:sp>
+        <p:nvSpPr>
+          <p:cNvPr id="173" name="Text 171"/>
+          <p:cNvSpPr txBox="1"/>
+          <p:nvPr/>
+        </p:nvSpPr>
+        <p:spPr>
+          <a:xfrm>
+            <a:off x="7990840" y="5833872"/>
             <a:ext cx="747776" cy="256032"/>
           </a:xfrm>
           <a:prstGeom prst="rect">
@@ -27763,7 +27829,7 @@
                 <a:ea typeface="Courier New" pitchFamily="34" charset="-122"/>
                 <a:cs typeface="Courier New" pitchFamily="34" charset="-120"/>
               </a:rPr>
-              <a:t>  sdlc 0.19.0, license: community</a:t>
+              <a:t>  sdlc 0.20.0, license: community</a:t>
             </a:r>
             <a:endParaRPr lang="en-US" sz="1000" dirty="0"/>
           </a:p>
@@ -35001,6 +35067,72 @@
                 <a:cs typeface="Calibri" pitchFamily="34" charset="-120"/>
               </a:rPr>
               <a:t>explain</a:t>
+            </a:r>
+            <a:endParaRPr lang="en-US" sz="1000" dirty="0"/>
+          </a:p>
+        </p:txBody>
+      </p:sp>
+      <p:sp>
+        <p:nvSpPr>
+          <p:cNvPr id="39" name="Shape 37"/>
+          <p:cNvSpPr/>
+          <p:nvPr/>
+        </p:nvSpPr>
+        <p:spPr>
+          <a:xfrm>
+            <a:off x="4493768" y="6053328"/>
+            <a:ext cx="549656" cy="256032"/>
+          </a:xfrm>
+          <a:prstGeom prst="roundRect">
+            <a:avLst>
+              <a:gd name="adj" fmla="val 50000"/>
+            </a:avLst>
+          </a:prstGeom>
+          <a:solidFill>
+            <a:srgbClr val="F3F5F8"/>
+          </a:solidFill>
+          <a:ln w="12700">
+            <a:solidFill>
+              <a:srgbClr val="F3F5F8"/>
+            </a:solidFill>
+            <a:prstDash val="solid"/>
+          </a:ln>
+        </p:spPr>
+      </p:sp>
+      <p:sp>
+        <p:nvSpPr>
+          <p:cNvPr id="40" name="Text 38"/>
+          <p:cNvSpPr txBox="1"/>
+          <p:nvPr/>
+        </p:nvSpPr>
+        <p:spPr>
+          <a:xfrm>
+            <a:off x="4493768" y="6053328"/>
+            <a:ext cx="549656" cy="256032"/>
+          </a:xfrm>
+          <a:prstGeom prst="rect">
+            <a:avLst/>
+          </a:prstGeom>
+          <a:noFill/>
+          <a:ln/>
+        </p:spPr>
+        <p:txBody>
+          <a:bodyPr wrap="square" lIns="0" tIns="0" rIns="0" bIns="0" rtlCol="0" anchor="ctr"/>
+          <a:lstStyle/>
+          <a:p>
+            <a:pPr algn="ctr" indent="0" marL="0">
+              <a:buNone/>
+            </a:pPr>
+            <a:r>
+              <a:rPr lang="en-US" sz="1000" dirty="0">
+                <a:solidFill>
+                  <a:srgbClr val="5B6475"/>
+                </a:solidFill>
+                <a:latin typeface="Calibri" pitchFamily="34" charset="0"/>
+                <a:ea typeface="Calibri" pitchFamily="34" charset="-122"/>
+                <a:cs typeface="Calibri" pitchFamily="34" charset="-120"/>
+              </a:rPr>
+              <a:t>judge</a:t>
             </a:r>
             <a:endParaRPr lang="en-US" sz="1000" dirty="0"/>
           </a:p>

--- a/docs/demo/sdlc-calculator-demo.en.pptx
+++ b/docs/demo/sdlc-calculator-demo.en.pptx
@@ -5112,7 +5112,7 @@
                 <a:ea typeface="Courier New" pitchFamily="34" charset="-122"/>
                 <a:cs typeface="Courier New" pitchFamily="34" charset="-120"/>
               </a:rPr>
-              <a:t>✓ test (2.2s)</a:t>
+              <a:t>✓ test (1.0s)</a:t>
             </a:r>
             <a:endParaRPr lang="en-US" sz="1000" dirty="0"/>
           </a:p>
@@ -6660,7 +6660,7 @@
                 <a:ea typeface="Courier New" pitchFamily="34" charset="-122"/>
                 <a:cs typeface="Courier New" pitchFamily="34" charset="-120"/>
               </a:rPr>
-              <a:t>  code-owner (3d6ac2e55b7f)</a:t>
+              <a:t>  code-owner (5ab417be3f87)</a:t>
             </a:r>
             <a:endParaRPr lang="en-US" sz="1000" dirty="0"/>
           </a:p>
@@ -6745,7 +6745,7 @@
                 <a:ea typeface="Courier New" pitchFamily="34" charset="-122"/>
                 <a:cs typeface="Courier New" pitchFamily="34" charset="-120"/>
               </a:rPr>
-              <a:t>  "SDLC-Approval: basic-arithmetic:review:3</a:t>
+              <a:t>  "SDLC-Approval: basic-arithmetic:review:5</a:t>
             </a:r>
             <a:endParaRPr lang="en-US" sz="1000" dirty="0"/>
           </a:p>
@@ -6762,7 +6762,7 @@
                 <a:ea typeface="Courier New" pitchFamily="34" charset="-122"/>
                 <a:cs typeface="Courier New" pitchFamily="34" charset="-120"/>
               </a:rPr>
-              <a:t>  d6ac2e55b7f"</a:t>
+              <a:t>  ab417be3f87"</a:t>
             </a:r>
             <a:endParaRPr lang="en-US" sz="1000" dirty="0"/>
           </a:p>
@@ -7443,7 +7443,7 @@
                 <a:ea typeface="Courier New" pitchFamily="34" charset="-122"/>
                 <a:cs typeface="Courier New" pitchFamily="34" charset="-120"/>
               </a:rPr>
-              <a:t>  release-manager (3d6ac2e55b7f)</a:t>
+              <a:t>  release-manager (5ab417be3f87)</a:t>
             </a:r>
             <a:endParaRPr lang="en-US" sz="1000" dirty="0"/>
           </a:p>
@@ -7511,7 +7511,7 @@
                 <a:ea typeface="Courier New" pitchFamily="34" charset="-122"/>
                 <a:cs typeface="Courier New" pitchFamily="34" charset="-120"/>
               </a:rPr>
-              <a:t>  gate" -m "SDLC-Approval: basic-arithmetic:release:3d6ac2e55b7f"</a:t>
+              <a:t>  gate" -m "SDLC-Approval: basic-arithmetic:release:5ab417be3f87"</a:t>
             </a:r>
             <a:endParaRPr lang="en-US" sz="1000" dirty="0"/>
           </a:p>
@@ -7794,7 +7794,7 @@
                 <a:ea typeface="Courier New" pitchFamily="34" charset="-122"/>
                 <a:cs typeface="Courier New" pitchFamily="34" charset="-120"/>
               </a:rPr>
-              <a:t>✓ basic-arithmetic/intent alice valid 41c6aa1c trailer: missing</a:t>
+              <a:t>✓ basic-arithmetic/intent alice valid 7fe457dd trailer: missing</a:t>
             </a:r>
             <a:endParaRPr lang="en-US" sz="1000" dirty="0"/>
           </a:p>
@@ -7811,7 +7811,7 @@
                 <a:ea typeface="Courier New" pitchFamily="34" charset="-122"/>
                 <a:cs typeface="Courier New" pitchFamily="34" charset="-120"/>
               </a:rPr>
-              <a:t>✓ basic-arithmetic/spec alice valid 168e88e7 trailer: missing</a:t>
+              <a:t>✓ basic-arithmetic/spec alice valid d653583b trailer: missing</a:t>
             </a:r>
             <a:endParaRPr lang="en-US" sz="1000" dirty="0"/>
           </a:p>
@@ -7828,7 +7828,7 @@
                 <a:ea typeface="Courier New" pitchFamily="34" charset="-122"/>
                 <a:cs typeface="Courier New" pitchFamily="34" charset="-120"/>
               </a:rPr>
-              <a:t>✗ basic-arithmetic/plan bob wrong-signer 168e88e7 trailer: missing</a:t>
+              <a:t>✗ basic-arithmetic/plan bob wrong-signer d653583b trailer: missing</a:t>
             </a:r>
             <a:endParaRPr lang="en-US" sz="1000" dirty="0"/>
           </a:p>
@@ -7845,7 +7845,7 @@
                 <a:ea typeface="Courier New" pitchFamily="34" charset="-122"/>
                 <a:cs typeface="Courier New" pitchFamily="34" charset="-120"/>
               </a:rPr>
-              <a:t>✓ basic-arithmetic/review carol valid c6ddcb02 trailer: missing</a:t>
+              <a:t>✓ basic-arithmetic/review carol valid e8d625cd trailer: missing</a:t>
             </a:r>
             <a:endParaRPr lang="en-US" sz="1000" dirty="0"/>
           </a:p>
@@ -7862,7 +7862,7 @@
                 <a:ea typeface="Courier New" pitchFamily="34" charset="-122"/>
                 <a:cs typeface="Courier New" pitchFamily="34" charset="-120"/>
               </a:rPr>
-              <a:t>✓ basic-arithmetic/release alice valid 909490ea trailer: missing</a:t>
+              <a:t>✓ basic-arithmetic/release alice valid 6b7cb787 trailer: missing</a:t>
             </a:r>
             <a:endParaRPr lang="en-US" sz="1000" dirty="0"/>
           </a:p>
@@ -7879,7 +7879,7 @@
                 <a:ea typeface="Courier New" pitchFamily="34" charset="-122"/>
                 <a:cs typeface="Courier New" pitchFamily="34" charset="-120"/>
               </a:rPr>
-              <a:t>✓ openspec/roles.yaml alice@calc.example bootstrap 68932692</a:t>
+              <a:t>✓ openspec/roles.yaml alice@calc.example bootstrap f0877292</a:t>
             </a:r>
             <a:endParaRPr lang="en-US" sz="1000" dirty="0"/>
           </a:p>
@@ -14365,7 +14365,7 @@
                 <a:ea typeface="Courier New" pitchFamily="34" charset="-122"/>
                 <a:cs typeface="Courier New" pitchFamily="34" charset="-120"/>
               </a:rPr>
-              <a:t>  archived) · sdlc 0.20.0, license:</a:t>
+              <a:t>  archived) · sdlc 0.20.1, license:</a:t>
             </a:r>
             <a:endParaRPr lang="en-US" sz="1000" dirty="0"/>
           </a:p>
@@ -14552,7 +14552,7 @@
                 <a:ea typeface="Courier New" pitchFamily="34" charset="-122"/>
                 <a:cs typeface="Courier New" pitchFamily="34" charset="-120"/>
               </a:rPr>
-              <a:t>  intent 3 · spec 3 · plan 16 · review 3;</a:t>
+              <a:t>  intent 3 · spec 3 · plan 17 · review 3;</a:t>
             </a:r>
             <a:endParaRPr lang="en-US" sz="1000" dirty="0"/>
           </a:p>
@@ -14886,7 +14886,7 @@
                 <a:ea typeface="Courier New" pitchFamily="34" charset="-122"/>
                 <a:cs typeface="Courier New" pitchFamily="34" charset="-120"/>
               </a:rPr>
-              <a:t>2026-10-13T16:48:05.251Z  gate.review.await</a:t>
+              <a:t>2026-10-13T18:27:35.445Z  gate.review.await</a:t>
             </a:r>
             <a:endParaRPr lang="en-US" sz="1000" dirty="0"/>
           </a:p>
@@ -14920,7 +14920,7 @@
                 <a:ea typeface="Courier New" pitchFamily="34" charset="-122"/>
                 <a:cs typeface="Courier New" pitchFamily="34" charset="-120"/>
               </a:rPr>
-              <a:t>  sha256:3d6ac2e55b7fa3a198a9816633bd881d47</a:t>
+              <a:t>  sha256:5ab417be3f87eb6876366c042b2b2487b7</a:t>
             </a:r>
             <a:endParaRPr lang="en-US" sz="1000" dirty="0"/>
           </a:p>
@@ -14937,7 +14937,7 @@
                 <a:ea typeface="Courier New" pitchFamily="34" charset="-122"/>
                 <a:cs typeface="Courier New" pitchFamily="34" charset="-120"/>
               </a:rPr>
-              <a:t>  7ca917251a375d5c8c848e9ad14518 [sdlc</a:t>
+              <a:t>  d6372c58e8c4fed9e00d32419bc60f [sdlc</a:t>
             </a:r>
             <a:endParaRPr lang="en-US" sz="1000" dirty="0"/>
           </a:p>
@@ -14954,7 +14954,7 @@
                 <a:ea typeface="Courier New" pitchFamily="34" charset="-122"/>
                 <a:cs typeface="Courier New" pitchFamily="34" charset="-120"/>
               </a:rPr>
-              <a:t>  0.20.0 · community]</a:t>
+              <a:t>  0.20.1 · community]</a:t>
             </a:r>
             <a:endParaRPr lang="en-US" sz="1000" dirty="0"/>
           </a:p>
@@ -14971,7 +14971,7 @@
                 <a:ea typeface="Courier New" pitchFamily="34" charset="-122"/>
                 <a:cs typeface="Courier New" pitchFamily="34" charset="-120"/>
               </a:rPr>
-              <a:t>2026-10-13T16:48:08.386Z  gate.review.appro</a:t>
+              <a:t>2026-10-13T18:27:38.626Z  gate.review.appro</a:t>
             </a:r>
             <a:endParaRPr lang="en-US" sz="1000" dirty="0"/>
           </a:p>
@@ -15022,7 +15022,7 @@
                 <a:ea typeface="Courier New" pitchFamily="34" charset="-122"/>
                 <a:cs typeface="Courier New" pitchFamily="34" charset="-120"/>
               </a:rPr>
-              <a:t>  [sdlc 0.20.0 · community]</a:t>
+              <a:t>  [sdlc 0.20.1 · community]</a:t>
             </a:r>
             <a:endParaRPr lang="en-US" sz="1000" dirty="0"/>
           </a:p>
@@ -15039,7 +15039,7 @@
                 <a:ea typeface="Courier New" pitchFamily="34" charset="-122"/>
                 <a:cs typeface="Courier New" pitchFamily="34" charset="-120"/>
               </a:rPr>
-              <a:t>2026-10-13T16:48:15.066Z  gate.release.appr</a:t>
+              <a:t>2026-10-13T18:27:45.529Z  gate.release.appr</a:t>
             </a:r>
             <a:endParaRPr lang="en-US" sz="1000" dirty="0"/>
           </a:p>
@@ -15090,7 +15090,7 @@
                 <a:ea typeface="Courier New" pitchFamily="34" charset="-122"/>
                 <a:cs typeface="Courier New" pitchFamily="34" charset="-120"/>
               </a:rPr>
-              <a:t>  release-manager [sdlc 0.20.0 · community]</a:t>
+              <a:t>  release-manager [sdlc 0.20.1 · community]</a:t>
             </a:r>
             <a:endParaRPr lang="en-US" sz="1000" dirty="0"/>
           </a:p>
@@ -16871,7 +16871,7 @@
                 <a:ea typeface="Courier New" pitchFamily="34" charset="-122"/>
                 <a:cs typeface="Courier New" pitchFamily="34" charset="-120"/>
               </a:rPr>
-              <a:t>      "id": "20261013T164910740Z-ci-green-e</a:t>
+              <a:t>      "id": "20261013T182840359Z-ci-green-0</a:t>
             </a:r>
             <a:endParaRPr lang="en-US" sz="1000" dirty="0"/>
           </a:p>
@@ -16888,7 +16888,7 @@
                 <a:ea typeface="Courier New" pitchFamily="34" charset="-122"/>
                 <a:cs typeface="Courier New" pitchFamily="34" charset="-120"/>
               </a:rPr>
-              <a:t>  1d607",</a:t>
+              <a:t>  64f21",</a:t>
             </a:r>
             <a:endParaRPr lang="en-US" sz="1000" dirty="0"/>
           </a:p>
@@ -17024,7 +17024,7 @@
                 <a:ea typeface="Courier New" pitchFamily="34" charset="-122"/>
                 <a:cs typeface="Courier New" pitchFamily="34" charset="-120"/>
               </a:rPr>
-              <a:t>        "ref": "bb445e41c829a11fdf3f991ce99</a:t>
+              <a:t>        "ref": "75913b7a3c2de306871d4186787</a:t>
             </a:r>
             <a:endParaRPr lang="en-US" sz="1000" dirty="0"/>
           </a:p>
@@ -17041,7 +17041,7 @@
                 <a:ea typeface="Courier New" pitchFamily="34" charset="-122"/>
                 <a:cs typeface="Courier New" pitchFamily="34" charset="-120"/>
               </a:rPr>
-              <a:t>  77e06b7879c35",</a:t>
+              <a:t>  45c1d232898b0",</a:t>
             </a:r>
             <a:endParaRPr lang="en-US" sz="1000" dirty="0"/>
           </a:p>
@@ -19615,7 +19615,7 @@
                 <a:ea typeface="Cambria" pitchFamily="34" charset="-122"/>
                 <a:cs typeface="Cambria" pitchFamily="34" charset="-120"/>
               </a:rPr>
-              <a:t>112</a:t>
+              <a:t>114</a:t>
             </a:r>
             <a:endParaRPr lang="en-US" sz="6000" dirty="0"/>
           </a:p>
@@ -27829,7 +27829,7 @@
                 <a:ea typeface="Courier New" pitchFamily="34" charset="-122"/>
                 <a:cs typeface="Courier New" pitchFamily="34" charset="-120"/>
               </a:rPr>
-              <a:t>  sdlc 0.20.0, license: community</a:t>
+              <a:t>  sdlc 0.20.1, license: community</a:t>
             </a:r>
             <a:endParaRPr lang="en-US" sz="1000" dirty="0"/>
           </a:p>

--- a/docs/demo/sdlc-calculator-demo.en.pptx
+++ b/docs/demo/sdlc-calculator-demo.en.pptx
@@ -6660,7 +6660,7 @@
                 <a:ea typeface="Courier New" pitchFamily="34" charset="-122"/>
                 <a:cs typeface="Courier New" pitchFamily="34" charset="-120"/>
               </a:rPr>
-              <a:t>  code-owner (5ab417be3f87)</a:t>
+              <a:t>  code-owner (9fb2796df945)</a:t>
             </a:r>
             <a:endParaRPr lang="en-US" sz="1000" dirty="0"/>
           </a:p>
@@ -6745,7 +6745,7 @@
                 <a:ea typeface="Courier New" pitchFamily="34" charset="-122"/>
                 <a:cs typeface="Courier New" pitchFamily="34" charset="-120"/>
               </a:rPr>
-              <a:t>  "SDLC-Approval: basic-arithmetic:review:5</a:t>
+              <a:t>  "SDLC-Approval: basic-arithmetic:review:9</a:t>
             </a:r>
             <a:endParaRPr lang="en-US" sz="1000" dirty="0"/>
           </a:p>
@@ -6762,7 +6762,7 @@
                 <a:ea typeface="Courier New" pitchFamily="34" charset="-122"/>
                 <a:cs typeface="Courier New" pitchFamily="34" charset="-120"/>
               </a:rPr>
-              <a:t>  ab417be3f87"</a:t>
+              <a:t>  fb2796df945"</a:t>
             </a:r>
             <a:endParaRPr lang="en-US" sz="1000" dirty="0"/>
           </a:p>
@@ -7443,7 +7443,7 @@
                 <a:ea typeface="Courier New" pitchFamily="34" charset="-122"/>
                 <a:cs typeface="Courier New" pitchFamily="34" charset="-120"/>
               </a:rPr>
-              <a:t>  release-manager (5ab417be3f87)</a:t>
+              <a:t>  release-manager (9fb2796df945)</a:t>
             </a:r>
             <a:endParaRPr lang="en-US" sz="1000" dirty="0"/>
           </a:p>
@@ -7511,7 +7511,7 @@
                 <a:ea typeface="Courier New" pitchFamily="34" charset="-122"/>
                 <a:cs typeface="Courier New" pitchFamily="34" charset="-120"/>
               </a:rPr>
-              <a:t>  gate" -m "SDLC-Approval: basic-arithmetic:release:5ab417be3f87"</a:t>
+              <a:t>  gate" -m "SDLC-Approval: basic-arithmetic:release:9fb2796df945"</a:t>
             </a:r>
             <a:endParaRPr lang="en-US" sz="1000" dirty="0"/>
           </a:p>
@@ -7794,7 +7794,7 @@
                 <a:ea typeface="Courier New" pitchFamily="34" charset="-122"/>
                 <a:cs typeface="Courier New" pitchFamily="34" charset="-120"/>
               </a:rPr>
-              <a:t>✓ basic-arithmetic/intent alice valid 7fe457dd trailer: missing</a:t>
+              <a:t>✓ basic-arithmetic/intent alice valid bfea444f trailer: missing</a:t>
             </a:r>
             <a:endParaRPr lang="en-US" sz="1000" dirty="0"/>
           </a:p>
@@ -7811,7 +7811,7 @@
                 <a:ea typeface="Courier New" pitchFamily="34" charset="-122"/>
                 <a:cs typeface="Courier New" pitchFamily="34" charset="-120"/>
               </a:rPr>
-              <a:t>✓ basic-arithmetic/spec alice valid d653583b trailer: missing</a:t>
+              <a:t>✓ basic-arithmetic/spec alice valid 45ddf0d1 trailer: missing</a:t>
             </a:r>
             <a:endParaRPr lang="en-US" sz="1000" dirty="0"/>
           </a:p>
@@ -7828,7 +7828,7 @@
                 <a:ea typeface="Courier New" pitchFamily="34" charset="-122"/>
                 <a:cs typeface="Courier New" pitchFamily="34" charset="-120"/>
               </a:rPr>
-              <a:t>✗ basic-arithmetic/plan bob wrong-signer d653583b trailer: missing</a:t>
+              <a:t>✗ basic-arithmetic/plan bob wrong-signer 45ddf0d1 trailer: missing</a:t>
             </a:r>
             <a:endParaRPr lang="en-US" sz="1000" dirty="0"/>
           </a:p>
@@ -7845,7 +7845,7 @@
                 <a:ea typeface="Courier New" pitchFamily="34" charset="-122"/>
                 <a:cs typeface="Courier New" pitchFamily="34" charset="-120"/>
               </a:rPr>
-              <a:t>✓ basic-arithmetic/review carol valid e8d625cd trailer: missing</a:t>
+              <a:t>✓ basic-arithmetic/review carol valid 4504ffa9 trailer: missing</a:t>
             </a:r>
             <a:endParaRPr lang="en-US" sz="1000" dirty="0"/>
           </a:p>
@@ -7862,7 +7862,7 @@
                 <a:ea typeface="Courier New" pitchFamily="34" charset="-122"/>
                 <a:cs typeface="Courier New" pitchFamily="34" charset="-120"/>
               </a:rPr>
-              <a:t>✓ basic-arithmetic/release alice valid 6b7cb787 trailer: missing</a:t>
+              <a:t>✓ basic-arithmetic/release alice valid 2bb25c09 trailer: missing</a:t>
             </a:r>
             <a:endParaRPr lang="en-US" sz="1000" dirty="0"/>
           </a:p>
@@ -7879,7 +7879,7 @@
                 <a:ea typeface="Courier New" pitchFamily="34" charset="-122"/>
                 <a:cs typeface="Courier New" pitchFamily="34" charset="-120"/>
               </a:rPr>
-              <a:t>✓ openspec/roles.yaml alice@calc.example bootstrap f0877292</a:t>
+              <a:t>✓ openspec/roles.yaml alice@calc.example bootstrap 4fbf901c</a:t>
             </a:r>
             <a:endParaRPr lang="en-US" sz="1000" dirty="0"/>
           </a:p>
@@ -14365,7 +14365,7 @@
                 <a:ea typeface="Courier New" pitchFamily="34" charset="-122"/>
                 <a:cs typeface="Courier New" pitchFamily="34" charset="-120"/>
               </a:rPr>
-              <a:t>  archived) · sdlc 0.20.1, license:</a:t>
+              <a:t>  archived) · sdlc 0.20.2, license:</a:t>
             </a:r>
             <a:endParaRPr lang="en-US" sz="1000" dirty="0"/>
           </a:p>
@@ -14886,7 +14886,7 @@
                 <a:ea typeface="Courier New" pitchFamily="34" charset="-122"/>
                 <a:cs typeface="Courier New" pitchFamily="34" charset="-120"/>
               </a:rPr>
-              <a:t>2026-10-13T18:27:35.445Z  gate.review.await</a:t>
+              <a:t>2026-10-13T20:35:39.116Z  gate.review.await</a:t>
             </a:r>
             <a:endParaRPr lang="en-US" sz="1000" dirty="0"/>
           </a:p>
@@ -14920,7 +14920,7 @@
                 <a:ea typeface="Courier New" pitchFamily="34" charset="-122"/>
                 <a:cs typeface="Courier New" pitchFamily="34" charset="-120"/>
               </a:rPr>
-              <a:t>  sha256:5ab417be3f87eb6876366c042b2b2487b7</a:t>
+              <a:t>  sha256:9fb2796df945c38c8c710c434879f8c3f5</a:t>
             </a:r>
             <a:endParaRPr lang="en-US" sz="1000" dirty="0"/>
           </a:p>
@@ -14937,7 +14937,7 @@
                 <a:ea typeface="Courier New" pitchFamily="34" charset="-122"/>
                 <a:cs typeface="Courier New" pitchFamily="34" charset="-120"/>
               </a:rPr>
-              <a:t>  d6372c58e8c4fed9e00d32419bc60f [sdlc</a:t>
+              <a:t>  2c643accd70824fb5cace7d17eadcf [sdlc</a:t>
             </a:r>
             <a:endParaRPr lang="en-US" sz="1000" dirty="0"/>
           </a:p>
@@ -14954,7 +14954,7 @@
                 <a:ea typeface="Courier New" pitchFamily="34" charset="-122"/>
                 <a:cs typeface="Courier New" pitchFamily="34" charset="-120"/>
               </a:rPr>
-              <a:t>  0.20.1 · community]</a:t>
+              <a:t>  0.20.2 · community]</a:t>
             </a:r>
             <a:endParaRPr lang="en-US" sz="1000" dirty="0"/>
           </a:p>
@@ -14971,7 +14971,7 @@
                 <a:ea typeface="Courier New" pitchFamily="34" charset="-122"/>
                 <a:cs typeface="Courier New" pitchFamily="34" charset="-120"/>
               </a:rPr>
-              <a:t>2026-10-13T18:27:38.626Z  gate.review.appro</a:t>
+              <a:t>2026-10-13T20:35:42.332Z  gate.review.appro</a:t>
             </a:r>
             <a:endParaRPr lang="en-US" sz="1000" dirty="0"/>
           </a:p>
@@ -15022,7 +15022,7 @@
                 <a:ea typeface="Courier New" pitchFamily="34" charset="-122"/>
                 <a:cs typeface="Courier New" pitchFamily="34" charset="-120"/>
               </a:rPr>
-              <a:t>  [sdlc 0.20.1 · community]</a:t>
+              <a:t>  [sdlc 0.20.2 · community]</a:t>
             </a:r>
             <a:endParaRPr lang="en-US" sz="1000" dirty="0"/>
           </a:p>
@@ -15039,7 +15039,7 @@
                 <a:ea typeface="Courier New" pitchFamily="34" charset="-122"/>
                 <a:cs typeface="Courier New" pitchFamily="34" charset="-120"/>
               </a:rPr>
-              <a:t>2026-10-13T18:27:45.529Z  gate.release.appr</a:t>
+              <a:t>2026-10-13T20:35:48.790Z  gate.release.appr</a:t>
             </a:r>
             <a:endParaRPr lang="en-US" sz="1000" dirty="0"/>
           </a:p>
@@ -15090,7 +15090,7 @@
                 <a:ea typeface="Courier New" pitchFamily="34" charset="-122"/>
                 <a:cs typeface="Courier New" pitchFamily="34" charset="-120"/>
               </a:rPr>
-              <a:t>  release-manager [sdlc 0.20.1 · community]</a:t>
+              <a:t>  release-manager [sdlc 0.20.2 · community]</a:t>
             </a:r>
             <a:endParaRPr lang="en-US" sz="1000" dirty="0"/>
           </a:p>
@@ -16418,7 +16418,7 @@
                 <a:ea typeface="Courier New" pitchFamily="34" charset="-122"/>
                 <a:cs typeface="Courier New" pitchFamily="34" charset="-120"/>
               </a:rPr>
-              <a:t>✓ test (1.0s)</a:t>
+              <a:t>✓ test (1.1s)</a:t>
             </a:r>
             <a:endParaRPr lang="en-US" sz="1000" dirty="0"/>
           </a:p>
@@ -16435,7 +16435,7 @@
                 <a:ea typeface="Courier New" pitchFamily="34" charset="-122"/>
                 <a:cs typeface="Courier New" pitchFamily="34" charset="-120"/>
               </a:rPr>
-              <a:t>✓ ci-green (ci/pipeline_status, 0.5s)</a:t>
+              <a:t>✓ ci-green (ci/pipeline_status, 0.6s)</a:t>
             </a:r>
             <a:endParaRPr lang="en-US" sz="1000" dirty="0"/>
           </a:p>
@@ -16871,7 +16871,7 @@
                 <a:ea typeface="Courier New" pitchFamily="34" charset="-122"/>
                 <a:cs typeface="Courier New" pitchFamily="34" charset="-120"/>
               </a:rPr>
-              <a:t>      "id": "20261013T182840359Z-ci-green-0</a:t>
+              <a:t>      "id": "20261013T203645800Z-ci-green-0</a:t>
             </a:r>
             <a:endParaRPr lang="en-US" sz="1000" dirty="0"/>
           </a:p>
@@ -16888,7 +16888,7 @@
                 <a:ea typeface="Courier New" pitchFamily="34" charset="-122"/>
                 <a:cs typeface="Courier New" pitchFamily="34" charset="-120"/>
               </a:rPr>
-              <a:t>  64f21",</a:t>
+              <a:t>  ca42d",</a:t>
             </a:r>
             <a:endParaRPr lang="en-US" sz="1000" dirty="0"/>
           </a:p>
@@ -17024,7 +17024,7 @@
                 <a:ea typeface="Courier New" pitchFamily="34" charset="-122"/>
                 <a:cs typeface="Courier New" pitchFamily="34" charset="-120"/>
               </a:rPr>
-              <a:t>        "ref": "75913b7a3c2de306871d4186787</a:t>
+              <a:t>        "ref": "142f97e9ee790e40de651669171</a:t>
             </a:r>
             <a:endParaRPr lang="en-US" sz="1000" dirty="0"/>
           </a:p>
@@ -17041,7 +17041,7 @@
                 <a:ea typeface="Courier New" pitchFamily="34" charset="-122"/>
                 <a:cs typeface="Courier New" pitchFamily="34" charset="-120"/>
               </a:rPr>
-              <a:t>  45c1d232898b0",</a:t>
+              <a:t>  c0c74d535ad0e",</a:t>
             </a:r>
             <a:endParaRPr lang="en-US" sz="1000" dirty="0"/>
           </a:p>
@@ -27829,7 +27829,7 @@
                 <a:ea typeface="Courier New" pitchFamily="34" charset="-122"/>
                 <a:cs typeface="Courier New" pitchFamily="34" charset="-120"/>
               </a:rPr>
-              <a:t>  sdlc 0.20.1, license: community</a:t>
+              <a:t>  sdlc 0.20.2, license: community</a:t>
             </a:r>
             <a:endParaRPr lang="en-US" sz="1000" dirty="0"/>
           </a:p>

--- a/docs/demo/sdlc-calculator-demo.en.pptx
+++ b/docs/demo/sdlc-calculator-demo.en.pptx
@@ -6660,7 +6660,7 @@
                 <a:ea typeface="Courier New" pitchFamily="34" charset="-122"/>
                 <a:cs typeface="Courier New" pitchFamily="34" charset="-120"/>
               </a:rPr>
-              <a:t>  code-owner (9fb2796df945)</a:t>
+              <a:t>  code-owner (6fe1207efb8e)</a:t>
             </a:r>
             <a:endParaRPr lang="en-US" sz="1000" dirty="0"/>
           </a:p>
@@ -6745,7 +6745,7 @@
                 <a:ea typeface="Courier New" pitchFamily="34" charset="-122"/>
                 <a:cs typeface="Courier New" pitchFamily="34" charset="-120"/>
               </a:rPr>
-              <a:t>  "SDLC-Approval: basic-arithmetic:review:9</a:t>
+              <a:t>  "SDLC-Approval: basic-arithmetic:review:6</a:t>
             </a:r>
             <a:endParaRPr lang="en-US" sz="1000" dirty="0"/>
           </a:p>
@@ -6762,7 +6762,7 @@
                 <a:ea typeface="Courier New" pitchFamily="34" charset="-122"/>
                 <a:cs typeface="Courier New" pitchFamily="34" charset="-120"/>
               </a:rPr>
-              <a:t>  fb2796df945"</a:t>
+              <a:t>  fe1207efb8e"</a:t>
             </a:r>
             <a:endParaRPr lang="en-US" sz="1000" dirty="0"/>
           </a:p>
@@ -7443,7 +7443,7 @@
                 <a:ea typeface="Courier New" pitchFamily="34" charset="-122"/>
                 <a:cs typeface="Courier New" pitchFamily="34" charset="-120"/>
               </a:rPr>
-              <a:t>  release-manager (9fb2796df945)</a:t>
+              <a:t>  release-manager (6fe1207efb8e)</a:t>
             </a:r>
             <a:endParaRPr lang="en-US" sz="1000" dirty="0"/>
           </a:p>
@@ -7511,7 +7511,7 @@
                 <a:ea typeface="Courier New" pitchFamily="34" charset="-122"/>
                 <a:cs typeface="Courier New" pitchFamily="34" charset="-120"/>
               </a:rPr>
-              <a:t>  gate" -m "SDLC-Approval: basic-arithmetic:release:9fb2796df945"</a:t>
+              <a:t>  gate" -m "SDLC-Approval: basic-arithmetic:release:6fe1207efb8e"</a:t>
             </a:r>
             <a:endParaRPr lang="en-US" sz="1000" dirty="0"/>
           </a:p>
@@ -7794,7 +7794,7 @@
                 <a:ea typeface="Courier New" pitchFamily="34" charset="-122"/>
                 <a:cs typeface="Courier New" pitchFamily="34" charset="-120"/>
               </a:rPr>
-              <a:t>✓ basic-arithmetic/intent alice valid bfea444f trailer: missing</a:t>
+              <a:t>✓ basic-arithmetic/intent alice valid d07fd095 trailer: missing</a:t>
             </a:r>
             <a:endParaRPr lang="en-US" sz="1000" dirty="0"/>
           </a:p>
@@ -7811,7 +7811,7 @@
                 <a:ea typeface="Courier New" pitchFamily="34" charset="-122"/>
                 <a:cs typeface="Courier New" pitchFamily="34" charset="-120"/>
               </a:rPr>
-              <a:t>✓ basic-arithmetic/spec alice valid 45ddf0d1 trailer: missing</a:t>
+              <a:t>✓ basic-arithmetic/spec alice valid d1469aa1 trailer: missing</a:t>
             </a:r>
             <a:endParaRPr lang="en-US" sz="1000" dirty="0"/>
           </a:p>
@@ -7828,7 +7828,7 @@
                 <a:ea typeface="Courier New" pitchFamily="34" charset="-122"/>
                 <a:cs typeface="Courier New" pitchFamily="34" charset="-120"/>
               </a:rPr>
-              <a:t>✗ basic-arithmetic/plan bob wrong-signer 45ddf0d1 trailer: missing</a:t>
+              <a:t>✗ basic-arithmetic/plan bob wrong-signer d1469aa1 trailer: missing</a:t>
             </a:r>
             <a:endParaRPr lang="en-US" sz="1000" dirty="0"/>
           </a:p>
@@ -7845,7 +7845,7 @@
                 <a:ea typeface="Courier New" pitchFamily="34" charset="-122"/>
                 <a:cs typeface="Courier New" pitchFamily="34" charset="-120"/>
               </a:rPr>
-              <a:t>✓ basic-arithmetic/review carol valid 4504ffa9 trailer: missing</a:t>
+              <a:t>✓ basic-arithmetic/review carol valid 24f02c2c trailer: missing</a:t>
             </a:r>
             <a:endParaRPr lang="en-US" sz="1000" dirty="0"/>
           </a:p>
@@ -7862,7 +7862,7 @@
                 <a:ea typeface="Courier New" pitchFamily="34" charset="-122"/>
                 <a:cs typeface="Courier New" pitchFamily="34" charset="-120"/>
               </a:rPr>
-              <a:t>✓ basic-arithmetic/release alice valid 2bb25c09 trailer: missing</a:t>
+              <a:t>✓ basic-arithmetic/release alice valid 39083661 trailer: missing</a:t>
             </a:r>
             <a:endParaRPr lang="en-US" sz="1000" dirty="0"/>
           </a:p>
@@ -7879,7 +7879,7 @@
                 <a:ea typeface="Courier New" pitchFamily="34" charset="-122"/>
                 <a:cs typeface="Courier New" pitchFamily="34" charset="-120"/>
               </a:rPr>
-              <a:t>✓ openspec/roles.yaml alice@calc.example bootstrap 4fbf901c</a:t>
+              <a:t>✓ openspec/roles.yaml alice@calc.example bootstrap c1f3d67d</a:t>
             </a:r>
             <a:endParaRPr lang="en-US" sz="1000" dirty="0"/>
           </a:p>
@@ -8511,7 +8511,7 @@
                 <a:ea typeface="Courier New" pitchFamily="34" charset="-122"/>
                 <a:cs typeface="Courier New" pitchFamily="34" charset="-120"/>
               </a:rPr>
-              <a:t>  openspec\changes\archive\2026-10-13-basic</a:t>
+              <a:t>  openspec\changes\archive\2026-10-14-basic</a:t>
             </a:r>
             <a:endParaRPr lang="en-US" sz="1000" dirty="0"/>
           </a:p>
@@ -14365,7 +14365,7 @@
                 <a:ea typeface="Courier New" pitchFamily="34" charset="-122"/>
                 <a:cs typeface="Courier New" pitchFamily="34" charset="-120"/>
               </a:rPr>
-              <a:t>  archived) · sdlc 0.20.2, license:</a:t>
+              <a:t>  archived) · sdlc 0.20.3, license:</a:t>
             </a:r>
             <a:endParaRPr lang="en-US" sz="1000" dirty="0"/>
           </a:p>
@@ -14552,7 +14552,7 @@
                 <a:ea typeface="Courier New" pitchFamily="34" charset="-122"/>
                 <a:cs typeface="Courier New" pitchFamily="34" charset="-120"/>
               </a:rPr>
-              <a:t>  intent 3 · spec 3 · plan 17 · review 3;</a:t>
+              <a:t>  intent 3 · spec 3 · plan 16 · review 3;</a:t>
             </a:r>
             <a:endParaRPr lang="en-US" sz="1000" dirty="0"/>
           </a:p>
@@ -14886,7 +14886,7 @@
                 <a:ea typeface="Courier New" pitchFamily="34" charset="-122"/>
                 <a:cs typeface="Courier New" pitchFamily="34" charset="-120"/>
               </a:rPr>
-              <a:t>2026-10-13T20:35:39.116Z  gate.review.await</a:t>
+              <a:t>2026-10-14T10:32:30.587Z  gate.review.await</a:t>
             </a:r>
             <a:endParaRPr lang="en-US" sz="1000" dirty="0"/>
           </a:p>
@@ -14920,7 +14920,7 @@
                 <a:ea typeface="Courier New" pitchFamily="34" charset="-122"/>
                 <a:cs typeface="Courier New" pitchFamily="34" charset="-120"/>
               </a:rPr>
-              <a:t>  sha256:9fb2796df945c38c8c710c434879f8c3f5</a:t>
+              <a:t>  sha256:6fe1207efb8ef41b5efedff0ce30e74846</a:t>
             </a:r>
             <a:endParaRPr lang="en-US" sz="1000" dirty="0"/>
           </a:p>
@@ -14937,7 +14937,7 @@
                 <a:ea typeface="Courier New" pitchFamily="34" charset="-122"/>
                 <a:cs typeface="Courier New" pitchFamily="34" charset="-120"/>
               </a:rPr>
-              <a:t>  2c643accd70824fb5cace7d17eadcf [sdlc</a:t>
+              <a:t>  88a9279510cdd27fe2a73b0f11f4ad [sdlc</a:t>
             </a:r>
             <a:endParaRPr lang="en-US" sz="1000" dirty="0"/>
           </a:p>
@@ -14954,7 +14954,7 @@
                 <a:ea typeface="Courier New" pitchFamily="34" charset="-122"/>
                 <a:cs typeface="Courier New" pitchFamily="34" charset="-120"/>
               </a:rPr>
-              <a:t>  0.20.2 · community]</a:t>
+              <a:t>  0.20.3 · community]</a:t>
             </a:r>
             <a:endParaRPr lang="en-US" sz="1000" dirty="0"/>
           </a:p>
@@ -14971,7 +14971,7 @@
                 <a:ea typeface="Courier New" pitchFamily="34" charset="-122"/>
                 <a:cs typeface="Courier New" pitchFamily="34" charset="-120"/>
               </a:rPr>
-              <a:t>2026-10-13T20:35:42.332Z  gate.review.appro</a:t>
+              <a:t>2026-10-14T10:32:33.820Z  gate.review.appro</a:t>
             </a:r>
             <a:endParaRPr lang="en-US" sz="1000" dirty="0"/>
           </a:p>
@@ -15022,7 +15022,7 @@
                 <a:ea typeface="Courier New" pitchFamily="34" charset="-122"/>
                 <a:cs typeface="Courier New" pitchFamily="34" charset="-120"/>
               </a:rPr>
-              <a:t>  [sdlc 0.20.2 · community]</a:t>
+              <a:t>  [sdlc 0.20.3 · community]</a:t>
             </a:r>
             <a:endParaRPr lang="en-US" sz="1000" dirty="0"/>
           </a:p>
@@ -15039,7 +15039,7 @@
                 <a:ea typeface="Courier New" pitchFamily="34" charset="-122"/>
                 <a:cs typeface="Courier New" pitchFamily="34" charset="-120"/>
               </a:rPr>
-              <a:t>2026-10-13T20:35:48.790Z  gate.release.appr</a:t>
+              <a:t>2026-10-14T10:32:40.341Z  gate.release.appr</a:t>
             </a:r>
             <a:endParaRPr lang="en-US" sz="1000" dirty="0"/>
           </a:p>
@@ -15090,7 +15090,7 @@
                 <a:ea typeface="Courier New" pitchFamily="34" charset="-122"/>
                 <a:cs typeface="Courier New" pitchFamily="34" charset="-120"/>
               </a:rPr>
-              <a:t>  release-manager [sdlc 0.20.2 · community]</a:t>
+              <a:t>  release-manager [sdlc 0.20.3 · community]</a:t>
             </a:r>
             <a:endParaRPr lang="en-US" sz="1000" dirty="0"/>
           </a:p>
@@ -16418,7 +16418,7 @@
                 <a:ea typeface="Courier New" pitchFamily="34" charset="-122"/>
                 <a:cs typeface="Courier New" pitchFamily="34" charset="-120"/>
               </a:rPr>
-              <a:t>✓ test (1.1s)</a:t>
+              <a:t>✓ test (1.0s)</a:t>
             </a:r>
             <a:endParaRPr lang="en-US" sz="1000" dirty="0"/>
           </a:p>
@@ -16435,7 +16435,7 @@
                 <a:ea typeface="Courier New" pitchFamily="34" charset="-122"/>
                 <a:cs typeface="Courier New" pitchFamily="34" charset="-120"/>
               </a:rPr>
-              <a:t>✓ ci-green (ci/pipeline_status, 0.6s)</a:t>
+              <a:t>✓ ci-green (ci/pipeline_status, 0.5s)</a:t>
             </a:r>
             <a:endParaRPr lang="en-US" sz="1000" dirty="0"/>
           </a:p>
@@ -16871,7 +16871,7 @@
                 <a:ea typeface="Courier New" pitchFamily="34" charset="-122"/>
                 <a:cs typeface="Courier New" pitchFamily="34" charset="-120"/>
               </a:rPr>
-              <a:t>      "id": "20261013T203645800Z-ci-green-0</a:t>
+              <a:t>      "id": "20261014T103334891Z-ci-green-e</a:t>
             </a:r>
             <a:endParaRPr lang="en-US" sz="1000" dirty="0"/>
           </a:p>
@@ -16888,7 +16888,7 @@
                 <a:ea typeface="Courier New" pitchFamily="34" charset="-122"/>
                 <a:cs typeface="Courier New" pitchFamily="34" charset="-120"/>
               </a:rPr>
-              <a:t>  ca42d",</a:t>
+              <a:t>  d62fc",</a:t>
             </a:r>
             <a:endParaRPr lang="en-US" sz="1000" dirty="0"/>
           </a:p>
@@ -17024,7 +17024,7 @@
                 <a:ea typeface="Courier New" pitchFamily="34" charset="-122"/>
                 <a:cs typeface="Courier New" pitchFamily="34" charset="-120"/>
               </a:rPr>
-              <a:t>        "ref": "142f97e9ee790e40de651669171</a:t>
+              <a:t>        "ref": "a5ef3f4aff403e94f01fcaa581a</a:t>
             </a:r>
             <a:endParaRPr lang="en-US" sz="1000" dirty="0"/>
           </a:p>
@@ -17041,7 +17041,7 @@
                 <a:ea typeface="Courier New" pitchFamily="34" charset="-122"/>
                 <a:cs typeface="Courier New" pitchFamily="34" charset="-120"/>
               </a:rPr>
-              <a:t>  c0c74d535ad0e",</a:t>
+              <a:t>  2a9e814b197fa",</a:t>
             </a:r>
             <a:endParaRPr lang="en-US" sz="1000" dirty="0"/>
           </a:p>
@@ -27829,7 +27829,7 @@
                 <a:ea typeface="Courier New" pitchFamily="34" charset="-122"/>
                 <a:cs typeface="Courier New" pitchFamily="34" charset="-120"/>
               </a:rPr>
-              <a:t>  sdlc 0.20.2, license: community</a:t>
+              <a:t>  sdlc 0.20.3, license: community</a:t>
             </a:r>
             <a:endParaRPr lang="en-US" sz="1000" dirty="0"/>
           </a:p>
@@ -34620,7 +34620,7 @@
                 <a:ea typeface="Courier New" pitchFamily="34" charset="-122"/>
                 <a:cs typeface="Courier New" pitchFamily="34" charset="-120"/>
               </a:rPr>
-              <a:t>  (3f005a0f65e9)</a:t>
+              <a:t>  (308be1b4f21d)</a:t>
             </a:r>
             <a:endParaRPr lang="en-US" sz="1000" dirty="0"/>
           </a:p>
@@ -34756,7 +34756,7 @@
                 <a:ea typeface="Courier New" pitchFamily="34" charset="-122"/>
                 <a:cs typeface="Courier New" pitchFamily="34" charset="-120"/>
               </a:rPr>
-              <a:t>  3f005a0f65e9"</a:t>
+              <a:t>  308be1b4f21d"</a:t>
             </a:r>
             <a:endParaRPr lang="en-US" sz="1000" dirty="0"/>
           </a:p>

--- a/docs/demo/sdlc-calculator-demo.en.pptx
+++ b/docs/demo/sdlc-calculator-demo.en.pptx
@@ -6660,7 +6660,7 @@
                 <a:ea typeface="Courier New" pitchFamily="34" charset="-122"/>
                 <a:cs typeface="Courier New" pitchFamily="34" charset="-120"/>
               </a:rPr>
-              <a:t>  code-owner (6fe1207efb8e)</a:t>
+              <a:t>  code-owner (68f3d1d6f609)</a:t>
             </a:r>
             <a:endParaRPr lang="en-US" sz="1000" dirty="0"/>
           </a:p>
@@ -6762,7 +6762,7 @@
                 <a:ea typeface="Courier New" pitchFamily="34" charset="-122"/>
                 <a:cs typeface="Courier New" pitchFamily="34" charset="-120"/>
               </a:rPr>
-              <a:t>  fe1207efb8e"</a:t>
+              <a:t>  8f3d1d6f609"</a:t>
             </a:r>
             <a:endParaRPr lang="en-US" sz="1000" dirty="0"/>
           </a:p>
@@ -7443,7 +7443,7 @@
                 <a:ea typeface="Courier New" pitchFamily="34" charset="-122"/>
                 <a:cs typeface="Courier New" pitchFamily="34" charset="-120"/>
               </a:rPr>
-              <a:t>  release-manager (6fe1207efb8e)</a:t>
+              <a:t>  release-manager (68f3d1d6f609)</a:t>
             </a:r>
             <a:endParaRPr lang="en-US" sz="1000" dirty="0"/>
           </a:p>
@@ -7511,7 +7511,7 @@
                 <a:ea typeface="Courier New" pitchFamily="34" charset="-122"/>
                 <a:cs typeface="Courier New" pitchFamily="34" charset="-120"/>
               </a:rPr>
-              <a:t>  gate" -m "SDLC-Approval: basic-arithmetic:release:6fe1207efb8e"</a:t>
+              <a:t>  gate" -m "SDLC-Approval: basic-arithmetic:release:68f3d1d6f609"</a:t>
             </a:r>
             <a:endParaRPr lang="en-US" sz="1000" dirty="0"/>
           </a:p>
@@ -7794,7 +7794,7 @@
                 <a:ea typeface="Courier New" pitchFamily="34" charset="-122"/>
                 <a:cs typeface="Courier New" pitchFamily="34" charset="-120"/>
               </a:rPr>
-              <a:t>✓ basic-arithmetic/intent alice valid d07fd095 trailer: missing</a:t>
+              <a:t>✓ basic-arithmetic/intent alice valid aa29dfa0 trailer: missing</a:t>
             </a:r>
             <a:endParaRPr lang="en-US" sz="1000" dirty="0"/>
           </a:p>
@@ -7811,7 +7811,7 @@
                 <a:ea typeface="Courier New" pitchFamily="34" charset="-122"/>
                 <a:cs typeface="Courier New" pitchFamily="34" charset="-120"/>
               </a:rPr>
-              <a:t>✓ basic-arithmetic/spec alice valid d1469aa1 trailer: missing</a:t>
+              <a:t>✓ basic-arithmetic/spec alice valid 07aae0ea trailer: missing</a:t>
             </a:r>
             <a:endParaRPr lang="en-US" sz="1000" dirty="0"/>
           </a:p>
@@ -7828,7 +7828,7 @@
                 <a:ea typeface="Courier New" pitchFamily="34" charset="-122"/>
                 <a:cs typeface="Courier New" pitchFamily="34" charset="-120"/>
               </a:rPr>
-              <a:t>✗ basic-arithmetic/plan bob wrong-signer d1469aa1 trailer: missing</a:t>
+              <a:t>✗ basic-arithmetic/plan bob wrong-signer 07aae0ea trailer: missing</a:t>
             </a:r>
             <a:endParaRPr lang="en-US" sz="1000" dirty="0"/>
           </a:p>
@@ -7845,7 +7845,7 @@
                 <a:ea typeface="Courier New" pitchFamily="34" charset="-122"/>
                 <a:cs typeface="Courier New" pitchFamily="34" charset="-120"/>
               </a:rPr>
-              <a:t>✓ basic-arithmetic/review carol valid 24f02c2c trailer: missing</a:t>
+              <a:t>✓ basic-arithmetic/review carol valid ef3a9334 trailer: missing</a:t>
             </a:r>
             <a:endParaRPr lang="en-US" sz="1000" dirty="0"/>
           </a:p>
@@ -7862,7 +7862,7 @@
                 <a:ea typeface="Courier New" pitchFamily="34" charset="-122"/>
                 <a:cs typeface="Courier New" pitchFamily="34" charset="-120"/>
               </a:rPr>
-              <a:t>✓ basic-arithmetic/release alice valid 39083661 trailer: missing</a:t>
+              <a:t>✓ basic-arithmetic/release alice valid 493c4116 trailer: missing</a:t>
             </a:r>
             <a:endParaRPr lang="en-US" sz="1000" dirty="0"/>
           </a:p>
@@ -7879,7 +7879,7 @@
                 <a:ea typeface="Courier New" pitchFamily="34" charset="-122"/>
                 <a:cs typeface="Courier New" pitchFamily="34" charset="-120"/>
               </a:rPr>
-              <a:t>✓ openspec/roles.yaml alice@calc.example bootstrap c1f3d67d</a:t>
+              <a:t>✓ openspec/roles.yaml alice@calc.example bootstrap a531106e</a:t>
             </a:r>
             <a:endParaRPr lang="en-US" sz="1000" dirty="0"/>
           </a:p>
@@ -14365,7 +14365,7 @@
                 <a:ea typeface="Courier New" pitchFamily="34" charset="-122"/>
                 <a:cs typeface="Courier New" pitchFamily="34" charset="-120"/>
               </a:rPr>
-              <a:t>  archived) · sdlc 0.20.3, license:</a:t>
+              <a:t>  archived) · sdlc 0.21.0, license:</a:t>
             </a:r>
             <a:endParaRPr lang="en-US" sz="1000" dirty="0"/>
           </a:p>
@@ -14501,7 +14501,7 @@
                 <a:ea typeface="Courier New" pitchFamily="34" charset="-122"/>
                 <a:cs typeface="Courier New" pitchFamily="34" charset="-120"/>
               </a:rPr>
-              <a:t>  agent commits: 0 of 12 (SDLC-Agent</a:t>
+              <a:t>  agent commits: 0 of 13 (SDLC-Agent</a:t>
             </a:r>
             <a:endParaRPr lang="en-US" sz="1000" dirty="0"/>
           </a:p>
@@ -14552,7 +14552,7 @@
                 <a:ea typeface="Courier New" pitchFamily="34" charset="-122"/>
                 <a:cs typeface="Courier New" pitchFamily="34" charset="-120"/>
               </a:rPr>
-              <a:t>  intent 3 · spec 3 · plan 16 · review 3;</a:t>
+              <a:t>  intent 3 · spec 3 · plan 17 · review 3;</a:t>
             </a:r>
             <a:endParaRPr lang="en-US" sz="1000" dirty="0"/>
           </a:p>
@@ -14852,7 +14852,7 @@
                 <a:ea typeface="Courier New" pitchFamily="34" charset="-122"/>
                 <a:cs typeface="Courier New" pitchFamily="34" charset="-120"/>
               </a:rPr>
-              <a:t>(last 15 of 47 entries; --limit to see</a:t>
+              <a:t>(last 15 of 58 entries; --limit to see</a:t>
             </a:r>
             <a:endParaRPr lang="en-US" sz="1000" dirty="0"/>
           </a:p>
@@ -14886,7 +14886,7 @@
                 <a:ea typeface="Courier New" pitchFamily="34" charset="-122"/>
                 <a:cs typeface="Courier New" pitchFamily="34" charset="-120"/>
               </a:rPr>
-              <a:t>2026-10-14T10:32:30.587Z  gate.review.await</a:t>
+              <a:t>2026-10-14T17:26:25.035Z  gate.review.await</a:t>
             </a:r>
             <a:endParaRPr lang="en-US" sz="1000" dirty="0"/>
           </a:p>
@@ -14920,7 +14920,7 @@
                 <a:ea typeface="Courier New" pitchFamily="34" charset="-122"/>
                 <a:cs typeface="Courier New" pitchFamily="34" charset="-120"/>
               </a:rPr>
-              <a:t>  sha256:6fe1207efb8ef41b5efedff0ce30e74846</a:t>
+              <a:t>  sha256:68f3d1d6f609ae3cfc12ad5fee55a000a6</a:t>
             </a:r>
             <a:endParaRPr lang="en-US" sz="1000" dirty="0"/>
           </a:p>
@@ -14937,7 +14937,7 @@
                 <a:ea typeface="Courier New" pitchFamily="34" charset="-122"/>
                 <a:cs typeface="Courier New" pitchFamily="34" charset="-120"/>
               </a:rPr>
-              <a:t>  88a9279510cdd27fe2a73b0f11f4ad [sdlc</a:t>
+              <a:t>  8a4c368438c5c1ddacd57fe5cd389f [sdlc</a:t>
             </a:r>
             <a:endParaRPr lang="en-US" sz="1000" dirty="0"/>
           </a:p>
@@ -14954,7 +14954,7 @@
                 <a:ea typeface="Courier New" pitchFamily="34" charset="-122"/>
                 <a:cs typeface="Courier New" pitchFamily="34" charset="-120"/>
               </a:rPr>
-              <a:t>  0.20.3 · community]</a:t>
+              <a:t>  0.21.0 · community]</a:t>
             </a:r>
             <a:endParaRPr lang="en-US" sz="1000" dirty="0"/>
           </a:p>
@@ -14971,7 +14971,7 @@
                 <a:ea typeface="Courier New" pitchFamily="34" charset="-122"/>
                 <a:cs typeface="Courier New" pitchFamily="34" charset="-120"/>
               </a:rPr>
-              <a:t>2026-10-14T10:32:33.820Z  gate.review.appro</a:t>
+              <a:t>2026-10-14T17:26:28.376Z  gate.review.appro</a:t>
             </a:r>
             <a:endParaRPr lang="en-US" sz="1000" dirty="0"/>
           </a:p>
@@ -15022,7 +15022,7 @@
                 <a:ea typeface="Courier New" pitchFamily="34" charset="-122"/>
                 <a:cs typeface="Courier New" pitchFamily="34" charset="-120"/>
               </a:rPr>
-              <a:t>  [sdlc 0.20.3 · community]</a:t>
+              <a:t>  [sdlc 0.21.0 · community]</a:t>
             </a:r>
             <a:endParaRPr lang="en-US" sz="1000" dirty="0"/>
           </a:p>
@@ -15039,7 +15039,7 @@
                 <a:ea typeface="Courier New" pitchFamily="34" charset="-122"/>
                 <a:cs typeface="Courier New" pitchFamily="34" charset="-120"/>
               </a:rPr>
-              <a:t>2026-10-14T10:32:40.341Z  gate.release.appr</a:t>
+              <a:t>2026-10-14T17:26:35.518Z  gate.release.appr</a:t>
             </a:r>
             <a:endParaRPr lang="en-US" sz="1000" dirty="0"/>
           </a:p>
@@ -15090,7 +15090,7 @@
                 <a:ea typeface="Courier New" pitchFamily="34" charset="-122"/>
                 <a:cs typeface="Courier New" pitchFamily="34" charset="-120"/>
               </a:rPr>
-              <a:t>  release-manager [sdlc 0.20.3 · community]</a:t>
+              <a:t>  release-manager [sdlc 0.21.0 · community]</a:t>
             </a:r>
             <a:endParaRPr lang="en-US" sz="1000" dirty="0"/>
           </a:p>
@@ -16418,7 +16418,7 @@
                 <a:ea typeface="Courier New" pitchFamily="34" charset="-122"/>
                 <a:cs typeface="Courier New" pitchFamily="34" charset="-120"/>
               </a:rPr>
-              <a:t>✓ test (1.0s)</a:t>
+              <a:t>✓ test (1.1s)</a:t>
             </a:r>
             <a:endParaRPr lang="en-US" sz="1000" dirty="0"/>
           </a:p>
@@ -16871,7 +16871,7 @@
                 <a:ea typeface="Courier New" pitchFamily="34" charset="-122"/>
                 <a:cs typeface="Courier New" pitchFamily="34" charset="-120"/>
               </a:rPr>
-              <a:t>      "id": "20261014T103334891Z-ci-green-e</a:t>
+              <a:t>      "id": "20261014T172731682Z-ci-green-5</a:t>
             </a:r>
             <a:endParaRPr lang="en-US" sz="1000" dirty="0"/>
           </a:p>
@@ -16888,7 +16888,7 @@
                 <a:ea typeface="Courier New" pitchFamily="34" charset="-122"/>
                 <a:cs typeface="Courier New" pitchFamily="34" charset="-120"/>
               </a:rPr>
-              <a:t>  d62fc",</a:t>
+              <a:t>  552ba",</a:t>
             </a:r>
             <a:endParaRPr lang="en-US" sz="1000" dirty="0"/>
           </a:p>
@@ -17024,7 +17024,7 @@
                 <a:ea typeface="Courier New" pitchFamily="34" charset="-122"/>
                 <a:cs typeface="Courier New" pitchFamily="34" charset="-120"/>
               </a:rPr>
-              <a:t>        "ref": "a5ef3f4aff403e94f01fcaa581a</a:t>
+              <a:t>        "ref": "e27ad9feb0f2d717a3eb584c84b</a:t>
             </a:r>
             <a:endParaRPr lang="en-US" sz="1000" dirty="0"/>
           </a:p>
@@ -17041,7 +17041,7 @@
                 <a:ea typeface="Courier New" pitchFamily="34" charset="-122"/>
                 <a:cs typeface="Courier New" pitchFamily="34" charset="-120"/>
               </a:rPr>
-              <a:t>  2a9e814b197fa",</a:t>
+              <a:t>  eb4b3c4190bb1",</a:t>
             </a:r>
             <a:endParaRPr lang="en-US" sz="1000" dirty="0"/>
           </a:p>
@@ -19615,7 +19615,7 @@
                 <a:ea typeface="Cambria" pitchFamily="34" charset="-122"/>
                 <a:cs typeface="Cambria" pitchFamily="34" charset="-120"/>
               </a:rPr>
-              <a:t>114</a:t>
+              <a:t>124</a:t>
             </a:r>
             <a:endParaRPr lang="en-US" sz="6000" dirty="0"/>
           </a:p>
@@ -19720,7 +19720,7 @@
                 <a:ea typeface="Cambria" pitchFamily="34" charset="-122"/>
                 <a:cs typeface="Cambria" pitchFamily="34" charset="-120"/>
               </a:rPr>
-              <a:t>79</a:t>
+              <a:t>87</a:t>
             </a:r>
             <a:endParaRPr lang="en-US" sz="6000" dirty="0"/>
           </a:p>
@@ -19759,7 +19759,7 @@
                 <a:ea typeface="Calibri" pitchFamily="34" charset="-122"/>
                 <a:cs typeface="Calibri" pitchFamily="34" charset="-120"/>
               </a:rPr>
-              <a:t>of 79 commands</a:t>
+              <a:t>of 87 commands</a:t>
             </a:r>
             <a:endParaRPr lang="en-US" sz="1600" dirty="0"/>
           </a:p>
@@ -24010,7 +24010,7 @@
         <p:spPr>
           <a:xfrm>
             <a:off x="5313680" y="5486400"/>
-            <a:ext cx="945896" cy="256032"/>
+            <a:ext cx="1540256" cy="256032"/>
           </a:xfrm>
           <a:prstGeom prst="roundRect">
             <a:avLst>
@@ -24037,7 +24037,7 @@
         <p:spPr>
           <a:xfrm>
             <a:off x="5313680" y="5486400"/>
-            <a:ext cx="945896" cy="256032"/>
+            <a:ext cx="1540256" cy="256032"/>
           </a:xfrm>
           <a:prstGeom prst="rect">
             <a:avLst/>
@@ -24061,7 +24061,7 @@
                 <a:ea typeface="Calibri" pitchFamily="34" charset="-122"/>
                 <a:cs typeface="Calibri" pitchFamily="34" charset="-120"/>
               </a:rPr>
-              <a:t>task export</a:t>
+              <a:t>task executors token</a:t>
             </a:r>
             <a:endParaRPr lang="en-US" sz="1000" dirty="0"/>
           </a:p>
@@ -24075,8 +24075,8 @@
         </p:nvSpPr>
         <p:spPr>
           <a:xfrm>
-            <a:off x="6351016" y="5486400"/>
-            <a:ext cx="1342136" cy="256032"/>
+            <a:off x="6945376" y="5486400"/>
+            <a:ext cx="945896" cy="256032"/>
           </a:xfrm>
           <a:prstGeom prst="roundRect">
             <a:avLst>
@@ -24102,8 +24102,8 @@
         </p:nvSpPr>
         <p:spPr>
           <a:xfrm>
-            <a:off x="6351016" y="5486400"/>
-            <a:ext cx="1342136" cy="256032"/>
+            <a:off x="6945376" y="5486400"/>
+            <a:ext cx="945896" cy="256032"/>
           </a:xfrm>
           <a:prstGeom prst="rect">
             <a:avLst/>
@@ -24127,7 +24127,7 @@
                 <a:ea typeface="Calibri" pitchFamily="34" charset="-122"/>
                 <a:cs typeface="Calibri" pitchFamily="34" charset="-120"/>
               </a:rPr>
-              <a:t>task check-result</a:t>
+              <a:t>task export</a:t>
             </a:r>
             <a:endParaRPr lang="en-US" sz="1000" dirty="0"/>
           </a:p>
@@ -24141,8 +24141,8 @@
         </p:nvSpPr>
         <p:spPr>
           <a:xfrm>
-            <a:off x="7784592" y="5486400"/>
-            <a:ext cx="615696" cy="256032"/>
+            <a:off x="7982712" y="5486400"/>
+            <a:ext cx="1342136" cy="256032"/>
           </a:xfrm>
           <a:prstGeom prst="roundRect">
             <a:avLst>
@@ -24168,8 +24168,8 @@
         </p:nvSpPr>
         <p:spPr>
           <a:xfrm>
-            <a:off x="7784592" y="5486400"/>
-            <a:ext cx="615696" cy="256032"/>
+            <a:off x="7982712" y="5486400"/>
+            <a:ext cx="1342136" cy="256032"/>
           </a:xfrm>
           <a:prstGeom prst="rect">
             <a:avLst/>
@@ -24193,7 +24193,7 @@
                 <a:ea typeface="Calibri" pitchFamily="34" charset="-122"/>
                 <a:cs typeface="Calibri" pitchFamily="34" charset="-120"/>
               </a:rPr>
-              <a:t>verify</a:t>
+              <a:t>task check-result</a:t>
             </a:r>
             <a:endParaRPr lang="en-US" sz="1000" dirty="0"/>
           </a:p>
@@ -24207,8 +24207,8 @@
         </p:nvSpPr>
         <p:spPr>
           <a:xfrm>
-            <a:off x="8491728" y="5486400"/>
-            <a:ext cx="615696" cy="256032"/>
+            <a:off x="9416288" y="5486400"/>
+            <a:ext cx="879856" cy="256032"/>
           </a:xfrm>
           <a:prstGeom prst="roundRect">
             <a:avLst>
@@ -24234,8 +24234,8 @@
         </p:nvSpPr>
         <p:spPr>
           <a:xfrm>
-            <a:off x="8491728" y="5486400"/>
-            <a:ext cx="615696" cy="256032"/>
+            <a:off x="9416288" y="5486400"/>
+            <a:ext cx="879856" cy="256032"/>
           </a:xfrm>
           <a:prstGeom prst="rect">
             <a:avLst/>
@@ -24259,7 +24259,7 @@
                 <a:ea typeface="Calibri" pitchFamily="34" charset="-122"/>
                 <a:cs typeface="Calibri" pitchFamily="34" charset="-120"/>
               </a:rPr>
-              <a:t>review</a:t>
+              <a:t>board list</a:t>
             </a:r>
             <a:endParaRPr lang="en-US" sz="1000" dirty="0"/>
           </a:p>
@@ -24273,8 +24273,8 @@
         </p:nvSpPr>
         <p:spPr>
           <a:xfrm>
-            <a:off x="9198864" y="5486400"/>
-            <a:ext cx="747776" cy="256032"/>
+            <a:off x="10387584" y="5486400"/>
+            <a:ext cx="1144016" cy="256032"/>
           </a:xfrm>
           <a:prstGeom prst="roundRect">
             <a:avLst>
@@ -24300,8 +24300,8 @@
         </p:nvSpPr>
         <p:spPr>
           <a:xfrm>
-            <a:off x="9198864" y="5486400"/>
-            <a:ext cx="747776" cy="256032"/>
+            <a:off x="10387584" y="5486400"/>
+            <a:ext cx="1144016" cy="256032"/>
           </a:xfrm>
           <a:prstGeom prst="rect">
             <a:avLst/>
@@ -24325,7 +24325,7 @@
                 <a:ea typeface="Calibri" pitchFamily="34" charset="-122"/>
                 <a:cs typeface="Calibri" pitchFamily="34" charset="-120"/>
               </a:rPr>
-              <a:t>validate</a:t>
+              <a:t>board dispatch</a:t>
             </a:r>
             <a:endParaRPr lang="en-US" sz="1000" dirty="0"/>
           </a:p>
@@ -24339,8 +24339,8 @@
         </p:nvSpPr>
         <p:spPr>
           <a:xfrm>
-            <a:off x="10038080" y="5486400"/>
-            <a:ext cx="681736" cy="256032"/>
+            <a:off x="457200" y="5833872"/>
+            <a:ext cx="945896" cy="256032"/>
           </a:xfrm>
           <a:prstGeom prst="roundRect">
             <a:avLst>
@@ -24366,8 +24366,8 @@
         </p:nvSpPr>
         <p:spPr>
           <a:xfrm>
-            <a:off x="10038080" y="5486400"/>
-            <a:ext cx="681736" cy="256032"/>
+            <a:off x="457200" y="5833872"/>
+            <a:ext cx="945896" cy="256032"/>
           </a:xfrm>
           <a:prstGeom prst="rect">
             <a:avLst/>
@@ -24391,7 +24391,7 @@
                 <a:ea typeface="Calibri" pitchFamily="34" charset="-122"/>
                 <a:cs typeface="Calibri" pitchFamily="34" charset="-120"/>
               </a:rPr>
-              <a:t>archive</a:t>
+              <a:t>board claim</a:t>
             </a:r>
             <a:endParaRPr lang="en-US" sz="1000" dirty="0"/>
           </a:p>
@@ -24405,8 +24405,8 @@
         </p:nvSpPr>
         <p:spPr>
           <a:xfrm>
-            <a:off x="10811256" y="5486400"/>
-            <a:ext cx="549656" cy="256032"/>
+            <a:off x="1494536" y="5833872"/>
+            <a:ext cx="1210056" cy="256032"/>
           </a:xfrm>
           <a:prstGeom prst="roundRect">
             <a:avLst>
@@ -24432,8 +24432,8 @@
         </p:nvSpPr>
         <p:spPr>
           <a:xfrm>
-            <a:off x="10811256" y="5486400"/>
-            <a:ext cx="549656" cy="256032"/>
+            <a:off x="1494536" y="5833872"/>
+            <a:ext cx="1210056" cy="256032"/>
           </a:xfrm>
           <a:prstGeom prst="rect">
             <a:avLst/>
@@ -24457,7 +24457,7 @@
                 <a:ea typeface="Calibri" pitchFamily="34" charset="-122"/>
                 <a:cs typeface="Calibri" pitchFamily="34" charset="-120"/>
               </a:rPr>
-              <a:t>audit</a:t>
+              <a:t>board heartbeat</a:t>
             </a:r>
             <a:endParaRPr lang="en-US" sz="1000" dirty="0"/>
           </a:p>
@@ -24471,8 +24471,8 @@
         </p:nvSpPr>
         <p:spPr>
           <a:xfrm>
-            <a:off x="457200" y="5833872"/>
-            <a:ext cx="813816" cy="256032"/>
+            <a:off x="2796032" y="5833872"/>
+            <a:ext cx="1077976" cy="256032"/>
           </a:xfrm>
           <a:prstGeom prst="roundRect">
             <a:avLst>
@@ -24498,8 +24498,8 @@
         </p:nvSpPr>
         <p:spPr>
           <a:xfrm>
-            <a:off x="457200" y="5833872"/>
-            <a:ext cx="813816" cy="256032"/>
+            <a:off x="2796032" y="5833872"/>
+            <a:ext cx="1077976" cy="256032"/>
           </a:xfrm>
           <a:prstGeom prst="rect">
             <a:avLst/>
@@ -24523,7 +24523,7 @@
                 <a:ea typeface="Calibri" pitchFamily="34" charset="-122"/>
                 <a:cs typeface="Calibri" pitchFamily="34" charset="-120"/>
               </a:rPr>
-              <a:t>changelog</a:t>
+              <a:t>board release</a:t>
             </a:r>
             <a:endParaRPr lang="en-US" sz="1000" dirty="0"/>
           </a:p>
@@ -24537,8 +24537,8 @@
         </p:nvSpPr>
         <p:spPr>
           <a:xfrm>
-            <a:off x="1362456" y="5833872"/>
-            <a:ext cx="615696" cy="256032"/>
+            <a:off x="3965448" y="5833872"/>
+            <a:ext cx="1011936" cy="256032"/>
           </a:xfrm>
           <a:prstGeom prst="roundRect">
             <a:avLst>
@@ -24564,8 +24564,8 @@
         </p:nvSpPr>
         <p:spPr>
           <a:xfrm>
-            <a:off x="1362456" y="5833872"/>
-            <a:ext cx="615696" cy="256032"/>
+            <a:off x="3965448" y="5833872"/>
+            <a:ext cx="1011936" cy="256032"/>
           </a:xfrm>
           <a:prstGeom prst="rect">
             <a:avLst/>
@@ -24589,7 +24589,7 @@
                 <a:ea typeface="Calibri" pitchFamily="34" charset="-122"/>
                 <a:cs typeface="Calibri" pitchFamily="34" charset="-120"/>
               </a:rPr>
-              <a:t>report</a:t>
+              <a:t>board submit</a:t>
             </a:r>
             <a:endParaRPr lang="en-US" sz="1000" dirty="0"/>
           </a:p>
@@ -24603,8 +24603,8 @@
         </p:nvSpPr>
         <p:spPr>
           <a:xfrm>
-            <a:off x="2069592" y="5833872"/>
-            <a:ext cx="813816" cy="256032"/>
+            <a:off x="5068824" y="5833872"/>
+            <a:ext cx="1011936" cy="256032"/>
           </a:xfrm>
           <a:prstGeom prst="roundRect">
             <a:avLst>
@@ -24630,8 +24630,8 @@
         </p:nvSpPr>
         <p:spPr>
           <a:xfrm>
-            <a:off x="2069592" y="5833872"/>
-            <a:ext cx="813816" cy="256032"/>
+            <a:off x="5068824" y="5833872"/>
+            <a:ext cx="1011936" cy="256032"/>
           </a:xfrm>
           <a:prstGeom prst="rect">
             <a:avLst/>
@@ -24655,7 +24655,7 @@
                 <a:ea typeface="Calibri" pitchFamily="34" charset="-122"/>
                 <a:cs typeface="Calibri" pitchFamily="34" charset="-120"/>
               </a:rPr>
-              <a:t>dashboard</a:t>
+              <a:t>board reopen</a:t>
             </a:r>
             <a:endParaRPr lang="en-US" sz="1000" dirty="0"/>
           </a:p>
@@ -24669,8 +24669,8 @@
         </p:nvSpPr>
         <p:spPr>
           <a:xfrm>
-            <a:off x="2974848" y="5833872"/>
-            <a:ext cx="417576" cy="256032"/>
+            <a:off x="6172200" y="5833872"/>
+            <a:ext cx="615696" cy="256032"/>
           </a:xfrm>
           <a:prstGeom prst="roundRect">
             <a:avLst>
@@ -24696,8 +24696,8 @@
         </p:nvSpPr>
         <p:spPr>
           <a:xfrm>
-            <a:off x="2974848" y="5833872"/>
-            <a:ext cx="417576" cy="256032"/>
+            <a:off x="6172200" y="5833872"/>
+            <a:ext cx="615696" cy="256032"/>
           </a:xfrm>
           <a:prstGeom prst="rect">
             <a:avLst/>
@@ -24721,7 +24721,7 @@
                 <a:ea typeface="Calibri" pitchFamily="34" charset="-122"/>
                 <a:cs typeface="Calibri" pitchFamily="34" charset="-120"/>
               </a:rPr>
-              <a:t>log</a:t>
+              <a:t>verify</a:t>
             </a:r>
             <a:endParaRPr lang="en-US" sz="1000" dirty="0"/>
           </a:p>
@@ -24735,8 +24735,8 @@
         </p:nvSpPr>
         <p:spPr>
           <a:xfrm>
-            <a:off x="3483864" y="5833872"/>
-            <a:ext cx="681736" cy="256032"/>
+            <a:off x="6879336" y="5833872"/>
+            <a:ext cx="615696" cy="256032"/>
           </a:xfrm>
           <a:prstGeom prst="roundRect">
             <a:avLst>
@@ -24762,8 +24762,8 @@
         </p:nvSpPr>
         <p:spPr>
           <a:xfrm>
-            <a:off x="3483864" y="5833872"/>
-            <a:ext cx="681736" cy="256032"/>
+            <a:off x="6879336" y="5833872"/>
+            <a:ext cx="615696" cy="256032"/>
           </a:xfrm>
           <a:prstGeom prst="rect">
             <a:avLst/>
@@ -24787,7 +24787,7 @@
                 <a:ea typeface="Calibri" pitchFamily="34" charset="-122"/>
                 <a:cs typeface="Calibri" pitchFamily="34" charset="-120"/>
               </a:rPr>
-              <a:t>license</a:t>
+              <a:t>review</a:t>
             </a:r>
             <a:endParaRPr lang="en-US" sz="1000" dirty="0"/>
           </a:p>
@@ -24801,8 +24801,8 @@
         </p:nvSpPr>
         <p:spPr>
           <a:xfrm>
-            <a:off x="4257040" y="5833872"/>
-            <a:ext cx="615696" cy="256032"/>
+            <a:off x="7586472" y="5833872"/>
+            <a:ext cx="747776" cy="256032"/>
           </a:xfrm>
           <a:prstGeom prst="roundRect">
             <a:avLst>
@@ -24828,8 +24828,8 @@
         </p:nvSpPr>
         <p:spPr>
           <a:xfrm>
-            <a:off x="4257040" y="5833872"/>
-            <a:ext cx="615696" cy="256032"/>
+            <a:off x="7586472" y="5833872"/>
+            <a:ext cx="747776" cy="256032"/>
           </a:xfrm>
           <a:prstGeom prst="rect">
             <a:avLst/>
@@ -24853,7 +24853,7 @@
                 <a:ea typeface="Calibri" pitchFamily="34" charset="-122"/>
                 <a:cs typeface="Calibri" pitchFamily="34" charset="-120"/>
               </a:rPr>
-              <a:t>doctor</a:t>
+              <a:t>validate</a:t>
             </a:r>
             <a:endParaRPr lang="en-US" sz="1000" dirty="0"/>
           </a:p>
@@ -24867,8 +24867,8 @@
         </p:nvSpPr>
         <p:spPr>
           <a:xfrm>
-            <a:off x="4964176" y="5833872"/>
-            <a:ext cx="615696" cy="256032"/>
+            <a:off x="8425688" y="5833872"/>
+            <a:ext cx="681736" cy="256032"/>
           </a:xfrm>
           <a:prstGeom prst="roundRect">
             <a:avLst>
@@ -24894,8 +24894,8 @@
         </p:nvSpPr>
         <p:spPr>
           <a:xfrm>
-            <a:off x="4964176" y="5833872"/>
-            <a:ext cx="615696" cy="256032"/>
+            <a:off x="8425688" y="5833872"/>
+            <a:ext cx="681736" cy="256032"/>
           </a:xfrm>
           <a:prstGeom prst="rect">
             <a:avLst/>
@@ -24919,7 +24919,7 @@
                 <a:ea typeface="Calibri" pitchFamily="34" charset="-122"/>
                 <a:cs typeface="Calibri" pitchFamily="34" charset="-120"/>
               </a:rPr>
-              <a:t>health</a:t>
+              <a:t>archive</a:t>
             </a:r>
             <a:endParaRPr lang="en-US" sz="1000" dirty="0"/>
           </a:p>
@@ -24933,8 +24933,8 @@
         </p:nvSpPr>
         <p:spPr>
           <a:xfrm>
-            <a:off x="5671312" y="5833872"/>
-            <a:ext cx="1011936" cy="256032"/>
+            <a:off x="9198864" y="5833872"/>
+            <a:ext cx="549656" cy="256032"/>
           </a:xfrm>
           <a:prstGeom prst="roundRect">
             <a:avLst>
@@ -24960,8 +24960,8 @@
         </p:nvSpPr>
         <p:spPr>
           <a:xfrm>
-            <a:off x="5671312" y="5833872"/>
-            <a:ext cx="1011936" cy="256032"/>
+            <a:off x="9198864" y="5833872"/>
+            <a:ext cx="549656" cy="256032"/>
           </a:xfrm>
           <a:prstGeom prst="rect">
             <a:avLst/>
@@ -24985,7 +24985,7 @@
                 <a:ea typeface="Calibri" pitchFamily="34" charset="-122"/>
                 <a:cs typeface="Calibri" pitchFamily="34" charset="-120"/>
               </a:rPr>
-              <a:t>plugin build</a:t>
+              <a:t>audit</a:t>
             </a:r>
             <a:endParaRPr lang="en-US" sz="1000" dirty="0"/>
           </a:p>
@@ -24999,8 +24999,8 @@
         </p:nvSpPr>
         <p:spPr>
           <a:xfrm>
-            <a:off x="6774688" y="5833872"/>
-            <a:ext cx="549656" cy="256032"/>
+            <a:off x="9839960" y="5833872"/>
+            <a:ext cx="813816" cy="256032"/>
           </a:xfrm>
           <a:prstGeom prst="roundRect">
             <a:avLst>
@@ -25026,8 +25026,8 @@
         </p:nvSpPr>
         <p:spPr>
           <a:xfrm>
-            <a:off x="6774688" y="5833872"/>
-            <a:ext cx="549656" cy="256032"/>
+            <a:off x="9839960" y="5833872"/>
+            <a:ext cx="813816" cy="256032"/>
           </a:xfrm>
           <a:prstGeom prst="rect">
             <a:avLst/>
@@ -25051,7 +25051,7 @@
                 <a:ea typeface="Calibri" pitchFamily="34" charset="-122"/>
                 <a:cs typeface="Calibri" pitchFamily="34" charset="-120"/>
               </a:rPr>
-              <a:t>trace</a:t>
+              <a:t>changelog</a:t>
             </a:r>
             <a:endParaRPr lang="en-US" sz="1000" dirty="0"/>
           </a:p>
@@ -25065,8 +25065,8 @@
         </p:nvSpPr>
         <p:spPr>
           <a:xfrm>
-            <a:off x="7415784" y="5833872"/>
-            <a:ext cx="483616" cy="256032"/>
+            <a:off x="10745216" y="5833872"/>
+            <a:ext cx="615696" cy="256032"/>
           </a:xfrm>
           <a:prstGeom prst="roundRect">
             <a:avLst>
@@ -25092,8 +25092,8 @@
         </p:nvSpPr>
         <p:spPr>
           <a:xfrm>
-            <a:off x="7415784" y="5833872"/>
-            <a:ext cx="483616" cy="256032"/>
+            <a:off x="10745216" y="5833872"/>
+            <a:ext cx="615696" cy="256032"/>
           </a:xfrm>
           <a:prstGeom prst="rect">
             <a:avLst/>
@@ -25117,73 +25117,7 @@
                 <a:ea typeface="Calibri" pitchFamily="34" charset="-122"/>
                 <a:cs typeface="Calibri" pitchFamily="34" charset="-120"/>
               </a:rPr>
-              <a:t>hook</a:t>
-            </a:r>
-            <a:endParaRPr lang="en-US" sz="1000" dirty="0"/>
-          </a:p>
-        </p:txBody>
-      </p:sp>
-      <p:sp>
-        <p:nvSpPr>
-          <p:cNvPr id="172" name="Shape 170"/>
-          <p:cNvSpPr/>
-          <p:nvPr/>
-        </p:nvSpPr>
-        <p:spPr>
-          <a:xfrm>
-            <a:off x="7990840" y="5833872"/>
-            <a:ext cx="747776" cy="256032"/>
-          </a:xfrm>
-          <a:prstGeom prst="roundRect">
-            <a:avLst>
-              <a:gd name="adj" fmla="val 50000"/>
-            </a:avLst>
-          </a:prstGeom>
-          <a:solidFill>
-            <a:srgbClr val="F3F5F8"/>
-          </a:solidFill>
-          <a:ln w="12700">
-            <a:solidFill>
-              <a:srgbClr val="F3F5F8"/>
-            </a:solidFill>
-            <a:prstDash val="solid"/>
-          </a:ln>
-        </p:spPr>
-      </p:sp>
-      <p:sp>
-        <p:nvSpPr>
-          <p:cNvPr id="173" name="Text 171"/>
-          <p:cNvSpPr txBox="1"/>
-          <p:nvPr/>
-        </p:nvSpPr>
-        <p:spPr>
-          <a:xfrm>
-            <a:off x="7990840" y="5833872"/>
-            <a:ext cx="747776" cy="256032"/>
-          </a:xfrm>
-          <a:prstGeom prst="rect">
-            <a:avLst/>
-          </a:prstGeom>
-          <a:noFill/>
-          <a:ln/>
-        </p:spPr>
-        <p:txBody>
-          <a:bodyPr wrap="square" lIns="0" tIns="0" rIns="0" bIns="0" rtlCol="0" anchor="ctr"/>
-          <a:lstStyle/>
-          <a:p>
-            <a:pPr algn="ctr" indent="0" marL="0">
-              <a:buNone/>
-            </a:pPr>
-            <a:r>
-              <a:rPr lang="en-US" sz="1000" dirty="0">
-                <a:solidFill>
-                  <a:srgbClr val="1F2430"/>
-                </a:solidFill>
-                <a:latin typeface="Calibri" pitchFamily="34" charset="0"/>
-                <a:ea typeface="Calibri" pitchFamily="34" charset="-122"/>
-                <a:cs typeface="Calibri" pitchFamily="34" charset="-120"/>
-              </a:rPr>
-              <a:t>openspec</a:t>
+              <a:t>report</a:t>
             </a:r>
             <a:endParaRPr lang="en-US" sz="1000" dirty="0"/>
           </a:p>
@@ -27829,7 +27763,7 @@
                 <a:ea typeface="Courier New" pitchFamily="34" charset="-122"/>
                 <a:cs typeface="Courier New" pitchFamily="34" charset="-120"/>
               </a:rPr>
-              <a:t>  sdlc 0.20.3, license: community</a:t>
+              <a:t>  sdlc 0.21.0, license: community</a:t>
             </a:r>
             <a:endParaRPr lang="en-US" sz="1000" dirty="0"/>
           </a:p>

--- a/docs/demo/sdlc-calculator-demo.en.pptx
+++ b/docs/demo/sdlc-calculator-demo.en.pptx
@@ -6660,7 +6660,7 @@
                 <a:ea typeface="Courier New" pitchFamily="34" charset="-122"/>
                 <a:cs typeface="Courier New" pitchFamily="34" charset="-120"/>
               </a:rPr>
-              <a:t>  code-owner (68f3d1d6f609)</a:t>
+              <a:t>  code-owner (6c914d1d9eb7)</a:t>
             </a:r>
             <a:endParaRPr lang="en-US" sz="1000" dirty="0"/>
           </a:p>
@@ -6762,7 +6762,7 @@
                 <a:ea typeface="Courier New" pitchFamily="34" charset="-122"/>
                 <a:cs typeface="Courier New" pitchFamily="34" charset="-120"/>
               </a:rPr>
-              <a:t>  8f3d1d6f609"</a:t>
+              <a:t>  c914d1d9eb7"</a:t>
             </a:r>
             <a:endParaRPr lang="en-US" sz="1000" dirty="0"/>
           </a:p>
@@ -7443,7 +7443,7 @@
                 <a:ea typeface="Courier New" pitchFamily="34" charset="-122"/>
                 <a:cs typeface="Courier New" pitchFamily="34" charset="-120"/>
               </a:rPr>
-              <a:t>  release-manager (68f3d1d6f609)</a:t>
+              <a:t>  release-manager (6c914d1d9eb7)</a:t>
             </a:r>
             <a:endParaRPr lang="en-US" sz="1000" dirty="0"/>
           </a:p>
@@ -7511,7 +7511,7 @@
                 <a:ea typeface="Courier New" pitchFamily="34" charset="-122"/>
                 <a:cs typeface="Courier New" pitchFamily="34" charset="-120"/>
               </a:rPr>
-              <a:t>  gate" -m "SDLC-Approval: basic-arithmetic:release:68f3d1d6f609"</a:t>
+              <a:t>  gate" -m "SDLC-Approval: basic-arithmetic:release:6c914d1d9eb7"</a:t>
             </a:r>
             <a:endParaRPr lang="en-US" sz="1000" dirty="0"/>
           </a:p>
@@ -7794,7 +7794,7 @@
                 <a:ea typeface="Courier New" pitchFamily="34" charset="-122"/>
                 <a:cs typeface="Courier New" pitchFamily="34" charset="-120"/>
               </a:rPr>
-              <a:t>✓ basic-arithmetic/intent alice valid aa29dfa0 trailer: missing</a:t>
+              <a:t>✓ basic-arithmetic/intent alice valid 4129aa86 trailer: missing</a:t>
             </a:r>
             <a:endParaRPr lang="en-US" sz="1000" dirty="0"/>
           </a:p>
@@ -7811,7 +7811,7 @@
                 <a:ea typeface="Courier New" pitchFamily="34" charset="-122"/>
                 <a:cs typeface="Courier New" pitchFamily="34" charset="-120"/>
               </a:rPr>
-              <a:t>✓ basic-arithmetic/spec alice valid 07aae0ea trailer: missing</a:t>
+              <a:t>✓ basic-arithmetic/spec alice valid c8de7833 trailer: missing</a:t>
             </a:r>
             <a:endParaRPr lang="en-US" sz="1000" dirty="0"/>
           </a:p>
@@ -7828,7 +7828,7 @@
                 <a:ea typeface="Courier New" pitchFamily="34" charset="-122"/>
                 <a:cs typeface="Courier New" pitchFamily="34" charset="-120"/>
               </a:rPr>
-              <a:t>✗ basic-arithmetic/plan bob wrong-signer 07aae0ea trailer: missing</a:t>
+              <a:t>✗ basic-arithmetic/plan bob wrong-signer c8de7833 trailer: missing</a:t>
             </a:r>
             <a:endParaRPr lang="en-US" sz="1000" dirty="0"/>
           </a:p>
@@ -7845,7 +7845,7 @@
                 <a:ea typeface="Courier New" pitchFamily="34" charset="-122"/>
                 <a:cs typeface="Courier New" pitchFamily="34" charset="-120"/>
               </a:rPr>
-              <a:t>✓ basic-arithmetic/review carol valid ef3a9334 trailer: missing</a:t>
+              <a:t>✓ basic-arithmetic/review carol valid 3bffe27b trailer: missing</a:t>
             </a:r>
             <a:endParaRPr lang="en-US" sz="1000" dirty="0"/>
           </a:p>
@@ -7862,7 +7862,7 @@
                 <a:ea typeface="Courier New" pitchFamily="34" charset="-122"/>
                 <a:cs typeface="Courier New" pitchFamily="34" charset="-120"/>
               </a:rPr>
-              <a:t>✓ basic-arithmetic/release alice valid 493c4116 trailer: missing</a:t>
+              <a:t>✓ basic-arithmetic/release alice valid f1bbfdef trailer: missing</a:t>
             </a:r>
             <a:endParaRPr lang="en-US" sz="1000" dirty="0"/>
           </a:p>
@@ -7879,7 +7879,7 @@
                 <a:ea typeface="Courier New" pitchFamily="34" charset="-122"/>
                 <a:cs typeface="Courier New" pitchFamily="34" charset="-120"/>
               </a:rPr>
-              <a:t>✓ openspec/roles.yaml alice@calc.example bootstrap a531106e</a:t>
+              <a:t>✓ openspec/roles.yaml alice@calc.example bootstrap 1ce051cb</a:t>
             </a:r>
             <a:endParaRPr lang="en-US" sz="1000" dirty="0"/>
           </a:p>
@@ -14365,7 +14365,7 @@
                 <a:ea typeface="Courier New" pitchFamily="34" charset="-122"/>
                 <a:cs typeface="Courier New" pitchFamily="34" charset="-120"/>
               </a:rPr>
-              <a:t>  archived) · sdlc 0.21.0, license:</a:t>
+              <a:t>  archived) · sdlc 0.21.1, license:</a:t>
             </a:r>
             <a:endParaRPr lang="en-US" sz="1000" dirty="0"/>
           </a:p>
@@ -14552,7 +14552,7 @@
                 <a:ea typeface="Courier New" pitchFamily="34" charset="-122"/>
                 <a:cs typeface="Courier New" pitchFamily="34" charset="-120"/>
               </a:rPr>
-              <a:t>  intent 3 · spec 3 · plan 17 · review 3;</a:t>
+              <a:t>  intent 3 · spec 3 · plan 18 · review 3;</a:t>
             </a:r>
             <a:endParaRPr lang="en-US" sz="1000" dirty="0"/>
           </a:p>
@@ -14886,7 +14886,7 @@
                 <a:ea typeface="Courier New" pitchFamily="34" charset="-122"/>
                 <a:cs typeface="Courier New" pitchFamily="34" charset="-120"/>
               </a:rPr>
-              <a:t>2026-10-14T17:26:25.035Z  gate.review.await</a:t>
+              <a:t>2026-10-14T20:18:24.238Z  gate.review.await</a:t>
             </a:r>
             <a:endParaRPr lang="en-US" sz="1000" dirty="0"/>
           </a:p>
@@ -14920,7 +14920,7 @@
                 <a:ea typeface="Courier New" pitchFamily="34" charset="-122"/>
                 <a:cs typeface="Courier New" pitchFamily="34" charset="-120"/>
               </a:rPr>
-              <a:t>  sha256:68f3d1d6f609ae3cfc12ad5fee55a000a6</a:t>
+              <a:t>  sha256:6c914d1d9eb78e477dde5ae396dfb67010</a:t>
             </a:r>
             <a:endParaRPr lang="en-US" sz="1000" dirty="0"/>
           </a:p>
@@ -14937,7 +14937,7 @@
                 <a:ea typeface="Courier New" pitchFamily="34" charset="-122"/>
                 <a:cs typeface="Courier New" pitchFamily="34" charset="-120"/>
               </a:rPr>
-              <a:t>  8a4c368438c5c1ddacd57fe5cd389f [sdlc</a:t>
+              <a:t>  d7985d68d5d091a42889b2b979e686 [sdlc</a:t>
             </a:r>
             <a:endParaRPr lang="en-US" sz="1000" dirty="0"/>
           </a:p>
@@ -14954,7 +14954,7 @@
                 <a:ea typeface="Courier New" pitchFamily="34" charset="-122"/>
                 <a:cs typeface="Courier New" pitchFamily="34" charset="-120"/>
               </a:rPr>
-              <a:t>  0.21.0 · community]</a:t>
+              <a:t>  0.21.1 · community]</a:t>
             </a:r>
             <a:endParaRPr lang="en-US" sz="1000" dirty="0"/>
           </a:p>
@@ -14971,7 +14971,7 @@
                 <a:ea typeface="Courier New" pitchFamily="34" charset="-122"/>
                 <a:cs typeface="Courier New" pitchFamily="34" charset="-120"/>
               </a:rPr>
-              <a:t>2026-10-14T17:26:28.376Z  gate.review.appro</a:t>
+              <a:t>2026-10-14T20:18:27.607Z  gate.review.appro</a:t>
             </a:r>
             <a:endParaRPr lang="en-US" sz="1000" dirty="0"/>
           </a:p>
@@ -15022,7 +15022,7 @@
                 <a:ea typeface="Courier New" pitchFamily="34" charset="-122"/>
                 <a:cs typeface="Courier New" pitchFamily="34" charset="-120"/>
               </a:rPr>
-              <a:t>  [sdlc 0.21.0 · community]</a:t>
+              <a:t>  [sdlc 0.21.1 · community]</a:t>
             </a:r>
             <a:endParaRPr lang="en-US" sz="1000" dirty="0"/>
           </a:p>
@@ -15039,7 +15039,7 @@
                 <a:ea typeface="Courier New" pitchFamily="34" charset="-122"/>
                 <a:cs typeface="Courier New" pitchFamily="34" charset="-120"/>
               </a:rPr>
-              <a:t>2026-10-14T17:26:35.518Z  gate.release.appr</a:t>
+              <a:t>2026-10-14T20:18:34.743Z  gate.release.appr</a:t>
             </a:r>
             <a:endParaRPr lang="en-US" sz="1000" dirty="0"/>
           </a:p>
@@ -15090,7 +15090,7 @@
                 <a:ea typeface="Courier New" pitchFamily="34" charset="-122"/>
                 <a:cs typeface="Courier New" pitchFamily="34" charset="-120"/>
               </a:rPr>
-              <a:t>  release-manager [sdlc 0.21.0 · community]</a:t>
+              <a:t>  release-manager [sdlc 0.21.1 · community]</a:t>
             </a:r>
             <a:endParaRPr lang="en-US" sz="1000" dirty="0"/>
           </a:p>
@@ -16418,7 +16418,7 @@
                 <a:ea typeface="Courier New" pitchFamily="34" charset="-122"/>
                 <a:cs typeface="Courier New" pitchFamily="34" charset="-120"/>
               </a:rPr>
-              <a:t>✓ test (1.1s)</a:t>
+              <a:t>✓ test (1.0s)</a:t>
             </a:r>
             <a:endParaRPr lang="en-US" sz="1000" dirty="0"/>
           </a:p>
@@ -16435,7 +16435,7 @@
                 <a:ea typeface="Courier New" pitchFamily="34" charset="-122"/>
                 <a:cs typeface="Courier New" pitchFamily="34" charset="-120"/>
               </a:rPr>
-              <a:t>✓ ci-green (ci/pipeline_status, 0.5s)</a:t>
+              <a:t>✓ ci-green (ci/pipeline_status, 0.6s)</a:t>
             </a:r>
             <a:endParaRPr lang="en-US" sz="1000" dirty="0"/>
           </a:p>
@@ -16871,7 +16871,7 @@
                 <a:ea typeface="Courier New" pitchFamily="34" charset="-122"/>
                 <a:cs typeface="Courier New" pitchFamily="34" charset="-120"/>
               </a:rPr>
-              <a:t>      "id": "20261014T172731682Z-ci-green-5</a:t>
+              <a:t>      "id": "20261014T201934378Z-ci-green-7</a:t>
             </a:r>
             <a:endParaRPr lang="en-US" sz="1000" dirty="0"/>
           </a:p>
@@ -16888,7 +16888,7 @@
                 <a:ea typeface="Courier New" pitchFamily="34" charset="-122"/>
                 <a:cs typeface="Courier New" pitchFamily="34" charset="-120"/>
               </a:rPr>
-              <a:t>  552ba",</a:t>
+              <a:t>  7a21f",</a:t>
             </a:r>
             <a:endParaRPr lang="en-US" sz="1000" dirty="0"/>
           </a:p>
@@ -17024,7 +17024,7 @@
                 <a:ea typeface="Courier New" pitchFamily="34" charset="-122"/>
                 <a:cs typeface="Courier New" pitchFamily="34" charset="-120"/>
               </a:rPr>
-              <a:t>        "ref": "e27ad9feb0f2d717a3eb584c84b</a:t>
+              <a:t>        "ref": "acb81fcd99955f97414e0c9808e</a:t>
             </a:r>
             <a:endParaRPr lang="en-US" sz="1000" dirty="0"/>
           </a:p>
@@ -17041,7 +17041,7 @@
                 <a:ea typeface="Courier New" pitchFamily="34" charset="-122"/>
                 <a:cs typeface="Courier New" pitchFamily="34" charset="-120"/>
               </a:rPr>
-              <a:t>  eb4b3c4190bb1",</a:t>
+              <a:t>  9305aa686a625",</a:t>
             </a:r>
             <a:endParaRPr lang="en-US" sz="1000" dirty="0"/>
           </a:p>
@@ -27763,7 +27763,7 @@
                 <a:ea typeface="Courier New" pitchFamily="34" charset="-122"/>
                 <a:cs typeface="Courier New" pitchFamily="34" charset="-120"/>
               </a:rPr>
-              <a:t>  sdlc 0.21.0, license: community</a:t>
+              <a:t>  sdlc 0.21.1, license: community</a:t>
             </a:r>
             <a:endParaRPr lang="en-US" sz="1000" dirty="0"/>
           </a:p>

--- a/docs/demo/sdlc-calculator-demo.en.pptx
+++ b/docs/demo/sdlc-calculator-demo.en.pptx
@@ -5112,7 +5112,7 @@
                 <a:ea typeface="Courier New" pitchFamily="34" charset="-122"/>
                 <a:cs typeface="Courier New" pitchFamily="34" charset="-120"/>
               </a:rPr>
-              <a:t>✓ test (1.0s)</a:t>
+              <a:t>✓ test (1.8s)</a:t>
             </a:r>
             <a:endParaRPr lang="en-US" sz="1000" dirty="0"/>
           </a:p>
@@ -6660,7 +6660,7 @@
                 <a:ea typeface="Courier New" pitchFamily="34" charset="-122"/>
                 <a:cs typeface="Courier New" pitchFamily="34" charset="-120"/>
               </a:rPr>
-              <a:t>  code-owner (6c914d1d9eb7)</a:t>
+              <a:t>  code-owner (90f082115905)</a:t>
             </a:r>
             <a:endParaRPr lang="en-US" sz="1000" dirty="0"/>
           </a:p>
@@ -6745,7 +6745,7 @@
                 <a:ea typeface="Courier New" pitchFamily="34" charset="-122"/>
                 <a:cs typeface="Courier New" pitchFamily="34" charset="-120"/>
               </a:rPr>
-              <a:t>  "SDLC-Approval: basic-arithmetic:review:6</a:t>
+              <a:t>  "SDLC-Approval: basic-arithmetic:review:9</a:t>
             </a:r>
             <a:endParaRPr lang="en-US" sz="1000" dirty="0"/>
           </a:p>
@@ -6762,7 +6762,7 @@
                 <a:ea typeface="Courier New" pitchFamily="34" charset="-122"/>
                 <a:cs typeface="Courier New" pitchFamily="34" charset="-120"/>
               </a:rPr>
-              <a:t>  c914d1d9eb7"</a:t>
+              <a:t>  0f082115905"</a:t>
             </a:r>
             <a:endParaRPr lang="en-US" sz="1000" dirty="0"/>
           </a:p>
@@ -7443,7 +7443,7 @@
                 <a:ea typeface="Courier New" pitchFamily="34" charset="-122"/>
                 <a:cs typeface="Courier New" pitchFamily="34" charset="-120"/>
               </a:rPr>
-              <a:t>  release-manager (6c914d1d9eb7)</a:t>
+              <a:t>  release-manager (90f082115905)</a:t>
             </a:r>
             <a:endParaRPr lang="en-US" sz="1000" dirty="0"/>
           </a:p>
@@ -7511,7 +7511,7 @@
                 <a:ea typeface="Courier New" pitchFamily="34" charset="-122"/>
                 <a:cs typeface="Courier New" pitchFamily="34" charset="-120"/>
               </a:rPr>
-              <a:t>  gate" -m "SDLC-Approval: basic-arithmetic:release:6c914d1d9eb7"</a:t>
+              <a:t>  gate" -m "SDLC-Approval: basic-arithmetic:release:90f082115905"</a:t>
             </a:r>
             <a:endParaRPr lang="en-US" sz="1000" dirty="0"/>
           </a:p>
@@ -7794,7 +7794,7 @@
                 <a:ea typeface="Courier New" pitchFamily="34" charset="-122"/>
                 <a:cs typeface="Courier New" pitchFamily="34" charset="-120"/>
               </a:rPr>
-              <a:t>✓ basic-arithmetic/intent alice valid 4129aa86 trailer: missing</a:t>
+              <a:t>✓ basic-arithmetic/intent alice valid 68fc158c trailer: missing</a:t>
             </a:r>
             <a:endParaRPr lang="en-US" sz="1000" dirty="0"/>
           </a:p>
@@ -7811,7 +7811,7 @@
                 <a:ea typeface="Courier New" pitchFamily="34" charset="-122"/>
                 <a:cs typeface="Courier New" pitchFamily="34" charset="-120"/>
               </a:rPr>
-              <a:t>✓ basic-arithmetic/spec alice valid c8de7833 trailer: missing</a:t>
+              <a:t>✓ basic-arithmetic/spec alice valid 86b70b05 trailer: missing</a:t>
             </a:r>
             <a:endParaRPr lang="en-US" sz="1000" dirty="0"/>
           </a:p>
@@ -7828,7 +7828,7 @@
                 <a:ea typeface="Courier New" pitchFamily="34" charset="-122"/>
                 <a:cs typeface="Courier New" pitchFamily="34" charset="-120"/>
               </a:rPr>
-              <a:t>✗ basic-arithmetic/plan bob wrong-signer c8de7833 trailer: missing</a:t>
+              <a:t>✗ basic-arithmetic/plan bob wrong-signer 86b70b05 trailer: missing</a:t>
             </a:r>
             <a:endParaRPr lang="en-US" sz="1000" dirty="0"/>
           </a:p>
@@ -7845,7 +7845,7 @@
                 <a:ea typeface="Courier New" pitchFamily="34" charset="-122"/>
                 <a:cs typeface="Courier New" pitchFamily="34" charset="-120"/>
               </a:rPr>
-              <a:t>✓ basic-arithmetic/review carol valid 3bffe27b trailer: missing</a:t>
+              <a:t>✓ basic-arithmetic/review carol valid 54a2da1f trailer: missing</a:t>
             </a:r>
             <a:endParaRPr lang="en-US" sz="1000" dirty="0"/>
           </a:p>
@@ -7862,7 +7862,7 @@
                 <a:ea typeface="Courier New" pitchFamily="34" charset="-122"/>
                 <a:cs typeface="Courier New" pitchFamily="34" charset="-120"/>
               </a:rPr>
-              <a:t>✓ basic-arithmetic/release alice valid f1bbfdef trailer: missing</a:t>
+              <a:t>✓ basic-arithmetic/release alice valid 7d74f6f0 trailer: missing</a:t>
             </a:r>
             <a:endParaRPr lang="en-US" sz="1000" dirty="0"/>
           </a:p>
@@ -7879,7 +7879,7 @@
                 <a:ea typeface="Courier New" pitchFamily="34" charset="-122"/>
                 <a:cs typeface="Courier New" pitchFamily="34" charset="-120"/>
               </a:rPr>
-              <a:t>✓ openspec/roles.yaml alice@calc.example bootstrap 1ce051cb</a:t>
+              <a:t>✓ openspec/roles.yaml alice@calc.example bootstrap b0556580</a:t>
             </a:r>
             <a:endParaRPr lang="en-US" sz="1000" dirty="0"/>
           </a:p>
@@ -8511,7 +8511,7 @@
                 <a:ea typeface="Courier New" pitchFamily="34" charset="-122"/>
                 <a:cs typeface="Courier New" pitchFamily="34" charset="-120"/>
               </a:rPr>
-              <a:t>  openspec\changes\archive\2026-10-14-basic</a:t>
+              <a:t>  openspec\changes\archive\2026-10-15-basic</a:t>
             </a:r>
             <a:endParaRPr lang="en-US" sz="1000" dirty="0"/>
           </a:p>
@@ -14365,7 +14365,7 @@
                 <a:ea typeface="Courier New" pitchFamily="34" charset="-122"/>
                 <a:cs typeface="Courier New" pitchFamily="34" charset="-120"/>
               </a:rPr>
-              <a:t>  archived) · sdlc 0.21.1, license:</a:t>
+              <a:t>  archived) · sdlc 0.21.2, license:</a:t>
             </a:r>
             <a:endParaRPr lang="en-US" sz="1000" dirty="0"/>
           </a:p>
@@ -14552,7 +14552,7 @@
                 <a:ea typeface="Courier New" pitchFamily="34" charset="-122"/>
                 <a:cs typeface="Courier New" pitchFamily="34" charset="-120"/>
               </a:rPr>
-              <a:t>  intent 3 · spec 3 · plan 18 · review 3;</a:t>
+              <a:t>  intent 3 · spec 3 · plan 17 · review 3;</a:t>
             </a:r>
             <a:endParaRPr lang="en-US" sz="1000" dirty="0"/>
           </a:p>
@@ -14886,7 +14886,7 @@
                 <a:ea typeface="Courier New" pitchFamily="34" charset="-122"/>
                 <a:cs typeface="Courier New" pitchFamily="34" charset="-120"/>
               </a:rPr>
-              <a:t>2026-10-14T20:18:24.238Z  gate.review.await</a:t>
+              <a:t>2026-10-15T13:31:50.558Z  gate.review.await</a:t>
             </a:r>
             <a:endParaRPr lang="en-US" sz="1000" dirty="0"/>
           </a:p>
@@ -14920,7 +14920,7 @@
                 <a:ea typeface="Courier New" pitchFamily="34" charset="-122"/>
                 <a:cs typeface="Courier New" pitchFamily="34" charset="-120"/>
               </a:rPr>
-              <a:t>  sha256:6c914d1d9eb78e477dde5ae396dfb67010</a:t>
+              <a:t>  sha256:90f082115905738bbf88908e8f9bddeb43</a:t>
             </a:r>
             <a:endParaRPr lang="en-US" sz="1000" dirty="0"/>
           </a:p>
@@ -14937,7 +14937,7 @@
                 <a:ea typeface="Courier New" pitchFamily="34" charset="-122"/>
                 <a:cs typeface="Courier New" pitchFamily="34" charset="-120"/>
               </a:rPr>
-              <a:t>  d7985d68d5d091a42889b2b979e686 [sdlc</a:t>
+              <a:t>  7cd3e676da99ba381bb6c7378fe339 [sdlc</a:t>
             </a:r>
             <a:endParaRPr lang="en-US" sz="1000" dirty="0"/>
           </a:p>
@@ -14954,7 +14954,7 @@
                 <a:ea typeface="Courier New" pitchFamily="34" charset="-122"/>
                 <a:cs typeface="Courier New" pitchFamily="34" charset="-120"/>
               </a:rPr>
-              <a:t>  0.21.1 · community]</a:t>
+              <a:t>  0.21.2 · community]</a:t>
             </a:r>
             <a:endParaRPr lang="en-US" sz="1000" dirty="0"/>
           </a:p>
@@ -14971,7 +14971,7 @@
                 <a:ea typeface="Courier New" pitchFamily="34" charset="-122"/>
                 <a:cs typeface="Courier New" pitchFamily="34" charset="-120"/>
               </a:rPr>
-              <a:t>2026-10-14T20:18:27.607Z  gate.review.appro</a:t>
+              <a:t>2026-10-15T13:31:53.746Z  gate.review.appro</a:t>
             </a:r>
             <a:endParaRPr lang="en-US" sz="1000" dirty="0"/>
           </a:p>
@@ -15022,7 +15022,7 @@
                 <a:ea typeface="Courier New" pitchFamily="34" charset="-122"/>
                 <a:cs typeface="Courier New" pitchFamily="34" charset="-120"/>
               </a:rPr>
-              <a:t>  [sdlc 0.21.1 · community]</a:t>
+              <a:t>  [sdlc 0.21.2 · community]</a:t>
             </a:r>
             <a:endParaRPr lang="en-US" sz="1000" dirty="0"/>
           </a:p>
@@ -15039,7 +15039,7 @@
                 <a:ea typeface="Courier New" pitchFamily="34" charset="-122"/>
                 <a:cs typeface="Courier New" pitchFamily="34" charset="-120"/>
               </a:rPr>
-              <a:t>2026-10-14T20:18:34.743Z  gate.release.appr</a:t>
+              <a:t>2026-10-15T13:32:00.709Z  gate.release.appr</a:t>
             </a:r>
             <a:endParaRPr lang="en-US" sz="1000" dirty="0"/>
           </a:p>
@@ -15090,7 +15090,7 @@
                 <a:ea typeface="Courier New" pitchFamily="34" charset="-122"/>
                 <a:cs typeface="Courier New" pitchFamily="34" charset="-120"/>
               </a:rPr>
-              <a:t>  release-manager [sdlc 0.21.1 · community]</a:t>
+              <a:t>  release-manager [sdlc 0.21.2 · community]</a:t>
             </a:r>
             <a:endParaRPr lang="en-US" sz="1000" dirty="0"/>
           </a:p>
@@ -16418,7 +16418,7 @@
                 <a:ea typeface="Courier New" pitchFamily="34" charset="-122"/>
                 <a:cs typeface="Courier New" pitchFamily="34" charset="-120"/>
               </a:rPr>
-              <a:t>✓ test (1.0s)</a:t>
+              <a:t>✓ test (1.3s)</a:t>
             </a:r>
             <a:endParaRPr lang="en-US" sz="1000" dirty="0"/>
           </a:p>
@@ -16435,7 +16435,7 @@
                 <a:ea typeface="Courier New" pitchFamily="34" charset="-122"/>
                 <a:cs typeface="Courier New" pitchFamily="34" charset="-120"/>
               </a:rPr>
-              <a:t>✓ ci-green (ci/pipeline_status, 0.6s)</a:t>
+              <a:t>✓ ci-green (ci/pipeline_status, 0.7s)</a:t>
             </a:r>
             <a:endParaRPr lang="en-US" sz="1000" dirty="0"/>
           </a:p>
@@ -16871,7 +16871,7 @@
                 <a:ea typeface="Courier New" pitchFamily="34" charset="-122"/>
                 <a:cs typeface="Courier New" pitchFamily="34" charset="-120"/>
               </a:rPr>
-              <a:t>      "id": "20261014T201934378Z-ci-green-7</a:t>
+              <a:t>      "id": "20261015T133307841Z-ci-green-a</a:t>
             </a:r>
             <a:endParaRPr lang="en-US" sz="1000" dirty="0"/>
           </a:p>
@@ -16888,7 +16888,7 @@
                 <a:ea typeface="Courier New" pitchFamily="34" charset="-122"/>
                 <a:cs typeface="Courier New" pitchFamily="34" charset="-120"/>
               </a:rPr>
-              <a:t>  7a21f",</a:t>
+              <a:t>  89bdd",</a:t>
             </a:r>
             <a:endParaRPr lang="en-US" sz="1000" dirty="0"/>
           </a:p>
@@ -17024,7 +17024,7 @@
                 <a:ea typeface="Courier New" pitchFamily="34" charset="-122"/>
                 <a:cs typeface="Courier New" pitchFamily="34" charset="-120"/>
               </a:rPr>
-              <a:t>        "ref": "acb81fcd99955f97414e0c9808e</a:t>
+              <a:t>        "ref": "fa0e1a35a96e7955e17570afef7</a:t>
             </a:r>
             <a:endParaRPr lang="en-US" sz="1000" dirty="0"/>
           </a:p>
@@ -17041,7 +17041,7 @@
                 <a:ea typeface="Courier New" pitchFamily="34" charset="-122"/>
                 <a:cs typeface="Courier New" pitchFamily="34" charset="-120"/>
               </a:rPr>
-              <a:t>  9305aa686a625",</a:t>
+              <a:t>  14a335bdfea66",</a:t>
             </a:r>
             <a:endParaRPr lang="en-US" sz="1000" dirty="0"/>
           </a:p>
@@ -27763,7 +27763,7 @@
                 <a:ea typeface="Courier New" pitchFamily="34" charset="-122"/>
                 <a:cs typeface="Courier New" pitchFamily="34" charset="-120"/>
               </a:rPr>
-              <a:t>  sdlc 0.21.1, license: community</a:t>
+              <a:t>  sdlc 0.21.2, license: community</a:t>
             </a:r>
             <a:endParaRPr lang="en-US" sz="1000" dirty="0"/>
           </a:p>
@@ -34554,7 +34554,7 @@
                 <a:ea typeface="Courier New" pitchFamily="34" charset="-122"/>
                 <a:cs typeface="Courier New" pitchFamily="34" charset="-120"/>
               </a:rPr>
-              <a:t>  (308be1b4f21d)</a:t>
+              <a:t>  (2844213e9554)</a:t>
             </a:r>
             <a:endParaRPr lang="en-US" sz="1000" dirty="0"/>
           </a:p>
@@ -34690,7 +34690,7 @@
                 <a:ea typeface="Courier New" pitchFamily="34" charset="-122"/>
                 <a:cs typeface="Courier New" pitchFamily="34" charset="-120"/>
               </a:rPr>
-              <a:t>  308be1b4f21d"</a:t>
+              <a:t>  2844213e9554"</a:t>
             </a:r>
             <a:endParaRPr lang="en-US" sz="1000" dirty="0"/>
           </a:p>

--- a/docs/demo/sdlc-calculator-demo.en.pptx
+++ b/docs/demo/sdlc-calculator-demo.en.pptx
@@ -5112,7 +5112,7 @@
                 <a:ea typeface="Courier New" pitchFamily="34" charset="-122"/>
                 <a:cs typeface="Courier New" pitchFamily="34" charset="-120"/>
               </a:rPr>
-              <a:t>✓ test (1.8s)</a:t>
+              <a:t>✓ test (1.0s)</a:t>
             </a:r>
             <a:endParaRPr lang="en-US" sz="1000" dirty="0"/>
           </a:p>
@@ -5975,7 +5975,7 @@
                 <a:ea typeface="Courier New" pitchFamily="34" charset="-122"/>
                 <a:cs typeface="Courier New" pitchFamily="34" charset="-120"/>
               </a:rPr>
-              <a:t>  Bob Turner (bob): author_cannot_approve —</a:t>
+              <a:t>  Bob Turner (bob): distinct_approvers —</a:t>
             </a:r>
             <a:endParaRPr lang="en-US" sz="1000" dirty="0"/>
           </a:p>
@@ -5992,7 +5992,7 @@
                 <a:ea typeface="Courier New" pitchFamily="34" charset="-122"/>
                 <a:cs typeface="Courier New" pitchFamily="34" charset="-120"/>
               </a:rPr>
-              <a:t>  Bob Turner authored code in this change.;</a:t>
+              <a:t>  Bob Turner already approved the paired</a:t>
             </a:r>
             <a:endParaRPr lang="en-US" sz="1000" dirty="0"/>
           </a:p>
@@ -6009,24 +6009,7 @@
                 <a:ea typeface="Courier New" pitchFamily="34" charset="-122"/>
                 <a:cs typeface="Courier New" pitchFamily="34" charset="-120"/>
               </a:rPr>
-              <a:t>  distinct_approvers — Bob Turner already</a:t>
-            </a:r>
-            <a:endParaRPr lang="en-US" sz="1000" dirty="0"/>
-          </a:p>
-          <a:p>
-            <a:pPr indent="0" marL="0">
-              <a:buNone/>
-            </a:pPr>
-            <a:r>
-              <a:rPr lang="en-US" sz="1000" dirty="0">
-                <a:solidFill>
-                  <a:srgbClr val="E8EEF2"/>
-                </a:solidFill>
-                <a:latin typeface="Courier New" pitchFamily="34" charset="0"/>
-                <a:ea typeface="Courier New" pitchFamily="34" charset="-122"/>
-                <a:cs typeface="Courier New" pitchFamily="34" charset="-120"/>
-              </a:rPr>
-              <a:t>  approved the paired gate plan/review.</a:t>
+              <a:t>  gate plan/review.</a:t>
             </a:r>
             <a:endParaRPr lang="en-US" sz="1000" dirty="0"/>
           </a:p>
@@ -6309,7 +6292,7 @@
                 <a:ea typeface="Courier New" pitchFamily="34" charset="-122"/>
                 <a:cs typeface="Courier New" pitchFamily="34" charset="-120"/>
               </a:rPr>
-              <a:t>Bob Turner authored code in this change.</a:t>
+              <a:t>Bob Turner already approved the paired gate</a:t>
             </a:r>
             <a:endParaRPr lang="en-US" sz="1000" dirty="0"/>
           </a:p>
@@ -6326,24 +6309,7 @@
                 <a:ea typeface="Courier New" pitchFamily="34" charset="-122"/>
                 <a:cs typeface="Courier New" pitchFamily="34" charset="-120"/>
               </a:rPr>
-              <a:t>  Bob Turner already approved the paired</a:t>
-            </a:r>
-            <a:endParaRPr lang="en-US" sz="1000" dirty="0"/>
-          </a:p>
-          <a:p>
-            <a:pPr indent="0" marL="0">
-              <a:buNone/>
-            </a:pPr>
-            <a:r>
-              <a:rPr lang="en-US" sz="1000" dirty="0">
-                <a:solidFill>
-                  <a:srgbClr val="E8EEF2"/>
-                </a:solidFill>
-                <a:latin typeface="Courier New" pitchFamily="34" charset="0"/>
-                <a:ea typeface="Courier New" pitchFamily="34" charset="-122"/>
-                <a:cs typeface="Courier New" pitchFamily="34" charset="-120"/>
-              </a:rPr>
-              <a:t>  gate plan/review.</a:t>
+              <a:t>  plan/review.</a:t>
             </a:r>
             <a:endParaRPr lang="en-US" sz="1000" dirty="0"/>
           </a:p>
@@ -6660,7 +6626,7 @@
                 <a:ea typeface="Courier New" pitchFamily="34" charset="-122"/>
                 <a:cs typeface="Courier New" pitchFamily="34" charset="-120"/>
               </a:rPr>
-              <a:t>  code-owner (90f082115905)</a:t>
+              <a:t>  code-owner (85a91b18d257)</a:t>
             </a:r>
             <a:endParaRPr lang="en-US" sz="1000" dirty="0"/>
           </a:p>
@@ -6745,7 +6711,7 @@
                 <a:ea typeface="Courier New" pitchFamily="34" charset="-122"/>
                 <a:cs typeface="Courier New" pitchFamily="34" charset="-120"/>
               </a:rPr>
-              <a:t>  "SDLC-Approval: basic-arithmetic:review:9</a:t>
+              <a:t>  "SDLC-Approval: basic-arithmetic:review:8</a:t>
             </a:r>
             <a:endParaRPr lang="en-US" sz="1000" dirty="0"/>
           </a:p>
@@ -6762,7 +6728,7 @@
                 <a:ea typeface="Courier New" pitchFamily="34" charset="-122"/>
                 <a:cs typeface="Courier New" pitchFamily="34" charset="-120"/>
               </a:rPr>
-              <a:t>  0f082115905"</a:t>
+              <a:t>  5a91b18d257"</a:t>
             </a:r>
             <a:endParaRPr lang="en-US" sz="1000" dirty="0"/>
           </a:p>
@@ -7443,7 +7409,7 @@
                 <a:ea typeface="Courier New" pitchFamily="34" charset="-122"/>
                 <a:cs typeface="Courier New" pitchFamily="34" charset="-120"/>
               </a:rPr>
-              <a:t>  release-manager (90f082115905)</a:t>
+              <a:t>  release-manager (85a91b18d257)</a:t>
             </a:r>
             <a:endParaRPr lang="en-US" sz="1000" dirty="0"/>
           </a:p>
@@ -7511,7 +7477,7 @@
                 <a:ea typeface="Courier New" pitchFamily="34" charset="-122"/>
                 <a:cs typeface="Courier New" pitchFamily="34" charset="-120"/>
               </a:rPr>
-              <a:t>  gate" -m "SDLC-Approval: basic-arithmetic:release:90f082115905"</a:t>
+              <a:t>  gate" -m "SDLC-Approval: basic-arithmetic:release:85a91b18d257"</a:t>
             </a:r>
             <a:endParaRPr lang="en-US" sz="1000" dirty="0"/>
           </a:p>
@@ -7794,7 +7760,7 @@
                 <a:ea typeface="Courier New" pitchFamily="34" charset="-122"/>
                 <a:cs typeface="Courier New" pitchFamily="34" charset="-120"/>
               </a:rPr>
-              <a:t>✓ basic-arithmetic/intent alice valid 68fc158c trailer: missing</a:t>
+              <a:t>✓ basic-arithmetic/intent alice valid 05413ba9 trailer: missing</a:t>
             </a:r>
             <a:endParaRPr lang="en-US" sz="1000" dirty="0"/>
           </a:p>
@@ -7811,7 +7777,7 @@
                 <a:ea typeface="Courier New" pitchFamily="34" charset="-122"/>
                 <a:cs typeface="Courier New" pitchFamily="34" charset="-120"/>
               </a:rPr>
-              <a:t>✓ basic-arithmetic/spec alice valid 86b70b05 trailer: missing</a:t>
+              <a:t>✓ basic-arithmetic/spec alice valid 1e84e4bf trailer: missing</a:t>
             </a:r>
             <a:endParaRPr lang="en-US" sz="1000" dirty="0"/>
           </a:p>
@@ -7828,7 +7794,7 @@
                 <a:ea typeface="Courier New" pitchFamily="34" charset="-122"/>
                 <a:cs typeface="Courier New" pitchFamily="34" charset="-120"/>
               </a:rPr>
-              <a:t>✗ basic-arithmetic/plan bob wrong-signer 86b70b05 trailer: missing</a:t>
+              <a:t>✗ basic-arithmetic/plan bob wrong-signer 1e84e4bf trailer: missing</a:t>
             </a:r>
             <a:endParaRPr lang="en-US" sz="1000" dirty="0"/>
           </a:p>
@@ -7845,7 +7811,7 @@
                 <a:ea typeface="Courier New" pitchFamily="34" charset="-122"/>
                 <a:cs typeface="Courier New" pitchFamily="34" charset="-120"/>
               </a:rPr>
-              <a:t>✓ basic-arithmetic/review carol valid 54a2da1f trailer: missing</a:t>
+              <a:t>✓ basic-arithmetic/review carol valid ec148dca trailer: missing</a:t>
             </a:r>
             <a:endParaRPr lang="en-US" sz="1000" dirty="0"/>
           </a:p>
@@ -7862,7 +7828,7 @@
                 <a:ea typeface="Courier New" pitchFamily="34" charset="-122"/>
                 <a:cs typeface="Courier New" pitchFamily="34" charset="-120"/>
               </a:rPr>
-              <a:t>✓ basic-arithmetic/release alice valid 7d74f6f0 trailer: missing</a:t>
+              <a:t>✓ basic-arithmetic/release alice valid 239c55a4 trailer: missing</a:t>
             </a:r>
             <a:endParaRPr lang="en-US" sz="1000" dirty="0"/>
           </a:p>
@@ -7879,7 +7845,7 @@
                 <a:ea typeface="Courier New" pitchFamily="34" charset="-122"/>
                 <a:cs typeface="Courier New" pitchFamily="34" charset="-120"/>
               </a:rPr>
-              <a:t>✓ openspec/roles.yaml alice@calc.example bootstrap b0556580</a:t>
+              <a:t>✓ openspec/roles.yaml marin@marin-ai.tech bootstrap a2bc9570</a:t>
             </a:r>
             <a:endParaRPr lang="en-US" sz="1000" dirty="0"/>
           </a:p>
@@ -11366,7 +11332,7 @@
                 <a:ea typeface="Calibri" pitchFamily="34" charset="-122"/>
                 <a:cs typeface="Calibri" pitchFamily="34" charset="-120"/>
               </a:rPr>
-              <a:t>Bob Turner authored code in this change. Bob Turner already approved …</a:t>
+              <a:t>Bob Turner already approved the paired gate plan/review.</a:t>
             </a:r>
             <a:endParaRPr lang="en-US" sz="1100" dirty="0"/>
           </a:p>
@@ -14365,7 +14331,7 @@
                 <a:ea typeface="Courier New" pitchFamily="34" charset="-122"/>
                 <a:cs typeface="Courier New" pitchFamily="34" charset="-120"/>
               </a:rPr>
-              <a:t>  archived) · sdlc 0.21.2, license:</a:t>
+              <a:t>  archived) · sdlc 0.21.3, license:</a:t>
             </a:r>
             <a:endParaRPr lang="en-US" sz="1000" dirty="0"/>
           </a:p>
@@ -14886,7 +14852,7 @@
                 <a:ea typeface="Courier New" pitchFamily="34" charset="-122"/>
                 <a:cs typeface="Courier New" pitchFamily="34" charset="-120"/>
               </a:rPr>
-              <a:t>2026-10-15T13:31:50.558Z  gate.review.await</a:t>
+              <a:t>2026-10-15T17:29:48.480Z  gate.review.await</a:t>
             </a:r>
             <a:endParaRPr lang="en-US" sz="1000" dirty="0"/>
           </a:p>
@@ -14920,7 +14886,7 @@
                 <a:ea typeface="Courier New" pitchFamily="34" charset="-122"/>
                 <a:cs typeface="Courier New" pitchFamily="34" charset="-120"/>
               </a:rPr>
-              <a:t>  sha256:90f082115905738bbf88908e8f9bddeb43</a:t>
+              <a:t>  sha256:85a91b18d25718bc3e1613fa277a1a7d78</a:t>
             </a:r>
             <a:endParaRPr lang="en-US" sz="1000" dirty="0"/>
           </a:p>
@@ -14937,7 +14903,7 @@
                 <a:ea typeface="Courier New" pitchFamily="34" charset="-122"/>
                 <a:cs typeface="Courier New" pitchFamily="34" charset="-120"/>
               </a:rPr>
-              <a:t>  7cd3e676da99ba381bb6c7378fe339 [sdlc</a:t>
+              <a:t>  05c549d49afe5093354cb1e81f92dc [sdlc</a:t>
             </a:r>
             <a:endParaRPr lang="en-US" sz="1000" dirty="0"/>
           </a:p>
@@ -14954,7 +14920,7 @@
                 <a:ea typeface="Courier New" pitchFamily="34" charset="-122"/>
                 <a:cs typeface="Courier New" pitchFamily="34" charset="-120"/>
               </a:rPr>
-              <a:t>  0.21.2 · community]</a:t>
+              <a:t>  0.21.3 · community]</a:t>
             </a:r>
             <a:endParaRPr lang="en-US" sz="1000" dirty="0"/>
           </a:p>
@@ -14971,7 +14937,7 @@
                 <a:ea typeface="Courier New" pitchFamily="34" charset="-122"/>
                 <a:cs typeface="Courier New" pitchFamily="34" charset="-120"/>
               </a:rPr>
-              <a:t>2026-10-15T13:31:53.746Z  gate.review.appro</a:t>
+              <a:t>2026-10-15T17:29:51.894Z  gate.review.appro</a:t>
             </a:r>
             <a:endParaRPr lang="en-US" sz="1000" dirty="0"/>
           </a:p>
@@ -15022,7 +14988,7 @@
                 <a:ea typeface="Courier New" pitchFamily="34" charset="-122"/>
                 <a:cs typeface="Courier New" pitchFamily="34" charset="-120"/>
               </a:rPr>
-              <a:t>  [sdlc 0.21.2 · community]</a:t>
+              <a:t>  [sdlc 0.21.3 · community]</a:t>
             </a:r>
             <a:endParaRPr lang="en-US" sz="1000" dirty="0"/>
           </a:p>
@@ -15039,7 +15005,7 @@
                 <a:ea typeface="Courier New" pitchFamily="34" charset="-122"/>
                 <a:cs typeface="Courier New" pitchFamily="34" charset="-120"/>
               </a:rPr>
-              <a:t>2026-10-15T13:32:00.709Z  gate.release.appr</a:t>
+              <a:t>2026-10-15T17:29:58.541Z  gate.release.appr</a:t>
             </a:r>
             <a:endParaRPr lang="en-US" sz="1000" dirty="0"/>
           </a:p>
@@ -15090,7 +15056,7 @@
                 <a:ea typeface="Courier New" pitchFamily="34" charset="-122"/>
                 <a:cs typeface="Courier New" pitchFamily="34" charset="-120"/>
               </a:rPr>
-              <a:t>  release-manager [sdlc 0.21.2 · community]</a:t>
+              <a:t>  release-manager [sdlc 0.21.3 · community]</a:t>
             </a:r>
             <a:endParaRPr lang="en-US" sz="1000" dirty="0"/>
           </a:p>
@@ -16418,7 +16384,7 @@
                 <a:ea typeface="Courier New" pitchFamily="34" charset="-122"/>
                 <a:cs typeface="Courier New" pitchFamily="34" charset="-120"/>
               </a:rPr>
-              <a:t>✓ test (1.3s)</a:t>
+              <a:t>✓ test (1.1s)</a:t>
             </a:r>
             <a:endParaRPr lang="en-US" sz="1000" dirty="0"/>
           </a:p>
@@ -16435,7 +16401,7 @@
                 <a:ea typeface="Courier New" pitchFamily="34" charset="-122"/>
                 <a:cs typeface="Courier New" pitchFamily="34" charset="-120"/>
               </a:rPr>
-              <a:t>✓ ci-green (ci/pipeline_status, 0.7s)</a:t>
+              <a:t>✓ ci-green (ci/pipeline_status, 0.6s)</a:t>
             </a:r>
             <a:endParaRPr lang="en-US" sz="1000" dirty="0"/>
           </a:p>
@@ -16871,7 +16837,7 @@
                 <a:ea typeface="Courier New" pitchFamily="34" charset="-122"/>
                 <a:cs typeface="Courier New" pitchFamily="34" charset="-120"/>
               </a:rPr>
-              <a:t>      "id": "20261015T133307841Z-ci-green-a</a:t>
+              <a:t>      "id": "20261015T173055421Z-ci-green-0</a:t>
             </a:r>
             <a:endParaRPr lang="en-US" sz="1000" dirty="0"/>
           </a:p>
@@ -16888,7 +16854,7 @@
                 <a:ea typeface="Courier New" pitchFamily="34" charset="-122"/>
                 <a:cs typeface="Courier New" pitchFamily="34" charset="-120"/>
               </a:rPr>
-              <a:t>  89bdd",</a:t>
+              <a:t>  57246",</a:t>
             </a:r>
             <a:endParaRPr lang="en-US" sz="1000" dirty="0"/>
           </a:p>
@@ -17024,7 +16990,7 @@
                 <a:ea typeface="Courier New" pitchFamily="34" charset="-122"/>
                 <a:cs typeface="Courier New" pitchFamily="34" charset="-120"/>
               </a:rPr>
-              <a:t>        "ref": "fa0e1a35a96e7955e17570afef7</a:t>
+              <a:t>        "ref": "89c909bf89d90205254ef2922bd</a:t>
             </a:r>
             <a:endParaRPr lang="en-US" sz="1000" dirty="0"/>
           </a:p>
@@ -17041,7 +17007,7 @@
                 <a:ea typeface="Courier New" pitchFamily="34" charset="-122"/>
                 <a:cs typeface="Courier New" pitchFamily="34" charset="-120"/>
               </a:rPr>
-              <a:t>  14a335bdfea66",</a:t>
+              <a:t>  2a93e6a194b82",</a:t>
             </a:r>
             <a:endParaRPr lang="en-US" sz="1000" dirty="0"/>
           </a:p>
@@ -27763,7 +27729,7 @@
                 <a:ea typeface="Courier New" pitchFamily="34" charset="-122"/>
                 <a:cs typeface="Courier New" pitchFamily="34" charset="-120"/>
               </a:rPr>
-              <a:t>  sdlc 0.21.2, license: community</a:t>
+              <a:t>  sdlc 0.21.3, license: community</a:t>
             </a:r>
             <a:endParaRPr lang="en-US" sz="1000" dirty="0"/>
           </a:p>

--- a/docs/demo/sdlc-calculator-demo.en.pptx
+++ b/docs/demo/sdlc-calculator-demo.en.pptx
@@ -5975,7 +5975,7 @@
                 <a:ea typeface="Courier New" pitchFamily="34" charset="-122"/>
                 <a:cs typeface="Courier New" pitchFamily="34" charset="-120"/>
               </a:rPr>
-              <a:t>  Bob Turner (bob): distinct_approvers —</a:t>
+              <a:t>  Bob Turner (bob): author_cannot_approve —</a:t>
             </a:r>
             <a:endParaRPr lang="en-US" sz="1000" dirty="0"/>
           </a:p>
@@ -5992,7 +5992,7 @@
                 <a:ea typeface="Courier New" pitchFamily="34" charset="-122"/>
                 <a:cs typeface="Courier New" pitchFamily="34" charset="-120"/>
               </a:rPr>
-              <a:t>  Bob Turner already approved the paired</a:t>
+              <a:t>  Bob Turner authored code in this change.;</a:t>
             </a:r>
             <a:endParaRPr lang="en-US" sz="1000" dirty="0"/>
           </a:p>
@@ -6009,7 +6009,24 @@
                 <a:ea typeface="Courier New" pitchFamily="34" charset="-122"/>
                 <a:cs typeface="Courier New" pitchFamily="34" charset="-120"/>
               </a:rPr>
-              <a:t>  gate plan/review.</a:t>
+              <a:t>  distinct_approvers — Bob Turner already</a:t>
+            </a:r>
+            <a:endParaRPr lang="en-US" sz="1000" dirty="0"/>
+          </a:p>
+          <a:p>
+            <a:pPr indent="0" marL="0">
+              <a:buNone/>
+            </a:pPr>
+            <a:r>
+              <a:rPr lang="en-US" sz="1000" dirty="0">
+                <a:solidFill>
+                  <a:srgbClr val="E8EEF2"/>
+                </a:solidFill>
+                <a:latin typeface="Courier New" pitchFamily="34" charset="0"/>
+                <a:ea typeface="Courier New" pitchFamily="34" charset="-122"/>
+                <a:cs typeface="Courier New" pitchFamily="34" charset="-120"/>
+              </a:rPr>
+              <a:t>  approved the paired gate plan/review.</a:t>
             </a:r>
             <a:endParaRPr lang="en-US" sz="1000" dirty="0"/>
           </a:p>
@@ -6292,7 +6309,7 @@
                 <a:ea typeface="Courier New" pitchFamily="34" charset="-122"/>
                 <a:cs typeface="Courier New" pitchFamily="34" charset="-120"/>
               </a:rPr>
-              <a:t>Bob Turner already approved the paired gate</a:t>
+              <a:t>Bob Turner authored code in this change.</a:t>
             </a:r>
             <a:endParaRPr lang="en-US" sz="1000" dirty="0"/>
           </a:p>
@@ -6309,7 +6326,24 @@
                 <a:ea typeface="Courier New" pitchFamily="34" charset="-122"/>
                 <a:cs typeface="Courier New" pitchFamily="34" charset="-120"/>
               </a:rPr>
-              <a:t>  plan/review.</a:t>
+              <a:t>  Bob Turner already approved the paired</a:t>
+            </a:r>
+            <a:endParaRPr lang="en-US" sz="1000" dirty="0"/>
+          </a:p>
+          <a:p>
+            <a:pPr indent="0" marL="0">
+              <a:buNone/>
+            </a:pPr>
+            <a:r>
+              <a:rPr lang="en-US" sz="1000" dirty="0">
+                <a:solidFill>
+                  <a:srgbClr val="E8EEF2"/>
+                </a:solidFill>
+                <a:latin typeface="Courier New" pitchFamily="34" charset="0"/>
+                <a:ea typeface="Courier New" pitchFamily="34" charset="-122"/>
+                <a:cs typeface="Courier New" pitchFamily="34" charset="-120"/>
+              </a:rPr>
+              <a:t>  gate plan/review.</a:t>
             </a:r>
             <a:endParaRPr lang="en-US" sz="1000" dirty="0"/>
           </a:p>
@@ -6626,7 +6660,7 @@
                 <a:ea typeface="Courier New" pitchFamily="34" charset="-122"/>
                 <a:cs typeface="Courier New" pitchFamily="34" charset="-120"/>
               </a:rPr>
-              <a:t>  code-owner (85a91b18d257)</a:t>
+              <a:t>  code-owner (4d278be092f3)</a:t>
             </a:r>
             <a:endParaRPr lang="en-US" sz="1000" dirty="0"/>
           </a:p>
@@ -6711,7 +6745,7 @@
                 <a:ea typeface="Courier New" pitchFamily="34" charset="-122"/>
                 <a:cs typeface="Courier New" pitchFamily="34" charset="-120"/>
               </a:rPr>
-              <a:t>  "SDLC-Approval: basic-arithmetic:review:8</a:t>
+              <a:t>  "SDLC-Approval: basic-arithmetic:review:4</a:t>
             </a:r>
             <a:endParaRPr lang="en-US" sz="1000" dirty="0"/>
           </a:p>
@@ -6728,7 +6762,7 @@
                 <a:ea typeface="Courier New" pitchFamily="34" charset="-122"/>
                 <a:cs typeface="Courier New" pitchFamily="34" charset="-120"/>
               </a:rPr>
-              <a:t>  5a91b18d257"</a:t>
+              <a:t>  d278be092f3"</a:t>
             </a:r>
             <a:endParaRPr lang="en-US" sz="1000" dirty="0"/>
           </a:p>
@@ -7409,7 +7443,7 @@
                 <a:ea typeface="Courier New" pitchFamily="34" charset="-122"/>
                 <a:cs typeface="Courier New" pitchFamily="34" charset="-120"/>
               </a:rPr>
-              <a:t>  release-manager (85a91b18d257)</a:t>
+              <a:t>  release-manager (4d278be092f3)</a:t>
             </a:r>
             <a:endParaRPr lang="en-US" sz="1000" dirty="0"/>
           </a:p>
@@ -7477,7 +7511,7 @@
                 <a:ea typeface="Courier New" pitchFamily="34" charset="-122"/>
                 <a:cs typeface="Courier New" pitchFamily="34" charset="-120"/>
               </a:rPr>
-              <a:t>  gate" -m "SDLC-Approval: basic-arithmetic:release:85a91b18d257"</a:t>
+              <a:t>  gate" -m "SDLC-Approval: basic-arithmetic:release:4d278be092f3"</a:t>
             </a:r>
             <a:endParaRPr lang="en-US" sz="1000" dirty="0"/>
           </a:p>
@@ -7760,7 +7794,7 @@
                 <a:ea typeface="Courier New" pitchFamily="34" charset="-122"/>
                 <a:cs typeface="Courier New" pitchFamily="34" charset="-120"/>
               </a:rPr>
-              <a:t>✓ basic-arithmetic/intent alice valid 05413ba9 trailer: missing</a:t>
+              <a:t>✓ basic-arithmetic/intent alice valid 86dd9ebe trailer: missing</a:t>
             </a:r>
             <a:endParaRPr lang="en-US" sz="1000" dirty="0"/>
           </a:p>
@@ -7777,7 +7811,7 @@
                 <a:ea typeface="Courier New" pitchFamily="34" charset="-122"/>
                 <a:cs typeface="Courier New" pitchFamily="34" charset="-120"/>
               </a:rPr>
-              <a:t>✓ basic-arithmetic/spec alice valid 1e84e4bf trailer: missing</a:t>
+              <a:t>✓ basic-arithmetic/spec alice valid 7acb4b39 trailer: missing</a:t>
             </a:r>
             <a:endParaRPr lang="en-US" sz="1000" dirty="0"/>
           </a:p>
@@ -7794,7 +7828,7 @@
                 <a:ea typeface="Courier New" pitchFamily="34" charset="-122"/>
                 <a:cs typeface="Courier New" pitchFamily="34" charset="-120"/>
               </a:rPr>
-              <a:t>✗ basic-arithmetic/plan bob wrong-signer 1e84e4bf trailer: missing</a:t>
+              <a:t>✗ basic-arithmetic/plan bob wrong-signer 7acb4b39 trailer: missing</a:t>
             </a:r>
             <a:endParaRPr lang="en-US" sz="1000" dirty="0"/>
           </a:p>
@@ -7811,7 +7845,7 @@
                 <a:ea typeface="Courier New" pitchFamily="34" charset="-122"/>
                 <a:cs typeface="Courier New" pitchFamily="34" charset="-120"/>
               </a:rPr>
-              <a:t>✓ basic-arithmetic/review carol valid ec148dca trailer: missing</a:t>
+              <a:t>✓ basic-arithmetic/review carol valid ee117e4c trailer: missing</a:t>
             </a:r>
             <a:endParaRPr lang="en-US" sz="1000" dirty="0"/>
           </a:p>
@@ -7828,7 +7862,7 @@
                 <a:ea typeface="Courier New" pitchFamily="34" charset="-122"/>
                 <a:cs typeface="Courier New" pitchFamily="34" charset="-120"/>
               </a:rPr>
-              <a:t>✓ basic-arithmetic/release alice valid 239c55a4 trailer: missing</a:t>
+              <a:t>✓ basic-arithmetic/release alice valid ecb36c66 trailer: missing</a:t>
             </a:r>
             <a:endParaRPr lang="en-US" sz="1000" dirty="0"/>
           </a:p>
@@ -7845,7 +7879,7 @@
                 <a:ea typeface="Courier New" pitchFamily="34" charset="-122"/>
                 <a:cs typeface="Courier New" pitchFamily="34" charset="-120"/>
               </a:rPr>
-              <a:t>✓ openspec/roles.yaml marin@marin-ai.tech bootstrap a2bc9570</a:t>
+              <a:t>✓ openspec/roles.yaml alice@calc.example bootstrap 6adc60f8</a:t>
             </a:r>
             <a:endParaRPr lang="en-US" sz="1000" dirty="0"/>
           </a:p>
@@ -11332,7 +11366,7 @@
                 <a:ea typeface="Calibri" pitchFamily="34" charset="-122"/>
                 <a:cs typeface="Calibri" pitchFamily="34" charset="-120"/>
               </a:rPr>
-              <a:t>Bob Turner already approved the paired gate plan/review.</a:t>
+              <a:t>Bob Turner authored code in this change. Bob Turner already approved …</a:t>
             </a:r>
             <a:endParaRPr lang="en-US" sz="1100" dirty="0"/>
           </a:p>
@@ -14331,7 +14365,7 @@
                 <a:ea typeface="Courier New" pitchFamily="34" charset="-122"/>
                 <a:cs typeface="Courier New" pitchFamily="34" charset="-120"/>
               </a:rPr>
-              <a:t>  archived) · sdlc 0.21.3, license:</a:t>
+              <a:t>  archived) · sdlc 0.22.0, license:</a:t>
             </a:r>
             <a:endParaRPr lang="en-US" sz="1000" dirty="0"/>
           </a:p>
@@ -14501,6 +14535,23 @@
                 <a:ea typeface="Courier New" pitchFamily="34" charset="-122"/>
                 <a:cs typeface="Courier New" pitchFamily="34" charset="-120"/>
               </a:rPr>
+              <a:t>  agent log events: 31 of 61</a:t>
+            </a:r>
+            <a:endParaRPr lang="en-US" sz="1000" dirty="0"/>
+          </a:p>
+          <a:p>
+            <a:pPr indent="0" marL="0">
+              <a:buNone/>
+            </a:pPr>
+            <a:r>
+              <a:rPr lang="en-US" sz="1000" dirty="0">
+                <a:solidFill>
+                  <a:srgbClr val="E8EEF2"/>
+                </a:solidFill>
+                <a:latin typeface="Courier New" pitchFamily="34" charset="0"/>
+                <a:ea typeface="Courier New" pitchFamily="34" charset="-122"/>
+                <a:cs typeface="Courier New" pitchFamily="34" charset="-120"/>
+              </a:rPr>
               <a:t>  median wait for a person (seconds):</a:t>
             </a:r>
             <a:endParaRPr lang="en-US" sz="1000" dirty="0"/>
@@ -14518,7 +14569,7 @@
                 <a:ea typeface="Courier New" pitchFamily="34" charset="-122"/>
                 <a:cs typeface="Courier New" pitchFamily="34" charset="-120"/>
               </a:rPr>
-              <a:t>  intent 3 · spec 3 · plan 17 · review 3;</a:t>
+              <a:t>  intent 3 · spec 3 · plan 16 · review 3;</a:t>
             </a:r>
             <a:endParaRPr lang="en-US" sz="1000" dirty="0"/>
           </a:p>
@@ -14536,23 +14587,6 @@
                 <a:cs typeface="Courier New" pitchFamily="34" charset="-120"/>
               </a:rPr>
               <a:t>  rework reasons: missing-requirement 1</a:t>
-            </a:r>
-            <a:endParaRPr lang="en-US" sz="1000" dirty="0"/>
-          </a:p>
-          <a:p>
-            <a:pPr indent="0" marL="0">
-              <a:buNone/>
-            </a:pPr>
-            <a:r>
-              <a:rPr lang="en-US" sz="1000" dirty="0">
-                <a:solidFill>
-                  <a:srgbClr val="E8EEF2"/>
-                </a:solidFill>
-                <a:latin typeface="Courier New" pitchFamily="34" charset="0"/>
-                <a:ea typeface="Courier New" pitchFamily="34" charset="-122"/>
-                <a:cs typeface="Courier New" pitchFamily="34" charset="-120"/>
-              </a:rPr>
-              <a:t>  people's participation (3 changes),</a:t>
             </a:r>
             <a:endParaRPr lang="en-US" sz="1000" dirty="0"/>
           </a:p>
@@ -14818,7 +14852,7 @@
                 <a:ea typeface="Courier New" pitchFamily="34" charset="-122"/>
                 <a:cs typeface="Courier New" pitchFamily="34" charset="-120"/>
               </a:rPr>
-              <a:t>(last 15 of 58 entries; --limit to see</a:t>
+              <a:t>(last 15 of 61 entries; --limit to see</a:t>
             </a:r>
             <a:endParaRPr lang="en-US" sz="1000" dirty="0"/>
           </a:p>
@@ -14852,7 +14886,7 @@
                 <a:ea typeface="Courier New" pitchFamily="34" charset="-122"/>
                 <a:cs typeface="Courier New" pitchFamily="34" charset="-120"/>
               </a:rPr>
-              <a:t>2026-10-15T17:29:48.480Z  gate.review.await</a:t>
+              <a:t>2026-10-16T01:45:11.492Z  gate.review.await</a:t>
             </a:r>
             <a:endParaRPr lang="en-US" sz="1000" dirty="0"/>
           </a:p>
@@ -14886,7 +14920,7 @@
                 <a:ea typeface="Courier New" pitchFamily="34" charset="-122"/>
                 <a:cs typeface="Courier New" pitchFamily="34" charset="-120"/>
               </a:rPr>
-              <a:t>  sha256:85a91b18d25718bc3e1613fa277a1a7d78</a:t>
+              <a:t>  sha256:4d278be092f300aa70e2c69198d892919f</a:t>
             </a:r>
             <a:endParaRPr lang="en-US" sz="1000" dirty="0"/>
           </a:p>
@@ -14903,7 +14937,7 @@
                 <a:ea typeface="Courier New" pitchFamily="34" charset="-122"/>
                 <a:cs typeface="Courier New" pitchFamily="34" charset="-120"/>
               </a:rPr>
-              <a:t>  05c549d49afe5093354cb1e81f92dc [sdlc</a:t>
+              <a:t>  24ca5e8bc7551724bba84b57c23af2 [sdlc</a:t>
             </a:r>
             <a:endParaRPr lang="en-US" sz="1000" dirty="0"/>
           </a:p>
@@ -14920,7 +14954,7 @@
                 <a:ea typeface="Courier New" pitchFamily="34" charset="-122"/>
                 <a:cs typeface="Courier New" pitchFamily="34" charset="-120"/>
               </a:rPr>
-              <a:t>  0.21.3 · community]</a:t>
+              <a:t>  0.22.0 · community]</a:t>
             </a:r>
             <a:endParaRPr lang="en-US" sz="1000" dirty="0"/>
           </a:p>
@@ -14937,7 +14971,7 @@
                 <a:ea typeface="Courier New" pitchFamily="34" charset="-122"/>
                 <a:cs typeface="Courier New" pitchFamily="34" charset="-120"/>
               </a:rPr>
-              <a:t>2026-10-15T17:29:51.894Z  gate.review.appro</a:t>
+              <a:t>2026-10-16T01:45:14.626Z  gate.review.appro</a:t>
             </a:r>
             <a:endParaRPr lang="en-US" sz="1000" dirty="0"/>
           </a:p>
@@ -14988,7 +15022,7 @@
                 <a:ea typeface="Courier New" pitchFamily="34" charset="-122"/>
                 <a:cs typeface="Courier New" pitchFamily="34" charset="-120"/>
               </a:rPr>
-              <a:t>  [sdlc 0.21.3 · community]</a:t>
+              <a:t>  [sdlc 0.22.0 · community]</a:t>
             </a:r>
             <a:endParaRPr lang="en-US" sz="1000" dirty="0"/>
           </a:p>
@@ -15005,7 +15039,7 @@
                 <a:ea typeface="Courier New" pitchFamily="34" charset="-122"/>
                 <a:cs typeface="Courier New" pitchFamily="34" charset="-120"/>
               </a:rPr>
-              <a:t>2026-10-15T17:29:58.541Z  gate.release.appr</a:t>
+              <a:t>2026-10-16T01:45:21.015Z  gate.release.appr</a:t>
             </a:r>
             <a:endParaRPr lang="en-US" sz="1000" dirty="0"/>
           </a:p>
@@ -15056,7 +15090,7 @@
                 <a:ea typeface="Courier New" pitchFamily="34" charset="-122"/>
                 <a:cs typeface="Courier New" pitchFamily="34" charset="-120"/>
               </a:rPr>
-              <a:t>  release-manager [sdlc 0.21.3 · community]</a:t>
+              <a:t>  release-manager [sdlc 0.22.0 · community]</a:t>
             </a:r>
             <a:endParaRPr lang="en-US" sz="1000" dirty="0"/>
           </a:p>
@@ -16384,7 +16418,7 @@
                 <a:ea typeface="Courier New" pitchFamily="34" charset="-122"/>
                 <a:cs typeface="Courier New" pitchFamily="34" charset="-120"/>
               </a:rPr>
-              <a:t>✓ test (1.1s)</a:t>
+              <a:t>✓ test (1.0s)</a:t>
             </a:r>
             <a:endParaRPr lang="en-US" sz="1000" dirty="0"/>
           </a:p>
@@ -16401,7 +16435,7 @@
                 <a:ea typeface="Courier New" pitchFamily="34" charset="-122"/>
                 <a:cs typeface="Courier New" pitchFamily="34" charset="-120"/>
               </a:rPr>
-              <a:t>✓ ci-green (ci/pipeline_status, 0.6s)</a:t>
+              <a:t>✓ ci-green (ci/pipeline_status, 0.5s)</a:t>
             </a:r>
             <a:endParaRPr lang="en-US" sz="1000" dirty="0"/>
           </a:p>
@@ -16837,7 +16871,7 @@
                 <a:ea typeface="Courier New" pitchFamily="34" charset="-122"/>
                 <a:cs typeface="Courier New" pitchFamily="34" charset="-120"/>
               </a:rPr>
-              <a:t>      "id": "20261015T173055421Z-ci-green-0</a:t>
+              <a:t>      "id": "20261016T014615137Z-ci-green-2</a:t>
             </a:r>
             <a:endParaRPr lang="en-US" sz="1000" dirty="0"/>
           </a:p>
@@ -16854,7 +16888,7 @@
                 <a:ea typeface="Courier New" pitchFamily="34" charset="-122"/>
                 <a:cs typeface="Courier New" pitchFamily="34" charset="-120"/>
               </a:rPr>
-              <a:t>  57246",</a:t>
+              <a:t>  1efff",</a:t>
             </a:r>
             <a:endParaRPr lang="en-US" sz="1000" dirty="0"/>
           </a:p>
@@ -16990,7 +17024,7 @@
                 <a:ea typeface="Courier New" pitchFamily="34" charset="-122"/>
                 <a:cs typeface="Courier New" pitchFamily="34" charset="-120"/>
               </a:rPr>
-              <a:t>        "ref": "89c909bf89d90205254ef2922bd</a:t>
+              <a:t>        "ref": "0e39097036f5c9332487f564dfe</a:t>
             </a:r>
             <a:endParaRPr lang="en-US" sz="1000" dirty="0"/>
           </a:p>
@@ -17007,7 +17041,7 @@
                 <a:ea typeface="Courier New" pitchFamily="34" charset="-122"/>
                 <a:cs typeface="Courier New" pitchFamily="34" charset="-120"/>
               </a:rPr>
-              <a:t>  2a93e6a194b82",</a:t>
+              <a:t>  32c7552c57b79",</a:t>
             </a:r>
             <a:endParaRPr lang="en-US" sz="1000" dirty="0"/>
           </a:p>
@@ -19581,7 +19615,7 @@
                 <a:ea typeface="Cambria" pitchFamily="34" charset="-122"/>
                 <a:cs typeface="Cambria" pitchFamily="34" charset="-120"/>
               </a:rPr>
-              <a:t>124</a:t>
+              <a:t>127</a:t>
             </a:r>
             <a:endParaRPr lang="en-US" sz="6000" dirty="0"/>
           </a:p>
@@ -19686,7 +19720,7 @@
                 <a:ea typeface="Cambria" pitchFamily="34" charset="-122"/>
                 <a:cs typeface="Cambria" pitchFamily="34" charset="-120"/>
               </a:rPr>
-              <a:t>87</a:t>
+              <a:t>90</a:t>
             </a:r>
             <a:endParaRPr lang="en-US" sz="6000" dirty="0"/>
           </a:p>
@@ -19725,7 +19759,7 @@
                 <a:ea typeface="Calibri" pitchFamily="34" charset="-122"/>
                 <a:cs typeface="Calibri" pitchFamily="34" charset="-120"/>
               </a:rPr>
-              <a:t>of 87 commands</a:t>
+              <a:t>of 90 commands</a:t>
             </a:r>
             <a:endParaRPr lang="en-US" sz="1600" dirty="0"/>
           </a:p>
@@ -24306,7 +24340,7 @@
         <p:spPr>
           <a:xfrm>
             <a:off x="457200" y="5833872"/>
-            <a:ext cx="945896" cy="256032"/>
+            <a:ext cx="1077976" cy="256032"/>
           </a:xfrm>
           <a:prstGeom prst="roundRect">
             <a:avLst>
@@ -24333,7 +24367,7 @@
         <p:spPr>
           <a:xfrm>
             <a:off x="457200" y="5833872"/>
-            <a:ext cx="945896" cy="256032"/>
+            <a:ext cx="1077976" cy="256032"/>
           </a:xfrm>
           <a:prstGeom prst="rect">
             <a:avLst/>
@@ -24357,7 +24391,7 @@
                 <a:ea typeface="Calibri" pitchFamily="34" charset="-122"/>
                 <a:cs typeface="Calibri" pitchFamily="34" charset="-120"/>
               </a:rPr>
-              <a:t>board claim</a:t>
+              <a:t>board auction</a:t>
             </a:r>
             <a:endParaRPr lang="en-US" sz="1000" dirty="0"/>
           </a:p>
@@ -24371,8 +24405,8 @@
         </p:nvSpPr>
         <p:spPr>
           <a:xfrm>
-            <a:off x="1494536" y="5833872"/>
-            <a:ext cx="1210056" cy="256032"/>
+            <a:off x="1626616" y="5833872"/>
+            <a:ext cx="813816" cy="256032"/>
           </a:xfrm>
           <a:prstGeom prst="roundRect">
             <a:avLst>
@@ -24398,8 +24432,8 @@
         </p:nvSpPr>
         <p:spPr>
           <a:xfrm>
-            <a:off x="1494536" y="5833872"/>
-            <a:ext cx="1210056" cy="256032"/>
+            <a:off x="1626616" y="5833872"/>
+            <a:ext cx="813816" cy="256032"/>
           </a:xfrm>
           <a:prstGeom prst="rect">
             <a:avLst/>
@@ -24423,7 +24457,7 @@
                 <a:ea typeface="Calibri" pitchFamily="34" charset="-122"/>
                 <a:cs typeface="Calibri" pitchFamily="34" charset="-120"/>
               </a:rPr>
-              <a:t>board heartbeat</a:t>
+              <a:t>board bid</a:t>
             </a:r>
             <a:endParaRPr lang="en-US" sz="1000" dirty="0"/>
           </a:p>
@@ -24437,8 +24471,8 @@
         </p:nvSpPr>
         <p:spPr>
           <a:xfrm>
-            <a:off x="2796032" y="5833872"/>
-            <a:ext cx="1077976" cy="256032"/>
+            <a:off x="2531872" y="5833872"/>
+            <a:ext cx="945896" cy="256032"/>
           </a:xfrm>
           <a:prstGeom prst="roundRect">
             <a:avLst>
@@ -24464,8 +24498,8 @@
         </p:nvSpPr>
         <p:spPr>
           <a:xfrm>
-            <a:off x="2796032" y="5833872"/>
-            <a:ext cx="1077976" cy="256032"/>
+            <a:off x="2531872" y="5833872"/>
+            <a:ext cx="945896" cy="256032"/>
           </a:xfrm>
           <a:prstGeom prst="rect">
             <a:avLst/>
@@ -24489,7 +24523,7 @@
                 <a:ea typeface="Calibri" pitchFamily="34" charset="-122"/>
                 <a:cs typeface="Calibri" pitchFamily="34" charset="-120"/>
               </a:rPr>
-              <a:t>board release</a:t>
+              <a:t>board award</a:t>
             </a:r>
             <a:endParaRPr lang="en-US" sz="1000" dirty="0"/>
           </a:p>
@@ -24503,8 +24537,8 @@
         </p:nvSpPr>
         <p:spPr>
           <a:xfrm>
-            <a:off x="3965448" y="5833872"/>
-            <a:ext cx="1011936" cy="256032"/>
+            <a:off x="3569208" y="5833872"/>
+            <a:ext cx="945896" cy="256032"/>
           </a:xfrm>
           <a:prstGeom prst="roundRect">
             <a:avLst>
@@ -24530,8 +24564,8 @@
         </p:nvSpPr>
         <p:spPr>
           <a:xfrm>
-            <a:off x="3965448" y="5833872"/>
-            <a:ext cx="1011936" cy="256032"/>
+            <a:off x="3569208" y="5833872"/>
+            <a:ext cx="945896" cy="256032"/>
           </a:xfrm>
           <a:prstGeom prst="rect">
             <a:avLst/>
@@ -24555,7 +24589,7 @@
                 <a:ea typeface="Calibri" pitchFamily="34" charset="-122"/>
                 <a:cs typeface="Calibri" pitchFamily="34" charset="-120"/>
               </a:rPr>
-              <a:t>board submit</a:t>
+              <a:t>board claim</a:t>
             </a:r>
             <a:endParaRPr lang="en-US" sz="1000" dirty="0"/>
           </a:p>
@@ -24569,8 +24603,8 @@
         </p:nvSpPr>
         <p:spPr>
           <a:xfrm>
-            <a:off x="5068824" y="5833872"/>
-            <a:ext cx="1011936" cy="256032"/>
+            <a:off x="4606544" y="5833872"/>
+            <a:ext cx="1210056" cy="256032"/>
           </a:xfrm>
           <a:prstGeom prst="roundRect">
             <a:avLst>
@@ -24596,8 +24630,8 @@
         </p:nvSpPr>
         <p:spPr>
           <a:xfrm>
-            <a:off x="5068824" y="5833872"/>
-            <a:ext cx="1011936" cy="256032"/>
+            <a:off x="4606544" y="5833872"/>
+            <a:ext cx="1210056" cy="256032"/>
           </a:xfrm>
           <a:prstGeom prst="rect">
             <a:avLst/>
@@ -24621,7 +24655,7 @@
                 <a:ea typeface="Calibri" pitchFamily="34" charset="-122"/>
                 <a:cs typeface="Calibri" pitchFamily="34" charset="-120"/>
               </a:rPr>
-              <a:t>board reopen</a:t>
+              <a:t>board heartbeat</a:t>
             </a:r>
             <a:endParaRPr lang="en-US" sz="1000" dirty="0"/>
           </a:p>
@@ -24635,8 +24669,8 @@
         </p:nvSpPr>
         <p:spPr>
           <a:xfrm>
-            <a:off x="6172200" y="5833872"/>
-            <a:ext cx="615696" cy="256032"/>
+            <a:off x="5908040" y="5833872"/>
+            <a:ext cx="1077976" cy="256032"/>
           </a:xfrm>
           <a:prstGeom prst="roundRect">
             <a:avLst>
@@ -24662,8 +24696,8 @@
         </p:nvSpPr>
         <p:spPr>
           <a:xfrm>
-            <a:off x="6172200" y="5833872"/>
-            <a:ext cx="615696" cy="256032"/>
+            <a:off x="5908040" y="5833872"/>
+            <a:ext cx="1077976" cy="256032"/>
           </a:xfrm>
           <a:prstGeom prst="rect">
             <a:avLst/>
@@ -24687,7 +24721,7 @@
                 <a:ea typeface="Calibri" pitchFamily="34" charset="-122"/>
                 <a:cs typeface="Calibri" pitchFamily="34" charset="-120"/>
               </a:rPr>
-              <a:t>verify</a:t>
+              <a:t>board release</a:t>
             </a:r>
             <a:endParaRPr lang="en-US" sz="1000" dirty="0"/>
           </a:p>
@@ -24701,8 +24735,8 @@
         </p:nvSpPr>
         <p:spPr>
           <a:xfrm>
-            <a:off x="6879336" y="5833872"/>
-            <a:ext cx="615696" cy="256032"/>
+            <a:off x="7077456" y="5833872"/>
+            <a:ext cx="1011936" cy="256032"/>
           </a:xfrm>
           <a:prstGeom prst="roundRect">
             <a:avLst>
@@ -24728,8 +24762,8 @@
         </p:nvSpPr>
         <p:spPr>
           <a:xfrm>
-            <a:off x="6879336" y="5833872"/>
-            <a:ext cx="615696" cy="256032"/>
+            <a:off x="7077456" y="5833872"/>
+            <a:ext cx="1011936" cy="256032"/>
           </a:xfrm>
           <a:prstGeom prst="rect">
             <a:avLst/>
@@ -24753,7 +24787,7 @@
                 <a:ea typeface="Calibri" pitchFamily="34" charset="-122"/>
                 <a:cs typeface="Calibri" pitchFamily="34" charset="-120"/>
               </a:rPr>
-              <a:t>review</a:t>
+              <a:t>board submit</a:t>
             </a:r>
             <a:endParaRPr lang="en-US" sz="1000" dirty="0"/>
           </a:p>
@@ -24767,8 +24801,8 @@
         </p:nvSpPr>
         <p:spPr>
           <a:xfrm>
-            <a:off x="7586472" y="5833872"/>
-            <a:ext cx="747776" cy="256032"/>
+            <a:off x="8180832" y="5833872"/>
+            <a:ext cx="1011936" cy="256032"/>
           </a:xfrm>
           <a:prstGeom prst="roundRect">
             <a:avLst>
@@ -24794,8 +24828,8 @@
         </p:nvSpPr>
         <p:spPr>
           <a:xfrm>
-            <a:off x="7586472" y="5833872"/>
-            <a:ext cx="747776" cy="256032"/>
+            <a:off x="8180832" y="5833872"/>
+            <a:ext cx="1011936" cy="256032"/>
           </a:xfrm>
           <a:prstGeom prst="rect">
             <a:avLst/>
@@ -24819,7 +24853,7 @@
                 <a:ea typeface="Calibri" pitchFamily="34" charset="-122"/>
                 <a:cs typeface="Calibri" pitchFamily="34" charset="-120"/>
               </a:rPr>
-              <a:t>validate</a:t>
+              <a:t>board reopen</a:t>
             </a:r>
             <a:endParaRPr lang="en-US" sz="1000" dirty="0"/>
           </a:p>
@@ -24833,8 +24867,8 @@
         </p:nvSpPr>
         <p:spPr>
           <a:xfrm>
-            <a:off x="8425688" y="5833872"/>
-            <a:ext cx="681736" cy="256032"/>
+            <a:off x="9284208" y="5833872"/>
+            <a:ext cx="615696" cy="256032"/>
           </a:xfrm>
           <a:prstGeom prst="roundRect">
             <a:avLst>
@@ -24860,8 +24894,8 @@
         </p:nvSpPr>
         <p:spPr>
           <a:xfrm>
-            <a:off x="8425688" y="5833872"/>
-            <a:ext cx="681736" cy="256032"/>
+            <a:off x="9284208" y="5833872"/>
+            <a:ext cx="615696" cy="256032"/>
           </a:xfrm>
           <a:prstGeom prst="rect">
             <a:avLst/>
@@ -24885,7 +24919,7 @@
                 <a:ea typeface="Calibri" pitchFamily="34" charset="-122"/>
                 <a:cs typeface="Calibri" pitchFamily="34" charset="-120"/>
               </a:rPr>
-              <a:t>archive</a:t>
+              <a:t>verify</a:t>
             </a:r>
             <a:endParaRPr lang="en-US" sz="1000" dirty="0"/>
           </a:p>
@@ -24899,8 +24933,8 @@
         </p:nvSpPr>
         <p:spPr>
           <a:xfrm>
-            <a:off x="9198864" y="5833872"/>
-            <a:ext cx="549656" cy="256032"/>
+            <a:off x="9991344" y="5833872"/>
+            <a:ext cx="615696" cy="256032"/>
           </a:xfrm>
           <a:prstGeom prst="roundRect">
             <a:avLst>
@@ -24926,8 +24960,8 @@
         </p:nvSpPr>
         <p:spPr>
           <a:xfrm>
-            <a:off x="9198864" y="5833872"/>
-            <a:ext cx="549656" cy="256032"/>
+            <a:off x="9991344" y="5833872"/>
+            <a:ext cx="615696" cy="256032"/>
           </a:xfrm>
           <a:prstGeom prst="rect">
             <a:avLst/>
@@ -24951,7 +24985,7 @@
                 <a:ea typeface="Calibri" pitchFamily="34" charset="-122"/>
                 <a:cs typeface="Calibri" pitchFamily="34" charset="-120"/>
               </a:rPr>
-              <a:t>audit</a:t>
+              <a:t>review</a:t>
             </a:r>
             <a:endParaRPr lang="en-US" sz="1000" dirty="0"/>
           </a:p>
@@ -24965,8 +24999,8 @@
         </p:nvSpPr>
         <p:spPr>
           <a:xfrm>
-            <a:off x="9839960" y="5833872"/>
-            <a:ext cx="813816" cy="256032"/>
+            <a:off x="10698480" y="5833872"/>
+            <a:ext cx="747776" cy="256032"/>
           </a:xfrm>
           <a:prstGeom prst="roundRect">
             <a:avLst>
@@ -24992,8 +25026,8 @@
         </p:nvSpPr>
         <p:spPr>
           <a:xfrm>
-            <a:off x="9839960" y="5833872"/>
-            <a:ext cx="813816" cy="256032"/>
+            <a:off x="10698480" y="5833872"/>
+            <a:ext cx="747776" cy="256032"/>
           </a:xfrm>
           <a:prstGeom prst="rect">
             <a:avLst/>
@@ -25017,73 +25051,7 @@
                 <a:ea typeface="Calibri" pitchFamily="34" charset="-122"/>
                 <a:cs typeface="Calibri" pitchFamily="34" charset="-120"/>
               </a:rPr>
-              <a:t>changelog</a:t>
-            </a:r>
-            <a:endParaRPr lang="en-US" sz="1000" dirty="0"/>
-          </a:p>
-        </p:txBody>
-      </p:sp>
-      <p:sp>
-        <p:nvSpPr>
-          <p:cNvPr id="170" name="Shape 168"/>
-          <p:cNvSpPr/>
-          <p:nvPr/>
-        </p:nvSpPr>
-        <p:spPr>
-          <a:xfrm>
-            <a:off x="10745216" y="5833872"/>
-            <a:ext cx="615696" cy="256032"/>
-          </a:xfrm>
-          <a:prstGeom prst="roundRect">
-            <a:avLst>
-              <a:gd name="adj" fmla="val 50000"/>
-            </a:avLst>
-          </a:prstGeom>
-          <a:solidFill>
-            <a:srgbClr val="F3F5F8"/>
-          </a:solidFill>
-          <a:ln w="12700">
-            <a:solidFill>
-              <a:srgbClr val="F3F5F8"/>
-            </a:solidFill>
-            <a:prstDash val="solid"/>
-          </a:ln>
-        </p:spPr>
-      </p:sp>
-      <p:sp>
-        <p:nvSpPr>
-          <p:cNvPr id="171" name="Text 169"/>
-          <p:cNvSpPr txBox="1"/>
-          <p:nvPr/>
-        </p:nvSpPr>
-        <p:spPr>
-          <a:xfrm>
-            <a:off x="10745216" y="5833872"/>
-            <a:ext cx="615696" cy="256032"/>
-          </a:xfrm>
-          <a:prstGeom prst="rect">
-            <a:avLst/>
-          </a:prstGeom>
-          <a:noFill/>
-          <a:ln/>
-        </p:spPr>
-        <p:txBody>
-          <a:bodyPr wrap="square" lIns="0" tIns="0" rIns="0" bIns="0" rtlCol="0" anchor="ctr"/>
-          <a:lstStyle/>
-          <a:p>
-            <a:pPr algn="ctr" indent="0" marL="0">
-              <a:buNone/>
-            </a:pPr>
-            <a:r>
-              <a:rPr lang="en-US" sz="1000" dirty="0">
-                <a:solidFill>
-                  <a:srgbClr val="1F2430"/>
-                </a:solidFill>
-                <a:latin typeface="Calibri" pitchFamily="34" charset="0"/>
-                <a:ea typeface="Calibri" pitchFamily="34" charset="-122"/>
-                <a:cs typeface="Calibri" pitchFamily="34" charset="-120"/>
-              </a:rPr>
-              <a:t>report</a:t>
+              <a:t>validate</a:t>
             </a:r>
             <a:endParaRPr lang="en-US" sz="1000" dirty="0"/>
           </a:p>
@@ -27729,7 +27697,7 @@
                 <a:ea typeface="Courier New" pitchFamily="34" charset="-122"/>
                 <a:cs typeface="Courier New" pitchFamily="34" charset="-120"/>
               </a:rPr>
-              <a:t>  sdlc 0.21.3, license: community</a:t>
+              <a:t>  sdlc 0.22.0, license: community</a:t>
             </a:r>
             <a:endParaRPr lang="en-US" sz="1000" dirty="0"/>
           </a:p>

--- a/docs/demo/sdlc-calculator-demo.en.pptx
+++ b/docs/demo/sdlc-calculator-demo.en.pptx
@@ -6660,7 +6660,7 @@
                 <a:ea typeface="Courier New" pitchFamily="34" charset="-122"/>
                 <a:cs typeface="Courier New" pitchFamily="34" charset="-120"/>
               </a:rPr>
-              <a:t>  code-owner (4d278be092f3)</a:t>
+              <a:t>  code-owner (990501383609)</a:t>
             </a:r>
             <a:endParaRPr lang="en-US" sz="1000" dirty="0"/>
           </a:p>
@@ -6745,7 +6745,7 @@
                 <a:ea typeface="Courier New" pitchFamily="34" charset="-122"/>
                 <a:cs typeface="Courier New" pitchFamily="34" charset="-120"/>
               </a:rPr>
-              <a:t>  "SDLC-Approval: basic-arithmetic:review:4</a:t>
+              <a:t>  "SDLC-Approval: basic-arithmetic:review:9</a:t>
             </a:r>
             <a:endParaRPr lang="en-US" sz="1000" dirty="0"/>
           </a:p>
@@ -6762,7 +6762,7 @@
                 <a:ea typeface="Courier New" pitchFamily="34" charset="-122"/>
                 <a:cs typeface="Courier New" pitchFamily="34" charset="-120"/>
               </a:rPr>
-              <a:t>  d278be092f3"</a:t>
+              <a:t>  90501383609"</a:t>
             </a:r>
             <a:endParaRPr lang="en-US" sz="1000" dirty="0"/>
           </a:p>
@@ -7443,7 +7443,7 @@
                 <a:ea typeface="Courier New" pitchFamily="34" charset="-122"/>
                 <a:cs typeface="Courier New" pitchFamily="34" charset="-120"/>
               </a:rPr>
-              <a:t>  release-manager (4d278be092f3)</a:t>
+              <a:t>  release-manager (990501383609)</a:t>
             </a:r>
             <a:endParaRPr lang="en-US" sz="1000" dirty="0"/>
           </a:p>
@@ -7511,7 +7511,7 @@
                 <a:ea typeface="Courier New" pitchFamily="34" charset="-122"/>
                 <a:cs typeface="Courier New" pitchFamily="34" charset="-120"/>
               </a:rPr>
-              <a:t>  gate" -m "SDLC-Approval: basic-arithmetic:release:4d278be092f3"</a:t>
+              <a:t>  gate" -m "SDLC-Approval: basic-arithmetic:release:990501383609"</a:t>
             </a:r>
             <a:endParaRPr lang="en-US" sz="1000" dirty="0"/>
           </a:p>
@@ -7794,7 +7794,7 @@
                 <a:ea typeface="Courier New" pitchFamily="34" charset="-122"/>
                 <a:cs typeface="Courier New" pitchFamily="34" charset="-120"/>
               </a:rPr>
-              <a:t>✓ basic-arithmetic/intent alice valid 86dd9ebe trailer: missing</a:t>
+              <a:t>✓ basic-arithmetic/intent alice valid 0e4f2e14 trailer: missing</a:t>
             </a:r>
             <a:endParaRPr lang="en-US" sz="1000" dirty="0"/>
           </a:p>
@@ -7811,7 +7811,7 @@
                 <a:ea typeface="Courier New" pitchFamily="34" charset="-122"/>
                 <a:cs typeface="Courier New" pitchFamily="34" charset="-120"/>
               </a:rPr>
-              <a:t>✓ basic-arithmetic/spec alice valid 7acb4b39 trailer: missing</a:t>
+              <a:t>✓ basic-arithmetic/spec alice valid fc28e19b trailer: missing</a:t>
             </a:r>
             <a:endParaRPr lang="en-US" sz="1000" dirty="0"/>
           </a:p>
@@ -7828,7 +7828,7 @@
                 <a:ea typeface="Courier New" pitchFamily="34" charset="-122"/>
                 <a:cs typeface="Courier New" pitchFamily="34" charset="-120"/>
               </a:rPr>
-              <a:t>✗ basic-arithmetic/plan bob wrong-signer 7acb4b39 trailer: missing</a:t>
+              <a:t>✗ basic-arithmetic/plan bob wrong-signer fc28e19b trailer: missing</a:t>
             </a:r>
             <a:endParaRPr lang="en-US" sz="1000" dirty="0"/>
           </a:p>
@@ -7845,7 +7845,7 @@
                 <a:ea typeface="Courier New" pitchFamily="34" charset="-122"/>
                 <a:cs typeface="Courier New" pitchFamily="34" charset="-120"/>
               </a:rPr>
-              <a:t>✓ basic-arithmetic/review carol valid ee117e4c trailer: missing</a:t>
+              <a:t>✓ basic-arithmetic/review carol valid acebc1d1 trailer: missing</a:t>
             </a:r>
             <a:endParaRPr lang="en-US" sz="1000" dirty="0"/>
           </a:p>
@@ -7862,7 +7862,7 @@
                 <a:ea typeface="Courier New" pitchFamily="34" charset="-122"/>
                 <a:cs typeface="Courier New" pitchFamily="34" charset="-120"/>
               </a:rPr>
-              <a:t>✓ basic-arithmetic/release alice valid ecb36c66 trailer: missing</a:t>
+              <a:t>✓ basic-arithmetic/release alice valid a3ee48e3 trailer: missing</a:t>
             </a:r>
             <a:endParaRPr lang="en-US" sz="1000" dirty="0"/>
           </a:p>
@@ -7879,7 +7879,7 @@
                 <a:ea typeface="Courier New" pitchFamily="34" charset="-122"/>
                 <a:cs typeface="Courier New" pitchFamily="34" charset="-120"/>
               </a:rPr>
-              <a:t>✓ openspec/roles.yaml alice@calc.example bootstrap 6adc60f8</a:t>
+              <a:t>✓ openspec/roles.yaml alice@calc.example bootstrap dfe8bfd7</a:t>
             </a:r>
             <a:endParaRPr lang="en-US" sz="1000" dirty="0"/>
           </a:p>
@@ -8511,7 +8511,7 @@
                 <a:ea typeface="Courier New" pitchFamily="34" charset="-122"/>
                 <a:cs typeface="Courier New" pitchFamily="34" charset="-120"/>
               </a:rPr>
-              <a:t>  openspec\changes\archive\2026-10-15-basic</a:t>
+              <a:t>  openspec\changes\archive\2026-10-16-basic</a:t>
             </a:r>
             <a:endParaRPr lang="en-US" sz="1000" dirty="0"/>
           </a:p>
@@ -14365,7 +14365,7 @@
                 <a:ea typeface="Courier New" pitchFamily="34" charset="-122"/>
                 <a:cs typeface="Courier New" pitchFamily="34" charset="-120"/>
               </a:rPr>
-              <a:t>  archived) · sdlc 0.22.0, license:</a:t>
+              <a:t>  archived) · sdlc 0.22.1, license:</a:t>
             </a:r>
             <a:endParaRPr lang="en-US" sz="1000" dirty="0"/>
           </a:p>
@@ -14569,7 +14569,7 @@
                 <a:ea typeface="Courier New" pitchFamily="34" charset="-122"/>
                 <a:cs typeface="Courier New" pitchFamily="34" charset="-120"/>
               </a:rPr>
-              <a:t>  intent 3 · spec 3 · plan 16 · review 3;</a:t>
+              <a:t>  intent 3 · spec 4 · plan 17 · review 3;</a:t>
             </a:r>
             <a:endParaRPr lang="en-US" sz="1000" dirty="0"/>
           </a:p>
@@ -14886,7 +14886,7 @@
                 <a:ea typeface="Courier New" pitchFamily="34" charset="-122"/>
                 <a:cs typeface="Courier New" pitchFamily="34" charset="-120"/>
               </a:rPr>
-              <a:t>2026-10-16T01:45:11.492Z  gate.review.await</a:t>
+              <a:t>2026-10-16T10:44:15.433Z  gate.review.await</a:t>
             </a:r>
             <a:endParaRPr lang="en-US" sz="1000" dirty="0"/>
           </a:p>
@@ -14920,7 +14920,7 @@
                 <a:ea typeface="Courier New" pitchFamily="34" charset="-122"/>
                 <a:cs typeface="Courier New" pitchFamily="34" charset="-120"/>
               </a:rPr>
-              <a:t>  sha256:4d278be092f300aa70e2c69198d892919f</a:t>
+              <a:t>  sha256:990501383609b47bfb85bb3dea911af52c</a:t>
             </a:r>
             <a:endParaRPr lang="en-US" sz="1000" dirty="0"/>
           </a:p>
@@ -14937,7 +14937,7 @@
                 <a:ea typeface="Courier New" pitchFamily="34" charset="-122"/>
                 <a:cs typeface="Courier New" pitchFamily="34" charset="-120"/>
               </a:rPr>
-              <a:t>  24ca5e8bc7551724bba84b57c23af2 [sdlc</a:t>
+              <a:t>  fb8b71b4556739dcd68f393a6c023f [sdlc</a:t>
             </a:r>
             <a:endParaRPr lang="en-US" sz="1000" dirty="0"/>
           </a:p>
@@ -14954,7 +14954,7 @@
                 <a:ea typeface="Courier New" pitchFamily="34" charset="-122"/>
                 <a:cs typeface="Courier New" pitchFamily="34" charset="-120"/>
               </a:rPr>
-              <a:t>  0.22.0 · community]</a:t>
+              <a:t>  0.22.1 · community]</a:t>
             </a:r>
             <a:endParaRPr lang="en-US" sz="1000" dirty="0"/>
           </a:p>
@@ -14971,7 +14971,7 @@
                 <a:ea typeface="Courier New" pitchFamily="34" charset="-122"/>
                 <a:cs typeface="Courier New" pitchFamily="34" charset="-120"/>
               </a:rPr>
-              <a:t>2026-10-16T01:45:14.626Z  gate.review.appro</a:t>
+              <a:t>2026-10-16T10:44:18.600Z  gate.review.appro</a:t>
             </a:r>
             <a:endParaRPr lang="en-US" sz="1000" dirty="0"/>
           </a:p>
@@ -15022,7 +15022,7 @@
                 <a:ea typeface="Courier New" pitchFamily="34" charset="-122"/>
                 <a:cs typeface="Courier New" pitchFamily="34" charset="-120"/>
               </a:rPr>
-              <a:t>  [sdlc 0.22.0 · community]</a:t>
+              <a:t>  [sdlc 0.22.1 · community]</a:t>
             </a:r>
             <a:endParaRPr lang="en-US" sz="1000" dirty="0"/>
           </a:p>
@@ -15039,7 +15039,7 @@
                 <a:ea typeface="Courier New" pitchFamily="34" charset="-122"/>
                 <a:cs typeface="Courier New" pitchFamily="34" charset="-120"/>
               </a:rPr>
-              <a:t>2026-10-16T01:45:21.015Z  gate.release.appr</a:t>
+              <a:t>2026-10-16T10:44:24.994Z  gate.release.appr</a:t>
             </a:r>
             <a:endParaRPr lang="en-US" sz="1000" dirty="0"/>
           </a:p>
@@ -15090,7 +15090,7 @@
                 <a:ea typeface="Courier New" pitchFamily="34" charset="-122"/>
                 <a:cs typeface="Courier New" pitchFamily="34" charset="-120"/>
               </a:rPr>
-              <a:t>  release-manager [sdlc 0.22.0 · community]</a:t>
+              <a:t>  release-manager [sdlc 0.22.1 · community]</a:t>
             </a:r>
             <a:endParaRPr lang="en-US" sz="1000" dirty="0"/>
           </a:p>
@@ -16871,7 +16871,7 @@
                 <a:ea typeface="Courier New" pitchFamily="34" charset="-122"/>
                 <a:cs typeface="Courier New" pitchFamily="34" charset="-120"/>
               </a:rPr>
-              <a:t>      "id": "20261016T014615137Z-ci-green-2</a:t>
+              <a:t>      "id": "20261016T104518290Z-ci-green-1</a:t>
             </a:r>
             <a:endParaRPr lang="en-US" sz="1000" dirty="0"/>
           </a:p>
@@ -16888,7 +16888,7 @@
                 <a:ea typeface="Courier New" pitchFamily="34" charset="-122"/>
                 <a:cs typeface="Courier New" pitchFamily="34" charset="-120"/>
               </a:rPr>
-              <a:t>  1efff",</a:t>
+              <a:t>  a40c4",</a:t>
             </a:r>
             <a:endParaRPr lang="en-US" sz="1000" dirty="0"/>
           </a:p>
@@ -17024,7 +17024,7 @@
                 <a:ea typeface="Courier New" pitchFamily="34" charset="-122"/>
                 <a:cs typeface="Courier New" pitchFamily="34" charset="-120"/>
               </a:rPr>
-              <a:t>        "ref": "0e39097036f5c9332487f564dfe</a:t>
+              <a:t>        "ref": "27eabdd8b83dd62c5953e8f12c7</a:t>
             </a:r>
             <a:endParaRPr lang="en-US" sz="1000" dirty="0"/>
           </a:p>
@@ -17041,7 +17041,7 @@
                 <a:ea typeface="Courier New" pitchFamily="34" charset="-122"/>
                 <a:cs typeface="Courier New" pitchFamily="34" charset="-120"/>
               </a:rPr>
-              <a:t>  32c7552c57b79",</a:t>
+              <a:t>  913aa80a04eff",</a:t>
             </a:r>
             <a:endParaRPr lang="en-US" sz="1000" dirty="0"/>
           </a:p>
@@ -27697,7 +27697,7 @@
                 <a:ea typeface="Courier New" pitchFamily="34" charset="-122"/>
                 <a:cs typeface="Courier New" pitchFamily="34" charset="-120"/>
               </a:rPr>
-              <a:t>  sdlc 0.22.0, license: community</a:t>
+              <a:t>  sdlc 0.22.1, license: community</a:t>
             </a:r>
             <a:endParaRPr lang="en-US" sz="1000" dirty="0"/>
           </a:p>
@@ -34488,7 +34488,7 @@
                 <a:ea typeface="Courier New" pitchFamily="34" charset="-122"/>
                 <a:cs typeface="Courier New" pitchFamily="34" charset="-120"/>
               </a:rPr>
-              <a:t>  (2844213e9554)</a:t>
+              <a:t>  (3f632e3f37b9)</a:t>
             </a:r>
             <a:endParaRPr lang="en-US" sz="1000" dirty="0"/>
           </a:p>
@@ -34624,7 +34624,7 @@
                 <a:ea typeface="Courier New" pitchFamily="34" charset="-122"/>
                 <a:cs typeface="Courier New" pitchFamily="34" charset="-120"/>
               </a:rPr>
-              <a:t>  2844213e9554"</a:t>
+              <a:t>  3f632e3f37b9"</a:t>
             </a:r>
             <a:endParaRPr lang="en-US" sz="1000" dirty="0"/>
           </a:p>

--- a/docs/demo/sdlc-calculator-demo.en.pptx
+++ b/docs/demo/sdlc-calculator-demo.en.pptx
@@ -6660,7 +6660,7 @@
                 <a:ea typeface="Courier New" pitchFamily="34" charset="-122"/>
                 <a:cs typeface="Courier New" pitchFamily="34" charset="-120"/>
               </a:rPr>
-              <a:t>  code-owner (990501383609)</a:t>
+              <a:t>  code-owner (1b0572e75b43)</a:t>
             </a:r>
             <a:endParaRPr lang="en-US" sz="1000" dirty="0"/>
           </a:p>
@@ -6745,7 +6745,7 @@
                 <a:ea typeface="Courier New" pitchFamily="34" charset="-122"/>
                 <a:cs typeface="Courier New" pitchFamily="34" charset="-120"/>
               </a:rPr>
-              <a:t>  "SDLC-Approval: basic-arithmetic:review:9</a:t>
+              <a:t>  "SDLC-Approval: basic-arithmetic:review:1</a:t>
             </a:r>
             <a:endParaRPr lang="en-US" sz="1000" dirty="0"/>
           </a:p>
@@ -6762,7 +6762,7 @@
                 <a:ea typeface="Courier New" pitchFamily="34" charset="-122"/>
                 <a:cs typeface="Courier New" pitchFamily="34" charset="-120"/>
               </a:rPr>
-              <a:t>  90501383609"</a:t>
+              <a:t>  b0572e75b43"</a:t>
             </a:r>
             <a:endParaRPr lang="en-US" sz="1000" dirty="0"/>
           </a:p>
@@ -7443,7 +7443,7 @@
                 <a:ea typeface="Courier New" pitchFamily="34" charset="-122"/>
                 <a:cs typeface="Courier New" pitchFamily="34" charset="-120"/>
               </a:rPr>
-              <a:t>  release-manager (990501383609)</a:t>
+              <a:t>  release-manager (1b0572e75b43)</a:t>
             </a:r>
             <a:endParaRPr lang="en-US" sz="1000" dirty="0"/>
           </a:p>
@@ -7511,7 +7511,7 @@
                 <a:ea typeface="Courier New" pitchFamily="34" charset="-122"/>
                 <a:cs typeface="Courier New" pitchFamily="34" charset="-120"/>
               </a:rPr>
-              <a:t>  gate" -m "SDLC-Approval: basic-arithmetic:release:990501383609"</a:t>
+              <a:t>  gate" -m "SDLC-Approval: basic-arithmetic:release:1b0572e75b43"</a:t>
             </a:r>
             <a:endParaRPr lang="en-US" sz="1000" dirty="0"/>
           </a:p>
@@ -7794,7 +7794,7 @@
                 <a:ea typeface="Courier New" pitchFamily="34" charset="-122"/>
                 <a:cs typeface="Courier New" pitchFamily="34" charset="-120"/>
               </a:rPr>
-              <a:t>✓ basic-arithmetic/intent alice valid 0e4f2e14 trailer: missing</a:t>
+              <a:t>✓ basic-arithmetic/intent alice valid 60b09e0c trailer: missing</a:t>
             </a:r>
             <a:endParaRPr lang="en-US" sz="1000" dirty="0"/>
           </a:p>
@@ -7811,7 +7811,7 @@
                 <a:ea typeface="Courier New" pitchFamily="34" charset="-122"/>
                 <a:cs typeface="Courier New" pitchFamily="34" charset="-120"/>
               </a:rPr>
-              <a:t>✓ basic-arithmetic/spec alice valid fc28e19b trailer: missing</a:t>
+              <a:t>✓ basic-arithmetic/spec alice valid 2a1b8947 trailer: missing</a:t>
             </a:r>
             <a:endParaRPr lang="en-US" sz="1000" dirty="0"/>
           </a:p>
@@ -7828,7 +7828,7 @@
                 <a:ea typeface="Courier New" pitchFamily="34" charset="-122"/>
                 <a:cs typeface="Courier New" pitchFamily="34" charset="-120"/>
               </a:rPr>
-              <a:t>✗ basic-arithmetic/plan bob wrong-signer fc28e19b trailer: missing</a:t>
+              <a:t>✗ basic-arithmetic/plan bob wrong-signer 2a1b8947 trailer: missing</a:t>
             </a:r>
             <a:endParaRPr lang="en-US" sz="1000" dirty="0"/>
           </a:p>
@@ -7845,7 +7845,7 @@
                 <a:ea typeface="Courier New" pitchFamily="34" charset="-122"/>
                 <a:cs typeface="Courier New" pitchFamily="34" charset="-120"/>
               </a:rPr>
-              <a:t>✓ basic-arithmetic/review carol valid acebc1d1 trailer: missing</a:t>
+              <a:t>✓ basic-arithmetic/review carol valid 4e266c03 trailer: missing</a:t>
             </a:r>
             <a:endParaRPr lang="en-US" sz="1000" dirty="0"/>
           </a:p>
@@ -7862,7 +7862,7 @@
                 <a:ea typeface="Courier New" pitchFamily="34" charset="-122"/>
                 <a:cs typeface="Courier New" pitchFamily="34" charset="-120"/>
               </a:rPr>
-              <a:t>✓ basic-arithmetic/release alice valid a3ee48e3 trailer: missing</a:t>
+              <a:t>✓ basic-arithmetic/release alice valid 88c0d836 trailer: missing</a:t>
             </a:r>
             <a:endParaRPr lang="en-US" sz="1000" dirty="0"/>
           </a:p>
@@ -7879,7 +7879,7 @@
                 <a:ea typeface="Courier New" pitchFamily="34" charset="-122"/>
                 <a:cs typeface="Courier New" pitchFamily="34" charset="-120"/>
               </a:rPr>
-              <a:t>✓ openspec/roles.yaml alice@calc.example bootstrap dfe8bfd7</a:t>
+              <a:t>✓ openspec/roles.yaml alice@calc.example bootstrap c608bb77</a:t>
             </a:r>
             <a:endParaRPr lang="en-US" sz="1000" dirty="0"/>
           </a:p>
@@ -14365,7 +14365,7 @@
                 <a:ea typeface="Courier New" pitchFamily="34" charset="-122"/>
                 <a:cs typeface="Courier New" pitchFamily="34" charset="-120"/>
               </a:rPr>
-              <a:t>  archived) · sdlc 0.22.1, license:</a:t>
+              <a:t>  archived) · sdlc 0.22.2, license:</a:t>
             </a:r>
             <a:endParaRPr lang="en-US" sz="1000" dirty="0"/>
           </a:p>
@@ -14886,7 +14886,7 @@
                 <a:ea typeface="Courier New" pitchFamily="34" charset="-122"/>
                 <a:cs typeface="Courier New" pitchFamily="34" charset="-120"/>
               </a:rPr>
-              <a:t>2026-10-16T10:44:15.433Z  gate.review.await</a:t>
+              <a:t>2026-10-16T16:04:45.256Z  gate.review.await</a:t>
             </a:r>
             <a:endParaRPr lang="en-US" sz="1000" dirty="0"/>
           </a:p>
@@ -14920,7 +14920,7 @@
                 <a:ea typeface="Courier New" pitchFamily="34" charset="-122"/>
                 <a:cs typeface="Courier New" pitchFamily="34" charset="-120"/>
               </a:rPr>
-              <a:t>  sha256:990501383609b47bfb85bb3dea911af52c</a:t>
+              <a:t>  sha256:1b0572e75b438c739e026a2956f0c7e027</a:t>
             </a:r>
             <a:endParaRPr lang="en-US" sz="1000" dirty="0"/>
           </a:p>
@@ -14937,7 +14937,7 @@
                 <a:ea typeface="Courier New" pitchFamily="34" charset="-122"/>
                 <a:cs typeface="Courier New" pitchFamily="34" charset="-120"/>
               </a:rPr>
-              <a:t>  fb8b71b4556739dcd68f393a6c023f [sdlc</a:t>
+              <a:t>  cb1998c250177581ae28f9ea4498bc [sdlc</a:t>
             </a:r>
             <a:endParaRPr lang="en-US" sz="1000" dirty="0"/>
           </a:p>
@@ -14954,7 +14954,7 @@
                 <a:ea typeface="Courier New" pitchFamily="34" charset="-122"/>
                 <a:cs typeface="Courier New" pitchFamily="34" charset="-120"/>
               </a:rPr>
-              <a:t>  0.22.1 · community]</a:t>
+              <a:t>  0.22.2 · community]</a:t>
             </a:r>
             <a:endParaRPr lang="en-US" sz="1000" dirty="0"/>
           </a:p>
@@ -14971,7 +14971,7 @@
                 <a:ea typeface="Courier New" pitchFamily="34" charset="-122"/>
                 <a:cs typeface="Courier New" pitchFamily="34" charset="-120"/>
               </a:rPr>
-              <a:t>2026-10-16T10:44:18.600Z  gate.review.appro</a:t>
+              <a:t>2026-10-16T16:04:48.553Z  gate.review.appro</a:t>
             </a:r>
             <a:endParaRPr lang="en-US" sz="1000" dirty="0"/>
           </a:p>
@@ -15022,7 +15022,7 @@
                 <a:ea typeface="Courier New" pitchFamily="34" charset="-122"/>
                 <a:cs typeface="Courier New" pitchFamily="34" charset="-120"/>
               </a:rPr>
-              <a:t>  [sdlc 0.22.1 · community]</a:t>
+              <a:t>  [sdlc 0.22.2 · community]</a:t>
             </a:r>
             <a:endParaRPr lang="en-US" sz="1000" dirty="0"/>
           </a:p>
@@ -15039,7 +15039,7 @@
                 <a:ea typeface="Courier New" pitchFamily="34" charset="-122"/>
                 <a:cs typeface="Courier New" pitchFamily="34" charset="-120"/>
               </a:rPr>
-              <a:t>2026-10-16T10:44:24.994Z  gate.release.appr</a:t>
+              <a:t>2026-10-16T16:04:55.308Z  gate.release.appr</a:t>
             </a:r>
             <a:endParaRPr lang="en-US" sz="1000" dirty="0"/>
           </a:p>
@@ -15090,7 +15090,7 @@
                 <a:ea typeface="Courier New" pitchFamily="34" charset="-122"/>
                 <a:cs typeface="Courier New" pitchFamily="34" charset="-120"/>
               </a:rPr>
-              <a:t>  release-manager [sdlc 0.22.1 · community]</a:t>
+              <a:t>  release-manager [sdlc 0.22.2 · community]</a:t>
             </a:r>
             <a:endParaRPr lang="en-US" sz="1000" dirty="0"/>
           </a:p>
@@ -16871,7 +16871,7 @@
                 <a:ea typeface="Courier New" pitchFamily="34" charset="-122"/>
                 <a:cs typeface="Courier New" pitchFamily="34" charset="-120"/>
               </a:rPr>
-              <a:t>      "id": "20261016T104518290Z-ci-green-1</a:t>
+              <a:t>      "id": "20261016T160551566Z-ci-green-d</a:t>
             </a:r>
             <a:endParaRPr lang="en-US" sz="1000" dirty="0"/>
           </a:p>
@@ -16888,7 +16888,7 @@
                 <a:ea typeface="Courier New" pitchFamily="34" charset="-122"/>
                 <a:cs typeface="Courier New" pitchFamily="34" charset="-120"/>
               </a:rPr>
-              <a:t>  a40c4",</a:t>
+              <a:t>  db21a",</a:t>
             </a:r>
             <a:endParaRPr lang="en-US" sz="1000" dirty="0"/>
           </a:p>
@@ -17024,7 +17024,7 @@
                 <a:ea typeface="Courier New" pitchFamily="34" charset="-122"/>
                 <a:cs typeface="Courier New" pitchFamily="34" charset="-120"/>
               </a:rPr>
-              <a:t>        "ref": "27eabdd8b83dd62c5953e8f12c7</a:t>
+              <a:t>        "ref": "68a4459470daf788559f9f26828</a:t>
             </a:r>
             <a:endParaRPr lang="en-US" sz="1000" dirty="0"/>
           </a:p>
@@ -17041,7 +17041,7 @@
                 <a:ea typeface="Courier New" pitchFamily="34" charset="-122"/>
                 <a:cs typeface="Courier New" pitchFamily="34" charset="-120"/>
               </a:rPr>
-              <a:t>  913aa80a04eff",</a:t>
+              <a:t>  f71346d2bd52c",</a:t>
             </a:r>
             <a:endParaRPr lang="en-US" sz="1000" dirty="0"/>
           </a:p>
@@ -27697,7 +27697,7 @@
                 <a:ea typeface="Courier New" pitchFamily="34" charset="-122"/>
                 <a:cs typeface="Courier New" pitchFamily="34" charset="-120"/>
               </a:rPr>
-              <a:t>  sdlc 0.22.1, license: community</a:t>
+              <a:t>  sdlc 0.22.2, license: community</a:t>
             </a:r>
             <a:endParaRPr lang="en-US" sz="1000" dirty="0"/>
           </a:p>

--- a/docs/demo/sdlc-calculator-demo.en.pptx
+++ b/docs/demo/sdlc-calculator-demo.en.pptx
@@ -5856,6 +5856,23 @@
                 <a:ea typeface="Courier New" pitchFamily="34" charset="-122"/>
                 <a:cs typeface="Courier New" pitchFamily="34" charset="-120"/>
               </a:rPr>
+              <a:t>Required roles: code-owner</a:t>
+            </a:r>
+            <a:endParaRPr lang="en-US" sz="1000" dirty="0"/>
+          </a:p>
+          <a:p>
+            <a:pPr indent="0" marL="0">
+              <a:buNone/>
+            </a:pPr>
+            <a:r>
+              <a:rPr lang="en-US" sz="1000" dirty="0">
+                <a:solidFill>
+                  <a:srgbClr val="E8EEF2"/>
+                </a:solidFill>
+                <a:latin typeface="Courier New" pitchFamily="34" charset="0"/>
+                <a:ea typeface="Courier New" pitchFamily="34" charset="-122"/>
+                <a:cs typeface="Courier New" pitchFamily="34" charset="-120"/>
+              </a:rPr>
               <a:t>review · basic-arithmetic — may approve:</a:t>
             </a:r>
             <a:endParaRPr lang="en-US" sz="1000" dirty="0"/>
@@ -6660,7 +6677,7 @@
                 <a:ea typeface="Courier New" pitchFamily="34" charset="-122"/>
                 <a:cs typeface="Courier New" pitchFamily="34" charset="-120"/>
               </a:rPr>
-              <a:t>  code-owner (1b0572e75b43)</a:t>
+              <a:t>  code-owner (deae0ff3a96f)</a:t>
             </a:r>
             <a:endParaRPr lang="en-US" sz="1000" dirty="0"/>
           </a:p>
@@ -6745,7 +6762,7 @@
                 <a:ea typeface="Courier New" pitchFamily="34" charset="-122"/>
                 <a:cs typeface="Courier New" pitchFamily="34" charset="-120"/>
               </a:rPr>
-              <a:t>  "SDLC-Approval: basic-arithmetic:review:1</a:t>
+              <a:t>  "SDLC-Approval: basic-arithmetic:review:d</a:t>
             </a:r>
             <a:endParaRPr lang="en-US" sz="1000" dirty="0"/>
           </a:p>
@@ -6762,7 +6779,7 @@
                 <a:ea typeface="Courier New" pitchFamily="34" charset="-122"/>
                 <a:cs typeface="Courier New" pitchFamily="34" charset="-120"/>
               </a:rPr>
-              <a:t>  b0572e75b43"</a:t>
+              <a:t>  eae0ff3a96f"</a:t>
             </a:r>
             <a:endParaRPr lang="en-US" sz="1000" dirty="0"/>
           </a:p>
@@ -7443,7 +7460,7 @@
                 <a:ea typeface="Courier New" pitchFamily="34" charset="-122"/>
                 <a:cs typeface="Courier New" pitchFamily="34" charset="-120"/>
               </a:rPr>
-              <a:t>  release-manager (1b0572e75b43)</a:t>
+              <a:t>  release-manager (deae0ff3a96f)</a:t>
             </a:r>
             <a:endParaRPr lang="en-US" sz="1000" dirty="0"/>
           </a:p>
@@ -7511,7 +7528,7 @@
                 <a:ea typeface="Courier New" pitchFamily="34" charset="-122"/>
                 <a:cs typeface="Courier New" pitchFamily="34" charset="-120"/>
               </a:rPr>
-              <a:t>  gate" -m "SDLC-Approval: basic-arithmetic:release:1b0572e75b43"</a:t>
+              <a:t>  gate" -m "SDLC-Approval: basic-arithmetic:release:deae0ff3a96f"</a:t>
             </a:r>
             <a:endParaRPr lang="en-US" sz="1000" dirty="0"/>
           </a:p>
@@ -7794,7 +7811,7 @@
                 <a:ea typeface="Courier New" pitchFamily="34" charset="-122"/>
                 <a:cs typeface="Courier New" pitchFamily="34" charset="-120"/>
               </a:rPr>
-              <a:t>✓ basic-arithmetic/intent alice valid 60b09e0c trailer: missing</a:t>
+              <a:t>✓ basic-arithmetic/intent alice valid 50716b90 trailer: missing</a:t>
             </a:r>
             <a:endParaRPr lang="en-US" sz="1000" dirty="0"/>
           </a:p>
@@ -7811,7 +7828,7 @@
                 <a:ea typeface="Courier New" pitchFamily="34" charset="-122"/>
                 <a:cs typeface="Courier New" pitchFamily="34" charset="-120"/>
               </a:rPr>
-              <a:t>✓ basic-arithmetic/spec alice valid 2a1b8947 trailer: missing</a:t>
+              <a:t>✓ basic-arithmetic/spec alice valid 02c182f4 trailer: missing</a:t>
             </a:r>
             <a:endParaRPr lang="en-US" sz="1000" dirty="0"/>
           </a:p>
@@ -7828,7 +7845,7 @@
                 <a:ea typeface="Courier New" pitchFamily="34" charset="-122"/>
                 <a:cs typeface="Courier New" pitchFamily="34" charset="-120"/>
               </a:rPr>
-              <a:t>✗ basic-arithmetic/plan bob wrong-signer 2a1b8947 trailer: missing</a:t>
+              <a:t>✗ basic-arithmetic/plan bob wrong-signer 02c182f4 trailer: missing</a:t>
             </a:r>
             <a:endParaRPr lang="en-US" sz="1000" dirty="0"/>
           </a:p>
@@ -7845,7 +7862,7 @@
                 <a:ea typeface="Courier New" pitchFamily="34" charset="-122"/>
                 <a:cs typeface="Courier New" pitchFamily="34" charset="-120"/>
               </a:rPr>
-              <a:t>✓ basic-arithmetic/review carol valid 4e266c03 trailer: missing</a:t>
+              <a:t>✓ basic-arithmetic/review carol valid 56b2bf8a trailer: missing</a:t>
             </a:r>
             <a:endParaRPr lang="en-US" sz="1000" dirty="0"/>
           </a:p>
@@ -7862,7 +7879,7 @@
                 <a:ea typeface="Courier New" pitchFamily="34" charset="-122"/>
                 <a:cs typeface="Courier New" pitchFamily="34" charset="-120"/>
               </a:rPr>
-              <a:t>✓ basic-arithmetic/release alice valid 88c0d836 trailer: missing</a:t>
+              <a:t>✓ basic-arithmetic/release alice valid 9d6cbcbf trailer: missing</a:t>
             </a:r>
             <a:endParaRPr lang="en-US" sz="1000" dirty="0"/>
           </a:p>
@@ -7879,7 +7896,7 @@
                 <a:ea typeface="Courier New" pitchFamily="34" charset="-122"/>
                 <a:cs typeface="Courier New" pitchFamily="34" charset="-120"/>
               </a:rPr>
-              <a:t>✓ openspec/roles.yaml alice@calc.example bootstrap c608bb77</a:t>
+              <a:t>✓ openspec/roles.yaml alice@calc.example bootstrap 46bb5cd9</a:t>
             </a:r>
             <a:endParaRPr lang="en-US" sz="1000" dirty="0"/>
           </a:p>
@@ -14365,7 +14382,7 @@
                 <a:ea typeface="Courier New" pitchFamily="34" charset="-122"/>
                 <a:cs typeface="Courier New" pitchFamily="34" charset="-120"/>
               </a:rPr>
-              <a:t>  archived) · sdlc 0.22.2, license:</a:t>
+              <a:t>  archived) · sdlc 0.22.3, license:</a:t>
             </a:r>
             <a:endParaRPr lang="en-US" sz="1000" dirty="0"/>
           </a:p>
@@ -14886,7 +14903,7 @@
                 <a:ea typeface="Courier New" pitchFamily="34" charset="-122"/>
                 <a:cs typeface="Courier New" pitchFamily="34" charset="-120"/>
               </a:rPr>
-              <a:t>2026-10-16T16:04:45.256Z  gate.review.await</a:t>
+              <a:t>2026-10-17T01:42:20.093Z  gate.review.await</a:t>
             </a:r>
             <a:endParaRPr lang="en-US" sz="1000" dirty="0"/>
           </a:p>
@@ -14920,7 +14937,7 @@
                 <a:ea typeface="Courier New" pitchFamily="34" charset="-122"/>
                 <a:cs typeface="Courier New" pitchFamily="34" charset="-120"/>
               </a:rPr>
-              <a:t>  sha256:1b0572e75b438c739e026a2956f0c7e027</a:t>
+              <a:t>  sha256:deae0ff3a96f174c6b0ad43a6d4536bc08</a:t>
             </a:r>
             <a:endParaRPr lang="en-US" sz="1000" dirty="0"/>
           </a:p>
@@ -14937,7 +14954,7 @@
                 <a:ea typeface="Courier New" pitchFamily="34" charset="-122"/>
                 <a:cs typeface="Courier New" pitchFamily="34" charset="-120"/>
               </a:rPr>
-              <a:t>  cb1998c250177581ae28f9ea4498bc [sdlc</a:t>
+              <a:t>  e797af8429c7f3d31eab554e3f8cd4 [sdlc</a:t>
             </a:r>
             <a:endParaRPr lang="en-US" sz="1000" dirty="0"/>
           </a:p>
@@ -14954,7 +14971,7 @@
                 <a:ea typeface="Courier New" pitchFamily="34" charset="-122"/>
                 <a:cs typeface="Courier New" pitchFamily="34" charset="-120"/>
               </a:rPr>
-              <a:t>  0.22.2 · community]</a:t>
+              <a:t>  0.22.3 · community]</a:t>
             </a:r>
             <a:endParaRPr lang="en-US" sz="1000" dirty="0"/>
           </a:p>
@@ -14971,7 +14988,7 @@
                 <a:ea typeface="Courier New" pitchFamily="34" charset="-122"/>
                 <a:cs typeface="Courier New" pitchFamily="34" charset="-120"/>
               </a:rPr>
-              <a:t>2026-10-16T16:04:48.553Z  gate.review.appro</a:t>
+              <a:t>2026-10-17T01:42:23.191Z  gate.review.appro</a:t>
             </a:r>
             <a:endParaRPr lang="en-US" sz="1000" dirty="0"/>
           </a:p>
@@ -15022,7 +15039,7 @@
                 <a:ea typeface="Courier New" pitchFamily="34" charset="-122"/>
                 <a:cs typeface="Courier New" pitchFamily="34" charset="-120"/>
               </a:rPr>
-              <a:t>  [sdlc 0.22.2 · community]</a:t>
+              <a:t>  [sdlc 0.22.3 · community]</a:t>
             </a:r>
             <a:endParaRPr lang="en-US" sz="1000" dirty="0"/>
           </a:p>
@@ -15039,7 +15056,7 @@
                 <a:ea typeface="Courier New" pitchFamily="34" charset="-122"/>
                 <a:cs typeface="Courier New" pitchFamily="34" charset="-120"/>
               </a:rPr>
-              <a:t>2026-10-16T16:04:55.308Z  gate.release.appr</a:t>
+              <a:t>2026-10-17T01:42:29.391Z  gate.release.appr</a:t>
             </a:r>
             <a:endParaRPr lang="en-US" sz="1000" dirty="0"/>
           </a:p>
@@ -15090,7 +15107,7 @@
                 <a:ea typeface="Courier New" pitchFamily="34" charset="-122"/>
                 <a:cs typeface="Courier New" pitchFamily="34" charset="-120"/>
               </a:rPr>
-              <a:t>  release-manager [sdlc 0.22.2 · community]</a:t>
+              <a:t>  release-manager [sdlc 0.22.3 · community]</a:t>
             </a:r>
             <a:endParaRPr lang="en-US" sz="1000" dirty="0"/>
           </a:p>
@@ -16871,7 +16888,7 @@
                 <a:ea typeface="Courier New" pitchFamily="34" charset="-122"/>
                 <a:cs typeface="Courier New" pitchFamily="34" charset="-120"/>
               </a:rPr>
-              <a:t>      "id": "20261016T160551566Z-ci-green-d</a:t>
+              <a:t>      "id": "20261017T014326118Z-ci-green-4</a:t>
             </a:r>
             <a:endParaRPr lang="en-US" sz="1000" dirty="0"/>
           </a:p>
@@ -16888,7 +16905,7 @@
                 <a:ea typeface="Courier New" pitchFamily="34" charset="-122"/>
                 <a:cs typeface="Courier New" pitchFamily="34" charset="-120"/>
               </a:rPr>
-              <a:t>  db21a",</a:t>
+              <a:t>  729dc",</a:t>
             </a:r>
             <a:endParaRPr lang="en-US" sz="1000" dirty="0"/>
           </a:p>
@@ -17024,7 +17041,7 @@
                 <a:ea typeface="Courier New" pitchFamily="34" charset="-122"/>
                 <a:cs typeface="Courier New" pitchFamily="34" charset="-120"/>
               </a:rPr>
-              <a:t>        "ref": "68a4459470daf788559f9f26828</a:t>
+              <a:t>        "ref": "a9f6de164e96ab0ec0a1cddd002</a:t>
             </a:r>
             <a:endParaRPr lang="en-US" sz="1000" dirty="0"/>
           </a:p>
@@ -17041,7 +17058,7 @@
                 <a:ea typeface="Courier New" pitchFamily="34" charset="-122"/>
                 <a:cs typeface="Courier New" pitchFamily="34" charset="-120"/>
               </a:rPr>
-              <a:t>  f71346d2bd52c",</a:t>
+              <a:t>  ec9a9f7d7cdb8",</a:t>
             </a:r>
             <a:endParaRPr lang="en-US" sz="1000" dirty="0"/>
           </a:p>
@@ -19615,7 +19632,7 @@
                 <a:ea typeface="Cambria" pitchFamily="34" charset="-122"/>
                 <a:cs typeface="Cambria" pitchFamily="34" charset="-120"/>
               </a:rPr>
-              <a:t>127</a:t>
+              <a:t>131</a:t>
             </a:r>
             <a:endParaRPr lang="en-US" sz="6000" dirty="0"/>
           </a:p>
@@ -19720,7 +19737,7 @@
                 <a:ea typeface="Cambria" pitchFamily="34" charset="-122"/>
                 <a:cs typeface="Cambria" pitchFamily="34" charset="-120"/>
               </a:rPr>
-              <a:t>90</a:t>
+              <a:t>92</a:t>
             </a:r>
             <a:endParaRPr lang="en-US" sz="6000" dirty="0"/>
           </a:p>
@@ -19759,7 +19776,7 @@
                 <a:ea typeface="Calibri" pitchFamily="34" charset="-122"/>
                 <a:cs typeface="Calibri" pitchFamily="34" charset="-120"/>
               </a:rPr>
-              <a:t>of 90 commands</a:t>
+              <a:t>of 92 commands</a:t>
             </a:r>
             <a:endParaRPr lang="en-US" sz="1600" dirty="0"/>
           </a:p>
@@ -21091,7 +21108,7 @@
                 <a:ea typeface="Calibri" pitchFamily="34" charset="-122"/>
                 <a:cs typeface="Calibri" pitchFamily="34" charset="-120"/>
               </a:rPr>
-              <a:t>backlog move</a:t>
+              <a:t>backlog link</a:t>
             </a:r>
             <a:endParaRPr lang="en-US" sz="1000" dirty="0"/>
           </a:p>
@@ -21157,7 +21174,7 @@
                 <a:ea typeface="Calibri" pitchFamily="34" charset="-122"/>
                 <a:cs typeface="Calibri" pitchFamily="34" charset="-120"/>
               </a:rPr>
-              <a:t>backlog drop</a:t>
+              <a:t>backlog move</a:t>
             </a:r>
             <a:endParaRPr lang="en-US" sz="1000" dirty="0"/>
           </a:p>
@@ -21223,7 +21240,7 @@
                 <a:ea typeface="Calibri" pitchFamily="34" charset="-122"/>
                 <a:cs typeface="Calibri" pitchFamily="34" charset="-120"/>
               </a:rPr>
-              <a:t>backlog done</a:t>
+              <a:t>backlog drop</a:t>
             </a:r>
             <a:endParaRPr lang="en-US" sz="1000" dirty="0"/>
           </a:p>
@@ -21238,7 +21255,7 @@
         <p:spPr>
           <a:xfrm>
             <a:off x="9284208" y="4096512"/>
-            <a:ext cx="1144016" cy="256032"/>
+            <a:ext cx="1011936" cy="256032"/>
           </a:xfrm>
           <a:prstGeom prst="roundRect">
             <a:avLst>
@@ -21265,7 +21282,7 @@
         <p:spPr>
           <a:xfrm>
             <a:off x="9284208" y="4096512"/>
-            <a:ext cx="1144016" cy="256032"/>
+            <a:ext cx="1011936" cy="256032"/>
           </a:xfrm>
           <a:prstGeom prst="rect">
             <a:avLst/>
@@ -21289,7 +21306,7 @@
                 <a:ea typeface="Calibri" pitchFamily="34" charset="-122"/>
                 <a:cs typeface="Calibri" pitchFamily="34" charset="-120"/>
               </a:rPr>
-              <a:t>backlog import</a:t>
+              <a:t>backlog done</a:t>
             </a:r>
             <a:endParaRPr lang="en-US" sz="1000" dirty="0"/>
           </a:p>
@@ -21303,8 +21320,8 @@
         </p:nvSpPr>
         <p:spPr>
           <a:xfrm>
-            <a:off x="10519664" y="4096512"/>
-            <a:ext cx="813816" cy="256032"/>
+            <a:off x="10387584" y="4096512"/>
+            <a:ext cx="1144016" cy="256032"/>
           </a:xfrm>
           <a:prstGeom prst="roundRect">
             <a:avLst>
@@ -21330,8 +21347,8 @@
         </p:nvSpPr>
         <p:spPr>
           <a:xfrm>
-            <a:off x="10519664" y="4096512"/>
-            <a:ext cx="813816" cy="256032"/>
+            <a:off x="10387584" y="4096512"/>
+            <a:ext cx="1144016" cy="256032"/>
           </a:xfrm>
           <a:prstGeom prst="rect">
             <a:avLst/>
@@ -21355,7 +21372,7 @@
                 <a:ea typeface="Calibri" pitchFamily="34" charset="-122"/>
                 <a:cs typeface="Calibri" pitchFamily="34" charset="-120"/>
               </a:rPr>
-              <a:t>defer add</a:t>
+              <a:t>backlog import</a:t>
             </a:r>
             <a:endParaRPr lang="en-US" sz="1000" dirty="0"/>
           </a:p>
@@ -21370,7 +21387,7 @@
         <p:spPr>
           <a:xfrm>
             <a:off x="457200" y="4443984"/>
-            <a:ext cx="879856" cy="256032"/>
+            <a:ext cx="813816" cy="256032"/>
           </a:xfrm>
           <a:prstGeom prst="roundRect">
             <a:avLst>
@@ -21397,7 +21414,7 @@
         <p:spPr>
           <a:xfrm>
             <a:off x="457200" y="4443984"/>
-            <a:ext cx="879856" cy="256032"/>
+            <a:ext cx="813816" cy="256032"/>
           </a:xfrm>
           <a:prstGeom prst="rect">
             <a:avLst/>
@@ -21421,7 +21438,7 @@
                 <a:ea typeface="Calibri" pitchFamily="34" charset="-122"/>
                 <a:cs typeface="Calibri" pitchFamily="34" charset="-120"/>
               </a:rPr>
-              <a:t>defer list</a:t>
+              <a:t>defer add</a:t>
             </a:r>
             <a:endParaRPr lang="en-US" sz="1000" dirty="0"/>
           </a:p>
@@ -21435,8 +21452,8 @@
         </p:nvSpPr>
         <p:spPr>
           <a:xfrm>
-            <a:off x="1428496" y="4443984"/>
-            <a:ext cx="945896" cy="256032"/>
+            <a:off x="1362456" y="4443984"/>
+            <a:ext cx="879856" cy="256032"/>
           </a:xfrm>
           <a:prstGeom prst="roundRect">
             <a:avLst>
@@ -21462,8 +21479,8 @@
         </p:nvSpPr>
         <p:spPr>
           <a:xfrm>
-            <a:off x="1428496" y="4443984"/>
-            <a:ext cx="945896" cy="256032"/>
+            <a:off x="1362456" y="4443984"/>
+            <a:ext cx="879856" cy="256032"/>
           </a:xfrm>
           <a:prstGeom prst="rect">
             <a:avLst/>
@@ -21487,7 +21504,7 @@
                 <a:ea typeface="Calibri" pitchFamily="34" charset="-122"/>
                 <a:cs typeface="Calibri" pitchFamily="34" charset="-120"/>
               </a:rPr>
-              <a:t>defer close</a:t>
+              <a:t>defer list</a:t>
             </a:r>
             <a:endParaRPr lang="en-US" sz="1000" dirty="0"/>
           </a:p>
@@ -21501,8 +21518,8 @@
         </p:nvSpPr>
         <p:spPr>
           <a:xfrm>
-            <a:off x="2465832" y="4443984"/>
-            <a:ext cx="1011936" cy="256032"/>
+            <a:off x="2333752" y="4443984"/>
+            <a:ext cx="945896" cy="256032"/>
           </a:xfrm>
           <a:prstGeom prst="roundRect">
             <a:avLst>
@@ -21528,8 +21545,8 @@
         </p:nvSpPr>
         <p:spPr>
           <a:xfrm>
-            <a:off x="2465832" y="4443984"/>
-            <a:ext cx="1011936" cy="256032"/>
+            <a:off x="2333752" y="4443984"/>
+            <a:ext cx="945896" cy="256032"/>
           </a:xfrm>
           <a:prstGeom prst="rect">
             <a:avLst/>
@@ -21553,7 +21570,7 @@
                 <a:ea typeface="Calibri" pitchFamily="34" charset="-122"/>
                 <a:cs typeface="Calibri" pitchFamily="34" charset="-120"/>
               </a:rPr>
-              <a:t>layout check</a:t>
+              <a:t>defer close</a:t>
             </a:r>
             <a:endParaRPr lang="en-US" sz="1000" dirty="0"/>
           </a:p>
@@ -21567,8 +21584,8 @@
         </p:nvSpPr>
         <p:spPr>
           <a:xfrm>
-            <a:off x="3569208" y="4443984"/>
-            <a:ext cx="1210056" cy="256032"/>
+            <a:off x="3371088" y="4443984"/>
+            <a:ext cx="1011936" cy="256032"/>
           </a:xfrm>
           <a:prstGeom prst="roundRect">
             <a:avLst>
@@ -21594,8 +21611,8 @@
         </p:nvSpPr>
         <p:spPr>
           <a:xfrm>
-            <a:off x="3569208" y="4443984"/>
-            <a:ext cx="1210056" cy="256032"/>
+            <a:off x="3371088" y="4443984"/>
+            <a:ext cx="1011936" cy="256032"/>
           </a:xfrm>
           <a:prstGeom prst="rect">
             <a:avLst/>
@@ -21619,7 +21636,7 @@
                 <a:ea typeface="Calibri" pitchFamily="34" charset="-122"/>
                 <a:cs typeface="Calibri" pitchFamily="34" charset="-120"/>
               </a:rPr>
-              <a:t>layout scaffold</a:t>
+              <a:t>layout check</a:t>
             </a:r>
             <a:endParaRPr lang="en-US" sz="1000" dirty="0"/>
           </a:p>
@@ -21633,8 +21650,8 @@
         </p:nvSpPr>
         <p:spPr>
           <a:xfrm>
-            <a:off x="4870704" y="4443984"/>
-            <a:ext cx="1011936" cy="256032"/>
+            <a:off x="4474464" y="4443984"/>
+            <a:ext cx="1210056" cy="256032"/>
           </a:xfrm>
           <a:prstGeom prst="roundRect">
             <a:avLst>
@@ -21660,8 +21677,8 @@
         </p:nvSpPr>
         <p:spPr>
           <a:xfrm>
-            <a:off x="4870704" y="4443984"/>
-            <a:ext cx="1011936" cy="256032"/>
+            <a:off x="4474464" y="4443984"/>
+            <a:ext cx="1210056" cy="256032"/>
           </a:xfrm>
           <a:prstGeom prst="rect">
             <a:avLst/>
@@ -21685,7 +21702,7 @@
                 <a:ea typeface="Calibri" pitchFamily="34" charset="-122"/>
                 <a:cs typeface="Calibri" pitchFamily="34" charset="-120"/>
               </a:rPr>
-              <a:t>layout adapt</a:t>
+              <a:t>layout scaffold</a:t>
             </a:r>
             <a:endParaRPr lang="en-US" sz="1000" dirty="0"/>
           </a:p>
@@ -21699,8 +21716,8 @@
         </p:nvSpPr>
         <p:spPr>
           <a:xfrm>
-            <a:off x="5974080" y="4443984"/>
-            <a:ext cx="1144016" cy="256032"/>
+            <a:off x="5775960" y="4443984"/>
+            <a:ext cx="1011936" cy="256032"/>
           </a:xfrm>
           <a:prstGeom prst="roundRect">
             <a:avLst>
@@ -21726,8 +21743,8 @@
         </p:nvSpPr>
         <p:spPr>
           <a:xfrm>
-            <a:off x="5974080" y="4443984"/>
-            <a:ext cx="1144016" cy="256032"/>
+            <a:off x="5775960" y="4443984"/>
+            <a:ext cx="1011936" cy="256032"/>
           </a:xfrm>
           <a:prstGeom prst="rect">
             <a:avLst/>
@@ -21751,7 +21768,7 @@
                 <a:ea typeface="Calibri" pitchFamily="34" charset="-122"/>
                 <a:cs typeface="Calibri" pitchFamily="34" charset="-120"/>
               </a:rPr>
-              <a:t>layout convert</a:t>
+              <a:t>layout adapt</a:t>
             </a:r>
             <a:endParaRPr lang="en-US" sz="1000" dirty="0"/>
           </a:p>
@@ -21765,8 +21782,8 @@
         </p:nvSpPr>
         <p:spPr>
           <a:xfrm>
-            <a:off x="7209536" y="4443984"/>
-            <a:ext cx="483616" cy="256032"/>
+            <a:off x="6879336" y="4443984"/>
+            <a:ext cx="1144016" cy="256032"/>
           </a:xfrm>
           <a:prstGeom prst="roundRect">
             <a:avLst>
@@ -21792,8 +21809,8 @@
         </p:nvSpPr>
         <p:spPr>
           <a:xfrm>
-            <a:off x="7209536" y="4443984"/>
-            <a:ext cx="483616" cy="256032"/>
+            <a:off x="6879336" y="4443984"/>
+            <a:ext cx="1144016" cy="256032"/>
           </a:xfrm>
           <a:prstGeom prst="rect">
             <a:avLst/>
@@ -21817,7 +21834,7 @@
                 <a:ea typeface="Calibri" pitchFamily="34" charset="-122"/>
                 <a:cs typeface="Calibri" pitchFamily="34" charset="-120"/>
               </a:rPr>
-              <a:t>init</a:t>
+              <a:t>layout convert</a:t>
             </a:r>
             <a:endParaRPr lang="en-US" sz="1000" dirty="0"/>
           </a:p>
@@ -21831,8 +21848,8 @@
         </p:nvSpPr>
         <p:spPr>
           <a:xfrm>
-            <a:off x="7784592" y="4443984"/>
-            <a:ext cx="615696" cy="256032"/>
+            <a:off x="8114792" y="4443984"/>
+            <a:ext cx="483616" cy="256032"/>
           </a:xfrm>
           <a:prstGeom prst="roundRect">
             <a:avLst>
@@ -21858,8 +21875,8 @@
         </p:nvSpPr>
         <p:spPr>
           <a:xfrm>
-            <a:off x="7784592" y="4443984"/>
-            <a:ext cx="615696" cy="256032"/>
+            <a:off x="8114792" y="4443984"/>
+            <a:ext cx="483616" cy="256032"/>
           </a:xfrm>
           <a:prstGeom prst="rect">
             <a:avLst/>
@@ -21883,7 +21900,7 @@
                 <a:ea typeface="Calibri" pitchFamily="34" charset="-122"/>
                 <a:cs typeface="Calibri" pitchFamily="34" charset="-120"/>
               </a:rPr>
-              <a:t>update</a:t>
+              <a:t>init</a:t>
             </a:r>
             <a:endParaRPr lang="en-US" sz="1000" dirty="0"/>
           </a:p>
@@ -21897,8 +21914,8 @@
         </p:nvSpPr>
         <p:spPr>
           <a:xfrm>
-            <a:off x="8491728" y="4443984"/>
-            <a:ext cx="813816" cy="256032"/>
+            <a:off x="8689848" y="4443984"/>
+            <a:ext cx="615696" cy="256032"/>
           </a:xfrm>
           <a:prstGeom prst="roundRect">
             <a:avLst>
@@ -21924,8 +21941,8 @@
         </p:nvSpPr>
         <p:spPr>
           <a:xfrm>
-            <a:off x="8491728" y="4443984"/>
-            <a:ext cx="813816" cy="256032"/>
+            <a:off x="8689848" y="4443984"/>
+            <a:ext cx="615696" cy="256032"/>
           </a:xfrm>
           <a:prstGeom prst="rect">
             <a:avLst/>
@@ -21949,7 +21966,7 @@
                 <a:ea typeface="Calibri" pitchFamily="34" charset="-122"/>
                 <a:cs typeface="Calibri" pitchFamily="34" charset="-120"/>
               </a:rPr>
-              <a:t>uninstall</a:t>
+              <a:t>update</a:t>
             </a:r>
             <a:endParaRPr lang="en-US" sz="1000" dirty="0"/>
           </a:p>
@@ -21964,7 +21981,7 @@
         <p:spPr>
           <a:xfrm>
             <a:off x="9396984" y="4443984"/>
-            <a:ext cx="417576" cy="256032"/>
+            <a:ext cx="813816" cy="256032"/>
           </a:xfrm>
           <a:prstGeom prst="roundRect">
             <a:avLst>
@@ -21991,7 +22008,7 @@
         <p:spPr>
           <a:xfrm>
             <a:off x="9396984" y="4443984"/>
-            <a:ext cx="417576" cy="256032"/>
+            <a:ext cx="813816" cy="256032"/>
           </a:xfrm>
           <a:prstGeom prst="rect">
             <a:avLst/>
@@ -22015,7 +22032,7 @@
                 <a:ea typeface="Calibri" pitchFamily="34" charset="-122"/>
                 <a:cs typeface="Calibri" pitchFamily="34" charset="-120"/>
               </a:rPr>
-              <a:t>new</a:t>
+              <a:t>uninstall</a:t>
             </a:r>
             <a:endParaRPr lang="en-US" sz="1000" dirty="0"/>
           </a:p>
@@ -22029,8 +22046,8 @@
         </p:nvSpPr>
         <p:spPr>
           <a:xfrm>
-            <a:off x="9906000" y="4443984"/>
-            <a:ext cx="1011936" cy="256032"/>
+            <a:off x="10302240" y="4443984"/>
+            <a:ext cx="417576" cy="256032"/>
           </a:xfrm>
           <a:prstGeom prst="roundRect">
             <a:avLst>
@@ -22056,8 +22073,8 @@
         </p:nvSpPr>
         <p:spPr>
           <a:xfrm>
-            <a:off x="9906000" y="4443984"/>
-            <a:ext cx="1011936" cy="256032"/>
+            <a:off x="10302240" y="4443984"/>
+            <a:ext cx="417576" cy="256032"/>
           </a:xfrm>
           <a:prstGeom prst="rect">
             <a:avLst/>
@@ -22081,7 +22098,7 @@
                 <a:ea typeface="Calibri" pitchFamily="34" charset="-122"/>
                 <a:cs typeface="Calibri" pitchFamily="34" charset="-120"/>
               </a:rPr>
-              <a:t>explore list</a:t>
+              <a:t>new</a:t>
             </a:r>
             <a:endParaRPr lang="en-US" sz="1000" dirty="0"/>
           </a:p>
@@ -22096,7 +22113,7 @@
         <p:spPr>
           <a:xfrm>
             <a:off x="457200" y="4791456"/>
-            <a:ext cx="945896" cy="256032"/>
+            <a:ext cx="1011936" cy="256032"/>
           </a:xfrm>
           <a:prstGeom prst="roundRect">
             <a:avLst>
@@ -22123,7 +22140,7 @@
         <p:spPr>
           <a:xfrm>
             <a:off x="457200" y="4791456"/>
-            <a:ext cx="945896" cy="256032"/>
+            <a:ext cx="1011936" cy="256032"/>
           </a:xfrm>
           <a:prstGeom prst="rect">
             <a:avLst/>
@@ -22147,7 +22164,7 @@
                 <a:ea typeface="Calibri" pitchFamily="34" charset="-122"/>
                 <a:cs typeface="Calibri" pitchFamily="34" charset="-120"/>
               </a:rPr>
-              <a:t>import bmad</a:t>
+              <a:t>explore list</a:t>
             </a:r>
             <a:endParaRPr lang="en-US" sz="1000" dirty="0"/>
           </a:p>
@@ -22161,8 +22178,8 @@
         </p:nvSpPr>
         <p:spPr>
           <a:xfrm>
-            <a:off x="1494536" y="4791456"/>
-            <a:ext cx="615696" cy="256032"/>
+            <a:off x="1560576" y="4791456"/>
+            <a:ext cx="945896" cy="256032"/>
           </a:xfrm>
           <a:prstGeom prst="roundRect">
             <a:avLst>
@@ -22188,8 +22205,8 @@
         </p:nvSpPr>
         <p:spPr>
           <a:xfrm>
-            <a:off x="1494536" y="4791456"/>
-            <a:ext cx="615696" cy="256032"/>
+            <a:off x="1560576" y="4791456"/>
+            <a:ext cx="945896" cy="256032"/>
           </a:xfrm>
           <a:prstGeom prst="rect">
             <a:avLst/>
@@ -22213,7 +22230,7 @@
                 <a:ea typeface="Calibri" pitchFamily="34" charset="-122"/>
                 <a:cs typeface="Calibri" pitchFamily="34" charset="-120"/>
               </a:rPr>
-              <a:t>status</a:t>
+              <a:t>import bmad</a:t>
             </a:r>
             <a:endParaRPr lang="en-US" sz="1000" dirty="0"/>
           </a:p>
@@ -22227,8 +22244,8 @@
         </p:nvSpPr>
         <p:spPr>
           <a:xfrm>
-            <a:off x="2201672" y="4791456"/>
-            <a:ext cx="681736" cy="256032"/>
+            <a:off x="2597912" y="4791456"/>
+            <a:ext cx="615696" cy="256032"/>
           </a:xfrm>
           <a:prstGeom prst="roundRect">
             <a:avLst>
@@ -22254,8 +22271,8 @@
         </p:nvSpPr>
         <p:spPr>
           <a:xfrm>
-            <a:off x="2201672" y="4791456"/>
-            <a:ext cx="681736" cy="256032"/>
+            <a:off x="2597912" y="4791456"/>
+            <a:ext cx="615696" cy="256032"/>
           </a:xfrm>
           <a:prstGeom prst="rect">
             <a:avLst/>
@@ -22279,7 +22296,7 @@
                 <a:ea typeface="Calibri" pitchFamily="34" charset="-122"/>
                 <a:cs typeface="Calibri" pitchFamily="34" charset="-120"/>
               </a:rPr>
-              <a:t>explain</a:t>
+              <a:t>status</a:t>
             </a:r>
             <a:endParaRPr lang="en-US" sz="1000" dirty="0"/>
           </a:p>
@@ -22293,8 +22310,8 @@
         </p:nvSpPr>
         <p:spPr>
           <a:xfrm>
-            <a:off x="2974848" y="4791456"/>
-            <a:ext cx="483616" cy="256032"/>
+            <a:off x="3305048" y="4791456"/>
+            <a:ext cx="681736" cy="256032"/>
           </a:xfrm>
           <a:prstGeom prst="roundRect">
             <a:avLst>
@@ -22320,8 +22337,8 @@
         </p:nvSpPr>
         <p:spPr>
           <a:xfrm>
-            <a:off x="2974848" y="4791456"/>
-            <a:ext cx="483616" cy="256032"/>
+            <a:off x="3305048" y="4791456"/>
+            <a:ext cx="681736" cy="256032"/>
           </a:xfrm>
           <a:prstGeom prst="rect">
             <a:avLst/>
@@ -22345,7 +22362,7 @@
                 <a:ea typeface="Calibri" pitchFamily="34" charset="-122"/>
                 <a:cs typeface="Calibri" pitchFamily="34" charset="-120"/>
               </a:rPr>
-              <a:t>help</a:t>
+              <a:t>explain</a:t>
             </a:r>
             <a:endParaRPr lang="en-US" sz="1000" dirty="0"/>
           </a:p>
@@ -22359,8 +22376,8 @@
         </p:nvSpPr>
         <p:spPr>
           <a:xfrm>
-            <a:off x="3549904" y="4791456"/>
-            <a:ext cx="549656" cy="256032"/>
+            <a:off x="4078224" y="4791456"/>
+            <a:ext cx="483616" cy="256032"/>
           </a:xfrm>
           <a:prstGeom prst="roundRect">
             <a:avLst>
@@ -22386,8 +22403,8 @@
         </p:nvSpPr>
         <p:spPr>
           <a:xfrm>
-            <a:off x="3549904" y="4791456"/>
-            <a:ext cx="549656" cy="256032"/>
+            <a:off x="4078224" y="4791456"/>
+            <a:ext cx="483616" cy="256032"/>
           </a:xfrm>
           <a:prstGeom prst="rect">
             <a:avLst/>
@@ -22411,7 +22428,7 @@
                 <a:ea typeface="Calibri" pitchFamily="34" charset="-122"/>
                 <a:cs typeface="Calibri" pitchFamily="34" charset="-120"/>
               </a:rPr>
-              <a:t>guide</a:t>
+              <a:t>help</a:t>
             </a:r>
             <a:endParaRPr lang="en-US" sz="1000" dirty="0"/>
           </a:p>
@@ -22425,8 +22442,8 @@
         </p:nvSpPr>
         <p:spPr>
           <a:xfrm>
-            <a:off x="4191000" y="4791456"/>
-            <a:ext cx="879856" cy="256032"/>
+            <a:off x="4653280" y="4791456"/>
+            <a:ext cx="549656" cy="256032"/>
           </a:xfrm>
           <a:prstGeom prst="roundRect">
             <a:avLst>
@@ -22452,8 +22469,8 @@
         </p:nvSpPr>
         <p:spPr>
           <a:xfrm>
-            <a:off x="4191000" y="4791456"/>
-            <a:ext cx="879856" cy="256032"/>
+            <a:off x="4653280" y="4791456"/>
+            <a:ext cx="549656" cy="256032"/>
           </a:xfrm>
           <a:prstGeom prst="rect">
             <a:avLst/>
@@ -22477,7 +22494,7 @@
                 <a:ea typeface="Calibri" pitchFamily="34" charset="-122"/>
                 <a:cs typeface="Calibri" pitchFamily="34" charset="-120"/>
               </a:rPr>
-              <a:t>statusline</a:t>
+              <a:t>guide</a:t>
             </a:r>
             <a:endParaRPr lang="en-US" sz="1000" dirty="0"/>
           </a:p>
@@ -22491,8 +22508,8 @@
         </p:nvSpPr>
         <p:spPr>
           <a:xfrm>
-            <a:off x="5162296" y="4791456"/>
-            <a:ext cx="1011936" cy="256032"/>
+            <a:off x="5294376" y="4791456"/>
+            <a:ext cx="879856" cy="256032"/>
           </a:xfrm>
           <a:prstGeom prst="roundRect">
             <a:avLst>
@@ -22518,8 +22535,8 @@
         </p:nvSpPr>
         <p:spPr>
           <a:xfrm>
-            <a:off x="5162296" y="4791456"/>
-            <a:ext cx="1011936" cy="256032"/>
+            <a:off x="5294376" y="4791456"/>
+            <a:ext cx="879856" cy="256032"/>
           </a:xfrm>
           <a:prstGeom prst="rect">
             <a:avLst/>
@@ -22543,7 +22560,7 @@
                 <a:ea typeface="Calibri" pitchFamily="34" charset="-122"/>
                 <a:cs typeface="Calibri" pitchFamily="34" charset="-120"/>
               </a:rPr>
-              <a:t>context pull</a:t>
+              <a:t>statusline</a:t>
             </a:r>
             <a:endParaRPr lang="en-US" sz="1000" dirty="0"/>
           </a:p>
@@ -22558,7 +22575,7 @@
         <p:spPr>
           <a:xfrm>
             <a:off x="6265672" y="4791456"/>
-            <a:ext cx="813816" cy="256032"/>
+            <a:ext cx="1011936" cy="256032"/>
           </a:xfrm>
           <a:prstGeom prst="roundRect">
             <a:avLst>
@@ -22585,7 +22602,7 @@
         <p:spPr>
           <a:xfrm>
             <a:off x="6265672" y="4791456"/>
-            <a:ext cx="813816" cy="256032"/>
+            <a:ext cx="1011936" cy="256032"/>
           </a:xfrm>
           <a:prstGeom prst="rect">
             <a:avLst/>
@@ -22609,7 +22626,7 @@
                 <a:ea typeface="Calibri" pitchFamily="34" charset="-122"/>
                 <a:cs typeface="Calibri" pitchFamily="34" charset="-120"/>
               </a:rPr>
-              <a:t>mcp serve</a:t>
+              <a:t>context pull</a:t>
             </a:r>
             <a:endParaRPr lang="en-US" sz="1000" dirty="0"/>
           </a:p>
@@ -22623,7 +22640,7 @@
         </p:nvSpPr>
         <p:spPr>
           <a:xfrm>
-            <a:off x="7170928" y="4791456"/>
+            <a:off x="7369048" y="4791456"/>
             <a:ext cx="813816" cy="256032"/>
           </a:xfrm>
           <a:prstGeom prst="roundRect">
@@ -22650,7 +22667,7 @@
         </p:nvSpPr>
         <p:spPr>
           <a:xfrm>
-            <a:off x="7170928" y="4791456"/>
+            <a:off x="7369048" y="4791456"/>
             <a:ext cx="813816" cy="256032"/>
           </a:xfrm>
           <a:prstGeom prst="rect">
@@ -22675,7 +22692,7 @@
                 <a:ea typeface="Calibri" pitchFamily="34" charset="-122"/>
                 <a:cs typeface="Calibri" pitchFamily="34" charset="-120"/>
               </a:rPr>
-              <a:t>mcp check</a:t>
+              <a:t>mcp serve</a:t>
             </a:r>
             <a:endParaRPr lang="en-US" sz="1000" dirty="0"/>
           </a:p>
@@ -22689,8 +22706,8 @@
         </p:nvSpPr>
         <p:spPr>
           <a:xfrm>
-            <a:off x="8076184" y="4791456"/>
-            <a:ext cx="879856" cy="256032"/>
+            <a:off x="8274304" y="4791456"/>
+            <a:ext cx="813816" cy="256032"/>
           </a:xfrm>
           <a:prstGeom prst="roundRect">
             <a:avLst>
@@ -22716,8 +22733,8 @@
         </p:nvSpPr>
         <p:spPr>
           <a:xfrm>
-            <a:off x="8076184" y="4791456"/>
-            <a:ext cx="879856" cy="256032"/>
+            <a:off x="8274304" y="4791456"/>
+            <a:ext cx="813816" cy="256032"/>
           </a:xfrm>
           <a:prstGeom prst="rect">
             <a:avLst/>
@@ -22741,7 +22758,7 @@
                 <a:ea typeface="Calibri" pitchFamily="34" charset="-122"/>
                 <a:cs typeface="Calibri" pitchFamily="34" charset="-120"/>
               </a:rPr>
-              <a:t>inbox list</a:t>
+              <a:t>mcp check</a:t>
             </a:r>
             <a:endParaRPr lang="en-US" sz="1000" dirty="0"/>
           </a:p>
@@ -22755,7 +22772,7 @@
         </p:nvSpPr>
         <p:spPr>
           <a:xfrm>
-            <a:off x="9047480" y="4791456"/>
+            <a:off x="9179560" y="4791456"/>
             <a:ext cx="879856" cy="256032"/>
           </a:xfrm>
           <a:prstGeom prst="roundRect">
@@ -22782,7 +22799,7 @@
         </p:nvSpPr>
         <p:spPr>
           <a:xfrm>
-            <a:off x="9047480" y="4791456"/>
+            <a:off x="9179560" y="4791456"/>
             <a:ext cx="879856" cy="256032"/>
           </a:xfrm>
           <a:prstGeom prst="rect">
@@ -22807,7 +22824,7 @@
                 <a:ea typeface="Calibri" pitchFamily="34" charset="-122"/>
                 <a:cs typeface="Calibri" pitchFamily="34" charset="-120"/>
               </a:rPr>
-              <a:t>inbox done</a:t>
+              <a:t>inbox list</a:t>
             </a:r>
             <a:endParaRPr lang="en-US" sz="1000" dirty="0"/>
           </a:p>
@@ -22821,8 +22838,8 @@
         </p:nvSpPr>
         <p:spPr>
           <a:xfrm>
-            <a:off x="10018776" y="4791456"/>
-            <a:ext cx="945896" cy="256032"/>
+            <a:off x="10150856" y="4791456"/>
+            <a:ext cx="879856" cy="256032"/>
           </a:xfrm>
           <a:prstGeom prst="roundRect">
             <a:avLst>
@@ -22848,8 +22865,8 @@
         </p:nvSpPr>
         <p:spPr>
           <a:xfrm>
-            <a:off x="10018776" y="4791456"/>
-            <a:ext cx="945896" cy="256032"/>
+            <a:off x="10150856" y="4791456"/>
+            <a:ext cx="879856" cy="256032"/>
           </a:xfrm>
           <a:prstGeom prst="rect">
             <a:avLst/>
@@ -22873,7 +22890,7 @@
                 <a:ea typeface="Calibri" pitchFamily="34" charset="-122"/>
                 <a:cs typeface="Calibri" pitchFamily="34" charset="-120"/>
               </a:rPr>
-              <a:t>events list</a:t>
+              <a:t>inbox done</a:t>
             </a:r>
             <a:endParaRPr lang="en-US" sz="1000" dirty="0"/>
           </a:p>
@@ -22888,7 +22905,7 @@
         <p:spPr>
           <a:xfrm>
             <a:off x="457200" y="5138928"/>
-            <a:ext cx="1011936" cy="256032"/>
+            <a:ext cx="945896" cy="256032"/>
           </a:xfrm>
           <a:prstGeom prst="roundRect">
             <a:avLst>
@@ -22915,7 +22932,7 @@
         <p:spPr>
           <a:xfrm>
             <a:off x="457200" y="5138928"/>
-            <a:ext cx="1011936" cy="256032"/>
+            <a:ext cx="945896" cy="256032"/>
           </a:xfrm>
           <a:prstGeom prst="rect">
             <a:avLst/>
@@ -22939,7 +22956,7 @@
                 <a:ea typeface="Calibri" pitchFamily="34" charset="-122"/>
                 <a:cs typeface="Calibri" pitchFamily="34" charset="-120"/>
               </a:rPr>
-              <a:t>events flush</a:t>
+              <a:t>events list</a:t>
             </a:r>
             <a:endParaRPr lang="en-US" sz="1000" dirty="0"/>
           </a:p>
@@ -22953,8 +22970,8 @@
         </p:nvSpPr>
         <p:spPr>
           <a:xfrm>
-            <a:off x="1560576" y="5138928"/>
-            <a:ext cx="1144016" cy="256032"/>
+            <a:off x="1494536" y="5138928"/>
+            <a:ext cx="1011936" cy="256032"/>
           </a:xfrm>
           <a:prstGeom prst="roundRect">
             <a:avLst>
@@ -22980,8 +22997,8 @@
         </p:nvSpPr>
         <p:spPr>
           <a:xfrm>
-            <a:off x="1560576" y="5138928"/>
-            <a:ext cx="1144016" cy="256032"/>
+            <a:off x="1494536" y="5138928"/>
+            <a:ext cx="1011936" cy="256032"/>
           </a:xfrm>
           <a:prstGeom prst="rect">
             <a:avLst/>
@@ -23005,7 +23022,7 @@
                 <a:ea typeface="Calibri" pitchFamily="34" charset="-122"/>
                 <a:cs typeface="Calibri" pitchFamily="34" charset="-120"/>
               </a:rPr>
-              <a:t>events summary</a:t>
+              <a:t>events flush</a:t>
             </a:r>
             <a:endParaRPr lang="en-US" sz="1000" dirty="0"/>
           </a:p>
@@ -23019,8 +23036,8 @@
         </p:nvSpPr>
         <p:spPr>
           <a:xfrm>
-            <a:off x="2796032" y="5138928"/>
-            <a:ext cx="1077976" cy="256032"/>
+            <a:off x="2597912" y="5138928"/>
+            <a:ext cx="1144016" cy="256032"/>
           </a:xfrm>
           <a:prstGeom prst="roundRect">
             <a:avLst>
@@ -23046,8 +23063,8 @@
         </p:nvSpPr>
         <p:spPr>
           <a:xfrm>
-            <a:off x="2796032" y="5138928"/>
-            <a:ext cx="1077976" cy="256032"/>
+            <a:off x="2597912" y="5138928"/>
+            <a:ext cx="1144016" cy="256032"/>
           </a:xfrm>
           <a:prstGeom prst="rect">
             <a:avLst/>
@@ -23071,7 +23088,7 @@
                 <a:ea typeface="Calibri" pitchFamily="34" charset="-122"/>
                 <a:cs typeface="Calibri" pitchFamily="34" charset="-120"/>
               </a:rPr>
-              <a:t>triage intake</a:t>
+              <a:t>events summary</a:t>
             </a:r>
             <a:endParaRPr lang="en-US" sz="1000" dirty="0"/>
           </a:p>
@@ -23085,7 +23102,7 @@
         </p:nvSpPr>
         <p:spPr>
           <a:xfrm>
-            <a:off x="3965448" y="5138928"/>
+            <a:off x="3833368" y="5138928"/>
             <a:ext cx="1077976" cy="256032"/>
           </a:xfrm>
           <a:prstGeom prst="roundRect">
@@ -23112,7 +23129,7 @@
         </p:nvSpPr>
         <p:spPr>
           <a:xfrm>
-            <a:off x="3965448" y="5138928"/>
+            <a:off x="3833368" y="5138928"/>
             <a:ext cx="1077976" cy="256032"/>
           </a:xfrm>
           <a:prstGeom prst="rect">
@@ -23137,7 +23154,7 @@
                 <a:ea typeface="Calibri" pitchFamily="34" charset="-122"/>
                 <a:cs typeface="Calibri" pitchFamily="34" charset="-120"/>
               </a:rPr>
-              <a:t>release check</a:t>
+              <a:t>triage intake</a:t>
             </a:r>
             <a:endParaRPr lang="en-US" sz="1000" dirty="0"/>
           </a:p>
@@ -23151,8 +23168,8 @@
         </p:nvSpPr>
         <p:spPr>
           <a:xfrm>
-            <a:off x="5134864" y="5138928"/>
-            <a:ext cx="813816" cy="256032"/>
+            <a:off x="5002784" y="5138928"/>
+            <a:ext cx="1077976" cy="256032"/>
           </a:xfrm>
           <a:prstGeom prst="roundRect">
             <a:avLst>
@@ -23178,8 +23195,8 @@
         </p:nvSpPr>
         <p:spPr>
           <a:xfrm>
-            <a:off x="5134864" y="5138928"/>
-            <a:ext cx="813816" cy="256032"/>
+            <a:off x="5002784" y="5138928"/>
+            <a:ext cx="1077976" cy="256032"/>
           </a:xfrm>
           <a:prstGeom prst="rect">
             <a:avLst/>
@@ -23203,7 +23220,7 @@
                 <a:ea typeface="Calibri" pitchFamily="34" charset="-122"/>
                 <a:cs typeface="Calibri" pitchFamily="34" charset="-120"/>
               </a:rPr>
-              <a:t>track set</a:t>
+              <a:t>release check</a:t>
             </a:r>
             <a:endParaRPr lang="en-US" sz="1000" dirty="0"/>
           </a:p>
@@ -23217,8 +23234,8 @@
         </p:nvSpPr>
         <p:spPr>
           <a:xfrm>
-            <a:off x="6040120" y="5138928"/>
-            <a:ext cx="483616" cy="256032"/>
+            <a:off x="6172200" y="5138928"/>
+            <a:ext cx="813816" cy="256032"/>
           </a:xfrm>
           <a:prstGeom prst="roundRect">
             <a:avLst>
@@ -23244,8 +23261,8 @@
         </p:nvSpPr>
         <p:spPr>
           <a:xfrm>
-            <a:off x="6040120" y="5138928"/>
-            <a:ext cx="483616" cy="256032"/>
+            <a:off x="6172200" y="5138928"/>
+            <a:ext cx="813816" cy="256032"/>
           </a:xfrm>
           <a:prstGeom prst="rect">
             <a:avLst/>
@@ -23269,7 +23286,7 @@
                 <a:ea typeface="Calibri" pitchFamily="34" charset="-122"/>
                 <a:cs typeface="Calibri" pitchFamily="34" charset="-120"/>
               </a:rPr>
-              <a:t>next</a:t>
+              <a:t>track set</a:t>
             </a:r>
             <a:endParaRPr lang="en-US" sz="1000" dirty="0"/>
           </a:p>
@@ -23283,8 +23300,8 @@
         </p:nvSpPr>
         <p:spPr>
           <a:xfrm>
-            <a:off x="6615176" y="5138928"/>
-            <a:ext cx="1011936" cy="256032"/>
+            <a:off x="7077456" y="5138928"/>
+            <a:ext cx="483616" cy="256032"/>
           </a:xfrm>
           <a:prstGeom prst="roundRect">
             <a:avLst>
@@ -23310,8 +23327,8 @@
         </p:nvSpPr>
         <p:spPr>
           <a:xfrm>
-            <a:off x="6615176" y="5138928"/>
-            <a:ext cx="1011936" cy="256032"/>
+            <a:off x="7077456" y="5138928"/>
+            <a:ext cx="483616" cy="256032"/>
           </a:xfrm>
           <a:prstGeom prst="rect">
             <a:avLst/>
@@ -23335,7 +23352,7 @@
                 <a:ea typeface="Calibri" pitchFamily="34" charset="-122"/>
                 <a:cs typeface="Calibri" pitchFamily="34" charset="-120"/>
               </a:rPr>
-              <a:t>instructions</a:t>
+              <a:t>next</a:t>
             </a:r>
             <a:endParaRPr lang="en-US" sz="1000" dirty="0"/>
           </a:p>
@@ -23349,8 +23366,8 @@
         </p:nvSpPr>
         <p:spPr>
           <a:xfrm>
-            <a:off x="7718552" y="5138928"/>
-            <a:ext cx="681736" cy="256032"/>
+            <a:off x="7652512" y="5138928"/>
+            <a:ext cx="1011936" cy="256032"/>
           </a:xfrm>
           <a:prstGeom prst="roundRect">
             <a:avLst>
@@ -23376,8 +23393,8 @@
         </p:nvSpPr>
         <p:spPr>
           <a:xfrm>
-            <a:off x="7718552" y="5138928"/>
-            <a:ext cx="681736" cy="256032"/>
+            <a:off x="7652512" y="5138928"/>
+            <a:ext cx="1011936" cy="256032"/>
           </a:xfrm>
           <a:prstGeom prst="rect">
             <a:avLst/>
@@ -23401,7 +23418,7 @@
                 <a:ea typeface="Calibri" pitchFamily="34" charset="-122"/>
                 <a:cs typeface="Calibri" pitchFamily="34" charset="-120"/>
               </a:rPr>
-              <a:t>approve</a:t>
+              <a:t>instructions</a:t>
             </a:r>
             <a:endParaRPr lang="en-US" sz="1000" dirty="0"/>
           </a:p>
@@ -23415,8 +23432,8 @@
         </p:nvSpPr>
         <p:spPr>
           <a:xfrm>
-            <a:off x="8491728" y="5138928"/>
-            <a:ext cx="615696" cy="256032"/>
+            <a:off x="8755888" y="5138928"/>
+            <a:ext cx="681736" cy="256032"/>
           </a:xfrm>
           <a:prstGeom prst="roundRect">
             <a:avLst>
@@ -23442,8 +23459,8 @@
         </p:nvSpPr>
         <p:spPr>
           <a:xfrm>
-            <a:off x="8491728" y="5138928"/>
-            <a:ext cx="615696" cy="256032"/>
+            <a:off x="8755888" y="5138928"/>
+            <a:ext cx="681736" cy="256032"/>
           </a:xfrm>
           <a:prstGeom prst="rect">
             <a:avLst/>
@@ -23467,7 +23484,7 @@
                 <a:ea typeface="Calibri" pitchFamily="34" charset="-122"/>
                 <a:cs typeface="Calibri" pitchFamily="34" charset="-120"/>
               </a:rPr>
-              <a:t>reject</a:t>
+              <a:t>approve</a:t>
             </a:r>
             <a:endParaRPr lang="en-US" sz="1000" dirty="0"/>
           </a:p>
@@ -23481,8 +23498,8 @@
         </p:nvSpPr>
         <p:spPr>
           <a:xfrm>
-            <a:off x="9198864" y="5138928"/>
-            <a:ext cx="549656" cy="256032"/>
+            <a:off x="9529064" y="5138928"/>
+            <a:ext cx="615696" cy="256032"/>
           </a:xfrm>
           <a:prstGeom prst="roundRect">
             <a:avLst>
@@ -23508,8 +23525,8 @@
         </p:nvSpPr>
         <p:spPr>
           <a:xfrm>
-            <a:off x="9198864" y="5138928"/>
-            <a:ext cx="549656" cy="256032"/>
+            <a:off x="9529064" y="5138928"/>
+            <a:ext cx="615696" cy="256032"/>
           </a:xfrm>
           <a:prstGeom prst="rect">
             <a:avLst/>
@@ -23533,7 +23550,7 @@
                 <a:ea typeface="Calibri" pitchFamily="34" charset="-122"/>
                 <a:cs typeface="Calibri" pitchFamily="34" charset="-120"/>
               </a:rPr>
-              <a:t>waive</a:t>
+              <a:t>reject</a:t>
             </a:r>
             <a:endParaRPr lang="en-US" sz="1000" dirty="0"/>
           </a:p>
@@ -23547,8 +23564,8 @@
         </p:nvSpPr>
         <p:spPr>
           <a:xfrm>
-            <a:off x="9839960" y="5138928"/>
-            <a:ext cx="615696" cy="256032"/>
+            <a:off x="10236200" y="5138928"/>
+            <a:ext cx="549656" cy="256032"/>
           </a:xfrm>
           <a:prstGeom prst="roundRect">
             <a:avLst>
@@ -23574,8 +23591,8 @@
         </p:nvSpPr>
         <p:spPr>
           <a:xfrm>
-            <a:off x="9839960" y="5138928"/>
-            <a:ext cx="615696" cy="256032"/>
+            <a:off x="10236200" y="5138928"/>
+            <a:ext cx="549656" cy="256032"/>
           </a:xfrm>
           <a:prstGeom prst="rect">
             <a:avLst/>
@@ -23599,7 +23616,7 @@
                 <a:ea typeface="Calibri" pitchFamily="34" charset="-122"/>
                 <a:cs typeface="Calibri" pitchFamily="34" charset="-120"/>
               </a:rPr>
-              <a:t>answer</a:t>
+              <a:t>waive</a:t>
             </a:r>
             <a:endParaRPr lang="en-US" sz="1000" dirty="0"/>
           </a:p>
@@ -23613,8 +23630,8 @@
         </p:nvSpPr>
         <p:spPr>
           <a:xfrm>
-            <a:off x="10547096" y="5138928"/>
-            <a:ext cx="549656" cy="256032"/>
+            <a:off x="10877296" y="5138928"/>
+            <a:ext cx="615696" cy="256032"/>
           </a:xfrm>
           <a:prstGeom prst="roundRect">
             <a:avLst>
@@ -23640,8 +23657,8 @@
         </p:nvSpPr>
         <p:spPr>
           <a:xfrm>
-            <a:off x="10547096" y="5138928"/>
-            <a:ext cx="549656" cy="256032"/>
+            <a:off x="10877296" y="5138928"/>
+            <a:ext cx="615696" cy="256032"/>
           </a:xfrm>
           <a:prstGeom prst="rect">
             <a:avLst/>
@@ -23665,7 +23682,7 @@
                 <a:ea typeface="Calibri" pitchFamily="34" charset="-122"/>
                 <a:cs typeface="Calibri" pitchFamily="34" charset="-120"/>
               </a:rPr>
-              <a:t>judge</a:t>
+              <a:t>answer</a:t>
             </a:r>
             <a:endParaRPr lang="en-US" sz="1000" dirty="0"/>
           </a:p>
@@ -23680,7 +23697,7 @@
         <p:spPr>
           <a:xfrm>
             <a:off x="457200" y="5486400"/>
-            <a:ext cx="747776" cy="256032"/>
+            <a:ext cx="549656" cy="256032"/>
           </a:xfrm>
           <a:prstGeom prst="roundRect">
             <a:avLst>
@@ -23707,7 +23724,7 @@
         <p:spPr>
           <a:xfrm>
             <a:off x="457200" y="5486400"/>
-            <a:ext cx="747776" cy="256032"/>
+            <a:ext cx="549656" cy="256032"/>
           </a:xfrm>
           <a:prstGeom prst="rect">
             <a:avLst/>
@@ -23731,7 +23748,7 @@
                 <a:ea typeface="Calibri" pitchFamily="34" charset="-122"/>
                 <a:cs typeface="Calibri" pitchFamily="34" charset="-120"/>
               </a:rPr>
-              <a:t>takeover</a:t>
+              <a:t>judge</a:t>
             </a:r>
             <a:endParaRPr lang="en-US" sz="1000" dirty="0"/>
           </a:p>
@@ -23745,8 +23762,8 @@
         </p:nvSpPr>
         <p:spPr>
           <a:xfrm>
-            <a:off x="1296416" y="5486400"/>
-            <a:ext cx="1210056" cy="256032"/>
+            <a:off x="1098296" y="5486400"/>
+            <a:ext cx="747776" cy="256032"/>
           </a:xfrm>
           <a:prstGeom prst="roundRect">
             <a:avLst>
@@ -23772,8 +23789,8 @@
         </p:nvSpPr>
         <p:spPr>
           <a:xfrm>
-            <a:off x="1296416" y="5486400"/>
-            <a:ext cx="1210056" cy="256032"/>
+            <a:off x="1098296" y="5486400"/>
+            <a:ext cx="747776" cy="256032"/>
           </a:xfrm>
           <a:prstGeom prst="rect">
             <a:avLst/>
@@ -23797,7 +23814,7 @@
                 <a:ea typeface="Calibri" pitchFamily="34" charset="-122"/>
                 <a:cs typeface="Calibri" pitchFamily="34" charset="-120"/>
               </a:rPr>
-              <a:t>release-control</a:t>
+              <a:t>takeover</a:t>
             </a:r>
             <a:endParaRPr lang="en-US" sz="1000" dirty="0"/>
           </a:p>
@@ -23811,8 +23828,8 @@
         </p:nvSpPr>
         <p:spPr>
           <a:xfrm>
-            <a:off x="2597912" y="5486400"/>
-            <a:ext cx="615696" cy="256032"/>
+            <a:off x="1937512" y="5486400"/>
+            <a:ext cx="1210056" cy="256032"/>
           </a:xfrm>
           <a:prstGeom prst="roundRect">
             <a:avLst>
@@ -23838,8 +23855,8 @@
         </p:nvSpPr>
         <p:spPr>
           <a:xfrm>
-            <a:off x="2597912" y="5486400"/>
-            <a:ext cx="615696" cy="256032"/>
+            <a:off x="1937512" y="5486400"/>
+            <a:ext cx="1210056" cy="256032"/>
           </a:xfrm>
           <a:prstGeom prst="rect">
             <a:avLst/>
@@ -23863,7 +23880,7 @@
                 <a:ea typeface="Calibri" pitchFamily="34" charset="-122"/>
                 <a:cs typeface="Calibri" pitchFamily="34" charset="-120"/>
               </a:rPr>
-              <a:t>rework</a:t>
+              <a:t>release-control</a:t>
             </a:r>
             <a:endParaRPr lang="en-US" sz="1000" dirty="0"/>
           </a:p>
@@ -23877,8 +23894,8 @@
         </p:nvSpPr>
         <p:spPr>
           <a:xfrm>
-            <a:off x="3305048" y="5486400"/>
-            <a:ext cx="1276096" cy="256032"/>
+            <a:off x="3239008" y="5486400"/>
+            <a:ext cx="615696" cy="256032"/>
           </a:xfrm>
           <a:prstGeom prst="roundRect">
             <a:avLst>
@@ -23904,8 +23921,8 @@
         </p:nvSpPr>
         <p:spPr>
           <a:xfrm>
-            <a:off x="3305048" y="5486400"/>
-            <a:ext cx="1276096" cy="256032"/>
+            <a:off x="3239008" y="5486400"/>
+            <a:ext cx="615696" cy="256032"/>
           </a:xfrm>
           <a:prstGeom prst="rect">
             <a:avLst/>
@@ -23929,7 +23946,7 @@
                 <a:ea typeface="Calibri" pitchFamily="34" charset="-122"/>
                 <a:cs typeface="Calibri" pitchFamily="34" charset="-120"/>
               </a:rPr>
-              <a:t>approvals verify</a:t>
+              <a:t>rework</a:t>
             </a:r>
             <a:endParaRPr lang="en-US" sz="1000" dirty="0"/>
           </a:p>
@@ -23943,8 +23960,8 @@
         </p:nvSpPr>
         <p:spPr>
           <a:xfrm>
-            <a:off x="4672584" y="5486400"/>
-            <a:ext cx="549656" cy="256032"/>
+            <a:off x="3946144" y="5486400"/>
+            <a:ext cx="1276096" cy="256032"/>
           </a:xfrm>
           <a:prstGeom prst="roundRect">
             <a:avLst>
@@ -23970,8 +23987,8 @@
         </p:nvSpPr>
         <p:spPr>
           <a:xfrm>
-            <a:off x="4672584" y="5486400"/>
-            <a:ext cx="549656" cy="256032"/>
+            <a:off x="3946144" y="5486400"/>
+            <a:ext cx="1276096" cy="256032"/>
           </a:xfrm>
           <a:prstGeom prst="rect">
             <a:avLst/>
@@ -23995,7 +24012,7 @@
                 <a:ea typeface="Calibri" pitchFamily="34" charset="-122"/>
                 <a:cs typeface="Calibri" pitchFamily="34" charset="-120"/>
               </a:rPr>
-              <a:t>tests</a:t>
+              <a:t>approvals verify</a:t>
             </a:r>
             <a:endParaRPr lang="en-US" sz="1000" dirty="0"/>
           </a:p>
@@ -24010,7 +24027,7 @@
         <p:spPr>
           <a:xfrm>
             <a:off x="5313680" y="5486400"/>
-            <a:ext cx="1540256" cy="256032"/>
+            <a:ext cx="549656" cy="256032"/>
           </a:xfrm>
           <a:prstGeom prst="roundRect">
             <a:avLst>
@@ -24037,7 +24054,7 @@
         <p:spPr>
           <a:xfrm>
             <a:off x="5313680" y="5486400"/>
-            <a:ext cx="1540256" cy="256032"/>
+            <a:ext cx="549656" cy="256032"/>
           </a:xfrm>
           <a:prstGeom prst="rect">
             <a:avLst/>
@@ -24061,7 +24078,7 @@
                 <a:ea typeface="Calibri" pitchFamily="34" charset="-122"/>
                 <a:cs typeface="Calibri" pitchFamily="34" charset="-120"/>
               </a:rPr>
-              <a:t>task executors token</a:t>
+              <a:t>tests</a:t>
             </a:r>
             <a:endParaRPr lang="en-US" sz="1000" dirty="0"/>
           </a:p>
@@ -24075,8 +24092,8 @@
         </p:nvSpPr>
         <p:spPr>
           <a:xfrm>
-            <a:off x="6945376" y="5486400"/>
-            <a:ext cx="945896" cy="256032"/>
+            <a:off x="5954776" y="5486400"/>
+            <a:ext cx="1540256" cy="256032"/>
           </a:xfrm>
           <a:prstGeom prst="roundRect">
             <a:avLst>
@@ -24102,8 +24119,8 @@
         </p:nvSpPr>
         <p:spPr>
           <a:xfrm>
-            <a:off x="6945376" y="5486400"/>
-            <a:ext cx="945896" cy="256032"/>
+            <a:off x="5954776" y="5486400"/>
+            <a:ext cx="1540256" cy="256032"/>
           </a:xfrm>
           <a:prstGeom prst="rect">
             <a:avLst/>
@@ -24127,7 +24144,7 @@
                 <a:ea typeface="Calibri" pitchFamily="34" charset="-122"/>
                 <a:cs typeface="Calibri" pitchFamily="34" charset="-120"/>
               </a:rPr>
-              <a:t>task export</a:t>
+              <a:t>task executors token</a:t>
             </a:r>
             <a:endParaRPr lang="en-US" sz="1000" dirty="0"/>
           </a:p>
@@ -24141,8 +24158,8 @@
         </p:nvSpPr>
         <p:spPr>
           <a:xfrm>
-            <a:off x="7982712" y="5486400"/>
-            <a:ext cx="1342136" cy="256032"/>
+            <a:off x="7586472" y="5486400"/>
+            <a:ext cx="945896" cy="256032"/>
           </a:xfrm>
           <a:prstGeom prst="roundRect">
             <a:avLst>
@@ -24168,8 +24185,8 @@
         </p:nvSpPr>
         <p:spPr>
           <a:xfrm>
-            <a:off x="7982712" y="5486400"/>
-            <a:ext cx="1342136" cy="256032"/>
+            <a:off x="7586472" y="5486400"/>
+            <a:ext cx="945896" cy="256032"/>
           </a:xfrm>
           <a:prstGeom prst="rect">
             <a:avLst/>
@@ -24193,7 +24210,7 @@
                 <a:ea typeface="Calibri" pitchFamily="34" charset="-122"/>
                 <a:cs typeface="Calibri" pitchFamily="34" charset="-120"/>
               </a:rPr>
-              <a:t>task check-result</a:t>
+              <a:t>task export</a:t>
             </a:r>
             <a:endParaRPr lang="en-US" sz="1000" dirty="0"/>
           </a:p>
@@ -24207,8 +24224,8 @@
         </p:nvSpPr>
         <p:spPr>
           <a:xfrm>
-            <a:off x="9416288" y="5486400"/>
-            <a:ext cx="879856" cy="256032"/>
+            <a:off x="8623808" y="5486400"/>
+            <a:ext cx="1342136" cy="256032"/>
           </a:xfrm>
           <a:prstGeom prst="roundRect">
             <a:avLst>
@@ -24234,8 +24251,8 @@
         </p:nvSpPr>
         <p:spPr>
           <a:xfrm>
-            <a:off x="9416288" y="5486400"/>
-            <a:ext cx="879856" cy="256032"/>
+            <a:off x="8623808" y="5486400"/>
+            <a:ext cx="1342136" cy="256032"/>
           </a:xfrm>
           <a:prstGeom prst="rect">
             <a:avLst/>
@@ -24259,7 +24276,7 @@
                 <a:ea typeface="Calibri" pitchFamily="34" charset="-122"/>
                 <a:cs typeface="Calibri" pitchFamily="34" charset="-120"/>
               </a:rPr>
-              <a:t>board list</a:t>
+              <a:t>task check-result</a:t>
             </a:r>
             <a:endParaRPr lang="en-US" sz="1000" dirty="0"/>
           </a:p>
@@ -24273,8 +24290,8 @@
         </p:nvSpPr>
         <p:spPr>
           <a:xfrm>
-            <a:off x="10387584" y="5486400"/>
-            <a:ext cx="1144016" cy="256032"/>
+            <a:off x="10057384" y="5486400"/>
+            <a:ext cx="879856" cy="256032"/>
           </a:xfrm>
           <a:prstGeom prst="roundRect">
             <a:avLst>
@@ -24300,8 +24317,8 @@
         </p:nvSpPr>
         <p:spPr>
           <a:xfrm>
-            <a:off x="10387584" y="5486400"/>
-            <a:ext cx="1144016" cy="256032"/>
+            <a:off x="10057384" y="5486400"/>
+            <a:ext cx="879856" cy="256032"/>
           </a:xfrm>
           <a:prstGeom prst="rect">
             <a:avLst/>
@@ -24325,7 +24342,7 @@
                 <a:ea typeface="Calibri" pitchFamily="34" charset="-122"/>
                 <a:cs typeface="Calibri" pitchFamily="34" charset="-120"/>
               </a:rPr>
-              <a:t>board dispatch</a:t>
+              <a:t>board list</a:t>
             </a:r>
             <a:endParaRPr lang="en-US" sz="1000" dirty="0"/>
           </a:p>
@@ -24340,7 +24357,7 @@
         <p:spPr>
           <a:xfrm>
             <a:off x="457200" y="5833872"/>
-            <a:ext cx="1077976" cy="256032"/>
+            <a:ext cx="1144016" cy="256032"/>
           </a:xfrm>
           <a:prstGeom prst="roundRect">
             <a:avLst>
@@ -24367,7 +24384,7 @@
         <p:spPr>
           <a:xfrm>
             <a:off x="457200" y="5833872"/>
-            <a:ext cx="1077976" cy="256032"/>
+            <a:ext cx="1144016" cy="256032"/>
           </a:xfrm>
           <a:prstGeom prst="rect">
             <a:avLst/>
@@ -24391,7 +24408,7 @@
                 <a:ea typeface="Calibri" pitchFamily="34" charset="-122"/>
                 <a:cs typeface="Calibri" pitchFamily="34" charset="-120"/>
               </a:rPr>
-              <a:t>board auction</a:t>
+              <a:t>board dispatch</a:t>
             </a:r>
             <a:endParaRPr lang="en-US" sz="1000" dirty="0"/>
           </a:p>
@@ -24405,8 +24422,8 @@
         </p:nvSpPr>
         <p:spPr>
           <a:xfrm>
-            <a:off x="1626616" y="5833872"/>
-            <a:ext cx="813816" cy="256032"/>
+            <a:off x="1692656" y="5833872"/>
+            <a:ext cx="1077976" cy="256032"/>
           </a:xfrm>
           <a:prstGeom prst="roundRect">
             <a:avLst>
@@ -24432,8 +24449,8 @@
         </p:nvSpPr>
         <p:spPr>
           <a:xfrm>
-            <a:off x="1626616" y="5833872"/>
-            <a:ext cx="813816" cy="256032"/>
+            <a:off x="1692656" y="5833872"/>
+            <a:ext cx="1077976" cy="256032"/>
           </a:xfrm>
           <a:prstGeom prst="rect">
             <a:avLst/>
@@ -24457,7 +24474,7 @@
                 <a:ea typeface="Calibri" pitchFamily="34" charset="-122"/>
                 <a:cs typeface="Calibri" pitchFamily="34" charset="-120"/>
               </a:rPr>
-              <a:t>board bid</a:t>
+              <a:t>board auction</a:t>
             </a:r>
             <a:endParaRPr lang="en-US" sz="1000" dirty="0"/>
           </a:p>
@@ -24471,8 +24488,8 @@
         </p:nvSpPr>
         <p:spPr>
           <a:xfrm>
-            <a:off x="2531872" y="5833872"/>
-            <a:ext cx="945896" cy="256032"/>
+            <a:off x="2862072" y="5833872"/>
+            <a:ext cx="813816" cy="256032"/>
           </a:xfrm>
           <a:prstGeom prst="roundRect">
             <a:avLst>
@@ -24498,8 +24515,8 @@
         </p:nvSpPr>
         <p:spPr>
           <a:xfrm>
-            <a:off x="2531872" y="5833872"/>
-            <a:ext cx="945896" cy="256032"/>
+            <a:off x="2862072" y="5833872"/>
+            <a:ext cx="813816" cy="256032"/>
           </a:xfrm>
           <a:prstGeom prst="rect">
             <a:avLst/>
@@ -24523,7 +24540,7 @@
                 <a:ea typeface="Calibri" pitchFamily="34" charset="-122"/>
                 <a:cs typeface="Calibri" pitchFamily="34" charset="-120"/>
               </a:rPr>
-              <a:t>board award</a:t>
+              <a:t>board bid</a:t>
             </a:r>
             <a:endParaRPr lang="en-US" sz="1000" dirty="0"/>
           </a:p>
@@ -24537,7 +24554,7 @@
         </p:nvSpPr>
         <p:spPr>
           <a:xfrm>
-            <a:off x="3569208" y="5833872"/>
+            <a:off x="3767328" y="5833872"/>
             <a:ext cx="945896" cy="256032"/>
           </a:xfrm>
           <a:prstGeom prst="roundRect">
@@ -24564,7 +24581,7 @@
         </p:nvSpPr>
         <p:spPr>
           <a:xfrm>
-            <a:off x="3569208" y="5833872"/>
+            <a:off x="3767328" y="5833872"/>
             <a:ext cx="945896" cy="256032"/>
           </a:xfrm>
           <a:prstGeom prst="rect">
@@ -24589,7 +24606,7 @@
                 <a:ea typeface="Calibri" pitchFamily="34" charset="-122"/>
                 <a:cs typeface="Calibri" pitchFamily="34" charset="-120"/>
               </a:rPr>
-              <a:t>board claim</a:t>
+              <a:t>board award</a:t>
             </a:r>
             <a:endParaRPr lang="en-US" sz="1000" dirty="0"/>
           </a:p>
@@ -24603,8 +24620,8 @@
         </p:nvSpPr>
         <p:spPr>
           <a:xfrm>
-            <a:off x="4606544" y="5833872"/>
-            <a:ext cx="1210056" cy="256032"/>
+            <a:off x="4804664" y="5833872"/>
+            <a:ext cx="945896" cy="256032"/>
           </a:xfrm>
           <a:prstGeom prst="roundRect">
             <a:avLst>
@@ -24630,8 +24647,8 @@
         </p:nvSpPr>
         <p:spPr>
           <a:xfrm>
-            <a:off x="4606544" y="5833872"/>
-            <a:ext cx="1210056" cy="256032"/>
+            <a:off x="4804664" y="5833872"/>
+            <a:ext cx="945896" cy="256032"/>
           </a:xfrm>
           <a:prstGeom prst="rect">
             <a:avLst/>
@@ -24655,7 +24672,7 @@
                 <a:ea typeface="Calibri" pitchFamily="34" charset="-122"/>
                 <a:cs typeface="Calibri" pitchFamily="34" charset="-120"/>
               </a:rPr>
-              <a:t>board heartbeat</a:t>
+              <a:t>board claim</a:t>
             </a:r>
             <a:endParaRPr lang="en-US" sz="1000" dirty="0"/>
           </a:p>
@@ -24669,8 +24686,8 @@
         </p:nvSpPr>
         <p:spPr>
           <a:xfrm>
-            <a:off x="5908040" y="5833872"/>
-            <a:ext cx="1077976" cy="256032"/>
+            <a:off x="5842000" y="5833872"/>
+            <a:ext cx="1210056" cy="256032"/>
           </a:xfrm>
           <a:prstGeom prst="roundRect">
             <a:avLst>
@@ -24696,8 +24713,8 @@
         </p:nvSpPr>
         <p:spPr>
           <a:xfrm>
-            <a:off x="5908040" y="5833872"/>
-            <a:ext cx="1077976" cy="256032"/>
+            <a:off x="5842000" y="5833872"/>
+            <a:ext cx="1210056" cy="256032"/>
           </a:xfrm>
           <a:prstGeom prst="rect">
             <a:avLst/>
@@ -24721,7 +24738,7 @@
                 <a:ea typeface="Calibri" pitchFamily="34" charset="-122"/>
                 <a:cs typeface="Calibri" pitchFamily="34" charset="-120"/>
               </a:rPr>
-              <a:t>board release</a:t>
+              <a:t>board heartbeat</a:t>
             </a:r>
             <a:endParaRPr lang="en-US" sz="1000" dirty="0"/>
           </a:p>
@@ -24735,8 +24752,8 @@
         </p:nvSpPr>
         <p:spPr>
           <a:xfrm>
-            <a:off x="7077456" y="5833872"/>
-            <a:ext cx="1011936" cy="256032"/>
+            <a:off x="7143496" y="5833872"/>
+            <a:ext cx="1077976" cy="256032"/>
           </a:xfrm>
           <a:prstGeom prst="roundRect">
             <a:avLst>
@@ -24762,8 +24779,8 @@
         </p:nvSpPr>
         <p:spPr>
           <a:xfrm>
-            <a:off x="7077456" y="5833872"/>
-            <a:ext cx="1011936" cy="256032"/>
+            <a:off x="7143496" y="5833872"/>
+            <a:ext cx="1077976" cy="256032"/>
           </a:xfrm>
           <a:prstGeom prst="rect">
             <a:avLst/>
@@ -24787,7 +24804,7 @@
                 <a:ea typeface="Calibri" pitchFamily="34" charset="-122"/>
                 <a:cs typeface="Calibri" pitchFamily="34" charset="-120"/>
               </a:rPr>
-              <a:t>board submit</a:t>
+              <a:t>board release</a:t>
             </a:r>
             <a:endParaRPr lang="en-US" sz="1000" dirty="0"/>
           </a:p>
@@ -24801,7 +24818,7 @@
         </p:nvSpPr>
         <p:spPr>
           <a:xfrm>
-            <a:off x="8180832" y="5833872"/>
+            <a:off x="8312912" y="5833872"/>
             <a:ext cx="1011936" cy="256032"/>
           </a:xfrm>
           <a:prstGeom prst="roundRect">
@@ -24828,7 +24845,7 @@
         </p:nvSpPr>
         <p:spPr>
           <a:xfrm>
-            <a:off x="8180832" y="5833872"/>
+            <a:off x="8312912" y="5833872"/>
             <a:ext cx="1011936" cy="256032"/>
           </a:xfrm>
           <a:prstGeom prst="rect">
@@ -24853,7 +24870,7 @@
                 <a:ea typeface="Calibri" pitchFamily="34" charset="-122"/>
                 <a:cs typeface="Calibri" pitchFamily="34" charset="-120"/>
               </a:rPr>
-              <a:t>board reopen</a:t>
+              <a:t>board submit</a:t>
             </a:r>
             <a:endParaRPr lang="en-US" sz="1000" dirty="0"/>
           </a:p>
@@ -24867,8 +24884,8 @@
         </p:nvSpPr>
         <p:spPr>
           <a:xfrm>
-            <a:off x="9284208" y="5833872"/>
-            <a:ext cx="615696" cy="256032"/>
+            <a:off x="9416288" y="5833872"/>
+            <a:ext cx="1011936" cy="256032"/>
           </a:xfrm>
           <a:prstGeom prst="roundRect">
             <a:avLst>
@@ -24894,8 +24911,8 @@
         </p:nvSpPr>
         <p:spPr>
           <a:xfrm>
-            <a:off x="9284208" y="5833872"/>
-            <a:ext cx="615696" cy="256032"/>
+            <a:off x="9416288" y="5833872"/>
+            <a:ext cx="1011936" cy="256032"/>
           </a:xfrm>
           <a:prstGeom prst="rect">
             <a:avLst/>
@@ -24919,7 +24936,7 @@
                 <a:ea typeface="Calibri" pitchFamily="34" charset="-122"/>
                 <a:cs typeface="Calibri" pitchFamily="34" charset="-120"/>
               </a:rPr>
-              <a:t>verify</a:t>
+              <a:t>board reopen</a:t>
             </a:r>
             <a:endParaRPr lang="en-US" sz="1000" dirty="0"/>
           </a:p>
@@ -24933,7 +24950,7 @@
         </p:nvSpPr>
         <p:spPr>
           <a:xfrm>
-            <a:off x="9991344" y="5833872"/>
+            <a:off x="10519664" y="5833872"/>
             <a:ext cx="615696" cy="256032"/>
           </a:xfrm>
           <a:prstGeom prst="roundRect">
@@ -24960,7 +24977,7 @@
         </p:nvSpPr>
         <p:spPr>
           <a:xfrm>
-            <a:off x="9991344" y="5833872"/>
+            <a:off x="10519664" y="5833872"/>
             <a:ext cx="615696" cy="256032"/>
           </a:xfrm>
           <a:prstGeom prst="rect">
@@ -24985,73 +25002,7 @@
                 <a:ea typeface="Calibri" pitchFamily="34" charset="-122"/>
                 <a:cs typeface="Calibri" pitchFamily="34" charset="-120"/>
               </a:rPr>
-              <a:t>review</a:t>
-            </a:r>
-            <a:endParaRPr lang="en-US" sz="1000" dirty="0"/>
-          </a:p>
-        </p:txBody>
-      </p:sp>
-      <p:sp>
-        <p:nvSpPr>
-          <p:cNvPr id="168" name="Shape 166"/>
-          <p:cNvSpPr/>
-          <p:nvPr/>
-        </p:nvSpPr>
-        <p:spPr>
-          <a:xfrm>
-            <a:off x="10698480" y="5833872"/>
-            <a:ext cx="747776" cy="256032"/>
-          </a:xfrm>
-          <a:prstGeom prst="roundRect">
-            <a:avLst>
-              <a:gd name="adj" fmla="val 50000"/>
-            </a:avLst>
-          </a:prstGeom>
-          <a:solidFill>
-            <a:srgbClr val="F3F5F8"/>
-          </a:solidFill>
-          <a:ln w="12700">
-            <a:solidFill>
-              <a:srgbClr val="F3F5F8"/>
-            </a:solidFill>
-            <a:prstDash val="solid"/>
-          </a:ln>
-        </p:spPr>
-      </p:sp>
-      <p:sp>
-        <p:nvSpPr>
-          <p:cNvPr id="169" name="Text 167"/>
-          <p:cNvSpPr txBox="1"/>
-          <p:nvPr/>
-        </p:nvSpPr>
-        <p:spPr>
-          <a:xfrm>
-            <a:off x="10698480" y="5833872"/>
-            <a:ext cx="747776" cy="256032"/>
-          </a:xfrm>
-          <a:prstGeom prst="rect">
-            <a:avLst/>
-          </a:prstGeom>
-          <a:noFill/>
-          <a:ln/>
-        </p:spPr>
-        <p:txBody>
-          <a:bodyPr wrap="square" lIns="0" tIns="0" rIns="0" bIns="0" rtlCol="0" anchor="ctr"/>
-          <a:lstStyle/>
-          <a:p>
-            <a:pPr algn="ctr" indent="0" marL="0">
-              <a:buNone/>
-            </a:pPr>
-            <a:r>
-              <a:rPr lang="en-US" sz="1000" dirty="0">
-                <a:solidFill>
-                  <a:srgbClr val="1F2430"/>
-                </a:solidFill>
-                <a:latin typeface="Calibri" pitchFamily="34" charset="0"/>
-                <a:ea typeface="Calibri" pitchFamily="34" charset="-122"/>
-                <a:cs typeface="Calibri" pitchFamily="34" charset="-120"/>
-              </a:rPr>
-              <a:t>validate</a:t>
+              <a:t>verify</a:t>
             </a:r>
             <a:endParaRPr lang="en-US" sz="1000" dirty="0"/>
           </a:p>
@@ -27697,7 +27648,7 @@
                 <a:ea typeface="Courier New" pitchFamily="34" charset="-122"/>
                 <a:cs typeface="Courier New" pitchFamily="34" charset="-120"/>
               </a:rPr>
-              <a:t>  sdlc 0.22.2, license: community</a:t>
+              <a:t>  sdlc 0.22.3, license: community</a:t>
             </a:r>
             <a:endParaRPr lang="en-US" sz="1000" dirty="0"/>
           </a:p>

--- a/docs/demo/sdlc-calculator-demo.en.pptx
+++ b/docs/demo/sdlc-calculator-demo.en.pptx
@@ -5112,7 +5112,7 @@
                 <a:ea typeface="Courier New" pitchFamily="34" charset="-122"/>
                 <a:cs typeface="Courier New" pitchFamily="34" charset="-120"/>
               </a:rPr>
-              <a:t>✓ test (1.0s)</a:t>
+              <a:t>✓ test (0.9s)</a:t>
             </a:r>
             <a:endParaRPr lang="en-US" sz="1000" dirty="0"/>
           </a:p>
@@ -6677,7 +6677,7 @@
                 <a:ea typeface="Courier New" pitchFamily="34" charset="-122"/>
                 <a:cs typeface="Courier New" pitchFamily="34" charset="-120"/>
               </a:rPr>
-              <a:t>  code-owner (deae0ff3a96f)</a:t>
+              <a:t>  code-owner (3f51023be410)</a:t>
             </a:r>
             <a:endParaRPr lang="en-US" sz="1000" dirty="0"/>
           </a:p>
@@ -6762,7 +6762,7 @@
                 <a:ea typeface="Courier New" pitchFamily="34" charset="-122"/>
                 <a:cs typeface="Courier New" pitchFamily="34" charset="-120"/>
               </a:rPr>
-              <a:t>  "SDLC-Approval: basic-arithmetic:review:d</a:t>
+              <a:t>  "SDLC-Approval: basic-arithmetic:review:3</a:t>
             </a:r>
             <a:endParaRPr lang="en-US" sz="1000" dirty="0"/>
           </a:p>
@@ -6779,7 +6779,7 @@
                 <a:ea typeface="Courier New" pitchFamily="34" charset="-122"/>
                 <a:cs typeface="Courier New" pitchFamily="34" charset="-120"/>
               </a:rPr>
-              <a:t>  eae0ff3a96f"</a:t>
+              <a:t>  f51023be410"</a:t>
             </a:r>
             <a:endParaRPr lang="en-US" sz="1000" dirty="0"/>
           </a:p>
@@ -7460,7 +7460,7 @@
                 <a:ea typeface="Courier New" pitchFamily="34" charset="-122"/>
                 <a:cs typeface="Courier New" pitchFamily="34" charset="-120"/>
               </a:rPr>
-              <a:t>  release-manager (deae0ff3a96f)</a:t>
+              <a:t>  release-manager (3f51023be410)</a:t>
             </a:r>
             <a:endParaRPr lang="en-US" sz="1000" dirty="0"/>
           </a:p>
@@ -7528,7 +7528,7 @@
                 <a:ea typeface="Courier New" pitchFamily="34" charset="-122"/>
                 <a:cs typeface="Courier New" pitchFamily="34" charset="-120"/>
               </a:rPr>
-              <a:t>  gate" -m "SDLC-Approval: basic-arithmetic:release:deae0ff3a96f"</a:t>
+              <a:t>  gate" -m "SDLC-Approval: basic-arithmetic:release:3f51023be410"</a:t>
             </a:r>
             <a:endParaRPr lang="en-US" sz="1000" dirty="0"/>
           </a:p>
@@ -7811,7 +7811,7 @@
                 <a:ea typeface="Courier New" pitchFamily="34" charset="-122"/>
                 <a:cs typeface="Courier New" pitchFamily="34" charset="-120"/>
               </a:rPr>
-              <a:t>✓ basic-arithmetic/intent alice valid 50716b90 trailer: missing</a:t>
+              <a:t>✓ basic-arithmetic/intent alice valid 2cb8d332 trailer: missing</a:t>
             </a:r>
             <a:endParaRPr lang="en-US" sz="1000" dirty="0"/>
           </a:p>
@@ -7828,7 +7828,7 @@
                 <a:ea typeface="Courier New" pitchFamily="34" charset="-122"/>
                 <a:cs typeface="Courier New" pitchFamily="34" charset="-120"/>
               </a:rPr>
-              <a:t>✓ basic-arithmetic/spec alice valid 02c182f4 trailer: missing</a:t>
+              <a:t>✓ basic-arithmetic/spec alice valid 2026497f trailer: missing</a:t>
             </a:r>
             <a:endParaRPr lang="en-US" sz="1000" dirty="0"/>
           </a:p>
@@ -7845,7 +7845,7 @@
                 <a:ea typeface="Courier New" pitchFamily="34" charset="-122"/>
                 <a:cs typeface="Courier New" pitchFamily="34" charset="-120"/>
               </a:rPr>
-              <a:t>✗ basic-arithmetic/plan bob wrong-signer 02c182f4 trailer: missing</a:t>
+              <a:t>✗ basic-arithmetic/plan bob wrong-signer 2026497f trailer: missing</a:t>
             </a:r>
             <a:endParaRPr lang="en-US" sz="1000" dirty="0"/>
           </a:p>
@@ -7862,7 +7862,7 @@
                 <a:ea typeface="Courier New" pitchFamily="34" charset="-122"/>
                 <a:cs typeface="Courier New" pitchFamily="34" charset="-120"/>
               </a:rPr>
-              <a:t>✓ basic-arithmetic/review carol valid 56b2bf8a trailer: missing</a:t>
+              <a:t>✓ basic-arithmetic/review carol valid 88b9c180 trailer: missing</a:t>
             </a:r>
             <a:endParaRPr lang="en-US" sz="1000" dirty="0"/>
           </a:p>
@@ -7879,7 +7879,7 @@
                 <a:ea typeface="Courier New" pitchFamily="34" charset="-122"/>
                 <a:cs typeface="Courier New" pitchFamily="34" charset="-120"/>
               </a:rPr>
-              <a:t>✓ basic-arithmetic/release alice valid 9d6cbcbf trailer: missing</a:t>
+              <a:t>✓ basic-arithmetic/release alice valid 33fa2d0e trailer: missing</a:t>
             </a:r>
             <a:endParaRPr lang="en-US" sz="1000" dirty="0"/>
           </a:p>
@@ -7896,7 +7896,7 @@
                 <a:ea typeface="Courier New" pitchFamily="34" charset="-122"/>
                 <a:cs typeface="Courier New" pitchFamily="34" charset="-120"/>
               </a:rPr>
-              <a:t>✓ openspec/roles.yaml alice@calc.example bootstrap 46bb5cd9</a:t>
+              <a:t>✓ openspec/roles.yaml alice@calc.example bootstrap 05189252</a:t>
             </a:r>
             <a:endParaRPr lang="en-US" sz="1000" dirty="0"/>
           </a:p>
@@ -8528,7 +8528,7 @@
                 <a:ea typeface="Courier New" pitchFamily="34" charset="-122"/>
                 <a:cs typeface="Courier New" pitchFamily="34" charset="-120"/>
               </a:rPr>
-              <a:t>  openspec\changes\archive\2026-10-16-basic</a:t>
+              <a:t>  openspec\changes\archive\2026-10-17-basic</a:t>
             </a:r>
             <a:endParaRPr lang="en-US" sz="1000" dirty="0"/>
           </a:p>
@@ -14382,7 +14382,7 @@
                 <a:ea typeface="Courier New" pitchFamily="34" charset="-122"/>
                 <a:cs typeface="Courier New" pitchFamily="34" charset="-120"/>
               </a:rPr>
-              <a:t>  archived) · sdlc 0.22.3, license:</a:t>
+              <a:t>  archived) · sdlc 0.22.4, license:</a:t>
             </a:r>
             <a:endParaRPr lang="en-US" sz="1000" dirty="0"/>
           </a:p>
@@ -14586,7 +14586,7 @@
                 <a:ea typeface="Courier New" pitchFamily="34" charset="-122"/>
                 <a:cs typeface="Courier New" pitchFamily="34" charset="-120"/>
               </a:rPr>
-              <a:t>  intent 3 · spec 4 · plan 17 · review 3;</a:t>
+              <a:t>  intent 3 · spec 4 · plan 16 · review 3;</a:t>
             </a:r>
             <a:endParaRPr lang="en-US" sz="1000" dirty="0"/>
           </a:p>
@@ -14903,7 +14903,7 @@
                 <a:ea typeface="Courier New" pitchFamily="34" charset="-122"/>
                 <a:cs typeface="Courier New" pitchFamily="34" charset="-120"/>
               </a:rPr>
-              <a:t>2026-10-17T01:42:20.093Z  gate.review.await</a:t>
+              <a:t>2026-10-17T07:50:34.581Z  gate.review.await</a:t>
             </a:r>
             <a:endParaRPr lang="en-US" sz="1000" dirty="0"/>
           </a:p>
@@ -14937,7 +14937,7 @@
                 <a:ea typeface="Courier New" pitchFamily="34" charset="-122"/>
                 <a:cs typeface="Courier New" pitchFamily="34" charset="-120"/>
               </a:rPr>
-              <a:t>  sha256:deae0ff3a96f174c6b0ad43a6d4536bc08</a:t>
+              <a:t>  sha256:3f51023be410c73488a732b3e04c954571</a:t>
             </a:r>
             <a:endParaRPr lang="en-US" sz="1000" dirty="0"/>
           </a:p>
@@ -14954,7 +14954,7 @@
                 <a:ea typeface="Courier New" pitchFamily="34" charset="-122"/>
                 <a:cs typeface="Courier New" pitchFamily="34" charset="-120"/>
               </a:rPr>
-              <a:t>  e797af8429c7f3d31eab554e3f8cd4 [sdlc</a:t>
+              <a:t>  701e4a1a7eced8a2873305cb36a9df [sdlc</a:t>
             </a:r>
             <a:endParaRPr lang="en-US" sz="1000" dirty="0"/>
           </a:p>
@@ -14971,7 +14971,7 @@
                 <a:ea typeface="Courier New" pitchFamily="34" charset="-122"/>
                 <a:cs typeface="Courier New" pitchFamily="34" charset="-120"/>
               </a:rPr>
-              <a:t>  0.22.3 · community]</a:t>
+              <a:t>  0.22.4 · community]</a:t>
             </a:r>
             <a:endParaRPr lang="en-US" sz="1000" dirty="0"/>
           </a:p>
@@ -14988,7 +14988,7 @@
                 <a:ea typeface="Courier New" pitchFamily="34" charset="-122"/>
                 <a:cs typeface="Courier New" pitchFamily="34" charset="-120"/>
               </a:rPr>
-              <a:t>2026-10-17T01:42:23.191Z  gate.review.appro</a:t>
+              <a:t>2026-10-17T07:50:37.614Z  gate.review.appro</a:t>
             </a:r>
             <a:endParaRPr lang="en-US" sz="1000" dirty="0"/>
           </a:p>
@@ -15039,7 +15039,7 @@
                 <a:ea typeface="Courier New" pitchFamily="34" charset="-122"/>
                 <a:cs typeface="Courier New" pitchFamily="34" charset="-120"/>
               </a:rPr>
-              <a:t>  [sdlc 0.22.3 · community]</a:t>
+              <a:t>  [sdlc 0.22.4 · community]</a:t>
             </a:r>
             <a:endParaRPr lang="en-US" sz="1000" dirty="0"/>
           </a:p>
@@ -15056,7 +15056,7 @@
                 <a:ea typeface="Courier New" pitchFamily="34" charset="-122"/>
                 <a:cs typeface="Courier New" pitchFamily="34" charset="-120"/>
               </a:rPr>
-              <a:t>2026-10-17T01:42:29.391Z  gate.release.appr</a:t>
+              <a:t>2026-10-17T07:50:43.926Z  gate.release.appr</a:t>
             </a:r>
             <a:endParaRPr lang="en-US" sz="1000" dirty="0"/>
           </a:p>
@@ -15107,7 +15107,7 @@
                 <a:ea typeface="Courier New" pitchFamily="34" charset="-122"/>
                 <a:cs typeface="Courier New" pitchFamily="34" charset="-120"/>
               </a:rPr>
-              <a:t>  release-manager [sdlc 0.22.3 · community]</a:t>
+              <a:t>  release-manager [sdlc 0.22.4 · community]</a:t>
             </a:r>
             <a:endParaRPr lang="en-US" sz="1000" dirty="0"/>
           </a:p>
@@ -16888,7 +16888,7 @@
                 <a:ea typeface="Courier New" pitchFamily="34" charset="-122"/>
                 <a:cs typeface="Courier New" pitchFamily="34" charset="-120"/>
               </a:rPr>
-              <a:t>      "id": "20261017T014326118Z-ci-green-4</a:t>
+              <a:t>      "id": "20261017T075139262Z-ci-green-a</a:t>
             </a:r>
             <a:endParaRPr lang="en-US" sz="1000" dirty="0"/>
           </a:p>
@@ -16905,7 +16905,7 @@
                 <a:ea typeface="Courier New" pitchFamily="34" charset="-122"/>
                 <a:cs typeface="Courier New" pitchFamily="34" charset="-120"/>
               </a:rPr>
-              <a:t>  729dc",</a:t>
+              <a:t>  1cde1",</a:t>
             </a:r>
             <a:endParaRPr lang="en-US" sz="1000" dirty="0"/>
           </a:p>
@@ -17041,7 +17041,7 @@
                 <a:ea typeface="Courier New" pitchFamily="34" charset="-122"/>
                 <a:cs typeface="Courier New" pitchFamily="34" charset="-120"/>
               </a:rPr>
-              <a:t>        "ref": "a9f6de164e96ab0ec0a1cddd002</a:t>
+              <a:t>        "ref": "700eaf8edbe2437631b97746f0a</a:t>
             </a:r>
             <a:endParaRPr lang="en-US" sz="1000" dirty="0"/>
           </a:p>
@@ -17058,7 +17058,7 @@
                 <a:ea typeface="Courier New" pitchFamily="34" charset="-122"/>
                 <a:cs typeface="Courier New" pitchFamily="34" charset="-120"/>
               </a:rPr>
-              <a:t>  ec9a9f7d7cdb8",</a:t>
+              <a:t>  d4bfe417c78ed",</a:t>
             </a:r>
             <a:endParaRPr lang="en-US" sz="1000" dirty="0"/>
           </a:p>
@@ -27648,7 +27648,7 @@
                 <a:ea typeface="Courier New" pitchFamily="34" charset="-122"/>
                 <a:cs typeface="Courier New" pitchFamily="34" charset="-120"/>
               </a:rPr>
-              <a:t>  sdlc 0.22.3, license: community</a:t>
+              <a:t>  sdlc 0.22.4, license: community</a:t>
             </a:r>
             <a:endParaRPr lang="en-US" sz="1000" dirty="0"/>
           </a:p>
@@ -34439,7 +34439,7 @@
                 <a:ea typeface="Courier New" pitchFamily="34" charset="-122"/>
                 <a:cs typeface="Courier New" pitchFamily="34" charset="-120"/>
               </a:rPr>
-              <a:t>  (3f632e3f37b9)</a:t>
+              <a:t>  (b6d7eb14bb6b)</a:t>
             </a:r>
             <a:endParaRPr lang="en-US" sz="1000" dirty="0"/>
           </a:p>
@@ -34575,7 +34575,7 @@
                 <a:ea typeface="Courier New" pitchFamily="34" charset="-122"/>
                 <a:cs typeface="Courier New" pitchFamily="34" charset="-120"/>
               </a:rPr>
-              <a:t>  3f632e3f37b9"</a:t>
+              <a:t>  b6d7eb14bb6b"</a:t>
             </a:r>
             <a:endParaRPr lang="en-US" sz="1000" dirty="0"/>
           </a:p>

--- a/docs/demo/sdlc-calculator-demo.en.pptx
+++ b/docs/demo/sdlc-calculator-demo.en.pptx
@@ -5112,7 +5112,7 @@
                 <a:ea typeface="Courier New" pitchFamily="34" charset="-122"/>
                 <a:cs typeface="Courier New" pitchFamily="34" charset="-120"/>
               </a:rPr>
-              <a:t>✓ test (0.9s)</a:t>
+              <a:t>✓ test (1.0s)</a:t>
             </a:r>
             <a:endParaRPr lang="en-US" sz="1000" dirty="0"/>
           </a:p>
@@ -6677,7 +6677,7 @@
                 <a:ea typeface="Courier New" pitchFamily="34" charset="-122"/>
                 <a:cs typeface="Courier New" pitchFamily="34" charset="-120"/>
               </a:rPr>
-              <a:t>  code-owner (3f51023be410)</a:t>
+              <a:t>  code-owner (e6ae90721f15)</a:t>
             </a:r>
             <a:endParaRPr lang="en-US" sz="1000" dirty="0"/>
           </a:p>
@@ -6762,7 +6762,7 @@
                 <a:ea typeface="Courier New" pitchFamily="34" charset="-122"/>
                 <a:cs typeface="Courier New" pitchFamily="34" charset="-120"/>
               </a:rPr>
-              <a:t>  "SDLC-Approval: basic-arithmetic:review:3</a:t>
+              <a:t>  "SDLC-Approval: basic-arithmetic:review:e</a:t>
             </a:r>
             <a:endParaRPr lang="en-US" sz="1000" dirty="0"/>
           </a:p>
@@ -6779,7 +6779,7 @@
                 <a:ea typeface="Courier New" pitchFamily="34" charset="-122"/>
                 <a:cs typeface="Courier New" pitchFamily="34" charset="-120"/>
               </a:rPr>
-              <a:t>  f51023be410"</a:t>
+              <a:t>  6ae90721f15"</a:t>
             </a:r>
             <a:endParaRPr lang="en-US" sz="1000" dirty="0"/>
           </a:p>
@@ -7460,7 +7460,7 @@
                 <a:ea typeface="Courier New" pitchFamily="34" charset="-122"/>
                 <a:cs typeface="Courier New" pitchFamily="34" charset="-120"/>
               </a:rPr>
-              <a:t>  release-manager (3f51023be410)</a:t>
+              <a:t>  release-manager (e6ae90721f15)</a:t>
             </a:r>
             <a:endParaRPr lang="en-US" sz="1000" dirty="0"/>
           </a:p>
@@ -7528,7 +7528,7 @@
                 <a:ea typeface="Courier New" pitchFamily="34" charset="-122"/>
                 <a:cs typeface="Courier New" pitchFamily="34" charset="-120"/>
               </a:rPr>
-              <a:t>  gate" -m "SDLC-Approval: basic-arithmetic:release:3f51023be410"</a:t>
+              <a:t>  gate" -m "SDLC-Approval: basic-arithmetic:release:e6ae90721f15"</a:t>
             </a:r>
             <a:endParaRPr lang="en-US" sz="1000" dirty="0"/>
           </a:p>
@@ -7811,7 +7811,7 @@
                 <a:ea typeface="Courier New" pitchFamily="34" charset="-122"/>
                 <a:cs typeface="Courier New" pitchFamily="34" charset="-120"/>
               </a:rPr>
-              <a:t>✓ basic-arithmetic/intent alice valid 2cb8d332 trailer: missing</a:t>
+              <a:t>✓ basic-arithmetic/intent alice valid 718a76ed trailer: missing</a:t>
             </a:r>
             <a:endParaRPr lang="en-US" sz="1000" dirty="0"/>
           </a:p>
@@ -7828,7 +7828,7 @@
                 <a:ea typeface="Courier New" pitchFamily="34" charset="-122"/>
                 <a:cs typeface="Courier New" pitchFamily="34" charset="-120"/>
               </a:rPr>
-              <a:t>✓ basic-arithmetic/spec alice valid 2026497f trailer: missing</a:t>
+              <a:t>✓ basic-arithmetic/spec alice valid 07d07c3d trailer: missing</a:t>
             </a:r>
             <a:endParaRPr lang="en-US" sz="1000" dirty="0"/>
           </a:p>
@@ -7845,7 +7845,7 @@
                 <a:ea typeface="Courier New" pitchFamily="34" charset="-122"/>
                 <a:cs typeface="Courier New" pitchFamily="34" charset="-120"/>
               </a:rPr>
-              <a:t>✗ basic-arithmetic/plan bob wrong-signer 2026497f trailer: missing</a:t>
+              <a:t>✗ basic-arithmetic/plan bob wrong-signer 07d07c3d trailer: missing</a:t>
             </a:r>
             <a:endParaRPr lang="en-US" sz="1000" dirty="0"/>
           </a:p>
@@ -7862,7 +7862,7 @@
                 <a:ea typeface="Courier New" pitchFamily="34" charset="-122"/>
                 <a:cs typeface="Courier New" pitchFamily="34" charset="-120"/>
               </a:rPr>
-              <a:t>✓ basic-arithmetic/review carol valid 88b9c180 trailer: missing</a:t>
+              <a:t>✓ basic-arithmetic/review carol valid 206d8b9e trailer: missing</a:t>
             </a:r>
             <a:endParaRPr lang="en-US" sz="1000" dirty="0"/>
           </a:p>
@@ -7879,7 +7879,7 @@
                 <a:ea typeface="Courier New" pitchFamily="34" charset="-122"/>
                 <a:cs typeface="Courier New" pitchFamily="34" charset="-120"/>
               </a:rPr>
-              <a:t>✓ basic-arithmetic/release alice valid 33fa2d0e trailer: missing</a:t>
+              <a:t>✓ basic-arithmetic/release alice valid 0ef43b5c trailer: missing</a:t>
             </a:r>
             <a:endParaRPr lang="en-US" sz="1000" dirty="0"/>
           </a:p>
@@ -7896,7 +7896,7 @@
                 <a:ea typeface="Courier New" pitchFamily="34" charset="-122"/>
                 <a:cs typeface="Courier New" pitchFamily="34" charset="-120"/>
               </a:rPr>
-              <a:t>✓ openspec/roles.yaml alice@calc.example bootstrap 05189252</a:t>
+              <a:t>✓ openspec/roles.yaml alice@calc.example bootstrap c3169312</a:t>
             </a:r>
             <a:endParaRPr lang="en-US" sz="1000" dirty="0"/>
           </a:p>
@@ -14382,7 +14382,7 @@
                 <a:ea typeface="Courier New" pitchFamily="34" charset="-122"/>
                 <a:cs typeface="Courier New" pitchFamily="34" charset="-120"/>
               </a:rPr>
-              <a:t>  archived) · sdlc 0.22.4, license:</a:t>
+              <a:t>  archived) · sdlc 0.23.0, license:</a:t>
             </a:r>
             <a:endParaRPr lang="en-US" sz="1000" dirty="0"/>
           </a:p>
@@ -14552,7 +14552,7 @@
                 <a:ea typeface="Courier New" pitchFamily="34" charset="-122"/>
                 <a:cs typeface="Courier New" pitchFamily="34" charset="-120"/>
               </a:rPr>
-              <a:t>  agent log events: 31 of 61</a:t>
+              <a:t>  agent log events: 33 of 65</a:t>
             </a:r>
             <a:endParaRPr lang="en-US" sz="1000" dirty="0"/>
           </a:p>
@@ -14586,7 +14586,7 @@
                 <a:ea typeface="Courier New" pitchFamily="34" charset="-122"/>
                 <a:cs typeface="Courier New" pitchFamily="34" charset="-120"/>
               </a:rPr>
-              <a:t>  intent 3 · spec 4 · plan 16 · review 3;</a:t>
+              <a:t>  intent 3 · spec 4 · plan 17 · review 3;</a:t>
             </a:r>
             <a:endParaRPr lang="en-US" sz="1000" dirty="0"/>
           </a:p>
@@ -14869,7 +14869,7 @@
                 <a:ea typeface="Courier New" pitchFamily="34" charset="-122"/>
                 <a:cs typeface="Courier New" pitchFamily="34" charset="-120"/>
               </a:rPr>
-              <a:t>(last 15 of 61 entries; --limit to see</a:t>
+              <a:t>(last 15 of 65 entries; --limit to see</a:t>
             </a:r>
             <a:endParaRPr lang="en-US" sz="1000" dirty="0"/>
           </a:p>
@@ -14903,7 +14903,7 @@
                 <a:ea typeface="Courier New" pitchFamily="34" charset="-122"/>
                 <a:cs typeface="Courier New" pitchFamily="34" charset="-120"/>
               </a:rPr>
-              <a:t>2026-10-17T07:50:34.581Z  gate.review.await</a:t>
+              <a:t>2026-10-17T12:05:52.719Z  gate.review.await</a:t>
             </a:r>
             <a:endParaRPr lang="en-US" sz="1000" dirty="0"/>
           </a:p>
@@ -14937,7 +14937,7 @@
                 <a:ea typeface="Courier New" pitchFamily="34" charset="-122"/>
                 <a:cs typeface="Courier New" pitchFamily="34" charset="-120"/>
               </a:rPr>
-              <a:t>  sha256:3f51023be410c73488a732b3e04c954571</a:t>
+              <a:t>  sha256:e6ae90721f1568fc9534a6ac07557f1f70</a:t>
             </a:r>
             <a:endParaRPr lang="en-US" sz="1000" dirty="0"/>
           </a:p>
@@ -14954,7 +14954,7 @@
                 <a:ea typeface="Courier New" pitchFamily="34" charset="-122"/>
                 <a:cs typeface="Courier New" pitchFamily="34" charset="-120"/>
               </a:rPr>
-              <a:t>  701e4a1a7eced8a2873305cb36a9df [sdlc</a:t>
+              <a:t>  25fa920d7654a7a7356febf480dede [sdlc</a:t>
             </a:r>
             <a:endParaRPr lang="en-US" sz="1000" dirty="0"/>
           </a:p>
@@ -14971,7 +14971,7 @@
                 <a:ea typeface="Courier New" pitchFamily="34" charset="-122"/>
                 <a:cs typeface="Courier New" pitchFamily="34" charset="-120"/>
               </a:rPr>
-              <a:t>  0.22.4 · community]</a:t>
+              <a:t>  0.23.0 · community]</a:t>
             </a:r>
             <a:endParaRPr lang="en-US" sz="1000" dirty="0"/>
           </a:p>
@@ -14988,7 +14988,7 @@
                 <a:ea typeface="Courier New" pitchFamily="34" charset="-122"/>
                 <a:cs typeface="Courier New" pitchFamily="34" charset="-120"/>
               </a:rPr>
-              <a:t>2026-10-17T07:50:37.614Z  gate.review.appro</a:t>
+              <a:t>2026-10-17T12:05:55.671Z  gate.review.appro</a:t>
             </a:r>
             <a:endParaRPr lang="en-US" sz="1000" dirty="0"/>
           </a:p>
@@ -15039,7 +15039,7 @@
                 <a:ea typeface="Courier New" pitchFamily="34" charset="-122"/>
                 <a:cs typeface="Courier New" pitchFamily="34" charset="-120"/>
               </a:rPr>
-              <a:t>  [sdlc 0.22.4 · community]</a:t>
+              <a:t>  [sdlc 0.23.0 · community]</a:t>
             </a:r>
             <a:endParaRPr lang="en-US" sz="1000" dirty="0"/>
           </a:p>
@@ -15056,7 +15056,7 @@
                 <a:ea typeface="Courier New" pitchFamily="34" charset="-122"/>
                 <a:cs typeface="Courier New" pitchFamily="34" charset="-120"/>
               </a:rPr>
-              <a:t>2026-10-17T07:50:43.926Z  gate.release.appr</a:t>
+              <a:t>2026-10-17T12:06:02.095Z  gate.release.appr</a:t>
             </a:r>
             <a:endParaRPr lang="en-US" sz="1000" dirty="0"/>
           </a:p>
@@ -15107,7 +15107,7 @@
                 <a:ea typeface="Courier New" pitchFamily="34" charset="-122"/>
                 <a:cs typeface="Courier New" pitchFamily="34" charset="-120"/>
               </a:rPr>
-              <a:t>  release-manager [sdlc 0.22.4 · community]</a:t>
+              <a:t>  release-manager [sdlc 0.23.0 · community]</a:t>
             </a:r>
             <a:endParaRPr lang="en-US" sz="1000" dirty="0"/>
           </a:p>
@@ -16452,7 +16452,7 @@
                 <a:ea typeface="Courier New" pitchFamily="34" charset="-122"/>
                 <a:cs typeface="Courier New" pitchFamily="34" charset="-120"/>
               </a:rPr>
-              <a:t>✓ ci-green (ci/pipeline_status, 0.5s)</a:t>
+              <a:t>✓ ci-green (ci/pipeline_status, 0.7s)</a:t>
             </a:r>
             <a:endParaRPr lang="en-US" sz="1000" dirty="0"/>
           </a:p>
@@ -16888,7 +16888,7 @@
                 <a:ea typeface="Courier New" pitchFamily="34" charset="-122"/>
                 <a:cs typeface="Courier New" pitchFamily="34" charset="-120"/>
               </a:rPr>
-              <a:t>      "id": "20261017T075139262Z-ci-green-a</a:t>
+              <a:t>      "id": "20261017T120700861Z-ci-green-8</a:t>
             </a:r>
             <a:endParaRPr lang="en-US" sz="1000" dirty="0"/>
           </a:p>
@@ -16905,7 +16905,7 @@
                 <a:ea typeface="Courier New" pitchFamily="34" charset="-122"/>
                 <a:cs typeface="Courier New" pitchFamily="34" charset="-120"/>
               </a:rPr>
-              <a:t>  1cde1",</a:t>
+              <a:t>  6278b",</a:t>
             </a:r>
             <a:endParaRPr lang="en-US" sz="1000" dirty="0"/>
           </a:p>
@@ -17041,7 +17041,7 @@
                 <a:ea typeface="Courier New" pitchFamily="34" charset="-122"/>
                 <a:cs typeface="Courier New" pitchFamily="34" charset="-120"/>
               </a:rPr>
-              <a:t>        "ref": "700eaf8edbe2437631b97746f0a</a:t>
+              <a:t>        "ref": "a8d15a6aac9869e504b3773bc7e</a:t>
             </a:r>
             <a:endParaRPr lang="en-US" sz="1000" dirty="0"/>
           </a:p>
@@ -17058,7 +17058,7 @@
                 <a:ea typeface="Courier New" pitchFamily="34" charset="-122"/>
                 <a:cs typeface="Courier New" pitchFamily="34" charset="-120"/>
               </a:rPr>
-              <a:t>  d4bfe417c78ed",</a:t>
+              <a:t>  9ad692d73c039",</a:t>
             </a:r>
             <a:endParaRPr lang="en-US" sz="1000" dirty="0"/>
           </a:p>
@@ -19632,7 +19632,7 @@
                 <a:ea typeface="Cambria" pitchFamily="34" charset="-122"/>
                 <a:cs typeface="Cambria" pitchFamily="34" charset="-120"/>
               </a:rPr>
-              <a:t>131</a:t>
+              <a:t>136</a:t>
             </a:r>
             <a:endParaRPr lang="en-US" sz="6000" dirty="0"/>
           </a:p>
@@ -19737,7 +19737,7 @@
                 <a:ea typeface="Cambria" pitchFamily="34" charset="-122"/>
                 <a:cs typeface="Cambria" pitchFamily="34" charset="-120"/>
               </a:rPr>
-              <a:t>92</a:t>
+              <a:t>96</a:t>
             </a:r>
             <a:endParaRPr lang="en-US" sz="6000" dirty="0"/>
           </a:p>
@@ -19776,7 +19776,7 @@
                 <a:ea typeface="Calibri" pitchFamily="34" charset="-122"/>
                 <a:cs typeface="Calibri" pitchFamily="34" charset="-120"/>
               </a:rPr>
-              <a:t>of 92 commands</a:t>
+              <a:t>of 96 commands</a:t>
             </a:r>
             <a:endParaRPr lang="en-US" sz="1600" dirty="0"/>
           </a:p>
@@ -20067,7 +20067,7 @@
         <p:spPr>
           <a:xfrm>
             <a:off x="1098296" y="3749040"/>
-            <a:ext cx="945896" cy="256032"/>
+            <a:ext cx="1144016" cy="256032"/>
           </a:xfrm>
           <a:prstGeom prst="roundRect">
             <a:avLst>
@@ -20094,7 +20094,7 @@
         <p:spPr>
           <a:xfrm>
             <a:off x="1098296" y="3749040"/>
-            <a:ext cx="945896" cy="256032"/>
+            <a:ext cx="1144016" cy="256032"/>
           </a:xfrm>
           <a:prstGeom prst="rect">
             <a:avLst/>
@@ -20118,7 +20118,7 @@
                 <a:ea typeface="Calibri" pitchFamily="34" charset="-122"/>
                 <a:cs typeface="Calibri" pitchFamily="34" charset="-120"/>
               </a:rPr>
-              <a:t>roles check</a:t>
+              <a:t>config propose</a:t>
             </a:r>
             <a:endParaRPr lang="en-US" sz="1000" dirty="0"/>
           </a:p>
@@ -20132,8 +20132,8 @@
         </p:nvSpPr>
         <p:spPr>
           <a:xfrm>
-            <a:off x="2135632" y="3749040"/>
-            <a:ext cx="813816" cy="256032"/>
+            <a:off x="2333752" y="3749040"/>
+            <a:ext cx="945896" cy="256032"/>
           </a:xfrm>
           <a:prstGeom prst="roundRect">
             <a:avLst>
@@ -20159,8 +20159,8 @@
         </p:nvSpPr>
         <p:spPr>
           <a:xfrm>
-            <a:off x="2135632" y="3749040"/>
-            <a:ext cx="813816" cy="256032"/>
+            <a:off x="2333752" y="3749040"/>
+            <a:ext cx="945896" cy="256032"/>
           </a:xfrm>
           <a:prstGeom prst="rect">
             <a:avLst/>
@@ -20184,7 +20184,7 @@
                 <a:ea typeface="Calibri" pitchFamily="34" charset="-122"/>
                 <a:cs typeface="Calibri" pitchFamily="34" charset="-120"/>
               </a:rPr>
-              <a:t>roles who</a:t>
+              <a:t>config show</a:t>
             </a:r>
             <a:endParaRPr lang="en-US" sz="1000" dirty="0"/>
           </a:p>
@@ -20198,8 +20198,8 @@
         </p:nvSpPr>
         <p:spPr>
           <a:xfrm>
-            <a:off x="3040888" y="3749040"/>
-            <a:ext cx="1077976" cy="256032"/>
+            <a:off x="3371088" y="3749040"/>
+            <a:ext cx="1011936" cy="256032"/>
           </a:xfrm>
           <a:prstGeom prst="roundRect">
             <a:avLst>
@@ -20225,8 +20225,8 @@
         </p:nvSpPr>
         <p:spPr>
           <a:xfrm>
-            <a:off x="3040888" y="3749040"/>
-            <a:ext cx="1077976" cy="256032"/>
+            <a:off x="3371088" y="3749040"/>
+            <a:ext cx="1011936" cy="256032"/>
           </a:xfrm>
           <a:prstGeom prst="rect">
             <a:avLst/>
@@ -20250,7 +20250,7 @@
                 <a:ea typeface="Calibri" pitchFamily="34" charset="-122"/>
                 <a:cs typeface="Calibri" pitchFamily="34" charset="-120"/>
               </a:rPr>
-              <a:t>roles migrate</a:t>
+              <a:t>config apply</a:t>
             </a:r>
             <a:endParaRPr lang="en-US" sz="1000" dirty="0"/>
           </a:p>
@@ -20264,8 +20264,8 @@
         </p:nvSpPr>
         <p:spPr>
           <a:xfrm>
-            <a:off x="4210304" y="3749040"/>
-            <a:ext cx="681736" cy="256032"/>
+            <a:off x="4474464" y="3749040"/>
+            <a:ext cx="1144016" cy="256032"/>
           </a:xfrm>
           <a:prstGeom prst="roundRect">
             <a:avLst>
@@ -20291,8 +20291,8 @@
         </p:nvSpPr>
         <p:spPr>
           <a:xfrm>
-            <a:off x="4210304" y="3749040"/>
-            <a:ext cx="681736" cy="256032"/>
+            <a:off x="4474464" y="3749040"/>
+            <a:ext cx="1144016" cy="256032"/>
           </a:xfrm>
           <a:prstGeom prst="rect">
             <a:avLst/>
@@ -20316,7 +20316,7 @@
                 <a:ea typeface="Calibri" pitchFamily="34" charset="-122"/>
                 <a:cs typeface="Calibri" pitchFamily="34" charset="-120"/>
               </a:rPr>
-              <a:t>ci init</a:t>
+              <a:t>config dismiss</a:t>
             </a:r>
             <a:endParaRPr lang="en-US" sz="1000" dirty="0"/>
           </a:p>
@@ -20330,8 +20330,8 @@
         </p:nvSpPr>
         <p:spPr>
           <a:xfrm>
-            <a:off x="4983480" y="3749040"/>
-            <a:ext cx="813816" cy="256032"/>
+            <a:off x="5709920" y="3749040"/>
+            <a:ext cx="945896" cy="256032"/>
           </a:xfrm>
           <a:prstGeom prst="roundRect">
             <a:avLst>
@@ -20357,8 +20357,8 @@
         </p:nvSpPr>
         <p:spPr>
           <a:xfrm>
-            <a:off x="4983480" y="3749040"/>
-            <a:ext cx="813816" cy="256032"/>
+            <a:off x="5709920" y="3749040"/>
+            <a:ext cx="945896" cy="256032"/>
           </a:xfrm>
           <a:prstGeom prst="rect">
             <a:avLst/>
@@ -20382,7 +20382,7 @@
                 <a:ea typeface="Calibri" pitchFamily="34" charset="-122"/>
                 <a:cs typeface="Calibri" pitchFamily="34" charset="-120"/>
               </a:rPr>
-              <a:t>team sync</a:t>
+              <a:t>roles check</a:t>
             </a:r>
             <a:endParaRPr lang="en-US" sz="1000" dirty="0"/>
           </a:p>
@@ -20396,8 +20396,8 @@
         </p:nvSpPr>
         <p:spPr>
           <a:xfrm>
-            <a:off x="5888736" y="3749040"/>
-            <a:ext cx="945896" cy="256032"/>
+            <a:off x="6747256" y="3749040"/>
+            <a:ext cx="813816" cy="256032"/>
           </a:xfrm>
           <a:prstGeom prst="roundRect">
             <a:avLst>
@@ -20423,8 +20423,8 @@
         </p:nvSpPr>
         <p:spPr>
           <a:xfrm>
-            <a:off x="5888736" y="3749040"/>
-            <a:ext cx="945896" cy="256032"/>
+            <a:off x="6747256" y="3749040"/>
+            <a:ext cx="813816" cy="256032"/>
           </a:xfrm>
           <a:prstGeom prst="rect">
             <a:avLst/>
@@ -20448,7 +20448,7 @@
                 <a:ea typeface="Calibri" pitchFamily="34" charset="-122"/>
                 <a:cs typeface="Calibri" pitchFamily="34" charset="-120"/>
               </a:rPr>
-              <a:t>team accept</a:t>
+              <a:t>roles who</a:t>
             </a:r>
             <a:endParaRPr lang="en-US" sz="1000" dirty="0"/>
           </a:p>
@@ -20462,8 +20462,8 @@
         </p:nvSpPr>
         <p:spPr>
           <a:xfrm>
-            <a:off x="6926072" y="3749040"/>
-            <a:ext cx="813816" cy="256032"/>
+            <a:off x="7652512" y="3749040"/>
+            <a:ext cx="1077976" cy="256032"/>
           </a:xfrm>
           <a:prstGeom prst="roundRect">
             <a:avLst>
@@ -20489,8 +20489,8 @@
         </p:nvSpPr>
         <p:spPr>
           <a:xfrm>
-            <a:off x="6926072" y="3749040"/>
-            <a:ext cx="813816" cy="256032"/>
+            <a:off x="7652512" y="3749040"/>
+            <a:ext cx="1077976" cy="256032"/>
           </a:xfrm>
           <a:prstGeom prst="rect">
             <a:avLst/>
@@ -20514,7 +20514,7 @@
                 <a:ea typeface="Calibri" pitchFamily="34" charset="-122"/>
                 <a:cs typeface="Calibri" pitchFamily="34" charset="-120"/>
               </a:rPr>
-              <a:t>team list</a:t>
+              <a:t>roles migrate</a:t>
             </a:r>
             <a:endParaRPr lang="en-US" sz="1000" dirty="0"/>
           </a:p>
@@ -20528,8 +20528,8 @@
         </p:nvSpPr>
         <p:spPr>
           <a:xfrm>
-            <a:off x="7831328" y="3749040"/>
-            <a:ext cx="879856" cy="256032"/>
+            <a:off x="8821928" y="3749040"/>
+            <a:ext cx="681736" cy="256032"/>
           </a:xfrm>
           <a:prstGeom prst="roundRect">
             <a:avLst>
@@ -20555,8 +20555,8 @@
         </p:nvSpPr>
         <p:spPr>
           <a:xfrm>
-            <a:off x="7831328" y="3749040"/>
-            <a:ext cx="879856" cy="256032"/>
+            <a:off x="8821928" y="3749040"/>
+            <a:ext cx="681736" cy="256032"/>
           </a:xfrm>
           <a:prstGeom prst="rect">
             <a:avLst/>
@@ -20580,7 +20580,7 @@
                 <a:ea typeface="Calibri" pitchFamily="34" charset="-122"/>
                 <a:cs typeface="Calibri" pitchFamily="34" charset="-120"/>
               </a:rPr>
-              <a:t>team check</a:t>
+              <a:t>ci init</a:t>
             </a:r>
             <a:endParaRPr lang="en-US" sz="1000" dirty="0"/>
           </a:p>
@@ -20594,8 +20594,8 @@
         </p:nvSpPr>
         <p:spPr>
           <a:xfrm>
-            <a:off x="8802624" y="3749040"/>
-            <a:ext cx="1276096" cy="256032"/>
+            <a:off x="9595104" y="3749040"/>
+            <a:ext cx="813816" cy="256032"/>
           </a:xfrm>
           <a:prstGeom prst="roundRect">
             <a:avLst>
@@ -20621,8 +20621,8 @@
         </p:nvSpPr>
         <p:spPr>
           <a:xfrm>
-            <a:off x="8802624" y="3749040"/>
-            <a:ext cx="1276096" cy="256032"/>
+            <a:off x="9595104" y="3749040"/>
+            <a:ext cx="813816" cy="256032"/>
           </a:xfrm>
           <a:prstGeom prst="rect">
             <a:avLst/>
@@ -20646,7 +20646,7 @@
                 <a:ea typeface="Calibri" pitchFamily="34" charset="-122"/>
                 <a:cs typeface="Calibri" pitchFamily="34" charset="-120"/>
               </a:rPr>
-              <a:t>backlog epic add</a:t>
+              <a:t>team sync</a:t>
             </a:r>
             <a:endParaRPr lang="en-US" sz="1000" dirty="0"/>
           </a:p>
@@ -20660,8 +20660,8 @@
         </p:nvSpPr>
         <p:spPr>
           <a:xfrm>
-            <a:off x="10170160" y="3749040"/>
-            <a:ext cx="1342136" cy="256032"/>
+            <a:off x="10500360" y="3749040"/>
+            <a:ext cx="945896" cy="256032"/>
           </a:xfrm>
           <a:prstGeom prst="roundRect">
             <a:avLst>
@@ -20687,8 +20687,8 @@
         </p:nvSpPr>
         <p:spPr>
           <a:xfrm>
-            <a:off x="10170160" y="3749040"/>
-            <a:ext cx="1342136" cy="256032"/>
+            <a:off x="10500360" y="3749040"/>
+            <a:ext cx="945896" cy="256032"/>
           </a:xfrm>
           <a:prstGeom prst="rect">
             <a:avLst/>
@@ -20712,7 +20712,7 @@
                 <a:ea typeface="Calibri" pitchFamily="34" charset="-122"/>
                 <a:cs typeface="Calibri" pitchFamily="34" charset="-120"/>
               </a:rPr>
-              <a:t>backlog epic edit</a:t>
+              <a:t>team accept</a:t>
             </a:r>
             <a:endParaRPr lang="en-US" sz="1000" dirty="0"/>
           </a:p>
@@ -20727,7 +20727,7 @@
         <p:spPr>
           <a:xfrm>
             <a:off x="457200" y="4096512"/>
-            <a:ext cx="945896" cy="256032"/>
+            <a:ext cx="813816" cy="256032"/>
           </a:xfrm>
           <a:prstGeom prst="roundRect">
             <a:avLst>
@@ -20754,7 +20754,7 @@
         <p:spPr>
           <a:xfrm>
             <a:off x="457200" y="4096512"/>
-            <a:ext cx="945896" cy="256032"/>
+            <a:ext cx="813816" cy="256032"/>
           </a:xfrm>
           <a:prstGeom prst="rect">
             <a:avLst/>
@@ -20778,7 +20778,7 @@
                 <a:ea typeface="Calibri" pitchFamily="34" charset="-122"/>
                 <a:cs typeface="Calibri" pitchFamily="34" charset="-120"/>
               </a:rPr>
-              <a:t>backlog add</a:t>
+              <a:t>team list</a:t>
             </a:r>
             <a:endParaRPr lang="en-US" sz="1000" dirty="0"/>
           </a:p>
@@ -20792,8 +20792,8 @@
         </p:nvSpPr>
         <p:spPr>
           <a:xfrm>
-            <a:off x="1494536" y="4096512"/>
-            <a:ext cx="1011936" cy="256032"/>
+            <a:off x="1362456" y="4096512"/>
+            <a:ext cx="879856" cy="256032"/>
           </a:xfrm>
           <a:prstGeom prst="roundRect">
             <a:avLst>
@@ -20819,8 +20819,8 @@
         </p:nvSpPr>
         <p:spPr>
           <a:xfrm>
-            <a:off x="1494536" y="4096512"/>
-            <a:ext cx="1011936" cy="256032"/>
+            <a:off x="1362456" y="4096512"/>
+            <a:ext cx="879856" cy="256032"/>
           </a:xfrm>
           <a:prstGeom prst="rect">
             <a:avLst/>
@@ -20844,7 +20844,7 @@
                 <a:ea typeface="Calibri" pitchFamily="34" charset="-122"/>
                 <a:cs typeface="Calibri" pitchFamily="34" charset="-120"/>
               </a:rPr>
-              <a:t>backlog edit</a:t>
+              <a:t>team check</a:t>
             </a:r>
             <a:endParaRPr lang="en-US" sz="1000" dirty="0"/>
           </a:p>
@@ -20858,8 +20858,8 @@
         </p:nvSpPr>
         <p:spPr>
           <a:xfrm>
-            <a:off x="2597912" y="4096512"/>
-            <a:ext cx="1011936" cy="256032"/>
+            <a:off x="2333752" y="4096512"/>
+            <a:ext cx="1276096" cy="256032"/>
           </a:xfrm>
           <a:prstGeom prst="roundRect">
             <a:avLst>
@@ -20885,8 +20885,8 @@
         </p:nvSpPr>
         <p:spPr>
           <a:xfrm>
-            <a:off x="2597912" y="4096512"/>
-            <a:ext cx="1011936" cy="256032"/>
+            <a:off x="2333752" y="4096512"/>
+            <a:ext cx="1276096" cy="256032"/>
           </a:xfrm>
           <a:prstGeom prst="rect">
             <a:avLst/>
@@ -20910,7 +20910,7 @@
                 <a:ea typeface="Calibri" pitchFamily="34" charset="-122"/>
                 <a:cs typeface="Calibri" pitchFamily="34" charset="-120"/>
               </a:rPr>
-              <a:t>backlog list</a:t>
+              <a:t>backlog epic add</a:t>
             </a:r>
             <a:endParaRPr lang="en-US" sz="1000" dirty="0"/>
           </a:p>
@@ -20925,7 +20925,7 @@
         <p:spPr>
           <a:xfrm>
             <a:off x="3701288" y="4096512"/>
-            <a:ext cx="1011936" cy="256032"/>
+            <a:ext cx="1342136" cy="256032"/>
           </a:xfrm>
           <a:prstGeom prst="roundRect">
             <a:avLst>
@@ -20952,7 +20952,7 @@
         <p:spPr>
           <a:xfrm>
             <a:off x="3701288" y="4096512"/>
-            <a:ext cx="1011936" cy="256032"/>
+            <a:ext cx="1342136" cy="256032"/>
           </a:xfrm>
           <a:prstGeom prst="rect">
             <a:avLst/>
@@ -20976,7 +20976,7 @@
                 <a:ea typeface="Calibri" pitchFamily="34" charset="-122"/>
                 <a:cs typeface="Calibri" pitchFamily="34" charset="-120"/>
               </a:rPr>
-              <a:t>backlog next</a:t>
+              <a:t>backlog epic edit</a:t>
             </a:r>
             <a:endParaRPr lang="en-US" sz="1000" dirty="0"/>
           </a:p>
@@ -20990,8 +20990,8 @@
         </p:nvSpPr>
         <p:spPr>
           <a:xfrm>
-            <a:off x="4804664" y="4096512"/>
-            <a:ext cx="1077976" cy="256032"/>
+            <a:off x="5134864" y="4096512"/>
+            <a:ext cx="945896" cy="256032"/>
           </a:xfrm>
           <a:prstGeom prst="roundRect">
             <a:avLst>
@@ -21017,8 +21017,8 @@
         </p:nvSpPr>
         <p:spPr>
           <a:xfrm>
-            <a:off x="4804664" y="4096512"/>
-            <a:ext cx="1077976" cy="256032"/>
+            <a:off x="5134864" y="4096512"/>
+            <a:ext cx="945896" cy="256032"/>
           </a:xfrm>
           <a:prstGeom prst="rect">
             <a:avLst/>
@@ -21042,7 +21042,7 @@
                 <a:ea typeface="Calibri" pitchFamily="34" charset="-122"/>
                 <a:cs typeface="Calibri" pitchFamily="34" charset="-120"/>
               </a:rPr>
-              <a:t>backlog start</a:t>
+              <a:t>backlog add</a:t>
             </a:r>
             <a:endParaRPr lang="en-US" sz="1000" dirty="0"/>
           </a:p>
@@ -21056,7 +21056,7 @@
         </p:nvSpPr>
         <p:spPr>
           <a:xfrm>
-            <a:off x="5974080" y="4096512"/>
+            <a:off x="6172200" y="4096512"/>
             <a:ext cx="1011936" cy="256032"/>
           </a:xfrm>
           <a:prstGeom prst="roundRect">
@@ -21083,7 +21083,7 @@
         </p:nvSpPr>
         <p:spPr>
           <a:xfrm>
-            <a:off x="5974080" y="4096512"/>
+            <a:off x="6172200" y="4096512"/>
             <a:ext cx="1011936" cy="256032"/>
           </a:xfrm>
           <a:prstGeom prst="rect">
@@ -21108,7 +21108,7 @@
                 <a:ea typeface="Calibri" pitchFamily="34" charset="-122"/>
                 <a:cs typeface="Calibri" pitchFamily="34" charset="-120"/>
               </a:rPr>
-              <a:t>backlog link</a:t>
+              <a:t>backlog edit</a:t>
             </a:r>
             <a:endParaRPr lang="en-US" sz="1000" dirty="0"/>
           </a:p>
@@ -21122,7 +21122,7 @@
         </p:nvSpPr>
         <p:spPr>
           <a:xfrm>
-            <a:off x="7077456" y="4096512"/>
+            <a:off x="7275576" y="4096512"/>
             <a:ext cx="1011936" cy="256032"/>
           </a:xfrm>
           <a:prstGeom prst="roundRect">
@@ -21149,7 +21149,7 @@
         </p:nvSpPr>
         <p:spPr>
           <a:xfrm>
-            <a:off x="7077456" y="4096512"/>
+            <a:off x="7275576" y="4096512"/>
             <a:ext cx="1011936" cy="256032"/>
           </a:xfrm>
           <a:prstGeom prst="rect">
@@ -21174,7 +21174,7 @@
                 <a:ea typeface="Calibri" pitchFamily="34" charset="-122"/>
                 <a:cs typeface="Calibri" pitchFamily="34" charset="-120"/>
               </a:rPr>
-              <a:t>backlog move</a:t>
+              <a:t>backlog list</a:t>
             </a:r>
             <a:endParaRPr lang="en-US" sz="1000" dirty="0"/>
           </a:p>
@@ -21188,7 +21188,7 @@
         </p:nvSpPr>
         <p:spPr>
           <a:xfrm>
-            <a:off x="8180832" y="4096512"/>
+            <a:off x="8378952" y="4096512"/>
             <a:ext cx="1011936" cy="256032"/>
           </a:xfrm>
           <a:prstGeom prst="roundRect">
@@ -21215,7 +21215,7 @@
         </p:nvSpPr>
         <p:spPr>
           <a:xfrm>
-            <a:off x="8180832" y="4096512"/>
+            <a:off x="8378952" y="4096512"/>
             <a:ext cx="1011936" cy="256032"/>
           </a:xfrm>
           <a:prstGeom prst="rect">
@@ -21240,7 +21240,7 @@
                 <a:ea typeface="Calibri" pitchFamily="34" charset="-122"/>
                 <a:cs typeface="Calibri" pitchFamily="34" charset="-120"/>
               </a:rPr>
-              <a:t>backlog drop</a:t>
+              <a:t>backlog next</a:t>
             </a:r>
             <a:endParaRPr lang="en-US" sz="1000" dirty="0"/>
           </a:p>
@@ -21254,8 +21254,8 @@
         </p:nvSpPr>
         <p:spPr>
           <a:xfrm>
-            <a:off x="9284208" y="4096512"/>
-            <a:ext cx="1011936" cy="256032"/>
+            <a:off x="9482328" y="4096512"/>
+            <a:ext cx="1077976" cy="256032"/>
           </a:xfrm>
           <a:prstGeom prst="roundRect">
             <a:avLst>
@@ -21281,8 +21281,8 @@
         </p:nvSpPr>
         <p:spPr>
           <a:xfrm>
-            <a:off x="9284208" y="4096512"/>
-            <a:ext cx="1011936" cy="256032"/>
+            <a:off x="9482328" y="4096512"/>
+            <a:ext cx="1077976" cy="256032"/>
           </a:xfrm>
           <a:prstGeom prst="rect">
             <a:avLst/>
@@ -21306,7 +21306,7 @@
                 <a:ea typeface="Calibri" pitchFamily="34" charset="-122"/>
                 <a:cs typeface="Calibri" pitchFamily="34" charset="-120"/>
               </a:rPr>
-              <a:t>backlog done</a:t>
+              <a:t>backlog start</a:t>
             </a:r>
             <a:endParaRPr lang="en-US" sz="1000" dirty="0"/>
           </a:p>
@@ -21320,8 +21320,8 @@
         </p:nvSpPr>
         <p:spPr>
           <a:xfrm>
-            <a:off x="10387584" y="4096512"/>
-            <a:ext cx="1144016" cy="256032"/>
+            <a:off x="10651744" y="4096512"/>
+            <a:ext cx="1011936" cy="256032"/>
           </a:xfrm>
           <a:prstGeom prst="roundRect">
             <a:avLst>
@@ -21347,8 +21347,8 @@
         </p:nvSpPr>
         <p:spPr>
           <a:xfrm>
-            <a:off x="10387584" y="4096512"/>
-            <a:ext cx="1144016" cy="256032"/>
+            <a:off x="10651744" y="4096512"/>
+            <a:ext cx="1011936" cy="256032"/>
           </a:xfrm>
           <a:prstGeom prst="rect">
             <a:avLst/>
@@ -21372,7 +21372,7 @@
                 <a:ea typeface="Calibri" pitchFamily="34" charset="-122"/>
                 <a:cs typeface="Calibri" pitchFamily="34" charset="-120"/>
               </a:rPr>
-              <a:t>backlog import</a:t>
+              <a:t>backlog link</a:t>
             </a:r>
             <a:endParaRPr lang="en-US" sz="1000" dirty="0"/>
           </a:p>
@@ -21387,7 +21387,7 @@
         <p:spPr>
           <a:xfrm>
             <a:off x="457200" y="4443984"/>
-            <a:ext cx="813816" cy="256032"/>
+            <a:ext cx="1011936" cy="256032"/>
           </a:xfrm>
           <a:prstGeom prst="roundRect">
             <a:avLst>
@@ -21414,7 +21414,7 @@
         <p:spPr>
           <a:xfrm>
             <a:off x="457200" y="4443984"/>
-            <a:ext cx="813816" cy="256032"/>
+            <a:ext cx="1011936" cy="256032"/>
           </a:xfrm>
           <a:prstGeom prst="rect">
             <a:avLst/>
@@ -21438,7 +21438,7 @@
                 <a:ea typeface="Calibri" pitchFamily="34" charset="-122"/>
                 <a:cs typeface="Calibri" pitchFamily="34" charset="-120"/>
               </a:rPr>
-              <a:t>defer add</a:t>
+              <a:t>backlog move</a:t>
             </a:r>
             <a:endParaRPr lang="en-US" sz="1000" dirty="0"/>
           </a:p>
@@ -21452,8 +21452,8 @@
         </p:nvSpPr>
         <p:spPr>
           <a:xfrm>
-            <a:off x="1362456" y="4443984"/>
-            <a:ext cx="879856" cy="256032"/>
+            <a:off x="1560576" y="4443984"/>
+            <a:ext cx="1011936" cy="256032"/>
           </a:xfrm>
           <a:prstGeom prst="roundRect">
             <a:avLst>
@@ -21479,8 +21479,8 @@
         </p:nvSpPr>
         <p:spPr>
           <a:xfrm>
-            <a:off x="1362456" y="4443984"/>
-            <a:ext cx="879856" cy="256032"/>
+            <a:off x="1560576" y="4443984"/>
+            <a:ext cx="1011936" cy="256032"/>
           </a:xfrm>
           <a:prstGeom prst="rect">
             <a:avLst/>
@@ -21504,7 +21504,7 @@
                 <a:ea typeface="Calibri" pitchFamily="34" charset="-122"/>
                 <a:cs typeface="Calibri" pitchFamily="34" charset="-120"/>
               </a:rPr>
-              <a:t>defer list</a:t>
+              <a:t>backlog drop</a:t>
             </a:r>
             <a:endParaRPr lang="en-US" sz="1000" dirty="0"/>
           </a:p>
@@ -21518,8 +21518,8 @@
         </p:nvSpPr>
         <p:spPr>
           <a:xfrm>
-            <a:off x="2333752" y="4443984"/>
-            <a:ext cx="945896" cy="256032"/>
+            <a:off x="2663952" y="4443984"/>
+            <a:ext cx="1011936" cy="256032"/>
           </a:xfrm>
           <a:prstGeom prst="roundRect">
             <a:avLst>
@@ -21545,8 +21545,8 @@
         </p:nvSpPr>
         <p:spPr>
           <a:xfrm>
-            <a:off x="2333752" y="4443984"/>
-            <a:ext cx="945896" cy="256032"/>
+            <a:off x="2663952" y="4443984"/>
+            <a:ext cx="1011936" cy="256032"/>
           </a:xfrm>
           <a:prstGeom prst="rect">
             <a:avLst/>
@@ -21570,7 +21570,7 @@
                 <a:ea typeface="Calibri" pitchFamily="34" charset="-122"/>
                 <a:cs typeface="Calibri" pitchFamily="34" charset="-120"/>
               </a:rPr>
-              <a:t>defer close</a:t>
+              <a:t>backlog done</a:t>
             </a:r>
             <a:endParaRPr lang="en-US" sz="1000" dirty="0"/>
           </a:p>
@@ -21584,8 +21584,8 @@
         </p:nvSpPr>
         <p:spPr>
           <a:xfrm>
-            <a:off x="3371088" y="4443984"/>
-            <a:ext cx="1011936" cy="256032"/>
+            <a:off x="3767328" y="4443984"/>
+            <a:ext cx="1144016" cy="256032"/>
           </a:xfrm>
           <a:prstGeom prst="roundRect">
             <a:avLst>
@@ -21611,8 +21611,8 @@
         </p:nvSpPr>
         <p:spPr>
           <a:xfrm>
-            <a:off x="3371088" y="4443984"/>
-            <a:ext cx="1011936" cy="256032"/>
+            <a:off x="3767328" y="4443984"/>
+            <a:ext cx="1144016" cy="256032"/>
           </a:xfrm>
           <a:prstGeom prst="rect">
             <a:avLst/>
@@ -21636,7 +21636,7 @@
                 <a:ea typeface="Calibri" pitchFamily="34" charset="-122"/>
                 <a:cs typeface="Calibri" pitchFamily="34" charset="-120"/>
               </a:rPr>
-              <a:t>layout check</a:t>
+              <a:t>backlog import</a:t>
             </a:r>
             <a:endParaRPr lang="en-US" sz="1000" dirty="0"/>
           </a:p>
@@ -21650,8 +21650,8 @@
         </p:nvSpPr>
         <p:spPr>
           <a:xfrm>
-            <a:off x="4474464" y="4443984"/>
-            <a:ext cx="1210056" cy="256032"/>
+            <a:off x="5002784" y="4443984"/>
+            <a:ext cx="813816" cy="256032"/>
           </a:xfrm>
           <a:prstGeom prst="roundRect">
             <a:avLst>
@@ -21677,8 +21677,8 @@
         </p:nvSpPr>
         <p:spPr>
           <a:xfrm>
-            <a:off x="4474464" y="4443984"/>
-            <a:ext cx="1210056" cy="256032"/>
+            <a:off x="5002784" y="4443984"/>
+            <a:ext cx="813816" cy="256032"/>
           </a:xfrm>
           <a:prstGeom prst="rect">
             <a:avLst/>
@@ -21702,7 +21702,7 @@
                 <a:ea typeface="Calibri" pitchFamily="34" charset="-122"/>
                 <a:cs typeface="Calibri" pitchFamily="34" charset="-120"/>
               </a:rPr>
-              <a:t>layout scaffold</a:t>
+              <a:t>defer add</a:t>
             </a:r>
             <a:endParaRPr lang="en-US" sz="1000" dirty="0"/>
           </a:p>
@@ -21716,8 +21716,8 @@
         </p:nvSpPr>
         <p:spPr>
           <a:xfrm>
-            <a:off x="5775960" y="4443984"/>
-            <a:ext cx="1011936" cy="256032"/>
+            <a:off x="5908040" y="4443984"/>
+            <a:ext cx="879856" cy="256032"/>
           </a:xfrm>
           <a:prstGeom prst="roundRect">
             <a:avLst>
@@ -21743,8 +21743,8 @@
         </p:nvSpPr>
         <p:spPr>
           <a:xfrm>
-            <a:off x="5775960" y="4443984"/>
-            <a:ext cx="1011936" cy="256032"/>
+            <a:off x="5908040" y="4443984"/>
+            <a:ext cx="879856" cy="256032"/>
           </a:xfrm>
           <a:prstGeom prst="rect">
             <a:avLst/>
@@ -21768,7 +21768,7 @@
                 <a:ea typeface="Calibri" pitchFamily="34" charset="-122"/>
                 <a:cs typeface="Calibri" pitchFamily="34" charset="-120"/>
               </a:rPr>
-              <a:t>layout adapt</a:t>
+              <a:t>defer list</a:t>
             </a:r>
             <a:endParaRPr lang="en-US" sz="1000" dirty="0"/>
           </a:p>
@@ -21783,7 +21783,7 @@
         <p:spPr>
           <a:xfrm>
             <a:off x="6879336" y="4443984"/>
-            <a:ext cx="1144016" cy="256032"/>
+            <a:ext cx="945896" cy="256032"/>
           </a:xfrm>
           <a:prstGeom prst="roundRect">
             <a:avLst>
@@ -21810,7 +21810,7 @@
         <p:spPr>
           <a:xfrm>
             <a:off x="6879336" y="4443984"/>
-            <a:ext cx="1144016" cy="256032"/>
+            <a:ext cx="945896" cy="256032"/>
           </a:xfrm>
           <a:prstGeom prst="rect">
             <a:avLst/>
@@ -21834,7 +21834,7 @@
                 <a:ea typeface="Calibri" pitchFamily="34" charset="-122"/>
                 <a:cs typeface="Calibri" pitchFamily="34" charset="-120"/>
               </a:rPr>
-              <a:t>layout convert</a:t>
+              <a:t>defer close</a:t>
             </a:r>
             <a:endParaRPr lang="en-US" sz="1000" dirty="0"/>
           </a:p>
@@ -21848,8 +21848,8 @@
         </p:nvSpPr>
         <p:spPr>
           <a:xfrm>
-            <a:off x="8114792" y="4443984"/>
-            <a:ext cx="483616" cy="256032"/>
+            <a:off x="7916672" y="4443984"/>
+            <a:ext cx="1011936" cy="256032"/>
           </a:xfrm>
           <a:prstGeom prst="roundRect">
             <a:avLst>
@@ -21875,8 +21875,8 @@
         </p:nvSpPr>
         <p:spPr>
           <a:xfrm>
-            <a:off x="8114792" y="4443984"/>
-            <a:ext cx="483616" cy="256032"/>
+            <a:off x="7916672" y="4443984"/>
+            <a:ext cx="1011936" cy="256032"/>
           </a:xfrm>
           <a:prstGeom prst="rect">
             <a:avLst/>
@@ -21900,7 +21900,7 @@
                 <a:ea typeface="Calibri" pitchFamily="34" charset="-122"/>
                 <a:cs typeface="Calibri" pitchFamily="34" charset="-120"/>
               </a:rPr>
-              <a:t>init</a:t>
+              <a:t>layout check</a:t>
             </a:r>
             <a:endParaRPr lang="en-US" sz="1000" dirty="0"/>
           </a:p>
@@ -21914,8 +21914,8 @@
         </p:nvSpPr>
         <p:spPr>
           <a:xfrm>
-            <a:off x="8689848" y="4443984"/>
-            <a:ext cx="615696" cy="256032"/>
+            <a:off x="9020048" y="4443984"/>
+            <a:ext cx="1210056" cy="256032"/>
           </a:xfrm>
           <a:prstGeom prst="roundRect">
             <a:avLst>
@@ -21941,8 +21941,8 @@
         </p:nvSpPr>
         <p:spPr>
           <a:xfrm>
-            <a:off x="8689848" y="4443984"/>
-            <a:ext cx="615696" cy="256032"/>
+            <a:off x="9020048" y="4443984"/>
+            <a:ext cx="1210056" cy="256032"/>
           </a:xfrm>
           <a:prstGeom prst="rect">
             <a:avLst/>
@@ -21966,7 +21966,7 @@
                 <a:ea typeface="Calibri" pitchFamily="34" charset="-122"/>
                 <a:cs typeface="Calibri" pitchFamily="34" charset="-120"/>
               </a:rPr>
-              <a:t>update</a:t>
+              <a:t>layout scaffold</a:t>
             </a:r>
             <a:endParaRPr lang="en-US" sz="1000" dirty="0"/>
           </a:p>
@@ -21980,8 +21980,8 @@
         </p:nvSpPr>
         <p:spPr>
           <a:xfrm>
-            <a:off x="9396984" y="4443984"/>
-            <a:ext cx="813816" cy="256032"/>
+            <a:off x="10321544" y="4443984"/>
+            <a:ext cx="1011936" cy="256032"/>
           </a:xfrm>
           <a:prstGeom prst="roundRect">
             <a:avLst>
@@ -22007,8 +22007,8 @@
         </p:nvSpPr>
         <p:spPr>
           <a:xfrm>
-            <a:off x="9396984" y="4443984"/>
-            <a:ext cx="813816" cy="256032"/>
+            <a:off x="10321544" y="4443984"/>
+            <a:ext cx="1011936" cy="256032"/>
           </a:xfrm>
           <a:prstGeom prst="rect">
             <a:avLst/>
@@ -22032,7 +22032,7 @@
                 <a:ea typeface="Calibri" pitchFamily="34" charset="-122"/>
                 <a:cs typeface="Calibri" pitchFamily="34" charset="-120"/>
               </a:rPr>
-              <a:t>uninstall</a:t>
+              <a:t>layout adapt</a:t>
             </a:r>
             <a:endParaRPr lang="en-US" sz="1000" dirty="0"/>
           </a:p>
@@ -22046,8 +22046,8 @@
         </p:nvSpPr>
         <p:spPr>
           <a:xfrm>
-            <a:off x="10302240" y="4443984"/>
-            <a:ext cx="417576" cy="256032"/>
+            <a:off x="457200" y="4791456"/>
+            <a:ext cx="1144016" cy="256032"/>
           </a:xfrm>
           <a:prstGeom prst="roundRect">
             <a:avLst>
@@ -22073,8 +22073,8 @@
         </p:nvSpPr>
         <p:spPr>
           <a:xfrm>
-            <a:off x="10302240" y="4443984"/>
-            <a:ext cx="417576" cy="256032"/>
+            <a:off x="457200" y="4791456"/>
+            <a:ext cx="1144016" cy="256032"/>
           </a:xfrm>
           <a:prstGeom prst="rect">
             <a:avLst/>
@@ -22098,7 +22098,7 @@
                 <a:ea typeface="Calibri" pitchFamily="34" charset="-122"/>
                 <a:cs typeface="Calibri" pitchFamily="34" charset="-120"/>
               </a:rPr>
-              <a:t>new</a:t>
+              <a:t>layout convert</a:t>
             </a:r>
             <a:endParaRPr lang="en-US" sz="1000" dirty="0"/>
           </a:p>
@@ -22112,8 +22112,8 @@
         </p:nvSpPr>
         <p:spPr>
           <a:xfrm>
-            <a:off x="457200" y="4791456"/>
-            <a:ext cx="1011936" cy="256032"/>
+            <a:off x="1692656" y="4791456"/>
+            <a:ext cx="483616" cy="256032"/>
           </a:xfrm>
           <a:prstGeom prst="roundRect">
             <a:avLst>
@@ -22139,8 +22139,8 @@
         </p:nvSpPr>
         <p:spPr>
           <a:xfrm>
-            <a:off x="457200" y="4791456"/>
-            <a:ext cx="1011936" cy="256032"/>
+            <a:off x="1692656" y="4791456"/>
+            <a:ext cx="483616" cy="256032"/>
           </a:xfrm>
           <a:prstGeom prst="rect">
             <a:avLst/>
@@ -22164,7 +22164,7 @@
                 <a:ea typeface="Calibri" pitchFamily="34" charset="-122"/>
                 <a:cs typeface="Calibri" pitchFamily="34" charset="-120"/>
               </a:rPr>
-              <a:t>explore list</a:t>
+              <a:t>init</a:t>
             </a:r>
             <a:endParaRPr lang="en-US" sz="1000" dirty="0"/>
           </a:p>
@@ -22178,8 +22178,8 @@
         </p:nvSpPr>
         <p:spPr>
           <a:xfrm>
-            <a:off x="1560576" y="4791456"/>
-            <a:ext cx="945896" cy="256032"/>
+            <a:off x="2267712" y="4791456"/>
+            <a:ext cx="615696" cy="256032"/>
           </a:xfrm>
           <a:prstGeom prst="roundRect">
             <a:avLst>
@@ -22205,8 +22205,8 @@
         </p:nvSpPr>
         <p:spPr>
           <a:xfrm>
-            <a:off x="1560576" y="4791456"/>
-            <a:ext cx="945896" cy="256032"/>
+            <a:off x="2267712" y="4791456"/>
+            <a:ext cx="615696" cy="256032"/>
           </a:xfrm>
           <a:prstGeom prst="rect">
             <a:avLst/>
@@ -22230,7 +22230,7 @@
                 <a:ea typeface="Calibri" pitchFamily="34" charset="-122"/>
                 <a:cs typeface="Calibri" pitchFamily="34" charset="-120"/>
               </a:rPr>
-              <a:t>import bmad</a:t>
+              <a:t>update</a:t>
             </a:r>
             <a:endParaRPr lang="en-US" sz="1000" dirty="0"/>
           </a:p>
@@ -22244,8 +22244,8 @@
         </p:nvSpPr>
         <p:spPr>
           <a:xfrm>
-            <a:off x="2597912" y="4791456"/>
-            <a:ext cx="615696" cy="256032"/>
+            <a:off x="2974848" y="4791456"/>
+            <a:ext cx="813816" cy="256032"/>
           </a:xfrm>
           <a:prstGeom prst="roundRect">
             <a:avLst>
@@ -22271,8 +22271,8 @@
         </p:nvSpPr>
         <p:spPr>
           <a:xfrm>
-            <a:off x="2597912" y="4791456"/>
-            <a:ext cx="615696" cy="256032"/>
+            <a:off x="2974848" y="4791456"/>
+            <a:ext cx="813816" cy="256032"/>
           </a:xfrm>
           <a:prstGeom prst="rect">
             <a:avLst/>
@@ -22296,7 +22296,7 @@
                 <a:ea typeface="Calibri" pitchFamily="34" charset="-122"/>
                 <a:cs typeface="Calibri" pitchFamily="34" charset="-120"/>
               </a:rPr>
-              <a:t>status</a:t>
+              <a:t>uninstall</a:t>
             </a:r>
             <a:endParaRPr lang="en-US" sz="1000" dirty="0"/>
           </a:p>
@@ -22310,8 +22310,8 @@
         </p:nvSpPr>
         <p:spPr>
           <a:xfrm>
-            <a:off x="3305048" y="4791456"/>
-            <a:ext cx="681736" cy="256032"/>
+            <a:off x="3880104" y="4791456"/>
+            <a:ext cx="417576" cy="256032"/>
           </a:xfrm>
           <a:prstGeom prst="roundRect">
             <a:avLst>
@@ -22337,8 +22337,8 @@
         </p:nvSpPr>
         <p:spPr>
           <a:xfrm>
-            <a:off x="3305048" y="4791456"/>
-            <a:ext cx="681736" cy="256032"/>
+            <a:off x="3880104" y="4791456"/>
+            <a:ext cx="417576" cy="256032"/>
           </a:xfrm>
           <a:prstGeom prst="rect">
             <a:avLst/>
@@ -22362,7 +22362,7 @@
                 <a:ea typeface="Calibri" pitchFamily="34" charset="-122"/>
                 <a:cs typeface="Calibri" pitchFamily="34" charset="-120"/>
               </a:rPr>
-              <a:t>explain</a:t>
+              <a:t>new</a:t>
             </a:r>
             <a:endParaRPr lang="en-US" sz="1000" dirty="0"/>
           </a:p>
@@ -22376,8 +22376,8 @@
         </p:nvSpPr>
         <p:spPr>
           <a:xfrm>
-            <a:off x="4078224" y="4791456"/>
-            <a:ext cx="483616" cy="256032"/>
+            <a:off x="4389120" y="4791456"/>
+            <a:ext cx="1011936" cy="256032"/>
           </a:xfrm>
           <a:prstGeom prst="roundRect">
             <a:avLst>
@@ -22403,8 +22403,8 @@
         </p:nvSpPr>
         <p:spPr>
           <a:xfrm>
-            <a:off x="4078224" y="4791456"/>
-            <a:ext cx="483616" cy="256032"/>
+            <a:off x="4389120" y="4791456"/>
+            <a:ext cx="1011936" cy="256032"/>
           </a:xfrm>
           <a:prstGeom prst="rect">
             <a:avLst/>
@@ -22428,7 +22428,7 @@
                 <a:ea typeface="Calibri" pitchFamily="34" charset="-122"/>
                 <a:cs typeface="Calibri" pitchFamily="34" charset="-120"/>
               </a:rPr>
-              <a:t>help</a:t>
+              <a:t>explore list</a:t>
             </a:r>
             <a:endParaRPr lang="en-US" sz="1000" dirty="0"/>
           </a:p>
@@ -22442,8 +22442,8 @@
         </p:nvSpPr>
         <p:spPr>
           <a:xfrm>
-            <a:off x="4653280" y="4791456"/>
-            <a:ext cx="549656" cy="256032"/>
+            <a:off x="5492496" y="4791456"/>
+            <a:ext cx="945896" cy="256032"/>
           </a:xfrm>
           <a:prstGeom prst="roundRect">
             <a:avLst>
@@ -22469,8 +22469,8 @@
         </p:nvSpPr>
         <p:spPr>
           <a:xfrm>
-            <a:off x="4653280" y="4791456"/>
-            <a:ext cx="549656" cy="256032"/>
+            <a:off x="5492496" y="4791456"/>
+            <a:ext cx="945896" cy="256032"/>
           </a:xfrm>
           <a:prstGeom prst="rect">
             <a:avLst/>
@@ -22494,7 +22494,7 @@
                 <a:ea typeface="Calibri" pitchFamily="34" charset="-122"/>
                 <a:cs typeface="Calibri" pitchFamily="34" charset="-120"/>
               </a:rPr>
-              <a:t>guide</a:t>
+              <a:t>import bmad</a:t>
             </a:r>
             <a:endParaRPr lang="en-US" sz="1000" dirty="0"/>
           </a:p>
@@ -22508,8 +22508,8 @@
         </p:nvSpPr>
         <p:spPr>
           <a:xfrm>
-            <a:off x="5294376" y="4791456"/>
-            <a:ext cx="879856" cy="256032"/>
+            <a:off x="6529832" y="4791456"/>
+            <a:ext cx="615696" cy="256032"/>
           </a:xfrm>
           <a:prstGeom prst="roundRect">
             <a:avLst>
@@ -22535,8 +22535,8 @@
         </p:nvSpPr>
         <p:spPr>
           <a:xfrm>
-            <a:off x="5294376" y="4791456"/>
-            <a:ext cx="879856" cy="256032"/>
+            <a:off x="6529832" y="4791456"/>
+            <a:ext cx="615696" cy="256032"/>
           </a:xfrm>
           <a:prstGeom prst="rect">
             <a:avLst/>
@@ -22560,7 +22560,7 @@
                 <a:ea typeface="Calibri" pitchFamily="34" charset="-122"/>
                 <a:cs typeface="Calibri" pitchFamily="34" charset="-120"/>
               </a:rPr>
-              <a:t>statusline</a:t>
+              <a:t>status</a:t>
             </a:r>
             <a:endParaRPr lang="en-US" sz="1000" dirty="0"/>
           </a:p>
@@ -22574,8 +22574,8 @@
         </p:nvSpPr>
         <p:spPr>
           <a:xfrm>
-            <a:off x="6265672" y="4791456"/>
-            <a:ext cx="1011936" cy="256032"/>
+            <a:off x="7236968" y="4791456"/>
+            <a:ext cx="681736" cy="256032"/>
           </a:xfrm>
           <a:prstGeom prst="roundRect">
             <a:avLst>
@@ -22601,8 +22601,8 @@
         </p:nvSpPr>
         <p:spPr>
           <a:xfrm>
-            <a:off x="6265672" y="4791456"/>
-            <a:ext cx="1011936" cy="256032"/>
+            <a:off x="7236968" y="4791456"/>
+            <a:ext cx="681736" cy="256032"/>
           </a:xfrm>
           <a:prstGeom prst="rect">
             <a:avLst/>
@@ -22626,7 +22626,7 @@
                 <a:ea typeface="Calibri" pitchFamily="34" charset="-122"/>
                 <a:cs typeface="Calibri" pitchFamily="34" charset="-120"/>
               </a:rPr>
-              <a:t>context pull</a:t>
+              <a:t>explain</a:t>
             </a:r>
             <a:endParaRPr lang="en-US" sz="1000" dirty="0"/>
           </a:p>
@@ -22640,8 +22640,8 @@
         </p:nvSpPr>
         <p:spPr>
           <a:xfrm>
-            <a:off x="7369048" y="4791456"/>
-            <a:ext cx="813816" cy="256032"/>
+            <a:off x="8010144" y="4791456"/>
+            <a:ext cx="483616" cy="256032"/>
           </a:xfrm>
           <a:prstGeom prst="roundRect">
             <a:avLst>
@@ -22667,8 +22667,8 @@
         </p:nvSpPr>
         <p:spPr>
           <a:xfrm>
-            <a:off x="7369048" y="4791456"/>
-            <a:ext cx="813816" cy="256032"/>
+            <a:off x="8010144" y="4791456"/>
+            <a:ext cx="483616" cy="256032"/>
           </a:xfrm>
           <a:prstGeom prst="rect">
             <a:avLst/>
@@ -22692,7 +22692,7 @@
                 <a:ea typeface="Calibri" pitchFamily="34" charset="-122"/>
                 <a:cs typeface="Calibri" pitchFamily="34" charset="-120"/>
               </a:rPr>
-              <a:t>mcp serve</a:t>
+              <a:t>help</a:t>
             </a:r>
             <a:endParaRPr lang="en-US" sz="1000" dirty="0"/>
           </a:p>
@@ -22706,8 +22706,8 @@
         </p:nvSpPr>
         <p:spPr>
           <a:xfrm>
-            <a:off x="8274304" y="4791456"/>
-            <a:ext cx="813816" cy="256032"/>
+            <a:off x="8585200" y="4791456"/>
+            <a:ext cx="549656" cy="256032"/>
           </a:xfrm>
           <a:prstGeom prst="roundRect">
             <a:avLst>
@@ -22733,8 +22733,8 @@
         </p:nvSpPr>
         <p:spPr>
           <a:xfrm>
-            <a:off x="8274304" y="4791456"/>
-            <a:ext cx="813816" cy="256032"/>
+            <a:off x="8585200" y="4791456"/>
+            <a:ext cx="549656" cy="256032"/>
           </a:xfrm>
           <a:prstGeom prst="rect">
             <a:avLst/>
@@ -22758,7 +22758,7 @@
                 <a:ea typeface="Calibri" pitchFamily="34" charset="-122"/>
                 <a:cs typeface="Calibri" pitchFamily="34" charset="-120"/>
               </a:rPr>
-              <a:t>mcp check</a:t>
+              <a:t>guide</a:t>
             </a:r>
             <a:endParaRPr lang="en-US" sz="1000" dirty="0"/>
           </a:p>
@@ -22772,7 +22772,7 @@
         </p:nvSpPr>
         <p:spPr>
           <a:xfrm>
-            <a:off x="9179560" y="4791456"/>
+            <a:off x="9226296" y="4791456"/>
             <a:ext cx="879856" cy="256032"/>
           </a:xfrm>
           <a:prstGeom prst="roundRect">
@@ -22799,7 +22799,7 @@
         </p:nvSpPr>
         <p:spPr>
           <a:xfrm>
-            <a:off x="9179560" y="4791456"/>
+            <a:off x="9226296" y="4791456"/>
             <a:ext cx="879856" cy="256032"/>
           </a:xfrm>
           <a:prstGeom prst="rect">
@@ -22824,7 +22824,7 @@
                 <a:ea typeface="Calibri" pitchFamily="34" charset="-122"/>
                 <a:cs typeface="Calibri" pitchFamily="34" charset="-120"/>
               </a:rPr>
-              <a:t>inbox list</a:t>
+              <a:t>statusline</a:t>
             </a:r>
             <a:endParaRPr lang="en-US" sz="1000" dirty="0"/>
           </a:p>
@@ -22838,8 +22838,8 @@
         </p:nvSpPr>
         <p:spPr>
           <a:xfrm>
-            <a:off x="10150856" y="4791456"/>
-            <a:ext cx="879856" cy="256032"/>
+            <a:off x="10197592" y="4791456"/>
+            <a:ext cx="1011936" cy="256032"/>
           </a:xfrm>
           <a:prstGeom prst="roundRect">
             <a:avLst>
@@ -22865,8 +22865,8 @@
         </p:nvSpPr>
         <p:spPr>
           <a:xfrm>
-            <a:off x="10150856" y="4791456"/>
-            <a:ext cx="879856" cy="256032"/>
+            <a:off x="10197592" y="4791456"/>
+            <a:ext cx="1011936" cy="256032"/>
           </a:xfrm>
           <a:prstGeom prst="rect">
             <a:avLst/>
@@ -22890,7 +22890,7 @@
                 <a:ea typeface="Calibri" pitchFamily="34" charset="-122"/>
                 <a:cs typeface="Calibri" pitchFamily="34" charset="-120"/>
               </a:rPr>
-              <a:t>inbox done</a:t>
+              <a:t>context pull</a:t>
             </a:r>
             <a:endParaRPr lang="en-US" sz="1000" dirty="0"/>
           </a:p>
@@ -22905,7 +22905,7 @@
         <p:spPr>
           <a:xfrm>
             <a:off x="457200" y="5138928"/>
-            <a:ext cx="945896" cy="256032"/>
+            <a:ext cx="813816" cy="256032"/>
           </a:xfrm>
           <a:prstGeom prst="roundRect">
             <a:avLst>
@@ -22932,7 +22932,7 @@
         <p:spPr>
           <a:xfrm>
             <a:off x="457200" y="5138928"/>
-            <a:ext cx="945896" cy="256032"/>
+            <a:ext cx="813816" cy="256032"/>
           </a:xfrm>
           <a:prstGeom prst="rect">
             <a:avLst/>
@@ -22956,7 +22956,7 @@
                 <a:ea typeface="Calibri" pitchFamily="34" charset="-122"/>
                 <a:cs typeface="Calibri" pitchFamily="34" charset="-120"/>
               </a:rPr>
-              <a:t>events list</a:t>
+              <a:t>mcp serve</a:t>
             </a:r>
             <a:endParaRPr lang="en-US" sz="1000" dirty="0"/>
           </a:p>
@@ -22970,8 +22970,8 @@
         </p:nvSpPr>
         <p:spPr>
           <a:xfrm>
-            <a:off x="1494536" y="5138928"/>
-            <a:ext cx="1011936" cy="256032"/>
+            <a:off x="1362456" y="5138928"/>
+            <a:ext cx="813816" cy="256032"/>
           </a:xfrm>
           <a:prstGeom prst="roundRect">
             <a:avLst>
@@ -22997,8 +22997,8 @@
         </p:nvSpPr>
         <p:spPr>
           <a:xfrm>
-            <a:off x="1494536" y="5138928"/>
-            <a:ext cx="1011936" cy="256032"/>
+            <a:off x="1362456" y="5138928"/>
+            <a:ext cx="813816" cy="256032"/>
           </a:xfrm>
           <a:prstGeom prst="rect">
             <a:avLst/>
@@ -23022,7 +23022,7 @@
                 <a:ea typeface="Calibri" pitchFamily="34" charset="-122"/>
                 <a:cs typeface="Calibri" pitchFamily="34" charset="-120"/>
               </a:rPr>
-              <a:t>events flush</a:t>
+              <a:t>mcp check</a:t>
             </a:r>
             <a:endParaRPr lang="en-US" sz="1000" dirty="0"/>
           </a:p>
@@ -23036,8 +23036,8 @@
         </p:nvSpPr>
         <p:spPr>
           <a:xfrm>
-            <a:off x="2597912" y="5138928"/>
-            <a:ext cx="1144016" cy="256032"/>
+            <a:off x="2267712" y="5138928"/>
+            <a:ext cx="879856" cy="256032"/>
           </a:xfrm>
           <a:prstGeom prst="roundRect">
             <a:avLst>
@@ -23063,8 +23063,8 @@
         </p:nvSpPr>
         <p:spPr>
           <a:xfrm>
-            <a:off x="2597912" y="5138928"/>
-            <a:ext cx="1144016" cy="256032"/>
+            <a:off x="2267712" y="5138928"/>
+            <a:ext cx="879856" cy="256032"/>
           </a:xfrm>
           <a:prstGeom prst="rect">
             <a:avLst/>
@@ -23088,7 +23088,7 @@
                 <a:ea typeface="Calibri" pitchFamily="34" charset="-122"/>
                 <a:cs typeface="Calibri" pitchFamily="34" charset="-120"/>
               </a:rPr>
-              <a:t>events summary</a:t>
+              <a:t>inbox list</a:t>
             </a:r>
             <a:endParaRPr lang="en-US" sz="1000" dirty="0"/>
           </a:p>
@@ -23102,8 +23102,8 @@
         </p:nvSpPr>
         <p:spPr>
           <a:xfrm>
-            <a:off x="3833368" y="5138928"/>
-            <a:ext cx="1077976" cy="256032"/>
+            <a:off x="3239008" y="5138928"/>
+            <a:ext cx="879856" cy="256032"/>
           </a:xfrm>
           <a:prstGeom prst="roundRect">
             <a:avLst>
@@ -23129,8 +23129,8 @@
         </p:nvSpPr>
         <p:spPr>
           <a:xfrm>
-            <a:off x="3833368" y="5138928"/>
-            <a:ext cx="1077976" cy="256032"/>
+            <a:off x="3239008" y="5138928"/>
+            <a:ext cx="879856" cy="256032"/>
           </a:xfrm>
           <a:prstGeom prst="rect">
             <a:avLst/>
@@ -23154,7 +23154,7 @@
                 <a:ea typeface="Calibri" pitchFamily="34" charset="-122"/>
                 <a:cs typeface="Calibri" pitchFamily="34" charset="-120"/>
               </a:rPr>
-              <a:t>triage intake</a:t>
+              <a:t>inbox done</a:t>
             </a:r>
             <a:endParaRPr lang="en-US" sz="1000" dirty="0"/>
           </a:p>
@@ -23168,8 +23168,8 @@
         </p:nvSpPr>
         <p:spPr>
           <a:xfrm>
-            <a:off x="5002784" y="5138928"/>
-            <a:ext cx="1077976" cy="256032"/>
+            <a:off x="4210304" y="5138928"/>
+            <a:ext cx="945896" cy="256032"/>
           </a:xfrm>
           <a:prstGeom prst="roundRect">
             <a:avLst>
@@ -23195,8 +23195,8 @@
         </p:nvSpPr>
         <p:spPr>
           <a:xfrm>
-            <a:off x="5002784" y="5138928"/>
-            <a:ext cx="1077976" cy="256032"/>
+            <a:off x="4210304" y="5138928"/>
+            <a:ext cx="945896" cy="256032"/>
           </a:xfrm>
           <a:prstGeom prst="rect">
             <a:avLst/>
@@ -23220,7 +23220,7 @@
                 <a:ea typeface="Calibri" pitchFamily="34" charset="-122"/>
                 <a:cs typeface="Calibri" pitchFamily="34" charset="-120"/>
               </a:rPr>
-              <a:t>release check</a:t>
+              <a:t>events list</a:t>
             </a:r>
             <a:endParaRPr lang="en-US" sz="1000" dirty="0"/>
           </a:p>
@@ -23234,8 +23234,8 @@
         </p:nvSpPr>
         <p:spPr>
           <a:xfrm>
-            <a:off x="6172200" y="5138928"/>
-            <a:ext cx="813816" cy="256032"/>
+            <a:off x="5247640" y="5138928"/>
+            <a:ext cx="1011936" cy="256032"/>
           </a:xfrm>
           <a:prstGeom prst="roundRect">
             <a:avLst>
@@ -23261,8 +23261,8 @@
         </p:nvSpPr>
         <p:spPr>
           <a:xfrm>
-            <a:off x="6172200" y="5138928"/>
-            <a:ext cx="813816" cy="256032"/>
+            <a:off x="5247640" y="5138928"/>
+            <a:ext cx="1011936" cy="256032"/>
           </a:xfrm>
           <a:prstGeom prst="rect">
             <a:avLst/>
@@ -23286,7 +23286,7 @@
                 <a:ea typeface="Calibri" pitchFamily="34" charset="-122"/>
                 <a:cs typeface="Calibri" pitchFamily="34" charset="-120"/>
               </a:rPr>
-              <a:t>track set</a:t>
+              <a:t>events flush</a:t>
             </a:r>
             <a:endParaRPr lang="en-US" sz="1000" dirty="0"/>
           </a:p>
@@ -23300,8 +23300,8 @@
         </p:nvSpPr>
         <p:spPr>
           <a:xfrm>
-            <a:off x="7077456" y="5138928"/>
-            <a:ext cx="483616" cy="256032"/>
+            <a:off x="6351016" y="5138928"/>
+            <a:ext cx="1144016" cy="256032"/>
           </a:xfrm>
           <a:prstGeom prst="roundRect">
             <a:avLst>
@@ -23327,8 +23327,8 @@
         </p:nvSpPr>
         <p:spPr>
           <a:xfrm>
-            <a:off x="7077456" y="5138928"/>
-            <a:ext cx="483616" cy="256032"/>
+            <a:off x="6351016" y="5138928"/>
+            <a:ext cx="1144016" cy="256032"/>
           </a:xfrm>
           <a:prstGeom prst="rect">
             <a:avLst/>
@@ -23352,7 +23352,7 @@
                 <a:ea typeface="Calibri" pitchFamily="34" charset="-122"/>
                 <a:cs typeface="Calibri" pitchFamily="34" charset="-120"/>
               </a:rPr>
-              <a:t>next</a:t>
+              <a:t>events summary</a:t>
             </a:r>
             <a:endParaRPr lang="en-US" sz="1000" dirty="0"/>
           </a:p>
@@ -23366,8 +23366,8 @@
         </p:nvSpPr>
         <p:spPr>
           <a:xfrm>
-            <a:off x="7652512" y="5138928"/>
-            <a:ext cx="1011936" cy="256032"/>
+            <a:off x="7586472" y="5138928"/>
+            <a:ext cx="1077976" cy="256032"/>
           </a:xfrm>
           <a:prstGeom prst="roundRect">
             <a:avLst>
@@ -23393,8 +23393,8 @@
         </p:nvSpPr>
         <p:spPr>
           <a:xfrm>
-            <a:off x="7652512" y="5138928"/>
-            <a:ext cx="1011936" cy="256032"/>
+            <a:off x="7586472" y="5138928"/>
+            <a:ext cx="1077976" cy="256032"/>
           </a:xfrm>
           <a:prstGeom prst="rect">
             <a:avLst/>
@@ -23418,7 +23418,7 @@
                 <a:ea typeface="Calibri" pitchFamily="34" charset="-122"/>
                 <a:cs typeface="Calibri" pitchFamily="34" charset="-120"/>
               </a:rPr>
-              <a:t>instructions</a:t>
+              <a:t>triage intake</a:t>
             </a:r>
             <a:endParaRPr lang="en-US" sz="1000" dirty="0"/>
           </a:p>
@@ -23433,7 +23433,7 @@
         <p:spPr>
           <a:xfrm>
             <a:off x="8755888" y="5138928"/>
-            <a:ext cx="681736" cy="256032"/>
+            <a:ext cx="1077976" cy="256032"/>
           </a:xfrm>
           <a:prstGeom prst="roundRect">
             <a:avLst>
@@ -23460,7 +23460,7 @@
         <p:spPr>
           <a:xfrm>
             <a:off x="8755888" y="5138928"/>
-            <a:ext cx="681736" cy="256032"/>
+            <a:ext cx="1077976" cy="256032"/>
           </a:xfrm>
           <a:prstGeom prst="rect">
             <a:avLst/>
@@ -23484,7 +23484,7 @@
                 <a:ea typeface="Calibri" pitchFamily="34" charset="-122"/>
                 <a:cs typeface="Calibri" pitchFamily="34" charset="-120"/>
               </a:rPr>
-              <a:t>approve</a:t>
+              <a:t>release check</a:t>
             </a:r>
             <a:endParaRPr lang="en-US" sz="1000" dirty="0"/>
           </a:p>
@@ -23498,8 +23498,8 @@
         </p:nvSpPr>
         <p:spPr>
           <a:xfrm>
-            <a:off x="9529064" y="5138928"/>
-            <a:ext cx="615696" cy="256032"/>
+            <a:off x="9925304" y="5138928"/>
+            <a:ext cx="813816" cy="256032"/>
           </a:xfrm>
           <a:prstGeom prst="roundRect">
             <a:avLst>
@@ -23525,8 +23525,8 @@
         </p:nvSpPr>
         <p:spPr>
           <a:xfrm>
-            <a:off x="9529064" y="5138928"/>
-            <a:ext cx="615696" cy="256032"/>
+            <a:off x="9925304" y="5138928"/>
+            <a:ext cx="813816" cy="256032"/>
           </a:xfrm>
           <a:prstGeom prst="rect">
             <a:avLst/>
@@ -23550,7 +23550,7 @@
                 <a:ea typeface="Calibri" pitchFamily="34" charset="-122"/>
                 <a:cs typeface="Calibri" pitchFamily="34" charset="-120"/>
               </a:rPr>
-              <a:t>reject</a:t>
+              <a:t>track set</a:t>
             </a:r>
             <a:endParaRPr lang="en-US" sz="1000" dirty="0"/>
           </a:p>
@@ -23564,8 +23564,8 @@
         </p:nvSpPr>
         <p:spPr>
           <a:xfrm>
-            <a:off x="10236200" y="5138928"/>
-            <a:ext cx="549656" cy="256032"/>
+            <a:off x="10830560" y="5138928"/>
+            <a:ext cx="483616" cy="256032"/>
           </a:xfrm>
           <a:prstGeom prst="roundRect">
             <a:avLst>
@@ -23591,8 +23591,8 @@
         </p:nvSpPr>
         <p:spPr>
           <a:xfrm>
-            <a:off x="10236200" y="5138928"/>
-            <a:ext cx="549656" cy="256032"/>
+            <a:off x="10830560" y="5138928"/>
+            <a:ext cx="483616" cy="256032"/>
           </a:xfrm>
           <a:prstGeom prst="rect">
             <a:avLst/>
@@ -23616,7 +23616,7 @@
                 <a:ea typeface="Calibri" pitchFamily="34" charset="-122"/>
                 <a:cs typeface="Calibri" pitchFamily="34" charset="-120"/>
               </a:rPr>
-              <a:t>waive</a:t>
+              <a:t>next</a:t>
             </a:r>
             <a:endParaRPr lang="en-US" sz="1000" dirty="0"/>
           </a:p>
@@ -23630,8 +23630,8 @@
         </p:nvSpPr>
         <p:spPr>
           <a:xfrm>
-            <a:off x="10877296" y="5138928"/>
-            <a:ext cx="615696" cy="256032"/>
+            <a:off x="457200" y="5486400"/>
+            <a:ext cx="1011936" cy="256032"/>
           </a:xfrm>
           <a:prstGeom prst="roundRect">
             <a:avLst>
@@ -23657,8 +23657,8 @@
         </p:nvSpPr>
         <p:spPr>
           <a:xfrm>
-            <a:off x="10877296" y="5138928"/>
-            <a:ext cx="615696" cy="256032"/>
+            <a:off x="457200" y="5486400"/>
+            <a:ext cx="1011936" cy="256032"/>
           </a:xfrm>
           <a:prstGeom prst="rect">
             <a:avLst/>
@@ -23682,7 +23682,7 @@
                 <a:ea typeface="Calibri" pitchFamily="34" charset="-122"/>
                 <a:cs typeface="Calibri" pitchFamily="34" charset="-120"/>
               </a:rPr>
-              <a:t>answer</a:t>
+              <a:t>instructions</a:t>
             </a:r>
             <a:endParaRPr lang="en-US" sz="1000" dirty="0"/>
           </a:p>
@@ -23696,8 +23696,8 @@
         </p:nvSpPr>
         <p:spPr>
           <a:xfrm>
-            <a:off x="457200" y="5486400"/>
-            <a:ext cx="549656" cy="256032"/>
+            <a:off x="1560576" y="5486400"/>
+            <a:ext cx="681736" cy="256032"/>
           </a:xfrm>
           <a:prstGeom prst="roundRect">
             <a:avLst>
@@ -23723,8 +23723,8 @@
         </p:nvSpPr>
         <p:spPr>
           <a:xfrm>
-            <a:off x="457200" y="5486400"/>
-            <a:ext cx="549656" cy="256032"/>
+            <a:off x="1560576" y="5486400"/>
+            <a:ext cx="681736" cy="256032"/>
           </a:xfrm>
           <a:prstGeom prst="rect">
             <a:avLst/>
@@ -23748,7 +23748,7 @@
                 <a:ea typeface="Calibri" pitchFamily="34" charset="-122"/>
                 <a:cs typeface="Calibri" pitchFamily="34" charset="-120"/>
               </a:rPr>
-              <a:t>judge</a:t>
+              <a:t>approve</a:t>
             </a:r>
             <a:endParaRPr lang="en-US" sz="1000" dirty="0"/>
           </a:p>
@@ -23762,8 +23762,8 @@
         </p:nvSpPr>
         <p:spPr>
           <a:xfrm>
-            <a:off x="1098296" y="5486400"/>
-            <a:ext cx="747776" cy="256032"/>
+            <a:off x="2333752" y="5486400"/>
+            <a:ext cx="615696" cy="256032"/>
           </a:xfrm>
           <a:prstGeom prst="roundRect">
             <a:avLst>
@@ -23789,8 +23789,8 @@
         </p:nvSpPr>
         <p:spPr>
           <a:xfrm>
-            <a:off x="1098296" y="5486400"/>
-            <a:ext cx="747776" cy="256032"/>
+            <a:off x="2333752" y="5486400"/>
+            <a:ext cx="615696" cy="256032"/>
           </a:xfrm>
           <a:prstGeom prst="rect">
             <a:avLst/>
@@ -23814,7 +23814,7 @@
                 <a:ea typeface="Calibri" pitchFamily="34" charset="-122"/>
                 <a:cs typeface="Calibri" pitchFamily="34" charset="-120"/>
               </a:rPr>
-              <a:t>takeover</a:t>
+              <a:t>reject</a:t>
             </a:r>
             <a:endParaRPr lang="en-US" sz="1000" dirty="0"/>
           </a:p>
@@ -23828,8 +23828,8 @@
         </p:nvSpPr>
         <p:spPr>
           <a:xfrm>
-            <a:off x="1937512" y="5486400"/>
-            <a:ext cx="1210056" cy="256032"/>
+            <a:off x="3040888" y="5486400"/>
+            <a:ext cx="549656" cy="256032"/>
           </a:xfrm>
           <a:prstGeom prst="roundRect">
             <a:avLst>
@@ -23855,8 +23855,8 @@
         </p:nvSpPr>
         <p:spPr>
           <a:xfrm>
-            <a:off x="1937512" y="5486400"/>
-            <a:ext cx="1210056" cy="256032"/>
+            <a:off x="3040888" y="5486400"/>
+            <a:ext cx="549656" cy="256032"/>
           </a:xfrm>
           <a:prstGeom prst="rect">
             <a:avLst/>
@@ -23880,7 +23880,7 @@
                 <a:ea typeface="Calibri" pitchFamily="34" charset="-122"/>
                 <a:cs typeface="Calibri" pitchFamily="34" charset="-120"/>
               </a:rPr>
-              <a:t>release-control</a:t>
+              <a:t>waive</a:t>
             </a:r>
             <a:endParaRPr lang="en-US" sz="1000" dirty="0"/>
           </a:p>
@@ -23894,7 +23894,7 @@
         </p:nvSpPr>
         <p:spPr>
           <a:xfrm>
-            <a:off x="3239008" y="5486400"/>
+            <a:off x="3681984" y="5486400"/>
             <a:ext cx="615696" cy="256032"/>
           </a:xfrm>
           <a:prstGeom prst="roundRect">
@@ -23921,7 +23921,7 @@
         </p:nvSpPr>
         <p:spPr>
           <a:xfrm>
-            <a:off x="3239008" y="5486400"/>
+            <a:off x="3681984" y="5486400"/>
             <a:ext cx="615696" cy="256032"/>
           </a:xfrm>
           <a:prstGeom prst="rect">
@@ -23946,7 +23946,7 @@
                 <a:ea typeface="Calibri" pitchFamily="34" charset="-122"/>
                 <a:cs typeface="Calibri" pitchFamily="34" charset="-120"/>
               </a:rPr>
-              <a:t>rework</a:t>
+              <a:t>answer</a:t>
             </a:r>
             <a:endParaRPr lang="en-US" sz="1000" dirty="0"/>
           </a:p>
@@ -23960,8 +23960,8 @@
         </p:nvSpPr>
         <p:spPr>
           <a:xfrm>
-            <a:off x="3946144" y="5486400"/>
-            <a:ext cx="1276096" cy="256032"/>
+            <a:off x="4389120" y="5486400"/>
+            <a:ext cx="549656" cy="256032"/>
           </a:xfrm>
           <a:prstGeom prst="roundRect">
             <a:avLst>
@@ -23987,8 +23987,8 @@
         </p:nvSpPr>
         <p:spPr>
           <a:xfrm>
-            <a:off x="3946144" y="5486400"/>
-            <a:ext cx="1276096" cy="256032"/>
+            <a:off x="4389120" y="5486400"/>
+            <a:ext cx="549656" cy="256032"/>
           </a:xfrm>
           <a:prstGeom prst="rect">
             <a:avLst/>
@@ -24012,7 +24012,7 @@
                 <a:ea typeface="Calibri" pitchFamily="34" charset="-122"/>
                 <a:cs typeface="Calibri" pitchFamily="34" charset="-120"/>
               </a:rPr>
-              <a:t>approvals verify</a:t>
+              <a:t>judge</a:t>
             </a:r>
             <a:endParaRPr lang="en-US" sz="1000" dirty="0"/>
           </a:p>
@@ -24026,8 +24026,8 @@
         </p:nvSpPr>
         <p:spPr>
           <a:xfrm>
-            <a:off x="5313680" y="5486400"/>
-            <a:ext cx="549656" cy="256032"/>
+            <a:off x="5030216" y="5486400"/>
+            <a:ext cx="747776" cy="256032"/>
           </a:xfrm>
           <a:prstGeom prst="roundRect">
             <a:avLst>
@@ -24053,8 +24053,8 @@
         </p:nvSpPr>
         <p:spPr>
           <a:xfrm>
-            <a:off x="5313680" y="5486400"/>
-            <a:ext cx="549656" cy="256032"/>
+            <a:off x="5030216" y="5486400"/>
+            <a:ext cx="747776" cy="256032"/>
           </a:xfrm>
           <a:prstGeom prst="rect">
             <a:avLst/>
@@ -24078,7 +24078,7 @@
                 <a:ea typeface="Calibri" pitchFamily="34" charset="-122"/>
                 <a:cs typeface="Calibri" pitchFamily="34" charset="-120"/>
               </a:rPr>
-              <a:t>tests</a:t>
+              <a:t>takeover</a:t>
             </a:r>
             <a:endParaRPr lang="en-US" sz="1000" dirty="0"/>
           </a:p>
@@ -24092,8 +24092,8 @@
         </p:nvSpPr>
         <p:spPr>
           <a:xfrm>
-            <a:off x="5954776" y="5486400"/>
-            <a:ext cx="1540256" cy="256032"/>
+            <a:off x="5869432" y="5486400"/>
+            <a:ext cx="1210056" cy="256032"/>
           </a:xfrm>
           <a:prstGeom prst="roundRect">
             <a:avLst>
@@ -24119,8 +24119,8 @@
         </p:nvSpPr>
         <p:spPr>
           <a:xfrm>
-            <a:off x="5954776" y="5486400"/>
-            <a:ext cx="1540256" cy="256032"/>
+            <a:off x="5869432" y="5486400"/>
+            <a:ext cx="1210056" cy="256032"/>
           </a:xfrm>
           <a:prstGeom prst="rect">
             <a:avLst/>
@@ -24144,7 +24144,7 @@
                 <a:ea typeface="Calibri" pitchFamily="34" charset="-122"/>
                 <a:cs typeface="Calibri" pitchFamily="34" charset="-120"/>
               </a:rPr>
-              <a:t>task executors token</a:t>
+              <a:t>release-control</a:t>
             </a:r>
             <a:endParaRPr lang="en-US" sz="1000" dirty="0"/>
           </a:p>
@@ -24158,8 +24158,8 @@
         </p:nvSpPr>
         <p:spPr>
           <a:xfrm>
-            <a:off x="7586472" y="5486400"/>
-            <a:ext cx="945896" cy="256032"/>
+            <a:off x="7170928" y="5486400"/>
+            <a:ext cx="615696" cy="256032"/>
           </a:xfrm>
           <a:prstGeom prst="roundRect">
             <a:avLst>
@@ -24185,8 +24185,8 @@
         </p:nvSpPr>
         <p:spPr>
           <a:xfrm>
-            <a:off x="7586472" y="5486400"/>
-            <a:ext cx="945896" cy="256032"/>
+            <a:off x="7170928" y="5486400"/>
+            <a:ext cx="615696" cy="256032"/>
           </a:xfrm>
           <a:prstGeom prst="rect">
             <a:avLst/>
@@ -24210,7 +24210,7 @@
                 <a:ea typeface="Calibri" pitchFamily="34" charset="-122"/>
                 <a:cs typeface="Calibri" pitchFamily="34" charset="-120"/>
               </a:rPr>
-              <a:t>task export</a:t>
+              <a:t>rework</a:t>
             </a:r>
             <a:endParaRPr lang="en-US" sz="1000" dirty="0"/>
           </a:p>
@@ -24224,8 +24224,8 @@
         </p:nvSpPr>
         <p:spPr>
           <a:xfrm>
-            <a:off x="8623808" y="5486400"/>
-            <a:ext cx="1342136" cy="256032"/>
+            <a:off x="7878064" y="5486400"/>
+            <a:ext cx="1276096" cy="256032"/>
           </a:xfrm>
           <a:prstGeom prst="roundRect">
             <a:avLst>
@@ -24251,8 +24251,8 @@
         </p:nvSpPr>
         <p:spPr>
           <a:xfrm>
-            <a:off x="8623808" y="5486400"/>
-            <a:ext cx="1342136" cy="256032"/>
+            <a:off x="7878064" y="5486400"/>
+            <a:ext cx="1276096" cy="256032"/>
           </a:xfrm>
           <a:prstGeom prst="rect">
             <a:avLst/>
@@ -24276,7 +24276,7 @@
                 <a:ea typeface="Calibri" pitchFamily="34" charset="-122"/>
                 <a:cs typeface="Calibri" pitchFamily="34" charset="-120"/>
               </a:rPr>
-              <a:t>task check-result</a:t>
+              <a:t>approvals verify</a:t>
             </a:r>
             <a:endParaRPr lang="en-US" sz="1000" dirty="0"/>
           </a:p>
@@ -24290,8 +24290,8 @@
         </p:nvSpPr>
         <p:spPr>
           <a:xfrm>
-            <a:off x="10057384" y="5486400"/>
-            <a:ext cx="879856" cy="256032"/>
+            <a:off x="9245600" y="5486400"/>
+            <a:ext cx="549656" cy="256032"/>
           </a:xfrm>
           <a:prstGeom prst="roundRect">
             <a:avLst>
@@ -24317,8 +24317,8 @@
         </p:nvSpPr>
         <p:spPr>
           <a:xfrm>
-            <a:off x="10057384" y="5486400"/>
-            <a:ext cx="879856" cy="256032"/>
+            <a:off x="9245600" y="5486400"/>
+            <a:ext cx="549656" cy="256032"/>
           </a:xfrm>
           <a:prstGeom prst="rect">
             <a:avLst/>
@@ -24342,7 +24342,7 @@
                 <a:ea typeface="Calibri" pitchFamily="34" charset="-122"/>
                 <a:cs typeface="Calibri" pitchFamily="34" charset="-120"/>
               </a:rPr>
-              <a:t>board list</a:t>
+              <a:t>tests</a:t>
             </a:r>
             <a:endParaRPr lang="en-US" sz="1000" dirty="0"/>
           </a:p>
@@ -24356,8 +24356,8 @@
         </p:nvSpPr>
         <p:spPr>
           <a:xfrm>
-            <a:off x="457200" y="5833872"/>
-            <a:ext cx="1144016" cy="256032"/>
+            <a:off x="9886696" y="5486400"/>
+            <a:ext cx="1540256" cy="256032"/>
           </a:xfrm>
           <a:prstGeom prst="roundRect">
             <a:avLst>
@@ -24383,8 +24383,8 @@
         </p:nvSpPr>
         <p:spPr>
           <a:xfrm>
-            <a:off x="457200" y="5833872"/>
-            <a:ext cx="1144016" cy="256032"/>
+            <a:off x="9886696" y="5486400"/>
+            <a:ext cx="1540256" cy="256032"/>
           </a:xfrm>
           <a:prstGeom prst="rect">
             <a:avLst/>
@@ -24408,7 +24408,7 @@
                 <a:ea typeface="Calibri" pitchFamily="34" charset="-122"/>
                 <a:cs typeface="Calibri" pitchFamily="34" charset="-120"/>
               </a:rPr>
-              <a:t>board dispatch</a:t>
+              <a:t>task executors token</a:t>
             </a:r>
             <a:endParaRPr lang="en-US" sz="1000" dirty="0"/>
           </a:p>
@@ -24422,8 +24422,8 @@
         </p:nvSpPr>
         <p:spPr>
           <a:xfrm>
-            <a:off x="1692656" y="5833872"/>
-            <a:ext cx="1077976" cy="256032"/>
+            <a:off x="457200" y="5833872"/>
+            <a:ext cx="945896" cy="256032"/>
           </a:xfrm>
           <a:prstGeom prst="roundRect">
             <a:avLst>
@@ -24449,8 +24449,8 @@
         </p:nvSpPr>
         <p:spPr>
           <a:xfrm>
-            <a:off x="1692656" y="5833872"/>
-            <a:ext cx="1077976" cy="256032"/>
+            <a:off x="457200" y="5833872"/>
+            <a:ext cx="945896" cy="256032"/>
           </a:xfrm>
           <a:prstGeom prst="rect">
             <a:avLst/>
@@ -24474,7 +24474,7 @@
                 <a:ea typeface="Calibri" pitchFamily="34" charset="-122"/>
                 <a:cs typeface="Calibri" pitchFamily="34" charset="-120"/>
               </a:rPr>
-              <a:t>board auction</a:t>
+              <a:t>task export</a:t>
             </a:r>
             <a:endParaRPr lang="en-US" sz="1000" dirty="0"/>
           </a:p>
@@ -24488,8 +24488,8 @@
         </p:nvSpPr>
         <p:spPr>
           <a:xfrm>
-            <a:off x="2862072" y="5833872"/>
-            <a:ext cx="813816" cy="256032"/>
+            <a:off x="1494536" y="5833872"/>
+            <a:ext cx="1342136" cy="256032"/>
           </a:xfrm>
           <a:prstGeom prst="roundRect">
             <a:avLst>
@@ -24515,8 +24515,8 @@
         </p:nvSpPr>
         <p:spPr>
           <a:xfrm>
-            <a:off x="2862072" y="5833872"/>
-            <a:ext cx="813816" cy="256032"/>
+            <a:off x="1494536" y="5833872"/>
+            <a:ext cx="1342136" cy="256032"/>
           </a:xfrm>
           <a:prstGeom prst="rect">
             <a:avLst/>
@@ -24540,7 +24540,7 @@
                 <a:ea typeface="Calibri" pitchFamily="34" charset="-122"/>
                 <a:cs typeface="Calibri" pitchFamily="34" charset="-120"/>
               </a:rPr>
-              <a:t>board bid</a:t>
+              <a:t>task check-result</a:t>
             </a:r>
             <a:endParaRPr lang="en-US" sz="1000" dirty="0"/>
           </a:p>
@@ -24554,8 +24554,8 @@
         </p:nvSpPr>
         <p:spPr>
           <a:xfrm>
-            <a:off x="3767328" y="5833872"/>
-            <a:ext cx="945896" cy="256032"/>
+            <a:off x="2928112" y="5833872"/>
+            <a:ext cx="879856" cy="256032"/>
           </a:xfrm>
           <a:prstGeom prst="roundRect">
             <a:avLst>
@@ -24581,8 +24581,8 @@
         </p:nvSpPr>
         <p:spPr>
           <a:xfrm>
-            <a:off x="3767328" y="5833872"/>
-            <a:ext cx="945896" cy="256032"/>
+            <a:off x="2928112" y="5833872"/>
+            <a:ext cx="879856" cy="256032"/>
           </a:xfrm>
           <a:prstGeom prst="rect">
             <a:avLst/>
@@ -24606,7 +24606,7 @@
                 <a:ea typeface="Calibri" pitchFamily="34" charset="-122"/>
                 <a:cs typeface="Calibri" pitchFamily="34" charset="-120"/>
               </a:rPr>
-              <a:t>board award</a:t>
+              <a:t>board list</a:t>
             </a:r>
             <a:endParaRPr lang="en-US" sz="1000" dirty="0"/>
           </a:p>
@@ -24620,8 +24620,8 @@
         </p:nvSpPr>
         <p:spPr>
           <a:xfrm>
-            <a:off x="4804664" y="5833872"/>
-            <a:ext cx="945896" cy="256032"/>
+            <a:off x="3899408" y="5833872"/>
+            <a:ext cx="1144016" cy="256032"/>
           </a:xfrm>
           <a:prstGeom prst="roundRect">
             <a:avLst>
@@ -24647,8 +24647,8 @@
         </p:nvSpPr>
         <p:spPr>
           <a:xfrm>
-            <a:off x="4804664" y="5833872"/>
-            <a:ext cx="945896" cy="256032"/>
+            <a:off x="3899408" y="5833872"/>
+            <a:ext cx="1144016" cy="256032"/>
           </a:xfrm>
           <a:prstGeom prst="rect">
             <a:avLst/>
@@ -24672,7 +24672,7 @@
                 <a:ea typeface="Calibri" pitchFamily="34" charset="-122"/>
                 <a:cs typeface="Calibri" pitchFamily="34" charset="-120"/>
               </a:rPr>
-              <a:t>board claim</a:t>
+              <a:t>board dispatch</a:t>
             </a:r>
             <a:endParaRPr lang="en-US" sz="1000" dirty="0"/>
           </a:p>
@@ -24686,8 +24686,8 @@
         </p:nvSpPr>
         <p:spPr>
           <a:xfrm>
-            <a:off x="5842000" y="5833872"/>
-            <a:ext cx="1210056" cy="256032"/>
+            <a:off x="5134864" y="5833872"/>
+            <a:ext cx="1077976" cy="256032"/>
           </a:xfrm>
           <a:prstGeom prst="roundRect">
             <a:avLst>
@@ -24713,8 +24713,8 @@
         </p:nvSpPr>
         <p:spPr>
           <a:xfrm>
-            <a:off x="5842000" y="5833872"/>
-            <a:ext cx="1210056" cy="256032"/>
+            <a:off x="5134864" y="5833872"/>
+            <a:ext cx="1077976" cy="256032"/>
           </a:xfrm>
           <a:prstGeom prst="rect">
             <a:avLst/>
@@ -24738,7 +24738,7 @@
                 <a:ea typeface="Calibri" pitchFamily="34" charset="-122"/>
                 <a:cs typeface="Calibri" pitchFamily="34" charset="-120"/>
               </a:rPr>
-              <a:t>board heartbeat</a:t>
+              <a:t>board auction</a:t>
             </a:r>
             <a:endParaRPr lang="en-US" sz="1000" dirty="0"/>
           </a:p>
@@ -24752,8 +24752,8 @@
         </p:nvSpPr>
         <p:spPr>
           <a:xfrm>
-            <a:off x="7143496" y="5833872"/>
-            <a:ext cx="1077976" cy="256032"/>
+            <a:off x="6304280" y="5833872"/>
+            <a:ext cx="813816" cy="256032"/>
           </a:xfrm>
           <a:prstGeom prst="roundRect">
             <a:avLst>
@@ -24779,8 +24779,8 @@
         </p:nvSpPr>
         <p:spPr>
           <a:xfrm>
-            <a:off x="7143496" y="5833872"/>
-            <a:ext cx="1077976" cy="256032"/>
+            <a:off x="6304280" y="5833872"/>
+            <a:ext cx="813816" cy="256032"/>
           </a:xfrm>
           <a:prstGeom prst="rect">
             <a:avLst/>
@@ -24804,7 +24804,7 @@
                 <a:ea typeface="Calibri" pitchFamily="34" charset="-122"/>
                 <a:cs typeface="Calibri" pitchFamily="34" charset="-120"/>
               </a:rPr>
-              <a:t>board release</a:t>
+              <a:t>board bid</a:t>
             </a:r>
             <a:endParaRPr lang="en-US" sz="1000" dirty="0"/>
           </a:p>
@@ -24818,8 +24818,8 @@
         </p:nvSpPr>
         <p:spPr>
           <a:xfrm>
-            <a:off x="8312912" y="5833872"/>
-            <a:ext cx="1011936" cy="256032"/>
+            <a:off x="7209536" y="5833872"/>
+            <a:ext cx="945896" cy="256032"/>
           </a:xfrm>
           <a:prstGeom prst="roundRect">
             <a:avLst>
@@ -24845,8 +24845,8 @@
         </p:nvSpPr>
         <p:spPr>
           <a:xfrm>
-            <a:off x="8312912" y="5833872"/>
-            <a:ext cx="1011936" cy="256032"/>
+            <a:off x="7209536" y="5833872"/>
+            <a:ext cx="945896" cy="256032"/>
           </a:xfrm>
           <a:prstGeom prst="rect">
             <a:avLst/>
@@ -24870,7 +24870,7 @@
                 <a:ea typeface="Calibri" pitchFamily="34" charset="-122"/>
                 <a:cs typeface="Calibri" pitchFamily="34" charset="-120"/>
               </a:rPr>
-              <a:t>board submit</a:t>
+              <a:t>board award</a:t>
             </a:r>
             <a:endParaRPr lang="en-US" sz="1000" dirty="0"/>
           </a:p>
@@ -24884,8 +24884,8 @@
         </p:nvSpPr>
         <p:spPr>
           <a:xfrm>
-            <a:off x="9416288" y="5833872"/>
-            <a:ext cx="1011936" cy="256032"/>
+            <a:off x="8246872" y="5833872"/>
+            <a:ext cx="945896" cy="256032"/>
           </a:xfrm>
           <a:prstGeom prst="roundRect">
             <a:avLst>
@@ -24911,8 +24911,8 @@
         </p:nvSpPr>
         <p:spPr>
           <a:xfrm>
-            <a:off x="9416288" y="5833872"/>
-            <a:ext cx="1011936" cy="256032"/>
+            <a:off x="8246872" y="5833872"/>
+            <a:ext cx="945896" cy="256032"/>
           </a:xfrm>
           <a:prstGeom prst="rect">
             <a:avLst/>
@@ -24936,7 +24936,7 @@
                 <a:ea typeface="Calibri" pitchFamily="34" charset="-122"/>
                 <a:cs typeface="Calibri" pitchFamily="34" charset="-120"/>
               </a:rPr>
-              <a:t>board reopen</a:t>
+              <a:t>board claim</a:t>
             </a:r>
             <a:endParaRPr lang="en-US" sz="1000" dirty="0"/>
           </a:p>
@@ -24950,8 +24950,8 @@
         </p:nvSpPr>
         <p:spPr>
           <a:xfrm>
-            <a:off x="10519664" y="5833872"/>
-            <a:ext cx="615696" cy="256032"/>
+            <a:off x="9284208" y="5833872"/>
+            <a:ext cx="1210056" cy="256032"/>
           </a:xfrm>
           <a:prstGeom prst="roundRect">
             <a:avLst>
@@ -24977,8 +24977,8 @@
         </p:nvSpPr>
         <p:spPr>
           <a:xfrm>
-            <a:off x="10519664" y="5833872"/>
-            <a:ext cx="615696" cy="256032"/>
+            <a:off x="9284208" y="5833872"/>
+            <a:ext cx="1210056" cy="256032"/>
           </a:xfrm>
           <a:prstGeom prst="rect">
             <a:avLst/>
@@ -25002,7 +25002,73 @@
                 <a:ea typeface="Calibri" pitchFamily="34" charset="-122"/>
                 <a:cs typeface="Calibri" pitchFamily="34" charset="-120"/>
               </a:rPr>
-              <a:t>verify</a:t>
+              <a:t>board heartbeat</a:t>
+            </a:r>
+            <a:endParaRPr lang="en-US" sz="1000" dirty="0"/>
+          </a:p>
+        </p:txBody>
+      </p:sp>
+      <p:sp>
+        <p:nvSpPr>
+          <p:cNvPr id="168" name="Shape 166"/>
+          <p:cNvSpPr/>
+          <p:nvPr/>
+        </p:nvSpPr>
+        <p:spPr>
+          <a:xfrm>
+            <a:off x="10585704" y="5833872"/>
+            <a:ext cx="1077976" cy="256032"/>
+          </a:xfrm>
+          <a:prstGeom prst="roundRect">
+            <a:avLst>
+              <a:gd name="adj" fmla="val 50000"/>
+            </a:avLst>
+          </a:prstGeom>
+          <a:solidFill>
+            <a:srgbClr val="F3F5F8"/>
+          </a:solidFill>
+          <a:ln w="12700">
+            <a:solidFill>
+              <a:srgbClr val="F3F5F8"/>
+            </a:solidFill>
+            <a:prstDash val="solid"/>
+          </a:ln>
+        </p:spPr>
+      </p:sp>
+      <p:sp>
+        <p:nvSpPr>
+          <p:cNvPr id="169" name="Text 167"/>
+          <p:cNvSpPr txBox="1"/>
+          <p:nvPr/>
+        </p:nvSpPr>
+        <p:spPr>
+          <a:xfrm>
+            <a:off x="10585704" y="5833872"/>
+            <a:ext cx="1077976" cy="256032"/>
+          </a:xfrm>
+          <a:prstGeom prst="rect">
+            <a:avLst/>
+          </a:prstGeom>
+          <a:noFill/>
+          <a:ln/>
+        </p:spPr>
+        <p:txBody>
+          <a:bodyPr wrap="square" lIns="0" tIns="0" rIns="0" bIns="0" rtlCol="0" anchor="ctr"/>
+          <a:lstStyle/>
+          <a:p>
+            <a:pPr algn="ctr" indent="0" marL="0">
+              <a:buNone/>
+            </a:pPr>
+            <a:r>
+              <a:rPr lang="en-US" sz="1000" dirty="0">
+                <a:solidFill>
+                  <a:srgbClr val="1F2430"/>
+                </a:solidFill>
+                <a:latin typeface="Calibri" pitchFamily="34" charset="0"/>
+                <a:ea typeface="Calibri" pitchFamily="34" charset="-122"/>
+                <a:cs typeface="Calibri" pitchFamily="34" charset="-120"/>
+              </a:rPr>
+              <a:t>board release</a:t>
             </a:r>
             <a:endParaRPr lang="en-US" sz="1000" dirty="0"/>
           </a:p>
@@ -27648,7 +27714,7 @@
                 <a:ea typeface="Courier New" pitchFamily="34" charset="-122"/>
                 <a:cs typeface="Courier New" pitchFamily="34" charset="-120"/>
               </a:rPr>
-              <a:t>  sdlc 0.22.4, license: community</a:t>
+              <a:t>  sdlc 0.23.0, license: community</a:t>
             </a:r>
             <a:endParaRPr lang="en-US" sz="1000" dirty="0"/>
           </a:p>

--- a/docs/demo/sdlc-calculator-demo.en.pptx
+++ b/docs/demo/sdlc-calculator-demo.en.pptx
@@ -6677,7 +6677,7 @@
                 <a:ea typeface="Courier New" pitchFamily="34" charset="-122"/>
                 <a:cs typeface="Courier New" pitchFamily="34" charset="-120"/>
               </a:rPr>
-              <a:t>  code-owner (e6ae90721f15)</a:t>
+              <a:t>  code-owner (9891c6de1a15)</a:t>
             </a:r>
             <a:endParaRPr lang="en-US" sz="1000" dirty="0"/>
           </a:p>
@@ -6762,7 +6762,7 @@
                 <a:ea typeface="Courier New" pitchFamily="34" charset="-122"/>
                 <a:cs typeface="Courier New" pitchFamily="34" charset="-120"/>
               </a:rPr>
-              <a:t>  "SDLC-Approval: basic-arithmetic:review:e</a:t>
+              <a:t>  "SDLC-Approval: basic-arithmetic:review:9</a:t>
             </a:r>
             <a:endParaRPr lang="en-US" sz="1000" dirty="0"/>
           </a:p>
@@ -6779,7 +6779,7 @@
                 <a:ea typeface="Courier New" pitchFamily="34" charset="-122"/>
                 <a:cs typeface="Courier New" pitchFamily="34" charset="-120"/>
               </a:rPr>
-              <a:t>  6ae90721f15"</a:t>
+              <a:t>  891c6de1a15"</a:t>
             </a:r>
             <a:endParaRPr lang="en-US" sz="1000" dirty="0"/>
           </a:p>
@@ -7460,7 +7460,7 @@
                 <a:ea typeface="Courier New" pitchFamily="34" charset="-122"/>
                 <a:cs typeface="Courier New" pitchFamily="34" charset="-120"/>
               </a:rPr>
-              <a:t>  release-manager (e6ae90721f15)</a:t>
+              <a:t>  release-manager (9891c6de1a15)</a:t>
             </a:r>
             <a:endParaRPr lang="en-US" sz="1000" dirty="0"/>
           </a:p>
@@ -7528,7 +7528,7 @@
                 <a:ea typeface="Courier New" pitchFamily="34" charset="-122"/>
                 <a:cs typeface="Courier New" pitchFamily="34" charset="-120"/>
               </a:rPr>
-              <a:t>  gate" -m "SDLC-Approval: basic-arithmetic:release:e6ae90721f15"</a:t>
+              <a:t>  gate" -m "SDLC-Approval: basic-arithmetic:release:9891c6de1a15"</a:t>
             </a:r>
             <a:endParaRPr lang="en-US" sz="1000" dirty="0"/>
           </a:p>
@@ -7811,7 +7811,7 @@
                 <a:ea typeface="Courier New" pitchFamily="34" charset="-122"/>
                 <a:cs typeface="Courier New" pitchFamily="34" charset="-120"/>
               </a:rPr>
-              <a:t>✓ basic-arithmetic/intent alice valid 718a76ed trailer: missing</a:t>
+              <a:t>✓ basic-arithmetic/intent alice valid 53404371 trailer: missing</a:t>
             </a:r>
             <a:endParaRPr lang="en-US" sz="1000" dirty="0"/>
           </a:p>
@@ -7828,7 +7828,7 @@
                 <a:ea typeface="Courier New" pitchFamily="34" charset="-122"/>
                 <a:cs typeface="Courier New" pitchFamily="34" charset="-120"/>
               </a:rPr>
-              <a:t>✓ basic-arithmetic/spec alice valid 07d07c3d trailer: missing</a:t>
+              <a:t>✓ basic-arithmetic/spec alice valid e73f7d4f trailer: missing</a:t>
             </a:r>
             <a:endParaRPr lang="en-US" sz="1000" dirty="0"/>
           </a:p>
@@ -7845,7 +7845,7 @@
                 <a:ea typeface="Courier New" pitchFamily="34" charset="-122"/>
                 <a:cs typeface="Courier New" pitchFamily="34" charset="-120"/>
               </a:rPr>
-              <a:t>✗ basic-arithmetic/plan bob wrong-signer 07d07c3d trailer: missing</a:t>
+              <a:t>✗ basic-arithmetic/plan bob wrong-signer e73f7d4f trailer: missing</a:t>
             </a:r>
             <a:endParaRPr lang="en-US" sz="1000" dirty="0"/>
           </a:p>
@@ -7862,7 +7862,7 @@
                 <a:ea typeface="Courier New" pitchFamily="34" charset="-122"/>
                 <a:cs typeface="Courier New" pitchFamily="34" charset="-120"/>
               </a:rPr>
-              <a:t>✓ basic-arithmetic/review carol valid 206d8b9e trailer: missing</a:t>
+              <a:t>✓ basic-arithmetic/review carol valid f39b6f5e trailer: missing</a:t>
             </a:r>
             <a:endParaRPr lang="en-US" sz="1000" dirty="0"/>
           </a:p>
@@ -7879,7 +7879,7 @@
                 <a:ea typeface="Courier New" pitchFamily="34" charset="-122"/>
                 <a:cs typeface="Courier New" pitchFamily="34" charset="-120"/>
               </a:rPr>
-              <a:t>✓ basic-arithmetic/release alice valid 0ef43b5c trailer: missing</a:t>
+              <a:t>✓ basic-arithmetic/release alice valid 78fbcb1f trailer: missing</a:t>
             </a:r>
             <a:endParaRPr lang="en-US" sz="1000" dirty="0"/>
           </a:p>
@@ -7896,7 +7896,7 @@
                 <a:ea typeface="Courier New" pitchFamily="34" charset="-122"/>
                 <a:cs typeface="Courier New" pitchFamily="34" charset="-120"/>
               </a:rPr>
-              <a:t>✓ openspec/roles.yaml alice@calc.example bootstrap c3169312</a:t>
+              <a:t>✓ openspec/roles.yaml alice@calc.example bootstrap 6359f583</a:t>
             </a:r>
             <a:endParaRPr lang="en-US" sz="1000" dirty="0"/>
           </a:p>
@@ -14382,7 +14382,7 @@
                 <a:ea typeface="Courier New" pitchFamily="34" charset="-122"/>
                 <a:cs typeface="Courier New" pitchFamily="34" charset="-120"/>
               </a:rPr>
-              <a:t>  archived) · sdlc 0.23.0, license:</a:t>
+              <a:t>  archived) · sdlc 0.23.1, license:</a:t>
             </a:r>
             <a:endParaRPr lang="en-US" sz="1000" dirty="0"/>
           </a:p>
@@ -14903,7 +14903,7 @@
                 <a:ea typeface="Courier New" pitchFamily="34" charset="-122"/>
                 <a:cs typeface="Courier New" pitchFamily="34" charset="-120"/>
               </a:rPr>
-              <a:t>2026-10-17T12:05:52.719Z  gate.review.await</a:t>
+              <a:t>2026-10-17T20:41:41.091Z  gate.review.await</a:t>
             </a:r>
             <a:endParaRPr lang="en-US" sz="1000" dirty="0"/>
           </a:p>
@@ -14937,7 +14937,7 @@
                 <a:ea typeface="Courier New" pitchFamily="34" charset="-122"/>
                 <a:cs typeface="Courier New" pitchFamily="34" charset="-120"/>
               </a:rPr>
-              <a:t>  sha256:e6ae90721f1568fc9534a6ac07557f1f70</a:t>
+              <a:t>  sha256:9891c6de1a151d070e566d76bfa51b84aa</a:t>
             </a:r>
             <a:endParaRPr lang="en-US" sz="1000" dirty="0"/>
           </a:p>
@@ -14954,7 +14954,7 @@
                 <a:ea typeface="Courier New" pitchFamily="34" charset="-122"/>
                 <a:cs typeface="Courier New" pitchFamily="34" charset="-120"/>
               </a:rPr>
-              <a:t>  25fa920d7654a7a7356febf480dede [sdlc</a:t>
+              <a:t>  46557985f8f9b311b46c06b9ef3966 [sdlc</a:t>
             </a:r>
             <a:endParaRPr lang="en-US" sz="1000" dirty="0"/>
           </a:p>
@@ -14971,7 +14971,7 @@
                 <a:ea typeface="Courier New" pitchFamily="34" charset="-122"/>
                 <a:cs typeface="Courier New" pitchFamily="34" charset="-120"/>
               </a:rPr>
-              <a:t>  0.23.0 · community]</a:t>
+              <a:t>  0.23.1 · community]</a:t>
             </a:r>
             <a:endParaRPr lang="en-US" sz="1000" dirty="0"/>
           </a:p>
@@ -14988,7 +14988,7 @@
                 <a:ea typeface="Courier New" pitchFamily="34" charset="-122"/>
                 <a:cs typeface="Courier New" pitchFamily="34" charset="-120"/>
               </a:rPr>
-              <a:t>2026-10-17T12:05:55.671Z  gate.review.appro</a:t>
+              <a:t>2026-10-17T20:41:44.326Z  gate.review.appro</a:t>
             </a:r>
             <a:endParaRPr lang="en-US" sz="1000" dirty="0"/>
           </a:p>
@@ -15039,7 +15039,7 @@
                 <a:ea typeface="Courier New" pitchFamily="34" charset="-122"/>
                 <a:cs typeface="Courier New" pitchFamily="34" charset="-120"/>
               </a:rPr>
-              <a:t>  [sdlc 0.23.0 · community]</a:t>
+              <a:t>  [sdlc 0.23.1 · community]</a:t>
             </a:r>
             <a:endParaRPr lang="en-US" sz="1000" dirty="0"/>
           </a:p>
@@ -15056,7 +15056,7 @@
                 <a:ea typeface="Courier New" pitchFamily="34" charset="-122"/>
                 <a:cs typeface="Courier New" pitchFamily="34" charset="-120"/>
               </a:rPr>
-              <a:t>2026-10-17T12:06:02.095Z  gate.release.appr</a:t>
+              <a:t>2026-10-17T20:41:50.823Z  gate.release.appr</a:t>
             </a:r>
             <a:endParaRPr lang="en-US" sz="1000" dirty="0"/>
           </a:p>
@@ -15107,7 +15107,7 @@
                 <a:ea typeface="Courier New" pitchFamily="34" charset="-122"/>
                 <a:cs typeface="Courier New" pitchFamily="34" charset="-120"/>
               </a:rPr>
-              <a:t>  release-manager [sdlc 0.23.0 · community]</a:t>
+              <a:t>  release-manager [sdlc 0.23.1 · community]</a:t>
             </a:r>
             <a:endParaRPr lang="en-US" sz="1000" dirty="0"/>
           </a:p>
@@ -16435,7 +16435,7 @@
                 <a:ea typeface="Courier New" pitchFamily="34" charset="-122"/>
                 <a:cs typeface="Courier New" pitchFamily="34" charset="-120"/>
               </a:rPr>
-              <a:t>✓ test (1.0s)</a:t>
+              <a:t>✓ test (1.3s)</a:t>
             </a:r>
             <a:endParaRPr lang="en-US" sz="1000" dirty="0"/>
           </a:p>
@@ -16452,7 +16452,7 @@
                 <a:ea typeface="Courier New" pitchFamily="34" charset="-122"/>
                 <a:cs typeface="Courier New" pitchFamily="34" charset="-120"/>
               </a:rPr>
-              <a:t>✓ ci-green (ci/pipeline_status, 0.7s)</a:t>
+              <a:t>✓ ci-green (ci/pipeline_status, 0.5s)</a:t>
             </a:r>
             <a:endParaRPr lang="en-US" sz="1000" dirty="0"/>
           </a:p>
@@ -16888,7 +16888,7 @@
                 <a:ea typeface="Courier New" pitchFamily="34" charset="-122"/>
                 <a:cs typeface="Courier New" pitchFamily="34" charset="-120"/>
               </a:rPr>
-              <a:t>      "id": "20261017T120700861Z-ci-green-8</a:t>
+              <a:t>      "id": "20261017T204249623Z-ci-green-6</a:t>
             </a:r>
             <a:endParaRPr lang="en-US" sz="1000" dirty="0"/>
           </a:p>
@@ -16905,7 +16905,7 @@
                 <a:ea typeface="Courier New" pitchFamily="34" charset="-122"/>
                 <a:cs typeface="Courier New" pitchFamily="34" charset="-120"/>
               </a:rPr>
-              <a:t>  6278b",</a:t>
+              <a:t>  3ed1f",</a:t>
             </a:r>
             <a:endParaRPr lang="en-US" sz="1000" dirty="0"/>
           </a:p>
@@ -17041,7 +17041,7 @@
                 <a:ea typeface="Courier New" pitchFamily="34" charset="-122"/>
                 <a:cs typeface="Courier New" pitchFamily="34" charset="-120"/>
               </a:rPr>
-              <a:t>        "ref": "a8d15a6aac9869e504b3773bc7e</a:t>
+              <a:t>        "ref": "df61e050c6bf2bc4bacdc1c03b3</a:t>
             </a:r>
             <a:endParaRPr lang="en-US" sz="1000" dirty="0"/>
           </a:p>
@@ -17058,7 +17058,7 @@
                 <a:ea typeface="Courier New" pitchFamily="34" charset="-122"/>
                 <a:cs typeface="Courier New" pitchFamily="34" charset="-120"/>
               </a:rPr>
-              <a:t>  9ad692d73c039",</a:t>
+              <a:t>  3abfc37eebe20",</a:t>
             </a:r>
             <a:endParaRPr lang="en-US" sz="1000" dirty="0"/>
           </a:p>
@@ -27714,7 +27714,7 @@
                 <a:ea typeface="Courier New" pitchFamily="34" charset="-122"/>
                 <a:cs typeface="Courier New" pitchFamily="34" charset="-120"/>
               </a:rPr>
-              <a:t>  sdlc 0.23.0, license: community</a:t>
+              <a:t>  sdlc 0.23.1, license: community</a:t>
             </a:r>
             <a:endParaRPr lang="en-US" sz="1000" dirty="0"/>
           </a:p>

--- a/docs/demo/sdlc-calculator-demo.en.pptx
+++ b/docs/demo/sdlc-calculator-demo.en.pptx
@@ -5112,7 +5112,7 @@
                 <a:ea typeface="Courier New" pitchFamily="34" charset="-122"/>
                 <a:cs typeface="Courier New" pitchFamily="34" charset="-120"/>
               </a:rPr>
-              <a:t>✓ test (1.0s)</a:t>
+              <a:t>✓ test (0.9s)</a:t>
             </a:r>
             <a:endParaRPr lang="en-US" sz="1000" dirty="0"/>
           </a:p>
@@ -6677,7 +6677,7 @@
                 <a:ea typeface="Courier New" pitchFamily="34" charset="-122"/>
                 <a:cs typeface="Courier New" pitchFamily="34" charset="-120"/>
               </a:rPr>
-              <a:t>  code-owner (9891c6de1a15)</a:t>
+              <a:t>  code-owner (9d42f5b6d4b3)</a:t>
             </a:r>
             <a:endParaRPr lang="en-US" sz="1000" dirty="0"/>
           </a:p>
@@ -6779,7 +6779,7 @@
                 <a:ea typeface="Courier New" pitchFamily="34" charset="-122"/>
                 <a:cs typeface="Courier New" pitchFamily="34" charset="-120"/>
               </a:rPr>
-              <a:t>  891c6de1a15"</a:t>
+              <a:t>  d42f5b6d4b3"</a:t>
             </a:r>
             <a:endParaRPr lang="en-US" sz="1000" dirty="0"/>
           </a:p>
@@ -7460,7 +7460,7 @@
                 <a:ea typeface="Courier New" pitchFamily="34" charset="-122"/>
                 <a:cs typeface="Courier New" pitchFamily="34" charset="-120"/>
               </a:rPr>
-              <a:t>  release-manager (9891c6de1a15)</a:t>
+              <a:t>  release-manager (9d42f5b6d4b3)</a:t>
             </a:r>
             <a:endParaRPr lang="en-US" sz="1000" dirty="0"/>
           </a:p>
@@ -7528,7 +7528,7 @@
                 <a:ea typeface="Courier New" pitchFamily="34" charset="-122"/>
                 <a:cs typeface="Courier New" pitchFamily="34" charset="-120"/>
               </a:rPr>
-              <a:t>  gate" -m "SDLC-Approval: basic-arithmetic:release:9891c6de1a15"</a:t>
+              <a:t>  gate" -m "SDLC-Approval: basic-arithmetic:release:9d42f5b6d4b3"</a:t>
             </a:r>
             <a:endParaRPr lang="en-US" sz="1000" dirty="0"/>
           </a:p>
@@ -7811,7 +7811,7 @@
                 <a:ea typeface="Courier New" pitchFamily="34" charset="-122"/>
                 <a:cs typeface="Courier New" pitchFamily="34" charset="-120"/>
               </a:rPr>
-              <a:t>✓ basic-arithmetic/intent alice valid 53404371 trailer: missing</a:t>
+              <a:t>✓ basic-arithmetic/intent alice valid 70e703af trailer: missing</a:t>
             </a:r>
             <a:endParaRPr lang="en-US" sz="1000" dirty="0"/>
           </a:p>
@@ -7828,7 +7828,7 @@
                 <a:ea typeface="Courier New" pitchFamily="34" charset="-122"/>
                 <a:cs typeface="Courier New" pitchFamily="34" charset="-120"/>
               </a:rPr>
-              <a:t>✓ basic-arithmetic/spec alice valid e73f7d4f trailer: missing</a:t>
+              <a:t>✓ basic-arithmetic/spec alice valid 570f14b2 trailer: missing</a:t>
             </a:r>
             <a:endParaRPr lang="en-US" sz="1000" dirty="0"/>
           </a:p>
@@ -7845,7 +7845,7 @@
                 <a:ea typeface="Courier New" pitchFamily="34" charset="-122"/>
                 <a:cs typeface="Courier New" pitchFamily="34" charset="-120"/>
               </a:rPr>
-              <a:t>✗ basic-arithmetic/plan bob wrong-signer e73f7d4f trailer: missing</a:t>
+              <a:t>✗ basic-arithmetic/plan bob wrong-signer 570f14b2 trailer: missing</a:t>
             </a:r>
             <a:endParaRPr lang="en-US" sz="1000" dirty="0"/>
           </a:p>
@@ -7862,7 +7862,7 @@
                 <a:ea typeface="Courier New" pitchFamily="34" charset="-122"/>
                 <a:cs typeface="Courier New" pitchFamily="34" charset="-120"/>
               </a:rPr>
-              <a:t>✓ basic-arithmetic/review carol valid f39b6f5e trailer: missing</a:t>
+              <a:t>✓ basic-arithmetic/review carol valid a47f201e trailer: missing</a:t>
             </a:r>
             <a:endParaRPr lang="en-US" sz="1000" dirty="0"/>
           </a:p>
@@ -7879,7 +7879,7 @@
                 <a:ea typeface="Courier New" pitchFamily="34" charset="-122"/>
                 <a:cs typeface="Courier New" pitchFamily="34" charset="-120"/>
               </a:rPr>
-              <a:t>✓ basic-arithmetic/release alice valid 78fbcb1f trailer: missing</a:t>
+              <a:t>✓ basic-arithmetic/release alice valid b91bc189 trailer: missing</a:t>
             </a:r>
             <a:endParaRPr lang="en-US" sz="1000" dirty="0"/>
           </a:p>
@@ -7896,7 +7896,7 @@
                 <a:ea typeface="Courier New" pitchFamily="34" charset="-122"/>
                 <a:cs typeface="Courier New" pitchFamily="34" charset="-120"/>
               </a:rPr>
-              <a:t>✓ openspec/roles.yaml alice@calc.example bootstrap 6359f583</a:t>
+              <a:t>✓ openspec/roles.yaml alice@calc.example bootstrap 3d92b77e</a:t>
             </a:r>
             <a:endParaRPr lang="en-US" sz="1000" dirty="0"/>
           </a:p>
@@ -8528,7 +8528,7 @@
                 <a:ea typeface="Courier New" pitchFamily="34" charset="-122"/>
                 <a:cs typeface="Courier New" pitchFamily="34" charset="-120"/>
               </a:rPr>
-              <a:t>  openspec\changes\archive\2026-10-17-basic</a:t>
+              <a:t>  openspec\changes\archive\2026-10-18-basic</a:t>
             </a:r>
             <a:endParaRPr lang="en-US" sz="1000" dirty="0"/>
           </a:p>
@@ -14031,7 +14031,7 @@
                 <a:ea typeface="Courier New" pitchFamily="34" charset="-122"/>
                 <a:cs typeface="Courier New" pitchFamily="34" charset="-120"/>
               </a:rPr>
-              <a:t>  Write plan (plan.md) for the plan gate.</a:t>
+              <a:t>  Write plan (plan.md) for the plan gate.;</a:t>
             </a:r>
             <a:endParaRPr lang="en-US" sz="1000" dirty="0"/>
           </a:p>
@@ -14048,6 +14048,40 @@
                 <a:ea typeface="Courier New" pitchFamily="34" charset="-122"/>
                 <a:cs typeface="Courier New" pitchFamily="34" charset="-120"/>
               </a:rPr>
+              <a:t>  review.md belongs at openspec/changes/fix</a:t>
+            </a:r>
+            <a:endParaRPr lang="en-US" sz="1000" dirty="0"/>
+          </a:p>
+          <a:p>
+            <a:pPr indent="0" marL="0">
+              <a:buNone/>
+            </a:pPr>
+            <a:r>
+              <a:rPr lang="en-US" sz="1000" dirty="0">
+                <a:solidFill>
+                  <a:srgbClr val="E8EEF2"/>
+                </a:solidFill>
+                <a:latin typeface="Courier New" pitchFamily="34" charset="0"/>
+                <a:ea typeface="Courier New" pitchFamily="34" charset="-122"/>
+                <a:cs typeface="Courier New" pitchFamily="34" charset="-120"/>
+              </a:rPr>
+              <a:t>  -rounding/review.md</a:t>
+            </a:r>
+            <a:endParaRPr lang="en-US" sz="1000" dirty="0"/>
+          </a:p>
+          <a:p>
+            <a:pPr indent="0" marL="0">
+              <a:buNone/>
+            </a:pPr>
+            <a:r>
+              <a:rPr lang="en-US" sz="1000" dirty="0">
+                <a:solidFill>
+                  <a:srgbClr val="E8EEF2"/>
+                </a:solidFill>
+                <a:latin typeface="Courier New" pitchFamily="34" charset="0"/>
+                <a:ea typeface="Courier New" pitchFamily="34" charset="-122"/>
+                <a:cs typeface="Courier New" pitchFamily="34" charset="-120"/>
+              </a:rPr>
               <a:t>voice-input   plan      agent: /sdlc:intent</a:t>
             </a:r>
             <a:endParaRPr lang="en-US" sz="1000" dirty="0"/>
@@ -14116,7 +14150,41 @@
                 <a:ea typeface="Courier New" pitchFamily="34" charset="-122"/>
                 <a:cs typeface="Courier New" pitchFamily="34" charset="-120"/>
               </a:rPr>
-              <a:t>  artifact(s), then ask for approval again.</a:t>
+              <a:t>  artifact(s), then ask for approval</a:t>
+            </a:r>
+            <a:endParaRPr lang="en-US" sz="1000" dirty="0"/>
+          </a:p>
+          <a:p>
+            <a:pPr indent="0" marL="0">
+              <a:buNone/>
+            </a:pPr>
+            <a:r>
+              <a:rPr lang="en-US" sz="1000" dirty="0">
+                <a:solidFill>
+                  <a:srgbClr val="E8EEF2"/>
+                </a:solidFill>
+                <a:latin typeface="Courier New" pitchFamily="34" charset="0"/>
+                <a:ea typeface="Courier New" pitchFamily="34" charset="-122"/>
+                <a:cs typeface="Courier New" pitchFamily="34" charset="-120"/>
+              </a:rPr>
+              <a:t>  again.; review.md belongs at</a:t>
+            </a:r>
+            <a:endParaRPr lang="en-US" sz="1000" dirty="0"/>
+          </a:p>
+          <a:p>
+            <a:pPr indent="0" marL="0">
+              <a:buNone/>
+            </a:pPr>
+            <a:r>
+              <a:rPr lang="en-US" sz="1000" dirty="0">
+                <a:solidFill>
+                  <a:srgbClr val="E8EEF2"/>
+                </a:solidFill>
+                <a:latin typeface="Courier New" pitchFamily="34" charset="0"/>
+                <a:ea typeface="Courier New" pitchFamily="34" charset="-122"/>
+                <a:cs typeface="Courier New" pitchFamily="34" charset="-120"/>
+              </a:rPr>
+              <a:t>  openspec/changes/voice-input/review.md</a:t>
             </a:r>
             <a:endParaRPr lang="en-US" sz="1000" dirty="0"/>
           </a:p>
@@ -14382,7 +14450,7 @@
                 <a:ea typeface="Courier New" pitchFamily="34" charset="-122"/>
                 <a:cs typeface="Courier New" pitchFamily="34" charset="-120"/>
               </a:rPr>
-              <a:t>  archived) · sdlc 0.23.1, license:</a:t>
+              <a:t>  archived) · sdlc 0.23.2, license:</a:t>
             </a:r>
             <a:endParaRPr lang="en-US" sz="1000" dirty="0"/>
           </a:p>
@@ -14586,7 +14654,7 @@
                 <a:ea typeface="Courier New" pitchFamily="34" charset="-122"/>
                 <a:cs typeface="Courier New" pitchFamily="34" charset="-120"/>
               </a:rPr>
-              <a:t>  intent 3 · spec 4 · plan 17 · review 3;</a:t>
+              <a:t>  intent 3 · spec 4 · plan 16 · review 3;</a:t>
             </a:r>
             <a:endParaRPr lang="en-US" sz="1000" dirty="0"/>
           </a:p>
@@ -14903,7 +14971,7 @@
                 <a:ea typeface="Courier New" pitchFamily="34" charset="-122"/>
                 <a:cs typeface="Courier New" pitchFamily="34" charset="-120"/>
               </a:rPr>
-              <a:t>2026-10-17T20:41:41.091Z  gate.review.await</a:t>
+              <a:t>2026-10-18T07:40:53.720Z  gate.review.await</a:t>
             </a:r>
             <a:endParaRPr lang="en-US" sz="1000" dirty="0"/>
           </a:p>
@@ -14937,7 +15005,7 @@
                 <a:ea typeface="Courier New" pitchFamily="34" charset="-122"/>
                 <a:cs typeface="Courier New" pitchFamily="34" charset="-120"/>
               </a:rPr>
-              <a:t>  sha256:9891c6de1a151d070e566d76bfa51b84aa</a:t>
+              <a:t>  sha256:9d42f5b6d4b3d84999138004781b26bf1e</a:t>
             </a:r>
             <a:endParaRPr lang="en-US" sz="1000" dirty="0"/>
           </a:p>
@@ -14954,7 +15022,7 @@
                 <a:ea typeface="Courier New" pitchFamily="34" charset="-122"/>
                 <a:cs typeface="Courier New" pitchFamily="34" charset="-120"/>
               </a:rPr>
-              <a:t>  46557985f8f9b311b46c06b9ef3966 [sdlc</a:t>
+              <a:t>  81ecdf1814b1080690b954aea061e2 [sdlc</a:t>
             </a:r>
             <a:endParaRPr lang="en-US" sz="1000" dirty="0"/>
           </a:p>
@@ -14971,7 +15039,7 @@
                 <a:ea typeface="Courier New" pitchFamily="34" charset="-122"/>
                 <a:cs typeface="Courier New" pitchFamily="34" charset="-120"/>
               </a:rPr>
-              <a:t>  0.23.1 · community]</a:t>
+              <a:t>  0.23.2 · community]</a:t>
             </a:r>
             <a:endParaRPr lang="en-US" sz="1000" dirty="0"/>
           </a:p>
@@ -14988,7 +15056,7 @@
                 <a:ea typeface="Courier New" pitchFamily="34" charset="-122"/>
                 <a:cs typeface="Courier New" pitchFamily="34" charset="-120"/>
               </a:rPr>
-              <a:t>2026-10-17T20:41:44.326Z  gate.review.appro</a:t>
+              <a:t>2026-10-18T07:40:56.588Z  gate.review.appro</a:t>
             </a:r>
             <a:endParaRPr lang="en-US" sz="1000" dirty="0"/>
           </a:p>
@@ -15039,7 +15107,7 @@
                 <a:ea typeface="Courier New" pitchFamily="34" charset="-122"/>
                 <a:cs typeface="Courier New" pitchFamily="34" charset="-120"/>
               </a:rPr>
-              <a:t>  [sdlc 0.23.1 · community]</a:t>
+              <a:t>  [sdlc 0.23.2 · community]</a:t>
             </a:r>
             <a:endParaRPr lang="en-US" sz="1000" dirty="0"/>
           </a:p>
@@ -15056,7 +15124,7 @@
                 <a:ea typeface="Courier New" pitchFamily="34" charset="-122"/>
                 <a:cs typeface="Courier New" pitchFamily="34" charset="-120"/>
               </a:rPr>
-              <a:t>2026-10-17T20:41:50.823Z  gate.release.appr</a:t>
+              <a:t>2026-10-18T07:41:02.664Z  gate.release.appr</a:t>
             </a:r>
             <a:endParaRPr lang="en-US" sz="1000" dirty="0"/>
           </a:p>
@@ -15107,7 +15175,7 @@
                 <a:ea typeface="Courier New" pitchFamily="34" charset="-122"/>
                 <a:cs typeface="Courier New" pitchFamily="34" charset="-120"/>
               </a:rPr>
-              <a:t>  release-manager [sdlc 0.23.1 · community]</a:t>
+              <a:t>  release-manager [sdlc 0.23.2 · community]</a:t>
             </a:r>
             <a:endParaRPr lang="en-US" sz="1000" dirty="0"/>
           </a:p>
@@ -16435,7 +16503,7 @@
                 <a:ea typeface="Courier New" pitchFamily="34" charset="-122"/>
                 <a:cs typeface="Courier New" pitchFamily="34" charset="-120"/>
               </a:rPr>
-              <a:t>✓ test (1.3s)</a:t>
+              <a:t>✓ test (0.9s)</a:t>
             </a:r>
             <a:endParaRPr lang="en-US" sz="1000" dirty="0"/>
           </a:p>
@@ -16888,7 +16956,7 @@
                 <a:ea typeface="Courier New" pitchFamily="34" charset="-122"/>
                 <a:cs typeface="Courier New" pitchFamily="34" charset="-120"/>
               </a:rPr>
-              <a:t>      "id": "20261017T204249623Z-ci-green-6</a:t>
+              <a:t>      "id": "20261018T074156793Z-ci-green-d</a:t>
             </a:r>
             <a:endParaRPr lang="en-US" sz="1000" dirty="0"/>
           </a:p>
@@ -16905,7 +16973,7 @@
                 <a:ea typeface="Courier New" pitchFamily="34" charset="-122"/>
                 <a:cs typeface="Courier New" pitchFamily="34" charset="-120"/>
               </a:rPr>
-              <a:t>  3ed1f",</a:t>
+              <a:t>  04ca9",</a:t>
             </a:r>
             <a:endParaRPr lang="en-US" sz="1000" dirty="0"/>
           </a:p>
@@ -17041,7 +17109,7 @@
                 <a:ea typeface="Courier New" pitchFamily="34" charset="-122"/>
                 <a:cs typeface="Courier New" pitchFamily="34" charset="-120"/>
               </a:rPr>
-              <a:t>        "ref": "df61e050c6bf2bc4bacdc1c03b3</a:t>
+              <a:t>        "ref": "be77f0dbb0a8758658e1211b191</a:t>
             </a:r>
             <a:endParaRPr lang="en-US" sz="1000" dirty="0"/>
           </a:p>
@@ -17058,7 +17126,7 @@
                 <a:ea typeface="Courier New" pitchFamily="34" charset="-122"/>
                 <a:cs typeface="Courier New" pitchFamily="34" charset="-120"/>
               </a:rPr>
-              <a:t>  3abfc37eebe20",</a:t>
+              <a:t>  417752eb59660",</a:t>
             </a:r>
             <a:endParaRPr lang="en-US" sz="1000" dirty="0"/>
           </a:p>
@@ -27714,7 +27782,7 @@
                 <a:ea typeface="Courier New" pitchFamily="34" charset="-122"/>
                 <a:cs typeface="Courier New" pitchFamily="34" charset="-120"/>
               </a:rPr>
-              <a:t>  sdlc 0.23.1, license: community</a:t>
+              <a:t>  sdlc 0.23.2, license: community</a:t>
             </a:r>
             <a:endParaRPr lang="en-US" sz="1000" dirty="0"/>
           </a:p>
@@ -34505,7 +34573,7 @@
                 <a:ea typeface="Courier New" pitchFamily="34" charset="-122"/>
                 <a:cs typeface="Courier New" pitchFamily="34" charset="-120"/>
               </a:rPr>
-              <a:t>  (b6d7eb14bb6b)</a:t>
+              <a:t>  (399e11488c29)</a:t>
             </a:r>
             <a:endParaRPr lang="en-US" sz="1000" dirty="0"/>
           </a:p>
@@ -34641,7 +34709,7 @@
                 <a:ea typeface="Courier New" pitchFamily="34" charset="-122"/>
                 <a:cs typeface="Courier New" pitchFamily="34" charset="-120"/>
               </a:rPr>
-              <a:t>  b6d7eb14bb6b"</a:t>
+              <a:t>  399e11488c29"</a:t>
             </a:r>
             <a:endParaRPr lang="en-US" sz="1000" dirty="0"/>
           </a:p>

--- a/docs/demo/sdlc-calculator-demo.en.pptx
+++ b/docs/demo/sdlc-calculator-demo.en.pptx
@@ -6677,7 +6677,7 @@
                 <a:ea typeface="Courier New" pitchFamily="34" charset="-122"/>
                 <a:cs typeface="Courier New" pitchFamily="34" charset="-120"/>
               </a:rPr>
-              <a:t>  code-owner (9d42f5b6d4b3)</a:t>
+              <a:t>  code-owner (659b84ac1051)</a:t>
             </a:r>
             <a:endParaRPr lang="en-US" sz="1000" dirty="0"/>
           </a:p>
@@ -6762,7 +6762,7 @@
                 <a:ea typeface="Courier New" pitchFamily="34" charset="-122"/>
                 <a:cs typeface="Courier New" pitchFamily="34" charset="-120"/>
               </a:rPr>
-              <a:t>  "SDLC-Approval: basic-arithmetic:review:9</a:t>
+              <a:t>  "SDLC-Approval: basic-arithmetic:review:6</a:t>
             </a:r>
             <a:endParaRPr lang="en-US" sz="1000" dirty="0"/>
           </a:p>
@@ -6779,7 +6779,7 @@
                 <a:ea typeface="Courier New" pitchFamily="34" charset="-122"/>
                 <a:cs typeface="Courier New" pitchFamily="34" charset="-120"/>
               </a:rPr>
-              <a:t>  d42f5b6d4b3"</a:t>
+              <a:t>  59b84ac1051"</a:t>
             </a:r>
             <a:endParaRPr lang="en-US" sz="1000" dirty="0"/>
           </a:p>
@@ -7460,7 +7460,7 @@
                 <a:ea typeface="Courier New" pitchFamily="34" charset="-122"/>
                 <a:cs typeface="Courier New" pitchFamily="34" charset="-120"/>
               </a:rPr>
-              <a:t>  release-manager (9d42f5b6d4b3)</a:t>
+              <a:t>  release-manager (659b84ac1051)</a:t>
             </a:r>
             <a:endParaRPr lang="en-US" sz="1000" dirty="0"/>
           </a:p>
@@ -7528,7 +7528,7 @@
                 <a:ea typeface="Courier New" pitchFamily="34" charset="-122"/>
                 <a:cs typeface="Courier New" pitchFamily="34" charset="-120"/>
               </a:rPr>
-              <a:t>  gate" -m "SDLC-Approval: basic-arithmetic:release:9d42f5b6d4b3"</a:t>
+              <a:t>  gate" -m "SDLC-Approval: basic-arithmetic:release:659b84ac1051"</a:t>
             </a:r>
             <a:endParaRPr lang="en-US" sz="1000" dirty="0"/>
           </a:p>
@@ -7811,7 +7811,7 @@
                 <a:ea typeface="Courier New" pitchFamily="34" charset="-122"/>
                 <a:cs typeface="Courier New" pitchFamily="34" charset="-120"/>
               </a:rPr>
-              <a:t>✓ basic-arithmetic/intent alice valid 70e703af trailer: missing</a:t>
+              <a:t>✓ basic-arithmetic/intent alice valid 6d23bcc8 trailer: missing</a:t>
             </a:r>
             <a:endParaRPr lang="en-US" sz="1000" dirty="0"/>
           </a:p>
@@ -7828,7 +7828,7 @@
                 <a:ea typeface="Courier New" pitchFamily="34" charset="-122"/>
                 <a:cs typeface="Courier New" pitchFamily="34" charset="-120"/>
               </a:rPr>
-              <a:t>✓ basic-arithmetic/spec alice valid 570f14b2 trailer: missing</a:t>
+              <a:t>✓ basic-arithmetic/spec alice valid a37f8050 trailer: missing</a:t>
             </a:r>
             <a:endParaRPr lang="en-US" sz="1000" dirty="0"/>
           </a:p>
@@ -7845,7 +7845,7 @@
                 <a:ea typeface="Courier New" pitchFamily="34" charset="-122"/>
                 <a:cs typeface="Courier New" pitchFamily="34" charset="-120"/>
               </a:rPr>
-              <a:t>✗ basic-arithmetic/plan bob wrong-signer 570f14b2 trailer: missing</a:t>
+              <a:t>✗ basic-arithmetic/plan bob wrong-signer a37f8050 trailer: missing</a:t>
             </a:r>
             <a:endParaRPr lang="en-US" sz="1000" dirty="0"/>
           </a:p>
@@ -7862,7 +7862,7 @@
                 <a:ea typeface="Courier New" pitchFamily="34" charset="-122"/>
                 <a:cs typeface="Courier New" pitchFamily="34" charset="-120"/>
               </a:rPr>
-              <a:t>✓ basic-arithmetic/review carol valid a47f201e trailer: missing</a:t>
+              <a:t>✓ basic-arithmetic/review carol valid 13f0fca7 trailer: missing</a:t>
             </a:r>
             <a:endParaRPr lang="en-US" sz="1000" dirty="0"/>
           </a:p>
@@ -7879,7 +7879,7 @@
                 <a:ea typeface="Courier New" pitchFamily="34" charset="-122"/>
                 <a:cs typeface="Courier New" pitchFamily="34" charset="-120"/>
               </a:rPr>
-              <a:t>✓ basic-arithmetic/release alice valid b91bc189 trailer: missing</a:t>
+              <a:t>✓ basic-arithmetic/release alice valid 4a5d05fb trailer: missing</a:t>
             </a:r>
             <a:endParaRPr lang="en-US" sz="1000" dirty="0"/>
           </a:p>
@@ -7896,7 +7896,7 @@
                 <a:ea typeface="Courier New" pitchFamily="34" charset="-122"/>
                 <a:cs typeface="Courier New" pitchFamily="34" charset="-120"/>
               </a:rPr>
-              <a:t>✓ openspec/roles.yaml alice@calc.example bootstrap 3d92b77e</a:t>
+              <a:t>✓ openspec/roles.yaml alice@calc.example bootstrap cc9dd892</a:t>
             </a:r>
             <a:endParaRPr lang="en-US" sz="1000" dirty="0"/>
           </a:p>
@@ -14450,7 +14450,7 @@
                 <a:ea typeface="Courier New" pitchFamily="34" charset="-122"/>
                 <a:cs typeface="Courier New" pitchFamily="34" charset="-120"/>
               </a:rPr>
-              <a:t>  archived) · sdlc 0.23.2, license:</a:t>
+              <a:t>  archived) · sdlc 0.23.3, license:</a:t>
             </a:r>
             <a:endParaRPr lang="en-US" sz="1000" dirty="0"/>
           </a:p>
@@ -14971,7 +14971,7 @@
                 <a:ea typeface="Courier New" pitchFamily="34" charset="-122"/>
                 <a:cs typeface="Courier New" pitchFamily="34" charset="-120"/>
               </a:rPr>
-              <a:t>2026-10-18T07:40:53.720Z  gate.review.await</a:t>
+              <a:t>2026-10-18T10:02:12.747Z  gate.review.await</a:t>
             </a:r>
             <a:endParaRPr lang="en-US" sz="1000" dirty="0"/>
           </a:p>
@@ -15005,7 +15005,7 @@
                 <a:ea typeface="Courier New" pitchFamily="34" charset="-122"/>
                 <a:cs typeface="Courier New" pitchFamily="34" charset="-120"/>
               </a:rPr>
-              <a:t>  sha256:9d42f5b6d4b3d84999138004781b26bf1e</a:t>
+              <a:t>  sha256:659b84ac1051b4d6c45682c053da8bbf09</a:t>
             </a:r>
             <a:endParaRPr lang="en-US" sz="1000" dirty="0"/>
           </a:p>
@@ -15022,7 +15022,7 @@
                 <a:ea typeface="Courier New" pitchFamily="34" charset="-122"/>
                 <a:cs typeface="Courier New" pitchFamily="34" charset="-120"/>
               </a:rPr>
-              <a:t>  81ecdf1814b1080690b954aea061e2 [sdlc</a:t>
+              <a:t>  c74ff9a410578d0fefacf6c89cba62 [sdlc</a:t>
             </a:r>
             <a:endParaRPr lang="en-US" sz="1000" dirty="0"/>
           </a:p>
@@ -15039,7 +15039,7 @@
                 <a:ea typeface="Courier New" pitchFamily="34" charset="-122"/>
                 <a:cs typeface="Courier New" pitchFamily="34" charset="-120"/>
               </a:rPr>
-              <a:t>  0.23.2 · community]</a:t>
+              <a:t>  0.23.3 · community]</a:t>
             </a:r>
             <a:endParaRPr lang="en-US" sz="1000" dirty="0"/>
           </a:p>
@@ -15056,7 +15056,7 @@
                 <a:ea typeface="Courier New" pitchFamily="34" charset="-122"/>
                 <a:cs typeface="Courier New" pitchFamily="34" charset="-120"/>
               </a:rPr>
-              <a:t>2026-10-18T07:40:56.588Z  gate.review.appro</a:t>
+              <a:t>2026-10-18T10:02:15.829Z  gate.review.appro</a:t>
             </a:r>
             <a:endParaRPr lang="en-US" sz="1000" dirty="0"/>
           </a:p>
@@ -15107,7 +15107,7 @@
                 <a:ea typeface="Courier New" pitchFamily="34" charset="-122"/>
                 <a:cs typeface="Courier New" pitchFamily="34" charset="-120"/>
               </a:rPr>
-              <a:t>  [sdlc 0.23.2 · community]</a:t>
+              <a:t>  [sdlc 0.23.3 · community]</a:t>
             </a:r>
             <a:endParaRPr lang="en-US" sz="1000" dirty="0"/>
           </a:p>
@@ -15124,7 +15124,7 @@
                 <a:ea typeface="Courier New" pitchFamily="34" charset="-122"/>
                 <a:cs typeface="Courier New" pitchFamily="34" charset="-120"/>
               </a:rPr>
-              <a:t>2026-10-18T07:41:02.664Z  gate.release.appr</a:t>
+              <a:t>2026-10-18T10:02:22.085Z  gate.release.appr</a:t>
             </a:r>
             <a:endParaRPr lang="en-US" sz="1000" dirty="0"/>
           </a:p>
@@ -15175,7 +15175,7 @@
                 <a:ea typeface="Courier New" pitchFamily="34" charset="-122"/>
                 <a:cs typeface="Courier New" pitchFamily="34" charset="-120"/>
               </a:rPr>
-              <a:t>  release-manager [sdlc 0.23.2 · community]</a:t>
+              <a:t>  release-manager [sdlc 0.23.3 · community]</a:t>
             </a:r>
             <a:endParaRPr lang="en-US" sz="1000" dirty="0"/>
           </a:p>
@@ -16503,7 +16503,7 @@
                 <a:ea typeface="Courier New" pitchFamily="34" charset="-122"/>
                 <a:cs typeface="Courier New" pitchFamily="34" charset="-120"/>
               </a:rPr>
-              <a:t>✓ test (0.9s)</a:t>
+              <a:t>✓ test (1.0s)</a:t>
             </a:r>
             <a:endParaRPr lang="en-US" sz="1000" dirty="0"/>
           </a:p>
@@ -16956,7 +16956,7 @@
                 <a:ea typeface="Courier New" pitchFamily="34" charset="-122"/>
                 <a:cs typeface="Courier New" pitchFamily="34" charset="-120"/>
               </a:rPr>
-              <a:t>      "id": "20261018T074156793Z-ci-green-d</a:t>
+              <a:t>      "id": "20261018T100323658Z-ci-green-f</a:t>
             </a:r>
             <a:endParaRPr lang="en-US" sz="1000" dirty="0"/>
           </a:p>
@@ -16973,7 +16973,7 @@
                 <a:ea typeface="Courier New" pitchFamily="34" charset="-122"/>
                 <a:cs typeface="Courier New" pitchFamily="34" charset="-120"/>
               </a:rPr>
-              <a:t>  04ca9",</a:t>
+              <a:t>  b676c",</a:t>
             </a:r>
             <a:endParaRPr lang="en-US" sz="1000" dirty="0"/>
           </a:p>
@@ -17109,7 +17109,7 @@
                 <a:ea typeface="Courier New" pitchFamily="34" charset="-122"/>
                 <a:cs typeface="Courier New" pitchFamily="34" charset="-120"/>
               </a:rPr>
-              <a:t>        "ref": "be77f0dbb0a8758658e1211b191</a:t>
+              <a:t>        "ref": "7417fd068c650602e321b2c67f6</a:t>
             </a:r>
             <a:endParaRPr lang="en-US" sz="1000" dirty="0"/>
           </a:p>
@@ -17126,7 +17126,7 @@
                 <a:ea typeface="Courier New" pitchFamily="34" charset="-122"/>
                 <a:cs typeface="Courier New" pitchFamily="34" charset="-120"/>
               </a:rPr>
-              <a:t>  417752eb59660",</a:t>
+              <a:t>  252f9a12ddfd1",</a:t>
             </a:r>
             <a:endParaRPr lang="en-US" sz="1000" dirty="0"/>
           </a:p>
@@ -27782,7 +27782,7 @@
                 <a:ea typeface="Courier New" pitchFamily="34" charset="-122"/>
                 <a:cs typeface="Courier New" pitchFamily="34" charset="-120"/>
               </a:rPr>
-              <a:t>  sdlc 0.23.2, license: community</a:t>
+              <a:t>  sdlc 0.23.3, license: community</a:t>
             </a:r>
             <a:endParaRPr lang="en-US" sz="1000" dirty="0"/>
           </a:p>

--- a/docs/demo/sdlc-calculator-demo.en.pptx
+++ b/docs/demo/sdlc-calculator-demo.en.pptx
@@ -5112,7 +5112,7 @@
                 <a:ea typeface="Courier New" pitchFamily="34" charset="-122"/>
                 <a:cs typeface="Courier New" pitchFamily="34" charset="-120"/>
               </a:rPr>
-              <a:t>✓ test (0.9s)</a:t>
+              <a:t>✓ test (1.0s)</a:t>
             </a:r>
             <a:endParaRPr lang="en-US" sz="1000" dirty="0"/>
           </a:p>
@@ -6677,7 +6677,7 @@
                 <a:ea typeface="Courier New" pitchFamily="34" charset="-122"/>
                 <a:cs typeface="Courier New" pitchFamily="34" charset="-120"/>
               </a:rPr>
-              <a:t>  code-owner (659b84ac1051)</a:t>
+              <a:t>  code-owner (e2e28d51fcfa)</a:t>
             </a:r>
             <a:endParaRPr lang="en-US" sz="1000" dirty="0"/>
           </a:p>
@@ -6762,7 +6762,7 @@
                 <a:ea typeface="Courier New" pitchFamily="34" charset="-122"/>
                 <a:cs typeface="Courier New" pitchFamily="34" charset="-120"/>
               </a:rPr>
-              <a:t>  "SDLC-Approval: basic-arithmetic:review:6</a:t>
+              <a:t>  "SDLC-Approval: basic-arithmetic:review:e</a:t>
             </a:r>
             <a:endParaRPr lang="en-US" sz="1000" dirty="0"/>
           </a:p>
@@ -6779,7 +6779,7 @@
                 <a:ea typeface="Courier New" pitchFamily="34" charset="-122"/>
                 <a:cs typeface="Courier New" pitchFamily="34" charset="-120"/>
               </a:rPr>
-              <a:t>  59b84ac1051"</a:t>
+              <a:t>  2e28d51fcfa"</a:t>
             </a:r>
             <a:endParaRPr lang="en-US" sz="1000" dirty="0"/>
           </a:p>
@@ -7460,7 +7460,7 @@
                 <a:ea typeface="Courier New" pitchFamily="34" charset="-122"/>
                 <a:cs typeface="Courier New" pitchFamily="34" charset="-120"/>
               </a:rPr>
-              <a:t>  release-manager (659b84ac1051)</a:t>
+              <a:t>  release-manager (e2e28d51fcfa)</a:t>
             </a:r>
             <a:endParaRPr lang="en-US" sz="1000" dirty="0"/>
           </a:p>
@@ -7528,7 +7528,7 @@
                 <a:ea typeface="Courier New" pitchFamily="34" charset="-122"/>
                 <a:cs typeface="Courier New" pitchFamily="34" charset="-120"/>
               </a:rPr>
-              <a:t>  gate" -m "SDLC-Approval: basic-arithmetic:release:659b84ac1051"</a:t>
+              <a:t>  gate" -m "SDLC-Approval: basic-arithmetic:release:e2e28d51fcfa"</a:t>
             </a:r>
             <a:endParaRPr lang="en-US" sz="1000" dirty="0"/>
           </a:p>
@@ -7811,7 +7811,7 @@
                 <a:ea typeface="Courier New" pitchFamily="34" charset="-122"/>
                 <a:cs typeface="Courier New" pitchFamily="34" charset="-120"/>
               </a:rPr>
-              <a:t>✓ basic-arithmetic/intent alice valid 6d23bcc8 trailer: missing</a:t>
+              <a:t>✓ basic-arithmetic/intent alice valid cfa660cd trailer: missing</a:t>
             </a:r>
             <a:endParaRPr lang="en-US" sz="1000" dirty="0"/>
           </a:p>
@@ -7828,7 +7828,7 @@
                 <a:ea typeface="Courier New" pitchFamily="34" charset="-122"/>
                 <a:cs typeface="Courier New" pitchFamily="34" charset="-120"/>
               </a:rPr>
-              <a:t>✓ basic-arithmetic/spec alice valid a37f8050 trailer: missing</a:t>
+              <a:t>✓ basic-arithmetic/spec alice valid 407fc91b trailer: missing</a:t>
             </a:r>
             <a:endParaRPr lang="en-US" sz="1000" dirty="0"/>
           </a:p>
@@ -7845,7 +7845,7 @@
                 <a:ea typeface="Courier New" pitchFamily="34" charset="-122"/>
                 <a:cs typeface="Courier New" pitchFamily="34" charset="-120"/>
               </a:rPr>
-              <a:t>✗ basic-arithmetic/plan bob wrong-signer a37f8050 trailer: missing</a:t>
+              <a:t>✗ basic-arithmetic/plan bob wrong-signer 407fc91b trailer: missing</a:t>
             </a:r>
             <a:endParaRPr lang="en-US" sz="1000" dirty="0"/>
           </a:p>
@@ -7862,7 +7862,7 @@
                 <a:ea typeface="Courier New" pitchFamily="34" charset="-122"/>
                 <a:cs typeface="Courier New" pitchFamily="34" charset="-120"/>
               </a:rPr>
-              <a:t>✓ basic-arithmetic/review carol valid 13f0fca7 trailer: missing</a:t>
+              <a:t>✓ basic-arithmetic/review carol valid 0b0207fc trailer: missing</a:t>
             </a:r>
             <a:endParaRPr lang="en-US" sz="1000" dirty="0"/>
           </a:p>
@@ -7879,7 +7879,7 @@
                 <a:ea typeface="Courier New" pitchFamily="34" charset="-122"/>
                 <a:cs typeface="Courier New" pitchFamily="34" charset="-120"/>
               </a:rPr>
-              <a:t>✓ basic-arithmetic/release alice valid 4a5d05fb trailer: missing</a:t>
+              <a:t>✓ basic-arithmetic/release alice valid d11cf702 trailer: missing</a:t>
             </a:r>
             <a:endParaRPr lang="en-US" sz="1000" dirty="0"/>
           </a:p>
@@ -7896,7 +7896,7 @@
                 <a:ea typeface="Courier New" pitchFamily="34" charset="-122"/>
                 <a:cs typeface="Courier New" pitchFamily="34" charset="-120"/>
               </a:rPr>
-              <a:t>✓ openspec/roles.yaml alice@calc.example bootstrap cc9dd892</a:t>
+              <a:t>✓ openspec/roles.yaml alice@calc.example bootstrap 72ca21eb</a:t>
             </a:r>
             <a:endParaRPr lang="en-US" sz="1000" dirty="0"/>
           </a:p>
@@ -14031,7 +14031,7 @@
                 <a:ea typeface="Courier New" pitchFamily="34" charset="-122"/>
                 <a:cs typeface="Courier New" pitchFamily="34" charset="-120"/>
               </a:rPr>
-              <a:t>  Write plan (plan.md) for the plan gate.;</a:t>
+              <a:t>  Write plan (plan.md) for the plan gate.</a:t>
             </a:r>
             <a:endParaRPr lang="en-US" sz="1000" dirty="0"/>
           </a:p>
@@ -14048,7 +14048,7 @@
                 <a:ea typeface="Courier New" pitchFamily="34" charset="-122"/>
                 <a:cs typeface="Courier New" pitchFamily="34" charset="-120"/>
               </a:rPr>
-              <a:t>  review.md belongs at openspec/changes/fix</a:t>
+              <a:t>voice-input   plan      agent: /sdlc:intent</a:t>
             </a:r>
             <a:endParaRPr lang="en-US" sz="1000" dirty="0"/>
           </a:p>
@@ -14065,7 +14065,7 @@
                 <a:ea typeface="Courier New" pitchFamily="34" charset="-122"/>
                 <a:cs typeface="Courier New" pitchFamily="34" charset="-120"/>
               </a:rPr>
-              <a:t>  -rounding/review.md</a:t>
+              <a:t>  - The intent gate was rejected by Alice</a:t>
             </a:r>
             <a:endParaRPr lang="en-US" sz="1000" dirty="0"/>
           </a:p>
@@ -14082,7 +14082,7 @@
                 <a:ea typeface="Courier New" pitchFamily="34" charset="-122"/>
                 <a:cs typeface="Courier New" pitchFamily="34" charset="-120"/>
               </a:rPr>
-              <a:t>voice-input   plan      agent: /sdlc:intent</a:t>
+              <a:t>  Walker &lt;alice@calc.example&gt;: Tills are in</a:t>
             </a:r>
             <a:endParaRPr lang="en-US" sz="1000" dirty="0"/>
           </a:p>
@@ -14099,7 +14099,7 @@
                 <a:ea typeface="Courier New" pitchFamily="34" charset="-122"/>
                 <a:cs typeface="Courier New" pitchFamily="34" charset="-120"/>
               </a:rPr>
-              <a:t>  - The intent gate was rejected by Alice</a:t>
+              <a:t>  noisy shops. Revise the intent</a:t>
             </a:r>
             <a:endParaRPr lang="en-US" sz="1000" dirty="0"/>
           </a:p>
@@ -14116,75 +14116,7 @@
                 <a:ea typeface="Courier New" pitchFamily="34" charset="-122"/>
                 <a:cs typeface="Courier New" pitchFamily="34" charset="-120"/>
               </a:rPr>
-              <a:t>  Walker &lt;alice@calc.example&gt;: Tills are in</a:t>
-            </a:r>
-            <a:endParaRPr lang="en-US" sz="1000" dirty="0"/>
-          </a:p>
-          <a:p>
-            <a:pPr indent="0" marL="0">
-              <a:buNone/>
-            </a:pPr>
-            <a:r>
-              <a:rPr lang="en-US" sz="1000" dirty="0">
-                <a:solidFill>
-                  <a:srgbClr val="E8EEF2"/>
-                </a:solidFill>
-                <a:latin typeface="Courier New" pitchFamily="34" charset="0"/>
-                <a:ea typeface="Courier New" pitchFamily="34" charset="-122"/>
-                <a:cs typeface="Courier New" pitchFamily="34" charset="-120"/>
-              </a:rPr>
-              <a:t>  noisy shops. Revise the intent</a:t>
-            </a:r>
-            <a:endParaRPr lang="en-US" sz="1000" dirty="0"/>
-          </a:p>
-          <a:p>
-            <a:pPr indent="0" marL="0">
-              <a:buNone/>
-            </a:pPr>
-            <a:r>
-              <a:rPr lang="en-US" sz="1000" dirty="0">
-                <a:solidFill>
-                  <a:srgbClr val="E8EEF2"/>
-                </a:solidFill>
-                <a:latin typeface="Courier New" pitchFamily="34" charset="0"/>
-                <a:ea typeface="Courier New" pitchFamily="34" charset="-122"/>
-                <a:cs typeface="Courier New" pitchFamily="34" charset="-120"/>
-              </a:rPr>
-              <a:t>  artifact(s), then ask for approval</a:t>
-            </a:r>
-            <a:endParaRPr lang="en-US" sz="1000" dirty="0"/>
-          </a:p>
-          <a:p>
-            <a:pPr indent="0" marL="0">
-              <a:buNone/>
-            </a:pPr>
-            <a:r>
-              <a:rPr lang="en-US" sz="1000" dirty="0">
-                <a:solidFill>
-                  <a:srgbClr val="E8EEF2"/>
-                </a:solidFill>
-                <a:latin typeface="Courier New" pitchFamily="34" charset="0"/>
-                <a:ea typeface="Courier New" pitchFamily="34" charset="-122"/>
-                <a:cs typeface="Courier New" pitchFamily="34" charset="-120"/>
-              </a:rPr>
-              <a:t>  again.; review.md belongs at</a:t>
-            </a:r>
-            <a:endParaRPr lang="en-US" sz="1000" dirty="0"/>
-          </a:p>
-          <a:p>
-            <a:pPr indent="0" marL="0">
-              <a:buNone/>
-            </a:pPr>
-            <a:r>
-              <a:rPr lang="en-US" sz="1000" dirty="0">
-                <a:solidFill>
-                  <a:srgbClr val="E8EEF2"/>
-                </a:solidFill>
-                <a:latin typeface="Courier New" pitchFamily="34" charset="0"/>
-                <a:ea typeface="Courier New" pitchFamily="34" charset="-122"/>
-                <a:cs typeface="Courier New" pitchFamily="34" charset="-120"/>
-              </a:rPr>
-              <a:t>  openspec/changes/voice-input/review.md</a:t>
+              <a:t>  artifact(s), then ask for approval again.</a:t>
             </a:r>
             <a:endParaRPr lang="en-US" sz="1000" dirty="0"/>
           </a:p>
@@ -14450,7 +14382,7 @@
                 <a:ea typeface="Courier New" pitchFamily="34" charset="-122"/>
                 <a:cs typeface="Courier New" pitchFamily="34" charset="-120"/>
               </a:rPr>
-              <a:t>  archived) · sdlc 0.23.3, license:</a:t>
+              <a:t>  archived) · sdlc 0.23.4, license:</a:t>
             </a:r>
             <a:endParaRPr lang="en-US" sz="1000" dirty="0"/>
           </a:p>
@@ -14654,7 +14586,7 @@
                 <a:ea typeface="Courier New" pitchFamily="34" charset="-122"/>
                 <a:cs typeface="Courier New" pitchFamily="34" charset="-120"/>
               </a:rPr>
-              <a:t>  intent 3 · spec 4 · plan 16 · review 3;</a:t>
+              <a:t>  intent 3 · spec 4 · plan 17 · review 3;</a:t>
             </a:r>
             <a:endParaRPr lang="en-US" sz="1000" dirty="0"/>
           </a:p>
@@ -14971,7 +14903,7 @@
                 <a:ea typeface="Courier New" pitchFamily="34" charset="-122"/>
                 <a:cs typeface="Courier New" pitchFamily="34" charset="-120"/>
               </a:rPr>
-              <a:t>2026-10-18T10:02:12.747Z  gate.review.await</a:t>
+              <a:t>2026-10-18T14:15:06.640Z  gate.review.await</a:t>
             </a:r>
             <a:endParaRPr lang="en-US" sz="1000" dirty="0"/>
           </a:p>
@@ -15005,7 +14937,7 @@
                 <a:ea typeface="Courier New" pitchFamily="34" charset="-122"/>
                 <a:cs typeface="Courier New" pitchFamily="34" charset="-120"/>
               </a:rPr>
-              <a:t>  sha256:659b84ac1051b4d6c45682c053da8bbf09</a:t>
+              <a:t>  sha256:e2e28d51fcfafdac544b25e0cda8b3addc</a:t>
             </a:r>
             <a:endParaRPr lang="en-US" sz="1000" dirty="0"/>
           </a:p>
@@ -15022,7 +14954,7 @@
                 <a:ea typeface="Courier New" pitchFamily="34" charset="-122"/>
                 <a:cs typeface="Courier New" pitchFamily="34" charset="-120"/>
               </a:rPr>
-              <a:t>  c74ff9a410578d0fefacf6c89cba62 [sdlc</a:t>
+              <a:t>  b5c13463885a28fe4056adaa09ada7 [sdlc</a:t>
             </a:r>
             <a:endParaRPr lang="en-US" sz="1000" dirty="0"/>
           </a:p>
@@ -15039,7 +14971,7 @@
                 <a:ea typeface="Courier New" pitchFamily="34" charset="-122"/>
                 <a:cs typeface="Courier New" pitchFamily="34" charset="-120"/>
               </a:rPr>
-              <a:t>  0.23.3 · community]</a:t>
+              <a:t>  0.23.4 · community]</a:t>
             </a:r>
             <a:endParaRPr lang="en-US" sz="1000" dirty="0"/>
           </a:p>
@@ -15056,7 +14988,7 @@
                 <a:ea typeface="Courier New" pitchFamily="34" charset="-122"/>
                 <a:cs typeface="Courier New" pitchFamily="34" charset="-120"/>
               </a:rPr>
-              <a:t>2026-10-18T10:02:15.829Z  gate.review.appro</a:t>
+              <a:t>2026-10-18T14:15:09.755Z  gate.review.appro</a:t>
             </a:r>
             <a:endParaRPr lang="en-US" sz="1000" dirty="0"/>
           </a:p>
@@ -15107,7 +15039,7 @@
                 <a:ea typeface="Courier New" pitchFamily="34" charset="-122"/>
                 <a:cs typeface="Courier New" pitchFamily="34" charset="-120"/>
               </a:rPr>
-              <a:t>  [sdlc 0.23.3 · community]</a:t>
+              <a:t>  [sdlc 0.23.4 · community]</a:t>
             </a:r>
             <a:endParaRPr lang="en-US" sz="1000" dirty="0"/>
           </a:p>
@@ -15124,7 +15056,7 @@
                 <a:ea typeface="Courier New" pitchFamily="34" charset="-122"/>
                 <a:cs typeface="Courier New" pitchFamily="34" charset="-120"/>
               </a:rPr>
-              <a:t>2026-10-18T10:02:22.085Z  gate.release.appr</a:t>
+              <a:t>2026-10-18T14:15:16.373Z  gate.release.appr</a:t>
             </a:r>
             <a:endParaRPr lang="en-US" sz="1000" dirty="0"/>
           </a:p>
@@ -15175,7 +15107,7 @@
                 <a:ea typeface="Courier New" pitchFamily="34" charset="-122"/>
                 <a:cs typeface="Courier New" pitchFamily="34" charset="-120"/>
               </a:rPr>
-              <a:t>  release-manager [sdlc 0.23.3 · community]</a:t>
+              <a:t>  release-manager [sdlc 0.23.4 · community]</a:t>
             </a:r>
             <a:endParaRPr lang="en-US" sz="1000" dirty="0"/>
           </a:p>
@@ -16520,7 +16452,7 @@
                 <a:ea typeface="Courier New" pitchFamily="34" charset="-122"/>
                 <a:cs typeface="Courier New" pitchFamily="34" charset="-120"/>
               </a:rPr>
-              <a:t>✓ ci-green (ci/pipeline_status, 0.5s)</a:t>
+              <a:t>✓ ci-green (ci/pipeline_status, 0.6s)</a:t>
             </a:r>
             <a:endParaRPr lang="en-US" sz="1000" dirty="0"/>
           </a:p>
@@ -16956,7 +16888,7 @@
                 <a:ea typeface="Courier New" pitchFamily="34" charset="-122"/>
                 <a:cs typeface="Courier New" pitchFamily="34" charset="-120"/>
               </a:rPr>
-              <a:t>      "id": "20261018T100323658Z-ci-green-f</a:t>
+              <a:t>      "id": "20261018T141613658Z-ci-green-a</a:t>
             </a:r>
             <a:endParaRPr lang="en-US" sz="1000" dirty="0"/>
           </a:p>
@@ -16973,7 +16905,7 @@
                 <a:ea typeface="Courier New" pitchFamily="34" charset="-122"/>
                 <a:cs typeface="Courier New" pitchFamily="34" charset="-120"/>
               </a:rPr>
-              <a:t>  b676c",</a:t>
+              <a:t>  ad74e",</a:t>
             </a:r>
             <a:endParaRPr lang="en-US" sz="1000" dirty="0"/>
           </a:p>
@@ -17109,7 +17041,7 @@
                 <a:ea typeface="Courier New" pitchFamily="34" charset="-122"/>
                 <a:cs typeface="Courier New" pitchFamily="34" charset="-120"/>
               </a:rPr>
-              <a:t>        "ref": "7417fd068c650602e321b2c67f6</a:t>
+              <a:t>        "ref": "808847017a4217cce2a75859527</a:t>
             </a:r>
             <a:endParaRPr lang="en-US" sz="1000" dirty="0"/>
           </a:p>
@@ -17126,7 +17058,7 @@
                 <a:ea typeface="Courier New" pitchFamily="34" charset="-122"/>
                 <a:cs typeface="Courier New" pitchFamily="34" charset="-120"/>
               </a:rPr>
-              <a:t>  252f9a12ddfd1",</a:t>
+              <a:t>  6fcbc2ec74e64",</a:t>
             </a:r>
             <a:endParaRPr lang="en-US" sz="1000" dirty="0"/>
           </a:p>
@@ -27782,7 +27714,7 @@
                 <a:ea typeface="Courier New" pitchFamily="34" charset="-122"/>
                 <a:cs typeface="Courier New" pitchFamily="34" charset="-120"/>
               </a:rPr>
-              <a:t>  sdlc 0.23.3, license: community</a:t>
+              <a:t>  sdlc 0.23.4, license: community</a:t>
             </a:r>
             <a:endParaRPr lang="en-US" sz="1000" dirty="0"/>
           </a:p>

--- a/docs/demo/sdlc-calculator-demo.en.pptx
+++ b/docs/demo/sdlc-calculator-demo.en.pptx
@@ -6677,7 +6677,7 @@
                 <a:ea typeface="Courier New" pitchFamily="34" charset="-122"/>
                 <a:cs typeface="Courier New" pitchFamily="34" charset="-120"/>
               </a:rPr>
-              <a:t>  code-owner (e2e28d51fcfa)</a:t>
+              <a:t>  code-owner (bccd305cafc5)</a:t>
             </a:r>
             <a:endParaRPr lang="en-US" sz="1000" dirty="0"/>
           </a:p>
@@ -6762,7 +6762,7 @@
                 <a:ea typeface="Courier New" pitchFamily="34" charset="-122"/>
                 <a:cs typeface="Courier New" pitchFamily="34" charset="-120"/>
               </a:rPr>
-              <a:t>  "SDLC-Approval: basic-arithmetic:review:e</a:t>
+              <a:t>  "SDLC-Approval: basic-arithmetic:review:b</a:t>
             </a:r>
             <a:endParaRPr lang="en-US" sz="1000" dirty="0"/>
           </a:p>
@@ -6779,7 +6779,7 @@
                 <a:ea typeface="Courier New" pitchFamily="34" charset="-122"/>
                 <a:cs typeface="Courier New" pitchFamily="34" charset="-120"/>
               </a:rPr>
-              <a:t>  2e28d51fcfa"</a:t>
+              <a:t>  ccd305cafc5"</a:t>
             </a:r>
             <a:endParaRPr lang="en-US" sz="1000" dirty="0"/>
           </a:p>
@@ -7460,7 +7460,7 @@
                 <a:ea typeface="Courier New" pitchFamily="34" charset="-122"/>
                 <a:cs typeface="Courier New" pitchFamily="34" charset="-120"/>
               </a:rPr>
-              <a:t>  release-manager (e2e28d51fcfa)</a:t>
+              <a:t>  release-manager (bccd305cafc5)</a:t>
             </a:r>
             <a:endParaRPr lang="en-US" sz="1000" dirty="0"/>
           </a:p>
@@ -7528,7 +7528,7 @@
                 <a:ea typeface="Courier New" pitchFamily="34" charset="-122"/>
                 <a:cs typeface="Courier New" pitchFamily="34" charset="-120"/>
               </a:rPr>
-              <a:t>  gate" -m "SDLC-Approval: basic-arithmetic:release:e2e28d51fcfa"</a:t>
+              <a:t>  gate" -m "SDLC-Approval: basic-arithmetic:release:bccd305cafc5"</a:t>
             </a:r>
             <a:endParaRPr lang="en-US" sz="1000" dirty="0"/>
           </a:p>
@@ -7811,7 +7811,7 @@
                 <a:ea typeface="Courier New" pitchFamily="34" charset="-122"/>
                 <a:cs typeface="Courier New" pitchFamily="34" charset="-120"/>
               </a:rPr>
-              <a:t>✓ basic-arithmetic/intent alice valid cfa660cd trailer: missing</a:t>
+              <a:t>✓ basic-arithmetic/intent alice valid 442a8a44 trailer: missing</a:t>
             </a:r>
             <a:endParaRPr lang="en-US" sz="1000" dirty="0"/>
           </a:p>
@@ -7828,7 +7828,7 @@
                 <a:ea typeface="Courier New" pitchFamily="34" charset="-122"/>
                 <a:cs typeface="Courier New" pitchFamily="34" charset="-120"/>
               </a:rPr>
-              <a:t>✓ basic-arithmetic/spec alice valid 407fc91b trailer: missing</a:t>
+              <a:t>✓ basic-arithmetic/spec alice valid 1dc667d7 trailer: missing</a:t>
             </a:r>
             <a:endParaRPr lang="en-US" sz="1000" dirty="0"/>
           </a:p>
@@ -7845,7 +7845,7 @@
                 <a:ea typeface="Courier New" pitchFamily="34" charset="-122"/>
                 <a:cs typeface="Courier New" pitchFamily="34" charset="-120"/>
               </a:rPr>
-              <a:t>✗ basic-arithmetic/plan bob wrong-signer 407fc91b trailer: missing</a:t>
+              <a:t>✗ basic-arithmetic/plan bob wrong-signer 1dc667d7 trailer: missing</a:t>
             </a:r>
             <a:endParaRPr lang="en-US" sz="1000" dirty="0"/>
           </a:p>
@@ -7862,7 +7862,7 @@
                 <a:ea typeface="Courier New" pitchFamily="34" charset="-122"/>
                 <a:cs typeface="Courier New" pitchFamily="34" charset="-120"/>
               </a:rPr>
-              <a:t>✓ basic-arithmetic/review carol valid 0b0207fc trailer: missing</a:t>
+              <a:t>✓ basic-arithmetic/review carol valid 919fd04f trailer: missing</a:t>
             </a:r>
             <a:endParaRPr lang="en-US" sz="1000" dirty="0"/>
           </a:p>
@@ -7879,7 +7879,7 @@
                 <a:ea typeface="Courier New" pitchFamily="34" charset="-122"/>
                 <a:cs typeface="Courier New" pitchFamily="34" charset="-120"/>
               </a:rPr>
-              <a:t>✓ basic-arithmetic/release alice valid d11cf702 trailer: missing</a:t>
+              <a:t>✓ basic-arithmetic/release alice valid 73031a73 trailer: missing</a:t>
             </a:r>
             <a:endParaRPr lang="en-US" sz="1000" dirty="0"/>
           </a:p>
@@ -7896,7 +7896,7 @@
                 <a:ea typeface="Courier New" pitchFamily="34" charset="-122"/>
                 <a:cs typeface="Courier New" pitchFamily="34" charset="-120"/>
               </a:rPr>
-              <a:t>✓ openspec/roles.yaml alice@calc.example bootstrap 72ca21eb</a:t>
+              <a:t>✓ openspec/roles.yaml alice@calc.example bootstrap 1a0e1f22</a:t>
             </a:r>
             <a:endParaRPr lang="en-US" sz="1000" dirty="0"/>
           </a:p>
@@ -14382,7 +14382,7 @@
                 <a:ea typeface="Courier New" pitchFamily="34" charset="-122"/>
                 <a:cs typeface="Courier New" pitchFamily="34" charset="-120"/>
               </a:rPr>
-              <a:t>  archived) · sdlc 0.23.4, license:</a:t>
+              <a:t>  archived) · sdlc 0.23.5, license:</a:t>
             </a:r>
             <a:endParaRPr lang="en-US" sz="1000" dirty="0"/>
           </a:p>
@@ -14903,7 +14903,7 @@
                 <a:ea typeface="Courier New" pitchFamily="34" charset="-122"/>
                 <a:cs typeface="Courier New" pitchFamily="34" charset="-120"/>
               </a:rPr>
-              <a:t>2026-10-18T14:15:06.640Z  gate.review.await</a:t>
+              <a:t>2026-10-18T16:59:06.073Z  gate.review.await</a:t>
             </a:r>
             <a:endParaRPr lang="en-US" sz="1000" dirty="0"/>
           </a:p>
@@ -14937,7 +14937,7 @@
                 <a:ea typeface="Courier New" pitchFamily="34" charset="-122"/>
                 <a:cs typeface="Courier New" pitchFamily="34" charset="-120"/>
               </a:rPr>
-              <a:t>  sha256:e2e28d51fcfafdac544b25e0cda8b3addc</a:t>
+              <a:t>  sha256:bccd305cafc5d05c4aacd90063e1e6496f</a:t>
             </a:r>
             <a:endParaRPr lang="en-US" sz="1000" dirty="0"/>
           </a:p>
@@ -14954,7 +14954,7 @@
                 <a:ea typeface="Courier New" pitchFamily="34" charset="-122"/>
                 <a:cs typeface="Courier New" pitchFamily="34" charset="-120"/>
               </a:rPr>
-              <a:t>  b5c13463885a28fe4056adaa09ada7 [sdlc</a:t>
+              <a:t>  57806e25d0ff2f6c880d540e304f80 [sdlc</a:t>
             </a:r>
             <a:endParaRPr lang="en-US" sz="1000" dirty="0"/>
           </a:p>
@@ -14971,7 +14971,7 @@
                 <a:ea typeface="Courier New" pitchFamily="34" charset="-122"/>
                 <a:cs typeface="Courier New" pitchFamily="34" charset="-120"/>
               </a:rPr>
-              <a:t>  0.23.4 · community]</a:t>
+              <a:t>  0.23.5 · community]</a:t>
             </a:r>
             <a:endParaRPr lang="en-US" sz="1000" dirty="0"/>
           </a:p>
@@ -14988,7 +14988,7 @@
                 <a:ea typeface="Courier New" pitchFamily="34" charset="-122"/>
                 <a:cs typeface="Courier New" pitchFamily="34" charset="-120"/>
               </a:rPr>
-              <a:t>2026-10-18T14:15:09.755Z  gate.review.appro</a:t>
+              <a:t>2026-10-18T16:59:09.425Z  gate.review.appro</a:t>
             </a:r>
             <a:endParaRPr lang="en-US" sz="1000" dirty="0"/>
           </a:p>
@@ -15039,7 +15039,7 @@
                 <a:ea typeface="Courier New" pitchFamily="34" charset="-122"/>
                 <a:cs typeface="Courier New" pitchFamily="34" charset="-120"/>
               </a:rPr>
-              <a:t>  [sdlc 0.23.4 · community]</a:t>
+              <a:t>  [sdlc 0.23.5 · community]</a:t>
             </a:r>
             <a:endParaRPr lang="en-US" sz="1000" dirty="0"/>
           </a:p>
@@ -15056,7 +15056,7 @@
                 <a:ea typeface="Courier New" pitchFamily="34" charset="-122"/>
                 <a:cs typeface="Courier New" pitchFamily="34" charset="-120"/>
               </a:rPr>
-              <a:t>2026-10-18T14:15:16.373Z  gate.release.appr</a:t>
+              <a:t>2026-10-18T16:59:15.899Z  gate.release.appr</a:t>
             </a:r>
             <a:endParaRPr lang="en-US" sz="1000" dirty="0"/>
           </a:p>
@@ -15107,7 +15107,7 @@
                 <a:ea typeface="Courier New" pitchFamily="34" charset="-122"/>
                 <a:cs typeface="Courier New" pitchFamily="34" charset="-120"/>
               </a:rPr>
-              <a:t>  release-manager [sdlc 0.23.4 · community]</a:t>
+              <a:t>  release-manager [sdlc 0.23.5 · community]</a:t>
             </a:r>
             <a:endParaRPr lang="en-US" sz="1000" dirty="0"/>
           </a:p>
@@ -16452,7 +16452,7 @@
                 <a:ea typeface="Courier New" pitchFamily="34" charset="-122"/>
                 <a:cs typeface="Courier New" pitchFamily="34" charset="-120"/>
               </a:rPr>
-              <a:t>✓ ci-green (ci/pipeline_status, 0.6s)</a:t>
+              <a:t>✓ ci-green (ci/pipeline_status, 0.5s)</a:t>
             </a:r>
             <a:endParaRPr lang="en-US" sz="1000" dirty="0"/>
           </a:p>
@@ -16888,7 +16888,7 @@
                 <a:ea typeface="Courier New" pitchFamily="34" charset="-122"/>
                 <a:cs typeface="Courier New" pitchFamily="34" charset="-120"/>
               </a:rPr>
-              <a:t>      "id": "20261018T141613658Z-ci-green-a</a:t>
+              <a:t>      "id": "20261018T170013887Z-ci-green-d</a:t>
             </a:r>
             <a:endParaRPr lang="en-US" sz="1000" dirty="0"/>
           </a:p>
@@ -16905,7 +16905,7 @@
                 <a:ea typeface="Courier New" pitchFamily="34" charset="-122"/>
                 <a:cs typeface="Courier New" pitchFamily="34" charset="-120"/>
               </a:rPr>
-              <a:t>  ad74e",</a:t>
+              <a:t>  b57a1",</a:t>
             </a:r>
             <a:endParaRPr lang="en-US" sz="1000" dirty="0"/>
           </a:p>
@@ -17041,7 +17041,7 @@
                 <a:ea typeface="Courier New" pitchFamily="34" charset="-122"/>
                 <a:cs typeface="Courier New" pitchFamily="34" charset="-120"/>
               </a:rPr>
-              <a:t>        "ref": "808847017a4217cce2a75859527</a:t>
+              <a:t>        "ref": "128fc4a4b717c69392aad6930f1</a:t>
             </a:r>
             <a:endParaRPr lang="en-US" sz="1000" dirty="0"/>
           </a:p>
@@ -17058,7 +17058,7 @@
                 <a:ea typeface="Courier New" pitchFamily="34" charset="-122"/>
                 <a:cs typeface="Courier New" pitchFamily="34" charset="-120"/>
               </a:rPr>
-              <a:t>  6fcbc2ec74e64",</a:t>
+              <a:t>  9f358ceac95ce",</a:t>
             </a:r>
             <a:endParaRPr lang="en-US" sz="1000" dirty="0"/>
           </a:p>
@@ -27714,7 +27714,7 @@
                 <a:ea typeface="Courier New" pitchFamily="34" charset="-122"/>
                 <a:cs typeface="Courier New" pitchFamily="34" charset="-120"/>
               </a:rPr>
-              <a:t>  sdlc 0.23.4, license: community</a:t>
+              <a:t>  sdlc 0.23.5, license: community</a:t>
             </a:r>
             <a:endParaRPr lang="en-US" sz="1000" dirty="0"/>
           </a:p>

--- a/docs/demo/sdlc-calculator-demo.en.pptx
+++ b/docs/demo/sdlc-calculator-demo.en.pptx
@@ -5112,7 +5112,7 @@
                 <a:ea typeface="Courier New" pitchFamily="34" charset="-122"/>
                 <a:cs typeface="Courier New" pitchFamily="34" charset="-120"/>
               </a:rPr>
-              <a:t>✓ test (1.0s)</a:t>
+              <a:t>✓ test (1.1s)</a:t>
             </a:r>
             <a:endParaRPr lang="en-US" sz="1000" dirty="0"/>
           </a:p>
@@ -6677,7 +6677,7 @@
                 <a:ea typeface="Courier New" pitchFamily="34" charset="-122"/>
                 <a:cs typeface="Courier New" pitchFamily="34" charset="-120"/>
               </a:rPr>
-              <a:t>  code-owner (bccd305cafc5)</a:t>
+              <a:t>  code-owner (26a7c377f3c8)</a:t>
             </a:r>
             <a:endParaRPr lang="en-US" sz="1000" dirty="0"/>
           </a:p>
@@ -6762,7 +6762,7 @@
                 <a:ea typeface="Courier New" pitchFamily="34" charset="-122"/>
                 <a:cs typeface="Courier New" pitchFamily="34" charset="-120"/>
               </a:rPr>
-              <a:t>  "SDLC-Approval: basic-arithmetic:review:b</a:t>
+              <a:t>  "SDLC-Approval: basic-arithmetic:review:2</a:t>
             </a:r>
             <a:endParaRPr lang="en-US" sz="1000" dirty="0"/>
           </a:p>
@@ -6779,7 +6779,7 @@
                 <a:ea typeface="Courier New" pitchFamily="34" charset="-122"/>
                 <a:cs typeface="Courier New" pitchFamily="34" charset="-120"/>
               </a:rPr>
-              <a:t>  ccd305cafc5"</a:t>
+              <a:t>  6a7c377f3c8"</a:t>
             </a:r>
             <a:endParaRPr lang="en-US" sz="1000" dirty="0"/>
           </a:p>
@@ -7460,7 +7460,7 @@
                 <a:ea typeface="Courier New" pitchFamily="34" charset="-122"/>
                 <a:cs typeface="Courier New" pitchFamily="34" charset="-120"/>
               </a:rPr>
-              <a:t>  release-manager (bccd305cafc5)</a:t>
+              <a:t>  release-manager (26a7c377f3c8)</a:t>
             </a:r>
             <a:endParaRPr lang="en-US" sz="1000" dirty="0"/>
           </a:p>
@@ -7528,7 +7528,7 @@
                 <a:ea typeface="Courier New" pitchFamily="34" charset="-122"/>
                 <a:cs typeface="Courier New" pitchFamily="34" charset="-120"/>
               </a:rPr>
-              <a:t>  gate" -m "SDLC-Approval: basic-arithmetic:release:bccd305cafc5"</a:t>
+              <a:t>  gate" -m "SDLC-Approval: basic-arithmetic:release:26a7c377f3c8"</a:t>
             </a:r>
             <a:endParaRPr lang="en-US" sz="1000" dirty="0"/>
           </a:p>
@@ -7811,7 +7811,7 @@
                 <a:ea typeface="Courier New" pitchFamily="34" charset="-122"/>
                 <a:cs typeface="Courier New" pitchFamily="34" charset="-120"/>
               </a:rPr>
-              <a:t>✓ basic-arithmetic/intent alice valid 442a8a44 trailer: missing</a:t>
+              <a:t>✓ basic-arithmetic/intent alice valid e78dbba3 trailer: missing</a:t>
             </a:r>
             <a:endParaRPr lang="en-US" sz="1000" dirty="0"/>
           </a:p>
@@ -7828,7 +7828,7 @@
                 <a:ea typeface="Courier New" pitchFamily="34" charset="-122"/>
                 <a:cs typeface="Courier New" pitchFamily="34" charset="-120"/>
               </a:rPr>
-              <a:t>✓ basic-arithmetic/spec alice valid 1dc667d7 trailer: missing</a:t>
+              <a:t>✓ basic-arithmetic/spec alice valid ed5a4b9f trailer: missing</a:t>
             </a:r>
             <a:endParaRPr lang="en-US" sz="1000" dirty="0"/>
           </a:p>
@@ -7845,7 +7845,7 @@
                 <a:ea typeface="Courier New" pitchFamily="34" charset="-122"/>
                 <a:cs typeface="Courier New" pitchFamily="34" charset="-120"/>
               </a:rPr>
-              <a:t>✗ basic-arithmetic/plan bob wrong-signer 1dc667d7 trailer: missing</a:t>
+              <a:t>✗ basic-arithmetic/plan bob wrong-signer ed5a4b9f trailer: missing</a:t>
             </a:r>
             <a:endParaRPr lang="en-US" sz="1000" dirty="0"/>
           </a:p>
@@ -7862,7 +7862,7 @@
                 <a:ea typeface="Courier New" pitchFamily="34" charset="-122"/>
                 <a:cs typeface="Courier New" pitchFamily="34" charset="-120"/>
               </a:rPr>
-              <a:t>✓ basic-arithmetic/review carol valid 919fd04f trailer: missing</a:t>
+              <a:t>✓ basic-arithmetic/review carol valid 5379c75a trailer: missing</a:t>
             </a:r>
             <a:endParaRPr lang="en-US" sz="1000" dirty="0"/>
           </a:p>
@@ -7879,7 +7879,7 @@
                 <a:ea typeface="Courier New" pitchFamily="34" charset="-122"/>
                 <a:cs typeface="Courier New" pitchFamily="34" charset="-120"/>
               </a:rPr>
-              <a:t>✓ basic-arithmetic/release alice valid 73031a73 trailer: missing</a:t>
+              <a:t>✓ basic-arithmetic/release alice valid 09355dfe trailer: missing</a:t>
             </a:r>
             <a:endParaRPr lang="en-US" sz="1000" dirty="0"/>
           </a:p>
@@ -7896,7 +7896,7 @@
                 <a:ea typeface="Courier New" pitchFamily="34" charset="-122"/>
                 <a:cs typeface="Courier New" pitchFamily="34" charset="-120"/>
               </a:rPr>
-              <a:t>✓ openspec/roles.yaml alice@calc.example bootstrap 1a0e1f22</a:t>
+              <a:t>✓ openspec/roles.yaml alice@calc.example bootstrap 52876c45</a:t>
             </a:r>
             <a:endParaRPr lang="en-US" sz="1000" dirty="0"/>
           </a:p>
@@ -14382,7 +14382,7 @@
                 <a:ea typeface="Courier New" pitchFamily="34" charset="-122"/>
                 <a:cs typeface="Courier New" pitchFamily="34" charset="-120"/>
               </a:rPr>
-              <a:t>  archived) · sdlc 0.23.5, license:</a:t>
+              <a:t>  archived) · sdlc 0.23.6, license:</a:t>
             </a:r>
             <a:endParaRPr lang="en-US" sz="1000" dirty="0"/>
           </a:p>
@@ -14903,7 +14903,7 @@
                 <a:ea typeface="Courier New" pitchFamily="34" charset="-122"/>
                 <a:cs typeface="Courier New" pitchFamily="34" charset="-120"/>
               </a:rPr>
-              <a:t>2026-10-18T16:59:06.073Z  gate.review.await</a:t>
+              <a:t>2026-10-18T21:26:39.897Z  gate.review.await</a:t>
             </a:r>
             <a:endParaRPr lang="en-US" sz="1000" dirty="0"/>
           </a:p>
@@ -14937,7 +14937,7 @@
                 <a:ea typeface="Courier New" pitchFamily="34" charset="-122"/>
                 <a:cs typeface="Courier New" pitchFamily="34" charset="-120"/>
               </a:rPr>
-              <a:t>  sha256:bccd305cafc5d05c4aacd90063e1e6496f</a:t>
+              <a:t>  sha256:26a7c377f3c870d9f1d2cf1af64fc6efb2</a:t>
             </a:r>
             <a:endParaRPr lang="en-US" sz="1000" dirty="0"/>
           </a:p>
@@ -14954,7 +14954,7 @@
                 <a:ea typeface="Courier New" pitchFamily="34" charset="-122"/>
                 <a:cs typeface="Courier New" pitchFamily="34" charset="-120"/>
               </a:rPr>
-              <a:t>  57806e25d0ff2f6c880d540e304f80 [sdlc</a:t>
+              <a:t>  5cd5f8430d9e59ec51c4dd7b5a9ea2 [sdlc</a:t>
             </a:r>
             <a:endParaRPr lang="en-US" sz="1000" dirty="0"/>
           </a:p>
@@ -14971,7 +14971,7 @@
                 <a:ea typeface="Courier New" pitchFamily="34" charset="-122"/>
                 <a:cs typeface="Courier New" pitchFamily="34" charset="-120"/>
               </a:rPr>
-              <a:t>  0.23.5 · community]</a:t>
+              <a:t>  0.23.6 · community]</a:t>
             </a:r>
             <a:endParaRPr lang="en-US" sz="1000" dirty="0"/>
           </a:p>
@@ -14988,7 +14988,7 @@
                 <a:ea typeface="Courier New" pitchFamily="34" charset="-122"/>
                 <a:cs typeface="Courier New" pitchFamily="34" charset="-120"/>
               </a:rPr>
-              <a:t>2026-10-18T16:59:09.425Z  gate.review.appro</a:t>
+              <a:t>2026-10-18T21:26:43.120Z  gate.review.appro</a:t>
             </a:r>
             <a:endParaRPr lang="en-US" sz="1000" dirty="0"/>
           </a:p>
@@ -15039,7 +15039,7 @@
                 <a:ea typeface="Courier New" pitchFamily="34" charset="-122"/>
                 <a:cs typeface="Courier New" pitchFamily="34" charset="-120"/>
               </a:rPr>
-              <a:t>  [sdlc 0.23.5 · community]</a:t>
+              <a:t>  [sdlc 0.23.6 · community]</a:t>
             </a:r>
             <a:endParaRPr lang="en-US" sz="1000" dirty="0"/>
           </a:p>
@@ -15056,7 +15056,7 @@
                 <a:ea typeface="Courier New" pitchFamily="34" charset="-122"/>
                 <a:cs typeface="Courier New" pitchFamily="34" charset="-120"/>
               </a:rPr>
-              <a:t>2026-10-18T16:59:15.899Z  gate.release.appr</a:t>
+              <a:t>2026-10-18T21:26:50.211Z  gate.release.appr</a:t>
             </a:r>
             <a:endParaRPr lang="en-US" sz="1000" dirty="0"/>
           </a:p>
@@ -15107,7 +15107,7 @@
                 <a:ea typeface="Courier New" pitchFamily="34" charset="-122"/>
                 <a:cs typeface="Courier New" pitchFamily="34" charset="-120"/>
               </a:rPr>
-              <a:t>  release-manager [sdlc 0.23.5 · community]</a:t>
+              <a:t>  release-manager [sdlc 0.23.6 · community]</a:t>
             </a:r>
             <a:endParaRPr lang="en-US" sz="1000" dirty="0"/>
           </a:p>
@@ -16435,7 +16435,7 @@
                 <a:ea typeface="Courier New" pitchFamily="34" charset="-122"/>
                 <a:cs typeface="Courier New" pitchFamily="34" charset="-120"/>
               </a:rPr>
-              <a:t>✓ test (1.0s)</a:t>
+              <a:t>✓ test (1.1s)</a:t>
             </a:r>
             <a:endParaRPr lang="en-US" sz="1000" dirty="0"/>
           </a:p>
@@ -16888,7 +16888,7 @@
                 <a:ea typeface="Courier New" pitchFamily="34" charset="-122"/>
                 <a:cs typeface="Courier New" pitchFamily="34" charset="-120"/>
               </a:rPr>
-              <a:t>      "id": "20261018T170013887Z-ci-green-d</a:t>
+              <a:t>      "id": "20261018T212749913Z-ci-green-5</a:t>
             </a:r>
             <a:endParaRPr lang="en-US" sz="1000" dirty="0"/>
           </a:p>
@@ -16905,7 +16905,7 @@
                 <a:ea typeface="Courier New" pitchFamily="34" charset="-122"/>
                 <a:cs typeface="Courier New" pitchFamily="34" charset="-120"/>
               </a:rPr>
-              <a:t>  b57a1",</a:t>
+              <a:t>  4c479",</a:t>
             </a:r>
             <a:endParaRPr lang="en-US" sz="1000" dirty="0"/>
           </a:p>
@@ -17041,7 +17041,7 @@
                 <a:ea typeface="Courier New" pitchFamily="34" charset="-122"/>
                 <a:cs typeface="Courier New" pitchFamily="34" charset="-120"/>
               </a:rPr>
-              <a:t>        "ref": "128fc4a4b717c69392aad6930f1</a:t>
+              <a:t>        "ref": "f6580cf0e863a96fee8bffb52e3</a:t>
             </a:r>
             <a:endParaRPr lang="en-US" sz="1000" dirty="0"/>
           </a:p>
@@ -17058,7 +17058,7 @@
                 <a:ea typeface="Courier New" pitchFamily="34" charset="-122"/>
                 <a:cs typeface="Courier New" pitchFamily="34" charset="-120"/>
               </a:rPr>
-              <a:t>  9f358ceac95ce",</a:t>
+              <a:t>  58c6cfa48431b",</a:t>
             </a:r>
             <a:endParaRPr lang="en-US" sz="1000" dirty="0"/>
           </a:p>
@@ -27714,7 +27714,7 @@
                 <a:ea typeface="Courier New" pitchFamily="34" charset="-122"/>
                 <a:cs typeface="Courier New" pitchFamily="34" charset="-120"/>
               </a:rPr>
-              <a:t>  sdlc 0.23.5, license: community</a:t>
+              <a:t>  sdlc 0.23.6, license: community</a:t>
             </a:r>
             <a:endParaRPr lang="en-US" sz="1000" dirty="0"/>
           </a:p>

--- a/docs/demo/sdlc-calculator-demo.en.pptx
+++ b/docs/demo/sdlc-calculator-demo.en.pptx
@@ -5112,7 +5112,7 @@
                 <a:ea typeface="Courier New" pitchFamily="34" charset="-122"/>
                 <a:cs typeface="Courier New" pitchFamily="34" charset="-120"/>
               </a:rPr>
-              <a:t>✓ test (1.1s)</a:t>
+              <a:t>✓ test (0.9s)</a:t>
             </a:r>
             <a:endParaRPr lang="en-US" sz="1000" dirty="0"/>
           </a:p>
@@ -6677,7 +6677,7 @@
                 <a:ea typeface="Courier New" pitchFamily="34" charset="-122"/>
                 <a:cs typeface="Courier New" pitchFamily="34" charset="-120"/>
               </a:rPr>
-              <a:t>  code-owner (26a7c377f3c8)</a:t>
+              <a:t>  code-owner (2acc7d469d49)</a:t>
             </a:r>
             <a:endParaRPr lang="en-US" sz="1000" dirty="0"/>
           </a:p>
@@ -6779,7 +6779,7 @@
                 <a:ea typeface="Courier New" pitchFamily="34" charset="-122"/>
                 <a:cs typeface="Courier New" pitchFamily="34" charset="-120"/>
               </a:rPr>
-              <a:t>  6a7c377f3c8"</a:t>
+              <a:t>  acc7d469d49"</a:t>
             </a:r>
             <a:endParaRPr lang="en-US" sz="1000" dirty="0"/>
           </a:p>
@@ -7460,7 +7460,7 @@
                 <a:ea typeface="Courier New" pitchFamily="34" charset="-122"/>
                 <a:cs typeface="Courier New" pitchFamily="34" charset="-120"/>
               </a:rPr>
-              <a:t>  release-manager (26a7c377f3c8)</a:t>
+              <a:t>  release-manager (2acc7d469d49)</a:t>
             </a:r>
             <a:endParaRPr lang="en-US" sz="1000" dirty="0"/>
           </a:p>
@@ -7528,7 +7528,7 @@
                 <a:ea typeface="Courier New" pitchFamily="34" charset="-122"/>
                 <a:cs typeface="Courier New" pitchFamily="34" charset="-120"/>
               </a:rPr>
-              <a:t>  gate" -m "SDLC-Approval: basic-arithmetic:release:26a7c377f3c8"</a:t>
+              <a:t>  gate" -m "SDLC-Approval: basic-arithmetic:release:2acc7d469d49"</a:t>
             </a:r>
             <a:endParaRPr lang="en-US" sz="1000" dirty="0"/>
           </a:p>
@@ -7811,7 +7811,7 @@
                 <a:ea typeface="Courier New" pitchFamily="34" charset="-122"/>
                 <a:cs typeface="Courier New" pitchFamily="34" charset="-120"/>
               </a:rPr>
-              <a:t>✓ basic-arithmetic/intent alice valid e78dbba3 trailer: missing</a:t>
+              <a:t>✓ basic-arithmetic/intent alice valid 49c7dc35 trailer: missing</a:t>
             </a:r>
             <a:endParaRPr lang="en-US" sz="1000" dirty="0"/>
           </a:p>
@@ -7828,7 +7828,7 @@
                 <a:ea typeface="Courier New" pitchFamily="34" charset="-122"/>
                 <a:cs typeface="Courier New" pitchFamily="34" charset="-120"/>
               </a:rPr>
-              <a:t>✓ basic-arithmetic/spec alice valid ed5a4b9f trailer: missing</a:t>
+              <a:t>✓ basic-arithmetic/spec alice valid 10dc23b1 trailer: missing</a:t>
             </a:r>
             <a:endParaRPr lang="en-US" sz="1000" dirty="0"/>
           </a:p>
@@ -7845,7 +7845,7 @@
                 <a:ea typeface="Courier New" pitchFamily="34" charset="-122"/>
                 <a:cs typeface="Courier New" pitchFamily="34" charset="-120"/>
               </a:rPr>
-              <a:t>✗ basic-arithmetic/plan bob wrong-signer ed5a4b9f trailer: missing</a:t>
+              <a:t>✗ basic-arithmetic/plan bob wrong-signer 10dc23b1 trailer: missing</a:t>
             </a:r>
             <a:endParaRPr lang="en-US" sz="1000" dirty="0"/>
           </a:p>
@@ -7862,7 +7862,7 @@
                 <a:ea typeface="Courier New" pitchFamily="34" charset="-122"/>
                 <a:cs typeface="Courier New" pitchFamily="34" charset="-120"/>
               </a:rPr>
-              <a:t>✓ basic-arithmetic/review carol valid 5379c75a trailer: missing</a:t>
+              <a:t>✓ basic-arithmetic/review carol valid b8fea448 trailer: missing</a:t>
             </a:r>
             <a:endParaRPr lang="en-US" sz="1000" dirty="0"/>
           </a:p>
@@ -7879,7 +7879,7 @@
                 <a:ea typeface="Courier New" pitchFamily="34" charset="-122"/>
                 <a:cs typeface="Courier New" pitchFamily="34" charset="-120"/>
               </a:rPr>
-              <a:t>✓ basic-arithmetic/release alice valid 09355dfe trailer: missing</a:t>
+              <a:t>✓ basic-arithmetic/release alice valid 7e5227ed trailer: missing</a:t>
             </a:r>
             <a:endParaRPr lang="en-US" sz="1000" dirty="0"/>
           </a:p>
@@ -7896,7 +7896,7 @@
                 <a:ea typeface="Courier New" pitchFamily="34" charset="-122"/>
                 <a:cs typeface="Courier New" pitchFamily="34" charset="-120"/>
               </a:rPr>
-              <a:t>✓ openspec/roles.yaml alice@calc.example bootstrap 52876c45</a:t>
+              <a:t>✓ openspec/roles.yaml alice@calc.example bootstrap f5d961d2</a:t>
             </a:r>
             <a:endParaRPr lang="en-US" sz="1000" dirty="0"/>
           </a:p>
@@ -14382,7 +14382,7 @@
                 <a:ea typeface="Courier New" pitchFamily="34" charset="-122"/>
                 <a:cs typeface="Courier New" pitchFamily="34" charset="-120"/>
               </a:rPr>
-              <a:t>  archived) · sdlc 0.23.6, license:</a:t>
+              <a:t>  archived) · sdlc 0.23.7, license:</a:t>
             </a:r>
             <a:endParaRPr lang="en-US" sz="1000" dirty="0"/>
           </a:p>
@@ -14903,7 +14903,7 @@
                 <a:ea typeface="Courier New" pitchFamily="34" charset="-122"/>
                 <a:cs typeface="Courier New" pitchFamily="34" charset="-120"/>
               </a:rPr>
-              <a:t>2026-10-18T21:26:39.897Z  gate.review.await</a:t>
+              <a:t>2026-10-19T02:06:56.015Z  gate.review.await</a:t>
             </a:r>
             <a:endParaRPr lang="en-US" sz="1000" dirty="0"/>
           </a:p>
@@ -14937,7 +14937,7 @@
                 <a:ea typeface="Courier New" pitchFamily="34" charset="-122"/>
                 <a:cs typeface="Courier New" pitchFamily="34" charset="-120"/>
               </a:rPr>
-              <a:t>  sha256:26a7c377f3c870d9f1d2cf1af64fc6efb2</a:t>
+              <a:t>  sha256:2acc7d469d49aff5749151d7235f4e6b62</a:t>
             </a:r>
             <a:endParaRPr lang="en-US" sz="1000" dirty="0"/>
           </a:p>
@@ -14954,7 +14954,7 @@
                 <a:ea typeface="Courier New" pitchFamily="34" charset="-122"/>
                 <a:cs typeface="Courier New" pitchFamily="34" charset="-120"/>
               </a:rPr>
-              <a:t>  5cd5f8430d9e59ec51c4dd7b5a9ea2 [sdlc</a:t>
+              <a:t>  a0ec60c31a0d099cb5ee5b97477490 [sdlc</a:t>
             </a:r>
             <a:endParaRPr lang="en-US" sz="1000" dirty="0"/>
           </a:p>
@@ -14971,7 +14971,7 @@
                 <a:ea typeface="Courier New" pitchFamily="34" charset="-122"/>
                 <a:cs typeface="Courier New" pitchFamily="34" charset="-120"/>
               </a:rPr>
-              <a:t>  0.23.6 · community]</a:t>
+              <a:t>  0.23.7 · community]</a:t>
             </a:r>
             <a:endParaRPr lang="en-US" sz="1000" dirty="0"/>
           </a:p>
@@ -14988,7 +14988,7 @@
                 <a:ea typeface="Courier New" pitchFamily="34" charset="-122"/>
                 <a:cs typeface="Courier New" pitchFamily="34" charset="-120"/>
               </a:rPr>
-              <a:t>2026-10-18T21:26:43.120Z  gate.review.appro</a:t>
+              <a:t>2026-10-19T02:06:59.086Z  gate.review.appro</a:t>
             </a:r>
             <a:endParaRPr lang="en-US" sz="1000" dirty="0"/>
           </a:p>
@@ -15039,7 +15039,7 @@
                 <a:ea typeface="Courier New" pitchFamily="34" charset="-122"/>
                 <a:cs typeface="Courier New" pitchFamily="34" charset="-120"/>
               </a:rPr>
-              <a:t>  [sdlc 0.23.6 · community]</a:t>
+              <a:t>  [sdlc 0.23.7 · community]</a:t>
             </a:r>
             <a:endParaRPr lang="en-US" sz="1000" dirty="0"/>
           </a:p>
@@ -15056,7 +15056,7 @@
                 <a:ea typeface="Courier New" pitchFamily="34" charset="-122"/>
                 <a:cs typeface="Courier New" pitchFamily="34" charset="-120"/>
               </a:rPr>
-              <a:t>2026-10-18T21:26:50.211Z  gate.release.appr</a:t>
+              <a:t>2026-10-19T02:07:06.409Z  gate.release.appr</a:t>
             </a:r>
             <a:endParaRPr lang="en-US" sz="1000" dirty="0"/>
           </a:p>
@@ -15107,7 +15107,7 @@
                 <a:ea typeface="Courier New" pitchFamily="34" charset="-122"/>
                 <a:cs typeface="Courier New" pitchFamily="34" charset="-120"/>
               </a:rPr>
-              <a:t>  release-manager [sdlc 0.23.6 · community]</a:t>
+              <a:t>  release-manager [sdlc 0.23.7 · community]</a:t>
             </a:r>
             <a:endParaRPr lang="en-US" sz="1000" dirty="0"/>
           </a:p>
@@ -16435,7 +16435,7 @@
                 <a:ea typeface="Courier New" pitchFamily="34" charset="-122"/>
                 <a:cs typeface="Courier New" pitchFamily="34" charset="-120"/>
               </a:rPr>
-              <a:t>✓ test (1.1s)</a:t>
+              <a:t>✓ test (1.0s)</a:t>
             </a:r>
             <a:endParaRPr lang="en-US" sz="1000" dirty="0"/>
           </a:p>
@@ -16888,7 +16888,7 @@
                 <a:ea typeface="Courier New" pitchFamily="34" charset="-122"/>
                 <a:cs typeface="Courier New" pitchFamily="34" charset="-120"/>
               </a:rPr>
-              <a:t>      "id": "20261018T212749913Z-ci-green-5</a:t>
+              <a:t>      "id": "20261019T020803519Z-ci-green-0</a:t>
             </a:r>
             <a:endParaRPr lang="en-US" sz="1000" dirty="0"/>
           </a:p>
@@ -16905,7 +16905,7 @@
                 <a:ea typeface="Courier New" pitchFamily="34" charset="-122"/>
                 <a:cs typeface="Courier New" pitchFamily="34" charset="-120"/>
               </a:rPr>
-              <a:t>  4c479",</a:t>
+              <a:t>  b1840",</a:t>
             </a:r>
             <a:endParaRPr lang="en-US" sz="1000" dirty="0"/>
           </a:p>
@@ -17041,7 +17041,7 @@
                 <a:ea typeface="Courier New" pitchFamily="34" charset="-122"/>
                 <a:cs typeface="Courier New" pitchFamily="34" charset="-120"/>
               </a:rPr>
-              <a:t>        "ref": "f6580cf0e863a96fee8bffb52e3</a:t>
+              <a:t>        "ref": "e00c0a68ae2556bb02ac241720b</a:t>
             </a:r>
             <a:endParaRPr lang="en-US" sz="1000" dirty="0"/>
           </a:p>
@@ -17058,7 +17058,7 @@
                 <a:ea typeface="Courier New" pitchFamily="34" charset="-122"/>
                 <a:cs typeface="Courier New" pitchFamily="34" charset="-120"/>
               </a:rPr>
-              <a:t>  58c6cfa48431b",</a:t>
+              <a:t>  12ec12baf2f15",</a:t>
             </a:r>
             <a:endParaRPr lang="en-US" sz="1000" dirty="0"/>
           </a:p>
@@ -27714,7 +27714,7 @@
                 <a:ea typeface="Courier New" pitchFamily="34" charset="-122"/>
                 <a:cs typeface="Courier New" pitchFamily="34" charset="-120"/>
               </a:rPr>
-              <a:t>  sdlc 0.23.6, license: community</a:t>
+              <a:t>  sdlc 0.23.7, license: community</a:t>
             </a:r>
             <a:endParaRPr lang="en-US" sz="1000" dirty="0"/>
           </a:p>

--- a/docs/demo/sdlc-calculator-demo.en.pptx
+++ b/docs/demo/sdlc-calculator-demo.en.pptx
@@ -5112,7 +5112,7 @@
                 <a:ea typeface="Courier New" pitchFamily="34" charset="-122"/>
                 <a:cs typeface="Courier New" pitchFamily="34" charset="-120"/>
               </a:rPr>
-              <a:t>✓ test (0.9s)</a:t>
+              <a:t>✓ test (1.0s)</a:t>
             </a:r>
             <a:endParaRPr lang="en-US" sz="1000" dirty="0"/>
           </a:p>
@@ -6677,7 +6677,7 @@
                 <a:ea typeface="Courier New" pitchFamily="34" charset="-122"/>
                 <a:cs typeface="Courier New" pitchFamily="34" charset="-120"/>
               </a:rPr>
-              <a:t>  code-owner (2acc7d469d49)</a:t>
+              <a:t>  code-owner (46bc4626e33e)</a:t>
             </a:r>
             <a:endParaRPr lang="en-US" sz="1000" dirty="0"/>
           </a:p>
@@ -6762,7 +6762,7 @@
                 <a:ea typeface="Courier New" pitchFamily="34" charset="-122"/>
                 <a:cs typeface="Courier New" pitchFamily="34" charset="-120"/>
               </a:rPr>
-              <a:t>  "SDLC-Approval: basic-arithmetic:review:2</a:t>
+              <a:t>  "SDLC-Approval: basic-arithmetic:review:4</a:t>
             </a:r>
             <a:endParaRPr lang="en-US" sz="1000" dirty="0"/>
           </a:p>
@@ -6779,7 +6779,7 @@
                 <a:ea typeface="Courier New" pitchFamily="34" charset="-122"/>
                 <a:cs typeface="Courier New" pitchFamily="34" charset="-120"/>
               </a:rPr>
-              <a:t>  acc7d469d49"</a:t>
+              <a:t>  6bc4626e33e"</a:t>
             </a:r>
             <a:endParaRPr lang="en-US" sz="1000" dirty="0"/>
           </a:p>
@@ -7460,7 +7460,7 @@
                 <a:ea typeface="Courier New" pitchFamily="34" charset="-122"/>
                 <a:cs typeface="Courier New" pitchFamily="34" charset="-120"/>
               </a:rPr>
-              <a:t>  release-manager (2acc7d469d49)</a:t>
+              <a:t>  release-manager (46bc4626e33e)</a:t>
             </a:r>
             <a:endParaRPr lang="en-US" sz="1000" dirty="0"/>
           </a:p>
@@ -7528,7 +7528,7 @@
                 <a:ea typeface="Courier New" pitchFamily="34" charset="-122"/>
                 <a:cs typeface="Courier New" pitchFamily="34" charset="-120"/>
               </a:rPr>
-              <a:t>  gate" -m "SDLC-Approval: basic-arithmetic:release:2acc7d469d49"</a:t>
+              <a:t>  gate" -m "SDLC-Approval: basic-arithmetic:release:46bc4626e33e"</a:t>
             </a:r>
             <a:endParaRPr lang="en-US" sz="1000" dirty="0"/>
           </a:p>
@@ -7811,7 +7811,7 @@
                 <a:ea typeface="Courier New" pitchFamily="34" charset="-122"/>
                 <a:cs typeface="Courier New" pitchFamily="34" charset="-120"/>
               </a:rPr>
-              <a:t>✓ basic-arithmetic/intent alice valid 49c7dc35 trailer: missing</a:t>
+              <a:t>✓ basic-arithmetic/intent alice valid d01987c0 trailer: missing</a:t>
             </a:r>
             <a:endParaRPr lang="en-US" sz="1000" dirty="0"/>
           </a:p>
@@ -7828,7 +7828,7 @@
                 <a:ea typeface="Courier New" pitchFamily="34" charset="-122"/>
                 <a:cs typeface="Courier New" pitchFamily="34" charset="-120"/>
               </a:rPr>
-              <a:t>✓ basic-arithmetic/spec alice valid 10dc23b1 trailer: missing</a:t>
+              <a:t>✓ basic-arithmetic/spec alice valid 93cc66b0 trailer: missing</a:t>
             </a:r>
             <a:endParaRPr lang="en-US" sz="1000" dirty="0"/>
           </a:p>
@@ -7845,7 +7845,7 @@
                 <a:ea typeface="Courier New" pitchFamily="34" charset="-122"/>
                 <a:cs typeface="Courier New" pitchFamily="34" charset="-120"/>
               </a:rPr>
-              <a:t>✗ basic-arithmetic/plan bob wrong-signer 10dc23b1 trailer: missing</a:t>
+              <a:t>✗ basic-arithmetic/plan bob wrong-signer 93cc66b0 trailer: missing</a:t>
             </a:r>
             <a:endParaRPr lang="en-US" sz="1000" dirty="0"/>
           </a:p>
@@ -7862,7 +7862,7 @@
                 <a:ea typeface="Courier New" pitchFamily="34" charset="-122"/>
                 <a:cs typeface="Courier New" pitchFamily="34" charset="-120"/>
               </a:rPr>
-              <a:t>✓ basic-arithmetic/review carol valid b8fea448 trailer: missing</a:t>
+              <a:t>✓ basic-arithmetic/review carol valid dff34b3b trailer: missing</a:t>
             </a:r>
             <a:endParaRPr lang="en-US" sz="1000" dirty="0"/>
           </a:p>
@@ -7879,7 +7879,7 @@
                 <a:ea typeface="Courier New" pitchFamily="34" charset="-122"/>
                 <a:cs typeface="Courier New" pitchFamily="34" charset="-120"/>
               </a:rPr>
-              <a:t>✓ basic-arithmetic/release alice valid 7e5227ed trailer: missing</a:t>
+              <a:t>✓ basic-arithmetic/release alice valid 20bb2474 trailer: missing</a:t>
             </a:r>
             <a:endParaRPr lang="en-US" sz="1000" dirty="0"/>
           </a:p>
@@ -7896,7 +7896,7 @@
                 <a:ea typeface="Courier New" pitchFamily="34" charset="-122"/>
                 <a:cs typeface="Courier New" pitchFamily="34" charset="-120"/>
               </a:rPr>
-              <a:t>✓ openspec/roles.yaml alice@calc.example bootstrap f5d961d2</a:t>
+              <a:t>✓ openspec/roles.yaml alice@calc.example bootstrap d517f291</a:t>
             </a:r>
             <a:endParaRPr lang="en-US" sz="1000" dirty="0"/>
           </a:p>
@@ -8528,7 +8528,7 @@
                 <a:ea typeface="Courier New" pitchFamily="34" charset="-122"/>
                 <a:cs typeface="Courier New" pitchFamily="34" charset="-120"/>
               </a:rPr>
-              <a:t>  openspec\changes\archive\2026-10-18-basic</a:t>
+              <a:t>  openspec\changes\archive\2026-10-21-basic</a:t>
             </a:r>
             <a:endParaRPr lang="en-US" sz="1000" dirty="0"/>
           </a:p>
@@ -14382,7 +14382,7 @@
                 <a:ea typeface="Courier New" pitchFamily="34" charset="-122"/>
                 <a:cs typeface="Courier New" pitchFamily="34" charset="-120"/>
               </a:rPr>
-              <a:t>  archived) · sdlc 0.23.7, license:</a:t>
+              <a:t>  archived) · sdlc 0.25.0, license:</a:t>
             </a:r>
             <a:endParaRPr lang="en-US" sz="1000" dirty="0"/>
           </a:p>
@@ -14586,7 +14586,7 @@
                 <a:ea typeface="Courier New" pitchFamily="34" charset="-122"/>
                 <a:cs typeface="Courier New" pitchFamily="34" charset="-120"/>
               </a:rPr>
-              <a:t>  intent 3 · spec 4 · plan 17 · review 3;</a:t>
+              <a:t>  intent 3 · spec 4 · plan 18 · review 3;</a:t>
             </a:r>
             <a:endParaRPr lang="en-US" sz="1000" dirty="0"/>
           </a:p>
@@ -14903,7 +14903,7 @@
                 <a:ea typeface="Courier New" pitchFamily="34" charset="-122"/>
                 <a:cs typeface="Courier New" pitchFamily="34" charset="-120"/>
               </a:rPr>
-              <a:t>2026-10-19T02:06:56.015Z  gate.review.await</a:t>
+              <a:t>2026-10-21T08:11:15.845Z  gate.review.await</a:t>
             </a:r>
             <a:endParaRPr lang="en-US" sz="1000" dirty="0"/>
           </a:p>
@@ -14937,7 +14937,7 @@
                 <a:ea typeface="Courier New" pitchFamily="34" charset="-122"/>
                 <a:cs typeface="Courier New" pitchFamily="34" charset="-120"/>
               </a:rPr>
-              <a:t>  sha256:2acc7d469d49aff5749151d7235f4e6b62</a:t>
+              <a:t>  sha256:46bc4626e33e438391481df9e302fecf79</a:t>
             </a:r>
             <a:endParaRPr lang="en-US" sz="1000" dirty="0"/>
           </a:p>
@@ -14954,7 +14954,7 @@
                 <a:ea typeface="Courier New" pitchFamily="34" charset="-122"/>
                 <a:cs typeface="Courier New" pitchFamily="34" charset="-120"/>
               </a:rPr>
-              <a:t>  a0ec60c31a0d099cb5ee5b97477490 [sdlc</a:t>
+              <a:t>  04a4f5118eda0a84614092b59889a5 [sdlc</a:t>
             </a:r>
             <a:endParaRPr lang="en-US" sz="1000" dirty="0"/>
           </a:p>
@@ -14971,7 +14971,7 @@
                 <a:ea typeface="Courier New" pitchFamily="34" charset="-122"/>
                 <a:cs typeface="Courier New" pitchFamily="34" charset="-120"/>
               </a:rPr>
-              <a:t>  0.23.7 · community]</a:t>
+              <a:t>  0.25.0 · community]</a:t>
             </a:r>
             <a:endParaRPr lang="en-US" sz="1000" dirty="0"/>
           </a:p>
@@ -14988,7 +14988,7 @@
                 <a:ea typeface="Courier New" pitchFamily="34" charset="-122"/>
                 <a:cs typeface="Courier New" pitchFamily="34" charset="-120"/>
               </a:rPr>
-              <a:t>2026-10-19T02:06:59.086Z  gate.review.appro</a:t>
+              <a:t>2026-10-21T08:11:18.945Z  gate.review.appro</a:t>
             </a:r>
             <a:endParaRPr lang="en-US" sz="1000" dirty="0"/>
           </a:p>
@@ -15039,7 +15039,7 @@
                 <a:ea typeface="Courier New" pitchFamily="34" charset="-122"/>
                 <a:cs typeface="Courier New" pitchFamily="34" charset="-120"/>
               </a:rPr>
-              <a:t>  [sdlc 0.23.7 · community]</a:t>
+              <a:t>  [sdlc 0.25.0 · community]</a:t>
             </a:r>
             <a:endParaRPr lang="en-US" sz="1000" dirty="0"/>
           </a:p>
@@ -15056,7 +15056,7 @@
                 <a:ea typeface="Courier New" pitchFamily="34" charset="-122"/>
                 <a:cs typeface="Courier New" pitchFamily="34" charset="-120"/>
               </a:rPr>
-              <a:t>2026-10-19T02:07:06.409Z  gate.release.appr</a:t>
+              <a:t>2026-10-21T08:11:25.441Z  gate.release.appr</a:t>
             </a:r>
             <a:endParaRPr lang="en-US" sz="1000" dirty="0"/>
           </a:p>
@@ -15107,7 +15107,7 @@
                 <a:ea typeface="Courier New" pitchFamily="34" charset="-122"/>
                 <a:cs typeface="Courier New" pitchFamily="34" charset="-120"/>
               </a:rPr>
-              <a:t>  release-manager [sdlc 0.23.7 · community]</a:t>
+              <a:t>  release-manager [sdlc 0.25.0 · community]</a:t>
             </a:r>
             <a:endParaRPr lang="en-US" sz="1000" dirty="0"/>
           </a:p>
@@ -16888,7 +16888,7 @@
                 <a:ea typeface="Courier New" pitchFamily="34" charset="-122"/>
                 <a:cs typeface="Courier New" pitchFamily="34" charset="-120"/>
               </a:rPr>
-              <a:t>      "id": "20261019T020803519Z-ci-green-0</a:t>
+              <a:t>      "id": "20261021T081224375Z-ci-green-3</a:t>
             </a:r>
             <a:endParaRPr lang="en-US" sz="1000" dirty="0"/>
           </a:p>
@@ -16905,7 +16905,7 @@
                 <a:ea typeface="Courier New" pitchFamily="34" charset="-122"/>
                 <a:cs typeface="Courier New" pitchFamily="34" charset="-120"/>
               </a:rPr>
-              <a:t>  b1840",</a:t>
+              <a:t>  eb7ae",</a:t>
             </a:r>
             <a:endParaRPr lang="en-US" sz="1000" dirty="0"/>
           </a:p>
@@ -17041,7 +17041,7 @@
                 <a:ea typeface="Courier New" pitchFamily="34" charset="-122"/>
                 <a:cs typeface="Courier New" pitchFamily="34" charset="-120"/>
               </a:rPr>
-              <a:t>        "ref": "e00c0a68ae2556bb02ac241720b</a:t>
+              <a:t>        "ref": "622db90eb1aca4573ef67294a2b</a:t>
             </a:r>
             <a:endParaRPr lang="en-US" sz="1000" dirty="0"/>
           </a:p>
@@ -17058,7 +17058,7 @@
                 <a:ea typeface="Courier New" pitchFamily="34" charset="-122"/>
                 <a:cs typeface="Courier New" pitchFamily="34" charset="-120"/>
               </a:rPr>
-              <a:t>  12ec12baf2f15",</a:t>
+              <a:t>  20b4b9741d4cd",</a:t>
             </a:r>
             <a:endParaRPr lang="en-US" sz="1000" dirty="0"/>
           </a:p>
@@ -27714,7 +27714,7 @@
                 <a:ea typeface="Courier New" pitchFamily="34" charset="-122"/>
                 <a:cs typeface="Courier New" pitchFamily="34" charset="-120"/>
               </a:rPr>
-              <a:t>  sdlc 0.23.7, license: community</a:t>
+              <a:t>  sdlc 0.25.0, license: community</a:t>
             </a:r>
             <a:endParaRPr lang="en-US" sz="1000" dirty="0"/>
           </a:p>
@@ -34505,7 +34505,7 @@
                 <a:ea typeface="Courier New" pitchFamily="34" charset="-122"/>
                 <a:cs typeface="Courier New" pitchFamily="34" charset="-120"/>
               </a:rPr>
-              <a:t>  (399e11488c29)</a:t>
+              <a:t>  (807f8a04ffae)</a:t>
             </a:r>
             <a:endParaRPr lang="en-US" sz="1000" dirty="0"/>
           </a:p>
@@ -34641,7 +34641,7 @@
                 <a:ea typeface="Courier New" pitchFamily="34" charset="-122"/>
                 <a:cs typeface="Courier New" pitchFamily="34" charset="-120"/>
               </a:rPr>
-              <a:t>  399e11488c29"</a:t>
+              <a:t>  807f8a04ffae"</a:t>
             </a:r>
             <a:endParaRPr lang="en-US" sz="1000" dirty="0"/>
           </a:p>

--- a/docs/demo/sdlc-calculator-demo.en.pptx
+++ b/docs/demo/sdlc-calculator-demo.en.pptx
@@ -26,9 +26,11 @@
     <p:sldId id="274" r:id="rId20"/>
     <p:sldId id="275" r:id="rId21"/>
     <p:sldId id="276" r:id="rId22"/>
+    <p:sldId id="277" r:id="rId23"/>
+    <p:sldId id="278" r:id="rId24"/>
   </p:sldIdLst>
   <p:notesMasterIdLst>
-    <p:notesMasterId r:id="rId23"/>
+    <p:notesMasterId r:id="rId25"/>
   </p:notesMasterIdLst>
   <p:sldSz cx="12192000" cy="6858000"/>
   <p:notesSz cx="6858000" cy="12192000"/>
@@ -1701,7 +1703,7 @@
           <a:p>
             <a:r>
               <a:rPr lang="en-US" dirty="0"/>
-              <a:t>Approvals come from people in roles.yaml, bound to content, optionally signed. Nobody pushes through their own work: authors do not approve their review or release. Everything is files in the repository: backlog, specs, evidence, decisions.</a:t>
+              <a:t>There is nothing to host and nothing to sign in to. The audit, the report and the dashboard are built from the files in the repository and work offline. The same commands run on a laptop, over SSH and in a CI job.</a:t>
             </a:r>
             <a:endParaRPr lang="en-US" dirty="0"/>
           </a:p>
@@ -1725,6 +1727,182 @@
             <a:fld id="{F7021451-1387-4CA6-816F-3879F97B5CBC}" type="slidenum">
               <a:rPr lang="en-US"/>
               <a:t>21</a:t>
+            </a:fld>
+            <a:endParaRPr lang="en-US"/>
+          </a:p>
+        </p:txBody>
+      </p:sp>
+    </p:spTree>
+    <p:extLst>
+      <p:ext uri="{BB962C8B-B14F-4D97-AF65-F5344CB8AC3E}">
+        <p14:creationId xmlns:p14="http://schemas.microsoft.com/office/powerpoint/2010/main" val="1024086991"/>
+      </p:ext>
+    </p:extLst>
+  </p:cSld>
+  <p:clrMapOvr>
+    <a:masterClrMapping/>
+  </p:clrMapOvr>
+</p:notes>
+</file>
+
+<file path=ppt/notesSlides/notesSlide22.xml><?xml version="1.0" encoding="utf-8"?>
+<p:notes xmlns:a="http://schemas.openxmlformats.org/drawingml/2006/main" xmlns:r="http://schemas.openxmlformats.org/officeDocument/2006/relationships" xmlns:p="http://schemas.openxmlformats.org/presentationml/2006/main">
+  <p:cSld>
+    <p:spTree>
+      <p:nvGrpSpPr>
+        <p:cNvPr id="1" name=""/>
+        <p:cNvGrpSpPr/>
+        <p:nvPr/>
+      </p:nvGrpSpPr>
+      <p:grpSpPr>
+        <a:xfrm>
+          <a:off x="0" y="0"/>
+          <a:ext cx="0" cy="0"/>
+          <a:chOff x="0" y="0"/>
+          <a:chExt cx="0" cy="0"/>
+        </a:xfrm>
+      </p:grpSpPr>
+      <p:sp>
+        <p:nvSpPr>
+          <p:cNvPr id="2" name="Slide Image Placeholder 1"/>
+          <p:cNvSpPr>
+            <a:spLocks noGrp="1" noRot="1" noChangeAspect="1"/>
+          </p:cNvSpPr>
+          <p:nvPr>
+            <p:ph type="sldImg"/>
+          </p:nvPr>
+        </p:nvSpPr>
+        <p:spPr/>
+      </p:sp>
+      <p:sp>
+        <p:nvSpPr>
+          <p:cNvPr id="3" name="Notes Placeholder 2"/>
+          <p:cNvSpPr>
+            <a:spLocks noGrp="1"/>
+          </p:cNvSpPr>
+          <p:nvPr>
+            <p:ph type="body" idx="1"/>
+          </p:nvPr>
+        </p:nvSpPr>
+        <p:spPr/>
+        <p:txBody>
+          <a:bodyPr/>
+          <a:lstStyle/>
+          <a:p>
+            <a:r>
+              <a:rPr lang="en-US" dirty="0"/>
+              <a:t>A real case from one of our releases. The gates were approved after the fact, against code that had already shipped. Examples: an agent could switch off the check that blocks its stop, and a project opened through a linked folder could not approve anything. Changes made by the rules get review findings too; the difference is that they surface before the release.</a:t>
+            </a:r>
+            <a:endParaRPr lang="en-US" dirty="0"/>
+          </a:p>
+        </p:txBody>
+      </p:sp>
+      <p:sp>
+        <p:nvSpPr>
+          <p:cNvPr id="4" name="Slide Number Placeholder 3"/>
+          <p:cNvSpPr>
+            <a:spLocks noGrp="1"/>
+          </p:cNvSpPr>
+          <p:nvPr>
+            <p:ph type="sldNum" sz="quarter" idx="10"/>
+          </p:nvPr>
+        </p:nvSpPr>
+        <p:spPr/>
+        <p:txBody>
+          <a:bodyPr/>
+          <a:lstStyle/>
+          <a:p>
+            <a:fld id="{F7021451-1387-4CA6-816F-3879F97B5CBC}" type="slidenum">
+              <a:rPr lang="en-US"/>
+              <a:t>22</a:t>
+            </a:fld>
+            <a:endParaRPr lang="en-US"/>
+          </a:p>
+        </p:txBody>
+      </p:sp>
+    </p:spTree>
+    <p:extLst>
+      <p:ext uri="{BB962C8B-B14F-4D97-AF65-F5344CB8AC3E}">
+        <p14:creationId xmlns:p14="http://schemas.microsoft.com/office/powerpoint/2010/main" val="1024086991"/>
+      </p:ext>
+    </p:extLst>
+  </p:cSld>
+  <p:clrMapOvr>
+    <a:masterClrMapping/>
+  </p:clrMapOvr>
+</p:notes>
+</file>
+
+<file path=ppt/notesSlides/notesSlide23.xml><?xml version="1.0" encoding="utf-8"?>
+<p:notes xmlns:a="http://schemas.openxmlformats.org/drawingml/2006/main" xmlns:r="http://schemas.openxmlformats.org/officeDocument/2006/relationships" xmlns:p="http://schemas.openxmlformats.org/presentationml/2006/main">
+  <p:cSld>
+    <p:spTree>
+      <p:nvGrpSpPr>
+        <p:cNvPr id="1" name=""/>
+        <p:cNvGrpSpPr/>
+        <p:nvPr/>
+      </p:nvGrpSpPr>
+      <p:grpSpPr>
+        <a:xfrm>
+          <a:off x="0" y="0"/>
+          <a:ext cx="0" cy="0"/>
+          <a:chOff x="0" y="0"/>
+          <a:chExt cx="0" cy="0"/>
+        </a:xfrm>
+      </p:grpSpPr>
+      <p:sp>
+        <p:nvSpPr>
+          <p:cNvPr id="2" name="Slide Image Placeholder 1"/>
+          <p:cNvSpPr>
+            <a:spLocks noGrp="1" noRot="1" noChangeAspect="1"/>
+          </p:cNvSpPr>
+          <p:nvPr>
+            <p:ph type="sldImg"/>
+          </p:nvPr>
+        </p:nvSpPr>
+        <p:spPr/>
+      </p:sp>
+      <p:sp>
+        <p:nvSpPr>
+          <p:cNvPr id="3" name="Notes Placeholder 2"/>
+          <p:cNvSpPr>
+            <a:spLocks noGrp="1"/>
+          </p:cNvSpPr>
+          <p:nvPr>
+            <p:ph type="body" idx="1"/>
+          </p:nvPr>
+        </p:nvSpPr>
+        <p:spPr/>
+        <p:txBody>
+          <a:bodyPr/>
+          <a:lstStyle/>
+          <a:p>
+            <a:r>
+              <a:rPr lang="en-US" dirty="0"/>
+              <a:t>Approvals come from people in roles.yaml, bound to content, optionally signed. Nobody pushes through their own work: authors do not approve their review or release. Everything is files in the repository: backlog, specs, evidence, decisions.</a:t>
+            </a:r>
+            <a:endParaRPr lang="en-US" dirty="0"/>
+          </a:p>
+        </p:txBody>
+      </p:sp>
+      <p:sp>
+        <p:nvSpPr>
+          <p:cNvPr id="4" name="Slide Number Placeholder 3"/>
+          <p:cNvSpPr>
+            <a:spLocks noGrp="1"/>
+          </p:cNvSpPr>
+          <p:nvPr>
+            <p:ph type="sldNum" sz="quarter" idx="10"/>
+          </p:nvPr>
+        </p:nvSpPr>
+        <p:spPr/>
+        <p:txBody>
+          <a:bodyPr/>
+          <a:lstStyle/>
+          <a:p>
+            <a:fld id="{F7021451-1387-4CA6-816F-3879F97B5CBC}" type="slidenum">
+              <a:rPr lang="en-US"/>
+              <a:t>23</a:t>
             </a:fld>
             <a:endParaRPr lang="en-US"/>
           </a:p>
@@ -25139,6 +25317,1055 @@
                 <a:ea typeface="Cambria" pitchFamily="34" charset="-122"/>
                 <a:cs typeface="Cambria" pitchFamily="34" charset="-120"/>
               </a:rPr>
+              <a:t>Why sdlc: almost nothing to run</a:t>
+            </a:r>
+            <a:endParaRPr lang="en-US" sz="3600" dirty="0"/>
+          </a:p>
+        </p:txBody>
+      </p:sp>
+      <p:sp>
+        <p:nvSpPr>
+          <p:cNvPr id="3" name="Shape 1"/>
+          <p:cNvSpPr/>
+          <p:nvPr/>
+        </p:nvSpPr>
+        <p:spPr>
+          <a:xfrm>
+            <a:off x="457200" y="1828800"/>
+            <a:ext cx="420624" cy="420624"/>
+          </a:xfrm>
+          <a:prstGeom prst="ellipse">
+            <a:avLst/>
+          </a:prstGeom>
+          <a:solidFill>
+            <a:srgbClr val="F2A541"/>
+          </a:solidFill>
+          <a:ln w="12700">
+            <a:solidFill>
+              <a:srgbClr val="F2A541"/>
+            </a:solidFill>
+            <a:prstDash val="solid"/>
+          </a:ln>
+        </p:spPr>
+      </p:sp>
+      <p:sp>
+        <p:nvSpPr>
+          <p:cNvPr id="4" name="Text 2"/>
+          <p:cNvSpPr txBox="1"/>
+          <p:nvPr/>
+        </p:nvSpPr>
+        <p:spPr>
+          <a:xfrm>
+            <a:off x="457200" y="1828800"/>
+            <a:ext cx="420624" cy="420624"/>
+          </a:xfrm>
+          <a:prstGeom prst="rect">
+            <a:avLst/>
+          </a:prstGeom>
+          <a:noFill/>
+          <a:ln/>
+        </p:spPr>
+        <p:txBody>
+          <a:bodyPr wrap="square" lIns="0" tIns="0" rIns="0" bIns="0" rtlCol="0" anchor="ctr"/>
+          <a:lstStyle/>
+          <a:p>
+            <a:pPr algn="ctr" indent="0" marL="0">
+              <a:buNone/>
+            </a:pPr>
+            <a:r>
+              <a:rPr lang="en-US" sz="1600" b="1" dirty="0">
+                <a:solidFill>
+                  <a:srgbClr val="1F2430"/>
+                </a:solidFill>
+                <a:latin typeface="Calibri" pitchFamily="34" charset="0"/>
+                <a:ea typeface="Calibri" pitchFamily="34" charset="-122"/>
+                <a:cs typeface="Calibri" pitchFamily="34" charset="-120"/>
+              </a:rPr>
+              <a:t>1</a:t>
+            </a:r>
+            <a:endParaRPr lang="en-US" sz="1600" dirty="0"/>
+          </a:p>
+        </p:txBody>
+      </p:sp>
+      <p:sp>
+        <p:nvSpPr>
+          <p:cNvPr id="5" name="Text 3"/>
+          <p:cNvSpPr txBox="1"/>
+          <p:nvPr/>
+        </p:nvSpPr>
+        <p:spPr>
+          <a:xfrm>
+            <a:off x="1097280" y="1783080"/>
+            <a:ext cx="10634472" cy="512064"/>
+          </a:xfrm>
+          <a:prstGeom prst="rect">
+            <a:avLst/>
+          </a:prstGeom>
+          <a:noFill/>
+          <a:ln/>
+        </p:spPr>
+        <p:txBody>
+          <a:bodyPr wrap="square" lIns="0" tIns="0" rIns="0" bIns="0" rtlCol="0" anchor="ctr"/>
+          <a:lstStyle/>
+          <a:p>
+            <a:pPr indent="0" marL="0">
+              <a:buNone/>
+            </a:pPr>
+            <a:r>
+              <a:rPr lang="en-US" sz="1800" dirty="0">
+                <a:solidFill>
+                  <a:srgbClr val="E8EEF2"/>
+                </a:solidFill>
+                <a:latin typeface="Calibri" pitchFamily="34" charset="0"/>
+                <a:ea typeface="Calibri" pitchFamily="34" charset="-122"/>
+                <a:cs typeface="Calibri" pitchFamily="34" charset="-120"/>
+              </a:rPr>
+              <a:t>Node.js, git and the agent you already use, plus one package from the GitHub release.</a:t>
+            </a:r>
+            <a:endParaRPr lang="en-US" sz="1800" dirty="0"/>
+          </a:p>
+        </p:txBody>
+      </p:sp>
+      <p:sp>
+        <p:nvSpPr>
+          <p:cNvPr id="6" name="Shape 4"/>
+          <p:cNvSpPr/>
+          <p:nvPr/>
+        </p:nvSpPr>
+        <p:spPr>
+          <a:xfrm>
+            <a:off x="457200" y="2560320"/>
+            <a:ext cx="420624" cy="420624"/>
+          </a:xfrm>
+          <a:prstGeom prst="ellipse">
+            <a:avLst/>
+          </a:prstGeom>
+          <a:solidFill>
+            <a:srgbClr val="F2A541"/>
+          </a:solidFill>
+          <a:ln w="12700">
+            <a:solidFill>
+              <a:srgbClr val="F2A541"/>
+            </a:solidFill>
+            <a:prstDash val="solid"/>
+          </a:ln>
+        </p:spPr>
+      </p:sp>
+      <p:sp>
+        <p:nvSpPr>
+          <p:cNvPr id="7" name="Text 5"/>
+          <p:cNvSpPr txBox="1"/>
+          <p:nvPr/>
+        </p:nvSpPr>
+        <p:spPr>
+          <a:xfrm>
+            <a:off x="457200" y="2560320"/>
+            <a:ext cx="420624" cy="420624"/>
+          </a:xfrm>
+          <a:prstGeom prst="rect">
+            <a:avLst/>
+          </a:prstGeom>
+          <a:noFill/>
+          <a:ln/>
+        </p:spPr>
+        <p:txBody>
+          <a:bodyPr wrap="square" lIns="0" tIns="0" rIns="0" bIns="0" rtlCol="0" anchor="ctr"/>
+          <a:lstStyle/>
+          <a:p>
+            <a:pPr algn="ctr" indent="0" marL="0">
+              <a:buNone/>
+            </a:pPr>
+            <a:r>
+              <a:rPr lang="en-US" sz="1600" b="1" dirty="0">
+                <a:solidFill>
+                  <a:srgbClr val="1F2430"/>
+                </a:solidFill>
+                <a:latin typeface="Calibri" pitchFamily="34" charset="0"/>
+                <a:ea typeface="Calibri" pitchFamily="34" charset="-122"/>
+                <a:cs typeface="Calibri" pitchFamily="34" charset="-120"/>
+              </a:rPr>
+              <a:t>2</a:t>
+            </a:r>
+            <a:endParaRPr lang="en-US" sz="1600" dirty="0"/>
+          </a:p>
+        </p:txBody>
+      </p:sp>
+      <p:sp>
+        <p:nvSpPr>
+          <p:cNvPr id="8" name="Text 6"/>
+          <p:cNvSpPr txBox="1"/>
+          <p:nvPr/>
+        </p:nvSpPr>
+        <p:spPr>
+          <a:xfrm>
+            <a:off x="1097280" y="2514600"/>
+            <a:ext cx="10634472" cy="512064"/>
+          </a:xfrm>
+          <a:prstGeom prst="rect">
+            <a:avLst/>
+          </a:prstGeom>
+          <a:noFill/>
+          <a:ln/>
+        </p:spPr>
+        <p:txBody>
+          <a:bodyPr wrap="square" lIns="0" tIns="0" rIns="0" bIns="0" rtlCol="0" anchor="ctr"/>
+          <a:lstStyle/>
+          <a:p>
+            <a:pPr indent="0" marL="0">
+              <a:buNone/>
+            </a:pPr>
+            <a:r>
+              <a:rPr lang="en-US" sz="1800" dirty="0">
+                <a:solidFill>
+                  <a:srgbClr val="E8EEF2"/>
+                </a:solidFill>
+                <a:latin typeface="Calibri" pitchFamily="34" charset="0"/>
+                <a:ea typeface="Calibri" pitchFamily="34" charset="-122"/>
+                <a:cs typeface="Calibri" pitchFamily="34" charset="-120"/>
+              </a:rPr>
+              <a:t>No server, database, container or cloud account: the state is files in git.</a:t>
+            </a:r>
+            <a:endParaRPr lang="en-US" sz="1800" dirty="0"/>
+          </a:p>
+        </p:txBody>
+      </p:sp>
+      <p:sp>
+        <p:nvSpPr>
+          <p:cNvPr id="9" name="Shape 7"/>
+          <p:cNvSpPr/>
+          <p:nvPr/>
+        </p:nvSpPr>
+        <p:spPr>
+          <a:xfrm>
+            <a:off x="457200" y="3291840"/>
+            <a:ext cx="420624" cy="420624"/>
+          </a:xfrm>
+          <a:prstGeom prst="ellipse">
+            <a:avLst/>
+          </a:prstGeom>
+          <a:solidFill>
+            <a:srgbClr val="F2A541"/>
+          </a:solidFill>
+          <a:ln w="12700">
+            <a:solidFill>
+              <a:srgbClr val="F2A541"/>
+            </a:solidFill>
+            <a:prstDash val="solid"/>
+          </a:ln>
+        </p:spPr>
+      </p:sp>
+      <p:sp>
+        <p:nvSpPr>
+          <p:cNvPr id="10" name="Text 8"/>
+          <p:cNvSpPr txBox="1"/>
+          <p:nvPr/>
+        </p:nvSpPr>
+        <p:spPr>
+          <a:xfrm>
+            <a:off x="457200" y="3291840"/>
+            <a:ext cx="420624" cy="420624"/>
+          </a:xfrm>
+          <a:prstGeom prst="rect">
+            <a:avLst/>
+          </a:prstGeom>
+          <a:noFill/>
+          <a:ln/>
+        </p:spPr>
+        <p:txBody>
+          <a:bodyPr wrap="square" lIns="0" tIns="0" rIns="0" bIns="0" rtlCol="0" anchor="ctr"/>
+          <a:lstStyle/>
+          <a:p>
+            <a:pPr algn="ctr" indent="0" marL="0">
+              <a:buNone/>
+            </a:pPr>
+            <a:r>
+              <a:rPr lang="en-US" sz="1600" b="1" dirty="0">
+                <a:solidFill>
+                  <a:srgbClr val="1F2430"/>
+                </a:solidFill>
+                <a:latin typeface="Calibri" pitchFamily="34" charset="0"/>
+                <a:ea typeface="Calibri" pitchFamily="34" charset="-122"/>
+                <a:cs typeface="Calibri" pitchFamily="34" charset="-120"/>
+              </a:rPr>
+              <a:t>3</a:t>
+            </a:r>
+            <a:endParaRPr lang="en-US" sz="1600" dirty="0"/>
+          </a:p>
+        </p:txBody>
+      </p:sp>
+      <p:sp>
+        <p:nvSpPr>
+          <p:cNvPr id="11" name="Text 9"/>
+          <p:cNvSpPr txBox="1"/>
+          <p:nvPr/>
+        </p:nvSpPr>
+        <p:spPr>
+          <a:xfrm>
+            <a:off x="1097280" y="3246120"/>
+            <a:ext cx="10634472" cy="512064"/>
+          </a:xfrm>
+          <a:prstGeom prst="rect">
+            <a:avLst/>
+          </a:prstGeom>
+          <a:noFill/>
+          <a:ln/>
+        </p:spPr>
+        <p:txBody>
+          <a:bodyPr wrap="square" lIns="0" tIns="0" rIns="0" bIns="0" rtlCol="0" anchor="ctr"/>
+          <a:lstStyle/>
+          <a:p>
+            <a:pPr indent="0" marL="0">
+              <a:buNone/>
+            </a:pPr>
+            <a:r>
+              <a:rPr lang="en-US" sz="1800" dirty="0">
+                <a:solidFill>
+                  <a:srgbClr val="E8EEF2"/>
+                </a:solidFill>
+                <a:latin typeface="Calibri" pitchFamily="34" charset="0"/>
+                <a:ea typeface="Calibri" pitchFamily="34" charset="-122"/>
+                <a:cs typeface="Calibri" pitchFamily="34" charset="-120"/>
+              </a:rPr>
+              <a:t>Simple: sdlc init sets a project up, sdlc next names the next step and who acts.</a:t>
+            </a:r>
+            <a:endParaRPr lang="en-US" sz="1800" dirty="0"/>
+          </a:p>
+        </p:txBody>
+      </p:sp>
+      <p:sp>
+        <p:nvSpPr>
+          <p:cNvPr id="12" name="Shape 10"/>
+          <p:cNvSpPr/>
+          <p:nvPr/>
+        </p:nvSpPr>
+        <p:spPr>
+          <a:xfrm>
+            <a:off x="457200" y="4023360"/>
+            <a:ext cx="420624" cy="420624"/>
+          </a:xfrm>
+          <a:prstGeom prst="ellipse">
+            <a:avLst/>
+          </a:prstGeom>
+          <a:solidFill>
+            <a:srgbClr val="F2A541"/>
+          </a:solidFill>
+          <a:ln w="12700">
+            <a:solidFill>
+              <a:srgbClr val="F2A541"/>
+            </a:solidFill>
+            <a:prstDash val="solid"/>
+          </a:ln>
+        </p:spPr>
+      </p:sp>
+      <p:sp>
+        <p:nvSpPr>
+          <p:cNvPr id="13" name="Text 11"/>
+          <p:cNvSpPr txBox="1"/>
+          <p:nvPr/>
+        </p:nvSpPr>
+        <p:spPr>
+          <a:xfrm>
+            <a:off x="457200" y="4023360"/>
+            <a:ext cx="420624" cy="420624"/>
+          </a:xfrm>
+          <a:prstGeom prst="rect">
+            <a:avLst/>
+          </a:prstGeom>
+          <a:noFill/>
+          <a:ln/>
+        </p:spPr>
+        <p:txBody>
+          <a:bodyPr wrap="square" lIns="0" tIns="0" rIns="0" bIns="0" rtlCol="0" anchor="ctr"/>
+          <a:lstStyle/>
+          <a:p>
+            <a:pPr algn="ctr" indent="0" marL="0">
+              <a:buNone/>
+            </a:pPr>
+            <a:r>
+              <a:rPr lang="en-US" sz="1600" b="1" dirty="0">
+                <a:solidFill>
+                  <a:srgbClr val="1F2430"/>
+                </a:solidFill>
+                <a:latin typeface="Calibri" pitchFamily="34" charset="0"/>
+                <a:ea typeface="Calibri" pitchFamily="34" charset="-122"/>
+                <a:cs typeface="Calibri" pitchFamily="34" charset="-120"/>
+              </a:rPr>
+              <a:t>4</a:t>
+            </a:r>
+            <a:endParaRPr lang="en-US" sz="1600" dirty="0"/>
+          </a:p>
+        </p:txBody>
+      </p:sp>
+      <p:sp>
+        <p:nvSpPr>
+          <p:cNvPr id="14" name="Text 12"/>
+          <p:cNvSpPr txBox="1"/>
+          <p:nvPr/>
+        </p:nvSpPr>
+        <p:spPr>
+          <a:xfrm>
+            <a:off x="1097280" y="3977640"/>
+            <a:ext cx="10634472" cy="512064"/>
+          </a:xfrm>
+          <a:prstGeom prst="rect">
+            <a:avLst/>
+          </a:prstGeom>
+          <a:noFill/>
+          <a:ln/>
+        </p:spPr>
+        <p:txBody>
+          <a:bodyPr wrap="square" lIns="0" tIns="0" rIns="0" bIns="0" rtlCol="0" anchor="ctr"/>
+          <a:lstStyle/>
+          <a:p>
+            <a:pPr indent="0" marL="0">
+              <a:buNone/>
+            </a:pPr>
+            <a:r>
+              <a:rPr lang="en-US" sz="1800" dirty="0">
+                <a:solidFill>
+                  <a:srgbClr val="E8EEF2"/>
+                </a:solidFill>
+                <a:latin typeface="Calibri" pitchFamily="34" charset="0"/>
+                <a:ea typeface="Calibri" pitchFamily="34" charset="-122"/>
+                <a:cs typeface="Calibri" pitchFamily="34" charset="-120"/>
+              </a:rPr>
+              <a:t>Console first: decisions in a person's terminal, --json for agents and CI.</a:t>
+            </a:r>
+            <a:endParaRPr lang="en-US" sz="1800" dirty="0"/>
+          </a:p>
+        </p:txBody>
+      </p:sp>
+      <p:sp>
+        <p:nvSpPr>
+          <p:cNvPr id="15" name="Shape 13"/>
+          <p:cNvSpPr/>
+          <p:nvPr/>
+        </p:nvSpPr>
+        <p:spPr>
+          <a:xfrm>
+            <a:off x="457200" y="4526280"/>
+            <a:ext cx="11274552" cy="1005840"/>
+          </a:xfrm>
+          <a:prstGeom prst="roundRect">
+            <a:avLst>
+              <a:gd name="adj" fmla="val 9091"/>
+            </a:avLst>
+          </a:prstGeom>
+          <a:solidFill>
+            <a:srgbClr val="161A22"/>
+          </a:solidFill>
+          <a:ln w="12700">
+            <a:solidFill>
+              <a:srgbClr val="161A22"/>
+            </a:solidFill>
+            <a:prstDash val="solid"/>
+          </a:ln>
+        </p:spPr>
+      </p:sp>
+      <p:sp>
+        <p:nvSpPr>
+          <p:cNvPr id="16" name="Text 14"/>
+          <p:cNvSpPr txBox="1"/>
+          <p:nvPr/>
+        </p:nvSpPr>
+        <p:spPr>
+          <a:xfrm>
+            <a:off x="731520" y="4754880"/>
+            <a:ext cx="10725912" cy="594360"/>
+          </a:xfrm>
+          <a:prstGeom prst="rect">
+            <a:avLst/>
+          </a:prstGeom>
+          <a:noFill/>
+          <a:ln/>
+        </p:spPr>
+        <p:txBody>
+          <a:bodyPr wrap="square" lIns="0" tIns="0" rIns="0" bIns="0" rtlCol="0" anchor="t"/>
+          <a:lstStyle/>
+          <a:p>
+            <a:pPr indent="0" marL="0">
+              <a:buNone/>
+            </a:pPr>
+            <a:r>
+              <a:rPr lang="en-US" sz="1300" dirty="0">
+                <a:solidFill>
+                  <a:srgbClr val="F2A541"/>
+                </a:solidFill>
+                <a:latin typeface="Courier New" pitchFamily="34" charset="0"/>
+                <a:ea typeface="Courier New" pitchFamily="34" charset="-122"/>
+                <a:cs typeface="Courier New" pitchFamily="34" charset="-120"/>
+              </a:rPr>
+              <a:t>$ npm install -g https://github.com/marin-ai-tech/sdlc/releases/latest/download/sdlc.tgz</a:t>
+            </a:r>
+            <a:endParaRPr lang="en-US" sz="1300" dirty="0"/>
+          </a:p>
+          <a:p>
+            <a:pPr indent="0" marL="0">
+              <a:buNone/>
+            </a:pPr>
+            <a:r>
+              <a:rPr lang="en-US" sz="1300" dirty="0">
+                <a:solidFill>
+                  <a:srgbClr val="F2A541"/>
+                </a:solidFill>
+                <a:latin typeface="Courier New" pitchFamily="34" charset="0"/>
+                <a:ea typeface="Courier New" pitchFamily="34" charset="-122"/>
+                <a:cs typeface="Courier New" pitchFamily="34" charset="-120"/>
+              </a:rPr>
+              <a:t>$ sdlc init</a:t>
+            </a:r>
+            <a:endParaRPr lang="en-US" sz="1300" dirty="0"/>
+          </a:p>
+        </p:txBody>
+      </p:sp>
+    </p:spTree>
+  </p:cSld>
+  <p:clrMapOvr>
+    <a:masterClrMapping/>
+  </p:clrMapOvr>
+</p:sld>
+</file>
+
+<file path=ppt/slides/slide22.xml><?xml version="1.0" encoding="utf-8"?>
+<p:sld xmlns:a="http://schemas.openxmlformats.org/drawingml/2006/main" xmlns:r="http://schemas.openxmlformats.org/officeDocument/2006/relationships" xmlns:p="http://schemas.openxmlformats.org/presentationml/2006/main">
+  <p:cSld name="Slide 22">
+    <p:bg>
+      <p:bgPr>
+        <a:solidFill>
+          <a:srgbClr val="1F2430"/>
+        </a:solidFill>
+      </p:bgPr>
+    </p:bg>
+    <p:spTree>
+      <p:nvGrpSpPr>
+        <p:cNvPr id="1" name=""/>
+        <p:cNvGrpSpPr/>
+        <p:nvPr/>
+      </p:nvGrpSpPr>
+      <p:grpSpPr>
+        <a:xfrm>
+          <a:off x="0" y="0"/>
+          <a:ext cx="0" cy="0"/>
+          <a:chOff x="0" y="0"/>
+          <a:chExt cx="0" cy="0"/>
+        </a:xfrm>
+      </p:grpSpPr>
+      <p:sp>
+        <p:nvSpPr>
+          <p:cNvPr id="2" name="Text 0"/>
+          <p:cNvSpPr txBox="1"/>
+          <p:nvPr/>
+        </p:nvSpPr>
+        <p:spPr>
+          <a:xfrm>
+            <a:off x="457200" y="640080"/>
+            <a:ext cx="11274552" cy="822960"/>
+          </a:xfrm>
+          <a:prstGeom prst="rect">
+            <a:avLst/>
+          </a:prstGeom>
+          <a:noFill/>
+          <a:ln/>
+        </p:spPr>
+        <p:txBody>
+          <a:bodyPr wrap="square" lIns="0" tIns="0" rIns="0" bIns="0" rtlCol="0" anchor="ctr"/>
+          <a:lstStyle/>
+          <a:p>
+            <a:pPr indent="0" marL="0">
+              <a:buNone/>
+            </a:pPr>
+            <a:r>
+              <a:rPr lang="en-US" sz="3600" b="1" dirty="0">
+                <a:solidFill>
+                  <a:srgbClr val="FFFFFF"/>
+                </a:solidFill>
+                <a:latin typeface="Cambria" pitchFamily="34" charset="0"/>
+                <a:ea typeface="Cambria" pitchFamily="34" charset="-122"/>
+                <a:cs typeface="Cambria" pitchFamily="34" charset="-120"/>
+              </a:rPr>
+              <a:t>What skipping the rules cost</a:t>
+            </a:r>
+            <a:endParaRPr lang="en-US" sz="3600" dirty="0"/>
+          </a:p>
+        </p:txBody>
+      </p:sp>
+      <p:sp>
+        <p:nvSpPr>
+          <p:cNvPr id="3" name="Shape 1"/>
+          <p:cNvSpPr/>
+          <p:nvPr/>
+        </p:nvSpPr>
+        <p:spPr>
+          <a:xfrm>
+            <a:off x="457200" y="1828800"/>
+            <a:ext cx="420624" cy="420624"/>
+          </a:xfrm>
+          <a:prstGeom prst="ellipse">
+            <a:avLst/>
+          </a:prstGeom>
+          <a:solidFill>
+            <a:srgbClr val="F2A541"/>
+          </a:solidFill>
+          <a:ln w="12700">
+            <a:solidFill>
+              <a:srgbClr val="F2A541"/>
+            </a:solidFill>
+            <a:prstDash val="solid"/>
+          </a:ln>
+        </p:spPr>
+      </p:sp>
+      <p:sp>
+        <p:nvSpPr>
+          <p:cNvPr id="4" name="Text 2"/>
+          <p:cNvSpPr txBox="1"/>
+          <p:nvPr/>
+        </p:nvSpPr>
+        <p:spPr>
+          <a:xfrm>
+            <a:off x="457200" y="1828800"/>
+            <a:ext cx="420624" cy="420624"/>
+          </a:xfrm>
+          <a:prstGeom prst="rect">
+            <a:avLst/>
+          </a:prstGeom>
+          <a:noFill/>
+          <a:ln/>
+        </p:spPr>
+        <p:txBody>
+          <a:bodyPr wrap="square" lIns="0" tIns="0" rIns="0" bIns="0" rtlCol="0" anchor="ctr"/>
+          <a:lstStyle/>
+          <a:p>
+            <a:pPr algn="ctr" indent="0" marL="0">
+              <a:buNone/>
+            </a:pPr>
+            <a:r>
+              <a:rPr lang="en-US" sz="1600" b="1" dirty="0">
+                <a:solidFill>
+                  <a:srgbClr val="1F2430"/>
+                </a:solidFill>
+                <a:latin typeface="Calibri" pitchFamily="34" charset="0"/>
+                <a:ea typeface="Calibri" pitchFamily="34" charset="-122"/>
+                <a:cs typeface="Calibri" pitchFamily="34" charset="-120"/>
+              </a:rPr>
+              <a:t>1</a:t>
+            </a:r>
+            <a:endParaRPr lang="en-US" sz="1600" dirty="0"/>
+          </a:p>
+        </p:txBody>
+      </p:sp>
+      <p:sp>
+        <p:nvSpPr>
+          <p:cNvPr id="5" name="Text 3"/>
+          <p:cNvSpPr txBox="1"/>
+          <p:nvPr/>
+        </p:nvSpPr>
+        <p:spPr>
+          <a:xfrm>
+            <a:off x="1097280" y="1783080"/>
+            <a:ext cx="10634472" cy="512064"/>
+          </a:xfrm>
+          <a:prstGeom prst="rect">
+            <a:avLst/>
+          </a:prstGeom>
+          <a:noFill/>
+          <a:ln/>
+        </p:spPr>
+        <p:txBody>
+          <a:bodyPr wrap="square" lIns="0" tIns="0" rIns="0" bIns="0" rtlCol="0" anchor="ctr"/>
+          <a:lstStyle/>
+          <a:p>
+            <a:pPr indent="0" marL="0">
+              <a:buNone/>
+            </a:pPr>
+            <a:r>
+              <a:rPr lang="en-US" sz="1800" dirty="0">
+                <a:solidFill>
+                  <a:srgbClr val="E8EEF2"/>
+                </a:solidFill>
+                <a:latin typeface="Calibri" pitchFamily="34" charset="0"/>
+                <a:ea typeface="Calibri" pitchFamily="34" charset="-122"/>
+                <a:cs typeface="Calibri" pitchFamily="34" charset="-120"/>
+              </a:rPr>
+              <a:t>One release shipped six changes in one batch, with no tests first and no review before it.</a:t>
+            </a:r>
+            <a:endParaRPr lang="en-US" sz="1800" dirty="0"/>
+          </a:p>
+        </p:txBody>
+      </p:sp>
+      <p:sp>
+        <p:nvSpPr>
+          <p:cNvPr id="6" name="Shape 4"/>
+          <p:cNvSpPr/>
+          <p:nvPr/>
+        </p:nvSpPr>
+        <p:spPr>
+          <a:xfrm>
+            <a:off x="457200" y="2560320"/>
+            <a:ext cx="420624" cy="420624"/>
+          </a:xfrm>
+          <a:prstGeom prst="ellipse">
+            <a:avLst/>
+          </a:prstGeom>
+          <a:solidFill>
+            <a:srgbClr val="F2A541"/>
+          </a:solidFill>
+          <a:ln w="12700">
+            <a:solidFill>
+              <a:srgbClr val="F2A541"/>
+            </a:solidFill>
+            <a:prstDash val="solid"/>
+          </a:ln>
+        </p:spPr>
+      </p:sp>
+      <p:sp>
+        <p:nvSpPr>
+          <p:cNvPr id="7" name="Text 5"/>
+          <p:cNvSpPr txBox="1"/>
+          <p:nvPr/>
+        </p:nvSpPr>
+        <p:spPr>
+          <a:xfrm>
+            <a:off x="457200" y="2560320"/>
+            <a:ext cx="420624" cy="420624"/>
+          </a:xfrm>
+          <a:prstGeom prst="rect">
+            <a:avLst/>
+          </a:prstGeom>
+          <a:noFill/>
+          <a:ln/>
+        </p:spPr>
+        <p:txBody>
+          <a:bodyPr wrap="square" lIns="0" tIns="0" rIns="0" bIns="0" rtlCol="0" anchor="ctr"/>
+          <a:lstStyle/>
+          <a:p>
+            <a:pPr algn="ctr" indent="0" marL="0">
+              <a:buNone/>
+            </a:pPr>
+            <a:r>
+              <a:rPr lang="en-US" sz="1600" b="1" dirty="0">
+                <a:solidFill>
+                  <a:srgbClr val="1F2430"/>
+                </a:solidFill>
+                <a:latin typeface="Calibri" pitchFamily="34" charset="0"/>
+                <a:ea typeface="Calibri" pitchFamily="34" charset="-122"/>
+                <a:cs typeface="Calibri" pitchFamily="34" charset="-120"/>
+              </a:rPr>
+              <a:t>2</a:t>
+            </a:r>
+            <a:endParaRPr lang="en-US" sz="1600" dirty="0"/>
+          </a:p>
+        </p:txBody>
+      </p:sp>
+      <p:sp>
+        <p:nvSpPr>
+          <p:cNvPr id="8" name="Text 6"/>
+          <p:cNvSpPr txBox="1"/>
+          <p:nvPr/>
+        </p:nvSpPr>
+        <p:spPr>
+          <a:xfrm>
+            <a:off x="1097280" y="2514600"/>
+            <a:ext cx="10634472" cy="512064"/>
+          </a:xfrm>
+          <a:prstGeom prst="rect">
+            <a:avLst/>
+          </a:prstGeom>
+          <a:noFill/>
+          <a:ln/>
+        </p:spPr>
+        <p:txBody>
+          <a:bodyPr wrap="square" lIns="0" tIns="0" rIns="0" bIns="0" rtlCol="0" anchor="ctr"/>
+          <a:lstStyle/>
+          <a:p>
+            <a:pPr indent="0" marL="0">
+              <a:buNone/>
+            </a:pPr>
+            <a:r>
+              <a:rPr lang="en-US" sz="1800" dirty="0">
+                <a:solidFill>
+                  <a:srgbClr val="E8EEF2"/>
+                </a:solidFill>
+                <a:latin typeface="Calibri" pitchFamily="34" charset="0"/>
+                <a:ea typeface="Calibri" pitchFamily="34" charset="-122"/>
+                <a:cs typeface="Calibri" pitchFamily="34" charset="-120"/>
+              </a:rPr>
+              <a:t>The review afterwards found 18 important findings, two of them security.</a:t>
+            </a:r>
+            <a:endParaRPr lang="en-US" sz="1800" dirty="0"/>
+          </a:p>
+        </p:txBody>
+      </p:sp>
+      <p:sp>
+        <p:nvSpPr>
+          <p:cNvPr id="9" name="Shape 7"/>
+          <p:cNvSpPr/>
+          <p:nvPr/>
+        </p:nvSpPr>
+        <p:spPr>
+          <a:xfrm>
+            <a:off x="457200" y="3291840"/>
+            <a:ext cx="420624" cy="420624"/>
+          </a:xfrm>
+          <a:prstGeom prst="ellipse">
+            <a:avLst/>
+          </a:prstGeom>
+          <a:solidFill>
+            <a:srgbClr val="F2A541"/>
+          </a:solidFill>
+          <a:ln w="12700">
+            <a:solidFill>
+              <a:srgbClr val="F2A541"/>
+            </a:solidFill>
+            <a:prstDash val="solid"/>
+          </a:ln>
+        </p:spPr>
+      </p:sp>
+      <p:sp>
+        <p:nvSpPr>
+          <p:cNvPr id="10" name="Text 8"/>
+          <p:cNvSpPr txBox="1"/>
+          <p:nvPr/>
+        </p:nvSpPr>
+        <p:spPr>
+          <a:xfrm>
+            <a:off x="457200" y="3291840"/>
+            <a:ext cx="420624" cy="420624"/>
+          </a:xfrm>
+          <a:prstGeom prst="rect">
+            <a:avLst/>
+          </a:prstGeom>
+          <a:noFill/>
+          <a:ln/>
+        </p:spPr>
+        <p:txBody>
+          <a:bodyPr wrap="square" lIns="0" tIns="0" rIns="0" bIns="0" rtlCol="0" anchor="ctr"/>
+          <a:lstStyle/>
+          <a:p>
+            <a:pPr algn="ctr" indent="0" marL="0">
+              <a:buNone/>
+            </a:pPr>
+            <a:r>
+              <a:rPr lang="en-US" sz="1600" b="1" dirty="0">
+                <a:solidFill>
+                  <a:srgbClr val="1F2430"/>
+                </a:solidFill>
+                <a:latin typeface="Calibri" pitchFamily="34" charset="0"/>
+                <a:ea typeface="Calibri" pitchFamily="34" charset="-122"/>
+                <a:cs typeface="Calibri" pitchFamily="34" charset="-120"/>
+              </a:rPr>
+              <a:t>3</a:t>
+            </a:r>
+            <a:endParaRPr lang="en-US" sz="1600" dirty="0"/>
+          </a:p>
+        </p:txBody>
+      </p:sp>
+      <p:sp>
+        <p:nvSpPr>
+          <p:cNvPr id="11" name="Text 9"/>
+          <p:cNvSpPr txBox="1"/>
+          <p:nvPr/>
+        </p:nvSpPr>
+        <p:spPr>
+          <a:xfrm>
+            <a:off x="1097280" y="3246120"/>
+            <a:ext cx="10634472" cy="512064"/>
+          </a:xfrm>
+          <a:prstGeom prst="rect">
+            <a:avLst/>
+          </a:prstGeom>
+          <a:noFill/>
+          <a:ln/>
+        </p:spPr>
+        <p:txBody>
+          <a:bodyPr wrap="square" lIns="0" tIns="0" rIns="0" bIns="0" rtlCol="0" anchor="ctr"/>
+          <a:lstStyle/>
+          <a:p>
+            <a:pPr indent="0" marL="0">
+              <a:buNone/>
+            </a:pPr>
+            <a:r>
+              <a:rPr lang="en-US" sz="1800" dirty="0">
+                <a:solidFill>
+                  <a:srgbClr val="E8EEF2"/>
+                </a:solidFill>
+                <a:latin typeface="Calibri" pitchFamily="34" charset="0"/>
+                <a:ea typeface="Calibri" pitchFamily="34" charset="-122"/>
+                <a:cs typeface="Calibri" pitchFamily="34" charset="-120"/>
+              </a:rPr>
+              <a:t>The bill: a fix right after the release and three follow-up changes.</a:t>
+            </a:r>
+            <a:endParaRPr lang="en-US" sz="1800" dirty="0"/>
+          </a:p>
+        </p:txBody>
+      </p:sp>
+      <p:sp>
+        <p:nvSpPr>
+          <p:cNvPr id="12" name="Shape 10"/>
+          <p:cNvSpPr/>
+          <p:nvPr/>
+        </p:nvSpPr>
+        <p:spPr>
+          <a:xfrm>
+            <a:off x="457200" y="4023360"/>
+            <a:ext cx="420624" cy="420624"/>
+          </a:xfrm>
+          <a:prstGeom prst="ellipse">
+            <a:avLst/>
+          </a:prstGeom>
+          <a:solidFill>
+            <a:srgbClr val="F2A541"/>
+          </a:solidFill>
+          <a:ln w="12700">
+            <a:solidFill>
+              <a:srgbClr val="F2A541"/>
+            </a:solidFill>
+            <a:prstDash val="solid"/>
+          </a:ln>
+        </p:spPr>
+      </p:sp>
+      <p:sp>
+        <p:nvSpPr>
+          <p:cNvPr id="13" name="Text 11"/>
+          <p:cNvSpPr txBox="1"/>
+          <p:nvPr/>
+        </p:nvSpPr>
+        <p:spPr>
+          <a:xfrm>
+            <a:off x="457200" y="4023360"/>
+            <a:ext cx="420624" cy="420624"/>
+          </a:xfrm>
+          <a:prstGeom prst="rect">
+            <a:avLst/>
+          </a:prstGeom>
+          <a:noFill/>
+          <a:ln/>
+        </p:spPr>
+        <p:txBody>
+          <a:bodyPr wrap="square" lIns="0" tIns="0" rIns="0" bIns="0" rtlCol="0" anchor="ctr"/>
+          <a:lstStyle/>
+          <a:p>
+            <a:pPr algn="ctr" indent="0" marL="0">
+              <a:buNone/>
+            </a:pPr>
+            <a:r>
+              <a:rPr lang="en-US" sz="1600" b="1" dirty="0">
+                <a:solidFill>
+                  <a:srgbClr val="1F2430"/>
+                </a:solidFill>
+                <a:latin typeface="Calibri" pitchFamily="34" charset="0"/>
+                <a:ea typeface="Calibri" pitchFamily="34" charset="-122"/>
+                <a:cs typeface="Calibri" pitchFamily="34" charset="-120"/>
+              </a:rPr>
+              <a:t>4</a:t>
+            </a:r>
+            <a:endParaRPr lang="en-US" sz="1600" dirty="0"/>
+          </a:p>
+        </p:txBody>
+      </p:sp>
+      <p:sp>
+        <p:nvSpPr>
+          <p:cNvPr id="14" name="Text 12"/>
+          <p:cNvSpPr txBox="1"/>
+          <p:nvPr/>
+        </p:nvSpPr>
+        <p:spPr>
+          <a:xfrm>
+            <a:off x="1097280" y="3977640"/>
+            <a:ext cx="10634472" cy="512064"/>
+          </a:xfrm>
+          <a:prstGeom prst="rect">
+            <a:avLst/>
+          </a:prstGeom>
+          <a:noFill/>
+          <a:ln/>
+        </p:spPr>
+        <p:txBody>
+          <a:bodyPr wrap="square" lIns="0" tIns="0" rIns="0" bIns="0" rtlCol="0" anchor="ctr"/>
+          <a:lstStyle/>
+          <a:p>
+            <a:pPr indent="0" marL="0">
+              <a:buNone/>
+            </a:pPr>
+            <a:r>
+              <a:rPr lang="en-US" sz="1800" dirty="0">
+                <a:solidFill>
+                  <a:srgbClr val="E8EEF2"/>
+                </a:solidFill>
+                <a:latin typeface="Calibri" pitchFamily="34" charset="0"/>
+                <a:ea typeface="Calibri" pitchFamily="34" charset="-122"/>
+                <a:cs typeface="Calibri" pitchFamily="34" charset="-120"/>
+              </a:rPr>
+              <a:t>With the gates, review finds such defects before the release, not users.</a:t>
+            </a:r>
+            <a:endParaRPr lang="en-US" sz="1800" dirty="0"/>
+          </a:p>
+        </p:txBody>
+      </p:sp>
+    </p:spTree>
+  </p:cSld>
+  <p:clrMapOvr>
+    <a:masterClrMapping/>
+  </p:clrMapOvr>
+</p:sld>
+</file>
+
+<file path=ppt/slides/slide23.xml><?xml version="1.0" encoding="utf-8"?>
+<p:sld xmlns:a="http://schemas.openxmlformats.org/drawingml/2006/main" xmlns:r="http://schemas.openxmlformats.org/officeDocument/2006/relationships" xmlns:p="http://schemas.openxmlformats.org/presentationml/2006/main">
+  <p:cSld name="Slide 23">
+    <p:bg>
+      <p:bgPr>
+        <a:solidFill>
+          <a:srgbClr val="1F2430"/>
+        </a:solidFill>
+      </p:bgPr>
+    </p:bg>
+    <p:spTree>
+      <p:nvGrpSpPr>
+        <p:cNvPr id="1" name=""/>
+        <p:cNvGrpSpPr/>
+        <p:nvPr/>
+      </p:nvGrpSpPr>
+      <p:grpSpPr>
+        <a:xfrm>
+          <a:off x="0" y="0"/>
+          <a:ext cx="0" cy="0"/>
+          <a:chOff x="0" y="0"/>
+          <a:chExt cx="0" cy="0"/>
+        </a:xfrm>
+      </p:grpSpPr>
+      <p:sp>
+        <p:nvSpPr>
+          <p:cNvPr id="2" name="Text 0"/>
+          <p:cNvSpPr txBox="1"/>
+          <p:nvPr/>
+        </p:nvSpPr>
+        <p:spPr>
+          <a:xfrm>
+            <a:off x="457200" y="640080"/>
+            <a:ext cx="11274552" cy="822960"/>
+          </a:xfrm>
+          <a:prstGeom prst="rect">
+            <a:avLst/>
+          </a:prstGeom>
+          <a:noFill/>
+          <a:ln/>
+        </p:spPr>
+        <p:txBody>
+          <a:bodyPr wrap="square" lIns="0" tIns="0" rIns="0" bIns="0" rtlCol="0" anchor="ctr"/>
+          <a:lstStyle/>
+          <a:p>
+            <a:pPr indent="0" marL="0">
+              <a:buNone/>
+            </a:pPr>
+            <a:r>
+              <a:rPr lang="en-US" sz="3600" b="1" dirty="0">
+                <a:solidFill>
+                  <a:srgbClr val="FFFFFF"/>
+                </a:solidFill>
+                <a:latin typeface="Cambria" pitchFamily="34" charset="0"/>
+                <a:ea typeface="Cambria" pitchFamily="34" charset="-122"/>
+                <a:cs typeface="Cambria" pitchFamily="34" charset="-120"/>
+              </a:rPr>
               <a:t>People decide. Agents do. Git remembers.</a:t>
             </a:r>
             <a:endParaRPr lang="en-US" sz="3600" dirty="0"/>
